--- a/preview/AAPL/AAPL_pitchbook.pptx
+++ b/preview/AAPL/AAPL_pitchbook.pptx
@@ -3348,7 +3348,7 @@
             <a:avLst/>
           </a:prstGeom>
           <a:solidFill>
-            <a:srgbClr val="EAF4EF"/>
+            <a:srgbClr val="FDF6E8"/>
           </a:solidFill>
           <a:ln>
             <a:noFill/>
@@ -3391,7 +3391,7 @@
             <a:avLst/>
           </a:prstGeom>
           <a:solidFill>
-            <a:srgbClr val="1A7A4A"/>
+            <a:srgbClr val="B06000"/>
           </a:solidFill>
           <a:ln>
             <a:noFill/>
@@ -3445,11 +3445,11 @@
             <a:r>
               <a:rPr sz="900" b="1" i="0">
                 <a:solidFill>
-                  <a:srgbClr val="1A7A4A"/>
+                  <a:srgbClr val="B06000"/>
                 </a:solidFill>
                 <a:latin typeface="Calibri"/>
               </a:rPr>
-              <a:t>● BUY  ·  Prix cible base : 280 $  ·  Upside : +10,7 %</a:t>
+              <a:t>● HOLD  ·  Prix cible base : — $  ·  Upside : —</a:t>
             </a:r>
           </a:p>
         </p:txBody>
@@ -4595,7 +4595,7 @@
                           </a:solidFill>
                           <a:latin typeface="Calibri"/>
                         </a:rPr>
-                        <a:t>26,1x</a:t>
+                        <a:t>26,2x</a:t>
                       </a:r>
                     </a:p>
                   </a:txBody>
@@ -5813,7 +5813,7 @@
                           </a:solidFill>
                           <a:latin typeface="Calibri"/>
                         </a:rPr>
-                        <a:t>9,97</a:t>
+                        <a:t>9,98</a:t>
                       </a:r>
                     </a:p>
                   </a:txBody>
@@ -6108,41 +6108,6 @@
           </a:graphicData>
         </a:graphic>
       </p:graphicFrame>
-      <p:sp>
-        <p:nvSpPr>
-          <p:cNvPr id="18" name="TextBox 17"/>
-          <p:cNvSpPr txBox="1"/>
-          <p:nvPr/>
-        </p:nvSpPr>
-        <p:spPr>
-          <a:xfrm>
-            <a:off x="367200" y="3628800"/>
-            <a:ext cx="8413200" cy="824400"/>
-          </a:xfrm>
-          <a:prstGeom prst="rect">
-            <a:avLst/>
-          </a:prstGeom>
-          <a:noFill/>
-        </p:spPr>
-        <p:txBody>
-          <a:bodyPr wrap="square">
-            <a:spAutoFit/>
-          </a:bodyPr>
-          <a:lstStyle/>
-          <a:p>
-            <a:pPr algn="l"/>
-            <a:r>
-              <a:rPr sz="850" b="0" i="0">
-                <a:solidFill>
-                  <a:srgbClr val="555555"/>
-                </a:solidFill>
-                <a:latin typeface="Calibri"/>
-              </a:rPr>
-              <a:t>Le ratio EV/EBITDA d'Apple est inférieur à la moyenne de son secteur, ce qui indique une valorisation attractive.</a:t>
-            </a:r>
-          </a:p>
-        </p:txBody>
-      </p:sp>
     </p:spTree>
   </p:cSld>
   <p:clrMapOvr>
@@ -7303,7 +7268,7 @@
                           </a:solidFill>
                           <a:latin typeface="Calibri"/>
                         </a:rPr>
-                        <a:t>280 $</a:t>
+                        <a:t>—</a:t>
                       </a:r>
                     </a:p>
                   </a:txBody>
@@ -7391,7 +7356,7 @@
                           </a:solidFill>
                           <a:latin typeface="Calibri"/>
                         </a:rPr>
-                        <a:t>253,38 $</a:t>
+                        <a:t>253,68 $</a:t>
                       </a:r>
                     </a:p>
                   </a:txBody>
@@ -7479,7 +7444,7 @@
                           </a:solidFill>
                           <a:latin typeface="Calibri"/>
                         </a:rPr>
-                        <a:t>+10,7 %</a:t>
+                        <a:t>—</a:t>
                       </a:r>
                     </a:p>
                   </a:txBody>
@@ -7622,7 +7587,7 @@
                           </a:solidFill>
                           <a:latin typeface="Calibri"/>
                         </a:rPr>
-                        <a:t>241 $</a:t>
+                        <a:t>—</a:t>
                       </a:r>
                     </a:p>
                   </a:txBody>
@@ -7645,7 +7610,7 @@
                           </a:solidFill>
                           <a:latin typeface="Calibri"/>
                         </a:rPr>
-                        <a:t>280 $</a:t>
+                        <a:t>—</a:t>
                       </a:r>
                     </a:p>
                   </a:txBody>
@@ -7668,7 +7633,7 @@
                           </a:solidFill>
                           <a:latin typeface="Calibri"/>
                         </a:rPr>
-                        <a:t>310 $</a:t>
+                        <a:t>—</a:t>
                       </a:r>
                     </a:p>
                   </a:txBody>
@@ -7693,7 +7658,7 @@
                           </a:solidFill>
                           <a:latin typeface="Calibri"/>
                         </a:rPr>
-                        <a:t>-5,0 %</a:t>
+                        <a:t>—</a:t>
                       </a:r>
                     </a:p>
                   </a:txBody>
@@ -7716,7 +7681,7 @@
                           </a:solidFill>
                           <a:latin typeface="Calibri"/>
                         </a:rPr>
-                        <a:t>+10,7 %</a:t>
+                        <a:t>—</a:t>
                       </a:r>
                     </a:p>
                   </a:txBody>
@@ -7739,7 +7704,7 @@
                           </a:solidFill>
                           <a:latin typeface="Calibri"/>
                         </a:rPr>
-                        <a:t>+22,4 %</a:t>
+                        <a:t>—</a:t>
                       </a:r>
                     </a:p>
                   </a:txBody>
@@ -8203,7 +8168,7 @@
                           </a:solidFill>
                           <a:latin typeface="Calibri"/>
                         </a:rPr>
-                        <a:t>325</a:t>
+                        <a:t>—</a:t>
                       </a:r>
                     </a:p>
                   </a:txBody>
@@ -8246,7 +8211,7 @@
                           </a:solidFill>
                           <a:latin typeface="Calibri"/>
                         </a:rPr>
-                        <a:t>353</a:t>
+                        <a:t>—</a:t>
                       </a:r>
                     </a:p>
                   </a:txBody>
@@ -8289,7 +8254,7 @@
                           </a:solidFill>
                           <a:latin typeface="Calibri"/>
                         </a:rPr>
-                        <a:t>386</a:t>
+                        <a:t>—</a:t>
                       </a:r>
                     </a:p>
                   </a:txBody>
@@ -8332,7 +8297,7 @@
                           </a:solidFill>
                           <a:latin typeface="Calibri"/>
                         </a:rPr>
-                        <a:t>426</a:t>
+                        <a:t>—</a:t>
                       </a:r>
                     </a:p>
                   </a:txBody>
@@ -8375,7 +8340,7 @@
                           </a:solidFill>
                           <a:latin typeface="Calibri"/>
                         </a:rPr>
-                        <a:t>475</a:t>
+                        <a:t>—</a:t>
                       </a:r>
                     </a:p>
                   </a:txBody>
@@ -8463,7 +8428,7 @@
                           </a:solidFill>
                           <a:latin typeface="Calibri"/>
                         </a:rPr>
-                        <a:t>280</a:t>
+                        <a:t>—</a:t>
                       </a:r>
                     </a:p>
                   </a:txBody>
@@ -8506,7 +8471,7 @@
                           </a:solidFill>
                           <a:latin typeface="Calibri"/>
                         </a:rPr>
-                        <a:t>301</a:t>
+                        <a:t>—</a:t>
                       </a:r>
                     </a:p>
                   </a:txBody>
@@ -8549,7 +8514,7 @@
                           </a:solidFill>
                           <a:latin typeface="Calibri"/>
                         </a:rPr>
-                        <a:t>325</a:t>
+                        <a:t>—</a:t>
                       </a:r>
                     </a:p>
                   </a:txBody>
@@ -8592,7 +8557,7 @@
                           </a:solidFill>
                           <a:latin typeface="Calibri"/>
                         </a:rPr>
-                        <a:t>353</a:t>
+                        <a:t>—</a:t>
                       </a:r>
                     </a:p>
                   </a:txBody>
@@ -8635,7 +8600,7 @@
                           </a:solidFill>
                           <a:latin typeface="Calibri"/>
                         </a:rPr>
-                        <a:t>386</a:t>
+                        <a:t>—</a:t>
                       </a:r>
                     </a:p>
                   </a:txBody>
@@ -8723,7 +8688,7 @@
                           </a:solidFill>
                           <a:latin typeface="Calibri"/>
                         </a:rPr>
-                        <a:t>247</a:t>
+                        <a:t>—</a:t>
                       </a:r>
                     </a:p>
                   </a:txBody>
@@ -8766,7 +8731,7 @@
                           </a:solidFill>
                           <a:latin typeface="Calibri"/>
                         </a:rPr>
-                        <a:t>263</a:t>
+                        <a:t>—</a:t>
                       </a:r>
                     </a:p>
                   </a:txBody>
@@ -8809,7 +8774,7 @@
                           </a:solidFill>
                           <a:latin typeface="Calibri"/>
                         </a:rPr>
-                        <a:t>280</a:t>
+                        <a:t>—</a:t>
                       </a:r>
                     </a:p>
                   </a:txBody>
@@ -8852,7 +8817,7 @@
                           </a:solidFill>
                           <a:latin typeface="Calibri"/>
                         </a:rPr>
-                        <a:t>301</a:t>
+                        <a:t>—</a:t>
                       </a:r>
                     </a:p>
                   </a:txBody>
@@ -8895,7 +8860,7 @@
                           </a:solidFill>
                           <a:latin typeface="Calibri"/>
                         </a:rPr>
-                        <a:t>325</a:t>
+                        <a:t>—</a:t>
                       </a:r>
                     </a:p>
                   </a:txBody>
@@ -8983,7 +8948,7 @@
                           </a:solidFill>
                           <a:latin typeface="Calibri"/>
                         </a:rPr>
-                        <a:t>220</a:t>
+                        <a:t>—</a:t>
                       </a:r>
                     </a:p>
                   </a:txBody>
@@ -9026,7 +8991,7 @@
                           </a:solidFill>
                           <a:latin typeface="Calibri"/>
                         </a:rPr>
-                        <a:t>233</a:t>
+                        <a:t>—</a:t>
                       </a:r>
                     </a:p>
                   </a:txBody>
@@ -9069,7 +9034,7 @@
                           </a:solidFill>
                           <a:latin typeface="Calibri"/>
                         </a:rPr>
-                        <a:t>247</a:t>
+                        <a:t>—</a:t>
                       </a:r>
                     </a:p>
                   </a:txBody>
@@ -9112,7 +9077,7 @@
                           </a:solidFill>
                           <a:latin typeface="Calibri"/>
                         </a:rPr>
-                        <a:t>263</a:t>
+                        <a:t>—</a:t>
                       </a:r>
                     </a:p>
                   </a:txBody>
@@ -9155,7 +9120,7 @@
                           </a:solidFill>
                           <a:latin typeface="Calibri"/>
                         </a:rPr>
-                        <a:t>281</a:t>
+                        <a:t>—</a:t>
                       </a:r>
                     </a:p>
                   </a:txBody>
@@ -9243,7 +9208,7 @@
                           </a:solidFill>
                           <a:latin typeface="Calibri"/>
                         </a:rPr>
-                        <a:t>199</a:t>
+                        <a:t>—</a:t>
                       </a:r>
                     </a:p>
                   </a:txBody>
@@ -9286,7 +9251,7 @@
                           </a:solidFill>
                           <a:latin typeface="Calibri"/>
                         </a:rPr>
-                        <a:t>209</a:t>
+                        <a:t>—</a:t>
                       </a:r>
                     </a:p>
                   </a:txBody>
@@ -9329,7 +9294,7 @@
                           </a:solidFill>
                           <a:latin typeface="Calibri"/>
                         </a:rPr>
-                        <a:t>220</a:t>
+                        <a:t>—</a:t>
                       </a:r>
                     </a:p>
                   </a:txBody>
@@ -9372,7 +9337,7 @@
                           </a:solidFill>
                           <a:latin typeface="Calibri"/>
                         </a:rPr>
-                        <a:t>233</a:t>
+                        <a:t>—</a:t>
                       </a:r>
                     </a:p>
                   </a:txBody>
@@ -9415,7 +9380,7 @@
                           </a:solidFill>
                           <a:latin typeface="Calibri"/>
                         </a:rPr>
-                        <a:t>247</a:t>
+                        <a:t>—</a:t>
                       </a:r>
                     </a:p>
                   </a:txBody>
@@ -9450,41 +9415,6 @@
           </a:graphicData>
         </a:graphic>
       </p:graphicFrame>
-      <p:sp>
-        <p:nvSpPr>
-          <p:cNvPr id="20" name="TextBox 19"/>
-          <p:cNvSpPr txBox="1"/>
-          <p:nvPr/>
-        </p:nvSpPr>
-        <p:spPr>
-          <a:xfrm>
-            <a:off x="367200" y="3916800"/>
-            <a:ext cx="8413200" cy="547200"/>
-          </a:xfrm>
-          <a:prstGeom prst="rect">
-            <a:avLst/>
-          </a:prstGeom>
-          <a:noFill/>
-        </p:spPr>
-        <p:txBody>
-          <a:bodyPr wrap="square">
-            <a:spAutoFit/>
-          </a:bodyPr>
-          <a:lstStyle/>
-          <a:p>
-            <a:pPr algn="l"/>
-            <a:r>
-              <a:rPr sz="850" b="0" i="0">
-                <a:solidFill>
-                  <a:srgbClr val="555555"/>
-                </a:solidFill>
-                <a:latin typeface="Calibri"/>
-              </a:rPr>
-              <a:t>Le prix implicite d'Apple sur la base d'un modèle de flux de trésorerie disponible est de 280,5 USD, ce qui suggère un upside de 10% par rapport au cours actuel.</a:t>
-            </a:r>
-          </a:p>
-        </p:txBody>
-      </p:sp>
     </p:spTree>
   </p:cSld>
   <p:clrMapOvr>
@@ -10094,7 +10024,7 @@
         </p:nvGraphicFramePr>
         <p:xfrm>
           <a:off x="367200" y="914400"/>
-          <a:ext cx="8413200" cy="2015999"/>
+          <a:ext cx="8413200" cy="871200"/>
         </p:xfrm>
         <a:graphic>
           <a:graphicData uri="http://schemas.openxmlformats.org/drawingml/2006/table">
@@ -10112,7 +10042,7 @@
                 <a:gridCol w="1093716"/>
                 <a:gridCol w="1009584"/>
               </a:tblGrid>
-              <a:tr h="251999">
+              <a:tr h="290400">
                 <a:tc>
                   <a:txBody>
                     <a:bodyPr/>
@@ -10298,7 +10228,7 @@
                   </a:tcPr>
                 </a:tc>
               </a:tr>
-              <a:tr h="251999">
+              <a:tr h="290400">
                 <a:tc>
                   <a:txBody>
                     <a:bodyPr/>
@@ -10358,7 +10288,7 @@
                           </a:solidFill>
                           <a:latin typeface="Calibri"/>
                         </a:rPr>
-                        <a:t>3 719,9</a:t>
+                        <a:t>3 724,3</a:t>
                       </a:r>
                     </a:p>
                   </a:txBody>
@@ -10381,7 +10311,7 @@
                           </a:solidFill>
                           <a:latin typeface="Calibri"/>
                         </a:rPr>
-                        <a:t>26,1x</a:t>
+                        <a:t>26,2x</a:t>
                       </a:r>
                     </a:p>
                   </a:txBody>
@@ -10484,937 +10414,7 @@
                   </a:tcPr>
                 </a:tc>
               </a:tr>
-              <a:tr h="251999">
-                <a:tc>
-                  <a:txBody>
-                    <a:bodyPr/>
-                    <a:lstStyle/>
-                    <a:p>
-                      <a:pPr algn="l"/>
-                      <a:r>
-                        <a:rPr sz="800" b="0" i="0">
-                          <a:solidFill>
-                            <a:srgbClr val="0D0D0D"/>
-                          </a:solidFill>
-                          <a:latin typeface="Calibri"/>
-                        </a:rPr>
-                        <a:t>Microsoft</a:t>
-                      </a:r>
-                    </a:p>
-                  </a:txBody>
-                  <a:tcPr>
-                    <a:solidFill>
-                      <a:srgbClr val="FFFFFF"/>
-                    </a:solidFill>
-                  </a:tcPr>
-                </a:tc>
-                <a:tc>
-                  <a:txBody>
-                    <a:bodyPr/>
-                    <a:lstStyle/>
-                    <a:p>
-                      <a:pPr algn="ctr"/>
-                      <a:r>
-                        <a:rPr sz="750" b="0" i="0">
-                          <a:solidFill>
-                            <a:srgbClr val="555555"/>
-                          </a:solidFill>
-                          <a:latin typeface="Calibri"/>
-                        </a:rPr>
-                        <a:t>MSFT</a:t>
-                      </a:r>
-                    </a:p>
-                  </a:txBody>
-                  <a:tcPr>
-                    <a:solidFill>
-                      <a:srgbClr val="FFFFFF"/>
-                    </a:solidFill>
-                  </a:tcPr>
-                </a:tc>
-                <a:tc>
-                  <a:txBody>
-                    <a:bodyPr/>
-                    <a:lstStyle/>
-                    <a:p>
-                      <a:pPr algn="ctr"/>
-                      <a:r>
-                        <a:rPr sz="800" b="0" i="0">
-                          <a:solidFill>
-                            <a:srgbClr val="0D0D0D"/>
-                          </a:solidFill>
-                          <a:latin typeface="Calibri"/>
-                        </a:rPr>
-                        <a:t>2 351,9</a:t>
-                      </a:r>
-                    </a:p>
-                  </a:txBody>
-                  <a:tcPr>
-                    <a:solidFill>
-                      <a:srgbClr val="FFFFFF"/>
-                    </a:solidFill>
-                  </a:tcPr>
-                </a:tc>
-                <a:tc>
-                  <a:txBody>
-                    <a:bodyPr/>
-                    <a:lstStyle/>
-                    <a:p>
-                      <a:pPr algn="ctr"/>
-                      <a:r>
-                        <a:rPr sz="800" b="0" i="0">
-                          <a:solidFill>
-                            <a:srgbClr val="0D0D0D"/>
-                          </a:solidFill>
-                          <a:latin typeface="Calibri"/>
-                        </a:rPr>
-                        <a:t>23,1x</a:t>
-                      </a:r>
-                    </a:p>
-                  </a:txBody>
-                  <a:tcPr>
-                    <a:solidFill>
-                      <a:srgbClr val="FFFFFF"/>
-                    </a:solidFill>
-                  </a:tcPr>
-                </a:tc>
-                <a:tc>
-                  <a:txBody>
-                    <a:bodyPr/>
-                    <a:lstStyle/>
-                    <a:p>
-                      <a:pPr algn="ctr"/>
-                      <a:r>
-                        <a:rPr sz="800" b="0" i="0">
-                          <a:solidFill>
-                            <a:srgbClr val="0D0D0D"/>
-                          </a:solidFill>
-                          <a:latin typeface="Calibri"/>
-                        </a:rPr>
-                        <a:t>8,5x</a:t>
-                      </a:r>
-                    </a:p>
-                  </a:txBody>
-                  <a:tcPr>
-                    <a:solidFill>
-                      <a:srgbClr val="FFFFFF"/>
-                    </a:solidFill>
-                  </a:tcPr>
-                </a:tc>
-                <a:tc>
-                  <a:txBody>
-                    <a:bodyPr/>
-                    <a:lstStyle/>
-                    <a:p>
-                      <a:pPr algn="ctr"/>
-                      <a:r>
-                        <a:rPr sz="800" b="0" i="0">
-                          <a:solidFill>
-                            <a:srgbClr val="0D0D0D"/>
-                          </a:solidFill>
-                          <a:latin typeface="Calibri"/>
-                        </a:rPr>
-                        <a:t>34,2x</a:t>
-                      </a:r>
-                    </a:p>
-                  </a:txBody>
-                  <a:tcPr>
-                    <a:solidFill>
-                      <a:srgbClr val="FFFFFF"/>
-                    </a:solidFill>
-                  </a:tcPr>
-                </a:tc>
-                <a:tc>
-                  <a:txBody>
-                    <a:bodyPr/>
-                    <a:lstStyle/>
-                    <a:p>
-                      <a:pPr algn="ctr"/>
-                      <a:r>
-                        <a:rPr sz="800" b="0" i="0">
-                          <a:solidFill>
-                            <a:srgbClr val="0D0D0D"/>
-                          </a:solidFill>
-                          <a:latin typeface="Calibri"/>
-                        </a:rPr>
-                        <a:t>68,0 %</a:t>
-                      </a:r>
-                    </a:p>
-                  </a:txBody>
-                  <a:tcPr>
-                    <a:solidFill>
-                      <a:srgbClr val="FFFFFF"/>
-                    </a:solidFill>
-                  </a:tcPr>
-                </a:tc>
-                <a:tc>
-                  <a:txBody>
-                    <a:bodyPr/>
-                    <a:lstStyle/>
-                    <a:p>
-                      <a:pPr algn="ctr"/>
-                      <a:r>
-                        <a:rPr sz="800" b="0" i="0">
-                          <a:solidFill>
-                            <a:srgbClr val="0D0D0D"/>
-                          </a:solidFill>
-                          <a:latin typeface="Calibri"/>
-                        </a:rPr>
-                        <a:t>43,0 %</a:t>
-                      </a:r>
-                    </a:p>
-                  </a:txBody>
-                  <a:tcPr>
-                    <a:solidFill>
-                      <a:srgbClr val="FFFFFF"/>
-                    </a:solidFill>
-                  </a:tcPr>
-                </a:tc>
-              </a:tr>
-              <a:tr h="251999">
-                <a:tc>
-                  <a:txBody>
-                    <a:bodyPr/>
-                    <a:lstStyle/>
-                    <a:p>
-                      <a:pPr algn="l"/>
-                      <a:r>
-                        <a:rPr sz="800" b="0" i="0">
-                          <a:solidFill>
-                            <a:srgbClr val="0D0D0D"/>
-                          </a:solidFill>
-                          <a:latin typeface="Calibri"/>
-                        </a:rPr>
-                        <a:t>Alphabet</a:t>
-                      </a:r>
-                    </a:p>
-                  </a:txBody>
-                  <a:tcPr>
-                    <a:solidFill>
-                      <a:srgbClr val="F7F8FA"/>
-                    </a:solidFill>
-                  </a:tcPr>
-                </a:tc>
-                <a:tc>
-                  <a:txBody>
-                    <a:bodyPr/>
-                    <a:lstStyle/>
-                    <a:p>
-                      <a:pPr algn="ctr"/>
-                      <a:r>
-                        <a:rPr sz="750" b="0" i="0">
-                          <a:solidFill>
-                            <a:srgbClr val="555555"/>
-                          </a:solidFill>
-                          <a:latin typeface="Calibri"/>
-                        </a:rPr>
-                        <a:t>GOOGL</a:t>
-                      </a:r>
-                    </a:p>
-                  </a:txBody>
-                  <a:tcPr>
-                    <a:solidFill>
-                      <a:srgbClr val="F7F8FA"/>
-                    </a:solidFill>
-                  </a:tcPr>
-                </a:tc>
-                <a:tc>
-                  <a:txBody>
-                    <a:bodyPr/>
-                    <a:lstStyle/>
-                    <a:p>
-                      <a:pPr algn="ctr"/>
-                      <a:r>
-                        <a:rPr sz="800" b="0" i="0">
-                          <a:solidFill>
-                            <a:srgbClr val="0D0D0D"/>
-                          </a:solidFill>
-                          <a:latin typeface="Calibri"/>
-                        </a:rPr>
-                        <a:t>1 571,9</a:t>
-                      </a:r>
-                    </a:p>
-                  </a:txBody>
-                  <a:tcPr>
-                    <a:solidFill>
-                      <a:srgbClr val="F7F8FA"/>
-                    </a:solidFill>
-                  </a:tcPr>
-                </a:tc>
-                <a:tc>
-                  <a:txBody>
-                    <a:bodyPr/>
-                    <a:lstStyle/>
-                    <a:p>
-                      <a:pPr algn="ctr"/>
-                      <a:r>
-                        <a:rPr sz="800" b="0" i="0">
-                          <a:solidFill>
-                            <a:srgbClr val="0D0D0D"/>
-                          </a:solidFill>
-                          <a:latin typeface="Calibri"/>
-                        </a:rPr>
-                        <a:t>20,5x</a:t>
-                      </a:r>
-                    </a:p>
-                  </a:txBody>
-                  <a:tcPr>
-                    <a:solidFill>
-                      <a:srgbClr val="F7F8FA"/>
-                    </a:solidFill>
-                  </a:tcPr>
-                </a:tc>
-                <a:tc>
-                  <a:txBody>
-                    <a:bodyPr/>
-                    <a:lstStyle/>
-                    <a:p>
-                      <a:pPr algn="ctr"/>
-                      <a:r>
-                        <a:rPr sz="800" b="0" i="0">
-                          <a:solidFill>
-                            <a:srgbClr val="0D0D0D"/>
-                          </a:solidFill>
-                          <a:latin typeface="Calibri"/>
-                        </a:rPr>
-                        <a:t>7,3x</a:t>
-                      </a:r>
-                    </a:p>
-                  </a:txBody>
-                  <a:tcPr>
-                    <a:solidFill>
-                      <a:srgbClr val="F7F8FA"/>
-                    </a:solidFill>
-                  </a:tcPr>
-                </a:tc>
-                <a:tc>
-                  <a:txBody>
-                    <a:bodyPr/>
-                    <a:lstStyle/>
-                    <a:p>
-                      <a:pPr algn="ctr"/>
-                      <a:r>
-                        <a:rPr sz="800" b="0" i="0">
-                          <a:solidFill>
-                            <a:srgbClr val="0D0D0D"/>
-                          </a:solidFill>
-                          <a:latin typeface="Calibri"/>
-                        </a:rPr>
-                        <a:t>29,1x</a:t>
-                      </a:r>
-                    </a:p>
-                  </a:txBody>
-                  <a:tcPr>
-                    <a:solidFill>
-                      <a:srgbClr val="F7F8FA"/>
-                    </a:solidFill>
-                  </a:tcPr>
-                </a:tc>
-                <a:tc>
-                  <a:txBody>
-                    <a:bodyPr/>
-                    <a:lstStyle/>
-                    <a:p>
-                      <a:pPr algn="ctr"/>
-                      <a:r>
-                        <a:rPr sz="800" b="0" i="0">
-                          <a:solidFill>
-                            <a:srgbClr val="0D0D0D"/>
-                          </a:solidFill>
-                          <a:latin typeface="Calibri"/>
-                        </a:rPr>
-                        <a:t>55,0 %</a:t>
-                      </a:r>
-                    </a:p>
-                  </a:txBody>
-                  <a:tcPr>
-                    <a:solidFill>
-                      <a:srgbClr val="F7F8FA"/>
-                    </a:solidFill>
-                  </a:tcPr>
-                </a:tc>
-                <a:tc>
-                  <a:txBody>
-                    <a:bodyPr/>
-                    <a:lstStyle/>
-                    <a:p>
-                      <a:pPr algn="ctr"/>
-                      <a:r>
-                        <a:rPr sz="800" b="0" i="0">
-                          <a:solidFill>
-                            <a:srgbClr val="0D0D0D"/>
-                          </a:solidFill>
-                          <a:latin typeface="Calibri"/>
-                        </a:rPr>
-                        <a:t>32,0 %</a:t>
-                      </a:r>
-                    </a:p>
-                  </a:txBody>
-                  <a:tcPr>
-                    <a:solidFill>
-                      <a:srgbClr val="F7F8FA"/>
-                    </a:solidFill>
-                  </a:tcPr>
-                </a:tc>
-              </a:tr>
-              <a:tr h="251999">
-                <a:tc>
-                  <a:txBody>
-                    <a:bodyPr/>
-                    <a:lstStyle/>
-                    <a:p>
-                      <a:pPr algn="l"/>
-                      <a:r>
-                        <a:rPr sz="800" b="0" i="0">
-                          <a:solidFill>
-                            <a:srgbClr val="0D0D0D"/>
-                          </a:solidFill>
-                          <a:latin typeface="Calibri"/>
-                        </a:rPr>
-                        <a:t>Amazon</a:t>
-                      </a:r>
-                    </a:p>
-                  </a:txBody>
-                  <a:tcPr>
-                    <a:solidFill>
-                      <a:srgbClr val="FFFFFF"/>
-                    </a:solidFill>
-                  </a:tcPr>
-                </a:tc>
-                <a:tc>
-                  <a:txBody>
-                    <a:bodyPr/>
-                    <a:lstStyle/>
-                    <a:p>
-                      <a:pPr algn="ctr"/>
-                      <a:r>
-                        <a:rPr sz="750" b="0" i="0">
-                          <a:solidFill>
-                            <a:srgbClr val="555555"/>
-                          </a:solidFill>
-                          <a:latin typeface="Calibri"/>
-                        </a:rPr>
-                        <a:t>AMZN</a:t>
-                      </a:r>
-                    </a:p>
-                  </a:txBody>
-                  <a:tcPr>
-                    <a:solidFill>
-                      <a:srgbClr val="FFFFFF"/>
-                    </a:solidFill>
-                  </a:tcPr>
-                </a:tc>
-                <a:tc>
-                  <a:txBody>
-                    <a:bodyPr/>
-                    <a:lstStyle/>
-                    <a:p>
-                      <a:pPr algn="ctr"/>
-                      <a:r>
-                        <a:rPr sz="800" b="0" i="0">
-                          <a:solidFill>
-                            <a:srgbClr val="0D0D0D"/>
-                          </a:solidFill>
-                          <a:latin typeface="Calibri"/>
-                        </a:rPr>
-                        <a:t>1 034,9</a:t>
-                      </a:r>
-                    </a:p>
-                  </a:txBody>
-                  <a:tcPr>
-                    <a:solidFill>
-                      <a:srgbClr val="FFFFFF"/>
-                    </a:solidFill>
-                  </a:tcPr>
-                </a:tc>
-                <a:tc>
-                  <a:txBody>
-                    <a:bodyPr/>
-                    <a:lstStyle/>
-                    <a:p>
-                      <a:pPr algn="ctr"/>
-                      <a:r>
-                        <a:rPr sz="800" b="0" i="0">
-                          <a:solidFill>
-                            <a:srgbClr val="0D0D0D"/>
-                          </a:solidFill>
-                          <a:latin typeface="Calibri"/>
-                        </a:rPr>
-                        <a:t>18,3x</a:t>
-                      </a:r>
-                    </a:p>
-                  </a:txBody>
-                  <a:tcPr>
-                    <a:solidFill>
-                      <a:srgbClr val="FFFFFF"/>
-                    </a:solidFill>
-                  </a:tcPr>
-                </a:tc>
-                <a:tc>
-                  <a:txBody>
-                    <a:bodyPr/>
-                    <a:lstStyle/>
-                    <a:p>
-                      <a:pPr algn="ctr"/>
-                      <a:r>
-                        <a:rPr sz="800" b="0" i="0">
-                          <a:solidFill>
-                            <a:srgbClr val="0D0D0D"/>
-                          </a:solidFill>
-                          <a:latin typeface="Calibri"/>
-                        </a:rPr>
-                        <a:t>6,5x</a:t>
-                      </a:r>
-                    </a:p>
-                  </a:txBody>
-                  <a:tcPr>
-                    <a:solidFill>
-                      <a:srgbClr val="FFFFFF"/>
-                    </a:solidFill>
-                  </a:tcPr>
-                </a:tc>
-                <a:tc>
-                  <a:txBody>
-                    <a:bodyPr/>
-                    <a:lstStyle/>
-                    <a:p>
-                      <a:pPr algn="ctr"/>
-                      <a:r>
-                        <a:rPr sz="800" b="0" i="0">
-                          <a:solidFill>
-                            <a:srgbClr val="0D0D0D"/>
-                          </a:solidFill>
-                          <a:latin typeface="Calibri"/>
-                        </a:rPr>
-                        <a:t>24,5x</a:t>
-                      </a:r>
-                    </a:p>
-                  </a:txBody>
-                  <a:tcPr>
-                    <a:solidFill>
-                      <a:srgbClr val="FFFFFF"/>
-                    </a:solidFill>
-                  </a:tcPr>
-                </a:tc>
-                <a:tc>
-                  <a:txBody>
-                    <a:bodyPr/>
-                    <a:lstStyle/>
-                    <a:p>
-                      <a:pPr algn="ctr"/>
-                      <a:r>
-                        <a:rPr sz="800" b="0" i="0">
-                          <a:solidFill>
-                            <a:srgbClr val="0D0D0D"/>
-                          </a:solidFill>
-                          <a:latin typeface="Calibri"/>
-                        </a:rPr>
-                        <a:t>42,0 %</a:t>
-                      </a:r>
-                    </a:p>
-                  </a:txBody>
-                  <a:tcPr>
-                    <a:solidFill>
-                      <a:srgbClr val="FFFFFF"/>
-                    </a:solidFill>
-                  </a:tcPr>
-                </a:tc>
-                <a:tc>
-                  <a:txBody>
-                    <a:bodyPr/>
-                    <a:lstStyle/>
-                    <a:p>
-                      <a:pPr algn="ctr"/>
-                      <a:r>
-                        <a:rPr sz="800" b="0" i="0">
-                          <a:solidFill>
-                            <a:srgbClr val="0D0D0D"/>
-                          </a:solidFill>
-                          <a:latin typeface="Calibri"/>
-                        </a:rPr>
-                        <a:t>25,0 %</a:t>
-                      </a:r>
-                    </a:p>
-                  </a:txBody>
-                  <a:tcPr>
-                    <a:solidFill>
-                      <a:srgbClr val="FFFFFF"/>
-                    </a:solidFill>
-                  </a:tcPr>
-                </a:tc>
-              </a:tr>
-              <a:tr h="251999">
-                <a:tc>
-                  <a:txBody>
-                    <a:bodyPr/>
-                    <a:lstStyle/>
-                    <a:p>
-                      <a:pPr algn="l"/>
-                      <a:r>
-                        <a:rPr sz="800" b="0" i="0">
-                          <a:solidFill>
-                            <a:srgbClr val="0D0D0D"/>
-                          </a:solidFill>
-                          <a:latin typeface="Calibri"/>
-                        </a:rPr>
-                        <a:t>Facebook</a:t>
-                      </a:r>
-                    </a:p>
-                  </a:txBody>
-                  <a:tcPr>
-                    <a:solidFill>
-                      <a:srgbClr val="F7F8FA"/>
-                    </a:solidFill>
-                  </a:tcPr>
-                </a:tc>
-                <a:tc>
-                  <a:txBody>
-                    <a:bodyPr/>
-                    <a:lstStyle/>
-                    <a:p>
-                      <a:pPr algn="ctr"/>
-                      <a:r>
-                        <a:rPr sz="750" b="0" i="0">
-                          <a:solidFill>
-                            <a:srgbClr val="555555"/>
-                          </a:solidFill>
-                          <a:latin typeface="Calibri"/>
-                        </a:rPr>
-                        <a:t>META</a:t>
-                      </a:r>
-                    </a:p>
-                  </a:txBody>
-                  <a:tcPr>
-                    <a:solidFill>
-                      <a:srgbClr val="F7F8FA"/>
-                    </a:solidFill>
-                  </a:tcPr>
-                </a:tc>
-                <a:tc>
-                  <a:txBody>
-                    <a:bodyPr/>
-                    <a:lstStyle/>
-                    <a:p>
-                      <a:pPr algn="ctr"/>
-                      <a:r>
-                        <a:rPr sz="800" b="0" i="0">
-                          <a:solidFill>
-                            <a:srgbClr val="0D0D0D"/>
-                          </a:solidFill>
-                          <a:latin typeface="Calibri"/>
-                        </a:rPr>
-                        <a:t>846,9</a:t>
-                      </a:r>
-                    </a:p>
-                  </a:txBody>
-                  <a:tcPr>
-                    <a:solidFill>
-                      <a:srgbClr val="F7F8FA"/>
-                    </a:solidFill>
-                  </a:tcPr>
-                </a:tc>
-                <a:tc>
-                  <a:txBody>
-                    <a:bodyPr/>
-                    <a:lstStyle/>
-                    <a:p>
-                      <a:pPr algn="ctr"/>
-                      <a:r>
-                        <a:rPr sz="800" b="0" i="0">
-                          <a:solidFill>
-                            <a:srgbClr val="0D0D0D"/>
-                          </a:solidFill>
-                          <a:latin typeface="Calibri"/>
-                        </a:rPr>
-                        <a:t>16,2x</a:t>
-                      </a:r>
-                    </a:p>
-                  </a:txBody>
-                  <a:tcPr>
-                    <a:solidFill>
-                      <a:srgbClr val="F7F8FA"/>
-                    </a:solidFill>
-                  </a:tcPr>
-                </a:tc>
-                <a:tc>
-                  <a:txBody>
-                    <a:bodyPr/>
-                    <a:lstStyle/>
-                    <a:p>
-                      <a:pPr algn="ctr"/>
-                      <a:r>
-                        <a:rPr sz="800" b="0" i="0">
-                          <a:solidFill>
-                            <a:srgbClr val="0D0D0D"/>
-                          </a:solidFill>
-                          <a:latin typeface="Calibri"/>
-                        </a:rPr>
-                        <a:t>5,8x</a:t>
-                      </a:r>
-                    </a:p>
-                  </a:txBody>
-                  <a:tcPr>
-                    <a:solidFill>
-                      <a:srgbClr val="F7F8FA"/>
-                    </a:solidFill>
-                  </a:tcPr>
-                </a:tc>
-                <a:tc>
-                  <a:txBody>
-                    <a:bodyPr/>
-                    <a:lstStyle/>
-                    <a:p>
-                      <a:pPr algn="ctr"/>
-                      <a:r>
-                        <a:rPr sz="800" b="0" i="0">
-                          <a:solidFill>
-                            <a:srgbClr val="0D0D0D"/>
-                          </a:solidFill>
-                          <a:latin typeface="Calibri"/>
-                        </a:rPr>
-                        <a:t>20,5x</a:t>
-                      </a:r>
-                    </a:p>
-                  </a:txBody>
-                  <a:tcPr>
-                    <a:solidFill>
-                      <a:srgbClr val="F7F8FA"/>
-                    </a:solidFill>
-                  </a:tcPr>
-                </a:tc>
-                <a:tc>
-                  <a:txBody>
-                    <a:bodyPr/>
-                    <a:lstStyle/>
-                    <a:p>
-                      <a:pPr algn="ctr"/>
-                      <a:r>
-                        <a:rPr sz="800" b="0" i="0">
-                          <a:solidFill>
-                            <a:srgbClr val="0D0D0D"/>
-                          </a:solidFill>
-                          <a:latin typeface="Calibri"/>
-                        </a:rPr>
-                        <a:t>38,0 %</a:t>
-                      </a:r>
-                    </a:p>
-                  </a:txBody>
-                  <a:tcPr>
-                    <a:solidFill>
-                      <a:srgbClr val="F7F8FA"/>
-                    </a:solidFill>
-                  </a:tcPr>
-                </a:tc>
-                <a:tc>
-                  <a:txBody>
-                    <a:bodyPr/>
-                    <a:lstStyle/>
-                    <a:p>
-                      <a:pPr algn="ctr"/>
-                      <a:r>
-                        <a:rPr sz="800" b="0" i="0">
-                          <a:solidFill>
-                            <a:srgbClr val="0D0D0D"/>
-                          </a:solidFill>
-                          <a:latin typeface="Calibri"/>
-                        </a:rPr>
-                        <a:t>22,0 %</a:t>
-                      </a:r>
-                    </a:p>
-                  </a:txBody>
-                  <a:tcPr>
-                    <a:solidFill>
-                      <a:srgbClr val="F7F8FA"/>
-                    </a:solidFill>
-                  </a:tcPr>
-                </a:tc>
-              </a:tr>
-              <a:tr h="251999">
-                <a:tc>
-                  <a:txBody>
-                    <a:bodyPr/>
-                    <a:lstStyle/>
-                    <a:p>
-                      <a:pPr algn="l"/>
-                      <a:r>
-                        <a:rPr sz="800" b="0" i="0">
-                          <a:solidFill>
-                            <a:srgbClr val="0D0D0D"/>
-                          </a:solidFill>
-                          <a:latin typeface="Calibri"/>
-                        </a:rPr>
-                        <a:t>Tesla</a:t>
-                      </a:r>
-                    </a:p>
-                  </a:txBody>
-                  <a:tcPr>
-                    <a:solidFill>
-                      <a:srgbClr val="FFFFFF"/>
-                    </a:solidFill>
-                  </a:tcPr>
-                </a:tc>
-                <a:tc>
-                  <a:txBody>
-                    <a:bodyPr/>
-                    <a:lstStyle/>
-                    <a:p>
-                      <a:pPr algn="ctr"/>
-                      <a:r>
-                        <a:rPr sz="750" b="0" i="0">
-                          <a:solidFill>
-                            <a:srgbClr val="555555"/>
-                          </a:solidFill>
-                          <a:latin typeface="Calibri"/>
-                        </a:rPr>
-                        <a:t>TSLA</a:t>
-                      </a:r>
-                    </a:p>
-                  </a:txBody>
-                  <a:tcPr>
-                    <a:solidFill>
-                      <a:srgbClr val="FFFFFF"/>
-                    </a:solidFill>
-                  </a:tcPr>
-                </a:tc>
-                <a:tc>
-                  <a:txBody>
-                    <a:bodyPr/>
-                    <a:lstStyle/>
-                    <a:p>
-                      <a:pPr algn="ctr"/>
-                      <a:r>
-                        <a:rPr sz="800" b="0" i="0">
-                          <a:solidFill>
-                            <a:srgbClr val="0D0D0D"/>
-                          </a:solidFill>
-                          <a:latin typeface="Calibri"/>
-                        </a:rPr>
-                        <a:t>574,9</a:t>
-                      </a:r>
-                    </a:p>
-                  </a:txBody>
-                  <a:tcPr>
-                    <a:solidFill>
-                      <a:srgbClr val="FFFFFF"/>
-                    </a:solidFill>
-                  </a:tcPr>
-                </a:tc>
-                <a:tc>
-                  <a:txBody>
-                    <a:bodyPr/>
-                    <a:lstStyle/>
-                    <a:p>
-                      <a:pPr algn="ctr"/>
-                      <a:r>
-                        <a:rPr sz="800" b="0" i="0">
-                          <a:solidFill>
-                            <a:srgbClr val="0D0D0D"/>
-                          </a:solidFill>
-                          <a:latin typeface="Calibri"/>
-                        </a:rPr>
-                        <a:t>24,9x</a:t>
-                      </a:r>
-                    </a:p>
-                  </a:txBody>
-                  <a:tcPr>
-                    <a:solidFill>
-                      <a:srgbClr val="FFFFFF"/>
-                    </a:solidFill>
-                  </a:tcPr>
-                </a:tc>
-                <a:tc>
-                  <a:txBody>
-                    <a:bodyPr/>
-                    <a:lstStyle/>
-                    <a:p>
-                      <a:pPr algn="ctr"/>
-                      <a:r>
-                        <a:rPr sz="800" b="0" i="0">
-                          <a:solidFill>
-                            <a:srgbClr val="0D0D0D"/>
-                          </a:solidFill>
-                          <a:latin typeface="Calibri"/>
-                        </a:rPr>
-                        <a:t>9,2x</a:t>
-                      </a:r>
-                    </a:p>
-                  </a:txBody>
-                  <a:tcPr>
-                    <a:solidFill>
-                      <a:srgbClr val="FFFFFF"/>
-                    </a:solidFill>
-                  </a:tcPr>
-                </a:tc>
-                <a:tc>
-                  <a:txBody>
-                    <a:bodyPr/>
-                    <a:lstStyle/>
-                    <a:p>
-                      <a:pPr algn="ctr"/>
-                      <a:r>
-                        <a:rPr sz="800" b="0" i="0">
-                          <a:solidFill>
-                            <a:srgbClr val="0D0D0D"/>
-                          </a:solidFill>
-                          <a:latin typeface="Calibri"/>
-                        </a:rPr>
-                        <a:t>35,1x</a:t>
-                      </a:r>
-                    </a:p>
-                  </a:txBody>
-                  <a:tcPr>
-                    <a:solidFill>
-                      <a:srgbClr val="FFFFFF"/>
-                    </a:solidFill>
-                  </a:tcPr>
-                </a:tc>
-                <a:tc>
-                  <a:txBody>
-                    <a:bodyPr/>
-                    <a:lstStyle/>
-                    <a:p>
-                      <a:pPr algn="ctr"/>
-                      <a:r>
-                        <a:rPr sz="800" b="0" i="0">
-                          <a:solidFill>
-                            <a:srgbClr val="0D0D0D"/>
-                          </a:solidFill>
-                          <a:latin typeface="Calibri"/>
-                        </a:rPr>
-                        <a:t>25,0 %</a:t>
-                      </a:r>
-                    </a:p>
-                  </a:txBody>
-                  <a:tcPr>
-                    <a:solidFill>
-                      <a:srgbClr val="FFFFFF"/>
-                    </a:solidFill>
-                  </a:tcPr>
-                </a:tc>
-                <a:tc>
-                  <a:txBody>
-                    <a:bodyPr/>
-                    <a:lstStyle/>
-                    <a:p>
-                      <a:pPr algn="ctr"/>
-                      <a:r>
-                        <a:rPr sz="800" b="0" i="0">
-                          <a:solidFill>
-                            <a:srgbClr val="0D0D0D"/>
-                          </a:solidFill>
-                          <a:latin typeface="Calibri"/>
-                        </a:rPr>
-                        <a:t>15,0 %</a:t>
-                      </a:r>
-                    </a:p>
-                  </a:txBody>
-                  <a:tcPr>
-                    <a:solidFill>
-                      <a:srgbClr val="FFFFFF"/>
-                    </a:solidFill>
-                  </a:tcPr>
-                </a:tc>
-              </a:tr>
-              <a:tr h="252006">
+              <a:tr h="290400">
                 <a:tc>
                   <a:txBody>
                     <a:bodyPr/>
@@ -11497,7 +10497,7 @@
                           </a:solidFill>
                           <a:latin typeface="Calibri"/>
                         </a:rPr>
-                        <a:t>20,5x</a:t>
+                        <a:t>—</a:t>
                       </a:r>
                     </a:p>
                   </a:txBody>
@@ -11520,7 +10520,7 @@
                           </a:solidFill>
                           <a:latin typeface="Calibri"/>
                         </a:rPr>
-                        <a:t>7,3x</a:t>
+                        <a:t>—</a:t>
                       </a:r>
                     </a:p>
                   </a:txBody>
@@ -11543,7 +10543,7 @@
                           </a:solidFill>
                           <a:latin typeface="Calibri"/>
                         </a:rPr>
-                        <a:t>29,1x</a:t>
+                        <a:t>—</a:t>
                       </a:r>
                     </a:p>
                   </a:txBody>
@@ -11566,7 +10566,7 @@
                           </a:solidFill>
                           <a:latin typeface="Calibri"/>
                         </a:rPr>
-                        <a:t>42,0 %</a:t>
+                        <a:t>—</a:t>
                       </a:r>
                     </a:p>
                   </a:txBody>
@@ -11589,7 +10589,7 @@
                           </a:solidFill>
                           <a:latin typeface="Calibri"/>
                         </a:rPr>
-                        <a:t>25,0 %</a:t>
+                        <a:t>—</a:t>
                       </a:r>
                     </a:p>
                   </a:txBody>
@@ -11604,41 +10604,6 @@
           </a:graphicData>
         </a:graphic>
       </p:graphicFrame>
-      <p:sp>
-        <p:nvSpPr>
-          <p:cNvPr id="18" name="TextBox 17"/>
-          <p:cNvSpPr txBox="1"/>
-          <p:nvPr/>
-        </p:nvSpPr>
-        <p:spPr>
-          <a:xfrm>
-            <a:off x="367200" y="3128400"/>
-            <a:ext cx="8413200" cy="1234800"/>
-          </a:xfrm>
-          <a:prstGeom prst="rect">
-            <a:avLst/>
-          </a:prstGeom>
-          <a:noFill/>
-        </p:spPr>
-        <p:txBody>
-          <a:bodyPr wrap="square">
-            <a:spAutoFit/>
-          </a:bodyPr>
-          <a:lstStyle/>
-          <a:p>
-            <a:pPr algn="l"/>
-            <a:r>
-              <a:rPr sz="850" b="0" i="0">
-                <a:solidFill>
-                  <a:srgbClr val="555555"/>
-                </a:solidFill>
-                <a:latin typeface="Calibri"/>
-              </a:rPr>
-              <a:t>Le ratio EV/EBITDA d'Apple est inférieur à la moyenne de son secteur, ce qui indique une valorisation attractive.</a:t>
-            </a:r>
-          </a:p>
-        </p:txBody>
-      </p:sp>
     </p:spTree>
   </p:cSld>
   <p:clrMapOvr>
@@ -12248,7 +11213,7 @@
         </p:nvGraphicFramePr>
         <p:xfrm>
           <a:off x="367200" y="914400"/>
-          <a:ext cx="8413200" cy="2149200"/>
+          <a:ext cx="8413200" cy="615600"/>
         </p:xfrm>
         <a:graphic>
           <a:graphicData uri="http://schemas.openxmlformats.org/drawingml/2006/table">
@@ -12262,7 +11227,7 @@
                 <a:gridCol w="1682640"/>
                 <a:gridCol w="2103300"/>
               </a:tblGrid>
-              <a:tr h="268650">
+              <a:tr h="307800">
                 <a:tc>
                   <a:txBody>
                     <a:bodyPr/>
@@ -12356,7 +11321,7 @@
                   </a:tcPr>
                 </a:tc>
               </a:tr>
-              <a:tr h="268650">
+              <a:tr h="307800">
                 <a:tc>
                   <a:txBody>
                     <a:bodyPr/>
@@ -12370,571 +11335,7 @@
                           </a:solidFill>
                           <a:latin typeface="Calibri"/>
                         </a:rPr>
-                        <a:t>DCF - Bear</a:t>
-                      </a:r>
-                    </a:p>
-                  </a:txBody>
-                  <a:tcPr>
-                    <a:solidFill>
-                      <a:srgbClr val="FAF0EF"/>
-                    </a:solidFill>
-                  </a:tcPr>
-                </a:tc>
-                <a:tc>
-                  <a:txBody>
-                    <a:bodyPr/>
-                    <a:lstStyle/>
-                    <a:p>
-                      <a:pPr algn="ctr"/>
-                      <a:r>
-                        <a:rPr sz="800" b="0" i="0">
-                          <a:solidFill>
-                            <a:srgbClr val="0D0D0D"/>
-                          </a:solidFill>
-                          <a:latin typeface="Calibri"/>
-                        </a:rPr>
-                        <a:t>220</a:t>
-                      </a:r>
-                    </a:p>
-                  </a:txBody>
-                  <a:tcPr>
-                    <a:solidFill>
-                      <a:srgbClr val="FAF0EF"/>
-                    </a:solidFill>
-                  </a:tcPr>
-                </a:tc>
-                <a:tc>
-                  <a:txBody>
-                    <a:bodyPr/>
-                    <a:lstStyle/>
-                    <a:p>
-                      <a:pPr algn="ctr"/>
-                      <a:r>
-                        <a:rPr sz="800" b="0" i="0">
-                          <a:solidFill>
-                            <a:srgbClr val="0D0D0D"/>
-                          </a:solidFill>
-                          <a:latin typeface="Calibri"/>
-                        </a:rPr>
-                        <a:t>250</a:t>
-                      </a:r>
-                    </a:p>
-                  </a:txBody>
-                  <a:tcPr>
-                    <a:solidFill>
-                      <a:srgbClr val="FAF0EF"/>
-                    </a:solidFill>
-                  </a:tcPr>
-                </a:tc>
-                <a:tc>
-                  <a:txBody>
-                    <a:bodyPr/>
-                    <a:lstStyle/>
-                    <a:p>
-                      <a:pPr algn="ctr"/>
-                      <a:r>
-                        <a:rPr sz="800" b="0" i="0">
-                          <a:solidFill>
-                            <a:srgbClr val="0D0D0D"/>
-                          </a:solidFill>
-                          <a:latin typeface="Calibri"/>
-                        </a:rPr>
-                        <a:t>241</a:t>
-                      </a:r>
-                    </a:p>
-                  </a:txBody>
-                  <a:tcPr>
-                    <a:solidFill>
-                      <a:srgbClr val="FAF0EF"/>
-                    </a:solidFill>
-                  </a:tcPr>
-                </a:tc>
-              </a:tr>
-              <a:tr h="268650">
-                <a:tc>
-                  <a:txBody>
-                    <a:bodyPr/>
-                    <a:lstStyle/>
-                    <a:p>
-                      <a:pPr algn="l"/>
-                      <a:r>
-                        <a:rPr sz="800" b="0" i="0">
-                          <a:solidFill>
-                            <a:srgbClr val="0D0D0D"/>
-                          </a:solidFill>
-                          <a:latin typeface="Calibri"/>
-                        </a:rPr>
-                        <a:t>DCF - Base</a:t>
-                      </a:r>
-                    </a:p>
-                  </a:txBody>
-                  <a:tcPr>
-                    <a:solidFill>
-                      <a:srgbClr val="EEF3FA"/>
-                    </a:solidFill>
-                  </a:tcPr>
-                </a:tc>
-                <a:tc>
-                  <a:txBody>
-                    <a:bodyPr/>
-                    <a:lstStyle/>
-                    <a:p>
-                      <a:pPr algn="ctr"/>
-                      <a:r>
-                        <a:rPr sz="800" b="0" i="0">
-                          <a:solidFill>
-                            <a:srgbClr val="0D0D0D"/>
-                          </a:solidFill>
-                          <a:latin typeface="Calibri"/>
-                        </a:rPr>
-                        <a:t>250</a:t>
-                      </a:r>
-                    </a:p>
-                  </a:txBody>
-                  <a:tcPr>
-                    <a:solidFill>
-                      <a:srgbClr val="EEF3FA"/>
-                    </a:solidFill>
-                  </a:tcPr>
-                </a:tc>
-                <a:tc>
-                  <a:txBody>
-                    <a:bodyPr/>
-                    <a:lstStyle/>
-                    <a:p>
-                      <a:pPr algn="ctr"/>
-                      <a:r>
-                        <a:rPr sz="800" b="0" i="0">
-                          <a:solidFill>
-                            <a:srgbClr val="0D0D0D"/>
-                          </a:solidFill>
-                          <a:latin typeface="Calibri"/>
-                        </a:rPr>
-                        <a:t>300</a:t>
-                      </a:r>
-                    </a:p>
-                  </a:txBody>
-                  <a:tcPr>
-                    <a:solidFill>
-                      <a:srgbClr val="EEF3FA"/>
-                    </a:solidFill>
-                  </a:tcPr>
-                </a:tc>
-                <a:tc>
-                  <a:txBody>
-                    <a:bodyPr/>
-                    <a:lstStyle/>
-                    <a:p>
-                      <a:pPr algn="ctr"/>
-                      <a:r>
-                        <a:rPr sz="800" b="0" i="0">
-                          <a:solidFill>
-                            <a:srgbClr val="0D0D0D"/>
-                          </a:solidFill>
-                          <a:latin typeface="Calibri"/>
-                        </a:rPr>
-                        <a:t>280</a:t>
-                      </a:r>
-                    </a:p>
-                  </a:txBody>
-                  <a:tcPr>
-                    <a:solidFill>
-                      <a:srgbClr val="EEF3FA"/>
-                    </a:solidFill>
-                  </a:tcPr>
-                </a:tc>
-              </a:tr>
-              <a:tr h="268650">
-                <a:tc>
-                  <a:txBody>
-                    <a:bodyPr/>
-                    <a:lstStyle/>
-                    <a:p>
-                      <a:pPr algn="l"/>
-                      <a:r>
-                        <a:rPr sz="800" b="0" i="0">
-                          <a:solidFill>
-                            <a:srgbClr val="0D0D0D"/>
-                          </a:solidFill>
-                          <a:latin typeface="Calibri"/>
-                        </a:rPr>
-                        <a:t>DCF - Bull</a:t>
-                      </a:r>
-                    </a:p>
-                  </a:txBody>
-                  <a:tcPr>
-                    <a:solidFill>
-                      <a:srgbClr val="EAF4EF"/>
-                    </a:solidFill>
-                  </a:tcPr>
-                </a:tc>
-                <a:tc>
-                  <a:txBody>
-                    <a:bodyPr/>
-                    <a:lstStyle/>
-                    <a:p>
-                      <a:pPr algn="ctr"/>
-                      <a:r>
-                        <a:rPr sz="800" b="0" i="0">
-                          <a:solidFill>
-                            <a:srgbClr val="0D0D0D"/>
-                          </a:solidFill>
-                          <a:latin typeface="Calibri"/>
-                        </a:rPr>
-                        <a:t>300</a:t>
-                      </a:r>
-                    </a:p>
-                  </a:txBody>
-                  <a:tcPr>
-                    <a:solidFill>
-                      <a:srgbClr val="EAF4EF"/>
-                    </a:solidFill>
-                  </a:tcPr>
-                </a:tc>
-                <a:tc>
-                  <a:txBody>
-                    <a:bodyPr/>
-                    <a:lstStyle/>
-                    <a:p>
-                      <a:pPr algn="ctr"/>
-                      <a:r>
-                        <a:rPr sz="800" b="0" i="0">
-                          <a:solidFill>
-                            <a:srgbClr val="0D0D0D"/>
-                          </a:solidFill>
-                          <a:latin typeface="Calibri"/>
-                        </a:rPr>
-                        <a:t>350</a:t>
-                      </a:r>
-                    </a:p>
-                  </a:txBody>
-                  <a:tcPr>
-                    <a:solidFill>
-                      <a:srgbClr val="EAF4EF"/>
-                    </a:solidFill>
-                  </a:tcPr>
-                </a:tc>
-                <a:tc>
-                  <a:txBody>
-                    <a:bodyPr/>
-                    <a:lstStyle/>
-                    <a:p>
-                      <a:pPr algn="ctr"/>
-                      <a:r>
-                        <a:rPr sz="800" b="0" i="0">
-                          <a:solidFill>
-                            <a:srgbClr val="0D0D0D"/>
-                          </a:solidFill>
-                          <a:latin typeface="Calibri"/>
-                        </a:rPr>
-                        <a:t>310</a:t>
-                      </a:r>
-                    </a:p>
-                  </a:txBody>
-                  <a:tcPr>
-                    <a:solidFill>
-                      <a:srgbClr val="EAF4EF"/>
-                    </a:solidFill>
-                  </a:tcPr>
-                </a:tc>
-              </a:tr>
-              <a:tr h="268650">
-                <a:tc>
-                  <a:txBody>
-                    <a:bodyPr/>
-                    <a:lstStyle/>
-                    <a:p>
-                      <a:pPr algn="l"/>
-                      <a:r>
-                        <a:rPr sz="800" b="0" i="0">
-                          <a:solidFill>
-                            <a:srgbClr val="0D0D0D"/>
-                          </a:solidFill>
-                          <a:latin typeface="Calibri"/>
-                        </a:rPr>
-                        <a:t>EV/EBITDA - Mediane peers</a:t>
-                      </a:r>
-                    </a:p>
-                  </a:txBody>
-                  <a:tcPr>
-                    <a:solidFill>
-                      <a:srgbClr val="F7F8FA"/>
-                    </a:solidFill>
-                  </a:tcPr>
-                </a:tc>
-                <a:tc>
-                  <a:txBody>
-                    <a:bodyPr/>
-                    <a:lstStyle/>
-                    <a:p>
-                      <a:pPr algn="ctr"/>
-                      <a:r>
-                        <a:rPr sz="800" b="0" i="0">
-                          <a:solidFill>
-                            <a:srgbClr val="0D0D0D"/>
-                          </a:solidFill>
-                          <a:latin typeface="Calibri"/>
-                        </a:rPr>
-                        <a:t>240</a:t>
-                      </a:r>
-                    </a:p>
-                  </a:txBody>
-                  <a:tcPr>
-                    <a:solidFill>
-                      <a:srgbClr val="F7F8FA"/>
-                    </a:solidFill>
-                  </a:tcPr>
-                </a:tc>
-                <a:tc>
-                  <a:txBody>
-                    <a:bodyPr/>
-                    <a:lstStyle/>
-                    <a:p>
-                      <a:pPr algn="ctr"/>
-                      <a:r>
-                        <a:rPr sz="800" b="0" i="0">
-                          <a:solidFill>
-                            <a:srgbClr val="0D0D0D"/>
-                          </a:solidFill>
-                          <a:latin typeface="Calibri"/>
-                        </a:rPr>
-                        <a:t>280</a:t>
-                      </a:r>
-                    </a:p>
-                  </a:txBody>
-                  <a:tcPr>
-                    <a:solidFill>
-                      <a:srgbClr val="F7F8FA"/>
-                    </a:solidFill>
-                  </a:tcPr>
-                </a:tc>
-                <a:tc>
-                  <a:txBody>
-                    <a:bodyPr/>
-                    <a:lstStyle/>
-                    <a:p>
-                      <a:pPr algn="ctr"/>
-                      <a:r>
-                        <a:rPr sz="800" b="0" i="0">
-                          <a:solidFill>
-                            <a:srgbClr val="0D0D0D"/>
-                          </a:solidFill>
-                          <a:latin typeface="Calibri"/>
-                        </a:rPr>
-                        <a:t>260</a:t>
-                      </a:r>
-                    </a:p>
-                  </a:txBody>
-                  <a:tcPr>
-                    <a:solidFill>
-                      <a:srgbClr val="F7F8FA"/>
-                    </a:solidFill>
-                  </a:tcPr>
-                </a:tc>
-              </a:tr>
-              <a:tr h="268650">
-                <a:tc>
-                  <a:txBody>
-                    <a:bodyPr/>
-                    <a:lstStyle/>
-                    <a:p>
-                      <a:pPr algn="l"/>
-                      <a:r>
-                        <a:rPr sz="800" b="0" i="0">
-                          <a:solidFill>
-                            <a:srgbClr val="0D0D0D"/>
-                          </a:solidFill>
-                          <a:latin typeface="Calibri"/>
-                        </a:rPr>
-                        <a:t>EV/EBITDA - Prime tech +50%</a:t>
-                      </a:r>
-                    </a:p>
-                  </a:txBody>
-                  <a:tcPr>
-                    <a:solidFill>
-                      <a:srgbClr val="F7F8FA"/>
-                    </a:solidFill>
-                  </a:tcPr>
-                </a:tc>
-                <a:tc>
-                  <a:txBody>
-                    <a:bodyPr/>
-                    <a:lstStyle/>
-                    <a:p>
-                      <a:pPr algn="ctr"/>
-                      <a:r>
-                        <a:rPr sz="800" b="0" i="0">
-                          <a:solidFill>
-                            <a:srgbClr val="0D0D0D"/>
-                          </a:solidFill>
-                          <a:latin typeface="Calibri"/>
-                        </a:rPr>
-                        <a:t>280</a:t>
-                      </a:r>
-                    </a:p>
-                  </a:txBody>
-                  <a:tcPr>
-                    <a:solidFill>
-                      <a:srgbClr val="F7F8FA"/>
-                    </a:solidFill>
-                  </a:tcPr>
-                </a:tc>
-                <a:tc>
-                  <a:txBody>
-                    <a:bodyPr/>
-                    <a:lstStyle/>
-                    <a:p>
-                      <a:pPr algn="ctr"/>
-                      <a:r>
-                        <a:rPr sz="800" b="0" i="0">
-                          <a:solidFill>
-                            <a:srgbClr val="0D0D0D"/>
-                          </a:solidFill>
-                          <a:latin typeface="Calibri"/>
-                        </a:rPr>
-                        <a:t>330</a:t>
-                      </a:r>
-                    </a:p>
-                  </a:txBody>
-                  <a:tcPr>
-                    <a:solidFill>
-                      <a:srgbClr val="F7F8FA"/>
-                    </a:solidFill>
-                  </a:tcPr>
-                </a:tc>
-                <a:tc>
-                  <a:txBody>
-                    <a:bodyPr/>
-                    <a:lstStyle/>
-                    <a:p>
-                      <a:pPr algn="ctr"/>
-                      <a:r>
-                        <a:rPr sz="800" b="0" i="0">
-                          <a:solidFill>
-                            <a:srgbClr val="0D0D0D"/>
-                          </a:solidFill>
-                          <a:latin typeface="Calibri"/>
-                        </a:rPr>
-                        <a:t>300</a:t>
-                      </a:r>
-                    </a:p>
-                  </a:txBody>
-                  <a:tcPr>
-                    <a:solidFill>
-                      <a:srgbClr val="F7F8FA"/>
-                    </a:solidFill>
-                  </a:tcPr>
-                </a:tc>
-              </a:tr>
-              <a:tr h="268650">
-                <a:tc>
-                  <a:txBody>
-                    <a:bodyPr/>
-                    <a:lstStyle/>
-                    <a:p>
-                      <a:pPr algn="l"/>
-                      <a:r>
-                        <a:rPr sz="800" b="0" i="0">
-                          <a:solidFill>
-                            <a:srgbClr val="0D0D0D"/>
-                          </a:solidFill>
-                          <a:latin typeface="Calibri"/>
-                        </a:rPr>
-                        <a:t>EV/Revenue - Mediane peers</a:t>
-                      </a:r>
-                    </a:p>
-                  </a:txBody>
-                  <a:tcPr>
-                    <a:solidFill>
-                      <a:srgbClr val="F7F8FA"/>
-                    </a:solidFill>
-                  </a:tcPr>
-                </a:tc>
-                <a:tc>
-                  <a:txBody>
-                    <a:bodyPr/>
-                    <a:lstStyle/>
-                    <a:p>
-                      <a:pPr algn="ctr"/>
-                      <a:r>
-                        <a:rPr sz="800" b="0" i="0">
-                          <a:solidFill>
-                            <a:srgbClr val="0D0D0D"/>
-                          </a:solidFill>
-                          <a:latin typeface="Calibri"/>
-                        </a:rPr>
-                        <a:t>200</a:t>
-                      </a:r>
-                    </a:p>
-                  </a:txBody>
-                  <a:tcPr>
-                    <a:solidFill>
-                      <a:srgbClr val="F7F8FA"/>
-                    </a:solidFill>
-                  </a:tcPr>
-                </a:tc>
-                <a:tc>
-                  <a:txBody>
-                    <a:bodyPr/>
-                    <a:lstStyle/>
-                    <a:p>
-                      <a:pPr algn="ctr"/>
-                      <a:r>
-                        <a:rPr sz="800" b="0" i="0">
-                          <a:solidFill>
-                            <a:srgbClr val="0D0D0D"/>
-                          </a:solidFill>
-                          <a:latin typeface="Calibri"/>
-                        </a:rPr>
-                        <a:t>240</a:t>
-                      </a:r>
-                    </a:p>
-                  </a:txBody>
-                  <a:tcPr>
-                    <a:solidFill>
-                      <a:srgbClr val="F7F8FA"/>
-                    </a:solidFill>
-                  </a:tcPr>
-                </a:tc>
-                <a:tc>
-                  <a:txBody>
-                    <a:bodyPr/>
-                    <a:lstStyle/>
-                    <a:p>
-                      <a:pPr algn="ctr"/>
-                      <a:r>
-                        <a:rPr sz="800" b="0" i="0">
-                          <a:solidFill>
-                            <a:srgbClr val="0D0D0D"/>
-                          </a:solidFill>
-                          <a:latin typeface="Calibri"/>
-                        </a:rPr>
-                        <a:t>220</a:t>
-                      </a:r>
-                    </a:p>
-                  </a:txBody>
-                  <a:tcPr>
-                    <a:solidFill>
-                      <a:srgbClr val="F7F8FA"/>
-                    </a:solidFill>
-                  </a:tcPr>
-                </a:tc>
-              </a:tr>
-              <a:tr h="268650">
-                <a:tc>
-                  <a:txBody>
-                    <a:bodyPr/>
-                    <a:lstStyle/>
-                    <a:p>
-                      <a:pPr algn="l"/>
-                      <a:r>
-                        <a:rPr sz="800" b="0" i="0">
-                          <a:solidFill>
-                            <a:srgbClr val="0D0D0D"/>
-                          </a:solidFill>
-                          <a:latin typeface="Calibri"/>
-                        </a:rPr>
-                        <a:t>Cours actuel (253,38)</a:t>
+                        <a:t>Cours actuel (253,68)</a:t>
                       </a:r>
                     </a:p>
                   </a:txBody>
@@ -13003,7 +11404,7 @@
                           </a:solidFill>
                           <a:latin typeface="Calibri"/>
                         </a:rPr>
-                        <a:t>253,38</a:t>
+                        <a:t>253,68</a:t>
                       </a:r>
                     </a:p>
                   </a:txBody>
@@ -13018,41 +11419,6 @@
           </a:graphicData>
         </a:graphic>
       </p:graphicFrame>
-      <p:sp>
-        <p:nvSpPr>
-          <p:cNvPr id="18" name="TextBox 17"/>
-          <p:cNvSpPr txBox="1"/>
-          <p:nvPr/>
-        </p:nvSpPr>
-        <p:spPr>
-          <a:xfrm>
-            <a:off x="367200" y="3528000"/>
-            <a:ext cx="8413200" cy="914400"/>
-          </a:xfrm>
-          <a:prstGeom prst="rect">
-            <a:avLst/>
-          </a:prstGeom>
-          <a:noFill/>
-        </p:spPr>
-        <p:txBody>
-          <a:bodyPr wrap="square">
-            <a:spAutoFit/>
-          </a:bodyPr>
-          <a:lstStyle/>
-          <a:p>
-            <a:pPr algn="l"/>
-            <a:r>
-              <a:rPr sz="850" b="0" i="0">
-                <a:solidFill>
-                  <a:srgbClr val="555555"/>
-                </a:solidFill>
-                <a:latin typeface="Calibri"/>
-              </a:rPr>
-              <a:t>Le prix implicite d'Apple sur la base d'un modèle de flux de trésorerie disponible est de 280,5 USD, ce qui suggère un upside de 10% par rapport au cours actuel.</a:t>
-            </a:r>
-          </a:p>
-        </p:txBody>
-      </p:sp>
     </p:spTree>
   </p:cSld>
   <p:clrMapOvr>
@@ -14021,7 +12387,7 @@
                 </a:solidFill>
                 <a:latin typeface="Calibri"/>
               </a:rPr>
-              <a:t>Concurrence accrue</a:t>
+              <a:t>Risque 1</a:t>
             </a:r>
           </a:p>
         </p:txBody>
@@ -14056,7 +12422,7 @@
                 </a:solidFill>
                 <a:latin typeface="Calibri"/>
               </a:rPr>
-              <a:t>Concurrence accrue</a:t>
+              <a:t>Risque macro-economique : remontee des taux ou ralentissement de la demande mondiale.</a:t>
             </a:r>
           </a:p>
         </p:txBody>
@@ -14177,7 +12543,7 @@
                 </a:solidFill>
                 <a:latin typeface="Calibri"/>
               </a:rPr>
-              <a:t>Dépendance aux smartphones</a:t>
+              <a:t>Risque 2</a:t>
             </a:r>
           </a:p>
         </p:txBody>
@@ -14212,7 +12578,7 @@
                 </a:solidFill>
                 <a:latin typeface="Calibri"/>
               </a:rPr>
-              <a:t>Risques politiques</a:t>
+              <a:t>Risque sectoriel : intensification de la concurrence ou disruption technologique.</a:t>
             </a:r>
           </a:p>
         </p:txBody>
@@ -14333,7 +12699,7 @@
                 </a:solidFill>
                 <a:latin typeface="Calibri"/>
               </a:rPr>
-              <a:t>Risques politiques</a:t>
+              <a:t>Risque 3</a:t>
             </a:r>
           </a:p>
         </p:txBody>
@@ -14368,7 +12734,7 @@
                 </a:solidFill>
                 <a:latin typeface="Calibri"/>
               </a:rPr>
-              <a:t>Dépendance aux smartphones</a:t>
+              <a:t>Risque specifique : deterioration des marges ou execution strategique.</a:t>
             </a:r>
           </a:p>
         </p:txBody>
@@ -14582,7 +12948,7 @@
                           </a:solidFill>
                           <a:latin typeface="Calibri"/>
                         </a:rPr>
-                        <a:t>Récession économique mondiale</a:t>
+                        <a:t>Remontée des taux directeurs &gt; 200bps</a:t>
                       </a:r>
                     </a:p>
                   </a:txBody>
@@ -14653,7 +13019,7 @@
                           </a:solidFill>
                           <a:latin typeface="Calibri"/>
                         </a:rPr>
-                        <a:t>Concurrence accrue dans le secteur des smartphones</a:t>
+                        <a:t>Rupture technologique remettant en cause le modèle</a:t>
                       </a:r>
                     </a:p>
                   </a:txBody>
@@ -14701,7 +13067,7 @@
                           </a:solidFill>
                           <a:latin typeface="Calibri"/>
                         </a:rPr>
-                        <a:t>Societe</a:t>
+                        <a:t>Société</a:t>
                       </a:r>
                     </a:p>
                   </a:txBody>
@@ -14724,7 +13090,7 @@
                           </a:solidFill>
                           <a:latin typeface="Calibri"/>
                         </a:rPr>
-                        <a:t>Problèmes de production ou de livraison</a:t>
+                        <a:t>Détérioration matérielle des marges opérationnelles</a:t>
                       </a:r>
                     </a:p>
                   </a:txBody>
@@ -14747,7 +13113,7 @@
                           </a:solidFill>
                           <a:latin typeface="Calibri"/>
                         </a:rPr>
-                        <a:t>2-3 trimestres</a:t>
+                        <a:t>2-3 trim.</a:t>
                       </a:r>
                     </a:p>
                   </a:txBody>
@@ -15730,7 +14096,7 @@
                 </a:solidFill>
                 <a:latin typeface="Calibri"/>
               </a:rPr>
-              <a:t>Neutre +</a:t>
+              <a:t>Positif</a:t>
             </a:r>
           </a:p>
         </p:txBody>
@@ -15800,7 +14166,7 @@
                 </a:solidFill>
                 <a:latin typeface="Calibri"/>
               </a:rPr>
-              <a:t>Score agrege : +0,035</a:t>
+              <a:t>Score agrege : +0,195</a:t>
             </a:r>
           </a:p>
         </p:txBody>
@@ -16112,7 +14478,7 @@
                 </a:solidFill>
                 <a:latin typeface="Calibri"/>
               </a:rPr>
-              <a:t>49,7 %</a:t>
+              <a:t>43,3 %</a:t>
             </a:r>
           </a:p>
         </p:txBody>
@@ -16303,7 +14669,7 @@
                 </a:solidFill>
                 <a:latin typeface="Calibri"/>
               </a:rPr>
-              <a:t>BUY</a:t>
+              <a:t>HOLD</a:t>
             </a:r>
           </a:p>
         </p:txBody>
@@ -16568,7 +14934,7 @@
                           </a:solidFill>
                           <a:latin typeface="Calibri"/>
                         </a:rPr>
-                        <a:t>7</a:t>
+                        <a:t>13</a:t>
                       </a:r>
                     </a:p>
                   </a:txBody>
@@ -16591,7 +14957,7 @@
                           </a:solidFill>
                           <a:latin typeface="Calibri"/>
                         </a:rPr>
-                        <a:t>+0,269</a:t>
+                        <a:t>+0,433</a:t>
                       </a:r>
                     </a:p>
                   </a:txBody>
@@ -16614,7 +14980,7 @@
                           </a:solidFill>
                           <a:latin typeface="Calibri"/>
                         </a:rPr>
-                        <a:t>Croissance de la demande pour les smartphones, Expansion de l'écosystème d'Apple, Innovation</a:t>
+                        <a:t>Catalyseurs, croissance, résultats</a:t>
                       </a:r>
                     </a:p>
                   </a:txBody>
@@ -16662,7 +15028,7 @@
                           </a:solidFill>
                           <a:latin typeface="Calibri"/>
                         </a:rPr>
-                        <a:t>17</a:t>
+                        <a:t>9</a:t>
                       </a:r>
                     </a:p>
                   </a:txBody>
@@ -16685,7 +15051,7 @@
                           </a:solidFill>
                           <a:latin typeface="Calibri"/>
                         </a:rPr>
-                        <a:t>+0,497</a:t>
+                        <a:t>+0,329</a:t>
                       </a:r>
                     </a:p>
                   </a:txBody>
@@ -16756,7 +15122,7 @@
                           </a:solidFill>
                           <a:latin typeface="Calibri"/>
                         </a:rPr>
-                        <a:t>6</a:t>
+                        <a:t>8</a:t>
                       </a:r>
                     </a:p>
                   </a:txBody>
@@ -16779,7 +15145,7 @@
                           </a:solidFill>
                           <a:latin typeface="Calibri"/>
                         </a:rPr>
-                        <a:t>+0,234</a:t>
+                        <a:t>+0,238</a:t>
                       </a:r>
                     </a:p>
                   </a:txBody>
@@ -16802,7 +15168,7 @@
                           </a:solidFill>
                           <a:latin typeface="Calibri"/>
                         </a:rPr>
-                        <a:t>Concurrence accrue, Risques politiques, Dépendance aux smartphones</a:t>
+                        <a:t>Risques macro, concurrence, dette</a:t>
                       </a:r>
                     </a:p>
                   </a:txBody>
@@ -16847,7 +15213,7 @@
                 </a:solidFill>
                 <a:latin typeface="Calibri"/>
               </a:rPr>
-              <a:t>Le sentiment global de la presse financiere sur AAPL cette semaine est mitige, avec certains titres laissant apparaitre une croissance potentielle pour l'entreprise, notamment en termes d'adoption de ses produits en Europe. Cependant, d'autres titres font etat de defis potentiels pour l'entreprise, tels que la concurrence accrue dans le marché des smartphones et les risques lies aux partenariats avec d'autres entreprises technologiques.</a:t>
+              <a:t>Le sentiment positif (score +0.195) est basé sur 30 articles analysés sur 7 jours. Confiance IA : 43%. Cohérence avec la recommandation HOLD : surveiller.</a:t>
             </a:r>
           </a:p>
         </p:txBody>
@@ -19755,41 +18121,6 @@
           </a:graphicData>
         </a:graphic>
       </p:graphicFrame>
-      <p:sp>
-        <p:nvSpPr>
-          <p:cNvPr id="21" name="TextBox 20"/>
-          <p:cNvSpPr txBox="1"/>
-          <p:nvPr/>
-        </p:nvSpPr>
-        <p:spPr>
-          <a:xfrm>
-            <a:off x="367200" y="3326400"/>
-            <a:ext cx="8413200" cy="1004400"/>
-          </a:xfrm>
-          <a:prstGeom prst="rect">
-            <a:avLst/>
-          </a:prstGeom>
-          <a:noFill/>
-        </p:spPr>
-        <p:txBody>
-          <a:bodyPr wrap="square">
-            <a:spAutoFit/>
-          </a:bodyPr>
-          <a:lstStyle/>
-          <a:p>
-            <a:pPr algn="l"/>
-            <a:r>
-              <a:rPr sz="850" b="0" i="0">
-                <a:solidFill>
-                  <a:srgbClr val="555555"/>
-                </a:solidFill>
-                <a:latin typeface="Calibri"/>
-              </a:rPr>
-              <a:t>La valorisation d'Apple est attractive par rapport à ses pairs, avec un ratio EV/EBITDA inférieur à 25. L'entreprise présente également un multiple de prix sur bénéfice inférieur à 30.</a:t>
-            </a:r>
-          </a:p>
-        </p:txBody>
-      </p:sp>
     </p:spTree>
   </p:cSld>
   <p:clrMapOvr>
@@ -19979,7 +18310,7 @@
             <a:avLst/>
           </a:prstGeom>
           <a:solidFill>
-            <a:srgbClr val="EAF4EF"/>
+            <a:srgbClr val="FDF6E8"/>
           </a:solidFill>
           <a:ln>
             <a:noFill/>
@@ -20022,7 +18353,7 @@
             <a:avLst/>
           </a:prstGeom>
           <a:solidFill>
-            <a:srgbClr val="1A7A4A"/>
+            <a:srgbClr val="B06000"/>
           </a:solidFill>
           <a:ln>
             <a:noFill/>
@@ -20076,11 +18407,11 @@
             <a:r>
               <a:rPr sz="1100" b="1" i="0">
                 <a:solidFill>
-                  <a:srgbClr val="1A7A4A"/>
+                  <a:srgbClr val="B06000"/>
                 </a:solidFill>
                 <a:latin typeface="Calibri"/>
               </a:rPr>
-              <a:t>● BUY</a:t>
+              <a:t>● HOLD</a:t>
             </a:r>
           </a:p>
         </p:txBody>
@@ -20115,7 +18446,7 @@
                 </a:solidFill>
                 <a:latin typeface="Calibri"/>
               </a:rPr>
-              <a:t>Prix cible base : 280 $  ·  Upside : +10,7 %  ·  Bear : 241 $ (-5,0 %)  ·  Bull : 310 $ (+22,4 %)</a:t>
+              <a:t>Prix cible base : — $  ·  Upside : —  ·  Bear : — $ (—)  ·  Bull : — $ (—)</a:t>
             </a:r>
           </a:p>
         </p:txBody>
@@ -20271,7 +18602,7 @@
                 </a:solidFill>
                 <a:latin typeface="Calibri"/>
               </a:rPr>
-              <a:t>Marque forte</a:t>
+              <a:t>—</a:t>
             </a:r>
           </a:p>
         </p:txBody>
@@ -20306,7 +18637,7 @@
                 </a:solidFill>
                 <a:latin typeface="Calibri"/>
               </a:rPr>
-              <a:t>La croissance de la demande pour les smartphones et les ordinateurs portables devrait atteindre 10% d'ici 2027</a:t>
+              <a:t>—</a:t>
             </a:r>
           </a:p>
         </p:txBody>
@@ -20384,7 +18715,7 @@
                 </a:solidFill>
                 <a:latin typeface="Calibri"/>
               </a:rPr>
-              <a:t>Ecosystème intégré</a:t>
+              <a:t>—</a:t>
             </a:r>
           </a:p>
         </p:txBody>
@@ -20419,7 +18750,7 @@
                 </a:solidFill>
                 <a:latin typeface="Calibri"/>
               </a:rPr>
-              <a:t>Les services d'Apple devraient générer 20% des revenus de l'entreprise d'ici 2028</a:t>
+              <a:t>—</a:t>
             </a:r>
           </a:p>
         </p:txBody>
@@ -20497,7 +18828,7 @@
                 </a:solidFill>
                 <a:latin typeface="Calibri"/>
               </a:rPr>
-              <a:t>Innovation</a:t>
+              <a:t>—</a:t>
             </a:r>
           </a:p>
         </p:txBody>
@@ -20532,7 +18863,7 @@
                 </a:solidFill>
                 <a:latin typeface="Calibri"/>
               </a:rPr>
-              <a:t>L'expansion de l'écosystème d'Apple devrait atteindre 500 millions d'utilisateurs actifs d'ici 2029</a:t>
+              <a:t>—</a:t>
             </a:r>
           </a:p>
         </p:txBody>
@@ -20688,7 +19019,7 @@
                 </a:solidFill>
                 <a:latin typeface="Calibri"/>
               </a:rPr>
-              <a:t>Concurrence accrue</a:t>
+              <a:t>—</a:t>
             </a:r>
           </a:p>
         </p:txBody>
@@ -20723,7 +19054,7 @@
                 </a:solidFill>
                 <a:latin typeface="Calibri"/>
               </a:rPr>
-              <a:t>Concurrence accrue</a:t>
+              <a:t>—</a:t>
             </a:r>
           </a:p>
         </p:txBody>
@@ -20801,7 +19132,7 @@
                 </a:solidFill>
                 <a:latin typeface="Calibri"/>
               </a:rPr>
-              <a:t>Dépendance aux smartphones</a:t>
+              <a:t>—</a:t>
             </a:r>
           </a:p>
         </p:txBody>
@@ -20836,7 +19167,7 @@
                 </a:solidFill>
                 <a:latin typeface="Calibri"/>
               </a:rPr>
-              <a:t>Risques politiques</a:t>
+              <a:t>—</a:t>
             </a:r>
           </a:p>
         </p:txBody>
@@ -20914,7 +19245,7 @@
                 </a:solidFill>
                 <a:latin typeface="Calibri"/>
               </a:rPr>
-              <a:t>Risques politiques</a:t>
+              <a:t>—</a:t>
             </a:r>
           </a:p>
         </p:txBody>
@@ -20949,7 +19280,7 @@
                 </a:solidFill>
                 <a:latin typeface="Calibri"/>
               </a:rPr>
-              <a:t>Dépendance aux smartphones</a:t>
+              <a:t>—</a:t>
             </a:r>
           </a:p>
         </p:txBody>
@@ -21156,7 +19487,7 @@
                 </a:solidFill>
                 <a:latin typeface="Calibri"/>
               </a:rPr>
-              <a:t>26,1x</a:t>
+              <a:t>26,2x</a:t>
             </a:r>
           </a:p>
         </p:txBody>
@@ -21226,7 +19557,7 @@
                 </a:solidFill>
                 <a:latin typeface="Calibri"/>
               </a:rPr>
-              <a:t>vs 20,5x médiane peers</a:t>
+              <a:t>vs — médiane peers</a:t>
             </a:r>
           </a:p>
         </p:txBody>
@@ -21538,7 +19869,7 @@
                 </a:solidFill>
                 <a:latin typeface="Calibri"/>
               </a:rPr>
-              <a:t>280 $</a:t>
+              <a:t>— $</a:t>
             </a:r>
           </a:p>
         </p:txBody>
@@ -21608,7 +19939,7 @@
                 </a:solidFill>
                 <a:latin typeface="Calibri"/>
               </a:rPr>
-              <a:t>Upside de +10,7 % vs cours</a:t>
+              <a:t>Upside de — vs cours</a:t>
             </a:r>
           </a:p>
         </p:txBody>
@@ -21729,7 +20060,7 @@
                 </a:solidFill>
                 <a:latin typeface="Calibri"/>
               </a:rPr>
-              <a:t>+0,035</a:t>
+              <a:t>+0,195</a:t>
             </a:r>
           </a:p>
         </p:txBody>
@@ -21799,7 +20130,7 @@
                 </a:solidFill>
                 <a:latin typeface="Calibri"/>
               </a:rPr>
-              <a:t>Neutre +  ·  30 articles</a:t>
+              <a:t>Positif  ·  30 articles</a:t>
             </a:r>
           </a:p>
         </p:txBody>
@@ -22519,7 +20850,7 @@
                 </a:solidFill>
                 <a:latin typeface="Calibri"/>
               </a:rPr>
-              <a:t>253,38 $</a:t>
+              <a:t>253,68 $</a:t>
             </a:r>
           </a:p>
         </p:txBody>
@@ -22987,7 +21318,7 @@
                 </a:solidFill>
                 <a:latin typeface="Calibri"/>
               </a:rPr>
-              <a:t>+19,7 %</a:t>
+              <a:t>+19,9 %</a:t>
             </a:r>
           </a:p>
         </p:txBody>
@@ -24016,8 +22347,8 @@
         </p:nvSpPr>
         <p:spPr>
           <a:xfrm>
-            <a:off x="7854300" y="2842183"/>
-            <a:ext cx="498636" cy="1053016"/>
+            <a:off x="7854300" y="2836118"/>
+            <a:ext cx="498636" cy="1059081"/>
           </a:xfrm>
           <a:prstGeom prst="rect">
             <a:avLst/>
@@ -24088,14 +22419,57 @@
       </p:sp>
       <p:sp>
         <p:nvSpPr>
-          <p:cNvPr id="60" name="TextBox 59"/>
+          <p:cNvPr id="60" name="Rectangle 59"/>
+          <p:cNvSpPr/>
+          <p:nvPr/>
+        </p:nvSpPr>
+        <p:spPr>
+          <a:xfrm>
+            <a:off x="601200" y="3823200"/>
+            <a:ext cx="8179200" cy="7200"/>
+          </a:xfrm>
+          <a:prstGeom prst="rect">
+            <a:avLst/>
+          </a:prstGeom>
+          <a:solidFill>
+            <a:srgbClr val="D0D5DD"/>
+          </a:solidFill>
+          <a:ln>
+            <a:noFill/>
+          </a:ln>
+        </p:spPr>
+        <p:style>
+          <a:lnRef idx="1">
+            <a:schemeClr val="accent1"/>
+          </a:lnRef>
+          <a:fillRef idx="3">
+            <a:schemeClr val="accent1"/>
+          </a:fillRef>
+          <a:effectRef idx="2">
+            <a:schemeClr val="accent1"/>
+          </a:effectRef>
+          <a:fontRef idx="minor">
+            <a:schemeClr val="lt1"/>
+          </a:fontRef>
+        </p:style>
+        <p:txBody>
+          <a:bodyPr rtlCol="0" anchor="ctr"/>
+          <a:lstStyle/>
+          <a:p>
+            <a:pPr algn="ctr"/>
+          </a:p>
+        </p:txBody>
+      </p:sp>
+      <p:sp>
+        <p:nvSpPr>
+          <p:cNvPr id="61" name="TextBox 60"/>
           <p:cNvSpPr txBox="1"/>
           <p:nvPr/>
         </p:nvSpPr>
         <p:spPr>
           <a:xfrm>
-            <a:off x="439200" y="2174400"/>
-            <a:ext cx="1800000" cy="144000"/>
+            <a:off x="367200" y="3751200"/>
+            <a:ext cx="216000" cy="144000"/>
           </a:xfrm>
           <a:prstGeom prst="rect">
             <a:avLst/>
@@ -24110,62 +22484,70 @@
           <a:p>
             <a:pPr algn="l"/>
             <a:r>
-              <a:rPr sz="700" b="0" i="0">
-                <a:solidFill>
-                  <a:srgbClr val="2E5FA3"/>
-                </a:solidFill>
-                <a:latin typeface="Calibri"/>
-              </a:rPr>
-              <a:t>▲ Max : 278,32 $</a:t>
-            </a:r>
-          </a:p>
-        </p:txBody>
-      </p:sp>
-      <p:sp>
-        <p:nvSpPr>
-          <p:cNvPr id="61" name="TextBox 60"/>
-          <p:cNvSpPr txBox="1"/>
-          <p:nvPr/>
-        </p:nvSpPr>
-        <p:spPr>
-          <a:xfrm>
-            <a:off x="439200" y="3643199"/>
-            <a:ext cx="1800000" cy="144000"/>
-          </a:xfrm>
-          <a:prstGeom prst="rect">
-            <a:avLst/>
-          </a:prstGeom>
-          <a:noFill/>
-        </p:spPr>
-        <p:txBody>
-          <a:bodyPr wrap="square">
-            <a:spAutoFit/>
-          </a:bodyPr>
-          <a:lstStyle/>
-          <a:p>
-            <a:pPr algn="l"/>
-            <a:r>
-              <a:rPr sz="700" b="0" i="0">
+              <a:rPr sz="600" b="0" i="0">
                 <a:solidFill>
                   <a:srgbClr val="555555"/>
                 </a:solidFill>
                 <a:latin typeface="Calibri"/>
               </a:rPr>
-              <a:t>▼ Min : 199,98 $</a:t>
-            </a:r>
-          </a:p>
-        </p:txBody>
-      </p:sp>
-      <p:sp>
-        <p:nvSpPr>
-          <p:cNvPr id="62" name="TextBox 61"/>
+              <a:t>199</a:t>
+            </a:r>
+          </a:p>
+        </p:txBody>
+      </p:sp>
+      <p:sp>
+        <p:nvSpPr>
+          <p:cNvPr id="62" name="Rectangle 61"/>
+          <p:cNvSpPr/>
+          <p:nvPr/>
+        </p:nvSpPr>
+        <p:spPr>
+          <a:xfrm>
+            <a:off x="601200" y="3348000"/>
+            <a:ext cx="8179200" cy="7200"/>
+          </a:xfrm>
+          <a:prstGeom prst="rect">
+            <a:avLst/>
+          </a:prstGeom>
+          <a:solidFill>
+            <a:srgbClr val="D0D5DD"/>
+          </a:solidFill>
+          <a:ln>
+            <a:noFill/>
+          </a:ln>
+        </p:spPr>
+        <p:style>
+          <a:lnRef idx="1">
+            <a:schemeClr val="accent1"/>
+          </a:lnRef>
+          <a:fillRef idx="3">
+            <a:schemeClr val="accent1"/>
+          </a:fillRef>
+          <a:effectRef idx="2">
+            <a:schemeClr val="accent1"/>
+          </a:effectRef>
+          <a:fontRef idx="minor">
+            <a:schemeClr val="lt1"/>
+          </a:fontRef>
+        </p:style>
+        <p:txBody>
+          <a:bodyPr rtlCol="0" anchor="ctr"/>
+          <a:lstStyle/>
+          <a:p>
+            <a:pPr algn="ctr"/>
+          </a:p>
+        </p:txBody>
+      </p:sp>
+      <p:sp>
+        <p:nvSpPr>
+          <p:cNvPr id="63" name="TextBox 62"/>
           <p:cNvSpPr txBox="1"/>
           <p:nvPr/>
         </p:nvSpPr>
         <p:spPr>
           <a:xfrm>
-            <a:off x="367200" y="4132800"/>
-            <a:ext cx="8413200" cy="687600"/>
+            <a:off x="367200" y="3276000"/>
+            <a:ext cx="216000" cy="144000"/>
           </a:xfrm>
           <a:prstGeom prst="rect">
             <a:avLst/>
@@ -24180,13 +22562,169 @@
           <a:p>
             <a:pPr algn="l"/>
             <a:r>
-              <a:rPr sz="850" b="0" i="0">
+              <a:rPr sz="600" b="0" i="0">
                 <a:solidFill>
                   <a:srgbClr val="555555"/>
                 </a:solidFill>
                 <a:latin typeface="Calibri"/>
               </a:rPr>
-              <a:t>Apple Inc. presente une opportunité d'investissement attractive avec des perspectives de croissance solides et une position dominante sur le marché. L'entreprise devrait poursuivre sa croissance grâce à ses produits innovants et à son écosystème intégré.</a:t>
+              <a:t>225</a:t>
+            </a:r>
+          </a:p>
+        </p:txBody>
+      </p:sp>
+      <p:sp>
+        <p:nvSpPr>
+          <p:cNvPr id="64" name="Rectangle 63"/>
+          <p:cNvSpPr/>
+          <p:nvPr/>
+        </p:nvSpPr>
+        <p:spPr>
+          <a:xfrm>
+            <a:off x="601200" y="2858400"/>
+            <a:ext cx="8179200" cy="7200"/>
+          </a:xfrm>
+          <a:prstGeom prst="rect">
+            <a:avLst/>
+          </a:prstGeom>
+          <a:solidFill>
+            <a:srgbClr val="D0D5DD"/>
+          </a:solidFill>
+          <a:ln>
+            <a:noFill/>
+          </a:ln>
+        </p:spPr>
+        <p:style>
+          <a:lnRef idx="1">
+            <a:schemeClr val="accent1"/>
+          </a:lnRef>
+          <a:fillRef idx="3">
+            <a:schemeClr val="accent1"/>
+          </a:fillRef>
+          <a:effectRef idx="2">
+            <a:schemeClr val="accent1"/>
+          </a:effectRef>
+          <a:fontRef idx="minor">
+            <a:schemeClr val="lt1"/>
+          </a:fontRef>
+        </p:style>
+        <p:txBody>
+          <a:bodyPr rtlCol="0" anchor="ctr"/>
+          <a:lstStyle/>
+          <a:p>
+            <a:pPr algn="ctr"/>
+          </a:p>
+        </p:txBody>
+      </p:sp>
+      <p:sp>
+        <p:nvSpPr>
+          <p:cNvPr id="65" name="TextBox 64"/>
+          <p:cNvSpPr txBox="1"/>
+          <p:nvPr/>
+        </p:nvSpPr>
+        <p:spPr>
+          <a:xfrm>
+            <a:off x="367200" y="2786399"/>
+            <a:ext cx="216000" cy="144000"/>
+          </a:xfrm>
+          <a:prstGeom prst="rect">
+            <a:avLst/>
+          </a:prstGeom>
+          <a:noFill/>
+        </p:spPr>
+        <p:txBody>
+          <a:bodyPr wrap="square">
+            <a:spAutoFit/>
+          </a:bodyPr>
+          <a:lstStyle/>
+          <a:p>
+            <a:pPr algn="l"/>
+            <a:r>
+              <a:rPr sz="600" b="0" i="0">
+                <a:solidFill>
+                  <a:srgbClr val="555555"/>
+                </a:solidFill>
+                <a:latin typeface="Calibri"/>
+              </a:rPr>
+              <a:t>252</a:t>
+            </a:r>
+          </a:p>
+        </p:txBody>
+      </p:sp>
+      <p:sp>
+        <p:nvSpPr>
+          <p:cNvPr id="66" name="Rectangle 65"/>
+          <p:cNvSpPr/>
+          <p:nvPr/>
+        </p:nvSpPr>
+        <p:spPr>
+          <a:xfrm>
+            <a:off x="601200" y="2383200"/>
+            <a:ext cx="8179200" cy="7200"/>
+          </a:xfrm>
+          <a:prstGeom prst="rect">
+            <a:avLst/>
+          </a:prstGeom>
+          <a:solidFill>
+            <a:srgbClr val="D0D5DD"/>
+          </a:solidFill>
+          <a:ln>
+            <a:noFill/>
+          </a:ln>
+        </p:spPr>
+        <p:style>
+          <a:lnRef idx="1">
+            <a:schemeClr val="accent1"/>
+          </a:lnRef>
+          <a:fillRef idx="3">
+            <a:schemeClr val="accent1"/>
+          </a:fillRef>
+          <a:effectRef idx="2">
+            <a:schemeClr val="accent1"/>
+          </a:effectRef>
+          <a:fontRef idx="minor">
+            <a:schemeClr val="lt1"/>
+          </a:fontRef>
+        </p:style>
+        <p:txBody>
+          <a:bodyPr rtlCol="0" anchor="ctr"/>
+          <a:lstStyle/>
+          <a:p>
+            <a:pPr algn="ctr"/>
+          </a:p>
+        </p:txBody>
+      </p:sp>
+      <p:sp>
+        <p:nvSpPr>
+          <p:cNvPr id="67" name="TextBox 66"/>
+          <p:cNvSpPr txBox="1"/>
+          <p:nvPr/>
+        </p:nvSpPr>
+        <p:spPr>
+          <a:xfrm>
+            <a:off x="367200" y="2311200"/>
+            <a:ext cx="216000" cy="144000"/>
+          </a:xfrm>
+          <a:prstGeom prst="rect">
+            <a:avLst/>
+          </a:prstGeom>
+          <a:noFill/>
+        </p:spPr>
+        <p:txBody>
+          <a:bodyPr wrap="square">
+            <a:spAutoFit/>
+          </a:bodyPr>
+          <a:lstStyle/>
+          <a:p>
+            <a:pPr algn="l"/>
+            <a:r>
+              <a:rPr sz="600" b="0" i="0">
+                <a:solidFill>
+                  <a:srgbClr val="555555"/>
+                </a:solidFill>
+                <a:latin typeface="Calibri"/>
+              </a:rPr>
+              <a:t>278</a:t>
             </a:r>
           </a:p>
         </p:txBody>
@@ -25229,7 +23767,7 @@
                 </a:solidFill>
                 <a:latin typeface="Calibri"/>
               </a:rPr>
-              <a:t>Concurrence accrue  ·  Dépendance aux smartphones</a:t>
+              <a:t>Risques structurels &amp; thèse contraire</a:t>
             </a:r>
           </a:p>
         </p:txBody>
@@ -26463,64 +25001,21 @@
                 </a:solidFill>
                 <a:latin typeface="Calibri"/>
               </a:rPr>
-              <a:t>Apple Inc. est un leader mondial dans la conception, la fabrication et la commercialisation de produits électroniques grand public. L'entreprise est positionnée comme un acteur majeur sur le marché des smartphones et des ordinateurs portables. Ses avantages concurrentiels incluent son écosystème intégré, sa marque forte et son innovante gamme de produits. L'entreprise articule son activité autour de deux segments stratégiques :</a:t>
-            </a:r>
-          </a:p>
-        </p:txBody>
-      </p:sp>
-      <p:sp>
-        <p:nvSpPr>
-          <p:cNvPr id="20" name="Rectangle 19"/>
-          <p:cNvSpPr/>
-          <p:nvPr/>
-        </p:nvSpPr>
-        <p:spPr>
-          <a:xfrm>
-            <a:off x="503999" y="2599200"/>
-            <a:ext cx="64800" cy="64800"/>
-          </a:xfrm>
-          <a:prstGeom prst="rect">
-            <a:avLst/>
-          </a:prstGeom>
-          <a:solidFill>
-            <a:srgbClr val="2E5FA3"/>
-          </a:solidFill>
-          <a:ln>
-            <a:noFill/>
-          </a:ln>
-        </p:spPr>
-        <p:style>
-          <a:lnRef idx="1">
-            <a:schemeClr val="accent1"/>
-          </a:lnRef>
-          <a:fillRef idx="3">
-            <a:schemeClr val="accent1"/>
-          </a:fillRef>
-          <a:effectRef idx="2">
-            <a:schemeClr val="accent1"/>
-          </a:effectRef>
-          <a:fontRef idx="minor">
-            <a:schemeClr val="lt1"/>
-          </a:fontRef>
-        </p:style>
-        <p:txBody>
-          <a:bodyPr rtlCol="0" anchor="ctr"/>
-          <a:lstStyle/>
-          <a:p>
-            <a:pPr algn="ctr"/>
-          </a:p>
-        </p:txBody>
-      </p:sp>
-      <p:sp>
-        <p:nvSpPr>
-          <p:cNvPr id="21" name="TextBox 20"/>
+              <a:t>—</a:t>
+            </a:r>
+          </a:p>
+        </p:txBody>
+      </p:sp>
+      <p:sp>
+        <p:nvSpPr>
+          <p:cNvPr id="20" name="TextBox 19"/>
           <p:cNvSpPr txBox="1"/>
           <p:nvPr/>
         </p:nvSpPr>
         <p:spPr>
           <a:xfrm>
-            <a:off x="619200" y="2556000"/>
-            <a:ext cx="4338000" cy="165600"/>
+            <a:off x="503999" y="2358000"/>
+            <a:ext cx="4662000" cy="183600"/>
           </a:xfrm>
           <a:prstGeom prst="rect">
             <a:avLst/>
@@ -26535,168 +25030,20 @@
           <a:p>
             <a:pPr algn="l"/>
             <a:r>
-              <a:rPr sz="850" b="1" i="0">
+              <a:rPr sz="900" b="1" i="0">
                 <a:solidFill>
-                  <a:srgbClr val="0D0D0D"/>
+                  <a:srgbClr val="1B3A6B"/>
                 </a:solidFill>
                 <a:latin typeface="Calibri"/>
               </a:rPr>
-              <a:t>Produits</a:t>
-            </a:r>
-          </a:p>
-        </p:txBody>
-      </p:sp>
-      <p:sp>
-        <p:nvSpPr>
-          <p:cNvPr id="22" name="TextBox 21"/>
-          <p:cNvSpPr txBox="1"/>
-          <p:nvPr/>
-        </p:nvSpPr>
-        <p:spPr>
-          <a:xfrm>
-            <a:off x="619200" y="2714400"/>
-            <a:ext cx="4338000" cy="144000"/>
-          </a:xfrm>
-          <a:prstGeom prst="rect">
-            <a:avLst/>
-          </a:prstGeom>
-          <a:noFill/>
-        </p:spPr>
-        <p:txBody>
-          <a:bodyPr wrap="square">
-            <a:spAutoFit/>
-          </a:bodyPr>
-          <a:lstStyle/>
-          <a:p>
-            <a:pPr algn="l"/>
-            <a:r>
-              <a:rPr sz="750" b="0" i="1">
-                <a:solidFill>
-                  <a:srgbClr val="555555"/>
-                </a:solidFill>
-                <a:latin typeface="Calibri"/>
-              </a:rPr>
-              <a:t>Les produits d'Apple incluent les iPhone, les Mac, les iPad, les Apple Watch et les AirPods.…</a:t>
-            </a:r>
-          </a:p>
-        </p:txBody>
-      </p:sp>
-      <p:sp>
-        <p:nvSpPr>
-          <p:cNvPr id="23" name="Rectangle 22"/>
-          <p:cNvSpPr/>
-          <p:nvPr/>
-        </p:nvSpPr>
-        <p:spPr>
-          <a:xfrm>
-            <a:off x="503999" y="2941199"/>
-            <a:ext cx="64800" cy="64800"/>
-          </a:xfrm>
-          <a:prstGeom prst="rect">
-            <a:avLst/>
-          </a:prstGeom>
-          <a:solidFill>
-            <a:srgbClr val="2E5FA3"/>
-          </a:solidFill>
-          <a:ln>
-            <a:noFill/>
-          </a:ln>
-        </p:spPr>
-        <p:style>
-          <a:lnRef idx="1">
-            <a:schemeClr val="accent1"/>
-          </a:lnRef>
-          <a:fillRef idx="3">
-            <a:schemeClr val="accent1"/>
-          </a:fillRef>
-          <a:effectRef idx="2">
-            <a:schemeClr val="accent1"/>
-          </a:effectRef>
-          <a:fontRef idx="minor">
-            <a:schemeClr val="lt1"/>
-          </a:fontRef>
-        </p:style>
-        <p:txBody>
-          <a:bodyPr rtlCol="0" anchor="ctr"/>
-          <a:lstStyle/>
-          <a:p>
-            <a:pPr algn="ctr"/>
-          </a:p>
-        </p:txBody>
-      </p:sp>
-      <p:sp>
-        <p:nvSpPr>
-          <p:cNvPr id="24" name="TextBox 23"/>
-          <p:cNvSpPr txBox="1"/>
-          <p:nvPr/>
-        </p:nvSpPr>
-        <p:spPr>
-          <a:xfrm>
-            <a:off x="619200" y="2897999"/>
-            <a:ext cx="4338000" cy="165600"/>
-          </a:xfrm>
-          <a:prstGeom prst="rect">
-            <a:avLst/>
-          </a:prstGeom>
-          <a:noFill/>
-        </p:spPr>
-        <p:txBody>
-          <a:bodyPr wrap="square">
-            <a:spAutoFit/>
-          </a:bodyPr>
-          <a:lstStyle/>
-          <a:p>
-            <a:pPr algn="l"/>
-            <a:r>
-              <a:rPr sz="850" b="1" i="0">
-                <a:solidFill>
-                  <a:srgbClr val="0D0D0D"/>
-                </a:solidFill>
-                <a:latin typeface="Calibri"/>
-              </a:rPr>
-              <a:t>Services</a:t>
-            </a:r>
-          </a:p>
-        </p:txBody>
-      </p:sp>
-      <p:sp>
-        <p:nvSpPr>
-          <p:cNvPr id="25" name="TextBox 24"/>
-          <p:cNvSpPr txBox="1"/>
-          <p:nvPr/>
-        </p:nvSpPr>
-        <p:spPr>
-          <a:xfrm>
-            <a:off x="619200" y="3056399"/>
-            <a:ext cx="4338000" cy="144000"/>
-          </a:xfrm>
-          <a:prstGeom prst="rect">
-            <a:avLst/>
-          </a:prstGeom>
-          <a:noFill/>
-        </p:spPr>
-        <p:txBody>
-          <a:bodyPr wrap="square">
-            <a:spAutoFit/>
-          </a:bodyPr>
-          <a:lstStyle/>
-          <a:p>
-            <a:pPr algn="l"/>
-            <a:r>
-              <a:rPr sz="750" b="0" i="1">
-                <a:solidFill>
-                  <a:srgbClr val="555555"/>
-                </a:solidFill>
-                <a:latin typeface="Calibri"/>
-              </a:rPr>
-              <a:t>Les services d'Apple incluent la musique, les films, les applications et les abonnements.…</a:t>
-            </a:r>
-          </a:p>
-        </p:txBody>
-      </p:sp>
-      <p:sp>
-        <p:nvSpPr>
-          <p:cNvPr id="26" name="Rectangle 25"/>
+              <a:t>Positionnement stratégique</a:t>
+            </a:r>
+          </a:p>
+        </p:txBody>
+      </p:sp>
+      <p:sp>
+        <p:nvSpPr>
+          <p:cNvPr id="21" name="Rectangle 20"/>
           <p:cNvSpPr/>
           <p:nvPr/>
         </p:nvSpPr>
@@ -26739,7 +25086,7 @@
       </p:sp>
       <p:sp>
         <p:nvSpPr>
-          <p:cNvPr id="27" name="Rectangle 26"/>
+          <p:cNvPr id="22" name="Rectangle 21"/>
           <p:cNvSpPr/>
           <p:nvPr/>
         </p:nvSpPr>
@@ -26782,7 +25129,7 @@
       </p:sp>
       <p:sp>
         <p:nvSpPr>
-          <p:cNvPr id="28" name="TextBox 27"/>
+          <p:cNvPr id="23" name="TextBox 22"/>
           <p:cNvSpPr txBox="1"/>
           <p:nvPr/>
         </p:nvSpPr>
@@ -26810,14 +25157,14 @@
                 </a:solidFill>
                 <a:latin typeface="Calibri"/>
               </a:rPr>
-              <a:t>3 719,9 Mds$</a:t>
-            </a:r>
-          </a:p>
-        </p:txBody>
-      </p:sp>
-      <p:sp>
-        <p:nvSpPr>
-          <p:cNvPr id="29" name="TextBox 28"/>
+              <a:t>3 724,3 Mds$</a:t>
+            </a:r>
+          </a:p>
+        </p:txBody>
+      </p:sp>
+      <p:sp>
+        <p:nvSpPr>
+          <p:cNvPr id="24" name="TextBox 23"/>
           <p:cNvSpPr txBox="1"/>
           <p:nvPr/>
         </p:nvSpPr>
@@ -26852,7 +25199,7 @@
       </p:sp>
       <p:sp>
         <p:nvSpPr>
-          <p:cNvPr id="30" name="Rectangle 29"/>
+          <p:cNvPr id="25" name="Rectangle 24"/>
           <p:cNvSpPr/>
           <p:nvPr/>
         </p:nvSpPr>
@@ -26895,7 +25242,7 @@
       </p:sp>
       <p:sp>
         <p:nvSpPr>
-          <p:cNvPr id="31" name="Rectangle 30"/>
+          <p:cNvPr id="26" name="Rectangle 25"/>
           <p:cNvSpPr/>
           <p:nvPr/>
         </p:nvSpPr>
@@ -26938,7 +25285,7 @@
       </p:sp>
       <p:sp>
         <p:nvSpPr>
-          <p:cNvPr id="32" name="TextBox 31"/>
+          <p:cNvPr id="27" name="TextBox 26"/>
           <p:cNvSpPr txBox="1"/>
           <p:nvPr/>
         </p:nvSpPr>
@@ -26973,7 +25320,7 @@
       </p:sp>
       <p:sp>
         <p:nvSpPr>
-          <p:cNvPr id="33" name="TextBox 32"/>
+          <p:cNvPr id="28" name="TextBox 27"/>
           <p:cNvSpPr txBox="1"/>
           <p:nvPr/>
         </p:nvSpPr>
@@ -27008,7 +25355,7 @@
       </p:sp>
       <p:sp>
         <p:nvSpPr>
-          <p:cNvPr id="34" name="Rectangle 33"/>
+          <p:cNvPr id="29" name="Rectangle 28"/>
           <p:cNvSpPr/>
           <p:nvPr/>
         </p:nvSpPr>
@@ -27051,7 +25398,7 @@
       </p:sp>
       <p:sp>
         <p:nvSpPr>
-          <p:cNvPr id="35" name="Rectangle 34"/>
+          <p:cNvPr id="30" name="Rectangle 29"/>
           <p:cNvSpPr/>
           <p:nvPr/>
         </p:nvSpPr>
@@ -27094,7 +25441,7 @@
       </p:sp>
       <p:sp>
         <p:nvSpPr>
-          <p:cNvPr id="36" name="TextBox 35"/>
+          <p:cNvPr id="31" name="TextBox 30"/>
           <p:cNvSpPr txBox="1"/>
           <p:nvPr/>
         </p:nvSpPr>
@@ -27122,14 +25469,14 @@
                 </a:solidFill>
                 <a:latin typeface="Calibri"/>
               </a:rPr>
-              <a:t>253,38 $</a:t>
-            </a:r>
-          </a:p>
-        </p:txBody>
-      </p:sp>
-      <p:sp>
-        <p:nvSpPr>
-          <p:cNvPr id="37" name="TextBox 36"/>
+              <a:t>253,68 $</a:t>
+            </a:r>
+          </a:p>
+        </p:txBody>
+      </p:sp>
+      <p:sp>
+        <p:nvSpPr>
+          <p:cNvPr id="32" name="TextBox 31"/>
           <p:cNvSpPr txBox="1"/>
           <p:nvPr/>
         </p:nvSpPr>
@@ -27164,7 +25511,7 @@
       </p:sp>
       <p:sp>
         <p:nvSpPr>
-          <p:cNvPr id="38" name="Rectangle 37"/>
+          <p:cNvPr id="33" name="Rectangle 32"/>
           <p:cNvSpPr/>
           <p:nvPr/>
         </p:nvSpPr>
@@ -27207,7 +25554,7 @@
       </p:sp>
       <p:sp>
         <p:nvSpPr>
-          <p:cNvPr id="39" name="Rectangle 38"/>
+          <p:cNvPr id="34" name="Rectangle 33"/>
           <p:cNvSpPr/>
           <p:nvPr/>
         </p:nvSpPr>
@@ -27250,7 +25597,7 @@
       </p:sp>
       <p:sp>
         <p:nvSpPr>
-          <p:cNvPr id="40" name="TextBox 39"/>
+          <p:cNvPr id="35" name="TextBox 34"/>
           <p:cNvSpPr txBox="1"/>
           <p:nvPr/>
         </p:nvSpPr>
@@ -27278,14 +25625,14 @@
                 </a:solidFill>
                 <a:latin typeface="Calibri"/>
               </a:rPr>
-              <a:t>26,1x</a:t>
-            </a:r>
-          </a:p>
-        </p:txBody>
-      </p:sp>
-      <p:sp>
-        <p:nvSpPr>
-          <p:cNvPr id="41" name="TextBox 40"/>
+              <a:t>26,2x</a:t>
+            </a:r>
+          </a:p>
+        </p:txBody>
+      </p:sp>
+      <p:sp>
+        <p:nvSpPr>
+          <p:cNvPr id="36" name="TextBox 35"/>
           <p:cNvSpPr txBox="1"/>
           <p:nvPr/>
         </p:nvSpPr>
@@ -27320,7 +25667,7 @@
       </p:sp>
       <p:sp>
         <p:nvSpPr>
-          <p:cNvPr id="42" name="TextBox 41"/>
+          <p:cNvPr id="37" name="TextBox 36"/>
           <p:cNvSpPr txBox="1"/>
           <p:nvPr/>
         </p:nvSpPr>
@@ -27961,7 +26308,7 @@
         <p:spPr>
           <a:xfrm>
             <a:off x="367200" y="961200"/>
-            <a:ext cx="4150800" cy="3520800"/>
+            <a:ext cx="2731199" cy="3520800"/>
           </a:xfrm>
           <a:prstGeom prst="rect">
             <a:avLst/>
@@ -28004,7 +26351,7 @@
         <p:spPr>
           <a:xfrm>
             <a:off x="367200" y="961200"/>
-            <a:ext cx="4150800" cy="54000"/>
+            <a:ext cx="2731199" cy="54000"/>
           </a:xfrm>
           <a:prstGeom prst="rect">
             <a:avLst/>
@@ -28047,7 +26394,7 @@
         <p:spPr>
           <a:xfrm>
             <a:off x="457200" y="1141200"/>
-            <a:ext cx="3970800" cy="640800"/>
+            <a:ext cx="2551199" cy="640800"/>
           </a:xfrm>
           <a:prstGeom prst="rect">
             <a:avLst/>
@@ -28068,7 +26415,7 @@
                 </a:solidFill>
                 <a:latin typeface="Calibri"/>
               </a:rPr>
-              <a:t>1%</a:t>
+              <a:t>—</a:t>
             </a:r>
           </a:p>
         </p:txBody>
@@ -28082,7 +26429,7 @@
         <p:spPr>
           <a:xfrm>
             <a:off x="457200" y="1785600"/>
-            <a:ext cx="3970800" cy="108000"/>
+            <a:ext cx="2551199" cy="108000"/>
           </a:xfrm>
           <a:prstGeom prst="rect">
             <a:avLst/>
@@ -28117,7 +26464,7 @@
         <p:spPr>
           <a:xfrm>
             <a:off x="457200" y="1965600"/>
-            <a:ext cx="3970800" cy="18000"/>
+            <a:ext cx="2551199" cy="18000"/>
           </a:xfrm>
           <a:prstGeom prst="rect">
             <a:avLst/>
@@ -28160,7 +26507,7 @@
         <p:spPr>
           <a:xfrm>
             <a:off x="457200" y="2059200"/>
-            <a:ext cx="3970800" cy="255600"/>
+            <a:ext cx="2551199" cy="255600"/>
           </a:xfrm>
           <a:prstGeom prst="rect">
             <a:avLst/>
@@ -28181,7 +26528,7 @@
                 </a:solidFill>
                 <a:latin typeface="Calibri"/>
               </a:rPr>
-              <a:t>Produits</a:t>
+              <a:t>Core Business</a:t>
             </a:r>
           </a:p>
         </p:txBody>
@@ -28195,7 +26542,7 @@
         <p:spPr>
           <a:xfrm>
             <a:off x="457200" y="2332800"/>
-            <a:ext cx="3970800" cy="1800000"/>
+            <a:ext cx="2551199" cy="2041199"/>
           </a:xfrm>
           <a:prstGeom prst="rect">
             <a:avLst/>
@@ -28216,7 +26563,7 @@
                 </a:solidFill>
                 <a:latin typeface="Calibri"/>
               </a:rPr>
-              <a:t>Les produits d'Apple incluent les iPhone, les Mac, les iPad, les Apple Watch et les AirPods. L'entreprise génère la majorité de ses revenus grâce à la vente de ces produits. Les principaux moteurs de croissance sont la demande croissante pour les…</a:t>
+              <a:t>—</a:t>
             </a:r>
           </a:p>
         </p:txBody>
@@ -28229,8 +26576,8 @@
         </p:nvSpPr>
         <p:spPr>
           <a:xfrm>
-            <a:off x="4626000" y="961200"/>
-            <a:ext cx="4150800" cy="3520800"/>
+            <a:off x="3206400" y="961200"/>
+            <a:ext cx="2731199" cy="3520800"/>
           </a:xfrm>
           <a:prstGeom prst="rect">
             <a:avLst/>
@@ -28272,8 +26619,8 @@
         </p:nvSpPr>
         <p:spPr>
           <a:xfrm>
-            <a:off x="4626000" y="961200"/>
-            <a:ext cx="4150800" cy="54000"/>
+            <a:off x="3206400" y="961200"/>
+            <a:ext cx="2731199" cy="54000"/>
           </a:xfrm>
           <a:prstGeom prst="rect">
             <a:avLst/>
@@ -28315,8 +26662,8 @@
         </p:nvSpPr>
         <p:spPr>
           <a:xfrm>
-            <a:off x="4716000" y="1141200"/>
-            <a:ext cx="3970800" cy="640800"/>
+            <a:off x="3296400" y="1141200"/>
+            <a:ext cx="2551199" cy="640800"/>
           </a:xfrm>
           <a:prstGeom prst="rect">
             <a:avLst/>
@@ -28337,7 +26684,7 @@
                 </a:solidFill>
                 <a:latin typeface="Calibri"/>
               </a:rPr>
-              <a:t>0%</a:t>
+              <a:t>—</a:t>
             </a:r>
           </a:p>
         </p:txBody>
@@ -28350,8 +26697,8 @@
         </p:nvSpPr>
         <p:spPr>
           <a:xfrm>
-            <a:off x="4716000" y="1785600"/>
-            <a:ext cx="3970800" cy="108000"/>
+            <a:off x="3296400" y="1785600"/>
+            <a:ext cx="2551199" cy="108000"/>
           </a:xfrm>
           <a:prstGeom prst="rect">
             <a:avLst/>
@@ -28385,8 +26732,8 @@
         </p:nvSpPr>
         <p:spPr>
           <a:xfrm>
-            <a:off x="4716000" y="1965600"/>
-            <a:ext cx="3970800" cy="18000"/>
+            <a:off x="3296400" y="1965600"/>
+            <a:ext cx="2551199" cy="18000"/>
           </a:xfrm>
           <a:prstGeom prst="rect">
             <a:avLst/>
@@ -28428,8 +26775,8 @@
         </p:nvSpPr>
         <p:spPr>
           <a:xfrm>
-            <a:off x="4716000" y="2059200"/>
-            <a:ext cx="3970800" cy="255600"/>
+            <a:off x="3296400" y="2059200"/>
+            <a:ext cx="2551199" cy="255600"/>
           </a:xfrm>
           <a:prstGeom prst="rect">
             <a:avLst/>
@@ -28450,7 +26797,7 @@
                 </a:solidFill>
                 <a:latin typeface="Calibri"/>
               </a:rPr>
-              <a:t>Services</a:t>
+              <a:t>Growth Driver</a:t>
             </a:r>
           </a:p>
         </p:txBody>
@@ -28463,8 +26810,8 @@
         </p:nvSpPr>
         <p:spPr>
           <a:xfrm>
-            <a:off x="4716000" y="2332800"/>
-            <a:ext cx="3970800" cy="1800000"/>
+            <a:off x="3296400" y="2332800"/>
+            <a:ext cx="2551199" cy="2041199"/>
           </a:xfrm>
           <a:prstGeom prst="rect">
             <a:avLst/>
@@ -28485,7 +26832,276 @@
                 </a:solidFill>
                 <a:latin typeface="Calibri"/>
               </a:rPr>
-              <a:t>Les services d'Apple incluent la musique, les films, les applications et les abonnements. L'entreprise cherche à diversifier ses sources de revenus en développant ses services. Les moteurs de croissance incluent la croissance du marché des services…</a:t>
+              <a:t>—</a:t>
+            </a:r>
+          </a:p>
+        </p:txBody>
+      </p:sp>
+      <p:sp>
+        <p:nvSpPr>
+          <p:cNvPr id="31" name="Rectangle 30"/>
+          <p:cNvSpPr/>
+          <p:nvPr/>
+        </p:nvSpPr>
+        <p:spPr>
+          <a:xfrm>
+            <a:off x="6045600" y="961200"/>
+            <a:ext cx="2731199" cy="3520800"/>
+          </a:xfrm>
+          <a:prstGeom prst="rect">
+            <a:avLst/>
+          </a:prstGeom>
+          <a:solidFill>
+            <a:srgbClr val="F7F8FA"/>
+          </a:solidFill>
+          <a:ln>
+            <a:noFill/>
+          </a:ln>
+        </p:spPr>
+        <p:style>
+          <a:lnRef idx="1">
+            <a:schemeClr val="accent1"/>
+          </a:lnRef>
+          <a:fillRef idx="3">
+            <a:schemeClr val="accent1"/>
+          </a:fillRef>
+          <a:effectRef idx="2">
+            <a:schemeClr val="accent1"/>
+          </a:effectRef>
+          <a:fontRef idx="minor">
+            <a:schemeClr val="lt1"/>
+          </a:fontRef>
+        </p:style>
+        <p:txBody>
+          <a:bodyPr rtlCol="0" anchor="ctr"/>
+          <a:lstStyle/>
+          <a:p>
+            <a:pPr algn="ctr"/>
+          </a:p>
+        </p:txBody>
+      </p:sp>
+      <p:sp>
+        <p:nvSpPr>
+          <p:cNvPr id="32" name="Rectangle 31"/>
+          <p:cNvSpPr/>
+          <p:nvPr/>
+        </p:nvSpPr>
+        <p:spPr>
+          <a:xfrm>
+            <a:off x="6045600" y="961200"/>
+            <a:ext cx="2731199" cy="54000"/>
+          </a:xfrm>
+          <a:prstGeom prst="rect">
+            <a:avLst/>
+          </a:prstGeom>
+          <a:solidFill>
+            <a:srgbClr val="888888"/>
+          </a:solidFill>
+          <a:ln>
+            <a:noFill/>
+          </a:ln>
+        </p:spPr>
+        <p:style>
+          <a:lnRef idx="1">
+            <a:schemeClr val="accent1"/>
+          </a:lnRef>
+          <a:fillRef idx="3">
+            <a:schemeClr val="accent1"/>
+          </a:fillRef>
+          <a:effectRef idx="2">
+            <a:schemeClr val="accent1"/>
+          </a:effectRef>
+          <a:fontRef idx="minor">
+            <a:schemeClr val="lt1"/>
+          </a:fontRef>
+        </p:style>
+        <p:txBody>
+          <a:bodyPr rtlCol="0" anchor="ctr"/>
+          <a:lstStyle/>
+          <a:p>
+            <a:pPr algn="ctr"/>
+          </a:p>
+        </p:txBody>
+      </p:sp>
+      <p:sp>
+        <p:nvSpPr>
+          <p:cNvPr id="33" name="TextBox 32"/>
+          <p:cNvSpPr txBox="1"/>
+          <p:nvPr/>
+        </p:nvSpPr>
+        <p:spPr>
+          <a:xfrm>
+            <a:off x="6135600" y="1141200"/>
+            <a:ext cx="2551199" cy="640800"/>
+          </a:xfrm>
+          <a:prstGeom prst="rect">
+            <a:avLst/>
+          </a:prstGeom>
+          <a:noFill/>
+        </p:spPr>
+        <p:txBody>
+          <a:bodyPr wrap="square">
+            <a:spAutoFit/>
+          </a:bodyPr>
+          <a:lstStyle/>
+          <a:p>
+            <a:pPr algn="l"/>
+            <a:r>
+              <a:rPr sz="2200" b="1" i="0">
+                <a:solidFill>
+                  <a:srgbClr val="888888"/>
+                </a:solidFill>
+                <a:latin typeface="Calibri"/>
+              </a:rPr>
+              <a:t>—</a:t>
+            </a:r>
+          </a:p>
+        </p:txBody>
+      </p:sp>
+      <p:sp>
+        <p:nvSpPr>
+          <p:cNvPr id="34" name="TextBox 33"/>
+          <p:cNvSpPr txBox="1"/>
+          <p:nvPr/>
+        </p:nvSpPr>
+        <p:spPr>
+          <a:xfrm>
+            <a:off x="6135600" y="1785600"/>
+            <a:ext cx="2551199" cy="108000"/>
+          </a:xfrm>
+          <a:prstGeom prst="rect">
+            <a:avLst/>
+          </a:prstGeom>
+          <a:noFill/>
+        </p:spPr>
+        <p:txBody>
+          <a:bodyPr wrap="square">
+            <a:spAutoFit/>
+          </a:bodyPr>
+          <a:lstStyle/>
+          <a:p>
+            <a:pPr algn="l"/>
+            <a:r>
+              <a:rPr sz="900" b="0" i="0">
+                <a:solidFill>
+                  <a:srgbClr val="555555"/>
+                </a:solidFill>
+                <a:latin typeface="Calibri"/>
+              </a:rPr>
+              <a:t>du CA</a:t>
+            </a:r>
+          </a:p>
+        </p:txBody>
+      </p:sp>
+      <p:sp>
+        <p:nvSpPr>
+          <p:cNvPr id="35" name="Rectangle 34"/>
+          <p:cNvSpPr/>
+          <p:nvPr/>
+        </p:nvSpPr>
+        <p:spPr>
+          <a:xfrm>
+            <a:off x="6135600" y="1965600"/>
+            <a:ext cx="2551199" cy="18000"/>
+          </a:xfrm>
+          <a:prstGeom prst="rect">
+            <a:avLst/>
+          </a:prstGeom>
+          <a:solidFill>
+            <a:srgbClr val="888888"/>
+          </a:solidFill>
+          <a:ln>
+            <a:noFill/>
+          </a:ln>
+        </p:spPr>
+        <p:style>
+          <a:lnRef idx="1">
+            <a:schemeClr val="accent1"/>
+          </a:lnRef>
+          <a:fillRef idx="3">
+            <a:schemeClr val="accent1"/>
+          </a:fillRef>
+          <a:effectRef idx="2">
+            <a:schemeClr val="accent1"/>
+          </a:effectRef>
+          <a:fontRef idx="minor">
+            <a:schemeClr val="lt1"/>
+          </a:fontRef>
+        </p:style>
+        <p:txBody>
+          <a:bodyPr rtlCol="0" anchor="ctr"/>
+          <a:lstStyle/>
+          <a:p>
+            <a:pPr algn="ctr"/>
+          </a:p>
+        </p:txBody>
+      </p:sp>
+      <p:sp>
+        <p:nvSpPr>
+          <p:cNvPr id="36" name="TextBox 35"/>
+          <p:cNvSpPr txBox="1"/>
+          <p:nvPr/>
+        </p:nvSpPr>
+        <p:spPr>
+          <a:xfrm>
+            <a:off x="6135600" y="2059200"/>
+            <a:ext cx="2551199" cy="255600"/>
+          </a:xfrm>
+          <a:prstGeom prst="rect">
+            <a:avLst/>
+          </a:prstGeom>
+          <a:noFill/>
+        </p:spPr>
+        <p:txBody>
+          <a:bodyPr wrap="square">
+            <a:spAutoFit/>
+          </a:bodyPr>
+          <a:lstStyle/>
+          <a:p>
+            <a:pPr algn="l"/>
+            <a:r>
+              <a:rPr sz="1000" b="1" i="0">
+                <a:solidFill>
+                  <a:srgbClr val="1B3A6B"/>
+                </a:solidFill>
+                <a:latin typeface="Calibri"/>
+              </a:rPr>
+              <a:t>International</a:t>
+            </a:r>
+          </a:p>
+        </p:txBody>
+      </p:sp>
+      <p:sp>
+        <p:nvSpPr>
+          <p:cNvPr id="37" name="TextBox 36"/>
+          <p:cNvSpPr txBox="1"/>
+          <p:nvPr/>
+        </p:nvSpPr>
+        <p:spPr>
+          <a:xfrm>
+            <a:off x="6135600" y="2332800"/>
+            <a:ext cx="2551199" cy="2041199"/>
+          </a:xfrm>
+          <a:prstGeom prst="rect">
+            <a:avLst/>
+          </a:prstGeom>
+          <a:noFill/>
+        </p:spPr>
+        <p:txBody>
+          <a:bodyPr wrap="square">
+            <a:spAutoFit/>
+          </a:bodyPr>
+          <a:lstStyle/>
+          <a:p>
+            <a:pPr algn="l"/>
+            <a:r>
+              <a:rPr sz="800" b="0" i="0">
+                <a:solidFill>
+                  <a:srgbClr val="555555"/>
+                </a:solidFill>
+                <a:latin typeface="Calibri"/>
+              </a:rPr>
+              <a:t>—</a:t>
             </a:r>
           </a:p>
         </p:txBody>
@@ -29337,7 +27953,7 @@
                 </a:solidFill>
                 <a:latin typeface="Calibri"/>
               </a:rPr>
-              <a:t>USD millions  ·  2021–2027F</a:t>
+              <a:t>USD millions  ·  2021–2025</a:t>
             </a:r>
           </a:p>
         </p:txBody>
@@ -29352,7 +27968,7 @@
         </p:nvGraphicFramePr>
         <p:xfrm>
           <a:off x="367200" y="914400"/>
-          <a:ext cx="8413196" cy="1980000"/>
+          <a:ext cx="8413200" cy="1980000"/>
         </p:xfrm>
         <a:graphic>
           <a:graphicData uri="http://schemas.openxmlformats.org/drawingml/2006/table">
@@ -29362,11 +27978,9 @@
               </a:tblPr>
               <a:tblGrid>
                 <a:gridCol w="2355696"/>
-                <a:gridCol w="1211500"/>
-                <a:gridCol w="1211500"/>
-                <a:gridCol w="1211500"/>
-                <a:gridCol w="1211500"/>
-                <a:gridCol w="1211500"/>
+                <a:gridCol w="2019168"/>
+                <a:gridCol w="2019168"/>
+                <a:gridCol w="2019168"/>
               </a:tblGrid>
               <a:tr h="220000">
                 <a:tc>
@@ -29452,52 +28066,6 @@
                           <a:latin typeface="Calibri"/>
                         </a:rPr>
                         <a:t>2025</a:t>
-                      </a:r>
-                    </a:p>
-                  </a:txBody>
-                  <a:tcPr>
-                    <a:solidFill>
-                      <a:srgbClr val="1B3A6B"/>
-                    </a:solidFill>
-                  </a:tcPr>
-                </a:tc>
-                <a:tc>
-                  <a:txBody>
-                    <a:bodyPr/>
-                    <a:lstStyle/>
-                    <a:p>
-                      <a:pPr algn="ctr"/>
-                      <a:r>
-                        <a:rPr sz="800" b="1" i="0">
-                          <a:solidFill>
-                            <a:srgbClr val="FFFFFF"/>
-                          </a:solidFill>
-                          <a:latin typeface="Calibri"/>
-                        </a:rPr>
-                        <a:t>2026F</a:t>
-                      </a:r>
-                    </a:p>
-                  </a:txBody>
-                  <a:tcPr>
-                    <a:solidFill>
-                      <a:srgbClr val="1B3A6B"/>
-                    </a:solidFill>
-                  </a:tcPr>
-                </a:tc>
-                <a:tc>
-                  <a:txBody>
-                    <a:bodyPr/>
-                    <a:lstStyle/>
-                    <a:p>
-                      <a:pPr algn="ctr"/>
-                      <a:r>
-                        <a:rPr sz="800" b="1" i="0">
-                          <a:solidFill>
-                            <a:srgbClr val="FFFFFF"/>
-                          </a:solidFill>
-                          <a:latin typeface="Calibri"/>
-                        </a:rPr>
-                        <a:t>2027F</a:t>
                       </a:r>
                     </a:p>
                   </a:txBody>
@@ -29601,52 +28169,6 @@
                     </a:solidFill>
                   </a:tcPr>
                 </a:tc>
-                <a:tc>
-                  <a:txBody>
-                    <a:bodyPr/>
-                    <a:lstStyle/>
-                    <a:p>
-                      <a:pPr algn="ctr"/>
-                      <a:r>
-                        <a:rPr sz="800" b="1" i="0">
-                          <a:solidFill>
-                            <a:srgbClr val="0D0D0D"/>
-                          </a:solidFill>
-                          <a:latin typeface="Calibri"/>
-                        </a:rPr>
-                        <a:t>437,2</a:t>
-                      </a:r>
-                    </a:p>
-                  </a:txBody>
-                  <a:tcPr>
-                    <a:solidFill>
-                      <a:srgbClr val="FFFFFF"/>
-                    </a:solidFill>
-                  </a:tcPr>
-                </a:tc>
-                <a:tc>
-                  <a:txBody>
-                    <a:bodyPr/>
-                    <a:lstStyle/>
-                    <a:p>
-                      <a:pPr algn="ctr"/>
-                      <a:r>
-                        <a:rPr sz="800" b="1" i="0">
-                          <a:solidFill>
-                            <a:srgbClr val="0D0D0D"/>
-                          </a:solidFill>
-                          <a:latin typeface="Calibri"/>
-                        </a:rPr>
-                        <a:t>468,4</a:t>
-                      </a:r>
-                    </a:p>
-                  </a:txBody>
-                  <a:tcPr>
-                    <a:solidFill>
-                      <a:srgbClr val="FFFFFF"/>
-                    </a:solidFill>
-                  </a:tcPr>
-                </a:tc>
               </a:tr>
               <a:tr h="220000">
                 <a:tc>
@@ -29738,52 +28260,6 @@
                   <a:tcPr>
                     <a:solidFill>
                       <a:srgbClr val="DDE8F5"/>
-                    </a:solidFill>
-                  </a:tcPr>
-                </a:tc>
-                <a:tc>
-                  <a:txBody>
-                    <a:bodyPr/>
-                    <a:lstStyle/>
-                    <a:p>
-                      <a:pPr algn="ctr"/>
-                      <a:r>
-                        <a:rPr sz="750" b="0" i="1">
-                          <a:solidFill>
-                            <a:srgbClr val="555555"/>
-                          </a:solidFill>
-                          <a:latin typeface="Calibri"/>
-                        </a:rPr>
-                        <a:t>+5,0 %</a:t>
-                      </a:r>
-                    </a:p>
-                  </a:txBody>
-                  <a:tcPr>
-                    <a:solidFill>
-                      <a:srgbClr val="F7F8FA"/>
-                    </a:solidFill>
-                  </a:tcPr>
-                </a:tc>
-                <a:tc>
-                  <a:txBody>
-                    <a:bodyPr/>
-                    <a:lstStyle/>
-                    <a:p>
-                      <a:pPr algn="ctr"/>
-                      <a:r>
-                        <a:rPr sz="750" b="0" i="1">
-                          <a:solidFill>
-                            <a:srgbClr val="555555"/>
-                          </a:solidFill>
-                          <a:latin typeface="Calibri"/>
-                        </a:rPr>
-                        <a:t>+7,0 %</a:t>
-                      </a:r>
-                    </a:p>
-                  </a:txBody>
-                  <a:tcPr>
-                    <a:solidFill>
-                      <a:srgbClr val="F7F8FA"/>
                     </a:solidFill>
                   </a:tcPr>
                 </a:tc>
@@ -29881,52 +28357,6 @@
                     </a:solidFill>
                   </a:tcPr>
                 </a:tc>
-                <a:tc>
-                  <a:txBody>
-                    <a:bodyPr/>
-                    <a:lstStyle/>
-                    <a:p>
-                      <a:pPr algn="ctr"/>
-                      <a:r>
-                        <a:rPr sz="800" b="1" i="0">
-                          <a:solidFill>
-                            <a:srgbClr val="0D0D0D"/>
-                          </a:solidFill>
-                          <a:latin typeface="Calibri"/>
-                        </a:rPr>
-                        <a:t>205,5</a:t>
-                      </a:r>
-                    </a:p>
-                  </a:txBody>
-                  <a:tcPr>
-                    <a:solidFill>
-                      <a:srgbClr val="FFFFFF"/>
-                    </a:solidFill>
-                  </a:tcPr>
-                </a:tc>
-                <a:tc>
-                  <a:txBody>
-                    <a:bodyPr/>
-                    <a:lstStyle/>
-                    <a:p>
-                      <a:pPr algn="ctr"/>
-                      <a:r>
-                        <a:rPr sz="800" b="1" i="0">
-                          <a:solidFill>
-                            <a:srgbClr val="0D0D0D"/>
-                          </a:solidFill>
-                          <a:latin typeface="Calibri"/>
-                        </a:rPr>
-                        <a:t>224,8</a:t>
-                      </a:r>
-                    </a:p>
-                  </a:txBody>
-                  <a:tcPr>
-                    <a:solidFill>
-                      <a:srgbClr val="FFFFFF"/>
-                    </a:solidFill>
-                  </a:tcPr>
-                </a:tc>
               </a:tr>
               <a:tr h="220000">
                 <a:tc>
@@ -30018,52 +28448,6 @@
                   <a:tcPr>
                     <a:solidFill>
                       <a:srgbClr val="DDE8F5"/>
-                    </a:solidFill>
-                  </a:tcPr>
-                </a:tc>
-                <a:tc>
-                  <a:txBody>
-                    <a:bodyPr/>
-                    <a:lstStyle/>
-                    <a:p>
-                      <a:pPr algn="ctr"/>
-                      <a:r>
-                        <a:rPr sz="750" b="0" i="1">
-                          <a:solidFill>
-                            <a:srgbClr val="555555"/>
-                          </a:solidFill>
-                          <a:latin typeface="Calibri"/>
-                        </a:rPr>
-                        <a:t>47,0 %</a:t>
-                      </a:r>
-                    </a:p>
-                  </a:txBody>
-                  <a:tcPr>
-                    <a:solidFill>
-                      <a:srgbClr val="F7F8FA"/>
-                    </a:solidFill>
-                  </a:tcPr>
-                </a:tc>
-                <a:tc>
-                  <a:txBody>
-                    <a:bodyPr/>
-                    <a:lstStyle/>
-                    <a:p>
-                      <a:pPr algn="ctr"/>
-                      <a:r>
-                        <a:rPr sz="750" b="0" i="1">
-                          <a:solidFill>
-                            <a:srgbClr val="555555"/>
-                          </a:solidFill>
-                          <a:latin typeface="Calibri"/>
-                        </a:rPr>
-                        <a:t>48,0 %</a:t>
-                      </a:r>
-                    </a:p>
-                  </a:txBody>
-                  <a:tcPr>
-                    <a:solidFill>
-                      <a:srgbClr val="F7F8FA"/>
                     </a:solidFill>
                   </a:tcPr>
                 </a:tc>
@@ -30161,52 +28545,6 @@
                     </a:solidFill>
                   </a:tcPr>
                 </a:tc>
-                <a:tc>
-                  <a:txBody>
-                    <a:bodyPr/>
-                    <a:lstStyle/>
-                    <a:p>
-                      <a:pPr algn="ctr"/>
-                      <a:r>
-                        <a:rPr sz="800" b="1" i="0">
-                          <a:solidFill>
-                            <a:srgbClr val="0D0D0D"/>
-                          </a:solidFill>
-                          <a:latin typeface="Calibri"/>
-                        </a:rPr>
-                        <a:t>157,8</a:t>
-                      </a:r>
-                    </a:p>
-                  </a:txBody>
-                  <a:tcPr>
-                    <a:solidFill>
-                      <a:srgbClr val="FFFFFF"/>
-                    </a:solidFill>
-                  </a:tcPr>
-                </a:tc>
-                <a:tc>
-                  <a:txBody>
-                    <a:bodyPr/>
-                    <a:lstStyle/>
-                    <a:p>
-                      <a:pPr algn="ctr"/>
-                      <a:r>
-                        <a:rPr sz="800" b="1" i="0">
-                          <a:solidFill>
-                            <a:srgbClr val="0D0D0D"/>
-                          </a:solidFill>
-                          <a:latin typeface="Calibri"/>
-                        </a:rPr>
-                        <a:t>173,2</a:t>
-                      </a:r>
-                    </a:p>
-                  </a:txBody>
-                  <a:tcPr>
-                    <a:solidFill>
-                      <a:srgbClr val="FFFFFF"/>
-                    </a:solidFill>
-                  </a:tcPr>
-                </a:tc>
               </a:tr>
               <a:tr h="220000">
                 <a:tc>
@@ -30298,52 +28636,6 @@
                   <a:tcPr>
                     <a:solidFill>
                       <a:srgbClr val="DDE8F5"/>
-                    </a:solidFill>
-                  </a:tcPr>
-                </a:tc>
-                <a:tc>
-                  <a:txBody>
-                    <a:bodyPr/>
-                    <a:lstStyle/>
-                    <a:p>
-                      <a:pPr algn="ctr"/>
-                      <a:r>
-                        <a:rPr sz="750" b="0" i="1">
-                          <a:solidFill>
-                            <a:srgbClr val="555555"/>
-                          </a:solidFill>
-                          <a:latin typeface="Calibri"/>
-                        </a:rPr>
-                        <a:t>36,0 %</a:t>
-                      </a:r>
-                    </a:p>
-                  </a:txBody>
-                  <a:tcPr>
-                    <a:solidFill>
-                      <a:srgbClr val="F7F8FA"/>
-                    </a:solidFill>
-                  </a:tcPr>
-                </a:tc>
-                <a:tc>
-                  <a:txBody>
-                    <a:bodyPr/>
-                    <a:lstStyle/>
-                    <a:p>
-                      <a:pPr algn="ctr"/>
-                      <a:r>
-                        <a:rPr sz="750" b="0" i="1">
-                          <a:solidFill>
-                            <a:srgbClr val="555555"/>
-                          </a:solidFill>
-                          <a:latin typeface="Calibri"/>
-                        </a:rPr>
-                        <a:t>37,0 %</a:t>
-                      </a:r>
-                    </a:p>
-                  </a:txBody>
-                  <a:tcPr>
-                    <a:solidFill>
-                      <a:srgbClr val="F7F8FA"/>
                     </a:solidFill>
                   </a:tcPr>
                 </a:tc>
@@ -30441,52 +28733,6 @@
                     </a:solidFill>
                   </a:tcPr>
                 </a:tc>
-                <a:tc>
-                  <a:txBody>
-                    <a:bodyPr/>
-                    <a:lstStyle/>
-                    <a:p>
-                      <a:pPr algn="ctr"/>
-                      <a:r>
-                        <a:rPr sz="800" b="1" i="0">
-                          <a:solidFill>
-                            <a:srgbClr val="0D0D0D"/>
-                          </a:solidFill>
-                          <a:latin typeface="Calibri"/>
-                        </a:rPr>
-                        <a:t>114,8</a:t>
-                      </a:r>
-                    </a:p>
-                  </a:txBody>
-                  <a:tcPr>
-                    <a:solidFill>
-                      <a:srgbClr val="FFFFFF"/>
-                    </a:solidFill>
-                  </a:tcPr>
-                </a:tc>
-                <a:tc>
-                  <a:txBody>
-                    <a:bodyPr/>
-                    <a:lstStyle/>
-                    <a:p>
-                      <a:pPr algn="ctr"/>
-                      <a:r>
-                        <a:rPr sz="800" b="1" i="0">
-                          <a:solidFill>
-                            <a:srgbClr val="0D0D0D"/>
-                          </a:solidFill>
-                          <a:latin typeface="Calibri"/>
-                        </a:rPr>
-                        <a:t>124,9</a:t>
-                      </a:r>
-                    </a:p>
-                  </a:txBody>
-                  <a:tcPr>
-                    <a:solidFill>
-                      <a:srgbClr val="FFFFFF"/>
-                    </a:solidFill>
-                  </a:tcPr>
-                </a:tc>
               </a:tr>
               <a:tr h="220000">
                 <a:tc>
@@ -30581,92 +28827,11 @@
                     </a:solidFill>
                   </a:tcPr>
                 </a:tc>
-                <a:tc>
-                  <a:txBody>
-                    <a:bodyPr/>
-                    <a:lstStyle/>
-                    <a:p>
-                      <a:pPr algn="ctr"/>
-                      <a:r>
-                        <a:rPr sz="750" b="0" i="1">
-                          <a:solidFill>
-                            <a:srgbClr val="555555"/>
-                          </a:solidFill>
-                          <a:latin typeface="Calibri"/>
-                        </a:rPr>
-                        <a:t>26,0 %</a:t>
-                      </a:r>
-                    </a:p>
-                  </a:txBody>
-                  <a:tcPr>
-                    <a:solidFill>
-                      <a:srgbClr val="F7F8FA"/>
-                    </a:solidFill>
-                  </a:tcPr>
-                </a:tc>
-                <a:tc>
-                  <a:txBody>
-                    <a:bodyPr/>
-                    <a:lstStyle/>
-                    <a:p>
-                      <a:pPr algn="ctr"/>
-                      <a:r>
-                        <a:rPr sz="750" b="0" i="1">
-                          <a:solidFill>
-                            <a:srgbClr val="555555"/>
-                          </a:solidFill>
-                          <a:latin typeface="Calibri"/>
-                        </a:rPr>
-                        <a:t>27,0 %</a:t>
-                      </a:r>
-                    </a:p>
-                  </a:txBody>
-                  <a:tcPr>
-                    <a:solidFill>
-                      <a:srgbClr val="F7F8FA"/>
-                    </a:solidFill>
-                  </a:tcPr>
-                </a:tc>
               </a:tr>
             </a:tbl>
           </a:graphicData>
         </a:graphic>
       </p:graphicFrame>
-      <p:sp>
-        <p:nvSpPr>
-          <p:cNvPr id="18" name="TextBox 17"/>
-          <p:cNvSpPr txBox="1"/>
-          <p:nvPr/>
-        </p:nvSpPr>
-        <p:spPr>
-          <a:xfrm>
-            <a:off x="367200" y="3218400"/>
-            <a:ext cx="8413200" cy="1224000"/>
-          </a:xfrm>
-          <a:prstGeom prst="rect">
-            <a:avLst/>
-          </a:prstGeom>
-          <a:noFill/>
-        </p:spPr>
-        <p:txBody>
-          <a:bodyPr wrap="square">
-            <a:spAutoFit/>
-          </a:bodyPr>
-          <a:lstStyle/>
-          <a:p>
-            <a:pPr algn="l"/>
-            <a:r>
-              <a:rPr sz="850" b="0" i="0">
-                <a:solidFill>
-                  <a:srgbClr val="555555"/>
-                </a:solidFill>
-                <a:latin typeface="Calibri"/>
-              </a:rPr>
-              <a:t>Les revenus d'Apple devraient augmenter de 5% en 2026 et de 7% en 2027, grâce à la croissance de la demande pour les smartphones et les ordinateurs portables.</a:t>
-            </a:r>
-          </a:p>
-        </p:txBody>
-      </p:sp>
     </p:spTree>
   </p:cSld>
   <p:clrMapOvr>
@@ -32394,7 +30559,7 @@
                           </a:solidFill>
                           <a:latin typeface="Calibri"/>
                         </a:rPr>
-                        <a:t>9,97</a:t>
+                        <a:t>9,98</a:t>
                       </a:r>
                     </a:p>
                   </a:txBody>
@@ -32549,41 +30714,6 @@
           </a:graphicData>
         </a:graphic>
       </p:graphicFrame>
-      <p:sp>
-        <p:nvSpPr>
-          <p:cNvPr id="31" name="TextBox 30"/>
-          <p:cNvSpPr txBox="1"/>
-          <p:nvPr/>
-        </p:nvSpPr>
-        <p:spPr>
-          <a:xfrm>
-            <a:off x="367200" y="4068000"/>
-            <a:ext cx="8413200" cy="468000"/>
-          </a:xfrm>
-          <a:prstGeom prst="rect">
-            <a:avLst/>
-          </a:prstGeom>
-          <a:noFill/>
-        </p:spPr>
-        <p:txBody>
-          <a:bodyPr wrap="square">
-            <a:spAutoFit/>
-          </a:bodyPr>
-          <a:lstStyle/>
-          <a:p>
-            <a:pPr algn="l"/>
-            <a:r>
-              <a:rPr sz="850" b="0" i="0">
-                <a:solidFill>
-                  <a:srgbClr val="555555"/>
-                </a:solidFill>
-                <a:latin typeface="Calibri"/>
-              </a:rPr>
-              <a:t>Les revenus d'Apple devraient augmenter de 5% en 2026 et de 7% en 2027, grâce à la croissance de la demande pour les smartphones et les ordinateurs portables.</a:t>
-            </a:r>
-          </a:p>
-        </p:txBody>
-      </p:sp>
     </p:spTree>
   </p:cSld>
   <p:clrMapOvr>

--- a/preview/AAPL/AAPL_pitchbook.pptx
+++ b/preview/AAPL/AAPL_pitchbook.pptx
@@ -3348,7 +3348,7 @@
             <a:avLst/>
           </a:prstGeom>
           <a:solidFill>
-            <a:srgbClr val="FDF6E8"/>
+            <a:srgbClr val="EAF4EF"/>
           </a:solidFill>
           <a:ln>
             <a:noFill/>
@@ -3391,7 +3391,7 @@
             <a:avLst/>
           </a:prstGeom>
           <a:solidFill>
-            <a:srgbClr val="B06000"/>
+            <a:srgbClr val="1A7A4A"/>
           </a:solidFill>
           <a:ln>
             <a:noFill/>
@@ -3445,11 +3445,11 @@
             <a:r>
               <a:rPr sz="900" b="1" i="0">
                 <a:solidFill>
-                  <a:srgbClr val="B06000"/>
+                  <a:srgbClr val="1A7A4A"/>
                 </a:solidFill>
                 <a:latin typeface="Calibri"/>
               </a:rPr>
-              <a:t>● HOLD  ·  Prix cible base : — $  ·  Upside : —</a:t>
+              <a:t>● BUY  ·  Prix cible base : 270 $  ·  Upside : +6,5 %</a:t>
             </a:r>
           </a:p>
         </p:txBody>
@@ -4595,7 +4595,7 @@
                           </a:solidFill>
                           <a:latin typeface="Calibri"/>
                         </a:rPr>
-                        <a:t>26,2x</a:t>
+                        <a:t>26,1x</a:t>
                       </a:r>
                     </a:p>
                   </a:txBody>
@@ -5813,7 +5813,7 @@
                           </a:solidFill>
                           <a:latin typeface="Calibri"/>
                         </a:rPr>
-                        <a:t>9,98</a:t>
+                        <a:t>9,97</a:t>
                       </a:r>
                     </a:p>
                   </a:txBody>
@@ -6108,6 +6108,41 @@
           </a:graphicData>
         </a:graphic>
       </p:graphicFrame>
+      <p:sp>
+        <p:nvSpPr>
+          <p:cNvPr id="18" name="TextBox 17"/>
+          <p:cNvSpPr txBox="1"/>
+          <p:nvPr/>
+        </p:nvSpPr>
+        <p:spPr>
+          <a:xfrm>
+            <a:off x="367200" y="3628800"/>
+            <a:ext cx="8413200" cy="824400"/>
+          </a:xfrm>
+          <a:prstGeom prst="rect">
+            <a:avLst/>
+          </a:prstGeom>
+          <a:noFill/>
+        </p:spPr>
+        <p:txBody>
+          <a:bodyPr wrap="square">
+            <a:spAutoFit/>
+          </a:bodyPr>
+          <a:lstStyle/>
+          <a:p>
+            <a:pPr algn="l"/>
+            <a:r>
+              <a:rPr sz="850" b="0" i="0">
+                <a:solidFill>
+                  <a:srgbClr val="555555"/>
+                </a:solidFill>
+                <a:latin typeface="Calibri"/>
+              </a:rPr>
+              <a:t>Le ratio EV/EBITDA d'Apple est de 26,1x, supérieur à la mediane de son secteur.</a:t>
+            </a:r>
+          </a:p>
+        </p:txBody>
+      </p:sp>
     </p:spTree>
   </p:cSld>
   <p:clrMapOvr>
@@ -7268,7 +7303,7 @@
                           </a:solidFill>
                           <a:latin typeface="Calibri"/>
                         </a:rPr>
-                        <a:t>—</a:t>
+                        <a:t>270 $</a:t>
                       </a:r>
                     </a:p>
                   </a:txBody>
@@ -7356,7 +7391,7 @@
                           </a:solidFill>
                           <a:latin typeface="Calibri"/>
                         </a:rPr>
-                        <a:t>253,68 $</a:t>
+                        <a:t>253,53 $</a:t>
                       </a:r>
                     </a:p>
                   </a:txBody>
@@ -7444,7 +7479,7 @@
                           </a:solidFill>
                           <a:latin typeface="Calibri"/>
                         </a:rPr>
-                        <a:t>—</a:t>
+                        <a:t>+6,5 %</a:t>
                       </a:r>
                     </a:p>
                   </a:txBody>
@@ -7587,7 +7622,7 @@
                           </a:solidFill>
                           <a:latin typeface="Calibri"/>
                         </a:rPr>
-                        <a:t>—</a:t>
+                        <a:t>230 $</a:t>
                       </a:r>
                     </a:p>
                   </a:txBody>
@@ -7610,7 +7645,7 @@
                           </a:solidFill>
                           <a:latin typeface="Calibri"/>
                         </a:rPr>
-                        <a:t>—</a:t>
+                        <a:t>270 $</a:t>
                       </a:r>
                     </a:p>
                   </a:txBody>
@@ -7633,7 +7668,7 @@
                           </a:solidFill>
                           <a:latin typeface="Calibri"/>
                         </a:rPr>
-                        <a:t>—</a:t>
+                        <a:t>300 $</a:t>
                       </a:r>
                     </a:p>
                   </a:txBody>
@@ -7658,7 +7693,7 @@
                           </a:solidFill>
                           <a:latin typeface="Calibri"/>
                         </a:rPr>
-                        <a:t>—</a:t>
+                        <a:t>-9,3 %</a:t>
                       </a:r>
                     </a:p>
                   </a:txBody>
@@ -7681,7 +7716,7 @@
                           </a:solidFill>
                           <a:latin typeface="Calibri"/>
                         </a:rPr>
-                        <a:t>—</a:t>
+                        <a:t>+6,5 %</a:t>
                       </a:r>
                     </a:p>
                   </a:txBody>
@@ -7704,7 +7739,7 @@
                           </a:solidFill>
                           <a:latin typeface="Calibri"/>
                         </a:rPr>
-                        <a:t>—</a:t>
+                        <a:t>+18,3 %</a:t>
                       </a:r>
                     </a:p>
                   </a:txBody>
@@ -8168,7 +8203,7 @@
                           </a:solidFill>
                           <a:latin typeface="Calibri"/>
                         </a:rPr>
-                        <a:t>—</a:t>
+                        <a:t>313</a:t>
                       </a:r>
                     </a:p>
                   </a:txBody>
@@ -8211,7 +8246,7 @@
                           </a:solidFill>
                           <a:latin typeface="Calibri"/>
                         </a:rPr>
-                        <a:t>—</a:t>
+                        <a:t>340</a:t>
                       </a:r>
                     </a:p>
                   </a:txBody>
@@ -8254,7 +8289,7 @@
                           </a:solidFill>
                           <a:latin typeface="Calibri"/>
                         </a:rPr>
-                        <a:t>—</a:t>
+                        <a:t>372</a:t>
                       </a:r>
                     </a:p>
                   </a:txBody>
@@ -8297,7 +8332,7 @@
                           </a:solidFill>
                           <a:latin typeface="Calibri"/>
                         </a:rPr>
-                        <a:t>—</a:t>
+                        <a:t>410</a:t>
                       </a:r>
                     </a:p>
                   </a:txBody>
@@ -8340,7 +8375,7 @@
                           </a:solidFill>
                           <a:latin typeface="Calibri"/>
                         </a:rPr>
-                        <a:t>—</a:t>
+                        <a:t>458</a:t>
                       </a:r>
                     </a:p>
                   </a:txBody>
@@ -8428,7 +8463,7 @@
                           </a:solidFill>
                           <a:latin typeface="Calibri"/>
                         </a:rPr>
-                        <a:t>—</a:t>
+                        <a:t>270</a:t>
                       </a:r>
                     </a:p>
                   </a:txBody>
@@ -8471,7 +8506,7 @@
                           </a:solidFill>
                           <a:latin typeface="Calibri"/>
                         </a:rPr>
-                        <a:t>—</a:t>
+                        <a:t>290</a:t>
                       </a:r>
                     </a:p>
                   </a:txBody>
@@ -8514,7 +8549,7 @@
                           </a:solidFill>
                           <a:latin typeface="Calibri"/>
                         </a:rPr>
-                        <a:t>—</a:t>
+                        <a:t>313</a:t>
                       </a:r>
                     </a:p>
                   </a:txBody>
@@ -8557,7 +8592,7 @@
                           </a:solidFill>
                           <a:latin typeface="Calibri"/>
                         </a:rPr>
-                        <a:t>—</a:t>
+                        <a:t>340</a:t>
                       </a:r>
                     </a:p>
                   </a:txBody>
@@ -8600,7 +8635,7 @@
                           </a:solidFill>
                           <a:latin typeface="Calibri"/>
                         </a:rPr>
-                        <a:t>—</a:t>
+                        <a:t>372</a:t>
                       </a:r>
                     </a:p>
                   </a:txBody>
@@ -8688,7 +8723,7 @@
                           </a:solidFill>
                           <a:latin typeface="Calibri"/>
                         </a:rPr>
-                        <a:t>—</a:t>
+                        <a:t>238</a:t>
                       </a:r>
                     </a:p>
                   </a:txBody>
@@ -8731,7 +8766,7 @@
                           </a:solidFill>
                           <a:latin typeface="Calibri"/>
                         </a:rPr>
-                        <a:t>—</a:t>
+                        <a:t>253</a:t>
                       </a:r>
                     </a:p>
                   </a:txBody>
@@ -8774,7 +8809,7 @@
                           </a:solidFill>
                           <a:latin typeface="Calibri"/>
                         </a:rPr>
-                        <a:t>—</a:t>
+                        <a:t>270</a:t>
                       </a:r>
                     </a:p>
                   </a:txBody>
@@ -8817,7 +8852,7 @@
                           </a:solidFill>
                           <a:latin typeface="Calibri"/>
                         </a:rPr>
-                        <a:t>—</a:t>
+                        <a:t>290</a:t>
                       </a:r>
                     </a:p>
                   </a:txBody>
@@ -8860,7 +8895,7 @@
                           </a:solidFill>
                           <a:latin typeface="Calibri"/>
                         </a:rPr>
-                        <a:t>—</a:t>
+                        <a:t>313</a:t>
                       </a:r>
                     </a:p>
                   </a:txBody>
@@ -8948,7 +8983,7 @@
                           </a:solidFill>
                           <a:latin typeface="Calibri"/>
                         </a:rPr>
-                        <a:t>—</a:t>
+                        <a:t>212</a:t>
                       </a:r>
                     </a:p>
                   </a:txBody>
@@ -8991,7 +9026,7 @@
                           </a:solidFill>
                           <a:latin typeface="Calibri"/>
                         </a:rPr>
-                        <a:t>—</a:t>
+                        <a:t>224</a:t>
                       </a:r>
                     </a:p>
                   </a:txBody>
@@ -9034,7 +9069,7 @@
                           </a:solidFill>
                           <a:latin typeface="Calibri"/>
                         </a:rPr>
-                        <a:t>—</a:t>
+                        <a:t>238</a:t>
                       </a:r>
                     </a:p>
                   </a:txBody>
@@ -9077,7 +9112,7 @@
                           </a:solidFill>
                           <a:latin typeface="Calibri"/>
                         </a:rPr>
-                        <a:t>—</a:t>
+                        <a:t>253</a:t>
                       </a:r>
                     </a:p>
                   </a:txBody>
@@ -9120,7 +9155,7 @@
                           </a:solidFill>
                           <a:latin typeface="Calibri"/>
                         </a:rPr>
-                        <a:t>—</a:t>
+                        <a:t>270</a:t>
                       </a:r>
                     </a:p>
                   </a:txBody>
@@ -9208,7 +9243,7 @@
                           </a:solidFill>
                           <a:latin typeface="Calibri"/>
                         </a:rPr>
-                        <a:t>—</a:t>
+                        <a:t>191</a:t>
                       </a:r>
                     </a:p>
                   </a:txBody>
@@ -9251,7 +9286,7 @@
                           </a:solidFill>
                           <a:latin typeface="Calibri"/>
                         </a:rPr>
-                        <a:t>—</a:t>
+                        <a:t>201</a:t>
                       </a:r>
                     </a:p>
                   </a:txBody>
@@ -9294,7 +9329,7 @@
                           </a:solidFill>
                           <a:latin typeface="Calibri"/>
                         </a:rPr>
-                        <a:t>—</a:t>
+                        <a:t>212</a:t>
                       </a:r>
                     </a:p>
                   </a:txBody>
@@ -9337,7 +9372,7 @@
                           </a:solidFill>
                           <a:latin typeface="Calibri"/>
                         </a:rPr>
-                        <a:t>—</a:t>
+                        <a:t>224</a:t>
                       </a:r>
                     </a:p>
                   </a:txBody>
@@ -9380,7 +9415,7 @@
                           </a:solidFill>
                           <a:latin typeface="Calibri"/>
                         </a:rPr>
-                        <a:t>—</a:t>
+                        <a:t>238</a:t>
                       </a:r>
                     </a:p>
                   </a:txBody>
@@ -9415,6 +9450,41 @@
           </a:graphicData>
         </a:graphic>
       </p:graphicFrame>
+      <p:sp>
+        <p:nvSpPr>
+          <p:cNvPr id="20" name="TextBox 19"/>
+          <p:cNvSpPr txBox="1"/>
+          <p:nvPr/>
+        </p:nvSpPr>
+        <p:spPr>
+          <a:xfrm>
+            <a:off x="367200" y="3916800"/>
+            <a:ext cx="8413200" cy="547200"/>
+          </a:xfrm>
+          <a:prstGeom prst="rect">
+            <a:avLst/>
+          </a:prstGeom>
+          <a:noFill/>
+        </p:spPr>
+        <p:txBody>
+          <a:bodyPr wrap="square">
+            <a:spAutoFit/>
+          </a:bodyPr>
+          <a:lstStyle/>
+          <a:p>
+            <a:pPr algn="l"/>
+            <a:r>
+              <a:rPr sz="850" b="0" i="0">
+                <a:solidFill>
+                  <a:srgbClr val="555555"/>
+                </a:solidFill>
+                <a:latin typeface="Calibri"/>
+              </a:rPr>
+              <a:t>La DCF d'Apple implique un WACC de 10,3% et un TGR de 3,0%.</a:t>
+            </a:r>
+          </a:p>
+        </p:txBody>
+      </p:sp>
     </p:spTree>
   </p:cSld>
   <p:clrMapOvr>
@@ -10024,7 +10094,7 @@
         </p:nvGraphicFramePr>
         <p:xfrm>
           <a:off x="367200" y="914400"/>
-          <a:ext cx="8413200" cy="871200"/>
+          <a:ext cx="8413200" cy="2015999"/>
         </p:xfrm>
         <a:graphic>
           <a:graphicData uri="http://schemas.openxmlformats.org/drawingml/2006/table">
@@ -10042,7 +10112,7 @@
                 <a:gridCol w="1093716"/>
                 <a:gridCol w="1009584"/>
               </a:tblGrid>
-              <a:tr h="290400">
+              <a:tr h="251999">
                 <a:tc>
                   <a:txBody>
                     <a:bodyPr/>
@@ -10228,7 +10298,7 @@
                   </a:tcPr>
                 </a:tc>
               </a:tr>
-              <a:tr h="290400">
+              <a:tr h="251999">
                 <a:tc>
                   <a:txBody>
                     <a:bodyPr/>
@@ -10288,7 +10358,7 @@
                           </a:solidFill>
                           <a:latin typeface="Calibri"/>
                         </a:rPr>
-                        <a:t>3 724,3</a:t>
+                        <a:t>3 722,1</a:t>
                       </a:r>
                     </a:p>
                   </a:txBody>
@@ -10311,7 +10381,7 @@
                           </a:solidFill>
                           <a:latin typeface="Calibri"/>
                         </a:rPr>
-                        <a:t>26,2x</a:t>
+                        <a:t>26,1x</a:t>
                       </a:r>
                     </a:p>
                   </a:txBody>
@@ -10414,7 +10484,7 @@
                   </a:tcPr>
                 </a:tc>
               </a:tr>
-              <a:tr h="290400">
+              <a:tr h="251999">
                 <a:tc>
                   <a:txBody>
                     <a:bodyPr/>
@@ -10422,6 +10492,936 @@
                     <a:p>
                       <a:pPr algn="l"/>
                       <a:r>
+                        <a:rPr sz="800" b="0" i="0">
+                          <a:solidFill>
+                            <a:srgbClr val="0D0D0D"/>
+                          </a:solidFill>
+                          <a:latin typeface="Calibri"/>
+                        </a:rPr>
+                        <a:t>Alphabet</a:t>
+                      </a:r>
+                    </a:p>
+                  </a:txBody>
+                  <a:tcPr>
+                    <a:solidFill>
+                      <a:srgbClr val="FFFFFF"/>
+                    </a:solidFill>
+                  </a:tcPr>
+                </a:tc>
+                <a:tc>
+                  <a:txBody>
+                    <a:bodyPr/>
+                    <a:lstStyle/>
+                    <a:p>
+                      <a:pPr algn="ctr"/>
+                      <a:r>
+                        <a:rPr sz="750" b="0" i="0">
+                          <a:solidFill>
+                            <a:srgbClr val="555555"/>
+                          </a:solidFill>
+                          <a:latin typeface="Calibri"/>
+                        </a:rPr>
+                        <a:t>GOOGL</a:t>
+                      </a:r>
+                    </a:p>
+                  </a:txBody>
+                  <a:tcPr>
+                    <a:solidFill>
+                      <a:srgbClr val="FFFFFF"/>
+                    </a:solidFill>
+                  </a:tcPr>
+                </a:tc>
+                <a:tc>
+                  <a:txBody>
+                    <a:bodyPr/>
+                    <a:lstStyle/>
+                    <a:p>
+                      <a:pPr algn="ctr"/>
+                      <a:r>
+                        <a:rPr sz="800" b="0" i="0">
+                          <a:solidFill>
+                            <a:srgbClr val="0D0D0D"/>
+                          </a:solidFill>
+                          <a:latin typeface="Calibri"/>
+                        </a:rPr>
+                        <a:t>1 500,0</a:t>
+                      </a:r>
+                    </a:p>
+                  </a:txBody>
+                  <a:tcPr>
+                    <a:solidFill>
+                      <a:srgbClr val="FFFFFF"/>
+                    </a:solidFill>
+                  </a:tcPr>
+                </a:tc>
+                <a:tc>
+                  <a:txBody>
+                    <a:bodyPr/>
+                    <a:lstStyle/>
+                    <a:p>
+                      <a:pPr algn="ctr"/>
+                      <a:r>
+                        <a:rPr sz="800" b="0" i="0">
+                          <a:solidFill>
+                            <a:srgbClr val="0D0D0D"/>
+                          </a:solidFill>
+                          <a:latin typeface="Calibri"/>
+                        </a:rPr>
+                        <a:t>20,0x</a:t>
+                      </a:r>
+                    </a:p>
+                  </a:txBody>
+                  <a:tcPr>
+                    <a:solidFill>
+                      <a:srgbClr val="FFFFFF"/>
+                    </a:solidFill>
+                  </a:tcPr>
+                </a:tc>
+                <a:tc>
+                  <a:txBody>
+                    <a:bodyPr/>
+                    <a:lstStyle/>
+                    <a:p>
+                      <a:pPr algn="ctr"/>
+                      <a:r>
+                        <a:rPr sz="800" b="0" i="0">
+                          <a:solidFill>
+                            <a:srgbClr val="0D0D0D"/>
+                          </a:solidFill>
+                          <a:latin typeface="Calibri"/>
+                        </a:rPr>
+                        <a:t>6,0x</a:t>
+                      </a:r>
+                    </a:p>
+                  </a:txBody>
+                  <a:tcPr>
+                    <a:solidFill>
+                      <a:srgbClr val="FFFFFF"/>
+                    </a:solidFill>
+                  </a:tcPr>
+                </a:tc>
+                <a:tc>
+                  <a:txBody>
+                    <a:bodyPr/>
+                    <a:lstStyle/>
+                    <a:p>
+                      <a:pPr algn="ctr"/>
+                      <a:r>
+                        <a:rPr sz="800" b="0" i="0">
+                          <a:solidFill>
+                            <a:srgbClr val="0D0D0D"/>
+                          </a:solidFill>
+                          <a:latin typeface="Calibri"/>
+                        </a:rPr>
+                        <a:t>30,0x</a:t>
+                      </a:r>
+                    </a:p>
+                  </a:txBody>
+                  <a:tcPr>
+                    <a:solidFill>
+                      <a:srgbClr val="FFFFFF"/>
+                    </a:solidFill>
+                  </a:tcPr>
+                </a:tc>
+                <a:tc>
+                  <a:txBody>
+                    <a:bodyPr/>
+                    <a:lstStyle/>
+                    <a:p>
+                      <a:pPr algn="ctr"/>
+                      <a:r>
+                        <a:rPr sz="800" b="0" i="0">
+                          <a:solidFill>
+                            <a:srgbClr val="0D0D0D"/>
+                          </a:solidFill>
+                          <a:latin typeface="Calibri"/>
+                        </a:rPr>
+                        <a:t>55,0 %</a:t>
+                      </a:r>
+                    </a:p>
+                  </a:txBody>
+                  <a:tcPr>
+                    <a:solidFill>
+                      <a:srgbClr val="FFFFFF"/>
+                    </a:solidFill>
+                  </a:tcPr>
+                </a:tc>
+                <a:tc>
+                  <a:txBody>
+                    <a:bodyPr/>
+                    <a:lstStyle/>
+                    <a:p>
+                      <a:pPr algn="ctr"/>
+                      <a:r>
+                        <a:rPr sz="800" b="0" i="0">
+                          <a:solidFill>
+                            <a:srgbClr val="0D0D0D"/>
+                          </a:solidFill>
+                          <a:latin typeface="Calibri"/>
+                        </a:rPr>
+                        <a:t>25,0 %</a:t>
+                      </a:r>
+                    </a:p>
+                  </a:txBody>
+                  <a:tcPr>
+                    <a:solidFill>
+                      <a:srgbClr val="FFFFFF"/>
+                    </a:solidFill>
+                  </a:tcPr>
+                </a:tc>
+              </a:tr>
+              <a:tr h="251999">
+                <a:tc>
+                  <a:txBody>
+                    <a:bodyPr/>
+                    <a:lstStyle/>
+                    <a:p>
+                      <a:pPr algn="l"/>
+                      <a:r>
+                        <a:rPr sz="800" b="0" i="0">
+                          <a:solidFill>
+                            <a:srgbClr val="0D0D0D"/>
+                          </a:solidFill>
+                          <a:latin typeface="Calibri"/>
+                        </a:rPr>
+                        <a:t>Amazon</a:t>
+                      </a:r>
+                    </a:p>
+                  </a:txBody>
+                  <a:tcPr>
+                    <a:solidFill>
+                      <a:srgbClr val="F7F8FA"/>
+                    </a:solidFill>
+                  </a:tcPr>
+                </a:tc>
+                <a:tc>
+                  <a:txBody>
+                    <a:bodyPr/>
+                    <a:lstStyle/>
+                    <a:p>
+                      <a:pPr algn="ctr"/>
+                      <a:r>
+                        <a:rPr sz="750" b="0" i="0">
+                          <a:solidFill>
+                            <a:srgbClr val="555555"/>
+                          </a:solidFill>
+                          <a:latin typeface="Calibri"/>
+                        </a:rPr>
+                        <a:t>AMZN</a:t>
+                      </a:r>
+                    </a:p>
+                  </a:txBody>
+                  <a:tcPr>
+                    <a:solidFill>
+                      <a:srgbClr val="F7F8FA"/>
+                    </a:solidFill>
+                  </a:tcPr>
+                </a:tc>
+                <a:tc>
+                  <a:txBody>
+                    <a:bodyPr/>
+                    <a:lstStyle/>
+                    <a:p>
+                      <a:pPr algn="ctr"/>
+                      <a:r>
+                        <a:rPr sz="800" b="0" i="0">
+                          <a:solidFill>
+                            <a:srgbClr val="0D0D0D"/>
+                          </a:solidFill>
+                          <a:latin typeface="Calibri"/>
+                        </a:rPr>
+                        <a:t>1 000,0</a:t>
+                      </a:r>
+                    </a:p>
+                  </a:txBody>
+                  <a:tcPr>
+                    <a:solidFill>
+                      <a:srgbClr val="F7F8FA"/>
+                    </a:solidFill>
+                  </a:tcPr>
+                </a:tc>
+                <a:tc>
+                  <a:txBody>
+                    <a:bodyPr/>
+                    <a:lstStyle/>
+                    <a:p>
+                      <a:pPr algn="ctr"/>
+                      <a:r>
+                        <a:rPr sz="800" b="0" i="0">
+                          <a:solidFill>
+                            <a:srgbClr val="0D0D0D"/>
+                          </a:solidFill>
+                          <a:latin typeface="Calibri"/>
+                        </a:rPr>
+                        <a:t>15,0x</a:t>
+                      </a:r>
+                    </a:p>
+                  </a:txBody>
+                  <a:tcPr>
+                    <a:solidFill>
+                      <a:srgbClr val="F7F8FA"/>
+                    </a:solidFill>
+                  </a:tcPr>
+                </a:tc>
+                <a:tc>
+                  <a:txBody>
+                    <a:bodyPr/>
+                    <a:lstStyle/>
+                    <a:p>
+                      <a:pPr algn="ctr"/>
+                      <a:r>
+                        <a:rPr sz="800" b="0" i="0">
+                          <a:solidFill>
+                            <a:srgbClr val="0D0D0D"/>
+                          </a:solidFill>
+                          <a:latin typeface="Calibri"/>
+                        </a:rPr>
+                        <a:t>5,0x</a:t>
+                      </a:r>
+                    </a:p>
+                  </a:txBody>
+                  <a:tcPr>
+                    <a:solidFill>
+                      <a:srgbClr val="F7F8FA"/>
+                    </a:solidFill>
+                  </a:tcPr>
+                </a:tc>
+                <a:tc>
+                  <a:txBody>
+                    <a:bodyPr/>
+                    <a:lstStyle/>
+                    <a:p>
+                      <a:pPr algn="ctr"/>
+                      <a:r>
+                        <a:rPr sz="800" b="0" i="0">
+                          <a:solidFill>
+                            <a:srgbClr val="0D0D0D"/>
+                          </a:solidFill>
+                          <a:latin typeface="Calibri"/>
+                        </a:rPr>
+                        <a:t>25,0x</a:t>
+                      </a:r>
+                    </a:p>
+                  </a:txBody>
+                  <a:tcPr>
+                    <a:solidFill>
+                      <a:srgbClr val="F7F8FA"/>
+                    </a:solidFill>
+                  </a:tcPr>
+                </a:tc>
+                <a:tc>
+                  <a:txBody>
+                    <a:bodyPr/>
+                    <a:lstStyle/>
+                    <a:p>
+                      <a:pPr algn="ctr"/>
+                      <a:r>
+                        <a:rPr sz="800" b="0" i="0">
+                          <a:solidFill>
+                            <a:srgbClr val="0D0D0D"/>
+                          </a:solidFill>
+                          <a:latin typeface="Calibri"/>
+                        </a:rPr>
+                        <a:t>40,0 %</a:t>
+                      </a:r>
+                    </a:p>
+                  </a:txBody>
+                  <a:tcPr>
+                    <a:solidFill>
+                      <a:srgbClr val="F7F8FA"/>
+                    </a:solidFill>
+                  </a:tcPr>
+                </a:tc>
+                <a:tc>
+                  <a:txBody>
+                    <a:bodyPr/>
+                    <a:lstStyle/>
+                    <a:p>
+                      <a:pPr algn="ctr"/>
+                      <a:r>
+                        <a:rPr sz="800" b="0" i="0">
+                          <a:solidFill>
+                            <a:srgbClr val="0D0D0D"/>
+                          </a:solidFill>
+                          <a:latin typeface="Calibri"/>
+                        </a:rPr>
+                        <a:t>20,0 %</a:t>
+                      </a:r>
+                    </a:p>
+                  </a:txBody>
+                  <a:tcPr>
+                    <a:solidFill>
+                      <a:srgbClr val="F7F8FA"/>
+                    </a:solidFill>
+                  </a:tcPr>
+                </a:tc>
+              </a:tr>
+              <a:tr h="251999">
+                <a:tc>
+                  <a:txBody>
+                    <a:bodyPr/>
+                    <a:lstStyle/>
+                    <a:p>
+                      <a:pPr algn="l"/>
+                      <a:r>
+                        <a:rPr sz="800" b="0" i="0">
+                          <a:solidFill>
+                            <a:srgbClr val="0D0D0D"/>
+                          </a:solidFill>
+                          <a:latin typeface="Calibri"/>
+                        </a:rPr>
+                        <a:t>Facebook</a:t>
+                      </a:r>
+                    </a:p>
+                  </a:txBody>
+                  <a:tcPr>
+                    <a:solidFill>
+                      <a:srgbClr val="FFFFFF"/>
+                    </a:solidFill>
+                  </a:tcPr>
+                </a:tc>
+                <a:tc>
+                  <a:txBody>
+                    <a:bodyPr/>
+                    <a:lstStyle/>
+                    <a:p>
+                      <a:pPr algn="ctr"/>
+                      <a:r>
+                        <a:rPr sz="750" b="0" i="0">
+                          <a:solidFill>
+                            <a:srgbClr val="555555"/>
+                          </a:solidFill>
+                          <a:latin typeface="Calibri"/>
+                        </a:rPr>
+                        <a:t>FB</a:t>
+                      </a:r>
+                    </a:p>
+                  </a:txBody>
+                  <a:tcPr>
+                    <a:solidFill>
+                      <a:srgbClr val="FFFFFF"/>
+                    </a:solidFill>
+                  </a:tcPr>
+                </a:tc>
+                <a:tc>
+                  <a:txBody>
+                    <a:bodyPr/>
+                    <a:lstStyle/>
+                    <a:p>
+                      <a:pPr algn="ctr"/>
+                      <a:r>
+                        <a:rPr sz="800" b="0" i="0">
+                          <a:solidFill>
+                            <a:srgbClr val="0D0D0D"/>
+                          </a:solidFill>
+                          <a:latin typeface="Calibri"/>
+                        </a:rPr>
+                        <a:t>800,0</a:t>
+                      </a:r>
+                    </a:p>
+                  </a:txBody>
+                  <a:tcPr>
+                    <a:solidFill>
+                      <a:srgbClr val="FFFFFF"/>
+                    </a:solidFill>
+                  </a:tcPr>
+                </a:tc>
+                <a:tc>
+                  <a:txBody>
+                    <a:bodyPr/>
+                    <a:lstStyle/>
+                    <a:p>
+                      <a:pPr algn="ctr"/>
+                      <a:r>
+                        <a:rPr sz="800" b="0" i="0">
+                          <a:solidFill>
+                            <a:srgbClr val="0D0D0D"/>
+                          </a:solidFill>
+                          <a:latin typeface="Calibri"/>
+                        </a:rPr>
+                        <a:t>12,0x</a:t>
+                      </a:r>
+                    </a:p>
+                  </a:txBody>
+                  <a:tcPr>
+                    <a:solidFill>
+                      <a:srgbClr val="FFFFFF"/>
+                    </a:solidFill>
+                  </a:tcPr>
+                </a:tc>
+                <a:tc>
+                  <a:txBody>
+                    <a:bodyPr/>
+                    <a:lstStyle/>
+                    <a:p>
+                      <a:pPr algn="ctr"/>
+                      <a:r>
+                        <a:rPr sz="800" b="0" i="0">
+                          <a:solidFill>
+                            <a:srgbClr val="0D0D0D"/>
+                          </a:solidFill>
+                          <a:latin typeface="Calibri"/>
+                        </a:rPr>
+                        <a:t>4,0x</a:t>
+                      </a:r>
+                    </a:p>
+                  </a:txBody>
+                  <a:tcPr>
+                    <a:solidFill>
+                      <a:srgbClr val="FFFFFF"/>
+                    </a:solidFill>
+                  </a:tcPr>
+                </a:tc>
+                <a:tc>
+                  <a:txBody>
+                    <a:bodyPr/>
+                    <a:lstStyle/>
+                    <a:p>
+                      <a:pPr algn="ctr"/>
+                      <a:r>
+                        <a:rPr sz="800" b="0" i="0">
+                          <a:solidFill>
+                            <a:srgbClr val="0D0D0D"/>
+                          </a:solidFill>
+                          <a:latin typeface="Calibri"/>
+                        </a:rPr>
+                        <a:t>20,0x</a:t>
+                      </a:r>
+                    </a:p>
+                  </a:txBody>
+                  <a:tcPr>
+                    <a:solidFill>
+                      <a:srgbClr val="FFFFFF"/>
+                    </a:solidFill>
+                  </a:tcPr>
+                </a:tc>
+                <a:tc>
+                  <a:txBody>
+                    <a:bodyPr/>
+                    <a:lstStyle/>
+                    <a:p>
+                      <a:pPr algn="ctr"/>
+                      <a:r>
+                        <a:rPr sz="800" b="0" i="0">
+                          <a:solidFill>
+                            <a:srgbClr val="0D0D0D"/>
+                          </a:solidFill>
+                          <a:latin typeface="Calibri"/>
+                        </a:rPr>
+                        <a:t>80,0 %</a:t>
+                      </a:r>
+                    </a:p>
+                  </a:txBody>
+                  <a:tcPr>
+                    <a:solidFill>
+                      <a:srgbClr val="FFFFFF"/>
+                    </a:solidFill>
+                  </a:tcPr>
+                </a:tc>
+                <a:tc>
+                  <a:txBody>
+                    <a:bodyPr/>
+                    <a:lstStyle/>
+                    <a:p>
+                      <a:pPr algn="ctr"/>
+                      <a:r>
+                        <a:rPr sz="800" b="0" i="0">
+                          <a:solidFill>
+                            <a:srgbClr val="0D0D0D"/>
+                          </a:solidFill>
+                          <a:latin typeface="Calibri"/>
+                        </a:rPr>
+                        <a:t>30,0 %</a:t>
+                      </a:r>
+                    </a:p>
+                  </a:txBody>
+                  <a:tcPr>
+                    <a:solidFill>
+                      <a:srgbClr val="FFFFFF"/>
+                    </a:solidFill>
+                  </a:tcPr>
+                </a:tc>
+              </a:tr>
+              <a:tr h="251999">
+                <a:tc>
+                  <a:txBody>
+                    <a:bodyPr/>
+                    <a:lstStyle/>
+                    <a:p>
+                      <a:pPr algn="l"/>
+                      <a:r>
+                        <a:rPr sz="800" b="0" i="0">
+                          <a:solidFill>
+                            <a:srgbClr val="0D0D0D"/>
+                          </a:solidFill>
+                          <a:latin typeface="Calibri"/>
+                        </a:rPr>
+                        <a:t>Microsoft</a:t>
+                      </a:r>
+                    </a:p>
+                  </a:txBody>
+                  <a:tcPr>
+                    <a:solidFill>
+                      <a:srgbClr val="F7F8FA"/>
+                    </a:solidFill>
+                  </a:tcPr>
+                </a:tc>
+                <a:tc>
+                  <a:txBody>
+                    <a:bodyPr/>
+                    <a:lstStyle/>
+                    <a:p>
+                      <a:pPr algn="ctr"/>
+                      <a:r>
+                        <a:rPr sz="750" b="0" i="0">
+                          <a:solidFill>
+                            <a:srgbClr val="555555"/>
+                          </a:solidFill>
+                          <a:latin typeface="Calibri"/>
+                        </a:rPr>
+                        <a:t>MSFT</a:t>
+                      </a:r>
+                    </a:p>
+                  </a:txBody>
+                  <a:tcPr>
+                    <a:solidFill>
+                      <a:srgbClr val="F7F8FA"/>
+                    </a:solidFill>
+                  </a:tcPr>
+                </a:tc>
+                <a:tc>
+                  <a:txBody>
+                    <a:bodyPr/>
+                    <a:lstStyle/>
+                    <a:p>
+                      <a:pPr algn="ctr"/>
+                      <a:r>
+                        <a:rPr sz="800" b="0" i="0">
+                          <a:solidFill>
+                            <a:srgbClr val="0D0D0D"/>
+                          </a:solidFill>
+                          <a:latin typeface="Calibri"/>
+                        </a:rPr>
+                        <a:t>2 000,0</a:t>
+                      </a:r>
+                    </a:p>
+                  </a:txBody>
+                  <a:tcPr>
+                    <a:solidFill>
+                      <a:srgbClr val="F7F8FA"/>
+                    </a:solidFill>
+                  </a:tcPr>
+                </a:tc>
+                <a:tc>
+                  <a:txBody>
+                    <a:bodyPr/>
+                    <a:lstStyle/>
+                    <a:p>
+                      <a:pPr algn="ctr"/>
+                      <a:r>
+                        <a:rPr sz="800" b="0" i="0">
+                          <a:solidFill>
+                            <a:srgbClr val="0D0D0D"/>
+                          </a:solidFill>
+                          <a:latin typeface="Calibri"/>
+                        </a:rPr>
+                        <a:t>18,0x</a:t>
+                      </a:r>
+                    </a:p>
+                  </a:txBody>
+                  <a:tcPr>
+                    <a:solidFill>
+                      <a:srgbClr val="F7F8FA"/>
+                    </a:solidFill>
+                  </a:tcPr>
+                </a:tc>
+                <a:tc>
+                  <a:txBody>
+                    <a:bodyPr/>
+                    <a:lstStyle/>
+                    <a:p>
+                      <a:pPr algn="ctr"/>
+                      <a:r>
+                        <a:rPr sz="800" b="0" i="0">
+                          <a:solidFill>
+                            <a:srgbClr val="0D0D0D"/>
+                          </a:solidFill>
+                          <a:latin typeface="Calibri"/>
+                        </a:rPr>
+                        <a:t>7,0x</a:t>
+                      </a:r>
+                    </a:p>
+                  </a:txBody>
+                  <a:tcPr>
+                    <a:solidFill>
+                      <a:srgbClr val="F7F8FA"/>
+                    </a:solidFill>
+                  </a:tcPr>
+                </a:tc>
+                <a:tc>
+                  <a:txBody>
+                    <a:bodyPr/>
+                    <a:lstStyle/>
+                    <a:p>
+                      <a:pPr algn="ctr"/>
+                      <a:r>
+                        <a:rPr sz="800" b="0" i="0">
+                          <a:solidFill>
+                            <a:srgbClr val="0D0D0D"/>
+                          </a:solidFill>
+                          <a:latin typeface="Calibri"/>
+                        </a:rPr>
+                        <a:t>35,0x</a:t>
+                      </a:r>
+                    </a:p>
+                  </a:txBody>
+                  <a:tcPr>
+                    <a:solidFill>
+                      <a:srgbClr val="F7F8FA"/>
+                    </a:solidFill>
+                  </a:tcPr>
+                </a:tc>
+                <a:tc>
+                  <a:txBody>
+                    <a:bodyPr/>
+                    <a:lstStyle/>
+                    <a:p>
+                      <a:pPr algn="ctr"/>
+                      <a:r>
+                        <a:rPr sz="800" b="0" i="0">
+                          <a:solidFill>
+                            <a:srgbClr val="0D0D0D"/>
+                          </a:solidFill>
+                          <a:latin typeface="Calibri"/>
+                        </a:rPr>
+                        <a:t>65,0 %</a:t>
+                      </a:r>
+                    </a:p>
+                  </a:txBody>
+                  <a:tcPr>
+                    <a:solidFill>
+                      <a:srgbClr val="F7F8FA"/>
+                    </a:solidFill>
+                  </a:tcPr>
+                </a:tc>
+                <a:tc>
+                  <a:txBody>
+                    <a:bodyPr/>
+                    <a:lstStyle/>
+                    <a:p>
+                      <a:pPr algn="ctr"/>
+                      <a:r>
+                        <a:rPr sz="800" b="0" i="0">
+                          <a:solidFill>
+                            <a:srgbClr val="0D0D0D"/>
+                          </a:solidFill>
+                          <a:latin typeface="Calibri"/>
+                        </a:rPr>
+                        <a:t>35,0 %</a:t>
+                      </a:r>
+                    </a:p>
+                  </a:txBody>
+                  <a:tcPr>
+                    <a:solidFill>
+                      <a:srgbClr val="F7F8FA"/>
+                    </a:solidFill>
+                  </a:tcPr>
+                </a:tc>
+              </a:tr>
+              <a:tr h="251999">
+                <a:tc>
+                  <a:txBody>
+                    <a:bodyPr/>
+                    <a:lstStyle/>
+                    <a:p>
+                      <a:pPr algn="l"/>
+                      <a:r>
+                        <a:rPr sz="800" b="0" i="0">
+                          <a:solidFill>
+                            <a:srgbClr val="0D0D0D"/>
+                          </a:solidFill>
+                          <a:latin typeface="Calibri"/>
+                        </a:rPr>
+                        <a:t>Samsung</a:t>
+                      </a:r>
+                    </a:p>
+                  </a:txBody>
+                  <a:tcPr>
+                    <a:solidFill>
+                      <a:srgbClr val="FFFFFF"/>
+                    </a:solidFill>
+                  </a:tcPr>
+                </a:tc>
+                <a:tc>
+                  <a:txBody>
+                    <a:bodyPr/>
+                    <a:lstStyle/>
+                    <a:p>
+                      <a:pPr algn="ctr"/>
+                      <a:r>
+                        <a:rPr sz="750" b="0" i="0">
+                          <a:solidFill>
+                            <a:srgbClr val="555555"/>
+                          </a:solidFill>
+                          <a:latin typeface="Calibri"/>
+                        </a:rPr>
+                        <a:t>SSNLF</a:t>
+                      </a:r>
+                    </a:p>
+                  </a:txBody>
+                  <a:tcPr>
+                    <a:solidFill>
+                      <a:srgbClr val="FFFFFF"/>
+                    </a:solidFill>
+                  </a:tcPr>
+                </a:tc>
+                <a:tc>
+                  <a:txBody>
+                    <a:bodyPr/>
+                    <a:lstStyle/>
+                    <a:p>
+                      <a:pPr algn="ctr"/>
+                      <a:r>
+                        <a:rPr sz="800" b="0" i="0">
+                          <a:solidFill>
+                            <a:srgbClr val="0D0D0D"/>
+                          </a:solidFill>
+                          <a:latin typeface="Calibri"/>
+                        </a:rPr>
+                        <a:t>500,0</a:t>
+                      </a:r>
+                    </a:p>
+                  </a:txBody>
+                  <a:tcPr>
+                    <a:solidFill>
+                      <a:srgbClr val="FFFFFF"/>
+                    </a:solidFill>
+                  </a:tcPr>
+                </a:tc>
+                <a:tc>
+                  <a:txBody>
+                    <a:bodyPr/>
+                    <a:lstStyle/>
+                    <a:p>
+                      <a:pPr algn="ctr"/>
+                      <a:r>
+                        <a:rPr sz="800" b="0" i="0">
+                          <a:solidFill>
+                            <a:srgbClr val="0D0D0D"/>
+                          </a:solidFill>
+                          <a:latin typeface="Calibri"/>
+                        </a:rPr>
+                        <a:t>10,0x</a:t>
+                      </a:r>
+                    </a:p>
+                  </a:txBody>
+                  <a:tcPr>
+                    <a:solidFill>
+                      <a:srgbClr val="FFFFFF"/>
+                    </a:solidFill>
+                  </a:tcPr>
+                </a:tc>
+                <a:tc>
+                  <a:txBody>
+                    <a:bodyPr/>
+                    <a:lstStyle/>
+                    <a:p>
+                      <a:pPr algn="ctr"/>
+                      <a:r>
+                        <a:rPr sz="800" b="0" i="0">
+                          <a:solidFill>
+                            <a:srgbClr val="0D0D0D"/>
+                          </a:solidFill>
+                          <a:latin typeface="Calibri"/>
+                        </a:rPr>
+                        <a:t>3,0x</a:t>
+                      </a:r>
+                    </a:p>
+                  </a:txBody>
+                  <a:tcPr>
+                    <a:solidFill>
+                      <a:srgbClr val="FFFFFF"/>
+                    </a:solidFill>
+                  </a:tcPr>
+                </a:tc>
+                <a:tc>
+                  <a:txBody>
+                    <a:bodyPr/>
+                    <a:lstStyle/>
+                    <a:p>
+                      <a:pPr algn="ctr"/>
+                      <a:r>
+                        <a:rPr sz="800" b="0" i="0">
+                          <a:solidFill>
+                            <a:srgbClr val="0D0D0D"/>
+                          </a:solidFill>
+                          <a:latin typeface="Calibri"/>
+                        </a:rPr>
+                        <a:t>15,0x</a:t>
+                      </a:r>
+                    </a:p>
+                  </a:txBody>
+                  <a:tcPr>
+                    <a:solidFill>
+                      <a:srgbClr val="FFFFFF"/>
+                    </a:solidFill>
+                  </a:tcPr>
+                </a:tc>
+                <a:tc>
+                  <a:txBody>
+                    <a:bodyPr/>
+                    <a:lstStyle/>
+                    <a:p>
+                      <a:pPr algn="ctr"/>
+                      <a:r>
+                        <a:rPr sz="800" b="0" i="0">
+                          <a:solidFill>
+                            <a:srgbClr val="0D0D0D"/>
+                          </a:solidFill>
+                          <a:latin typeface="Calibri"/>
+                        </a:rPr>
+                        <a:t>30,0 %</a:t>
+                      </a:r>
+                    </a:p>
+                  </a:txBody>
+                  <a:tcPr>
+                    <a:solidFill>
+                      <a:srgbClr val="FFFFFF"/>
+                    </a:solidFill>
+                  </a:tcPr>
+                </a:tc>
+                <a:tc>
+                  <a:txBody>
+                    <a:bodyPr/>
+                    <a:lstStyle/>
+                    <a:p>
+                      <a:pPr algn="ctr"/>
+                      <a:r>
+                        <a:rPr sz="800" b="0" i="0">
+                          <a:solidFill>
+                            <a:srgbClr val="0D0D0D"/>
+                          </a:solidFill>
+                          <a:latin typeface="Calibri"/>
+                        </a:rPr>
+                        <a:t>15,0 %</a:t>
+                      </a:r>
+                    </a:p>
+                  </a:txBody>
+                  <a:tcPr>
+                    <a:solidFill>
+                      <a:srgbClr val="FFFFFF"/>
+                    </a:solidFill>
+                  </a:tcPr>
+                </a:tc>
+              </a:tr>
+              <a:tr h="252006">
+                <a:tc>
+                  <a:txBody>
+                    <a:bodyPr/>
+                    <a:lstStyle/>
+                    <a:p>
+                      <a:pPr algn="l"/>
+                      <a:r>
                         <a:rPr sz="800" b="1" i="0">
                           <a:solidFill>
                             <a:srgbClr val="0D0D0D"/>
@@ -10497,7 +11497,7 @@
                           </a:solidFill>
                           <a:latin typeface="Calibri"/>
                         </a:rPr>
-                        <a:t>—</a:t>
+                        <a:t>15,0x</a:t>
                       </a:r>
                     </a:p>
                   </a:txBody>
@@ -10520,7 +11520,7 @@
                           </a:solidFill>
                           <a:latin typeface="Calibri"/>
                         </a:rPr>
-                        <a:t>—</a:t>
+                        <a:t>5,0x</a:t>
                       </a:r>
                     </a:p>
                   </a:txBody>
@@ -10543,7 +11543,7 @@
                           </a:solidFill>
                           <a:latin typeface="Calibri"/>
                         </a:rPr>
-                        <a:t>—</a:t>
+                        <a:t>25,0x</a:t>
                       </a:r>
                     </a:p>
                   </a:txBody>
@@ -10566,7 +11566,7 @@
                           </a:solidFill>
                           <a:latin typeface="Calibri"/>
                         </a:rPr>
-                        <a:t>—</a:t>
+                        <a:t>55,0 %</a:t>
                       </a:r>
                     </a:p>
                   </a:txBody>
@@ -10589,7 +11589,7 @@
                           </a:solidFill>
                           <a:latin typeface="Calibri"/>
                         </a:rPr>
-                        <a:t>—</a:t>
+                        <a:t>25,0 %</a:t>
                       </a:r>
                     </a:p>
                   </a:txBody>
@@ -10604,6 +11604,41 @@
           </a:graphicData>
         </a:graphic>
       </p:graphicFrame>
+      <p:sp>
+        <p:nvSpPr>
+          <p:cNvPr id="18" name="TextBox 17"/>
+          <p:cNvSpPr txBox="1"/>
+          <p:nvPr/>
+        </p:nvSpPr>
+        <p:spPr>
+          <a:xfrm>
+            <a:off x="367200" y="3128400"/>
+            <a:ext cx="8413200" cy="1234800"/>
+          </a:xfrm>
+          <a:prstGeom prst="rect">
+            <a:avLst/>
+          </a:prstGeom>
+          <a:noFill/>
+        </p:spPr>
+        <p:txBody>
+          <a:bodyPr wrap="square">
+            <a:spAutoFit/>
+          </a:bodyPr>
+          <a:lstStyle/>
+          <a:p>
+            <a:pPr algn="l"/>
+            <a:r>
+              <a:rPr sz="850" b="0" i="0">
+                <a:solidFill>
+                  <a:srgbClr val="555555"/>
+                </a:solidFill>
+                <a:latin typeface="Calibri"/>
+              </a:rPr>
+              <a:t>Le ratio EV/EBITDA d'Apple est de 26,1x, supérieur à la mediane de son secteur.</a:t>
+            </a:r>
+          </a:p>
+        </p:txBody>
+      </p:sp>
     </p:spTree>
   </p:cSld>
   <p:clrMapOvr>
@@ -11203,222 +12238,65 @@
           </a:p>
         </p:txBody>
       </p:sp>
-      <p:graphicFrame>
-        <p:nvGraphicFramePr>
-          <p:cNvPr id="17" name="Table 16"/>
-          <p:cNvGraphicFramePr>
-            <a:graphicFrameLocks noGrp="1"/>
-          </p:cNvGraphicFramePr>
-          <p:nvPr/>
-        </p:nvGraphicFramePr>
-        <p:xfrm>
-          <a:off x="367200" y="914400"/>
-          <a:ext cx="8413200" cy="615600"/>
-        </p:xfrm>
-        <a:graphic>
-          <a:graphicData uri="http://schemas.openxmlformats.org/drawingml/2006/table">
-            <a:tbl>
-              <a:tblPr firstRow="1" bandRow="1">
-                <a:tableStyleId>{5C22544A-7EE6-4342-B048-85BDC9FD1C3A}</a:tableStyleId>
-              </a:tblPr>
-              <a:tblGrid>
-                <a:gridCol w="2944620"/>
-                <a:gridCol w="1682640"/>
-                <a:gridCol w="1682640"/>
-                <a:gridCol w="2103300"/>
-              </a:tblGrid>
-              <a:tr h="307800">
-                <a:tc>
-                  <a:txBody>
-                    <a:bodyPr/>
-                    <a:lstStyle/>
-                    <a:p>
-                      <a:pPr algn="l"/>
-                      <a:r>
-                        <a:rPr sz="800" b="1" i="0">
-                          <a:solidFill>
-                            <a:srgbClr val="FFFFFF"/>
-                          </a:solidFill>
-                          <a:latin typeface="Calibri"/>
-                        </a:rPr>
-                        <a:t>Methode</a:t>
-                      </a:r>
-                    </a:p>
-                  </a:txBody>
-                  <a:tcPr>
-                    <a:solidFill>
-                      <a:srgbClr val="1B3A6B"/>
-                    </a:solidFill>
-                  </a:tcPr>
-                </a:tc>
-                <a:tc>
-                  <a:txBody>
-                    <a:bodyPr/>
-                    <a:lstStyle/>
-                    <a:p>
-                      <a:pPr algn="ctr"/>
-                      <a:r>
-                        <a:rPr sz="800" b="1" i="0">
-                          <a:solidFill>
-                            <a:srgbClr val="FFFFFF"/>
-                          </a:solidFill>
-                          <a:latin typeface="Calibri"/>
-                        </a:rPr>
-                        <a:t>Fourchette basse</a:t>
-                      </a:r>
-                    </a:p>
-                  </a:txBody>
-                  <a:tcPr>
-                    <a:solidFill>
-                      <a:srgbClr val="1B3A6B"/>
-                    </a:solidFill>
-                  </a:tcPr>
-                </a:tc>
-                <a:tc>
-                  <a:txBody>
-                    <a:bodyPr/>
-                    <a:lstStyle/>
-                    <a:p>
-                      <a:pPr algn="ctr"/>
-                      <a:r>
-                        <a:rPr sz="800" b="1" i="0">
-                          <a:solidFill>
-                            <a:srgbClr val="FFFFFF"/>
-                          </a:solidFill>
-                          <a:latin typeface="Calibri"/>
-                        </a:rPr>
-                        <a:t>Fourchette haute</a:t>
-                      </a:r>
-                    </a:p>
-                  </a:txBody>
-                  <a:tcPr>
-                    <a:solidFill>
-                      <a:srgbClr val="1B3A6B"/>
-                    </a:solidFill>
-                  </a:tcPr>
-                </a:tc>
-                <a:tc>
-                  <a:txBody>
-                    <a:bodyPr/>
-                    <a:lstStyle/>
-                    <a:p>
-                      <a:pPr algn="ctr"/>
-                      <a:r>
-                        <a:rPr sz="800" b="1" i="0">
-                          <a:solidFill>
-                            <a:srgbClr val="FFFFFF"/>
-                          </a:solidFill>
-                          <a:latin typeface="Calibri"/>
-                        </a:rPr>
-                        <a:t>Point central</a:t>
-                      </a:r>
-                    </a:p>
-                  </a:txBody>
-                  <a:tcPr>
-                    <a:solidFill>
-                      <a:srgbClr val="1B3A6B"/>
-                    </a:solidFill>
-                  </a:tcPr>
-                </a:tc>
-              </a:tr>
-              <a:tr h="307800">
-                <a:tc>
-                  <a:txBody>
-                    <a:bodyPr/>
-                    <a:lstStyle/>
-                    <a:p>
-                      <a:pPr algn="l"/>
-                      <a:r>
-                        <a:rPr sz="800" b="0" i="0">
-                          <a:solidFill>
-                            <a:srgbClr val="0D0D0D"/>
-                          </a:solidFill>
-                          <a:latin typeface="Calibri"/>
-                        </a:rPr>
-                        <a:t>Cours actuel (253,68)</a:t>
-                      </a:r>
-                    </a:p>
-                  </a:txBody>
-                  <a:tcPr>
-                    <a:solidFill>
-                      <a:srgbClr val="EEF3FA"/>
-                    </a:solidFill>
-                  </a:tcPr>
-                </a:tc>
-                <a:tc>
-                  <a:txBody>
-                    <a:bodyPr/>
-                    <a:lstStyle/>
-                    <a:p>
-                      <a:pPr algn="ctr"/>
-                      <a:r>
-                        <a:rPr sz="800" b="0" i="0">
-                          <a:solidFill>
-                            <a:srgbClr val="0D0D0D"/>
-                          </a:solidFill>
-                          <a:latin typeface="Calibri"/>
-                        </a:rPr>
-                        <a:t>—</a:t>
-                      </a:r>
-                    </a:p>
-                  </a:txBody>
-                  <a:tcPr>
-                    <a:solidFill>
-                      <a:srgbClr val="EEF3FA"/>
-                    </a:solidFill>
-                  </a:tcPr>
-                </a:tc>
-                <a:tc>
-                  <a:txBody>
-                    <a:bodyPr/>
-                    <a:lstStyle/>
-                    <a:p>
-                      <a:pPr algn="ctr"/>
-                      <a:r>
-                        <a:rPr sz="800" b="0" i="0">
-                          <a:solidFill>
-                            <a:srgbClr val="0D0D0D"/>
-                          </a:solidFill>
-                          <a:latin typeface="Calibri"/>
-                        </a:rPr>
-                        <a:t>—</a:t>
-                      </a:r>
-                    </a:p>
-                  </a:txBody>
-                  <a:tcPr>
-                    <a:solidFill>
-                      <a:srgbClr val="EEF3FA"/>
-                    </a:solidFill>
-                  </a:tcPr>
-                </a:tc>
-                <a:tc>
-                  <a:txBody>
-                    <a:bodyPr/>
-                    <a:lstStyle/>
-                    <a:p>
-                      <a:pPr algn="ctr"/>
-                      <a:r>
-                        <a:rPr sz="800" b="0" i="0">
-                          <a:solidFill>
-                            <a:srgbClr val="0D0D0D"/>
-                          </a:solidFill>
-                          <a:latin typeface="Calibri"/>
-                        </a:rPr>
-                        <a:t>253,68</a:t>
-                      </a:r>
-                    </a:p>
-                  </a:txBody>
-                  <a:tcPr>
-                    <a:solidFill>
-                      <a:srgbClr val="EEF3FA"/>
-                    </a:solidFill>
-                  </a:tcPr>
-                </a:tc>
-              </a:tr>
-            </a:tbl>
-          </a:graphicData>
-        </a:graphic>
-      </p:graphicFrame>
+      <p:pic>
+        <p:nvPicPr>
+          <p:cNvPr id="17" name="Picture 16" descr="image.png"/>
+          <p:cNvPicPr>
+            <a:picLocks noChangeAspect="1"/>
+          </p:cNvPicPr>
+          <p:nvPr/>
+        </p:nvPicPr>
+        <p:blipFill>
+          <a:blip r:embed="rId2"/>
+          <a:stretch>
+            <a:fillRect/>
+          </a:stretch>
+        </p:blipFill>
+        <p:spPr>
+          <a:xfrm>
+            <a:off x="367200" y="914400"/>
+            <a:ext cx="8413200" cy="1980000"/>
+          </a:xfrm>
+          <a:prstGeom prst="rect">
+            <a:avLst/>
+          </a:prstGeom>
+        </p:spPr>
+      </p:pic>
+      <p:sp>
+        <p:nvSpPr>
+          <p:cNvPr id="18" name="TextBox 17"/>
+          <p:cNvSpPr txBox="1"/>
+          <p:nvPr/>
+        </p:nvSpPr>
+        <p:spPr>
+          <a:xfrm>
+            <a:off x="367200" y="3528000"/>
+            <a:ext cx="8413200" cy="914400"/>
+          </a:xfrm>
+          <a:prstGeom prst="rect">
+            <a:avLst/>
+          </a:prstGeom>
+          <a:noFill/>
+        </p:spPr>
+        <p:txBody>
+          <a:bodyPr wrap="square">
+            <a:spAutoFit/>
+          </a:bodyPr>
+          <a:lstStyle/>
+          <a:p>
+            <a:pPr algn="l"/>
+            <a:r>
+              <a:rPr sz="850" b="0" i="0">
+                <a:solidFill>
+                  <a:srgbClr val="555555"/>
+                </a:solidFill>
+                <a:latin typeface="Calibri"/>
+              </a:rPr>
+              <a:t>La DCF d'Apple implique un WACC de 10,3% et un TGR de 3,0%.</a:t>
+            </a:r>
+          </a:p>
+        </p:txBody>
+      </p:sp>
     </p:spTree>
   </p:cSld>
   <p:clrMapOvr>
@@ -12387,7 +13265,7 @@
                 </a:solidFill>
                 <a:latin typeface="Calibri"/>
               </a:rPr>
-              <a:t>Risque 1</a:t>
+              <a:t>Risque Concurrentiel</a:t>
             </a:r>
           </a:p>
         </p:txBody>
@@ -12422,7 +13300,7 @@
                 </a:solidFill>
                 <a:latin typeface="Calibri"/>
               </a:rPr>
-              <a:t>Risque macro-economique : remontee des taux ou ralentissement de la demande mondiale.</a:t>
+              <a:t>AAPL est surévaluée avec un P/E de 33,23x, dépassant la moyenne sectorielle de 10%</a:t>
             </a:r>
           </a:p>
         </p:txBody>
@@ -12543,7 +13421,7 @@
                 </a:solidFill>
                 <a:latin typeface="Calibri"/>
               </a:rPr>
-              <a:t>Risque 2</a:t>
+              <a:t>Risque Sectoriel</a:t>
             </a:r>
           </a:p>
         </p:txBody>
@@ -12578,7 +13456,7 @@
                 </a:solidFill>
                 <a:latin typeface="Calibri"/>
               </a:rPr>
-              <a:t>Risque sectoriel : intensification de la concurrence ou disruption technologique.</a:t>
+              <a:t>Les ratios de marge bénéficiaire sont sous pression debido à la concurrence accrue, avec une marge brute de 46,9% qui pourrait baisser de 2% d'ici 2026</a:t>
             </a:r>
           </a:p>
         </p:txBody>
@@ -12699,7 +13577,7 @@
                 </a:solidFill>
                 <a:latin typeface="Calibri"/>
               </a:rPr>
-              <a:t>Risque 3</a:t>
+              <a:t>Risque Financier</a:t>
             </a:r>
           </a:p>
         </p:txBody>
@@ -12734,7 +13612,7 @@
                 </a:solidFill>
                 <a:latin typeface="Calibri"/>
               </a:rPr>
-              <a:t>Risque specifique : deterioration des marges ou execution strategique.</a:t>
+              <a:t>Le déclin du marché des smartphones pourrait impacter les ventes d'AAPL, avec une croissance des revenus prévue à seulement 6,4% en 2025</a:t>
             </a:r>
           </a:p>
         </p:txBody>
@@ -12948,7 +13826,7 @@
                           </a:solidFill>
                           <a:latin typeface="Calibri"/>
                         </a:rPr>
-                        <a:t>Remontée des taux directeurs &gt; 200bps</a:t>
+                        <a:t>Récession économique</a:t>
                       </a:r>
                     </a:p>
                   </a:txBody>
@@ -13019,7 +13897,7 @@
                           </a:solidFill>
                           <a:latin typeface="Calibri"/>
                         </a:rPr>
-                        <a:t>Rupture technologique remettant en cause le modèle</a:t>
+                        <a:t>Concurrence accrue dans le secteur des smartphones</a:t>
                       </a:r>
                     </a:p>
                   </a:txBody>
@@ -13067,7 +13945,7 @@
                           </a:solidFill>
                           <a:latin typeface="Calibri"/>
                         </a:rPr>
-                        <a:t>Société</a:t>
+                        <a:t>Societe</a:t>
                       </a:r>
                     </a:p>
                   </a:txBody>
@@ -13090,7 +13968,7 @@
                           </a:solidFill>
                           <a:latin typeface="Calibri"/>
                         </a:rPr>
-                        <a:t>Détérioration matérielle des marges opérationnelles</a:t>
+                        <a:t>Problèmes de production d'iPhones</a:t>
                       </a:r>
                     </a:p>
                   </a:txBody>
@@ -13113,7 +13991,7 @@
                           </a:solidFill>
                           <a:latin typeface="Calibri"/>
                         </a:rPr>
-                        <a:t>2-3 trim.</a:t>
+                        <a:t>2-3 trimestres</a:t>
                       </a:r>
                     </a:p>
                   </a:txBody>
@@ -14096,7 +14974,7 @@
                 </a:solidFill>
                 <a:latin typeface="Calibri"/>
               </a:rPr>
-              <a:t>Positif</a:t>
+              <a:t>Neutre +</a:t>
             </a:r>
           </a:p>
         </p:txBody>
@@ -14166,7 +15044,7 @@
                 </a:solidFill>
                 <a:latin typeface="Calibri"/>
               </a:rPr>
-              <a:t>Score agrege : +0,195</a:t>
+              <a:t>Score agrege : +0,017</a:t>
             </a:r>
           </a:p>
         </p:txBody>
@@ -14478,7 +15356,7 @@
                 </a:solidFill>
                 <a:latin typeface="Calibri"/>
               </a:rPr>
-              <a:t>43,3 %</a:t>
+              <a:t>45,0 %</a:t>
             </a:r>
           </a:p>
         </p:txBody>
@@ -14669,7 +15547,7 @@
                 </a:solidFill>
                 <a:latin typeface="Calibri"/>
               </a:rPr>
-              <a:t>HOLD</a:t>
+              <a:t>BUY</a:t>
             </a:r>
           </a:p>
         </p:txBody>
@@ -14934,7 +15812,7 @@
                           </a:solidFill>
                           <a:latin typeface="Calibri"/>
                         </a:rPr>
-                        <a:t>13</a:t>
+                        <a:t>7</a:t>
                       </a:r>
                     </a:p>
                   </a:txBody>
@@ -14957,7 +15835,7 @@
                           </a:solidFill>
                           <a:latin typeface="Calibri"/>
                         </a:rPr>
-                        <a:t>+0,433</a:t>
+                        <a:t>+0,284</a:t>
                       </a:r>
                     </a:p>
                   </a:txBody>
@@ -14980,7 +15858,7 @@
                           </a:solidFill>
                           <a:latin typeface="Calibri"/>
                         </a:rPr>
-                        <a:t>Catalyseurs, croissance, résultats</a:t>
+                        <a:t>5G, IA, Sécurité</a:t>
                       </a:r>
                     </a:p>
                   </a:txBody>
@@ -15028,7 +15906,7 @@
                           </a:solidFill>
                           <a:latin typeface="Calibri"/>
                         </a:rPr>
-                        <a:t>9</a:t>
+                        <a:t>15</a:t>
                       </a:r>
                     </a:p>
                   </a:txBody>
@@ -15051,7 +15929,7 @@
                           </a:solidFill>
                           <a:latin typeface="Calibri"/>
                         </a:rPr>
-                        <a:t>+0,329</a:t>
+                        <a:t>+0,450</a:t>
                       </a:r>
                     </a:p>
                   </a:txBody>
@@ -15145,7 +16023,7 @@
                           </a:solidFill>
                           <a:latin typeface="Calibri"/>
                         </a:rPr>
-                        <a:t>+0,238</a:t>
+                        <a:t>+0,267</a:t>
                       </a:r>
                     </a:p>
                   </a:txBody>
@@ -15168,7 +16046,7 @@
                           </a:solidFill>
                           <a:latin typeface="Calibri"/>
                         </a:rPr>
-                        <a:t>Risques macro, concurrence, dette</a:t>
+                        <a:t>Concurrence chinoise, Réglementation, Dépendance aux composants</a:t>
                       </a:r>
                     </a:p>
                   </a:txBody>
@@ -15213,7 +16091,7 @@
                 </a:solidFill>
                 <a:latin typeface="Calibri"/>
               </a:rPr>
-              <a:t>Le sentiment positif (score +0.195) est basé sur 30 articles analysés sur 7 jours. Confiance IA : 43%. Cohérence avec la recommandation HOLD : surveiller.</a:t>
+              <a:t>Le sentiment global de la presse financiere sur AAPL cette semaine est mitigé, avec des nouvelles positives sur les ventes d'iPhone 17 et l'adoption croissante des appareils Apple en Europe, mais également des inquiétudes sur la concurrence et les prix élevés de la mémoire. Les investisseurs attendent avec patience les résultats futurs de l'entreprise, notamment après l'annonce de l'introduction de publicités payantes sur Apple Maps.</a:t>
             </a:r>
           </a:p>
         </p:txBody>
@@ -18121,6 +18999,41 @@
           </a:graphicData>
         </a:graphic>
       </p:graphicFrame>
+      <p:sp>
+        <p:nvSpPr>
+          <p:cNvPr id="21" name="TextBox 20"/>
+          <p:cNvSpPr txBox="1"/>
+          <p:nvPr/>
+        </p:nvSpPr>
+        <p:spPr>
+          <a:xfrm>
+            <a:off x="367200" y="3326400"/>
+            <a:ext cx="8413200" cy="1004400"/>
+          </a:xfrm>
+          <a:prstGeom prst="rect">
+            <a:avLst/>
+          </a:prstGeom>
+          <a:noFill/>
+        </p:spPr>
+        <p:txBody>
+          <a:bodyPr wrap="square">
+            <a:spAutoFit/>
+          </a:bodyPr>
+          <a:lstStyle/>
+          <a:p>
+            <a:pPr algn="l"/>
+            <a:r>
+              <a:rPr sz="850" b="0" i="0">
+                <a:solidFill>
+                  <a:srgbClr val="555555"/>
+                </a:solidFill>
+                <a:latin typeface="Calibri"/>
+              </a:rPr>
+              <a:t>La valorisation d'Apple est élevée par rapport à ses pairs, mais justifiée par sa croissance et ses marges. Le multiple EV/EBITDA est de 26,1x.</a:t>
+            </a:r>
+          </a:p>
+        </p:txBody>
+      </p:sp>
     </p:spTree>
   </p:cSld>
   <p:clrMapOvr>
@@ -18310,7 +19223,7 @@
             <a:avLst/>
           </a:prstGeom>
           <a:solidFill>
-            <a:srgbClr val="FDF6E8"/>
+            <a:srgbClr val="EAF4EF"/>
           </a:solidFill>
           <a:ln>
             <a:noFill/>
@@ -18353,7 +19266,7 @@
             <a:avLst/>
           </a:prstGeom>
           <a:solidFill>
-            <a:srgbClr val="B06000"/>
+            <a:srgbClr val="1A7A4A"/>
           </a:solidFill>
           <a:ln>
             <a:noFill/>
@@ -18407,11 +19320,11 @@
             <a:r>
               <a:rPr sz="1100" b="1" i="0">
                 <a:solidFill>
-                  <a:srgbClr val="B06000"/>
+                  <a:srgbClr val="1A7A4A"/>
                 </a:solidFill>
                 <a:latin typeface="Calibri"/>
               </a:rPr>
-              <a:t>● HOLD</a:t>
+              <a:t>● BUY</a:t>
             </a:r>
           </a:p>
         </p:txBody>
@@ -18446,7 +19359,7 @@
                 </a:solidFill>
                 <a:latin typeface="Calibri"/>
               </a:rPr>
-              <a:t>Prix cible base : — $  ·  Upside : —  ·  Bear : — $ (—)  ·  Bull : — $ (—)</a:t>
+              <a:t>Prix cible base : 270 $  ·  Upside : +6,5 %  ·  Bear : 230 $ (-9,3 %)  ·  Bull : 300 $ (+18,3 %)</a:t>
             </a:r>
           </a:p>
         </p:txBody>
@@ -18602,7 +19515,7 @@
                 </a:solidFill>
                 <a:latin typeface="Calibri"/>
               </a:rPr>
-              <a:t>—</a:t>
+              <a:t>Marque forte</a:t>
             </a:r>
           </a:p>
         </p:txBody>
@@ -18637,7 +19550,7 @@
                 </a:solidFill>
                 <a:latin typeface="Calibri"/>
               </a:rPr>
-              <a:t>—</a:t>
+              <a:t>La croissance des revenus d'Apple sera drivée par la vente d'iPhones 5G</a:t>
             </a:r>
           </a:p>
         </p:txBody>
@@ -18715,7 +19628,7 @@
                 </a:solidFill>
                 <a:latin typeface="Calibri"/>
               </a:rPr>
-              <a:t>—</a:t>
+              <a:t>Innovation</a:t>
             </a:r>
           </a:p>
         </p:txBody>
@@ -18750,7 +19663,7 @@
                 </a:solidFill>
                 <a:latin typeface="Calibri"/>
               </a:rPr>
-              <a:t>—</a:t>
+              <a:t>La mise à jour des Macs et des iPads sera un catalyseur de croissance</a:t>
             </a:r>
           </a:p>
         </p:txBody>
@@ -18828,7 +19741,7 @@
                 </a:solidFill>
                 <a:latin typeface="Calibri"/>
               </a:rPr>
-              <a:t>—</a:t>
+              <a:t>Écosystème</a:t>
             </a:r>
           </a:p>
         </p:txBody>
@@ -18863,7 +19776,7 @@
                 </a:solidFill>
                 <a:latin typeface="Calibri"/>
               </a:rPr>
-              <a:t>—</a:t>
+              <a:t>Les services d'Apple devraient générer 50 milliards de dollars de revenus en 2026</a:t>
             </a:r>
           </a:p>
         </p:txBody>
@@ -19019,7 +19932,7 @@
                 </a:solidFill>
                 <a:latin typeface="Calibri"/>
               </a:rPr>
-              <a:t>—</a:t>
+              <a:t>Concurrence</a:t>
             </a:r>
           </a:p>
         </p:txBody>
@@ -19054,7 +19967,7 @@
                 </a:solidFill>
                 <a:latin typeface="Calibri"/>
               </a:rPr>
-              <a:t>—</a:t>
+              <a:t>Concurrence chinoise</a:t>
             </a:r>
           </a:p>
         </p:txBody>
@@ -19132,7 +20045,7 @@
                 </a:solidFill>
                 <a:latin typeface="Calibri"/>
               </a:rPr>
-              <a:t>—</a:t>
+              <a:t>Dépendance aux iPhones</a:t>
             </a:r>
           </a:p>
         </p:txBody>
@@ -19167,7 +20080,7 @@
                 </a:solidFill>
                 <a:latin typeface="Calibri"/>
               </a:rPr>
-              <a:t>—</a:t>
+              <a:t>Réglementation</a:t>
             </a:r>
           </a:p>
         </p:txBody>
@@ -19245,7 +20158,7 @@
                 </a:solidFill>
                 <a:latin typeface="Calibri"/>
               </a:rPr>
-              <a:t>—</a:t>
+              <a:t>Réglementation</a:t>
             </a:r>
           </a:p>
         </p:txBody>
@@ -19280,7 +20193,7 @@
                 </a:solidFill>
                 <a:latin typeface="Calibri"/>
               </a:rPr>
-              <a:t>—</a:t>
+              <a:t>Dépendance aux composants</a:t>
             </a:r>
           </a:p>
         </p:txBody>
@@ -19487,7 +20400,7 @@
                 </a:solidFill>
                 <a:latin typeface="Calibri"/>
               </a:rPr>
-              <a:t>26,2x</a:t>
+              <a:t>26,1x</a:t>
             </a:r>
           </a:p>
         </p:txBody>
@@ -19557,7 +20470,7 @@
                 </a:solidFill>
                 <a:latin typeface="Calibri"/>
               </a:rPr>
-              <a:t>vs — médiane peers</a:t>
+              <a:t>vs 15,0x médiane peers</a:t>
             </a:r>
           </a:p>
         </p:txBody>
@@ -19869,7 +20782,7 @@
                 </a:solidFill>
                 <a:latin typeface="Calibri"/>
               </a:rPr>
-              <a:t>— $</a:t>
+              <a:t>270 $</a:t>
             </a:r>
           </a:p>
         </p:txBody>
@@ -19939,7 +20852,7 @@
                 </a:solidFill>
                 <a:latin typeface="Calibri"/>
               </a:rPr>
-              <a:t>Upside de — vs cours</a:t>
+              <a:t>Upside de +6,5 % vs cours</a:t>
             </a:r>
           </a:p>
         </p:txBody>
@@ -20060,7 +20973,7 @@
                 </a:solidFill>
                 <a:latin typeface="Calibri"/>
               </a:rPr>
-              <a:t>+0,195</a:t>
+              <a:t>+0,017</a:t>
             </a:r>
           </a:p>
         </p:txBody>
@@ -20130,7 +21043,7 @@
                 </a:solidFill>
                 <a:latin typeface="Calibri"/>
               </a:rPr>
-              <a:t>Positif  ·  30 articles</a:t>
+              <a:t>Neutre +  ·  30 articles</a:t>
             </a:r>
           </a:p>
         </p:txBody>
@@ -20850,7 +21763,7 @@
                 </a:solidFill>
                 <a:latin typeface="Calibri"/>
               </a:rPr>
-              <a:t>253,68 $</a:t>
+              <a:t>253,53 $</a:t>
             </a:r>
           </a:p>
         </p:txBody>
@@ -21318,7 +22231,7 @@
                 </a:solidFill>
                 <a:latin typeface="Calibri"/>
               </a:rPr>
-              <a:t>+19,9 %</a:t>
+              <a:t>+19,8 %</a:t>
             </a:r>
           </a:p>
         </p:txBody>
@@ -22347,8 +23260,8 @@
         </p:nvSpPr>
         <p:spPr>
           <a:xfrm>
-            <a:off x="7854300" y="2836118"/>
-            <a:ext cx="498636" cy="1059081"/>
+            <a:off x="7854300" y="2838875"/>
+            <a:ext cx="498636" cy="1056324"/>
           </a:xfrm>
           <a:prstGeom prst="rect">
             <a:avLst/>
@@ -22725,6 +23638,41 @@
                 <a:latin typeface="Calibri"/>
               </a:rPr>
               <a:t>278</a:t>
+            </a:r>
+          </a:p>
+        </p:txBody>
+      </p:sp>
+      <p:sp>
+        <p:nvSpPr>
+          <p:cNvPr id="68" name="TextBox 67"/>
+          <p:cNvSpPr txBox="1"/>
+          <p:nvPr/>
+        </p:nvSpPr>
+        <p:spPr>
+          <a:xfrm>
+            <a:off x="367200" y="4132800"/>
+            <a:ext cx="8413200" cy="687600"/>
+          </a:xfrm>
+          <a:prstGeom prst="rect">
+            <a:avLst/>
+          </a:prstGeom>
+          <a:noFill/>
+        </p:spPr>
+        <p:txBody>
+          <a:bodyPr wrap="square">
+            <a:spAutoFit/>
+          </a:bodyPr>
+          <a:lstStyle/>
+          <a:p>
+            <a:pPr algn="l"/>
+            <a:r>
+              <a:rPr sz="850" b="0" i="0">
+                <a:solidFill>
+                  <a:srgbClr val="555555"/>
+                </a:solidFill>
+                <a:latin typeface="Calibri"/>
+              </a:rPr>
+              <a:t>Apple Inc. est une entreprise de technologie leader avec une position forte sur le marché. La croissance des revenus et des marges est attendue.</a:t>
             </a:r>
           </a:p>
         </p:txBody>
@@ -23767,7 +24715,7 @@
                 </a:solidFill>
                 <a:latin typeface="Calibri"/>
               </a:rPr>
-              <a:t>Risques structurels &amp; thèse contraire</a:t>
+              <a:t>Concurrence  ·  Dépendance aux iPhones</a:t>
             </a:r>
           </a:p>
         </p:txBody>
@@ -25001,21 +25949,64 @@
                 </a:solidFill>
                 <a:latin typeface="Calibri"/>
               </a:rPr>
-              <a:t>—</a:t>
+              <a:t>Apple Inc. est une entreprise de technologie qui conçoit, produit et commercialise des produits électroniques. Elle est leader sur le marché des smartphones et des ordinateurs portables. L'avantage concurrentiel d'Apple réside dans sa marque forte et sa capacité à innover. L'entreprise articule son activité autour de deux segments stratégiques :</a:t>
             </a:r>
           </a:p>
         </p:txBody>
       </p:sp>
       <p:sp>
         <p:nvSpPr>
-          <p:cNvPr id="20" name="TextBox 19"/>
+          <p:cNvPr id="20" name="Rectangle 19"/>
+          <p:cNvSpPr/>
+          <p:nvPr/>
+        </p:nvSpPr>
+        <p:spPr>
+          <a:xfrm>
+            <a:off x="503999" y="2599200"/>
+            <a:ext cx="64800" cy="64800"/>
+          </a:xfrm>
+          <a:prstGeom prst="rect">
+            <a:avLst/>
+          </a:prstGeom>
+          <a:solidFill>
+            <a:srgbClr val="2E5FA3"/>
+          </a:solidFill>
+          <a:ln>
+            <a:noFill/>
+          </a:ln>
+        </p:spPr>
+        <p:style>
+          <a:lnRef idx="1">
+            <a:schemeClr val="accent1"/>
+          </a:lnRef>
+          <a:fillRef idx="3">
+            <a:schemeClr val="accent1"/>
+          </a:fillRef>
+          <a:effectRef idx="2">
+            <a:schemeClr val="accent1"/>
+          </a:effectRef>
+          <a:fontRef idx="minor">
+            <a:schemeClr val="lt1"/>
+          </a:fontRef>
+        </p:style>
+        <p:txBody>
+          <a:bodyPr rtlCol="0" anchor="ctr"/>
+          <a:lstStyle/>
+          <a:p>
+            <a:pPr algn="ctr"/>
+          </a:p>
+        </p:txBody>
+      </p:sp>
+      <p:sp>
+        <p:nvSpPr>
+          <p:cNvPr id="21" name="TextBox 20"/>
           <p:cNvSpPr txBox="1"/>
           <p:nvPr/>
         </p:nvSpPr>
         <p:spPr>
           <a:xfrm>
-            <a:off x="503999" y="2358000"/>
-            <a:ext cx="4662000" cy="183600"/>
+            <a:off x="619200" y="2556000"/>
+            <a:ext cx="4338000" cy="165600"/>
           </a:xfrm>
           <a:prstGeom prst="rect">
             <a:avLst/>
@@ -25030,20 +26021,168 @@
           <a:p>
             <a:pPr algn="l"/>
             <a:r>
-              <a:rPr sz="900" b="1" i="0">
+              <a:rPr sz="850" b="1" i="0">
                 <a:solidFill>
-                  <a:srgbClr val="1B3A6B"/>
+                  <a:srgbClr val="0D0D0D"/>
                 </a:solidFill>
                 <a:latin typeface="Calibri"/>
               </a:rPr>
-              <a:t>Positionnement stratégique</a:t>
+              <a:t>Produits</a:t>
             </a:r>
           </a:p>
         </p:txBody>
       </p:sp>
       <p:sp>
         <p:nvSpPr>
-          <p:cNvPr id="21" name="Rectangle 20"/>
+          <p:cNvPr id="22" name="TextBox 21"/>
+          <p:cNvSpPr txBox="1"/>
+          <p:nvPr/>
+        </p:nvSpPr>
+        <p:spPr>
+          <a:xfrm>
+            <a:off x="619200" y="2714400"/>
+            <a:ext cx="4338000" cy="144000"/>
+          </a:xfrm>
+          <a:prstGeom prst="rect">
+            <a:avLst/>
+          </a:prstGeom>
+          <a:noFill/>
+        </p:spPr>
+        <p:txBody>
+          <a:bodyPr wrap="square">
+            <a:spAutoFit/>
+          </a:bodyPr>
+          <a:lstStyle/>
+          <a:p>
+            <a:pPr algn="l"/>
+            <a:r>
+              <a:rPr sz="750" b="0" i="1">
+                <a:solidFill>
+                  <a:srgbClr val="555555"/>
+                </a:solidFill>
+                <a:latin typeface="Calibri"/>
+              </a:rPr>
+              <a:t>Les produits d'Apple incluent les iPhones, les Macs et les iPads. Les revenus de cette section…</a:t>
+            </a:r>
+          </a:p>
+        </p:txBody>
+      </p:sp>
+      <p:sp>
+        <p:nvSpPr>
+          <p:cNvPr id="23" name="Rectangle 22"/>
+          <p:cNvSpPr/>
+          <p:nvPr/>
+        </p:nvSpPr>
+        <p:spPr>
+          <a:xfrm>
+            <a:off x="503999" y="2941199"/>
+            <a:ext cx="64800" cy="64800"/>
+          </a:xfrm>
+          <a:prstGeom prst="rect">
+            <a:avLst/>
+          </a:prstGeom>
+          <a:solidFill>
+            <a:srgbClr val="2E5FA3"/>
+          </a:solidFill>
+          <a:ln>
+            <a:noFill/>
+          </a:ln>
+        </p:spPr>
+        <p:style>
+          <a:lnRef idx="1">
+            <a:schemeClr val="accent1"/>
+          </a:lnRef>
+          <a:fillRef idx="3">
+            <a:schemeClr val="accent1"/>
+          </a:fillRef>
+          <a:effectRef idx="2">
+            <a:schemeClr val="accent1"/>
+          </a:effectRef>
+          <a:fontRef idx="minor">
+            <a:schemeClr val="lt1"/>
+          </a:fontRef>
+        </p:style>
+        <p:txBody>
+          <a:bodyPr rtlCol="0" anchor="ctr"/>
+          <a:lstStyle/>
+          <a:p>
+            <a:pPr algn="ctr"/>
+          </a:p>
+        </p:txBody>
+      </p:sp>
+      <p:sp>
+        <p:nvSpPr>
+          <p:cNvPr id="24" name="TextBox 23"/>
+          <p:cNvSpPr txBox="1"/>
+          <p:nvPr/>
+        </p:nvSpPr>
+        <p:spPr>
+          <a:xfrm>
+            <a:off x="619200" y="2897999"/>
+            <a:ext cx="4338000" cy="165600"/>
+          </a:xfrm>
+          <a:prstGeom prst="rect">
+            <a:avLst/>
+          </a:prstGeom>
+          <a:noFill/>
+        </p:spPr>
+        <p:txBody>
+          <a:bodyPr wrap="square">
+            <a:spAutoFit/>
+          </a:bodyPr>
+          <a:lstStyle/>
+          <a:p>
+            <a:pPr algn="l"/>
+            <a:r>
+              <a:rPr sz="850" b="1" i="0">
+                <a:solidFill>
+                  <a:srgbClr val="0D0D0D"/>
+                </a:solidFill>
+                <a:latin typeface="Calibri"/>
+              </a:rPr>
+              <a:t>Services</a:t>
+            </a:r>
+          </a:p>
+        </p:txBody>
+      </p:sp>
+      <p:sp>
+        <p:nvSpPr>
+          <p:cNvPr id="25" name="TextBox 24"/>
+          <p:cNvSpPr txBox="1"/>
+          <p:nvPr/>
+        </p:nvSpPr>
+        <p:spPr>
+          <a:xfrm>
+            <a:off x="619200" y="3056399"/>
+            <a:ext cx="4338000" cy="144000"/>
+          </a:xfrm>
+          <a:prstGeom prst="rect">
+            <a:avLst/>
+          </a:prstGeom>
+          <a:noFill/>
+        </p:spPr>
+        <p:txBody>
+          <a:bodyPr wrap="square">
+            <a:spAutoFit/>
+          </a:bodyPr>
+          <a:lstStyle/>
+          <a:p>
+            <a:pPr algn="l"/>
+            <a:r>
+              <a:rPr sz="750" b="0" i="1">
+                <a:solidFill>
+                  <a:srgbClr val="555555"/>
+                </a:solidFill>
+                <a:latin typeface="Calibri"/>
+              </a:rPr>
+              <a:t>Les services d'Apple incluent la musique, les films et les applications. Les revenus de cette…</a:t>
+            </a:r>
+          </a:p>
+        </p:txBody>
+      </p:sp>
+      <p:sp>
+        <p:nvSpPr>
+          <p:cNvPr id="26" name="Rectangle 25"/>
           <p:cNvSpPr/>
           <p:nvPr/>
         </p:nvSpPr>
@@ -25086,7 +26225,7 @@
       </p:sp>
       <p:sp>
         <p:nvSpPr>
-          <p:cNvPr id="22" name="Rectangle 21"/>
+          <p:cNvPr id="27" name="Rectangle 26"/>
           <p:cNvSpPr/>
           <p:nvPr/>
         </p:nvSpPr>
@@ -25129,7 +26268,7 @@
       </p:sp>
       <p:sp>
         <p:nvSpPr>
-          <p:cNvPr id="23" name="TextBox 22"/>
+          <p:cNvPr id="28" name="TextBox 27"/>
           <p:cNvSpPr txBox="1"/>
           <p:nvPr/>
         </p:nvSpPr>
@@ -25157,14 +26296,14 @@
                 </a:solidFill>
                 <a:latin typeface="Calibri"/>
               </a:rPr>
-              <a:t>3 724,3 Mds$</a:t>
+              <a:t>3 722,1 Mds$</a:t>
             </a:r>
           </a:p>
         </p:txBody>
       </p:sp>
       <p:sp>
         <p:nvSpPr>
-          <p:cNvPr id="24" name="TextBox 23"/>
+          <p:cNvPr id="29" name="TextBox 28"/>
           <p:cNvSpPr txBox="1"/>
           <p:nvPr/>
         </p:nvSpPr>
@@ -25199,7 +26338,7 @@
       </p:sp>
       <p:sp>
         <p:nvSpPr>
-          <p:cNvPr id="25" name="Rectangle 24"/>
+          <p:cNvPr id="30" name="Rectangle 29"/>
           <p:cNvSpPr/>
           <p:nvPr/>
         </p:nvSpPr>
@@ -25242,7 +26381,7 @@
       </p:sp>
       <p:sp>
         <p:nvSpPr>
-          <p:cNvPr id="26" name="Rectangle 25"/>
+          <p:cNvPr id="31" name="Rectangle 30"/>
           <p:cNvSpPr/>
           <p:nvPr/>
         </p:nvSpPr>
@@ -25285,7 +26424,7 @@
       </p:sp>
       <p:sp>
         <p:nvSpPr>
-          <p:cNvPr id="27" name="TextBox 26"/>
+          <p:cNvPr id="32" name="TextBox 31"/>
           <p:cNvSpPr txBox="1"/>
           <p:nvPr/>
         </p:nvSpPr>
@@ -25320,7 +26459,7 @@
       </p:sp>
       <p:sp>
         <p:nvSpPr>
-          <p:cNvPr id="28" name="TextBox 27"/>
+          <p:cNvPr id="33" name="TextBox 32"/>
           <p:cNvSpPr txBox="1"/>
           <p:nvPr/>
         </p:nvSpPr>
@@ -25355,7 +26494,7 @@
       </p:sp>
       <p:sp>
         <p:nvSpPr>
-          <p:cNvPr id="29" name="Rectangle 28"/>
+          <p:cNvPr id="34" name="Rectangle 33"/>
           <p:cNvSpPr/>
           <p:nvPr/>
         </p:nvSpPr>
@@ -25398,7 +26537,7 @@
       </p:sp>
       <p:sp>
         <p:nvSpPr>
-          <p:cNvPr id="30" name="Rectangle 29"/>
+          <p:cNvPr id="35" name="Rectangle 34"/>
           <p:cNvSpPr/>
           <p:nvPr/>
         </p:nvSpPr>
@@ -25441,7 +26580,7 @@
       </p:sp>
       <p:sp>
         <p:nvSpPr>
-          <p:cNvPr id="31" name="TextBox 30"/>
+          <p:cNvPr id="36" name="TextBox 35"/>
           <p:cNvSpPr txBox="1"/>
           <p:nvPr/>
         </p:nvSpPr>
@@ -25469,14 +26608,14 @@
                 </a:solidFill>
                 <a:latin typeface="Calibri"/>
               </a:rPr>
-              <a:t>253,68 $</a:t>
+              <a:t>253,53 $</a:t>
             </a:r>
           </a:p>
         </p:txBody>
       </p:sp>
       <p:sp>
         <p:nvSpPr>
-          <p:cNvPr id="32" name="TextBox 31"/>
+          <p:cNvPr id="37" name="TextBox 36"/>
           <p:cNvSpPr txBox="1"/>
           <p:nvPr/>
         </p:nvSpPr>
@@ -25511,7 +26650,7 @@
       </p:sp>
       <p:sp>
         <p:nvSpPr>
-          <p:cNvPr id="33" name="Rectangle 32"/>
+          <p:cNvPr id="38" name="Rectangle 37"/>
           <p:cNvSpPr/>
           <p:nvPr/>
         </p:nvSpPr>
@@ -25554,7 +26693,7 @@
       </p:sp>
       <p:sp>
         <p:nvSpPr>
-          <p:cNvPr id="34" name="Rectangle 33"/>
+          <p:cNvPr id="39" name="Rectangle 38"/>
           <p:cNvSpPr/>
           <p:nvPr/>
         </p:nvSpPr>
@@ -25597,7 +26736,7 @@
       </p:sp>
       <p:sp>
         <p:nvSpPr>
-          <p:cNvPr id="35" name="TextBox 34"/>
+          <p:cNvPr id="40" name="TextBox 39"/>
           <p:cNvSpPr txBox="1"/>
           <p:nvPr/>
         </p:nvSpPr>
@@ -25625,14 +26764,14 @@
                 </a:solidFill>
                 <a:latin typeface="Calibri"/>
               </a:rPr>
-              <a:t>26,2x</a:t>
+              <a:t>26,1x</a:t>
             </a:r>
           </a:p>
         </p:txBody>
       </p:sp>
       <p:sp>
         <p:nvSpPr>
-          <p:cNvPr id="36" name="TextBox 35"/>
+          <p:cNvPr id="41" name="TextBox 40"/>
           <p:cNvSpPr txBox="1"/>
           <p:nvPr/>
         </p:nvSpPr>
@@ -25667,7 +26806,7 @@
       </p:sp>
       <p:sp>
         <p:nvSpPr>
-          <p:cNvPr id="37" name="TextBox 36"/>
+          <p:cNvPr id="42" name="TextBox 41"/>
           <p:cNvSpPr txBox="1"/>
           <p:nvPr/>
         </p:nvSpPr>
@@ -26308,7 +27447,7 @@
         <p:spPr>
           <a:xfrm>
             <a:off x="367200" y="961200"/>
-            <a:ext cx="2731199" cy="3520800"/>
+            <a:ext cx="4150800" cy="3520800"/>
           </a:xfrm>
           <a:prstGeom prst="rect">
             <a:avLst/>
@@ -26351,7 +27490,7 @@
         <p:spPr>
           <a:xfrm>
             <a:off x="367200" y="961200"/>
-            <a:ext cx="2731199" cy="54000"/>
+            <a:ext cx="4150800" cy="54000"/>
           </a:xfrm>
           <a:prstGeom prst="rect">
             <a:avLst/>
@@ -26394,7 +27533,7 @@
         <p:spPr>
           <a:xfrm>
             <a:off x="457200" y="1141200"/>
-            <a:ext cx="2551199" cy="640800"/>
+            <a:ext cx="3970800" cy="640800"/>
           </a:xfrm>
           <a:prstGeom prst="rect">
             <a:avLst/>
@@ -26415,7 +27554,7 @@
                 </a:solidFill>
                 <a:latin typeface="Calibri"/>
               </a:rPr>
-              <a:t>—</a:t>
+              <a:t>80%</a:t>
             </a:r>
           </a:p>
         </p:txBody>
@@ -26429,7 +27568,7 @@
         <p:spPr>
           <a:xfrm>
             <a:off x="457200" y="1785600"/>
-            <a:ext cx="2551199" cy="108000"/>
+            <a:ext cx="3970800" cy="108000"/>
           </a:xfrm>
           <a:prstGeom prst="rect">
             <a:avLst/>
@@ -26464,7 +27603,7 @@
         <p:spPr>
           <a:xfrm>
             <a:off x="457200" y="1965600"/>
-            <a:ext cx="2551199" cy="18000"/>
+            <a:ext cx="3970800" cy="18000"/>
           </a:xfrm>
           <a:prstGeom prst="rect">
             <a:avLst/>
@@ -26507,7 +27646,7 @@
         <p:spPr>
           <a:xfrm>
             <a:off x="457200" y="2059200"/>
-            <a:ext cx="2551199" cy="255600"/>
+            <a:ext cx="3970800" cy="255600"/>
           </a:xfrm>
           <a:prstGeom prst="rect">
             <a:avLst/>
@@ -26528,7 +27667,7 @@
                 </a:solidFill>
                 <a:latin typeface="Calibri"/>
               </a:rPr>
-              <a:t>Core Business</a:t>
+              <a:t>Produits</a:t>
             </a:r>
           </a:p>
         </p:txBody>
@@ -26542,7 +27681,7 @@
         <p:spPr>
           <a:xfrm>
             <a:off x="457200" y="2332800"/>
-            <a:ext cx="2551199" cy="2041199"/>
+            <a:ext cx="3970800" cy="2041199"/>
           </a:xfrm>
           <a:prstGeom prst="rect">
             <a:avLst/>
@@ -26563,7 +27702,7 @@
                 </a:solidFill>
                 <a:latin typeface="Calibri"/>
               </a:rPr>
-              <a:t>—</a:t>
+              <a:t>Les produits d'Apple incluent les iPhones, les Macs et les iPads. Les revenus de cette section proviennent de la vente de ces produits. Les clients cibles sont les particuliers et les entreprises.</a:t>
             </a:r>
           </a:p>
         </p:txBody>
@@ -26576,8 +27715,8 @@
         </p:nvSpPr>
         <p:spPr>
           <a:xfrm>
-            <a:off x="3206400" y="961200"/>
-            <a:ext cx="2731199" cy="3520800"/>
+            <a:off x="4626000" y="961200"/>
+            <a:ext cx="4150800" cy="3520800"/>
           </a:xfrm>
           <a:prstGeom prst="rect">
             <a:avLst/>
@@ -26619,8 +27758,8 @@
         </p:nvSpPr>
         <p:spPr>
           <a:xfrm>
-            <a:off x="3206400" y="961200"/>
-            <a:ext cx="2731199" cy="54000"/>
+            <a:off x="4626000" y="961200"/>
+            <a:ext cx="4150800" cy="54000"/>
           </a:xfrm>
           <a:prstGeom prst="rect">
             <a:avLst/>
@@ -26662,8 +27801,8 @@
         </p:nvSpPr>
         <p:spPr>
           <a:xfrm>
-            <a:off x="3296400" y="1141200"/>
-            <a:ext cx="2551199" cy="640800"/>
+            <a:off x="4716000" y="1141200"/>
+            <a:ext cx="3970800" cy="640800"/>
           </a:xfrm>
           <a:prstGeom prst="rect">
             <a:avLst/>
@@ -26684,7 +27823,7 @@
                 </a:solidFill>
                 <a:latin typeface="Calibri"/>
               </a:rPr>
-              <a:t>—</a:t>
+              <a:t>20%</a:t>
             </a:r>
           </a:p>
         </p:txBody>
@@ -26697,8 +27836,8 @@
         </p:nvSpPr>
         <p:spPr>
           <a:xfrm>
-            <a:off x="3296400" y="1785600"/>
-            <a:ext cx="2551199" cy="108000"/>
+            <a:off x="4716000" y="1785600"/>
+            <a:ext cx="3970800" cy="108000"/>
           </a:xfrm>
           <a:prstGeom prst="rect">
             <a:avLst/>
@@ -26732,8 +27871,8 @@
         </p:nvSpPr>
         <p:spPr>
           <a:xfrm>
-            <a:off x="3296400" y="1965600"/>
-            <a:ext cx="2551199" cy="18000"/>
+            <a:off x="4716000" y="1965600"/>
+            <a:ext cx="3970800" cy="18000"/>
           </a:xfrm>
           <a:prstGeom prst="rect">
             <a:avLst/>
@@ -26775,8 +27914,8 @@
         </p:nvSpPr>
         <p:spPr>
           <a:xfrm>
-            <a:off x="3296400" y="2059200"/>
-            <a:ext cx="2551199" cy="255600"/>
+            <a:off x="4716000" y="2059200"/>
+            <a:ext cx="3970800" cy="255600"/>
           </a:xfrm>
           <a:prstGeom prst="rect">
             <a:avLst/>
@@ -26797,7 +27936,7 @@
                 </a:solidFill>
                 <a:latin typeface="Calibri"/>
               </a:rPr>
-              <a:t>Growth Driver</a:t>
+              <a:t>Services</a:t>
             </a:r>
           </a:p>
         </p:txBody>
@@ -26810,8 +27949,8 @@
         </p:nvSpPr>
         <p:spPr>
           <a:xfrm>
-            <a:off x="3296400" y="2332800"/>
-            <a:ext cx="2551199" cy="2041199"/>
+            <a:off x="4716000" y="2332800"/>
+            <a:ext cx="3970800" cy="2041199"/>
           </a:xfrm>
           <a:prstGeom prst="rect">
             <a:avLst/>
@@ -26832,276 +27971,7 @@
                 </a:solidFill>
                 <a:latin typeface="Calibri"/>
               </a:rPr>
-              <a:t>—</a:t>
-            </a:r>
-          </a:p>
-        </p:txBody>
-      </p:sp>
-      <p:sp>
-        <p:nvSpPr>
-          <p:cNvPr id="31" name="Rectangle 30"/>
-          <p:cNvSpPr/>
-          <p:nvPr/>
-        </p:nvSpPr>
-        <p:spPr>
-          <a:xfrm>
-            <a:off x="6045600" y="961200"/>
-            <a:ext cx="2731199" cy="3520800"/>
-          </a:xfrm>
-          <a:prstGeom prst="rect">
-            <a:avLst/>
-          </a:prstGeom>
-          <a:solidFill>
-            <a:srgbClr val="F7F8FA"/>
-          </a:solidFill>
-          <a:ln>
-            <a:noFill/>
-          </a:ln>
-        </p:spPr>
-        <p:style>
-          <a:lnRef idx="1">
-            <a:schemeClr val="accent1"/>
-          </a:lnRef>
-          <a:fillRef idx="3">
-            <a:schemeClr val="accent1"/>
-          </a:fillRef>
-          <a:effectRef idx="2">
-            <a:schemeClr val="accent1"/>
-          </a:effectRef>
-          <a:fontRef idx="minor">
-            <a:schemeClr val="lt1"/>
-          </a:fontRef>
-        </p:style>
-        <p:txBody>
-          <a:bodyPr rtlCol="0" anchor="ctr"/>
-          <a:lstStyle/>
-          <a:p>
-            <a:pPr algn="ctr"/>
-          </a:p>
-        </p:txBody>
-      </p:sp>
-      <p:sp>
-        <p:nvSpPr>
-          <p:cNvPr id="32" name="Rectangle 31"/>
-          <p:cNvSpPr/>
-          <p:nvPr/>
-        </p:nvSpPr>
-        <p:spPr>
-          <a:xfrm>
-            <a:off x="6045600" y="961200"/>
-            <a:ext cx="2731199" cy="54000"/>
-          </a:xfrm>
-          <a:prstGeom prst="rect">
-            <a:avLst/>
-          </a:prstGeom>
-          <a:solidFill>
-            <a:srgbClr val="888888"/>
-          </a:solidFill>
-          <a:ln>
-            <a:noFill/>
-          </a:ln>
-        </p:spPr>
-        <p:style>
-          <a:lnRef idx="1">
-            <a:schemeClr val="accent1"/>
-          </a:lnRef>
-          <a:fillRef idx="3">
-            <a:schemeClr val="accent1"/>
-          </a:fillRef>
-          <a:effectRef idx="2">
-            <a:schemeClr val="accent1"/>
-          </a:effectRef>
-          <a:fontRef idx="minor">
-            <a:schemeClr val="lt1"/>
-          </a:fontRef>
-        </p:style>
-        <p:txBody>
-          <a:bodyPr rtlCol="0" anchor="ctr"/>
-          <a:lstStyle/>
-          <a:p>
-            <a:pPr algn="ctr"/>
-          </a:p>
-        </p:txBody>
-      </p:sp>
-      <p:sp>
-        <p:nvSpPr>
-          <p:cNvPr id="33" name="TextBox 32"/>
-          <p:cNvSpPr txBox="1"/>
-          <p:nvPr/>
-        </p:nvSpPr>
-        <p:spPr>
-          <a:xfrm>
-            <a:off x="6135600" y="1141200"/>
-            <a:ext cx="2551199" cy="640800"/>
-          </a:xfrm>
-          <a:prstGeom prst="rect">
-            <a:avLst/>
-          </a:prstGeom>
-          <a:noFill/>
-        </p:spPr>
-        <p:txBody>
-          <a:bodyPr wrap="square">
-            <a:spAutoFit/>
-          </a:bodyPr>
-          <a:lstStyle/>
-          <a:p>
-            <a:pPr algn="l"/>
-            <a:r>
-              <a:rPr sz="2200" b="1" i="0">
-                <a:solidFill>
-                  <a:srgbClr val="888888"/>
-                </a:solidFill>
-                <a:latin typeface="Calibri"/>
-              </a:rPr>
-              <a:t>—</a:t>
-            </a:r>
-          </a:p>
-        </p:txBody>
-      </p:sp>
-      <p:sp>
-        <p:nvSpPr>
-          <p:cNvPr id="34" name="TextBox 33"/>
-          <p:cNvSpPr txBox="1"/>
-          <p:nvPr/>
-        </p:nvSpPr>
-        <p:spPr>
-          <a:xfrm>
-            <a:off x="6135600" y="1785600"/>
-            <a:ext cx="2551199" cy="108000"/>
-          </a:xfrm>
-          <a:prstGeom prst="rect">
-            <a:avLst/>
-          </a:prstGeom>
-          <a:noFill/>
-        </p:spPr>
-        <p:txBody>
-          <a:bodyPr wrap="square">
-            <a:spAutoFit/>
-          </a:bodyPr>
-          <a:lstStyle/>
-          <a:p>
-            <a:pPr algn="l"/>
-            <a:r>
-              <a:rPr sz="900" b="0" i="0">
-                <a:solidFill>
-                  <a:srgbClr val="555555"/>
-                </a:solidFill>
-                <a:latin typeface="Calibri"/>
-              </a:rPr>
-              <a:t>du CA</a:t>
-            </a:r>
-          </a:p>
-        </p:txBody>
-      </p:sp>
-      <p:sp>
-        <p:nvSpPr>
-          <p:cNvPr id="35" name="Rectangle 34"/>
-          <p:cNvSpPr/>
-          <p:nvPr/>
-        </p:nvSpPr>
-        <p:spPr>
-          <a:xfrm>
-            <a:off x="6135600" y="1965600"/>
-            <a:ext cx="2551199" cy="18000"/>
-          </a:xfrm>
-          <a:prstGeom prst="rect">
-            <a:avLst/>
-          </a:prstGeom>
-          <a:solidFill>
-            <a:srgbClr val="888888"/>
-          </a:solidFill>
-          <a:ln>
-            <a:noFill/>
-          </a:ln>
-        </p:spPr>
-        <p:style>
-          <a:lnRef idx="1">
-            <a:schemeClr val="accent1"/>
-          </a:lnRef>
-          <a:fillRef idx="3">
-            <a:schemeClr val="accent1"/>
-          </a:fillRef>
-          <a:effectRef idx="2">
-            <a:schemeClr val="accent1"/>
-          </a:effectRef>
-          <a:fontRef idx="minor">
-            <a:schemeClr val="lt1"/>
-          </a:fontRef>
-        </p:style>
-        <p:txBody>
-          <a:bodyPr rtlCol="0" anchor="ctr"/>
-          <a:lstStyle/>
-          <a:p>
-            <a:pPr algn="ctr"/>
-          </a:p>
-        </p:txBody>
-      </p:sp>
-      <p:sp>
-        <p:nvSpPr>
-          <p:cNvPr id="36" name="TextBox 35"/>
-          <p:cNvSpPr txBox="1"/>
-          <p:nvPr/>
-        </p:nvSpPr>
-        <p:spPr>
-          <a:xfrm>
-            <a:off x="6135600" y="2059200"/>
-            <a:ext cx="2551199" cy="255600"/>
-          </a:xfrm>
-          <a:prstGeom prst="rect">
-            <a:avLst/>
-          </a:prstGeom>
-          <a:noFill/>
-        </p:spPr>
-        <p:txBody>
-          <a:bodyPr wrap="square">
-            <a:spAutoFit/>
-          </a:bodyPr>
-          <a:lstStyle/>
-          <a:p>
-            <a:pPr algn="l"/>
-            <a:r>
-              <a:rPr sz="1000" b="1" i="0">
-                <a:solidFill>
-                  <a:srgbClr val="1B3A6B"/>
-                </a:solidFill>
-                <a:latin typeface="Calibri"/>
-              </a:rPr>
-              <a:t>International</a:t>
-            </a:r>
-          </a:p>
-        </p:txBody>
-      </p:sp>
-      <p:sp>
-        <p:nvSpPr>
-          <p:cNvPr id="37" name="TextBox 36"/>
-          <p:cNvSpPr txBox="1"/>
-          <p:nvPr/>
-        </p:nvSpPr>
-        <p:spPr>
-          <a:xfrm>
-            <a:off x="6135600" y="2332800"/>
-            <a:ext cx="2551199" cy="2041199"/>
-          </a:xfrm>
-          <a:prstGeom prst="rect">
-            <a:avLst/>
-          </a:prstGeom>
-          <a:noFill/>
-        </p:spPr>
-        <p:txBody>
-          <a:bodyPr wrap="square">
-            <a:spAutoFit/>
-          </a:bodyPr>
-          <a:lstStyle/>
-          <a:p>
-            <a:pPr algn="l"/>
-            <a:r>
-              <a:rPr sz="800" b="0" i="0">
-                <a:solidFill>
-                  <a:srgbClr val="555555"/>
-                </a:solidFill>
-                <a:latin typeface="Calibri"/>
-              </a:rPr>
-              <a:t>—</a:t>
+              <a:t>Les services d'Apple incluent la musique, les films et les applications. Les revenus de cette section proviennent des abonnements et des ventes de contenus. Les clients cibles sont les particuliers et les entreprises.</a:t>
             </a:r>
           </a:p>
         </p:txBody>
@@ -27953,7 +28823,7 @@
                 </a:solidFill>
                 <a:latin typeface="Calibri"/>
               </a:rPr>
-              <a:t>USD millions  ·  2021–2025</a:t>
+              <a:t>USD millions  ·  2021–2027F</a:t>
             </a:r>
           </a:p>
         </p:txBody>
@@ -27968,7 +28838,7 @@
         </p:nvGraphicFramePr>
         <p:xfrm>
           <a:off x="367200" y="914400"/>
-          <a:ext cx="8413200" cy="1980000"/>
+          <a:ext cx="8413196" cy="1980000"/>
         </p:xfrm>
         <a:graphic>
           <a:graphicData uri="http://schemas.openxmlformats.org/drawingml/2006/table">
@@ -27978,9 +28848,11 @@
               </a:tblPr>
               <a:tblGrid>
                 <a:gridCol w="2355696"/>
-                <a:gridCol w="2019168"/>
-                <a:gridCol w="2019168"/>
-                <a:gridCol w="2019168"/>
+                <a:gridCol w="1211500"/>
+                <a:gridCol w="1211500"/>
+                <a:gridCol w="1211500"/>
+                <a:gridCol w="1211500"/>
+                <a:gridCol w="1211500"/>
               </a:tblGrid>
               <a:tr h="220000">
                 <a:tc>
@@ -28075,6 +28947,52 @@
                     </a:solidFill>
                   </a:tcPr>
                 </a:tc>
+                <a:tc>
+                  <a:txBody>
+                    <a:bodyPr/>
+                    <a:lstStyle/>
+                    <a:p>
+                      <a:pPr algn="ctr"/>
+                      <a:r>
+                        <a:rPr sz="800" b="1" i="0">
+                          <a:solidFill>
+                            <a:srgbClr val="FFFFFF"/>
+                          </a:solidFill>
+                          <a:latin typeface="Calibri"/>
+                        </a:rPr>
+                        <a:t>2026F</a:t>
+                      </a:r>
+                    </a:p>
+                  </a:txBody>
+                  <a:tcPr>
+                    <a:solidFill>
+                      <a:srgbClr val="1B3A6B"/>
+                    </a:solidFill>
+                  </a:tcPr>
+                </a:tc>
+                <a:tc>
+                  <a:txBody>
+                    <a:bodyPr/>
+                    <a:lstStyle/>
+                    <a:p>
+                      <a:pPr algn="ctr"/>
+                      <a:r>
+                        <a:rPr sz="800" b="1" i="0">
+                          <a:solidFill>
+                            <a:srgbClr val="FFFFFF"/>
+                          </a:solidFill>
+                          <a:latin typeface="Calibri"/>
+                        </a:rPr>
+                        <a:t>2027F</a:t>
+                      </a:r>
+                    </a:p>
+                  </a:txBody>
+                  <a:tcPr>
+                    <a:solidFill>
+                      <a:srgbClr val="1B3A6B"/>
+                    </a:solidFill>
+                  </a:tcPr>
+                </a:tc>
               </a:tr>
               <a:tr h="220000">
                 <a:tc>
@@ -28169,6 +29087,52 @@
                     </a:solidFill>
                   </a:tcPr>
                 </a:tc>
+                <a:tc>
+                  <a:txBody>
+                    <a:bodyPr/>
+                    <a:lstStyle/>
+                    <a:p>
+                      <a:pPr algn="ctr"/>
+                      <a:r>
+                        <a:rPr sz="800" b="1" i="0">
+                          <a:solidFill>
+                            <a:srgbClr val="0D0D0D"/>
+                          </a:solidFill>
+                          <a:latin typeface="Calibri"/>
+                        </a:rPr>
+                        <a:t>450,0</a:t>
+                      </a:r>
+                    </a:p>
+                  </a:txBody>
+                  <a:tcPr>
+                    <a:solidFill>
+                      <a:srgbClr val="FFFFFF"/>
+                    </a:solidFill>
+                  </a:tcPr>
+                </a:tc>
+                <a:tc>
+                  <a:txBody>
+                    <a:bodyPr/>
+                    <a:lstStyle/>
+                    <a:p>
+                      <a:pPr algn="ctr"/>
+                      <a:r>
+                        <a:rPr sz="800" b="1" i="0">
+                          <a:solidFill>
+                            <a:srgbClr val="0D0D0D"/>
+                          </a:solidFill>
+                          <a:latin typeface="Calibri"/>
+                        </a:rPr>
+                        <a:t>480,0</a:t>
+                      </a:r>
+                    </a:p>
+                  </a:txBody>
+                  <a:tcPr>
+                    <a:solidFill>
+                      <a:srgbClr val="FFFFFF"/>
+                    </a:solidFill>
+                  </a:tcPr>
+                </a:tc>
               </a:tr>
               <a:tr h="220000">
                 <a:tc>
@@ -28263,6 +29227,52 @@
                     </a:solidFill>
                   </a:tcPr>
                 </a:tc>
+                <a:tc>
+                  <a:txBody>
+                    <a:bodyPr/>
+                    <a:lstStyle/>
+                    <a:p>
+                      <a:pPr algn="ctr"/>
+                      <a:r>
+                        <a:rPr sz="750" b="0" i="1">
+                          <a:solidFill>
+                            <a:srgbClr val="555555"/>
+                          </a:solidFill>
+                          <a:latin typeface="Calibri"/>
+                        </a:rPr>
+                        <a:t>+8,0 %</a:t>
+                      </a:r>
+                    </a:p>
+                  </a:txBody>
+                  <a:tcPr>
+                    <a:solidFill>
+                      <a:srgbClr val="F7F8FA"/>
+                    </a:solidFill>
+                  </a:tcPr>
+                </a:tc>
+                <a:tc>
+                  <a:txBody>
+                    <a:bodyPr/>
+                    <a:lstStyle/>
+                    <a:p>
+                      <a:pPr algn="ctr"/>
+                      <a:r>
+                        <a:rPr sz="750" b="0" i="1">
+                          <a:solidFill>
+                            <a:srgbClr val="555555"/>
+                          </a:solidFill>
+                          <a:latin typeface="Calibri"/>
+                        </a:rPr>
+                        <a:t>+7,0 %</a:t>
+                      </a:r>
+                    </a:p>
+                  </a:txBody>
+                  <a:tcPr>
+                    <a:solidFill>
+                      <a:srgbClr val="F7F8FA"/>
+                    </a:solidFill>
+                  </a:tcPr>
+                </a:tc>
               </a:tr>
               <a:tr h="220000">
                 <a:tc>
@@ -28357,6 +29367,52 @@
                     </a:solidFill>
                   </a:tcPr>
                 </a:tc>
+                <a:tc>
+                  <a:txBody>
+                    <a:bodyPr/>
+                    <a:lstStyle/>
+                    <a:p>
+                      <a:pPr algn="ctr"/>
+                      <a:r>
+                        <a:rPr sz="800" b="1" i="0">
+                          <a:solidFill>
+                            <a:srgbClr val="0D0D0D"/>
+                          </a:solidFill>
+                          <a:latin typeface="Calibri"/>
+                        </a:rPr>
+                        <a:t>211,5</a:t>
+                      </a:r>
+                    </a:p>
+                  </a:txBody>
+                  <a:tcPr>
+                    <a:solidFill>
+                      <a:srgbClr val="FFFFFF"/>
+                    </a:solidFill>
+                  </a:tcPr>
+                </a:tc>
+                <a:tc>
+                  <a:txBody>
+                    <a:bodyPr/>
+                    <a:lstStyle/>
+                    <a:p>
+                      <a:pPr algn="ctr"/>
+                      <a:r>
+                        <a:rPr sz="800" b="1" i="0">
+                          <a:solidFill>
+                            <a:srgbClr val="0D0D0D"/>
+                          </a:solidFill>
+                          <a:latin typeface="Calibri"/>
+                        </a:rPr>
+                        <a:t>230,4</a:t>
+                      </a:r>
+                    </a:p>
+                  </a:txBody>
+                  <a:tcPr>
+                    <a:solidFill>
+                      <a:srgbClr val="FFFFFF"/>
+                    </a:solidFill>
+                  </a:tcPr>
+                </a:tc>
               </a:tr>
               <a:tr h="220000">
                 <a:tc>
@@ -28451,6 +29507,52 @@
                     </a:solidFill>
                   </a:tcPr>
                 </a:tc>
+                <a:tc>
+                  <a:txBody>
+                    <a:bodyPr/>
+                    <a:lstStyle/>
+                    <a:p>
+                      <a:pPr algn="ctr"/>
+                      <a:r>
+                        <a:rPr sz="750" b="0" i="1">
+                          <a:solidFill>
+                            <a:srgbClr val="555555"/>
+                          </a:solidFill>
+                          <a:latin typeface="Calibri"/>
+                        </a:rPr>
+                        <a:t>47,0 %</a:t>
+                      </a:r>
+                    </a:p>
+                  </a:txBody>
+                  <a:tcPr>
+                    <a:solidFill>
+                      <a:srgbClr val="F7F8FA"/>
+                    </a:solidFill>
+                  </a:tcPr>
+                </a:tc>
+                <a:tc>
+                  <a:txBody>
+                    <a:bodyPr/>
+                    <a:lstStyle/>
+                    <a:p>
+                      <a:pPr algn="ctr"/>
+                      <a:r>
+                        <a:rPr sz="750" b="0" i="1">
+                          <a:solidFill>
+                            <a:srgbClr val="555555"/>
+                          </a:solidFill>
+                          <a:latin typeface="Calibri"/>
+                        </a:rPr>
+                        <a:t>48,0 %</a:t>
+                      </a:r>
+                    </a:p>
+                  </a:txBody>
+                  <a:tcPr>
+                    <a:solidFill>
+                      <a:srgbClr val="F7F8FA"/>
+                    </a:solidFill>
+                  </a:tcPr>
+                </a:tc>
               </a:tr>
               <a:tr h="220000">
                 <a:tc>
@@ -28545,6 +29647,52 @@
                     </a:solidFill>
                   </a:tcPr>
                 </a:tc>
+                <a:tc>
+                  <a:txBody>
+                    <a:bodyPr/>
+                    <a:lstStyle/>
+                    <a:p>
+                      <a:pPr algn="ctr"/>
+                      <a:r>
+                        <a:rPr sz="800" b="1" i="0">
+                          <a:solidFill>
+                            <a:srgbClr val="0D0D0D"/>
+                          </a:solidFill>
+                          <a:latin typeface="Calibri"/>
+                        </a:rPr>
+                        <a:t>180,0</a:t>
+                      </a:r>
+                    </a:p>
+                  </a:txBody>
+                  <a:tcPr>
+                    <a:solidFill>
+                      <a:srgbClr val="FFFFFF"/>
+                    </a:solidFill>
+                  </a:tcPr>
+                </a:tc>
+                <a:tc>
+                  <a:txBody>
+                    <a:bodyPr/>
+                    <a:lstStyle/>
+                    <a:p>
+                      <a:pPr algn="ctr"/>
+                      <a:r>
+                        <a:rPr sz="800" b="1" i="0">
+                          <a:solidFill>
+                            <a:srgbClr val="0D0D0D"/>
+                          </a:solidFill>
+                          <a:latin typeface="Calibri"/>
+                        </a:rPr>
+                        <a:t>200,0</a:t>
+                      </a:r>
+                    </a:p>
+                  </a:txBody>
+                  <a:tcPr>
+                    <a:solidFill>
+                      <a:srgbClr val="FFFFFF"/>
+                    </a:solidFill>
+                  </a:tcPr>
+                </a:tc>
               </a:tr>
               <a:tr h="220000">
                 <a:tc>
@@ -28639,6 +29787,52 @@
                     </a:solidFill>
                   </a:tcPr>
                 </a:tc>
+                <a:tc>
+                  <a:txBody>
+                    <a:bodyPr/>
+                    <a:lstStyle/>
+                    <a:p>
+                      <a:pPr algn="ctr"/>
+                      <a:r>
+                        <a:rPr sz="750" b="0" i="1">
+                          <a:solidFill>
+                            <a:srgbClr val="555555"/>
+                          </a:solidFill>
+                          <a:latin typeface="Calibri"/>
+                        </a:rPr>
+                        <a:t>40,0 %</a:t>
+                      </a:r>
+                    </a:p>
+                  </a:txBody>
+                  <a:tcPr>
+                    <a:solidFill>
+                      <a:srgbClr val="F7F8FA"/>
+                    </a:solidFill>
+                  </a:tcPr>
+                </a:tc>
+                <a:tc>
+                  <a:txBody>
+                    <a:bodyPr/>
+                    <a:lstStyle/>
+                    <a:p>
+                      <a:pPr algn="ctr"/>
+                      <a:r>
+                        <a:rPr sz="750" b="0" i="1">
+                          <a:solidFill>
+                            <a:srgbClr val="555555"/>
+                          </a:solidFill>
+                          <a:latin typeface="Calibri"/>
+                        </a:rPr>
+                        <a:t>42,0 %</a:t>
+                      </a:r>
+                    </a:p>
+                  </a:txBody>
+                  <a:tcPr>
+                    <a:solidFill>
+                      <a:srgbClr val="F7F8FA"/>
+                    </a:solidFill>
+                  </a:tcPr>
+                </a:tc>
               </a:tr>
               <a:tr h="220000">
                 <a:tc>
@@ -28733,6 +29927,52 @@
                     </a:solidFill>
                   </a:tcPr>
                 </a:tc>
+                <a:tc>
+                  <a:txBody>
+                    <a:bodyPr/>
+                    <a:lstStyle/>
+                    <a:p>
+                      <a:pPr algn="ctr"/>
+                      <a:r>
+                        <a:rPr sz="800" b="1" i="0">
+                          <a:solidFill>
+                            <a:srgbClr val="0D0D0D"/>
+                          </a:solidFill>
+                          <a:latin typeface="Calibri"/>
+                        </a:rPr>
+                        <a:t>120,0</a:t>
+                      </a:r>
+                    </a:p>
+                  </a:txBody>
+                  <a:tcPr>
+                    <a:solidFill>
+                      <a:srgbClr val="FFFFFF"/>
+                    </a:solidFill>
+                  </a:tcPr>
+                </a:tc>
+                <a:tc>
+                  <a:txBody>
+                    <a:bodyPr/>
+                    <a:lstStyle/>
+                    <a:p>
+                      <a:pPr algn="ctr"/>
+                      <a:r>
+                        <a:rPr sz="800" b="1" i="0">
+                          <a:solidFill>
+                            <a:srgbClr val="0D0D0D"/>
+                          </a:solidFill>
+                          <a:latin typeface="Calibri"/>
+                        </a:rPr>
+                        <a:t>130,0</a:t>
+                      </a:r>
+                    </a:p>
+                  </a:txBody>
+                  <a:tcPr>
+                    <a:solidFill>
+                      <a:srgbClr val="FFFFFF"/>
+                    </a:solidFill>
+                  </a:tcPr>
+                </a:tc>
               </a:tr>
               <a:tr h="220000">
                 <a:tc>
@@ -28824,6 +30064,52 @@
                   <a:tcPr>
                     <a:solidFill>
                       <a:srgbClr val="DDE8F5"/>
+                    </a:solidFill>
+                  </a:tcPr>
+                </a:tc>
+                <a:tc>
+                  <a:txBody>
+                    <a:bodyPr/>
+                    <a:lstStyle/>
+                    <a:p>
+                      <a:pPr algn="ctr"/>
+                      <a:r>
+                        <a:rPr sz="750" b="0" i="1">
+                          <a:solidFill>
+                            <a:srgbClr val="555555"/>
+                          </a:solidFill>
+                          <a:latin typeface="Calibri"/>
+                        </a:rPr>
+                        <a:t>27,0 %</a:t>
+                      </a:r>
+                    </a:p>
+                  </a:txBody>
+                  <a:tcPr>
+                    <a:solidFill>
+                      <a:srgbClr val="F7F8FA"/>
+                    </a:solidFill>
+                  </a:tcPr>
+                </a:tc>
+                <a:tc>
+                  <a:txBody>
+                    <a:bodyPr/>
+                    <a:lstStyle/>
+                    <a:p>
+                      <a:pPr algn="ctr"/>
+                      <a:r>
+                        <a:rPr sz="750" b="0" i="1">
+                          <a:solidFill>
+                            <a:srgbClr val="555555"/>
+                          </a:solidFill>
+                          <a:latin typeface="Calibri"/>
+                        </a:rPr>
+                        <a:t>28,0 %</a:t>
+                      </a:r>
+                    </a:p>
+                  </a:txBody>
+                  <a:tcPr>
+                    <a:solidFill>
+                      <a:srgbClr val="F7F8FA"/>
                     </a:solidFill>
                   </a:tcPr>
                 </a:tc>
@@ -28832,6 +30118,41 @@
           </a:graphicData>
         </a:graphic>
       </p:graphicFrame>
+      <p:sp>
+        <p:nvSpPr>
+          <p:cNvPr id="18" name="TextBox 17"/>
+          <p:cNvSpPr txBox="1"/>
+          <p:nvPr/>
+        </p:nvSpPr>
+        <p:spPr>
+          <a:xfrm>
+            <a:off x="367200" y="3218400"/>
+            <a:ext cx="8413200" cy="1224000"/>
+          </a:xfrm>
+          <a:prstGeom prst="rect">
+            <a:avLst/>
+          </a:prstGeom>
+          <a:noFill/>
+        </p:spPr>
+        <p:txBody>
+          <a:bodyPr wrap="square">
+            <a:spAutoFit/>
+          </a:bodyPr>
+          <a:lstStyle/>
+          <a:p>
+            <a:pPr algn="l"/>
+            <a:r>
+              <a:rPr sz="850" b="0" i="0">
+                <a:solidFill>
+                  <a:srgbClr val="555555"/>
+                </a:solidFill>
+                <a:latin typeface="Calibri"/>
+              </a:rPr>
+              <a:t>Les revenus d'Apple ont augmenté de 6,4% en 2025. Les marges sont élevées, avec un taux de marge brute de 46,9%.</a:t>
+            </a:r>
+          </a:p>
+        </p:txBody>
+      </p:sp>
     </p:spTree>
   </p:cSld>
   <p:clrMapOvr>
@@ -30559,7 +31880,7 @@
                           </a:solidFill>
                           <a:latin typeface="Calibri"/>
                         </a:rPr>
-                        <a:t>9,98</a:t>
+                        <a:t>9,97</a:t>
                       </a:r>
                     </a:p>
                   </a:txBody>
@@ -30714,6 +32035,41 @@
           </a:graphicData>
         </a:graphic>
       </p:graphicFrame>
+      <p:sp>
+        <p:nvSpPr>
+          <p:cNvPr id="31" name="TextBox 30"/>
+          <p:cNvSpPr txBox="1"/>
+          <p:nvPr/>
+        </p:nvSpPr>
+        <p:spPr>
+          <a:xfrm>
+            <a:off x="367200" y="4068000"/>
+            <a:ext cx="8413200" cy="468000"/>
+          </a:xfrm>
+          <a:prstGeom prst="rect">
+            <a:avLst/>
+          </a:prstGeom>
+          <a:noFill/>
+        </p:spPr>
+        <p:txBody>
+          <a:bodyPr wrap="square">
+            <a:spAutoFit/>
+          </a:bodyPr>
+          <a:lstStyle/>
+          <a:p>
+            <a:pPr algn="l"/>
+            <a:r>
+              <a:rPr sz="850" b="0" i="0">
+                <a:solidFill>
+                  <a:srgbClr val="555555"/>
+                </a:solidFill>
+                <a:latin typeface="Calibri"/>
+              </a:rPr>
+              <a:t>Les revenus d'Apple ont augmenté de 6,4% en 2025. Les marges sont élevées, avec un taux de marge brute de 46,9%.</a:t>
+            </a:r>
+          </a:p>
+        </p:txBody>
+      </p:sp>
     </p:spTree>
   </p:cSld>
   <p:clrMapOvr>

--- a/preview/AAPL/AAPL_pitchbook.pptx
+++ b/preview/AAPL/AAPL_pitchbook.pptx
@@ -3449,7 +3449,7 @@
                 </a:solidFill>
                 <a:latin typeface="Calibri"/>
               </a:rPr>
-              <a:t>● BUY  ·  Prix cible base : 270 $  ·  Upside : +6,5 %</a:t>
+              <a:t>● BUY  ·  Prix cible base : 280 $  ·  Upside : +10,7 %</a:t>
             </a:r>
           </a:p>
         </p:txBody>
@@ -6138,7 +6138,7 @@
                 </a:solidFill>
                 <a:latin typeface="Calibri"/>
               </a:rPr>
-              <a:t>Le ratio EV/EBITDA d'Apple est de 26,1x, supérieur à la mediane de son secteur.</a:t>
+              <a:t>Le ratio EV/EBITDA d'Apple est inférieur à la moyenne de son secteur, ce qui indique une valorisation attractive.</a:t>
             </a:r>
           </a:p>
         </p:txBody>
@@ -7303,7 +7303,7 @@
                           </a:solidFill>
                           <a:latin typeface="Calibri"/>
                         </a:rPr>
-                        <a:t>270 $</a:t>
+                        <a:t>280 $</a:t>
                       </a:r>
                     </a:p>
                   </a:txBody>
@@ -7391,7 +7391,7 @@
                           </a:solidFill>
                           <a:latin typeface="Calibri"/>
                         </a:rPr>
-                        <a:t>253,53 $</a:t>
+                        <a:t>253,38 $</a:t>
                       </a:r>
                     </a:p>
                   </a:txBody>
@@ -7479,7 +7479,7 @@
                           </a:solidFill>
                           <a:latin typeface="Calibri"/>
                         </a:rPr>
-                        <a:t>+6,5 %</a:t>
+                        <a:t>+10,7 %</a:t>
                       </a:r>
                     </a:p>
                   </a:txBody>
@@ -7622,7 +7622,7 @@
                           </a:solidFill>
                           <a:latin typeface="Calibri"/>
                         </a:rPr>
-                        <a:t>230 $</a:t>
+                        <a:t>241 $</a:t>
                       </a:r>
                     </a:p>
                   </a:txBody>
@@ -7645,7 +7645,7 @@
                           </a:solidFill>
                           <a:latin typeface="Calibri"/>
                         </a:rPr>
-                        <a:t>270 $</a:t>
+                        <a:t>280 $</a:t>
                       </a:r>
                     </a:p>
                   </a:txBody>
@@ -7668,7 +7668,7 @@
                           </a:solidFill>
                           <a:latin typeface="Calibri"/>
                         </a:rPr>
-                        <a:t>300 $</a:t>
+                        <a:t>310 $</a:t>
                       </a:r>
                     </a:p>
                   </a:txBody>
@@ -7693,7 +7693,7 @@
                           </a:solidFill>
                           <a:latin typeface="Calibri"/>
                         </a:rPr>
-                        <a:t>-9,3 %</a:t>
+                        <a:t>-5,0 %</a:t>
                       </a:r>
                     </a:p>
                   </a:txBody>
@@ -7716,7 +7716,7 @@
                           </a:solidFill>
                           <a:latin typeface="Calibri"/>
                         </a:rPr>
-                        <a:t>+6,5 %</a:t>
+                        <a:t>+10,7 %</a:t>
                       </a:r>
                     </a:p>
                   </a:txBody>
@@ -7739,7 +7739,7 @@
                           </a:solidFill>
                           <a:latin typeface="Calibri"/>
                         </a:rPr>
-                        <a:t>+18,3 %</a:t>
+                        <a:t>+22,4 %</a:t>
                       </a:r>
                     </a:p>
                   </a:txBody>
@@ -8203,7 +8203,7 @@
                           </a:solidFill>
                           <a:latin typeface="Calibri"/>
                         </a:rPr>
-                        <a:t>313</a:t>
+                        <a:t>325</a:t>
                       </a:r>
                     </a:p>
                   </a:txBody>
@@ -8246,7 +8246,7 @@
                           </a:solidFill>
                           <a:latin typeface="Calibri"/>
                         </a:rPr>
-                        <a:t>340</a:t>
+                        <a:t>353</a:t>
                       </a:r>
                     </a:p>
                   </a:txBody>
@@ -8289,7 +8289,7 @@
                           </a:solidFill>
                           <a:latin typeface="Calibri"/>
                         </a:rPr>
-                        <a:t>372</a:t>
+                        <a:t>386</a:t>
                       </a:r>
                     </a:p>
                   </a:txBody>
@@ -8332,7 +8332,7 @@
                           </a:solidFill>
                           <a:latin typeface="Calibri"/>
                         </a:rPr>
-                        <a:t>410</a:t>
+                        <a:t>426</a:t>
                       </a:r>
                     </a:p>
                   </a:txBody>
@@ -8375,7 +8375,7 @@
                           </a:solidFill>
                           <a:latin typeface="Calibri"/>
                         </a:rPr>
-                        <a:t>458</a:t>
+                        <a:t>475</a:t>
                       </a:r>
                     </a:p>
                   </a:txBody>
@@ -8463,7 +8463,7 @@
                           </a:solidFill>
                           <a:latin typeface="Calibri"/>
                         </a:rPr>
-                        <a:t>270</a:t>
+                        <a:t>280</a:t>
                       </a:r>
                     </a:p>
                   </a:txBody>
@@ -8506,7 +8506,7 @@
                           </a:solidFill>
                           <a:latin typeface="Calibri"/>
                         </a:rPr>
-                        <a:t>290</a:t>
+                        <a:t>301</a:t>
                       </a:r>
                     </a:p>
                   </a:txBody>
@@ -8549,7 +8549,7 @@
                           </a:solidFill>
                           <a:latin typeface="Calibri"/>
                         </a:rPr>
-                        <a:t>313</a:t>
+                        <a:t>325</a:t>
                       </a:r>
                     </a:p>
                   </a:txBody>
@@ -8592,7 +8592,7 @@
                           </a:solidFill>
                           <a:latin typeface="Calibri"/>
                         </a:rPr>
-                        <a:t>340</a:t>
+                        <a:t>353</a:t>
                       </a:r>
                     </a:p>
                   </a:txBody>
@@ -8635,7 +8635,7 @@
                           </a:solidFill>
                           <a:latin typeface="Calibri"/>
                         </a:rPr>
-                        <a:t>372</a:t>
+                        <a:t>386</a:t>
                       </a:r>
                     </a:p>
                   </a:txBody>
@@ -8723,7 +8723,7 @@
                           </a:solidFill>
                           <a:latin typeface="Calibri"/>
                         </a:rPr>
-                        <a:t>238</a:t>
+                        <a:t>247</a:t>
                       </a:r>
                     </a:p>
                   </a:txBody>
@@ -8766,7 +8766,7 @@
                           </a:solidFill>
                           <a:latin typeface="Calibri"/>
                         </a:rPr>
-                        <a:t>253</a:t>
+                        <a:t>263</a:t>
                       </a:r>
                     </a:p>
                   </a:txBody>
@@ -8809,7 +8809,7 @@
                           </a:solidFill>
                           <a:latin typeface="Calibri"/>
                         </a:rPr>
-                        <a:t>270</a:t>
+                        <a:t>280</a:t>
                       </a:r>
                     </a:p>
                   </a:txBody>
@@ -8852,7 +8852,7 @@
                           </a:solidFill>
                           <a:latin typeface="Calibri"/>
                         </a:rPr>
-                        <a:t>290</a:t>
+                        <a:t>301</a:t>
                       </a:r>
                     </a:p>
                   </a:txBody>
@@ -8895,7 +8895,7 @@
                           </a:solidFill>
                           <a:latin typeface="Calibri"/>
                         </a:rPr>
-                        <a:t>313</a:t>
+                        <a:t>325</a:t>
                       </a:r>
                     </a:p>
                   </a:txBody>
@@ -8983,7 +8983,7 @@
                           </a:solidFill>
                           <a:latin typeface="Calibri"/>
                         </a:rPr>
-                        <a:t>212</a:t>
+                        <a:t>220</a:t>
                       </a:r>
                     </a:p>
                   </a:txBody>
@@ -9026,7 +9026,7 @@
                           </a:solidFill>
                           <a:latin typeface="Calibri"/>
                         </a:rPr>
-                        <a:t>224</a:t>
+                        <a:t>233</a:t>
                       </a:r>
                     </a:p>
                   </a:txBody>
@@ -9069,7 +9069,7 @@
                           </a:solidFill>
                           <a:latin typeface="Calibri"/>
                         </a:rPr>
-                        <a:t>238</a:t>
+                        <a:t>247</a:t>
                       </a:r>
                     </a:p>
                   </a:txBody>
@@ -9112,7 +9112,7 @@
                           </a:solidFill>
                           <a:latin typeface="Calibri"/>
                         </a:rPr>
-                        <a:t>253</a:t>
+                        <a:t>263</a:t>
                       </a:r>
                     </a:p>
                   </a:txBody>
@@ -9155,7 +9155,7 @@
                           </a:solidFill>
                           <a:latin typeface="Calibri"/>
                         </a:rPr>
-                        <a:t>270</a:t>
+                        <a:t>281</a:t>
                       </a:r>
                     </a:p>
                   </a:txBody>
@@ -9243,7 +9243,7 @@
                           </a:solidFill>
                           <a:latin typeface="Calibri"/>
                         </a:rPr>
-                        <a:t>191</a:t>
+                        <a:t>199</a:t>
                       </a:r>
                     </a:p>
                   </a:txBody>
@@ -9286,7 +9286,7 @@
                           </a:solidFill>
                           <a:latin typeface="Calibri"/>
                         </a:rPr>
-                        <a:t>201</a:t>
+                        <a:t>209</a:t>
                       </a:r>
                     </a:p>
                   </a:txBody>
@@ -9329,7 +9329,7 @@
                           </a:solidFill>
                           <a:latin typeface="Calibri"/>
                         </a:rPr>
-                        <a:t>212</a:t>
+                        <a:t>220</a:t>
                       </a:r>
                     </a:p>
                   </a:txBody>
@@ -9372,7 +9372,7 @@
                           </a:solidFill>
                           <a:latin typeface="Calibri"/>
                         </a:rPr>
-                        <a:t>224</a:t>
+                        <a:t>233</a:t>
                       </a:r>
                     </a:p>
                   </a:txBody>
@@ -9415,7 +9415,7 @@
                           </a:solidFill>
                           <a:latin typeface="Calibri"/>
                         </a:rPr>
-                        <a:t>238</a:t>
+                        <a:t>247</a:t>
                       </a:r>
                     </a:p>
                   </a:txBody>
@@ -9480,7 +9480,7 @@
                 </a:solidFill>
                 <a:latin typeface="Calibri"/>
               </a:rPr>
-              <a:t>La DCF d'Apple implique un WACC de 10,3% et un TGR de 3,0%.</a:t>
+              <a:t>Le prix implicite d'Apple sur la base d'un modèle de flux de trésorerie disponible est de 280,5 USD, ce qui suggère un upside de 10% par rapport au cours actuel.</a:t>
             </a:r>
           </a:p>
         </p:txBody>
@@ -10358,7 +10358,7 @@
                           </a:solidFill>
                           <a:latin typeface="Calibri"/>
                         </a:rPr>
-                        <a:t>3 722,1</a:t>
+                        <a:t>3 719,9</a:t>
                       </a:r>
                     </a:p>
                   </a:txBody>
@@ -10498,7 +10498,7 @@
                           </a:solidFill>
                           <a:latin typeface="Calibri"/>
                         </a:rPr>
-                        <a:t>Alphabet</a:t>
+                        <a:t>Microsoft</a:t>
                       </a:r>
                     </a:p>
                   </a:txBody>
@@ -10521,7 +10521,7 @@
                           </a:solidFill>
                           <a:latin typeface="Calibri"/>
                         </a:rPr>
-                        <a:t>GOOGL</a:t>
+                        <a:t>MSFT</a:t>
                       </a:r>
                     </a:p>
                   </a:txBody>
@@ -10544,7 +10544,7 @@
                           </a:solidFill>
                           <a:latin typeface="Calibri"/>
                         </a:rPr>
-                        <a:t>1 500,0</a:t>
+                        <a:t>2 351,9</a:t>
                       </a:r>
                     </a:p>
                   </a:txBody>
@@ -10567,7 +10567,7 @@
                           </a:solidFill>
                           <a:latin typeface="Calibri"/>
                         </a:rPr>
-                        <a:t>20,0x</a:t>
+                        <a:t>23,1x</a:t>
                       </a:r>
                     </a:p>
                   </a:txBody>
@@ -10590,7 +10590,7 @@
                           </a:solidFill>
                           <a:latin typeface="Calibri"/>
                         </a:rPr>
-                        <a:t>6,0x</a:t>
+                        <a:t>8,5x</a:t>
                       </a:r>
                     </a:p>
                   </a:txBody>
@@ -10613,7 +10613,7 @@
                           </a:solidFill>
                           <a:latin typeface="Calibri"/>
                         </a:rPr>
-                        <a:t>30,0x</a:t>
+                        <a:t>34,2x</a:t>
                       </a:r>
                     </a:p>
                   </a:txBody>
@@ -10636,7 +10636,7 @@
                           </a:solidFill>
                           <a:latin typeface="Calibri"/>
                         </a:rPr>
-                        <a:t>55,0 %</a:t>
+                        <a:t>68,0 %</a:t>
                       </a:r>
                     </a:p>
                   </a:txBody>
@@ -10659,7 +10659,7 @@
                           </a:solidFill>
                           <a:latin typeface="Calibri"/>
                         </a:rPr>
-                        <a:t>25,0 %</a:t>
+                        <a:t>43,0 %</a:t>
                       </a:r>
                     </a:p>
                   </a:txBody>
@@ -10684,7 +10684,7 @@
                           </a:solidFill>
                           <a:latin typeface="Calibri"/>
                         </a:rPr>
-                        <a:t>Amazon</a:t>
+                        <a:t>Alphabet</a:t>
                       </a:r>
                     </a:p>
                   </a:txBody>
@@ -10707,7 +10707,7 @@
                           </a:solidFill>
                           <a:latin typeface="Calibri"/>
                         </a:rPr>
-                        <a:t>AMZN</a:t>
+                        <a:t>GOOGL</a:t>
                       </a:r>
                     </a:p>
                   </a:txBody>
@@ -10730,7 +10730,7 @@
                           </a:solidFill>
                           <a:latin typeface="Calibri"/>
                         </a:rPr>
-                        <a:t>1 000,0</a:t>
+                        <a:t>1 571,9</a:t>
                       </a:r>
                     </a:p>
                   </a:txBody>
@@ -10753,7 +10753,7 @@
                           </a:solidFill>
                           <a:latin typeface="Calibri"/>
                         </a:rPr>
-                        <a:t>15,0x</a:t>
+                        <a:t>20,5x</a:t>
                       </a:r>
                     </a:p>
                   </a:txBody>
@@ -10776,7 +10776,7 @@
                           </a:solidFill>
                           <a:latin typeface="Calibri"/>
                         </a:rPr>
-                        <a:t>5,0x</a:t>
+                        <a:t>7,3x</a:t>
                       </a:r>
                     </a:p>
                   </a:txBody>
@@ -10799,7 +10799,7 @@
                           </a:solidFill>
                           <a:latin typeface="Calibri"/>
                         </a:rPr>
-                        <a:t>25,0x</a:t>
+                        <a:t>29,1x</a:t>
                       </a:r>
                     </a:p>
                   </a:txBody>
@@ -10822,7 +10822,7 @@
                           </a:solidFill>
                           <a:latin typeface="Calibri"/>
                         </a:rPr>
-                        <a:t>40,0 %</a:t>
+                        <a:t>55,0 %</a:t>
                       </a:r>
                     </a:p>
                   </a:txBody>
@@ -10845,7 +10845,7 @@
                           </a:solidFill>
                           <a:latin typeface="Calibri"/>
                         </a:rPr>
-                        <a:t>20,0 %</a:t>
+                        <a:t>32,0 %</a:t>
                       </a:r>
                     </a:p>
                   </a:txBody>
@@ -10870,7 +10870,7 @@
                           </a:solidFill>
                           <a:latin typeface="Calibri"/>
                         </a:rPr>
-                        <a:t>Facebook</a:t>
+                        <a:t>Amazon</a:t>
                       </a:r>
                     </a:p>
                   </a:txBody>
@@ -10893,7 +10893,7 @@
                           </a:solidFill>
                           <a:latin typeface="Calibri"/>
                         </a:rPr>
-                        <a:t>FB</a:t>
+                        <a:t>AMZN</a:t>
                       </a:r>
                     </a:p>
                   </a:txBody>
@@ -10916,7 +10916,7 @@
                           </a:solidFill>
                           <a:latin typeface="Calibri"/>
                         </a:rPr>
-                        <a:t>800,0</a:t>
+                        <a:t>1 034,9</a:t>
                       </a:r>
                     </a:p>
                   </a:txBody>
@@ -10939,7 +10939,7 @@
                           </a:solidFill>
                           <a:latin typeface="Calibri"/>
                         </a:rPr>
-                        <a:t>12,0x</a:t>
+                        <a:t>18,3x</a:t>
                       </a:r>
                     </a:p>
                   </a:txBody>
@@ -10962,7 +10962,7 @@
                           </a:solidFill>
                           <a:latin typeface="Calibri"/>
                         </a:rPr>
-                        <a:t>4,0x</a:t>
+                        <a:t>6,5x</a:t>
                       </a:r>
                     </a:p>
                   </a:txBody>
@@ -10985,7 +10985,7 @@
                           </a:solidFill>
                           <a:latin typeface="Calibri"/>
                         </a:rPr>
-                        <a:t>20,0x</a:t>
+                        <a:t>24,5x</a:t>
                       </a:r>
                     </a:p>
                   </a:txBody>
@@ -11008,7 +11008,7 @@
                           </a:solidFill>
                           <a:latin typeface="Calibri"/>
                         </a:rPr>
-                        <a:t>80,0 %</a:t>
+                        <a:t>42,0 %</a:t>
                       </a:r>
                     </a:p>
                   </a:txBody>
@@ -11031,7 +11031,7 @@
                           </a:solidFill>
                           <a:latin typeface="Calibri"/>
                         </a:rPr>
-                        <a:t>30,0 %</a:t>
+                        <a:t>25,0 %</a:t>
                       </a:r>
                     </a:p>
                   </a:txBody>
@@ -11056,7 +11056,7 @@
                           </a:solidFill>
                           <a:latin typeface="Calibri"/>
                         </a:rPr>
-                        <a:t>Microsoft</a:t>
+                        <a:t>Facebook</a:t>
                       </a:r>
                     </a:p>
                   </a:txBody>
@@ -11079,7 +11079,7 @@
                           </a:solidFill>
                           <a:latin typeface="Calibri"/>
                         </a:rPr>
-                        <a:t>MSFT</a:t>
+                        <a:t>META</a:t>
                       </a:r>
                     </a:p>
                   </a:txBody>
@@ -11102,7 +11102,7 @@
                           </a:solidFill>
                           <a:latin typeface="Calibri"/>
                         </a:rPr>
-                        <a:t>2 000,0</a:t>
+                        <a:t>846,9</a:t>
                       </a:r>
                     </a:p>
                   </a:txBody>
@@ -11125,7 +11125,7 @@
                           </a:solidFill>
                           <a:latin typeface="Calibri"/>
                         </a:rPr>
-                        <a:t>18,0x</a:t>
+                        <a:t>16,2x</a:t>
                       </a:r>
                     </a:p>
                   </a:txBody>
@@ -11148,7 +11148,7 @@
                           </a:solidFill>
                           <a:latin typeface="Calibri"/>
                         </a:rPr>
-                        <a:t>7,0x</a:t>
+                        <a:t>5,8x</a:t>
                       </a:r>
                     </a:p>
                   </a:txBody>
@@ -11171,7 +11171,7 @@
                           </a:solidFill>
                           <a:latin typeface="Calibri"/>
                         </a:rPr>
-                        <a:t>35,0x</a:t>
+                        <a:t>20,5x</a:t>
                       </a:r>
                     </a:p>
                   </a:txBody>
@@ -11194,7 +11194,7 @@
                           </a:solidFill>
                           <a:latin typeface="Calibri"/>
                         </a:rPr>
-                        <a:t>65,0 %</a:t>
+                        <a:t>38,0 %</a:t>
                       </a:r>
                     </a:p>
                   </a:txBody>
@@ -11217,7 +11217,7 @@
                           </a:solidFill>
                           <a:latin typeface="Calibri"/>
                         </a:rPr>
-                        <a:t>35,0 %</a:t>
+                        <a:t>22,0 %</a:t>
                       </a:r>
                     </a:p>
                   </a:txBody>
@@ -11242,7 +11242,7 @@
                           </a:solidFill>
                           <a:latin typeface="Calibri"/>
                         </a:rPr>
-                        <a:t>Samsung</a:t>
+                        <a:t>Tesla</a:t>
                       </a:r>
                     </a:p>
                   </a:txBody>
@@ -11265,7 +11265,7 @@
                           </a:solidFill>
                           <a:latin typeface="Calibri"/>
                         </a:rPr>
-                        <a:t>SSNLF</a:t>
+                        <a:t>TSLA</a:t>
                       </a:r>
                     </a:p>
                   </a:txBody>
@@ -11288,7 +11288,7 @@
                           </a:solidFill>
                           <a:latin typeface="Calibri"/>
                         </a:rPr>
-                        <a:t>500,0</a:t>
+                        <a:t>574,9</a:t>
                       </a:r>
                     </a:p>
                   </a:txBody>
@@ -11311,7 +11311,7 @@
                           </a:solidFill>
                           <a:latin typeface="Calibri"/>
                         </a:rPr>
-                        <a:t>10,0x</a:t>
+                        <a:t>24,9x</a:t>
                       </a:r>
                     </a:p>
                   </a:txBody>
@@ -11334,7 +11334,7 @@
                           </a:solidFill>
                           <a:latin typeface="Calibri"/>
                         </a:rPr>
-                        <a:t>3,0x</a:t>
+                        <a:t>9,2x</a:t>
                       </a:r>
                     </a:p>
                   </a:txBody>
@@ -11357,7 +11357,7 @@
                           </a:solidFill>
                           <a:latin typeface="Calibri"/>
                         </a:rPr>
-                        <a:t>15,0x</a:t>
+                        <a:t>35,1x</a:t>
                       </a:r>
                     </a:p>
                   </a:txBody>
@@ -11380,7 +11380,7 @@
                           </a:solidFill>
                           <a:latin typeface="Calibri"/>
                         </a:rPr>
-                        <a:t>30,0 %</a:t>
+                        <a:t>25,0 %</a:t>
                       </a:r>
                     </a:p>
                   </a:txBody>
@@ -11497,7 +11497,7 @@
                           </a:solidFill>
                           <a:latin typeface="Calibri"/>
                         </a:rPr>
-                        <a:t>15,0x</a:t>
+                        <a:t>20,5x</a:t>
                       </a:r>
                     </a:p>
                   </a:txBody>
@@ -11520,7 +11520,7 @@
                           </a:solidFill>
                           <a:latin typeface="Calibri"/>
                         </a:rPr>
-                        <a:t>5,0x</a:t>
+                        <a:t>7,3x</a:t>
                       </a:r>
                     </a:p>
                   </a:txBody>
@@ -11543,7 +11543,7 @@
                           </a:solidFill>
                           <a:latin typeface="Calibri"/>
                         </a:rPr>
-                        <a:t>25,0x</a:t>
+                        <a:t>29,1x</a:t>
                       </a:r>
                     </a:p>
                   </a:txBody>
@@ -11566,7 +11566,7 @@
                           </a:solidFill>
                           <a:latin typeface="Calibri"/>
                         </a:rPr>
-                        <a:t>55,0 %</a:t>
+                        <a:t>42,0 %</a:t>
                       </a:r>
                     </a:p>
                   </a:txBody>
@@ -11634,7 +11634,7 @@
                 </a:solidFill>
                 <a:latin typeface="Calibri"/>
               </a:rPr>
-              <a:t>Le ratio EV/EBITDA d'Apple est de 26,1x, supérieur à la mediane de son secteur.</a:t>
+              <a:t>Le ratio EV/EBITDA d'Apple est inférieur à la moyenne de son secteur, ce qui indique une valorisation attractive.</a:t>
             </a:r>
           </a:p>
         </p:txBody>
@@ -12238,30 +12238,786 @@
           </a:p>
         </p:txBody>
       </p:sp>
-      <p:pic>
-        <p:nvPicPr>
-          <p:cNvPr id="17" name="Picture 16" descr="image.png"/>
-          <p:cNvPicPr>
-            <a:picLocks noChangeAspect="1"/>
-          </p:cNvPicPr>
-          <p:nvPr/>
-        </p:nvPicPr>
-        <p:blipFill>
-          <a:blip r:embed="rId2"/>
-          <a:stretch>
-            <a:fillRect/>
-          </a:stretch>
-        </p:blipFill>
-        <p:spPr>
-          <a:xfrm>
-            <a:off x="367200" y="914400"/>
-            <a:ext cx="8413200" cy="1980000"/>
-          </a:xfrm>
-          <a:prstGeom prst="rect">
-            <a:avLst/>
-          </a:prstGeom>
-        </p:spPr>
-      </p:pic>
+      <p:graphicFrame>
+        <p:nvGraphicFramePr>
+          <p:cNvPr id="17" name="Table 16"/>
+          <p:cNvGraphicFramePr>
+            <a:graphicFrameLocks noGrp="1"/>
+          </p:cNvGraphicFramePr>
+          <p:nvPr/>
+        </p:nvGraphicFramePr>
+        <p:xfrm>
+          <a:off x="367200" y="914400"/>
+          <a:ext cx="8413200" cy="2149200"/>
+        </p:xfrm>
+        <a:graphic>
+          <a:graphicData uri="http://schemas.openxmlformats.org/drawingml/2006/table">
+            <a:tbl>
+              <a:tblPr firstRow="1" bandRow="1">
+                <a:tableStyleId>{5C22544A-7EE6-4342-B048-85BDC9FD1C3A}</a:tableStyleId>
+              </a:tblPr>
+              <a:tblGrid>
+                <a:gridCol w="2944620"/>
+                <a:gridCol w="1682640"/>
+                <a:gridCol w="1682640"/>
+                <a:gridCol w="2103300"/>
+              </a:tblGrid>
+              <a:tr h="268650">
+                <a:tc>
+                  <a:txBody>
+                    <a:bodyPr/>
+                    <a:lstStyle/>
+                    <a:p>
+                      <a:pPr algn="l"/>
+                      <a:r>
+                        <a:rPr sz="800" b="1" i="0">
+                          <a:solidFill>
+                            <a:srgbClr val="FFFFFF"/>
+                          </a:solidFill>
+                          <a:latin typeface="Calibri"/>
+                        </a:rPr>
+                        <a:t>Methode</a:t>
+                      </a:r>
+                    </a:p>
+                  </a:txBody>
+                  <a:tcPr>
+                    <a:solidFill>
+                      <a:srgbClr val="1B3A6B"/>
+                    </a:solidFill>
+                  </a:tcPr>
+                </a:tc>
+                <a:tc>
+                  <a:txBody>
+                    <a:bodyPr/>
+                    <a:lstStyle/>
+                    <a:p>
+                      <a:pPr algn="ctr"/>
+                      <a:r>
+                        <a:rPr sz="800" b="1" i="0">
+                          <a:solidFill>
+                            <a:srgbClr val="FFFFFF"/>
+                          </a:solidFill>
+                          <a:latin typeface="Calibri"/>
+                        </a:rPr>
+                        <a:t>Fourchette basse</a:t>
+                      </a:r>
+                    </a:p>
+                  </a:txBody>
+                  <a:tcPr>
+                    <a:solidFill>
+                      <a:srgbClr val="1B3A6B"/>
+                    </a:solidFill>
+                  </a:tcPr>
+                </a:tc>
+                <a:tc>
+                  <a:txBody>
+                    <a:bodyPr/>
+                    <a:lstStyle/>
+                    <a:p>
+                      <a:pPr algn="ctr"/>
+                      <a:r>
+                        <a:rPr sz="800" b="1" i="0">
+                          <a:solidFill>
+                            <a:srgbClr val="FFFFFF"/>
+                          </a:solidFill>
+                          <a:latin typeface="Calibri"/>
+                        </a:rPr>
+                        <a:t>Fourchette haute</a:t>
+                      </a:r>
+                    </a:p>
+                  </a:txBody>
+                  <a:tcPr>
+                    <a:solidFill>
+                      <a:srgbClr val="1B3A6B"/>
+                    </a:solidFill>
+                  </a:tcPr>
+                </a:tc>
+                <a:tc>
+                  <a:txBody>
+                    <a:bodyPr/>
+                    <a:lstStyle/>
+                    <a:p>
+                      <a:pPr algn="ctr"/>
+                      <a:r>
+                        <a:rPr sz="800" b="1" i="0">
+                          <a:solidFill>
+                            <a:srgbClr val="FFFFFF"/>
+                          </a:solidFill>
+                          <a:latin typeface="Calibri"/>
+                        </a:rPr>
+                        <a:t>Point central</a:t>
+                      </a:r>
+                    </a:p>
+                  </a:txBody>
+                  <a:tcPr>
+                    <a:solidFill>
+                      <a:srgbClr val="1B3A6B"/>
+                    </a:solidFill>
+                  </a:tcPr>
+                </a:tc>
+              </a:tr>
+              <a:tr h="268650">
+                <a:tc>
+                  <a:txBody>
+                    <a:bodyPr/>
+                    <a:lstStyle/>
+                    <a:p>
+                      <a:pPr algn="l"/>
+                      <a:r>
+                        <a:rPr sz="800" b="0" i="0">
+                          <a:solidFill>
+                            <a:srgbClr val="0D0D0D"/>
+                          </a:solidFill>
+                          <a:latin typeface="Calibri"/>
+                        </a:rPr>
+                        <a:t>DCF - Bear</a:t>
+                      </a:r>
+                    </a:p>
+                  </a:txBody>
+                  <a:tcPr>
+                    <a:solidFill>
+                      <a:srgbClr val="FAF0EF"/>
+                    </a:solidFill>
+                  </a:tcPr>
+                </a:tc>
+                <a:tc>
+                  <a:txBody>
+                    <a:bodyPr/>
+                    <a:lstStyle/>
+                    <a:p>
+                      <a:pPr algn="ctr"/>
+                      <a:r>
+                        <a:rPr sz="800" b="0" i="0">
+                          <a:solidFill>
+                            <a:srgbClr val="0D0D0D"/>
+                          </a:solidFill>
+                          <a:latin typeface="Calibri"/>
+                        </a:rPr>
+                        <a:t>220</a:t>
+                      </a:r>
+                    </a:p>
+                  </a:txBody>
+                  <a:tcPr>
+                    <a:solidFill>
+                      <a:srgbClr val="FAF0EF"/>
+                    </a:solidFill>
+                  </a:tcPr>
+                </a:tc>
+                <a:tc>
+                  <a:txBody>
+                    <a:bodyPr/>
+                    <a:lstStyle/>
+                    <a:p>
+                      <a:pPr algn="ctr"/>
+                      <a:r>
+                        <a:rPr sz="800" b="0" i="0">
+                          <a:solidFill>
+                            <a:srgbClr val="0D0D0D"/>
+                          </a:solidFill>
+                          <a:latin typeface="Calibri"/>
+                        </a:rPr>
+                        <a:t>250</a:t>
+                      </a:r>
+                    </a:p>
+                  </a:txBody>
+                  <a:tcPr>
+                    <a:solidFill>
+                      <a:srgbClr val="FAF0EF"/>
+                    </a:solidFill>
+                  </a:tcPr>
+                </a:tc>
+                <a:tc>
+                  <a:txBody>
+                    <a:bodyPr/>
+                    <a:lstStyle/>
+                    <a:p>
+                      <a:pPr algn="ctr"/>
+                      <a:r>
+                        <a:rPr sz="800" b="0" i="0">
+                          <a:solidFill>
+                            <a:srgbClr val="0D0D0D"/>
+                          </a:solidFill>
+                          <a:latin typeface="Calibri"/>
+                        </a:rPr>
+                        <a:t>241</a:t>
+                      </a:r>
+                    </a:p>
+                  </a:txBody>
+                  <a:tcPr>
+                    <a:solidFill>
+                      <a:srgbClr val="FAF0EF"/>
+                    </a:solidFill>
+                  </a:tcPr>
+                </a:tc>
+              </a:tr>
+              <a:tr h="268650">
+                <a:tc>
+                  <a:txBody>
+                    <a:bodyPr/>
+                    <a:lstStyle/>
+                    <a:p>
+                      <a:pPr algn="l"/>
+                      <a:r>
+                        <a:rPr sz="800" b="0" i="0">
+                          <a:solidFill>
+                            <a:srgbClr val="0D0D0D"/>
+                          </a:solidFill>
+                          <a:latin typeface="Calibri"/>
+                        </a:rPr>
+                        <a:t>DCF - Base</a:t>
+                      </a:r>
+                    </a:p>
+                  </a:txBody>
+                  <a:tcPr>
+                    <a:solidFill>
+                      <a:srgbClr val="EEF3FA"/>
+                    </a:solidFill>
+                  </a:tcPr>
+                </a:tc>
+                <a:tc>
+                  <a:txBody>
+                    <a:bodyPr/>
+                    <a:lstStyle/>
+                    <a:p>
+                      <a:pPr algn="ctr"/>
+                      <a:r>
+                        <a:rPr sz="800" b="0" i="0">
+                          <a:solidFill>
+                            <a:srgbClr val="0D0D0D"/>
+                          </a:solidFill>
+                          <a:latin typeface="Calibri"/>
+                        </a:rPr>
+                        <a:t>250</a:t>
+                      </a:r>
+                    </a:p>
+                  </a:txBody>
+                  <a:tcPr>
+                    <a:solidFill>
+                      <a:srgbClr val="EEF3FA"/>
+                    </a:solidFill>
+                  </a:tcPr>
+                </a:tc>
+                <a:tc>
+                  <a:txBody>
+                    <a:bodyPr/>
+                    <a:lstStyle/>
+                    <a:p>
+                      <a:pPr algn="ctr"/>
+                      <a:r>
+                        <a:rPr sz="800" b="0" i="0">
+                          <a:solidFill>
+                            <a:srgbClr val="0D0D0D"/>
+                          </a:solidFill>
+                          <a:latin typeface="Calibri"/>
+                        </a:rPr>
+                        <a:t>300</a:t>
+                      </a:r>
+                    </a:p>
+                  </a:txBody>
+                  <a:tcPr>
+                    <a:solidFill>
+                      <a:srgbClr val="EEF3FA"/>
+                    </a:solidFill>
+                  </a:tcPr>
+                </a:tc>
+                <a:tc>
+                  <a:txBody>
+                    <a:bodyPr/>
+                    <a:lstStyle/>
+                    <a:p>
+                      <a:pPr algn="ctr"/>
+                      <a:r>
+                        <a:rPr sz="800" b="0" i="0">
+                          <a:solidFill>
+                            <a:srgbClr val="0D0D0D"/>
+                          </a:solidFill>
+                          <a:latin typeface="Calibri"/>
+                        </a:rPr>
+                        <a:t>280</a:t>
+                      </a:r>
+                    </a:p>
+                  </a:txBody>
+                  <a:tcPr>
+                    <a:solidFill>
+                      <a:srgbClr val="EEF3FA"/>
+                    </a:solidFill>
+                  </a:tcPr>
+                </a:tc>
+              </a:tr>
+              <a:tr h="268650">
+                <a:tc>
+                  <a:txBody>
+                    <a:bodyPr/>
+                    <a:lstStyle/>
+                    <a:p>
+                      <a:pPr algn="l"/>
+                      <a:r>
+                        <a:rPr sz="800" b="0" i="0">
+                          <a:solidFill>
+                            <a:srgbClr val="0D0D0D"/>
+                          </a:solidFill>
+                          <a:latin typeface="Calibri"/>
+                        </a:rPr>
+                        <a:t>DCF - Bull</a:t>
+                      </a:r>
+                    </a:p>
+                  </a:txBody>
+                  <a:tcPr>
+                    <a:solidFill>
+                      <a:srgbClr val="EAF4EF"/>
+                    </a:solidFill>
+                  </a:tcPr>
+                </a:tc>
+                <a:tc>
+                  <a:txBody>
+                    <a:bodyPr/>
+                    <a:lstStyle/>
+                    <a:p>
+                      <a:pPr algn="ctr"/>
+                      <a:r>
+                        <a:rPr sz="800" b="0" i="0">
+                          <a:solidFill>
+                            <a:srgbClr val="0D0D0D"/>
+                          </a:solidFill>
+                          <a:latin typeface="Calibri"/>
+                        </a:rPr>
+                        <a:t>300</a:t>
+                      </a:r>
+                    </a:p>
+                  </a:txBody>
+                  <a:tcPr>
+                    <a:solidFill>
+                      <a:srgbClr val="EAF4EF"/>
+                    </a:solidFill>
+                  </a:tcPr>
+                </a:tc>
+                <a:tc>
+                  <a:txBody>
+                    <a:bodyPr/>
+                    <a:lstStyle/>
+                    <a:p>
+                      <a:pPr algn="ctr"/>
+                      <a:r>
+                        <a:rPr sz="800" b="0" i="0">
+                          <a:solidFill>
+                            <a:srgbClr val="0D0D0D"/>
+                          </a:solidFill>
+                          <a:latin typeface="Calibri"/>
+                        </a:rPr>
+                        <a:t>350</a:t>
+                      </a:r>
+                    </a:p>
+                  </a:txBody>
+                  <a:tcPr>
+                    <a:solidFill>
+                      <a:srgbClr val="EAF4EF"/>
+                    </a:solidFill>
+                  </a:tcPr>
+                </a:tc>
+                <a:tc>
+                  <a:txBody>
+                    <a:bodyPr/>
+                    <a:lstStyle/>
+                    <a:p>
+                      <a:pPr algn="ctr"/>
+                      <a:r>
+                        <a:rPr sz="800" b="0" i="0">
+                          <a:solidFill>
+                            <a:srgbClr val="0D0D0D"/>
+                          </a:solidFill>
+                          <a:latin typeface="Calibri"/>
+                        </a:rPr>
+                        <a:t>310</a:t>
+                      </a:r>
+                    </a:p>
+                  </a:txBody>
+                  <a:tcPr>
+                    <a:solidFill>
+                      <a:srgbClr val="EAF4EF"/>
+                    </a:solidFill>
+                  </a:tcPr>
+                </a:tc>
+              </a:tr>
+              <a:tr h="268650">
+                <a:tc>
+                  <a:txBody>
+                    <a:bodyPr/>
+                    <a:lstStyle/>
+                    <a:p>
+                      <a:pPr algn="l"/>
+                      <a:r>
+                        <a:rPr sz="800" b="0" i="0">
+                          <a:solidFill>
+                            <a:srgbClr val="0D0D0D"/>
+                          </a:solidFill>
+                          <a:latin typeface="Calibri"/>
+                        </a:rPr>
+                        <a:t>EV/EBITDA - Mediane peers</a:t>
+                      </a:r>
+                    </a:p>
+                  </a:txBody>
+                  <a:tcPr>
+                    <a:solidFill>
+                      <a:srgbClr val="F7F8FA"/>
+                    </a:solidFill>
+                  </a:tcPr>
+                </a:tc>
+                <a:tc>
+                  <a:txBody>
+                    <a:bodyPr/>
+                    <a:lstStyle/>
+                    <a:p>
+                      <a:pPr algn="ctr"/>
+                      <a:r>
+                        <a:rPr sz="800" b="0" i="0">
+                          <a:solidFill>
+                            <a:srgbClr val="0D0D0D"/>
+                          </a:solidFill>
+                          <a:latin typeface="Calibri"/>
+                        </a:rPr>
+                        <a:t>240</a:t>
+                      </a:r>
+                    </a:p>
+                  </a:txBody>
+                  <a:tcPr>
+                    <a:solidFill>
+                      <a:srgbClr val="F7F8FA"/>
+                    </a:solidFill>
+                  </a:tcPr>
+                </a:tc>
+                <a:tc>
+                  <a:txBody>
+                    <a:bodyPr/>
+                    <a:lstStyle/>
+                    <a:p>
+                      <a:pPr algn="ctr"/>
+                      <a:r>
+                        <a:rPr sz="800" b="0" i="0">
+                          <a:solidFill>
+                            <a:srgbClr val="0D0D0D"/>
+                          </a:solidFill>
+                          <a:latin typeface="Calibri"/>
+                        </a:rPr>
+                        <a:t>280</a:t>
+                      </a:r>
+                    </a:p>
+                  </a:txBody>
+                  <a:tcPr>
+                    <a:solidFill>
+                      <a:srgbClr val="F7F8FA"/>
+                    </a:solidFill>
+                  </a:tcPr>
+                </a:tc>
+                <a:tc>
+                  <a:txBody>
+                    <a:bodyPr/>
+                    <a:lstStyle/>
+                    <a:p>
+                      <a:pPr algn="ctr"/>
+                      <a:r>
+                        <a:rPr sz="800" b="0" i="0">
+                          <a:solidFill>
+                            <a:srgbClr val="0D0D0D"/>
+                          </a:solidFill>
+                          <a:latin typeface="Calibri"/>
+                        </a:rPr>
+                        <a:t>260</a:t>
+                      </a:r>
+                    </a:p>
+                  </a:txBody>
+                  <a:tcPr>
+                    <a:solidFill>
+                      <a:srgbClr val="F7F8FA"/>
+                    </a:solidFill>
+                  </a:tcPr>
+                </a:tc>
+              </a:tr>
+              <a:tr h="268650">
+                <a:tc>
+                  <a:txBody>
+                    <a:bodyPr/>
+                    <a:lstStyle/>
+                    <a:p>
+                      <a:pPr algn="l"/>
+                      <a:r>
+                        <a:rPr sz="800" b="0" i="0">
+                          <a:solidFill>
+                            <a:srgbClr val="0D0D0D"/>
+                          </a:solidFill>
+                          <a:latin typeface="Calibri"/>
+                        </a:rPr>
+                        <a:t>EV/EBITDA - Prime tech +50%</a:t>
+                      </a:r>
+                    </a:p>
+                  </a:txBody>
+                  <a:tcPr>
+                    <a:solidFill>
+                      <a:srgbClr val="F7F8FA"/>
+                    </a:solidFill>
+                  </a:tcPr>
+                </a:tc>
+                <a:tc>
+                  <a:txBody>
+                    <a:bodyPr/>
+                    <a:lstStyle/>
+                    <a:p>
+                      <a:pPr algn="ctr"/>
+                      <a:r>
+                        <a:rPr sz="800" b="0" i="0">
+                          <a:solidFill>
+                            <a:srgbClr val="0D0D0D"/>
+                          </a:solidFill>
+                          <a:latin typeface="Calibri"/>
+                        </a:rPr>
+                        <a:t>280</a:t>
+                      </a:r>
+                    </a:p>
+                  </a:txBody>
+                  <a:tcPr>
+                    <a:solidFill>
+                      <a:srgbClr val="F7F8FA"/>
+                    </a:solidFill>
+                  </a:tcPr>
+                </a:tc>
+                <a:tc>
+                  <a:txBody>
+                    <a:bodyPr/>
+                    <a:lstStyle/>
+                    <a:p>
+                      <a:pPr algn="ctr"/>
+                      <a:r>
+                        <a:rPr sz="800" b="0" i="0">
+                          <a:solidFill>
+                            <a:srgbClr val="0D0D0D"/>
+                          </a:solidFill>
+                          <a:latin typeface="Calibri"/>
+                        </a:rPr>
+                        <a:t>330</a:t>
+                      </a:r>
+                    </a:p>
+                  </a:txBody>
+                  <a:tcPr>
+                    <a:solidFill>
+                      <a:srgbClr val="F7F8FA"/>
+                    </a:solidFill>
+                  </a:tcPr>
+                </a:tc>
+                <a:tc>
+                  <a:txBody>
+                    <a:bodyPr/>
+                    <a:lstStyle/>
+                    <a:p>
+                      <a:pPr algn="ctr"/>
+                      <a:r>
+                        <a:rPr sz="800" b="0" i="0">
+                          <a:solidFill>
+                            <a:srgbClr val="0D0D0D"/>
+                          </a:solidFill>
+                          <a:latin typeface="Calibri"/>
+                        </a:rPr>
+                        <a:t>300</a:t>
+                      </a:r>
+                    </a:p>
+                  </a:txBody>
+                  <a:tcPr>
+                    <a:solidFill>
+                      <a:srgbClr val="F7F8FA"/>
+                    </a:solidFill>
+                  </a:tcPr>
+                </a:tc>
+              </a:tr>
+              <a:tr h="268650">
+                <a:tc>
+                  <a:txBody>
+                    <a:bodyPr/>
+                    <a:lstStyle/>
+                    <a:p>
+                      <a:pPr algn="l"/>
+                      <a:r>
+                        <a:rPr sz="800" b="0" i="0">
+                          <a:solidFill>
+                            <a:srgbClr val="0D0D0D"/>
+                          </a:solidFill>
+                          <a:latin typeface="Calibri"/>
+                        </a:rPr>
+                        <a:t>EV/Revenue - Mediane peers</a:t>
+                      </a:r>
+                    </a:p>
+                  </a:txBody>
+                  <a:tcPr>
+                    <a:solidFill>
+                      <a:srgbClr val="F7F8FA"/>
+                    </a:solidFill>
+                  </a:tcPr>
+                </a:tc>
+                <a:tc>
+                  <a:txBody>
+                    <a:bodyPr/>
+                    <a:lstStyle/>
+                    <a:p>
+                      <a:pPr algn="ctr"/>
+                      <a:r>
+                        <a:rPr sz="800" b="0" i="0">
+                          <a:solidFill>
+                            <a:srgbClr val="0D0D0D"/>
+                          </a:solidFill>
+                          <a:latin typeface="Calibri"/>
+                        </a:rPr>
+                        <a:t>200</a:t>
+                      </a:r>
+                    </a:p>
+                  </a:txBody>
+                  <a:tcPr>
+                    <a:solidFill>
+                      <a:srgbClr val="F7F8FA"/>
+                    </a:solidFill>
+                  </a:tcPr>
+                </a:tc>
+                <a:tc>
+                  <a:txBody>
+                    <a:bodyPr/>
+                    <a:lstStyle/>
+                    <a:p>
+                      <a:pPr algn="ctr"/>
+                      <a:r>
+                        <a:rPr sz="800" b="0" i="0">
+                          <a:solidFill>
+                            <a:srgbClr val="0D0D0D"/>
+                          </a:solidFill>
+                          <a:latin typeface="Calibri"/>
+                        </a:rPr>
+                        <a:t>240</a:t>
+                      </a:r>
+                    </a:p>
+                  </a:txBody>
+                  <a:tcPr>
+                    <a:solidFill>
+                      <a:srgbClr val="F7F8FA"/>
+                    </a:solidFill>
+                  </a:tcPr>
+                </a:tc>
+                <a:tc>
+                  <a:txBody>
+                    <a:bodyPr/>
+                    <a:lstStyle/>
+                    <a:p>
+                      <a:pPr algn="ctr"/>
+                      <a:r>
+                        <a:rPr sz="800" b="0" i="0">
+                          <a:solidFill>
+                            <a:srgbClr val="0D0D0D"/>
+                          </a:solidFill>
+                          <a:latin typeface="Calibri"/>
+                        </a:rPr>
+                        <a:t>220</a:t>
+                      </a:r>
+                    </a:p>
+                  </a:txBody>
+                  <a:tcPr>
+                    <a:solidFill>
+                      <a:srgbClr val="F7F8FA"/>
+                    </a:solidFill>
+                  </a:tcPr>
+                </a:tc>
+              </a:tr>
+              <a:tr h="268650">
+                <a:tc>
+                  <a:txBody>
+                    <a:bodyPr/>
+                    <a:lstStyle/>
+                    <a:p>
+                      <a:pPr algn="l"/>
+                      <a:r>
+                        <a:rPr sz="800" b="0" i="0">
+                          <a:solidFill>
+                            <a:srgbClr val="0D0D0D"/>
+                          </a:solidFill>
+                          <a:latin typeface="Calibri"/>
+                        </a:rPr>
+                        <a:t>Cours actuel (253,38)</a:t>
+                      </a:r>
+                    </a:p>
+                  </a:txBody>
+                  <a:tcPr>
+                    <a:solidFill>
+                      <a:srgbClr val="EEF3FA"/>
+                    </a:solidFill>
+                  </a:tcPr>
+                </a:tc>
+                <a:tc>
+                  <a:txBody>
+                    <a:bodyPr/>
+                    <a:lstStyle/>
+                    <a:p>
+                      <a:pPr algn="ctr"/>
+                      <a:r>
+                        <a:rPr sz="800" b="0" i="0">
+                          <a:solidFill>
+                            <a:srgbClr val="0D0D0D"/>
+                          </a:solidFill>
+                          <a:latin typeface="Calibri"/>
+                        </a:rPr>
+                        <a:t>—</a:t>
+                      </a:r>
+                    </a:p>
+                  </a:txBody>
+                  <a:tcPr>
+                    <a:solidFill>
+                      <a:srgbClr val="EEF3FA"/>
+                    </a:solidFill>
+                  </a:tcPr>
+                </a:tc>
+                <a:tc>
+                  <a:txBody>
+                    <a:bodyPr/>
+                    <a:lstStyle/>
+                    <a:p>
+                      <a:pPr algn="ctr"/>
+                      <a:r>
+                        <a:rPr sz="800" b="0" i="0">
+                          <a:solidFill>
+                            <a:srgbClr val="0D0D0D"/>
+                          </a:solidFill>
+                          <a:latin typeface="Calibri"/>
+                        </a:rPr>
+                        <a:t>—</a:t>
+                      </a:r>
+                    </a:p>
+                  </a:txBody>
+                  <a:tcPr>
+                    <a:solidFill>
+                      <a:srgbClr val="EEF3FA"/>
+                    </a:solidFill>
+                  </a:tcPr>
+                </a:tc>
+                <a:tc>
+                  <a:txBody>
+                    <a:bodyPr/>
+                    <a:lstStyle/>
+                    <a:p>
+                      <a:pPr algn="ctr"/>
+                      <a:r>
+                        <a:rPr sz="800" b="0" i="0">
+                          <a:solidFill>
+                            <a:srgbClr val="0D0D0D"/>
+                          </a:solidFill>
+                          <a:latin typeface="Calibri"/>
+                        </a:rPr>
+                        <a:t>253,38</a:t>
+                      </a:r>
+                    </a:p>
+                  </a:txBody>
+                  <a:tcPr>
+                    <a:solidFill>
+                      <a:srgbClr val="EEF3FA"/>
+                    </a:solidFill>
+                  </a:tcPr>
+                </a:tc>
+              </a:tr>
+            </a:tbl>
+          </a:graphicData>
+        </a:graphic>
+      </p:graphicFrame>
       <p:sp>
         <p:nvSpPr>
           <p:cNvPr id="18" name="TextBox 17"/>
@@ -12292,7 +13048,7 @@
                 </a:solidFill>
                 <a:latin typeface="Calibri"/>
               </a:rPr>
-              <a:t>La DCF d'Apple implique un WACC de 10,3% et un TGR de 3,0%.</a:t>
+              <a:t>Le prix implicite d'Apple sur la base d'un modèle de flux de trésorerie disponible est de 280,5 USD, ce qui suggère un upside de 10% par rapport au cours actuel.</a:t>
             </a:r>
           </a:p>
         </p:txBody>
@@ -13265,7 +14021,7 @@
                 </a:solidFill>
                 <a:latin typeface="Calibri"/>
               </a:rPr>
-              <a:t>Risque Concurrentiel</a:t>
+              <a:t>Concurrence accrue</a:t>
             </a:r>
           </a:p>
         </p:txBody>
@@ -13300,7 +14056,7 @@
                 </a:solidFill>
                 <a:latin typeface="Calibri"/>
               </a:rPr>
-              <a:t>AAPL est surévaluée avec un P/E de 33,23x, dépassant la moyenne sectorielle de 10%</a:t>
+              <a:t>Concurrence accrue</a:t>
             </a:r>
           </a:p>
         </p:txBody>
@@ -13421,7 +14177,7 @@
                 </a:solidFill>
                 <a:latin typeface="Calibri"/>
               </a:rPr>
-              <a:t>Risque Sectoriel</a:t>
+              <a:t>Dépendance aux smartphones</a:t>
             </a:r>
           </a:p>
         </p:txBody>
@@ -13456,7 +14212,7 @@
                 </a:solidFill>
                 <a:latin typeface="Calibri"/>
               </a:rPr>
-              <a:t>Les ratios de marge bénéficiaire sont sous pression debido à la concurrence accrue, avec une marge brute de 46,9% qui pourrait baisser de 2% d'ici 2026</a:t>
+              <a:t>Risques politiques</a:t>
             </a:r>
           </a:p>
         </p:txBody>
@@ -13577,7 +14333,7 @@
                 </a:solidFill>
                 <a:latin typeface="Calibri"/>
               </a:rPr>
-              <a:t>Risque Financier</a:t>
+              <a:t>Risques politiques</a:t>
             </a:r>
           </a:p>
         </p:txBody>
@@ -13612,7 +14368,7 @@
                 </a:solidFill>
                 <a:latin typeface="Calibri"/>
               </a:rPr>
-              <a:t>Le déclin du marché des smartphones pourrait impacter les ventes d'AAPL, avec une croissance des revenus prévue à seulement 6,4% en 2025</a:t>
+              <a:t>Dépendance aux smartphones</a:t>
             </a:r>
           </a:p>
         </p:txBody>
@@ -13826,7 +14582,7 @@
                           </a:solidFill>
                           <a:latin typeface="Calibri"/>
                         </a:rPr>
-                        <a:t>Récession économique</a:t>
+                        <a:t>Récession économique mondiale</a:t>
                       </a:r>
                     </a:p>
                   </a:txBody>
@@ -13968,7 +14724,7 @@
                           </a:solidFill>
                           <a:latin typeface="Calibri"/>
                         </a:rPr>
-                        <a:t>Problèmes de production d'iPhones</a:t>
+                        <a:t>Problèmes de production ou de livraison</a:t>
                       </a:r>
                     </a:p>
                   </a:txBody>
@@ -15044,7 +15800,7 @@
                 </a:solidFill>
                 <a:latin typeface="Calibri"/>
               </a:rPr>
-              <a:t>Score agrege : +0,017</a:t>
+              <a:t>Score agrege : +0,035</a:t>
             </a:r>
           </a:p>
         </p:txBody>
@@ -15356,7 +16112,7 @@
                 </a:solidFill>
                 <a:latin typeface="Calibri"/>
               </a:rPr>
-              <a:t>45,0 %</a:t>
+              <a:t>49,7 %</a:t>
             </a:r>
           </a:p>
         </p:txBody>
@@ -15835,7 +16591,7 @@
                           </a:solidFill>
                           <a:latin typeface="Calibri"/>
                         </a:rPr>
-                        <a:t>+0,284</a:t>
+                        <a:t>+0,269</a:t>
                       </a:r>
                     </a:p>
                   </a:txBody>
@@ -15858,7 +16614,7 @@
                           </a:solidFill>
                           <a:latin typeface="Calibri"/>
                         </a:rPr>
-                        <a:t>5G, IA, Sécurité</a:t>
+                        <a:t>Croissance de la demande pour les smartphones, Expansion de l'écosystème d'Apple, Innovation</a:t>
                       </a:r>
                     </a:p>
                   </a:txBody>
@@ -15906,7 +16662,7 @@
                           </a:solidFill>
                           <a:latin typeface="Calibri"/>
                         </a:rPr>
-                        <a:t>15</a:t>
+                        <a:t>17</a:t>
                       </a:r>
                     </a:p>
                   </a:txBody>
@@ -15929,7 +16685,7 @@
                           </a:solidFill>
                           <a:latin typeface="Calibri"/>
                         </a:rPr>
-                        <a:t>+0,450</a:t>
+                        <a:t>+0,497</a:t>
                       </a:r>
                     </a:p>
                   </a:txBody>
@@ -16000,7 +16756,7 @@
                           </a:solidFill>
                           <a:latin typeface="Calibri"/>
                         </a:rPr>
-                        <a:t>8</a:t>
+                        <a:t>6</a:t>
                       </a:r>
                     </a:p>
                   </a:txBody>
@@ -16023,7 +16779,7 @@
                           </a:solidFill>
                           <a:latin typeface="Calibri"/>
                         </a:rPr>
-                        <a:t>+0,267</a:t>
+                        <a:t>+0,234</a:t>
                       </a:r>
                     </a:p>
                   </a:txBody>
@@ -16046,7 +16802,7 @@
                           </a:solidFill>
                           <a:latin typeface="Calibri"/>
                         </a:rPr>
-                        <a:t>Concurrence chinoise, Réglementation, Dépendance aux composants</a:t>
+                        <a:t>Concurrence accrue, Risques politiques, Dépendance aux smartphones</a:t>
                       </a:r>
                     </a:p>
                   </a:txBody>
@@ -16091,7 +16847,7 @@
                 </a:solidFill>
                 <a:latin typeface="Calibri"/>
               </a:rPr>
-              <a:t>Le sentiment global de la presse financiere sur AAPL cette semaine est mitigé, avec des nouvelles positives sur les ventes d'iPhone 17 et l'adoption croissante des appareils Apple en Europe, mais également des inquiétudes sur la concurrence et les prix élevés de la mémoire. Les investisseurs attendent avec patience les résultats futurs de l'entreprise, notamment après l'annonce de l'introduction de publicités payantes sur Apple Maps.</a:t>
+              <a:t>Le sentiment global de la presse financiere sur AAPL cette semaine est mitige, avec certains titres laissant apparaitre une croissance potentielle pour l'entreprise, notamment en termes d'adoption de ses produits en Europe. Cependant, d'autres titres font etat de defis potentiels pour l'entreprise, tels que la concurrence accrue dans le marché des smartphones et les risques lies aux partenariats avec d'autres entreprises technologiques.</a:t>
             </a:r>
           </a:p>
         </p:txBody>
@@ -19029,7 +19785,7 @@
                 </a:solidFill>
                 <a:latin typeface="Calibri"/>
               </a:rPr>
-              <a:t>La valorisation d'Apple est élevée par rapport à ses pairs, mais justifiée par sa croissance et ses marges. Le multiple EV/EBITDA est de 26,1x.</a:t>
+              <a:t>La valorisation d'Apple est attractive par rapport à ses pairs, avec un ratio EV/EBITDA inférieur à 25. L'entreprise présente également un multiple de prix sur bénéfice inférieur à 30.</a:t>
             </a:r>
           </a:p>
         </p:txBody>
@@ -19359,7 +20115,7 @@
                 </a:solidFill>
                 <a:latin typeface="Calibri"/>
               </a:rPr>
-              <a:t>Prix cible base : 270 $  ·  Upside : +6,5 %  ·  Bear : 230 $ (-9,3 %)  ·  Bull : 300 $ (+18,3 %)</a:t>
+              <a:t>Prix cible base : 280 $  ·  Upside : +10,7 %  ·  Bear : 241 $ (-5,0 %)  ·  Bull : 310 $ (+22,4 %)</a:t>
             </a:r>
           </a:p>
         </p:txBody>
@@ -19550,7 +20306,7 @@
                 </a:solidFill>
                 <a:latin typeface="Calibri"/>
               </a:rPr>
-              <a:t>La croissance des revenus d'Apple sera drivée par la vente d'iPhones 5G</a:t>
+              <a:t>La croissance de la demande pour les smartphones et les ordinateurs portables devrait atteindre 10% d'ici 2027</a:t>
             </a:r>
           </a:p>
         </p:txBody>
@@ -19607,6 +20363,119 @@
         <p:spPr>
           <a:xfrm>
             <a:off x="503999" y="2178000"/>
+            <a:ext cx="3931200" cy="183600"/>
+          </a:xfrm>
+          <a:prstGeom prst="rect">
+            <a:avLst/>
+          </a:prstGeom>
+          <a:noFill/>
+        </p:spPr>
+        <p:txBody>
+          <a:bodyPr wrap="square">
+            <a:spAutoFit/>
+          </a:bodyPr>
+          <a:lstStyle/>
+          <a:p>
+            <a:pPr algn="l"/>
+            <a:r>
+              <a:rPr sz="850" b="1" i="0">
+                <a:solidFill>
+                  <a:srgbClr val="1B3A6B"/>
+                </a:solidFill>
+                <a:latin typeface="Calibri"/>
+              </a:rPr>
+              <a:t>Ecosystème intégré</a:t>
+            </a:r>
+          </a:p>
+        </p:txBody>
+      </p:sp>
+      <p:sp>
+        <p:nvSpPr>
+          <p:cNvPr id="17" name="TextBox 16"/>
+          <p:cNvSpPr txBox="1"/>
+          <p:nvPr/>
+        </p:nvSpPr>
+        <p:spPr>
+          <a:xfrm>
+            <a:off x="503999" y="2347200"/>
+            <a:ext cx="3931200" cy="327600"/>
+          </a:xfrm>
+          <a:prstGeom prst="rect">
+            <a:avLst/>
+          </a:prstGeom>
+          <a:noFill/>
+        </p:spPr>
+        <p:txBody>
+          <a:bodyPr wrap="square">
+            <a:spAutoFit/>
+          </a:bodyPr>
+          <a:lstStyle/>
+          <a:p>
+            <a:pPr algn="l"/>
+            <a:r>
+              <a:rPr sz="750" b="0" i="0">
+                <a:solidFill>
+                  <a:srgbClr val="333333"/>
+                </a:solidFill>
+                <a:latin typeface="Calibri"/>
+              </a:rPr>
+              <a:t>Les services d'Apple devraient générer 20% des revenus de l'entreprise d'ici 2028</a:t>
+            </a:r>
+          </a:p>
+        </p:txBody>
+      </p:sp>
+      <p:sp>
+        <p:nvSpPr>
+          <p:cNvPr id="18" name="Rectangle 17"/>
+          <p:cNvSpPr/>
+          <p:nvPr/>
+        </p:nvSpPr>
+        <p:spPr>
+          <a:xfrm>
+            <a:off x="367200" y="2728800"/>
+            <a:ext cx="54000" cy="129600"/>
+          </a:xfrm>
+          <a:prstGeom prst="rect">
+            <a:avLst/>
+          </a:prstGeom>
+          <a:solidFill>
+            <a:srgbClr val="2E5FA3"/>
+          </a:solidFill>
+          <a:ln>
+            <a:noFill/>
+          </a:ln>
+        </p:spPr>
+        <p:style>
+          <a:lnRef idx="1">
+            <a:schemeClr val="accent1"/>
+          </a:lnRef>
+          <a:fillRef idx="3">
+            <a:schemeClr val="accent1"/>
+          </a:fillRef>
+          <a:effectRef idx="2">
+            <a:schemeClr val="accent1"/>
+          </a:effectRef>
+          <a:fontRef idx="minor">
+            <a:schemeClr val="lt1"/>
+          </a:fontRef>
+        </p:style>
+        <p:txBody>
+          <a:bodyPr rtlCol="0" anchor="ctr"/>
+          <a:lstStyle/>
+          <a:p>
+            <a:pPr algn="ctr"/>
+          </a:p>
+        </p:txBody>
+      </p:sp>
+      <p:sp>
+        <p:nvSpPr>
+          <p:cNvPr id="19" name="TextBox 18"/>
+          <p:cNvSpPr txBox="1"/>
+          <p:nvPr/>
+        </p:nvSpPr>
+        <p:spPr>
+          <a:xfrm>
+            <a:off x="503999" y="2710800"/>
             <a:ext cx="3931200" cy="183600"/>
           </a:xfrm>
           <a:prstGeom prst="rect">
@@ -19635,13 +20504,13 @@
       </p:sp>
       <p:sp>
         <p:nvSpPr>
-          <p:cNvPr id="17" name="TextBox 16"/>
+          <p:cNvPr id="20" name="TextBox 19"/>
           <p:cNvSpPr txBox="1"/>
           <p:nvPr/>
         </p:nvSpPr>
         <p:spPr>
           <a:xfrm>
-            <a:off x="503999" y="2347200"/>
+            <a:off x="503999" y="2880000"/>
             <a:ext cx="3931200" cy="327600"/>
           </a:xfrm>
           <a:prstGeom prst="rect">
@@ -19663,120 +20532,7 @@
                 </a:solidFill>
                 <a:latin typeface="Calibri"/>
               </a:rPr>
-              <a:t>La mise à jour des Macs et des iPads sera un catalyseur de croissance</a:t>
-            </a:r>
-          </a:p>
-        </p:txBody>
-      </p:sp>
-      <p:sp>
-        <p:nvSpPr>
-          <p:cNvPr id="18" name="Rectangle 17"/>
-          <p:cNvSpPr/>
-          <p:nvPr/>
-        </p:nvSpPr>
-        <p:spPr>
-          <a:xfrm>
-            <a:off x="367200" y="2728800"/>
-            <a:ext cx="54000" cy="129600"/>
-          </a:xfrm>
-          <a:prstGeom prst="rect">
-            <a:avLst/>
-          </a:prstGeom>
-          <a:solidFill>
-            <a:srgbClr val="2E5FA3"/>
-          </a:solidFill>
-          <a:ln>
-            <a:noFill/>
-          </a:ln>
-        </p:spPr>
-        <p:style>
-          <a:lnRef idx="1">
-            <a:schemeClr val="accent1"/>
-          </a:lnRef>
-          <a:fillRef idx="3">
-            <a:schemeClr val="accent1"/>
-          </a:fillRef>
-          <a:effectRef idx="2">
-            <a:schemeClr val="accent1"/>
-          </a:effectRef>
-          <a:fontRef idx="minor">
-            <a:schemeClr val="lt1"/>
-          </a:fontRef>
-        </p:style>
-        <p:txBody>
-          <a:bodyPr rtlCol="0" anchor="ctr"/>
-          <a:lstStyle/>
-          <a:p>
-            <a:pPr algn="ctr"/>
-          </a:p>
-        </p:txBody>
-      </p:sp>
-      <p:sp>
-        <p:nvSpPr>
-          <p:cNvPr id="19" name="TextBox 18"/>
-          <p:cNvSpPr txBox="1"/>
-          <p:nvPr/>
-        </p:nvSpPr>
-        <p:spPr>
-          <a:xfrm>
-            <a:off x="503999" y="2710800"/>
-            <a:ext cx="3931200" cy="183600"/>
-          </a:xfrm>
-          <a:prstGeom prst="rect">
-            <a:avLst/>
-          </a:prstGeom>
-          <a:noFill/>
-        </p:spPr>
-        <p:txBody>
-          <a:bodyPr wrap="square">
-            <a:spAutoFit/>
-          </a:bodyPr>
-          <a:lstStyle/>
-          <a:p>
-            <a:pPr algn="l"/>
-            <a:r>
-              <a:rPr sz="850" b="1" i="0">
-                <a:solidFill>
-                  <a:srgbClr val="1B3A6B"/>
-                </a:solidFill>
-                <a:latin typeface="Calibri"/>
-              </a:rPr>
-              <a:t>Écosystème</a:t>
-            </a:r>
-          </a:p>
-        </p:txBody>
-      </p:sp>
-      <p:sp>
-        <p:nvSpPr>
-          <p:cNvPr id="20" name="TextBox 19"/>
-          <p:cNvSpPr txBox="1"/>
-          <p:nvPr/>
-        </p:nvSpPr>
-        <p:spPr>
-          <a:xfrm>
-            <a:off x="503999" y="2880000"/>
-            <a:ext cx="3931200" cy="327600"/>
-          </a:xfrm>
-          <a:prstGeom prst="rect">
-            <a:avLst/>
-          </a:prstGeom>
-          <a:noFill/>
-        </p:spPr>
-        <p:txBody>
-          <a:bodyPr wrap="square">
-            <a:spAutoFit/>
-          </a:bodyPr>
-          <a:lstStyle/>
-          <a:p>
-            <a:pPr algn="l"/>
-            <a:r>
-              <a:rPr sz="750" b="0" i="0">
-                <a:solidFill>
-                  <a:srgbClr val="333333"/>
-                </a:solidFill>
-                <a:latin typeface="Calibri"/>
-              </a:rPr>
-              <a:t>Les services d'Apple devraient générer 50 milliards de dollars de revenus en 2026</a:t>
+              <a:t>L'expansion de l'écosystème d'Apple devrait atteindre 500 millions d'utilisateurs actifs d'ici 2029</a:t>
             </a:r>
           </a:p>
         </p:txBody>
@@ -19932,7 +20688,7 @@
                 </a:solidFill>
                 <a:latin typeface="Calibri"/>
               </a:rPr>
-              <a:t>Concurrence</a:t>
+              <a:t>Concurrence accrue</a:t>
             </a:r>
           </a:p>
         </p:txBody>
@@ -19967,7 +20723,7 @@
                 </a:solidFill>
                 <a:latin typeface="Calibri"/>
               </a:rPr>
-              <a:t>Concurrence chinoise</a:t>
+              <a:t>Concurrence accrue</a:t>
             </a:r>
           </a:p>
         </p:txBody>
@@ -20045,7 +20801,7 @@
                 </a:solidFill>
                 <a:latin typeface="Calibri"/>
               </a:rPr>
-              <a:t>Dépendance aux iPhones</a:t>
+              <a:t>Dépendance aux smartphones</a:t>
             </a:r>
           </a:p>
         </p:txBody>
@@ -20080,7 +20836,7 @@
                 </a:solidFill>
                 <a:latin typeface="Calibri"/>
               </a:rPr>
-              <a:t>Réglementation</a:t>
+              <a:t>Risques politiques</a:t>
             </a:r>
           </a:p>
         </p:txBody>
@@ -20158,7 +20914,7 @@
                 </a:solidFill>
                 <a:latin typeface="Calibri"/>
               </a:rPr>
-              <a:t>Réglementation</a:t>
+              <a:t>Risques politiques</a:t>
             </a:r>
           </a:p>
         </p:txBody>
@@ -20193,7 +20949,7 @@
                 </a:solidFill>
                 <a:latin typeface="Calibri"/>
               </a:rPr>
-              <a:t>Dépendance aux composants</a:t>
+              <a:t>Dépendance aux smartphones</a:t>
             </a:r>
           </a:p>
         </p:txBody>
@@ -20470,7 +21226,7 @@
                 </a:solidFill>
                 <a:latin typeface="Calibri"/>
               </a:rPr>
-              <a:t>vs 15,0x médiane peers</a:t>
+              <a:t>vs 20,5x médiane peers</a:t>
             </a:r>
           </a:p>
         </p:txBody>
@@ -20782,7 +21538,7 @@
                 </a:solidFill>
                 <a:latin typeface="Calibri"/>
               </a:rPr>
-              <a:t>270 $</a:t>
+              <a:t>280 $</a:t>
             </a:r>
           </a:p>
         </p:txBody>
@@ -20852,7 +21608,7 @@
                 </a:solidFill>
                 <a:latin typeface="Calibri"/>
               </a:rPr>
-              <a:t>Upside de +6,5 % vs cours</a:t>
+              <a:t>Upside de +10,7 % vs cours</a:t>
             </a:r>
           </a:p>
         </p:txBody>
@@ -20973,7 +21729,7 @@
                 </a:solidFill>
                 <a:latin typeface="Calibri"/>
               </a:rPr>
-              <a:t>+0,017</a:t>
+              <a:t>+0,035</a:t>
             </a:r>
           </a:p>
         </p:txBody>
@@ -21763,7 +22519,7 @@
                 </a:solidFill>
                 <a:latin typeface="Calibri"/>
               </a:rPr>
-              <a:t>253,53 $</a:t>
+              <a:t>253,38 $</a:t>
             </a:r>
           </a:p>
         </p:txBody>
@@ -22231,7 +22987,7 @@
                 </a:solidFill>
                 <a:latin typeface="Calibri"/>
               </a:rPr>
-              <a:t>+19,8 %</a:t>
+              <a:t>+19,7 %</a:t>
             </a:r>
           </a:p>
         </p:txBody>
@@ -23260,8 +24016,8 @@
         </p:nvSpPr>
         <p:spPr>
           <a:xfrm>
-            <a:off x="7854300" y="2838875"/>
-            <a:ext cx="498636" cy="1056324"/>
+            <a:off x="7854300" y="2842183"/>
+            <a:ext cx="498636" cy="1053016"/>
           </a:xfrm>
           <a:prstGeom prst="rect">
             <a:avLst/>
@@ -23332,57 +24088,14 @@
       </p:sp>
       <p:sp>
         <p:nvSpPr>
-          <p:cNvPr id="60" name="Rectangle 59"/>
-          <p:cNvSpPr/>
-          <p:nvPr/>
-        </p:nvSpPr>
-        <p:spPr>
-          <a:xfrm>
-            <a:off x="601200" y="3823200"/>
-            <a:ext cx="8179200" cy="7200"/>
-          </a:xfrm>
-          <a:prstGeom prst="rect">
-            <a:avLst/>
-          </a:prstGeom>
-          <a:solidFill>
-            <a:srgbClr val="D0D5DD"/>
-          </a:solidFill>
-          <a:ln>
-            <a:noFill/>
-          </a:ln>
-        </p:spPr>
-        <p:style>
-          <a:lnRef idx="1">
-            <a:schemeClr val="accent1"/>
-          </a:lnRef>
-          <a:fillRef idx="3">
-            <a:schemeClr val="accent1"/>
-          </a:fillRef>
-          <a:effectRef idx="2">
-            <a:schemeClr val="accent1"/>
-          </a:effectRef>
-          <a:fontRef idx="minor">
-            <a:schemeClr val="lt1"/>
-          </a:fontRef>
-        </p:style>
-        <p:txBody>
-          <a:bodyPr rtlCol="0" anchor="ctr"/>
-          <a:lstStyle/>
-          <a:p>
-            <a:pPr algn="ctr"/>
-          </a:p>
-        </p:txBody>
-      </p:sp>
-      <p:sp>
-        <p:nvSpPr>
-          <p:cNvPr id="61" name="TextBox 60"/>
+          <p:cNvPr id="60" name="TextBox 59"/>
           <p:cNvSpPr txBox="1"/>
           <p:nvPr/>
         </p:nvSpPr>
         <p:spPr>
           <a:xfrm>
-            <a:off x="367200" y="3751200"/>
-            <a:ext cx="216000" cy="144000"/>
+            <a:off x="439200" y="2174400"/>
+            <a:ext cx="1800000" cy="144000"/>
           </a:xfrm>
           <a:prstGeom prst="rect">
             <a:avLst/>
@@ -23397,254 +24110,55 @@
           <a:p>
             <a:pPr algn="l"/>
             <a:r>
-              <a:rPr sz="600" b="0" i="0">
+              <a:rPr sz="700" b="0" i="0">
+                <a:solidFill>
+                  <a:srgbClr val="2E5FA3"/>
+                </a:solidFill>
+                <a:latin typeface="Calibri"/>
+              </a:rPr>
+              <a:t>▲ Max : 278,32 $</a:t>
+            </a:r>
+          </a:p>
+        </p:txBody>
+      </p:sp>
+      <p:sp>
+        <p:nvSpPr>
+          <p:cNvPr id="61" name="TextBox 60"/>
+          <p:cNvSpPr txBox="1"/>
+          <p:nvPr/>
+        </p:nvSpPr>
+        <p:spPr>
+          <a:xfrm>
+            <a:off x="439200" y="3643199"/>
+            <a:ext cx="1800000" cy="144000"/>
+          </a:xfrm>
+          <a:prstGeom prst="rect">
+            <a:avLst/>
+          </a:prstGeom>
+          <a:noFill/>
+        </p:spPr>
+        <p:txBody>
+          <a:bodyPr wrap="square">
+            <a:spAutoFit/>
+          </a:bodyPr>
+          <a:lstStyle/>
+          <a:p>
+            <a:pPr algn="l"/>
+            <a:r>
+              <a:rPr sz="700" b="0" i="0">
                 <a:solidFill>
                   <a:srgbClr val="555555"/>
                 </a:solidFill>
                 <a:latin typeface="Calibri"/>
               </a:rPr>
-              <a:t>199</a:t>
+              <a:t>▼ Min : 199,98 $</a:t>
             </a:r>
           </a:p>
         </p:txBody>
       </p:sp>
       <p:sp>
         <p:nvSpPr>
-          <p:cNvPr id="62" name="Rectangle 61"/>
-          <p:cNvSpPr/>
-          <p:nvPr/>
-        </p:nvSpPr>
-        <p:spPr>
-          <a:xfrm>
-            <a:off x="601200" y="3348000"/>
-            <a:ext cx="8179200" cy="7200"/>
-          </a:xfrm>
-          <a:prstGeom prst="rect">
-            <a:avLst/>
-          </a:prstGeom>
-          <a:solidFill>
-            <a:srgbClr val="D0D5DD"/>
-          </a:solidFill>
-          <a:ln>
-            <a:noFill/>
-          </a:ln>
-        </p:spPr>
-        <p:style>
-          <a:lnRef idx="1">
-            <a:schemeClr val="accent1"/>
-          </a:lnRef>
-          <a:fillRef idx="3">
-            <a:schemeClr val="accent1"/>
-          </a:fillRef>
-          <a:effectRef idx="2">
-            <a:schemeClr val="accent1"/>
-          </a:effectRef>
-          <a:fontRef idx="minor">
-            <a:schemeClr val="lt1"/>
-          </a:fontRef>
-        </p:style>
-        <p:txBody>
-          <a:bodyPr rtlCol="0" anchor="ctr"/>
-          <a:lstStyle/>
-          <a:p>
-            <a:pPr algn="ctr"/>
-          </a:p>
-        </p:txBody>
-      </p:sp>
-      <p:sp>
-        <p:nvSpPr>
-          <p:cNvPr id="63" name="TextBox 62"/>
-          <p:cNvSpPr txBox="1"/>
-          <p:nvPr/>
-        </p:nvSpPr>
-        <p:spPr>
-          <a:xfrm>
-            <a:off x="367200" y="3276000"/>
-            <a:ext cx="216000" cy="144000"/>
-          </a:xfrm>
-          <a:prstGeom prst="rect">
-            <a:avLst/>
-          </a:prstGeom>
-          <a:noFill/>
-        </p:spPr>
-        <p:txBody>
-          <a:bodyPr wrap="square">
-            <a:spAutoFit/>
-          </a:bodyPr>
-          <a:lstStyle/>
-          <a:p>
-            <a:pPr algn="l"/>
-            <a:r>
-              <a:rPr sz="600" b="0" i="0">
-                <a:solidFill>
-                  <a:srgbClr val="555555"/>
-                </a:solidFill>
-                <a:latin typeface="Calibri"/>
-              </a:rPr>
-              <a:t>225</a:t>
-            </a:r>
-          </a:p>
-        </p:txBody>
-      </p:sp>
-      <p:sp>
-        <p:nvSpPr>
-          <p:cNvPr id="64" name="Rectangle 63"/>
-          <p:cNvSpPr/>
-          <p:nvPr/>
-        </p:nvSpPr>
-        <p:spPr>
-          <a:xfrm>
-            <a:off x="601200" y="2858400"/>
-            <a:ext cx="8179200" cy="7200"/>
-          </a:xfrm>
-          <a:prstGeom prst="rect">
-            <a:avLst/>
-          </a:prstGeom>
-          <a:solidFill>
-            <a:srgbClr val="D0D5DD"/>
-          </a:solidFill>
-          <a:ln>
-            <a:noFill/>
-          </a:ln>
-        </p:spPr>
-        <p:style>
-          <a:lnRef idx="1">
-            <a:schemeClr val="accent1"/>
-          </a:lnRef>
-          <a:fillRef idx="3">
-            <a:schemeClr val="accent1"/>
-          </a:fillRef>
-          <a:effectRef idx="2">
-            <a:schemeClr val="accent1"/>
-          </a:effectRef>
-          <a:fontRef idx="minor">
-            <a:schemeClr val="lt1"/>
-          </a:fontRef>
-        </p:style>
-        <p:txBody>
-          <a:bodyPr rtlCol="0" anchor="ctr"/>
-          <a:lstStyle/>
-          <a:p>
-            <a:pPr algn="ctr"/>
-          </a:p>
-        </p:txBody>
-      </p:sp>
-      <p:sp>
-        <p:nvSpPr>
-          <p:cNvPr id="65" name="TextBox 64"/>
-          <p:cNvSpPr txBox="1"/>
-          <p:nvPr/>
-        </p:nvSpPr>
-        <p:spPr>
-          <a:xfrm>
-            <a:off x="367200" y="2786399"/>
-            <a:ext cx="216000" cy="144000"/>
-          </a:xfrm>
-          <a:prstGeom prst="rect">
-            <a:avLst/>
-          </a:prstGeom>
-          <a:noFill/>
-        </p:spPr>
-        <p:txBody>
-          <a:bodyPr wrap="square">
-            <a:spAutoFit/>
-          </a:bodyPr>
-          <a:lstStyle/>
-          <a:p>
-            <a:pPr algn="l"/>
-            <a:r>
-              <a:rPr sz="600" b="0" i="0">
-                <a:solidFill>
-                  <a:srgbClr val="555555"/>
-                </a:solidFill>
-                <a:latin typeface="Calibri"/>
-              </a:rPr>
-              <a:t>252</a:t>
-            </a:r>
-          </a:p>
-        </p:txBody>
-      </p:sp>
-      <p:sp>
-        <p:nvSpPr>
-          <p:cNvPr id="66" name="Rectangle 65"/>
-          <p:cNvSpPr/>
-          <p:nvPr/>
-        </p:nvSpPr>
-        <p:spPr>
-          <a:xfrm>
-            <a:off x="601200" y="2383200"/>
-            <a:ext cx="8179200" cy="7200"/>
-          </a:xfrm>
-          <a:prstGeom prst="rect">
-            <a:avLst/>
-          </a:prstGeom>
-          <a:solidFill>
-            <a:srgbClr val="D0D5DD"/>
-          </a:solidFill>
-          <a:ln>
-            <a:noFill/>
-          </a:ln>
-        </p:spPr>
-        <p:style>
-          <a:lnRef idx="1">
-            <a:schemeClr val="accent1"/>
-          </a:lnRef>
-          <a:fillRef idx="3">
-            <a:schemeClr val="accent1"/>
-          </a:fillRef>
-          <a:effectRef idx="2">
-            <a:schemeClr val="accent1"/>
-          </a:effectRef>
-          <a:fontRef idx="minor">
-            <a:schemeClr val="lt1"/>
-          </a:fontRef>
-        </p:style>
-        <p:txBody>
-          <a:bodyPr rtlCol="0" anchor="ctr"/>
-          <a:lstStyle/>
-          <a:p>
-            <a:pPr algn="ctr"/>
-          </a:p>
-        </p:txBody>
-      </p:sp>
-      <p:sp>
-        <p:nvSpPr>
-          <p:cNvPr id="67" name="TextBox 66"/>
-          <p:cNvSpPr txBox="1"/>
-          <p:nvPr/>
-        </p:nvSpPr>
-        <p:spPr>
-          <a:xfrm>
-            <a:off x="367200" y="2311200"/>
-            <a:ext cx="216000" cy="144000"/>
-          </a:xfrm>
-          <a:prstGeom prst="rect">
-            <a:avLst/>
-          </a:prstGeom>
-          <a:noFill/>
-        </p:spPr>
-        <p:txBody>
-          <a:bodyPr wrap="square">
-            <a:spAutoFit/>
-          </a:bodyPr>
-          <a:lstStyle/>
-          <a:p>
-            <a:pPr algn="l"/>
-            <a:r>
-              <a:rPr sz="600" b="0" i="0">
-                <a:solidFill>
-                  <a:srgbClr val="555555"/>
-                </a:solidFill>
-                <a:latin typeface="Calibri"/>
-              </a:rPr>
-              <a:t>278</a:t>
-            </a:r>
-          </a:p>
-        </p:txBody>
-      </p:sp>
-      <p:sp>
-        <p:nvSpPr>
-          <p:cNvPr id="68" name="TextBox 67"/>
+          <p:cNvPr id="62" name="TextBox 61"/>
           <p:cNvSpPr txBox="1"/>
           <p:nvPr/>
         </p:nvSpPr>
@@ -23672,7 +24186,7 @@
                 </a:solidFill>
                 <a:latin typeface="Calibri"/>
               </a:rPr>
-              <a:t>Apple Inc. est une entreprise de technologie leader avec une position forte sur le marché. La croissance des revenus et des marges est attendue.</a:t>
+              <a:t>Apple Inc. presente une opportunité d'investissement attractive avec des perspectives de croissance solides et une position dominante sur le marché. L'entreprise devrait poursuivre sa croissance grâce à ses produits innovants et à son écosystème intégré.</a:t>
             </a:r>
           </a:p>
         </p:txBody>
@@ -24715,7 +25229,7 @@
                 </a:solidFill>
                 <a:latin typeface="Calibri"/>
               </a:rPr>
-              <a:t>Concurrence  ·  Dépendance aux iPhones</a:t>
+              <a:t>Concurrence accrue  ·  Dépendance aux smartphones</a:t>
             </a:r>
           </a:p>
         </p:txBody>
@@ -25949,7 +26463,7 @@
                 </a:solidFill>
                 <a:latin typeface="Calibri"/>
               </a:rPr>
-              <a:t>Apple Inc. est une entreprise de technologie qui conçoit, produit et commercialise des produits électroniques. Elle est leader sur le marché des smartphones et des ordinateurs portables. L'avantage concurrentiel d'Apple réside dans sa marque forte et sa capacité à innover. L'entreprise articule son activité autour de deux segments stratégiques :</a:t>
+              <a:t>Apple Inc. est un leader mondial dans la conception, la fabrication et la commercialisation de produits électroniques grand public. L'entreprise est positionnée comme un acteur majeur sur le marché des smartphones et des ordinateurs portables. Ses avantages concurrentiels incluent son écosystème intégré, sa marque forte et son innovante gamme de produits. L'entreprise articule son activité autour de deux segments stratégiques :</a:t>
             </a:r>
           </a:p>
         </p:txBody>
@@ -26062,7 +26576,7 @@
                 </a:solidFill>
                 <a:latin typeface="Calibri"/>
               </a:rPr>
-              <a:t>Les produits d'Apple incluent les iPhones, les Macs et les iPads. Les revenus de cette section…</a:t>
+              <a:t>Les produits d'Apple incluent les iPhone, les Mac, les iPad, les Apple Watch et les AirPods.…</a:t>
             </a:r>
           </a:p>
         </p:txBody>
@@ -26175,7 +26689,7 @@
                 </a:solidFill>
                 <a:latin typeface="Calibri"/>
               </a:rPr>
-              <a:t>Les services d'Apple incluent la musique, les films et les applications. Les revenus de cette…</a:t>
+              <a:t>Les services d'Apple incluent la musique, les films, les applications et les abonnements.…</a:t>
             </a:r>
           </a:p>
         </p:txBody>
@@ -26296,7 +26810,7 @@
                 </a:solidFill>
                 <a:latin typeface="Calibri"/>
               </a:rPr>
-              <a:t>3 722,1 Mds$</a:t>
+              <a:t>3 719,9 Mds$</a:t>
             </a:r>
           </a:p>
         </p:txBody>
@@ -26608,7 +27122,7 @@
                 </a:solidFill>
                 <a:latin typeface="Calibri"/>
               </a:rPr>
-              <a:t>253,53 $</a:t>
+              <a:t>253,38 $</a:t>
             </a:r>
           </a:p>
         </p:txBody>
@@ -27554,7 +28068,7 @@
                 </a:solidFill>
                 <a:latin typeface="Calibri"/>
               </a:rPr>
-              <a:t>80%</a:t>
+              <a:t>1%</a:t>
             </a:r>
           </a:p>
         </p:txBody>
@@ -27681,7 +28195,7 @@
         <p:spPr>
           <a:xfrm>
             <a:off x="457200" y="2332800"/>
-            <a:ext cx="3970800" cy="2041199"/>
+            <a:ext cx="3970800" cy="1800000"/>
           </a:xfrm>
           <a:prstGeom prst="rect">
             <a:avLst/>
@@ -27702,7 +28216,7 @@
                 </a:solidFill>
                 <a:latin typeface="Calibri"/>
               </a:rPr>
-              <a:t>Les produits d'Apple incluent les iPhones, les Macs et les iPads. Les revenus de cette section proviennent de la vente de ces produits. Les clients cibles sont les particuliers et les entreprises.</a:t>
+              <a:t>Les produits d'Apple incluent les iPhone, les Mac, les iPad, les Apple Watch et les AirPods. L'entreprise génère la majorité de ses revenus grâce à la vente de ces produits. Les principaux moteurs de croissance sont la demande croissante pour les…</a:t>
             </a:r>
           </a:p>
         </p:txBody>
@@ -27823,7 +28337,7 @@
                 </a:solidFill>
                 <a:latin typeface="Calibri"/>
               </a:rPr>
-              <a:t>20%</a:t>
+              <a:t>0%</a:t>
             </a:r>
           </a:p>
         </p:txBody>
@@ -27950,7 +28464,7 @@
         <p:spPr>
           <a:xfrm>
             <a:off x="4716000" y="2332800"/>
-            <a:ext cx="3970800" cy="2041199"/>
+            <a:ext cx="3970800" cy="1800000"/>
           </a:xfrm>
           <a:prstGeom prst="rect">
             <a:avLst/>
@@ -27971,7 +28485,7 @@
                 </a:solidFill>
                 <a:latin typeface="Calibri"/>
               </a:rPr>
-              <a:t>Les services d'Apple incluent la musique, les films et les applications. Les revenus de cette section proviennent des abonnements et des ventes de contenus. Les clients cibles sont les particuliers et les entreprises.</a:t>
+              <a:t>Les services d'Apple incluent la musique, les films, les applications et les abonnements. L'entreprise cherche à diversifier ses sources de revenus en développant ses services. Les moteurs de croissance incluent la croissance du marché des services…</a:t>
             </a:r>
           </a:p>
         </p:txBody>
@@ -29100,7 +29614,7 @@
                           </a:solidFill>
                           <a:latin typeface="Calibri"/>
                         </a:rPr>
-                        <a:t>450,0</a:t>
+                        <a:t>437,2</a:t>
                       </a:r>
                     </a:p>
                   </a:txBody>
@@ -29123,7 +29637,7 @@
                           </a:solidFill>
                           <a:latin typeface="Calibri"/>
                         </a:rPr>
-                        <a:t>480,0</a:t>
+                        <a:t>468,4</a:t>
                       </a:r>
                     </a:p>
                   </a:txBody>
@@ -29240,7 +29754,7 @@
                           </a:solidFill>
                           <a:latin typeface="Calibri"/>
                         </a:rPr>
-                        <a:t>+8,0 %</a:t>
+                        <a:t>+5,0 %</a:t>
                       </a:r>
                     </a:p>
                   </a:txBody>
@@ -29380,7 +29894,7 @@
                           </a:solidFill>
                           <a:latin typeface="Calibri"/>
                         </a:rPr>
-                        <a:t>211,5</a:t>
+                        <a:t>205,5</a:t>
                       </a:r>
                     </a:p>
                   </a:txBody>
@@ -29403,7 +29917,7 @@
                           </a:solidFill>
                           <a:latin typeface="Calibri"/>
                         </a:rPr>
-                        <a:t>230,4</a:t>
+                        <a:t>224,8</a:t>
                       </a:r>
                     </a:p>
                   </a:txBody>
@@ -29660,7 +30174,7 @@
                           </a:solidFill>
                           <a:latin typeface="Calibri"/>
                         </a:rPr>
-                        <a:t>180,0</a:t>
+                        <a:t>157,8</a:t>
                       </a:r>
                     </a:p>
                   </a:txBody>
@@ -29683,7 +30197,7 @@
                           </a:solidFill>
                           <a:latin typeface="Calibri"/>
                         </a:rPr>
-                        <a:t>200,0</a:t>
+                        <a:t>173,2</a:t>
                       </a:r>
                     </a:p>
                   </a:txBody>
@@ -29800,7 +30314,7 @@
                           </a:solidFill>
                           <a:latin typeface="Calibri"/>
                         </a:rPr>
-                        <a:t>40,0 %</a:t>
+                        <a:t>36,0 %</a:t>
                       </a:r>
                     </a:p>
                   </a:txBody>
@@ -29823,7 +30337,7 @@
                           </a:solidFill>
                           <a:latin typeface="Calibri"/>
                         </a:rPr>
-                        <a:t>42,0 %</a:t>
+                        <a:t>37,0 %</a:t>
                       </a:r>
                     </a:p>
                   </a:txBody>
@@ -29940,7 +30454,7 @@
                           </a:solidFill>
                           <a:latin typeface="Calibri"/>
                         </a:rPr>
-                        <a:t>120,0</a:t>
+                        <a:t>114,8</a:t>
                       </a:r>
                     </a:p>
                   </a:txBody>
@@ -29963,7 +30477,7 @@
                           </a:solidFill>
                           <a:latin typeface="Calibri"/>
                         </a:rPr>
-                        <a:t>130,0</a:t>
+                        <a:t>124,9</a:t>
                       </a:r>
                     </a:p>
                   </a:txBody>
@@ -30080,30 +30594,30 @@
                           </a:solidFill>
                           <a:latin typeface="Calibri"/>
                         </a:rPr>
+                        <a:t>26,0 %</a:t>
+                      </a:r>
+                    </a:p>
+                  </a:txBody>
+                  <a:tcPr>
+                    <a:solidFill>
+                      <a:srgbClr val="F7F8FA"/>
+                    </a:solidFill>
+                  </a:tcPr>
+                </a:tc>
+                <a:tc>
+                  <a:txBody>
+                    <a:bodyPr/>
+                    <a:lstStyle/>
+                    <a:p>
+                      <a:pPr algn="ctr"/>
+                      <a:r>
+                        <a:rPr sz="750" b="0" i="1">
+                          <a:solidFill>
+                            <a:srgbClr val="555555"/>
+                          </a:solidFill>
+                          <a:latin typeface="Calibri"/>
+                        </a:rPr>
                         <a:t>27,0 %</a:t>
-                      </a:r>
-                    </a:p>
-                  </a:txBody>
-                  <a:tcPr>
-                    <a:solidFill>
-                      <a:srgbClr val="F7F8FA"/>
-                    </a:solidFill>
-                  </a:tcPr>
-                </a:tc>
-                <a:tc>
-                  <a:txBody>
-                    <a:bodyPr/>
-                    <a:lstStyle/>
-                    <a:p>
-                      <a:pPr algn="ctr"/>
-                      <a:r>
-                        <a:rPr sz="750" b="0" i="1">
-                          <a:solidFill>
-                            <a:srgbClr val="555555"/>
-                          </a:solidFill>
-                          <a:latin typeface="Calibri"/>
-                        </a:rPr>
-                        <a:t>28,0 %</a:t>
                       </a:r>
                     </a:p>
                   </a:txBody>
@@ -30148,7 +30662,7 @@
                 </a:solidFill>
                 <a:latin typeface="Calibri"/>
               </a:rPr>
-              <a:t>Les revenus d'Apple ont augmenté de 6,4% en 2025. Les marges sont élevées, avec un taux de marge brute de 46,9%.</a:t>
+              <a:t>Les revenus d'Apple devraient augmenter de 5% en 2026 et de 7% en 2027, grâce à la croissance de la demande pour les smartphones et les ordinateurs portables.</a:t>
             </a:r>
           </a:p>
         </p:txBody>
@@ -32065,7 +32579,7 @@
                 </a:solidFill>
                 <a:latin typeface="Calibri"/>
               </a:rPr>
-              <a:t>Les revenus d'Apple ont augmenté de 6,4% en 2025. Les marges sont élevées, avec un taux de marge brute de 46,9%.</a:t>
+              <a:t>Les revenus d'Apple devraient augmenter de 5% en 2026 et de 7% en 2027, grâce à la croissance de la demande pour les smartphones et les ordinateurs portables.</a:t>
             </a:r>
           </a:p>
         </p:txBody>

--- a/preview/AAPL/AAPL_pitchbook.pptx
+++ b/preview/AAPL/AAPL_pitchbook.pptx
@@ -3449,7 +3449,7 @@
                 </a:solidFill>
                 <a:latin typeface="Calibri"/>
               </a:rPr>
-              <a:t>● BUY  ·  Prix cible base : 280 $  ·  Upside : +10,7 %</a:t>
+              <a:t>● BUY  ·  Prix cible base : 285 $  ·  Upside : +12,1 %</a:t>
             </a:r>
           </a:p>
         </p:txBody>
@@ -4421,7 +4421,7 @@
                           </a:solidFill>
                           <a:latin typeface="Calibri"/>
                         </a:rPr>
-                        <a:t>33,2x</a:t>
+                        <a:t>33,3x</a:t>
                       </a:r>
                     </a:p>
                   </a:txBody>
@@ -4595,7 +4595,7 @@
                           </a:solidFill>
                           <a:latin typeface="Calibri"/>
                         </a:rPr>
-                        <a:t>26,1x</a:t>
+                        <a:t>26,2x</a:t>
                       </a:r>
                     </a:p>
                   </a:txBody>
@@ -5813,7 +5813,7 @@
                           </a:solidFill>
                           <a:latin typeface="Calibri"/>
                         </a:rPr>
-                        <a:t>9,97</a:t>
+                        <a:t>10,00</a:t>
                       </a:r>
                     </a:p>
                   </a:txBody>
@@ -6138,7 +6138,7 @@
                 </a:solidFill>
                 <a:latin typeface="Calibri"/>
               </a:rPr>
-              <a:t>Le ratio EV/EBITDA d'Apple est inférieur à la moyenne de son secteur, ce qui indique une valorisation attractive.</a:t>
+              <a:t>ROIC à 84.4% vs 35% pour le secteur tech. EV/Revenue à 9.1x vs médiane peers à 7.8x reflétant la prime qualité.</a:t>
             </a:r>
           </a:p>
         </p:txBody>
@@ -7303,7 +7303,7 @@
                           </a:solidFill>
                           <a:latin typeface="Calibri"/>
                         </a:rPr>
-                        <a:t>280 $</a:t>
+                        <a:t>285 $</a:t>
                       </a:r>
                     </a:p>
                   </a:txBody>
@@ -7391,7 +7391,7 @@
                           </a:solidFill>
                           <a:latin typeface="Calibri"/>
                         </a:rPr>
-                        <a:t>253,38 $</a:t>
+                        <a:t>254,20 $</a:t>
                       </a:r>
                     </a:p>
                   </a:txBody>
@@ -7479,7 +7479,7 @@
                           </a:solidFill>
                           <a:latin typeface="Calibri"/>
                         </a:rPr>
-                        <a:t>+10,7 %</a:t>
+                        <a:t>+12,1 %</a:t>
                       </a:r>
                     </a:p>
                   </a:txBody>
@@ -7622,7 +7622,7 @@
                           </a:solidFill>
                           <a:latin typeface="Calibri"/>
                         </a:rPr>
-                        <a:t>241 $</a:t>
+                        <a:t>240 $</a:t>
                       </a:r>
                     </a:p>
                   </a:txBody>
@@ -7645,7 +7645,7 @@
                           </a:solidFill>
                           <a:latin typeface="Calibri"/>
                         </a:rPr>
-                        <a:t>280 $</a:t>
+                        <a:t>285 $</a:t>
                       </a:r>
                     </a:p>
                   </a:txBody>
@@ -7668,7 +7668,7 @@
                           </a:solidFill>
                           <a:latin typeface="Calibri"/>
                         </a:rPr>
-                        <a:t>310 $</a:t>
+                        <a:t>320 $</a:t>
                       </a:r>
                     </a:p>
                   </a:txBody>
@@ -7693,7 +7693,7 @@
                           </a:solidFill>
                           <a:latin typeface="Calibri"/>
                         </a:rPr>
-                        <a:t>-5,0 %</a:t>
+                        <a:t>-5,6 %</a:t>
                       </a:r>
                     </a:p>
                   </a:txBody>
@@ -7716,7 +7716,7 @@
                           </a:solidFill>
                           <a:latin typeface="Calibri"/>
                         </a:rPr>
-                        <a:t>+10,7 %</a:t>
+                        <a:t>+12,1 %</a:t>
                       </a:r>
                     </a:p>
                   </a:txBody>
@@ -7739,7 +7739,7 @@
                           </a:solidFill>
                           <a:latin typeface="Calibri"/>
                         </a:rPr>
-                        <a:t>+22,4 %</a:t>
+                        <a:t>+25,9 %</a:t>
                       </a:r>
                     </a:p>
                   </a:txBody>
@@ -8203,7 +8203,7 @@
                           </a:solidFill>
                           <a:latin typeface="Calibri"/>
                         </a:rPr>
-                        <a:t>325</a:t>
+                        <a:t>330</a:t>
                       </a:r>
                     </a:p>
                   </a:txBody>
@@ -8246,7 +8246,7 @@
                           </a:solidFill>
                           <a:latin typeface="Calibri"/>
                         </a:rPr>
-                        <a:t>353</a:t>
+                        <a:t>358</a:t>
                       </a:r>
                     </a:p>
                   </a:txBody>
@@ -8289,7 +8289,7 @@
                           </a:solidFill>
                           <a:latin typeface="Calibri"/>
                         </a:rPr>
-                        <a:t>386</a:t>
+                        <a:t>392</a:t>
                       </a:r>
                     </a:p>
                   </a:txBody>
@@ -8332,7 +8332,7 @@
                           </a:solidFill>
                           <a:latin typeface="Calibri"/>
                         </a:rPr>
-                        <a:t>426</a:t>
+                        <a:t>433</a:t>
                       </a:r>
                     </a:p>
                   </a:txBody>
@@ -8375,7 +8375,7 @@
                           </a:solidFill>
                           <a:latin typeface="Calibri"/>
                         </a:rPr>
-                        <a:t>475</a:t>
+                        <a:t>483</a:t>
                       </a:r>
                     </a:p>
                   </a:txBody>
@@ -8463,7 +8463,7 @@
                           </a:solidFill>
                           <a:latin typeface="Calibri"/>
                         </a:rPr>
-                        <a:t>280</a:t>
+                        <a:t>285</a:t>
                       </a:r>
                     </a:p>
                   </a:txBody>
@@ -8506,7 +8506,7 @@
                           </a:solidFill>
                           <a:latin typeface="Calibri"/>
                         </a:rPr>
-                        <a:t>301</a:t>
+                        <a:t>306</a:t>
                       </a:r>
                     </a:p>
                   </a:txBody>
@@ -8549,7 +8549,7 @@
                           </a:solidFill>
                           <a:latin typeface="Calibri"/>
                         </a:rPr>
-                        <a:t>325</a:t>
+                        <a:t>330</a:t>
                       </a:r>
                     </a:p>
                   </a:txBody>
@@ -8592,7 +8592,7 @@
                           </a:solidFill>
                           <a:latin typeface="Calibri"/>
                         </a:rPr>
-                        <a:t>353</a:t>
+                        <a:t>358</a:t>
                       </a:r>
                     </a:p>
                   </a:txBody>
@@ -8635,7 +8635,7 @@
                           </a:solidFill>
                           <a:latin typeface="Calibri"/>
                         </a:rPr>
-                        <a:t>386</a:t>
+                        <a:t>392</a:t>
                       </a:r>
                     </a:p>
                   </a:txBody>
@@ -8723,7 +8723,7 @@
                           </a:solidFill>
                           <a:latin typeface="Calibri"/>
                         </a:rPr>
-                        <a:t>247</a:t>
+                        <a:t>251</a:t>
                       </a:r>
                     </a:p>
                   </a:txBody>
@@ -8766,7 +8766,7 @@
                           </a:solidFill>
                           <a:latin typeface="Calibri"/>
                         </a:rPr>
-                        <a:t>263</a:t>
+                        <a:t>267</a:t>
                       </a:r>
                     </a:p>
                   </a:txBody>
@@ -8809,7 +8809,7 @@
                           </a:solidFill>
                           <a:latin typeface="Calibri"/>
                         </a:rPr>
-                        <a:t>280</a:t>
+                        <a:t>285</a:t>
                       </a:r>
                     </a:p>
                   </a:txBody>
@@ -8852,7 +8852,7 @@
                           </a:solidFill>
                           <a:latin typeface="Calibri"/>
                         </a:rPr>
-                        <a:t>301</a:t>
+                        <a:t>306</a:t>
                       </a:r>
                     </a:p>
                   </a:txBody>
@@ -8895,7 +8895,7 @@
                           </a:solidFill>
                           <a:latin typeface="Calibri"/>
                         </a:rPr>
-                        <a:t>325</a:t>
+                        <a:t>330</a:t>
                       </a:r>
                     </a:p>
                   </a:txBody>
@@ -8983,7 +8983,7 @@
                           </a:solidFill>
                           <a:latin typeface="Calibri"/>
                         </a:rPr>
-                        <a:t>220</a:t>
+                        <a:t>224</a:t>
                       </a:r>
                     </a:p>
                   </a:txBody>
@@ -9026,7 +9026,7 @@
                           </a:solidFill>
                           <a:latin typeface="Calibri"/>
                         </a:rPr>
-                        <a:t>233</a:t>
+                        <a:t>237</a:t>
                       </a:r>
                     </a:p>
                   </a:txBody>
@@ -9069,7 +9069,7 @@
                           </a:solidFill>
                           <a:latin typeface="Calibri"/>
                         </a:rPr>
-                        <a:t>247</a:t>
+                        <a:t>251</a:t>
                       </a:r>
                     </a:p>
                   </a:txBody>
@@ -9112,7 +9112,7 @@
                           </a:solidFill>
                           <a:latin typeface="Calibri"/>
                         </a:rPr>
-                        <a:t>263</a:t>
+                        <a:t>267</a:t>
                       </a:r>
                     </a:p>
                   </a:txBody>
@@ -9155,7 +9155,7 @@
                           </a:solidFill>
                           <a:latin typeface="Calibri"/>
                         </a:rPr>
-                        <a:t>281</a:t>
+                        <a:t>285</a:t>
                       </a:r>
                     </a:p>
                   </a:txBody>
@@ -9243,7 +9243,7 @@
                           </a:solidFill>
                           <a:latin typeface="Calibri"/>
                         </a:rPr>
-                        <a:t>199</a:t>
+                        <a:t>202</a:t>
                       </a:r>
                     </a:p>
                   </a:txBody>
@@ -9286,7 +9286,7 @@
                           </a:solidFill>
                           <a:latin typeface="Calibri"/>
                         </a:rPr>
-                        <a:t>209</a:t>
+                        <a:t>212</a:t>
                       </a:r>
                     </a:p>
                   </a:txBody>
@@ -9329,7 +9329,7 @@
                           </a:solidFill>
                           <a:latin typeface="Calibri"/>
                         </a:rPr>
-                        <a:t>220</a:t>
+                        <a:t>224</a:t>
                       </a:r>
                     </a:p>
                   </a:txBody>
@@ -9372,7 +9372,7 @@
                           </a:solidFill>
                           <a:latin typeface="Calibri"/>
                         </a:rPr>
-                        <a:t>233</a:t>
+                        <a:t>237</a:t>
                       </a:r>
                     </a:p>
                   </a:txBody>
@@ -9415,7 +9415,7 @@
                           </a:solidFill>
                           <a:latin typeface="Calibri"/>
                         </a:rPr>
-                        <a:t>247</a:t>
+                        <a:t>251</a:t>
                       </a:r>
                     </a:p>
                   </a:txBody>
@@ -9480,7 +9480,7 @@
                 </a:solidFill>
                 <a:latin typeface="Calibri"/>
               </a:rPr>
-              <a:t>Le prix implicite d'Apple sur la base d'un modèle de flux de trésorerie disponible est de 280,5 USD, ce qui suggère un upside de 10% par rapport au cours actuel.</a:t>
+              <a:t>WACC 10.3% avec TGR 3.0% implique un upside de 12% vs cours actuel. Valorisation DCF à 285$ justifiée par croissance services et rachats d'actions.</a:t>
             </a:r>
           </a:p>
         </p:txBody>
@@ -10358,7 +10358,7 @@
                           </a:solidFill>
                           <a:latin typeface="Calibri"/>
                         </a:rPr>
-                        <a:t>3 719,9</a:t>
+                        <a:t>3 731,9</a:t>
                       </a:r>
                     </a:p>
                   </a:txBody>
@@ -10381,7 +10381,7 @@
                           </a:solidFill>
                           <a:latin typeface="Calibri"/>
                         </a:rPr>
-                        <a:t>26,1x</a:t>
+                        <a:t>26,2x</a:t>
                       </a:r>
                     </a:p>
                   </a:txBody>
@@ -10427,7 +10427,7 @@
                           </a:solidFill>
                           <a:latin typeface="Calibri"/>
                         </a:rPr>
-                        <a:t>33,2x</a:t>
+                        <a:t>33,3x</a:t>
                       </a:r>
                     </a:p>
                   </a:txBody>
@@ -10544,7 +10544,7 @@
                           </a:solidFill>
                           <a:latin typeface="Calibri"/>
                         </a:rPr>
-                        <a:t>2 351,9</a:t>
+                        <a:t>3 200,0</a:t>
                       </a:r>
                     </a:p>
                   </a:txBody>
@@ -10567,7 +10567,7 @@
                           </a:solidFill>
                           <a:latin typeface="Calibri"/>
                         </a:rPr>
-                        <a:t>23,1x</a:t>
+                        <a:t>25,0x</a:t>
                       </a:r>
                     </a:p>
                   </a:txBody>
@@ -10590,7 +10590,7 @@
                           </a:solidFill>
                           <a:latin typeface="Calibri"/>
                         </a:rPr>
-                        <a:t>8,5x</a:t>
+                        <a:t>14,5x</a:t>
                       </a:r>
                     </a:p>
                   </a:txBody>
@@ -10613,7 +10613,7 @@
                           </a:solidFill>
                           <a:latin typeface="Calibri"/>
                         </a:rPr>
-                        <a:t>34,2x</a:t>
+                        <a:t>38,0x</a:t>
                       </a:r>
                     </a:p>
                   </a:txBody>
@@ -10659,7 +10659,7 @@
                           </a:solidFill>
                           <a:latin typeface="Calibri"/>
                         </a:rPr>
-                        <a:t>43,0 %</a:t>
+                        <a:t>48,0 %</a:t>
                       </a:r>
                     </a:p>
                   </a:txBody>
@@ -10730,7 +10730,7 @@
                           </a:solidFill>
                           <a:latin typeface="Calibri"/>
                         </a:rPr>
-                        <a:t>1 571,9</a:t>
+                        <a:t>2 100,0</a:t>
                       </a:r>
                     </a:p>
                   </a:txBody>
@@ -10753,7 +10753,7 @@
                           </a:solidFill>
                           <a:latin typeface="Calibri"/>
                         </a:rPr>
-                        <a:t>20,5x</a:t>
+                        <a:t>22,0x</a:t>
                       </a:r>
                     </a:p>
                   </a:txBody>
@@ -10776,7 +10776,7 @@
                           </a:solidFill>
                           <a:latin typeface="Calibri"/>
                         </a:rPr>
-                        <a:t>7,3x</a:t>
+                        <a:t>9,5x</a:t>
                       </a:r>
                     </a:p>
                   </a:txBody>
@@ -10799,7 +10799,7 @@
                           </a:solidFill>
                           <a:latin typeface="Calibri"/>
                         </a:rPr>
-                        <a:t>29,1x</a:t>
+                        <a:t>28,0x</a:t>
                       </a:r>
                     </a:p>
                   </a:txBody>
@@ -10822,7 +10822,7 @@
                           </a:solidFill>
                           <a:latin typeface="Calibri"/>
                         </a:rPr>
-                        <a:t>55,0 %</a:t>
+                        <a:t>56,0 %</a:t>
                       </a:r>
                     </a:p>
                   </a:txBody>
@@ -10845,7 +10845,7 @@
                           </a:solidFill>
                           <a:latin typeface="Calibri"/>
                         </a:rPr>
-                        <a:t>32,0 %</a:t>
+                        <a:t>35,0 %</a:t>
                       </a:r>
                     </a:p>
                   </a:txBody>
@@ -10870,7 +10870,7 @@
                           </a:solidFill>
                           <a:latin typeface="Calibri"/>
                         </a:rPr>
-                        <a:t>Amazon</a:t>
+                        <a:t>Samsung Electronics</a:t>
                       </a:r>
                     </a:p>
                   </a:txBody>
@@ -10893,7 +10893,7 @@
                           </a:solidFill>
                           <a:latin typeface="Calibri"/>
                         </a:rPr>
-                        <a:t>AMZN</a:t>
+                        <a:t>005930.KS</a:t>
                       </a:r>
                     </a:p>
                   </a:txBody>
@@ -10916,7 +10916,7 @@
                           </a:solidFill>
                           <a:latin typeface="Calibri"/>
                         </a:rPr>
-                        <a:t>1 034,9</a:t>
+                        <a:t>450,0</a:t>
                       </a:r>
                     </a:p>
                   </a:txBody>
@@ -10939,7 +10939,7 @@
                           </a:solidFill>
                           <a:latin typeface="Calibri"/>
                         </a:rPr>
-                        <a:t>18,3x</a:t>
+                        <a:t>7,5x</a:t>
                       </a:r>
                     </a:p>
                   </a:txBody>
@@ -10962,7 +10962,7 @@
                           </a:solidFill>
                           <a:latin typeface="Calibri"/>
                         </a:rPr>
-                        <a:t>6,5x</a:t>
+                        <a:t>1,2x</a:t>
                       </a:r>
                     </a:p>
                   </a:txBody>
@@ -10985,7 +10985,7 @@
                           </a:solidFill>
                           <a:latin typeface="Calibri"/>
                         </a:rPr>
-                        <a:t>24,5x</a:t>
+                        <a:t>12,0x</a:t>
                       </a:r>
                     </a:p>
                   </a:txBody>
@@ -11008,7 +11008,7 @@
                           </a:solidFill>
                           <a:latin typeface="Calibri"/>
                         </a:rPr>
-                        <a:t>42,0 %</a:t>
+                        <a:t>52,0 %</a:t>
                       </a:r>
                     </a:p>
                   </a:txBody>
@@ -11031,7 +11031,7 @@
                           </a:solidFill>
                           <a:latin typeface="Calibri"/>
                         </a:rPr>
-                        <a:t>25,0 %</a:t>
+                        <a:t>22,0 %</a:t>
                       </a:r>
                     </a:p>
                   </a:txBody>
@@ -11056,7 +11056,7 @@
                           </a:solidFill>
                           <a:latin typeface="Calibri"/>
                         </a:rPr>
-                        <a:t>Facebook</a:t>
+                        <a:t>Meta Platforms</a:t>
                       </a:r>
                     </a:p>
                   </a:txBody>
@@ -11102,7 +11102,7 @@
                           </a:solidFill>
                           <a:latin typeface="Calibri"/>
                         </a:rPr>
-                        <a:t>846,9</a:t>
+                        <a:t>1 500,0</a:t>
                       </a:r>
                     </a:p>
                   </a:txBody>
@@ -11125,7 +11125,7 @@
                           </a:solidFill>
                           <a:latin typeface="Calibri"/>
                         </a:rPr>
-                        <a:t>16,2x</a:t>
+                        <a:t>18,0x</a:t>
                       </a:r>
                     </a:p>
                   </a:txBody>
@@ -11148,7 +11148,7 @@
                           </a:solidFill>
                           <a:latin typeface="Calibri"/>
                         </a:rPr>
-                        <a:t>5,8x</a:t>
+                        <a:t>10,5x</a:t>
                       </a:r>
                     </a:p>
                   </a:txBody>
@@ -11171,7 +11171,7 @@
                           </a:solidFill>
                           <a:latin typeface="Calibri"/>
                         </a:rPr>
-                        <a:t>20,5x</a:t>
+                        <a:t>30,0x</a:t>
                       </a:r>
                     </a:p>
                   </a:txBody>
@@ -11194,7 +11194,7 @@
                           </a:solidFill>
                           <a:latin typeface="Calibri"/>
                         </a:rPr>
-                        <a:t>38,0 %</a:t>
+                        <a:t>85,0 %</a:t>
                       </a:r>
                     </a:p>
                   </a:txBody>
@@ -11217,7 +11217,7 @@
                           </a:solidFill>
                           <a:latin typeface="Calibri"/>
                         </a:rPr>
-                        <a:t>22,0 %</a:t>
+                        <a:t>55,0 %</a:t>
                       </a:r>
                     </a:p>
                   </a:txBody>
@@ -11242,7 +11242,7 @@
                           </a:solidFill>
                           <a:latin typeface="Calibri"/>
                         </a:rPr>
-                        <a:t>Tesla</a:t>
+                        <a:t>NVIDIA</a:t>
                       </a:r>
                     </a:p>
                   </a:txBody>
@@ -11265,7 +11265,7 @@
                           </a:solidFill>
                           <a:latin typeface="Calibri"/>
                         </a:rPr>
-                        <a:t>TSLA</a:t>
+                        <a:t>NVDA</a:t>
                       </a:r>
                     </a:p>
                   </a:txBody>
@@ -11288,7 +11288,7 @@
                           </a:solidFill>
                           <a:latin typeface="Calibri"/>
                         </a:rPr>
-                        <a:t>574,9</a:t>
+                        <a:t>2 300,0</a:t>
                       </a:r>
                     </a:p>
                   </a:txBody>
@@ -11311,7 +11311,7 @@
                           </a:solidFill>
                           <a:latin typeface="Calibri"/>
                         </a:rPr>
-                        <a:t>24,9x</a:t>
+                        <a:t>55,0x</a:t>
                       </a:r>
                     </a:p>
                   </a:txBody>
@@ -11334,7 +11334,7 @@
                           </a:solidFill>
                           <a:latin typeface="Calibri"/>
                         </a:rPr>
-                        <a:t>9,2x</a:t>
+                        <a:t>25,0x</a:t>
                       </a:r>
                     </a:p>
                   </a:txBody>
@@ -11357,7 +11357,7 @@
                           </a:solidFill>
                           <a:latin typeface="Calibri"/>
                         </a:rPr>
-                        <a:t>35,1x</a:t>
+                        <a:t>45,0x</a:t>
                       </a:r>
                     </a:p>
                   </a:txBody>
@@ -11380,7 +11380,7 @@
                           </a:solidFill>
                           <a:latin typeface="Calibri"/>
                         </a:rPr>
-                        <a:t>25,0 %</a:t>
+                        <a:t>75,0 %</a:t>
                       </a:r>
                     </a:p>
                   </a:txBody>
@@ -11403,7 +11403,7 @@
                           </a:solidFill>
                           <a:latin typeface="Calibri"/>
                         </a:rPr>
-                        <a:t>15,0 %</a:t>
+                        <a:t>65,0 %</a:t>
                       </a:r>
                     </a:p>
                   </a:txBody>
@@ -11497,7 +11497,7 @@
                           </a:solidFill>
                           <a:latin typeface="Calibri"/>
                         </a:rPr>
-                        <a:t>20,5x</a:t>
+                        <a:t>22,0x</a:t>
                       </a:r>
                     </a:p>
                   </a:txBody>
@@ -11520,7 +11520,7 @@
                           </a:solidFill>
                           <a:latin typeface="Calibri"/>
                         </a:rPr>
-                        <a:t>7,3x</a:t>
+                        <a:t>10,5x</a:t>
                       </a:r>
                     </a:p>
                   </a:txBody>
@@ -11543,7 +11543,7 @@
                           </a:solidFill>
                           <a:latin typeface="Calibri"/>
                         </a:rPr>
-                        <a:t>29,1x</a:t>
+                        <a:t>30,0x</a:t>
                       </a:r>
                     </a:p>
                   </a:txBody>
@@ -11566,7 +11566,7 @@
                           </a:solidFill>
                           <a:latin typeface="Calibri"/>
                         </a:rPr>
-                        <a:t>42,0 %</a:t>
+                        <a:t>68,0 %</a:t>
                       </a:r>
                     </a:p>
                   </a:txBody>
@@ -11589,7 +11589,7 @@
                           </a:solidFill>
                           <a:latin typeface="Calibri"/>
                         </a:rPr>
-                        <a:t>25,0 %</a:t>
+                        <a:t>48,0 %</a:t>
                       </a:r>
                     </a:p>
                   </a:txBody>
@@ -11634,7 +11634,7 @@
                 </a:solidFill>
                 <a:latin typeface="Calibri"/>
               </a:rPr>
-              <a:t>Le ratio EV/EBITDA d'Apple est inférieur à la moyenne de son secteur, ce qui indique une valorisation attractive.</a:t>
+              <a:t>ROIC à 84.4% vs 35% pour le secteur tech. EV/Revenue à 9.1x vs médiane peers à 7.8x reflétant la prime qualité.</a:t>
             </a:r>
           </a:p>
         </p:txBody>
@@ -12238,786 +12238,30 @@
           </a:p>
         </p:txBody>
       </p:sp>
-      <p:graphicFrame>
-        <p:nvGraphicFramePr>
-          <p:cNvPr id="17" name="Table 16"/>
-          <p:cNvGraphicFramePr>
-            <a:graphicFrameLocks noGrp="1"/>
-          </p:cNvGraphicFramePr>
-          <p:nvPr/>
-        </p:nvGraphicFramePr>
-        <p:xfrm>
-          <a:off x="367200" y="914400"/>
-          <a:ext cx="8413200" cy="2149200"/>
-        </p:xfrm>
-        <a:graphic>
-          <a:graphicData uri="http://schemas.openxmlformats.org/drawingml/2006/table">
-            <a:tbl>
-              <a:tblPr firstRow="1" bandRow="1">
-                <a:tableStyleId>{5C22544A-7EE6-4342-B048-85BDC9FD1C3A}</a:tableStyleId>
-              </a:tblPr>
-              <a:tblGrid>
-                <a:gridCol w="2944620"/>
-                <a:gridCol w="1682640"/>
-                <a:gridCol w="1682640"/>
-                <a:gridCol w="2103300"/>
-              </a:tblGrid>
-              <a:tr h="268650">
-                <a:tc>
-                  <a:txBody>
-                    <a:bodyPr/>
-                    <a:lstStyle/>
-                    <a:p>
-                      <a:pPr algn="l"/>
-                      <a:r>
-                        <a:rPr sz="800" b="1" i="0">
-                          <a:solidFill>
-                            <a:srgbClr val="FFFFFF"/>
-                          </a:solidFill>
-                          <a:latin typeface="Calibri"/>
-                        </a:rPr>
-                        <a:t>Methode</a:t>
-                      </a:r>
-                    </a:p>
-                  </a:txBody>
-                  <a:tcPr>
-                    <a:solidFill>
-                      <a:srgbClr val="1B3A6B"/>
-                    </a:solidFill>
-                  </a:tcPr>
-                </a:tc>
-                <a:tc>
-                  <a:txBody>
-                    <a:bodyPr/>
-                    <a:lstStyle/>
-                    <a:p>
-                      <a:pPr algn="ctr"/>
-                      <a:r>
-                        <a:rPr sz="800" b="1" i="0">
-                          <a:solidFill>
-                            <a:srgbClr val="FFFFFF"/>
-                          </a:solidFill>
-                          <a:latin typeface="Calibri"/>
-                        </a:rPr>
-                        <a:t>Fourchette basse</a:t>
-                      </a:r>
-                    </a:p>
-                  </a:txBody>
-                  <a:tcPr>
-                    <a:solidFill>
-                      <a:srgbClr val="1B3A6B"/>
-                    </a:solidFill>
-                  </a:tcPr>
-                </a:tc>
-                <a:tc>
-                  <a:txBody>
-                    <a:bodyPr/>
-                    <a:lstStyle/>
-                    <a:p>
-                      <a:pPr algn="ctr"/>
-                      <a:r>
-                        <a:rPr sz="800" b="1" i="0">
-                          <a:solidFill>
-                            <a:srgbClr val="FFFFFF"/>
-                          </a:solidFill>
-                          <a:latin typeface="Calibri"/>
-                        </a:rPr>
-                        <a:t>Fourchette haute</a:t>
-                      </a:r>
-                    </a:p>
-                  </a:txBody>
-                  <a:tcPr>
-                    <a:solidFill>
-                      <a:srgbClr val="1B3A6B"/>
-                    </a:solidFill>
-                  </a:tcPr>
-                </a:tc>
-                <a:tc>
-                  <a:txBody>
-                    <a:bodyPr/>
-                    <a:lstStyle/>
-                    <a:p>
-                      <a:pPr algn="ctr"/>
-                      <a:r>
-                        <a:rPr sz="800" b="1" i="0">
-                          <a:solidFill>
-                            <a:srgbClr val="FFFFFF"/>
-                          </a:solidFill>
-                          <a:latin typeface="Calibri"/>
-                        </a:rPr>
-                        <a:t>Point central</a:t>
-                      </a:r>
-                    </a:p>
-                  </a:txBody>
-                  <a:tcPr>
-                    <a:solidFill>
-                      <a:srgbClr val="1B3A6B"/>
-                    </a:solidFill>
-                  </a:tcPr>
-                </a:tc>
-              </a:tr>
-              <a:tr h="268650">
-                <a:tc>
-                  <a:txBody>
-                    <a:bodyPr/>
-                    <a:lstStyle/>
-                    <a:p>
-                      <a:pPr algn="l"/>
-                      <a:r>
-                        <a:rPr sz="800" b="0" i="0">
-                          <a:solidFill>
-                            <a:srgbClr val="0D0D0D"/>
-                          </a:solidFill>
-                          <a:latin typeface="Calibri"/>
-                        </a:rPr>
-                        <a:t>DCF - Bear</a:t>
-                      </a:r>
-                    </a:p>
-                  </a:txBody>
-                  <a:tcPr>
-                    <a:solidFill>
-                      <a:srgbClr val="FAF0EF"/>
-                    </a:solidFill>
-                  </a:tcPr>
-                </a:tc>
-                <a:tc>
-                  <a:txBody>
-                    <a:bodyPr/>
-                    <a:lstStyle/>
-                    <a:p>
-                      <a:pPr algn="ctr"/>
-                      <a:r>
-                        <a:rPr sz="800" b="0" i="0">
-                          <a:solidFill>
-                            <a:srgbClr val="0D0D0D"/>
-                          </a:solidFill>
-                          <a:latin typeface="Calibri"/>
-                        </a:rPr>
-                        <a:t>220</a:t>
-                      </a:r>
-                    </a:p>
-                  </a:txBody>
-                  <a:tcPr>
-                    <a:solidFill>
-                      <a:srgbClr val="FAF0EF"/>
-                    </a:solidFill>
-                  </a:tcPr>
-                </a:tc>
-                <a:tc>
-                  <a:txBody>
-                    <a:bodyPr/>
-                    <a:lstStyle/>
-                    <a:p>
-                      <a:pPr algn="ctr"/>
-                      <a:r>
-                        <a:rPr sz="800" b="0" i="0">
-                          <a:solidFill>
-                            <a:srgbClr val="0D0D0D"/>
-                          </a:solidFill>
-                          <a:latin typeface="Calibri"/>
-                        </a:rPr>
-                        <a:t>250</a:t>
-                      </a:r>
-                    </a:p>
-                  </a:txBody>
-                  <a:tcPr>
-                    <a:solidFill>
-                      <a:srgbClr val="FAF0EF"/>
-                    </a:solidFill>
-                  </a:tcPr>
-                </a:tc>
-                <a:tc>
-                  <a:txBody>
-                    <a:bodyPr/>
-                    <a:lstStyle/>
-                    <a:p>
-                      <a:pPr algn="ctr"/>
-                      <a:r>
-                        <a:rPr sz="800" b="0" i="0">
-                          <a:solidFill>
-                            <a:srgbClr val="0D0D0D"/>
-                          </a:solidFill>
-                          <a:latin typeface="Calibri"/>
-                        </a:rPr>
-                        <a:t>241</a:t>
-                      </a:r>
-                    </a:p>
-                  </a:txBody>
-                  <a:tcPr>
-                    <a:solidFill>
-                      <a:srgbClr val="FAF0EF"/>
-                    </a:solidFill>
-                  </a:tcPr>
-                </a:tc>
-              </a:tr>
-              <a:tr h="268650">
-                <a:tc>
-                  <a:txBody>
-                    <a:bodyPr/>
-                    <a:lstStyle/>
-                    <a:p>
-                      <a:pPr algn="l"/>
-                      <a:r>
-                        <a:rPr sz="800" b="0" i="0">
-                          <a:solidFill>
-                            <a:srgbClr val="0D0D0D"/>
-                          </a:solidFill>
-                          <a:latin typeface="Calibri"/>
-                        </a:rPr>
-                        <a:t>DCF - Base</a:t>
-                      </a:r>
-                    </a:p>
-                  </a:txBody>
-                  <a:tcPr>
-                    <a:solidFill>
-                      <a:srgbClr val="EEF3FA"/>
-                    </a:solidFill>
-                  </a:tcPr>
-                </a:tc>
-                <a:tc>
-                  <a:txBody>
-                    <a:bodyPr/>
-                    <a:lstStyle/>
-                    <a:p>
-                      <a:pPr algn="ctr"/>
-                      <a:r>
-                        <a:rPr sz="800" b="0" i="0">
-                          <a:solidFill>
-                            <a:srgbClr val="0D0D0D"/>
-                          </a:solidFill>
-                          <a:latin typeface="Calibri"/>
-                        </a:rPr>
-                        <a:t>250</a:t>
-                      </a:r>
-                    </a:p>
-                  </a:txBody>
-                  <a:tcPr>
-                    <a:solidFill>
-                      <a:srgbClr val="EEF3FA"/>
-                    </a:solidFill>
-                  </a:tcPr>
-                </a:tc>
-                <a:tc>
-                  <a:txBody>
-                    <a:bodyPr/>
-                    <a:lstStyle/>
-                    <a:p>
-                      <a:pPr algn="ctr"/>
-                      <a:r>
-                        <a:rPr sz="800" b="0" i="0">
-                          <a:solidFill>
-                            <a:srgbClr val="0D0D0D"/>
-                          </a:solidFill>
-                          <a:latin typeface="Calibri"/>
-                        </a:rPr>
-                        <a:t>300</a:t>
-                      </a:r>
-                    </a:p>
-                  </a:txBody>
-                  <a:tcPr>
-                    <a:solidFill>
-                      <a:srgbClr val="EEF3FA"/>
-                    </a:solidFill>
-                  </a:tcPr>
-                </a:tc>
-                <a:tc>
-                  <a:txBody>
-                    <a:bodyPr/>
-                    <a:lstStyle/>
-                    <a:p>
-                      <a:pPr algn="ctr"/>
-                      <a:r>
-                        <a:rPr sz="800" b="0" i="0">
-                          <a:solidFill>
-                            <a:srgbClr val="0D0D0D"/>
-                          </a:solidFill>
-                          <a:latin typeface="Calibri"/>
-                        </a:rPr>
-                        <a:t>280</a:t>
-                      </a:r>
-                    </a:p>
-                  </a:txBody>
-                  <a:tcPr>
-                    <a:solidFill>
-                      <a:srgbClr val="EEF3FA"/>
-                    </a:solidFill>
-                  </a:tcPr>
-                </a:tc>
-              </a:tr>
-              <a:tr h="268650">
-                <a:tc>
-                  <a:txBody>
-                    <a:bodyPr/>
-                    <a:lstStyle/>
-                    <a:p>
-                      <a:pPr algn="l"/>
-                      <a:r>
-                        <a:rPr sz="800" b="0" i="0">
-                          <a:solidFill>
-                            <a:srgbClr val="0D0D0D"/>
-                          </a:solidFill>
-                          <a:latin typeface="Calibri"/>
-                        </a:rPr>
-                        <a:t>DCF - Bull</a:t>
-                      </a:r>
-                    </a:p>
-                  </a:txBody>
-                  <a:tcPr>
-                    <a:solidFill>
-                      <a:srgbClr val="EAF4EF"/>
-                    </a:solidFill>
-                  </a:tcPr>
-                </a:tc>
-                <a:tc>
-                  <a:txBody>
-                    <a:bodyPr/>
-                    <a:lstStyle/>
-                    <a:p>
-                      <a:pPr algn="ctr"/>
-                      <a:r>
-                        <a:rPr sz="800" b="0" i="0">
-                          <a:solidFill>
-                            <a:srgbClr val="0D0D0D"/>
-                          </a:solidFill>
-                          <a:latin typeface="Calibri"/>
-                        </a:rPr>
-                        <a:t>300</a:t>
-                      </a:r>
-                    </a:p>
-                  </a:txBody>
-                  <a:tcPr>
-                    <a:solidFill>
-                      <a:srgbClr val="EAF4EF"/>
-                    </a:solidFill>
-                  </a:tcPr>
-                </a:tc>
-                <a:tc>
-                  <a:txBody>
-                    <a:bodyPr/>
-                    <a:lstStyle/>
-                    <a:p>
-                      <a:pPr algn="ctr"/>
-                      <a:r>
-                        <a:rPr sz="800" b="0" i="0">
-                          <a:solidFill>
-                            <a:srgbClr val="0D0D0D"/>
-                          </a:solidFill>
-                          <a:latin typeface="Calibri"/>
-                        </a:rPr>
-                        <a:t>350</a:t>
-                      </a:r>
-                    </a:p>
-                  </a:txBody>
-                  <a:tcPr>
-                    <a:solidFill>
-                      <a:srgbClr val="EAF4EF"/>
-                    </a:solidFill>
-                  </a:tcPr>
-                </a:tc>
-                <a:tc>
-                  <a:txBody>
-                    <a:bodyPr/>
-                    <a:lstStyle/>
-                    <a:p>
-                      <a:pPr algn="ctr"/>
-                      <a:r>
-                        <a:rPr sz="800" b="0" i="0">
-                          <a:solidFill>
-                            <a:srgbClr val="0D0D0D"/>
-                          </a:solidFill>
-                          <a:latin typeface="Calibri"/>
-                        </a:rPr>
-                        <a:t>310</a:t>
-                      </a:r>
-                    </a:p>
-                  </a:txBody>
-                  <a:tcPr>
-                    <a:solidFill>
-                      <a:srgbClr val="EAF4EF"/>
-                    </a:solidFill>
-                  </a:tcPr>
-                </a:tc>
-              </a:tr>
-              <a:tr h="268650">
-                <a:tc>
-                  <a:txBody>
-                    <a:bodyPr/>
-                    <a:lstStyle/>
-                    <a:p>
-                      <a:pPr algn="l"/>
-                      <a:r>
-                        <a:rPr sz="800" b="0" i="0">
-                          <a:solidFill>
-                            <a:srgbClr val="0D0D0D"/>
-                          </a:solidFill>
-                          <a:latin typeface="Calibri"/>
-                        </a:rPr>
-                        <a:t>EV/EBITDA - Mediane peers</a:t>
-                      </a:r>
-                    </a:p>
-                  </a:txBody>
-                  <a:tcPr>
-                    <a:solidFill>
-                      <a:srgbClr val="F7F8FA"/>
-                    </a:solidFill>
-                  </a:tcPr>
-                </a:tc>
-                <a:tc>
-                  <a:txBody>
-                    <a:bodyPr/>
-                    <a:lstStyle/>
-                    <a:p>
-                      <a:pPr algn="ctr"/>
-                      <a:r>
-                        <a:rPr sz="800" b="0" i="0">
-                          <a:solidFill>
-                            <a:srgbClr val="0D0D0D"/>
-                          </a:solidFill>
-                          <a:latin typeface="Calibri"/>
-                        </a:rPr>
-                        <a:t>240</a:t>
-                      </a:r>
-                    </a:p>
-                  </a:txBody>
-                  <a:tcPr>
-                    <a:solidFill>
-                      <a:srgbClr val="F7F8FA"/>
-                    </a:solidFill>
-                  </a:tcPr>
-                </a:tc>
-                <a:tc>
-                  <a:txBody>
-                    <a:bodyPr/>
-                    <a:lstStyle/>
-                    <a:p>
-                      <a:pPr algn="ctr"/>
-                      <a:r>
-                        <a:rPr sz="800" b="0" i="0">
-                          <a:solidFill>
-                            <a:srgbClr val="0D0D0D"/>
-                          </a:solidFill>
-                          <a:latin typeface="Calibri"/>
-                        </a:rPr>
-                        <a:t>280</a:t>
-                      </a:r>
-                    </a:p>
-                  </a:txBody>
-                  <a:tcPr>
-                    <a:solidFill>
-                      <a:srgbClr val="F7F8FA"/>
-                    </a:solidFill>
-                  </a:tcPr>
-                </a:tc>
-                <a:tc>
-                  <a:txBody>
-                    <a:bodyPr/>
-                    <a:lstStyle/>
-                    <a:p>
-                      <a:pPr algn="ctr"/>
-                      <a:r>
-                        <a:rPr sz="800" b="0" i="0">
-                          <a:solidFill>
-                            <a:srgbClr val="0D0D0D"/>
-                          </a:solidFill>
-                          <a:latin typeface="Calibri"/>
-                        </a:rPr>
-                        <a:t>260</a:t>
-                      </a:r>
-                    </a:p>
-                  </a:txBody>
-                  <a:tcPr>
-                    <a:solidFill>
-                      <a:srgbClr val="F7F8FA"/>
-                    </a:solidFill>
-                  </a:tcPr>
-                </a:tc>
-              </a:tr>
-              <a:tr h="268650">
-                <a:tc>
-                  <a:txBody>
-                    <a:bodyPr/>
-                    <a:lstStyle/>
-                    <a:p>
-                      <a:pPr algn="l"/>
-                      <a:r>
-                        <a:rPr sz="800" b="0" i="0">
-                          <a:solidFill>
-                            <a:srgbClr val="0D0D0D"/>
-                          </a:solidFill>
-                          <a:latin typeface="Calibri"/>
-                        </a:rPr>
-                        <a:t>EV/EBITDA - Prime tech +50%</a:t>
-                      </a:r>
-                    </a:p>
-                  </a:txBody>
-                  <a:tcPr>
-                    <a:solidFill>
-                      <a:srgbClr val="F7F8FA"/>
-                    </a:solidFill>
-                  </a:tcPr>
-                </a:tc>
-                <a:tc>
-                  <a:txBody>
-                    <a:bodyPr/>
-                    <a:lstStyle/>
-                    <a:p>
-                      <a:pPr algn="ctr"/>
-                      <a:r>
-                        <a:rPr sz="800" b="0" i="0">
-                          <a:solidFill>
-                            <a:srgbClr val="0D0D0D"/>
-                          </a:solidFill>
-                          <a:latin typeface="Calibri"/>
-                        </a:rPr>
-                        <a:t>280</a:t>
-                      </a:r>
-                    </a:p>
-                  </a:txBody>
-                  <a:tcPr>
-                    <a:solidFill>
-                      <a:srgbClr val="F7F8FA"/>
-                    </a:solidFill>
-                  </a:tcPr>
-                </a:tc>
-                <a:tc>
-                  <a:txBody>
-                    <a:bodyPr/>
-                    <a:lstStyle/>
-                    <a:p>
-                      <a:pPr algn="ctr"/>
-                      <a:r>
-                        <a:rPr sz="800" b="0" i="0">
-                          <a:solidFill>
-                            <a:srgbClr val="0D0D0D"/>
-                          </a:solidFill>
-                          <a:latin typeface="Calibri"/>
-                        </a:rPr>
-                        <a:t>330</a:t>
-                      </a:r>
-                    </a:p>
-                  </a:txBody>
-                  <a:tcPr>
-                    <a:solidFill>
-                      <a:srgbClr val="F7F8FA"/>
-                    </a:solidFill>
-                  </a:tcPr>
-                </a:tc>
-                <a:tc>
-                  <a:txBody>
-                    <a:bodyPr/>
-                    <a:lstStyle/>
-                    <a:p>
-                      <a:pPr algn="ctr"/>
-                      <a:r>
-                        <a:rPr sz="800" b="0" i="0">
-                          <a:solidFill>
-                            <a:srgbClr val="0D0D0D"/>
-                          </a:solidFill>
-                          <a:latin typeface="Calibri"/>
-                        </a:rPr>
-                        <a:t>300</a:t>
-                      </a:r>
-                    </a:p>
-                  </a:txBody>
-                  <a:tcPr>
-                    <a:solidFill>
-                      <a:srgbClr val="F7F8FA"/>
-                    </a:solidFill>
-                  </a:tcPr>
-                </a:tc>
-              </a:tr>
-              <a:tr h="268650">
-                <a:tc>
-                  <a:txBody>
-                    <a:bodyPr/>
-                    <a:lstStyle/>
-                    <a:p>
-                      <a:pPr algn="l"/>
-                      <a:r>
-                        <a:rPr sz="800" b="0" i="0">
-                          <a:solidFill>
-                            <a:srgbClr val="0D0D0D"/>
-                          </a:solidFill>
-                          <a:latin typeface="Calibri"/>
-                        </a:rPr>
-                        <a:t>EV/Revenue - Mediane peers</a:t>
-                      </a:r>
-                    </a:p>
-                  </a:txBody>
-                  <a:tcPr>
-                    <a:solidFill>
-                      <a:srgbClr val="F7F8FA"/>
-                    </a:solidFill>
-                  </a:tcPr>
-                </a:tc>
-                <a:tc>
-                  <a:txBody>
-                    <a:bodyPr/>
-                    <a:lstStyle/>
-                    <a:p>
-                      <a:pPr algn="ctr"/>
-                      <a:r>
-                        <a:rPr sz="800" b="0" i="0">
-                          <a:solidFill>
-                            <a:srgbClr val="0D0D0D"/>
-                          </a:solidFill>
-                          <a:latin typeface="Calibri"/>
-                        </a:rPr>
-                        <a:t>200</a:t>
-                      </a:r>
-                    </a:p>
-                  </a:txBody>
-                  <a:tcPr>
-                    <a:solidFill>
-                      <a:srgbClr val="F7F8FA"/>
-                    </a:solidFill>
-                  </a:tcPr>
-                </a:tc>
-                <a:tc>
-                  <a:txBody>
-                    <a:bodyPr/>
-                    <a:lstStyle/>
-                    <a:p>
-                      <a:pPr algn="ctr"/>
-                      <a:r>
-                        <a:rPr sz="800" b="0" i="0">
-                          <a:solidFill>
-                            <a:srgbClr val="0D0D0D"/>
-                          </a:solidFill>
-                          <a:latin typeface="Calibri"/>
-                        </a:rPr>
-                        <a:t>240</a:t>
-                      </a:r>
-                    </a:p>
-                  </a:txBody>
-                  <a:tcPr>
-                    <a:solidFill>
-                      <a:srgbClr val="F7F8FA"/>
-                    </a:solidFill>
-                  </a:tcPr>
-                </a:tc>
-                <a:tc>
-                  <a:txBody>
-                    <a:bodyPr/>
-                    <a:lstStyle/>
-                    <a:p>
-                      <a:pPr algn="ctr"/>
-                      <a:r>
-                        <a:rPr sz="800" b="0" i="0">
-                          <a:solidFill>
-                            <a:srgbClr val="0D0D0D"/>
-                          </a:solidFill>
-                          <a:latin typeface="Calibri"/>
-                        </a:rPr>
-                        <a:t>220</a:t>
-                      </a:r>
-                    </a:p>
-                  </a:txBody>
-                  <a:tcPr>
-                    <a:solidFill>
-                      <a:srgbClr val="F7F8FA"/>
-                    </a:solidFill>
-                  </a:tcPr>
-                </a:tc>
-              </a:tr>
-              <a:tr h="268650">
-                <a:tc>
-                  <a:txBody>
-                    <a:bodyPr/>
-                    <a:lstStyle/>
-                    <a:p>
-                      <a:pPr algn="l"/>
-                      <a:r>
-                        <a:rPr sz="800" b="0" i="0">
-                          <a:solidFill>
-                            <a:srgbClr val="0D0D0D"/>
-                          </a:solidFill>
-                          <a:latin typeface="Calibri"/>
-                        </a:rPr>
-                        <a:t>Cours actuel (253,38)</a:t>
-                      </a:r>
-                    </a:p>
-                  </a:txBody>
-                  <a:tcPr>
-                    <a:solidFill>
-                      <a:srgbClr val="EEF3FA"/>
-                    </a:solidFill>
-                  </a:tcPr>
-                </a:tc>
-                <a:tc>
-                  <a:txBody>
-                    <a:bodyPr/>
-                    <a:lstStyle/>
-                    <a:p>
-                      <a:pPr algn="ctr"/>
-                      <a:r>
-                        <a:rPr sz="800" b="0" i="0">
-                          <a:solidFill>
-                            <a:srgbClr val="0D0D0D"/>
-                          </a:solidFill>
-                          <a:latin typeface="Calibri"/>
-                        </a:rPr>
-                        <a:t>—</a:t>
-                      </a:r>
-                    </a:p>
-                  </a:txBody>
-                  <a:tcPr>
-                    <a:solidFill>
-                      <a:srgbClr val="EEF3FA"/>
-                    </a:solidFill>
-                  </a:tcPr>
-                </a:tc>
-                <a:tc>
-                  <a:txBody>
-                    <a:bodyPr/>
-                    <a:lstStyle/>
-                    <a:p>
-                      <a:pPr algn="ctr"/>
-                      <a:r>
-                        <a:rPr sz="800" b="0" i="0">
-                          <a:solidFill>
-                            <a:srgbClr val="0D0D0D"/>
-                          </a:solidFill>
-                          <a:latin typeface="Calibri"/>
-                        </a:rPr>
-                        <a:t>—</a:t>
-                      </a:r>
-                    </a:p>
-                  </a:txBody>
-                  <a:tcPr>
-                    <a:solidFill>
-                      <a:srgbClr val="EEF3FA"/>
-                    </a:solidFill>
-                  </a:tcPr>
-                </a:tc>
-                <a:tc>
-                  <a:txBody>
-                    <a:bodyPr/>
-                    <a:lstStyle/>
-                    <a:p>
-                      <a:pPr algn="ctr"/>
-                      <a:r>
-                        <a:rPr sz="800" b="0" i="0">
-                          <a:solidFill>
-                            <a:srgbClr val="0D0D0D"/>
-                          </a:solidFill>
-                          <a:latin typeface="Calibri"/>
-                        </a:rPr>
-                        <a:t>253,38</a:t>
-                      </a:r>
-                    </a:p>
-                  </a:txBody>
-                  <a:tcPr>
-                    <a:solidFill>
-                      <a:srgbClr val="EEF3FA"/>
-                    </a:solidFill>
-                  </a:tcPr>
-                </a:tc>
-              </a:tr>
-            </a:tbl>
-          </a:graphicData>
-        </a:graphic>
-      </p:graphicFrame>
+      <p:pic>
+        <p:nvPicPr>
+          <p:cNvPr id="17" name="Picture 16" descr="image.png"/>
+          <p:cNvPicPr>
+            <a:picLocks noChangeAspect="1"/>
+          </p:cNvPicPr>
+          <p:nvPr/>
+        </p:nvPicPr>
+        <p:blipFill>
+          <a:blip r:embed="rId2"/>
+          <a:stretch>
+            <a:fillRect/>
+          </a:stretch>
+        </p:blipFill>
+        <p:spPr>
+          <a:xfrm>
+            <a:off x="367200" y="914400"/>
+            <a:ext cx="8413200" cy="1980000"/>
+          </a:xfrm>
+          <a:prstGeom prst="rect">
+            <a:avLst/>
+          </a:prstGeom>
+        </p:spPr>
+      </p:pic>
       <p:sp>
         <p:nvSpPr>
           <p:cNvPr id="18" name="TextBox 17"/>
@@ -13048,7 +12292,7 @@
                 </a:solidFill>
                 <a:latin typeface="Calibri"/>
               </a:rPr>
-              <a:t>Le prix implicite d'Apple sur la base d'un modèle de flux de trésorerie disponible est de 280,5 USD, ce qui suggère un upside de 10% par rapport au cours actuel.</a:t>
+              <a:t>WACC 10.3% avec TGR 3.0% implique un upside de 12% vs cours actuel. Valorisation DCF à 285$ justifiée par croissance services et rachats d'actions.</a:t>
             </a:r>
           </a:p>
         </p:txBody>
@@ -14021,7 +13265,7 @@
                 </a:solidFill>
                 <a:latin typeface="Calibri"/>
               </a:rPr>
-              <a:t>Concurrence accrue</a:t>
+              <a:t>Régulation App Store</a:t>
             </a:r>
           </a:p>
         </p:txBody>
@@ -14056,7 +13300,7 @@
                 </a:solidFill>
                 <a:latin typeface="Calibri"/>
               </a:rPr>
-              <a:t>Concurrence accrue</a:t>
+              <a:t>Régulation européenne sur l'App Store</a:t>
             </a:r>
           </a:p>
         </p:txBody>
@@ -14177,7 +13421,7 @@
                 </a:solidFill>
                 <a:latin typeface="Calibri"/>
               </a:rPr>
-              <a:t>Dépendance aux smartphones</a:t>
+              <a:t>Concurrence IA</a:t>
             </a:r>
           </a:p>
         </p:txBody>
@@ -14212,7 +13456,7 @@
                 </a:solidFill>
                 <a:latin typeface="Calibri"/>
               </a:rPr>
-              <a:t>Risques politiques</a:t>
+              <a:t>Concurrence accrue en IA (Google, Microsoft)</a:t>
             </a:r>
           </a:p>
         </p:txBody>
@@ -14333,7 +13577,7 @@
                 </a:solidFill>
                 <a:latin typeface="Calibri"/>
               </a:rPr>
-              <a:t>Risques politiques</a:t>
+              <a:t>Dépendance iPhone</a:t>
             </a:r>
           </a:p>
         </p:txBody>
@@ -14368,7 +13612,7 @@
                 </a:solidFill>
                 <a:latin typeface="Calibri"/>
               </a:rPr>
-              <a:t>Dépendance aux smartphones</a:t>
+              <a:t>Ralentissement économique en Chine</a:t>
             </a:r>
           </a:p>
         </p:txBody>
@@ -14582,7 +13826,7 @@
                           </a:solidFill>
                           <a:latin typeface="Calibri"/>
                         </a:rPr>
-                        <a:t>Récession économique mondiale</a:t>
+                        <a:t>Récession mondiale 2026 réduisant la demande de 10%</a:t>
                       </a:r>
                     </a:p>
                   </a:txBody>
@@ -14653,7 +13897,7 @@
                           </a:solidFill>
                           <a:latin typeface="Calibri"/>
                         </a:rPr>
-                        <a:t>Concurrence accrue dans le secteur des smartphones</a:t>
+                        <a:t>Régulation stricte sur l'App Store en UE/US amputant 15% des revenus services</a:t>
                       </a:r>
                     </a:p>
                   </a:txBody>
@@ -14724,7 +13968,7 @@
                           </a:solidFill>
                           <a:latin typeface="Calibri"/>
                         </a:rPr>
-                        <a:t>Problèmes de production ou de livraison</a:t>
+                        <a:t>Échec commercial iPhone 17 avec baisse ARPU de 10%</a:t>
                       </a:r>
                     </a:p>
                   </a:txBody>
@@ -14747,7 +13991,7 @@
                           </a:solidFill>
                           <a:latin typeface="Calibri"/>
                         </a:rPr>
-                        <a:t>2-3 trimestres</a:t>
+                        <a:t>2-3 trim.</a:t>
                       </a:r>
                     </a:p>
                   </a:txBody>
@@ -15730,7 +14974,7 @@
                 </a:solidFill>
                 <a:latin typeface="Calibri"/>
               </a:rPr>
-              <a:t>Neutre +</a:t>
+              <a:t>Positif</a:t>
             </a:r>
           </a:p>
         </p:txBody>
@@ -15800,7 +15044,7 @@
                 </a:solidFill>
                 <a:latin typeface="Calibri"/>
               </a:rPr>
-              <a:t>Score agrege : +0,035</a:t>
+              <a:t>Score agrege : +0,339</a:t>
             </a:r>
           </a:p>
         </p:txBody>
@@ -16112,7 +15356,7 @@
                 </a:solidFill>
                 <a:latin typeface="Calibri"/>
               </a:rPr>
-              <a:t>49,7 %</a:t>
+              <a:t>52,5 %</a:t>
             </a:r>
           </a:p>
         </p:txBody>
@@ -16568,7 +15812,7 @@
                           </a:solidFill>
                           <a:latin typeface="Calibri"/>
                         </a:rPr>
-                        <a:t>7</a:t>
+                        <a:t>17</a:t>
                       </a:r>
                     </a:p>
                   </a:txBody>
@@ -16591,7 +15835,7 @@
                           </a:solidFill>
                           <a:latin typeface="Calibri"/>
                         </a:rPr>
-                        <a:t>+0,269</a:t>
+                        <a:t>+0,525</a:t>
                       </a:r>
                     </a:p>
                   </a:txBody>
@@ -16614,7 +15858,7 @@
                           </a:solidFill>
                           <a:latin typeface="Calibri"/>
                         </a:rPr>
-                        <a:t>Croissance de la demande pour les smartphones, Expansion de l'écosystème d'Apple, Innovation</a:t>
+                        <a:t>Croissance services &gt;15% CAGR 2025-2027, Rachat d'actions 100Md$ en 2025, Lancement iPhone 17 avec IA intégrée</a:t>
                       </a:r>
                     </a:p>
                   </a:txBody>
@@ -16662,7 +15906,7 @@
                           </a:solidFill>
                           <a:latin typeface="Calibri"/>
                         </a:rPr>
-                        <a:t>17</a:t>
+                        <a:t>7</a:t>
                       </a:r>
                     </a:p>
                   </a:txBody>
@@ -16685,7 +15929,7 @@
                           </a:solidFill>
                           <a:latin typeface="Calibri"/>
                         </a:rPr>
-                        <a:t>+0,497</a:t>
+                        <a:t>+0,288</a:t>
                       </a:r>
                     </a:p>
                   </a:txBody>
@@ -16779,7 +16023,7 @@
                           </a:solidFill>
                           <a:latin typeface="Calibri"/>
                         </a:rPr>
-                        <a:t>+0,234</a:t>
+                        <a:t>+0,186</a:t>
                       </a:r>
                     </a:p>
                   </a:txBody>
@@ -16802,7 +16046,7 @@
                           </a:solidFill>
                           <a:latin typeface="Calibri"/>
                         </a:rPr>
-                        <a:t>Concurrence accrue, Risques politiques, Dépendance aux smartphones</a:t>
+                        <a:t>Régulation européenne sur l'App Store, Concurrence accrue en IA (Google, Microsoft), Ralentissement économique en Chine</a:t>
                       </a:r>
                     </a:p>
                   </a:txBody>
@@ -16847,7 +16091,7 @@
                 </a:solidFill>
                 <a:latin typeface="Calibri"/>
               </a:rPr>
-              <a:t>Le sentiment global de la presse financiere sur AAPL cette semaine est mitige, avec certains titres laissant apparaitre une croissance potentielle pour l'entreprise, notamment en termes d'adoption de ses produits en Europe. Cependant, d'autres titres font etat de defis potentiels pour l'entreprise, tels que la concurrence accrue dans le marché des smartphones et les risques lies aux partenariats avec d'autres entreprises technologiques.</a:t>
+              <a:t>Le sentiment positif (score +0.339) est basé sur 30 articles analysés sur 7 jours. Confiance IA : 53%. Cohérence avec la recommandation BUY : validée.</a:t>
             </a:r>
           </a:p>
         </p:txBody>
@@ -19785,7 +19029,7 @@
                 </a:solidFill>
                 <a:latin typeface="Calibri"/>
               </a:rPr>
-              <a:t>La valorisation d'Apple est attractive par rapport à ses pairs, avec un ratio EV/EBITDA inférieur à 25. L'entreprise présente également un multiple de prix sur bénéfice inférieur à 30.</a:t>
+              <a:t>Les multiples (P/E 33.3x, EV/EBITDA 26.2x) sont élevés mais justifiés par la qualité des marges et la récurrence des revenus. Comparables tech affichent des ratios similaires avec upside limité.</a:t>
             </a:r>
           </a:p>
         </p:txBody>
@@ -20115,7 +19359,7 @@
                 </a:solidFill>
                 <a:latin typeface="Calibri"/>
               </a:rPr>
-              <a:t>Prix cible base : 280 $  ·  Upside : +10,7 %  ·  Bear : 241 $ (-5,0 %)  ·  Bull : 310 $ (+22,4 %)</a:t>
+              <a:t>Prix cible base : 285 $  ·  Upside : +12,1 %  ·  Bear : 240 $ (-5,6 %)  ·  Bull : 320 $ (+25,9 %)</a:t>
             </a:r>
           </a:p>
         </p:txBody>
@@ -20271,7 +19515,7 @@
                 </a:solidFill>
                 <a:latin typeface="Calibri"/>
               </a:rPr>
-              <a:t>Marque forte</a:t>
+              <a:t>Écosystème fermé</a:t>
             </a:r>
           </a:p>
         </p:txBody>
@@ -20306,7 +19550,7 @@
                 </a:solidFill>
                 <a:latin typeface="Calibri"/>
               </a:rPr>
-              <a:t>La croissance de la demande pour les smartphones et les ordinateurs portables devrait atteindre 10% d'ici 2027</a:t>
+              <a:t>Lancement de l'iPhone 17 en 2026 avec +15% de ventes grâce à l'IA intégrée boostant l'ARPU à 850$</a:t>
             </a:r>
           </a:p>
         </p:txBody>
@@ -20384,7 +19628,7 @@
                 </a:solidFill>
                 <a:latin typeface="Calibri"/>
               </a:rPr>
-              <a:t>Ecosystème intégré</a:t>
+              <a:t>Marges premium</a:t>
             </a:r>
           </a:p>
         </p:txBody>
@@ -20419,7 +19663,7 @@
                 </a:solidFill>
                 <a:latin typeface="Calibri"/>
               </a:rPr>
-              <a:t>Les services d'Apple devraient générer 20% des revenus de l'entreprise d'ici 2028</a:t>
+              <a:t>Expansion des services avec +18% de revenus atteignant 100Md$ en 2027</a:t>
             </a:r>
           </a:p>
         </p:txBody>
@@ -20497,7 +19741,7 @@
                 </a:solidFill>
                 <a:latin typeface="Calibri"/>
               </a:rPr>
-              <a:t>Innovation</a:t>
+              <a:t>Cash-flows massifs</a:t>
             </a:r>
           </a:p>
         </p:txBody>
@@ -20532,7 +19776,7 @@
                 </a:solidFill>
                 <a:latin typeface="Calibri"/>
               </a:rPr>
-              <a:t>L'expansion de l'écosystème d'Apple devrait atteindre 500 millions d'utilisateurs actifs d'ici 2029</a:t>
+              <a:t>Rachat d'actions de 100Md$ annoncé en 2025 soutenant la valorisation.</a:t>
             </a:r>
           </a:p>
         </p:txBody>
@@ -20688,7 +19932,7 @@
                 </a:solidFill>
                 <a:latin typeface="Calibri"/>
               </a:rPr>
-              <a:t>Concurrence accrue</a:t>
+              <a:t>Régulation App Store</a:t>
             </a:r>
           </a:p>
         </p:txBody>
@@ -20723,7 +19967,7 @@
                 </a:solidFill>
                 <a:latin typeface="Calibri"/>
               </a:rPr>
-              <a:t>Concurrence accrue</a:t>
+              <a:t>Régulation européenne sur l'App Store</a:t>
             </a:r>
           </a:p>
         </p:txBody>
@@ -20801,7 +20045,7 @@
                 </a:solidFill>
                 <a:latin typeface="Calibri"/>
               </a:rPr>
-              <a:t>Dépendance aux smartphones</a:t>
+              <a:t>Concurrence IA</a:t>
             </a:r>
           </a:p>
         </p:txBody>
@@ -20836,7 +20080,7 @@
                 </a:solidFill>
                 <a:latin typeface="Calibri"/>
               </a:rPr>
-              <a:t>Risques politiques</a:t>
+              <a:t>Concurrence accrue en IA (Google, Microsoft)</a:t>
             </a:r>
           </a:p>
         </p:txBody>
@@ -20914,7 +20158,7 @@
                 </a:solidFill>
                 <a:latin typeface="Calibri"/>
               </a:rPr>
-              <a:t>Risques politiques</a:t>
+              <a:t>Dépendance iPhone</a:t>
             </a:r>
           </a:p>
         </p:txBody>
@@ -20949,7 +20193,7 @@
                 </a:solidFill>
                 <a:latin typeface="Calibri"/>
               </a:rPr>
-              <a:t>Dépendance aux smartphones</a:t>
+              <a:t>Impact potentiel sur la these d'investissement — surveillance recommandee sur les 6-12 prochains mois.</a:t>
             </a:r>
           </a:p>
         </p:txBody>
@@ -21156,7 +20400,7 @@
                 </a:solidFill>
                 <a:latin typeface="Calibri"/>
               </a:rPr>
-              <a:t>26,1x</a:t>
+              <a:t>26,2x</a:t>
             </a:r>
           </a:p>
         </p:txBody>
@@ -21226,7 +20470,7 @@
                 </a:solidFill>
                 <a:latin typeface="Calibri"/>
               </a:rPr>
-              <a:t>vs 20,5x médiane peers</a:t>
+              <a:t>vs 22,0x médiane peers</a:t>
             </a:r>
           </a:p>
         </p:txBody>
@@ -21538,7 +20782,7 @@
                 </a:solidFill>
                 <a:latin typeface="Calibri"/>
               </a:rPr>
-              <a:t>280 $</a:t>
+              <a:t>285 $</a:t>
             </a:r>
           </a:p>
         </p:txBody>
@@ -21608,7 +20852,7 @@
                 </a:solidFill>
                 <a:latin typeface="Calibri"/>
               </a:rPr>
-              <a:t>Upside de +10,7 % vs cours</a:t>
+              <a:t>Upside de +12,1 % vs cours</a:t>
             </a:r>
           </a:p>
         </p:txBody>
@@ -21729,7 +20973,7 @@
                 </a:solidFill>
                 <a:latin typeface="Calibri"/>
               </a:rPr>
-              <a:t>+0,035</a:t>
+              <a:t>+0,339</a:t>
             </a:r>
           </a:p>
         </p:txBody>
@@ -21799,7 +21043,7 @@
                 </a:solidFill>
                 <a:latin typeface="Calibri"/>
               </a:rPr>
-              <a:t>Neutre +  ·  30 articles</a:t>
+              <a:t>Positif  ·  30 articles</a:t>
             </a:r>
           </a:p>
         </p:txBody>
@@ -22519,7 +21763,7 @@
                 </a:solidFill>
                 <a:latin typeface="Calibri"/>
               </a:rPr>
-              <a:t>253,38 $</a:t>
+              <a:t>254,20 $</a:t>
             </a:r>
           </a:p>
         </p:txBody>
@@ -22987,7 +22231,7 @@
                 </a:solidFill>
                 <a:latin typeface="Calibri"/>
               </a:rPr>
-              <a:t>+19,7 %</a:t>
+              <a:t>+20,1 %</a:t>
             </a:r>
           </a:p>
         </p:txBody>
@@ -24016,8 +23260,8 @@
         </p:nvSpPr>
         <p:spPr>
           <a:xfrm>
-            <a:off x="7854300" y="2842183"/>
-            <a:ext cx="498636" cy="1053016"/>
+            <a:off x="7854300" y="2826559"/>
+            <a:ext cx="498636" cy="1068640"/>
           </a:xfrm>
           <a:prstGeom prst="rect">
             <a:avLst/>
@@ -24088,14 +23332,57 @@
       </p:sp>
       <p:sp>
         <p:nvSpPr>
-          <p:cNvPr id="60" name="TextBox 59"/>
+          <p:cNvPr id="60" name="Rectangle 59"/>
+          <p:cNvSpPr/>
+          <p:nvPr/>
+        </p:nvSpPr>
+        <p:spPr>
+          <a:xfrm>
+            <a:off x="601200" y="3823200"/>
+            <a:ext cx="8179200" cy="7200"/>
+          </a:xfrm>
+          <a:prstGeom prst="rect">
+            <a:avLst/>
+          </a:prstGeom>
+          <a:solidFill>
+            <a:srgbClr val="D0D5DD"/>
+          </a:solidFill>
+          <a:ln>
+            <a:noFill/>
+          </a:ln>
+        </p:spPr>
+        <p:style>
+          <a:lnRef idx="1">
+            <a:schemeClr val="accent1"/>
+          </a:lnRef>
+          <a:fillRef idx="3">
+            <a:schemeClr val="accent1"/>
+          </a:fillRef>
+          <a:effectRef idx="2">
+            <a:schemeClr val="accent1"/>
+          </a:effectRef>
+          <a:fontRef idx="minor">
+            <a:schemeClr val="lt1"/>
+          </a:fontRef>
+        </p:style>
+        <p:txBody>
+          <a:bodyPr rtlCol="0" anchor="ctr"/>
+          <a:lstStyle/>
+          <a:p>
+            <a:pPr algn="ctr"/>
+          </a:p>
+        </p:txBody>
+      </p:sp>
+      <p:sp>
+        <p:nvSpPr>
+          <p:cNvPr id="61" name="TextBox 60"/>
           <p:cNvSpPr txBox="1"/>
           <p:nvPr/>
         </p:nvSpPr>
         <p:spPr>
           <a:xfrm>
-            <a:off x="439200" y="2174400"/>
-            <a:ext cx="1800000" cy="144000"/>
+            <a:off x="367200" y="3751200"/>
+            <a:ext cx="216000" cy="144000"/>
           </a:xfrm>
           <a:prstGeom prst="rect">
             <a:avLst/>
@@ -24110,55 +23397,254 @@
           <a:p>
             <a:pPr algn="l"/>
             <a:r>
-              <a:rPr sz="700" b="0" i="0">
-                <a:solidFill>
-                  <a:srgbClr val="2E5FA3"/>
-                </a:solidFill>
-                <a:latin typeface="Calibri"/>
-              </a:rPr>
-              <a:t>▲ Max : 278,32 $</a:t>
-            </a:r>
-          </a:p>
-        </p:txBody>
-      </p:sp>
-      <p:sp>
-        <p:nvSpPr>
-          <p:cNvPr id="61" name="TextBox 60"/>
-          <p:cNvSpPr txBox="1"/>
-          <p:nvPr/>
-        </p:nvSpPr>
-        <p:spPr>
-          <a:xfrm>
-            <a:off x="439200" y="3643199"/>
-            <a:ext cx="1800000" cy="144000"/>
-          </a:xfrm>
-          <a:prstGeom prst="rect">
-            <a:avLst/>
-          </a:prstGeom>
-          <a:noFill/>
-        </p:spPr>
-        <p:txBody>
-          <a:bodyPr wrap="square">
-            <a:spAutoFit/>
-          </a:bodyPr>
-          <a:lstStyle/>
-          <a:p>
-            <a:pPr algn="l"/>
-            <a:r>
-              <a:rPr sz="700" b="0" i="0">
+              <a:rPr sz="600" b="0" i="0">
                 <a:solidFill>
                   <a:srgbClr val="555555"/>
                 </a:solidFill>
                 <a:latin typeface="Calibri"/>
               </a:rPr>
-              <a:t>▼ Min : 199,98 $</a:t>
+              <a:t>199</a:t>
             </a:r>
           </a:p>
         </p:txBody>
       </p:sp>
       <p:sp>
         <p:nvSpPr>
-          <p:cNvPr id="62" name="TextBox 61"/>
+          <p:cNvPr id="62" name="Rectangle 61"/>
+          <p:cNvSpPr/>
+          <p:nvPr/>
+        </p:nvSpPr>
+        <p:spPr>
+          <a:xfrm>
+            <a:off x="601200" y="3348000"/>
+            <a:ext cx="8179200" cy="7200"/>
+          </a:xfrm>
+          <a:prstGeom prst="rect">
+            <a:avLst/>
+          </a:prstGeom>
+          <a:solidFill>
+            <a:srgbClr val="D0D5DD"/>
+          </a:solidFill>
+          <a:ln>
+            <a:noFill/>
+          </a:ln>
+        </p:spPr>
+        <p:style>
+          <a:lnRef idx="1">
+            <a:schemeClr val="accent1"/>
+          </a:lnRef>
+          <a:fillRef idx="3">
+            <a:schemeClr val="accent1"/>
+          </a:fillRef>
+          <a:effectRef idx="2">
+            <a:schemeClr val="accent1"/>
+          </a:effectRef>
+          <a:fontRef idx="minor">
+            <a:schemeClr val="lt1"/>
+          </a:fontRef>
+        </p:style>
+        <p:txBody>
+          <a:bodyPr rtlCol="0" anchor="ctr"/>
+          <a:lstStyle/>
+          <a:p>
+            <a:pPr algn="ctr"/>
+          </a:p>
+        </p:txBody>
+      </p:sp>
+      <p:sp>
+        <p:nvSpPr>
+          <p:cNvPr id="63" name="TextBox 62"/>
+          <p:cNvSpPr txBox="1"/>
+          <p:nvPr/>
+        </p:nvSpPr>
+        <p:spPr>
+          <a:xfrm>
+            <a:off x="367200" y="3276000"/>
+            <a:ext cx="216000" cy="144000"/>
+          </a:xfrm>
+          <a:prstGeom prst="rect">
+            <a:avLst/>
+          </a:prstGeom>
+          <a:noFill/>
+        </p:spPr>
+        <p:txBody>
+          <a:bodyPr wrap="square">
+            <a:spAutoFit/>
+          </a:bodyPr>
+          <a:lstStyle/>
+          <a:p>
+            <a:pPr algn="l"/>
+            <a:r>
+              <a:rPr sz="600" b="0" i="0">
+                <a:solidFill>
+                  <a:srgbClr val="555555"/>
+                </a:solidFill>
+                <a:latin typeface="Calibri"/>
+              </a:rPr>
+              <a:t>225</a:t>
+            </a:r>
+          </a:p>
+        </p:txBody>
+      </p:sp>
+      <p:sp>
+        <p:nvSpPr>
+          <p:cNvPr id="64" name="Rectangle 63"/>
+          <p:cNvSpPr/>
+          <p:nvPr/>
+        </p:nvSpPr>
+        <p:spPr>
+          <a:xfrm>
+            <a:off x="601200" y="2858400"/>
+            <a:ext cx="8179200" cy="7200"/>
+          </a:xfrm>
+          <a:prstGeom prst="rect">
+            <a:avLst/>
+          </a:prstGeom>
+          <a:solidFill>
+            <a:srgbClr val="D0D5DD"/>
+          </a:solidFill>
+          <a:ln>
+            <a:noFill/>
+          </a:ln>
+        </p:spPr>
+        <p:style>
+          <a:lnRef idx="1">
+            <a:schemeClr val="accent1"/>
+          </a:lnRef>
+          <a:fillRef idx="3">
+            <a:schemeClr val="accent1"/>
+          </a:fillRef>
+          <a:effectRef idx="2">
+            <a:schemeClr val="accent1"/>
+          </a:effectRef>
+          <a:fontRef idx="minor">
+            <a:schemeClr val="lt1"/>
+          </a:fontRef>
+        </p:style>
+        <p:txBody>
+          <a:bodyPr rtlCol="0" anchor="ctr"/>
+          <a:lstStyle/>
+          <a:p>
+            <a:pPr algn="ctr"/>
+          </a:p>
+        </p:txBody>
+      </p:sp>
+      <p:sp>
+        <p:nvSpPr>
+          <p:cNvPr id="65" name="TextBox 64"/>
+          <p:cNvSpPr txBox="1"/>
+          <p:nvPr/>
+        </p:nvSpPr>
+        <p:spPr>
+          <a:xfrm>
+            <a:off x="367200" y="2786399"/>
+            <a:ext cx="216000" cy="144000"/>
+          </a:xfrm>
+          <a:prstGeom prst="rect">
+            <a:avLst/>
+          </a:prstGeom>
+          <a:noFill/>
+        </p:spPr>
+        <p:txBody>
+          <a:bodyPr wrap="square">
+            <a:spAutoFit/>
+          </a:bodyPr>
+          <a:lstStyle/>
+          <a:p>
+            <a:pPr algn="l"/>
+            <a:r>
+              <a:rPr sz="600" b="0" i="0">
+                <a:solidFill>
+                  <a:srgbClr val="555555"/>
+                </a:solidFill>
+                <a:latin typeface="Calibri"/>
+              </a:rPr>
+              <a:t>252</a:t>
+            </a:r>
+          </a:p>
+        </p:txBody>
+      </p:sp>
+      <p:sp>
+        <p:nvSpPr>
+          <p:cNvPr id="66" name="Rectangle 65"/>
+          <p:cNvSpPr/>
+          <p:nvPr/>
+        </p:nvSpPr>
+        <p:spPr>
+          <a:xfrm>
+            <a:off x="601200" y="2383200"/>
+            <a:ext cx="8179200" cy="7200"/>
+          </a:xfrm>
+          <a:prstGeom prst="rect">
+            <a:avLst/>
+          </a:prstGeom>
+          <a:solidFill>
+            <a:srgbClr val="D0D5DD"/>
+          </a:solidFill>
+          <a:ln>
+            <a:noFill/>
+          </a:ln>
+        </p:spPr>
+        <p:style>
+          <a:lnRef idx="1">
+            <a:schemeClr val="accent1"/>
+          </a:lnRef>
+          <a:fillRef idx="3">
+            <a:schemeClr val="accent1"/>
+          </a:fillRef>
+          <a:effectRef idx="2">
+            <a:schemeClr val="accent1"/>
+          </a:effectRef>
+          <a:fontRef idx="minor">
+            <a:schemeClr val="lt1"/>
+          </a:fontRef>
+        </p:style>
+        <p:txBody>
+          <a:bodyPr rtlCol="0" anchor="ctr"/>
+          <a:lstStyle/>
+          <a:p>
+            <a:pPr algn="ctr"/>
+          </a:p>
+        </p:txBody>
+      </p:sp>
+      <p:sp>
+        <p:nvSpPr>
+          <p:cNvPr id="67" name="TextBox 66"/>
+          <p:cNvSpPr txBox="1"/>
+          <p:nvPr/>
+        </p:nvSpPr>
+        <p:spPr>
+          <a:xfrm>
+            <a:off x="367200" y="2311200"/>
+            <a:ext cx="216000" cy="144000"/>
+          </a:xfrm>
+          <a:prstGeom prst="rect">
+            <a:avLst/>
+          </a:prstGeom>
+          <a:noFill/>
+        </p:spPr>
+        <p:txBody>
+          <a:bodyPr wrap="square">
+            <a:spAutoFit/>
+          </a:bodyPr>
+          <a:lstStyle/>
+          <a:p>
+            <a:pPr algn="l"/>
+            <a:r>
+              <a:rPr sz="600" b="0" i="0">
+                <a:solidFill>
+                  <a:srgbClr val="555555"/>
+                </a:solidFill>
+                <a:latin typeface="Calibri"/>
+              </a:rPr>
+              <a:t>278</a:t>
+            </a:r>
+          </a:p>
+        </p:txBody>
+      </p:sp>
+      <p:sp>
+        <p:nvSpPr>
+          <p:cNvPr id="68" name="TextBox 67"/>
           <p:cNvSpPr txBox="1"/>
           <p:nvPr/>
         </p:nvSpPr>
@@ -24186,7 +23672,7 @@
                 </a:solidFill>
                 <a:latin typeface="Calibri"/>
               </a:rPr>
-              <a:t>Apple Inc. presente une opportunité d'investissement attractive avec des perspectives de croissance solides et une position dominante sur le marché. L'entreprise devrait poursuivre sa croissance grâce à ses produits innovants et à son écosystème intégré.</a:t>
+              <a:t>Apple maintient une position dominante dans les services et l'innovation hardware malgré des défis macroéconomiques. La valorisation reste attractive avec une marge nette de 26.9% et un ROIC de 84.4%.</a:t>
             </a:r>
           </a:p>
         </p:txBody>
@@ -25229,7 +24715,7 @@
                 </a:solidFill>
                 <a:latin typeface="Calibri"/>
               </a:rPr>
-              <a:t>Concurrence accrue  ·  Dépendance aux smartphones</a:t>
+              <a:t>Régulation App Store  ·  Concurrence IA</a:t>
             </a:r>
           </a:p>
         </p:txBody>
@@ -26463,7 +25949,7 @@
                 </a:solidFill>
                 <a:latin typeface="Calibri"/>
               </a:rPr>
-              <a:t>Apple Inc. est un leader mondial dans la conception, la fabrication et la commercialisation de produits électroniques grand public. L'entreprise est positionnée comme un acteur majeur sur le marché des smartphones et des ordinateurs portables. Ses avantages concurrentiels incluent son écosystème intégré, sa marque forte et son innovante gamme de produits. L'entreprise articule son activité autour de deux segments stratégiques :</a:t>
+              <a:t>Apple conçoit et commercialise des smartphones, ordinateurs et services numériques haut de gamme. Positionné comme leader premium avec écosystème intégré, l'entreprise bénéficie d'une fidélisation client exceptionnelle et de marges durables. Son avantage concurrentiel repose sur l'innovation, la marque forte et la rentabilité supérieure à ses pairs. L'entreprise articule son activité autour de deux segments stratégiques :</a:t>
             </a:r>
           </a:p>
         </p:txBody>
@@ -26576,7 +26062,7 @@
                 </a:solidFill>
                 <a:latin typeface="Calibri"/>
               </a:rPr>
-              <a:t>Les produits d'Apple incluent les iPhone, les Mac, les iPad, les Apple Watch et les AirPods.…</a:t>
+              <a:t>Ventes de iPhone, Mac, iPad et wearables représentant 80% du chiffre d'affaires. Modèle basé sur…</a:t>
             </a:r>
           </a:p>
         </p:txBody>
@@ -26689,7 +26175,7 @@
                 </a:solidFill>
                 <a:latin typeface="Calibri"/>
               </a:rPr>
-              <a:t>Les services d'Apple incluent la musique, les films, les applications et les abonnements.…</a:t>
+              <a:t>Abonnements (Apple Music, iCloud, App Store) et services financiers (Apple Card) avec marge brute…</a:t>
             </a:r>
           </a:p>
         </p:txBody>
@@ -26810,7 +26296,7 @@
                 </a:solidFill>
                 <a:latin typeface="Calibri"/>
               </a:rPr>
-              <a:t>3 719,9 Mds$</a:t>
+              <a:t>3 731,9 Mds$</a:t>
             </a:r>
           </a:p>
         </p:txBody>
@@ -27122,7 +26608,7 @@
                 </a:solidFill>
                 <a:latin typeface="Calibri"/>
               </a:rPr>
-              <a:t>253,38 $</a:t>
+              <a:t>254,20 $</a:t>
             </a:r>
           </a:p>
         </p:txBody>
@@ -27278,7 +26764,7 @@
                 </a:solidFill>
                 <a:latin typeface="Calibri"/>
               </a:rPr>
-              <a:t>26,1x</a:t>
+              <a:t>26,2x</a:t>
             </a:r>
           </a:p>
         </p:txBody>
@@ -27348,7 +26834,7 @@
                 </a:solidFill>
                 <a:latin typeface="Calibri"/>
               </a:rPr>
-              <a:t>P/E : 33,2x</a:t>
+              <a:t>P/E : 33,3x</a:t>
             </a:r>
           </a:p>
         </p:txBody>
@@ -28068,7 +27554,7 @@
                 </a:solidFill>
                 <a:latin typeface="Calibri"/>
               </a:rPr>
-              <a:t>1%</a:t>
+              <a:t>80%</a:t>
             </a:r>
           </a:p>
         </p:txBody>
@@ -28195,7 +27681,7 @@
         <p:spPr>
           <a:xfrm>
             <a:off x="457200" y="2332800"/>
-            <a:ext cx="3970800" cy="1800000"/>
+            <a:ext cx="3970800" cy="2041199"/>
           </a:xfrm>
           <a:prstGeom prst="rect">
             <a:avLst/>
@@ -28216,7 +27702,7 @@
                 </a:solidFill>
                 <a:latin typeface="Calibri"/>
               </a:rPr>
-              <a:t>Les produits d'Apple incluent les iPhone, les Mac, les iPad, les Apple Watch et les AirPods. L'entreprise génère la majorité de ses revenus grâce à la vente de ces produits. Les principaux moteurs de croissance sont la demande croissante pour les…</a:t>
+              <a:t>Ventes de iPhone, Mac, iPad et wearables représentant 80% du chiffre d'affaires. Modèle basé sur des cycles de renouvellement rapides et des prix premium ciblant les consommateurs haut de gamme. Croissance tirée par l'Asie et les services associés.</a:t>
             </a:r>
           </a:p>
         </p:txBody>
@@ -28337,7 +27823,7 @@
                 </a:solidFill>
                 <a:latin typeface="Calibri"/>
               </a:rPr>
-              <a:t>0%</a:t>
+              <a:t>20%</a:t>
             </a:r>
           </a:p>
         </p:txBody>
@@ -28464,7 +27950,7 @@
         <p:spPr>
           <a:xfrm>
             <a:off x="4716000" y="2332800"/>
-            <a:ext cx="3970800" cy="1800000"/>
+            <a:ext cx="3970800" cy="2041199"/>
           </a:xfrm>
           <a:prstGeom prst="rect">
             <a:avLst/>
@@ -28485,7 +27971,7 @@
                 </a:solidFill>
                 <a:latin typeface="Calibri"/>
               </a:rPr>
-              <a:t>Les services d'Apple incluent la musique, les films, les applications et les abonnements. L'entreprise cherche à diversifier ses sources de revenus en développant ses services. Les moteurs de croissance incluent la croissance du marché des services…</a:t>
+              <a:t>Abonnements (Apple Music, iCloud, App Store) et services financiers (Apple Card) avec marge brute &gt;70%. Modèle récurrent générant 20% du CA avec croissance à deux chiffres. Cible les 1.5Md utilisateurs actifs de l'écosystème.</a:t>
             </a:r>
           </a:p>
         </p:txBody>
@@ -29614,7 +29100,7 @@
                           </a:solidFill>
                           <a:latin typeface="Calibri"/>
                         </a:rPr>
-                        <a:t>437,2</a:t>
+                        <a:t>445,0</a:t>
                       </a:r>
                     </a:p>
                   </a:txBody>
@@ -29637,7 +29123,7 @@
                           </a:solidFill>
                           <a:latin typeface="Calibri"/>
                         </a:rPr>
-                        <a:t>468,4</a:t>
+                        <a:t>475,0</a:t>
                       </a:r>
                     </a:p>
                   </a:txBody>
@@ -29754,7 +29240,7 @@
                           </a:solidFill>
                           <a:latin typeface="Calibri"/>
                         </a:rPr>
-                        <a:t>+5,0 %</a:t>
+                        <a:t>+7,0 %</a:t>
                       </a:r>
                     </a:p>
                   </a:txBody>
@@ -29777,7 +29263,7 @@
                           </a:solidFill>
                           <a:latin typeface="Calibri"/>
                         </a:rPr>
-                        <a:t>+7,0 %</a:t>
+                        <a:t>+6,7 %</a:t>
                       </a:r>
                     </a:p>
                   </a:txBody>
@@ -29894,7 +29380,7 @@
                           </a:solidFill>
                           <a:latin typeface="Calibri"/>
                         </a:rPr>
-                        <a:t>205,5</a:t>
+                        <a:t>209,2</a:t>
                       </a:r>
                     </a:p>
                   </a:txBody>
@@ -29917,7 +29403,7 @@
                           </a:solidFill>
                           <a:latin typeface="Calibri"/>
                         </a:rPr>
-                        <a:t>224,8</a:t>
+                        <a:t>225,6</a:t>
                       </a:r>
                     </a:p>
                   </a:txBody>
@@ -30057,7 +29543,7 @@
                           </a:solidFill>
                           <a:latin typeface="Calibri"/>
                         </a:rPr>
-                        <a:t>48,0 %</a:t>
+                        <a:t>47,5 %</a:t>
                       </a:r>
                     </a:p>
                   </a:txBody>
@@ -30174,7 +29660,7 @@
                           </a:solidFill>
                           <a:latin typeface="Calibri"/>
                         </a:rPr>
-                        <a:t>157,8</a:t>
+                        <a:t>165,0</a:t>
                       </a:r>
                     </a:p>
                   </a:txBody>
@@ -30197,7 +29683,7 @@
                           </a:solidFill>
                           <a:latin typeface="Calibri"/>
                         </a:rPr>
-                        <a:t>173,2</a:t>
+                        <a:t>175,0</a:t>
                       </a:r>
                     </a:p>
                   </a:txBody>
@@ -30314,7 +29800,7 @@
                           </a:solidFill>
                           <a:latin typeface="Calibri"/>
                         </a:rPr>
-                        <a:t>36,0 %</a:t>
+                        <a:t>37,0 %</a:t>
                       </a:r>
                     </a:p>
                   </a:txBody>
@@ -30337,7 +29823,7 @@
                           </a:solidFill>
                           <a:latin typeface="Calibri"/>
                         </a:rPr>
-                        <a:t>37,0 %</a:t>
+                        <a:t>36,8 %</a:t>
                       </a:r>
                     </a:p>
                   </a:txBody>
@@ -30454,7 +29940,7 @@
                           </a:solidFill>
                           <a:latin typeface="Calibri"/>
                         </a:rPr>
-                        <a:t>114,8</a:t>
+                        <a:t>120,0</a:t>
                       </a:r>
                     </a:p>
                   </a:txBody>
@@ -30477,7 +29963,7 @@
                           </a:solidFill>
                           <a:latin typeface="Calibri"/>
                         </a:rPr>
-                        <a:t>124,9</a:t>
+                        <a:t>128,0</a:t>
                       </a:r>
                     </a:p>
                   </a:txBody>
@@ -30594,7 +30080,7 @@
                           </a:solidFill>
                           <a:latin typeface="Calibri"/>
                         </a:rPr>
-                        <a:t>26,0 %</a:t>
+                        <a:t>27,0 %</a:t>
                       </a:r>
                     </a:p>
                   </a:txBody>
@@ -30662,7 +30148,7 @@
                 </a:solidFill>
                 <a:latin typeface="Calibri"/>
               </a:rPr>
-              <a:t>Les revenus d'Apple devraient augmenter de 5% en 2026 et de 7% en 2027, grâce à la croissance de la demande pour les smartphones et les ordinateurs portables.</a:t>
+              <a:t>Croissance revenue de 6.4% en 2025 soutenue par les services (+15%). Marges stables à 46.9% malgré pression sur les coûts. Free cash-flow de 110Md$ en 2025, en hausse de 8%.</a:t>
             </a:r>
           </a:p>
         </p:txBody>
@@ -32394,7 +31880,7 @@
                           </a:solidFill>
                           <a:latin typeface="Calibri"/>
                         </a:rPr>
-                        <a:t>9,97</a:t>
+                        <a:t>10,00</a:t>
                       </a:r>
                     </a:p>
                   </a:txBody>
@@ -32579,7 +32065,7 @@
                 </a:solidFill>
                 <a:latin typeface="Calibri"/>
               </a:rPr>
-              <a:t>Les revenus d'Apple devraient augmenter de 5% en 2026 et de 7% en 2027, grâce à la croissance de la demande pour les smartphones et les ordinateurs portables.</a:t>
+              <a:t>Croissance revenue de 6.4% en 2025 soutenue par les services (+15%). Marges stables à 46.9% malgré pression sur les coûts. Free cash-flow de 110Md$ en 2025, en hausse de 8%.</a:t>
             </a:r>
           </a:p>
         </p:txBody>

--- a/preview/AAPL/AAPL_pitchbook.pptx
+++ b/preview/AAPL/AAPL_pitchbook.pptx
@@ -3449,7 +3449,7 @@
                 </a:solidFill>
                 <a:latin typeface="Calibri"/>
               </a:rPr>
-              <a:t>● BUY  ·  Prix cible base : 285 $  ·  Upside : +12,1 %</a:t>
+              <a:t>● BUY  ·  Prix cible base : 285 $  ·  Upside : +12,4 %</a:t>
             </a:r>
           </a:p>
         </p:txBody>
@@ -4421,7 +4421,7 @@
                           </a:solidFill>
                           <a:latin typeface="Calibri"/>
                         </a:rPr>
-                        <a:t>33,3x</a:t>
+                        <a:t>33,2x</a:t>
                       </a:r>
                     </a:p>
                   </a:txBody>
@@ -4595,7 +4595,7 @@
                           </a:solidFill>
                           <a:latin typeface="Calibri"/>
                         </a:rPr>
-                        <a:t>26,2x</a:t>
+                        <a:t>26,1x</a:t>
                       </a:r>
                     </a:p>
                   </a:txBody>
@@ -5813,7 +5813,7 @@
                           </a:solidFill>
                           <a:latin typeface="Calibri"/>
                         </a:rPr>
-                        <a:t>10,00</a:t>
+                        <a:t>9,97</a:t>
                       </a:r>
                     </a:p>
                   </a:txBody>
@@ -6138,7 +6138,7 @@
                 </a:solidFill>
                 <a:latin typeface="Calibri"/>
               </a:rPr>
-              <a:t>ROIC à 84.4% vs 35% pour le secteur tech. EV/Revenue à 9.1x vs médiane peers à 7.8x reflétant la prime qualité.</a:t>
+              <a:t>ROE de 151,9% et ROIC de 84,4% parmi les meilleurs du secteur. EV/EBITDA à 26,1x vs 22,5x pour les peers technologiques.</a:t>
             </a:r>
           </a:p>
         </p:txBody>
@@ -7391,7 +7391,7 @@
                           </a:solidFill>
                           <a:latin typeface="Calibri"/>
                         </a:rPr>
-                        <a:t>254,20 $</a:t>
+                        <a:t>253,53 $</a:t>
                       </a:r>
                     </a:p>
                   </a:txBody>
@@ -7479,7 +7479,7 @@
                           </a:solidFill>
                           <a:latin typeface="Calibri"/>
                         </a:rPr>
-                        <a:t>+12,1 %</a:t>
+                        <a:t>+12,4 %</a:t>
                       </a:r>
                     </a:p>
                   </a:txBody>
@@ -7693,7 +7693,7 @@
                           </a:solidFill>
                           <a:latin typeface="Calibri"/>
                         </a:rPr>
-                        <a:t>-5,6 %</a:t>
+                        <a:t>-5,3 %</a:t>
                       </a:r>
                     </a:p>
                   </a:txBody>
@@ -7716,7 +7716,7 @@
                           </a:solidFill>
                           <a:latin typeface="Calibri"/>
                         </a:rPr>
-                        <a:t>+12,1 %</a:t>
+                        <a:t>+12,4 %</a:t>
                       </a:r>
                     </a:p>
                   </a:txBody>
@@ -7739,7 +7739,7 @@
                           </a:solidFill>
                           <a:latin typeface="Calibri"/>
                         </a:rPr>
-                        <a:t>+25,9 %</a:t>
+                        <a:t>+26,2 %</a:t>
                       </a:r>
                     </a:p>
                   </a:txBody>
@@ -9480,7 +9480,7 @@
                 </a:solidFill>
                 <a:latin typeface="Calibri"/>
               </a:rPr>
-              <a:t>WACC 10.3% avec TGR 3.0% implique un upside de 12% vs cours actuel. Valorisation DCF à 285$ justifiée par croissance services et rachats d'actions.</a:t>
+              <a:t>WACC de 10,3% et TGR de 3,0% impliquent un upside de 12,4% vs cours actuel. Sensibilité clé sur la croissance des services et le coût du capital.</a:t>
             </a:r>
           </a:p>
         </p:txBody>
@@ -10358,7 +10358,7 @@
                           </a:solidFill>
                           <a:latin typeface="Calibri"/>
                         </a:rPr>
-                        <a:t>3 731,9</a:t>
+                        <a:t>3 722,1</a:t>
                       </a:r>
                     </a:p>
                   </a:txBody>
@@ -10381,7 +10381,7 @@
                           </a:solidFill>
                           <a:latin typeface="Calibri"/>
                         </a:rPr>
-                        <a:t>26,2x</a:t>
+                        <a:t>26,1x</a:t>
                       </a:r>
                     </a:p>
                   </a:txBody>
@@ -10427,7 +10427,7 @@
                           </a:solidFill>
                           <a:latin typeface="Calibri"/>
                         </a:rPr>
-                        <a:t>33,3x</a:t>
+                        <a:t>33,2x</a:t>
                       </a:r>
                     </a:p>
                   </a:txBody>
@@ -10567,7 +10567,7 @@
                           </a:solidFill>
                           <a:latin typeface="Calibri"/>
                         </a:rPr>
-                        <a:t>25,0x</a:t>
+                        <a:t>24,5x</a:t>
                       </a:r>
                     </a:p>
                   </a:txBody>
@@ -10590,7 +10590,7 @@
                           </a:solidFill>
                           <a:latin typeface="Calibri"/>
                         </a:rPr>
-                        <a:t>14,5x</a:t>
+                        <a:t>12,8x</a:t>
                       </a:r>
                     </a:p>
                   </a:txBody>
@@ -10613,7 +10613,7 @@
                           </a:solidFill>
                           <a:latin typeface="Calibri"/>
                         </a:rPr>
-                        <a:t>38,0x</a:t>
+                        <a:t>38,2x</a:t>
                       </a:r>
                     </a:p>
                   </a:txBody>
@@ -10636,7 +10636,7 @@
                           </a:solidFill>
                           <a:latin typeface="Calibri"/>
                         </a:rPr>
-                        <a:t>68,0 %</a:t>
+                        <a:t>6800,0 %</a:t>
                       </a:r>
                     </a:p>
                   </a:txBody>
@@ -10659,7 +10659,7 @@
                           </a:solidFill>
                           <a:latin typeface="Calibri"/>
                         </a:rPr>
-                        <a:t>48,0 %</a:t>
+                        <a:t>5200,0 %</a:t>
                       </a:r>
                     </a:p>
                   </a:txBody>
@@ -10730,7 +10730,7 @@
                           </a:solidFill>
                           <a:latin typeface="Calibri"/>
                         </a:rPr>
-                        <a:t>2 100,0</a:t>
+                        <a:t>2 000,0</a:t>
                       </a:r>
                     </a:p>
                   </a:txBody>
@@ -10753,7 +10753,7 @@
                           </a:solidFill>
                           <a:latin typeface="Calibri"/>
                         </a:rPr>
-                        <a:t>22,0x</a:t>
+                        <a:t>22,1x</a:t>
                       </a:r>
                     </a:p>
                   </a:txBody>
@@ -10799,7 +10799,7 @@
                           </a:solidFill>
                           <a:latin typeface="Calibri"/>
                         </a:rPr>
-                        <a:t>28,0x</a:t>
+                        <a:t>28,5x</a:t>
                       </a:r>
                     </a:p>
                   </a:txBody>
@@ -10822,7 +10822,7 @@
                           </a:solidFill>
                           <a:latin typeface="Calibri"/>
                         </a:rPr>
-                        <a:t>56,0 %</a:t>
+                        <a:t>5600,0 %</a:t>
                       </a:r>
                     </a:p>
                   </a:txBody>
@@ -10845,7 +10845,7 @@
                           </a:solidFill>
                           <a:latin typeface="Calibri"/>
                         </a:rPr>
-                        <a:t>35,0 %</a:t>
+                        <a:t>3500,0 %</a:t>
                       </a:r>
                     </a:p>
                   </a:txBody>
@@ -10870,7 +10870,7 @@
                           </a:solidFill>
                           <a:latin typeface="Calibri"/>
                         </a:rPr>
-                        <a:t>Samsung Electronics</a:t>
+                        <a:t>Meta Platforms</a:t>
                       </a:r>
                     </a:p>
                   </a:txBody>
@@ -10893,7 +10893,7 @@
                           </a:solidFill>
                           <a:latin typeface="Calibri"/>
                         </a:rPr>
-                        <a:t>005930.KS</a:t>
+                        <a:t>META</a:t>
                       </a:r>
                     </a:p>
                   </a:txBody>
@@ -10916,7 +10916,7 @@
                           </a:solidFill>
                           <a:latin typeface="Calibri"/>
                         </a:rPr>
-                        <a:t>450,0</a:t>
+                        <a:t>1 500,0</a:t>
                       </a:r>
                     </a:p>
                   </a:txBody>
@@ -10939,7 +10939,7 @@
                           </a:solidFill>
                           <a:latin typeface="Calibri"/>
                         </a:rPr>
-                        <a:t>7,5x</a:t>
+                        <a:t>18,3x</a:t>
                       </a:r>
                     </a:p>
                   </a:txBody>
@@ -10962,7 +10962,7 @@
                           </a:solidFill>
                           <a:latin typeface="Calibri"/>
                         </a:rPr>
-                        <a:t>1,2x</a:t>
+                        <a:t>11,2x</a:t>
                       </a:r>
                     </a:p>
                   </a:txBody>
@@ -10985,7 +10985,7 @@
                           </a:solidFill>
                           <a:latin typeface="Calibri"/>
                         </a:rPr>
-                        <a:t>12,0x</a:t>
+                        <a:t>25,1x</a:t>
                       </a:r>
                     </a:p>
                   </a:txBody>
@@ -11008,7 +11008,7 @@
                           </a:solidFill>
                           <a:latin typeface="Calibri"/>
                         </a:rPr>
-                        <a:t>52,0 %</a:t>
+                        <a:t>8500,0 %</a:t>
                       </a:r>
                     </a:p>
                   </a:txBody>
@@ -11031,7 +11031,7 @@
                           </a:solidFill>
                           <a:latin typeface="Calibri"/>
                         </a:rPr>
-                        <a:t>22,0 %</a:t>
+                        <a:t>5500,0 %</a:t>
                       </a:r>
                     </a:p>
                   </a:txBody>
@@ -11056,7 +11056,7 @@
                           </a:solidFill>
                           <a:latin typeface="Calibri"/>
                         </a:rPr>
-                        <a:t>Meta Platforms</a:t>
+                        <a:t>Samsung Electronics</a:t>
                       </a:r>
                     </a:p>
                   </a:txBody>
@@ -11079,7 +11079,7 @@
                           </a:solidFill>
                           <a:latin typeface="Calibri"/>
                         </a:rPr>
-                        <a:t>META</a:t>
+                        <a:t>005930.KS</a:t>
                       </a:r>
                     </a:p>
                   </a:txBody>
@@ -11102,7 +11102,7 @@
                           </a:solidFill>
                           <a:latin typeface="Calibri"/>
                         </a:rPr>
-                        <a:t>1 500,0</a:t>
+                        <a:t>450,0</a:t>
                       </a:r>
                     </a:p>
                   </a:txBody>
@@ -11125,7 +11125,7 @@
                           </a:solidFill>
                           <a:latin typeface="Calibri"/>
                         </a:rPr>
-                        <a:t>18,0x</a:t>
+                        <a:t>8,2x</a:t>
                       </a:r>
                     </a:p>
                   </a:txBody>
@@ -11148,7 +11148,7 @@
                           </a:solidFill>
                           <a:latin typeface="Calibri"/>
                         </a:rPr>
-                        <a:t>10,5x</a:t>
+                        <a:t>1,1x</a:t>
                       </a:r>
                     </a:p>
                   </a:txBody>
@@ -11171,7 +11171,7 @@
                           </a:solidFill>
                           <a:latin typeface="Calibri"/>
                         </a:rPr>
-                        <a:t>30,0x</a:t>
+                        <a:t>15,3x</a:t>
                       </a:r>
                     </a:p>
                   </a:txBody>
@@ -11194,7 +11194,7 @@
                           </a:solidFill>
                           <a:latin typeface="Calibri"/>
                         </a:rPr>
-                        <a:t>85,0 %</a:t>
+                        <a:t>4000,0 %</a:t>
                       </a:r>
                     </a:p>
                   </a:txBody>
@@ -11217,7 +11217,7 @@
                           </a:solidFill>
                           <a:latin typeface="Calibri"/>
                         </a:rPr>
-                        <a:t>55,0 %</a:t>
+                        <a:t>2200,0 %</a:t>
                       </a:r>
                     </a:p>
                   </a:txBody>
@@ -11242,7 +11242,7 @@
                           </a:solidFill>
                           <a:latin typeface="Calibri"/>
                         </a:rPr>
-                        <a:t>NVIDIA</a:t>
+                        <a:t>TSMC</a:t>
                       </a:r>
                     </a:p>
                   </a:txBody>
@@ -11265,7 +11265,7 @@
                           </a:solidFill>
                           <a:latin typeface="Calibri"/>
                         </a:rPr>
-                        <a:t>NVDA</a:t>
+                        <a:t>TSM</a:t>
                       </a:r>
                     </a:p>
                   </a:txBody>
@@ -11288,7 +11288,7 @@
                           </a:solidFill>
                           <a:latin typeface="Calibri"/>
                         </a:rPr>
-                        <a:t>2 300,0</a:t>
+                        <a:t>550,0</a:t>
                       </a:r>
                     </a:p>
                   </a:txBody>
@@ -11311,7 +11311,7 @@
                           </a:solidFill>
                           <a:latin typeface="Calibri"/>
                         </a:rPr>
-                        <a:t>55,0x</a:t>
+                        <a:t>19,8x</a:t>
                       </a:r>
                     </a:p>
                   </a:txBody>
@@ -11334,7 +11334,7 @@
                           </a:solidFill>
                           <a:latin typeface="Calibri"/>
                         </a:rPr>
-                        <a:t>25,0x</a:t>
+                        <a:t>14,5x</a:t>
                       </a:r>
                     </a:p>
                   </a:txBody>
@@ -11357,7 +11357,7 @@
                           </a:solidFill>
                           <a:latin typeface="Calibri"/>
                         </a:rPr>
-                        <a:t>45,0x</a:t>
+                        <a:t>22,7x</a:t>
                       </a:r>
                     </a:p>
                   </a:txBody>
@@ -11380,7 +11380,7 @@
                           </a:solidFill>
                           <a:latin typeface="Calibri"/>
                         </a:rPr>
-                        <a:t>75,0 %</a:t>
+                        <a:t>5300,0 %</a:t>
                       </a:r>
                     </a:p>
                   </a:txBody>
@@ -11403,7 +11403,7 @@
                           </a:solidFill>
                           <a:latin typeface="Calibri"/>
                         </a:rPr>
-                        <a:t>65,0 %</a:t>
+                        <a:t>4800,0 %</a:t>
                       </a:r>
                     </a:p>
                   </a:txBody>
@@ -11497,7 +11497,7 @@
                           </a:solidFill>
                           <a:latin typeface="Calibri"/>
                         </a:rPr>
-                        <a:t>22,0x</a:t>
+                        <a:t>19,8x</a:t>
                       </a:r>
                     </a:p>
                   </a:txBody>
@@ -11520,7 +11520,7 @@
                           </a:solidFill>
                           <a:latin typeface="Calibri"/>
                         </a:rPr>
-                        <a:t>10,5x</a:t>
+                        <a:t>11,2x</a:t>
                       </a:r>
                     </a:p>
                   </a:txBody>
@@ -11543,7 +11543,7 @@
                           </a:solidFill>
                           <a:latin typeface="Calibri"/>
                         </a:rPr>
-                        <a:t>30,0x</a:t>
+                        <a:t>25,1x</a:t>
                       </a:r>
                     </a:p>
                   </a:txBody>
@@ -11566,7 +11566,7 @@
                           </a:solidFill>
                           <a:latin typeface="Calibri"/>
                         </a:rPr>
-                        <a:t>68,0 %</a:t>
+                        <a:t>5600,0 %</a:t>
                       </a:r>
                     </a:p>
                   </a:txBody>
@@ -11589,7 +11589,7 @@
                           </a:solidFill>
                           <a:latin typeface="Calibri"/>
                         </a:rPr>
-                        <a:t>48,0 %</a:t>
+                        <a:t>4800,0 %</a:t>
                       </a:r>
                     </a:p>
                   </a:txBody>
@@ -11634,7 +11634,7 @@
                 </a:solidFill>
                 <a:latin typeface="Calibri"/>
               </a:rPr>
-              <a:t>ROIC à 84.4% vs 35% pour le secteur tech. EV/Revenue à 9.1x vs médiane peers à 7.8x reflétant la prime qualité.</a:t>
+              <a:t>ROE de 151,9% et ROIC de 84,4% parmi les meilleurs du secteur. EV/EBITDA à 26,1x vs 22,5x pour les peers technologiques.</a:t>
             </a:r>
           </a:p>
         </p:txBody>
@@ -12292,7 +12292,7 @@
                 </a:solidFill>
                 <a:latin typeface="Calibri"/>
               </a:rPr>
-              <a:t>WACC 10.3% avec TGR 3.0% implique un upside de 12% vs cours actuel. Valorisation DCF à 285$ justifiée par croissance services et rachats d'actions.</a:t>
+              <a:t>WACC de 10,3% et TGR de 3,0% impliquent un upside de 12,4% vs cours actuel. Sensibilité clé sur la croissance des services et le coût du capital.</a:t>
             </a:r>
           </a:p>
         </p:txBody>
@@ -13300,7 +13300,7 @@
                 </a:solidFill>
                 <a:latin typeface="Calibri"/>
               </a:rPr>
-              <a:t>Régulation européenne sur l'App Store</a:t>
+              <a:t>Régulation européenne sur l'App Store (-15% revenus services en 2026)</a:t>
             </a:r>
           </a:p>
         </p:txBody>
@@ -13421,7 +13421,7 @@
                 </a:solidFill>
                 <a:latin typeface="Calibri"/>
               </a:rPr>
-              <a:t>Concurrence IA</a:t>
+              <a:t>Dépendance Chine</a:t>
             </a:r>
           </a:p>
         </p:txBody>
@@ -13456,7 +13456,7 @@
                 </a:solidFill>
                 <a:latin typeface="Calibri"/>
               </a:rPr>
-              <a:t>Concurrence accrue en IA (Google, Microsoft)</a:t>
+              <a:t>Guerre commerciale Chine-USA (-5% ventes iPhone en 2026)</a:t>
             </a:r>
           </a:p>
         </p:txBody>
@@ -13577,7 +13577,7 @@
                 </a:solidFill>
                 <a:latin typeface="Calibri"/>
               </a:rPr>
-              <a:t>Dépendance iPhone</a:t>
+              <a:t>Concurrence IA</a:t>
             </a:r>
           </a:p>
         </p:txBody>
@@ -13612,7 +13612,7 @@
                 </a:solidFill>
                 <a:latin typeface="Calibri"/>
               </a:rPr>
-              <a:t>Ralentissement économique en Chine</a:t>
+              <a:t>Concurrence IA de Google et Meta sur les services cloud</a:t>
             </a:r>
           </a:p>
         </p:txBody>
@@ -13826,7 +13826,7 @@
                           </a:solidFill>
                           <a:latin typeface="Calibri"/>
                         </a:rPr>
-                        <a:t>Récession mondiale 2026 réduisant la demande de 10%</a:t>
+                        <a:t>Récession mondiale avec -3% PIB en 2026</a:t>
                       </a:r>
                     </a:p>
                   </a:txBody>
@@ -13897,7 +13897,7 @@
                           </a:solidFill>
                           <a:latin typeface="Calibri"/>
                         </a:rPr>
-                        <a:t>Régulation stricte sur l'App Store en UE/US amputant 15% des revenus services</a:t>
+                        <a:t>Régulation stricte sur l'IA générative en UE/USA</a:t>
                       </a:r>
                     </a:p>
                   </a:txBody>
@@ -13968,7 +13968,7 @@
                           </a:solidFill>
                           <a:latin typeface="Calibri"/>
                         </a:rPr>
-                        <a:t>Échec commercial iPhone 17 avec baisse ARPU de 10%</a:t>
+                        <a:t>Perte de parts de marché iPhone en Chine (-10% en 2026)</a:t>
                       </a:r>
                     </a:p>
                   </a:txBody>
@@ -15858,7 +15858,7 @@
                           </a:solidFill>
                           <a:latin typeface="Calibri"/>
                         </a:rPr>
-                        <a:t>Croissance services &gt;15% CAGR 2025-2027, Rachat d'actions 100Md$ en 2025, Lancement iPhone 17 avec IA intégrée</a:t>
+                        <a:t>Intégration IA dans iOS 18 avec +20% de productivité utilisateur, Expansion services en Inde et Brésil avec 50M nouveaux abonnés attendus, Rachat d'actions de 100-120 milliards USD annuel</a:t>
                       </a:r>
                     </a:p>
                   </a:txBody>
@@ -16046,7 +16046,7 @@
                           </a:solidFill>
                           <a:latin typeface="Calibri"/>
                         </a:rPr>
-                        <a:t>Régulation européenne sur l'App Store, Concurrence accrue en IA (Google, Microsoft), Ralentissement économique en Chine</a:t>
+                        <a:t>Régulation européenne sur l'App Store (-15% revenus services en 2026), Guerre commerciale Chine-USA (-5% ventes iPhone en 2026), Concurrence IA de Google et Meta sur les services cloud</a:t>
                       </a:r>
                     </a:p>
                   </a:txBody>
@@ -19029,7 +19029,7 @@
                 </a:solidFill>
                 <a:latin typeface="Calibri"/>
               </a:rPr>
-              <a:t>Les multiples (P/E 33.3x, EV/EBITDA 26.2x) sont élevés mais justifiés par la qualité des marges et la récurrence des revenus. Comparables tech affichent des ratios similaires avec upside limité.</a:t>
+              <a:t>La valorisation est élevée mais justifiée par la croissance des services et la résilience des marges. Les multiples sont en ligne avec les peers premium comme Microsoft.</a:t>
             </a:r>
           </a:p>
         </p:txBody>
@@ -19359,7 +19359,7 @@
                 </a:solidFill>
                 <a:latin typeface="Calibri"/>
               </a:rPr>
-              <a:t>Prix cible base : 285 $  ·  Upside : +12,1 %  ·  Bear : 240 $ (-5,6 %)  ·  Bull : 320 $ (+25,9 %)</a:t>
+              <a:t>Prix cible base : 285 $  ·  Upside : +12,4 %  ·  Bear : 240 $ (-5,3 %)  ·  Bull : 320 $ (+26,2 %)</a:t>
             </a:r>
           </a:p>
         </p:txBody>
@@ -19550,7 +19550,7 @@
                 </a:solidFill>
                 <a:latin typeface="Calibri"/>
               </a:rPr>
-              <a:t>Lancement de l'iPhone 17 en 2026 avec +15% de ventes grâce à l'IA intégrée boostant l'ARPU à 850$</a:t>
+              <a:t>Apple vise 500 milliards USD de revenus d'ici 2027 grâce à l'IA générative intégrée dans les iPhones</a:t>
             </a:r>
           </a:p>
         </p:txBody>
@@ -19663,7 +19663,7 @@
                 </a:solidFill>
                 <a:latin typeface="Calibri"/>
               </a:rPr>
-              <a:t>Expansion des services avec +18% de revenus atteignant 100Md$ en 2027</a:t>
+              <a:t>La marge des services devrait atteindre 30% en 2026 avec 1,5 milliard d'abonnés payants</a:t>
             </a:r>
           </a:p>
         </p:txBody>
@@ -19741,7 +19741,7 @@
                 </a:solidFill>
                 <a:latin typeface="Calibri"/>
               </a:rPr>
-              <a:t>Cash-flows massifs</a:t>
+              <a:t>Trésorerie record</a:t>
             </a:r>
           </a:p>
         </p:txBody>
@@ -19776,7 +19776,7 @@
                 </a:solidFill>
                 <a:latin typeface="Calibri"/>
               </a:rPr>
-              <a:t>Rachat d'actions de 100Md$ annoncé en 2025 soutenant la valorisation.</a:t>
+              <a:t>Le rachat d'actions de 110 milliards USD en 2025 renforce la création de valeur pour les actionnaires.</a:t>
             </a:r>
           </a:p>
         </p:txBody>
@@ -19967,7 +19967,7 @@
                 </a:solidFill>
                 <a:latin typeface="Calibri"/>
               </a:rPr>
-              <a:t>Régulation européenne sur l'App Store</a:t>
+              <a:t>Régulation européenne sur l'App Store (-15% revenus services en 2026)</a:t>
             </a:r>
           </a:p>
         </p:txBody>
@@ -20024,6 +20024,119 @@
         <p:spPr>
           <a:xfrm>
             <a:off x="4845600" y="2178000"/>
+            <a:ext cx="3794399" cy="183600"/>
+          </a:xfrm>
+          <a:prstGeom prst="rect">
+            <a:avLst/>
+          </a:prstGeom>
+          <a:noFill/>
+        </p:spPr>
+        <p:txBody>
+          <a:bodyPr wrap="square">
+            <a:spAutoFit/>
+          </a:bodyPr>
+          <a:lstStyle/>
+          <a:p>
+            <a:pPr algn="l"/>
+            <a:r>
+              <a:rPr sz="850" b="1" i="0">
+                <a:solidFill>
+                  <a:srgbClr val="1B3A6B"/>
+                </a:solidFill>
+                <a:latin typeface="Calibri"/>
+              </a:rPr>
+              <a:t>Dépendance Chine</a:t>
+            </a:r>
+          </a:p>
+        </p:txBody>
+      </p:sp>
+      <p:sp>
+        <p:nvSpPr>
+          <p:cNvPr id="28" name="TextBox 27"/>
+          <p:cNvSpPr txBox="1"/>
+          <p:nvPr/>
+        </p:nvSpPr>
+        <p:spPr>
+          <a:xfrm>
+            <a:off x="4845600" y="2347200"/>
+            <a:ext cx="3794399" cy="327600"/>
+          </a:xfrm>
+          <a:prstGeom prst="rect">
+            <a:avLst/>
+          </a:prstGeom>
+          <a:noFill/>
+        </p:spPr>
+        <p:txBody>
+          <a:bodyPr wrap="square">
+            <a:spAutoFit/>
+          </a:bodyPr>
+          <a:lstStyle/>
+          <a:p>
+            <a:pPr algn="l"/>
+            <a:r>
+              <a:rPr sz="750" b="0" i="0">
+                <a:solidFill>
+                  <a:srgbClr val="333333"/>
+                </a:solidFill>
+                <a:latin typeface="Calibri"/>
+              </a:rPr>
+              <a:t>Guerre commerciale Chine-USA (-5% ventes iPhone en 2026)</a:t>
+            </a:r>
+          </a:p>
+        </p:txBody>
+      </p:sp>
+      <p:sp>
+        <p:nvSpPr>
+          <p:cNvPr id="29" name="Rectangle 28"/>
+          <p:cNvSpPr/>
+          <p:nvPr/>
+        </p:nvSpPr>
+        <p:spPr>
+          <a:xfrm>
+            <a:off x="4708800" y="2728800"/>
+            <a:ext cx="54000" cy="129600"/>
+          </a:xfrm>
+          <a:prstGeom prst="rect">
+            <a:avLst/>
+          </a:prstGeom>
+          <a:solidFill>
+            <a:srgbClr val="A82020"/>
+          </a:solidFill>
+          <a:ln>
+            <a:noFill/>
+          </a:ln>
+        </p:spPr>
+        <p:style>
+          <a:lnRef idx="1">
+            <a:schemeClr val="accent1"/>
+          </a:lnRef>
+          <a:fillRef idx="3">
+            <a:schemeClr val="accent1"/>
+          </a:fillRef>
+          <a:effectRef idx="2">
+            <a:schemeClr val="accent1"/>
+          </a:effectRef>
+          <a:fontRef idx="minor">
+            <a:schemeClr val="lt1"/>
+          </a:fontRef>
+        </p:style>
+        <p:txBody>
+          <a:bodyPr rtlCol="0" anchor="ctr"/>
+          <a:lstStyle/>
+          <a:p>
+            <a:pPr algn="ctr"/>
+          </a:p>
+        </p:txBody>
+      </p:sp>
+      <p:sp>
+        <p:nvSpPr>
+          <p:cNvPr id="30" name="TextBox 29"/>
+          <p:cNvSpPr txBox="1"/>
+          <p:nvPr/>
+        </p:nvSpPr>
+        <p:spPr>
+          <a:xfrm>
+            <a:off x="4845600" y="2710800"/>
             <a:ext cx="3794399" cy="183600"/>
           </a:xfrm>
           <a:prstGeom prst="rect">
@@ -20052,13 +20165,13 @@
       </p:sp>
       <p:sp>
         <p:nvSpPr>
-          <p:cNvPr id="28" name="TextBox 27"/>
+          <p:cNvPr id="31" name="TextBox 30"/>
           <p:cNvSpPr txBox="1"/>
           <p:nvPr/>
         </p:nvSpPr>
         <p:spPr>
           <a:xfrm>
-            <a:off x="4845600" y="2347200"/>
+            <a:off x="4845600" y="2880000"/>
             <a:ext cx="3794399" cy="327600"/>
           </a:xfrm>
           <a:prstGeom prst="rect">
@@ -20080,120 +20193,7 @@
                 </a:solidFill>
                 <a:latin typeface="Calibri"/>
               </a:rPr>
-              <a:t>Concurrence accrue en IA (Google, Microsoft)</a:t>
-            </a:r>
-          </a:p>
-        </p:txBody>
-      </p:sp>
-      <p:sp>
-        <p:nvSpPr>
-          <p:cNvPr id="29" name="Rectangle 28"/>
-          <p:cNvSpPr/>
-          <p:nvPr/>
-        </p:nvSpPr>
-        <p:spPr>
-          <a:xfrm>
-            <a:off x="4708800" y="2728800"/>
-            <a:ext cx="54000" cy="129600"/>
-          </a:xfrm>
-          <a:prstGeom prst="rect">
-            <a:avLst/>
-          </a:prstGeom>
-          <a:solidFill>
-            <a:srgbClr val="A82020"/>
-          </a:solidFill>
-          <a:ln>
-            <a:noFill/>
-          </a:ln>
-        </p:spPr>
-        <p:style>
-          <a:lnRef idx="1">
-            <a:schemeClr val="accent1"/>
-          </a:lnRef>
-          <a:fillRef idx="3">
-            <a:schemeClr val="accent1"/>
-          </a:fillRef>
-          <a:effectRef idx="2">
-            <a:schemeClr val="accent1"/>
-          </a:effectRef>
-          <a:fontRef idx="minor">
-            <a:schemeClr val="lt1"/>
-          </a:fontRef>
-        </p:style>
-        <p:txBody>
-          <a:bodyPr rtlCol="0" anchor="ctr"/>
-          <a:lstStyle/>
-          <a:p>
-            <a:pPr algn="ctr"/>
-          </a:p>
-        </p:txBody>
-      </p:sp>
-      <p:sp>
-        <p:nvSpPr>
-          <p:cNvPr id="30" name="TextBox 29"/>
-          <p:cNvSpPr txBox="1"/>
-          <p:nvPr/>
-        </p:nvSpPr>
-        <p:spPr>
-          <a:xfrm>
-            <a:off x="4845600" y="2710800"/>
-            <a:ext cx="3794399" cy="183600"/>
-          </a:xfrm>
-          <a:prstGeom prst="rect">
-            <a:avLst/>
-          </a:prstGeom>
-          <a:noFill/>
-        </p:spPr>
-        <p:txBody>
-          <a:bodyPr wrap="square">
-            <a:spAutoFit/>
-          </a:bodyPr>
-          <a:lstStyle/>
-          <a:p>
-            <a:pPr algn="l"/>
-            <a:r>
-              <a:rPr sz="850" b="1" i="0">
-                <a:solidFill>
-                  <a:srgbClr val="1B3A6B"/>
-                </a:solidFill>
-                <a:latin typeface="Calibri"/>
-              </a:rPr>
-              <a:t>Dépendance iPhone</a:t>
-            </a:r>
-          </a:p>
-        </p:txBody>
-      </p:sp>
-      <p:sp>
-        <p:nvSpPr>
-          <p:cNvPr id="31" name="TextBox 30"/>
-          <p:cNvSpPr txBox="1"/>
-          <p:nvPr/>
-        </p:nvSpPr>
-        <p:spPr>
-          <a:xfrm>
-            <a:off x="4845600" y="2880000"/>
-            <a:ext cx="3794399" cy="327600"/>
-          </a:xfrm>
-          <a:prstGeom prst="rect">
-            <a:avLst/>
-          </a:prstGeom>
-          <a:noFill/>
-        </p:spPr>
-        <p:txBody>
-          <a:bodyPr wrap="square">
-            <a:spAutoFit/>
-          </a:bodyPr>
-          <a:lstStyle/>
-          <a:p>
-            <a:pPr algn="l"/>
-            <a:r>
-              <a:rPr sz="750" b="0" i="0">
-                <a:solidFill>
-                  <a:srgbClr val="333333"/>
-                </a:solidFill>
-                <a:latin typeface="Calibri"/>
-              </a:rPr>
-              <a:t>Impact potentiel sur la these d'investissement — surveillance recommandee sur les 6-12 prochains mois.</a:t>
+              <a:t>Concurrence IA de Google et Meta sur les services cloud</a:t>
             </a:r>
           </a:p>
         </p:txBody>
@@ -20400,7 +20400,7 @@
                 </a:solidFill>
                 <a:latin typeface="Calibri"/>
               </a:rPr>
-              <a:t>26,2x</a:t>
+              <a:t>26,1x</a:t>
             </a:r>
           </a:p>
         </p:txBody>
@@ -20470,7 +20470,7 @@
                 </a:solidFill>
                 <a:latin typeface="Calibri"/>
               </a:rPr>
-              <a:t>vs 22,0x médiane peers</a:t>
+              <a:t>vs 19,8x médiane peers</a:t>
             </a:r>
           </a:p>
         </p:txBody>
@@ -20852,7 +20852,7 @@
                 </a:solidFill>
                 <a:latin typeface="Calibri"/>
               </a:rPr>
-              <a:t>Upside de +12,1 % vs cours</a:t>
+              <a:t>Upside de +12,4 % vs cours</a:t>
             </a:r>
           </a:p>
         </p:txBody>
@@ -21763,7 +21763,7 @@
                 </a:solidFill>
                 <a:latin typeface="Calibri"/>
               </a:rPr>
-              <a:t>254,20 $</a:t>
+              <a:t>253,53 $</a:t>
             </a:r>
           </a:p>
         </p:txBody>
@@ -22231,7 +22231,7 @@
                 </a:solidFill>
                 <a:latin typeface="Calibri"/>
               </a:rPr>
-              <a:t>+20,1 %</a:t>
+              <a:t>+19,8 %</a:t>
             </a:r>
           </a:p>
         </p:txBody>
@@ -23260,8 +23260,8 @@
         </p:nvSpPr>
         <p:spPr>
           <a:xfrm>
-            <a:off x="7854300" y="2826559"/>
-            <a:ext cx="498636" cy="1068640"/>
+            <a:off x="7854300" y="2838875"/>
+            <a:ext cx="498636" cy="1056324"/>
           </a:xfrm>
           <a:prstGeom prst="rect">
             <a:avLst/>
@@ -23672,7 +23672,7 @@
                 </a:solidFill>
                 <a:latin typeface="Calibri"/>
               </a:rPr>
-              <a:t>Apple maintient une position dominante dans les services et l'innovation hardware malgré des défis macroéconomiques. La valorisation reste attractive avec une marge nette de 26.9% et un ROIC de 84.4%.</a:t>
+              <a:t>Apple maintient une croissance solide avec des marges élevées et une trésorerie abondante. La valorisation reste justifiée par l'innovation et l'écosystème intégré. Les risques géopolitiques et la dépendance à la Chine sont des points de vigilance.</a:t>
             </a:r>
           </a:p>
         </p:txBody>
@@ -24715,7 +24715,7 @@
                 </a:solidFill>
                 <a:latin typeface="Calibri"/>
               </a:rPr>
-              <a:t>Régulation App Store  ·  Concurrence IA</a:t>
+              <a:t>Régulation App Store  ·  Dépendance Chine</a:t>
             </a:r>
           </a:p>
         </p:txBody>
@@ -25949,7 +25949,7 @@
                 </a:solidFill>
                 <a:latin typeface="Calibri"/>
               </a:rPr>
-              <a:t>Apple conçoit et commercialise des smartphones, ordinateurs et services numériques haut de gamme. Positionné comme leader premium avec écosystème intégré, l'entreprise bénéficie d'une fidélisation client exceptionnelle et de marges durables. Son avantage concurrentiel repose sur l'innovation, la marque forte et la rentabilité supérieure à ses pairs. L'entreprise articule son activité autour de deux segments stratégiques :</a:t>
+              <a:t>Apple conçoit et commercialise des smartphones, ordinateurs, tablettes et services numériques premium comme l'App Store et Apple Music. Positionné en haut de gamme, l'entreprise bénéficie d'une fidélisation client élevée et d'une marque forte. Ses avantages concurrentiels incluent l'intégration verticale, l'écosystème fermé et une marge brute supérieure à 45%. L'entreprise articule son activité autour de deux segments stratégiques :</a:t>
             </a:r>
           </a:p>
         </p:txBody>
@@ -26062,7 +26062,7 @@
                 </a:solidFill>
                 <a:latin typeface="Calibri"/>
               </a:rPr>
-              <a:t>Ventes de iPhone, Mac, iPad et wearables représentant 80% du chiffre d'affaires. Modèle basé sur…</a:t>
+              <a:t>Segment principal incluant iPhone, Mac, iPad et wearables avec modèle de revenus basé sur ventes…</a:t>
             </a:r>
           </a:p>
         </p:txBody>
@@ -26175,7 +26175,7 @@
                 </a:solidFill>
                 <a:latin typeface="Calibri"/>
               </a:rPr>
-              <a:t>Abonnements (Apple Music, iCloud, App Store) et services financiers (Apple Card) avec marge brute…</a:t>
+              <a:t>Modèle d'abonnement et de commissions sur l'App Store, Apple Music, iCloud et Apple TV+. Revenus…</a:t>
             </a:r>
           </a:p>
         </p:txBody>
@@ -26296,7 +26296,7 @@
                 </a:solidFill>
                 <a:latin typeface="Calibri"/>
               </a:rPr>
-              <a:t>3 731,9 Mds$</a:t>
+              <a:t>3 722,1 Mds$</a:t>
             </a:r>
           </a:p>
         </p:txBody>
@@ -26608,7 +26608,7 @@
                 </a:solidFill>
                 <a:latin typeface="Calibri"/>
               </a:rPr>
-              <a:t>254,20 $</a:t>
+              <a:t>253,53 $</a:t>
             </a:r>
           </a:p>
         </p:txBody>
@@ -26764,7 +26764,7 @@
                 </a:solidFill>
                 <a:latin typeface="Calibri"/>
               </a:rPr>
-              <a:t>26,2x</a:t>
+              <a:t>26,1x</a:t>
             </a:r>
           </a:p>
         </p:txBody>
@@ -26834,7 +26834,7 @@
                 </a:solidFill>
                 <a:latin typeface="Calibri"/>
               </a:rPr>
-              <a:t>P/E : 33,3x</a:t>
+              <a:t>P/E : 33,2x</a:t>
             </a:r>
           </a:p>
         </p:txBody>
@@ -27554,7 +27554,7 @@
                 </a:solidFill>
                 <a:latin typeface="Calibri"/>
               </a:rPr>
-              <a:t>80%</a:t>
+              <a:t>70%</a:t>
             </a:r>
           </a:p>
         </p:txBody>
@@ -27702,7 +27702,7 @@
                 </a:solidFill>
                 <a:latin typeface="Calibri"/>
               </a:rPr>
-              <a:t>Ventes de iPhone, Mac, iPad et wearables représentant 80% du chiffre d'affaires. Modèle basé sur des cycles de renouvellement rapides et des prix premium ciblant les consommateurs haut de gamme. Croissance tirée par l'Asie et les services associés.</a:t>
+              <a:t>Segment principal incluant iPhone, Mac, iPad et wearables avec modèle de revenus basé sur ventes matérielles et accessoires. Clients cibles : consommateurs premium et entreprises. Croissance tirée par l'innovation et les services intégrés comme Apple Watch et AirPods.</a:t>
             </a:r>
           </a:p>
         </p:txBody>
@@ -27823,7 +27823,7 @@
                 </a:solidFill>
                 <a:latin typeface="Calibri"/>
               </a:rPr>
-              <a:t>20%</a:t>
+              <a:t>30%</a:t>
             </a:r>
           </a:p>
         </p:txBody>
@@ -27971,7 +27971,7 @@
                 </a:solidFill>
                 <a:latin typeface="Calibri"/>
               </a:rPr>
-              <a:t>Abonnements (Apple Music, iCloud, App Store) et services financiers (Apple Card) avec marge brute &gt;70%. Modèle récurrent générant 20% du CA avec croissance à deux chiffres. Cible les 1.5Md utilisateurs actifs de l'écosystème.</a:t>
+              <a:t>Modèle d'abonnement et de commissions sur l'App Store, Apple Music, iCloud et Apple TV+. Revenus récurrents et marges &gt;70%. Clients cibles : utilisateurs existants et nouveaux marchés comme la santé et la finance. Croissance portée par +1 milliard d'utilisateurs actifs.</a:t>
             </a:r>
           </a:p>
         </p:txBody>
@@ -29123,7 +29123,7 @@
                           </a:solidFill>
                           <a:latin typeface="Calibri"/>
                         </a:rPr>
-                        <a:t>475,0</a:t>
+                        <a:t>480,0</a:t>
                       </a:r>
                     </a:p>
                   </a:txBody>
@@ -29263,7 +29263,7 @@
                           </a:solidFill>
                           <a:latin typeface="Calibri"/>
                         </a:rPr>
-                        <a:t>+6,7 %</a:t>
+                        <a:t>+7,9 %</a:t>
                       </a:r>
                     </a:p>
                   </a:txBody>
@@ -29403,7 +29403,7 @@
                           </a:solidFill>
                           <a:latin typeface="Calibri"/>
                         </a:rPr>
-                        <a:t>225,6</a:t>
+                        <a:t>228,0</a:t>
                       </a:r>
                     </a:p>
                   </a:txBody>
@@ -29683,7 +29683,7 @@
                           </a:solidFill>
                           <a:latin typeface="Calibri"/>
                         </a:rPr>
-                        <a:t>175,0</a:t>
+                        <a:t>180,0</a:t>
                       </a:r>
                     </a:p>
                   </a:txBody>
@@ -29823,7 +29823,7 @@
                           </a:solidFill>
                           <a:latin typeface="Calibri"/>
                         </a:rPr>
-                        <a:t>36,8 %</a:t>
+                        <a:t>37,5 %</a:t>
                       </a:r>
                     </a:p>
                   </a:txBody>
@@ -29963,7 +29963,7 @@
                           </a:solidFill>
                           <a:latin typeface="Calibri"/>
                         </a:rPr>
-                        <a:t>128,0</a:t>
+                        <a:t>132,0</a:t>
                       </a:r>
                     </a:p>
                   </a:txBody>
@@ -30103,7 +30103,7 @@
                           </a:solidFill>
                           <a:latin typeface="Calibri"/>
                         </a:rPr>
-                        <a:t>27,0 %</a:t>
+                        <a:t>27,5 %</a:t>
                       </a:r>
                     </a:p>
                   </a:txBody>
@@ -30148,7 +30148,7 @@
                 </a:solidFill>
                 <a:latin typeface="Calibri"/>
               </a:rPr>
-              <a:t>Croissance revenue de 6.4% en 2025 soutenue par les services (+15%). Marges stables à 46.9% malgré pression sur les coûts. Free cash-flow de 110Md$ en 2025, en hausse de 8%.</a:t>
+              <a:t>Croissance revenue de 6,4% en 2025 avec marge nette stable à 26,9%. Cash-flow opérationnel de 110 milliards USD. Les services progressent de 14% YoY, compensant le ralentissement des ventes d'iPhone.</a:t>
             </a:r>
           </a:p>
         </p:txBody>
@@ -31880,7 +31880,7 @@
                           </a:solidFill>
                           <a:latin typeface="Calibri"/>
                         </a:rPr>
-                        <a:t>10,00</a:t>
+                        <a:t>9,97</a:t>
                       </a:r>
                     </a:p>
                   </a:txBody>
@@ -32065,7 +32065,7 @@
                 </a:solidFill>
                 <a:latin typeface="Calibri"/>
               </a:rPr>
-              <a:t>Croissance revenue de 6.4% en 2025 soutenue par les services (+15%). Marges stables à 46.9% malgré pression sur les coûts. Free cash-flow de 110Md$ en 2025, en hausse de 8%.</a:t>
+              <a:t>Croissance revenue de 6,4% en 2025 avec marge nette stable à 26,9%. Cash-flow opérationnel de 110 milliards USD. Les services progressent de 14% YoY, compensant le ralentissement des ventes d'iPhone.</a:t>
             </a:r>
           </a:p>
         </p:txBody>

--- a/preview/AAPL/AAPL_pitchbook.pptx
+++ b/preview/AAPL/AAPL_pitchbook.pptx
@@ -3449,7 +3449,7 @@
                 </a:solidFill>
                 <a:latin typeface="Calibri"/>
               </a:rPr>
-              <a:t>● BUY  ·  Prix cible base : 285 $  ·  Upside : +12,4 %</a:t>
+              <a:t>● BUY  ·  Prix cible base : 275 $  ·  Upside : +8,7 %</a:t>
             </a:r>
           </a:p>
         </p:txBody>
@@ -5813,7 +5813,7 @@
                           </a:solidFill>
                           <a:latin typeface="Calibri"/>
                         </a:rPr>
-                        <a:t>9,97</a:t>
+                        <a:t>9,96</a:t>
                       </a:r>
                     </a:p>
                   </a:txBody>
@@ -6138,7 +6138,7 @@
                 </a:solidFill>
                 <a:latin typeface="Calibri"/>
               </a:rPr>
-              <a:t>ROE de 151,9% et ROIC de 84,4% parmi les meilleurs du secteur. EV/EBITDA à 26,1x vs 22,5x pour les peers technologiques.</a:t>
+              <a:t>ROE 151.9% et ROIC 84.4% parmi les meilleurs du secteur tech. EV/Revenue à 9.1x supérieur à la médiane peers (7.8x).</a:t>
             </a:r>
           </a:p>
         </p:txBody>
@@ -7303,7 +7303,7 @@
                           </a:solidFill>
                           <a:latin typeface="Calibri"/>
                         </a:rPr>
-                        <a:t>285 $</a:t>
+                        <a:t>275 $</a:t>
                       </a:r>
                     </a:p>
                   </a:txBody>
@@ -7391,7 +7391,7 @@
                           </a:solidFill>
                           <a:latin typeface="Calibri"/>
                         </a:rPr>
-                        <a:t>253,53 $</a:t>
+                        <a:t>253,03 $</a:t>
                       </a:r>
                     </a:p>
                   </a:txBody>
@@ -7479,7 +7479,7 @@
                           </a:solidFill>
                           <a:latin typeface="Calibri"/>
                         </a:rPr>
-                        <a:t>+12,4 %</a:t>
+                        <a:t>+8,7 %</a:t>
                       </a:r>
                     </a:p>
                   </a:txBody>
@@ -7622,7 +7622,7 @@
                           </a:solidFill>
                           <a:latin typeface="Calibri"/>
                         </a:rPr>
-                        <a:t>240 $</a:t>
+                        <a:t>220 $</a:t>
                       </a:r>
                     </a:p>
                   </a:txBody>
@@ -7645,7 +7645,7 @@
                           </a:solidFill>
                           <a:latin typeface="Calibri"/>
                         </a:rPr>
-                        <a:t>285 $</a:t>
+                        <a:t>275 $</a:t>
                       </a:r>
                     </a:p>
                   </a:txBody>
@@ -7668,7 +7668,7 @@
                           </a:solidFill>
                           <a:latin typeface="Calibri"/>
                         </a:rPr>
-                        <a:t>320 $</a:t>
+                        <a:t>310 $</a:t>
                       </a:r>
                     </a:p>
                   </a:txBody>
@@ -7693,7 +7693,7 @@
                           </a:solidFill>
                           <a:latin typeface="Calibri"/>
                         </a:rPr>
-                        <a:t>-5,3 %</a:t>
+                        <a:t>-13,1 %</a:t>
                       </a:r>
                     </a:p>
                   </a:txBody>
@@ -7716,7 +7716,7 @@
                           </a:solidFill>
                           <a:latin typeface="Calibri"/>
                         </a:rPr>
-                        <a:t>+12,4 %</a:t>
+                        <a:t>+8,7 %</a:t>
                       </a:r>
                     </a:p>
                   </a:txBody>
@@ -7739,7 +7739,7 @@
                           </a:solidFill>
                           <a:latin typeface="Calibri"/>
                         </a:rPr>
-                        <a:t>+26,2 %</a:t>
+                        <a:t>+22,5 %</a:t>
                       </a:r>
                     </a:p>
                   </a:txBody>
@@ -8203,7 +8203,7 @@
                           </a:solidFill>
                           <a:latin typeface="Calibri"/>
                         </a:rPr>
-                        <a:t>330</a:t>
+                        <a:t>319</a:t>
                       </a:r>
                     </a:p>
                   </a:txBody>
@@ -8246,7 +8246,7 @@
                           </a:solidFill>
                           <a:latin typeface="Calibri"/>
                         </a:rPr>
-                        <a:t>358</a:t>
+                        <a:t>346</a:t>
                       </a:r>
                     </a:p>
                   </a:txBody>
@@ -8289,7 +8289,7 @@
                           </a:solidFill>
                           <a:latin typeface="Calibri"/>
                         </a:rPr>
-                        <a:t>392</a:t>
+                        <a:t>379</a:t>
                       </a:r>
                     </a:p>
                   </a:txBody>
@@ -8332,7 +8332,7 @@
                           </a:solidFill>
                           <a:latin typeface="Calibri"/>
                         </a:rPr>
-                        <a:t>433</a:t>
+                        <a:t>418</a:t>
                       </a:r>
                     </a:p>
                   </a:txBody>
@@ -8375,7 +8375,7 @@
                           </a:solidFill>
                           <a:latin typeface="Calibri"/>
                         </a:rPr>
-                        <a:t>483</a:t>
+                        <a:t>466</a:t>
                       </a:r>
                     </a:p>
                   </a:txBody>
@@ -8463,7 +8463,7 @@
                           </a:solidFill>
                           <a:latin typeface="Calibri"/>
                         </a:rPr>
-                        <a:t>285</a:t>
+                        <a:t>275</a:t>
                       </a:r>
                     </a:p>
                   </a:txBody>
@@ -8506,7 +8506,7 @@
                           </a:solidFill>
                           <a:latin typeface="Calibri"/>
                         </a:rPr>
-                        <a:t>306</a:t>
+                        <a:t>295</a:t>
                       </a:r>
                     </a:p>
                   </a:txBody>
@@ -8549,7 +8549,7 @@
                           </a:solidFill>
                           <a:latin typeface="Calibri"/>
                         </a:rPr>
-                        <a:t>330</a:t>
+                        <a:t>319</a:t>
                       </a:r>
                     </a:p>
                   </a:txBody>
@@ -8592,7 +8592,7 @@
                           </a:solidFill>
                           <a:latin typeface="Calibri"/>
                         </a:rPr>
-                        <a:t>358</a:t>
+                        <a:t>346</a:t>
                       </a:r>
                     </a:p>
                   </a:txBody>
@@ -8635,7 +8635,7 @@
                           </a:solidFill>
                           <a:latin typeface="Calibri"/>
                         </a:rPr>
-                        <a:t>392</a:t>
+                        <a:t>379</a:t>
                       </a:r>
                     </a:p>
                   </a:txBody>
@@ -8723,7 +8723,7 @@
                           </a:solidFill>
                           <a:latin typeface="Calibri"/>
                         </a:rPr>
-                        <a:t>251</a:t>
+                        <a:t>242</a:t>
                       </a:r>
                     </a:p>
                   </a:txBody>
@@ -8766,7 +8766,7 @@
                           </a:solidFill>
                           <a:latin typeface="Calibri"/>
                         </a:rPr>
-                        <a:t>267</a:t>
+                        <a:t>257</a:t>
                       </a:r>
                     </a:p>
                   </a:txBody>
@@ -8809,7 +8809,7 @@
                           </a:solidFill>
                           <a:latin typeface="Calibri"/>
                         </a:rPr>
-                        <a:t>285</a:t>
+                        <a:t>275</a:t>
                       </a:r>
                     </a:p>
                   </a:txBody>
@@ -8852,7 +8852,7 @@
                           </a:solidFill>
                           <a:latin typeface="Calibri"/>
                         </a:rPr>
-                        <a:t>306</a:t>
+                        <a:t>295</a:t>
                       </a:r>
                     </a:p>
                   </a:txBody>
@@ -8895,7 +8895,7 @@
                           </a:solidFill>
                           <a:latin typeface="Calibri"/>
                         </a:rPr>
-                        <a:t>330</a:t>
+                        <a:t>319</a:t>
                       </a:r>
                     </a:p>
                   </a:txBody>
@@ -8983,7 +8983,7 @@
                           </a:solidFill>
                           <a:latin typeface="Calibri"/>
                         </a:rPr>
-                        <a:t>224</a:t>
+                        <a:t>216</a:t>
                       </a:r>
                     </a:p>
                   </a:txBody>
@@ -9026,7 +9026,7 @@
                           </a:solidFill>
                           <a:latin typeface="Calibri"/>
                         </a:rPr>
-                        <a:t>237</a:t>
+                        <a:t>228</a:t>
                       </a:r>
                     </a:p>
                   </a:txBody>
@@ -9069,7 +9069,7 @@
                           </a:solidFill>
                           <a:latin typeface="Calibri"/>
                         </a:rPr>
-                        <a:t>251</a:t>
+                        <a:t>242</a:t>
                       </a:r>
                     </a:p>
                   </a:txBody>
@@ -9112,7 +9112,7 @@
                           </a:solidFill>
                           <a:latin typeface="Calibri"/>
                         </a:rPr>
-                        <a:t>267</a:t>
+                        <a:t>257</a:t>
                       </a:r>
                     </a:p>
                   </a:txBody>
@@ -9155,7 +9155,7 @@
                           </a:solidFill>
                           <a:latin typeface="Calibri"/>
                         </a:rPr>
-                        <a:t>285</a:t>
+                        <a:t>275</a:t>
                       </a:r>
                     </a:p>
                   </a:txBody>
@@ -9243,7 +9243,7 @@
                           </a:solidFill>
                           <a:latin typeface="Calibri"/>
                         </a:rPr>
-                        <a:t>202</a:t>
+                        <a:t>195</a:t>
                       </a:r>
                     </a:p>
                   </a:txBody>
@@ -9286,7 +9286,7 @@
                           </a:solidFill>
                           <a:latin typeface="Calibri"/>
                         </a:rPr>
-                        <a:t>212</a:t>
+                        <a:t>205</a:t>
                       </a:r>
                     </a:p>
                   </a:txBody>
@@ -9329,7 +9329,7 @@
                           </a:solidFill>
                           <a:latin typeface="Calibri"/>
                         </a:rPr>
-                        <a:t>224</a:t>
+                        <a:t>216</a:t>
                       </a:r>
                     </a:p>
                   </a:txBody>
@@ -9372,7 +9372,7 @@
                           </a:solidFill>
                           <a:latin typeface="Calibri"/>
                         </a:rPr>
-                        <a:t>237</a:t>
+                        <a:t>228</a:t>
                       </a:r>
                     </a:p>
                   </a:txBody>
@@ -9415,7 +9415,7 @@
                           </a:solidFill>
                           <a:latin typeface="Calibri"/>
                         </a:rPr>
-                        <a:t>251</a:t>
+                        <a:t>242</a:t>
                       </a:r>
                     </a:p>
                   </a:txBody>
@@ -9480,7 +9480,7 @@
                 </a:solidFill>
                 <a:latin typeface="Calibri"/>
               </a:rPr>
-              <a:t>WACC de 10,3% et TGR de 3,0% impliquent un upside de 12,4% vs cours actuel. Sensibilité clé sur la croissance des services et le coût du capital.</a:t>
+              <a:t>WACC 10.3% et TGR 3.0% impliquent un upside de 12% vs cours actuel. Sensibilité forte à la croissance des services.</a:t>
             </a:r>
           </a:p>
         </p:txBody>
@@ -10358,7 +10358,7 @@
                           </a:solidFill>
                           <a:latin typeface="Calibri"/>
                         </a:rPr>
-                        <a:t>3 722,1</a:t>
+                        <a:t>3 714,8</a:t>
                       </a:r>
                     </a:p>
                   </a:txBody>
@@ -10590,7 +10590,7 @@
                           </a:solidFill>
                           <a:latin typeface="Calibri"/>
                         </a:rPr>
-                        <a:t>12,8x</a:t>
+                        <a:t>14,2x</a:t>
                       </a:r>
                     </a:p>
                   </a:txBody>
@@ -10613,7 +10613,7 @@
                           </a:solidFill>
                           <a:latin typeface="Calibri"/>
                         </a:rPr>
-                        <a:t>38,2x</a:t>
+                        <a:t>38,1x</a:t>
                       </a:r>
                     </a:p>
                   </a:txBody>
@@ -10636,7 +10636,7 @@
                           </a:solidFill>
                           <a:latin typeface="Calibri"/>
                         </a:rPr>
-                        <a:t>6800,0 %</a:t>
+                        <a:t>68,0 %</a:t>
                       </a:r>
                     </a:p>
                   </a:txBody>
@@ -10659,7 +10659,7 @@
                           </a:solidFill>
                           <a:latin typeface="Calibri"/>
                         </a:rPr>
-                        <a:t>5200,0 %</a:t>
+                        <a:t>45,0 %</a:t>
                       </a:r>
                     </a:p>
                   </a:txBody>
@@ -10730,7 +10730,7 @@
                           </a:solidFill>
                           <a:latin typeface="Calibri"/>
                         </a:rPr>
-                        <a:t>2 000,0</a:t>
+                        <a:t>2 100,0</a:t>
                       </a:r>
                     </a:p>
                   </a:txBody>
@@ -10753,7 +10753,7 @@
                           </a:solidFill>
                           <a:latin typeface="Calibri"/>
                         </a:rPr>
-                        <a:t>22,1x</a:t>
+                        <a:t>22,3x</a:t>
                       </a:r>
                     </a:p>
                   </a:txBody>
@@ -10776,7 +10776,7 @@
                           </a:solidFill>
                           <a:latin typeface="Calibri"/>
                         </a:rPr>
-                        <a:t>9,5x</a:t>
+                        <a:t>8,5x</a:t>
                       </a:r>
                     </a:p>
                   </a:txBody>
@@ -10799,7 +10799,7 @@
                           </a:solidFill>
                           <a:latin typeface="Calibri"/>
                         </a:rPr>
-                        <a:t>28,5x</a:t>
+                        <a:t>28,7x</a:t>
                       </a:r>
                     </a:p>
                   </a:txBody>
@@ -10822,7 +10822,7 @@
                           </a:solidFill>
                           <a:latin typeface="Calibri"/>
                         </a:rPr>
-                        <a:t>5600,0 %</a:t>
+                        <a:t>56,0 %</a:t>
                       </a:r>
                     </a:p>
                   </a:txBody>
@@ -10845,7 +10845,7 @@
                           </a:solidFill>
                           <a:latin typeface="Calibri"/>
                         </a:rPr>
-                        <a:t>3500,0 %</a:t>
+                        <a:t>38,0 %</a:t>
                       </a:r>
                     </a:p>
                   </a:txBody>
@@ -10870,7 +10870,7 @@
                           </a:solidFill>
                           <a:latin typeface="Calibri"/>
                         </a:rPr>
-                        <a:t>Meta Platforms</a:t>
+                        <a:t>Amazon</a:t>
                       </a:r>
                     </a:p>
                   </a:txBody>
@@ -10893,7 +10893,7 @@
                           </a:solidFill>
                           <a:latin typeface="Calibri"/>
                         </a:rPr>
-                        <a:t>META</a:t>
+                        <a:t>AMZN</a:t>
                       </a:r>
                     </a:p>
                   </a:txBody>
@@ -10916,7 +10916,7 @@
                           </a:solidFill>
                           <a:latin typeface="Calibri"/>
                         </a:rPr>
-                        <a:t>1 500,0</a:t>
+                        <a:t>1 800,0</a:t>
                       </a:r>
                     </a:p>
                   </a:txBody>
@@ -10939,7 +10939,7 @@
                           </a:solidFill>
                           <a:latin typeface="Calibri"/>
                         </a:rPr>
-                        <a:t>18,3x</a:t>
+                        <a:t>20,1x</a:t>
                       </a:r>
                     </a:p>
                   </a:txBody>
@@ -10962,7 +10962,7 @@
                           </a:solidFill>
                           <a:latin typeface="Calibri"/>
                         </a:rPr>
-                        <a:t>11,2x</a:t>
+                        <a:t>4,2x</a:t>
                       </a:r>
                     </a:p>
                   </a:txBody>
@@ -10985,7 +10985,7 @@
                           </a:solidFill>
                           <a:latin typeface="Calibri"/>
                         </a:rPr>
-                        <a:t>25,1x</a:t>
+                        <a:t>55,3x</a:t>
                       </a:r>
                     </a:p>
                   </a:txBody>
@@ -11008,7 +11008,7 @@
                           </a:solidFill>
                           <a:latin typeface="Calibri"/>
                         </a:rPr>
-                        <a:t>8500,0 %</a:t>
+                        <a:t>44,0 %</a:t>
                       </a:r>
                     </a:p>
                   </a:txBody>
@@ -11031,7 +11031,7 @@
                           </a:solidFill>
                           <a:latin typeface="Calibri"/>
                         </a:rPr>
-                        <a:t>5500,0 %</a:t>
+                        <a:t>15,0 %</a:t>
                       </a:r>
                     </a:p>
                   </a:txBody>
@@ -11056,7 +11056,7 @@
                           </a:solidFill>
                           <a:latin typeface="Calibri"/>
                         </a:rPr>
-                        <a:t>Samsung Electronics</a:t>
+                        <a:t>Meta Platforms</a:t>
                       </a:r>
                     </a:p>
                   </a:txBody>
@@ -11079,7 +11079,7 @@
                           </a:solidFill>
                           <a:latin typeface="Calibri"/>
                         </a:rPr>
-                        <a:t>005930.KS</a:t>
+                        <a:t>META</a:t>
                       </a:r>
                     </a:p>
                   </a:txBody>
@@ -11102,7 +11102,7 @@
                           </a:solidFill>
                           <a:latin typeface="Calibri"/>
                         </a:rPr>
-                        <a:t>450,0</a:t>
+                        <a:t>1 500,0</a:t>
                       </a:r>
                     </a:p>
                   </a:txBody>
@@ -11125,7 +11125,7 @@
                           </a:solidFill>
                           <a:latin typeface="Calibri"/>
                         </a:rPr>
-                        <a:t>8,2x</a:t>
+                        <a:t>18,7x</a:t>
                       </a:r>
                     </a:p>
                   </a:txBody>
@@ -11148,7 +11148,7 @@
                           </a:solidFill>
                           <a:latin typeface="Calibri"/>
                         </a:rPr>
-                        <a:t>1,1x</a:t>
+                        <a:t>12,1x</a:t>
                       </a:r>
                     </a:p>
                   </a:txBody>
@@ -11171,7 +11171,7 @@
                           </a:solidFill>
                           <a:latin typeface="Calibri"/>
                         </a:rPr>
-                        <a:t>15,3x</a:t>
+                        <a:t>32,4x</a:t>
                       </a:r>
                     </a:p>
                   </a:txBody>
@@ -11194,7 +11194,7 @@
                           </a:solidFill>
                           <a:latin typeface="Calibri"/>
                         </a:rPr>
-                        <a:t>4000,0 %</a:t>
+                        <a:t>85,0 %</a:t>
                       </a:r>
                     </a:p>
                   </a:txBody>
@@ -11217,7 +11217,7 @@
                           </a:solidFill>
                           <a:latin typeface="Calibri"/>
                         </a:rPr>
-                        <a:t>2200,0 %</a:t>
+                        <a:t>52,0 %</a:t>
                       </a:r>
                     </a:p>
                   </a:txBody>
@@ -11242,7 +11242,7 @@
                           </a:solidFill>
                           <a:latin typeface="Calibri"/>
                         </a:rPr>
-                        <a:t>TSMC</a:t>
+                        <a:t>Samsung Electronics</a:t>
                       </a:r>
                     </a:p>
                   </a:txBody>
@@ -11265,7 +11265,7 @@
                           </a:solidFill>
                           <a:latin typeface="Calibri"/>
                         </a:rPr>
-                        <a:t>TSM</a:t>
+                        <a:t>005930.KS</a:t>
                       </a:r>
                     </a:p>
                   </a:txBody>
@@ -11288,7 +11288,7 @@
                           </a:solidFill>
                           <a:latin typeface="Calibri"/>
                         </a:rPr>
-                        <a:t>550,0</a:t>
+                        <a:t>450,0</a:t>
                       </a:r>
                     </a:p>
                   </a:txBody>
@@ -11311,7 +11311,7 @@
                           </a:solidFill>
                           <a:latin typeface="Calibri"/>
                         </a:rPr>
-                        <a:t>19,8x</a:t>
+                        <a:t>6,8x</a:t>
                       </a:r>
                     </a:p>
                   </a:txBody>
@@ -11334,7 +11334,7 @@
                           </a:solidFill>
                           <a:latin typeface="Calibri"/>
                         </a:rPr>
-                        <a:t>14,5x</a:t>
+                        <a:t>1,2x</a:t>
                       </a:r>
                     </a:p>
                   </a:txBody>
@@ -11357,7 +11357,7 @@
                           </a:solidFill>
                           <a:latin typeface="Calibri"/>
                         </a:rPr>
-                        <a:t>22,7x</a:t>
+                        <a:t>15,2x</a:t>
                       </a:r>
                     </a:p>
                   </a:txBody>
@@ -11380,7 +11380,7 @@
                           </a:solidFill>
                           <a:latin typeface="Calibri"/>
                         </a:rPr>
-                        <a:t>5300,0 %</a:t>
+                        <a:t>48,0 %</a:t>
                       </a:r>
                     </a:p>
                   </a:txBody>
@@ -11403,7 +11403,7 @@
                           </a:solidFill>
                           <a:latin typeface="Calibri"/>
                         </a:rPr>
-                        <a:t>4800,0 %</a:t>
+                        <a:t>22,0 %</a:t>
                       </a:r>
                     </a:p>
                   </a:txBody>
@@ -11497,7 +11497,7 @@
                           </a:solidFill>
                           <a:latin typeface="Calibri"/>
                         </a:rPr>
-                        <a:t>19,8x</a:t>
+                        <a:t>20,1x</a:t>
                       </a:r>
                     </a:p>
                   </a:txBody>
@@ -11520,7 +11520,7 @@
                           </a:solidFill>
                           <a:latin typeface="Calibri"/>
                         </a:rPr>
-                        <a:t>11,2x</a:t>
+                        <a:t>8,5x</a:t>
                       </a:r>
                     </a:p>
                   </a:txBody>
@@ -11543,7 +11543,7 @@
                           </a:solidFill>
                           <a:latin typeface="Calibri"/>
                         </a:rPr>
-                        <a:t>25,1x</a:t>
+                        <a:t>32,4x</a:t>
                       </a:r>
                     </a:p>
                   </a:txBody>
@@ -11566,7 +11566,7 @@
                           </a:solidFill>
                           <a:latin typeface="Calibri"/>
                         </a:rPr>
-                        <a:t>5600,0 %</a:t>
+                        <a:t>56,0 %</a:t>
                       </a:r>
                     </a:p>
                   </a:txBody>
@@ -11589,7 +11589,7 @@
                           </a:solidFill>
                           <a:latin typeface="Calibri"/>
                         </a:rPr>
-                        <a:t>4800,0 %</a:t>
+                        <a:t>38,0 %</a:t>
                       </a:r>
                     </a:p>
                   </a:txBody>
@@ -11634,7 +11634,7 @@
                 </a:solidFill>
                 <a:latin typeface="Calibri"/>
               </a:rPr>
-              <a:t>ROE de 151,9% et ROIC de 84,4% parmi les meilleurs du secteur. EV/EBITDA à 26,1x vs 22,5x pour les peers technologiques.</a:t>
+              <a:t>ROE 151.9% et ROIC 84.4% parmi les meilleurs du secteur tech. EV/Revenue à 9.1x supérieur à la médiane peers (7.8x).</a:t>
             </a:r>
           </a:p>
         </p:txBody>
@@ -12292,7 +12292,7 @@
                 </a:solidFill>
                 <a:latin typeface="Calibri"/>
               </a:rPr>
-              <a:t>WACC de 10,3% et TGR de 3,0% impliquent un upside de 12,4% vs cours actuel. Sensibilité clé sur la croissance des services et le coût du capital.</a:t>
+              <a:t>WACC 10.3% et TGR 3.0% impliquent un upside de 12% vs cours actuel. Sensibilité forte à la croissance des services.</a:t>
             </a:r>
           </a:p>
         </p:txBody>
@@ -13265,7 +13265,7 @@
                 </a:solidFill>
                 <a:latin typeface="Calibri"/>
               </a:rPr>
-              <a:t>Régulation App Store</a:t>
+              <a:t>Dépendance iPhone</a:t>
             </a:r>
           </a:p>
         </p:txBody>
@@ -13300,7 +13300,7 @@
                 </a:solidFill>
                 <a:latin typeface="Calibri"/>
               </a:rPr>
-              <a:t>Régulation européenne sur l'App Store (-15% revenus services en 2026)</a:t>
+              <a:t>Régulation App Store en UE</a:t>
             </a:r>
           </a:p>
         </p:txBody>
@@ -13421,7 +13421,7 @@
                 </a:solidFill>
                 <a:latin typeface="Calibri"/>
               </a:rPr>
-              <a:t>Dépendance Chine</a:t>
+              <a:t>Régulation</a:t>
             </a:r>
           </a:p>
         </p:txBody>
@@ -13456,7 +13456,7 @@
                 </a:solidFill>
                 <a:latin typeface="Calibri"/>
               </a:rPr>
-              <a:t>Guerre commerciale Chine-USA (-5% ventes iPhone en 2026)</a:t>
+              <a:t>Concurrence Android en Asie</a:t>
             </a:r>
           </a:p>
         </p:txBody>
@@ -13612,7 +13612,7 @@
                 </a:solidFill>
                 <a:latin typeface="Calibri"/>
               </a:rPr>
-              <a:t>Concurrence IA de Google et Meta sur les services cloud</a:t>
+              <a:t>Ralentissement Chine</a:t>
             </a:r>
           </a:p>
         </p:txBody>
@@ -13826,7 +13826,7 @@
                           </a:solidFill>
                           <a:latin typeface="Calibri"/>
                         </a:rPr>
-                        <a:t>Récession mondiale avec -3% PIB en 2026</a:t>
+                        <a:t>Récession mondiale 2026 avec -3% PIB US</a:t>
                       </a:r>
                     </a:p>
                   </a:txBody>
@@ -13897,7 +13897,7 @@
                           </a:solidFill>
                           <a:latin typeface="Calibri"/>
                         </a:rPr>
-                        <a:t>Régulation stricte sur l'IA générative en UE/USA</a:t>
+                        <a:t>Régulation stricte IA en UE réduisant l'innovation</a:t>
                       </a:r>
                     </a:p>
                   </a:txBody>
@@ -13968,7 +13968,7 @@
                           </a:solidFill>
                           <a:latin typeface="Calibri"/>
                         </a:rPr>
-                        <a:t>Perte de parts de marché iPhone en Chine (-10% en 2026)</a:t>
+                        <a:t>Échec commercial iPhone 16 avec -10% ventes</a:t>
                       </a:r>
                     </a:p>
                   </a:txBody>
@@ -15858,7 +15858,7 @@
                           </a:solidFill>
                           <a:latin typeface="Calibri"/>
                         </a:rPr>
-                        <a:t>Intégration IA dans iOS 18 avec +20% de productivité utilisateur, Expansion services en Inde et Brésil avec 50M nouveaux abonnés attendus, Rachat d'actions de 100-120 milliards USD annuel</a:t>
+                        <a:t>Croissance services +15% YoY, Lancement iPhone 16 avec IA intégrée, Rachat actions 110 Mds USD</a:t>
                       </a:r>
                     </a:p>
                   </a:txBody>
@@ -16046,7 +16046,7 @@
                           </a:solidFill>
                           <a:latin typeface="Calibri"/>
                         </a:rPr>
-                        <a:t>Régulation européenne sur l'App Store (-15% revenus services en 2026), Guerre commerciale Chine-USA (-5% ventes iPhone en 2026), Concurrence IA de Google et Meta sur les services cloud</a:t>
+                        <a:t>Régulation App Store en UE, Concurrence Android en Asie, Ralentissement Chine</a:t>
                       </a:r>
                     </a:p>
                   </a:txBody>
@@ -19029,7 +19029,7 @@
                 </a:solidFill>
                 <a:latin typeface="Calibri"/>
               </a:rPr>
-              <a:t>La valorisation est élevée mais justifiée par la croissance des services et la résilience des marges. Les multiples sont en ligne avec les peers premium comme Microsoft.</a:t>
+              <a:t>Les multiples (33.2x P/E, 26.1x EV/EBITDA) sont élevés mais justifiés par la qualité des revenus. Comparables affichent des primes similaires pour la récurrence des services.</a:t>
             </a:r>
           </a:p>
         </p:txBody>
@@ -19359,7 +19359,7 @@
                 </a:solidFill>
                 <a:latin typeface="Calibri"/>
               </a:rPr>
-              <a:t>Prix cible base : 285 $  ·  Upside : +12,4 %  ·  Bear : 240 $ (-5,3 %)  ·  Bull : 320 $ (+26,2 %)</a:t>
+              <a:t>Prix cible base : 275 $  ·  Upside : +8,7 %  ·  Bear : 220 $ (-13,1 %)  ·  Bull : 310 $ (+22,5 %)</a:t>
             </a:r>
           </a:p>
         </p:txBody>
@@ -19550,7 +19550,7 @@
                 </a:solidFill>
                 <a:latin typeface="Calibri"/>
               </a:rPr>
-              <a:t>Apple vise 500 milliards USD de revenus d'ici 2027 grâce à l'IA générative intégrée dans les iPhones</a:t>
+              <a:t>L'intégration de l'IA dans les produits 2026 pourrait générer +15 Md USD de revenus supplémentaires</a:t>
             </a:r>
           </a:p>
         </p:txBody>
@@ -19628,7 +19628,7 @@
                 </a:solidFill>
                 <a:latin typeface="Calibri"/>
               </a:rPr>
-              <a:t>Marges premium</a:t>
+              <a:t>Marges élevées</a:t>
             </a:r>
           </a:p>
         </p:txBody>
@@ -19663,7 +19663,7 @@
                 </a:solidFill>
                 <a:latin typeface="Calibri"/>
               </a:rPr>
-              <a:t>La marge des services devrait atteindre 30% en 2026 avec 1,5 milliard d'abonnés payants</a:t>
+              <a:t>La marge des services devrait atteindre 72% d'ici 2027 grâce à l'augmentation des abonnements</a:t>
             </a:r>
           </a:p>
         </p:txBody>
@@ -19741,7 +19741,7 @@
                 </a:solidFill>
                 <a:latin typeface="Calibri"/>
               </a:rPr>
-              <a:t>Trésorerie record</a:t>
+              <a:t>Trésorerie massive</a:t>
             </a:r>
           </a:p>
         </p:txBody>
@@ -19776,7 +19776,7 @@
                 </a:solidFill>
                 <a:latin typeface="Calibri"/>
               </a:rPr>
-              <a:t>Le rachat d'actions de 110 milliards USD en 2025 renforce la création de valeur pour les actionnaires.</a:t>
+              <a:t>Le rachat d'actions de 110 Mds USD prévu en 2026 soutient la valorisation.</a:t>
             </a:r>
           </a:p>
         </p:txBody>
@@ -19932,7 +19932,7 @@
                 </a:solidFill>
                 <a:latin typeface="Calibri"/>
               </a:rPr>
-              <a:t>Régulation App Store</a:t>
+              <a:t>Dépendance iPhone</a:t>
             </a:r>
           </a:p>
         </p:txBody>
@@ -19967,7 +19967,7 @@
                 </a:solidFill>
                 <a:latin typeface="Calibri"/>
               </a:rPr>
-              <a:t>Régulation européenne sur l'App Store (-15% revenus services en 2026)</a:t>
+              <a:t>Impact potentiel sur la these d'investissement — surveillance recommandee sur les 6-12 prochains mois.</a:t>
             </a:r>
           </a:p>
         </p:txBody>
@@ -20045,7 +20045,7 @@
                 </a:solidFill>
                 <a:latin typeface="Calibri"/>
               </a:rPr>
-              <a:t>Dépendance Chine</a:t>
+              <a:t>Régulation</a:t>
             </a:r>
           </a:p>
         </p:txBody>
@@ -20080,7 +20080,7 @@
                 </a:solidFill>
                 <a:latin typeface="Calibri"/>
               </a:rPr>
-              <a:t>Guerre commerciale Chine-USA (-5% ventes iPhone en 2026)</a:t>
+              <a:t>Impact potentiel sur la these d'investissement — surveillance recommandee sur les 6-12 prochains mois.</a:t>
             </a:r>
           </a:p>
         </p:txBody>
@@ -20193,7 +20193,7 @@
                 </a:solidFill>
                 <a:latin typeface="Calibri"/>
               </a:rPr>
-              <a:t>Concurrence IA de Google et Meta sur les services cloud</a:t>
+              <a:t>Impact potentiel sur la these d'investissement — surveillance recommandee sur les 6-12 prochains mois.</a:t>
             </a:r>
           </a:p>
         </p:txBody>
@@ -20470,7 +20470,7 @@
                 </a:solidFill>
                 <a:latin typeface="Calibri"/>
               </a:rPr>
-              <a:t>vs 19,8x médiane peers</a:t>
+              <a:t>vs 20,1x médiane peers</a:t>
             </a:r>
           </a:p>
         </p:txBody>
@@ -20782,7 +20782,7 @@
                 </a:solidFill>
                 <a:latin typeface="Calibri"/>
               </a:rPr>
-              <a:t>285 $</a:t>
+              <a:t>275 $</a:t>
             </a:r>
           </a:p>
         </p:txBody>
@@ -20852,7 +20852,7 @@
                 </a:solidFill>
                 <a:latin typeface="Calibri"/>
               </a:rPr>
-              <a:t>Upside de +12,4 % vs cours</a:t>
+              <a:t>Upside de +8,7 % vs cours</a:t>
             </a:r>
           </a:p>
         </p:txBody>
@@ -21763,7 +21763,7 @@
                 </a:solidFill>
                 <a:latin typeface="Calibri"/>
               </a:rPr>
-              <a:t>253,53 $</a:t>
+              <a:t>253,03 $</a:t>
             </a:r>
           </a:p>
         </p:txBody>
@@ -22231,7 +22231,7 @@
                 </a:solidFill>
                 <a:latin typeface="Calibri"/>
               </a:rPr>
-              <a:t>+19,8 %</a:t>
+              <a:t>+19,6 %</a:t>
             </a:r>
           </a:p>
         </p:txBody>
@@ -23260,8 +23260,8 @@
         </p:nvSpPr>
         <p:spPr>
           <a:xfrm>
-            <a:off x="7854300" y="2838875"/>
-            <a:ext cx="498636" cy="1056324"/>
+            <a:off x="7854300" y="2848249"/>
+            <a:ext cx="498636" cy="1046950"/>
           </a:xfrm>
           <a:prstGeom prst="rect">
             <a:avLst/>
@@ -23672,7 +23672,7 @@
                 </a:solidFill>
                 <a:latin typeface="Calibri"/>
               </a:rPr>
-              <a:t>Apple maintient une croissance solide avec des marges élevées et une trésorerie abondante. La valorisation reste justifiée par l'innovation et l'écosystème intégré. Les risques géopolitiques et la dépendance à la Chine sont des points de vigilance.</a:t>
+              <a:t>Apple affiche une croissance résiliente avec des marges robustes et une trésorerie abondante. Le cours actuel sous-évalue le potentiel de l'IA intégrée et des services récurrents. La valorisation reste attractive malgré un premium sectoriel.</a:t>
             </a:r>
           </a:p>
         </p:txBody>
@@ -24715,7 +24715,7 @@
                 </a:solidFill>
                 <a:latin typeface="Calibri"/>
               </a:rPr>
-              <a:t>Régulation App Store  ·  Dépendance Chine</a:t>
+              <a:t>Dépendance iPhone  ·  Régulation</a:t>
             </a:r>
           </a:p>
         </p:txBody>
@@ -25949,7 +25949,7 @@
                 </a:solidFill>
                 <a:latin typeface="Calibri"/>
               </a:rPr>
-              <a:t>Apple conçoit et commercialise des smartphones, ordinateurs, tablettes et services numériques premium comme l'App Store et Apple Music. Positionné en haut de gamme, l'entreprise bénéficie d'une fidélisation client élevée et d'une marque forte. Ses avantages concurrentiels incluent l'intégration verticale, l'écosystème fermé et une marge brute supérieure à 45%. L'entreprise articule son activité autour de deux segments stratégiques :</a:t>
+              <a:t>Apple conçoit et commercialise des produits technologiques premium (iPhone, Mac, iPad, Wearables) et des services (App Store, Apple Music, iCloud). Positionné en haut de gamme, le groupe mise sur l'écosystème fermé et l'innovation pour fidéliser ses clients. Ses avantages concurrentiels incluent une marge brute élevée, une trésorerie nette de 166 Mds USD et une forte récurrence des revenus services. L'entreprise articule son activité autour de deux segments stratégiques :</a:t>
             </a:r>
           </a:p>
         </p:txBody>
@@ -26062,7 +26062,7 @@
                 </a:solidFill>
                 <a:latin typeface="Calibri"/>
               </a:rPr>
-              <a:t>Segment principal incluant iPhone, Mac, iPad et wearables avec modèle de revenus basé sur ventes…</a:t>
+              <a:t>Ventes de matériel (iPhone 60%, Mac 7%, iPad 7%, Wearables 8%) avec marge brute ~35%. Clients…</a:t>
             </a:r>
           </a:p>
         </p:txBody>
@@ -26175,7 +26175,7 @@
                 </a:solidFill>
                 <a:latin typeface="Calibri"/>
               </a:rPr>
-              <a:t>Modèle d'abonnement et de commissions sur l'App Store, Apple Music, iCloud et Apple TV+. Revenus…</a:t>
+              <a:t>Abonnements (App Store, Apple Music, iCloud) et licences avec marge brute ~70%. Base d'utilisateurs…</a:t>
             </a:r>
           </a:p>
         </p:txBody>
@@ -26296,7 +26296,7 @@
                 </a:solidFill>
                 <a:latin typeface="Calibri"/>
               </a:rPr>
-              <a:t>3 722,1 Mds$</a:t>
+              <a:t>3 714,8 Mds$</a:t>
             </a:r>
           </a:p>
         </p:txBody>
@@ -26608,7 +26608,7 @@
                 </a:solidFill>
                 <a:latin typeface="Calibri"/>
               </a:rPr>
-              <a:t>253,53 $</a:t>
+              <a:t>253,03 $</a:t>
             </a:r>
           </a:p>
         </p:txBody>
@@ -27554,7 +27554,7 @@
                 </a:solidFill>
                 <a:latin typeface="Calibri"/>
               </a:rPr>
-              <a:t>70%</a:t>
+              <a:t>82%</a:t>
             </a:r>
           </a:p>
         </p:txBody>
@@ -27702,7 +27702,7 @@
                 </a:solidFill>
                 <a:latin typeface="Calibri"/>
               </a:rPr>
-              <a:t>Segment principal incluant iPhone, Mac, iPad et wearables avec modèle de revenus basé sur ventes matérielles et accessoires. Clients cibles : consommateurs premium et entreprises. Croissance tirée par l'innovation et les services intégrés comme Apple Watch et AirPods.</a:t>
+              <a:t>Ventes de matériel (iPhone 60%, Mac 7%, iPad 7%, Wearables 8%) avec marge brute ~35%. Clients premium en Amérique du Nord et Europe. Croissance portée par l'iPhone 15 et l'expansion en Chine.</a:t>
             </a:r>
           </a:p>
         </p:txBody>
@@ -27823,7 +27823,7 @@
                 </a:solidFill>
                 <a:latin typeface="Calibri"/>
               </a:rPr>
-              <a:t>30%</a:t>
+              <a:t>18%</a:t>
             </a:r>
           </a:p>
         </p:txBody>
@@ -27971,7 +27971,7 @@
                 </a:solidFill>
                 <a:latin typeface="Calibri"/>
               </a:rPr>
-              <a:t>Modèle d'abonnement et de commissions sur l'App Store, Apple Music, iCloud et Apple TV+. Revenus récurrents et marges &gt;70%. Clients cibles : utilisateurs existants et nouveaux marchés comme la santé et la finance. Croissance portée par +1 milliard d'utilisateurs actifs.</a:t>
+              <a:t>Abonnements (App Store, Apple Music, iCloud) et licences avec marge brute ~70%. Base d'utilisateurs 1.5 Md et croissance annuelle 15%. Revenus récurrents à 80% du segment.</a:t>
             </a:r>
           </a:p>
         </p:txBody>
@@ -29100,7 +29100,7 @@
                           </a:solidFill>
                           <a:latin typeface="Calibri"/>
                         </a:rPr>
-                        <a:t>445,0</a:t>
+                        <a:t>440,0</a:t>
                       </a:r>
                     </a:p>
                   </a:txBody>
@@ -29123,7 +29123,7 @@
                           </a:solidFill>
                           <a:latin typeface="Calibri"/>
                         </a:rPr>
-                        <a:t>480,0</a:t>
+                        <a:t>470,0</a:t>
                       </a:r>
                     </a:p>
                   </a:txBody>
@@ -29240,7 +29240,7 @@
                           </a:solidFill>
                           <a:latin typeface="Calibri"/>
                         </a:rPr>
-                        <a:t>+7,0 %</a:t>
+                        <a:t>+5,7 %</a:t>
                       </a:r>
                     </a:p>
                   </a:txBody>
@@ -29263,7 +29263,7 @@
                           </a:solidFill>
                           <a:latin typeface="Calibri"/>
                         </a:rPr>
-                        <a:t>+7,9 %</a:t>
+                        <a:t>+6,8 %</a:t>
                       </a:r>
                     </a:p>
                   </a:txBody>
@@ -29380,7 +29380,7 @@
                           </a:solidFill>
                           <a:latin typeface="Calibri"/>
                         </a:rPr>
-                        <a:t>209,2</a:t>
+                        <a:t>207,7</a:t>
                       </a:r>
                     </a:p>
                   </a:txBody>
@@ -29403,7 +29403,7 @@
                           </a:solidFill>
                           <a:latin typeface="Calibri"/>
                         </a:rPr>
-                        <a:t>228,0</a:t>
+                        <a:t>223,2</a:t>
                       </a:r>
                     </a:p>
                   </a:txBody>
@@ -29520,7 +29520,7 @@
                           </a:solidFill>
                           <a:latin typeface="Calibri"/>
                         </a:rPr>
-                        <a:t>47,0 %</a:t>
+                        <a:t>47,2 %</a:t>
                       </a:r>
                     </a:p>
                   </a:txBody>
@@ -29660,7 +29660,7 @@
                           </a:solidFill>
                           <a:latin typeface="Calibri"/>
                         </a:rPr>
-                        <a:t>165,0</a:t>
+                        <a:t>162,0</a:t>
                       </a:r>
                     </a:p>
                   </a:txBody>
@@ -29683,7 +29683,7 @@
                           </a:solidFill>
                           <a:latin typeface="Calibri"/>
                         </a:rPr>
-                        <a:t>180,0</a:t>
+                        <a:t>175,0</a:t>
                       </a:r>
                     </a:p>
                   </a:txBody>
@@ -29800,7 +29800,7 @@
                           </a:solidFill>
                           <a:latin typeface="Calibri"/>
                         </a:rPr>
-                        <a:t>37,0 %</a:t>
+                        <a:t>36,8 %</a:t>
                       </a:r>
                     </a:p>
                   </a:txBody>
@@ -29823,7 +29823,7 @@
                           </a:solidFill>
                           <a:latin typeface="Calibri"/>
                         </a:rPr>
-                        <a:t>37,5 %</a:t>
+                        <a:t>37,2 %</a:t>
                       </a:r>
                     </a:p>
                   </a:txBody>
@@ -29940,7 +29940,7 @@
                           </a:solidFill>
                           <a:latin typeface="Calibri"/>
                         </a:rPr>
-                        <a:t>120,0</a:t>
+                        <a:t>115,0</a:t>
                       </a:r>
                     </a:p>
                   </a:txBody>
@@ -29963,7 +29963,7 @@
                           </a:solidFill>
                           <a:latin typeface="Calibri"/>
                         </a:rPr>
-                        <a:t>132,0</a:t>
+                        <a:t>125,0</a:t>
                       </a:r>
                     </a:p>
                   </a:txBody>
@@ -30080,7 +30080,7 @@
                           </a:solidFill>
                           <a:latin typeface="Calibri"/>
                         </a:rPr>
-                        <a:t>27,0 %</a:t>
+                        <a:t>26,1 %</a:t>
                       </a:r>
                     </a:p>
                   </a:txBody>
@@ -30103,7 +30103,7 @@
                           </a:solidFill>
                           <a:latin typeface="Calibri"/>
                         </a:rPr>
-                        <a:t>27,5 %</a:t>
+                        <a:t>26,6 %</a:t>
                       </a:r>
                     </a:p>
                   </a:txBody>
@@ -30148,7 +30148,7 @@
                 </a:solidFill>
                 <a:latin typeface="Calibri"/>
               </a:rPr>
-              <a:t>Croissance revenue de 6,4% en 2025 avec marge nette stable à 26,9%. Cash-flow opérationnel de 110 milliards USD. Les services progressent de 14% YoY, compensant le ralentissement des ventes d'iPhone.</a:t>
+              <a:t>Croissance revenue 6.4% en 2025 malgré un environnement macro difficile. Marges nettes stables à 26.9% grâce à la mixité services/produits. Free cash flow de 105 Mds USD en 2025.</a:t>
             </a:r>
           </a:p>
         </p:txBody>
@@ -31880,7 +31880,7 @@
                           </a:solidFill>
                           <a:latin typeface="Calibri"/>
                         </a:rPr>
-                        <a:t>9,97</a:t>
+                        <a:t>9,96</a:t>
                       </a:r>
                     </a:p>
                   </a:txBody>
@@ -32065,7 +32065,7 @@
                 </a:solidFill>
                 <a:latin typeface="Calibri"/>
               </a:rPr>
-              <a:t>Croissance revenue de 6,4% en 2025 avec marge nette stable à 26,9%. Cash-flow opérationnel de 110 milliards USD. Les services progressent de 14% YoY, compensant le ralentissement des ventes d'iPhone.</a:t>
+              <a:t>Croissance revenue 6.4% en 2025 malgré un environnement macro difficile. Marges nettes stables à 26.9% grâce à la mixité services/produits. Free cash flow de 105 Mds USD en 2025.</a:t>
             </a:r>
           </a:p>
         </p:txBody>

--- a/preview/AAPL/AAPL_pitchbook.pptx
+++ b/preview/AAPL/AAPL_pitchbook.pptx
@@ -3348,7 +3348,7 @@
             <a:avLst/>
           </a:prstGeom>
           <a:solidFill>
-            <a:srgbClr val="EAF4EF"/>
+            <a:srgbClr val="FDF6E8"/>
           </a:solidFill>
           <a:ln>
             <a:noFill/>
@@ -3391,7 +3391,7 @@
             <a:avLst/>
           </a:prstGeom>
           <a:solidFill>
-            <a:srgbClr val="1A7A4A"/>
+            <a:srgbClr val="B06000"/>
           </a:solidFill>
           <a:ln>
             <a:noFill/>
@@ -3445,11 +3445,11 @@
             <a:r>
               <a:rPr sz="900" b="1" i="0">
                 <a:solidFill>
-                  <a:srgbClr val="1A7A4A"/>
+                  <a:srgbClr val="B06000"/>
                 </a:solidFill>
                 <a:latin typeface="Calibri"/>
               </a:rPr>
-              <a:t>● BUY  ·  Prix cible base : 285 $  ·  Upside : +14,5 %</a:t>
+              <a:t>● HOLD  ·  Prix cible base : — $  ·  Upside : —</a:t>
             </a:r>
           </a:p>
         </p:txBody>
@@ -3562,7 +3562,7 @@
                 </a:solidFill>
                 <a:latin typeface="Calibri"/>
               </a:rPr>
-              <a:t>27 mars 2026</a:t>
+              <a:t>28 mars 2026</a:t>
             </a:r>
           </a:p>
         </p:txBody>
@@ -4677,17 +4677,17 @@
                       <a:r>
                         <a:rPr sz="800" b="1" i="0">
                           <a:solidFill>
-                            <a:srgbClr val="555555"/>
+                            <a:srgbClr val="A82020"/>
                           </a:solidFill>
                           <a:latin typeface="Calibri"/>
                         </a:rPr>
-                        <a:t>Tres eleve</a:t>
+                        <a:t>Très élevé</a:t>
                       </a:r>
                     </a:p>
                   </a:txBody>
                   <a:tcPr>
                     <a:solidFill>
-                      <a:srgbClr val="F7F8FA"/>
+                      <a:srgbClr val="FAF0EF"/>
                     </a:solidFill>
                     <a:lnL w="6350">
                       <a:solidFill>
@@ -5721,17 +5721,17 @@
                       <a:r>
                         <a:rPr sz="800" b="1" i="0">
                           <a:solidFill>
-                            <a:srgbClr val="1A7A4A"/>
+                            <a:srgbClr val="555555"/>
                           </a:solidFill>
                           <a:latin typeface="Calibri"/>
                         </a:rPr>
-                        <a:t>Leger</a:t>
+                        <a:t>Léger</a:t>
                       </a:r>
                     </a:p>
                   </a:txBody>
                   <a:tcPr>
                     <a:solidFill>
-                      <a:srgbClr val="EAF4EF"/>
+                      <a:srgbClr val="F7F8FA"/>
                     </a:solidFill>
                     <a:lnL w="6350">
                       <a:solidFill>
@@ -6108,41 +6108,6 @@
           </a:graphicData>
         </a:graphic>
       </p:graphicFrame>
-      <p:sp>
-        <p:nvSpPr>
-          <p:cNvPr id="18" name="TextBox 17"/>
-          <p:cNvSpPr txBox="1"/>
-          <p:nvPr/>
-        </p:nvSpPr>
-        <p:spPr>
-          <a:xfrm>
-            <a:off x="367200" y="3628800"/>
-            <a:ext cx="8413200" cy="824400"/>
-          </a:xfrm>
-          <a:prstGeom prst="rect">
-            <a:avLst/>
-          </a:prstGeom>
-          <a:noFill/>
-        </p:spPr>
-        <p:txBody>
-          <a:bodyPr wrap="square">
-            <a:spAutoFit/>
-          </a:bodyPr>
-          <a:lstStyle/>
-          <a:p>
-            <a:pPr algn="l"/>
-            <a:r>
-              <a:rPr sz="850" b="0" i="0">
-                <a:solidFill>
-                  <a:srgbClr val="555555"/>
-                </a:solidFill>
-                <a:latin typeface="Calibri"/>
-              </a:rPr>
-              <a:t>Les marges brutes sont passées de 43.3% en 2022 à 46.9% en 2025, reflétant un mix produit plus premium et une meilleure gestion des coûts logistiques. Les marges EBITDA (34.8%) et nettes (26.9%) bénéficient du levier opérationnel sur les services à forte marge. Cette tendance structurelle soutient la durabilité des niveaux actuels et limite le risque de compression.</a:t>
-            </a:r>
-          </a:p>
-        </p:txBody>
-      </p:sp>
     </p:spTree>
   </p:cSld>
   <p:clrMapOvr>
@@ -7303,7 +7268,7 @@
                           </a:solidFill>
                           <a:latin typeface="Calibri"/>
                         </a:rPr>
-                        <a:t>285 $</a:t>
+                        <a:t>—</a:t>
                       </a:r>
                     </a:p>
                   </a:txBody>
@@ -7479,7 +7444,7 @@
                           </a:solidFill>
                           <a:latin typeface="Calibri"/>
                         </a:rPr>
-                        <a:t>+14,5 %</a:t>
+                        <a:t>—</a:t>
                       </a:r>
                     </a:p>
                   </a:txBody>
@@ -7622,7 +7587,7 @@
                           </a:solidFill>
                           <a:latin typeface="Calibri"/>
                         </a:rPr>
-                        <a:t>240 $</a:t>
+                        <a:t>—</a:t>
                       </a:r>
                     </a:p>
                   </a:txBody>
@@ -7645,7 +7610,7 @@
                           </a:solidFill>
                           <a:latin typeface="Calibri"/>
                         </a:rPr>
-                        <a:t>285 $</a:t>
+                        <a:t>—</a:t>
                       </a:r>
                     </a:p>
                   </a:txBody>
@@ -7668,7 +7633,7 @@
                           </a:solidFill>
                           <a:latin typeface="Calibri"/>
                         </a:rPr>
-                        <a:t>320 $</a:t>
+                        <a:t>—</a:t>
                       </a:r>
                     </a:p>
                   </a:txBody>
@@ -7693,7 +7658,7 @@
                           </a:solidFill>
                           <a:latin typeface="Calibri"/>
                         </a:rPr>
-                        <a:t>-3,5 %</a:t>
+                        <a:t>—</a:t>
                       </a:r>
                     </a:p>
                   </a:txBody>
@@ -7716,7 +7681,7 @@
                           </a:solidFill>
                           <a:latin typeface="Calibri"/>
                         </a:rPr>
-                        <a:t>+14,5 %</a:t>
+                        <a:t>—</a:t>
                       </a:r>
                     </a:p>
                   </a:txBody>
@@ -7739,7 +7704,7 @@
                           </a:solidFill>
                           <a:latin typeface="Calibri"/>
                         </a:rPr>
-                        <a:t>+28,6 %</a:t>
+                        <a:t>—</a:t>
                       </a:r>
                     </a:p>
                   </a:txBody>
@@ -8203,7 +8168,7 @@
                           </a:solidFill>
                           <a:latin typeface="Calibri"/>
                         </a:rPr>
-                        <a:t>329</a:t>
+                        <a:t>—</a:t>
                       </a:r>
                     </a:p>
                   </a:txBody>
@@ -8246,7 +8211,7 @@
                           </a:solidFill>
                           <a:latin typeface="Calibri"/>
                         </a:rPr>
-                        <a:t>357</a:t>
+                        <a:t>—</a:t>
                       </a:r>
                     </a:p>
                   </a:txBody>
@@ -8289,7 +8254,7 @@
                           </a:solidFill>
                           <a:latin typeface="Calibri"/>
                         </a:rPr>
-                        <a:t>390</a:t>
+                        <a:t>—</a:t>
                       </a:r>
                     </a:p>
                   </a:txBody>
@@ -8332,7 +8297,7 @@
                           </a:solidFill>
                           <a:latin typeface="Calibri"/>
                         </a:rPr>
-                        <a:t>430</a:t>
+                        <a:t>—</a:t>
                       </a:r>
                     </a:p>
                   </a:txBody>
@@ -8375,7 +8340,7 @@
                           </a:solidFill>
                           <a:latin typeface="Calibri"/>
                         </a:rPr>
-                        <a:t>478</a:t>
+                        <a:t>—</a:t>
                       </a:r>
                     </a:p>
                   </a:txBody>
@@ -8463,7 +8428,7 @@
                           </a:solidFill>
                           <a:latin typeface="Calibri"/>
                         </a:rPr>
-                        <a:t>285</a:t>
+                        <a:t>—</a:t>
                       </a:r>
                     </a:p>
                   </a:txBody>
@@ -8506,7 +8471,7 @@
                           </a:solidFill>
                           <a:latin typeface="Calibri"/>
                         </a:rPr>
-                        <a:t>306</a:t>
+                        <a:t>—</a:t>
                       </a:r>
                     </a:p>
                   </a:txBody>
@@ -8549,7 +8514,7 @@
                           </a:solidFill>
                           <a:latin typeface="Calibri"/>
                         </a:rPr>
-                        <a:t>329</a:t>
+                        <a:t>—</a:t>
                       </a:r>
                     </a:p>
                   </a:txBody>
@@ -8592,7 +8557,7 @@
                           </a:solidFill>
                           <a:latin typeface="Calibri"/>
                         </a:rPr>
-                        <a:t>357</a:t>
+                        <a:t>—</a:t>
                       </a:r>
                     </a:p>
                   </a:txBody>
@@ -8635,7 +8600,7 @@
                           </a:solidFill>
                           <a:latin typeface="Calibri"/>
                         </a:rPr>
-                        <a:t>390</a:t>
+                        <a:t>—</a:t>
                       </a:r>
                     </a:p>
                   </a:txBody>
@@ -8723,7 +8688,7 @@
                           </a:solidFill>
                           <a:latin typeface="Calibri"/>
                         </a:rPr>
-                        <a:t>251</a:t>
+                        <a:t>—</a:t>
                       </a:r>
                     </a:p>
                   </a:txBody>
@@ -8766,7 +8731,7 @@
                           </a:solidFill>
                           <a:latin typeface="Calibri"/>
                         </a:rPr>
-                        <a:t>267</a:t>
+                        <a:t>—</a:t>
                       </a:r>
                     </a:p>
                   </a:txBody>
@@ -8809,7 +8774,7 @@
                           </a:solidFill>
                           <a:latin typeface="Calibri"/>
                         </a:rPr>
-                        <a:t>285</a:t>
+                        <a:t>—</a:t>
                       </a:r>
                     </a:p>
                   </a:txBody>
@@ -8852,7 +8817,7 @@
                           </a:solidFill>
                           <a:latin typeface="Calibri"/>
                         </a:rPr>
-                        <a:t>306</a:t>
+                        <a:t>—</a:t>
                       </a:r>
                     </a:p>
                   </a:txBody>
@@ -8895,7 +8860,7 @@
                           </a:solidFill>
                           <a:latin typeface="Calibri"/>
                         </a:rPr>
-                        <a:t>329</a:t>
+                        <a:t>—</a:t>
                       </a:r>
                     </a:p>
                   </a:txBody>
@@ -8983,7 +8948,7 @@
                           </a:solidFill>
                           <a:latin typeface="Calibri"/>
                         </a:rPr>
-                        <a:t>225</a:t>
+                        <a:t>—</a:t>
                       </a:r>
                     </a:p>
                   </a:txBody>
@@ -9026,7 +8991,7 @@
                           </a:solidFill>
                           <a:latin typeface="Calibri"/>
                         </a:rPr>
-                        <a:t>237</a:t>
+                        <a:t>—</a:t>
                       </a:r>
                     </a:p>
                   </a:txBody>
@@ -9069,7 +9034,7 @@
                           </a:solidFill>
                           <a:latin typeface="Calibri"/>
                         </a:rPr>
-                        <a:t>251</a:t>
+                        <a:t>—</a:t>
                       </a:r>
                     </a:p>
                   </a:txBody>
@@ -9112,7 +9077,7 @@
                           </a:solidFill>
                           <a:latin typeface="Calibri"/>
                         </a:rPr>
-                        <a:t>267</a:t>
+                        <a:t>—</a:t>
                       </a:r>
                     </a:p>
                   </a:txBody>
@@ -9155,7 +9120,7 @@
                           </a:solidFill>
                           <a:latin typeface="Calibri"/>
                         </a:rPr>
-                        <a:t>285</a:t>
+                        <a:t>—</a:t>
                       </a:r>
                     </a:p>
                   </a:txBody>
@@ -9243,7 +9208,7 @@
                           </a:solidFill>
                           <a:latin typeface="Calibri"/>
                         </a:rPr>
-                        <a:t>203</a:t>
+                        <a:t>—</a:t>
                       </a:r>
                     </a:p>
                   </a:txBody>
@@ -9286,7 +9251,7 @@
                           </a:solidFill>
                           <a:latin typeface="Calibri"/>
                         </a:rPr>
-                        <a:t>213</a:t>
+                        <a:t>—</a:t>
                       </a:r>
                     </a:p>
                   </a:txBody>
@@ -9329,7 +9294,7 @@
                           </a:solidFill>
                           <a:latin typeface="Calibri"/>
                         </a:rPr>
-                        <a:t>225</a:t>
+                        <a:t>—</a:t>
                       </a:r>
                     </a:p>
                   </a:txBody>
@@ -9372,7 +9337,7 @@
                           </a:solidFill>
                           <a:latin typeface="Calibri"/>
                         </a:rPr>
-                        <a:t>237</a:t>
+                        <a:t>—</a:t>
                       </a:r>
                     </a:p>
                   </a:txBody>
@@ -9415,7 +9380,7 @@
                           </a:solidFill>
                           <a:latin typeface="Calibri"/>
                         </a:rPr>
-                        <a:t>251</a:t>
+                        <a:t>—</a:t>
                       </a:r>
                     </a:p>
                   </a:txBody>
@@ -9450,41 +9415,6 @@
           </a:graphicData>
         </a:graphic>
       </p:graphicFrame>
-      <p:sp>
-        <p:nvSpPr>
-          <p:cNvPr id="20" name="TextBox 19"/>
-          <p:cNvSpPr txBox="1"/>
-          <p:nvPr/>
-        </p:nvSpPr>
-        <p:spPr>
-          <a:xfrm>
-            <a:off x="367200" y="3916800"/>
-            <a:ext cx="8413200" cy="547200"/>
-          </a:xfrm>
-          <a:prstGeom prst="rect">
-            <a:avLst/>
-          </a:prstGeom>
-          <a:noFill/>
-        </p:spPr>
-        <p:txBody>
-          <a:bodyPr wrap="square">
-            <a:spAutoFit/>
-          </a:bodyPr>
-          <a:lstStyle/>
-          <a:p>
-            <a:pPr algn="l"/>
-            <a:r>
-              <a:rPr sz="850" b="0" i="0">
-                <a:solidFill>
-                  <a:srgbClr val="555555"/>
-                </a:solidFill>
-                <a:latin typeface="Calibri"/>
-              </a:rPr>
-              <a:t>Avec un WACC de 10.4% et une TGR de 3.0%, le prix implicite DCF est de 275$ (vs cours 248.8$), soit un upside de 10.5%. La prime de croissance semble partiellement intégrée, mais les catalyseurs (IA, Chine) pourraient justifier une réévaluation à la hausse si exécutés avec succès.</a:t>
-            </a:r>
-          </a:p>
-        </p:txBody>
-      </p:sp>
     </p:spTree>
   </p:cSld>
   <p:clrMapOvr>
@@ -10094,7 +10024,7 @@
         </p:nvGraphicFramePr>
         <p:xfrm>
           <a:off x="367200" y="914400"/>
-          <a:ext cx="8413200" cy="2015999"/>
+          <a:ext cx="8413200" cy="871200"/>
         </p:xfrm>
         <a:graphic>
           <a:graphicData uri="http://schemas.openxmlformats.org/drawingml/2006/table">
@@ -10112,7 +10042,7 @@
                 <a:gridCol w="1093716"/>
                 <a:gridCol w="1009584"/>
               </a:tblGrid>
-              <a:tr h="251999">
+              <a:tr h="290400">
                 <a:tc>
                   <a:txBody>
                     <a:bodyPr/>
@@ -10298,7 +10228,7 @@
                   </a:tcPr>
                 </a:tc>
               </a:tr>
-              <a:tr h="251999">
+              <a:tr h="290400">
                 <a:tc>
                   <a:txBody>
                     <a:bodyPr/>
@@ -10484,937 +10414,7 @@
                   </a:tcPr>
                 </a:tc>
               </a:tr>
-              <a:tr h="251999">
-                <a:tc>
-                  <a:txBody>
-                    <a:bodyPr/>
-                    <a:lstStyle/>
-                    <a:p>
-                      <a:pPr algn="l"/>
-                      <a:r>
-                        <a:rPr sz="800" b="0" i="0">
-                          <a:solidFill>
-                            <a:srgbClr val="0D0D0D"/>
-                          </a:solidFill>
-                          <a:latin typeface="Calibri"/>
-                        </a:rPr>
-                        <a:t>Samsung Electronics</a:t>
-                      </a:r>
-                    </a:p>
-                  </a:txBody>
-                  <a:tcPr>
-                    <a:solidFill>
-                      <a:srgbClr val="FFFFFF"/>
-                    </a:solidFill>
-                  </a:tcPr>
-                </a:tc>
-                <a:tc>
-                  <a:txBody>
-                    <a:bodyPr/>
-                    <a:lstStyle/>
-                    <a:p>
-                      <a:pPr algn="ctr"/>
-                      <a:r>
-                        <a:rPr sz="750" b="0" i="0">
-                          <a:solidFill>
-                            <a:srgbClr val="555555"/>
-                          </a:solidFill>
-                          <a:latin typeface="Calibri"/>
-                        </a:rPr>
-                        <a:t>005930.KS</a:t>
-                      </a:r>
-                    </a:p>
-                  </a:txBody>
-                  <a:tcPr>
-                    <a:solidFill>
-                      <a:srgbClr val="FFFFFF"/>
-                    </a:solidFill>
-                  </a:tcPr>
-                </a:tc>
-                <a:tc>
-                  <a:txBody>
-                    <a:bodyPr/>
-                    <a:lstStyle/>
-                    <a:p>
-                      <a:pPr algn="ctr"/>
-                      <a:r>
-                        <a:rPr sz="800" b="0" i="0">
-                          <a:solidFill>
-                            <a:srgbClr val="0D0D0D"/>
-                          </a:solidFill>
-                          <a:latin typeface="Calibri"/>
-                        </a:rPr>
-                        <a:t>450,0</a:t>
-                      </a:r>
-                    </a:p>
-                  </a:txBody>
-                  <a:tcPr>
-                    <a:solidFill>
-                      <a:srgbClr val="FFFFFF"/>
-                    </a:solidFill>
-                  </a:tcPr>
-                </a:tc>
-                <a:tc>
-                  <a:txBody>
-                    <a:bodyPr/>
-                    <a:lstStyle/>
-                    <a:p>
-                      <a:pPr algn="ctr"/>
-                      <a:r>
-                        <a:rPr sz="800" b="0" i="0">
-                          <a:solidFill>
-                            <a:srgbClr val="0D0D0D"/>
-                          </a:solidFill>
-                          <a:latin typeface="Calibri"/>
-                        </a:rPr>
-                        <a:t>6,8x</a:t>
-                      </a:r>
-                    </a:p>
-                  </a:txBody>
-                  <a:tcPr>
-                    <a:solidFill>
-                      <a:srgbClr val="FFFFFF"/>
-                    </a:solidFill>
-                  </a:tcPr>
-                </a:tc>
-                <a:tc>
-                  <a:txBody>
-                    <a:bodyPr/>
-                    <a:lstStyle/>
-                    <a:p>
-                      <a:pPr algn="ctr"/>
-                      <a:r>
-                        <a:rPr sz="800" b="0" i="0">
-                          <a:solidFill>
-                            <a:srgbClr val="0D0D0D"/>
-                          </a:solidFill>
-                          <a:latin typeface="Calibri"/>
-                        </a:rPr>
-                        <a:t>1,2x</a:t>
-                      </a:r>
-                    </a:p>
-                  </a:txBody>
-                  <a:tcPr>
-                    <a:solidFill>
-                      <a:srgbClr val="FFFFFF"/>
-                    </a:solidFill>
-                  </a:tcPr>
-                </a:tc>
-                <a:tc>
-                  <a:txBody>
-                    <a:bodyPr/>
-                    <a:lstStyle/>
-                    <a:p>
-                      <a:pPr algn="ctr"/>
-                      <a:r>
-                        <a:rPr sz="800" b="0" i="0">
-                          <a:solidFill>
-                            <a:srgbClr val="0D0D0D"/>
-                          </a:solidFill>
-                          <a:latin typeface="Calibri"/>
-                        </a:rPr>
-                        <a:t>15,2x</a:t>
-                      </a:r>
-                    </a:p>
-                  </a:txBody>
-                  <a:tcPr>
-                    <a:solidFill>
-                      <a:srgbClr val="FFFFFF"/>
-                    </a:solidFill>
-                  </a:tcPr>
-                </a:tc>
-                <a:tc>
-                  <a:txBody>
-                    <a:bodyPr/>
-                    <a:lstStyle/>
-                    <a:p>
-                      <a:pPr algn="ctr"/>
-                      <a:r>
-                        <a:rPr sz="800" b="0" i="0">
-                          <a:solidFill>
-                            <a:srgbClr val="0D0D0D"/>
-                          </a:solidFill>
-                          <a:latin typeface="Calibri"/>
-                        </a:rPr>
-                        <a:t>38,0 %</a:t>
-                      </a:r>
-                    </a:p>
-                  </a:txBody>
-                  <a:tcPr>
-                    <a:solidFill>
-                      <a:srgbClr val="FFFFFF"/>
-                    </a:solidFill>
-                  </a:tcPr>
-                </a:tc>
-                <a:tc>
-                  <a:txBody>
-                    <a:bodyPr/>
-                    <a:lstStyle/>
-                    <a:p>
-                      <a:pPr algn="ctr"/>
-                      <a:r>
-                        <a:rPr sz="800" b="0" i="0">
-                          <a:solidFill>
-                            <a:srgbClr val="0D0D0D"/>
-                          </a:solidFill>
-                          <a:latin typeface="Calibri"/>
-                        </a:rPr>
-                        <a:t>22,0 %</a:t>
-                      </a:r>
-                    </a:p>
-                  </a:txBody>
-                  <a:tcPr>
-                    <a:solidFill>
-                      <a:srgbClr val="FFFFFF"/>
-                    </a:solidFill>
-                  </a:tcPr>
-                </a:tc>
-              </a:tr>
-              <a:tr h="251999">
-                <a:tc>
-                  <a:txBody>
-                    <a:bodyPr/>
-                    <a:lstStyle/>
-                    <a:p>
-                      <a:pPr algn="l"/>
-                      <a:r>
-                        <a:rPr sz="800" b="0" i="0">
-                          <a:solidFill>
-                            <a:srgbClr val="0D0D0D"/>
-                          </a:solidFill>
-                          <a:latin typeface="Calibri"/>
-                        </a:rPr>
-                        <a:t>Microsoft</a:t>
-                      </a:r>
-                    </a:p>
-                  </a:txBody>
-                  <a:tcPr>
-                    <a:solidFill>
-                      <a:srgbClr val="F7F8FA"/>
-                    </a:solidFill>
-                  </a:tcPr>
-                </a:tc>
-                <a:tc>
-                  <a:txBody>
-                    <a:bodyPr/>
-                    <a:lstStyle/>
-                    <a:p>
-                      <a:pPr algn="ctr"/>
-                      <a:r>
-                        <a:rPr sz="750" b="0" i="0">
-                          <a:solidFill>
-                            <a:srgbClr val="555555"/>
-                          </a:solidFill>
-                          <a:latin typeface="Calibri"/>
-                        </a:rPr>
-                        <a:t>MSFT</a:t>
-                      </a:r>
-                    </a:p>
-                  </a:txBody>
-                  <a:tcPr>
-                    <a:solidFill>
-                      <a:srgbClr val="F7F8FA"/>
-                    </a:solidFill>
-                  </a:tcPr>
-                </a:tc>
-                <a:tc>
-                  <a:txBody>
-                    <a:bodyPr/>
-                    <a:lstStyle/>
-                    <a:p>
-                      <a:pPr algn="ctr"/>
-                      <a:r>
-                        <a:rPr sz="800" b="0" i="0">
-                          <a:solidFill>
-                            <a:srgbClr val="0D0D0D"/>
-                          </a:solidFill>
-                          <a:latin typeface="Calibri"/>
-                        </a:rPr>
-                        <a:t>3 100,0</a:t>
-                      </a:r>
-                    </a:p>
-                  </a:txBody>
-                  <a:tcPr>
-                    <a:solidFill>
-                      <a:srgbClr val="F7F8FA"/>
-                    </a:solidFill>
-                  </a:tcPr>
-                </a:tc>
-                <a:tc>
-                  <a:txBody>
-                    <a:bodyPr/>
-                    <a:lstStyle/>
-                    <a:p>
-                      <a:pPr algn="ctr"/>
-                      <a:r>
-                        <a:rPr sz="800" b="0" i="0">
-                          <a:solidFill>
-                            <a:srgbClr val="0D0D0D"/>
-                          </a:solidFill>
-                          <a:latin typeface="Calibri"/>
-                        </a:rPr>
-                        <a:t>22,5x</a:t>
-                      </a:r>
-                    </a:p>
-                  </a:txBody>
-                  <a:tcPr>
-                    <a:solidFill>
-                      <a:srgbClr val="F7F8FA"/>
-                    </a:solidFill>
-                  </a:tcPr>
-                </a:tc>
-                <a:tc>
-                  <a:txBody>
-                    <a:bodyPr/>
-                    <a:lstStyle/>
-                    <a:p>
-                      <a:pPr algn="ctr"/>
-                      <a:r>
-                        <a:rPr sz="800" b="0" i="0">
-                          <a:solidFill>
-                            <a:srgbClr val="0D0D0D"/>
-                          </a:solidFill>
-                          <a:latin typeface="Calibri"/>
-                        </a:rPr>
-                        <a:t>8,9x</a:t>
-                      </a:r>
-                    </a:p>
-                  </a:txBody>
-                  <a:tcPr>
-                    <a:solidFill>
-                      <a:srgbClr val="F7F8FA"/>
-                    </a:solidFill>
-                  </a:tcPr>
-                </a:tc>
-                <a:tc>
-                  <a:txBody>
-                    <a:bodyPr/>
-                    <a:lstStyle/>
-                    <a:p>
-                      <a:pPr algn="ctr"/>
-                      <a:r>
-                        <a:rPr sz="800" b="0" i="0">
-                          <a:solidFill>
-                            <a:srgbClr val="0D0D0D"/>
-                          </a:solidFill>
-                          <a:latin typeface="Calibri"/>
-                        </a:rPr>
-                        <a:t>38,1x</a:t>
-                      </a:r>
-                    </a:p>
-                  </a:txBody>
-                  <a:tcPr>
-                    <a:solidFill>
-                      <a:srgbClr val="F7F8FA"/>
-                    </a:solidFill>
-                  </a:tcPr>
-                </a:tc>
-                <a:tc>
-                  <a:txBody>
-                    <a:bodyPr/>
-                    <a:lstStyle/>
-                    <a:p>
-                      <a:pPr algn="ctr"/>
-                      <a:r>
-                        <a:rPr sz="800" b="0" i="0">
-                          <a:solidFill>
-                            <a:srgbClr val="0D0D0D"/>
-                          </a:solidFill>
-                          <a:latin typeface="Calibri"/>
-                        </a:rPr>
-                        <a:t>68,0 %</a:t>
-                      </a:r>
-                    </a:p>
-                  </a:txBody>
-                  <a:tcPr>
-                    <a:solidFill>
-                      <a:srgbClr val="F7F8FA"/>
-                    </a:solidFill>
-                  </a:tcPr>
-                </a:tc>
-                <a:tc>
-                  <a:txBody>
-                    <a:bodyPr/>
-                    <a:lstStyle/>
-                    <a:p>
-                      <a:pPr algn="ctr"/>
-                      <a:r>
-                        <a:rPr sz="800" b="0" i="0">
-                          <a:solidFill>
-                            <a:srgbClr val="0D0D0D"/>
-                          </a:solidFill>
-                          <a:latin typeface="Calibri"/>
-                        </a:rPr>
-                        <a:t>48,0 %</a:t>
-                      </a:r>
-                    </a:p>
-                  </a:txBody>
-                  <a:tcPr>
-                    <a:solidFill>
-                      <a:srgbClr val="F7F8FA"/>
-                    </a:solidFill>
-                  </a:tcPr>
-                </a:tc>
-              </a:tr>
-              <a:tr h="251999">
-                <a:tc>
-                  <a:txBody>
-                    <a:bodyPr/>
-                    <a:lstStyle/>
-                    <a:p>
-                      <a:pPr algn="l"/>
-                      <a:r>
-                        <a:rPr sz="800" b="0" i="0">
-                          <a:solidFill>
-                            <a:srgbClr val="0D0D0D"/>
-                          </a:solidFill>
-                          <a:latin typeface="Calibri"/>
-                        </a:rPr>
-                        <a:t>Alphabet</a:t>
-                      </a:r>
-                    </a:p>
-                  </a:txBody>
-                  <a:tcPr>
-                    <a:solidFill>
-                      <a:srgbClr val="FFFFFF"/>
-                    </a:solidFill>
-                  </a:tcPr>
-                </a:tc>
-                <a:tc>
-                  <a:txBody>
-                    <a:bodyPr/>
-                    <a:lstStyle/>
-                    <a:p>
-                      <a:pPr algn="ctr"/>
-                      <a:r>
-                        <a:rPr sz="750" b="0" i="0">
-                          <a:solidFill>
-                            <a:srgbClr val="555555"/>
-                          </a:solidFill>
-                          <a:latin typeface="Calibri"/>
-                        </a:rPr>
-                        <a:t>GOOGL</a:t>
-                      </a:r>
-                    </a:p>
-                  </a:txBody>
-                  <a:tcPr>
-                    <a:solidFill>
-                      <a:srgbClr val="FFFFFF"/>
-                    </a:solidFill>
-                  </a:tcPr>
-                </a:tc>
-                <a:tc>
-                  <a:txBody>
-                    <a:bodyPr/>
-                    <a:lstStyle/>
-                    <a:p>
-                      <a:pPr algn="ctr"/>
-                      <a:r>
-                        <a:rPr sz="800" b="0" i="0">
-                          <a:solidFill>
-                            <a:srgbClr val="0D0D0D"/>
-                          </a:solidFill>
-                          <a:latin typeface="Calibri"/>
-                        </a:rPr>
-                        <a:t>2 000,0</a:t>
-                      </a:r>
-                    </a:p>
-                  </a:txBody>
-                  <a:tcPr>
-                    <a:solidFill>
-                      <a:srgbClr val="FFFFFF"/>
-                    </a:solidFill>
-                  </a:tcPr>
-                </a:tc>
-                <a:tc>
-                  <a:txBody>
-                    <a:bodyPr/>
-                    <a:lstStyle/>
-                    <a:p>
-                      <a:pPr algn="ctr"/>
-                      <a:r>
-                        <a:rPr sz="800" b="0" i="0">
-                          <a:solidFill>
-                            <a:srgbClr val="0D0D0D"/>
-                          </a:solidFill>
-                          <a:latin typeface="Calibri"/>
-                        </a:rPr>
-                        <a:t>18,7x</a:t>
-                      </a:r>
-                    </a:p>
-                  </a:txBody>
-                  <a:tcPr>
-                    <a:solidFill>
-                      <a:srgbClr val="FFFFFF"/>
-                    </a:solidFill>
-                  </a:tcPr>
-                </a:tc>
-                <a:tc>
-                  <a:txBody>
-                    <a:bodyPr/>
-                    <a:lstStyle/>
-                    <a:p>
-                      <a:pPr algn="ctr"/>
-                      <a:r>
-                        <a:rPr sz="800" b="0" i="0">
-                          <a:solidFill>
-                            <a:srgbClr val="0D0D0D"/>
-                          </a:solidFill>
-                          <a:latin typeface="Calibri"/>
-                        </a:rPr>
-                        <a:t>7,2x</a:t>
-                      </a:r>
-                    </a:p>
-                  </a:txBody>
-                  <a:tcPr>
-                    <a:solidFill>
-                      <a:srgbClr val="FFFFFF"/>
-                    </a:solidFill>
-                  </a:tcPr>
-                </a:tc>
-                <a:tc>
-                  <a:txBody>
-                    <a:bodyPr/>
-                    <a:lstStyle/>
-                    <a:p>
-                      <a:pPr algn="ctr"/>
-                      <a:r>
-                        <a:rPr sz="800" b="0" i="0">
-                          <a:solidFill>
-                            <a:srgbClr val="0D0D0D"/>
-                          </a:solidFill>
-                          <a:latin typeface="Calibri"/>
-                        </a:rPr>
-                        <a:t>26,4x</a:t>
-                      </a:r>
-                    </a:p>
-                  </a:txBody>
-                  <a:tcPr>
-                    <a:solidFill>
-                      <a:srgbClr val="FFFFFF"/>
-                    </a:solidFill>
-                  </a:tcPr>
-                </a:tc>
-                <a:tc>
-                  <a:txBody>
-                    <a:bodyPr/>
-                    <a:lstStyle/>
-                    <a:p>
-                      <a:pPr algn="ctr"/>
-                      <a:r>
-                        <a:rPr sz="800" b="0" i="0">
-                          <a:solidFill>
-                            <a:srgbClr val="0D0D0D"/>
-                          </a:solidFill>
-                          <a:latin typeface="Calibri"/>
-                        </a:rPr>
-                        <a:t>56,0 %</a:t>
-                      </a:r>
-                    </a:p>
-                  </a:txBody>
-                  <a:tcPr>
-                    <a:solidFill>
-                      <a:srgbClr val="FFFFFF"/>
-                    </a:solidFill>
-                  </a:tcPr>
-                </a:tc>
-                <a:tc>
-                  <a:txBody>
-                    <a:bodyPr/>
-                    <a:lstStyle/>
-                    <a:p>
-                      <a:pPr algn="ctr"/>
-                      <a:r>
-                        <a:rPr sz="800" b="0" i="0">
-                          <a:solidFill>
-                            <a:srgbClr val="0D0D0D"/>
-                          </a:solidFill>
-                          <a:latin typeface="Calibri"/>
-                        </a:rPr>
-                        <a:t>38,0 %</a:t>
-                      </a:r>
-                    </a:p>
-                  </a:txBody>
-                  <a:tcPr>
-                    <a:solidFill>
-                      <a:srgbClr val="FFFFFF"/>
-                    </a:solidFill>
-                  </a:tcPr>
-                </a:tc>
-              </a:tr>
-              <a:tr h="251999">
-                <a:tc>
-                  <a:txBody>
-                    <a:bodyPr/>
-                    <a:lstStyle/>
-                    <a:p>
-                      <a:pPr algn="l"/>
-                      <a:r>
-                        <a:rPr sz="800" b="0" i="0">
-                          <a:solidFill>
-                            <a:srgbClr val="0D0D0D"/>
-                          </a:solidFill>
-                          <a:latin typeface="Calibri"/>
-                        </a:rPr>
-                        <a:t>Meta Platforms</a:t>
-                      </a:r>
-                    </a:p>
-                  </a:txBody>
-                  <a:tcPr>
-                    <a:solidFill>
-                      <a:srgbClr val="F7F8FA"/>
-                    </a:solidFill>
-                  </a:tcPr>
-                </a:tc>
-                <a:tc>
-                  <a:txBody>
-                    <a:bodyPr/>
-                    <a:lstStyle/>
-                    <a:p>
-                      <a:pPr algn="ctr"/>
-                      <a:r>
-                        <a:rPr sz="750" b="0" i="0">
-                          <a:solidFill>
-                            <a:srgbClr val="555555"/>
-                          </a:solidFill>
-                          <a:latin typeface="Calibri"/>
-                        </a:rPr>
-                        <a:t>META</a:t>
-                      </a:r>
-                    </a:p>
-                  </a:txBody>
-                  <a:tcPr>
-                    <a:solidFill>
-                      <a:srgbClr val="F7F8FA"/>
-                    </a:solidFill>
-                  </a:tcPr>
-                </a:tc>
-                <a:tc>
-                  <a:txBody>
-                    <a:bodyPr/>
-                    <a:lstStyle/>
-                    <a:p>
-                      <a:pPr algn="ctr"/>
-                      <a:r>
-                        <a:rPr sz="800" b="0" i="0">
-                          <a:solidFill>
-                            <a:srgbClr val="0D0D0D"/>
-                          </a:solidFill>
-                          <a:latin typeface="Calibri"/>
-                        </a:rPr>
-                        <a:t>1 500,0</a:t>
-                      </a:r>
-                    </a:p>
-                  </a:txBody>
-                  <a:tcPr>
-                    <a:solidFill>
-                      <a:srgbClr val="F7F8FA"/>
-                    </a:solidFill>
-                  </a:tcPr>
-                </a:tc>
-                <a:tc>
-                  <a:txBody>
-                    <a:bodyPr/>
-                    <a:lstStyle/>
-                    <a:p>
-                      <a:pPr algn="ctr"/>
-                      <a:r>
-                        <a:rPr sz="800" b="0" i="0">
-                          <a:solidFill>
-                            <a:srgbClr val="0D0D0D"/>
-                          </a:solidFill>
-                          <a:latin typeface="Calibri"/>
-                        </a:rPr>
-                        <a:t>14,3x</a:t>
-                      </a:r>
-                    </a:p>
-                  </a:txBody>
-                  <a:tcPr>
-                    <a:solidFill>
-                      <a:srgbClr val="F7F8FA"/>
-                    </a:solidFill>
-                  </a:tcPr>
-                </a:tc>
-                <a:tc>
-                  <a:txBody>
-                    <a:bodyPr/>
-                    <a:lstStyle/>
-                    <a:p>
-                      <a:pPr algn="ctr"/>
-                      <a:r>
-                        <a:rPr sz="800" b="0" i="0">
-                          <a:solidFill>
-                            <a:srgbClr val="0D0D0D"/>
-                          </a:solidFill>
-                          <a:latin typeface="Calibri"/>
-                        </a:rPr>
-                        <a:t>8,1x</a:t>
-                      </a:r>
-                    </a:p>
-                  </a:txBody>
-                  <a:tcPr>
-                    <a:solidFill>
-                      <a:srgbClr val="F7F8FA"/>
-                    </a:solidFill>
-                  </a:tcPr>
-                </a:tc>
-                <a:tc>
-                  <a:txBody>
-                    <a:bodyPr/>
-                    <a:lstStyle/>
-                    <a:p>
-                      <a:pPr algn="ctr"/>
-                      <a:r>
-                        <a:rPr sz="800" b="0" i="0">
-                          <a:solidFill>
-                            <a:srgbClr val="0D0D0D"/>
-                          </a:solidFill>
-                          <a:latin typeface="Calibri"/>
-                        </a:rPr>
-                        <a:t>24,8x</a:t>
-                      </a:r>
-                    </a:p>
-                  </a:txBody>
-                  <a:tcPr>
-                    <a:solidFill>
-                      <a:srgbClr val="F7F8FA"/>
-                    </a:solidFill>
-                  </a:tcPr>
-                </a:tc>
-                <a:tc>
-                  <a:txBody>
-                    <a:bodyPr/>
-                    <a:lstStyle/>
-                    <a:p>
-                      <a:pPr algn="ctr"/>
-                      <a:r>
-                        <a:rPr sz="800" b="0" i="0">
-                          <a:solidFill>
-                            <a:srgbClr val="0D0D0D"/>
-                          </a:solidFill>
-                          <a:latin typeface="Calibri"/>
-                        </a:rPr>
-                        <a:t>88,0 %</a:t>
-                      </a:r>
-                    </a:p>
-                  </a:txBody>
-                  <a:tcPr>
-                    <a:solidFill>
-                      <a:srgbClr val="F7F8FA"/>
-                    </a:solidFill>
-                  </a:tcPr>
-                </a:tc>
-                <a:tc>
-                  <a:txBody>
-                    <a:bodyPr/>
-                    <a:lstStyle/>
-                    <a:p>
-                      <a:pPr algn="ctr"/>
-                      <a:r>
-                        <a:rPr sz="800" b="0" i="0">
-                          <a:solidFill>
-                            <a:srgbClr val="0D0D0D"/>
-                          </a:solidFill>
-                          <a:latin typeface="Calibri"/>
-                        </a:rPr>
-                        <a:t>55,0 %</a:t>
-                      </a:r>
-                    </a:p>
-                  </a:txBody>
-                  <a:tcPr>
-                    <a:solidFill>
-                      <a:srgbClr val="F7F8FA"/>
-                    </a:solidFill>
-                  </a:tcPr>
-                </a:tc>
-              </a:tr>
-              <a:tr h="251999">
-                <a:tc>
-                  <a:txBody>
-                    <a:bodyPr/>
-                    <a:lstStyle/>
-                    <a:p>
-                      <a:pPr algn="l"/>
-                      <a:r>
-                        <a:rPr sz="800" b="0" i="0">
-                          <a:solidFill>
-                            <a:srgbClr val="0D0D0D"/>
-                          </a:solidFill>
-                          <a:latin typeface="Calibri"/>
-                        </a:rPr>
-                        <a:t>TSMC</a:t>
-                      </a:r>
-                    </a:p>
-                  </a:txBody>
-                  <a:tcPr>
-                    <a:solidFill>
-                      <a:srgbClr val="FFFFFF"/>
-                    </a:solidFill>
-                  </a:tcPr>
-                </a:tc>
-                <a:tc>
-                  <a:txBody>
-                    <a:bodyPr/>
-                    <a:lstStyle/>
-                    <a:p>
-                      <a:pPr algn="ctr"/>
-                      <a:r>
-                        <a:rPr sz="750" b="0" i="0">
-                          <a:solidFill>
-                            <a:srgbClr val="555555"/>
-                          </a:solidFill>
-                          <a:latin typeface="Calibri"/>
-                        </a:rPr>
-                        <a:t>TSM</a:t>
-                      </a:r>
-                    </a:p>
-                  </a:txBody>
-                  <a:tcPr>
-                    <a:solidFill>
-                      <a:srgbClr val="FFFFFF"/>
-                    </a:solidFill>
-                  </a:tcPr>
-                </a:tc>
-                <a:tc>
-                  <a:txBody>
-                    <a:bodyPr/>
-                    <a:lstStyle/>
-                    <a:p>
-                      <a:pPr algn="ctr"/>
-                      <a:r>
-                        <a:rPr sz="800" b="0" i="0">
-                          <a:solidFill>
-                            <a:srgbClr val="0D0D0D"/>
-                          </a:solidFill>
-                          <a:latin typeface="Calibri"/>
-                        </a:rPr>
-                        <a:t>500,0</a:t>
-                      </a:r>
-                    </a:p>
-                  </a:txBody>
-                  <a:tcPr>
-                    <a:solidFill>
-                      <a:srgbClr val="FFFFFF"/>
-                    </a:solidFill>
-                  </a:tcPr>
-                </a:tc>
-                <a:tc>
-                  <a:txBody>
-                    <a:bodyPr/>
-                    <a:lstStyle/>
-                    <a:p>
-                      <a:pPr algn="ctr"/>
-                      <a:r>
-                        <a:rPr sz="800" b="0" i="0">
-                          <a:solidFill>
-                            <a:srgbClr val="0D0D0D"/>
-                          </a:solidFill>
-                          <a:latin typeface="Calibri"/>
-                        </a:rPr>
-                        <a:t>12,1x</a:t>
-                      </a:r>
-                    </a:p>
-                  </a:txBody>
-                  <a:tcPr>
-                    <a:solidFill>
-                      <a:srgbClr val="FFFFFF"/>
-                    </a:solidFill>
-                  </a:tcPr>
-                </a:tc>
-                <a:tc>
-                  <a:txBody>
-                    <a:bodyPr/>
-                    <a:lstStyle/>
-                    <a:p>
-                      <a:pPr algn="ctr"/>
-                      <a:r>
-                        <a:rPr sz="800" b="0" i="0">
-                          <a:solidFill>
-                            <a:srgbClr val="0D0D0D"/>
-                          </a:solidFill>
-                          <a:latin typeface="Calibri"/>
-                        </a:rPr>
-                        <a:t>7,5x</a:t>
-                      </a:r>
-                    </a:p>
-                  </a:txBody>
-                  <a:tcPr>
-                    <a:solidFill>
-                      <a:srgbClr val="FFFFFF"/>
-                    </a:solidFill>
-                  </a:tcPr>
-                </a:tc>
-                <a:tc>
-                  <a:txBody>
-                    <a:bodyPr/>
-                    <a:lstStyle/>
-                    <a:p>
-                      <a:pPr algn="ctr"/>
-                      <a:r>
-                        <a:rPr sz="800" b="0" i="0">
-                          <a:solidFill>
-                            <a:srgbClr val="0D0D0D"/>
-                          </a:solidFill>
-                          <a:latin typeface="Calibri"/>
-                        </a:rPr>
-                        <a:t>20,5x</a:t>
-                      </a:r>
-                    </a:p>
-                  </a:txBody>
-                  <a:tcPr>
-                    <a:solidFill>
-                      <a:srgbClr val="FFFFFF"/>
-                    </a:solidFill>
-                  </a:tcPr>
-                </a:tc>
-                <a:tc>
-                  <a:txBody>
-                    <a:bodyPr/>
-                    <a:lstStyle/>
-                    <a:p>
-                      <a:pPr algn="ctr"/>
-                      <a:r>
-                        <a:rPr sz="800" b="0" i="0">
-                          <a:solidFill>
-                            <a:srgbClr val="0D0D0D"/>
-                          </a:solidFill>
-                          <a:latin typeface="Calibri"/>
-                        </a:rPr>
-                        <a:t>52,0 %</a:t>
-                      </a:r>
-                    </a:p>
-                  </a:txBody>
-                  <a:tcPr>
-                    <a:solidFill>
-                      <a:srgbClr val="FFFFFF"/>
-                    </a:solidFill>
-                  </a:tcPr>
-                </a:tc>
-                <a:tc>
-                  <a:txBody>
-                    <a:bodyPr/>
-                    <a:lstStyle/>
-                    <a:p>
-                      <a:pPr algn="ctr"/>
-                      <a:r>
-                        <a:rPr sz="800" b="0" i="0">
-                          <a:solidFill>
-                            <a:srgbClr val="0D0D0D"/>
-                          </a:solidFill>
-                          <a:latin typeface="Calibri"/>
-                        </a:rPr>
-                        <a:t>45,0 %</a:t>
-                      </a:r>
-                    </a:p>
-                  </a:txBody>
-                  <a:tcPr>
-                    <a:solidFill>
-                      <a:srgbClr val="FFFFFF"/>
-                    </a:solidFill>
-                  </a:tcPr>
-                </a:tc>
-              </a:tr>
-              <a:tr h="252006">
+              <a:tr h="290400">
                 <a:tc>
                   <a:txBody>
                     <a:bodyPr/>
@@ -11497,7 +10497,7 @@
                           </a:solidFill>
                           <a:latin typeface="Calibri"/>
                         </a:rPr>
-                        <a:t>14,3x</a:t>
+                        <a:t>—</a:t>
                       </a:r>
                     </a:p>
                   </a:txBody>
@@ -11520,7 +10520,7 @@
                           </a:solidFill>
                           <a:latin typeface="Calibri"/>
                         </a:rPr>
-                        <a:t>7,5x</a:t>
+                        <a:t>—</a:t>
                       </a:r>
                     </a:p>
                   </a:txBody>
@@ -11543,7 +10543,7 @@
                           </a:solidFill>
                           <a:latin typeface="Calibri"/>
                         </a:rPr>
-                        <a:t>24,8x</a:t>
+                        <a:t>—</a:t>
                       </a:r>
                     </a:p>
                   </a:txBody>
@@ -11566,7 +10566,7 @@
                           </a:solidFill>
                           <a:latin typeface="Calibri"/>
                         </a:rPr>
-                        <a:t>56,0 %</a:t>
+                        <a:t>—</a:t>
                       </a:r>
                     </a:p>
                   </a:txBody>
@@ -11589,7 +10589,7 @@
                           </a:solidFill>
                           <a:latin typeface="Calibri"/>
                         </a:rPr>
-                        <a:t>45,0 %</a:t>
+                        <a:t>—</a:t>
                       </a:r>
                     </a:p>
                   </a:txBody>
@@ -11604,41 +10604,6 @@
           </a:graphicData>
         </a:graphic>
       </p:graphicFrame>
-      <p:sp>
-        <p:nvSpPr>
-          <p:cNvPr id="18" name="TextBox 17"/>
-          <p:cNvSpPr txBox="1"/>
-          <p:nvPr/>
-        </p:nvSpPr>
-        <p:spPr>
-          <a:xfrm>
-            <a:off x="367200" y="3128400"/>
-            <a:ext cx="8413200" cy="1234800"/>
-          </a:xfrm>
-          <a:prstGeom prst="rect">
-            <a:avLst/>
-          </a:prstGeom>
-          <a:noFill/>
-        </p:spPr>
-        <p:txBody>
-          <a:bodyPr wrap="square">
-            <a:spAutoFit/>
-          </a:bodyPr>
-          <a:lstStyle/>
-          <a:p>
-            <a:pPr algn="l"/>
-            <a:r>
-              <a:rPr sz="850" b="0" i="0">
-                <a:solidFill>
-                  <a:srgbClr val="555555"/>
-                </a:solidFill>
-                <a:latin typeface="Calibri"/>
-              </a:rPr>
-              <a:t>Apple se traite à 32.6x P/E vs 24.8x pour la médiane peers (Samsung, Microsoft, Alphabet, Meta, TSMC). La prime de 31% est justifiée par la qualité des actifs (marges, trésorerie) et la récurrence des revenus services. Une convergence vers la médiane impliquerait un downside de 24%, mais la prime semble durable compte tenu des avantages concurrentiels.</a:t>
-            </a:r>
-          </a:p>
-        </p:txBody>
-      </p:sp>
     </p:spTree>
   </p:cSld>
   <p:clrMapOvr>
@@ -12238,65 +11203,222 @@
           </a:p>
         </p:txBody>
       </p:sp>
-      <p:pic>
-        <p:nvPicPr>
-          <p:cNvPr id="17" name="Picture 16" descr="image.png"/>
-          <p:cNvPicPr>
-            <a:picLocks noChangeAspect="1"/>
-          </p:cNvPicPr>
-          <p:nvPr/>
-        </p:nvPicPr>
-        <p:blipFill>
-          <a:blip r:embed="rId2"/>
-          <a:stretch>
-            <a:fillRect/>
-          </a:stretch>
-        </p:blipFill>
-        <p:spPr>
-          <a:xfrm>
-            <a:off x="367200" y="914400"/>
-            <a:ext cx="8413200" cy="2448000"/>
-          </a:xfrm>
-          <a:prstGeom prst="rect">
-            <a:avLst/>
-          </a:prstGeom>
-        </p:spPr>
-      </p:pic>
-      <p:sp>
-        <p:nvSpPr>
-          <p:cNvPr id="18" name="TextBox 17"/>
-          <p:cNvSpPr txBox="1"/>
-          <p:nvPr/>
-        </p:nvSpPr>
-        <p:spPr>
-          <a:xfrm>
-            <a:off x="367200" y="3488400"/>
-            <a:ext cx="8413200" cy="914400"/>
-          </a:xfrm>
-          <a:prstGeom prst="rect">
-            <a:avLst/>
-          </a:prstGeom>
-          <a:noFill/>
-        </p:spPr>
-        <p:txBody>
-          <a:bodyPr wrap="square">
-            <a:spAutoFit/>
-          </a:bodyPr>
-          <a:lstStyle/>
-          <a:p>
-            <a:pPr algn="l"/>
-            <a:r>
-              <a:rPr sz="850" b="0" i="0">
-                <a:solidFill>
-                  <a:srgbClr val="555555"/>
-                </a:solidFill>
-                <a:latin typeface="Calibri"/>
-              </a:rPr>
-              <a:t>Avec un WACC de 10.4% et une TGR de 3.0%, le prix implicite DCF est de 275$ (vs cours 248.8$), soit un upside de 10.5%. La prime de croissance semble partiellement intégrée, mais les catalyseurs (IA, Chine) pourraient justifier une réévaluation à la hausse si exécutés avec succès.</a:t>
-            </a:r>
-          </a:p>
-        </p:txBody>
-      </p:sp>
+      <p:graphicFrame>
+        <p:nvGraphicFramePr>
+          <p:cNvPr id="17" name="Table 16"/>
+          <p:cNvGraphicFramePr>
+            <a:graphicFrameLocks noGrp="1"/>
+          </p:cNvGraphicFramePr>
+          <p:nvPr/>
+        </p:nvGraphicFramePr>
+        <p:xfrm>
+          <a:off x="367200" y="914400"/>
+          <a:ext cx="8413200" cy="615600"/>
+        </p:xfrm>
+        <a:graphic>
+          <a:graphicData uri="http://schemas.openxmlformats.org/drawingml/2006/table">
+            <a:tbl>
+              <a:tblPr firstRow="1" bandRow="1">
+                <a:tableStyleId>{5C22544A-7EE6-4342-B048-85BDC9FD1C3A}</a:tableStyleId>
+              </a:tblPr>
+              <a:tblGrid>
+                <a:gridCol w="2944620"/>
+                <a:gridCol w="1682640"/>
+                <a:gridCol w="1682640"/>
+                <a:gridCol w="2103300"/>
+              </a:tblGrid>
+              <a:tr h="307800">
+                <a:tc>
+                  <a:txBody>
+                    <a:bodyPr/>
+                    <a:lstStyle/>
+                    <a:p>
+                      <a:pPr algn="l"/>
+                      <a:r>
+                        <a:rPr sz="800" b="1" i="0">
+                          <a:solidFill>
+                            <a:srgbClr val="FFFFFF"/>
+                          </a:solidFill>
+                          <a:latin typeface="Calibri"/>
+                        </a:rPr>
+                        <a:t>Methode</a:t>
+                      </a:r>
+                    </a:p>
+                  </a:txBody>
+                  <a:tcPr>
+                    <a:solidFill>
+                      <a:srgbClr val="1B3A6B"/>
+                    </a:solidFill>
+                  </a:tcPr>
+                </a:tc>
+                <a:tc>
+                  <a:txBody>
+                    <a:bodyPr/>
+                    <a:lstStyle/>
+                    <a:p>
+                      <a:pPr algn="ctr"/>
+                      <a:r>
+                        <a:rPr sz="800" b="1" i="0">
+                          <a:solidFill>
+                            <a:srgbClr val="FFFFFF"/>
+                          </a:solidFill>
+                          <a:latin typeface="Calibri"/>
+                        </a:rPr>
+                        <a:t>Fourchette basse</a:t>
+                      </a:r>
+                    </a:p>
+                  </a:txBody>
+                  <a:tcPr>
+                    <a:solidFill>
+                      <a:srgbClr val="1B3A6B"/>
+                    </a:solidFill>
+                  </a:tcPr>
+                </a:tc>
+                <a:tc>
+                  <a:txBody>
+                    <a:bodyPr/>
+                    <a:lstStyle/>
+                    <a:p>
+                      <a:pPr algn="ctr"/>
+                      <a:r>
+                        <a:rPr sz="800" b="1" i="0">
+                          <a:solidFill>
+                            <a:srgbClr val="FFFFFF"/>
+                          </a:solidFill>
+                          <a:latin typeface="Calibri"/>
+                        </a:rPr>
+                        <a:t>Fourchette haute</a:t>
+                      </a:r>
+                    </a:p>
+                  </a:txBody>
+                  <a:tcPr>
+                    <a:solidFill>
+                      <a:srgbClr val="1B3A6B"/>
+                    </a:solidFill>
+                  </a:tcPr>
+                </a:tc>
+                <a:tc>
+                  <a:txBody>
+                    <a:bodyPr/>
+                    <a:lstStyle/>
+                    <a:p>
+                      <a:pPr algn="ctr"/>
+                      <a:r>
+                        <a:rPr sz="800" b="1" i="0">
+                          <a:solidFill>
+                            <a:srgbClr val="FFFFFF"/>
+                          </a:solidFill>
+                          <a:latin typeface="Calibri"/>
+                        </a:rPr>
+                        <a:t>Point central</a:t>
+                      </a:r>
+                    </a:p>
+                  </a:txBody>
+                  <a:tcPr>
+                    <a:solidFill>
+                      <a:srgbClr val="1B3A6B"/>
+                    </a:solidFill>
+                  </a:tcPr>
+                </a:tc>
+              </a:tr>
+              <a:tr h="307800">
+                <a:tc>
+                  <a:txBody>
+                    <a:bodyPr/>
+                    <a:lstStyle/>
+                    <a:p>
+                      <a:pPr algn="l"/>
+                      <a:r>
+                        <a:rPr sz="800" b="0" i="0">
+                          <a:solidFill>
+                            <a:srgbClr val="0D0D0D"/>
+                          </a:solidFill>
+                          <a:latin typeface="Calibri"/>
+                        </a:rPr>
+                        <a:t>Cours actuel (248,80)</a:t>
+                      </a:r>
+                    </a:p>
+                  </a:txBody>
+                  <a:tcPr>
+                    <a:solidFill>
+                      <a:srgbClr val="EEF3FA"/>
+                    </a:solidFill>
+                  </a:tcPr>
+                </a:tc>
+                <a:tc>
+                  <a:txBody>
+                    <a:bodyPr/>
+                    <a:lstStyle/>
+                    <a:p>
+                      <a:pPr algn="ctr"/>
+                      <a:r>
+                        <a:rPr sz="800" b="0" i="0">
+                          <a:solidFill>
+                            <a:srgbClr val="0D0D0D"/>
+                          </a:solidFill>
+                          <a:latin typeface="Calibri"/>
+                        </a:rPr>
+                        <a:t>—</a:t>
+                      </a:r>
+                    </a:p>
+                  </a:txBody>
+                  <a:tcPr>
+                    <a:solidFill>
+                      <a:srgbClr val="EEF3FA"/>
+                    </a:solidFill>
+                  </a:tcPr>
+                </a:tc>
+                <a:tc>
+                  <a:txBody>
+                    <a:bodyPr/>
+                    <a:lstStyle/>
+                    <a:p>
+                      <a:pPr algn="ctr"/>
+                      <a:r>
+                        <a:rPr sz="800" b="0" i="0">
+                          <a:solidFill>
+                            <a:srgbClr val="0D0D0D"/>
+                          </a:solidFill>
+                          <a:latin typeface="Calibri"/>
+                        </a:rPr>
+                        <a:t>—</a:t>
+                      </a:r>
+                    </a:p>
+                  </a:txBody>
+                  <a:tcPr>
+                    <a:solidFill>
+                      <a:srgbClr val="EEF3FA"/>
+                    </a:solidFill>
+                  </a:tcPr>
+                </a:tc>
+                <a:tc>
+                  <a:txBody>
+                    <a:bodyPr/>
+                    <a:lstStyle/>
+                    <a:p>
+                      <a:pPr algn="ctr"/>
+                      <a:r>
+                        <a:rPr sz="800" b="0" i="0">
+                          <a:solidFill>
+                            <a:srgbClr val="0D0D0D"/>
+                          </a:solidFill>
+                          <a:latin typeface="Calibri"/>
+                        </a:rPr>
+                        <a:t>248,80</a:t>
+                      </a:r>
+                    </a:p>
+                  </a:txBody>
+                  <a:tcPr>
+                    <a:solidFill>
+                      <a:srgbClr val="EEF3FA"/>
+                    </a:solidFill>
+                  </a:tcPr>
+                </a:tc>
+              </a:tr>
+            </a:tbl>
+          </a:graphicData>
+        </a:graphic>
+      </p:graphicFrame>
     </p:spTree>
   </p:cSld>
   <p:clrMapOvr>
@@ -13265,7 +12387,7 @@
                 </a:solidFill>
                 <a:latin typeface="Calibri"/>
               </a:rPr>
-              <a:t>Dépendance iPhone 52% CA</a:t>
+              <a:t>Risque 1</a:t>
             </a:r>
           </a:p>
         </p:txBody>
@@ -13300,7 +12422,7 @@
                 </a:solidFill>
                 <a:latin typeface="Calibri"/>
               </a:rPr>
-              <a:t>Le P/E de 32.61x surpasse de 50% la moyenne du secteur (21.8x) et reflète une valorisation déjà intégrant 5 ans de croissance future; or les marges brutes &gt;45% reposent sur un mix produit vieillissant avec iPhone à 52% du CA en 2024, en baisse tendancielle depuis 2020.</a:t>
+              <a:t>Risque macro-economique : remontee des taux ou ralentissement de la demande mondiale.</a:t>
             </a:r>
           </a:p>
         </p:txBody>
@@ -13421,7 +12543,7 @@
                 </a:solidFill>
                 <a:latin typeface="Calibri"/>
               </a:rPr>
-              <a:t>Dette opérationnelle croissante</a:t>
+              <a:t>Risque 2</a:t>
             </a:r>
           </a:p>
         </p:txBody>
@@ -13456,7 +12578,7 @@
                 </a:solidFill>
                 <a:latin typeface="Calibri"/>
               </a:rPr>
-              <a:t>La trésorerie nette de 166Md$ masque une dette opérationnelle croissante avec 11.5Md$ de coûts de financement en 2023, soit 1.8x le résultat net de 6.3Md$ du segment services, fragilisant la rentabilité future.</a:t>
+              <a:t>Risque sectoriel : intensification de la concurrence ou disruption technologique.</a:t>
             </a:r>
           </a:p>
         </p:txBody>
@@ -13577,7 +12699,7 @@
                 </a:solidFill>
                 <a:latin typeface="Calibri"/>
               </a:rPr>
-              <a:t>Valorisation excessive P/E</a:t>
+              <a:t>Risque 3</a:t>
             </a:r>
           </a:p>
         </p:txBody>
@@ -13612,7 +12734,7 @@
                 </a:solidFill>
                 <a:latin typeface="Calibri"/>
               </a:rPr>
-              <a:t>L'Altman Z-score de 9.83, bien au-delà du seuil de 3, suggère une santé financière exceptionnelle; pourtant, ce ratio ignore les 38Md$ de rachats d'actions en 2023 qui ont artificiellement boosté le ROE à 151.9%, masquant une rentabilité économique réelle de 12.4% hors effets de levier.</a:t>
+              <a:t>Risque specifique : deterioration des marges ou execution strategique.</a:t>
             </a:r>
           </a:p>
         </p:txBody>
@@ -13826,7 +12948,7 @@
                           </a:solidFill>
                           <a:latin typeface="Calibri"/>
                         </a:rPr>
-                        <a:t>Récession mondiale réduisant la demande premium de 15%</a:t>
+                        <a:t>Remontée des taux directeurs &gt; 200bps</a:t>
                       </a:r>
                     </a:p>
                   </a:txBody>
@@ -13897,7 +13019,7 @@
                           </a:solidFill>
                           <a:latin typeface="Calibri"/>
                         </a:rPr>
-                        <a:t>Concurrence accrue dans l'IA réduisant l'avantage différenciant</a:t>
+                        <a:t>Rupture technologique remettant en cause le modèle</a:t>
                       </a:r>
                     </a:p>
                   </a:txBody>
@@ -13945,7 +13067,7 @@
                           </a:solidFill>
                           <a:latin typeface="Calibri"/>
                         </a:rPr>
-                        <a:t>Societe</a:t>
+                        <a:t>Société</a:t>
                       </a:r>
                     </a:p>
                   </a:txBody>
@@ -13968,7 +13090,7 @@
                           </a:solidFill>
                           <a:latin typeface="Calibri"/>
                         </a:rPr>
-                        <a:t>Régulation chinoise limitant l'accès au marché</a:t>
+                        <a:t>Détérioration matérielle des marges opérationnelles</a:t>
                       </a:r>
                     </a:p>
                   </a:txBody>
@@ -14974,7 +14096,7 @@
                 </a:solidFill>
                 <a:latin typeface="Calibri"/>
               </a:rPr>
-              <a:t>Positif</a:t>
+              <a:t>Negatif</a:t>
             </a:r>
           </a:p>
         </p:txBody>
@@ -15044,7 +14166,7 @@
                 </a:solidFill>
                 <a:latin typeface="Calibri"/>
               </a:rPr>
-              <a:t>Score agrege : +0,177</a:t>
+              <a:t>Score agrege : -0,012</a:t>
             </a:r>
           </a:p>
         </p:txBody>
@@ -15356,7 +14478,7 @@
                 </a:solidFill>
                 <a:latin typeface="Calibri"/>
               </a:rPr>
-              <a:t>43,3 %</a:t>
+              <a:t>40,8 %</a:t>
             </a:r>
           </a:p>
         </p:txBody>
@@ -15547,7 +14669,7 @@
                 </a:solidFill>
                 <a:latin typeface="Calibri"/>
               </a:rPr>
-              <a:t>BUY</a:t>
+              <a:t>HOLD</a:t>
             </a:r>
           </a:p>
         </p:txBody>
@@ -15812,7 +14934,7 @@
                           </a:solidFill>
                           <a:latin typeface="Calibri"/>
                         </a:rPr>
-                        <a:t>14</a:t>
+                        <a:t>13</a:t>
                       </a:r>
                     </a:p>
                   </a:txBody>
@@ -15835,7 +14957,7 @@
                           </a:solidFill>
                           <a:latin typeface="Calibri"/>
                         </a:rPr>
-                        <a:t>+0,433</a:t>
+                        <a:t>+0,396</a:t>
                       </a:r>
                     </a:p>
                   </a:txBody>
@@ -15858,7 +14980,7 @@
                           </a:solidFill>
                           <a:latin typeface="Calibri"/>
                         </a:rPr>
-                        <a:t>Lancement iPhone 16 avec IA intégrée en septembre 2026 pourrait ajouter 12-15Md$ de revenus annuels d'ici 2027 | Impact sur les services cloud et abonnements via amélioration de l'expérience utilisateur</a:t>
+                        <a:t>Catalyseurs, croissance, résultats</a:t>
                       </a:r>
                     </a:p>
                   </a:txBody>
@@ -15906,7 +15028,7 @@
                           </a:solidFill>
                           <a:latin typeface="Calibri"/>
                         </a:rPr>
-                        <a:t>9</a:t>
+                        <a:t>3</a:t>
                       </a:r>
                     </a:p>
                   </a:txBody>
@@ -15929,7 +15051,7 @@
                           </a:solidFill>
                           <a:latin typeface="Calibri"/>
                         </a:rPr>
-                        <a:t>+0,312</a:t>
+                        <a:t>+0,196</a:t>
                       </a:r>
                     </a:p>
                   </a:txBody>
@@ -16000,7 +15122,7 @@
                           </a:solidFill>
                           <a:latin typeface="Calibri"/>
                         </a:rPr>
-                        <a:t>7</a:t>
+                        <a:t>14</a:t>
                       </a:r>
                     </a:p>
                   </a:txBody>
@@ -16023,7 +15145,7 @@
                           </a:solidFill>
                           <a:latin typeface="Calibri"/>
                         </a:rPr>
-                        <a:t>+0,256</a:t>
+                        <a:t>+0,408</a:t>
                       </a:r>
                     </a:p>
                   </a:txBody>
@@ -16046,7 +15168,7 @@
                           </a:solidFill>
                           <a:latin typeface="Calibri"/>
                         </a:rPr>
-                        <a:t>Régulation chinoise accrue pourrait limiter l'accès au marché et réduire les marges de 5-8% | Impact sur les ventes iPhone estimées à 20Md$ d'ici 2027 | Horizon 12-18 mois avec risque de sanctions</a:t>
+                        <a:t>Risques macro, concurrence, dette</a:t>
                       </a:r>
                     </a:p>
                   </a:txBody>
@@ -16091,7 +15213,7 @@
                 </a:solidFill>
                 <a:latin typeface="Calibri"/>
               </a:rPr>
-              <a:t>La presse financière souligne l'optimisme autour des innovations IA et des services d'Apple, malgré un contexte de marché volatil affectant les "Magnificent 7". Les analystes anticipent une croissance future portée par les nouveaux cycles produits et l'IA, tempérée par les risques macroéconomiques.</a:t>
+              <a:t>La presse financière souligne une semaine difficile pour Apple, marquée par un recul du secteur tech et une volatilité accrue. Cependant, les initiatives en IA et la croissance des services restent des points positifs majeurs pour l'action.</a:t>
             </a:r>
           </a:p>
         </p:txBody>
@@ -16690,7 +15812,7 @@
                 </a:solidFill>
                 <a:latin typeface="Calibri"/>
               </a:rPr>
-              <a:t>Répartition de l'actionnariat  ·  Au 27 mars 2026</a:t>
+              <a:t>Répartition de l'actionnariat  ·  Au 28 mars 2026</a:t>
             </a:r>
           </a:p>
         </p:txBody>
@@ -18999,41 +18121,6 @@
           </a:graphicData>
         </a:graphic>
       </p:graphicFrame>
-      <p:sp>
-        <p:nvSpPr>
-          <p:cNvPr id="21" name="TextBox 20"/>
-          <p:cNvSpPr txBox="1"/>
-          <p:nvPr/>
-        </p:nvSpPr>
-        <p:spPr>
-          <a:xfrm>
-            <a:off x="367200" y="3326400"/>
-            <a:ext cx="8413200" cy="1004400"/>
-          </a:xfrm>
-          <a:prstGeom prst="rect">
-            <a:avLst/>
-          </a:prstGeom>
-          <a:noFill/>
-        </p:spPr>
-        <p:txBody>
-          <a:bodyPr wrap="square">
-            <a:spAutoFit/>
-          </a:bodyPr>
-          <a:lstStyle/>
-          <a:p>
-            <a:pPr algn="l"/>
-            <a:r>
-              <a:rPr sz="850" b="0" i="0">
-                <a:solidFill>
-                  <a:srgbClr val="555555"/>
-                </a:solidFill>
-                <a:latin typeface="Calibri"/>
-              </a:rPr>
-              <a:t>Apple se négocie à 25.7x EV/EBITDA vs 22.1x pour la médiane des peers technologiques. La prime de 16% est justifiée par la qualité des actifs et la récurrence des revenus services.</a:t>
-            </a:r>
-          </a:p>
-        </p:txBody>
-      </p:sp>
     </p:spTree>
   </p:cSld>
   <p:clrMapOvr>
@@ -19223,7 +18310,7 @@
             <a:avLst/>
           </a:prstGeom>
           <a:solidFill>
-            <a:srgbClr val="EAF4EF"/>
+            <a:srgbClr val="FDF6E8"/>
           </a:solidFill>
           <a:ln>
             <a:noFill/>
@@ -19266,7 +18353,7 @@
             <a:avLst/>
           </a:prstGeom>
           <a:solidFill>
-            <a:srgbClr val="1A7A4A"/>
+            <a:srgbClr val="B06000"/>
           </a:solidFill>
           <a:ln>
             <a:noFill/>
@@ -19320,11 +18407,11 @@
             <a:r>
               <a:rPr sz="1100" b="1" i="0">
                 <a:solidFill>
-                  <a:srgbClr val="1A7A4A"/>
+                  <a:srgbClr val="B06000"/>
                 </a:solidFill>
                 <a:latin typeface="Calibri"/>
               </a:rPr>
-              <a:t>● BUY</a:t>
+              <a:t>● HOLD</a:t>
             </a:r>
           </a:p>
         </p:txBody>
@@ -19359,7 +18446,7 @@
                 </a:solidFill>
                 <a:latin typeface="Calibri"/>
               </a:rPr>
-              <a:t>Prix cible base : 285 $  ·  Upside : +14,5 %  ·  Bear : 240 $ (-3,5 %)  ·  Bull : 320 $ (+28,6 %)</a:t>
+              <a:t>Prix cible base : — $  ·  Upside : —  ·  Bear : — $ (—)  ·  Bull : — $ (—)</a:t>
             </a:r>
           </a:p>
         </p:txBody>
@@ -19515,7 +18602,7 @@
                 </a:solidFill>
                 <a:latin typeface="Calibri"/>
               </a:rPr>
-              <a:t>Écosystème fermé</a:t>
+              <a:t>—</a:t>
             </a:r>
           </a:p>
         </p:txBody>
@@ -19550,7 +18637,7 @@
                 </a:solidFill>
                 <a:latin typeface="Calibri"/>
               </a:rPr>
-              <a:t>L'IA intégrée dans iOS 18 et les nouveaux iPhone 16 pourraient générer +15Md$ de revenus supplémentaires d'ici 2027</a:t>
+              <a:t>—</a:t>
             </a:r>
           </a:p>
         </p:txBody>
@@ -19628,7 +18715,7 @@
                 </a:solidFill>
                 <a:latin typeface="Calibri"/>
               </a:rPr>
-              <a:t>Marge brute &gt;45%</a:t>
+              <a:t>—</a:t>
             </a:r>
           </a:p>
         </p:txBody>
@@ -19663,7 +18750,7 @@
                 </a:solidFill>
                 <a:latin typeface="Calibri"/>
               </a:rPr>
-              <a:t>La pénétration des services en Chine (15% des revenus totaux) devrait croître de 25% par an avec l'ouverture du marché</a:t>
+              <a:t>—</a:t>
             </a:r>
           </a:p>
         </p:txBody>
@@ -19741,7 +18828,7 @@
                 </a:solidFill>
                 <a:latin typeface="Calibri"/>
               </a:rPr>
-              <a:t>Trésorerie nette 166Md$</a:t>
+              <a:t>—</a:t>
             </a:r>
           </a:p>
         </p:txBody>
@@ -19776,7 +18863,7 @@
                 </a:solidFill>
                 <a:latin typeface="Calibri"/>
               </a:rPr>
-              <a:t>Le rachat d'actions pour 100Md$ en 2026 soutiendra la valorisation via une réduction du nombre d'actions en circulation</a:t>
+              <a:t>—</a:t>
             </a:r>
           </a:p>
         </p:txBody>
@@ -19932,7 +19019,7 @@
                 </a:solidFill>
                 <a:latin typeface="Calibri"/>
               </a:rPr>
-              <a:t>Dépendance iPhone</a:t>
+              <a:t>—</a:t>
             </a:r>
           </a:p>
         </p:txBody>
@@ -19967,7 +19054,7 @@
                 </a:solidFill>
                 <a:latin typeface="Calibri"/>
               </a:rPr>
-              <a:t>Régulation chinoise accrue pourrait limiter l'accès au marché et réduire les marges de 5-8% | Impact sur les ventes iPhone estimées à 20Md$ d'ici 2027 | Horizon 12-18 mois avec risque de sanctions</a:t>
+              <a:t>Impact potentiel sur la these d'investissement — surveillance recommandee sur les 6-12 prochains mois.</a:t>
             </a:r>
           </a:p>
         </p:txBody>
@@ -20045,7 +19132,7 @@
                 </a:solidFill>
                 <a:latin typeface="Calibri"/>
               </a:rPr>
-              <a:t>Régulation Chine</a:t>
+              <a:t>—</a:t>
             </a:r>
           </a:p>
         </p:txBody>
@@ -20080,7 +19167,7 @@
                 </a:solidFill>
                 <a:latin typeface="Calibri"/>
               </a:rPr>
-              <a:t>Concurrence accrue dans l'IA avec Meta et Google réduisant l'avantage différenciant d'Apple | Perte de part de marché smartphone estimée à 3% d'ici 2027 | Horizon 2-3 ans avec pression sur les prix</a:t>
+              <a:t>Impact potentiel sur la these d'investissement — surveillance recommandee sur les 6-12 prochains mois.</a:t>
             </a:r>
           </a:p>
         </p:txBody>
@@ -20158,7 +19245,7 @@
                 </a:solidFill>
                 <a:latin typeface="Calibri"/>
               </a:rPr>
-              <a:t>Concurrence IA</a:t>
+              <a:t>—</a:t>
             </a:r>
           </a:p>
         </p:txBody>
@@ -20193,7 +19280,7 @@
                 </a:solidFill>
                 <a:latin typeface="Calibri"/>
               </a:rPr>
-              <a:t>Dépendance à l'iPhone pour 55% des revenus | Baisse de 10% des ventes iPhone en 2026 réduirait le CA de 40Md$ | Horizon 6-12 mois avec risque de saturation du marché premium</a:t>
+              <a:t>Impact potentiel sur la these d'investissement — surveillance recommandee sur les 6-12 prochains mois.</a:t>
             </a:r>
           </a:p>
         </p:txBody>
@@ -20470,7 +19557,7 @@
                 </a:solidFill>
                 <a:latin typeface="Calibri"/>
               </a:rPr>
-              <a:t>vs 14,3x médiane peers</a:t>
+              <a:t>vs — médiane peers</a:t>
             </a:r>
           </a:p>
         </p:txBody>
@@ -20782,7 +19869,7 @@
                 </a:solidFill>
                 <a:latin typeface="Calibri"/>
               </a:rPr>
-              <a:t>285 $</a:t>
+              <a:t>— $</a:t>
             </a:r>
           </a:p>
         </p:txBody>
@@ -20852,7 +19939,7 @@
                 </a:solidFill>
                 <a:latin typeface="Calibri"/>
               </a:rPr>
-              <a:t>Upside de +14,5 % vs cours</a:t>
+              <a:t>Upside de — vs cours</a:t>
             </a:r>
           </a:p>
         </p:txBody>
@@ -20973,7 +20060,7 @@
                 </a:solidFill>
                 <a:latin typeface="Calibri"/>
               </a:rPr>
-              <a:t>+0,177</a:t>
+              <a:t>-0,012</a:t>
             </a:r>
           </a:p>
         </p:txBody>
@@ -21043,7 +20130,7 @@
                 </a:solidFill>
                 <a:latin typeface="Calibri"/>
               </a:rPr>
-              <a:t>Positif  ·  30 articles</a:t>
+              <a:t>Negatif  ·  30 articles</a:t>
             </a:r>
           </a:p>
         </p:txBody>
@@ -21642,7 +20729,7 @@
                 </a:solidFill>
                 <a:latin typeface="Calibri"/>
               </a:rPr>
-              <a:t>AAPL  ·  USD  ·  Au 27 mars 2026</a:t>
+              <a:t>AAPL  ·  USD  ·  Au 28 mars 2026</a:t>
             </a:r>
           </a:p>
         </p:txBody>
@@ -23638,41 +22725,6 @@
                 <a:latin typeface="Calibri"/>
               </a:rPr>
               <a:t>278</a:t>
-            </a:r>
-          </a:p>
-        </p:txBody>
-      </p:sp>
-      <p:sp>
-        <p:nvSpPr>
-          <p:cNvPr id="68" name="TextBox 67"/>
-          <p:cNvSpPr txBox="1"/>
-          <p:nvPr/>
-        </p:nvSpPr>
-        <p:spPr>
-          <a:xfrm>
-            <a:off x="367200" y="4132800"/>
-            <a:ext cx="8413200" cy="687600"/>
-          </a:xfrm>
-          <a:prstGeom prst="rect">
-            <a:avLst/>
-          </a:prstGeom>
-          <a:noFill/>
-        </p:spPr>
-        <p:txBody>
-          <a:bodyPr wrap="square">
-            <a:spAutoFit/>
-          </a:bodyPr>
-          <a:lstStyle/>
-          <a:p>
-            <a:pPr algn="l"/>
-            <a:r>
-              <a:rPr sz="850" b="0" i="0">
-                <a:solidFill>
-                  <a:srgbClr val="555555"/>
-                </a:solidFill>
-                <a:latin typeface="Calibri"/>
-              </a:rPr>
-              <a:t>Apple maintient une position dominante dans les écosystèmes premium avec des marges exceptionnelles. La valorisation reste attractive malgré une prime de croissance déjà intégrée. Les catalyseurs structurels (IA, services, Chine) soutiennent le scénario haussier à moyen terme.</a:t>
             </a:r>
           </a:p>
         </p:txBody>
@@ -24715,7 +23767,7 @@
                 </a:solidFill>
                 <a:latin typeface="Calibri"/>
               </a:rPr>
-              <a:t>Dépendance iPhone  ·  Régulation Chine</a:t>
+              <a:t>Risques structurels &amp; thèse contraire</a:t>
             </a:r>
           </a:p>
         </p:txBody>
@@ -25949,64 +25001,21 @@
                 </a:solidFill>
                 <a:latin typeface="Calibri"/>
               </a:rPr>
-              <a:t>Apple conçoit et commercialise des produits technologiques premium (iPhone, Mac, iPad, Apple Watch) intégrés à son écosystème fermé. Leader mondial avec 25% de part de marché smartphone et 800M d'utilisateurs actifs, l'entreprise combine hardware, software et services récurrents. Son avantage concurrentiel repose sur l'innovation verticale, la fidélisation client et une marge brute supérieure à 45% grâce au mix produit et pricing power. L'entreprise articule son activité autour de deux segments stratégiques :</a:t>
-            </a:r>
-          </a:p>
-        </p:txBody>
-      </p:sp>
-      <p:sp>
-        <p:nvSpPr>
-          <p:cNvPr id="20" name="Rectangle 19"/>
-          <p:cNvSpPr/>
-          <p:nvPr/>
-        </p:nvSpPr>
-        <p:spPr>
-          <a:xfrm>
-            <a:off x="503999" y="2599200"/>
-            <a:ext cx="64800" cy="64800"/>
-          </a:xfrm>
-          <a:prstGeom prst="rect">
-            <a:avLst/>
-          </a:prstGeom>
-          <a:solidFill>
-            <a:srgbClr val="2E5FA3"/>
-          </a:solidFill>
-          <a:ln>
-            <a:noFill/>
-          </a:ln>
-        </p:spPr>
-        <p:style>
-          <a:lnRef idx="1">
-            <a:schemeClr val="accent1"/>
-          </a:lnRef>
-          <a:fillRef idx="3">
-            <a:schemeClr val="accent1"/>
-          </a:fillRef>
-          <a:effectRef idx="2">
-            <a:schemeClr val="accent1"/>
-          </a:effectRef>
-          <a:fontRef idx="minor">
-            <a:schemeClr val="lt1"/>
-          </a:fontRef>
-        </p:style>
-        <p:txBody>
-          <a:bodyPr rtlCol="0" anchor="ctr"/>
-          <a:lstStyle/>
-          <a:p>
-            <a:pPr algn="ctr"/>
-          </a:p>
-        </p:txBody>
-      </p:sp>
-      <p:sp>
-        <p:nvSpPr>
-          <p:cNvPr id="21" name="TextBox 20"/>
+              <a:t>—</a:t>
+            </a:r>
+          </a:p>
+        </p:txBody>
+      </p:sp>
+      <p:sp>
+        <p:nvSpPr>
+          <p:cNvPr id="20" name="TextBox 19"/>
           <p:cNvSpPr txBox="1"/>
           <p:nvPr/>
         </p:nvSpPr>
         <p:spPr>
           <a:xfrm>
-            <a:off x="619200" y="2556000"/>
-            <a:ext cx="4338000" cy="165600"/>
+            <a:off x="503999" y="2358000"/>
+            <a:ext cx="4662000" cy="183600"/>
           </a:xfrm>
           <a:prstGeom prst="rect">
             <a:avLst/>
@@ -26021,168 +25030,20 @@
           <a:p>
             <a:pPr algn="l"/>
             <a:r>
-              <a:rPr sz="850" b="1" i="0">
+              <a:rPr sz="900" b="1" i="0">
                 <a:solidFill>
-                  <a:srgbClr val="0D0D0D"/>
+                  <a:srgbClr val="1B3A6B"/>
                 </a:solidFill>
                 <a:latin typeface="Calibri"/>
               </a:rPr>
-              <a:t>Produits</a:t>
-            </a:r>
-          </a:p>
-        </p:txBody>
-      </p:sp>
-      <p:sp>
-        <p:nvSpPr>
-          <p:cNvPr id="22" name="TextBox 21"/>
-          <p:cNvSpPr txBox="1"/>
-          <p:nvPr/>
-        </p:nvSpPr>
-        <p:spPr>
-          <a:xfrm>
-            <a:off x="619200" y="2714400"/>
-            <a:ext cx="4338000" cy="503999"/>
-          </a:xfrm>
-          <a:prstGeom prst="rect">
-            <a:avLst/>
-          </a:prstGeom>
-          <a:noFill/>
-        </p:spPr>
-        <p:txBody>
-          <a:bodyPr wrap="square">
-            <a:spAutoFit/>
-          </a:bodyPr>
-          <a:lstStyle/>
-          <a:p>
-            <a:pPr algn="l"/>
-            <a:r>
-              <a:rPr sz="750" b="0" i="1">
-                <a:solidFill>
-                  <a:srgbClr val="555555"/>
-                </a:solidFill>
-                <a:latin typeface="Calibri"/>
-              </a:rPr>
-              <a:t>Segment hardware incluant iPhone (55% des revenus), Mac, iPad et Apple Watch. Modèle basé sur des cycles de renouvellement rapides (2-3 ans) et des prix premium. Clients cibles : consommateurs haut de gamme et professionnels. Croissance tirée par l'Asie (20% des ventes) et les services associés (Apple Music, iCloud).</a:t>
-            </a:r>
-          </a:p>
-        </p:txBody>
-      </p:sp>
-      <p:sp>
-        <p:nvSpPr>
-          <p:cNvPr id="23" name="Rectangle 22"/>
-          <p:cNvSpPr/>
-          <p:nvPr/>
-        </p:nvSpPr>
-        <p:spPr>
-          <a:xfrm>
-            <a:off x="503999" y="3301199"/>
-            <a:ext cx="64800" cy="64800"/>
-          </a:xfrm>
-          <a:prstGeom prst="rect">
-            <a:avLst/>
-          </a:prstGeom>
-          <a:solidFill>
-            <a:srgbClr val="2E5FA3"/>
-          </a:solidFill>
-          <a:ln>
-            <a:noFill/>
-          </a:ln>
-        </p:spPr>
-        <p:style>
-          <a:lnRef idx="1">
-            <a:schemeClr val="accent1"/>
-          </a:lnRef>
-          <a:fillRef idx="3">
-            <a:schemeClr val="accent1"/>
-          </a:fillRef>
-          <a:effectRef idx="2">
-            <a:schemeClr val="accent1"/>
-          </a:effectRef>
-          <a:fontRef idx="minor">
-            <a:schemeClr val="lt1"/>
-          </a:fontRef>
-        </p:style>
-        <p:txBody>
-          <a:bodyPr rtlCol="0" anchor="ctr"/>
-          <a:lstStyle/>
-          <a:p>
-            <a:pPr algn="ctr"/>
-          </a:p>
-        </p:txBody>
-      </p:sp>
-      <p:sp>
-        <p:nvSpPr>
-          <p:cNvPr id="24" name="TextBox 23"/>
-          <p:cNvSpPr txBox="1"/>
-          <p:nvPr/>
-        </p:nvSpPr>
-        <p:spPr>
-          <a:xfrm>
-            <a:off x="619200" y="3257999"/>
-            <a:ext cx="4338000" cy="165600"/>
-          </a:xfrm>
-          <a:prstGeom prst="rect">
-            <a:avLst/>
-          </a:prstGeom>
-          <a:noFill/>
-        </p:spPr>
-        <p:txBody>
-          <a:bodyPr wrap="square">
-            <a:spAutoFit/>
-          </a:bodyPr>
-          <a:lstStyle/>
-          <a:p>
-            <a:pPr algn="l"/>
-            <a:r>
-              <a:rPr sz="850" b="1" i="0">
-                <a:solidFill>
-                  <a:srgbClr val="0D0D0D"/>
-                </a:solidFill>
-                <a:latin typeface="Calibri"/>
-              </a:rPr>
-              <a:t>Services</a:t>
-            </a:r>
-          </a:p>
-        </p:txBody>
-      </p:sp>
-      <p:sp>
-        <p:nvSpPr>
-          <p:cNvPr id="25" name="TextBox 24"/>
-          <p:cNvSpPr txBox="1"/>
-          <p:nvPr/>
-        </p:nvSpPr>
-        <p:spPr>
-          <a:xfrm>
-            <a:off x="619200" y="3416399"/>
-            <a:ext cx="4338000" cy="503999"/>
-          </a:xfrm>
-          <a:prstGeom prst="rect">
-            <a:avLst/>
-          </a:prstGeom>
-          <a:noFill/>
-        </p:spPr>
-        <p:txBody>
-          <a:bodyPr wrap="square">
-            <a:spAutoFit/>
-          </a:bodyPr>
-          <a:lstStyle/>
-          <a:p>
-            <a:pPr algn="l"/>
-            <a:r>
-              <a:rPr sz="750" b="0" i="1">
-                <a:solidFill>
-                  <a:srgbClr val="555555"/>
-                </a:solidFill>
-                <a:latin typeface="Calibri"/>
-              </a:rPr>
-              <a:t>Segment à forte rentabilité (70% de marge) incluant App Store, Apple Music, iCloud et Apple Pay. Modèle abonnement avec 1.1Md d'utilisateurs payants générant 80Md$ de revenus annuels. Croissance portée par l'expansion géographique et l'augmentation du ARPU via bundling.</a:t>
-            </a:r>
-          </a:p>
-        </p:txBody>
-      </p:sp>
-      <p:sp>
-        <p:nvSpPr>
-          <p:cNvPr id="26" name="Rectangle 25"/>
+              <a:t>Positionnement stratégique</a:t>
+            </a:r>
+          </a:p>
+        </p:txBody>
+      </p:sp>
+      <p:sp>
+        <p:nvSpPr>
+          <p:cNvPr id="21" name="Rectangle 20"/>
           <p:cNvSpPr/>
           <p:nvPr/>
         </p:nvSpPr>
@@ -26225,7 +25086,7 @@
       </p:sp>
       <p:sp>
         <p:nvSpPr>
-          <p:cNvPr id="27" name="Rectangle 26"/>
+          <p:cNvPr id="22" name="Rectangle 21"/>
           <p:cNvSpPr/>
           <p:nvPr/>
         </p:nvSpPr>
@@ -26268,7 +25129,7 @@
       </p:sp>
       <p:sp>
         <p:nvSpPr>
-          <p:cNvPr id="28" name="TextBox 27"/>
+          <p:cNvPr id="23" name="TextBox 22"/>
           <p:cNvSpPr txBox="1"/>
           <p:nvPr/>
         </p:nvSpPr>
@@ -26303,7 +25164,7 @@
       </p:sp>
       <p:sp>
         <p:nvSpPr>
-          <p:cNvPr id="29" name="TextBox 28"/>
+          <p:cNvPr id="24" name="TextBox 23"/>
           <p:cNvSpPr txBox="1"/>
           <p:nvPr/>
         </p:nvSpPr>
@@ -26338,7 +25199,7 @@
       </p:sp>
       <p:sp>
         <p:nvSpPr>
-          <p:cNvPr id="30" name="Rectangle 29"/>
+          <p:cNvPr id="25" name="Rectangle 24"/>
           <p:cNvSpPr/>
           <p:nvPr/>
         </p:nvSpPr>
@@ -26381,7 +25242,7 @@
       </p:sp>
       <p:sp>
         <p:nvSpPr>
-          <p:cNvPr id="31" name="Rectangle 30"/>
+          <p:cNvPr id="26" name="Rectangle 25"/>
           <p:cNvSpPr/>
           <p:nvPr/>
         </p:nvSpPr>
@@ -26424,7 +25285,7 @@
       </p:sp>
       <p:sp>
         <p:nvSpPr>
-          <p:cNvPr id="32" name="TextBox 31"/>
+          <p:cNvPr id="27" name="TextBox 26"/>
           <p:cNvSpPr txBox="1"/>
           <p:nvPr/>
         </p:nvSpPr>
@@ -26459,7 +25320,7 @@
       </p:sp>
       <p:sp>
         <p:nvSpPr>
-          <p:cNvPr id="33" name="TextBox 32"/>
+          <p:cNvPr id="28" name="TextBox 27"/>
           <p:cNvSpPr txBox="1"/>
           <p:nvPr/>
         </p:nvSpPr>
@@ -26494,7 +25355,7 @@
       </p:sp>
       <p:sp>
         <p:nvSpPr>
-          <p:cNvPr id="34" name="Rectangle 33"/>
+          <p:cNvPr id="29" name="Rectangle 28"/>
           <p:cNvSpPr/>
           <p:nvPr/>
         </p:nvSpPr>
@@ -26537,7 +25398,7 @@
       </p:sp>
       <p:sp>
         <p:nvSpPr>
-          <p:cNvPr id="35" name="Rectangle 34"/>
+          <p:cNvPr id="30" name="Rectangle 29"/>
           <p:cNvSpPr/>
           <p:nvPr/>
         </p:nvSpPr>
@@ -26580,7 +25441,7 @@
       </p:sp>
       <p:sp>
         <p:nvSpPr>
-          <p:cNvPr id="36" name="TextBox 35"/>
+          <p:cNvPr id="31" name="TextBox 30"/>
           <p:cNvSpPr txBox="1"/>
           <p:nvPr/>
         </p:nvSpPr>
@@ -26615,7 +25476,7 @@
       </p:sp>
       <p:sp>
         <p:nvSpPr>
-          <p:cNvPr id="37" name="TextBox 36"/>
+          <p:cNvPr id="32" name="TextBox 31"/>
           <p:cNvSpPr txBox="1"/>
           <p:nvPr/>
         </p:nvSpPr>
@@ -26650,7 +25511,7 @@
       </p:sp>
       <p:sp>
         <p:nvSpPr>
-          <p:cNvPr id="38" name="Rectangle 37"/>
+          <p:cNvPr id="33" name="Rectangle 32"/>
           <p:cNvSpPr/>
           <p:nvPr/>
         </p:nvSpPr>
@@ -26693,7 +25554,7 @@
       </p:sp>
       <p:sp>
         <p:nvSpPr>
-          <p:cNvPr id="39" name="Rectangle 38"/>
+          <p:cNvPr id="34" name="Rectangle 33"/>
           <p:cNvSpPr/>
           <p:nvPr/>
         </p:nvSpPr>
@@ -26736,7 +25597,7 @@
       </p:sp>
       <p:sp>
         <p:nvSpPr>
-          <p:cNvPr id="40" name="TextBox 39"/>
+          <p:cNvPr id="35" name="TextBox 34"/>
           <p:cNvSpPr txBox="1"/>
           <p:nvPr/>
         </p:nvSpPr>
@@ -26771,7 +25632,7 @@
       </p:sp>
       <p:sp>
         <p:nvSpPr>
-          <p:cNvPr id="41" name="TextBox 40"/>
+          <p:cNvPr id="36" name="TextBox 35"/>
           <p:cNvSpPr txBox="1"/>
           <p:nvPr/>
         </p:nvSpPr>
@@ -26806,7 +25667,7 @@
       </p:sp>
       <p:sp>
         <p:nvSpPr>
-          <p:cNvPr id="42" name="TextBox 41"/>
+          <p:cNvPr id="37" name="TextBox 36"/>
           <p:cNvSpPr txBox="1"/>
           <p:nvPr/>
         </p:nvSpPr>
@@ -27398,7 +26259,7 @@
                 </a:solidFill>
                 <a:latin typeface="Calibri"/>
               </a:rPr>
-              <a:t>Modele Economique</a:t>
+              <a:t>Modèle Économique</a:t>
             </a:r>
           </a:p>
         </p:txBody>
@@ -27433,7 +26294,7 @@
                 </a:solidFill>
                 <a:latin typeface="Calibri"/>
               </a:rPr>
-              <a:t>Segments operationnels et moteurs de croissance</a:t>
+              <a:t>Segments opérationnels et moteurs de croissance</a:t>
             </a:r>
           </a:p>
         </p:txBody>
@@ -27447,7 +26308,7 @@
         <p:spPr>
           <a:xfrm>
             <a:off x="367200" y="961200"/>
-            <a:ext cx="4150800" cy="3520800"/>
+            <a:ext cx="2731199" cy="3520800"/>
           </a:xfrm>
           <a:prstGeom prst="rect">
             <a:avLst/>
@@ -27490,7 +26351,7 @@
         <p:spPr>
           <a:xfrm>
             <a:off x="367200" y="961200"/>
-            <a:ext cx="4150800" cy="54000"/>
+            <a:ext cx="2731199" cy="54000"/>
           </a:xfrm>
           <a:prstGeom prst="rect">
             <a:avLst/>
@@ -27533,7 +26394,7 @@
         <p:spPr>
           <a:xfrm>
             <a:off x="457200" y="1141200"/>
-            <a:ext cx="3970800" cy="640800"/>
+            <a:ext cx="2551199" cy="640800"/>
           </a:xfrm>
           <a:prstGeom prst="rect">
             <a:avLst/>
@@ -27554,7 +26415,7 @@
                 </a:solidFill>
                 <a:latin typeface="Calibri"/>
               </a:rPr>
-              <a:t>62%</a:t>
+              <a:t>—</a:t>
             </a:r>
           </a:p>
         </p:txBody>
@@ -27568,7 +26429,7 @@
         <p:spPr>
           <a:xfrm>
             <a:off x="457200" y="1785600"/>
-            <a:ext cx="3970800" cy="108000"/>
+            <a:ext cx="2551199" cy="108000"/>
           </a:xfrm>
           <a:prstGeom prst="rect">
             <a:avLst/>
@@ -27603,7 +26464,7 @@
         <p:spPr>
           <a:xfrm>
             <a:off x="457200" y="1965600"/>
-            <a:ext cx="3970800" cy="18000"/>
+            <a:ext cx="2551199" cy="18000"/>
           </a:xfrm>
           <a:prstGeom prst="rect">
             <a:avLst/>
@@ -27646,7 +26507,7 @@
         <p:spPr>
           <a:xfrm>
             <a:off x="457200" y="2059200"/>
-            <a:ext cx="3970800" cy="255600"/>
+            <a:ext cx="2551199" cy="255600"/>
           </a:xfrm>
           <a:prstGeom prst="rect">
             <a:avLst/>
@@ -27667,7 +26528,7 @@
                 </a:solidFill>
                 <a:latin typeface="Calibri"/>
               </a:rPr>
-              <a:t>Produits</a:t>
+              <a:t>Core Business</a:t>
             </a:r>
           </a:p>
         </p:txBody>
@@ -27681,7 +26542,7 @@
         <p:spPr>
           <a:xfrm>
             <a:off x="457200" y="2332800"/>
-            <a:ext cx="3970800" cy="2041199"/>
+            <a:ext cx="2551199" cy="2041199"/>
           </a:xfrm>
           <a:prstGeom prst="rect">
             <a:avLst/>
@@ -27702,7 +26563,7 @@
                 </a:solidFill>
                 <a:latin typeface="Calibri"/>
               </a:rPr>
-              <a:t>Segment hardware incluant iPhone (55% des revenus), Mac, iPad et Apple Watch. Modèle basé sur des cycles de renouvellement rapides (2-3 ans) et des prix premium. Clients cibles : consommateurs haut de gamme et professionnels. Croissance tirée par l'Asie (20% des ventes) et les services associés (Apple Music, iCloud).</a:t>
+              <a:t>—</a:t>
             </a:r>
           </a:p>
         </p:txBody>
@@ -27715,8 +26576,8 @@
         </p:nvSpPr>
         <p:spPr>
           <a:xfrm>
-            <a:off x="4626000" y="961200"/>
-            <a:ext cx="4150800" cy="3520800"/>
+            <a:off x="3206400" y="961200"/>
+            <a:ext cx="2731199" cy="3520800"/>
           </a:xfrm>
           <a:prstGeom prst="rect">
             <a:avLst/>
@@ -27758,8 +26619,8 @@
         </p:nvSpPr>
         <p:spPr>
           <a:xfrm>
-            <a:off x="4626000" y="961200"/>
-            <a:ext cx="4150800" cy="54000"/>
+            <a:off x="3206400" y="961200"/>
+            <a:ext cx="2731199" cy="54000"/>
           </a:xfrm>
           <a:prstGeom prst="rect">
             <a:avLst/>
@@ -27801,8 +26662,8 @@
         </p:nvSpPr>
         <p:spPr>
           <a:xfrm>
-            <a:off x="4716000" y="1141200"/>
-            <a:ext cx="3970800" cy="640800"/>
+            <a:off x="3296400" y="1141200"/>
+            <a:ext cx="2551199" cy="640800"/>
           </a:xfrm>
           <a:prstGeom prst="rect">
             <a:avLst/>
@@ -27823,7 +26684,7 @@
                 </a:solidFill>
                 <a:latin typeface="Calibri"/>
               </a:rPr>
-              <a:t>22%</a:t>
+              <a:t>—</a:t>
             </a:r>
           </a:p>
         </p:txBody>
@@ -27836,8 +26697,8 @@
         </p:nvSpPr>
         <p:spPr>
           <a:xfrm>
-            <a:off x="4716000" y="1785600"/>
-            <a:ext cx="3970800" cy="108000"/>
+            <a:off x="3296400" y="1785600"/>
+            <a:ext cx="2551199" cy="108000"/>
           </a:xfrm>
           <a:prstGeom prst="rect">
             <a:avLst/>
@@ -27871,8 +26732,8 @@
         </p:nvSpPr>
         <p:spPr>
           <a:xfrm>
-            <a:off x="4716000" y="1965600"/>
-            <a:ext cx="3970800" cy="18000"/>
+            <a:off x="3296400" y="1965600"/>
+            <a:ext cx="2551199" cy="18000"/>
           </a:xfrm>
           <a:prstGeom prst="rect">
             <a:avLst/>
@@ -27914,8 +26775,8 @@
         </p:nvSpPr>
         <p:spPr>
           <a:xfrm>
-            <a:off x="4716000" y="2059200"/>
-            <a:ext cx="3970800" cy="255600"/>
+            <a:off x="3296400" y="2059200"/>
+            <a:ext cx="2551199" cy="255600"/>
           </a:xfrm>
           <a:prstGeom prst="rect">
             <a:avLst/>
@@ -27936,7 +26797,7 @@
                 </a:solidFill>
                 <a:latin typeface="Calibri"/>
               </a:rPr>
-              <a:t>Services</a:t>
+              <a:t>Growth Driver</a:t>
             </a:r>
           </a:p>
         </p:txBody>
@@ -27949,8 +26810,8 @@
         </p:nvSpPr>
         <p:spPr>
           <a:xfrm>
-            <a:off x="4716000" y="2332800"/>
-            <a:ext cx="3970800" cy="2041199"/>
+            <a:off x="3296400" y="2332800"/>
+            <a:ext cx="2551199" cy="2041199"/>
           </a:xfrm>
           <a:prstGeom prst="rect">
             <a:avLst/>
@@ -27971,7 +26832,276 @@
                 </a:solidFill>
                 <a:latin typeface="Calibri"/>
               </a:rPr>
-              <a:t>Segment à forte rentabilité (70% de marge) incluant App Store, Apple Music, iCloud et Apple Pay. Modèle abonnement avec 1.1Md d'utilisateurs payants générant 80Md$ de revenus annuels. Croissance portée par l'expansion géographique et l'augmentation du ARPU via bundling.</a:t>
+              <a:t>—</a:t>
+            </a:r>
+          </a:p>
+        </p:txBody>
+      </p:sp>
+      <p:sp>
+        <p:nvSpPr>
+          <p:cNvPr id="31" name="Rectangle 30"/>
+          <p:cNvSpPr/>
+          <p:nvPr/>
+        </p:nvSpPr>
+        <p:spPr>
+          <a:xfrm>
+            <a:off x="6045600" y="961200"/>
+            <a:ext cx="2731199" cy="3520800"/>
+          </a:xfrm>
+          <a:prstGeom prst="rect">
+            <a:avLst/>
+          </a:prstGeom>
+          <a:solidFill>
+            <a:srgbClr val="F7F8FA"/>
+          </a:solidFill>
+          <a:ln>
+            <a:noFill/>
+          </a:ln>
+        </p:spPr>
+        <p:style>
+          <a:lnRef idx="1">
+            <a:schemeClr val="accent1"/>
+          </a:lnRef>
+          <a:fillRef idx="3">
+            <a:schemeClr val="accent1"/>
+          </a:fillRef>
+          <a:effectRef idx="2">
+            <a:schemeClr val="accent1"/>
+          </a:effectRef>
+          <a:fontRef idx="minor">
+            <a:schemeClr val="lt1"/>
+          </a:fontRef>
+        </p:style>
+        <p:txBody>
+          <a:bodyPr rtlCol="0" anchor="ctr"/>
+          <a:lstStyle/>
+          <a:p>
+            <a:pPr algn="ctr"/>
+          </a:p>
+        </p:txBody>
+      </p:sp>
+      <p:sp>
+        <p:nvSpPr>
+          <p:cNvPr id="32" name="Rectangle 31"/>
+          <p:cNvSpPr/>
+          <p:nvPr/>
+        </p:nvSpPr>
+        <p:spPr>
+          <a:xfrm>
+            <a:off x="6045600" y="961200"/>
+            <a:ext cx="2731199" cy="54000"/>
+          </a:xfrm>
+          <a:prstGeom prst="rect">
+            <a:avLst/>
+          </a:prstGeom>
+          <a:solidFill>
+            <a:srgbClr val="888888"/>
+          </a:solidFill>
+          <a:ln>
+            <a:noFill/>
+          </a:ln>
+        </p:spPr>
+        <p:style>
+          <a:lnRef idx="1">
+            <a:schemeClr val="accent1"/>
+          </a:lnRef>
+          <a:fillRef idx="3">
+            <a:schemeClr val="accent1"/>
+          </a:fillRef>
+          <a:effectRef idx="2">
+            <a:schemeClr val="accent1"/>
+          </a:effectRef>
+          <a:fontRef idx="minor">
+            <a:schemeClr val="lt1"/>
+          </a:fontRef>
+        </p:style>
+        <p:txBody>
+          <a:bodyPr rtlCol="0" anchor="ctr"/>
+          <a:lstStyle/>
+          <a:p>
+            <a:pPr algn="ctr"/>
+          </a:p>
+        </p:txBody>
+      </p:sp>
+      <p:sp>
+        <p:nvSpPr>
+          <p:cNvPr id="33" name="TextBox 32"/>
+          <p:cNvSpPr txBox="1"/>
+          <p:nvPr/>
+        </p:nvSpPr>
+        <p:spPr>
+          <a:xfrm>
+            <a:off x="6135600" y="1141200"/>
+            <a:ext cx="2551199" cy="640800"/>
+          </a:xfrm>
+          <a:prstGeom prst="rect">
+            <a:avLst/>
+          </a:prstGeom>
+          <a:noFill/>
+        </p:spPr>
+        <p:txBody>
+          <a:bodyPr wrap="square">
+            <a:spAutoFit/>
+          </a:bodyPr>
+          <a:lstStyle/>
+          <a:p>
+            <a:pPr algn="l"/>
+            <a:r>
+              <a:rPr sz="2200" b="1" i="0">
+                <a:solidFill>
+                  <a:srgbClr val="888888"/>
+                </a:solidFill>
+                <a:latin typeface="Calibri"/>
+              </a:rPr>
+              <a:t>—</a:t>
+            </a:r>
+          </a:p>
+        </p:txBody>
+      </p:sp>
+      <p:sp>
+        <p:nvSpPr>
+          <p:cNvPr id="34" name="TextBox 33"/>
+          <p:cNvSpPr txBox="1"/>
+          <p:nvPr/>
+        </p:nvSpPr>
+        <p:spPr>
+          <a:xfrm>
+            <a:off x="6135600" y="1785600"/>
+            <a:ext cx="2551199" cy="108000"/>
+          </a:xfrm>
+          <a:prstGeom prst="rect">
+            <a:avLst/>
+          </a:prstGeom>
+          <a:noFill/>
+        </p:spPr>
+        <p:txBody>
+          <a:bodyPr wrap="square">
+            <a:spAutoFit/>
+          </a:bodyPr>
+          <a:lstStyle/>
+          <a:p>
+            <a:pPr algn="l"/>
+            <a:r>
+              <a:rPr sz="900" b="0" i="0">
+                <a:solidFill>
+                  <a:srgbClr val="555555"/>
+                </a:solidFill>
+                <a:latin typeface="Calibri"/>
+              </a:rPr>
+              <a:t>du CA</a:t>
+            </a:r>
+          </a:p>
+        </p:txBody>
+      </p:sp>
+      <p:sp>
+        <p:nvSpPr>
+          <p:cNvPr id="35" name="Rectangle 34"/>
+          <p:cNvSpPr/>
+          <p:nvPr/>
+        </p:nvSpPr>
+        <p:spPr>
+          <a:xfrm>
+            <a:off x="6135600" y="1965600"/>
+            <a:ext cx="2551199" cy="18000"/>
+          </a:xfrm>
+          <a:prstGeom prst="rect">
+            <a:avLst/>
+          </a:prstGeom>
+          <a:solidFill>
+            <a:srgbClr val="888888"/>
+          </a:solidFill>
+          <a:ln>
+            <a:noFill/>
+          </a:ln>
+        </p:spPr>
+        <p:style>
+          <a:lnRef idx="1">
+            <a:schemeClr val="accent1"/>
+          </a:lnRef>
+          <a:fillRef idx="3">
+            <a:schemeClr val="accent1"/>
+          </a:fillRef>
+          <a:effectRef idx="2">
+            <a:schemeClr val="accent1"/>
+          </a:effectRef>
+          <a:fontRef idx="minor">
+            <a:schemeClr val="lt1"/>
+          </a:fontRef>
+        </p:style>
+        <p:txBody>
+          <a:bodyPr rtlCol="0" anchor="ctr"/>
+          <a:lstStyle/>
+          <a:p>
+            <a:pPr algn="ctr"/>
+          </a:p>
+        </p:txBody>
+      </p:sp>
+      <p:sp>
+        <p:nvSpPr>
+          <p:cNvPr id="36" name="TextBox 35"/>
+          <p:cNvSpPr txBox="1"/>
+          <p:nvPr/>
+        </p:nvSpPr>
+        <p:spPr>
+          <a:xfrm>
+            <a:off x="6135600" y="2059200"/>
+            <a:ext cx="2551199" cy="255600"/>
+          </a:xfrm>
+          <a:prstGeom prst="rect">
+            <a:avLst/>
+          </a:prstGeom>
+          <a:noFill/>
+        </p:spPr>
+        <p:txBody>
+          <a:bodyPr wrap="square">
+            <a:spAutoFit/>
+          </a:bodyPr>
+          <a:lstStyle/>
+          <a:p>
+            <a:pPr algn="l"/>
+            <a:r>
+              <a:rPr sz="1000" b="1" i="0">
+                <a:solidFill>
+                  <a:srgbClr val="1B3A6B"/>
+                </a:solidFill>
+                <a:latin typeface="Calibri"/>
+              </a:rPr>
+              <a:t>International</a:t>
+            </a:r>
+          </a:p>
+        </p:txBody>
+      </p:sp>
+      <p:sp>
+        <p:nvSpPr>
+          <p:cNvPr id="37" name="TextBox 36"/>
+          <p:cNvSpPr txBox="1"/>
+          <p:nvPr/>
+        </p:nvSpPr>
+        <p:spPr>
+          <a:xfrm>
+            <a:off x="6135600" y="2332800"/>
+            <a:ext cx="2551199" cy="2041199"/>
+          </a:xfrm>
+          <a:prstGeom prst="rect">
+            <a:avLst/>
+          </a:prstGeom>
+          <a:noFill/>
+        </p:spPr>
+        <p:txBody>
+          <a:bodyPr wrap="square">
+            <a:spAutoFit/>
+          </a:bodyPr>
+          <a:lstStyle/>
+          <a:p>
+            <a:pPr algn="l"/>
+            <a:r>
+              <a:rPr sz="800" b="0" i="0">
+                <a:solidFill>
+                  <a:srgbClr val="555555"/>
+                </a:solidFill>
+                <a:latin typeface="Calibri"/>
+              </a:rPr>
+              <a:t>—</a:t>
             </a:r>
           </a:p>
         </p:txBody>
@@ -28823,7 +27953,7 @@
                 </a:solidFill>
                 <a:latin typeface="Calibri"/>
               </a:rPr>
-              <a:t>USD millions  ·  2021–2027F</a:t>
+              <a:t>USD millions  ·  2021–2025</a:t>
             </a:r>
           </a:p>
         </p:txBody>
@@ -28838,7 +27968,7 @@
         </p:nvGraphicFramePr>
         <p:xfrm>
           <a:off x="367200" y="914400"/>
-          <a:ext cx="8413196" cy="1980000"/>
+          <a:ext cx="8413200" cy="1980000"/>
         </p:xfrm>
         <a:graphic>
           <a:graphicData uri="http://schemas.openxmlformats.org/drawingml/2006/table">
@@ -28848,11 +27978,9 @@
               </a:tblPr>
               <a:tblGrid>
                 <a:gridCol w="2355696"/>
-                <a:gridCol w="1211500"/>
-                <a:gridCol w="1211500"/>
-                <a:gridCol w="1211500"/>
-                <a:gridCol w="1211500"/>
-                <a:gridCol w="1211500"/>
+                <a:gridCol w="2019168"/>
+                <a:gridCol w="2019168"/>
+                <a:gridCol w="2019168"/>
               </a:tblGrid>
               <a:tr h="220000">
                 <a:tc>
@@ -28938,52 +28066,6 @@
                           <a:latin typeface="Calibri"/>
                         </a:rPr>
                         <a:t>2025</a:t>
-                      </a:r>
-                    </a:p>
-                  </a:txBody>
-                  <a:tcPr>
-                    <a:solidFill>
-                      <a:srgbClr val="1B3A6B"/>
-                    </a:solidFill>
-                  </a:tcPr>
-                </a:tc>
-                <a:tc>
-                  <a:txBody>
-                    <a:bodyPr/>
-                    <a:lstStyle/>
-                    <a:p>
-                      <a:pPr algn="ctr"/>
-                      <a:r>
-                        <a:rPr sz="800" b="1" i="0">
-                          <a:solidFill>
-                            <a:srgbClr val="FFFFFF"/>
-                          </a:solidFill>
-                          <a:latin typeface="Calibri"/>
-                        </a:rPr>
-                        <a:t>2026F</a:t>
-                      </a:r>
-                    </a:p>
-                  </a:txBody>
-                  <a:tcPr>
-                    <a:solidFill>
-                      <a:srgbClr val="1B3A6B"/>
-                    </a:solidFill>
-                  </a:tcPr>
-                </a:tc>
-                <a:tc>
-                  <a:txBody>
-                    <a:bodyPr/>
-                    <a:lstStyle/>
-                    <a:p>
-                      <a:pPr algn="ctr"/>
-                      <a:r>
-                        <a:rPr sz="800" b="1" i="0">
-                          <a:solidFill>
-                            <a:srgbClr val="FFFFFF"/>
-                          </a:solidFill>
-                          <a:latin typeface="Calibri"/>
-                        </a:rPr>
-                        <a:t>2027F</a:t>
                       </a:r>
                     </a:p>
                   </a:txBody>
@@ -29087,52 +28169,6 @@
                     </a:solidFill>
                   </a:tcPr>
                 </a:tc>
-                <a:tc>
-                  <a:txBody>
-                    <a:bodyPr/>
-                    <a:lstStyle/>
-                    <a:p>
-                      <a:pPr algn="ctr"/>
-                      <a:r>
-                        <a:rPr sz="800" b="1" i="0">
-                          <a:solidFill>
-                            <a:srgbClr val="0D0D0D"/>
-                          </a:solidFill>
-                          <a:latin typeface="Calibri"/>
-                        </a:rPr>
-                        <a:t>440,0</a:t>
-                      </a:r>
-                    </a:p>
-                  </a:txBody>
-                  <a:tcPr>
-                    <a:solidFill>
-                      <a:srgbClr val="FFFFFF"/>
-                    </a:solidFill>
-                  </a:tcPr>
-                </a:tc>
-                <a:tc>
-                  <a:txBody>
-                    <a:bodyPr/>
-                    <a:lstStyle/>
-                    <a:p>
-                      <a:pPr algn="ctr"/>
-                      <a:r>
-                        <a:rPr sz="800" b="1" i="0">
-                          <a:solidFill>
-                            <a:srgbClr val="0D0D0D"/>
-                          </a:solidFill>
-                          <a:latin typeface="Calibri"/>
-                        </a:rPr>
-                        <a:t>470,0</a:t>
-                      </a:r>
-                    </a:p>
-                  </a:txBody>
-                  <a:tcPr>
-                    <a:solidFill>
-                      <a:srgbClr val="FFFFFF"/>
-                    </a:solidFill>
-                  </a:tcPr>
-                </a:tc>
               </a:tr>
               <a:tr h="220000">
                 <a:tc>
@@ -29224,52 +28260,6 @@
                   <a:tcPr>
                     <a:solidFill>
                       <a:srgbClr val="DDE8F5"/>
-                    </a:solidFill>
-                  </a:tcPr>
-                </a:tc>
-                <a:tc>
-                  <a:txBody>
-                    <a:bodyPr/>
-                    <a:lstStyle/>
-                    <a:p>
-                      <a:pPr algn="ctr"/>
-                      <a:r>
-                        <a:rPr sz="750" b="0" i="1">
-                          <a:solidFill>
-                            <a:srgbClr val="555555"/>
-                          </a:solidFill>
-                          <a:latin typeface="Calibri"/>
-                        </a:rPr>
-                        <a:t>+5,7 %</a:t>
-                      </a:r>
-                    </a:p>
-                  </a:txBody>
-                  <a:tcPr>
-                    <a:solidFill>
-                      <a:srgbClr val="F7F8FA"/>
-                    </a:solidFill>
-                  </a:tcPr>
-                </a:tc>
-                <a:tc>
-                  <a:txBody>
-                    <a:bodyPr/>
-                    <a:lstStyle/>
-                    <a:p>
-                      <a:pPr algn="ctr"/>
-                      <a:r>
-                        <a:rPr sz="750" b="0" i="1">
-                          <a:solidFill>
-                            <a:srgbClr val="555555"/>
-                          </a:solidFill>
-                          <a:latin typeface="Calibri"/>
-                        </a:rPr>
-                        <a:t>+6,8 %</a:t>
-                      </a:r>
-                    </a:p>
-                  </a:txBody>
-                  <a:tcPr>
-                    <a:solidFill>
-                      <a:srgbClr val="F7F8FA"/>
                     </a:solidFill>
                   </a:tcPr>
                 </a:tc>
@@ -29367,52 +28357,6 @@
                     </a:solidFill>
                   </a:tcPr>
                 </a:tc>
-                <a:tc>
-                  <a:txBody>
-                    <a:bodyPr/>
-                    <a:lstStyle/>
-                    <a:p>
-                      <a:pPr algn="ctr"/>
-                      <a:r>
-                        <a:rPr sz="800" b="1" i="0">
-                          <a:solidFill>
-                            <a:srgbClr val="0D0D0D"/>
-                          </a:solidFill>
-                          <a:latin typeface="Calibri"/>
-                        </a:rPr>
-                        <a:t>207,7</a:t>
-                      </a:r>
-                    </a:p>
-                  </a:txBody>
-                  <a:tcPr>
-                    <a:solidFill>
-                      <a:srgbClr val="FFFFFF"/>
-                    </a:solidFill>
-                  </a:tcPr>
-                </a:tc>
-                <a:tc>
-                  <a:txBody>
-                    <a:bodyPr/>
-                    <a:lstStyle/>
-                    <a:p>
-                      <a:pPr algn="ctr"/>
-                      <a:r>
-                        <a:rPr sz="800" b="1" i="0">
-                          <a:solidFill>
-                            <a:srgbClr val="0D0D0D"/>
-                          </a:solidFill>
-                          <a:latin typeface="Calibri"/>
-                        </a:rPr>
-                        <a:t>223,2</a:t>
-                      </a:r>
-                    </a:p>
-                  </a:txBody>
-                  <a:tcPr>
-                    <a:solidFill>
-                      <a:srgbClr val="FFFFFF"/>
-                    </a:solidFill>
-                  </a:tcPr>
-                </a:tc>
               </a:tr>
               <a:tr h="220000">
                 <a:tc>
@@ -29504,52 +28448,6 @@
                   <a:tcPr>
                     <a:solidFill>
                       <a:srgbClr val="DDE8F5"/>
-                    </a:solidFill>
-                  </a:tcPr>
-                </a:tc>
-                <a:tc>
-                  <a:txBody>
-                    <a:bodyPr/>
-                    <a:lstStyle/>
-                    <a:p>
-                      <a:pPr algn="ctr"/>
-                      <a:r>
-                        <a:rPr sz="750" b="0" i="1">
-                          <a:solidFill>
-                            <a:srgbClr val="555555"/>
-                          </a:solidFill>
-                          <a:latin typeface="Calibri"/>
-                        </a:rPr>
-                        <a:t>47,2 %</a:t>
-                      </a:r>
-                    </a:p>
-                  </a:txBody>
-                  <a:tcPr>
-                    <a:solidFill>
-                      <a:srgbClr val="F7F8FA"/>
-                    </a:solidFill>
-                  </a:tcPr>
-                </a:tc>
-                <a:tc>
-                  <a:txBody>
-                    <a:bodyPr/>
-                    <a:lstStyle/>
-                    <a:p>
-                      <a:pPr algn="ctr"/>
-                      <a:r>
-                        <a:rPr sz="750" b="0" i="1">
-                          <a:solidFill>
-                            <a:srgbClr val="555555"/>
-                          </a:solidFill>
-                          <a:latin typeface="Calibri"/>
-                        </a:rPr>
-                        <a:t>47,5 %</a:t>
-                      </a:r>
-                    </a:p>
-                  </a:txBody>
-                  <a:tcPr>
-                    <a:solidFill>
-                      <a:srgbClr val="F7F8FA"/>
                     </a:solidFill>
                   </a:tcPr>
                 </a:tc>
@@ -29647,52 +28545,6 @@
                     </a:solidFill>
                   </a:tcPr>
                 </a:tc>
-                <a:tc>
-                  <a:txBody>
-                    <a:bodyPr/>
-                    <a:lstStyle/>
-                    <a:p>
-                      <a:pPr algn="ctr"/>
-                      <a:r>
-                        <a:rPr sz="800" b="1" i="0">
-                          <a:solidFill>
-                            <a:srgbClr val="0D0D0D"/>
-                          </a:solidFill>
-                          <a:latin typeface="Calibri"/>
-                        </a:rPr>
-                        <a:t>155,0</a:t>
-                      </a:r>
-                    </a:p>
-                  </a:txBody>
-                  <a:tcPr>
-                    <a:solidFill>
-                      <a:srgbClr val="FFFFFF"/>
-                    </a:solidFill>
-                  </a:tcPr>
-                </a:tc>
-                <a:tc>
-                  <a:txBody>
-                    <a:bodyPr/>
-                    <a:lstStyle/>
-                    <a:p>
-                      <a:pPr algn="ctr"/>
-                      <a:r>
-                        <a:rPr sz="800" b="1" i="0">
-                          <a:solidFill>
-                            <a:srgbClr val="0D0D0D"/>
-                          </a:solidFill>
-                          <a:latin typeface="Calibri"/>
-                        </a:rPr>
-                        <a:t>168,0</a:t>
-                      </a:r>
-                    </a:p>
-                  </a:txBody>
-                  <a:tcPr>
-                    <a:solidFill>
-                      <a:srgbClr val="FFFFFF"/>
-                    </a:solidFill>
-                  </a:tcPr>
-                </a:tc>
               </a:tr>
               <a:tr h="220000">
                 <a:tc>
@@ -29784,52 +28636,6 @@
                   <a:tcPr>
                     <a:solidFill>
                       <a:srgbClr val="DDE8F5"/>
-                    </a:solidFill>
-                  </a:tcPr>
-                </a:tc>
-                <a:tc>
-                  <a:txBody>
-                    <a:bodyPr/>
-                    <a:lstStyle/>
-                    <a:p>
-                      <a:pPr algn="ctr"/>
-                      <a:r>
-                        <a:rPr sz="750" b="0" i="1">
-                          <a:solidFill>
-                            <a:srgbClr val="555555"/>
-                          </a:solidFill>
-                          <a:latin typeface="Calibri"/>
-                        </a:rPr>
-                        <a:t>35,2 %</a:t>
-                      </a:r>
-                    </a:p>
-                  </a:txBody>
-                  <a:tcPr>
-                    <a:solidFill>
-                      <a:srgbClr val="F7F8FA"/>
-                    </a:solidFill>
-                  </a:tcPr>
-                </a:tc>
-                <a:tc>
-                  <a:txBody>
-                    <a:bodyPr/>
-                    <a:lstStyle/>
-                    <a:p>
-                      <a:pPr algn="ctr"/>
-                      <a:r>
-                        <a:rPr sz="750" b="0" i="1">
-                          <a:solidFill>
-                            <a:srgbClr val="555555"/>
-                          </a:solidFill>
-                          <a:latin typeface="Calibri"/>
-                        </a:rPr>
-                        <a:t>35,7 %</a:t>
-                      </a:r>
-                    </a:p>
-                  </a:txBody>
-                  <a:tcPr>
-                    <a:solidFill>
-                      <a:srgbClr val="F7F8FA"/>
                     </a:solidFill>
                   </a:tcPr>
                 </a:tc>
@@ -29927,52 +28733,6 @@
                     </a:solidFill>
                   </a:tcPr>
                 </a:tc>
-                <a:tc>
-                  <a:txBody>
-                    <a:bodyPr/>
-                    <a:lstStyle/>
-                    <a:p>
-                      <a:pPr algn="ctr"/>
-                      <a:r>
-                        <a:rPr sz="800" b="1" i="0">
-                          <a:solidFill>
-                            <a:srgbClr val="0D0D0D"/>
-                          </a:solidFill>
-                          <a:latin typeface="Calibri"/>
-                        </a:rPr>
-                        <a:t>118,0</a:t>
-                      </a:r>
-                    </a:p>
-                  </a:txBody>
-                  <a:tcPr>
-                    <a:solidFill>
-                      <a:srgbClr val="FFFFFF"/>
-                    </a:solidFill>
-                  </a:tcPr>
-                </a:tc>
-                <a:tc>
-                  <a:txBody>
-                    <a:bodyPr/>
-                    <a:lstStyle/>
-                    <a:p>
-                      <a:pPr algn="ctr"/>
-                      <a:r>
-                        <a:rPr sz="800" b="1" i="0">
-                          <a:solidFill>
-                            <a:srgbClr val="0D0D0D"/>
-                          </a:solidFill>
-                          <a:latin typeface="Calibri"/>
-                        </a:rPr>
-                        <a:t>128,0</a:t>
-                      </a:r>
-                    </a:p>
-                  </a:txBody>
-                  <a:tcPr>
-                    <a:solidFill>
-                      <a:srgbClr val="FFFFFF"/>
-                    </a:solidFill>
-                  </a:tcPr>
-                </a:tc>
               </a:tr>
               <a:tr h="220000">
                 <a:tc>
@@ -30067,92 +28827,11 @@
                     </a:solidFill>
                   </a:tcPr>
                 </a:tc>
-                <a:tc>
-                  <a:txBody>
-                    <a:bodyPr/>
-                    <a:lstStyle/>
-                    <a:p>
-                      <a:pPr algn="ctr"/>
-                      <a:r>
-                        <a:rPr sz="750" b="0" i="1">
-                          <a:solidFill>
-                            <a:srgbClr val="555555"/>
-                          </a:solidFill>
-                          <a:latin typeface="Calibri"/>
-                        </a:rPr>
-                        <a:t>26,8 %</a:t>
-                      </a:r>
-                    </a:p>
-                  </a:txBody>
-                  <a:tcPr>
-                    <a:solidFill>
-                      <a:srgbClr val="F7F8FA"/>
-                    </a:solidFill>
-                  </a:tcPr>
-                </a:tc>
-                <a:tc>
-                  <a:txBody>
-                    <a:bodyPr/>
-                    <a:lstStyle/>
-                    <a:p>
-                      <a:pPr algn="ctr"/>
-                      <a:r>
-                        <a:rPr sz="750" b="0" i="1">
-                          <a:solidFill>
-                            <a:srgbClr val="555555"/>
-                          </a:solidFill>
-                          <a:latin typeface="Calibri"/>
-                        </a:rPr>
-                        <a:t>27,2 %</a:t>
-                      </a:r>
-                    </a:p>
-                  </a:txBody>
-                  <a:tcPr>
-                    <a:solidFill>
-                      <a:srgbClr val="F7F8FA"/>
-                    </a:solidFill>
-                  </a:tcPr>
-                </a:tc>
               </a:tr>
             </a:tbl>
           </a:graphicData>
         </a:graphic>
       </p:graphicFrame>
-      <p:sp>
-        <p:nvSpPr>
-          <p:cNvPr id="18" name="TextBox 17"/>
-          <p:cNvSpPr txBox="1"/>
-          <p:nvPr/>
-        </p:nvSpPr>
-        <p:spPr>
-          <a:xfrm>
-            <a:off x="367200" y="3218400"/>
-            <a:ext cx="8413200" cy="1224000"/>
-          </a:xfrm>
-          <a:prstGeom prst="rect">
-            <a:avLst/>
-          </a:prstGeom>
-          <a:noFill/>
-        </p:spPr>
-        <p:txBody>
-          <a:bodyPr wrap="square">
-            <a:spAutoFit/>
-          </a:bodyPr>
-          <a:lstStyle/>
-          <a:p>
-            <a:pPr algn="l"/>
-            <a:r>
-              <a:rPr sz="850" b="0" i="0">
-                <a:solidFill>
-                  <a:srgbClr val="555555"/>
-                </a:solidFill>
-                <a:latin typeface="Calibri"/>
-              </a:rPr>
-              <a:t>Croissance revenue de 6.4% en 2025 portée par les services (+12%) et l'iPhone (+5%). Les marges se stabilisent à haut niveau grâce à l'effet de levier sur les coûts fixes et au mix produit favorable. La génération de cash de 110Md$ en 2025 renforce la solidité bilancielle et permet des rachats d'actions agressifs.</a:t>
-            </a:r>
-          </a:p>
-        </p:txBody>
-      </p:sp>
     </p:spTree>
   </p:cSld>
   <p:clrMapOvr>
@@ -32035,41 +30714,6 @@
           </a:graphicData>
         </a:graphic>
       </p:graphicFrame>
-      <p:sp>
-        <p:nvSpPr>
-          <p:cNvPr id="31" name="TextBox 30"/>
-          <p:cNvSpPr txBox="1"/>
-          <p:nvPr/>
-        </p:nvSpPr>
-        <p:spPr>
-          <a:xfrm>
-            <a:off x="367200" y="4068000"/>
-            <a:ext cx="8413200" cy="468000"/>
-          </a:xfrm>
-          <a:prstGeom prst="rect">
-            <a:avLst/>
-          </a:prstGeom>
-          <a:noFill/>
-        </p:spPr>
-        <p:txBody>
-          <a:bodyPr wrap="square">
-            <a:spAutoFit/>
-          </a:bodyPr>
-          <a:lstStyle/>
-          <a:p>
-            <a:pPr algn="l"/>
-            <a:r>
-              <a:rPr sz="850" b="0" i="0">
-                <a:solidFill>
-                  <a:srgbClr val="555555"/>
-                </a:solidFill>
-                <a:latin typeface="Calibri"/>
-              </a:rPr>
-              <a:t>Croissance revenue de 6.4% en 2025 portée par les services (+12%) et l'iPhone (+5%). Les marges se stabilisent à haut niveau grâce à l'effet de levier sur les coûts fixes et au mix produit favorable. La génération de cash de 110Md$ en 2025 renforce la solidité bilancielle et permet des rachats d'act</a:t>
-            </a:r>
-          </a:p>
-        </p:txBody>
-      </p:sp>
     </p:spTree>
   </p:cSld>
   <p:clrMapOvr>

--- a/preview/AAPL/AAPL_pitchbook.pptx
+++ b/preview/AAPL/AAPL_pitchbook.pptx
@@ -3348,7 +3348,7 @@
             <a:avLst/>
           </a:prstGeom>
           <a:solidFill>
-            <a:srgbClr val="EAF4EF"/>
+            <a:srgbClr val="FDF6E8"/>
           </a:solidFill>
           <a:ln>
             <a:noFill/>
@@ -3391,7 +3391,7 @@
             <a:avLst/>
           </a:prstGeom>
           <a:solidFill>
-            <a:srgbClr val="1A7A4A"/>
+            <a:srgbClr val="B06000"/>
           </a:solidFill>
           <a:ln>
             <a:noFill/>
@@ -3445,11 +3445,11 @@
             <a:r>
               <a:rPr sz="900" b="1" i="0">
                 <a:solidFill>
-                  <a:srgbClr val="1A7A4A"/>
+                  <a:srgbClr val="B06000"/>
                 </a:solidFill>
                 <a:latin typeface="Calibri"/>
               </a:rPr>
-              <a:t>● BUY  ·  Prix cible base : 285 $  ·  Upside : +14,5 %</a:t>
+              <a:t>● HOLD  ·  Prix cible base : — $  ·  Upside : —</a:t>
             </a:r>
           </a:p>
         </p:txBody>
@@ -6108,41 +6108,6 @@
           </a:graphicData>
         </a:graphic>
       </p:graphicFrame>
-      <p:sp>
-        <p:nvSpPr>
-          <p:cNvPr id="18" name="TextBox 17"/>
-          <p:cNvSpPr txBox="1"/>
-          <p:nvPr/>
-        </p:nvSpPr>
-        <p:spPr>
-          <a:xfrm>
-            <a:off x="367200" y="3628800"/>
-            <a:ext cx="8413200" cy="824400"/>
-          </a:xfrm>
-          <a:prstGeom prst="rect">
-            <a:avLst/>
-          </a:prstGeom>
-          <a:noFill/>
-        </p:spPr>
-        <p:txBody>
-          <a:bodyPr wrap="square">
-            <a:spAutoFit/>
-          </a:bodyPr>
-          <a:lstStyle/>
-          <a:p>
-            <a:pPr algn="l"/>
-            <a:r>
-              <a:rPr sz="850" b="0" i="0">
-                <a:solidFill>
-                  <a:srgbClr val="555555"/>
-                </a:solidFill>
-                <a:latin typeface="Calibri"/>
-              </a:rPr>
-              <a:t>Les marges brutes sont passées de 43.3% (2022) à 46.9% (2025), reflétant un mix produit favorable (iPhone premium) et une optimisation des coûts de production. Les marges EBITDA/nettes ont progressé malgré des investissements R&amp;D accrus, démontrant un levier opérationnel exceptionnel. Cette dynamique suggère une durabilité des marges à 45%+ brute et 35%+ EBITDA.</a:t>
-            </a:r>
-          </a:p>
-        </p:txBody>
-      </p:sp>
     </p:spTree>
   </p:cSld>
   <p:clrMapOvr>
@@ -7303,7 +7268,7 @@
                           </a:solidFill>
                           <a:latin typeface="Calibri"/>
                         </a:rPr>
-                        <a:t>285 $</a:t>
+                        <a:t>—</a:t>
                       </a:r>
                     </a:p>
                   </a:txBody>
@@ -7479,7 +7444,7 @@
                           </a:solidFill>
                           <a:latin typeface="Calibri"/>
                         </a:rPr>
-                        <a:t>+14,5 %</a:t>
+                        <a:t>—</a:t>
                       </a:r>
                     </a:p>
                   </a:txBody>
@@ -7622,7 +7587,7 @@
                           </a:solidFill>
                           <a:latin typeface="Calibri"/>
                         </a:rPr>
-                        <a:t>220 $</a:t>
+                        <a:t>—</a:t>
                       </a:r>
                     </a:p>
                   </a:txBody>
@@ -7645,7 +7610,7 @@
                           </a:solidFill>
                           <a:latin typeface="Calibri"/>
                         </a:rPr>
-                        <a:t>285 $</a:t>
+                        <a:t>—</a:t>
                       </a:r>
                     </a:p>
                   </a:txBody>
@@ -7668,7 +7633,7 @@
                           </a:solidFill>
                           <a:latin typeface="Calibri"/>
                         </a:rPr>
-                        <a:t>320 $</a:t>
+                        <a:t>—</a:t>
                       </a:r>
                     </a:p>
                   </a:txBody>
@@ -7693,7 +7658,7 @@
                           </a:solidFill>
                           <a:latin typeface="Calibri"/>
                         </a:rPr>
-                        <a:t>-11,6 %</a:t>
+                        <a:t>—</a:t>
                       </a:r>
                     </a:p>
                   </a:txBody>
@@ -7716,7 +7681,7 @@
                           </a:solidFill>
                           <a:latin typeface="Calibri"/>
                         </a:rPr>
-                        <a:t>+14,5 %</a:t>
+                        <a:t>—</a:t>
                       </a:r>
                     </a:p>
                   </a:txBody>
@@ -7739,7 +7704,7 @@
                           </a:solidFill>
                           <a:latin typeface="Calibri"/>
                         </a:rPr>
-                        <a:t>+28,6 %</a:t>
+                        <a:t>—</a:t>
                       </a:r>
                     </a:p>
                   </a:txBody>
@@ -8203,7 +8168,7 @@
                           </a:solidFill>
                           <a:latin typeface="Calibri"/>
                         </a:rPr>
-                        <a:t>329</a:t>
+                        <a:t>—</a:t>
                       </a:r>
                     </a:p>
                   </a:txBody>
@@ -8246,7 +8211,7 @@
                           </a:solidFill>
                           <a:latin typeface="Calibri"/>
                         </a:rPr>
-                        <a:t>357</a:t>
+                        <a:t>—</a:t>
                       </a:r>
                     </a:p>
                   </a:txBody>
@@ -8289,7 +8254,7 @@
                           </a:solidFill>
                           <a:latin typeface="Calibri"/>
                         </a:rPr>
-                        <a:t>390</a:t>
+                        <a:t>—</a:t>
                       </a:r>
                     </a:p>
                   </a:txBody>
@@ -8332,7 +8297,7 @@
                           </a:solidFill>
                           <a:latin typeface="Calibri"/>
                         </a:rPr>
-                        <a:t>430</a:t>
+                        <a:t>—</a:t>
                       </a:r>
                     </a:p>
                   </a:txBody>
@@ -8375,7 +8340,7 @@
                           </a:solidFill>
                           <a:latin typeface="Calibri"/>
                         </a:rPr>
-                        <a:t>478</a:t>
+                        <a:t>—</a:t>
                       </a:r>
                     </a:p>
                   </a:txBody>
@@ -8463,7 +8428,7 @@
                           </a:solidFill>
                           <a:latin typeface="Calibri"/>
                         </a:rPr>
-                        <a:t>285</a:t>
+                        <a:t>—</a:t>
                       </a:r>
                     </a:p>
                   </a:txBody>
@@ -8506,7 +8471,7 @@
                           </a:solidFill>
                           <a:latin typeface="Calibri"/>
                         </a:rPr>
-                        <a:t>306</a:t>
+                        <a:t>—</a:t>
                       </a:r>
                     </a:p>
                   </a:txBody>
@@ -8549,7 +8514,7 @@
                           </a:solidFill>
                           <a:latin typeface="Calibri"/>
                         </a:rPr>
-                        <a:t>329</a:t>
+                        <a:t>—</a:t>
                       </a:r>
                     </a:p>
                   </a:txBody>
@@ -8592,7 +8557,7 @@
                           </a:solidFill>
                           <a:latin typeface="Calibri"/>
                         </a:rPr>
-                        <a:t>357</a:t>
+                        <a:t>—</a:t>
                       </a:r>
                     </a:p>
                   </a:txBody>
@@ -8635,7 +8600,7 @@
                           </a:solidFill>
                           <a:latin typeface="Calibri"/>
                         </a:rPr>
-                        <a:t>390</a:t>
+                        <a:t>—</a:t>
                       </a:r>
                     </a:p>
                   </a:txBody>
@@ -8723,7 +8688,7 @@
                           </a:solidFill>
                           <a:latin typeface="Calibri"/>
                         </a:rPr>
-                        <a:t>251</a:t>
+                        <a:t>—</a:t>
                       </a:r>
                     </a:p>
                   </a:txBody>
@@ -8766,7 +8731,7 @@
                           </a:solidFill>
                           <a:latin typeface="Calibri"/>
                         </a:rPr>
-                        <a:t>267</a:t>
+                        <a:t>—</a:t>
                       </a:r>
                     </a:p>
                   </a:txBody>
@@ -8809,7 +8774,7 @@
                           </a:solidFill>
                           <a:latin typeface="Calibri"/>
                         </a:rPr>
-                        <a:t>285</a:t>
+                        <a:t>—</a:t>
                       </a:r>
                     </a:p>
                   </a:txBody>
@@ -8852,7 +8817,7 @@
                           </a:solidFill>
                           <a:latin typeface="Calibri"/>
                         </a:rPr>
-                        <a:t>306</a:t>
+                        <a:t>—</a:t>
                       </a:r>
                     </a:p>
                   </a:txBody>
@@ -8895,7 +8860,7 @@
                           </a:solidFill>
                           <a:latin typeface="Calibri"/>
                         </a:rPr>
-                        <a:t>329</a:t>
+                        <a:t>—</a:t>
                       </a:r>
                     </a:p>
                   </a:txBody>
@@ -8983,7 +8948,7 @@
                           </a:solidFill>
                           <a:latin typeface="Calibri"/>
                         </a:rPr>
-                        <a:t>225</a:t>
+                        <a:t>—</a:t>
                       </a:r>
                     </a:p>
                   </a:txBody>
@@ -9026,7 +8991,7 @@
                           </a:solidFill>
                           <a:latin typeface="Calibri"/>
                         </a:rPr>
-                        <a:t>237</a:t>
+                        <a:t>—</a:t>
                       </a:r>
                     </a:p>
                   </a:txBody>
@@ -9069,7 +9034,7 @@
                           </a:solidFill>
                           <a:latin typeface="Calibri"/>
                         </a:rPr>
-                        <a:t>251</a:t>
+                        <a:t>—</a:t>
                       </a:r>
                     </a:p>
                   </a:txBody>
@@ -9112,7 +9077,7 @@
                           </a:solidFill>
                           <a:latin typeface="Calibri"/>
                         </a:rPr>
-                        <a:t>267</a:t>
+                        <a:t>—</a:t>
                       </a:r>
                     </a:p>
                   </a:txBody>
@@ -9155,7 +9120,7 @@
                           </a:solidFill>
                           <a:latin typeface="Calibri"/>
                         </a:rPr>
-                        <a:t>285</a:t>
+                        <a:t>—</a:t>
                       </a:r>
                     </a:p>
                   </a:txBody>
@@ -9243,7 +9208,7 @@
                           </a:solidFill>
                           <a:latin typeface="Calibri"/>
                         </a:rPr>
-                        <a:t>203</a:t>
+                        <a:t>—</a:t>
                       </a:r>
                     </a:p>
                   </a:txBody>
@@ -9286,7 +9251,7 @@
                           </a:solidFill>
                           <a:latin typeface="Calibri"/>
                         </a:rPr>
-                        <a:t>213</a:t>
+                        <a:t>—</a:t>
                       </a:r>
                     </a:p>
                   </a:txBody>
@@ -9329,7 +9294,7 @@
                           </a:solidFill>
                           <a:latin typeface="Calibri"/>
                         </a:rPr>
-                        <a:t>225</a:t>
+                        <a:t>—</a:t>
                       </a:r>
                     </a:p>
                   </a:txBody>
@@ -9372,7 +9337,7 @@
                           </a:solidFill>
                           <a:latin typeface="Calibri"/>
                         </a:rPr>
-                        <a:t>237</a:t>
+                        <a:t>—</a:t>
                       </a:r>
                     </a:p>
                   </a:txBody>
@@ -9415,7 +9380,7 @@
                           </a:solidFill>
                           <a:latin typeface="Calibri"/>
                         </a:rPr>
-                        <a:t>251</a:t>
+                        <a:t>—</a:t>
                       </a:r>
                     </a:p>
                   </a:txBody>
@@ -9450,41 +9415,6 @@
           </a:graphicData>
         </a:graphic>
       </p:graphicFrame>
-      <p:sp>
-        <p:nvSpPr>
-          <p:cNvPr id="20" name="TextBox 19"/>
-          <p:cNvSpPr txBox="1"/>
-          <p:nvPr/>
-        </p:nvSpPr>
-        <p:spPr>
-          <a:xfrm>
-            <a:off x="367200" y="3916800"/>
-            <a:ext cx="8413200" cy="547200"/>
-          </a:xfrm>
-          <a:prstGeom prst="rect">
-            <a:avLst/>
-          </a:prstGeom>
-          <a:noFill/>
-        </p:spPr>
-        <p:txBody>
-          <a:bodyPr wrap="square">
-            <a:spAutoFit/>
-          </a:bodyPr>
-          <a:lstStyle/>
-          <a:p>
-            <a:pPr algn="l"/>
-            <a:r>
-              <a:rPr sz="850" b="0" i="0">
-                <a:solidFill>
-                  <a:srgbClr val="555555"/>
-                </a:solidFill>
-                <a:latin typeface="Calibri"/>
-              </a:rPr>
-              <a:t>Avec un WACC de 10.4% et un TGR de 3.0%, le DCF implique un prix de 285$ (base), soit un upside de 14.5% vs cours actuel. La prime de croissance est partiellement pricee, mais les catalyseurs (IA, services) pourraient justifier une revalorisation si l'execution suit.</a:t>
-            </a:r>
-          </a:p>
-        </p:txBody>
-      </p:sp>
     </p:spTree>
   </p:cSld>
   <p:clrMapOvr>
@@ -10094,7 +10024,7 @@
         </p:nvGraphicFramePr>
         <p:xfrm>
           <a:off x="367200" y="914400"/>
-          <a:ext cx="8413200" cy="2015999"/>
+          <a:ext cx="8413200" cy="871200"/>
         </p:xfrm>
         <a:graphic>
           <a:graphicData uri="http://schemas.openxmlformats.org/drawingml/2006/table">
@@ -10112,7 +10042,7 @@
                 <a:gridCol w="1093716"/>
                 <a:gridCol w="1009584"/>
               </a:tblGrid>
-              <a:tr h="251999">
+              <a:tr h="290400">
                 <a:tc>
                   <a:txBody>
                     <a:bodyPr/>
@@ -10298,7 +10228,7 @@
                   </a:tcPr>
                 </a:tc>
               </a:tr>
-              <a:tr h="251999">
+              <a:tr h="290400">
                 <a:tc>
                   <a:txBody>
                     <a:bodyPr/>
@@ -10484,937 +10414,7 @@
                   </a:tcPr>
                 </a:tc>
               </a:tr>
-              <a:tr h="251999">
-                <a:tc>
-                  <a:txBody>
-                    <a:bodyPr/>
-                    <a:lstStyle/>
-                    <a:p>
-                      <a:pPr algn="l"/>
-                      <a:r>
-                        <a:rPr sz="800" b="0" i="0">
-                          <a:solidFill>
-                            <a:srgbClr val="0D0D0D"/>
-                          </a:solidFill>
-                          <a:latin typeface="Calibri"/>
-                        </a:rPr>
-                        <a:t>Microsoft</a:t>
-                      </a:r>
-                    </a:p>
-                  </a:txBody>
-                  <a:tcPr>
-                    <a:solidFill>
-                      <a:srgbClr val="FFFFFF"/>
-                    </a:solidFill>
-                  </a:tcPr>
-                </a:tc>
-                <a:tc>
-                  <a:txBody>
-                    <a:bodyPr/>
-                    <a:lstStyle/>
-                    <a:p>
-                      <a:pPr algn="ctr"/>
-                      <a:r>
-                        <a:rPr sz="750" b="0" i="0">
-                          <a:solidFill>
-                            <a:srgbClr val="555555"/>
-                          </a:solidFill>
-                          <a:latin typeface="Calibri"/>
-                        </a:rPr>
-                        <a:t>MSFT</a:t>
-                      </a:r>
-                    </a:p>
-                  </a:txBody>
-                  <a:tcPr>
-                    <a:solidFill>
-                      <a:srgbClr val="FFFFFF"/>
-                    </a:solidFill>
-                  </a:tcPr>
-                </a:tc>
-                <a:tc>
-                  <a:txBody>
-                    <a:bodyPr/>
-                    <a:lstStyle/>
-                    <a:p>
-                      <a:pPr algn="ctr"/>
-                      <a:r>
-                        <a:rPr sz="800" b="0" i="0">
-                          <a:solidFill>
-                            <a:srgbClr val="0D0D0D"/>
-                          </a:solidFill>
-                          <a:latin typeface="Calibri"/>
-                        </a:rPr>
-                        <a:t>3 200,0</a:t>
-                      </a:r>
-                    </a:p>
-                  </a:txBody>
-                  <a:tcPr>
-                    <a:solidFill>
-                      <a:srgbClr val="FFFFFF"/>
-                    </a:solidFill>
-                  </a:tcPr>
-                </a:tc>
-                <a:tc>
-                  <a:txBody>
-                    <a:bodyPr/>
-                    <a:lstStyle/>
-                    <a:p>
-                      <a:pPr algn="ctr"/>
-                      <a:r>
-                        <a:rPr sz="800" b="0" i="0">
-                          <a:solidFill>
-                            <a:srgbClr val="0D0D0D"/>
-                          </a:solidFill>
-                          <a:latin typeface="Calibri"/>
-                        </a:rPr>
-                        <a:t>24,1x</a:t>
-                      </a:r>
-                    </a:p>
-                  </a:txBody>
-                  <a:tcPr>
-                    <a:solidFill>
-                      <a:srgbClr val="FFFFFF"/>
-                    </a:solidFill>
-                  </a:tcPr>
-                </a:tc>
-                <a:tc>
-                  <a:txBody>
-                    <a:bodyPr/>
-                    <a:lstStyle/>
-                    <a:p>
-                      <a:pPr algn="ctr"/>
-                      <a:r>
-                        <a:rPr sz="800" b="0" i="0">
-                          <a:solidFill>
-                            <a:srgbClr val="0D0D0D"/>
-                          </a:solidFill>
-                          <a:latin typeface="Calibri"/>
-                        </a:rPr>
-                        <a:t>12,8x</a:t>
-                      </a:r>
-                    </a:p>
-                  </a:txBody>
-                  <a:tcPr>
-                    <a:solidFill>
-                      <a:srgbClr val="FFFFFF"/>
-                    </a:solidFill>
-                  </a:tcPr>
-                </a:tc>
-                <a:tc>
-                  <a:txBody>
-                    <a:bodyPr/>
-                    <a:lstStyle/>
-                    <a:p>
-                      <a:pPr algn="ctr"/>
-                      <a:r>
-                        <a:rPr sz="800" b="0" i="0">
-                          <a:solidFill>
-                            <a:srgbClr val="0D0D0D"/>
-                          </a:solidFill>
-                          <a:latin typeface="Calibri"/>
-                        </a:rPr>
-                        <a:t>37,2x</a:t>
-                      </a:r>
-                    </a:p>
-                  </a:txBody>
-                  <a:tcPr>
-                    <a:solidFill>
-                      <a:srgbClr val="FFFFFF"/>
-                    </a:solidFill>
-                  </a:tcPr>
-                </a:tc>
-                <a:tc>
-                  <a:txBody>
-                    <a:bodyPr/>
-                    <a:lstStyle/>
-                    <a:p>
-                      <a:pPr algn="ctr"/>
-                      <a:r>
-                        <a:rPr sz="800" b="0" i="0">
-                          <a:solidFill>
-                            <a:srgbClr val="0D0D0D"/>
-                          </a:solidFill>
-                          <a:latin typeface="Calibri"/>
-                        </a:rPr>
-                        <a:t>6800,0 %</a:t>
-                      </a:r>
-                    </a:p>
-                  </a:txBody>
-                  <a:tcPr>
-                    <a:solidFill>
-                      <a:srgbClr val="FFFFFF"/>
-                    </a:solidFill>
-                  </a:tcPr>
-                </a:tc>
-                <a:tc>
-                  <a:txBody>
-                    <a:bodyPr/>
-                    <a:lstStyle/>
-                    <a:p>
-                      <a:pPr algn="ctr"/>
-                      <a:r>
-                        <a:rPr sz="800" b="0" i="0">
-                          <a:solidFill>
-                            <a:srgbClr val="0D0D0D"/>
-                          </a:solidFill>
-                          <a:latin typeface="Calibri"/>
-                        </a:rPr>
-                        <a:t>5500,0 %</a:t>
-                      </a:r>
-                    </a:p>
-                  </a:txBody>
-                  <a:tcPr>
-                    <a:solidFill>
-                      <a:srgbClr val="FFFFFF"/>
-                    </a:solidFill>
-                  </a:tcPr>
-                </a:tc>
-              </a:tr>
-              <a:tr h="251999">
-                <a:tc>
-                  <a:txBody>
-                    <a:bodyPr/>
-                    <a:lstStyle/>
-                    <a:p>
-                      <a:pPr algn="l"/>
-                      <a:r>
-                        <a:rPr sz="800" b="0" i="0">
-                          <a:solidFill>
-                            <a:srgbClr val="0D0D0D"/>
-                          </a:solidFill>
-                          <a:latin typeface="Calibri"/>
-                        </a:rPr>
-                        <a:t>Alphabet</a:t>
-                      </a:r>
-                    </a:p>
-                  </a:txBody>
-                  <a:tcPr>
-                    <a:solidFill>
-                      <a:srgbClr val="F7F8FA"/>
-                    </a:solidFill>
-                  </a:tcPr>
-                </a:tc>
-                <a:tc>
-                  <a:txBody>
-                    <a:bodyPr/>
-                    <a:lstStyle/>
-                    <a:p>
-                      <a:pPr algn="ctr"/>
-                      <a:r>
-                        <a:rPr sz="750" b="0" i="0">
-                          <a:solidFill>
-                            <a:srgbClr val="555555"/>
-                          </a:solidFill>
-                          <a:latin typeface="Calibri"/>
-                        </a:rPr>
-                        <a:t>GOOGL</a:t>
-                      </a:r>
-                    </a:p>
-                  </a:txBody>
-                  <a:tcPr>
-                    <a:solidFill>
-                      <a:srgbClr val="F7F8FA"/>
-                    </a:solidFill>
-                  </a:tcPr>
-                </a:tc>
-                <a:tc>
-                  <a:txBody>
-                    <a:bodyPr/>
-                    <a:lstStyle/>
-                    <a:p>
-                      <a:pPr algn="ctr"/>
-                      <a:r>
-                        <a:rPr sz="800" b="0" i="0">
-                          <a:solidFill>
-                            <a:srgbClr val="0D0D0D"/>
-                          </a:solidFill>
-                          <a:latin typeface="Calibri"/>
-                        </a:rPr>
-                        <a:t>2 100,0</a:t>
-                      </a:r>
-                    </a:p>
-                  </a:txBody>
-                  <a:tcPr>
-                    <a:solidFill>
-                      <a:srgbClr val="F7F8FA"/>
-                    </a:solidFill>
-                  </a:tcPr>
-                </a:tc>
-                <a:tc>
-                  <a:txBody>
-                    <a:bodyPr/>
-                    <a:lstStyle/>
-                    <a:p>
-                      <a:pPr algn="ctr"/>
-                      <a:r>
-                        <a:rPr sz="800" b="0" i="0">
-                          <a:solidFill>
-                            <a:srgbClr val="0D0D0D"/>
-                          </a:solidFill>
-                          <a:latin typeface="Calibri"/>
-                        </a:rPr>
-                        <a:t>22,5x</a:t>
-                      </a:r>
-                    </a:p>
-                  </a:txBody>
-                  <a:tcPr>
-                    <a:solidFill>
-                      <a:srgbClr val="F7F8FA"/>
-                    </a:solidFill>
-                  </a:tcPr>
-                </a:tc>
-                <a:tc>
-                  <a:txBody>
-                    <a:bodyPr/>
-                    <a:lstStyle/>
-                    <a:p>
-                      <a:pPr algn="ctr"/>
-                      <a:r>
-                        <a:rPr sz="800" b="0" i="0">
-                          <a:solidFill>
-                            <a:srgbClr val="0D0D0D"/>
-                          </a:solidFill>
-                          <a:latin typeface="Calibri"/>
-                        </a:rPr>
-                        <a:t>8,5x</a:t>
-                      </a:r>
-                    </a:p>
-                  </a:txBody>
-                  <a:tcPr>
-                    <a:solidFill>
-                      <a:srgbClr val="F7F8FA"/>
-                    </a:solidFill>
-                  </a:tcPr>
-                </a:tc>
-                <a:tc>
-                  <a:txBody>
-                    <a:bodyPr/>
-                    <a:lstStyle/>
-                    <a:p>
-                      <a:pPr algn="ctr"/>
-                      <a:r>
-                        <a:rPr sz="800" b="0" i="0">
-                          <a:solidFill>
-                            <a:srgbClr val="0D0D0D"/>
-                          </a:solidFill>
-                          <a:latin typeface="Calibri"/>
-                        </a:rPr>
-                        <a:t>28,5x</a:t>
-                      </a:r>
-                    </a:p>
-                  </a:txBody>
-                  <a:tcPr>
-                    <a:solidFill>
-                      <a:srgbClr val="F7F8FA"/>
-                    </a:solidFill>
-                  </a:tcPr>
-                </a:tc>
-                <a:tc>
-                  <a:txBody>
-                    <a:bodyPr/>
-                    <a:lstStyle/>
-                    <a:p>
-                      <a:pPr algn="ctr"/>
-                      <a:r>
-                        <a:rPr sz="800" b="0" i="0">
-                          <a:solidFill>
-                            <a:srgbClr val="0D0D0D"/>
-                          </a:solidFill>
-                          <a:latin typeface="Calibri"/>
-                        </a:rPr>
-                        <a:t>5600,0 %</a:t>
-                      </a:r>
-                    </a:p>
-                  </a:txBody>
-                  <a:tcPr>
-                    <a:solidFill>
-                      <a:srgbClr val="F7F8FA"/>
-                    </a:solidFill>
-                  </a:tcPr>
-                </a:tc>
-                <a:tc>
-                  <a:txBody>
-                    <a:bodyPr/>
-                    <a:lstStyle/>
-                    <a:p>
-                      <a:pPr algn="ctr"/>
-                      <a:r>
-                        <a:rPr sz="800" b="0" i="0">
-                          <a:solidFill>
-                            <a:srgbClr val="0D0D0D"/>
-                          </a:solidFill>
-                          <a:latin typeface="Calibri"/>
-                        </a:rPr>
-                        <a:t>4000,0 %</a:t>
-                      </a:r>
-                    </a:p>
-                  </a:txBody>
-                  <a:tcPr>
-                    <a:solidFill>
-                      <a:srgbClr val="F7F8FA"/>
-                    </a:solidFill>
-                  </a:tcPr>
-                </a:tc>
-              </a:tr>
-              <a:tr h="251999">
-                <a:tc>
-                  <a:txBody>
-                    <a:bodyPr/>
-                    <a:lstStyle/>
-                    <a:p>
-                      <a:pPr algn="l"/>
-                      <a:r>
-                        <a:rPr sz="800" b="0" i="0">
-                          <a:solidFill>
-                            <a:srgbClr val="0D0D0D"/>
-                          </a:solidFill>
-                          <a:latin typeface="Calibri"/>
-                        </a:rPr>
-                        <a:t>Amazon</a:t>
-                      </a:r>
-                    </a:p>
-                  </a:txBody>
-                  <a:tcPr>
-                    <a:solidFill>
-                      <a:srgbClr val="FFFFFF"/>
-                    </a:solidFill>
-                  </a:tcPr>
-                </a:tc>
-                <a:tc>
-                  <a:txBody>
-                    <a:bodyPr/>
-                    <a:lstStyle/>
-                    <a:p>
-                      <a:pPr algn="ctr"/>
-                      <a:r>
-                        <a:rPr sz="750" b="0" i="0">
-                          <a:solidFill>
-                            <a:srgbClr val="555555"/>
-                          </a:solidFill>
-                          <a:latin typeface="Calibri"/>
-                        </a:rPr>
-                        <a:t>AMZN</a:t>
-                      </a:r>
-                    </a:p>
-                  </a:txBody>
-                  <a:tcPr>
-                    <a:solidFill>
-                      <a:srgbClr val="FFFFFF"/>
-                    </a:solidFill>
-                  </a:tcPr>
-                </a:tc>
-                <a:tc>
-                  <a:txBody>
-                    <a:bodyPr/>
-                    <a:lstStyle/>
-                    <a:p>
-                      <a:pPr algn="ctr"/>
-                      <a:r>
-                        <a:rPr sz="800" b="0" i="0">
-                          <a:solidFill>
-                            <a:srgbClr val="0D0D0D"/>
-                          </a:solidFill>
-                          <a:latin typeface="Calibri"/>
-                        </a:rPr>
-                        <a:t>1 800,0</a:t>
-                      </a:r>
-                    </a:p>
-                  </a:txBody>
-                  <a:tcPr>
-                    <a:solidFill>
-                      <a:srgbClr val="FFFFFF"/>
-                    </a:solidFill>
-                  </a:tcPr>
-                </a:tc>
-                <a:tc>
-                  <a:txBody>
-                    <a:bodyPr/>
-                    <a:lstStyle/>
-                    <a:p>
-                      <a:pPr algn="ctr"/>
-                      <a:r>
-                        <a:rPr sz="800" b="0" i="0">
-                          <a:solidFill>
-                            <a:srgbClr val="0D0D0D"/>
-                          </a:solidFill>
-                          <a:latin typeface="Calibri"/>
-                        </a:rPr>
-                        <a:t>20,3x</a:t>
-                      </a:r>
-                    </a:p>
-                  </a:txBody>
-                  <a:tcPr>
-                    <a:solidFill>
-                      <a:srgbClr val="FFFFFF"/>
-                    </a:solidFill>
-                  </a:tcPr>
-                </a:tc>
-                <a:tc>
-                  <a:txBody>
-                    <a:bodyPr/>
-                    <a:lstStyle/>
-                    <a:p>
-                      <a:pPr algn="ctr"/>
-                      <a:r>
-                        <a:rPr sz="800" b="0" i="0">
-                          <a:solidFill>
-                            <a:srgbClr val="0D0D0D"/>
-                          </a:solidFill>
-                          <a:latin typeface="Calibri"/>
-                        </a:rPr>
-                        <a:t>3,2x</a:t>
-                      </a:r>
-                    </a:p>
-                  </a:txBody>
-                  <a:tcPr>
-                    <a:solidFill>
-                      <a:srgbClr val="FFFFFF"/>
-                    </a:solidFill>
-                  </a:tcPr>
-                </a:tc>
-                <a:tc>
-                  <a:txBody>
-                    <a:bodyPr/>
-                    <a:lstStyle/>
-                    <a:p>
-                      <a:pPr algn="ctr"/>
-                      <a:r>
-                        <a:rPr sz="800" b="0" i="0">
-                          <a:solidFill>
-                            <a:srgbClr val="0D0D0D"/>
-                          </a:solidFill>
-                          <a:latin typeface="Calibri"/>
-                        </a:rPr>
-                        <a:t>55,0x</a:t>
-                      </a:r>
-                    </a:p>
-                  </a:txBody>
-                  <a:tcPr>
-                    <a:solidFill>
-                      <a:srgbClr val="FFFFFF"/>
-                    </a:solidFill>
-                  </a:tcPr>
-                </a:tc>
-                <a:tc>
-                  <a:txBody>
-                    <a:bodyPr/>
-                    <a:lstStyle/>
-                    <a:p>
-                      <a:pPr algn="ctr"/>
-                      <a:r>
-                        <a:rPr sz="800" b="0" i="0">
-                          <a:solidFill>
-                            <a:srgbClr val="0D0D0D"/>
-                          </a:solidFill>
-                          <a:latin typeface="Calibri"/>
-                        </a:rPr>
-                        <a:t>4000,0 %</a:t>
-                      </a:r>
-                    </a:p>
-                  </a:txBody>
-                  <a:tcPr>
-                    <a:solidFill>
-                      <a:srgbClr val="FFFFFF"/>
-                    </a:solidFill>
-                  </a:tcPr>
-                </a:tc>
-                <a:tc>
-                  <a:txBody>
-                    <a:bodyPr/>
-                    <a:lstStyle/>
-                    <a:p>
-                      <a:pPr algn="ctr"/>
-                      <a:r>
-                        <a:rPr sz="800" b="0" i="0">
-                          <a:solidFill>
-                            <a:srgbClr val="0D0D0D"/>
-                          </a:solidFill>
-                          <a:latin typeface="Calibri"/>
-                        </a:rPr>
-                        <a:t>1500,0 %</a:t>
-                      </a:r>
-                    </a:p>
-                  </a:txBody>
-                  <a:tcPr>
-                    <a:solidFill>
-                      <a:srgbClr val="FFFFFF"/>
-                    </a:solidFill>
-                  </a:tcPr>
-                </a:tc>
-              </a:tr>
-              <a:tr h="251999">
-                <a:tc>
-                  <a:txBody>
-                    <a:bodyPr/>
-                    <a:lstStyle/>
-                    <a:p>
-                      <a:pPr algn="l"/>
-                      <a:r>
-                        <a:rPr sz="800" b="0" i="0">
-                          <a:solidFill>
-                            <a:srgbClr val="0D0D0D"/>
-                          </a:solidFill>
-                          <a:latin typeface="Calibri"/>
-                        </a:rPr>
-                        <a:t>Meta Platforms</a:t>
-                      </a:r>
-                    </a:p>
-                  </a:txBody>
-                  <a:tcPr>
-                    <a:solidFill>
-                      <a:srgbClr val="F7F8FA"/>
-                    </a:solidFill>
-                  </a:tcPr>
-                </a:tc>
-                <a:tc>
-                  <a:txBody>
-                    <a:bodyPr/>
-                    <a:lstStyle/>
-                    <a:p>
-                      <a:pPr algn="ctr"/>
-                      <a:r>
-                        <a:rPr sz="750" b="0" i="0">
-                          <a:solidFill>
-                            <a:srgbClr val="555555"/>
-                          </a:solidFill>
-                          <a:latin typeface="Calibri"/>
-                        </a:rPr>
-                        <a:t>META</a:t>
-                      </a:r>
-                    </a:p>
-                  </a:txBody>
-                  <a:tcPr>
-                    <a:solidFill>
-                      <a:srgbClr val="F7F8FA"/>
-                    </a:solidFill>
-                  </a:tcPr>
-                </a:tc>
-                <a:tc>
-                  <a:txBody>
-                    <a:bodyPr/>
-                    <a:lstStyle/>
-                    <a:p>
-                      <a:pPr algn="ctr"/>
-                      <a:r>
-                        <a:rPr sz="800" b="0" i="0">
-                          <a:solidFill>
-                            <a:srgbClr val="0D0D0D"/>
-                          </a:solidFill>
-                          <a:latin typeface="Calibri"/>
-                        </a:rPr>
-                        <a:t>1 500,0</a:t>
-                      </a:r>
-                    </a:p>
-                  </a:txBody>
-                  <a:tcPr>
-                    <a:solidFill>
-                      <a:srgbClr val="F7F8FA"/>
-                    </a:solidFill>
-                  </a:tcPr>
-                </a:tc>
-                <a:tc>
-                  <a:txBody>
-                    <a:bodyPr/>
-                    <a:lstStyle/>
-                    <a:p>
-                      <a:pPr algn="ctr"/>
-                      <a:r>
-                        <a:rPr sz="800" b="0" i="0">
-                          <a:solidFill>
-                            <a:srgbClr val="0D0D0D"/>
-                          </a:solidFill>
-                          <a:latin typeface="Calibri"/>
-                        </a:rPr>
-                        <a:t>18,7x</a:t>
-                      </a:r>
-                    </a:p>
-                  </a:txBody>
-                  <a:tcPr>
-                    <a:solidFill>
-                      <a:srgbClr val="F7F8FA"/>
-                    </a:solidFill>
-                  </a:tcPr>
-                </a:tc>
-                <a:tc>
-                  <a:txBody>
-                    <a:bodyPr/>
-                    <a:lstStyle/>
-                    <a:p>
-                      <a:pPr algn="ctr"/>
-                      <a:r>
-                        <a:rPr sz="800" b="0" i="0">
-                          <a:solidFill>
-                            <a:srgbClr val="0D0D0D"/>
-                          </a:solidFill>
-                          <a:latin typeface="Calibri"/>
-                        </a:rPr>
-                        <a:t>9,2x</a:t>
-                      </a:r>
-                    </a:p>
-                  </a:txBody>
-                  <a:tcPr>
-                    <a:solidFill>
-                      <a:srgbClr val="F7F8FA"/>
-                    </a:solidFill>
-                  </a:tcPr>
-                </a:tc>
-                <a:tc>
-                  <a:txBody>
-                    <a:bodyPr/>
-                    <a:lstStyle/>
-                    <a:p>
-                      <a:pPr algn="ctr"/>
-                      <a:r>
-                        <a:rPr sz="800" b="0" i="0">
-                          <a:solidFill>
-                            <a:srgbClr val="0D0D0D"/>
-                          </a:solidFill>
-                          <a:latin typeface="Calibri"/>
-                        </a:rPr>
-                        <a:t>30,5x</a:t>
-                      </a:r>
-                    </a:p>
-                  </a:txBody>
-                  <a:tcPr>
-                    <a:solidFill>
-                      <a:srgbClr val="F7F8FA"/>
-                    </a:solidFill>
-                  </a:tcPr>
-                </a:tc>
-                <a:tc>
-                  <a:txBody>
-                    <a:bodyPr/>
-                    <a:lstStyle/>
-                    <a:p>
-                      <a:pPr algn="ctr"/>
-                      <a:r>
-                        <a:rPr sz="800" b="0" i="0">
-                          <a:solidFill>
-                            <a:srgbClr val="0D0D0D"/>
-                          </a:solidFill>
-                          <a:latin typeface="Calibri"/>
-                        </a:rPr>
-                        <a:t>8500,0 %</a:t>
-                      </a:r>
-                    </a:p>
-                  </a:txBody>
-                  <a:tcPr>
-                    <a:solidFill>
-                      <a:srgbClr val="F7F8FA"/>
-                    </a:solidFill>
-                  </a:tcPr>
-                </a:tc>
-                <a:tc>
-                  <a:txBody>
-                    <a:bodyPr/>
-                    <a:lstStyle/>
-                    <a:p>
-                      <a:pPr algn="ctr"/>
-                      <a:r>
-                        <a:rPr sz="800" b="0" i="0">
-                          <a:solidFill>
-                            <a:srgbClr val="0D0D0D"/>
-                          </a:solidFill>
-                          <a:latin typeface="Calibri"/>
-                        </a:rPr>
-                        <a:t>5500,0 %</a:t>
-                      </a:r>
-                    </a:p>
-                  </a:txBody>
-                  <a:tcPr>
-                    <a:solidFill>
-                      <a:srgbClr val="F7F8FA"/>
-                    </a:solidFill>
-                  </a:tcPr>
-                </a:tc>
-              </a:tr>
-              <a:tr h="251999">
-                <a:tc>
-                  <a:txBody>
-                    <a:bodyPr/>
-                    <a:lstStyle/>
-                    <a:p>
-                      <a:pPr algn="l"/>
-                      <a:r>
-                        <a:rPr sz="800" b="0" i="0">
-                          <a:solidFill>
-                            <a:srgbClr val="0D0D0D"/>
-                          </a:solidFill>
-                          <a:latin typeface="Calibri"/>
-                        </a:rPr>
-                        <a:t>NVIDIA</a:t>
-                      </a:r>
-                    </a:p>
-                  </a:txBody>
-                  <a:tcPr>
-                    <a:solidFill>
-                      <a:srgbClr val="FFFFFF"/>
-                    </a:solidFill>
-                  </a:tcPr>
-                </a:tc>
-                <a:tc>
-                  <a:txBody>
-                    <a:bodyPr/>
-                    <a:lstStyle/>
-                    <a:p>
-                      <a:pPr algn="ctr"/>
-                      <a:r>
-                        <a:rPr sz="750" b="0" i="0">
-                          <a:solidFill>
-                            <a:srgbClr val="555555"/>
-                          </a:solidFill>
-                          <a:latin typeface="Calibri"/>
-                        </a:rPr>
-                        <a:t>NVDA</a:t>
-                      </a:r>
-                    </a:p>
-                  </a:txBody>
-                  <a:tcPr>
-                    <a:solidFill>
-                      <a:srgbClr val="FFFFFF"/>
-                    </a:solidFill>
-                  </a:tcPr>
-                </a:tc>
-                <a:tc>
-                  <a:txBody>
-                    <a:bodyPr/>
-                    <a:lstStyle/>
-                    <a:p>
-                      <a:pPr algn="ctr"/>
-                      <a:r>
-                        <a:rPr sz="800" b="0" i="0">
-                          <a:solidFill>
-                            <a:srgbClr val="0D0D0D"/>
-                          </a:solidFill>
-                          <a:latin typeface="Calibri"/>
-                        </a:rPr>
-                        <a:t>2 300,0</a:t>
-                      </a:r>
-                    </a:p>
-                  </a:txBody>
-                  <a:tcPr>
-                    <a:solidFill>
-                      <a:srgbClr val="FFFFFF"/>
-                    </a:solidFill>
-                  </a:tcPr>
-                </a:tc>
-                <a:tc>
-                  <a:txBody>
-                    <a:bodyPr/>
-                    <a:lstStyle/>
-                    <a:p>
-                      <a:pPr algn="ctr"/>
-                      <a:r>
-                        <a:rPr sz="800" b="0" i="0">
-                          <a:solidFill>
-                            <a:srgbClr val="0D0D0D"/>
-                          </a:solidFill>
-                          <a:latin typeface="Calibri"/>
-                        </a:rPr>
-                        <a:t>45,0x</a:t>
-                      </a:r>
-                    </a:p>
-                  </a:txBody>
-                  <a:tcPr>
-                    <a:solidFill>
-                      <a:srgbClr val="FFFFFF"/>
-                    </a:solidFill>
-                  </a:tcPr>
-                </a:tc>
-                <a:tc>
-                  <a:txBody>
-                    <a:bodyPr/>
-                    <a:lstStyle/>
-                    <a:p>
-                      <a:pPr algn="ctr"/>
-                      <a:r>
-                        <a:rPr sz="800" b="0" i="0">
-                          <a:solidFill>
-                            <a:srgbClr val="0D0D0D"/>
-                          </a:solidFill>
-                          <a:latin typeface="Calibri"/>
-                        </a:rPr>
-                        <a:t>22,0x</a:t>
-                      </a:r>
-                    </a:p>
-                  </a:txBody>
-                  <a:tcPr>
-                    <a:solidFill>
-                      <a:srgbClr val="FFFFFF"/>
-                    </a:solidFill>
-                  </a:tcPr>
-                </a:tc>
-                <a:tc>
-                  <a:txBody>
-                    <a:bodyPr/>
-                    <a:lstStyle/>
-                    <a:p>
-                      <a:pPr algn="ctr"/>
-                      <a:r>
-                        <a:rPr sz="800" b="0" i="0">
-                          <a:solidFill>
-                            <a:srgbClr val="0D0D0D"/>
-                          </a:solidFill>
-                          <a:latin typeface="Calibri"/>
-                        </a:rPr>
-                        <a:t>42,0x</a:t>
-                      </a:r>
-                    </a:p>
-                  </a:txBody>
-                  <a:tcPr>
-                    <a:solidFill>
-                      <a:srgbClr val="FFFFFF"/>
-                    </a:solidFill>
-                  </a:tcPr>
-                </a:tc>
-                <a:tc>
-                  <a:txBody>
-                    <a:bodyPr/>
-                    <a:lstStyle/>
-                    <a:p>
-                      <a:pPr algn="ctr"/>
-                      <a:r>
-                        <a:rPr sz="800" b="0" i="0">
-                          <a:solidFill>
-                            <a:srgbClr val="0D0D0D"/>
-                          </a:solidFill>
-                          <a:latin typeface="Calibri"/>
-                        </a:rPr>
-                        <a:t>7000,0 %</a:t>
-                      </a:r>
-                    </a:p>
-                  </a:txBody>
-                  <a:tcPr>
-                    <a:solidFill>
-                      <a:srgbClr val="FFFFFF"/>
-                    </a:solidFill>
-                  </a:tcPr>
-                </a:tc>
-                <a:tc>
-                  <a:txBody>
-                    <a:bodyPr/>
-                    <a:lstStyle/>
-                    <a:p>
-                      <a:pPr algn="ctr"/>
-                      <a:r>
-                        <a:rPr sz="800" b="0" i="0">
-                          <a:solidFill>
-                            <a:srgbClr val="0D0D0D"/>
-                          </a:solidFill>
-                          <a:latin typeface="Calibri"/>
-                        </a:rPr>
-                        <a:t>6500,0 %</a:t>
-                      </a:r>
-                    </a:p>
-                  </a:txBody>
-                  <a:tcPr>
-                    <a:solidFill>
-                      <a:srgbClr val="FFFFFF"/>
-                    </a:solidFill>
-                  </a:tcPr>
-                </a:tc>
-              </a:tr>
-              <a:tr h="252006">
+              <a:tr h="290400">
                 <a:tc>
                   <a:txBody>
                     <a:bodyPr/>
@@ -11497,7 +10497,7 @@
                           </a:solidFill>
                           <a:latin typeface="Calibri"/>
                         </a:rPr>
-                        <a:t>22,5x</a:t>
+                        <a:t>—</a:t>
                       </a:r>
                     </a:p>
                   </a:txBody>
@@ -11520,7 +10520,7 @@
                           </a:solidFill>
                           <a:latin typeface="Calibri"/>
                         </a:rPr>
-                        <a:t>9,2x</a:t>
+                        <a:t>—</a:t>
                       </a:r>
                     </a:p>
                   </a:txBody>
@@ -11543,7 +10543,7 @@
                           </a:solidFill>
                           <a:latin typeface="Calibri"/>
                         </a:rPr>
-                        <a:t>37,2x</a:t>
+                        <a:t>—</a:t>
                       </a:r>
                     </a:p>
                   </a:txBody>
@@ -11566,7 +10566,7 @@
                           </a:solidFill>
                           <a:latin typeface="Calibri"/>
                         </a:rPr>
-                        <a:t>6800,0 %</a:t>
+                        <a:t>—</a:t>
                       </a:r>
                     </a:p>
                   </a:txBody>
@@ -11589,7 +10589,7 @@
                           </a:solidFill>
                           <a:latin typeface="Calibri"/>
                         </a:rPr>
-                        <a:t>5500,0 %</a:t>
+                        <a:t>—</a:t>
                       </a:r>
                     </a:p>
                   </a:txBody>
@@ -11604,41 +10604,6 @@
           </a:graphicData>
         </a:graphic>
       </p:graphicFrame>
-      <p:sp>
-        <p:nvSpPr>
-          <p:cNvPr id="18" name="TextBox 17"/>
-          <p:cNvSpPr txBox="1"/>
-          <p:nvPr/>
-        </p:nvSpPr>
-        <p:spPr>
-          <a:xfrm>
-            <a:off x="367200" y="3128400"/>
-            <a:ext cx="8413200" cy="1234800"/>
-          </a:xfrm>
-          <a:prstGeom prst="rect">
-            <a:avLst/>
-          </a:prstGeom>
-          <a:noFill/>
-        </p:spPr>
-        <p:txBody>
-          <a:bodyPr wrap="square">
-            <a:spAutoFit/>
-          </a:bodyPr>
-          <a:lstStyle/>
-          <a:p>
-            <a:pPr algn="l"/>
-            <a:r>
-              <a:rPr sz="850" b="0" i="0">
-                <a:solidFill>
-                  <a:srgbClr val="555555"/>
-                </a:solidFill>
-                <a:latin typeface="Calibri"/>
-              </a:rPr>
-              <a:t>Apple affiche un P/E de 32.6x vs une médiane peers de 28.5x (+13.7%), justifiée par des marges supérieures et une croissance organique. L'EV/EBITDA à 25.7x est en ligne avec la médiane (26.1x), mais une prime de 20% serait justifiée pour sa qualité d'actifs. Une convergence vers 30x P/E impliquerait un upside de 12%.</a:t>
-            </a:r>
-          </a:p>
-        </p:txBody>
-      </p:sp>
     </p:spTree>
   </p:cSld>
   <p:clrMapOvr>
@@ -12238,65 +11203,222 @@
           </a:p>
         </p:txBody>
       </p:sp>
-      <p:pic>
-        <p:nvPicPr>
-          <p:cNvPr id="17" name="Picture 16" descr="image.png"/>
-          <p:cNvPicPr>
-            <a:picLocks noChangeAspect="1"/>
-          </p:cNvPicPr>
-          <p:nvPr/>
-        </p:nvPicPr>
-        <p:blipFill>
-          <a:blip r:embed="rId2"/>
-          <a:stretch>
-            <a:fillRect/>
-          </a:stretch>
-        </p:blipFill>
-        <p:spPr>
-          <a:xfrm>
-            <a:off x="367200" y="914400"/>
-            <a:ext cx="8413200" cy="2448000"/>
-          </a:xfrm>
-          <a:prstGeom prst="rect">
-            <a:avLst/>
-          </a:prstGeom>
-        </p:spPr>
-      </p:pic>
-      <p:sp>
-        <p:nvSpPr>
-          <p:cNvPr id="18" name="TextBox 17"/>
-          <p:cNvSpPr txBox="1"/>
-          <p:nvPr/>
-        </p:nvSpPr>
-        <p:spPr>
-          <a:xfrm>
-            <a:off x="367200" y="3488400"/>
-            <a:ext cx="8413200" cy="914400"/>
-          </a:xfrm>
-          <a:prstGeom prst="rect">
-            <a:avLst/>
-          </a:prstGeom>
-          <a:noFill/>
-        </p:spPr>
-        <p:txBody>
-          <a:bodyPr wrap="square">
-            <a:spAutoFit/>
-          </a:bodyPr>
-          <a:lstStyle/>
-          <a:p>
-            <a:pPr algn="l"/>
-            <a:r>
-              <a:rPr sz="850" b="0" i="0">
-                <a:solidFill>
-                  <a:srgbClr val="555555"/>
-                </a:solidFill>
-                <a:latin typeface="Calibri"/>
-              </a:rPr>
-              <a:t>Avec un WACC de 10.4% et un TGR de 3.0%, le DCF implique un prix de 285$ (base), soit un upside de 14.5% vs cours actuel. La prime de croissance est partiellement pricee, mais les catalyseurs (IA, services) pourraient justifier une revalorisation si l'execution suit.</a:t>
-            </a:r>
-          </a:p>
-        </p:txBody>
-      </p:sp>
+      <p:graphicFrame>
+        <p:nvGraphicFramePr>
+          <p:cNvPr id="17" name="Table 16"/>
+          <p:cNvGraphicFramePr>
+            <a:graphicFrameLocks noGrp="1"/>
+          </p:cNvGraphicFramePr>
+          <p:nvPr/>
+        </p:nvGraphicFramePr>
+        <p:xfrm>
+          <a:off x="367200" y="914400"/>
+          <a:ext cx="8413200" cy="615600"/>
+        </p:xfrm>
+        <a:graphic>
+          <a:graphicData uri="http://schemas.openxmlformats.org/drawingml/2006/table">
+            <a:tbl>
+              <a:tblPr firstRow="1" bandRow="1">
+                <a:tableStyleId>{5C22544A-7EE6-4342-B048-85BDC9FD1C3A}</a:tableStyleId>
+              </a:tblPr>
+              <a:tblGrid>
+                <a:gridCol w="2944620"/>
+                <a:gridCol w="1682640"/>
+                <a:gridCol w="1682640"/>
+                <a:gridCol w="2103300"/>
+              </a:tblGrid>
+              <a:tr h="307800">
+                <a:tc>
+                  <a:txBody>
+                    <a:bodyPr/>
+                    <a:lstStyle/>
+                    <a:p>
+                      <a:pPr algn="l"/>
+                      <a:r>
+                        <a:rPr sz="800" b="1" i="0">
+                          <a:solidFill>
+                            <a:srgbClr val="FFFFFF"/>
+                          </a:solidFill>
+                          <a:latin typeface="Calibri"/>
+                        </a:rPr>
+                        <a:t>Méthode</a:t>
+                      </a:r>
+                    </a:p>
+                  </a:txBody>
+                  <a:tcPr>
+                    <a:solidFill>
+                      <a:srgbClr val="1B3A6B"/>
+                    </a:solidFill>
+                  </a:tcPr>
+                </a:tc>
+                <a:tc>
+                  <a:txBody>
+                    <a:bodyPr/>
+                    <a:lstStyle/>
+                    <a:p>
+                      <a:pPr algn="ctr"/>
+                      <a:r>
+                        <a:rPr sz="800" b="1" i="0">
+                          <a:solidFill>
+                            <a:srgbClr val="FFFFFF"/>
+                          </a:solidFill>
+                          <a:latin typeface="Calibri"/>
+                        </a:rPr>
+                        <a:t>Fourchette basse</a:t>
+                      </a:r>
+                    </a:p>
+                  </a:txBody>
+                  <a:tcPr>
+                    <a:solidFill>
+                      <a:srgbClr val="1B3A6B"/>
+                    </a:solidFill>
+                  </a:tcPr>
+                </a:tc>
+                <a:tc>
+                  <a:txBody>
+                    <a:bodyPr/>
+                    <a:lstStyle/>
+                    <a:p>
+                      <a:pPr algn="ctr"/>
+                      <a:r>
+                        <a:rPr sz="800" b="1" i="0">
+                          <a:solidFill>
+                            <a:srgbClr val="FFFFFF"/>
+                          </a:solidFill>
+                          <a:latin typeface="Calibri"/>
+                        </a:rPr>
+                        <a:t>Fourchette haute</a:t>
+                      </a:r>
+                    </a:p>
+                  </a:txBody>
+                  <a:tcPr>
+                    <a:solidFill>
+                      <a:srgbClr val="1B3A6B"/>
+                    </a:solidFill>
+                  </a:tcPr>
+                </a:tc>
+                <a:tc>
+                  <a:txBody>
+                    <a:bodyPr/>
+                    <a:lstStyle/>
+                    <a:p>
+                      <a:pPr algn="ctr"/>
+                      <a:r>
+                        <a:rPr sz="800" b="1" i="0">
+                          <a:solidFill>
+                            <a:srgbClr val="FFFFFF"/>
+                          </a:solidFill>
+                          <a:latin typeface="Calibri"/>
+                        </a:rPr>
+                        <a:t>Point central</a:t>
+                      </a:r>
+                    </a:p>
+                  </a:txBody>
+                  <a:tcPr>
+                    <a:solidFill>
+                      <a:srgbClr val="1B3A6B"/>
+                    </a:solidFill>
+                  </a:tcPr>
+                </a:tc>
+              </a:tr>
+              <a:tr h="307800">
+                <a:tc>
+                  <a:txBody>
+                    <a:bodyPr/>
+                    <a:lstStyle/>
+                    <a:p>
+                      <a:pPr algn="l"/>
+                      <a:r>
+                        <a:rPr sz="800" b="0" i="0">
+                          <a:solidFill>
+                            <a:srgbClr val="0D0D0D"/>
+                          </a:solidFill>
+                          <a:latin typeface="Calibri"/>
+                        </a:rPr>
+                        <a:t>Cours actuel (248,80)</a:t>
+                      </a:r>
+                    </a:p>
+                  </a:txBody>
+                  <a:tcPr>
+                    <a:solidFill>
+                      <a:srgbClr val="EEF3FA"/>
+                    </a:solidFill>
+                  </a:tcPr>
+                </a:tc>
+                <a:tc>
+                  <a:txBody>
+                    <a:bodyPr/>
+                    <a:lstStyle/>
+                    <a:p>
+                      <a:pPr algn="ctr"/>
+                      <a:r>
+                        <a:rPr sz="800" b="0" i="0">
+                          <a:solidFill>
+                            <a:srgbClr val="0D0D0D"/>
+                          </a:solidFill>
+                          <a:latin typeface="Calibri"/>
+                        </a:rPr>
+                        <a:t>—</a:t>
+                      </a:r>
+                    </a:p>
+                  </a:txBody>
+                  <a:tcPr>
+                    <a:solidFill>
+                      <a:srgbClr val="EEF3FA"/>
+                    </a:solidFill>
+                  </a:tcPr>
+                </a:tc>
+                <a:tc>
+                  <a:txBody>
+                    <a:bodyPr/>
+                    <a:lstStyle/>
+                    <a:p>
+                      <a:pPr algn="ctr"/>
+                      <a:r>
+                        <a:rPr sz="800" b="0" i="0">
+                          <a:solidFill>
+                            <a:srgbClr val="0D0D0D"/>
+                          </a:solidFill>
+                          <a:latin typeface="Calibri"/>
+                        </a:rPr>
+                        <a:t>—</a:t>
+                      </a:r>
+                    </a:p>
+                  </a:txBody>
+                  <a:tcPr>
+                    <a:solidFill>
+                      <a:srgbClr val="EEF3FA"/>
+                    </a:solidFill>
+                  </a:tcPr>
+                </a:tc>
+                <a:tc>
+                  <a:txBody>
+                    <a:bodyPr/>
+                    <a:lstStyle/>
+                    <a:p>
+                      <a:pPr algn="ctr"/>
+                      <a:r>
+                        <a:rPr sz="800" b="0" i="0">
+                          <a:solidFill>
+                            <a:srgbClr val="0D0D0D"/>
+                          </a:solidFill>
+                          <a:latin typeface="Calibri"/>
+                        </a:rPr>
+                        <a:t>248,80</a:t>
+                      </a:r>
+                    </a:p>
+                  </a:txBody>
+                  <a:tcPr>
+                    <a:solidFill>
+                      <a:srgbClr val="EEF3FA"/>
+                    </a:solidFill>
+                  </a:tcPr>
+                </a:tc>
+              </a:tr>
+            </a:tbl>
+          </a:graphicData>
+        </a:graphic>
+      </p:graphicFrame>
     </p:spTree>
   </p:cSld>
   <p:clrMapOvr>
@@ -13265,7 +12387,7 @@
                 </a:solidFill>
                 <a:latin typeface="Calibri"/>
               </a:rPr>
-              <a:t>Régulation antitrust</a:t>
+              <a:t>Risque 1</a:t>
             </a:r>
           </a:p>
         </p:txBody>
@@ -13300,7 +12422,7 @@
                 </a:solidFill>
                 <a:latin typeface="Calibri"/>
               </a:rPr>
-              <a:t>La marge nette de 26.9% repose sur des ventes d'iPhone en Chine en chute de 19% en 2024, avec une dépendance à 23% des revenus asiatiques qui s'érode sous les tensions géopolitiques. Les marges premium de 46.9% masquent des coûts logistiques en hausse de 12% liés aux ruptures de stock en 2023. Le ROE de 151.9% est gonflé par des rachats d'actions record de 110 milliards en 2024, artificiellement boostant la rentabilité.</a:t>
+              <a:t>Risque macro-économique : remontée des taux ou ralentissement de la demande mondiale.</a:t>
             </a:r>
           </a:p>
         </p:txBody>
@@ -13421,7 +12543,7 @@
                 </a:solidFill>
                 <a:latin typeface="Calibri"/>
               </a:rPr>
-              <a:t>Dépendance Chine</a:t>
+              <a:t>Risque 2</a:t>
             </a:r>
           </a:p>
         </p:txBody>
@@ -13456,7 +12578,7 @@
                 </a:solidFill>
                 <a:latin typeface="Calibri"/>
               </a:rPr>
-              <a:t>Les ratios de valorisation sont historiquement élevés : P/E à 32.61x dépasse la moyenne sectorielle de 22x, avec un EV/EBITDA de 25.67x supérieur de 40% à celui de Microsoft. L'Altman Z-score de 9.83, bien au-dessus du seuil de 2.98, suggère une surévaluation du risque de faillite, reflétant une bulle spéculative. La croissance des revenus de 6.4% en 2025 est inférieure à la moyenne des 8.2% des 5 dernières années, indiquant un essoufflement structurel.</a:t>
+              <a:t>Risque sectoriel : intensification de la concurrence ou disruption technologique.</a:t>
             </a:r>
           </a:p>
         </p:txBody>
@@ -13577,7 +12699,7 @@
                 </a:solidFill>
                 <a:latin typeface="Calibri"/>
               </a:rPr>
-              <a:t>Surévaluation marché</a:t>
+              <a:t>Risque 3</a:t>
             </a:r>
           </a:p>
         </p:txBody>
@@ -13612,7 +12734,7 @@
                 </a:solidFill>
                 <a:latin typeface="Calibri"/>
               </a:rPr>
-              <a:t>L'écosystème fermé, autrefois un atout, devient un piège avec des régulations antitrust en Europe et aux États-Unis menaçant les marges de 30% sur les services. Les marges de l'iPhone, cœur de profit à 52% des revenus, sont sous pression avec des coûts de composants en hausse de 8% en 2024 et une concurrence accrue de Samsung et Xiaomi en milieu de gamme.</a:t>
+              <a:t>Risque spécifique : détérioration des marges ou exécution stratégique.</a:t>
             </a:r>
           </a:p>
         </p:txBody>
@@ -13826,7 +12948,7 @@
                           </a:solidFill>
                           <a:latin typeface="Calibri"/>
                         </a:rPr>
-                        <a:t>Récession mondiale avec baisse du PIB de -2% en 2026</a:t>
+                        <a:t>Remontée des taux directeurs &gt; 200bps</a:t>
                       </a:r>
                     </a:p>
                   </a:txBody>
@@ -13897,7 +13019,7 @@
                           </a:solidFill>
                           <a:latin typeface="Calibri"/>
                         </a:rPr>
-                        <a:t>Régulation stricte sur les services numériques en UE/US</a:t>
+                        <a:t>Rupture technologique remettant en cause le modèle</a:t>
                       </a:r>
                     </a:p>
                   </a:txBody>
@@ -13968,7 +13090,7 @@
                           </a:solidFill>
                           <a:latin typeface="Calibri"/>
                         </a:rPr>
-                        <a:t>Échec commercial de l'iPhone 16 avec baisse des parts de marché</a:t>
+                        <a:t>Détérioration matérielle des marges opérationnelles</a:t>
                       </a:r>
                     </a:p>
                   </a:txBody>
@@ -15547,7 +14669,7 @@
                 </a:solidFill>
                 <a:latin typeface="Calibri"/>
               </a:rPr>
-              <a:t>BUY</a:t>
+              <a:t>HOLD</a:t>
             </a:r>
           </a:p>
         </p:txBody>
@@ -15858,7 +14980,7 @@
                           </a:solidFill>
                           <a:latin typeface="Calibri"/>
                         </a:rPr>
-                        <a:t>Lancement iPhone 16 en 2026 avec IA intégrée pourrait booster les ventes de 8% et l'EPS de 10% | Horizon: 12 mois | Impact: +15Mds$ CA</a:t>
+                        <a:t>Catalyseurs, croissance, résultats</a:t>
                       </a:r>
                     </a:p>
                   </a:txBody>
@@ -16046,7 +15168,7 @@
                           </a:solidFill>
                           <a:latin typeface="Calibri"/>
                         </a:rPr>
-                        <a:t>Régulation européenne sur les services (DMA) pourrait réduire les revenus App Store de 10% d'ici 2027 | Horizon: 12 mois | Impact: -8Mds$ CA</a:t>
+                        <a:t>Risques macro, concurrence, dette</a:t>
                       </a:r>
                     </a:p>
                   </a:txBody>
@@ -16091,7 +15213,7 @@
                 </a:solidFill>
                 <a:latin typeface="Calibri"/>
               </a:rPr>
-              <a:t>La presse financière souligne à la fois des avancées technologiques positives pour Apple, notamment avec l'ouverture de Siri à d'autres assistants IA, mais aussi des défis majeurs liés à l'IA et à la concurrence qui pourraient peser sur sa domination future. Les prédictions de surpassement par d'autres acteurs d'ici une décennie ajoutent une pression sur le titre.</a:t>
+              <a:t>La presse financière souligne à la fois des avancées technologiques prometteuses pour Apple, notamment autour de Siri et de l'IA, mais aussi des défis majeurs liés à la concurrence et à l'évolution du marché. L'anniversaire des 50 ans d'Apple met en lumière sa capacité à innover, tout en devant faire face à des pressions concurrentielles croissantes.</a:t>
             </a:r>
           </a:p>
         </p:txBody>
@@ -18999,41 +18121,6 @@
           </a:graphicData>
         </a:graphic>
       </p:graphicFrame>
-      <p:sp>
-        <p:nvSpPr>
-          <p:cNvPr id="21" name="TextBox 20"/>
-          <p:cNvSpPr txBox="1"/>
-          <p:nvPr/>
-        </p:nvSpPr>
-        <p:spPr>
-          <a:xfrm>
-            <a:off x="367200" y="3326400"/>
-            <a:ext cx="8413200" cy="1004400"/>
-          </a:xfrm>
-          <a:prstGeom prst="rect">
-            <a:avLst/>
-          </a:prstGeom>
-          <a:noFill/>
-        </p:spPr>
-        <p:txBody>
-          <a:bodyPr wrap="square">
-            <a:spAutoFit/>
-          </a:bodyPr>
-          <a:lstStyle/>
-          <a:p>
-            <a:pPr algn="l"/>
-            <a:r>
-              <a:rPr sz="850" b="0" i="0">
-                <a:solidFill>
-                  <a:srgbClr val="555555"/>
-                </a:solidFill>
-                <a:latin typeface="Calibri"/>
-              </a:rPr>
-              <a:t>Apple se négocie à un P/E de 32.6x, soit une prime de 15% vs la médiane des peers technologiques. La décote sur EV/EBITDA (-10%) reflète la qualité supérieure des actifs mais reste justifiée par la croissance organique.</a:t>
-            </a:r>
-          </a:p>
-        </p:txBody>
-      </p:sp>
     </p:spTree>
   </p:cSld>
   <p:clrMapOvr>
@@ -19223,7 +18310,7 @@
             <a:avLst/>
           </a:prstGeom>
           <a:solidFill>
-            <a:srgbClr val="EAF4EF"/>
+            <a:srgbClr val="FDF6E8"/>
           </a:solidFill>
           <a:ln>
             <a:noFill/>
@@ -19266,7 +18353,7 @@
             <a:avLst/>
           </a:prstGeom>
           <a:solidFill>
-            <a:srgbClr val="1A7A4A"/>
+            <a:srgbClr val="B06000"/>
           </a:solidFill>
           <a:ln>
             <a:noFill/>
@@ -19320,11 +18407,11 @@
             <a:r>
               <a:rPr sz="1100" b="1" i="0">
                 <a:solidFill>
-                  <a:srgbClr val="1A7A4A"/>
+                  <a:srgbClr val="B06000"/>
                 </a:solidFill>
                 <a:latin typeface="Calibri"/>
               </a:rPr>
-              <a:t>● BUY</a:t>
+              <a:t>● HOLD</a:t>
             </a:r>
           </a:p>
         </p:txBody>
@@ -19359,7 +18446,7 @@
                 </a:solidFill>
                 <a:latin typeface="Calibri"/>
               </a:rPr>
-              <a:t>Prix cible base : 285 $  ·  Upside : +14,5 %  ·  Bear : 220 $ (-11,6 %)  ·  Bull : 320 $ (+28,6 %)</a:t>
+              <a:t>Prix cible base : — $  ·  Upside : —  ·  Bear : — $ (—)  ·  Bull : — $ (—)</a:t>
             </a:r>
           </a:p>
         </p:txBody>
@@ -19515,7 +18602,7 @@
                 </a:solidFill>
                 <a:latin typeface="Calibri"/>
               </a:rPr>
-              <a:t>Écosystème fermé</a:t>
+              <a:t>—</a:t>
             </a:r>
           </a:p>
         </p:txBody>
@@ -19550,7 +18637,7 @@
                 </a:solidFill>
                 <a:latin typeface="Calibri"/>
               </a:rPr>
-              <a:t>Apple devrait bénéficier d'un rebond des ventes iPhone en 2026 avec +8% YoY grâce à l'IA intégrée dans iOS 18</a:t>
+              <a:t>—</a:t>
             </a:r>
           </a:p>
         </p:txBody>
@@ -19628,7 +18715,7 @@
                 </a:solidFill>
                 <a:latin typeface="Calibri"/>
               </a:rPr>
-              <a:t>Marges premium</a:t>
+              <a:t>—</a:t>
             </a:r>
           </a:p>
         </p:txBody>
@@ -19663,7 +18750,7 @@
                 </a:solidFill>
                 <a:latin typeface="Calibri"/>
               </a:rPr>
-              <a:t>Les services récurrents pourraient croître de 12% YoY en 2026, portant la marge EBITDA à 36%</a:t>
+              <a:t>—</a:t>
             </a:r>
           </a:p>
         </p:txBody>
@@ -19741,7 +18828,7 @@
                 </a:solidFill>
                 <a:latin typeface="Calibri"/>
               </a:rPr>
-              <a:t>Cash flow record</a:t>
+              <a:t>—</a:t>
             </a:r>
           </a:p>
         </p:txBody>
@@ -19776,7 +18863,7 @@
                 </a:solidFill>
                 <a:latin typeface="Calibri"/>
               </a:rPr>
-              <a:t>Le rachat d'actions de 110Mds$ en 2026 soutiendra la valorisation avec un EPS en hausse de 10%.</a:t>
+              <a:t>—</a:t>
             </a:r>
           </a:p>
         </p:txBody>
@@ -19932,7 +19019,7 @@
                 </a:solidFill>
                 <a:latin typeface="Calibri"/>
               </a:rPr>
-              <a:t>Dépendance iPhone</a:t>
+              <a:t>—</a:t>
             </a:r>
           </a:p>
         </p:txBody>
@@ -19967,7 +19054,7 @@
                 </a:solidFill>
                 <a:latin typeface="Calibri"/>
               </a:rPr>
-              <a:t>Régulation européenne sur les services (DMA) pourrait réduire les revenus App Store de 10% d'ici 2027 | Horizon: 12 mois | Impact: -8Mds$ CA</a:t>
+              <a:t>Impact potentiel sur la thèse d'investissement — surveillance recommandée sur les 6-12 prochains mois.</a:t>
             </a:r>
           </a:p>
         </p:txBody>
@@ -20045,7 +19132,7 @@
                 </a:solidFill>
                 <a:latin typeface="Calibri"/>
               </a:rPr>
-              <a:t>Régulation services</a:t>
+              <a:t>—</a:t>
             </a:r>
           </a:p>
         </p:txBody>
@@ -20080,7 +19167,7 @@
                 </a:solidFill>
                 <a:latin typeface="Calibri"/>
               </a:rPr>
-              <a:t>Concurrence accrue en IA (Google, Microsoft) pourrait éroder les parts de marché des services Apple de 5% | Horizon: 18 mois | Impact: -3Mds$ EBIT</a:t>
+              <a:t>Impact potentiel sur la thèse d'investissement — surveillance recommandée sur les 6-12 prochains mois.</a:t>
             </a:r>
           </a:p>
         </p:txBody>
@@ -20158,7 +19245,7 @@
                 </a:solidFill>
                 <a:latin typeface="Calibri"/>
               </a:rPr>
-              <a:t>Concurrence IA</a:t>
+              <a:t>—</a:t>
             </a:r>
           </a:p>
         </p:txBody>
@@ -20193,7 +19280,7 @@
                 </a:solidFill>
                 <a:latin typeface="Calibri"/>
               </a:rPr>
-              <a:t>Ralentissement économique en Chine pourrait réduire les ventes iPhone de 15% en 2026 | Horizon: 6 mois | Impact: -12Mds$ CA</a:t>
+              <a:t>Impact potentiel sur la thèse d'investissement — surveillance recommandée sur les 6-12 prochains mois.</a:t>
             </a:r>
           </a:p>
         </p:txBody>
@@ -20470,7 +19557,7 @@
                 </a:solidFill>
                 <a:latin typeface="Calibri"/>
               </a:rPr>
-              <a:t>vs 22,5x médiane peers</a:t>
+              <a:t>vs — médiane peers</a:t>
             </a:r>
           </a:p>
         </p:txBody>
@@ -20782,7 +19869,7 @@
                 </a:solidFill>
                 <a:latin typeface="Calibri"/>
               </a:rPr>
-              <a:t>285 $</a:t>
+              <a:t>— $</a:t>
             </a:r>
           </a:p>
         </p:txBody>
@@ -20852,7 +19939,7 @@
                 </a:solidFill>
                 <a:latin typeface="Calibri"/>
               </a:rPr>
-              <a:t>Upside de +14,5 % vs cours</a:t>
+              <a:t>Upside de — vs cours</a:t>
             </a:r>
           </a:p>
         </p:txBody>
@@ -23642,41 +22729,6 @@
           </a:p>
         </p:txBody>
       </p:sp>
-      <p:sp>
-        <p:nvSpPr>
-          <p:cNvPr id="68" name="TextBox 67"/>
-          <p:cNvSpPr txBox="1"/>
-          <p:nvPr/>
-        </p:nvSpPr>
-        <p:spPr>
-          <a:xfrm>
-            <a:off x="367200" y="4132800"/>
-            <a:ext cx="8413200" cy="687600"/>
-          </a:xfrm>
-          <a:prstGeom prst="rect">
-            <a:avLst/>
-          </a:prstGeom>
-          <a:noFill/>
-        </p:spPr>
-        <p:txBody>
-          <a:bodyPr wrap="square">
-            <a:spAutoFit/>
-          </a:bodyPr>
-          <a:lstStyle/>
-          <a:p>
-            <a:pPr algn="l"/>
-            <a:r>
-              <a:rPr sz="850" b="0" i="0">
-                <a:solidFill>
-                  <a:srgbClr val="555555"/>
-                </a:solidFill>
-                <a:latin typeface="Calibri"/>
-              </a:rPr>
-              <a:t>Apple affiche une résilience opérationnelle exceptionnelle avec des marges nettes à 26.9% et un ROE de 151.9%, malgré un environnement macroéconomique incertain. La valorisation reste attractive avec un P/E de 32.6x, inférieur à sa moyenne historique sur 5 ans (35x).</a:t>
-            </a:r>
-          </a:p>
-        </p:txBody>
-      </p:sp>
     </p:spTree>
   </p:cSld>
   <p:clrMapOvr>
@@ -24715,7 +23767,7 @@
                 </a:solidFill>
                 <a:latin typeface="Calibri"/>
               </a:rPr>
-              <a:t>Dépendance iPhone  ·  Régulation services</a:t>
+              <a:t>Risques structurels &amp; thèse contraire</a:t>
             </a:r>
           </a:p>
         </p:txBody>
@@ -25949,64 +25001,21 @@
                 </a:solidFill>
                 <a:latin typeface="Calibri"/>
               </a:rPr>
-              <a:t>Apple conçoit et commercialise des produits technologiques premium (iPhone, Mac, iPad, services) avec un écosystème intégré et une fidélisation client élevée. Positionné en haut de gamme, l'entreprise capitalise sur l'innovation, la marque forte et un modèle de services récurrents à marge élevée. Son avantage concurrentiel repose sur la synergie hardware-software, la propriété intellectuelle et une logistique mondiale optimisée. L'entreprise articule son activité autour de deux segments stratégiques :</a:t>
-            </a:r>
-          </a:p>
-        </p:txBody>
-      </p:sp>
-      <p:sp>
-        <p:nvSpPr>
-          <p:cNvPr id="20" name="Rectangle 19"/>
-          <p:cNvSpPr/>
-          <p:nvPr/>
-        </p:nvSpPr>
-        <p:spPr>
-          <a:xfrm>
-            <a:off x="503999" y="2599200"/>
-            <a:ext cx="64800" cy="64800"/>
-          </a:xfrm>
-          <a:prstGeom prst="rect">
-            <a:avLst/>
-          </a:prstGeom>
-          <a:solidFill>
-            <a:srgbClr val="2E5FA3"/>
-          </a:solidFill>
-          <a:ln>
-            <a:noFill/>
-          </a:ln>
-        </p:spPr>
-        <p:style>
-          <a:lnRef idx="1">
-            <a:schemeClr val="accent1"/>
-          </a:lnRef>
-          <a:fillRef idx="3">
-            <a:schemeClr val="accent1"/>
-          </a:fillRef>
-          <a:effectRef idx="2">
-            <a:schemeClr val="accent1"/>
-          </a:effectRef>
-          <a:fontRef idx="minor">
-            <a:schemeClr val="lt1"/>
-          </a:fontRef>
-        </p:style>
-        <p:txBody>
-          <a:bodyPr rtlCol="0" anchor="ctr"/>
-          <a:lstStyle/>
-          <a:p>
-            <a:pPr algn="ctr"/>
-          </a:p>
-        </p:txBody>
-      </p:sp>
-      <p:sp>
-        <p:nvSpPr>
-          <p:cNvPr id="21" name="TextBox 20"/>
+              <a:t>—</a:t>
+            </a:r>
+          </a:p>
+        </p:txBody>
+      </p:sp>
+      <p:sp>
+        <p:nvSpPr>
+          <p:cNvPr id="20" name="TextBox 19"/>
           <p:cNvSpPr txBox="1"/>
           <p:nvPr/>
         </p:nvSpPr>
         <p:spPr>
           <a:xfrm>
-            <a:off x="619200" y="2556000"/>
-            <a:ext cx="4338000" cy="165600"/>
+            <a:off x="503999" y="2358000"/>
+            <a:ext cx="4662000" cy="183600"/>
           </a:xfrm>
           <a:prstGeom prst="rect">
             <a:avLst/>
@@ -26021,168 +25030,20 @@
           <a:p>
             <a:pPr algn="l"/>
             <a:r>
-              <a:rPr sz="850" b="1" i="0">
+              <a:rPr sz="900" b="1" i="0">
                 <a:solidFill>
-                  <a:srgbClr val="0D0D0D"/>
+                  <a:srgbClr val="1B3A6B"/>
                 </a:solidFill>
                 <a:latin typeface="Calibri"/>
               </a:rPr>
-              <a:t>Produits</a:t>
-            </a:r>
-          </a:p>
-        </p:txBody>
-      </p:sp>
-      <p:sp>
-        <p:nvSpPr>
-          <p:cNvPr id="22" name="TextBox 21"/>
-          <p:cNvSpPr txBox="1"/>
-          <p:nvPr/>
-        </p:nvSpPr>
-        <p:spPr>
-          <a:xfrm>
-            <a:off x="619200" y="2714400"/>
-            <a:ext cx="4338000" cy="503999"/>
-          </a:xfrm>
-          <a:prstGeom prst="rect">
-            <a:avLst/>
-          </a:prstGeom>
-          <a:noFill/>
-        </p:spPr>
-        <p:txBody>
-          <a:bodyPr wrap="square">
-            <a:spAutoFit/>
-          </a:bodyPr>
-          <a:lstStyle/>
-          <a:p>
-            <a:pPr algn="l"/>
-            <a:r>
-              <a:rPr sz="750" b="0" i="1">
-                <a:solidFill>
-                  <a:srgbClr val="555555"/>
-                </a:solidFill>
-                <a:latin typeface="Calibri"/>
-              </a:rPr>
-              <a:t>Segment phare avec l'iPhone (50% du CA 2025), Mac, iPad et wearables, générant des revenus via ventes unitaires et mises à jour logicielles. Cible les consommateurs premium et les entreprises avec des cycles de renouvellement courts. Croissance tirée par l'innovation (ex: puces M-series) et l'expansion géographique en Asie.</a:t>
-            </a:r>
-          </a:p>
-        </p:txBody>
-      </p:sp>
-      <p:sp>
-        <p:nvSpPr>
-          <p:cNvPr id="23" name="Rectangle 22"/>
-          <p:cNvSpPr/>
-          <p:nvPr/>
-        </p:nvSpPr>
-        <p:spPr>
-          <a:xfrm>
-            <a:off x="503999" y="3301199"/>
-            <a:ext cx="64800" cy="64800"/>
-          </a:xfrm>
-          <a:prstGeom prst="rect">
-            <a:avLst/>
-          </a:prstGeom>
-          <a:solidFill>
-            <a:srgbClr val="2E5FA3"/>
-          </a:solidFill>
-          <a:ln>
-            <a:noFill/>
-          </a:ln>
-        </p:spPr>
-        <p:style>
-          <a:lnRef idx="1">
-            <a:schemeClr val="accent1"/>
-          </a:lnRef>
-          <a:fillRef idx="3">
-            <a:schemeClr val="accent1"/>
-          </a:fillRef>
-          <a:effectRef idx="2">
-            <a:schemeClr val="accent1"/>
-          </a:effectRef>
-          <a:fontRef idx="minor">
-            <a:schemeClr val="lt1"/>
-          </a:fontRef>
-        </p:style>
-        <p:txBody>
-          <a:bodyPr rtlCol="0" anchor="ctr"/>
-          <a:lstStyle/>
-          <a:p>
-            <a:pPr algn="ctr"/>
-          </a:p>
-        </p:txBody>
-      </p:sp>
-      <p:sp>
-        <p:nvSpPr>
-          <p:cNvPr id="24" name="TextBox 23"/>
-          <p:cNvSpPr txBox="1"/>
-          <p:nvPr/>
-        </p:nvSpPr>
-        <p:spPr>
-          <a:xfrm>
-            <a:off x="619200" y="3257999"/>
-            <a:ext cx="4338000" cy="165600"/>
-          </a:xfrm>
-          <a:prstGeom prst="rect">
-            <a:avLst/>
-          </a:prstGeom>
-          <a:noFill/>
-        </p:spPr>
-        <p:txBody>
-          <a:bodyPr wrap="square">
-            <a:spAutoFit/>
-          </a:bodyPr>
-          <a:lstStyle/>
-          <a:p>
-            <a:pPr algn="l"/>
-            <a:r>
-              <a:rPr sz="850" b="1" i="0">
-                <a:solidFill>
-                  <a:srgbClr val="0D0D0D"/>
-                </a:solidFill>
-                <a:latin typeface="Calibri"/>
-              </a:rPr>
-              <a:t>Services</a:t>
-            </a:r>
-          </a:p>
-        </p:txBody>
-      </p:sp>
-      <p:sp>
-        <p:nvSpPr>
-          <p:cNvPr id="25" name="TextBox 24"/>
-          <p:cNvSpPr txBox="1"/>
-          <p:nvPr/>
-        </p:nvSpPr>
-        <p:spPr>
-          <a:xfrm>
-            <a:off x="619200" y="3416399"/>
-            <a:ext cx="4338000" cy="503999"/>
-          </a:xfrm>
-          <a:prstGeom prst="rect">
-            <a:avLst/>
-          </a:prstGeom>
-          <a:noFill/>
-        </p:spPr>
-        <p:txBody>
-          <a:bodyPr wrap="square">
-            <a:spAutoFit/>
-          </a:bodyPr>
-          <a:lstStyle/>
-          <a:p>
-            <a:pPr algn="l"/>
-            <a:r>
-              <a:rPr sz="750" b="0" i="1">
-                <a:solidFill>
-                  <a:srgbClr val="555555"/>
-                </a:solidFill>
-                <a:latin typeface="Calibri"/>
-              </a:rPr>
-              <a:t>Segment à forte rentabilité (EBITDA margin 70%) incluant App Store, Apple Music, iCloud et Apple Pay. Modèle d'abonnement avec revenus récurrents (CA 2025: 85Mds$). Cible les 1.5Md d'utilisateurs actifs avec des services personnalisés et une monétisation croissante. Croissance soutenue par l'augmentation de l'ARPU et l'expansion internationale.</a:t>
-            </a:r>
-          </a:p>
-        </p:txBody>
-      </p:sp>
-      <p:sp>
-        <p:nvSpPr>
-          <p:cNvPr id="26" name="Rectangle 25"/>
+              <a:t>Positionnement stratégique</a:t>
+            </a:r>
+          </a:p>
+        </p:txBody>
+      </p:sp>
+      <p:sp>
+        <p:nvSpPr>
+          <p:cNvPr id="21" name="Rectangle 20"/>
           <p:cNvSpPr/>
           <p:nvPr/>
         </p:nvSpPr>
@@ -26225,7 +25086,7 @@
       </p:sp>
       <p:sp>
         <p:nvSpPr>
-          <p:cNvPr id="27" name="Rectangle 26"/>
+          <p:cNvPr id="22" name="Rectangle 21"/>
           <p:cNvSpPr/>
           <p:nvPr/>
         </p:nvSpPr>
@@ -26268,7 +25129,7 @@
       </p:sp>
       <p:sp>
         <p:nvSpPr>
-          <p:cNvPr id="28" name="TextBox 27"/>
+          <p:cNvPr id="23" name="TextBox 22"/>
           <p:cNvSpPr txBox="1"/>
           <p:nvPr/>
         </p:nvSpPr>
@@ -26303,7 +25164,7 @@
       </p:sp>
       <p:sp>
         <p:nvSpPr>
-          <p:cNvPr id="29" name="TextBox 28"/>
+          <p:cNvPr id="24" name="TextBox 23"/>
           <p:cNvSpPr txBox="1"/>
           <p:nvPr/>
         </p:nvSpPr>
@@ -26338,7 +25199,7 @@
       </p:sp>
       <p:sp>
         <p:nvSpPr>
-          <p:cNvPr id="30" name="Rectangle 29"/>
+          <p:cNvPr id="25" name="Rectangle 24"/>
           <p:cNvSpPr/>
           <p:nvPr/>
         </p:nvSpPr>
@@ -26381,7 +25242,7 @@
       </p:sp>
       <p:sp>
         <p:nvSpPr>
-          <p:cNvPr id="31" name="Rectangle 30"/>
+          <p:cNvPr id="26" name="Rectangle 25"/>
           <p:cNvSpPr/>
           <p:nvPr/>
         </p:nvSpPr>
@@ -26424,7 +25285,7 @@
       </p:sp>
       <p:sp>
         <p:nvSpPr>
-          <p:cNvPr id="32" name="TextBox 31"/>
+          <p:cNvPr id="27" name="TextBox 26"/>
           <p:cNvSpPr txBox="1"/>
           <p:nvPr/>
         </p:nvSpPr>
@@ -26459,7 +25320,7 @@
       </p:sp>
       <p:sp>
         <p:nvSpPr>
-          <p:cNvPr id="33" name="TextBox 32"/>
+          <p:cNvPr id="28" name="TextBox 27"/>
           <p:cNvSpPr txBox="1"/>
           <p:nvPr/>
         </p:nvSpPr>
@@ -26494,7 +25355,7 @@
       </p:sp>
       <p:sp>
         <p:nvSpPr>
-          <p:cNvPr id="34" name="Rectangle 33"/>
+          <p:cNvPr id="29" name="Rectangle 28"/>
           <p:cNvSpPr/>
           <p:nvPr/>
         </p:nvSpPr>
@@ -26537,7 +25398,7 @@
       </p:sp>
       <p:sp>
         <p:nvSpPr>
-          <p:cNvPr id="35" name="Rectangle 34"/>
+          <p:cNvPr id="30" name="Rectangle 29"/>
           <p:cNvSpPr/>
           <p:nvPr/>
         </p:nvSpPr>
@@ -26580,7 +25441,7 @@
       </p:sp>
       <p:sp>
         <p:nvSpPr>
-          <p:cNvPr id="36" name="TextBox 35"/>
+          <p:cNvPr id="31" name="TextBox 30"/>
           <p:cNvSpPr txBox="1"/>
           <p:nvPr/>
         </p:nvSpPr>
@@ -26615,7 +25476,7 @@
       </p:sp>
       <p:sp>
         <p:nvSpPr>
-          <p:cNvPr id="37" name="TextBox 36"/>
+          <p:cNvPr id="32" name="TextBox 31"/>
           <p:cNvSpPr txBox="1"/>
           <p:nvPr/>
         </p:nvSpPr>
@@ -26650,7 +25511,7 @@
       </p:sp>
       <p:sp>
         <p:nvSpPr>
-          <p:cNvPr id="38" name="Rectangle 37"/>
+          <p:cNvPr id="33" name="Rectangle 32"/>
           <p:cNvSpPr/>
           <p:nvPr/>
         </p:nvSpPr>
@@ -26693,7 +25554,7 @@
       </p:sp>
       <p:sp>
         <p:nvSpPr>
-          <p:cNvPr id="39" name="Rectangle 38"/>
+          <p:cNvPr id="34" name="Rectangle 33"/>
           <p:cNvSpPr/>
           <p:nvPr/>
         </p:nvSpPr>
@@ -26736,7 +25597,7 @@
       </p:sp>
       <p:sp>
         <p:nvSpPr>
-          <p:cNvPr id="40" name="TextBox 39"/>
+          <p:cNvPr id="35" name="TextBox 34"/>
           <p:cNvSpPr txBox="1"/>
           <p:nvPr/>
         </p:nvSpPr>
@@ -26771,7 +25632,7 @@
       </p:sp>
       <p:sp>
         <p:nvSpPr>
-          <p:cNvPr id="41" name="TextBox 40"/>
+          <p:cNvPr id="36" name="TextBox 35"/>
           <p:cNvSpPr txBox="1"/>
           <p:nvPr/>
         </p:nvSpPr>
@@ -26806,7 +25667,7 @@
       </p:sp>
       <p:sp>
         <p:nvSpPr>
-          <p:cNvPr id="42" name="TextBox 41"/>
+          <p:cNvPr id="37" name="TextBox 36"/>
           <p:cNvSpPr txBox="1"/>
           <p:nvPr/>
         </p:nvSpPr>
@@ -27447,7 +26308,7 @@
         <p:spPr>
           <a:xfrm>
             <a:off x="367200" y="961200"/>
-            <a:ext cx="4150800" cy="3520800"/>
+            <a:ext cx="2731199" cy="3520800"/>
           </a:xfrm>
           <a:prstGeom prst="rect">
             <a:avLst/>
@@ -27490,7 +26351,7 @@
         <p:spPr>
           <a:xfrm>
             <a:off x="367200" y="961200"/>
-            <a:ext cx="4150800" cy="54000"/>
+            <a:ext cx="2731199" cy="54000"/>
           </a:xfrm>
           <a:prstGeom prst="rect">
             <a:avLst/>
@@ -27533,7 +26394,7 @@
         <p:spPr>
           <a:xfrm>
             <a:off x="457200" y="1141200"/>
-            <a:ext cx="3970800" cy="640800"/>
+            <a:ext cx="2551199" cy="640800"/>
           </a:xfrm>
           <a:prstGeom prst="rect">
             <a:avLst/>
@@ -27554,7 +26415,7 @@
                 </a:solidFill>
                 <a:latin typeface="Calibri"/>
               </a:rPr>
-              <a:t>52%</a:t>
+              <a:t>—</a:t>
             </a:r>
           </a:p>
         </p:txBody>
@@ -27568,7 +26429,7 @@
         <p:spPr>
           <a:xfrm>
             <a:off x="457200" y="1785600"/>
-            <a:ext cx="3970800" cy="108000"/>
+            <a:ext cx="2551199" cy="108000"/>
           </a:xfrm>
           <a:prstGeom prst="rect">
             <a:avLst/>
@@ -27603,7 +26464,7 @@
         <p:spPr>
           <a:xfrm>
             <a:off x="457200" y="1965600"/>
-            <a:ext cx="3970800" cy="18000"/>
+            <a:ext cx="2551199" cy="18000"/>
           </a:xfrm>
           <a:prstGeom prst="rect">
             <a:avLst/>
@@ -27646,7 +26507,7 @@
         <p:spPr>
           <a:xfrm>
             <a:off x="457200" y="2059200"/>
-            <a:ext cx="3970800" cy="255600"/>
+            <a:ext cx="2551199" cy="255600"/>
           </a:xfrm>
           <a:prstGeom prst="rect">
             <a:avLst/>
@@ -27667,7 +26528,7 @@
                 </a:solidFill>
                 <a:latin typeface="Calibri"/>
               </a:rPr>
-              <a:t>Produits</a:t>
+              <a:t>Core Business</a:t>
             </a:r>
           </a:p>
         </p:txBody>
@@ -27681,7 +26542,7 @@
         <p:spPr>
           <a:xfrm>
             <a:off x="457200" y="2332800"/>
-            <a:ext cx="3970800" cy="2041199"/>
+            <a:ext cx="2551199" cy="2041199"/>
           </a:xfrm>
           <a:prstGeom prst="rect">
             <a:avLst/>
@@ -27702,7 +26563,7 @@
                 </a:solidFill>
                 <a:latin typeface="Calibri"/>
               </a:rPr>
-              <a:t>Segment phare avec l'iPhone (50% du CA 2025), Mac, iPad et wearables, générant des revenus via ventes unitaires et mises à jour logicielles. Cible les consommateurs premium et les entreprises avec des cycles de renouvellement courts. Croissance tirée par l'innovation (ex: puces M-series) et l'expansion géographique en Asie.</a:t>
+              <a:t>—</a:t>
             </a:r>
           </a:p>
         </p:txBody>
@@ -27715,8 +26576,8 @@
         </p:nvSpPr>
         <p:spPr>
           <a:xfrm>
-            <a:off x="4626000" y="961200"/>
-            <a:ext cx="4150800" cy="3520800"/>
+            <a:off x="3206400" y="961200"/>
+            <a:ext cx="2731199" cy="3520800"/>
           </a:xfrm>
           <a:prstGeom prst="rect">
             <a:avLst/>
@@ -27758,8 +26619,8 @@
         </p:nvSpPr>
         <p:spPr>
           <a:xfrm>
-            <a:off x="4626000" y="961200"/>
-            <a:ext cx="4150800" cy="54000"/>
+            <a:off x="3206400" y="961200"/>
+            <a:ext cx="2731199" cy="54000"/>
           </a:xfrm>
           <a:prstGeom prst="rect">
             <a:avLst/>
@@ -27801,8 +26662,8 @@
         </p:nvSpPr>
         <p:spPr>
           <a:xfrm>
-            <a:off x="4716000" y="1141200"/>
-            <a:ext cx="3970800" cy="640800"/>
+            <a:off x="3296400" y="1141200"/>
+            <a:ext cx="2551199" cy="640800"/>
           </a:xfrm>
           <a:prstGeom prst="rect">
             <a:avLst/>
@@ -27823,7 +26684,7 @@
                 </a:solidFill>
                 <a:latin typeface="Calibri"/>
               </a:rPr>
-              <a:t>20%</a:t>
+              <a:t>—</a:t>
             </a:r>
           </a:p>
         </p:txBody>
@@ -27836,8 +26697,8 @@
         </p:nvSpPr>
         <p:spPr>
           <a:xfrm>
-            <a:off x="4716000" y="1785600"/>
-            <a:ext cx="3970800" cy="108000"/>
+            <a:off x="3296400" y="1785600"/>
+            <a:ext cx="2551199" cy="108000"/>
           </a:xfrm>
           <a:prstGeom prst="rect">
             <a:avLst/>
@@ -27871,8 +26732,8 @@
         </p:nvSpPr>
         <p:spPr>
           <a:xfrm>
-            <a:off x="4716000" y="1965600"/>
-            <a:ext cx="3970800" cy="18000"/>
+            <a:off x="3296400" y="1965600"/>
+            <a:ext cx="2551199" cy="18000"/>
           </a:xfrm>
           <a:prstGeom prst="rect">
             <a:avLst/>
@@ -27914,8 +26775,8 @@
         </p:nvSpPr>
         <p:spPr>
           <a:xfrm>
-            <a:off x="4716000" y="2059200"/>
-            <a:ext cx="3970800" cy="255600"/>
+            <a:off x="3296400" y="2059200"/>
+            <a:ext cx="2551199" cy="255600"/>
           </a:xfrm>
           <a:prstGeom prst="rect">
             <a:avLst/>
@@ -27936,7 +26797,7 @@
                 </a:solidFill>
                 <a:latin typeface="Calibri"/>
               </a:rPr>
-              <a:t>Services</a:t>
+              <a:t>Growth Driver</a:t>
             </a:r>
           </a:p>
         </p:txBody>
@@ -27949,8 +26810,8 @@
         </p:nvSpPr>
         <p:spPr>
           <a:xfrm>
-            <a:off x="4716000" y="2332800"/>
-            <a:ext cx="3970800" cy="2041199"/>
+            <a:off x="3296400" y="2332800"/>
+            <a:ext cx="2551199" cy="2041199"/>
           </a:xfrm>
           <a:prstGeom prst="rect">
             <a:avLst/>
@@ -27971,7 +26832,276 @@
                 </a:solidFill>
                 <a:latin typeface="Calibri"/>
               </a:rPr>
-              <a:t>Segment à forte rentabilité (EBITDA margin 70%) incluant App Store, Apple Music, iCloud et Apple Pay. Modèle d'abonnement avec revenus récurrents (CA 2025: 85Mds$). Cible les 1.5Md d'utilisateurs actifs avec des services personnalisés et une monétisation croissante. Croissance soutenue par l'augmentation de l'ARPU et l'expansion internationale.</a:t>
+              <a:t>—</a:t>
+            </a:r>
+          </a:p>
+        </p:txBody>
+      </p:sp>
+      <p:sp>
+        <p:nvSpPr>
+          <p:cNvPr id="31" name="Rectangle 30"/>
+          <p:cNvSpPr/>
+          <p:nvPr/>
+        </p:nvSpPr>
+        <p:spPr>
+          <a:xfrm>
+            <a:off x="6045600" y="961200"/>
+            <a:ext cx="2731199" cy="3520800"/>
+          </a:xfrm>
+          <a:prstGeom prst="rect">
+            <a:avLst/>
+          </a:prstGeom>
+          <a:solidFill>
+            <a:srgbClr val="F7F8FA"/>
+          </a:solidFill>
+          <a:ln>
+            <a:noFill/>
+          </a:ln>
+        </p:spPr>
+        <p:style>
+          <a:lnRef idx="1">
+            <a:schemeClr val="accent1"/>
+          </a:lnRef>
+          <a:fillRef idx="3">
+            <a:schemeClr val="accent1"/>
+          </a:fillRef>
+          <a:effectRef idx="2">
+            <a:schemeClr val="accent1"/>
+          </a:effectRef>
+          <a:fontRef idx="minor">
+            <a:schemeClr val="lt1"/>
+          </a:fontRef>
+        </p:style>
+        <p:txBody>
+          <a:bodyPr rtlCol="0" anchor="ctr"/>
+          <a:lstStyle/>
+          <a:p>
+            <a:pPr algn="ctr"/>
+          </a:p>
+        </p:txBody>
+      </p:sp>
+      <p:sp>
+        <p:nvSpPr>
+          <p:cNvPr id="32" name="Rectangle 31"/>
+          <p:cNvSpPr/>
+          <p:nvPr/>
+        </p:nvSpPr>
+        <p:spPr>
+          <a:xfrm>
+            <a:off x="6045600" y="961200"/>
+            <a:ext cx="2731199" cy="54000"/>
+          </a:xfrm>
+          <a:prstGeom prst="rect">
+            <a:avLst/>
+          </a:prstGeom>
+          <a:solidFill>
+            <a:srgbClr val="888888"/>
+          </a:solidFill>
+          <a:ln>
+            <a:noFill/>
+          </a:ln>
+        </p:spPr>
+        <p:style>
+          <a:lnRef idx="1">
+            <a:schemeClr val="accent1"/>
+          </a:lnRef>
+          <a:fillRef idx="3">
+            <a:schemeClr val="accent1"/>
+          </a:fillRef>
+          <a:effectRef idx="2">
+            <a:schemeClr val="accent1"/>
+          </a:effectRef>
+          <a:fontRef idx="minor">
+            <a:schemeClr val="lt1"/>
+          </a:fontRef>
+        </p:style>
+        <p:txBody>
+          <a:bodyPr rtlCol="0" anchor="ctr"/>
+          <a:lstStyle/>
+          <a:p>
+            <a:pPr algn="ctr"/>
+          </a:p>
+        </p:txBody>
+      </p:sp>
+      <p:sp>
+        <p:nvSpPr>
+          <p:cNvPr id="33" name="TextBox 32"/>
+          <p:cNvSpPr txBox="1"/>
+          <p:nvPr/>
+        </p:nvSpPr>
+        <p:spPr>
+          <a:xfrm>
+            <a:off x="6135600" y="1141200"/>
+            <a:ext cx="2551199" cy="640800"/>
+          </a:xfrm>
+          <a:prstGeom prst="rect">
+            <a:avLst/>
+          </a:prstGeom>
+          <a:noFill/>
+        </p:spPr>
+        <p:txBody>
+          <a:bodyPr wrap="square">
+            <a:spAutoFit/>
+          </a:bodyPr>
+          <a:lstStyle/>
+          <a:p>
+            <a:pPr algn="l"/>
+            <a:r>
+              <a:rPr sz="2200" b="1" i="0">
+                <a:solidFill>
+                  <a:srgbClr val="888888"/>
+                </a:solidFill>
+                <a:latin typeface="Calibri"/>
+              </a:rPr>
+              <a:t>—</a:t>
+            </a:r>
+          </a:p>
+        </p:txBody>
+      </p:sp>
+      <p:sp>
+        <p:nvSpPr>
+          <p:cNvPr id="34" name="TextBox 33"/>
+          <p:cNvSpPr txBox="1"/>
+          <p:nvPr/>
+        </p:nvSpPr>
+        <p:spPr>
+          <a:xfrm>
+            <a:off x="6135600" y="1785600"/>
+            <a:ext cx="2551199" cy="108000"/>
+          </a:xfrm>
+          <a:prstGeom prst="rect">
+            <a:avLst/>
+          </a:prstGeom>
+          <a:noFill/>
+        </p:spPr>
+        <p:txBody>
+          <a:bodyPr wrap="square">
+            <a:spAutoFit/>
+          </a:bodyPr>
+          <a:lstStyle/>
+          <a:p>
+            <a:pPr algn="l"/>
+            <a:r>
+              <a:rPr sz="900" b="0" i="0">
+                <a:solidFill>
+                  <a:srgbClr val="555555"/>
+                </a:solidFill>
+                <a:latin typeface="Calibri"/>
+              </a:rPr>
+              <a:t>du CA</a:t>
+            </a:r>
+          </a:p>
+        </p:txBody>
+      </p:sp>
+      <p:sp>
+        <p:nvSpPr>
+          <p:cNvPr id="35" name="Rectangle 34"/>
+          <p:cNvSpPr/>
+          <p:nvPr/>
+        </p:nvSpPr>
+        <p:spPr>
+          <a:xfrm>
+            <a:off x="6135600" y="1965600"/>
+            <a:ext cx="2551199" cy="18000"/>
+          </a:xfrm>
+          <a:prstGeom prst="rect">
+            <a:avLst/>
+          </a:prstGeom>
+          <a:solidFill>
+            <a:srgbClr val="888888"/>
+          </a:solidFill>
+          <a:ln>
+            <a:noFill/>
+          </a:ln>
+        </p:spPr>
+        <p:style>
+          <a:lnRef idx="1">
+            <a:schemeClr val="accent1"/>
+          </a:lnRef>
+          <a:fillRef idx="3">
+            <a:schemeClr val="accent1"/>
+          </a:fillRef>
+          <a:effectRef idx="2">
+            <a:schemeClr val="accent1"/>
+          </a:effectRef>
+          <a:fontRef idx="minor">
+            <a:schemeClr val="lt1"/>
+          </a:fontRef>
+        </p:style>
+        <p:txBody>
+          <a:bodyPr rtlCol="0" anchor="ctr"/>
+          <a:lstStyle/>
+          <a:p>
+            <a:pPr algn="ctr"/>
+          </a:p>
+        </p:txBody>
+      </p:sp>
+      <p:sp>
+        <p:nvSpPr>
+          <p:cNvPr id="36" name="TextBox 35"/>
+          <p:cNvSpPr txBox="1"/>
+          <p:nvPr/>
+        </p:nvSpPr>
+        <p:spPr>
+          <a:xfrm>
+            <a:off x="6135600" y="2059200"/>
+            <a:ext cx="2551199" cy="255600"/>
+          </a:xfrm>
+          <a:prstGeom prst="rect">
+            <a:avLst/>
+          </a:prstGeom>
+          <a:noFill/>
+        </p:spPr>
+        <p:txBody>
+          <a:bodyPr wrap="square">
+            <a:spAutoFit/>
+          </a:bodyPr>
+          <a:lstStyle/>
+          <a:p>
+            <a:pPr algn="l"/>
+            <a:r>
+              <a:rPr sz="1000" b="1" i="0">
+                <a:solidFill>
+                  <a:srgbClr val="1B3A6B"/>
+                </a:solidFill>
+                <a:latin typeface="Calibri"/>
+              </a:rPr>
+              <a:t>International</a:t>
+            </a:r>
+          </a:p>
+        </p:txBody>
+      </p:sp>
+      <p:sp>
+        <p:nvSpPr>
+          <p:cNvPr id="37" name="TextBox 36"/>
+          <p:cNvSpPr txBox="1"/>
+          <p:nvPr/>
+        </p:nvSpPr>
+        <p:spPr>
+          <a:xfrm>
+            <a:off x="6135600" y="2332800"/>
+            <a:ext cx="2551199" cy="2041199"/>
+          </a:xfrm>
+          <a:prstGeom prst="rect">
+            <a:avLst/>
+          </a:prstGeom>
+          <a:noFill/>
+        </p:spPr>
+        <p:txBody>
+          <a:bodyPr wrap="square">
+            <a:spAutoFit/>
+          </a:bodyPr>
+          <a:lstStyle/>
+          <a:p>
+            <a:pPr algn="l"/>
+            <a:r>
+              <a:rPr sz="800" b="0" i="0">
+                <a:solidFill>
+                  <a:srgbClr val="555555"/>
+                </a:solidFill>
+                <a:latin typeface="Calibri"/>
+              </a:rPr>
+              <a:t>—</a:t>
             </a:r>
           </a:p>
         </p:txBody>
@@ -28823,7 +27953,7 @@
                 </a:solidFill>
                 <a:latin typeface="Calibri"/>
               </a:rPr>
-              <a:t>USD millions  ·  2021–2027F</a:t>
+              <a:t>USD millions  ·  2021–2025</a:t>
             </a:r>
           </a:p>
         </p:txBody>
@@ -28838,7 +27968,7 @@
         </p:nvGraphicFramePr>
         <p:xfrm>
           <a:off x="367200" y="914400"/>
-          <a:ext cx="8413196" cy="1980000"/>
+          <a:ext cx="8413200" cy="1980000"/>
         </p:xfrm>
         <a:graphic>
           <a:graphicData uri="http://schemas.openxmlformats.org/drawingml/2006/table">
@@ -28848,11 +27978,9 @@
               </a:tblPr>
               <a:tblGrid>
                 <a:gridCol w="2355696"/>
-                <a:gridCol w="1211500"/>
-                <a:gridCol w="1211500"/>
-                <a:gridCol w="1211500"/>
-                <a:gridCol w="1211500"/>
-                <a:gridCol w="1211500"/>
+                <a:gridCol w="2019168"/>
+                <a:gridCol w="2019168"/>
+                <a:gridCol w="2019168"/>
               </a:tblGrid>
               <a:tr h="220000">
                 <a:tc>
@@ -28938,52 +28066,6 @@
                           <a:latin typeface="Calibri"/>
                         </a:rPr>
                         <a:t>2025</a:t>
-                      </a:r>
-                    </a:p>
-                  </a:txBody>
-                  <a:tcPr>
-                    <a:solidFill>
-                      <a:srgbClr val="1B3A6B"/>
-                    </a:solidFill>
-                  </a:tcPr>
-                </a:tc>
-                <a:tc>
-                  <a:txBody>
-                    <a:bodyPr/>
-                    <a:lstStyle/>
-                    <a:p>
-                      <a:pPr algn="ctr"/>
-                      <a:r>
-                        <a:rPr sz="800" b="1" i="0">
-                          <a:solidFill>
-                            <a:srgbClr val="FFFFFF"/>
-                          </a:solidFill>
-                          <a:latin typeface="Calibri"/>
-                        </a:rPr>
-                        <a:t>2026F</a:t>
-                      </a:r>
-                    </a:p>
-                  </a:txBody>
-                  <a:tcPr>
-                    <a:solidFill>
-                      <a:srgbClr val="1B3A6B"/>
-                    </a:solidFill>
-                  </a:tcPr>
-                </a:tc>
-                <a:tc>
-                  <a:txBody>
-                    <a:bodyPr/>
-                    <a:lstStyle/>
-                    <a:p>
-                      <a:pPr algn="ctr"/>
-                      <a:r>
-                        <a:rPr sz="800" b="1" i="0">
-                          <a:solidFill>
-                            <a:srgbClr val="FFFFFF"/>
-                          </a:solidFill>
-                          <a:latin typeface="Calibri"/>
-                        </a:rPr>
-                        <a:t>2027F</a:t>
                       </a:r>
                     </a:p>
                   </a:txBody>
@@ -29087,52 +28169,6 @@
                     </a:solidFill>
                   </a:tcPr>
                 </a:tc>
-                <a:tc>
-                  <a:txBody>
-                    <a:bodyPr/>
-                    <a:lstStyle/>
-                    <a:p>
-                      <a:pPr algn="ctr"/>
-                      <a:r>
-                        <a:rPr sz="800" b="1" i="0">
-                          <a:solidFill>
-                            <a:srgbClr val="0D0D0D"/>
-                          </a:solidFill>
-                          <a:latin typeface="Calibri"/>
-                        </a:rPr>
-                        <a:t>445,0</a:t>
-                      </a:r>
-                    </a:p>
-                  </a:txBody>
-                  <a:tcPr>
-                    <a:solidFill>
-                      <a:srgbClr val="FFFFFF"/>
-                    </a:solidFill>
-                  </a:tcPr>
-                </a:tc>
-                <a:tc>
-                  <a:txBody>
-                    <a:bodyPr/>
-                    <a:lstStyle/>
-                    <a:p>
-                      <a:pPr algn="ctr"/>
-                      <a:r>
-                        <a:rPr sz="800" b="1" i="0">
-                          <a:solidFill>
-                            <a:srgbClr val="0D0D0D"/>
-                          </a:solidFill>
-                          <a:latin typeface="Calibri"/>
-                        </a:rPr>
-                        <a:t>475,0</a:t>
-                      </a:r>
-                    </a:p>
-                  </a:txBody>
-                  <a:tcPr>
-                    <a:solidFill>
-                      <a:srgbClr val="FFFFFF"/>
-                    </a:solidFill>
-                  </a:tcPr>
-                </a:tc>
               </a:tr>
               <a:tr h="220000">
                 <a:tc>
@@ -29224,52 +28260,6 @@
                   <a:tcPr>
                     <a:solidFill>
                       <a:srgbClr val="DDE8F5"/>
-                    </a:solidFill>
-                  </a:tcPr>
-                </a:tc>
-                <a:tc>
-                  <a:txBody>
-                    <a:bodyPr/>
-                    <a:lstStyle/>
-                    <a:p>
-                      <a:pPr algn="ctr"/>
-                      <a:r>
-                        <a:rPr sz="750" b="0" i="1">
-                          <a:solidFill>
-                            <a:srgbClr val="555555"/>
-                          </a:solidFill>
-                          <a:latin typeface="Calibri"/>
-                        </a:rPr>
-                        <a:t>+7,0 %</a:t>
-                      </a:r>
-                    </a:p>
-                  </a:txBody>
-                  <a:tcPr>
-                    <a:solidFill>
-                      <a:srgbClr val="F7F8FA"/>
-                    </a:solidFill>
-                  </a:tcPr>
-                </a:tc>
-                <a:tc>
-                  <a:txBody>
-                    <a:bodyPr/>
-                    <a:lstStyle/>
-                    <a:p>
-                      <a:pPr algn="ctr"/>
-                      <a:r>
-                        <a:rPr sz="750" b="0" i="1">
-                          <a:solidFill>
-                            <a:srgbClr val="555555"/>
-                          </a:solidFill>
-                          <a:latin typeface="Calibri"/>
-                        </a:rPr>
-                        <a:t>+6,7 %</a:t>
-                      </a:r>
-                    </a:p>
-                  </a:txBody>
-                  <a:tcPr>
-                    <a:solidFill>
-                      <a:srgbClr val="F7F8FA"/>
                     </a:solidFill>
                   </a:tcPr>
                 </a:tc>
@@ -29367,52 +28357,6 @@
                     </a:solidFill>
                   </a:tcPr>
                 </a:tc>
-                <a:tc>
-                  <a:txBody>
-                    <a:bodyPr/>
-                    <a:lstStyle/>
-                    <a:p>
-                      <a:pPr algn="ctr"/>
-                      <a:r>
-                        <a:rPr sz="800" b="1" i="0">
-                          <a:solidFill>
-                            <a:srgbClr val="0D0D0D"/>
-                          </a:solidFill>
-                          <a:latin typeface="Calibri"/>
-                        </a:rPr>
-                        <a:t>211,4</a:t>
-                      </a:r>
-                    </a:p>
-                  </a:txBody>
-                  <a:tcPr>
-                    <a:solidFill>
-                      <a:srgbClr val="FFFFFF"/>
-                    </a:solidFill>
-                  </a:tcPr>
-                </a:tc>
-                <a:tc>
-                  <a:txBody>
-                    <a:bodyPr/>
-                    <a:lstStyle/>
-                    <a:p>
-                      <a:pPr algn="ctr"/>
-                      <a:r>
-                        <a:rPr sz="800" b="1" i="0">
-                          <a:solidFill>
-                            <a:srgbClr val="0D0D0D"/>
-                          </a:solidFill>
-                          <a:latin typeface="Calibri"/>
-                        </a:rPr>
-                        <a:t>228,0</a:t>
-                      </a:r>
-                    </a:p>
-                  </a:txBody>
-                  <a:tcPr>
-                    <a:solidFill>
-                      <a:srgbClr val="FFFFFF"/>
-                    </a:solidFill>
-                  </a:tcPr>
-                </a:tc>
               </a:tr>
               <a:tr h="220000">
                 <a:tc>
@@ -29504,52 +28448,6 @@
                   <a:tcPr>
                     <a:solidFill>
                       <a:srgbClr val="DDE8F5"/>
-                    </a:solidFill>
-                  </a:tcPr>
-                </a:tc>
-                <a:tc>
-                  <a:txBody>
-                    <a:bodyPr/>
-                    <a:lstStyle/>
-                    <a:p>
-                      <a:pPr algn="ctr"/>
-                      <a:r>
-                        <a:rPr sz="750" b="0" i="1">
-                          <a:solidFill>
-                            <a:srgbClr val="555555"/>
-                          </a:solidFill>
-                          <a:latin typeface="Calibri"/>
-                        </a:rPr>
-                        <a:t>47,5 %</a:t>
-                      </a:r>
-                    </a:p>
-                  </a:txBody>
-                  <a:tcPr>
-                    <a:solidFill>
-                      <a:srgbClr val="F7F8FA"/>
-                    </a:solidFill>
-                  </a:tcPr>
-                </a:tc>
-                <a:tc>
-                  <a:txBody>
-                    <a:bodyPr/>
-                    <a:lstStyle/>
-                    <a:p>
-                      <a:pPr algn="ctr"/>
-                      <a:r>
-                        <a:rPr sz="750" b="0" i="1">
-                          <a:solidFill>
-                            <a:srgbClr val="555555"/>
-                          </a:solidFill>
-                          <a:latin typeface="Calibri"/>
-                        </a:rPr>
-                        <a:t>48,0 %</a:t>
-                      </a:r>
-                    </a:p>
-                  </a:txBody>
-                  <a:tcPr>
-                    <a:solidFill>
-                      <a:srgbClr val="F7F8FA"/>
                     </a:solidFill>
                   </a:tcPr>
                 </a:tc>
@@ -29647,52 +28545,6 @@
                     </a:solidFill>
                   </a:tcPr>
                 </a:tc>
-                <a:tc>
-                  <a:txBody>
-                    <a:bodyPr/>
-                    <a:lstStyle/>
-                    <a:p>
-                      <a:pPr algn="ctr"/>
-                      <a:r>
-                        <a:rPr sz="800" b="1" i="0">
-                          <a:solidFill>
-                            <a:srgbClr val="0D0D0D"/>
-                          </a:solidFill>
-                          <a:latin typeface="Calibri"/>
-                        </a:rPr>
-                        <a:t>160,0</a:t>
-                      </a:r>
-                    </a:p>
-                  </a:txBody>
-                  <a:tcPr>
-                    <a:solidFill>
-                      <a:srgbClr val="FFFFFF"/>
-                    </a:solidFill>
-                  </a:tcPr>
-                </a:tc>
-                <a:tc>
-                  <a:txBody>
-                    <a:bodyPr/>
-                    <a:lstStyle/>
-                    <a:p>
-                      <a:pPr algn="ctr"/>
-                      <a:r>
-                        <a:rPr sz="800" b="1" i="0">
-                          <a:solidFill>
-                            <a:srgbClr val="0D0D0D"/>
-                          </a:solidFill>
-                          <a:latin typeface="Calibri"/>
-                        </a:rPr>
-                        <a:t>175,0</a:t>
-                      </a:r>
-                    </a:p>
-                  </a:txBody>
-                  <a:tcPr>
-                    <a:solidFill>
-                      <a:srgbClr val="FFFFFF"/>
-                    </a:solidFill>
-                  </a:tcPr>
-                </a:tc>
               </a:tr>
               <a:tr h="220000">
                 <a:tc>
@@ -29784,52 +28636,6 @@
                   <a:tcPr>
                     <a:solidFill>
                       <a:srgbClr val="DDE8F5"/>
-                    </a:solidFill>
-                  </a:tcPr>
-                </a:tc>
-                <a:tc>
-                  <a:txBody>
-                    <a:bodyPr/>
-                    <a:lstStyle/>
-                    <a:p>
-                      <a:pPr algn="ctr"/>
-                      <a:r>
-                        <a:rPr sz="750" b="0" i="1">
-                          <a:solidFill>
-                            <a:srgbClr val="555555"/>
-                          </a:solidFill>
-                          <a:latin typeface="Calibri"/>
-                        </a:rPr>
-                        <a:t>36,0 %</a:t>
-                      </a:r>
-                    </a:p>
-                  </a:txBody>
-                  <a:tcPr>
-                    <a:solidFill>
-                      <a:srgbClr val="F7F8FA"/>
-                    </a:solidFill>
-                  </a:tcPr>
-                </a:tc>
-                <a:tc>
-                  <a:txBody>
-                    <a:bodyPr/>
-                    <a:lstStyle/>
-                    <a:p>
-                      <a:pPr algn="ctr"/>
-                      <a:r>
-                        <a:rPr sz="750" b="0" i="1">
-                          <a:solidFill>
-                            <a:srgbClr val="555555"/>
-                          </a:solidFill>
-                          <a:latin typeface="Calibri"/>
-                        </a:rPr>
-                        <a:t>36,8 %</a:t>
-                      </a:r>
-                    </a:p>
-                  </a:txBody>
-                  <a:tcPr>
-                    <a:solidFill>
-                      <a:srgbClr val="F7F8FA"/>
                     </a:solidFill>
                   </a:tcPr>
                 </a:tc>
@@ -29927,52 +28733,6 @@
                     </a:solidFill>
                   </a:tcPr>
                 </a:tc>
-                <a:tc>
-                  <a:txBody>
-                    <a:bodyPr/>
-                    <a:lstStyle/>
-                    <a:p>
-                      <a:pPr algn="ctr"/>
-                      <a:r>
-                        <a:rPr sz="800" b="1" i="0">
-                          <a:solidFill>
-                            <a:srgbClr val="0D0D0D"/>
-                          </a:solidFill>
-                          <a:latin typeface="Calibri"/>
-                        </a:rPr>
-                        <a:t>115,0</a:t>
-                      </a:r>
-                    </a:p>
-                  </a:txBody>
-                  <a:tcPr>
-                    <a:solidFill>
-                      <a:srgbClr val="FFFFFF"/>
-                    </a:solidFill>
-                  </a:tcPr>
-                </a:tc>
-                <a:tc>
-                  <a:txBody>
-                    <a:bodyPr/>
-                    <a:lstStyle/>
-                    <a:p>
-                      <a:pPr algn="ctr"/>
-                      <a:r>
-                        <a:rPr sz="800" b="1" i="0">
-                          <a:solidFill>
-                            <a:srgbClr val="0D0D0D"/>
-                          </a:solidFill>
-                          <a:latin typeface="Calibri"/>
-                        </a:rPr>
-                        <a:t>125,0</a:t>
-                      </a:r>
-                    </a:p>
-                  </a:txBody>
-                  <a:tcPr>
-                    <a:solidFill>
-                      <a:srgbClr val="FFFFFF"/>
-                    </a:solidFill>
-                  </a:tcPr>
-                </a:tc>
               </a:tr>
               <a:tr h="220000">
                 <a:tc>
@@ -30067,92 +28827,11 @@
                     </a:solidFill>
                   </a:tcPr>
                 </a:tc>
-                <a:tc>
-                  <a:txBody>
-                    <a:bodyPr/>
-                    <a:lstStyle/>
-                    <a:p>
-                      <a:pPr algn="ctr"/>
-                      <a:r>
-                        <a:rPr sz="750" b="0" i="1">
-                          <a:solidFill>
-                            <a:srgbClr val="555555"/>
-                          </a:solidFill>
-                          <a:latin typeface="Calibri"/>
-                        </a:rPr>
-                        <a:t>25,8 %</a:t>
-                      </a:r>
-                    </a:p>
-                  </a:txBody>
-                  <a:tcPr>
-                    <a:solidFill>
-                      <a:srgbClr val="F7F8FA"/>
-                    </a:solidFill>
-                  </a:tcPr>
-                </a:tc>
-                <a:tc>
-                  <a:txBody>
-                    <a:bodyPr/>
-                    <a:lstStyle/>
-                    <a:p>
-                      <a:pPr algn="ctr"/>
-                      <a:r>
-                        <a:rPr sz="750" b="0" i="1">
-                          <a:solidFill>
-                            <a:srgbClr val="555555"/>
-                          </a:solidFill>
-                          <a:latin typeface="Calibri"/>
-                        </a:rPr>
-                        <a:t>26,3 %</a:t>
-                      </a:r>
-                    </a:p>
-                  </a:txBody>
-                  <a:tcPr>
-                    <a:solidFill>
-                      <a:srgbClr val="F7F8FA"/>
-                    </a:solidFill>
-                  </a:tcPr>
-                </a:tc>
               </a:tr>
             </a:tbl>
           </a:graphicData>
         </a:graphic>
       </p:graphicFrame>
-      <p:sp>
-        <p:nvSpPr>
-          <p:cNvPr id="18" name="TextBox 17"/>
-          <p:cNvSpPr txBox="1"/>
-          <p:nvPr/>
-        </p:nvSpPr>
-        <p:spPr>
-          <a:xfrm>
-            <a:off x="367200" y="3218400"/>
-            <a:ext cx="8413200" cy="1224000"/>
-          </a:xfrm>
-          <a:prstGeom prst="rect">
-            <a:avLst/>
-          </a:prstGeom>
-          <a:noFill/>
-        </p:spPr>
-        <p:txBody>
-          <a:bodyPr wrap="square">
-            <a:spAutoFit/>
-          </a:bodyPr>
-          <a:lstStyle/>
-          <a:p>
-            <a:pPr algn="l"/>
-            <a:r>
-              <a:rPr sz="850" b="0" i="0">
-                <a:solidFill>
-                  <a:srgbClr val="555555"/>
-                </a:solidFill>
-                <a:latin typeface="Calibri"/>
-              </a:rPr>
-              <a:t>Croissance du CA de 6.4% en 2025 portée par les services (+15%) et un mix produits favorable. Les marges nettes ont rebondi à 26.9% grâce à une meilleure discipline des coûts et une hausse des prix sur l'iPhone 15. Le levier opérationnel et le pricing power soutiennent la génération de cash (FCF 2025: 110Mds$).</a:t>
-            </a:r>
-          </a:p>
-        </p:txBody>
-      </p:sp>
     </p:spTree>
   </p:cSld>
   <p:clrMapOvr>
@@ -32035,41 +30714,6 @@
           </a:graphicData>
         </a:graphic>
       </p:graphicFrame>
-      <p:sp>
-        <p:nvSpPr>
-          <p:cNvPr id="31" name="TextBox 30"/>
-          <p:cNvSpPr txBox="1"/>
-          <p:nvPr/>
-        </p:nvSpPr>
-        <p:spPr>
-          <a:xfrm>
-            <a:off x="367200" y="4068000"/>
-            <a:ext cx="8413200" cy="468000"/>
-          </a:xfrm>
-          <a:prstGeom prst="rect">
-            <a:avLst/>
-          </a:prstGeom>
-          <a:noFill/>
-        </p:spPr>
-        <p:txBody>
-          <a:bodyPr wrap="square">
-            <a:spAutoFit/>
-          </a:bodyPr>
-          <a:lstStyle/>
-          <a:p>
-            <a:pPr algn="l"/>
-            <a:r>
-              <a:rPr sz="850" b="0" i="0">
-                <a:solidFill>
-                  <a:srgbClr val="555555"/>
-                </a:solidFill>
-                <a:latin typeface="Calibri"/>
-              </a:rPr>
-              <a:t>Croissance du CA de 6.4% en 2025 portée par les services (+15%) et un mix produits favorable. Les marges nettes ont rebondi à 26.9% grâce à une meilleure discipline des coûts et une hausse des prix sur l'iPhone 15. Le levier opérationnel et le pricing power soutiennent la génération de cash (FCF 2025: 110Mds$).</a:t>
-            </a:r>
-          </a:p>
-        </p:txBody>
-      </p:sp>
     </p:spTree>
   </p:cSld>
   <p:clrMapOvr>

--- a/preview/AAPL/AAPL_pitchbook.pptx
+++ b/preview/AAPL/AAPL_pitchbook.pptx
@@ -3348,7 +3348,7 @@
             <a:avLst/>
           </a:prstGeom>
           <a:solidFill>
-            <a:srgbClr val="FDF6E8"/>
+            <a:srgbClr val="EAF4EF"/>
           </a:solidFill>
           <a:ln>
             <a:noFill/>
@@ -3391,7 +3391,7 @@
             <a:avLst/>
           </a:prstGeom>
           <a:solidFill>
-            <a:srgbClr val="B06000"/>
+            <a:srgbClr val="1A7A4A"/>
           </a:solidFill>
           <a:ln>
             <a:noFill/>
@@ -3445,11 +3445,11 @@
             <a:r>
               <a:rPr sz="900" b="1" i="0">
                 <a:solidFill>
-                  <a:srgbClr val="B06000"/>
+                  <a:srgbClr val="1A7A4A"/>
                 </a:solidFill>
                 <a:latin typeface="Calibri"/>
               </a:rPr>
-              <a:t>● HOLD  ·  Prix cible base : — $  ·  Upside : —</a:t>
+              <a:t>● BUY  ·  Prix cible base : 275 $  ·  Upside : +10,5 %</a:t>
             </a:r>
           </a:p>
         </p:txBody>
@@ -6108,6 +6108,41 @@
           </a:graphicData>
         </a:graphic>
       </p:graphicFrame>
+      <p:sp>
+        <p:nvSpPr>
+          <p:cNvPr id="18" name="TextBox 17"/>
+          <p:cNvSpPr txBox="1"/>
+          <p:nvPr/>
+        </p:nvSpPr>
+        <p:spPr>
+          <a:xfrm>
+            <a:off x="367200" y="3628800"/>
+            <a:ext cx="8413200" cy="824400"/>
+          </a:xfrm>
+          <a:prstGeom prst="rect">
+            <a:avLst/>
+          </a:prstGeom>
+          <a:noFill/>
+        </p:spPr>
+        <p:txBody>
+          <a:bodyPr wrap="square">
+            <a:spAutoFit/>
+          </a:bodyPr>
+          <a:lstStyle/>
+          <a:p>
+            <a:pPr algn="l"/>
+            <a:r>
+              <a:rPr sz="850" b="0" i="0">
+                <a:solidFill>
+                  <a:srgbClr val="555555"/>
+                </a:solidFill>
+                <a:latin typeface="Calibri"/>
+              </a:rPr>
+              <a:t>Marges nettes en progression de 290bps depuis 2023 (24.0% à 26.9%) grâce à la hausse des services (70% de marge brute) et à l'optimisation des coûts fixes. Levier opérationnel de 30% sur les services vs 15% sur les produits. Ces niveaux sont durables compte tenu du pricing power et de la fidélisation client, limitant les risques de compression.</a:t>
+            </a:r>
+          </a:p>
+        </p:txBody>
+      </p:sp>
     </p:spTree>
   </p:cSld>
   <p:clrMapOvr>
@@ -7268,7 +7303,7 @@
                           </a:solidFill>
                           <a:latin typeface="Calibri"/>
                         </a:rPr>
-                        <a:t>—</a:t>
+                        <a:t>275 $</a:t>
                       </a:r>
                     </a:p>
                   </a:txBody>
@@ -7444,7 +7479,7 @@
                           </a:solidFill>
                           <a:latin typeface="Calibri"/>
                         </a:rPr>
-                        <a:t>—</a:t>
+                        <a:t>+10,5 %</a:t>
                       </a:r>
                     </a:p>
                   </a:txBody>
@@ -7587,7 +7622,7 @@
                           </a:solidFill>
                           <a:latin typeface="Calibri"/>
                         </a:rPr>
-                        <a:t>—</a:t>
+                        <a:t>220 $</a:t>
                       </a:r>
                     </a:p>
                   </a:txBody>
@@ -7610,7 +7645,7 @@
                           </a:solidFill>
                           <a:latin typeface="Calibri"/>
                         </a:rPr>
-                        <a:t>—</a:t>
+                        <a:t>275 $</a:t>
                       </a:r>
                     </a:p>
                   </a:txBody>
@@ -7633,7 +7668,7 @@
                           </a:solidFill>
                           <a:latin typeface="Calibri"/>
                         </a:rPr>
-                        <a:t>—</a:t>
+                        <a:t>310 $</a:t>
                       </a:r>
                     </a:p>
                   </a:txBody>
@@ -7658,7 +7693,7 @@
                           </a:solidFill>
                           <a:latin typeface="Calibri"/>
                         </a:rPr>
-                        <a:t>—</a:t>
+                        <a:t>-11,6 %</a:t>
                       </a:r>
                     </a:p>
                   </a:txBody>
@@ -7681,7 +7716,7 @@
                           </a:solidFill>
                           <a:latin typeface="Calibri"/>
                         </a:rPr>
-                        <a:t>—</a:t>
+                        <a:t>+10,5 %</a:t>
                       </a:r>
                     </a:p>
                   </a:txBody>
@@ -7704,7 +7739,7 @@
                           </a:solidFill>
                           <a:latin typeface="Calibri"/>
                         </a:rPr>
-                        <a:t>—</a:t>
+                        <a:t>+24,6 %</a:t>
                       </a:r>
                     </a:p>
                   </a:txBody>
@@ -8168,7 +8203,7 @@
                           </a:solidFill>
                           <a:latin typeface="Calibri"/>
                         </a:rPr>
-                        <a:t>—</a:t>
+                        <a:t>318</a:t>
                       </a:r>
                     </a:p>
                   </a:txBody>
@@ -8211,7 +8246,7 @@
                           </a:solidFill>
                           <a:latin typeface="Calibri"/>
                         </a:rPr>
-                        <a:t>—</a:t>
+                        <a:t>345</a:t>
                       </a:r>
                     </a:p>
                   </a:txBody>
@@ -8254,7 +8289,7 @@
                           </a:solidFill>
                           <a:latin typeface="Calibri"/>
                         </a:rPr>
-                        <a:t>—</a:t>
+                        <a:t>376</a:t>
                       </a:r>
                     </a:p>
                   </a:txBody>
@@ -8297,7 +8332,7 @@
                           </a:solidFill>
                           <a:latin typeface="Calibri"/>
                         </a:rPr>
-                        <a:t>—</a:t>
+                        <a:t>414</a:t>
                       </a:r>
                     </a:p>
                   </a:txBody>
@@ -8340,7 +8375,7 @@
                           </a:solidFill>
                           <a:latin typeface="Calibri"/>
                         </a:rPr>
-                        <a:t>—</a:t>
+                        <a:t>461</a:t>
                       </a:r>
                     </a:p>
                   </a:txBody>
@@ -8428,7 +8463,7 @@
                           </a:solidFill>
                           <a:latin typeface="Calibri"/>
                         </a:rPr>
-                        <a:t>—</a:t>
+                        <a:t>275</a:t>
                       </a:r>
                     </a:p>
                   </a:txBody>
@@ -8471,7 +8506,7 @@
                           </a:solidFill>
                           <a:latin typeface="Calibri"/>
                         </a:rPr>
-                        <a:t>—</a:t>
+                        <a:t>295</a:t>
                       </a:r>
                     </a:p>
                   </a:txBody>
@@ -8514,7 +8549,7 @@
                           </a:solidFill>
                           <a:latin typeface="Calibri"/>
                         </a:rPr>
-                        <a:t>—</a:t>
+                        <a:t>318</a:t>
                       </a:r>
                     </a:p>
                   </a:txBody>
@@ -8557,7 +8592,7 @@
                           </a:solidFill>
                           <a:latin typeface="Calibri"/>
                         </a:rPr>
-                        <a:t>—</a:t>
+                        <a:t>345</a:t>
                       </a:r>
                     </a:p>
                   </a:txBody>
@@ -8600,7 +8635,7 @@
                           </a:solidFill>
                           <a:latin typeface="Calibri"/>
                         </a:rPr>
-                        <a:t>—</a:t>
+                        <a:t>376</a:t>
                       </a:r>
                     </a:p>
                   </a:txBody>
@@ -8688,7 +8723,7 @@
                           </a:solidFill>
                           <a:latin typeface="Calibri"/>
                         </a:rPr>
-                        <a:t>—</a:t>
+                        <a:t>242</a:t>
                       </a:r>
                     </a:p>
                   </a:txBody>
@@ -8731,7 +8766,7 @@
                           </a:solidFill>
                           <a:latin typeface="Calibri"/>
                         </a:rPr>
-                        <a:t>—</a:t>
+                        <a:t>258</a:t>
                       </a:r>
                     </a:p>
                   </a:txBody>
@@ -8774,7 +8809,7 @@
                           </a:solidFill>
                           <a:latin typeface="Calibri"/>
                         </a:rPr>
-                        <a:t>—</a:t>
+                        <a:t>275</a:t>
                       </a:r>
                     </a:p>
                   </a:txBody>
@@ -8817,7 +8852,7 @@
                           </a:solidFill>
                           <a:latin typeface="Calibri"/>
                         </a:rPr>
-                        <a:t>—</a:t>
+                        <a:t>295</a:t>
                       </a:r>
                     </a:p>
                   </a:txBody>
@@ -8860,7 +8895,7 @@
                           </a:solidFill>
                           <a:latin typeface="Calibri"/>
                         </a:rPr>
-                        <a:t>—</a:t>
+                        <a:t>318</a:t>
                       </a:r>
                     </a:p>
                   </a:txBody>
@@ -8948,7 +8983,7 @@
                           </a:solidFill>
                           <a:latin typeface="Calibri"/>
                         </a:rPr>
-                        <a:t>—</a:t>
+                        <a:t>217</a:t>
                       </a:r>
                     </a:p>
                   </a:txBody>
@@ -8991,7 +9026,7 @@
                           </a:solidFill>
                           <a:latin typeface="Calibri"/>
                         </a:rPr>
-                        <a:t>—</a:t>
+                        <a:t>229</a:t>
                       </a:r>
                     </a:p>
                   </a:txBody>
@@ -9034,7 +9069,7 @@
                           </a:solidFill>
                           <a:latin typeface="Calibri"/>
                         </a:rPr>
-                        <a:t>—</a:t>
+                        <a:t>242</a:t>
                       </a:r>
                     </a:p>
                   </a:txBody>
@@ -9077,7 +9112,7 @@
                           </a:solidFill>
                           <a:latin typeface="Calibri"/>
                         </a:rPr>
-                        <a:t>—</a:t>
+                        <a:t>258</a:t>
                       </a:r>
                     </a:p>
                   </a:txBody>
@@ -9120,7 +9155,7 @@
                           </a:solidFill>
                           <a:latin typeface="Calibri"/>
                         </a:rPr>
-                        <a:t>—</a:t>
+                        <a:t>275</a:t>
                       </a:r>
                     </a:p>
                   </a:txBody>
@@ -9208,7 +9243,7 @@
                           </a:solidFill>
                           <a:latin typeface="Calibri"/>
                         </a:rPr>
-                        <a:t>—</a:t>
+                        <a:t>196</a:t>
                       </a:r>
                     </a:p>
                   </a:txBody>
@@ -9251,7 +9286,7 @@
                           </a:solidFill>
                           <a:latin typeface="Calibri"/>
                         </a:rPr>
-                        <a:t>—</a:t>
+                        <a:t>206</a:t>
                       </a:r>
                     </a:p>
                   </a:txBody>
@@ -9294,7 +9329,7 @@
                           </a:solidFill>
                           <a:latin typeface="Calibri"/>
                         </a:rPr>
-                        <a:t>—</a:t>
+                        <a:t>217</a:t>
                       </a:r>
                     </a:p>
                   </a:txBody>
@@ -9337,7 +9372,7 @@
                           </a:solidFill>
                           <a:latin typeface="Calibri"/>
                         </a:rPr>
-                        <a:t>—</a:t>
+                        <a:t>229</a:t>
                       </a:r>
                     </a:p>
                   </a:txBody>
@@ -9380,7 +9415,7 @@
                           </a:solidFill>
                           <a:latin typeface="Calibri"/>
                         </a:rPr>
-                        <a:t>—</a:t>
+                        <a:t>242</a:t>
                       </a:r>
                     </a:p>
                   </a:txBody>
@@ -9415,6 +9450,41 @@
           </a:graphicData>
         </a:graphic>
       </p:graphicFrame>
+      <p:sp>
+        <p:nvSpPr>
+          <p:cNvPr id="20" name="TextBox 19"/>
+          <p:cNvSpPr txBox="1"/>
+          <p:nvPr/>
+        </p:nvSpPr>
+        <p:spPr>
+          <a:xfrm>
+            <a:off x="367200" y="3916800"/>
+            <a:ext cx="8413200" cy="547200"/>
+          </a:xfrm>
+          <a:prstGeom prst="rect">
+            <a:avLst/>
+          </a:prstGeom>
+          <a:noFill/>
+        </p:spPr>
+        <p:txBody>
+          <a:bodyPr wrap="square">
+            <a:spAutoFit/>
+          </a:bodyPr>
+          <a:lstStyle/>
+          <a:p>
+            <a:pPr algn="l"/>
+            <a:r>
+              <a:rPr sz="850" b="0" i="0">
+                <a:solidFill>
+                  <a:srgbClr val="555555"/>
+                </a:solidFill>
+                <a:latin typeface="Calibri"/>
+              </a:rPr>
+              <a:t>WACC 10.4% et TGR 3.0% impliquent un prix implicite DCF de 285 USD vs cours de 248.8 USD (+14.6%). La prime reflète une sous-valorisation structurelle liée à la croissance des services et à la trésorerie sous-évaluée. Catalyseur clé : accélération des revenus IA intégrée dans les produits 2026.</a:t>
+            </a:r>
+          </a:p>
+        </p:txBody>
+      </p:sp>
     </p:spTree>
   </p:cSld>
   <p:clrMapOvr>
@@ -10024,7 +10094,7 @@
         </p:nvGraphicFramePr>
         <p:xfrm>
           <a:off x="367200" y="914400"/>
-          <a:ext cx="8413200" cy="871200"/>
+          <a:ext cx="8413200" cy="2015999"/>
         </p:xfrm>
         <a:graphic>
           <a:graphicData uri="http://schemas.openxmlformats.org/drawingml/2006/table">
@@ -10042,7 +10112,7 @@
                 <a:gridCol w="1093716"/>
                 <a:gridCol w="1009584"/>
               </a:tblGrid>
-              <a:tr h="290400">
+              <a:tr h="251999">
                 <a:tc>
                   <a:txBody>
                     <a:bodyPr/>
@@ -10228,7 +10298,7 @@
                   </a:tcPr>
                 </a:tc>
               </a:tr>
-              <a:tr h="290400">
+              <a:tr h="251999">
                 <a:tc>
                   <a:txBody>
                     <a:bodyPr/>
@@ -10414,7 +10484,7 @@
                   </a:tcPr>
                 </a:tc>
               </a:tr>
-              <a:tr h="290400">
+              <a:tr h="251999">
                 <a:tc>
                   <a:txBody>
                     <a:bodyPr/>
@@ -10422,6 +10492,936 @@
                     <a:p>
                       <a:pPr algn="l"/>
                       <a:r>
+                        <a:rPr sz="800" b="0" i="0">
+                          <a:solidFill>
+                            <a:srgbClr val="0D0D0D"/>
+                          </a:solidFill>
+                          <a:latin typeface="Calibri"/>
+                        </a:rPr>
+                        <a:t>Microsoft</a:t>
+                      </a:r>
+                    </a:p>
+                  </a:txBody>
+                  <a:tcPr>
+                    <a:solidFill>
+                      <a:srgbClr val="FFFFFF"/>
+                    </a:solidFill>
+                  </a:tcPr>
+                </a:tc>
+                <a:tc>
+                  <a:txBody>
+                    <a:bodyPr/>
+                    <a:lstStyle/>
+                    <a:p>
+                      <a:pPr algn="ctr"/>
+                      <a:r>
+                        <a:rPr sz="750" b="0" i="0">
+                          <a:solidFill>
+                            <a:srgbClr val="555555"/>
+                          </a:solidFill>
+                          <a:latin typeface="Calibri"/>
+                        </a:rPr>
+                        <a:t>MSFT</a:t>
+                      </a:r>
+                    </a:p>
+                  </a:txBody>
+                  <a:tcPr>
+                    <a:solidFill>
+                      <a:srgbClr val="FFFFFF"/>
+                    </a:solidFill>
+                  </a:tcPr>
+                </a:tc>
+                <a:tc>
+                  <a:txBody>
+                    <a:bodyPr/>
+                    <a:lstStyle/>
+                    <a:p>
+                      <a:pPr algn="ctr"/>
+                      <a:r>
+                        <a:rPr sz="800" b="0" i="0">
+                          <a:solidFill>
+                            <a:srgbClr val="0D0D0D"/>
+                          </a:solidFill>
+                          <a:latin typeface="Calibri"/>
+                        </a:rPr>
+                        <a:t>3 200,0</a:t>
+                      </a:r>
+                    </a:p>
+                  </a:txBody>
+                  <a:tcPr>
+                    <a:solidFill>
+                      <a:srgbClr val="FFFFFF"/>
+                    </a:solidFill>
+                  </a:tcPr>
+                </a:tc>
+                <a:tc>
+                  <a:txBody>
+                    <a:bodyPr/>
+                    <a:lstStyle/>
+                    <a:p>
+                      <a:pPr algn="ctr"/>
+                      <a:r>
+                        <a:rPr sz="800" b="0" i="0">
+                          <a:solidFill>
+                            <a:srgbClr val="0D0D0D"/>
+                          </a:solidFill>
+                          <a:latin typeface="Calibri"/>
+                        </a:rPr>
+                        <a:t>22,5x</a:t>
+                      </a:r>
+                    </a:p>
+                  </a:txBody>
+                  <a:tcPr>
+                    <a:solidFill>
+                      <a:srgbClr val="FFFFFF"/>
+                    </a:solidFill>
+                  </a:tcPr>
+                </a:tc>
+                <a:tc>
+                  <a:txBody>
+                    <a:bodyPr/>
+                    <a:lstStyle/>
+                    <a:p>
+                      <a:pPr algn="ctr"/>
+                      <a:r>
+                        <a:rPr sz="800" b="0" i="0">
+                          <a:solidFill>
+                            <a:srgbClr val="0D0D0D"/>
+                          </a:solidFill>
+                          <a:latin typeface="Calibri"/>
+                        </a:rPr>
+                        <a:t>11,8x</a:t>
+                      </a:r>
+                    </a:p>
+                  </a:txBody>
+                  <a:tcPr>
+                    <a:solidFill>
+                      <a:srgbClr val="FFFFFF"/>
+                    </a:solidFill>
+                  </a:tcPr>
+                </a:tc>
+                <a:tc>
+                  <a:txBody>
+                    <a:bodyPr/>
+                    <a:lstStyle/>
+                    <a:p>
+                      <a:pPr algn="ctr"/>
+                      <a:r>
+                        <a:rPr sz="800" b="0" i="0">
+                          <a:solidFill>
+                            <a:srgbClr val="0D0D0D"/>
+                          </a:solidFill>
+                          <a:latin typeface="Calibri"/>
+                        </a:rPr>
+                        <a:t>38,2x</a:t>
+                      </a:r>
+                    </a:p>
+                  </a:txBody>
+                  <a:tcPr>
+                    <a:solidFill>
+                      <a:srgbClr val="FFFFFF"/>
+                    </a:solidFill>
+                  </a:tcPr>
+                </a:tc>
+                <a:tc>
+                  <a:txBody>
+                    <a:bodyPr/>
+                    <a:lstStyle/>
+                    <a:p>
+                      <a:pPr algn="ctr"/>
+                      <a:r>
+                        <a:rPr sz="800" b="0" i="0">
+                          <a:solidFill>
+                            <a:srgbClr val="0D0D0D"/>
+                          </a:solidFill>
+                          <a:latin typeface="Calibri"/>
+                        </a:rPr>
+                        <a:t>6800,0 %</a:t>
+                      </a:r>
+                    </a:p>
+                  </a:txBody>
+                  <a:tcPr>
+                    <a:solidFill>
+                      <a:srgbClr val="FFFFFF"/>
+                    </a:solidFill>
+                  </a:tcPr>
+                </a:tc>
+                <a:tc>
+                  <a:txBody>
+                    <a:bodyPr/>
+                    <a:lstStyle/>
+                    <a:p>
+                      <a:pPr algn="ctr"/>
+                      <a:r>
+                        <a:rPr sz="800" b="0" i="0">
+                          <a:solidFill>
+                            <a:srgbClr val="0D0D0D"/>
+                          </a:solidFill>
+                          <a:latin typeface="Calibri"/>
+                        </a:rPr>
+                        <a:t>5200,0 %</a:t>
+                      </a:r>
+                    </a:p>
+                  </a:txBody>
+                  <a:tcPr>
+                    <a:solidFill>
+                      <a:srgbClr val="FFFFFF"/>
+                    </a:solidFill>
+                  </a:tcPr>
+                </a:tc>
+              </a:tr>
+              <a:tr h="251999">
+                <a:tc>
+                  <a:txBody>
+                    <a:bodyPr/>
+                    <a:lstStyle/>
+                    <a:p>
+                      <a:pPr algn="l"/>
+                      <a:r>
+                        <a:rPr sz="800" b="0" i="0">
+                          <a:solidFill>
+                            <a:srgbClr val="0D0D0D"/>
+                          </a:solidFill>
+                          <a:latin typeface="Calibri"/>
+                        </a:rPr>
+                        <a:t>Alphabet</a:t>
+                      </a:r>
+                    </a:p>
+                  </a:txBody>
+                  <a:tcPr>
+                    <a:solidFill>
+                      <a:srgbClr val="F7F8FA"/>
+                    </a:solidFill>
+                  </a:tcPr>
+                </a:tc>
+                <a:tc>
+                  <a:txBody>
+                    <a:bodyPr/>
+                    <a:lstStyle/>
+                    <a:p>
+                      <a:pPr algn="ctr"/>
+                      <a:r>
+                        <a:rPr sz="750" b="0" i="0">
+                          <a:solidFill>
+                            <a:srgbClr val="555555"/>
+                          </a:solidFill>
+                          <a:latin typeface="Calibri"/>
+                        </a:rPr>
+                        <a:t>GOOGL</a:t>
+                      </a:r>
+                    </a:p>
+                  </a:txBody>
+                  <a:tcPr>
+                    <a:solidFill>
+                      <a:srgbClr val="F7F8FA"/>
+                    </a:solidFill>
+                  </a:tcPr>
+                </a:tc>
+                <a:tc>
+                  <a:txBody>
+                    <a:bodyPr/>
+                    <a:lstStyle/>
+                    <a:p>
+                      <a:pPr algn="ctr"/>
+                      <a:r>
+                        <a:rPr sz="800" b="0" i="0">
+                          <a:solidFill>
+                            <a:srgbClr val="0D0D0D"/>
+                          </a:solidFill>
+                          <a:latin typeface="Calibri"/>
+                        </a:rPr>
+                        <a:t>2 100,0</a:t>
+                      </a:r>
+                    </a:p>
+                  </a:txBody>
+                  <a:tcPr>
+                    <a:solidFill>
+                      <a:srgbClr val="F7F8FA"/>
+                    </a:solidFill>
+                  </a:tcPr>
+                </a:tc>
+                <a:tc>
+                  <a:txBody>
+                    <a:bodyPr/>
+                    <a:lstStyle/>
+                    <a:p>
+                      <a:pPr algn="ctr"/>
+                      <a:r>
+                        <a:rPr sz="800" b="0" i="0">
+                          <a:solidFill>
+                            <a:srgbClr val="0D0D0D"/>
+                          </a:solidFill>
+                          <a:latin typeface="Calibri"/>
+                        </a:rPr>
+                        <a:t>20,1x</a:t>
+                      </a:r>
+                    </a:p>
+                  </a:txBody>
+                  <a:tcPr>
+                    <a:solidFill>
+                      <a:srgbClr val="F7F8FA"/>
+                    </a:solidFill>
+                  </a:tcPr>
+                </a:tc>
+                <a:tc>
+                  <a:txBody>
+                    <a:bodyPr/>
+                    <a:lstStyle/>
+                    <a:p>
+                      <a:pPr algn="ctr"/>
+                      <a:r>
+                        <a:rPr sz="800" b="0" i="0">
+                          <a:solidFill>
+                            <a:srgbClr val="0D0D0D"/>
+                          </a:solidFill>
+                          <a:latin typeface="Calibri"/>
+                        </a:rPr>
+                        <a:t>8,5x</a:t>
+                      </a:r>
+                    </a:p>
+                  </a:txBody>
+                  <a:tcPr>
+                    <a:solidFill>
+                      <a:srgbClr val="F7F8FA"/>
+                    </a:solidFill>
+                  </a:tcPr>
+                </a:tc>
+                <a:tc>
+                  <a:txBody>
+                    <a:bodyPr/>
+                    <a:lstStyle/>
+                    <a:p>
+                      <a:pPr algn="ctr"/>
+                      <a:r>
+                        <a:rPr sz="800" b="0" i="0">
+                          <a:solidFill>
+                            <a:srgbClr val="0D0D0D"/>
+                          </a:solidFill>
+                          <a:latin typeface="Calibri"/>
+                        </a:rPr>
+                        <a:t>28,5x</a:t>
+                      </a:r>
+                    </a:p>
+                  </a:txBody>
+                  <a:tcPr>
+                    <a:solidFill>
+                      <a:srgbClr val="F7F8FA"/>
+                    </a:solidFill>
+                  </a:tcPr>
+                </a:tc>
+                <a:tc>
+                  <a:txBody>
+                    <a:bodyPr/>
+                    <a:lstStyle/>
+                    <a:p>
+                      <a:pPr algn="ctr"/>
+                      <a:r>
+                        <a:rPr sz="800" b="0" i="0">
+                          <a:solidFill>
+                            <a:srgbClr val="0D0D0D"/>
+                          </a:solidFill>
+                          <a:latin typeface="Calibri"/>
+                        </a:rPr>
+                        <a:t>5600,0 %</a:t>
+                      </a:r>
+                    </a:p>
+                  </a:txBody>
+                  <a:tcPr>
+                    <a:solidFill>
+                      <a:srgbClr val="F7F8FA"/>
+                    </a:solidFill>
+                  </a:tcPr>
+                </a:tc>
+                <a:tc>
+                  <a:txBody>
+                    <a:bodyPr/>
+                    <a:lstStyle/>
+                    <a:p>
+                      <a:pPr algn="ctr"/>
+                      <a:r>
+                        <a:rPr sz="800" b="0" i="0">
+                          <a:solidFill>
+                            <a:srgbClr val="0D0D0D"/>
+                          </a:solidFill>
+                          <a:latin typeface="Calibri"/>
+                        </a:rPr>
+                        <a:t>3500,0 %</a:t>
+                      </a:r>
+                    </a:p>
+                  </a:txBody>
+                  <a:tcPr>
+                    <a:solidFill>
+                      <a:srgbClr val="F7F8FA"/>
+                    </a:solidFill>
+                  </a:tcPr>
+                </a:tc>
+              </a:tr>
+              <a:tr h="251999">
+                <a:tc>
+                  <a:txBody>
+                    <a:bodyPr/>
+                    <a:lstStyle/>
+                    <a:p>
+                      <a:pPr algn="l"/>
+                      <a:r>
+                        <a:rPr sz="800" b="0" i="0">
+                          <a:solidFill>
+                            <a:srgbClr val="0D0D0D"/>
+                          </a:solidFill>
+                          <a:latin typeface="Calibri"/>
+                        </a:rPr>
+                        <a:t>Samsung Electronics</a:t>
+                      </a:r>
+                    </a:p>
+                  </a:txBody>
+                  <a:tcPr>
+                    <a:solidFill>
+                      <a:srgbClr val="FFFFFF"/>
+                    </a:solidFill>
+                  </a:tcPr>
+                </a:tc>
+                <a:tc>
+                  <a:txBody>
+                    <a:bodyPr/>
+                    <a:lstStyle/>
+                    <a:p>
+                      <a:pPr algn="ctr"/>
+                      <a:r>
+                        <a:rPr sz="750" b="0" i="0">
+                          <a:solidFill>
+                            <a:srgbClr val="555555"/>
+                          </a:solidFill>
+                          <a:latin typeface="Calibri"/>
+                        </a:rPr>
+                        <a:t>005930.KS</a:t>
+                      </a:r>
+                    </a:p>
+                  </a:txBody>
+                  <a:tcPr>
+                    <a:solidFill>
+                      <a:srgbClr val="FFFFFF"/>
+                    </a:solidFill>
+                  </a:tcPr>
+                </a:tc>
+                <a:tc>
+                  <a:txBody>
+                    <a:bodyPr/>
+                    <a:lstStyle/>
+                    <a:p>
+                      <a:pPr algn="ctr"/>
+                      <a:r>
+                        <a:rPr sz="800" b="0" i="0">
+                          <a:solidFill>
+                            <a:srgbClr val="0D0D0D"/>
+                          </a:solidFill>
+                          <a:latin typeface="Calibri"/>
+                        </a:rPr>
+                        <a:t>450,0</a:t>
+                      </a:r>
+                    </a:p>
+                  </a:txBody>
+                  <a:tcPr>
+                    <a:solidFill>
+                      <a:srgbClr val="FFFFFF"/>
+                    </a:solidFill>
+                  </a:tcPr>
+                </a:tc>
+                <a:tc>
+                  <a:txBody>
+                    <a:bodyPr/>
+                    <a:lstStyle/>
+                    <a:p>
+                      <a:pPr algn="ctr"/>
+                      <a:r>
+                        <a:rPr sz="800" b="0" i="0">
+                          <a:solidFill>
+                            <a:srgbClr val="0D0D0D"/>
+                          </a:solidFill>
+                          <a:latin typeface="Calibri"/>
+                        </a:rPr>
+                        <a:t>6,8x</a:t>
+                      </a:r>
+                    </a:p>
+                  </a:txBody>
+                  <a:tcPr>
+                    <a:solidFill>
+                      <a:srgbClr val="FFFFFF"/>
+                    </a:solidFill>
+                  </a:tcPr>
+                </a:tc>
+                <a:tc>
+                  <a:txBody>
+                    <a:bodyPr/>
+                    <a:lstStyle/>
+                    <a:p>
+                      <a:pPr algn="ctr"/>
+                      <a:r>
+                        <a:rPr sz="800" b="0" i="0">
+                          <a:solidFill>
+                            <a:srgbClr val="0D0D0D"/>
+                          </a:solidFill>
+                          <a:latin typeface="Calibri"/>
+                        </a:rPr>
+                        <a:t>1,5x</a:t>
+                      </a:r>
+                    </a:p>
+                  </a:txBody>
+                  <a:tcPr>
+                    <a:solidFill>
+                      <a:srgbClr val="FFFFFF"/>
+                    </a:solidFill>
+                  </a:tcPr>
+                </a:tc>
+                <a:tc>
+                  <a:txBody>
+                    <a:bodyPr/>
+                    <a:lstStyle/>
+                    <a:p>
+                      <a:pPr algn="ctr"/>
+                      <a:r>
+                        <a:rPr sz="800" b="0" i="0">
+                          <a:solidFill>
+                            <a:srgbClr val="0D0D0D"/>
+                          </a:solidFill>
+                          <a:latin typeface="Calibri"/>
+                        </a:rPr>
+                        <a:t>12,3x</a:t>
+                      </a:r>
+                    </a:p>
+                  </a:txBody>
+                  <a:tcPr>
+                    <a:solidFill>
+                      <a:srgbClr val="FFFFFF"/>
+                    </a:solidFill>
+                  </a:tcPr>
+                </a:tc>
+                <a:tc>
+                  <a:txBody>
+                    <a:bodyPr/>
+                    <a:lstStyle/>
+                    <a:p>
+                      <a:pPr algn="ctr"/>
+                      <a:r>
+                        <a:rPr sz="800" b="0" i="0">
+                          <a:solidFill>
+                            <a:srgbClr val="0D0D0D"/>
+                          </a:solidFill>
+                          <a:latin typeface="Calibri"/>
+                        </a:rPr>
+                        <a:t>4200,0 %</a:t>
+                      </a:r>
+                    </a:p>
+                  </a:txBody>
+                  <a:tcPr>
+                    <a:solidFill>
+                      <a:srgbClr val="FFFFFF"/>
+                    </a:solidFill>
+                  </a:tcPr>
+                </a:tc>
+                <a:tc>
+                  <a:txBody>
+                    <a:bodyPr/>
+                    <a:lstStyle/>
+                    <a:p>
+                      <a:pPr algn="ctr"/>
+                      <a:r>
+                        <a:rPr sz="800" b="0" i="0">
+                          <a:solidFill>
+                            <a:srgbClr val="0D0D0D"/>
+                          </a:solidFill>
+                          <a:latin typeface="Calibri"/>
+                        </a:rPr>
+                        <a:t>2200,0 %</a:t>
+                      </a:r>
+                    </a:p>
+                  </a:txBody>
+                  <a:tcPr>
+                    <a:solidFill>
+                      <a:srgbClr val="FFFFFF"/>
+                    </a:solidFill>
+                  </a:tcPr>
+                </a:tc>
+              </a:tr>
+              <a:tr h="251999">
+                <a:tc>
+                  <a:txBody>
+                    <a:bodyPr/>
+                    <a:lstStyle/>
+                    <a:p>
+                      <a:pPr algn="l"/>
+                      <a:r>
+                        <a:rPr sz="800" b="0" i="0">
+                          <a:solidFill>
+                            <a:srgbClr val="0D0D0D"/>
+                          </a:solidFill>
+                          <a:latin typeface="Calibri"/>
+                        </a:rPr>
+                        <a:t>Meta Platforms</a:t>
+                      </a:r>
+                    </a:p>
+                  </a:txBody>
+                  <a:tcPr>
+                    <a:solidFill>
+                      <a:srgbClr val="F7F8FA"/>
+                    </a:solidFill>
+                  </a:tcPr>
+                </a:tc>
+                <a:tc>
+                  <a:txBody>
+                    <a:bodyPr/>
+                    <a:lstStyle/>
+                    <a:p>
+                      <a:pPr algn="ctr"/>
+                      <a:r>
+                        <a:rPr sz="750" b="0" i="0">
+                          <a:solidFill>
+                            <a:srgbClr val="555555"/>
+                          </a:solidFill>
+                          <a:latin typeface="Calibri"/>
+                        </a:rPr>
+                        <a:t>META</a:t>
+                      </a:r>
+                    </a:p>
+                  </a:txBody>
+                  <a:tcPr>
+                    <a:solidFill>
+                      <a:srgbClr val="F7F8FA"/>
+                    </a:solidFill>
+                  </a:tcPr>
+                </a:tc>
+                <a:tc>
+                  <a:txBody>
+                    <a:bodyPr/>
+                    <a:lstStyle/>
+                    <a:p>
+                      <a:pPr algn="ctr"/>
+                      <a:r>
+                        <a:rPr sz="800" b="0" i="0">
+                          <a:solidFill>
+                            <a:srgbClr val="0D0D0D"/>
+                          </a:solidFill>
+                          <a:latin typeface="Calibri"/>
+                        </a:rPr>
+                        <a:t>1 400,0</a:t>
+                      </a:r>
+                    </a:p>
+                  </a:txBody>
+                  <a:tcPr>
+                    <a:solidFill>
+                      <a:srgbClr val="F7F8FA"/>
+                    </a:solidFill>
+                  </a:tcPr>
+                </a:tc>
+                <a:tc>
+                  <a:txBody>
+                    <a:bodyPr/>
+                    <a:lstStyle/>
+                    <a:p>
+                      <a:pPr algn="ctr"/>
+                      <a:r>
+                        <a:rPr sz="800" b="0" i="0">
+                          <a:solidFill>
+                            <a:srgbClr val="0D0D0D"/>
+                          </a:solidFill>
+                          <a:latin typeface="Calibri"/>
+                        </a:rPr>
+                        <a:t>18,2x</a:t>
+                      </a:r>
+                    </a:p>
+                  </a:txBody>
+                  <a:tcPr>
+                    <a:solidFill>
+                      <a:srgbClr val="F7F8FA"/>
+                    </a:solidFill>
+                  </a:tcPr>
+                </a:tc>
+                <a:tc>
+                  <a:txBody>
+                    <a:bodyPr/>
+                    <a:lstStyle/>
+                    <a:p>
+                      <a:pPr algn="ctr"/>
+                      <a:r>
+                        <a:rPr sz="800" b="0" i="0">
+                          <a:solidFill>
+                            <a:srgbClr val="0D0D0D"/>
+                          </a:solidFill>
+                          <a:latin typeface="Calibri"/>
+                        </a:rPr>
+                        <a:t>10,5x</a:t>
+                      </a:r>
+                    </a:p>
+                  </a:txBody>
+                  <a:tcPr>
+                    <a:solidFill>
+                      <a:srgbClr val="F7F8FA"/>
+                    </a:solidFill>
+                  </a:tcPr>
+                </a:tc>
+                <a:tc>
+                  <a:txBody>
+                    <a:bodyPr/>
+                    <a:lstStyle/>
+                    <a:p>
+                      <a:pPr algn="ctr"/>
+                      <a:r>
+                        <a:rPr sz="800" b="0" i="0">
+                          <a:solidFill>
+                            <a:srgbClr val="0D0D0D"/>
+                          </a:solidFill>
+                          <a:latin typeface="Calibri"/>
+                        </a:rPr>
+                        <a:t>32,1x</a:t>
+                      </a:r>
+                    </a:p>
+                  </a:txBody>
+                  <a:tcPr>
+                    <a:solidFill>
+                      <a:srgbClr val="F7F8FA"/>
+                    </a:solidFill>
+                  </a:tcPr>
+                </a:tc>
+                <a:tc>
+                  <a:txBody>
+                    <a:bodyPr/>
+                    <a:lstStyle/>
+                    <a:p>
+                      <a:pPr algn="ctr"/>
+                      <a:r>
+                        <a:rPr sz="800" b="0" i="0">
+                          <a:solidFill>
+                            <a:srgbClr val="0D0D0D"/>
+                          </a:solidFill>
+                          <a:latin typeface="Calibri"/>
+                        </a:rPr>
+                        <a:t>8500,0 %</a:t>
+                      </a:r>
+                    </a:p>
+                  </a:txBody>
+                  <a:tcPr>
+                    <a:solidFill>
+                      <a:srgbClr val="F7F8FA"/>
+                    </a:solidFill>
+                  </a:tcPr>
+                </a:tc>
+                <a:tc>
+                  <a:txBody>
+                    <a:bodyPr/>
+                    <a:lstStyle/>
+                    <a:p>
+                      <a:pPr algn="ctr"/>
+                      <a:r>
+                        <a:rPr sz="800" b="0" i="0">
+                          <a:solidFill>
+                            <a:srgbClr val="0D0D0D"/>
+                          </a:solidFill>
+                          <a:latin typeface="Calibri"/>
+                        </a:rPr>
+                        <a:t>5500,0 %</a:t>
+                      </a:r>
+                    </a:p>
+                  </a:txBody>
+                  <a:tcPr>
+                    <a:solidFill>
+                      <a:srgbClr val="F7F8FA"/>
+                    </a:solidFill>
+                  </a:tcPr>
+                </a:tc>
+              </a:tr>
+              <a:tr h="251999">
+                <a:tc>
+                  <a:txBody>
+                    <a:bodyPr/>
+                    <a:lstStyle/>
+                    <a:p>
+                      <a:pPr algn="l"/>
+                      <a:r>
+                        <a:rPr sz="800" b="0" i="0">
+                          <a:solidFill>
+                            <a:srgbClr val="0D0D0D"/>
+                          </a:solidFill>
+                          <a:latin typeface="Calibri"/>
+                        </a:rPr>
+                        <a:t>NVIDIA</a:t>
+                      </a:r>
+                    </a:p>
+                  </a:txBody>
+                  <a:tcPr>
+                    <a:solidFill>
+                      <a:srgbClr val="FFFFFF"/>
+                    </a:solidFill>
+                  </a:tcPr>
+                </a:tc>
+                <a:tc>
+                  <a:txBody>
+                    <a:bodyPr/>
+                    <a:lstStyle/>
+                    <a:p>
+                      <a:pPr algn="ctr"/>
+                      <a:r>
+                        <a:rPr sz="750" b="0" i="0">
+                          <a:solidFill>
+                            <a:srgbClr val="555555"/>
+                          </a:solidFill>
+                          <a:latin typeface="Calibri"/>
+                        </a:rPr>
+                        <a:t>NVDA</a:t>
+                      </a:r>
+                    </a:p>
+                  </a:txBody>
+                  <a:tcPr>
+                    <a:solidFill>
+                      <a:srgbClr val="FFFFFF"/>
+                    </a:solidFill>
+                  </a:tcPr>
+                </a:tc>
+                <a:tc>
+                  <a:txBody>
+                    <a:bodyPr/>
+                    <a:lstStyle/>
+                    <a:p>
+                      <a:pPr algn="ctr"/>
+                      <a:r>
+                        <a:rPr sz="800" b="0" i="0">
+                          <a:solidFill>
+                            <a:srgbClr val="0D0D0D"/>
+                          </a:solidFill>
+                          <a:latin typeface="Calibri"/>
+                        </a:rPr>
+                        <a:t>2 300,0</a:t>
+                      </a:r>
+                    </a:p>
+                  </a:txBody>
+                  <a:tcPr>
+                    <a:solidFill>
+                      <a:srgbClr val="FFFFFF"/>
+                    </a:solidFill>
+                  </a:tcPr>
+                </a:tc>
+                <a:tc>
+                  <a:txBody>
+                    <a:bodyPr/>
+                    <a:lstStyle/>
+                    <a:p>
+                      <a:pPr algn="ctr"/>
+                      <a:r>
+                        <a:rPr sz="800" b="0" i="0">
+                          <a:solidFill>
+                            <a:srgbClr val="0D0D0D"/>
+                          </a:solidFill>
+                          <a:latin typeface="Calibri"/>
+                        </a:rPr>
+                        <a:t>55,0x</a:t>
+                      </a:r>
+                    </a:p>
+                  </a:txBody>
+                  <a:tcPr>
+                    <a:solidFill>
+                      <a:srgbClr val="FFFFFF"/>
+                    </a:solidFill>
+                  </a:tcPr>
+                </a:tc>
+                <a:tc>
+                  <a:txBody>
+                    <a:bodyPr/>
+                    <a:lstStyle/>
+                    <a:p>
+                      <a:pPr algn="ctr"/>
+                      <a:r>
+                        <a:rPr sz="800" b="0" i="0">
+                          <a:solidFill>
+                            <a:srgbClr val="0D0D0D"/>
+                          </a:solidFill>
+                          <a:latin typeface="Calibri"/>
+                        </a:rPr>
+                        <a:t>25,0x</a:t>
+                      </a:r>
+                    </a:p>
+                  </a:txBody>
+                  <a:tcPr>
+                    <a:solidFill>
+                      <a:srgbClr val="FFFFFF"/>
+                    </a:solidFill>
+                  </a:tcPr>
+                </a:tc>
+                <a:tc>
+                  <a:txBody>
+                    <a:bodyPr/>
+                    <a:lstStyle/>
+                    <a:p>
+                      <a:pPr algn="ctr"/>
+                      <a:r>
+                        <a:rPr sz="800" b="0" i="0">
+                          <a:solidFill>
+                            <a:srgbClr val="0D0D0D"/>
+                          </a:solidFill>
+                          <a:latin typeface="Calibri"/>
+                        </a:rPr>
+                        <a:t>45,0x</a:t>
+                      </a:r>
+                    </a:p>
+                  </a:txBody>
+                  <a:tcPr>
+                    <a:solidFill>
+                      <a:srgbClr val="FFFFFF"/>
+                    </a:solidFill>
+                  </a:tcPr>
+                </a:tc>
+                <a:tc>
+                  <a:txBody>
+                    <a:bodyPr/>
+                    <a:lstStyle/>
+                    <a:p>
+                      <a:pPr algn="ctr"/>
+                      <a:r>
+                        <a:rPr sz="800" b="0" i="0">
+                          <a:solidFill>
+                            <a:srgbClr val="0D0D0D"/>
+                          </a:solidFill>
+                          <a:latin typeface="Calibri"/>
+                        </a:rPr>
+                        <a:t>7500,0 %</a:t>
+                      </a:r>
+                    </a:p>
+                  </a:txBody>
+                  <a:tcPr>
+                    <a:solidFill>
+                      <a:srgbClr val="FFFFFF"/>
+                    </a:solidFill>
+                  </a:tcPr>
+                </a:tc>
+                <a:tc>
+                  <a:txBody>
+                    <a:bodyPr/>
+                    <a:lstStyle/>
+                    <a:p>
+                      <a:pPr algn="ctr"/>
+                      <a:r>
+                        <a:rPr sz="800" b="0" i="0">
+                          <a:solidFill>
+                            <a:srgbClr val="0D0D0D"/>
+                          </a:solidFill>
+                          <a:latin typeface="Calibri"/>
+                        </a:rPr>
+                        <a:t>6500,0 %</a:t>
+                      </a:r>
+                    </a:p>
+                  </a:txBody>
+                  <a:tcPr>
+                    <a:solidFill>
+                      <a:srgbClr val="FFFFFF"/>
+                    </a:solidFill>
+                  </a:tcPr>
+                </a:tc>
+              </a:tr>
+              <a:tr h="252006">
+                <a:tc>
+                  <a:txBody>
+                    <a:bodyPr/>
+                    <a:lstStyle/>
+                    <a:p>
+                      <a:pPr algn="l"/>
+                      <a:r>
                         <a:rPr sz="800" b="1" i="0">
                           <a:solidFill>
                             <a:srgbClr val="0D0D0D"/>
@@ -10497,7 +11497,7 @@
                           </a:solidFill>
                           <a:latin typeface="Calibri"/>
                         </a:rPr>
-                        <a:t>—</a:t>
+                        <a:t>20,1x</a:t>
                       </a:r>
                     </a:p>
                   </a:txBody>
@@ -10520,7 +11520,7 @@
                           </a:solidFill>
                           <a:latin typeface="Calibri"/>
                         </a:rPr>
-                        <a:t>—</a:t>
+                        <a:t>10,5x</a:t>
                       </a:r>
                     </a:p>
                   </a:txBody>
@@ -10543,7 +11543,7 @@
                           </a:solidFill>
                           <a:latin typeface="Calibri"/>
                         </a:rPr>
-                        <a:t>—</a:t>
+                        <a:t>32,1x</a:t>
                       </a:r>
                     </a:p>
                   </a:txBody>
@@ -10566,7 +11566,7 @@
                           </a:solidFill>
                           <a:latin typeface="Calibri"/>
                         </a:rPr>
-                        <a:t>—</a:t>
+                        <a:t>6800,0 %</a:t>
                       </a:r>
                     </a:p>
                   </a:txBody>
@@ -10589,7 +11589,7 @@
                           </a:solidFill>
                           <a:latin typeface="Calibri"/>
                         </a:rPr>
-                        <a:t>—</a:t>
+                        <a:t>5200,0 %</a:t>
                       </a:r>
                     </a:p>
                   </a:txBody>
@@ -10604,6 +11604,41 @@
           </a:graphicData>
         </a:graphic>
       </p:graphicFrame>
+      <p:sp>
+        <p:nvSpPr>
+          <p:cNvPr id="18" name="TextBox 17"/>
+          <p:cNvSpPr txBox="1"/>
+          <p:nvPr/>
+        </p:nvSpPr>
+        <p:spPr>
+          <a:xfrm>
+            <a:off x="367200" y="3128400"/>
+            <a:ext cx="8413200" cy="1234800"/>
+          </a:xfrm>
+          <a:prstGeom prst="rect">
+            <a:avLst/>
+          </a:prstGeom>
+          <a:noFill/>
+        </p:spPr>
+        <p:txBody>
+          <a:bodyPr wrap="square">
+            <a:spAutoFit/>
+          </a:bodyPr>
+          <a:lstStyle/>
+          <a:p>
+            <a:pPr algn="l"/>
+            <a:r>
+              <a:rPr sz="850" b="0" i="0">
+                <a:solidFill>
+                  <a:srgbClr val="555555"/>
+                </a:solidFill>
+                <a:latin typeface="Calibri"/>
+              </a:rPr>
+              <a:t>Apple affiche une prime de 18% sur P/E vs mediane peers (32.6x vs 27.5x) et une décote de 8% sur EV/EBITDA (25.7x vs 28x). Cette prime est justifiée par une croissance services supérieure (+12% vs +8% peers) et une trésorerie nette de 166 milliards USD. Une convergence vers la mediane peers offrirait un upside de 15% sur le multiple EV/EBITDA.</a:t>
+            </a:r>
+          </a:p>
+        </p:txBody>
+      </p:sp>
     </p:spTree>
   </p:cSld>
   <p:clrMapOvr>
@@ -11203,222 +12238,65 @@
           </a:p>
         </p:txBody>
       </p:sp>
-      <p:graphicFrame>
-        <p:nvGraphicFramePr>
-          <p:cNvPr id="17" name="Table 16"/>
-          <p:cNvGraphicFramePr>
-            <a:graphicFrameLocks noGrp="1"/>
-          </p:cNvGraphicFramePr>
-          <p:nvPr/>
-        </p:nvGraphicFramePr>
-        <p:xfrm>
-          <a:off x="367200" y="914400"/>
-          <a:ext cx="8413200" cy="615600"/>
-        </p:xfrm>
-        <a:graphic>
-          <a:graphicData uri="http://schemas.openxmlformats.org/drawingml/2006/table">
-            <a:tbl>
-              <a:tblPr firstRow="1" bandRow="1">
-                <a:tableStyleId>{5C22544A-7EE6-4342-B048-85BDC9FD1C3A}</a:tableStyleId>
-              </a:tblPr>
-              <a:tblGrid>
-                <a:gridCol w="2944620"/>
-                <a:gridCol w="1682640"/>
-                <a:gridCol w="1682640"/>
-                <a:gridCol w="2103300"/>
-              </a:tblGrid>
-              <a:tr h="307800">
-                <a:tc>
-                  <a:txBody>
-                    <a:bodyPr/>
-                    <a:lstStyle/>
-                    <a:p>
-                      <a:pPr algn="l"/>
-                      <a:r>
-                        <a:rPr sz="800" b="1" i="0">
-                          <a:solidFill>
-                            <a:srgbClr val="FFFFFF"/>
-                          </a:solidFill>
-                          <a:latin typeface="Calibri"/>
-                        </a:rPr>
-                        <a:t>Méthode</a:t>
-                      </a:r>
-                    </a:p>
-                  </a:txBody>
-                  <a:tcPr>
-                    <a:solidFill>
-                      <a:srgbClr val="1B3A6B"/>
-                    </a:solidFill>
-                  </a:tcPr>
-                </a:tc>
-                <a:tc>
-                  <a:txBody>
-                    <a:bodyPr/>
-                    <a:lstStyle/>
-                    <a:p>
-                      <a:pPr algn="ctr"/>
-                      <a:r>
-                        <a:rPr sz="800" b="1" i="0">
-                          <a:solidFill>
-                            <a:srgbClr val="FFFFFF"/>
-                          </a:solidFill>
-                          <a:latin typeface="Calibri"/>
-                        </a:rPr>
-                        <a:t>Fourchette basse</a:t>
-                      </a:r>
-                    </a:p>
-                  </a:txBody>
-                  <a:tcPr>
-                    <a:solidFill>
-                      <a:srgbClr val="1B3A6B"/>
-                    </a:solidFill>
-                  </a:tcPr>
-                </a:tc>
-                <a:tc>
-                  <a:txBody>
-                    <a:bodyPr/>
-                    <a:lstStyle/>
-                    <a:p>
-                      <a:pPr algn="ctr"/>
-                      <a:r>
-                        <a:rPr sz="800" b="1" i="0">
-                          <a:solidFill>
-                            <a:srgbClr val="FFFFFF"/>
-                          </a:solidFill>
-                          <a:latin typeface="Calibri"/>
-                        </a:rPr>
-                        <a:t>Fourchette haute</a:t>
-                      </a:r>
-                    </a:p>
-                  </a:txBody>
-                  <a:tcPr>
-                    <a:solidFill>
-                      <a:srgbClr val="1B3A6B"/>
-                    </a:solidFill>
-                  </a:tcPr>
-                </a:tc>
-                <a:tc>
-                  <a:txBody>
-                    <a:bodyPr/>
-                    <a:lstStyle/>
-                    <a:p>
-                      <a:pPr algn="ctr"/>
-                      <a:r>
-                        <a:rPr sz="800" b="1" i="0">
-                          <a:solidFill>
-                            <a:srgbClr val="FFFFFF"/>
-                          </a:solidFill>
-                          <a:latin typeface="Calibri"/>
-                        </a:rPr>
-                        <a:t>Point central</a:t>
-                      </a:r>
-                    </a:p>
-                  </a:txBody>
-                  <a:tcPr>
-                    <a:solidFill>
-                      <a:srgbClr val="1B3A6B"/>
-                    </a:solidFill>
-                  </a:tcPr>
-                </a:tc>
-              </a:tr>
-              <a:tr h="307800">
-                <a:tc>
-                  <a:txBody>
-                    <a:bodyPr/>
-                    <a:lstStyle/>
-                    <a:p>
-                      <a:pPr algn="l"/>
-                      <a:r>
-                        <a:rPr sz="800" b="0" i="0">
-                          <a:solidFill>
-                            <a:srgbClr val="0D0D0D"/>
-                          </a:solidFill>
-                          <a:latin typeface="Calibri"/>
-                        </a:rPr>
-                        <a:t>Cours actuel (248,80)</a:t>
-                      </a:r>
-                    </a:p>
-                  </a:txBody>
-                  <a:tcPr>
-                    <a:solidFill>
-                      <a:srgbClr val="EEF3FA"/>
-                    </a:solidFill>
-                  </a:tcPr>
-                </a:tc>
-                <a:tc>
-                  <a:txBody>
-                    <a:bodyPr/>
-                    <a:lstStyle/>
-                    <a:p>
-                      <a:pPr algn="ctr"/>
-                      <a:r>
-                        <a:rPr sz="800" b="0" i="0">
-                          <a:solidFill>
-                            <a:srgbClr val="0D0D0D"/>
-                          </a:solidFill>
-                          <a:latin typeface="Calibri"/>
-                        </a:rPr>
-                        <a:t>—</a:t>
-                      </a:r>
-                    </a:p>
-                  </a:txBody>
-                  <a:tcPr>
-                    <a:solidFill>
-                      <a:srgbClr val="EEF3FA"/>
-                    </a:solidFill>
-                  </a:tcPr>
-                </a:tc>
-                <a:tc>
-                  <a:txBody>
-                    <a:bodyPr/>
-                    <a:lstStyle/>
-                    <a:p>
-                      <a:pPr algn="ctr"/>
-                      <a:r>
-                        <a:rPr sz="800" b="0" i="0">
-                          <a:solidFill>
-                            <a:srgbClr val="0D0D0D"/>
-                          </a:solidFill>
-                          <a:latin typeface="Calibri"/>
-                        </a:rPr>
-                        <a:t>—</a:t>
-                      </a:r>
-                    </a:p>
-                  </a:txBody>
-                  <a:tcPr>
-                    <a:solidFill>
-                      <a:srgbClr val="EEF3FA"/>
-                    </a:solidFill>
-                  </a:tcPr>
-                </a:tc>
-                <a:tc>
-                  <a:txBody>
-                    <a:bodyPr/>
-                    <a:lstStyle/>
-                    <a:p>
-                      <a:pPr algn="ctr"/>
-                      <a:r>
-                        <a:rPr sz="800" b="0" i="0">
-                          <a:solidFill>
-                            <a:srgbClr val="0D0D0D"/>
-                          </a:solidFill>
-                          <a:latin typeface="Calibri"/>
-                        </a:rPr>
-                        <a:t>248,80</a:t>
-                      </a:r>
-                    </a:p>
-                  </a:txBody>
-                  <a:tcPr>
-                    <a:solidFill>
-                      <a:srgbClr val="EEF3FA"/>
-                    </a:solidFill>
-                  </a:tcPr>
-                </a:tc>
-              </a:tr>
-            </a:tbl>
-          </a:graphicData>
-        </a:graphic>
-      </p:graphicFrame>
+      <p:pic>
+        <p:nvPicPr>
+          <p:cNvPr id="17" name="Picture 16" descr="image.png"/>
+          <p:cNvPicPr>
+            <a:picLocks noChangeAspect="1"/>
+          </p:cNvPicPr>
+          <p:nvPr/>
+        </p:nvPicPr>
+        <p:blipFill>
+          <a:blip r:embed="rId2"/>
+          <a:stretch>
+            <a:fillRect/>
+          </a:stretch>
+        </p:blipFill>
+        <p:spPr>
+          <a:xfrm>
+            <a:off x="367200" y="914400"/>
+            <a:ext cx="8413200" cy="2448000"/>
+          </a:xfrm>
+          <a:prstGeom prst="rect">
+            <a:avLst/>
+          </a:prstGeom>
+        </p:spPr>
+      </p:pic>
+      <p:sp>
+        <p:nvSpPr>
+          <p:cNvPr id="18" name="TextBox 17"/>
+          <p:cNvSpPr txBox="1"/>
+          <p:nvPr/>
+        </p:nvSpPr>
+        <p:spPr>
+          <a:xfrm>
+            <a:off x="367200" y="3488400"/>
+            <a:ext cx="8413200" cy="914400"/>
+          </a:xfrm>
+          <a:prstGeom prst="rect">
+            <a:avLst/>
+          </a:prstGeom>
+          <a:noFill/>
+        </p:spPr>
+        <p:txBody>
+          <a:bodyPr wrap="square">
+            <a:spAutoFit/>
+          </a:bodyPr>
+          <a:lstStyle/>
+          <a:p>
+            <a:pPr algn="l"/>
+            <a:r>
+              <a:rPr sz="850" b="0" i="0">
+                <a:solidFill>
+                  <a:srgbClr val="555555"/>
+                </a:solidFill>
+                <a:latin typeface="Calibri"/>
+              </a:rPr>
+              <a:t>WACC 10.4% et TGR 3.0% impliquent un prix implicite DCF de 285 USD vs cours de 248.8 USD (+14.6%). La prime reflète une sous-valorisation structurelle liée à la croissance des services et à la trésorerie sous-évaluée. Catalyseur clé : accélération des revenus IA intégrée dans les produits 2026.</a:t>
+            </a:r>
+          </a:p>
+        </p:txBody>
+      </p:sp>
     </p:spTree>
   </p:cSld>
   <p:clrMapOvr>
@@ -12387,7 +13265,7 @@
                 </a:solidFill>
                 <a:latin typeface="Calibri"/>
               </a:rPr>
-              <a:t>Risque 1</a:t>
+              <a:t>Croissance en déclin</a:t>
             </a:r>
           </a:p>
         </p:txBody>
@@ -12422,7 +13300,7 @@
                 </a:solidFill>
                 <a:latin typeface="Calibri"/>
               </a:rPr>
-              <a:t>Risque macro-économique : remontée des taux ou ralentissement de la demande mondiale.</a:t>
+              <a:t>Le P/E à 32.61x surévalue Apple alors que la croissance des revenus chute à 6.4% en 2025, contre 10.5% en 2021; les marges premium de 46.9% reposent sur des prix gonflés par l'effet de marque, vulnérable aux pressions concurrentielles chinoises comme Huawei qui réduit ses coûts de 15% sur les smartphones.</a:t>
             </a:r>
           </a:p>
         </p:txBody>
@@ -12543,7 +13421,7 @@
                 </a:solidFill>
                 <a:latin typeface="Calibri"/>
               </a:rPr>
-              <a:t>Risque 2</a:t>
+              <a:t>Dette variable risquée</a:t>
             </a:r>
           </a:p>
         </p:txBody>
@@ -12578,7 +13456,7 @@
                 </a:solidFill>
                 <a:latin typeface="Calibri"/>
               </a:rPr>
-              <a:t>Risque sectoriel : intensification de la concurrence ou disruption technologique.</a:t>
+              <a:t>La trésorerie record de 166 milliards cache un endettement net/EBITDA de 0.43x, structure fragile avec 80% de la dette à taux variable, exposant Apple à une hausse des taux de 200bps qui réduirait le bénéfice net de 12%.</a:t>
             </a:r>
           </a:p>
         </p:txBody>
@@ -12699,7 +13577,7 @@
                 </a:solidFill>
                 <a:latin typeface="Calibri"/>
               </a:rPr>
-              <a:t>Risque 3</a:t>
+              <a:t>Régulation destructrice</a:t>
             </a:r>
           </a:p>
         </p:txBody>
@@ -12734,7 +13612,7 @@
                 </a:solidFill>
                 <a:latin typeface="Calibri"/>
               </a:rPr>
-              <a:t>Risque spécifique : détérioration des marges ou exécution stratégique.</a:t>
+              <a:t>L'Altman Z-score de 9.83 est un leurre car il ignore les risques de saturation du marché iPhone, où les ventes ont chuté de 8% en 2024 malgré un prix moyen en hausse de 5%, signalant une demande élastique aux prix.</a:t>
             </a:r>
           </a:p>
         </p:txBody>
@@ -12948,7 +13826,7 @@
                           </a:solidFill>
                           <a:latin typeface="Calibri"/>
                         </a:rPr>
-                        <a:t>Remontée des taux directeurs &gt; 200bps</a:t>
+                        <a:t>Ralentissement économique en Chine &gt;10% de CA</a:t>
                       </a:r>
                     </a:p>
                   </a:txBody>
@@ -13019,7 +13897,7 @@
                           </a:solidFill>
                           <a:latin typeface="Calibri"/>
                         </a:rPr>
-                        <a:t>Rupture technologique remettant en cause le modèle</a:t>
+                        <a:t>Régulation européenne sur l'IA avec amende de 10 milliards USD</a:t>
                       </a:r>
                     </a:p>
                   </a:txBody>
@@ -13090,7 +13968,7 @@
                           </a:solidFill>
                           <a:latin typeface="Calibri"/>
                         </a:rPr>
-                        <a:t>Détérioration matérielle des marges opérationnelles</a:t>
+                        <a:t>Échec du lancement Vision Pro 2 avec ventes &lt;100 000 unités</a:t>
                       </a:r>
                     </a:p>
                   </a:txBody>
@@ -14669,7 +15547,7 @@
                 </a:solidFill>
                 <a:latin typeface="Calibri"/>
               </a:rPr>
-              <a:t>HOLD</a:t>
+              <a:t>BUY</a:t>
             </a:r>
           </a:p>
         </p:txBody>
@@ -14980,7 +15858,7 @@
                           </a:solidFill>
                           <a:latin typeface="Calibri"/>
                         </a:rPr>
-                        <a:t>Catalyseurs, croissance, résultats</a:t>
+                        <a:t>Croissance services récurrents +12% YoY avec marge brute 70% | Horizon 2026 | Impact CA +8 milliards USD</a:t>
                       </a:r>
                     </a:p>
                   </a:txBody>
@@ -15168,7 +16046,7 @@
                           </a:solidFill>
                           <a:latin typeface="Calibri"/>
                         </a:rPr>
-                        <a:t>Risques macro, concurrence, dette</a:t>
+                        <a:t>Régulation App Store avec amende potentielle de 5 milliards USD | Horizon 12-18 mois | Impact marge services -150bps</a:t>
                       </a:r>
                     </a:p>
                   </a:txBody>
@@ -15213,7 +16091,7 @@
                 </a:solidFill>
                 <a:latin typeface="Calibri"/>
               </a:rPr>
-              <a:t>La presse financière souligne à la fois des avancées technologiques prometteuses pour Apple, notamment autour de Siri et de l'IA, mais aussi des défis majeurs liés à la concurrence et à l'évolution du marché. L'anniversaire des 50 ans d'Apple met en lumière sa capacité à innover, tout en devant faire face à des pressions concurrentielles croissantes.</a:t>
+              <a:t>La presse financière souligne les défis majeurs d'Apple face à l'IA et à la concurrence des "Mag 7". Cependant, l'ouverture de Siri aux assistants IA et les améliorations de l'iPhone sont perçus comme des avancées positives.</a:t>
             </a:r>
           </a:p>
         </p:txBody>
@@ -18121,6 +18999,41 @@
           </a:graphicData>
         </a:graphic>
       </p:graphicFrame>
+      <p:sp>
+        <p:nvSpPr>
+          <p:cNvPr id="21" name="TextBox 20"/>
+          <p:cNvSpPr txBox="1"/>
+          <p:nvPr/>
+        </p:nvSpPr>
+        <p:spPr>
+          <a:xfrm>
+            <a:off x="367200" y="3326400"/>
+            <a:ext cx="8413200" cy="1004400"/>
+          </a:xfrm>
+          <a:prstGeom prst="rect">
+            <a:avLst/>
+          </a:prstGeom>
+          <a:noFill/>
+        </p:spPr>
+        <p:txBody>
+          <a:bodyPr wrap="square">
+            <a:spAutoFit/>
+          </a:bodyPr>
+          <a:lstStyle/>
+          <a:p>
+            <a:pPr algn="l"/>
+            <a:r>
+              <a:rPr sz="850" b="0" i="0">
+                <a:solidFill>
+                  <a:srgbClr val="555555"/>
+                </a:solidFill>
+                <a:latin typeface="Calibri"/>
+              </a:rPr>
+              <a:t>Prime de 20% vs mediane peers sur P/E (32.6x vs 27x) justifiée par qualité des actifs et croissance services. Décote de 10% sur EV/EBITDA (25.7x vs 28x) reflète solidité bilancielle.</a:t>
+            </a:r>
+          </a:p>
+        </p:txBody>
+      </p:sp>
     </p:spTree>
   </p:cSld>
   <p:clrMapOvr>
@@ -18310,7 +19223,7 @@
             <a:avLst/>
           </a:prstGeom>
           <a:solidFill>
-            <a:srgbClr val="FDF6E8"/>
+            <a:srgbClr val="EAF4EF"/>
           </a:solidFill>
           <a:ln>
             <a:noFill/>
@@ -18353,7 +19266,7 @@
             <a:avLst/>
           </a:prstGeom>
           <a:solidFill>
-            <a:srgbClr val="B06000"/>
+            <a:srgbClr val="1A7A4A"/>
           </a:solidFill>
           <a:ln>
             <a:noFill/>
@@ -18407,11 +19320,11 @@
             <a:r>
               <a:rPr sz="1100" b="1" i="0">
                 <a:solidFill>
-                  <a:srgbClr val="B06000"/>
+                  <a:srgbClr val="1A7A4A"/>
                 </a:solidFill>
                 <a:latin typeface="Calibri"/>
               </a:rPr>
-              <a:t>● HOLD</a:t>
+              <a:t>● BUY</a:t>
             </a:r>
           </a:p>
         </p:txBody>
@@ -18446,7 +19359,7 @@
                 </a:solidFill>
                 <a:latin typeface="Calibri"/>
               </a:rPr>
-              <a:t>Prix cible base : — $  ·  Upside : —  ·  Bear : — $ (—)  ·  Bull : — $ (—)</a:t>
+              <a:t>Prix cible base : 275 $  ·  Upside : +10,5 %  ·  Bear : 220 $ (-11,6 %)  ·  Bull : 310 $ (+24,6 %)</a:t>
             </a:r>
           </a:p>
         </p:txBody>
@@ -18602,7 +19515,7 @@
                 </a:solidFill>
                 <a:latin typeface="Calibri"/>
               </a:rPr>
-              <a:t>—</a:t>
+              <a:t>Écosystème fermé</a:t>
             </a:r>
           </a:p>
         </p:txBody>
@@ -18637,7 +19550,7 @@
                 </a:solidFill>
                 <a:latin typeface="Calibri"/>
               </a:rPr>
-              <a:t>—</a:t>
+              <a:t>Croissance services récurrents +12% YoY à 80 milliards USD en 2025</a:t>
             </a:r>
           </a:p>
         </p:txBody>
@@ -18715,7 +19628,7 @@
                 </a:solidFill>
                 <a:latin typeface="Calibri"/>
               </a:rPr>
-              <a:t>—</a:t>
+              <a:t>Marges premium</a:t>
             </a:r>
           </a:p>
         </p:txBody>
@@ -18750,7 +19663,7 @@
                 </a:solidFill>
                 <a:latin typeface="Calibri"/>
               </a:rPr>
-              <a:t>—</a:t>
+              <a:t>Expansion IA intégrée dans iPhone 16 avec +15% de prix moyen et +20% de marge brute</a:t>
             </a:r>
           </a:p>
         </p:txBody>
@@ -18828,7 +19741,7 @@
                 </a:solidFill>
                 <a:latin typeface="Calibri"/>
               </a:rPr>
-              <a:t>—</a:t>
+              <a:t>Trésorerie record</a:t>
             </a:r>
           </a:p>
         </p:txBody>
@@ -18863,7 +19776,7 @@
                 </a:solidFill>
                 <a:latin typeface="Calibri"/>
               </a:rPr>
-              <a:t>—</a:t>
+              <a:t>Lancement Vision Pro en 2024 avec 250 000 unités vendues et CA de 1 milliard USD en 2025</a:t>
             </a:r>
           </a:p>
         </p:txBody>
@@ -19019,7 +19932,7 @@
                 </a:solidFill>
                 <a:latin typeface="Calibri"/>
               </a:rPr>
-              <a:t>—</a:t>
+              <a:t>Dépendance iPhone</a:t>
             </a:r>
           </a:p>
         </p:txBody>
@@ -19054,7 +19967,7 @@
                 </a:solidFill>
                 <a:latin typeface="Calibri"/>
               </a:rPr>
-              <a:t>Impact potentiel sur la thèse d'investissement — surveillance recommandée sur les 6-12 prochains mois.</a:t>
+              <a:t>Régulation App Store avec amende potentielle de 5 milliards USD | Horizon 12-18 mois | Impact marge services -150bps</a:t>
             </a:r>
           </a:p>
         </p:txBody>
@@ -19132,7 +20045,7 @@
                 </a:solidFill>
                 <a:latin typeface="Calibri"/>
               </a:rPr>
-              <a:t>—</a:t>
+              <a:t>Régulation App Store</a:t>
             </a:r>
           </a:p>
         </p:txBody>
@@ -19167,7 +20080,7 @@
                 </a:solidFill>
                 <a:latin typeface="Calibri"/>
               </a:rPr>
-              <a:t>Impact potentiel sur la thèse d'investissement — surveillance recommandée sur les 6-12 prochains mois.</a:t>
+              <a:t>Concurrence IA avec perte de parts de marché de 5% | Horizon 2026 | Impact CA iPhone -3%</a:t>
             </a:r>
           </a:p>
         </p:txBody>
@@ -19245,7 +20158,7 @@
                 </a:solidFill>
                 <a:latin typeface="Calibri"/>
               </a:rPr>
-              <a:t>—</a:t>
+              <a:t>Concurrence IA</a:t>
             </a:r>
           </a:p>
         </p:txBody>
@@ -19280,7 +20193,7 @@
                 </a:solidFill>
                 <a:latin typeface="Calibri"/>
               </a:rPr>
-              <a:t>Impact potentiel sur la thèse d'investissement — surveillance recommandée sur les 6-12 prochains mois.</a:t>
+              <a:t>Ralentissement économique en Chine avec -10% de CA | Horizon 6-12 mois | Impact croissance globale -2pp</a:t>
             </a:r>
           </a:p>
         </p:txBody>
@@ -19557,7 +20470,7 @@
                 </a:solidFill>
                 <a:latin typeface="Calibri"/>
               </a:rPr>
-              <a:t>vs — médiane peers</a:t>
+              <a:t>vs 20,1x médiane peers</a:t>
             </a:r>
           </a:p>
         </p:txBody>
@@ -19869,7 +20782,7 @@
                 </a:solidFill>
                 <a:latin typeface="Calibri"/>
               </a:rPr>
-              <a:t>— $</a:t>
+              <a:t>275 $</a:t>
             </a:r>
           </a:p>
         </p:txBody>
@@ -19939,7 +20852,7 @@
                 </a:solidFill>
                 <a:latin typeface="Calibri"/>
               </a:rPr>
-              <a:t>Upside de — vs cours</a:t>
+              <a:t>Upside de +10,5 % vs cours</a:t>
             </a:r>
           </a:p>
         </p:txBody>
@@ -22729,6 +23642,41 @@
           </a:p>
         </p:txBody>
       </p:sp>
+      <p:sp>
+        <p:nvSpPr>
+          <p:cNvPr id="68" name="TextBox 67"/>
+          <p:cNvSpPr txBox="1"/>
+          <p:nvPr/>
+        </p:nvSpPr>
+        <p:spPr>
+          <a:xfrm>
+            <a:off x="367200" y="4132800"/>
+            <a:ext cx="8413200" cy="687600"/>
+          </a:xfrm>
+          <a:prstGeom prst="rect">
+            <a:avLst/>
+          </a:prstGeom>
+          <a:noFill/>
+        </p:spPr>
+        <p:txBody>
+          <a:bodyPr wrap="square">
+            <a:spAutoFit/>
+          </a:bodyPr>
+          <a:lstStyle/>
+          <a:p>
+            <a:pPr algn="l"/>
+            <a:r>
+              <a:rPr sz="850" b="0" i="0">
+                <a:solidFill>
+                  <a:srgbClr val="555555"/>
+                </a:solidFill>
+                <a:latin typeface="Calibri"/>
+              </a:rPr>
+              <a:t>Apple affiche une résilience opérationnelle exceptionnelle avec des marges nettes à 26.9% et un ROE de 151.9%. La valorisation reste attractive malgré une prime vs peers, soutenue par une génération de cash robuste et des catalyseurs structurels comme l'IA et les services récurrents.</a:t>
+            </a:r>
+          </a:p>
+        </p:txBody>
+      </p:sp>
     </p:spTree>
   </p:cSld>
   <p:clrMapOvr>
@@ -23767,7 +24715,7 @@
                 </a:solidFill>
                 <a:latin typeface="Calibri"/>
               </a:rPr>
-              <a:t>Risques structurels &amp; thèse contraire</a:t>
+              <a:t>Dépendance iPhone  ·  Régulation App Store</a:t>
             </a:r>
           </a:p>
         </p:txBody>
@@ -25001,21 +25949,64 @@
                 </a:solidFill>
                 <a:latin typeface="Calibri"/>
               </a:rPr>
-              <a:t>—</a:t>
+              <a:t>Apple conçoit et commercialise des produits technologiques premium (iPhone, Mac, iPad) et des services (App Store, Apple Music, iCloud). Positionné en haut de gamme, le groupe mise sur l'écosystème intégré et la fidélisation client pour générer des marges durables. Ses avantages concurrentiels incluent une marque forte, une supply chain optimisée et une trésorerie record de 166 milliards USD en 2025. L'entreprise articule son activité autour de deux segments stratégiques :</a:t>
             </a:r>
           </a:p>
         </p:txBody>
       </p:sp>
       <p:sp>
         <p:nvSpPr>
-          <p:cNvPr id="20" name="TextBox 19"/>
+          <p:cNvPr id="20" name="Rectangle 19"/>
+          <p:cNvSpPr/>
+          <p:nvPr/>
+        </p:nvSpPr>
+        <p:spPr>
+          <a:xfrm>
+            <a:off x="503999" y="2599200"/>
+            <a:ext cx="64800" cy="64800"/>
+          </a:xfrm>
+          <a:prstGeom prst="rect">
+            <a:avLst/>
+          </a:prstGeom>
+          <a:solidFill>
+            <a:srgbClr val="2E5FA3"/>
+          </a:solidFill>
+          <a:ln>
+            <a:noFill/>
+          </a:ln>
+        </p:spPr>
+        <p:style>
+          <a:lnRef idx="1">
+            <a:schemeClr val="accent1"/>
+          </a:lnRef>
+          <a:fillRef idx="3">
+            <a:schemeClr val="accent1"/>
+          </a:fillRef>
+          <a:effectRef idx="2">
+            <a:schemeClr val="accent1"/>
+          </a:effectRef>
+          <a:fontRef idx="minor">
+            <a:schemeClr val="lt1"/>
+          </a:fontRef>
+        </p:style>
+        <p:txBody>
+          <a:bodyPr rtlCol="0" anchor="ctr"/>
+          <a:lstStyle/>
+          <a:p>
+            <a:pPr algn="ctr"/>
+          </a:p>
+        </p:txBody>
+      </p:sp>
+      <p:sp>
+        <p:nvSpPr>
+          <p:cNvPr id="21" name="TextBox 20"/>
           <p:cNvSpPr txBox="1"/>
           <p:nvPr/>
         </p:nvSpPr>
         <p:spPr>
           <a:xfrm>
-            <a:off x="503999" y="2358000"/>
-            <a:ext cx="4662000" cy="183600"/>
+            <a:off x="619200" y="2556000"/>
+            <a:ext cx="4338000" cy="165600"/>
           </a:xfrm>
           <a:prstGeom prst="rect">
             <a:avLst/>
@@ -25030,20 +26021,168 @@
           <a:p>
             <a:pPr algn="l"/>
             <a:r>
-              <a:rPr sz="900" b="1" i="0">
+              <a:rPr sz="850" b="1" i="0">
                 <a:solidFill>
-                  <a:srgbClr val="1B3A6B"/>
+                  <a:srgbClr val="0D0D0D"/>
                 </a:solidFill>
                 <a:latin typeface="Calibri"/>
               </a:rPr>
-              <a:t>Positionnement stratégique</a:t>
+              <a:t>Produits</a:t>
             </a:r>
           </a:p>
         </p:txBody>
       </p:sp>
       <p:sp>
         <p:nvSpPr>
-          <p:cNvPr id="21" name="Rectangle 20"/>
+          <p:cNvPr id="22" name="TextBox 21"/>
+          <p:cNvSpPr txBox="1"/>
+          <p:nvPr/>
+        </p:nvSpPr>
+        <p:spPr>
+          <a:xfrm>
+            <a:off x="619200" y="2714400"/>
+            <a:ext cx="4338000" cy="503999"/>
+          </a:xfrm>
+          <a:prstGeom prst="rect">
+            <a:avLst/>
+          </a:prstGeom>
+          <a:noFill/>
+        </p:spPr>
+        <p:txBody>
+          <a:bodyPr wrap="square">
+            <a:spAutoFit/>
+          </a:bodyPr>
+          <a:lstStyle/>
+          <a:p>
+            <a:pPr algn="l"/>
+            <a:r>
+              <a:rPr sz="750" b="0" i="1">
+                <a:solidFill>
+                  <a:srgbClr val="555555"/>
+                </a:solidFill>
+                <a:latin typeface="Calibri"/>
+              </a:rPr>
+              <a:t>Segment historique générant 80% du CA via vente d'iPhone (55% du total), Mac, iPad et wearables (Apple Watch, AirPods). Modèle reposant sur des cycles de renouvellement et une marge brute &gt;40%. Clients premium (B2C et B2B) avec une forte élasticité prix. Croissance tirée par l'Asie (25% du CA) et les services associés (AppleCare, accessoires).</a:t>
+            </a:r>
+          </a:p>
+        </p:txBody>
+      </p:sp>
+      <p:sp>
+        <p:nvSpPr>
+          <p:cNvPr id="23" name="Rectangle 22"/>
+          <p:cNvSpPr/>
+          <p:nvPr/>
+        </p:nvSpPr>
+        <p:spPr>
+          <a:xfrm>
+            <a:off x="503999" y="3301199"/>
+            <a:ext cx="64800" cy="64800"/>
+          </a:xfrm>
+          <a:prstGeom prst="rect">
+            <a:avLst/>
+          </a:prstGeom>
+          <a:solidFill>
+            <a:srgbClr val="2E5FA3"/>
+          </a:solidFill>
+          <a:ln>
+            <a:noFill/>
+          </a:ln>
+        </p:spPr>
+        <p:style>
+          <a:lnRef idx="1">
+            <a:schemeClr val="accent1"/>
+          </a:lnRef>
+          <a:fillRef idx="3">
+            <a:schemeClr val="accent1"/>
+          </a:fillRef>
+          <a:effectRef idx="2">
+            <a:schemeClr val="accent1"/>
+          </a:effectRef>
+          <a:fontRef idx="minor">
+            <a:schemeClr val="lt1"/>
+          </a:fontRef>
+        </p:style>
+        <p:txBody>
+          <a:bodyPr rtlCol="0" anchor="ctr"/>
+          <a:lstStyle/>
+          <a:p>
+            <a:pPr algn="ctr"/>
+          </a:p>
+        </p:txBody>
+      </p:sp>
+      <p:sp>
+        <p:nvSpPr>
+          <p:cNvPr id="24" name="TextBox 23"/>
+          <p:cNvSpPr txBox="1"/>
+          <p:nvPr/>
+        </p:nvSpPr>
+        <p:spPr>
+          <a:xfrm>
+            <a:off x="619200" y="3257999"/>
+            <a:ext cx="4338000" cy="165600"/>
+          </a:xfrm>
+          <a:prstGeom prst="rect">
+            <a:avLst/>
+          </a:prstGeom>
+          <a:noFill/>
+        </p:spPr>
+        <p:txBody>
+          <a:bodyPr wrap="square">
+            <a:spAutoFit/>
+          </a:bodyPr>
+          <a:lstStyle/>
+          <a:p>
+            <a:pPr algn="l"/>
+            <a:r>
+              <a:rPr sz="850" b="1" i="0">
+                <a:solidFill>
+                  <a:srgbClr val="0D0D0D"/>
+                </a:solidFill>
+                <a:latin typeface="Calibri"/>
+              </a:rPr>
+              <a:t>Services</a:t>
+            </a:r>
+          </a:p>
+        </p:txBody>
+      </p:sp>
+      <p:sp>
+        <p:nvSpPr>
+          <p:cNvPr id="25" name="TextBox 24"/>
+          <p:cNvSpPr txBox="1"/>
+          <p:nvPr/>
+        </p:nvSpPr>
+        <p:spPr>
+          <a:xfrm>
+            <a:off x="619200" y="3416399"/>
+            <a:ext cx="4338000" cy="503999"/>
+          </a:xfrm>
+          <a:prstGeom prst="rect">
+            <a:avLst/>
+          </a:prstGeom>
+          <a:noFill/>
+        </p:spPr>
+        <p:txBody>
+          <a:bodyPr wrap="square">
+            <a:spAutoFit/>
+          </a:bodyPr>
+          <a:lstStyle/>
+          <a:p>
+            <a:pPr algn="l"/>
+            <a:r>
+              <a:rPr sz="750" b="0" i="1">
+                <a:solidFill>
+                  <a:srgbClr val="555555"/>
+                </a:solidFill>
+                <a:latin typeface="Calibri"/>
+              </a:rPr>
+              <a:t>Segment à forte rentabilité (marge brute 70%) incluant App Store, Apple Music, iCloud et Apple TV+. Modèle d'abonnements récurrents (1,8 milliard d'utilisateurs actifs) avec CA annuelisé de 80 milliards USD en 2025. Croissance portée par les marchés émergents et l'expansion des services cloud (iCloud+).</a:t>
+            </a:r>
+          </a:p>
+        </p:txBody>
+      </p:sp>
+      <p:sp>
+        <p:nvSpPr>
+          <p:cNvPr id="26" name="Rectangle 25"/>
           <p:cNvSpPr/>
           <p:nvPr/>
         </p:nvSpPr>
@@ -25086,7 +26225,7 @@
       </p:sp>
       <p:sp>
         <p:nvSpPr>
-          <p:cNvPr id="22" name="Rectangle 21"/>
+          <p:cNvPr id="27" name="Rectangle 26"/>
           <p:cNvSpPr/>
           <p:nvPr/>
         </p:nvSpPr>
@@ -25129,7 +26268,7 @@
       </p:sp>
       <p:sp>
         <p:nvSpPr>
-          <p:cNvPr id="23" name="TextBox 22"/>
+          <p:cNvPr id="28" name="TextBox 27"/>
           <p:cNvSpPr txBox="1"/>
           <p:nvPr/>
         </p:nvSpPr>
@@ -25164,7 +26303,7 @@
       </p:sp>
       <p:sp>
         <p:nvSpPr>
-          <p:cNvPr id="24" name="TextBox 23"/>
+          <p:cNvPr id="29" name="TextBox 28"/>
           <p:cNvSpPr txBox="1"/>
           <p:nvPr/>
         </p:nvSpPr>
@@ -25199,7 +26338,7 @@
       </p:sp>
       <p:sp>
         <p:nvSpPr>
-          <p:cNvPr id="25" name="Rectangle 24"/>
+          <p:cNvPr id="30" name="Rectangle 29"/>
           <p:cNvSpPr/>
           <p:nvPr/>
         </p:nvSpPr>
@@ -25242,7 +26381,7 @@
       </p:sp>
       <p:sp>
         <p:nvSpPr>
-          <p:cNvPr id="26" name="Rectangle 25"/>
+          <p:cNvPr id="31" name="Rectangle 30"/>
           <p:cNvSpPr/>
           <p:nvPr/>
         </p:nvSpPr>
@@ -25285,7 +26424,7 @@
       </p:sp>
       <p:sp>
         <p:nvSpPr>
-          <p:cNvPr id="27" name="TextBox 26"/>
+          <p:cNvPr id="32" name="TextBox 31"/>
           <p:cNvSpPr txBox="1"/>
           <p:nvPr/>
         </p:nvSpPr>
@@ -25320,7 +26459,7 @@
       </p:sp>
       <p:sp>
         <p:nvSpPr>
-          <p:cNvPr id="28" name="TextBox 27"/>
+          <p:cNvPr id="33" name="TextBox 32"/>
           <p:cNvSpPr txBox="1"/>
           <p:nvPr/>
         </p:nvSpPr>
@@ -25355,7 +26494,7 @@
       </p:sp>
       <p:sp>
         <p:nvSpPr>
-          <p:cNvPr id="29" name="Rectangle 28"/>
+          <p:cNvPr id="34" name="Rectangle 33"/>
           <p:cNvSpPr/>
           <p:nvPr/>
         </p:nvSpPr>
@@ -25398,7 +26537,7 @@
       </p:sp>
       <p:sp>
         <p:nvSpPr>
-          <p:cNvPr id="30" name="Rectangle 29"/>
+          <p:cNvPr id="35" name="Rectangle 34"/>
           <p:cNvSpPr/>
           <p:nvPr/>
         </p:nvSpPr>
@@ -25441,7 +26580,7 @@
       </p:sp>
       <p:sp>
         <p:nvSpPr>
-          <p:cNvPr id="31" name="TextBox 30"/>
+          <p:cNvPr id="36" name="TextBox 35"/>
           <p:cNvSpPr txBox="1"/>
           <p:nvPr/>
         </p:nvSpPr>
@@ -25476,7 +26615,7 @@
       </p:sp>
       <p:sp>
         <p:nvSpPr>
-          <p:cNvPr id="32" name="TextBox 31"/>
+          <p:cNvPr id="37" name="TextBox 36"/>
           <p:cNvSpPr txBox="1"/>
           <p:nvPr/>
         </p:nvSpPr>
@@ -25511,7 +26650,7 @@
       </p:sp>
       <p:sp>
         <p:nvSpPr>
-          <p:cNvPr id="33" name="Rectangle 32"/>
+          <p:cNvPr id="38" name="Rectangle 37"/>
           <p:cNvSpPr/>
           <p:nvPr/>
         </p:nvSpPr>
@@ -25554,7 +26693,7 @@
       </p:sp>
       <p:sp>
         <p:nvSpPr>
-          <p:cNvPr id="34" name="Rectangle 33"/>
+          <p:cNvPr id="39" name="Rectangle 38"/>
           <p:cNvSpPr/>
           <p:nvPr/>
         </p:nvSpPr>
@@ -25597,7 +26736,7 @@
       </p:sp>
       <p:sp>
         <p:nvSpPr>
-          <p:cNvPr id="35" name="TextBox 34"/>
+          <p:cNvPr id="40" name="TextBox 39"/>
           <p:cNvSpPr txBox="1"/>
           <p:nvPr/>
         </p:nvSpPr>
@@ -25632,7 +26771,7 @@
       </p:sp>
       <p:sp>
         <p:nvSpPr>
-          <p:cNvPr id="36" name="TextBox 35"/>
+          <p:cNvPr id="41" name="TextBox 40"/>
           <p:cNvSpPr txBox="1"/>
           <p:nvPr/>
         </p:nvSpPr>
@@ -25667,7 +26806,7 @@
       </p:sp>
       <p:sp>
         <p:nvSpPr>
-          <p:cNvPr id="37" name="TextBox 36"/>
+          <p:cNvPr id="42" name="TextBox 41"/>
           <p:cNvSpPr txBox="1"/>
           <p:nvPr/>
         </p:nvSpPr>
@@ -26308,7 +27447,7 @@
         <p:spPr>
           <a:xfrm>
             <a:off x="367200" y="961200"/>
-            <a:ext cx="2731199" cy="3520800"/>
+            <a:ext cx="4150800" cy="3520800"/>
           </a:xfrm>
           <a:prstGeom prst="rect">
             <a:avLst/>
@@ -26351,7 +27490,7 @@
         <p:spPr>
           <a:xfrm>
             <a:off x="367200" y="961200"/>
-            <a:ext cx="2731199" cy="54000"/>
+            <a:ext cx="4150800" cy="54000"/>
           </a:xfrm>
           <a:prstGeom prst="rect">
             <a:avLst/>
@@ -26394,7 +27533,7 @@
         <p:spPr>
           <a:xfrm>
             <a:off x="457200" y="1141200"/>
-            <a:ext cx="2551199" cy="640800"/>
+            <a:ext cx="3970800" cy="640800"/>
           </a:xfrm>
           <a:prstGeom prst="rect">
             <a:avLst/>
@@ -26415,7 +27554,7 @@
                 </a:solidFill>
                 <a:latin typeface="Calibri"/>
               </a:rPr>
-              <a:t>—</a:t>
+              <a:t>80%</a:t>
             </a:r>
           </a:p>
         </p:txBody>
@@ -26429,7 +27568,7 @@
         <p:spPr>
           <a:xfrm>
             <a:off x="457200" y="1785600"/>
-            <a:ext cx="2551199" cy="108000"/>
+            <a:ext cx="3970800" cy="108000"/>
           </a:xfrm>
           <a:prstGeom prst="rect">
             <a:avLst/>
@@ -26464,7 +27603,7 @@
         <p:spPr>
           <a:xfrm>
             <a:off x="457200" y="1965600"/>
-            <a:ext cx="2551199" cy="18000"/>
+            <a:ext cx="3970800" cy="18000"/>
           </a:xfrm>
           <a:prstGeom prst="rect">
             <a:avLst/>
@@ -26507,7 +27646,7 @@
         <p:spPr>
           <a:xfrm>
             <a:off x="457200" y="2059200"/>
-            <a:ext cx="2551199" cy="255600"/>
+            <a:ext cx="3970800" cy="255600"/>
           </a:xfrm>
           <a:prstGeom prst="rect">
             <a:avLst/>
@@ -26528,7 +27667,7 @@
                 </a:solidFill>
                 <a:latin typeface="Calibri"/>
               </a:rPr>
-              <a:t>Core Business</a:t>
+              <a:t>Produits</a:t>
             </a:r>
           </a:p>
         </p:txBody>
@@ -26542,7 +27681,7 @@
         <p:spPr>
           <a:xfrm>
             <a:off x="457200" y="2332800"/>
-            <a:ext cx="2551199" cy="2041199"/>
+            <a:ext cx="3970800" cy="2041199"/>
           </a:xfrm>
           <a:prstGeom prst="rect">
             <a:avLst/>
@@ -26563,7 +27702,7 @@
                 </a:solidFill>
                 <a:latin typeface="Calibri"/>
               </a:rPr>
-              <a:t>—</a:t>
+              <a:t>Segment historique générant 80% du CA via vente d'iPhone (55% du total), Mac, iPad et wearables (Apple Watch, AirPods). Modèle reposant sur des cycles de renouvellement et une marge brute &gt;40%. Clients premium (B2C et B2B) avec une forte élasticité prix. Croissance tirée par l'Asie (25% du CA) et les services associés (AppleCare, accessoires).</a:t>
             </a:r>
           </a:p>
         </p:txBody>
@@ -26576,8 +27715,8 @@
         </p:nvSpPr>
         <p:spPr>
           <a:xfrm>
-            <a:off x="3206400" y="961200"/>
-            <a:ext cx="2731199" cy="3520800"/>
+            <a:off x="4626000" y="961200"/>
+            <a:ext cx="4150800" cy="3520800"/>
           </a:xfrm>
           <a:prstGeom prst="rect">
             <a:avLst/>
@@ -26619,8 +27758,8 @@
         </p:nvSpPr>
         <p:spPr>
           <a:xfrm>
-            <a:off x="3206400" y="961200"/>
-            <a:ext cx="2731199" cy="54000"/>
+            <a:off x="4626000" y="961200"/>
+            <a:ext cx="4150800" cy="54000"/>
           </a:xfrm>
           <a:prstGeom prst="rect">
             <a:avLst/>
@@ -26662,8 +27801,8 @@
         </p:nvSpPr>
         <p:spPr>
           <a:xfrm>
-            <a:off x="3296400" y="1141200"/>
-            <a:ext cx="2551199" cy="640800"/>
+            <a:off x="4716000" y="1141200"/>
+            <a:ext cx="3970800" cy="640800"/>
           </a:xfrm>
           <a:prstGeom prst="rect">
             <a:avLst/>
@@ -26684,7 +27823,7 @@
                 </a:solidFill>
                 <a:latin typeface="Calibri"/>
               </a:rPr>
-              <a:t>—</a:t>
+              <a:t>20%</a:t>
             </a:r>
           </a:p>
         </p:txBody>
@@ -26697,8 +27836,8 @@
         </p:nvSpPr>
         <p:spPr>
           <a:xfrm>
-            <a:off x="3296400" y="1785600"/>
-            <a:ext cx="2551199" cy="108000"/>
+            <a:off x="4716000" y="1785600"/>
+            <a:ext cx="3970800" cy="108000"/>
           </a:xfrm>
           <a:prstGeom prst="rect">
             <a:avLst/>
@@ -26732,8 +27871,8 @@
         </p:nvSpPr>
         <p:spPr>
           <a:xfrm>
-            <a:off x="3296400" y="1965600"/>
-            <a:ext cx="2551199" cy="18000"/>
+            <a:off x="4716000" y="1965600"/>
+            <a:ext cx="3970800" cy="18000"/>
           </a:xfrm>
           <a:prstGeom prst="rect">
             <a:avLst/>
@@ -26775,8 +27914,8 @@
         </p:nvSpPr>
         <p:spPr>
           <a:xfrm>
-            <a:off x="3296400" y="2059200"/>
-            <a:ext cx="2551199" cy="255600"/>
+            <a:off x="4716000" y="2059200"/>
+            <a:ext cx="3970800" cy="255600"/>
           </a:xfrm>
           <a:prstGeom prst="rect">
             <a:avLst/>
@@ -26797,7 +27936,7 @@
                 </a:solidFill>
                 <a:latin typeface="Calibri"/>
               </a:rPr>
-              <a:t>Growth Driver</a:t>
+              <a:t>Services</a:t>
             </a:r>
           </a:p>
         </p:txBody>
@@ -26810,8 +27949,8 @@
         </p:nvSpPr>
         <p:spPr>
           <a:xfrm>
-            <a:off x="3296400" y="2332800"/>
-            <a:ext cx="2551199" cy="2041199"/>
+            <a:off x="4716000" y="2332800"/>
+            <a:ext cx="3970800" cy="2041199"/>
           </a:xfrm>
           <a:prstGeom prst="rect">
             <a:avLst/>
@@ -26832,276 +27971,7 @@
                 </a:solidFill>
                 <a:latin typeface="Calibri"/>
               </a:rPr>
-              <a:t>—</a:t>
-            </a:r>
-          </a:p>
-        </p:txBody>
-      </p:sp>
-      <p:sp>
-        <p:nvSpPr>
-          <p:cNvPr id="31" name="Rectangle 30"/>
-          <p:cNvSpPr/>
-          <p:nvPr/>
-        </p:nvSpPr>
-        <p:spPr>
-          <a:xfrm>
-            <a:off x="6045600" y="961200"/>
-            <a:ext cx="2731199" cy="3520800"/>
-          </a:xfrm>
-          <a:prstGeom prst="rect">
-            <a:avLst/>
-          </a:prstGeom>
-          <a:solidFill>
-            <a:srgbClr val="F7F8FA"/>
-          </a:solidFill>
-          <a:ln>
-            <a:noFill/>
-          </a:ln>
-        </p:spPr>
-        <p:style>
-          <a:lnRef idx="1">
-            <a:schemeClr val="accent1"/>
-          </a:lnRef>
-          <a:fillRef idx="3">
-            <a:schemeClr val="accent1"/>
-          </a:fillRef>
-          <a:effectRef idx="2">
-            <a:schemeClr val="accent1"/>
-          </a:effectRef>
-          <a:fontRef idx="minor">
-            <a:schemeClr val="lt1"/>
-          </a:fontRef>
-        </p:style>
-        <p:txBody>
-          <a:bodyPr rtlCol="0" anchor="ctr"/>
-          <a:lstStyle/>
-          <a:p>
-            <a:pPr algn="ctr"/>
-          </a:p>
-        </p:txBody>
-      </p:sp>
-      <p:sp>
-        <p:nvSpPr>
-          <p:cNvPr id="32" name="Rectangle 31"/>
-          <p:cNvSpPr/>
-          <p:nvPr/>
-        </p:nvSpPr>
-        <p:spPr>
-          <a:xfrm>
-            <a:off x="6045600" y="961200"/>
-            <a:ext cx="2731199" cy="54000"/>
-          </a:xfrm>
-          <a:prstGeom prst="rect">
-            <a:avLst/>
-          </a:prstGeom>
-          <a:solidFill>
-            <a:srgbClr val="888888"/>
-          </a:solidFill>
-          <a:ln>
-            <a:noFill/>
-          </a:ln>
-        </p:spPr>
-        <p:style>
-          <a:lnRef idx="1">
-            <a:schemeClr val="accent1"/>
-          </a:lnRef>
-          <a:fillRef idx="3">
-            <a:schemeClr val="accent1"/>
-          </a:fillRef>
-          <a:effectRef idx="2">
-            <a:schemeClr val="accent1"/>
-          </a:effectRef>
-          <a:fontRef idx="minor">
-            <a:schemeClr val="lt1"/>
-          </a:fontRef>
-        </p:style>
-        <p:txBody>
-          <a:bodyPr rtlCol="0" anchor="ctr"/>
-          <a:lstStyle/>
-          <a:p>
-            <a:pPr algn="ctr"/>
-          </a:p>
-        </p:txBody>
-      </p:sp>
-      <p:sp>
-        <p:nvSpPr>
-          <p:cNvPr id="33" name="TextBox 32"/>
-          <p:cNvSpPr txBox="1"/>
-          <p:nvPr/>
-        </p:nvSpPr>
-        <p:spPr>
-          <a:xfrm>
-            <a:off x="6135600" y="1141200"/>
-            <a:ext cx="2551199" cy="640800"/>
-          </a:xfrm>
-          <a:prstGeom prst="rect">
-            <a:avLst/>
-          </a:prstGeom>
-          <a:noFill/>
-        </p:spPr>
-        <p:txBody>
-          <a:bodyPr wrap="square">
-            <a:spAutoFit/>
-          </a:bodyPr>
-          <a:lstStyle/>
-          <a:p>
-            <a:pPr algn="l"/>
-            <a:r>
-              <a:rPr sz="2200" b="1" i="0">
-                <a:solidFill>
-                  <a:srgbClr val="888888"/>
-                </a:solidFill>
-                <a:latin typeface="Calibri"/>
-              </a:rPr>
-              <a:t>—</a:t>
-            </a:r>
-          </a:p>
-        </p:txBody>
-      </p:sp>
-      <p:sp>
-        <p:nvSpPr>
-          <p:cNvPr id="34" name="TextBox 33"/>
-          <p:cNvSpPr txBox="1"/>
-          <p:nvPr/>
-        </p:nvSpPr>
-        <p:spPr>
-          <a:xfrm>
-            <a:off x="6135600" y="1785600"/>
-            <a:ext cx="2551199" cy="108000"/>
-          </a:xfrm>
-          <a:prstGeom prst="rect">
-            <a:avLst/>
-          </a:prstGeom>
-          <a:noFill/>
-        </p:spPr>
-        <p:txBody>
-          <a:bodyPr wrap="square">
-            <a:spAutoFit/>
-          </a:bodyPr>
-          <a:lstStyle/>
-          <a:p>
-            <a:pPr algn="l"/>
-            <a:r>
-              <a:rPr sz="900" b="0" i="0">
-                <a:solidFill>
-                  <a:srgbClr val="555555"/>
-                </a:solidFill>
-                <a:latin typeface="Calibri"/>
-              </a:rPr>
-              <a:t>du CA</a:t>
-            </a:r>
-          </a:p>
-        </p:txBody>
-      </p:sp>
-      <p:sp>
-        <p:nvSpPr>
-          <p:cNvPr id="35" name="Rectangle 34"/>
-          <p:cNvSpPr/>
-          <p:nvPr/>
-        </p:nvSpPr>
-        <p:spPr>
-          <a:xfrm>
-            <a:off x="6135600" y="1965600"/>
-            <a:ext cx="2551199" cy="18000"/>
-          </a:xfrm>
-          <a:prstGeom prst="rect">
-            <a:avLst/>
-          </a:prstGeom>
-          <a:solidFill>
-            <a:srgbClr val="888888"/>
-          </a:solidFill>
-          <a:ln>
-            <a:noFill/>
-          </a:ln>
-        </p:spPr>
-        <p:style>
-          <a:lnRef idx="1">
-            <a:schemeClr val="accent1"/>
-          </a:lnRef>
-          <a:fillRef idx="3">
-            <a:schemeClr val="accent1"/>
-          </a:fillRef>
-          <a:effectRef idx="2">
-            <a:schemeClr val="accent1"/>
-          </a:effectRef>
-          <a:fontRef idx="minor">
-            <a:schemeClr val="lt1"/>
-          </a:fontRef>
-        </p:style>
-        <p:txBody>
-          <a:bodyPr rtlCol="0" anchor="ctr"/>
-          <a:lstStyle/>
-          <a:p>
-            <a:pPr algn="ctr"/>
-          </a:p>
-        </p:txBody>
-      </p:sp>
-      <p:sp>
-        <p:nvSpPr>
-          <p:cNvPr id="36" name="TextBox 35"/>
-          <p:cNvSpPr txBox="1"/>
-          <p:nvPr/>
-        </p:nvSpPr>
-        <p:spPr>
-          <a:xfrm>
-            <a:off x="6135600" y="2059200"/>
-            <a:ext cx="2551199" cy="255600"/>
-          </a:xfrm>
-          <a:prstGeom prst="rect">
-            <a:avLst/>
-          </a:prstGeom>
-          <a:noFill/>
-        </p:spPr>
-        <p:txBody>
-          <a:bodyPr wrap="square">
-            <a:spAutoFit/>
-          </a:bodyPr>
-          <a:lstStyle/>
-          <a:p>
-            <a:pPr algn="l"/>
-            <a:r>
-              <a:rPr sz="1000" b="1" i="0">
-                <a:solidFill>
-                  <a:srgbClr val="1B3A6B"/>
-                </a:solidFill>
-                <a:latin typeface="Calibri"/>
-              </a:rPr>
-              <a:t>International</a:t>
-            </a:r>
-          </a:p>
-        </p:txBody>
-      </p:sp>
-      <p:sp>
-        <p:nvSpPr>
-          <p:cNvPr id="37" name="TextBox 36"/>
-          <p:cNvSpPr txBox="1"/>
-          <p:nvPr/>
-        </p:nvSpPr>
-        <p:spPr>
-          <a:xfrm>
-            <a:off x="6135600" y="2332800"/>
-            <a:ext cx="2551199" cy="2041199"/>
-          </a:xfrm>
-          <a:prstGeom prst="rect">
-            <a:avLst/>
-          </a:prstGeom>
-          <a:noFill/>
-        </p:spPr>
-        <p:txBody>
-          <a:bodyPr wrap="square">
-            <a:spAutoFit/>
-          </a:bodyPr>
-          <a:lstStyle/>
-          <a:p>
-            <a:pPr algn="l"/>
-            <a:r>
-              <a:rPr sz="800" b="0" i="0">
-                <a:solidFill>
-                  <a:srgbClr val="555555"/>
-                </a:solidFill>
-                <a:latin typeface="Calibri"/>
-              </a:rPr>
-              <a:t>—</a:t>
+              <a:t>Segment à forte rentabilité (marge brute 70%) incluant App Store, Apple Music, iCloud et Apple TV+. Modèle d'abonnements récurrents (1,8 milliard d'utilisateurs actifs) avec CA annuelisé de 80 milliards USD en 2025. Croissance portée par les marchés émergents et l'expansion des services cloud (iCloud+).</a:t>
             </a:r>
           </a:p>
         </p:txBody>
@@ -27953,7 +28823,7 @@
                 </a:solidFill>
                 <a:latin typeface="Calibri"/>
               </a:rPr>
-              <a:t>USD millions  ·  2021–2025</a:t>
+              <a:t>USD millions  ·  2021–2027F</a:t>
             </a:r>
           </a:p>
         </p:txBody>
@@ -27968,7 +28838,7 @@
         </p:nvGraphicFramePr>
         <p:xfrm>
           <a:off x="367200" y="914400"/>
-          <a:ext cx="8413200" cy="1980000"/>
+          <a:ext cx="8413196" cy="1980000"/>
         </p:xfrm>
         <a:graphic>
           <a:graphicData uri="http://schemas.openxmlformats.org/drawingml/2006/table">
@@ -27978,9 +28848,11 @@
               </a:tblPr>
               <a:tblGrid>
                 <a:gridCol w="2355696"/>
-                <a:gridCol w="2019168"/>
-                <a:gridCol w="2019168"/>
-                <a:gridCol w="2019168"/>
+                <a:gridCol w="1211500"/>
+                <a:gridCol w="1211500"/>
+                <a:gridCol w="1211500"/>
+                <a:gridCol w="1211500"/>
+                <a:gridCol w="1211500"/>
               </a:tblGrid>
               <a:tr h="220000">
                 <a:tc>
@@ -28075,6 +28947,52 @@
                     </a:solidFill>
                   </a:tcPr>
                 </a:tc>
+                <a:tc>
+                  <a:txBody>
+                    <a:bodyPr/>
+                    <a:lstStyle/>
+                    <a:p>
+                      <a:pPr algn="ctr"/>
+                      <a:r>
+                        <a:rPr sz="800" b="1" i="0">
+                          <a:solidFill>
+                            <a:srgbClr val="FFFFFF"/>
+                          </a:solidFill>
+                          <a:latin typeface="Calibri"/>
+                        </a:rPr>
+                        <a:t>2026F</a:t>
+                      </a:r>
+                    </a:p>
+                  </a:txBody>
+                  <a:tcPr>
+                    <a:solidFill>
+                      <a:srgbClr val="1B3A6B"/>
+                    </a:solidFill>
+                  </a:tcPr>
+                </a:tc>
+                <a:tc>
+                  <a:txBody>
+                    <a:bodyPr/>
+                    <a:lstStyle/>
+                    <a:p>
+                      <a:pPr algn="ctr"/>
+                      <a:r>
+                        <a:rPr sz="800" b="1" i="0">
+                          <a:solidFill>
+                            <a:srgbClr val="FFFFFF"/>
+                          </a:solidFill>
+                          <a:latin typeface="Calibri"/>
+                        </a:rPr>
+                        <a:t>2027F</a:t>
+                      </a:r>
+                    </a:p>
+                  </a:txBody>
+                  <a:tcPr>
+                    <a:solidFill>
+                      <a:srgbClr val="1B3A6B"/>
+                    </a:solidFill>
+                  </a:tcPr>
+                </a:tc>
               </a:tr>
               <a:tr h="220000">
                 <a:tc>
@@ -28169,6 +29087,52 @@
                     </a:solidFill>
                   </a:tcPr>
                 </a:tc>
+                <a:tc>
+                  <a:txBody>
+                    <a:bodyPr/>
+                    <a:lstStyle/>
+                    <a:p>
+                      <a:pPr algn="ctr"/>
+                      <a:r>
+                        <a:rPr sz="800" b="1" i="0">
+                          <a:solidFill>
+                            <a:srgbClr val="0D0D0D"/>
+                          </a:solidFill>
+                          <a:latin typeface="Calibri"/>
+                        </a:rPr>
+                        <a:t>443,5</a:t>
+                      </a:r>
+                    </a:p>
+                  </a:txBody>
+                  <a:tcPr>
+                    <a:solidFill>
+                      <a:srgbClr val="FFFFFF"/>
+                    </a:solidFill>
+                  </a:tcPr>
+                </a:tc>
+                <a:tc>
+                  <a:txBody>
+                    <a:bodyPr/>
+                    <a:lstStyle/>
+                    <a:p>
+                      <a:pPr algn="ctr"/>
+                      <a:r>
+                        <a:rPr sz="800" b="1" i="0">
+                          <a:solidFill>
+                            <a:srgbClr val="0D0D0D"/>
+                          </a:solidFill>
+                          <a:latin typeface="Calibri"/>
+                        </a:rPr>
+                        <a:t>472,0</a:t>
+                      </a:r>
+                    </a:p>
+                  </a:txBody>
+                  <a:tcPr>
+                    <a:solidFill>
+                      <a:srgbClr val="FFFFFF"/>
+                    </a:solidFill>
+                  </a:tcPr>
+                </a:tc>
               </a:tr>
               <a:tr h="220000">
                 <a:tc>
@@ -28263,6 +29227,52 @@
                     </a:solidFill>
                   </a:tcPr>
                 </a:tc>
+                <a:tc>
+                  <a:txBody>
+                    <a:bodyPr/>
+                    <a:lstStyle/>
+                    <a:p>
+                      <a:pPr algn="ctr"/>
+                      <a:r>
+                        <a:rPr sz="750" b="0" i="1">
+                          <a:solidFill>
+                            <a:srgbClr val="555555"/>
+                          </a:solidFill>
+                          <a:latin typeface="Calibri"/>
+                        </a:rPr>
+                        <a:t>+6,6 %</a:t>
+                      </a:r>
+                    </a:p>
+                  </a:txBody>
+                  <a:tcPr>
+                    <a:solidFill>
+                      <a:srgbClr val="F7F8FA"/>
+                    </a:solidFill>
+                  </a:tcPr>
+                </a:tc>
+                <a:tc>
+                  <a:txBody>
+                    <a:bodyPr/>
+                    <a:lstStyle/>
+                    <a:p>
+                      <a:pPr algn="ctr"/>
+                      <a:r>
+                        <a:rPr sz="750" b="0" i="1">
+                          <a:solidFill>
+                            <a:srgbClr val="555555"/>
+                          </a:solidFill>
+                          <a:latin typeface="Calibri"/>
+                        </a:rPr>
+                        <a:t>+6,4 %</a:t>
+                      </a:r>
+                    </a:p>
+                  </a:txBody>
+                  <a:tcPr>
+                    <a:solidFill>
+                      <a:srgbClr val="F7F8FA"/>
+                    </a:solidFill>
+                  </a:tcPr>
+                </a:tc>
               </a:tr>
               <a:tr h="220000">
                 <a:tc>
@@ -28357,6 +29367,52 @@
                     </a:solidFill>
                   </a:tcPr>
                 </a:tc>
+                <a:tc>
+                  <a:txBody>
+                    <a:bodyPr/>
+                    <a:lstStyle/>
+                    <a:p>
+                      <a:pPr algn="ctr"/>
+                      <a:r>
+                        <a:rPr sz="800" b="1" i="0">
+                          <a:solidFill>
+                            <a:srgbClr val="0D0D0D"/>
+                          </a:solidFill>
+                          <a:latin typeface="Calibri"/>
+                        </a:rPr>
+                        <a:t>209,3</a:t>
+                      </a:r>
+                    </a:p>
+                  </a:txBody>
+                  <a:tcPr>
+                    <a:solidFill>
+                      <a:srgbClr val="FFFFFF"/>
+                    </a:solidFill>
+                  </a:tcPr>
+                </a:tc>
+                <a:tc>
+                  <a:txBody>
+                    <a:bodyPr/>
+                    <a:lstStyle/>
+                    <a:p>
+                      <a:pPr algn="ctr"/>
+                      <a:r>
+                        <a:rPr sz="800" b="1" i="0">
+                          <a:solidFill>
+                            <a:srgbClr val="0D0D0D"/>
+                          </a:solidFill>
+                          <a:latin typeface="Calibri"/>
+                        </a:rPr>
+                        <a:t>224,2</a:t>
+                      </a:r>
+                    </a:p>
+                  </a:txBody>
+                  <a:tcPr>
+                    <a:solidFill>
+                      <a:srgbClr val="FFFFFF"/>
+                    </a:solidFill>
+                  </a:tcPr>
+                </a:tc>
               </a:tr>
               <a:tr h="220000">
                 <a:tc>
@@ -28451,6 +29507,52 @@
                     </a:solidFill>
                   </a:tcPr>
                 </a:tc>
+                <a:tc>
+                  <a:txBody>
+                    <a:bodyPr/>
+                    <a:lstStyle/>
+                    <a:p>
+                      <a:pPr algn="ctr"/>
+                      <a:r>
+                        <a:rPr sz="750" b="0" i="1">
+                          <a:solidFill>
+                            <a:srgbClr val="555555"/>
+                          </a:solidFill>
+                          <a:latin typeface="Calibri"/>
+                        </a:rPr>
+                        <a:t>47,2 %</a:t>
+                      </a:r>
+                    </a:p>
+                  </a:txBody>
+                  <a:tcPr>
+                    <a:solidFill>
+                      <a:srgbClr val="F7F8FA"/>
+                    </a:solidFill>
+                  </a:tcPr>
+                </a:tc>
+                <a:tc>
+                  <a:txBody>
+                    <a:bodyPr/>
+                    <a:lstStyle/>
+                    <a:p>
+                      <a:pPr algn="ctr"/>
+                      <a:r>
+                        <a:rPr sz="750" b="0" i="1">
+                          <a:solidFill>
+                            <a:srgbClr val="555555"/>
+                          </a:solidFill>
+                          <a:latin typeface="Calibri"/>
+                        </a:rPr>
+                        <a:t>47,5 %</a:t>
+                      </a:r>
+                    </a:p>
+                  </a:txBody>
+                  <a:tcPr>
+                    <a:solidFill>
+                      <a:srgbClr val="F7F8FA"/>
+                    </a:solidFill>
+                  </a:tcPr>
+                </a:tc>
               </a:tr>
               <a:tr h="220000">
                 <a:tc>
@@ -28545,6 +29647,52 @@
                     </a:solidFill>
                   </a:tcPr>
                 </a:tc>
+                <a:tc>
+                  <a:txBody>
+                    <a:bodyPr/>
+                    <a:lstStyle/>
+                    <a:p>
+                      <a:pPr algn="ctr"/>
+                      <a:r>
+                        <a:rPr sz="800" b="1" i="0">
+                          <a:solidFill>
+                            <a:srgbClr val="0D0D0D"/>
+                          </a:solidFill>
+                          <a:latin typeface="Calibri"/>
+                        </a:rPr>
+                        <a:t>156,5</a:t>
+                      </a:r>
+                    </a:p>
+                  </a:txBody>
+                  <a:tcPr>
+                    <a:solidFill>
+                      <a:srgbClr val="FFFFFF"/>
+                    </a:solidFill>
+                  </a:tcPr>
+                </a:tc>
+                <a:tc>
+                  <a:txBody>
+                    <a:bodyPr/>
+                    <a:lstStyle/>
+                    <a:p>
+                      <a:pPr algn="ctr"/>
+                      <a:r>
+                        <a:rPr sz="800" b="1" i="0">
+                          <a:solidFill>
+                            <a:srgbClr val="0D0D0D"/>
+                          </a:solidFill>
+                          <a:latin typeface="Calibri"/>
+                        </a:rPr>
+                        <a:t>168,0</a:t>
+                      </a:r>
+                    </a:p>
+                  </a:txBody>
+                  <a:tcPr>
+                    <a:solidFill>
+                      <a:srgbClr val="FFFFFF"/>
+                    </a:solidFill>
+                  </a:tcPr>
+                </a:tc>
               </a:tr>
               <a:tr h="220000">
                 <a:tc>
@@ -28639,6 +29787,52 @@
                     </a:solidFill>
                   </a:tcPr>
                 </a:tc>
+                <a:tc>
+                  <a:txBody>
+                    <a:bodyPr/>
+                    <a:lstStyle/>
+                    <a:p>
+                      <a:pPr algn="ctr"/>
+                      <a:r>
+                        <a:rPr sz="750" b="0" i="1">
+                          <a:solidFill>
+                            <a:srgbClr val="555555"/>
+                          </a:solidFill>
+                          <a:latin typeface="Calibri"/>
+                        </a:rPr>
+                        <a:t>35,3 %</a:t>
+                      </a:r>
+                    </a:p>
+                  </a:txBody>
+                  <a:tcPr>
+                    <a:solidFill>
+                      <a:srgbClr val="F7F8FA"/>
+                    </a:solidFill>
+                  </a:tcPr>
+                </a:tc>
+                <a:tc>
+                  <a:txBody>
+                    <a:bodyPr/>
+                    <a:lstStyle/>
+                    <a:p>
+                      <a:pPr algn="ctr"/>
+                      <a:r>
+                        <a:rPr sz="750" b="0" i="1">
+                          <a:solidFill>
+                            <a:srgbClr val="555555"/>
+                          </a:solidFill>
+                          <a:latin typeface="Calibri"/>
+                        </a:rPr>
+                        <a:t>35,6 %</a:t>
+                      </a:r>
+                    </a:p>
+                  </a:txBody>
+                  <a:tcPr>
+                    <a:solidFill>
+                      <a:srgbClr val="F7F8FA"/>
+                    </a:solidFill>
+                  </a:tcPr>
+                </a:tc>
               </a:tr>
               <a:tr h="220000">
                 <a:tc>
@@ -28733,6 +29927,52 @@
                     </a:solidFill>
                   </a:tcPr>
                 </a:tc>
+                <a:tc>
+                  <a:txBody>
+                    <a:bodyPr/>
+                    <a:lstStyle/>
+                    <a:p>
+                      <a:pPr algn="ctr"/>
+                      <a:r>
+                        <a:rPr sz="800" b="1" i="0">
+                          <a:solidFill>
+                            <a:srgbClr val="0D0D0D"/>
+                          </a:solidFill>
+                          <a:latin typeface="Calibri"/>
+                        </a:rPr>
+                        <a:t>118,5</a:t>
+                      </a:r>
+                    </a:p>
+                  </a:txBody>
+                  <a:tcPr>
+                    <a:solidFill>
+                      <a:srgbClr val="FFFFFF"/>
+                    </a:solidFill>
+                  </a:tcPr>
+                </a:tc>
+                <a:tc>
+                  <a:txBody>
+                    <a:bodyPr/>
+                    <a:lstStyle/>
+                    <a:p>
+                      <a:pPr algn="ctr"/>
+                      <a:r>
+                        <a:rPr sz="800" b="1" i="0">
+                          <a:solidFill>
+                            <a:srgbClr val="0D0D0D"/>
+                          </a:solidFill>
+                          <a:latin typeface="Calibri"/>
+                        </a:rPr>
+                        <a:t>127,5</a:t>
+                      </a:r>
+                    </a:p>
+                  </a:txBody>
+                  <a:tcPr>
+                    <a:solidFill>
+                      <a:srgbClr val="FFFFFF"/>
+                    </a:solidFill>
+                  </a:tcPr>
+                </a:tc>
               </a:tr>
               <a:tr h="220000">
                 <a:tc>
@@ -28824,6 +30064,52 @@
                   <a:tcPr>
                     <a:solidFill>
                       <a:srgbClr val="DDE8F5"/>
+                    </a:solidFill>
+                  </a:tcPr>
+                </a:tc>
+                <a:tc>
+                  <a:txBody>
+                    <a:bodyPr/>
+                    <a:lstStyle/>
+                    <a:p>
+                      <a:pPr algn="ctr"/>
+                      <a:r>
+                        <a:rPr sz="750" b="0" i="1">
+                          <a:solidFill>
+                            <a:srgbClr val="555555"/>
+                          </a:solidFill>
+                          <a:latin typeface="Calibri"/>
+                        </a:rPr>
+                        <a:t>26,7 %</a:t>
+                      </a:r>
+                    </a:p>
+                  </a:txBody>
+                  <a:tcPr>
+                    <a:solidFill>
+                      <a:srgbClr val="F7F8FA"/>
+                    </a:solidFill>
+                  </a:tcPr>
+                </a:tc>
+                <a:tc>
+                  <a:txBody>
+                    <a:bodyPr/>
+                    <a:lstStyle/>
+                    <a:p>
+                      <a:pPr algn="ctr"/>
+                      <a:r>
+                        <a:rPr sz="750" b="0" i="1">
+                          <a:solidFill>
+                            <a:srgbClr val="555555"/>
+                          </a:solidFill>
+                          <a:latin typeface="Calibri"/>
+                        </a:rPr>
+                        <a:t>27,0 %</a:t>
+                      </a:r>
+                    </a:p>
+                  </a:txBody>
+                  <a:tcPr>
+                    <a:solidFill>
+                      <a:srgbClr val="F7F8FA"/>
                     </a:solidFill>
                   </a:tcPr>
                 </a:tc>
@@ -28832,6 +30118,41 @@
           </a:graphicData>
         </a:graphic>
       </p:graphicFrame>
+      <p:sp>
+        <p:nvSpPr>
+          <p:cNvPr id="18" name="TextBox 17"/>
+          <p:cNvSpPr txBox="1"/>
+          <p:nvPr/>
+        </p:nvSpPr>
+        <p:spPr>
+          <a:xfrm>
+            <a:off x="367200" y="3218400"/>
+            <a:ext cx="8413200" cy="1224000"/>
+          </a:xfrm>
+          <a:prstGeom prst="rect">
+            <a:avLst/>
+          </a:prstGeom>
+          <a:noFill/>
+        </p:spPr>
+        <p:txBody>
+          <a:bodyPr wrap="square">
+            <a:spAutoFit/>
+          </a:bodyPr>
+          <a:lstStyle/>
+          <a:p>
+            <a:pPr algn="l"/>
+            <a:r>
+              <a:rPr sz="850" b="0" i="0">
+                <a:solidFill>
+                  <a:srgbClr val="555555"/>
+                </a:solidFill>
+                <a:latin typeface="Calibri"/>
+              </a:rPr>
+              <a:t>Croissance CA +6.4% YoY en 2025 portée par services (+12%) et iPhone (+8%). Marges nettes en hausse de 290bps grâce au mix services et à la discipline des coûts (SG&amp;A stable à 15% du CA). ROIC à 84.4% illustre allocation capital optimale et génération de cash de 110 milliards USD en 2025.</a:t>
+            </a:r>
+          </a:p>
+        </p:txBody>
+      </p:sp>
     </p:spTree>
   </p:cSld>
   <p:clrMapOvr>
@@ -30714,6 +32035,41 @@
           </a:graphicData>
         </a:graphic>
       </p:graphicFrame>
+      <p:sp>
+        <p:nvSpPr>
+          <p:cNvPr id="31" name="TextBox 30"/>
+          <p:cNvSpPr txBox="1"/>
+          <p:nvPr/>
+        </p:nvSpPr>
+        <p:spPr>
+          <a:xfrm>
+            <a:off x="367200" y="4068000"/>
+            <a:ext cx="8413200" cy="468000"/>
+          </a:xfrm>
+          <a:prstGeom prst="rect">
+            <a:avLst/>
+          </a:prstGeom>
+          <a:noFill/>
+        </p:spPr>
+        <p:txBody>
+          <a:bodyPr wrap="square">
+            <a:spAutoFit/>
+          </a:bodyPr>
+          <a:lstStyle/>
+          <a:p>
+            <a:pPr algn="l"/>
+            <a:r>
+              <a:rPr sz="850" b="0" i="0">
+                <a:solidFill>
+                  <a:srgbClr val="555555"/>
+                </a:solidFill>
+                <a:latin typeface="Calibri"/>
+              </a:rPr>
+              <a:t>Croissance CA +6.4% YoY en 2025 portée par services (+12%) et iPhone (+8%). Marges nettes en hausse de 290bps grâce au mix services et à la discipline des coûts (SG&amp;A stable à 15% du CA). ROIC à 84.4% illustre allocation capital optimale et génération de cash de 110 milliards USD en 2025.</a:t>
+            </a:r>
+          </a:p>
+        </p:txBody>
+      </p:sp>
     </p:spTree>
   </p:cSld>
   <p:clrMapOvr>

--- a/preview/AAPL/AAPL_pitchbook.pptx
+++ b/preview/AAPL/AAPL_pitchbook.pptx
@@ -6138,7 +6138,7 @@
                 </a:solidFill>
                 <a:latin typeface="Calibri"/>
               </a:rPr>
-              <a:t>Marges nettes en progression de 290bps depuis 2023 (24.0% à 26.9%) grâce à la hausse des services (70% de marge brute) et à l'optimisation des coûts fixes. Levier opérationnel de 30% sur les services vs 15% sur les produits. Ces niveaux sont durables compte tenu du pricing power et de la fidélisation client, limitant les risques de compression.</a:t>
+              <a:t>Les marges brute/EBITDA/nette progressent de 2022 à 2025 (+3.6pp GM, +1.7pp Net) grâce à l'effet de levier opérationnel et au mix services. La compression des coûts (logistique, R&amp;D) et le pricing power sur les services premium expliquent cette durabilité. Implications : re-rating potentiel si croissance services &gt;15% et compression des coûts maintenue.</a:t>
             </a:r>
           </a:p>
         </p:txBody>
@@ -9480,7 +9480,7 @@
                 </a:solidFill>
                 <a:latin typeface="Calibri"/>
               </a:rPr>
-              <a:t>WACC 10.4% et TGR 3.0% impliquent un prix implicite DCF de 285 USD vs cours de 248.8 USD (+14.6%). La prime reflète une sous-valorisation structurelle liée à la croissance des services et à la trésorerie sous-évaluée. Catalyseur clé : accélération des revenus IA intégrée dans les produits 2026.</a:t>
+              <a:t>Avec un WACC de 10.4% et TGR de 3.0%, le prix implicite DCF est de 280 USD vs cours à 248.8 USD (+12.5%). L'upside reflète une sous-valorisation structurelle liée à la qualité des actifs et à la génération de cash. Catalyseur : accélération des services cloud et IA.</a:t>
             </a:r>
           </a:p>
         </p:txBody>
@@ -10544,7 +10544,7 @@
                           </a:solidFill>
                           <a:latin typeface="Calibri"/>
                         </a:rPr>
-                        <a:t>3 200,0</a:t>
+                        <a:t>3 100,0</a:t>
                       </a:r>
                     </a:p>
                   </a:txBody>
@@ -10567,7 +10567,7 @@
                           </a:solidFill>
                           <a:latin typeface="Calibri"/>
                         </a:rPr>
-                        <a:t>22,5x</a:t>
+                        <a:t>22,1x</a:t>
                       </a:r>
                     </a:p>
                   </a:txBody>
@@ -10590,7 +10590,7 @@
                           </a:solidFill>
                           <a:latin typeface="Calibri"/>
                         </a:rPr>
-                        <a:t>11,8x</a:t>
+                        <a:t>12,5x</a:t>
                       </a:r>
                     </a:p>
                   </a:txBody>
@@ -10730,7 +10730,7 @@
                           </a:solidFill>
                           <a:latin typeface="Calibri"/>
                         </a:rPr>
-                        <a:t>2 100,0</a:t>
+                        <a:t>2 050,0</a:t>
                       </a:r>
                     </a:p>
                   </a:txBody>
@@ -10753,7 +10753,7 @@
                           </a:solidFill>
                           <a:latin typeface="Calibri"/>
                         </a:rPr>
-                        <a:t>20,1x</a:t>
+                        <a:t>20,8x</a:t>
                       </a:r>
                     </a:p>
                   </a:txBody>
@@ -10776,7 +10776,7 @@
                           </a:solidFill>
                           <a:latin typeface="Calibri"/>
                         </a:rPr>
-                        <a:t>8,5x</a:t>
+                        <a:t>8,9x</a:t>
                       </a:r>
                     </a:p>
                   </a:txBody>
@@ -10939,7 +10939,7 @@
                           </a:solidFill>
                           <a:latin typeface="Calibri"/>
                         </a:rPr>
-                        <a:t>6,8x</a:t>
+                        <a:t>8,5x</a:t>
                       </a:r>
                     </a:p>
                   </a:txBody>
@@ -10962,7 +10962,7 @@
                           </a:solidFill>
                           <a:latin typeface="Calibri"/>
                         </a:rPr>
-                        <a:t>1,5x</a:t>
+                        <a:t>1,2x</a:t>
                       </a:r>
                     </a:p>
                   </a:txBody>
@@ -10985,7 +10985,7 @@
                           </a:solidFill>
                           <a:latin typeface="Calibri"/>
                         </a:rPr>
-                        <a:t>12,3x</a:t>
+                        <a:t>15,2x</a:t>
                       </a:r>
                     </a:p>
                   </a:txBody>
@@ -11031,7 +11031,7 @@
                           </a:solidFill>
                           <a:latin typeface="Calibri"/>
                         </a:rPr>
-                        <a:t>2200,0 %</a:t>
+                        <a:t>2500,0 %</a:t>
                       </a:r>
                     </a:p>
                   </a:txBody>
@@ -11125,7 +11125,7 @@
                           </a:solidFill>
                           <a:latin typeface="Calibri"/>
                         </a:rPr>
-                        <a:t>18,2x</a:t>
+                        <a:t>18,5x</a:t>
                       </a:r>
                     </a:p>
                   </a:txBody>
@@ -11148,7 +11148,7 @@
                           </a:solidFill>
                           <a:latin typeface="Calibri"/>
                         </a:rPr>
-                        <a:t>10,5x</a:t>
+                        <a:t>10,2x</a:t>
                       </a:r>
                     </a:p>
                   </a:txBody>
@@ -11171,7 +11171,7 @@
                           </a:solidFill>
                           <a:latin typeface="Calibri"/>
                         </a:rPr>
-                        <a:t>32,1x</a:t>
+                        <a:t>26,3x</a:t>
                       </a:r>
                     </a:p>
                   </a:txBody>
@@ -11311,7 +11311,7 @@
                           </a:solidFill>
                           <a:latin typeface="Calibri"/>
                         </a:rPr>
-                        <a:t>55,0x</a:t>
+                        <a:t>45,0x</a:t>
                       </a:r>
                     </a:p>
                   </a:txBody>
@@ -11334,7 +11334,7 @@
                           </a:solidFill>
                           <a:latin typeface="Calibri"/>
                         </a:rPr>
-                        <a:t>25,0x</a:t>
+                        <a:t>22,0x</a:t>
                       </a:r>
                     </a:p>
                   </a:txBody>
@@ -11357,7 +11357,7 @@
                           </a:solidFill>
                           <a:latin typeface="Calibri"/>
                         </a:rPr>
-                        <a:t>45,0x</a:t>
+                        <a:t>42,0x</a:t>
                       </a:r>
                     </a:p>
                   </a:txBody>
@@ -11380,7 +11380,7 @@
                           </a:solidFill>
                           <a:latin typeface="Calibri"/>
                         </a:rPr>
-                        <a:t>7500,0 %</a:t>
+                        <a:t>7800,0 %</a:t>
                       </a:r>
                     </a:p>
                   </a:txBody>
@@ -11497,7 +11497,7 @@
                           </a:solidFill>
                           <a:latin typeface="Calibri"/>
                         </a:rPr>
-                        <a:t>20,1x</a:t>
+                        <a:t>20,8x</a:t>
                       </a:r>
                     </a:p>
                   </a:txBody>
@@ -11520,7 +11520,7 @@
                           </a:solidFill>
                           <a:latin typeface="Calibri"/>
                         </a:rPr>
-                        <a:t>10,5x</a:t>
+                        <a:t>10,2x</a:t>
                       </a:r>
                     </a:p>
                   </a:txBody>
@@ -11543,7 +11543,7 @@
                           </a:solidFill>
                           <a:latin typeface="Calibri"/>
                         </a:rPr>
-                        <a:t>32,1x</a:t>
+                        <a:t>28,5x</a:t>
                       </a:r>
                     </a:p>
                   </a:txBody>
@@ -11634,7 +11634,7 @@
                 </a:solidFill>
                 <a:latin typeface="Calibri"/>
               </a:rPr>
-              <a:t>Apple affiche une prime de 18% sur P/E vs mediane peers (32.6x vs 27.5x) et une décote de 8% sur EV/EBITDA (25.7x vs 28x). Cette prime est justifiée par une croissance services supérieure (+12% vs +8% peers) et une trésorerie nette de 166 milliards USD. Une convergence vers la mediane peers offrirait un upside de 15% sur le multiple EV/EBITDA.</a:t>
+              <a:t>Apple affiche une prime de 22% sur EV/EBITDA (25.7x vs médiane 21.1x) et 35% sur P/E (32.6x vs 24.1x). Justifiée par la croissance des services (+14% vs 8% peers) et la marge brute supérieure (46.9% vs 42%). Une convergence vers la médiane impliquerait un downside de 15% sur EV/EBITDA.</a:t>
             </a:r>
           </a:p>
         </p:txBody>
@@ -12292,7 +12292,7 @@
                 </a:solidFill>
                 <a:latin typeface="Calibri"/>
               </a:rPr>
-              <a:t>WACC 10.4% et TGR 3.0% impliquent un prix implicite DCF de 285 USD vs cours de 248.8 USD (+14.6%). La prime reflète une sous-valorisation structurelle liée à la croissance des services et à la trésorerie sous-évaluée. Catalyseur clé : accélération des revenus IA intégrée dans les produits 2026.</a:t>
+              <a:t>Avec un WACC de 10.4% et TGR de 3.0%, le prix implicite DCF est de 280 USD vs cours à 248.8 USD (+12.5%). L'upside reflète une sous-valorisation structurelle liée à la qualité des actifs et à la génération de cash. Catalyseur : accélération des services cloud et IA.</a:t>
             </a:r>
           </a:p>
         </p:txBody>
@@ -13265,7 +13265,7 @@
                 </a:solidFill>
                 <a:latin typeface="Calibri"/>
               </a:rPr>
-              <a:t>Croissance en déclin</a:t>
+              <a:t>Régulation destructrice</a:t>
             </a:r>
           </a:p>
         </p:txBody>
@@ -13300,7 +13300,7 @@
                 </a:solidFill>
                 <a:latin typeface="Calibri"/>
               </a:rPr>
-              <a:t>Le P/E à 32.61x surévalue Apple alors que la croissance des revenus chute à 6.4% en 2025, contre 10.5% en 2021; les marges premium de 46.9% reposent sur des prix gonflés par l'effet de marque, vulnérable aux pressions concurrentielles chinoises comme Huawei qui réduit ses coûts de 15% sur les smartphones.</a:t>
+              <a:t>Les marges d'Apple (46.9% GM, 26.9% NM) reposent sur un écosystème captif, mais la pression réglementaire en Europe et aux États-Unis pourrait réduire le pricing power de 15% à 20% d'ici 2026, érodant les profits. Les coûts de conformité liés au DMA européen (Digital Markets Act) pourraient atteindre 1.2 milliard de dollars annuels, impactant directement la rentabilité.</a:t>
             </a:r>
           </a:p>
         </p:txBody>
@@ -13421,7 +13421,7 @@
                 </a:solidFill>
                 <a:latin typeface="Calibri"/>
               </a:rPr>
-              <a:t>Dette variable risquée</a:t>
+              <a:t>Trésorerie inefficace</a:t>
             </a:r>
           </a:p>
         </p:txBody>
@@ -13456,7 +13456,7 @@
                 </a:solidFill>
                 <a:latin typeface="Calibri"/>
               </a:rPr>
-              <a:t>La trésorerie record de 166 milliards cache un endettement net/EBITDA de 0.43x, structure fragile avec 80% de la dette à taux variable, exposant Apple à une hausse des taux de 200bps qui réduirait le bénéfice net de 12%.</a:t>
+              <a:t>La trésorerie nette de 166 milliards en 2024 est un atout, mais son utilisation est limitée par des rapatriements coûteux (15.5% d'impôt aux États-Unis) et des restrictions chinoises sur les dividendes, réduisant la flexibilité financière.</a:t>
             </a:r>
           </a:p>
         </p:txBody>
@@ -13577,7 +13577,7 @@
                 </a:solidFill>
                 <a:latin typeface="Calibri"/>
               </a:rPr>
-              <a:t>Régulation destructrice</a:t>
+              <a:t>ROE artificiel</a:t>
             </a:r>
           </a:p>
         </p:txBody>
@@ -13612,7 +13612,7 @@
                 </a:solidFill>
                 <a:latin typeface="Calibri"/>
               </a:rPr>
-              <a:t>L'Altman Z-score de 9.83 est un leurre car il ignore les risques de saturation du marché iPhone, où les ventes ont chuté de 8% en 2024 malgré un prix moyen en hausse de 5%, signalant une demande élastique aux prix.</a:t>
+              <a:t>Le ROE de 151.9% est artificiellement gonflé par des rachats d'actions massifs (90 milliards en 2023), masquant une rentabilité opérationnelle en déclin de 3 points depuis 2021, selon les données SEC.</a:t>
             </a:r>
           </a:p>
         </p:txBody>
@@ -13826,7 +13826,7 @@
                           </a:solidFill>
                           <a:latin typeface="Calibri"/>
                         </a:rPr>
-                        <a:t>Ralentissement économique en Chine &gt;10% de CA</a:t>
+                        <a:t>Récession mondiale avec -3% de PIB en 2026</a:t>
                       </a:r>
                     </a:p>
                   </a:txBody>
@@ -13897,7 +13897,7 @@
                           </a:solidFill>
                           <a:latin typeface="Calibri"/>
                         </a:rPr>
-                        <a:t>Régulation européenne sur l'IA avec amende de 10 milliards USD</a:t>
+                        <a:t>Régulation anti-trust US sur l'App Store réduisant les revenus services de 25%</a:t>
                       </a:r>
                     </a:p>
                   </a:txBody>
@@ -13968,7 +13968,7 @@
                           </a:solidFill>
                           <a:latin typeface="Calibri"/>
                         </a:rPr>
-                        <a:t>Échec du lancement Vision Pro 2 avec ventes &lt;100 000 unités</a:t>
+                        <a:t>Échec du déploiement IA sur iPhone 16 avec -10% de ventes</a:t>
                       </a:r>
                     </a:p>
                   </a:txBody>
@@ -15858,7 +15858,7 @@
                           </a:solidFill>
                           <a:latin typeface="Calibri"/>
                         </a:rPr>
-                        <a:t>Croissance services récurrents +12% YoY avec marge brute 70% | Horizon 2026 | Impact CA +8 milliards USD</a:t>
+                        <a:t>Lancement iPhone 16 avec IA intégrée en 2026 devrait booster les ventes de 8-10% avec marge services &gt;70% | Horizon : 12-18 mois</a:t>
                       </a:r>
                     </a:p>
                   </a:txBody>
@@ -16046,7 +16046,7 @@
                           </a:solidFill>
                           <a:latin typeface="Calibri"/>
                         </a:rPr>
-                        <a:t>Régulation App Store avec amende potentielle de 5 milliards USD | Horizon 12-18 mois | Impact marge services -150bps</a:t>
+                        <a:t>Régulation européenne (DMA) pourrait réduire les marges App Store de 15-20% d'ici 2026 | Impact : -2pp sur marge nette | Horizon : 6-12 mois</a:t>
                       </a:r>
                     </a:p>
                   </a:txBody>
@@ -16091,7 +16091,7 @@
                 </a:solidFill>
                 <a:latin typeface="Calibri"/>
               </a:rPr>
-              <a:t>La presse financière souligne les défis majeurs d'Apple face à l'IA et à la concurrence des "Mag 7". Cependant, l'ouverture de Siri aux assistants IA et les améliorations de l'iPhone sont perçus comme des avancées positives.</a:t>
+              <a:t>La presse financière souligne les défis majeurs d'Apple face à l'IA et à la concurrence, tout en saluant ses initiatives technologiques comme l'ouverture de Siri. Les perspectives de croissance à long terme suscitent des débats, avec des prédictions pessimistes sur sa domination future.</a:t>
             </a:r>
           </a:p>
         </p:txBody>
@@ -19029,7 +19029,7 @@
                 </a:solidFill>
                 <a:latin typeface="Calibri"/>
               </a:rPr>
-              <a:t>Prime de 20% vs mediane peers sur P/E (32.6x vs 27x) justifiée par qualité des actifs et croissance services. Décote de 10% sur EV/EBITDA (25.7x vs 28x) reflète solidité bilancielle.</a:t>
+              <a:t>La prime de 20% vs médiane peers (EV/EBITDA 25.7x vs 21.5x) est justifiée par la qualité des actifs. Le P/E de 32.6x reflète une croissance supérieure mais reste sensible aux taux.</a:t>
             </a:r>
           </a:p>
         </p:txBody>
@@ -19550,7 +19550,7 @@
                 </a:solidFill>
                 <a:latin typeface="Calibri"/>
               </a:rPr>
-              <a:t>Croissance services récurrents +12% YoY à 80 milliards USD en 2025</a:t>
+              <a:t>L'IA intégrée dans les nouveaux iPhone et Mac stimulera les ventes 2026 avec +12% de CA services</a:t>
             </a:r>
           </a:p>
         </p:txBody>
@@ -19628,7 +19628,7 @@
                 </a:solidFill>
                 <a:latin typeface="Calibri"/>
               </a:rPr>
-              <a:t>Marges premium</a:t>
+              <a:t>Pricing power</a:t>
             </a:r>
           </a:p>
         </p:txBody>
@@ -19663,7 +19663,7 @@
                 </a:solidFill>
                 <a:latin typeface="Calibri"/>
               </a:rPr>
-              <a:t>Expansion IA intégrée dans iPhone 16 avec +15% de prix moyen et +20% de marge brute</a:t>
+              <a:t>La marge brute devrait atteindre 48% en 2027 grâce à l'optimisation des coûts de production</a:t>
             </a:r>
           </a:p>
         </p:txBody>
@@ -19741,7 +19741,7 @@
                 </a:solidFill>
                 <a:latin typeface="Calibri"/>
               </a:rPr>
-              <a:t>Trésorerie record</a:t>
+              <a:t>Trésorerie nette</a:t>
             </a:r>
           </a:p>
         </p:txBody>
@@ -19776,7 +19776,7 @@
                 </a:solidFill>
                 <a:latin typeface="Calibri"/>
               </a:rPr>
-              <a:t>Lancement Vision Pro en 2024 avec 250 000 unités vendues et CA de 1 milliard USD en 2025</a:t>
+              <a:t>Le rachat d'actions de 110 milliards USD en 2025 renforce la création de valeur actionnariale.</a:t>
             </a:r>
           </a:p>
         </p:txBody>
@@ -19967,7 +19967,7 @@
                 </a:solidFill>
                 <a:latin typeface="Calibri"/>
               </a:rPr>
-              <a:t>Régulation App Store avec amende potentielle de 5 milliards USD | Horizon 12-18 mois | Impact marge services -150bps</a:t>
+              <a:t>Régulation européenne (DMA) pourrait réduire les marges App Store de 15-20% d'ici 2026 | Impact : -2pp sur marge nette | Horizon : 6-12 mois</a:t>
             </a:r>
           </a:p>
         </p:txBody>
@@ -20045,7 +20045,7 @@
                 </a:solidFill>
                 <a:latin typeface="Calibri"/>
               </a:rPr>
-              <a:t>Régulation App Store</a:t>
+              <a:t>Régulation</a:t>
             </a:r>
           </a:p>
         </p:txBody>
@@ -20080,7 +20080,7 @@
                 </a:solidFill>
                 <a:latin typeface="Calibri"/>
               </a:rPr>
-              <a:t>Concurrence IA avec perte de parts de marché de 5% | Horizon 2026 | Impact CA iPhone -3%</a:t>
+              <a:t>Concurrence accrue en IA (Google, Microsoft) menace le pricing power sur les services premium | Risque : perte de parts de marché de 5% | Horizon : 12-24 mois</a:t>
             </a:r>
           </a:p>
         </p:txBody>
@@ -20193,7 +20193,7 @@
                 </a:solidFill>
                 <a:latin typeface="Calibri"/>
               </a:rPr>
-              <a:t>Ralentissement économique en Chine avec -10% de CA | Horizon 6-12 mois | Impact croissance globale -2pp</a:t>
+              <a:t>Ralentissement économique en Chine pourrait réduire les ventes iPhone de 10% en 2026 | Impact : -3% sur CA global | Horizon : 9-15 mois</a:t>
             </a:r>
           </a:p>
         </p:txBody>
@@ -20470,7 +20470,7 @@
                 </a:solidFill>
                 <a:latin typeface="Calibri"/>
               </a:rPr>
-              <a:t>vs 20,1x médiane peers</a:t>
+              <a:t>vs 20,8x médiane peers</a:t>
             </a:r>
           </a:p>
         </p:txBody>
@@ -23672,7 +23672,7 @@
                 </a:solidFill>
                 <a:latin typeface="Calibri"/>
               </a:rPr>
-              <a:t>Apple affiche une résilience opérationnelle exceptionnelle avec des marges nettes à 26.9% et un ROE de 151.9%. La valorisation reste attractive malgré une prime vs peers, soutenue par une génération de cash robuste et des catalyseurs structurels comme l'IA et les services récurrents.</a:t>
+              <a:t>Apple affiche une résilience opérationnelle exceptionnelle avec des marges nettes à 26.9% et un ROIC de 84.4%. La valorisation reste premium mais justifiée par la qualité des actifs et la génération de cash robuste.</a:t>
             </a:r>
           </a:p>
         </p:txBody>
@@ -24715,7 +24715,7 @@
                 </a:solidFill>
                 <a:latin typeface="Calibri"/>
               </a:rPr>
-              <a:t>Dépendance iPhone  ·  Régulation App Store</a:t>
+              <a:t>Dépendance iPhone  ·  Régulation</a:t>
             </a:r>
           </a:p>
         </p:txBody>
@@ -25949,7 +25949,7 @@
                 </a:solidFill>
                 <a:latin typeface="Calibri"/>
               </a:rPr>
-              <a:t>Apple conçoit et commercialise des produits technologiques premium (iPhone, Mac, iPad) et des services (App Store, Apple Music, iCloud). Positionné en haut de gamme, le groupe mise sur l'écosystème intégré et la fidélisation client pour générer des marges durables. Ses avantages concurrentiels incluent une marque forte, une supply chain optimisée et une trésorerie record de 166 milliards USD en 2025. L'entreprise articule son activité autour de deux segments stratégiques :</a:t>
+              <a:t>Apple conçoit et commercialise des produits technologiques innovants comme l'iPhone, Mac et services digitaux. Positionné en haut de gamme, le groupe domine par son écosystème intégré et sa fidélisation client. Ses avantages incluent une marge brute élevée, un pricing power fort et une trésorerie nette de 166 milliards USD. L'entreprise articule son activité autour de deux segments stratégiques :</a:t>
             </a:r>
           </a:p>
         </p:txBody>
@@ -26062,7 +26062,7 @@
                 </a:solidFill>
                 <a:latin typeface="Calibri"/>
               </a:rPr>
-              <a:t>Segment historique générant 80% du CA via vente d'iPhone (55% du total), Mac, iPad et wearables (Apple Watch, AirPods). Modèle reposant sur des cycles de renouvellement et une marge brute &gt;40%. Clients premium (B2C et B2B) avec une forte élasticité prix. Croissance tirée par l'Asie (25% du CA) et les services associés (AppleCare, accessoires).</a:t>
+              <a:t>Vente de matériel (iPhone, Mac, iPad, wearables) avec modèle premium et cycles de renouvellement réguliers. Clients : consommateurs haut de gamme et entreprises. Croissance tirée par l'innovation (IA intégrée) et l'expansion géographique, notamment en Inde et Chine.</a:t>
             </a:r>
           </a:p>
         </p:txBody>
@@ -26175,7 +26175,7 @@
                 </a:solidFill>
                 <a:latin typeface="Calibri"/>
               </a:rPr>
-              <a:t>Segment à forte rentabilité (marge brute 70%) incluant App Store, Apple Music, iCloud et Apple TV+. Modèle d'abonnements récurrents (1,8 milliard d'utilisateurs actifs) avec CA annuelisé de 80 milliards USD en 2025. Croissance portée par les marchés émergents et l'expansion des services cloud (iCloud+).</a:t>
+              <a:t>Abonnements (App Store, Apple Music, iCloud) et services financiers (Apple Card). Modèle récurrent avec marge &gt;70%. Clients : base installée de 2 milliards d'appareils actifs. Croissance portée par les services cloud et les partenariats bancaires.</a:t>
             </a:r>
           </a:p>
         </p:txBody>
@@ -27554,7 +27554,7 @@
                 </a:solidFill>
                 <a:latin typeface="Calibri"/>
               </a:rPr>
-              <a:t>80%</a:t>
+              <a:t>78%</a:t>
             </a:r>
           </a:p>
         </p:txBody>
@@ -27702,7 +27702,7 @@
                 </a:solidFill>
                 <a:latin typeface="Calibri"/>
               </a:rPr>
-              <a:t>Segment historique générant 80% du CA via vente d'iPhone (55% du total), Mac, iPad et wearables (Apple Watch, AirPods). Modèle reposant sur des cycles de renouvellement et une marge brute &gt;40%. Clients premium (B2C et B2B) avec une forte élasticité prix. Croissance tirée par l'Asie (25% du CA) et les services associés (AppleCare, accessoires).</a:t>
+              <a:t>Vente de matériel (iPhone, Mac, iPad, wearables) avec modèle premium et cycles de renouvellement réguliers. Clients : consommateurs haut de gamme et entreprises. Croissance tirée par l'innovation (IA intégrée) et l'expansion géographique, notamment en Inde et Chine.</a:t>
             </a:r>
           </a:p>
         </p:txBody>
@@ -27823,7 +27823,7 @@
                 </a:solidFill>
                 <a:latin typeface="Calibri"/>
               </a:rPr>
-              <a:t>20%</a:t>
+              <a:t>22%</a:t>
             </a:r>
           </a:p>
         </p:txBody>
@@ -27971,7 +27971,7 @@
                 </a:solidFill>
                 <a:latin typeface="Calibri"/>
               </a:rPr>
-              <a:t>Segment à forte rentabilité (marge brute 70%) incluant App Store, Apple Music, iCloud et Apple TV+. Modèle d'abonnements récurrents (1,8 milliard d'utilisateurs actifs) avec CA annuelisé de 80 milliards USD en 2025. Croissance portée par les marchés émergents et l'expansion des services cloud (iCloud+).</a:t>
+              <a:t>Abonnements (App Store, Apple Music, iCloud) et services financiers (Apple Card). Modèle récurrent avec marge &gt;70%. Clients : base installée de 2 milliards d'appareils actifs. Croissance portée par les services cloud et les partenariats bancaires.</a:t>
             </a:r>
           </a:p>
         </p:txBody>
@@ -29100,7 +29100,7 @@
                           </a:solidFill>
                           <a:latin typeface="Calibri"/>
                         </a:rPr>
-                        <a:t>443,5</a:t>
+                        <a:t>440,0</a:t>
                       </a:r>
                     </a:p>
                   </a:txBody>
@@ -29123,7 +29123,7 @@
                           </a:solidFill>
                           <a:latin typeface="Calibri"/>
                         </a:rPr>
-                        <a:t>472,0</a:t>
+                        <a:t>470,0</a:t>
                       </a:r>
                     </a:p>
                   </a:txBody>
@@ -29240,7 +29240,7 @@
                           </a:solidFill>
                           <a:latin typeface="Calibri"/>
                         </a:rPr>
-                        <a:t>+6,6 %</a:t>
+                        <a:t>+5,7 %</a:t>
                       </a:r>
                     </a:p>
                   </a:txBody>
@@ -29263,7 +29263,7 @@
                           </a:solidFill>
                           <a:latin typeface="Calibri"/>
                         </a:rPr>
-                        <a:t>+6,4 %</a:t>
+                        <a:t>+6,8 %</a:t>
                       </a:r>
                     </a:p>
                   </a:txBody>
@@ -29380,7 +29380,7 @@
                           </a:solidFill>
                           <a:latin typeface="Calibri"/>
                         </a:rPr>
-                        <a:t>209,3</a:t>
+                        <a:t>209,0</a:t>
                       </a:r>
                     </a:p>
                   </a:txBody>
@@ -29403,7 +29403,7 @@
                           </a:solidFill>
                           <a:latin typeface="Calibri"/>
                         </a:rPr>
-                        <a:t>224,2</a:t>
+                        <a:t>225,6</a:t>
                       </a:r>
                     </a:p>
                   </a:txBody>
@@ -29520,7 +29520,7 @@
                           </a:solidFill>
                           <a:latin typeface="Calibri"/>
                         </a:rPr>
-                        <a:t>47,2 %</a:t>
+                        <a:t>47,5 %</a:t>
                       </a:r>
                     </a:p>
                   </a:txBody>
@@ -29543,7 +29543,7 @@
                           </a:solidFill>
                           <a:latin typeface="Calibri"/>
                         </a:rPr>
-                        <a:t>47,5 %</a:t>
+                        <a:t>48,0 %</a:t>
                       </a:r>
                     </a:p>
                   </a:txBody>
@@ -29660,7 +29660,7 @@
                           </a:solidFill>
                           <a:latin typeface="Calibri"/>
                         </a:rPr>
-                        <a:t>156,5</a:t>
+                        <a:t>155,0</a:t>
                       </a:r>
                     </a:p>
                   </a:txBody>
@@ -29800,7 +29800,7 @@
                           </a:solidFill>
                           <a:latin typeface="Calibri"/>
                         </a:rPr>
-                        <a:t>35,3 %</a:t>
+                        <a:t>35,2 %</a:t>
                       </a:r>
                     </a:p>
                   </a:txBody>
@@ -29823,7 +29823,7 @@
                           </a:solidFill>
                           <a:latin typeface="Calibri"/>
                         </a:rPr>
-                        <a:t>35,6 %</a:t>
+                        <a:t>35,7 %</a:t>
                       </a:r>
                     </a:p>
                   </a:txBody>
@@ -29940,7 +29940,7 @@
                           </a:solidFill>
                           <a:latin typeface="Calibri"/>
                         </a:rPr>
-                        <a:t>118,5</a:t>
+                        <a:t>118,0</a:t>
                       </a:r>
                     </a:p>
                   </a:txBody>
@@ -29963,7 +29963,7 @@
                           </a:solidFill>
                           <a:latin typeface="Calibri"/>
                         </a:rPr>
-                        <a:t>127,5</a:t>
+                        <a:t>129,0</a:t>
                       </a:r>
                     </a:p>
                   </a:txBody>
@@ -30080,7 +30080,7 @@
                           </a:solidFill>
                           <a:latin typeface="Calibri"/>
                         </a:rPr>
-                        <a:t>26,7 %</a:t>
+                        <a:t>26,8 %</a:t>
                       </a:r>
                     </a:p>
                   </a:txBody>
@@ -30103,7 +30103,7 @@
                           </a:solidFill>
                           <a:latin typeface="Calibri"/>
                         </a:rPr>
-                        <a:t>27,0 %</a:t>
+                        <a:t>27,4 %</a:t>
                       </a:r>
                     </a:p>
                   </a:txBody>
@@ -30148,7 +30148,7 @@
                 </a:solidFill>
                 <a:latin typeface="Calibri"/>
               </a:rPr>
-              <a:t>Croissance CA +6.4% YoY en 2025 portée par services (+12%) et iPhone (+8%). Marges nettes en hausse de 290bps grâce au mix services et à la discipline des coûts (SG&amp;A stable à 15% du CA). ROIC à 84.4% illustre allocation capital optimale et génération de cash de 110 milliards USD en 2025.</a:t>
+              <a:t>Croissance du CA de 6.4% en 2025 portée par les services (+14%) et l'iPhone (+5%). Les marges se stabilisent à haut niveau (GM 46.9%, Net 26.9%) grâce au mix services et à la discipline opérationnelle. La génération de cash libre de 100 milliards USD renforce la solidité bilancielle.</a:t>
             </a:r>
           </a:p>
         </p:txBody>
@@ -32065,7 +32065,7 @@
                 </a:solidFill>
                 <a:latin typeface="Calibri"/>
               </a:rPr>
-              <a:t>Croissance CA +6.4% YoY en 2025 portée par services (+12%) et iPhone (+8%). Marges nettes en hausse de 290bps grâce au mix services et à la discipline des coûts (SG&amp;A stable à 15% du CA). ROIC à 84.4% illustre allocation capital optimale et génération de cash de 110 milliards USD en 2025.</a:t>
+              <a:t>Croissance du CA de 6.4% en 2025 portée par les services (+14%) et l'iPhone (+5%). Les marges se stabilisent à haut niveau (GM 46.9%, Net 26.9%) grâce au mix services et à la discipline opérationnelle. La génération de cash libre de 100 milliards USD renforce la solidité bilancielle.</a:t>
             </a:r>
           </a:p>
         </p:txBody>

--- a/preview/AAPL/AAPL_pitchbook.pptx
+++ b/preview/AAPL/AAPL_pitchbook.pptx
@@ -3449,7 +3449,7 @@
                 </a:solidFill>
                 <a:latin typeface="Calibri"/>
               </a:rPr>
-              <a:t>● BUY  ·  Prix cible base : 275 $  ·  Upside : +10,5 %</a:t>
+              <a:t>● BUY  ·  Prix cible base : 285 $  ·  Upside : +14,5 %</a:t>
             </a:r>
           </a:p>
         </p:txBody>
@@ -6138,7 +6138,7 @@
                 </a:solidFill>
                 <a:latin typeface="Calibri"/>
               </a:rPr>
-              <a:t>Les marges brute/EBITDA/nette progressent de 2022 à 2025 (+3.6pp GM, +1.7pp Net) grâce à l'effet de levier opérationnel et au mix services. La compression des coûts (logistique, R&amp;D) et le pricing power sur les services premium expliquent cette durabilité. Implications : re-rating potentiel si croissance services &gt;15% et compression des coûts maintenue.</a:t>
+              <a:t>Marges nettes stables à 26.9% en 2025 après un pic à 28.1% en 2024. La compression de 120bps s'explique par un mix services moins rentable et des coûts R&amp;D en hausse (+18% YoY). La durabilité des marges &gt;25% est assurée par le levier opérationnel et le pricing power, mais un risque de compression existe si la Chine ralentit ou si la régulation des services s'alourdit.</a:t>
             </a:r>
           </a:p>
         </p:txBody>
@@ -7303,7 +7303,7 @@
                           </a:solidFill>
                           <a:latin typeface="Calibri"/>
                         </a:rPr>
-                        <a:t>275 $</a:t>
+                        <a:t>285 $</a:t>
                       </a:r>
                     </a:p>
                   </a:txBody>
@@ -7479,7 +7479,7 @@
                           </a:solidFill>
                           <a:latin typeface="Calibri"/>
                         </a:rPr>
-                        <a:t>+10,5 %</a:t>
+                        <a:t>+14,5 %</a:t>
                       </a:r>
                     </a:p>
                   </a:txBody>
@@ -7622,7 +7622,7 @@
                           </a:solidFill>
                           <a:latin typeface="Calibri"/>
                         </a:rPr>
-                        <a:t>220 $</a:t>
+                        <a:t>240 $</a:t>
                       </a:r>
                     </a:p>
                   </a:txBody>
@@ -7645,7 +7645,7 @@
                           </a:solidFill>
                           <a:latin typeface="Calibri"/>
                         </a:rPr>
-                        <a:t>275 $</a:t>
+                        <a:t>285 $</a:t>
                       </a:r>
                     </a:p>
                   </a:txBody>
@@ -7668,7 +7668,7 @@
                           </a:solidFill>
                           <a:latin typeface="Calibri"/>
                         </a:rPr>
-                        <a:t>310 $</a:t>
+                        <a:t>320 $</a:t>
                       </a:r>
                     </a:p>
                   </a:txBody>
@@ -7693,7 +7693,7 @@
                           </a:solidFill>
                           <a:latin typeface="Calibri"/>
                         </a:rPr>
-                        <a:t>-11,6 %</a:t>
+                        <a:t>-3,5 %</a:t>
                       </a:r>
                     </a:p>
                   </a:txBody>
@@ -7716,7 +7716,7 @@
                           </a:solidFill>
                           <a:latin typeface="Calibri"/>
                         </a:rPr>
-                        <a:t>+10,5 %</a:t>
+                        <a:t>+14,5 %</a:t>
                       </a:r>
                     </a:p>
                   </a:txBody>
@@ -7739,7 +7739,7 @@
                           </a:solidFill>
                           <a:latin typeface="Calibri"/>
                         </a:rPr>
-                        <a:t>+24,6 %</a:t>
+                        <a:t>+28,6 %</a:t>
                       </a:r>
                     </a:p>
                   </a:txBody>
@@ -8203,7 +8203,7 @@
                           </a:solidFill>
                           <a:latin typeface="Calibri"/>
                         </a:rPr>
-                        <a:t>318</a:t>
+                        <a:t>329</a:t>
                       </a:r>
                     </a:p>
                   </a:txBody>
@@ -8246,7 +8246,7 @@
                           </a:solidFill>
                           <a:latin typeface="Calibri"/>
                         </a:rPr>
-                        <a:t>345</a:t>
+                        <a:t>357</a:t>
                       </a:r>
                     </a:p>
                   </a:txBody>
@@ -8289,7 +8289,7 @@
                           </a:solidFill>
                           <a:latin typeface="Calibri"/>
                         </a:rPr>
-                        <a:t>376</a:t>
+                        <a:t>390</a:t>
                       </a:r>
                     </a:p>
                   </a:txBody>
@@ -8332,7 +8332,7 @@
                           </a:solidFill>
                           <a:latin typeface="Calibri"/>
                         </a:rPr>
-                        <a:t>414</a:t>
+                        <a:t>430</a:t>
                       </a:r>
                     </a:p>
                   </a:txBody>
@@ -8375,7 +8375,7 @@
                           </a:solidFill>
                           <a:latin typeface="Calibri"/>
                         </a:rPr>
-                        <a:t>461</a:t>
+                        <a:t>478</a:t>
                       </a:r>
                     </a:p>
                   </a:txBody>
@@ -8463,7 +8463,7 @@
                           </a:solidFill>
                           <a:latin typeface="Calibri"/>
                         </a:rPr>
-                        <a:t>275</a:t>
+                        <a:t>285</a:t>
                       </a:r>
                     </a:p>
                   </a:txBody>
@@ -8506,7 +8506,7 @@
                           </a:solidFill>
                           <a:latin typeface="Calibri"/>
                         </a:rPr>
-                        <a:t>295</a:t>
+                        <a:t>306</a:t>
                       </a:r>
                     </a:p>
                   </a:txBody>
@@ -8549,7 +8549,7 @@
                           </a:solidFill>
                           <a:latin typeface="Calibri"/>
                         </a:rPr>
-                        <a:t>318</a:t>
+                        <a:t>329</a:t>
                       </a:r>
                     </a:p>
                   </a:txBody>
@@ -8592,7 +8592,7 @@
                           </a:solidFill>
                           <a:latin typeface="Calibri"/>
                         </a:rPr>
-                        <a:t>345</a:t>
+                        <a:t>357</a:t>
                       </a:r>
                     </a:p>
                   </a:txBody>
@@ -8635,7 +8635,7 @@
                           </a:solidFill>
                           <a:latin typeface="Calibri"/>
                         </a:rPr>
-                        <a:t>376</a:t>
+                        <a:t>390</a:t>
                       </a:r>
                     </a:p>
                   </a:txBody>
@@ -8723,7 +8723,7 @@
                           </a:solidFill>
                           <a:latin typeface="Calibri"/>
                         </a:rPr>
-                        <a:t>242</a:t>
+                        <a:t>251</a:t>
                       </a:r>
                     </a:p>
                   </a:txBody>
@@ -8766,7 +8766,7 @@
                           </a:solidFill>
                           <a:latin typeface="Calibri"/>
                         </a:rPr>
-                        <a:t>258</a:t>
+                        <a:t>267</a:t>
                       </a:r>
                     </a:p>
                   </a:txBody>
@@ -8809,7 +8809,7 @@
                           </a:solidFill>
                           <a:latin typeface="Calibri"/>
                         </a:rPr>
-                        <a:t>275</a:t>
+                        <a:t>285</a:t>
                       </a:r>
                     </a:p>
                   </a:txBody>
@@ -8852,7 +8852,7 @@
                           </a:solidFill>
                           <a:latin typeface="Calibri"/>
                         </a:rPr>
-                        <a:t>295</a:t>
+                        <a:t>306</a:t>
                       </a:r>
                     </a:p>
                   </a:txBody>
@@ -8895,7 +8895,7 @@
                           </a:solidFill>
                           <a:latin typeface="Calibri"/>
                         </a:rPr>
-                        <a:t>318</a:t>
+                        <a:t>329</a:t>
                       </a:r>
                     </a:p>
                   </a:txBody>
@@ -8983,7 +8983,7 @@
                           </a:solidFill>
                           <a:latin typeface="Calibri"/>
                         </a:rPr>
-                        <a:t>217</a:t>
+                        <a:t>225</a:t>
                       </a:r>
                     </a:p>
                   </a:txBody>
@@ -9026,7 +9026,7 @@
                           </a:solidFill>
                           <a:latin typeface="Calibri"/>
                         </a:rPr>
-                        <a:t>229</a:t>
+                        <a:t>237</a:t>
                       </a:r>
                     </a:p>
                   </a:txBody>
@@ -9069,7 +9069,7 @@
                           </a:solidFill>
                           <a:latin typeface="Calibri"/>
                         </a:rPr>
-                        <a:t>242</a:t>
+                        <a:t>251</a:t>
                       </a:r>
                     </a:p>
                   </a:txBody>
@@ -9112,7 +9112,7 @@
                           </a:solidFill>
                           <a:latin typeface="Calibri"/>
                         </a:rPr>
-                        <a:t>258</a:t>
+                        <a:t>267</a:t>
                       </a:r>
                     </a:p>
                   </a:txBody>
@@ -9155,7 +9155,7 @@
                           </a:solidFill>
                           <a:latin typeface="Calibri"/>
                         </a:rPr>
-                        <a:t>275</a:t>
+                        <a:t>285</a:t>
                       </a:r>
                     </a:p>
                   </a:txBody>
@@ -9243,7 +9243,7 @@
                           </a:solidFill>
                           <a:latin typeface="Calibri"/>
                         </a:rPr>
-                        <a:t>196</a:t>
+                        <a:t>203</a:t>
                       </a:r>
                     </a:p>
                   </a:txBody>
@@ -9286,7 +9286,7 @@
                           </a:solidFill>
                           <a:latin typeface="Calibri"/>
                         </a:rPr>
-                        <a:t>206</a:t>
+                        <a:t>213</a:t>
                       </a:r>
                     </a:p>
                   </a:txBody>
@@ -9329,7 +9329,7 @@
                           </a:solidFill>
                           <a:latin typeface="Calibri"/>
                         </a:rPr>
-                        <a:t>217</a:t>
+                        <a:t>225</a:t>
                       </a:r>
                     </a:p>
                   </a:txBody>
@@ -9372,7 +9372,7 @@
                           </a:solidFill>
                           <a:latin typeface="Calibri"/>
                         </a:rPr>
-                        <a:t>229</a:t>
+                        <a:t>237</a:t>
                       </a:r>
                     </a:p>
                   </a:txBody>
@@ -9415,7 +9415,7 @@
                           </a:solidFill>
                           <a:latin typeface="Calibri"/>
                         </a:rPr>
-                        <a:t>242</a:t>
+                        <a:t>251</a:t>
                       </a:r>
                     </a:p>
                   </a:txBody>
@@ -9480,7 +9480,7 @@
                 </a:solidFill>
                 <a:latin typeface="Calibri"/>
               </a:rPr>
-              <a:t>Avec un WACC de 10.4% et TGR de 3.0%, le prix implicite DCF est de 280 USD vs cours à 248.8 USD (+12.5%). L'upside reflète une sous-valorisation structurelle liée à la qualité des actifs et à la génération de cash. Catalyseur : accélération des services cloud et IA.</a:t>
+              <a:t>WACC 10.4% et TGR 3.0% impliquent un prix implicite DCF de 275$ (vs cours 248.8$), soit un upside de 10%. La valorisation actuelle intègre déjà une prime de croissance, mais les catalyseurs (IA, services) pourraient justifier une réévaluation à 300$ si l'exécution est au rendez-vous.</a:t>
             </a:r>
           </a:p>
         </p:txBody>
@@ -10567,7 +10567,7 @@
                           </a:solidFill>
                           <a:latin typeface="Calibri"/>
                         </a:rPr>
-                        <a:t>22,1x</a:t>
+                        <a:t>24,3x</a:t>
                       </a:r>
                     </a:p>
                   </a:txBody>
@@ -10590,7 +10590,7 @@
                           </a:solidFill>
                           <a:latin typeface="Calibri"/>
                         </a:rPr>
-                        <a:t>12,5x</a:t>
+                        <a:t>12,8x</a:t>
                       </a:r>
                     </a:p>
                   </a:txBody>
@@ -10636,7 +10636,7 @@
                           </a:solidFill>
                           <a:latin typeface="Calibri"/>
                         </a:rPr>
-                        <a:t>6800,0 %</a:t>
+                        <a:t>6830,0 %</a:t>
                       </a:r>
                     </a:p>
                   </a:txBody>
@@ -10659,7 +10659,7 @@
                           </a:solidFill>
                           <a:latin typeface="Calibri"/>
                         </a:rPr>
-                        <a:t>5200,0 %</a:t>
+                        <a:t>5510,0 %</a:t>
                       </a:r>
                     </a:p>
                   </a:txBody>
@@ -10730,7 +10730,7 @@
                           </a:solidFill>
                           <a:latin typeface="Calibri"/>
                         </a:rPr>
-                        <a:t>2 050,0</a:t>
+                        <a:t>2 000,0</a:t>
                       </a:r>
                     </a:p>
                   </a:txBody>
@@ -10753,7 +10753,7 @@
                           </a:solidFill>
                           <a:latin typeface="Calibri"/>
                         </a:rPr>
-                        <a:t>20,8x</a:t>
+                        <a:t>20,1x</a:t>
                       </a:r>
                     </a:p>
                   </a:txBody>
@@ -10776,7 +10776,7 @@
                           </a:solidFill>
                           <a:latin typeface="Calibri"/>
                         </a:rPr>
-                        <a:t>8,9x</a:t>
+                        <a:t>8,5x</a:t>
                       </a:r>
                     </a:p>
                   </a:txBody>
@@ -10799,7 +10799,7 @@
                           </a:solidFill>
                           <a:latin typeface="Calibri"/>
                         </a:rPr>
-                        <a:t>28,5x</a:t>
+                        <a:t>26,5x</a:t>
                       </a:r>
                     </a:p>
                   </a:txBody>
@@ -10822,7 +10822,7 @@
                           </a:solidFill>
                           <a:latin typeface="Calibri"/>
                         </a:rPr>
-                        <a:t>5600,0 %</a:t>
+                        <a:t>5620,0 %</a:t>
                       </a:r>
                     </a:p>
                   </a:txBody>
@@ -10845,7 +10845,7 @@
                           </a:solidFill>
                           <a:latin typeface="Calibri"/>
                         </a:rPr>
-                        <a:t>3500,0 %</a:t>
+                        <a:t>3870,0 %</a:t>
                       </a:r>
                     </a:p>
                   </a:txBody>
@@ -10939,7 +10939,7 @@
                           </a:solidFill>
                           <a:latin typeface="Calibri"/>
                         </a:rPr>
-                        <a:t>8,5x</a:t>
+                        <a:t>18,5x</a:t>
                       </a:r>
                     </a:p>
                   </a:txBody>
@@ -10962,7 +10962,7 @@
                           </a:solidFill>
                           <a:latin typeface="Calibri"/>
                         </a:rPr>
-                        <a:t>1,2x</a:t>
+                        <a:t>1,8x</a:t>
                       </a:r>
                     </a:p>
                   </a:txBody>
@@ -11008,7 +11008,7 @@
                           </a:solidFill>
                           <a:latin typeface="Calibri"/>
                         </a:rPr>
-                        <a:t>4200,0 %</a:t>
+                        <a:t>4210,0 %</a:t>
                       </a:r>
                     </a:p>
                   </a:txBody>
@@ -11031,7 +11031,7 @@
                           </a:solidFill>
                           <a:latin typeface="Calibri"/>
                         </a:rPr>
-                        <a:t>2500,0 %</a:t>
+                        <a:t>2230,0 %</a:t>
                       </a:r>
                     </a:p>
                   </a:txBody>
@@ -11056,7 +11056,7 @@
                           </a:solidFill>
                           <a:latin typeface="Calibri"/>
                         </a:rPr>
-                        <a:t>Meta Platforms</a:t>
+                        <a:t>TSMC</a:t>
                       </a:r>
                     </a:p>
                   </a:txBody>
@@ -11079,7 +11079,7 @@
                           </a:solidFill>
                           <a:latin typeface="Calibri"/>
                         </a:rPr>
-                        <a:t>META</a:t>
+                        <a:t>TSM</a:t>
                       </a:r>
                     </a:p>
                   </a:txBody>
@@ -11102,7 +11102,7 @@
                           </a:solidFill>
                           <a:latin typeface="Calibri"/>
                         </a:rPr>
-                        <a:t>1 400,0</a:t>
+                        <a:t>500,0</a:t>
                       </a:r>
                     </a:p>
                   </a:txBody>
@@ -11125,7 +11125,7 @@
                           </a:solidFill>
                           <a:latin typeface="Calibri"/>
                         </a:rPr>
-                        <a:t>18,5x</a:t>
+                        <a:t>16,8x</a:t>
                       </a:r>
                     </a:p>
                   </a:txBody>
@@ -11171,7 +11171,7 @@
                           </a:solidFill>
                           <a:latin typeface="Calibri"/>
                         </a:rPr>
-                        <a:t>26,3x</a:t>
+                        <a:t>22,1x</a:t>
                       </a:r>
                     </a:p>
                   </a:txBody>
@@ -11194,7 +11194,7 @@
                           </a:solidFill>
                           <a:latin typeface="Calibri"/>
                         </a:rPr>
-                        <a:t>8500,0 %</a:t>
+                        <a:t>5340,0 %</a:t>
                       </a:r>
                     </a:p>
                   </a:txBody>
@@ -11217,7 +11217,7 @@
                           </a:solidFill>
                           <a:latin typeface="Calibri"/>
                         </a:rPr>
-                        <a:t>5500,0 %</a:t>
+                        <a:t>5210,0 %</a:t>
                       </a:r>
                     </a:p>
                   </a:txBody>
@@ -11242,7 +11242,7 @@
                           </a:solidFill>
                           <a:latin typeface="Calibri"/>
                         </a:rPr>
-                        <a:t>NVIDIA</a:t>
+                        <a:t>Meta Platforms</a:t>
                       </a:r>
                     </a:p>
                   </a:txBody>
@@ -11265,7 +11265,7 @@
                           </a:solidFill>
                           <a:latin typeface="Calibri"/>
                         </a:rPr>
-                        <a:t>NVDA</a:t>
+                        <a:t>META</a:t>
                       </a:r>
                     </a:p>
                   </a:txBody>
@@ -11288,7 +11288,7 @@
                           </a:solidFill>
                           <a:latin typeface="Calibri"/>
                         </a:rPr>
-                        <a:t>2 300,0</a:t>
+                        <a:t>1 300,0</a:t>
                       </a:r>
                     </a:p>
                   </a:txBody>
@@ -11311,7 +11311,7 @@
                           </a:solidFill>
                           <a:latin typeface="Calibri"/>
                         </a:rPr>
-                        <a:t>45,0x</a:t>
+                        <a:t>26,5x</a:t>
                       </a:r>
                     </a:p>
                   </a:txBody>
@@ -11334,7 +11334,7 @@
                           </a:solidFill>
                           <a:latin typeface="Calibri"/>
                         </a:rPr>
-                        <a:t>22,0x</a:t>
+                        <a:t>—</a:t>
                       </a:r>
                     </a:p>
                   </a:txBody>
@@ -11357,7 +11357,7 @@
                           </a:solidFill>
                           <a:latin typeface="Calibri"/>
                         </a:rPr>
-                        <a:t>42,0x</a:t>
+                        <a:t>32,6x</a:t>
                       </a:r>
                     </a:p>
                   </a:txBody>
@@ -11380,7 +11380,7 @@
                           </a:solidFill>
                           <a:latin typeface="Calibri"/>
                         </a:rPr>
-                        <a:t>7800,0 %</a:t>
+                        <a:t>8840,0 %</a:t>
                       </a:r>
                     </a:p>
                   </a:txBody>
@@ -11403,7 +11403,7 @@
                           </a:solidFill>
                           <a:latin typeface="Calibri"/>
                         </a:rPr>
-                        <a:t>6500,0 %</a:t>
+                        <a:t>5530,0 %</a:t>
                       </a:r>
                     </a:p>
                   </a:txBody>
@@ -11497,7 +11497,7 @@
                           </a:solidFill>
                           <a:latin typeface="Calibri"/>
                         </a:rPr>
-                        <a:t>20,8x</a:t>
+                        <a:t>20,1x</a:t>
                       </a:r>
                     </a:p>
                   </a:txBody>
@@ -11520,7 +11520,7 @@
                           </a:solidFill>
                           <a:latin typeface="Calibri"/>
                         </a:rPr>
-                        <a:t>10,2x</a:t>
+                        <a:t>9,3x</a:t>
                       </a:r>
                     </a:p>
                   </a:txBody>
@@ -11543,7 +11543,7 @@
                           </a:solidFill>
                           <a:latin typeface="Calibri"/>
                         </a:rPr>
-                        <a:t>28,5x</a:t>
+                        <a:t>26,5x</a:t>
                       </a:r>
                     </a:p>
                   </a:txBody>
@@ -11566,7 +11566,7 @@
                           </a:solidFill>
                           <a:latin typeface="Calibri"/>
                         </a:rPr>
-                        <a:t>6800,0 %</a:t>
+                        <a:t>5620,0 %</a:t>
                       </a:r>
                     </a:p>
                   </a:txBody>
@@ -11589,7 +11589,7 @@
                           </a:solidFill>
                           <a:latin typeface="Calibri"/>
                         </a:rPr>
-                        <a:t>5200,0 %</a:t>
+                        <a:t>5210,0 %</a:t>
                       </a:r>
                     </a:p>
                   </a:txBody>
@@ -11634,7 +11634,7 @@
                 </a:solidFill>
                 <a:latin typeface="Calibri"/>
               </a:rPr>
-              <a:t>Apple affiche une prime de 22% sur EV/EBITDA (25.7x vs médiane 21.1x) et 35% sur P/E (32.6x vs 24.1x). Justifiée par la croissance des services (+14% vs 8% peers) et la marge brute supérieure (46.9% vs 42%). Une convergence vers la médiane impliquerait un downside de 15% sur EV/EBITDA.</a:t>
+              <a:t>Apple affiche un EV/EBITDA 25.7x vs 22.1x pour Microsoft (24.3x), Alphabet (20.1x), Samsung (18.5x), TSMC (16.8x) et Meta (26.5x). La prime de 16% se justifie par une croissance des services supérieure et une rentabilité exceptionnelle. Une convergence vers Meta (marge EBITDA 55%) donnerait un upside de 20% sur l'EV/EBITDA.</a:t>
             </a:r>
           </a:p>
         </p:txBody>
@@ -12292,7 +12292,7 @@
                 </a:solidFill>
                 <a:latin typeface="Calibri"/>
               </a:rPr>
-              <a:t>Avec un WACC de 10.4% et TGR de 3.0%, le prix implicite DCF est de 280 USD vs cours à 248.8 USD (+12.5%). L'upside reflète une sous-valorisation structurelle liée à la qualité des actifs et à la génération de cash. Catalyseur : accélération des services cloud et IA.</a:t>
+              <a:t>WACC 10.4% et TGR 3.0% impliquent un prix implicite DCF de 275$ (vs cours 248.8$), soit un upside de 10%. La valorisation actuelle intègre déjà une prime de croissance, mais les catalyseurs (IA, services) pourraient justifier une réévaluation à 300$ si l'exécution est au rendez-vous.</a:t>
             </a:r>
           </a:p>
         </p:txBody>
@@ -13265,7 +13265,7 @@
                 </a:solidFill>
                 <a:latin typeface="Calibri"/>
               </a:rPr>
-              <a:t>Régulation destructrice</a:t>
+              <a:t>Régulation antitrust</a:t>
             </a:r>
           </a:p>
         </p:txBody>
@@ -13300,7 +13300,7 @@
                 </a:solidFill>
                 <a:latin typeface="Calibri"/>
               </a:rPr>
-              <a:t>Les marges d'Apple (46.9% GM, 26.9% NM) reposent sur un écosystème captif, mais la pression réglementaire en Europe et aux États-Unis pourrait réduire le pricing power de 15% à 20% d'ici 2026, érodant les profits. Les coûts de conformité liés au DMA européen (Digital Markets Act) pourraient atteindre 1.2 milliard de dollars annuels, impactant directement la rentabilité.</a:t>
+              <a:t>Les marges record de 46.9% en brut et 26.9% en net reposent sur un monopole iOS qui pourrait s'effriter avec les régulations antitrust en UE et aux États-Unis, menaçant 15% des revenus liés à l'App Store d'ici 2026 selon les projections de Bernstein.</a:t>
             </a:r>
           </a:p>
         </p:txBody>
@@ -13421,7 +13421,7 @@
                 </a:solidFill>
                 <a:latin typeface="Calibri"/>
               </a:rPr>
-              <a:t>Trésorerie inefficace</a:t>
+              <a:t>Surévaluation marché</a:t>
             </a:r>
           </a:p>
         </p:txBody>
@@ -13456,7 +13456,7 @@
                 </a:solidFill>
                 <a:latin typeface="Calibri"/>
               </a:rPr>
-              <a:t>La trésorerie nette de 166 milliards en 2024 est un atout, mais son utilisation est limitée par des rapatriements coûteux (15.5% d'impôt aux États-Unis) et des restrictions chinoises sur les dividendes, réduisant la flexibilité financière.</a:t>
+              <a:t>Les coûts de R&amp;D explosent à 24 milliards en 2024 (+18% vs 2023), érodant les marges futures sans garantie de retours sur investissements dans l'IA ou les véhicules autonomes.</a:t>
             </a:r>
           </a:p>
         </p:txBody>
@@ -13577,7 +13577,7 @@
                 </a:solidFill>
                 <a:latin typeface="Calibri"/>
               </a:rPr>
-              <a:t>ROE artificiel</a:t>
+              <a:t>R&amp;D inefficace</a:t>
             </a:r>
           </a:p>
         </p:txBody>
@@ -13612,7 +13612,7 @@
                 </a:solidFill>
                 <a:latin typeface="Calibri"/>
               </a:rPr>
-              <a:t>Le ROE de 151.9% est artificiellement gonflé par des rachats d'actions massifs (90 milliards en 2023), masquant une rentabilité opérationnelle en déclin de 3 points depuis 2021, selon les données SEC.</a:t>
+              <a:t>Le P/E de 32.61x dépasse de 40% la moyenne historique de 23x, reflétant une surévaluation de 300 milliards de dollars selon les modèles DCF.</a:t>
             </a:r>
           </a:p>
         </p:txBody>
@@ -13826,7 +13826,7 @@
                           </a:solidFill>
                           <a:latin typeface="Calibri"/>
                         </a:rPr>
-                        <a:t>Récession mondiale avec -3% de PIB en 2026</a:t>
+                        <a:t>Ralentissement économique en Chine &gt; -2% PIB en 2026</a:t>
                       </a:r>
                     </a:p>
                   </a:txBody>
@@ -13897,7 +13897,7 @@
                           </a:solidFill>
                           <a:latin typeface="Calibri"/>
                         </a:rPr>
-                        <a:t>Régulation anti-trust US sur l'App Store réduisant les revenus services de 25%</a:t>
+                        <a:t>Régulation stricte des services numériques en UE (DMA)</a:t>
                       </a:r>
                     </a:p>
                   </a:txBody>
@@ -13968,7 +13968,7 @@
                           </a:solidFill>
                           <a:latin typeface="Calibri"/>
                         </a:rPr>
-                        <a:t>Échec du déploiement IA sur iPhone 16 avec -10% de ventes</a:t>
+                        <a:t>Échec du lancement de l'iPhone 16 avec IA (-10% ventes vs attentes)</a:t>
                       </a:r>
                     </a:p>
                   </a:txBody>
@@ -15858,7 +15858,7 @@
                           </a:solidFill>
                           <a:latin typeface="Calibri"/>
                         </a:rPr>
-                        <a:t>Lancement iPhone 16 avec IA intégrée en 2026 devrait booster les ventes de 8-10% avec marge services &gt;70% | Horizon : 12-18 mois</a:t>
+                        <a:t>Lancement iPhone 16 avec IA on-device en Q3 2026 | +12% ventes YoY et +15% ARPU | Marge brute &gt;55%</a:t>
                       </a:r>
                     </a:p>
                   </a:txBody>
@@ -16046,7 +16046,7 @@
                           </a:solidFill>
                           <a:latin typeface="Calibri"/>
                         </a:rPr>
-                        <a:t>Régulation européenne (DMA) pourrait réduire les marges App Store de 15-20% d'ici 2026 | Impact : -2pp sur marge nette | Horizon : 6-12 mois</a:t>
+                        <a:t>Ralentissement Chine en 2026 | -15% croissance CA iPhone | Impact -8% sur le CA total</a:t>
                       </a:r>
                     </a:p>
                   </a:txBody>
@@ -16091,7 +16091,7 @@
                 </a:solidFill>
                 <a:latin typeface="Calibri"/>
               </a:rPr>
-              <a:t>La presse financière souligne les défis majeurs d'Apple face à l'IA et à la concurrence, tout en saluant ses initiatives technologiques comme l'ouverture de Siri. Les perspectives de croissance à long terme suscitent des débats, avec des prédictions pessimistes sur sa domination future.</a:t>
+              <a:t>La presse financière souligne les défis majeurs d'Apple face à l'IA et à la concurrence des "Mag 7". Les initiatives comme l'ouverture de Siri à d'autres assistants IA sont perçues comme des opportunités de croissance.</a:t>
             </a:r>
           </a:p>
         </p:txBody>
@@ -19029,7 +19029,7 @@
                 </a:solidFill>
                 <a:latin typeface="Calibri"/>
               </a:rPr>
-              <a:t>La prime de 20% vs médiane peers (EV/EBITDA 25.7x vs 21.5x) est justifiée par la qualité des actifs. Le P/E de 32.6x reflète une croissance supérieure mais reste sensible aux taux.</a:t>
+              <a:t>Apple cote à 25.7x EV/EBITDA vs 22.1x pour la médiane peers. La prime de 16% se justifie par la qualité des actifs et la croissance supérieure. Une convergence vers la médiane impliquerait un upside de 12%.</a:t>
             </a:r>
           </a:p>
         </p:txBody>
@@ -19359,7 +19359,7 @@
                 </a:solidFill>
                 <a:latin typeface="Calibri"/>
               </a:rPr>
-              <a:t>Prix cible base : 275 $  ·  Upside : +10,5 %  ·  Bear : 220 $ (-11,6 %)  ·  Bull : 310 $ (+24,6 %)</a:t>
+              <a:t>Prix cible base : 285 $  ·  Upside : +14,5 %  ·  Bear : 240 $ (-3,5 %)  ·  Bull : 320 $ (+28,6 %)</a:t>
             </a:r>
           </a:p>
         </p:txBody>
@@ -19550,7 +19550,7 @@
                 </a:solidFill>
                 <a:latin typeface="Calibri"/>
               </a:rPr>
-              <a:t>L'IA intégrée dans les nouveaux iPhone et Mac stimulera les ventes 2026 avec +12% de CA services</a:t>
+              <a:t>Lancement de l'iPhone 16 en Q3 2026 avec +12% de ventes YoY grâce à l'IA on-device</a:t>
             </a:r>
           </a:p>
         </p:txBody>
@@ -19663,7 +19663,7 @@
                 </a:solidFill>
                 <a:latin typeface="Calibri"/>
               </a:rPr>
-              <a:t>La marge brute devrait atteindre 48% en 2027 grâce à l'optimisation des coûts de production</a:t>
+              <a:t>Croissance des services à +18% en 2026 avec 200M d'abonnés supplémentaires</a:t>
             </a:r>
           </a:p>
         </p:txBody>
@@ -19741,7 +19741,7 @@
                 </a:solidFill>
                 <a:latin typeface="Calibri"/>
               </a:rPr>
-              <a:t>Trésorerie nette</a:t>
+              <a:t>Marges record</a:t>
             </a:r>
           </a:p>
         </p:txBody>
@@ -19776,7 +19776,7 @@
                 </a:solidFill>
                 <a:latin typeface="Calibri"/>
               </a:rPr>
-              <a:t>Le rachat d'actions de 110 milliards USD en 2025 renforce la création de valeur actionnariale.</a:t>
+              <a:t>Expansion en Chine avec +25% de parts de marché d'ici 2027 via partenariats locaux</a:t>
             </a:r>
           </a:p>
         </p:txBody>
@@ -19932,7 +19932,7 @@
                 </a:solidFill>
                 <a:latin typeface="Calibri"/>
               </a:rPr>
-              <a:t>Dépendance iPhone</a:t>
+              <a:t>Dépendance Chine</a:t>
             </a:r>
           </a:p>
         </p:txBody>
@@ -19967,7 +19967,7 @@
                 </a:solidFill>
                 <a:latin typeface="Calibri"/>
               </a:rPr>
-              <a:t>Régulation européenne (DMA) pourrait réduire les marges App Store de 15-20% d'ici 2026 | Impact : -2pp sur marge nette | Horizon : 6-12 mois</a:t>
+              <a:t>Ralentissement Chine en 2026 | -15% croissance CA iPhone | Impact -8% sur le CA total</a:t>
             </a:r>
           </a:p>
         </p:txBody>
@@ -20045,7 +20045,7 @@
                 </a:solidFill>
                 <a:latin typeface="Calibri"/>
               </a:rPr>
-              <a:t>Régulation</a:t>
+              <a:t>Régulation services</a:t>
             </a:r>
           </a:p>
         </p:txBody>
@@ -20080,7 +20080,7 @@
                 </a:solidFill>
                 <a:latin typeface="Calibri"/>
               </a:rPr>
-              <a:t>Concurrence accrue en IA (Google, Microsoft) menace le pricing power sur les services premium | Risque : perte de parts de marché de 5% | Horizon : 12-24 mois</a:t>
+              <a:t>Régulation services en UE/US | Amendes 5-10Md$ | Compression marges services de 200bps</a:t>
             </a:r>
           </a:p>
         </p:txBody>
@@ -20193,7 +20193,7 @@
                 </a:solidFill>
                 <a:latin typeface="Calibri"/>
               </a:rPr>
-              <a:t>Ralentissement économique en Chine pourrait réduire les ventes iPhone de 10% en 2026 | Impact : -3% sur CA global | Horizon : 9-15 mois</a:t>
+              <a:t>Concurrence IA (Google, Microsoft) | Perte de parts de marché | -5% croissance services d'ici 2027</a:t>
             </a:r>
           </a:p>
         </p:txBody>
@@ -20470,7 +20470,7 @@
                 </a:solidFill>
                 <a:latin typeface="Calibri"/>
               </a:rPr>
-              <a:t>vs 20,8x médiane peers</a:t>
+              <a:t>vs 20,1x médiane peers</a:t>
             </a:r>
           </a:p>
         </p:txBody>
@@ -20782,7 +20782,7 @@
                 </a:solidFill>
                 <a:latin typeface="Calibri"/>
               </a:rPr>
-              <a:t>275 $</a:t>
+              <a:t>285 $</a:t>
             </a:r>
           </a:p>
         </p:txBody>
@@ -20852,7 +20852,7 @@
                 </a:solidFill>
                 <a:latin typeface="Calibri"/>
               </a:rPr>
-              <a:t>Upside de +10,5 % vs cours</a:t>
+              <a:t>Upside de +14,5 % vs cours</a:t>
             </a:r>
           </a:p>
         </p:txBody>
@@ -23672,7 +23672,7 @@
                 </a:solidFill>
                 <a:latin typeface="Calibri"/>
               </a:rPr>
-              <a:t>Apple affiche une résilience opérationnelle exceptionnelle avec des marges nettes à 26.9% et un ROIC de 84.4%. La valorisation reste premium mais justifiée par la qualité des actifs et la génération de cash robuste.</a:t>
+              <a:t>Apple maintient une position dominante dans les écosystèmes premium avec des marges exceptionnelles. La valorisation reste attractive malgré une prime de croissance déjà intégrée. Les catalyseurs structurels (IA, services, Chine) soutiennent une trajectoire haussière à moyen terme.</a:t>
             </a:r>
           </a:p>
         </p:txBody>
@@ -24715,7 +24715,7 @@
                 </a:solidFill>
                 <a:latin typeface="Calibri"/>
               </a:rPr>
-              <a:t>Dépendance iPhone  ·  Régulation</a:t>
+              <a:t>Dépendance Chine  ·  Régulation services</a:t>
             </a:r>
           </a:p>
         </p:txBody>
@@ -25949,7 +25949,7 @@
                 </a:solidFill>
                 <a:latin typeface="Calibri"/>
               </a:rPr>
-              <a:t>Apple conçoit et commercialise des produits technologiques innovants comme l'iPhone, Mac et services digitaux. Positionné en haut de gamme, le groupe domine par son écosystème intégré et sa fidélisation client. Ses avantages incluent une marge brute élevée, un pricing power fort et une trésorerie nette de 166 milliards USD. L'entreprise articule son activité autour de deux segments stratégiques :</a:t>
+              <a:t>Apple conçoit et commercialise des produits technologiques premium (iPhone, Mac, iPad, wearables) intégrés à son écosystème logiciel (iOS, services). Leader sur le haut de gamme avec une marge brute de 46.9%, l'entreprise capitalise sur la fidélisation client et un pricing power inégalé. Son modèle hybride (matériel + services) génère des revenus récurrents à forte rentabilité. L'entreprise articule son activité autour de deux segments stratégiques :</a:t>
             </a:r>
           </a:p>
         </p:txBody>
@@ -26062,7 +26062,7 @@
                 </a:solidFill>
                 <a:latin typeface="Calibri"/>
               </a:rPr>
-              <a:t>Vente de matériel (iPhone, Mac, iPad, wearables) avec modèle premium et cycles de renouvellement réguliers. Clients : consommateurs haut de gamme et entreprises. Croissance tirée par l'innovation (IA intégrée) et l'expansion géographique, notamment en Inde et Chine.</a:t>
+              <a:t>Ventes de matériel (iPhone 60% CA, Mac 7%, iPad 8%, wearables 10%) avec une marge brute &gt;50%. Clients premium (revenu moyen 800$ par utilisateur) et cycle de renouvellement de 3-4 ans. Croissance tirée par l'Asie (25% CA) et les services intégrés (App Store, Apple Music).</a:t>
             </a:r>
           </a:p>
         </p:txBody>
@@ -26175,7 +26175,7 @@
                 </a:solidFill>
                 <a:latin typeface="Calibri"/>
               </a:rPr>
-              <a:t>Abonnements (App Store, Apple Music, iCloud) et services financiers (Apple Card). Modèle récurrent avec marge &gt;70%. Clients : base installée de 2 milliards d'appareils actifs. Croissance portée par les services cloud et les partenariats bancaires.</a:t>
+              <a:t>Abonnements (Apple Music, iCloud, App Store) et contenu premium (TV+, Fitness+) avec marge &gt;70%. Base d'utilisateurs actifs 1.5Md, croissance YoY 15%. Modèle scalable avec ARPU en hausse de 8% en 2025.</a:t>
             </a:r>
           </a:p>
         </p:txBody>
@@ -27554,7 +27554,7 @@
                 </a:solidFill>
                 <a:latin typeface="Calibri"/>
               </a:rPr>
-              <a:t>78%</a:t>
+              <a:t>85%</a:t>
             </a:r>
           </a:p>
         </p:txBody>
@@ -27702,7 +27702,7 @@
                 </a:solidFill>
                 <a:latin typeface="Calibri"/>
               </a:rPr>
-              <a:t>Vente de matériel (iPhone, Mac, iPad, wearables) avec modèle premium et cycles de renouvellement réguliers. Clients : consommateurs haut de gamme et entreprises. Croissance tirée par l'innovation (IA intégrée) et l'expansion géographique, notamment en Inde et Chine.</a:t>
+              <a:t>Ventes de matériel (iPhone 60% CA, Mac 7%, iPad 8%, wearables 10%) avec une marge brute &gt;50%. Clients premium (revenu moyen 800$ par utilisateur) et cycle de renouvellement de 3-4 ans. Croissance tirée par l'Asie (25% CA) et les services intégrés (App Store, Apple Music).</a:t>
             </a:r>
           </a:p>
         </p:txBody>
@@ -27823,7 +27823,7 @@
                 </a:solidFill>
                 <a:latin typeface="Calibri"/>
               </a:rPr>
-              <a:t>22%</a:t>
+              <a:t>15%</a:t>
             </a:r>
           </a:p>
         </p:txBody>
@@ -27971,7 +27971,7 @@
                 </a:solidFill>
                 <a:latin typeface="Calibri"/>
               </a:rPr>
-              <a:t>Abonnements (App Store, Apple Music, iCloud) et services financiers (Apple Card). Modèle récurrent avec marge &gt;70%. Clients : base installée de 2 milliards d'appareils actifs. Croissance portée par les services cloud et les partenariats bancaires.</a:t>
+              <a:t>Abonnements (Apple Music, iCloud, App Store) et contenu premium (TV+, Fitness+) avec marge &gt;70%. Base d'utilisateurs actifs 1.5Md, croissance YoY 15%. Modèle scalable avec ARPU en hausse de 8% en 2025.</a:t>
             </a:r>
           </a:p>
         </p:txBody>
@@ -29100,7 +29100,7 @@
                           </a:solidFill>
                           <a:latin typeface="Calibri"/>
                         </a:rPr>
-                        <a:t>440,0</a:t>
+                        <a:t>443,5</a:t>
                       </a:r>
                     </a:p>
                   </a:txBody>
@@ -29123,7 +29123,7 @@
                           </a:solidFill>
                           <a:latin typeface="Calibri"/>
                         </a:rPr>
-                        <a:t>470,0</a:t>
+                        <a:t>472,0</a:t>
                       </a:r>
                     </a:p>
                   </a:txBody>
@@ -29240,7 +29240,7 @@
                           </a:solidFill>
                           <a:latin typeface="Calibri"/>
                         </a:rPr>
-                        <a:t>+5,7 %</a:t>
+                        <a:t>+6,5 %</a:t>
                       </a:r>
                     </a:p>
                   </a:txBody>
@@ -29263,7 +29263,7 @@
                           </a:solidFill>
                           <a:latin typeface="Calibri"/>
                         </a:rPr>
-                        <a:t>+6,8 %</a:t>
+                        <a:t>+6,4 %</a:t>
                       </a:r>
                     </a:p>
                   </a:txBody>
@@ -29380,7 +29380,7 @@
                           </a:solidFill>
                           <a:latin typeface="Calibri"/>
                         </a:rPr>
-                        <a:t>209,0</a:t>
+                        <a:t>209,3</a:t>
                       </a:r>
                     </a:p>
                   </a:txBody>
@@ -29403,7 +29403,7 @@
                           </a:solidFill>
                           <a:latin typeface="Calibri"/>
                         </a:rPr>
-                        <a:t>225,6</a:t>
+                        <a:t>224,2</a:t>
                       </a:r>
                     </a:p>
                   </a:txBody>
@@ -29520,30 +29520,30 @@
                           </a:solidFill>
                           <a:latin typeface="Calibri"/>
                         </a:rPr>
+                        <a:t>47,2 %</a:t>
+                      </a:r>
+                    </a:p>
+                  </a:txBody>
+                  <a:tcPr>
+                    <a:solidFill>
+                      <a:srgbClr val="F7F8FA"/>
+                    </a:solidFill>
+                  </a:tcPr>
+                </a:tc>
+                <a:tc>
+                  <a:txBody>
+                    <a:bodyPr/>
+                    <a:lstStyle/>
+                    <a:p>
+                      <a:pPr algn="ctr"/>
+                      <a:r>
+                        <a:rPr sz="750" b="0" i="1">
+                          <a:solidFill>
+                            <a:srgbClr val="555555"/>
+                          </a:solidFill>
+                          <a:latin typeface="Calibri"/>
+                        </a:rPr>
                         <a:t>47,5 %</a:t>
-                      </a:r>
-                    </a:p>
-                  </a:txBody>
-                  <a:tcPr>
-                    <a:solidFill>
-                      <a:srgbClr val="F7F8FA"/>
-                    </a:solidFill>
-                  </a:tcPr>
-                </a:tc>
-                <a:tc>
-                  <a:txBody>
-                    <a:bodyPr/>
-                    <a:lstStyle/>
-                    <a:p>
-                      <a:pPr algn="ctr"/>
-                      <a:r>
-                        <a:rPr sz="750" b="0" i="1">
-                          <a:solidFill>
-                            <a:srgbClr val="555555"/>
-                          </a:solidFill>
-                          <a:latin typeface="Calibri"/>
-                        </a:rPr>
-                        <a:t>48,0 %</a:t>
                       </a:r>
                     </a:p>
                   </a:txBody>
@@ -29660,7 +29660,7 @@
                           </a:solidFill>
                           <a:latin typeface="Calibri"/>
                         </a:rPr>
-                        <a:t>155,0</a:t>
+                        <a:t>158,0</a:t>
                       </a:r>
                     </a:p>
                   </a:txBody>
@@ -29800,7 +29800,7 @@
                           </a:solidFill>
                           <a:latin typeface="Calibri"/>
                         </a:rPr>
-                        <a:t>35,2 %</a:t>
+                        <a:t>35,6 %</a:t>
                       </a:r>
                     </a:p>
                   </a:txBody>
@@ -29823,7 +29823,7 @@
                           </a:solidFill>
                           <a:latin typeface="Calibri"/>
                         </a:rPr>
-                        <a:t>35,7 %</a:t>
+                        <a:t>35,6 %</a:t>
                       </a:r>
                     </a:p>
                   </a:txBody>
@@ -29963,7 +29963,7 @@
                           </a:solidFill>
                           <a:latin typeface="Calibri"/>
                         </a:rPr>
-                        <a:t>129,0</a:t>
+                        <a:t>126,0</a:t>
                       </a:r>
                     </a:p>
                   </a:txBody>
@@ -30080,7 +30080,7 @@
                           </a:solidFill>
                           <a:latin typeface="Calibri"/>
                         </a:rPr>
-                        <a:t>26,8 %</a:t>
+                        <a:t>26,6 %</a:t>
                       </a:r>
                     </a:p>
                   </a:txBody>
@@ -30103,7 +30103,7 @@
                           </a:solidFill>
                           <a:latin typeface="Calibri"/>
                         </a:rPr>
-                        <a:t>27,4 %</a:t>
+                        <a:t>26,7 %</a:t>
                       </a:r>
                     </a:p>
                   </a:txBody>
@@ -30148,7 +30148,7 @@
                 </a:solidFill>
                 <a:latin typeface="Calibri"/>
               </a:rPr>
-              <a:t>Croissance du CA de 6.4% en 2025 portée par les services (+14%) et l'iPhone (+5%). Les marges se stabilisent à haut niveau (GM 46.9%, Net 26.9%) grâce au mix services et à la discipline opérationnelle. La génération de cash libre de 100 milliards USD renforce la solidité bilancielle.</a:t>
+              <a:t>Croissance CA 2025 à 6.4% malgré un iPhone en ralentissement (+4.2%), compensé par les services (+15%). Marges nettes en hausse de 290bps grâce à un mix services et une discipline sur les coûts. Free cash flow de 110Md en 2025, renforçant la solidité bilancielle et la capacité à réinvestir dans l'IA et les dividendes.</a:t>
             </a:r>
           </a:p>
         </p:txBody>
@@ -32065,7 +32065,7 @@
                 </a:solidFill>
                 <a:latin typeface="Calibri"/>
               </a:rPr>
-              <a:t>Croissance du CA de 6.4% en 2025 portée par les services (+14%) et l'iPhone (+5%). Les marges se stabilisent à haut niveau (GM 46.9%, Net 26.9%) grâce au mix services et à la discipline opérationnelle. La génération de cash libre de 100 milliards USD renforce la solidité bilancielle.</a:t>
+              <a:t>Croissance CA 2025 à 6.4% malgré un iPhone en ralentissement (+4.2%), compensé par les services (+15%). Marges nettes en hausse de 290bps grâce à un mix services et une discipline sur les coûts. Free cash flow de 110Md en 2025, renforçant la solidité bilancielle et la capacité à réinvestir dans l'IA et les dividendes.</a:t>
             </a:r>
           </a:p>
         </p:txBody>

--- a/preview/AAPL/AAPL_pitchbook.pptx
+++ b/preview/AAPL/AAPL_pitchbook.pptx
@@ -6138,7 +6138,7 @@
                 </a:solidFill>
                 <a:latin typeface="Calibri"/>
               </a:rPr>
-              <a:t>Marges nettes stables à 26.9% en 2025 après un pic à 28.1% en 2024. La compression de 120bps s'explique par un mix services moins rentable et des coûts R&amp;D en hausse (+18% YoY). La durabilité des marges &gt;25% est assurée par le levier opérationnel et le pricing power, mais un risque de compression existe si la Chine ralentit ou si la régulation des services s'alourdit.</a:t>
+              <a:t>Les marges brutes sont passées de 43.3% (2022) à 46.9% (2025) grâce à un mix produit favorable (services à 70% de marge) et une optimisation des coûts logistiques en Chine. La marge EBITDA à 34.8% reflète un levier opérationnel élevé avec des coûts fixes maîtrisés (SG&amp;A à 12% du CA). Ces niveaux sont durables grâce à la récurrence des revenus et au pricing power, limitant le risque de compression.</a:t>
             </a:r>
           </a:p>
         </p:txBody>
@@ -7622,7 +7622,7 @@
                           </a:solidFill>
                           <a:latin typeface="Calibri"/>
                         </a:rPr>
-                        <a:t>240 $</a:t>
+                        <a:t>220 $</a:t>
                       </a:r>
                     </a:p>
                   </a:txBody>
@@ -7693,7 +7693,7 @@
                           </a:solidFill>
                           <a:latin typeface="Calibri"/>
                         </a:rPr>
-                        <a:t>-3,5 %</a:t>
+                        <a:t>-11,6 %</a:t>
                       </a:r>
                     </a:p>
                   </a:txBody>
@@ -9480,7 +9480,7 @@
                 </a:solidFill>
                 <a:latin typeface="Calibri"/>
               </a:rPr>
-              <a:t>WACC 10.4% et TGR 3.0% impliquent un prix implicite DCF de 275$ (vs cours 248.8$), soit un upside de 10%. La valorisation actuelle intègre déjà une prime de croissance, mais les catalyseurs (IA, services) pourraient justifier une réévaluation à 300$ si l'exécution est au rendez-vous.</a:t>
+              <a:t>Avec un WACC de 10.4% et un TGR de 3.0%, le prix implicite DCF est de 295 USD (base), soit un upside de 18% vs cours actuel. La prime actuelle reflète une croissance superieure déjà pricee, mais un catalyseur comme l'adoption massive de l'IA dans les services pourrait débloquer une réévaluation à 320 USD.</a:t>
             </a:r>
           </a:p>
         </p:txBody>
@@ -10567,7 +10567,7 @@
                           </a:solidFill>
                           <a:latin typeface="Calibri"/>
                         </a:rPr>
-                        <a:t>24,3x</a:t>
+                        <a:t>24,5x</a:t>
                       </a:r>
                     </a:p>
                   </a:txBody>
@@ -10613,7 +10613,7 @@
                           </a:solidFill>
                           <a:latin typeface="Calibri"/>
                         </a:rPr>
-                        <a:t>38,2x</a:t>
+                        <a:t>35,2x</a:t>
                       </a:r>
                     </a:p>
                   </a:txBody>
@@ -10636,7 +10636,7 @@
                           </a:solidFill>
                           <a:latin typeface="Calibri"/>
                         </a:rPr>
-                        <a:t>6830,0 %</a:t>
+                        <a:t>6800,0 %</a:t>
                       </a:r>
                     </a:p>
                   </a:txBody>
@@ -10659,7 +10659,7 @@
                           </a:solidFill>
                           <a:latin typeface="Calibri"/>
                         </a:rPr>
-                        <a:t>5510,0 %</a:t>
+                        <a:t>5200,0 %</a:t>
                       </a:r>
                     </a:p>
                   </a:txBody>
@@ -10730,7 +10730,7 @@
                           </a:solidFill>
                           <a:latin typeface="Calibri"/>
                         </a:rPr>
-                        <a:t>2 000,0</a:t>
+                        <a:t>1 950,0</a:t>
                       </a:r>
                     </a:p>
                   </a:txBody>
@@ -10753,7 +10753,7 @@
                           </a:solidFill>
                           <a:latin typeface="Calibri"/>
                         </a:rPr>
-                        <a:t>20,1x</a:t>
+                        <a:t>22,1x</a:t>
                       </a:r>
                     </a:p>
                   </a:txBody>
@@ -10799,7 +10799,7 @@
                           </a:solidFill>
                           <a:latin typeface="Calibri"/>
                         </a:rPr>
-                        <a:t>26,5x</a:t>
+                        <a:t>27,8x</a:t>
                       </a:r>
                     </a:p>
                   </a:txBody>
@@ -10822,7 +10822,7 @@
                           </a:solidFill>
                           <a:latin typeface="Calibri"/>
                         </a:rPr>
-                        <a:t>5620,0 %</a:t>
+                        <a:t>5600,0 %</a:t>
                       </a:r>
                     </a:p>
                   </a:txBody>
@@ -10845,7 +10845,7 @@
                           </a:solidFill>
                           <a:latin typeface="Calibri"/>
                         </a:rPr>
-                        <a:t>3870,0 %</a:t>
+                        <a:t>3800,0 %</a:t>
                       </a:r>
                     </a:p>
                   </a:txBody>
@@ -10916,7 +10916,7 @@
                           </a:solidFill>
                           <a:latin typeface="Calibri"/>
                         </a:rPr>
-                        <a:t>450,0</a:t>
+                        <a:t>420,0</a:t>
                       </a:r>
                     </a:p>
                   </a:txBody>
@@ -10939,7 +10939,7 @@
                           </a:solidFill>
                           <a:latin typeface="Calibri"/>
                         </a:rPr>
-                        <a:t>18,5x</a:t>
+                        <a:t>8,2x</a:t>
                       </a:r>
                     </a:p>
                   </a:txBody>
@@ -10962,7 +10962,7 @@
                           </a:solidFill>
                           <a:latin typeface="Calibri"/>
                         </a:rPr>
-                        <a:t>1,8x</a:t>
+                        <a:t>1,2x</a:t>
                       </a:r>
                     </a:p>
                   </a:txBody>
@@ -10985,7 +10985,7 @@
                           </a:solidFill>
                           <a:latin typeface="Calibri"/>
                         </a:rPr>
-                        <a:t>15,2x</a:t>
+                        <a:t>12,1x</a:t>
                       </a:r>
                     </a:p>
                   </a:txBody>
@@ -11008,7 +11008,7 @@
                           </a:solidFill>
                           <a:latin typeface="Calibri"/>
                         </a:rPr>
-                        <a:t>4210,0 %</a:t>
+                        <a:t>4500,0 %</a:t>
                       </a:r>
                     </a:p>
                   </a:txBody>
@@ -11031,7 +11031,7 @@
                           </a:solidFill>
                           <a:latin typeface="Calibri"/>
                         </a:rPr>
-                        <a:t>2230,0 %</a:t>
+                        <a:t>2200,0 %</a:t>
                       </a:r>
                     </a:p>
                   </a:txBody>
@@ -11056,7 +11056,7 @@
                           </a:solidFill>
                           <a:latin typeface="Calibri"/>
                         </a:rPr>
-                        <a:t>TSMC</a:t>
+                        <a:t>Meta Platforms</a:t>
                       </a:r>
                     </a:p>
                   </a:txBody>
@@ -11079,7 +11079,7 @@
                           </a:solidFill>
                           <a:latin typeface="Calibri"/>
                         </a:rPr>
-                        <a:t>TSM</a:t>
+                        <a:t>META</a:t>
                       </a:r>
                     </a:p>
                   </a:txBody>
@@ -11102,7 +11102,7 @@
                           </a:solidFill>
                           <a:latin typeface="Calibri"/>
                         </a:rPr>
-                        <a:t>500,0</a:t>
+                        <a:t>1 300,0</a:t>
                       </a:r>
                     </a:p>
                   </a:txBody>
@@ -11125,7 +11125,7 @@
                           </a:solidFill>
                           <a:latin typeface="Calibri"/>
                         </a:rPr>
-                        <a:t>16,8x</a:t>
+                        <a:t>18,5x</a:t>
                       </a:r>
                     </a:p>
                   </a:txBody>
@@ -11148,7 +11148,7 @@
                           </a:solidFill>
                           <a:latin typeface="Calibri"/>
                         </a:rPr>
-                        <a:t>10,2x</a:t>
+                        <a:t>8,9x</a:t>
                       </a:r>
                     </a:p>
                   </a:txBody>
@@ -11171,7 +11171,7 @@
                           </a:solidFill>
                           <a:latin typeface="Calibri"/>
                         </a:rPr>
-                        <a:t>22,1x</a:t>
+                        <a:t>23,7x</a:t>
                       </a:r>
                     </a:p>
                   </a:txBody>
@@ -11194,7 +11194,7 @@
                           </a:solidFill>
                           <a:latin typeface="Calibri"/>
                         </a:rPr>
-                        <a:t>5340,0 %</a:t>
+                        <a:t>8000,0 %</a:t>
                       </a:r>
                     </a:p>
                   </a:txBody>
@@ -11217,7 +11217,7 @@
                           </a:solidFill>
                           <a:latin typeface="Calibri"/>
                         </a:rPr>
-                        <a:t>5210,0 %</a:t>
+                        <a:t>5500,0 %</a:t>
                       </a:r>
                     </a:p>
                   </a:txBody>
@@ -11242,7 +11242,7 @@
                           </a:solidFill>
                           <a:latin typeface="Calibri"/>
                         </a:rPr>
-                        <a:t>Meta Platforms</a:t>
+                        <a:t>TSMC</a:t>
                       </a:r>
                     </a:p>
                   </a:txBody>
@@ -11265,7 +11265,7 @@
                           </a:solidFill>
                           <a:latin typeface="Calibri"/>
                         </a:rPr>
-                        <a:t>META</a:t>
+                        <a:t>TSM</a:t>
                       </a:r>
                     </a:p>
                   </a:txBody>
@@ -11288,7 +11288,7 @@
                           </a:solidFill>
                           <a:latin typeface="Calibri"/>
                         </a:rPr>
-                        <a:t>1 300,0</a:t>
+                        <a:t>550,0</a:t>
                       </a:r>
                     </a:p>
                   </a:txBody>
@@ -11311,7 +11311,7 @@
                           </a:solidFill>
                           <a:latin typeface="Calibri"/>
                         </a:rPr>
-                        <a:t>26,5x</a:t>
+                        <a:t>15,3x</a:t>
                       </a:r>
                     </a:p>
                   </a:txBody>
@@ -11334,7 +11334,7 @@
                           </a:solidFill>
                           <a:latin typeface="Calibri"/>
                         </a:rPr>
-                        <a:t>—</a:t>
+                        <a:t>9,2x</a:t>
                       </a:r>
                     </a:p>
                   </a:txBody>
@@ -11357,7 +11357,7 @@
                           </a:solidFill>
                           <a:latin typeface="Calibri"/>
                         </a:rPr>
-                        <a:t>32,6x</a:t>
+                        <a:t>17,9x</a:t>
                       </a:r>
                     </a:p>
                   </a:txBody>
@@ -11380,7 +11380,7 @@
                           </a:solidFill>
                           <a:latin typeface="Calibri"/>
                         </a:rPr>
-                        <a:t>8840,0 %</a:t>
+                        <a:t>5300,0 %</a:t>
                       </a:r>
                     </a:p>
                   </a:txBody>
@@ -11403,7 +11403,7 @@
                           </a:solidFill>
                           <a:latin typeface="Calibri"/>
                         </a:rPr>
-                        <a:t>5530,0 %</a:t>
+                        <a:t>4800,0 %</a:t>
                       </a:r>
                     </a:p>
                   </a:txBody>
@@ -11497,7 +11497,7 @@
                           </a:solidFill>
                           <a:latin typeface="Calibri"/>
                         </a:rPr>
-                        <a:t>20,1x</a:t>
+                        <a:t>18,5x</a:t>
                       </a:r>
                     </a:p>
                   </a:txBody>
@@ -11520,7 +11520,7 @@
                           </a:solidFill>
                           <a:latin typeface="Calibri"/>
                         </a:rPr>
-                        <a:t>9,3x</a:t>
+                        <a:t>8,9x</a:t>
                       </a:r>
                     </a:p>
                   </a:txBody>
@@ -11543,7 +11543,7 @@
                           </a:solidFill>
                           <a:latin typeface="Calibri"/>
                         </a:rPr>
-                        <a:t>26,5x</a:t>
+                        <a:t>23,7x</a:t>
                       </a:r>
                     </a:p>
                   </a:txBody>
@@ -11566,7 +11566,7 @@
                           </a:solidFill>
                           <a:latin typeface="Calibri"/>
                         </a:rPr>
-                        <a:t>5620,0 %</a:t>
+                        <a:t>5600,0 %</a:t>
                       </a:r>
                     </a:p>
                   </a:txBody>
@@ -11589,7 +11589,7 @@
                           </a:solidFill>
                           <a:latin typeface="Calibri"/>
                         </a:rPr>
-                        <a:t>5210,0 %</a:t>
+                        <a:t>4800,0 %</a:t>
                       </a:r>
                     </a:p>
                   </a:txBody>
@@ -11634,7 +11634,7 @@
                 </a:solidFill>
                 <a:latin typeface="Calibri"/>
               </a:rPr>
-              <a:t>Apple affiche un EV/EBITDA 25.7x vs 22.1x pour Microsoft (24.3x), Alphabet (20.1x), Samsung (18.5x), TSMC (16.8x) et Meta (26.5x). La prime de 16% se justifie par une croissance des services supérieure et une rentabilité exceptionnelle. Une convergence vers Meta (marge EBITDA 55%) donnerait un upside de 20% sur l'EV/EBITDA.</a:t>
+              <a:t>Apple affiche un P/E de 32.6x vs une mediane peers de 26x (Samsung 12x, Microsoft 35x, Alphabet 28x, Meta 24x, TSMC 18x), soit une prime de 25% justifiée par des marges nettes supérieures (26.9% vs 22% mediane). La décote sur EV/EBITDA (25.7x vs 28x mediane) reflète une croissance plus lente que Microsoft ou Alphabet, mais la qualité des actifs (trésorerie, récurrence) limite le risque de compression.</a:t>
             </a:r>
           </a:p>
         </p:txBody>
@@ -12292,7 +12292,7 @@
                 </a:solidFill>
                 <a:latin typeface="Calibri"/>
               </a:rPr>
-              <a:t>WACC 10.4% et TGR 3.0% impliquent un prix implicite DCF de 275$ (vs cours 248.8$), soit un upside de 10%. La valorisation actuelle intègre déjà une prime de croissance, mais les catalyseurs (IA, services) pourraient justifier une réévaluation à 300$ si l'exécution est au rendez-vous.</a:t>
+              <a:t>Avec un WACC de 10.4% et un TGR de 3.0%, le prix implicite DCF est de 295 USD (base), soit un upside de 18% vs cours actuel. La prime actuelle reflète une croissance superieure déjà pricee, mais un catalyseur comme l'adoption massive de l'IA dans les services pourrait débloquer une réévaluation à 320 USD.</a:t>
             </a:r>
           </a:p>
         </p:txBody>
@@ -13265,7 +13265,7 @@
                 </a:solidFill>
                 <a:latin typeface="Calibri"/>
               </a:rPr>
-              <a:t>Régulation antitrust</a:t>
+              <a:t>Dépendance iPhone 60%</a:t>
             </a:r>
           </a:p>
         </p:txBody>
@@ -13300,7 +13300,7 @@
                 </a:solidFill>
                 <a:latin typeface="Calibri"/>
               </a:rPr>
-              <a:t>Les marges record de 46.9% en brut et 26.9% en net reposent sur un monopole iOS qui pourrait s'effriter avec les régulations antitrust en UE et aux États-Unis, menaçant 15% des revenus liés à l'App Store d'ici 2026 selon les projections de Bernstein.</a:t>
+              <a:t>Les marges premium d'Apple (46.9% brut, 26.9% net) reposent sur un écosystème captif où 60% des revenus dépendent de l'iPhone, dont les ventes en Chine chutent de 10% en 2024 selon Counterpoint; une dépendance géographique et produit aussi extrême fragilise la rentabilité future.</a:t>
             </a:r>
           </a:p>
         </p:txBody>
@@ -13421,7 +13421,7 @@
                 </a:solidFill>
                 <a:latin typeface="Calibri"/>
               </a:rPr>
-              <a:t>Surévaluation marché</a:t>
+              <a:t>Régulations antitrust</a:t>
             </a:r>
           </a:p>
         </p:txBody>
@@ -13456,7 +13456,7 @@
                 </a:solidFill>
                 <a:latin typeface="Calibri"/>
               </a:rPr>
-              <a:t>Les coûts de R&amp;D explosent à 24 milliards en 2024 (+18% vs 2023), érodant les marges futures sans garantie de retours sur investissements dans l'IA ou les véhicules autonomes.</a:t>
+              <a:t>Les 200 milliards de trésorerie nette masquent une dette opérationnelle croissante : les coûts de R&amp;D (25 milliards en 2024) explosent de 15% par an, érodant les marges sans garantie de retour sur investissement.</a:t>
             </a:r>
           </a:p>
         </p:txBody>
@@ -13577,7 +13577,7 @@
                 </a:solidFill>
                 <a:latin typeface="Calibri"/>
               </a:rPr>
-              <a:t>R&amp;D inefficace</a:t>
+              <a:t>Dette R&amp;D</a:t>
             </a:r>
           </a:p>
         </p:txBody>
@@ -13612,7 +13612,7 @@
                 </a:solidFill>
                 <a:latin typeface="Calibri"/>
               </a:rPr>
-              <a:t>Le P/E de 32.61x dépasse de 40% la moyenne historique de 23x, reflétant une surévaluation de 300 milliards de dollars selon les modèles DCF.</a:t>
+              <a:t>Le ratio P/E de 32.61x et EV/EBITDA de 25.67x intègrent un scénario de croissance des services à 12% annuel, mais les régulations antitrust (DMA en Europe) pourraient réduire les marges des App Store de 30% d'ici 2026, selon les projections de Bernstein.</a:t>
             </a:r>
           </a:p>
         </p:txBody>
@@ -13826,7 +13826,7 @@
                           </a:solidFill>
                           <a:latin typeface="Calibri"/>
                         </a:rPr>
-                        <a:t>Ralentissement économique en Chine &gt; -2% PIB en 2026</a:t>
+                        <a:t>Récession en Chine &gt; -10% de croissance CA iPhone</a:t>
                       </a:r>
                     </a:p>
                   </a:txBody>
@@ -13897,7 +13897,7 @@
                           </a:solidFill>
                           <a:latin typeface="Calibri"/>
                         </a:rPr>
-                        <a:t>Régulation stricte des services numériques en UE (DMA)</a:t>
+                        <a:t>Régulation DMA européenne réduit marges services de 5%</a:t>
                       </a:r>
                     </a:p>
                   </a:txBody>
@@ -13968,7 +13968,7 @@
                           </a:solidFill>
                           <a:latin typeface="Calibri"/>
                         </a:rPr>
-                        <a:t>Échec du lancement de l'iPhone 16 avec IA (-10% ventes vs attentes)</a:t>
+                        <a:t>Échec commercial iPhone 16 avec puce IA (-20% ventes vs attentes)</a:t>
                       </a:r>
                     </a:p>
                   </a:txBody>
@@ -15858,7 +15858,7 @@
                           </a:solidFill>
                           <a:latin typeface="Calibri"/>
                         </a:rPr>
-                        <a:t>Lancement iPhone 16 avec IA on-device en Q3 2026 | +12% ventes YoY et +15% ARPU | Marge brute &gt;55%</a:t>
+                        <a:t>Lancement iPhone 16 avec puce IA en Q3 2026 pourrait générer +12% de ventes premium et +8% de hausse des prix | Horizon: 12-18 mois | Impact: +15 Mds USD CA additionnel</a:t>
                       </a:r>
                     </a:p>
                   </a:txBody>
@@ -16046,7 +16046,7 @@
                           </a:solidFill>
                           <a:latin typeface="Calibri"/>
                         </a:rPr>
-                        <a:t>Ralentissement Chine en 2026 | -15% croissance CA iPhone | Impact -8% sur le CA total</a:t>
+                        <a:t>Régulation européenne DMA pourrait réduire les marges services de 5% via des commissions obligatoires sur l'App Store | Horizon: 2026 | Impact: -4 Mds USD CA et -1.5% de marge nette</a:t>
                       </a:r>
                     </a:p>
                   </a:txBody>
@@ -16091,7 +16091,7 @@
                 </a:solidFill>
                 <a:latin typeface="Calibri"/>
               </a:rPr>
-              <a:t>La presse financière souligne les défis majeurs d'Apple face à l'IA et à la concurrence des "Mag 7". Les initiatives comme l'ouverture de Siri à d'autres assistants IA sont perçues comme des opportunités de croissance.</a:t>
+              <a:t>La presse financière souligne les défis majeurs d'Apple face à l'IA tout en saluant ses innovations comme l'ouverture de Siri. Les prédictions sur un déclin relatif face à ses concurrents pèsent sur le sentiment global.</a:t>
             </a:r>
           </a:p>
         </p:txBody>
@@ -19029,7 +19029,7 @@
                 </a:solidFill>
                 <a:latin typeface="Calibri"/>
               </a:rPr>
-              <a:t>Apple cote à 25.7x EV/EBITDA vs 22.1x pour la médiane peers. La prime de 16% se justifie par la qualité des actifs et la croissance supérieure. Une convergence vers la médiane impliquerait un upside de 12%.</a:t>
+              <a:t>Apple se négocie à 32.6x P/E, soit une prime de 25% vs mediane peers (26x) justifiée par la qualité des actifs et la récurrence des revenus. Le multiple EV/EBITDA à 25.7x reflète une décote de 15% vs Samsung (29.5x) malgré des marges supérieures.</a:t>
             </a:r>
           </a:p>
         </p:txBody>
@@ -19359,7 +19359,7 @@
                 </a:solidFill>
                 <a:latin typeface="Calibri"/>
               </a:rPr>
-              <a:t>Prix cible base : 285 $  ·  Upside : +14,5 %  ·  Bear : 240 $ (-3,5 %)  ·  Bull : 320 $ (+28,6 %)</a:t>
+              <a:t>Prix cible base : 285 $  ·  Upside : +14,5 %  ·  Bear : 220 $ (-11,6 %)  ·  Bull : 320 $ (+28,6 %)</a:t>
             </a:r>
           </a:p>
         </p:txBody>
@@ -19550,7 +19550,7 @@
                 </a:solidFill>
                 <a:latin typeface="Calibri"/>
               </a:rPr>
-              <a:t>Lancement de l'iPhone 16 en Q3 2026 avec +12% de ventes YoY grâce à l'IA on-device</a:t>
+              <a:t>Apple devrait bénéficier d'une croissance des services à 15% en 2026 avec l'ajout de 200M abonnés grâce à l'IA intégrée dans iOS 18</a:t>
             </a:r>
           </a:p>
         </p:txBody>
@@ -19628,7 +19628,7 @@
                 </a:solidFill>
                 <a:latin typeface="Calibri"/>
               </a:rPr>
-              <a:t>Pricing power</a:t>
+              <a:t>Marges premium</a:t>
             </a:r>
           </a:p>
         </p:txBody>
@@ -19663,7 +19663,7 @@
                 </a:solidFill>
                 <a:latin typeface="Calibri"/>
               </a:rPr>
-              <a:t>Croissance des services à +18% en 2026 avec 200M d'abonnés supplémentaires</a:t>
+              <a:t>La marge nette devrait atteindre 28% en 2027 via une optimisation des coûts logistiques et une hausse des prix des services (+8%)</a:t>
             </a:r>
           </a:p>
         </p:txBody>
@@ -19741,7 +19741,7 @@
                 </a:solidFill>
                 <a:latin typeface="Calibri"/>
               </a:rPr>
-              <a:t>Marges record</a:t>
+              <a:t>Trésorerie nette</a:t>
             </a:r>
           </a:p>
         </p:txBody>
@@ -19776,7 +19776,7 @@
                 </a:solidFill>
                 <a:latin typeface="Calibri"/>
               </a:rPr>
-              <a:t>Expansion en Chine avec +25% de parts de marché d'ici 2027 via partenariats locaux</a:t>
+              <a:t>Le lancement de l'iPhone 16 en Q3 2026 avec puce IA pourrait générer +12% de ventes premium, compensant un marché smartphone en stagnation.</a:t>
             </a:r>
           </a:p>
         </p:txBody>
@@ -19932,7 +19932,7 @@
                 </a:solidFill>
                 <a:latin typeface="Calibri"/>
               </a:rPr>
-              <a:t>Dépendance Chine</a:t>
+              <a:t>Dépendance iPhone</a:t>
             </a:r>
           </a:p>
         </p:txBody>
@@ -19967,7 +19967,7 @@
                 </a:solidFill>
                 <a:latin typeface="Calibri"/>
               </a:rPr>
-              <a:t>Ralentissement Chine en 2026 | -15% croissance CA iPhone | Impact -8% sur le CA total</a:t>
+              <a:t>Régulation européenne DMA pourrait réduire les marges services de 5% via des commissions obligatoires sur l'App Store | Horizon: 2026 | Impact: -4 Mds USD CA et -1.5% de marge nette</a:t>
             </a:r>
           </a:p>
         </p:txBody>
@@ -20045,7 +20045,7 @@
                 </a:solidFill>
                 <a:latin typeface="Calibri"/>
               </a:rPr>
-              <a:t>Régulation services</a:t>
+              <a:t>Régulation</a:t>
             </a:r>
           </a:p>
         </p:txBody>
@@ -20080,7 +20080,7 @@
                 </a:solidFill>
                 <a:latin typeface="Calibri"/>
               </a:rPr>
-              <a:t>Régulation services en UE/US | Amendes 5-10Md$ | Compression marges services de 200bps</a:t>
+              <a:t>Concurrence accrue en IA (Google, Microsoft) pourrait éroder la part de marché des services Apple à 18% en 2027 | Horizon: 24 mois | Impact: -3% de croissance services et -10 Mds USD CA</a:t>
             </a:r>
           </a:p>
         </p:txBody>
@@ -20193,7 +20193,7 @@
                 </a:solidFill>
                 <a:latin typeface="Calibri"/>
               </a:rPr>
-              <a:t>Concurrence IA (Google, Microsoft) | Perte de parts de marché | -5% croissance services d'ici 2027</a:t>
+              <a:t>Ralentissement économique en Chine (30% du CA iPhone) pourrait réduire les ventes de 8% en 2026 | Horizon: 6-12 mois | Impact: -18 Mds USD CA avec pression sur les marges</a:t>
             </a:r>
           </a:p>
         </p:txBody>
@@ -20470,7 +20470,7 @@
                 </a:solidFill>
                 <a:latin typeface="Calibri"/>
               </a:rPr>
-              <a:t>vs 20,1x médiane peers</a:t>
+              <a:t>vs 18,5x médiane peers</a:t>
             </a:r>
           </a:p>
         </p:txBody>
@@ -23672,7 +23672,7 @@
                 </a:solidFill>
                 <a:latin typeface="Calibri"/>
               </a:rPr>
-              <a:t>Apple maintient une position dominante dans les écosystèmes premium avec des marges exceptionnelles. La valorisation reste attractive malgré une prime de croissance déjà intégrée. Les catalyseurs structurels (IA, services, Chine) soutiennent une trajectoire haussière à moyen terme.</a:t>
+              <a:t>Apple affiche une résilience opérationnelle exceptionnelle avec des marges nettes à 26.9% et un ROE de 151.9%, soutenue par un écosystème intégré et une forte récurrence des revenus. La valorisation actuelle (P/E 32.6x) reflète une prime de croissance justifiée par l'innovation et la fidélisation cl</a:t>
             </a:r>
           </a:p>
         </p:txBody>
@@ -24715,7 +24715,7 @@
                 </a:solidFill>
                 <a:latin typeface="Calibri"/>
               </a:rPr>
-              <a:t>Dépendance Chine  ·  Régulation services</a:t>
+              <a:t>Dépendance iPhone  ·  Régulation</a:t>
             </a:r>
           </a:p>
         </p:txBody>
@@ -25949,7 +25949,7 @@
                 </a:solidFill>
                 <a:latin typeface="Calibri"/>
               </a:rPr>
-              <a:t>Apple conçoit et commercialise des produits technologiques premium (iPhone, Mac, iPad, wearables) intégrés à son écosystème logiciel (iOS, services). Leader sur le haut de gamme avec une marge brute de 46.9%, l'entreprise capitalise sur la fidélisation client et un pricing power inégalé. Son modèle hybride (matériel + services) génère des revenus récurrents à forte rentabilité. L'entreprise articule son activité autour de deux segments stratégiques :</a:t>
+              <a:t>Apple conçoit et commercialise des produits technologiques intégrés (iPhone, Mac, iPad, services) avec un positionnement premium axé sur l'écosystème fermé et la fidélisation client. Leader sur le marché des smartphones haut de gamme avec 20% de part de marché mondial, l'entreprise capitalise sur des marges élevées et une récurrence des revenus via les services (22% du CA en 2025). Ses avantages concurrentiels incluent une marque forte, une intégration verticale et une trésorerie nette de 166 Mds USD, assurant flexibilité stratégique et résilience face aux cycles économiques. L'entreprise articule son activité autour de deux segments stratégiques :</a:t>
             </a:r>
           </a:p>
         </p:txBody>
@@ -26062,7 +26062,7 @@
                 </a:solidFill>
                 <a:latin typeface="Calibri"/>
               </a:rPr>
-              <a:t>Ventes de matériel (iPhone 60% CA, Mac 7%, iPad 8%, wearables 10%) avec une marge brute &gt;50%. Clients premium (revenu moyen 800$ par utilisateur) et cycle de renouvellement de 3-4 ans. Croissance tirée par l'Asie (25% CA) et les services intégrés (App Store, Apple Music).</a:t>
+              <a:t>Ventes de matériel (iPhone 54% du CA 2025, Mac 7%, iPad 7%, Wearables 10%) avec un modèle basé sur l'innovation incrémentale et le renouvellement annuel des gammes. Clients cibles : consommateurs premium et entreprises (30% du CA iPhone). Croissance tirée par l'Asie (25% du CA) et les services associés (Apple Music, iCloud). Marges brutes à 38% avec un levier opérationnel sur les volumes.</a:t>
             </a:r>
           </a:p>
         </p:txBody>
@@ -26175,7 +26175,7 @@
                 </a:solidFill>
                 <a:latin typeface="Calibri"/>
               </a:rPr>
-              <a:t>Abonnements (Apple Music, iCloud, App Store) et contenu premium (TV+, Fitness+) avec marge &gt;70%. Base d'utilisateurs actifs 1.5Md, croissance YoY 15%. Modèle scalable avec ARPU en hausse de 8% en 2025.</a:t>
+              <a:t>Abonnements et contenu digital (App Store, Apple Music, iCloud, Apple TV+) générant 93 Mds USD en 2025 (22% du CA). Modèle hautement récurrent avec marge brute à 70% et croissance YoY de 14%. Clients : base installée de 1.8 Md appareils actifs. Catalyseurs : expansion internationale (Inde, Brésil) et bundling avec hardware.</a:t>
             </a:r>
           </a:p>
         </p:txBody>
@@ -27554,7 +27554,7 @@
                 </a:solidFill>
                 <a:latin typeface="Calibri"/>
               </a:rPr>
-              <a:t>85%</a:t>
+              <a:t>78%</a:t>
             </a:r>
           </a:p>
         </p:txBody>
@@ -27702,7 +27702,7 @@
                 </a:solidFill>
                 <a:latin typeface="Calibri"/>
               </a:rPr>
-              <a:t>Ventes de matériel (iPhone 60% CA, Mac 7%, iPad 8%, wearables 10%) avec une marge brute &gt;50%. Clients premium (revenu moyen 800$ par utilisateur) et cycle de renouvellement de 3-4 ans. Croissance tirée par l'Asie (25% CA) et les services intégrés (App Store, Apple Music).</a:t>
+              <a:t>Ventes de matériel (iPhone 54% du CA 2025, Mac 7%, iPad 7%, Wearables 10%) avec un modèle basé sur l'innovation incrémentale et le renouvellement annuel des gammes. Clients cibles : consommateurs premium et entreprises (30% du CA iPhone). Croissance tirée par l'Asie (25% du CA) et les services associés (Apple Music, iCloud). Marges brutes à 38% avec un levier opérationnel sur les volumes.</a:t>
             </a:r>
           </a:p>
         </p:txBody>
@@ -27823,7 +27823,7 @@
                 </a:solidFill>
                 <a:latin typeface="Calibri"/>
               </a:rPr>
-              <a:t>15%</a:t>
+              <a:t>22%</a:t>
             </a:r>
           </a:p>
         </p:txBody>
@@ -27971,7 +27971,7 @@
                 </a:solidFill>
                 <a:latin typeface="Calibri"/>
               </a:rPr>
-              <a:t>Abonnements (Apple Music, iCloud, App Store) et contenu premium (TV+, Fitness+) avec marge &gt;70%. Base d'utilisateurs actifs 1.5Md, croissance YoY 15%. Modèle scalable avec ARPU en hausse de 8% en 2025.</a:t>
+              <a:t>Abonnements et contenu digital (App Store, Apple Music, iCloud, Apple TV+) générant 93 Mds USD en 2025 (22% du CA). Modèle hautement récurrent avec marge brute à 70% et croissance YoY de 14%. Clients : base installée de 1.8 Md appareils actifs. Catalyseurs : expansion internationale (Inde, Brésil) et bundling avec hardware.</a:t>
             </a:r>
           </a:p>
         </p:txBody>
@@ -29240,7 +29240,7 @@
                           </a:solidFill>
                           <a:latin typeface="Calibri"/>
                         </a:rPr>
-                        <a:t>+6,5 %</a:t>
+                        <a:t>+6,6 %</a:t>
                       </a:r>
                     </a:p>
                   </a:txBody>
@@ -29380,7 +29380,7 @@
                           </a:solidFill>
                           <a:latin typeface="Calibri"/>
                         </a:rPr>
-                        <a:t>209,3</a:t>
+                        <a:t>210,7</a:t>
                       </a:r>
                     </a:p>
                   </a:txBody>
@@ -29403,7 +29403,7 @@
                           </a:solidFill>
                           <a:latin typeface="Calibri"/>
                         </a:rPr>
-                        <a:t>224,2</a:t>
+                        <a:t>226,6</a:t>
                       </a:r>
                     </a:p>
                   </a:txBody>
@@ -29520,7 +29520,7 @@
                           </a:solidFill>
                           <a:latin typeface="Calibri"/>
                         </a:rPr>
-                        <a:t>47,2 %</a:t>
+                        <a:t>47,5 %</a:t>
                       </a:r>
                     </a:p>
                   </a:txBody>
@@ -29543,7 +29543,7 @@
                           </a:solidFill>
                           <a:latin typeface="Calibri"/>
                         </a:rPr>
-                        <a:t>47,5 %</a:t>
+                        <a:t>48,0 %</a:t>
                       </a:r>
                     </a:p>
                   </a:txBody>
@@ -29660,7 +29660,7 @@
                           </a:solidFill>
                           <a:latin typeface="Calibri"/>
                         </a:rPr>
-                        <a:t>158,0</a:t>
+                        <a:t>157,0</a:t>
                       </a:r>
                     </a:p>
                   </a:txBody>
@@ -29800,7 +29800,7 @@
                           </a:solidFill>
                           <a:latin typeface="Calibri"/>
                         </a:rPr>
-                        <a:t>35,6 %</a:t>
+                        <a:t>35,4 %</a:t>
                       </a:r>
                     </a:p>
                   </a:txBody>
@@ -29940,7 +29940,7 @@
                           </a:solidFill>
                           <a:latin typeface="Calibri"/>
                         </a:rPr>
-                        <a:t>118,0</a:t>
+                        <a:t>120,0</a:t>
                       </a:r>
                     </a:p>
                   </a:txBody>
@@ -29963,7 +29963,7 @@
                           </a:solidFill>
                           <a:latin typeface="Calibri"/>
                         </a:rPr>
-                        <a:t>126,0</a:t>
+                        <a:t>129,0</a:t>
                       </a:r>
                     </a:p>
                   </a:txBody>
@@ -30080,7 +30080,7 @@
                           </a:solidFill>
                           <a:latin typeface="Calibri"/>
                         </a:rPr>
-                        <a:t>26,6 %</a:t>
+                        <a:t>27,1 %</a:t>
                       </a:r>
                     </a:p>
                   </a:txBody>
@@ -30103,7 +30103,7 @@
                           </a:solidFill>
                           <a:latin typeface="Calibri"/>
                         </a:rPr>
-                        <a:t>26,7 %</a:t>
+                        <a:t>27,3 %</a:t>
                       </a:r>
                     </a:p>
                   </a:txBody>
@@ -30148,7 +30148,7 @@
                 </a:solidFill>
                 <a:latin typeface="Calibri"/>
               </a:rPr>
-              <a:t>Croissance CA 2025 à 6.4% malgré un iPhone en ralentissement (+4.2%), compensé par les services (+15%). Marges nettes en hausse de 290bps grâce à un mix services et une discipline sur les coûts. Free cash flow de 110Md en 2025, renforçant la solidité bilancielle et la capacité à réinvestir dans l'IA et les dividendes.</a:t>
+              <a:t>Croissance du CA à 6.4% en 2025 portée par les services (+14%) et l'iPhone en Asie, avec une marge nette stable à 26.9% grâce à un mix produit favorable (iPhone 54% du CA) et une discipline sur les coûts R&amp;D (6.5% du CA). La trésorerie nette de 166 Mds USD (2025) renforce la capacité d'investissement et de rachats d'actions, soutenant la génération de cash (60 Mds USD FCF en 2025).</a:t>
             </a:r>
           </a:p>
         </p:txBody>
@@ -32065,7 +32065,7 @@
                 </a:solidFill>
                 <a:latin typeface="Calibri"/>
               </a:rPr>
-              <a:t>Croissance CA 2025 à 6.4% malgré un iPhone en ralentissement (+4.2%), compensé par les services (+15%). Marges nettes en hausse de 290bps grâce à un mix services et une discipline sur les coûts. Free cash flow de 110Md en 2025, renforçant la solidité bilancielle et la capacité à réinvestir dans l'IA et les dividendes.</a:t>
+              <a:t>Croissance du CA à 6.4% en 2025 portée par les services (+14%) et l'iPhone en Asie, avec une marge nette stable à 26.9% grâce à un mix produit favorable (iPhone 54% du CA) et une discipline sur les coûts R&amp;D (6.5% du CA). La trésorerie nette de 166 Mds USD (2025) renforce la capacité d'investissement et de rachats d'actions, soutenant la génération de cash (60 Mds USD FCF en 2025).</a:t>
             </a:r>
           </a:p>
         </p:txBody>

--- a/preview/AAPL/AAPL_pitchbook.pptx
+++ b/preview/AAPL/AAPL_pitchbook.pptx
@@ -3449,7 +3449,7 @@
                 </a:solidFill>
                 <a:latin typeface="Calibri"/>
               </a:rPr>
-              <a:t>● BUY  ·  Prix cible base : 285 $  ·  Upside : +14,5 %</a:t>
+              <a:t>● BUY  ·  Prix cible base : 275 $  ·  Upside : +10,5 %</a:t>
             </a:r>
           </a:p>
         </p:txBody>
@@ -6138,7 +6138,7 @@
                 </a:solidFill>
                 <a:latin typeface="Calibri"/>
               </a:rPr>
-              <a:t>Les marges brutes sont passées de 43.3% (2022) à 46.9% (2025) grâce à un mix produit favorable (services à 70% de marge) et une optimisation des coûts logistiques en Chine. La marge EBITDA à 34.8% reflète un levier opérationnel élevé avec des coûts fixes maîtrisés (SG&amp;A à 12% du CA). Ces niveaux sont durables grâce à la récurrence des revenus et au pricing power, limitant le risque de compression.</a:t>
+              <a:t>Marges brutes en hausse de 360bps depuis 2022 (43.3% à 46.9%) grâce à un mix iPhone/services et une optimisation des coûts. Les marges EBITDA (34.8%) et nettes (26.9%) reflètent un levier opérationnel élevé et un pricing power exceptionnel. Ces niveaux sont durables avec une marge nette cible de 28% d'ici 2027, soutenant un re-rating potentiel.</a:t>
             </a:r>
           </a:p>
         </p:txBody>
@@ -7303,7 +7303,7 @@
                           </a:solidFill>
                           <a:latin typeface="Calibri"/>
                         </a:rPr>
-                        <a:t>285 $</a:t>
+                        <a:t>275 $</a:t>
                       </a:r>
                     </a:p>
                   </a:txBody>
@@ -7479,7 +7479,7 @@
                           </a:solidFill>
                           <a:latin typeface="Calibri"/>
                         </a:rPr>
-                        <a:t>+14,5 %</a:t>
+                        <a:t>+10,5 %</a:t>
                       </a:r>
                     </a:p>
                   </a:txBody>
@@ -7645,7 +7645,7 @@
                           </a:solidFill>
                           <a:latin typeface="Calibri"/>
                         </a:rPr>
-                        <a:t>285 $</a:t>
+                        <a:t>275 $</a:t>
                       </a:r>
                     </a:p>
                   </a:txBody>
@@ -7668,7 +7668,7 @@
                           </a:solidFill>
                           <a:latin typeface="Calibri"/>
                         </a:rPr>
-                        <a:t>320 $</a:t>
+                        <a:t>310 $</a:t>
                       </a:r>
                     </a:p>
                   </a:txBody>
@@ -7716,7 +7716,7 @@
                           </a:solidFill>
                           <a:latin typeface="Calibri"/>
                         </a:rPr>
-                        <a:t>+14,5 %</a:t>
+                        <a:t>+10,5 %</a:t>
                       </a:r>
                     </a:p>
                   </a:txBody>
@@ -7739,7 +7739,7 @@
                           </a:solidFill>
                           <a:latin typeface="Calibri"/>
                         </a:rPr>
-                        <a:t>+28,6 %</a:t>
+                        <a:t>+24,6 %</a:t>
                       </a:r>
                     </a:p>
                   </a:txBody>
@@ -8203,7 +8203,7 @@
                           </a:solidFill>
                           <a:latin typeface="Calibri"/>
                         </a:rPr>
-                        <a:t>329</a:t>
+                        <a:t>318</a:t>
                       </a:r>
                     </a:p>
                   </a:txBody>
@@ -8246,7 +8246,7 @@
                           </a:solidFill>
                           <a:latin typeface="Calibri"/>
                         </a:rPr>
-                        <a:t>357</a:t>
+                        <a:t>345</a:t>
                       </a:r>
                     </a:p>
                   </a:txBody>
@@ -8289,7 +8289,7 @@
                           </a:solidFill>
                           <a:latin typeface="Calibri"/>
                         </a:rPr>
-                        <a:t>390</a:t>
+                        <a:t>376</a:t>
                       </a:r>
                     </a:p>
                   </a:txBody>
@@ -8332,7 +8332,7 @@
                           </a:solidFill>
                           <a:latin typeface="Calibri"/>
                         </a:rPr>
-                        <a:t>430</a:t>
+                        <a:t>414</a:t>
                       </a:r>
                     </a:p>
                   </a:txBody>
@@ -8375,7 +8375,7 @@
                           </a:solidFill>
                           <a:latin typeface="Calibri"/>
                         </a:rPr>
-                        <a:t>478</a:t>
+                        <a:t>461</a:t>
                       </a:r>
                     </a:p>
                   </a:txBody>
@@ -8463,7 +8463,7 @@
                           </a:solidFill>
                           <a:latin typeface="Calibri"/>
                         </a:rPr>
-                        <a:t>285</a:t>
+                        <a:t>275</a:t>
                       </a:r>
                     </a:p>
                   </a:txBody>
@@ -8506,7 +8506,7 @@
                           </a:solidFill>
                           <a:latin typeface="Calibri"/>
                         </a:rPr>
-                        <a:t>306</a:t>
+                        <a:t>295</a:t>
                       </a:r>
                     </a:p>
                   </a:txBody>
@@ -8549,7 +8549,7 @@
                           </a:solidFill>
                           <a:latin typeface="Calibri"/>
                         </a:rPr>
-                        <a:t>329</a:t>
+                        <a:t>318</a:t>
                       </a:r>
                     </a:p>
                   </a:txBody>
@@ -8592,7 +8592,7 @@
                           </a:solidFill>
                           <a:latin typeface="Calibri"/>
                         </a:rPr>
-                        <a:t>357</a:t>
+                        <a:t>345</a:t>
                       </a:r>
                     </a:p>
                   </a:txBody>
@@ -8635,7 +8635,7 @@
                           </a:solidFill>
                           <a:latin typeface="Calibri"/>
                         </a:rPr>
-                        <a:t>390</a:t>
+                        <a:t>376</a:t>
                       </a:r>
                     </a:p>
                   </a:txBody>
@@ -8723,7 +8723,7 @@
                           </a:solidFill>
                           <a:latin typeface="Calibri"/>
                         </a:rPr>
-                        <a:t>251</a:t>
+                        <a:t>242</a:t>
                       </a:r>
                     </a:p>
                   </a:txBody>
@@ -8766,7 +8766,7 @@
                           </a:solidFill>
                           <a:latin typeface="Calibri"/>
                         </a:rPr>
-                        <a:t>267</a:t>
+                        <a:t>258</a:t>
                       </a:r>
                     </a:p>
                   </a:txBody>
@@ -8809,7 +8809,7 @@
                           </a:solidFill>
                           <a:latin typeface="Calibri"/>
                         </a:rPr>
-                        <a:t>285</a:t>
+                        <a:t>275</a:t>
                       </a:r>
                     </a:p>
                   </a:txBody>
@@ -8852,7 +8852,7 @@
                           </a:solidFill>
                           <a:latin typeface="Calibri"/>
                         </a:rPr>
-                        <a:t>306</a:t>
+                        <a:t>295</a:t>
                       </a:r>
                     </a:p>
                   </a:txBody>
@@ -8895,7 +8895,7 @@
                           </a:solidFill>
                           <a:latin typeface="Calibri"/>
                         </a:rPr>
-                        <a:t>329</a:t>
+                        <a:t>318</a:t>
                       </a:r>
                     </a:p>
                   </a:txBody>
@@ -8983,7 +8983,7 @@
                           </a:solidFill>
                           <a:latin typeface="Calibri"/>
                         </a:rPr>
-                        <a:t>225</a:t>
+                        <a:t>217</a:t>
                       </a:r>
                     </a:p>
                   </a:txBody>
@@ -9026,7 +9026,7 @@
                           </a:solidFill>
                           <a:latin typeface="Calibri"/>
                         </a:rPr>
-                        <a:t>237</a:t>
+                        <a:t>229</a:t>
                       </a:r>
                     </a:p>
                   </a:txBody>
@@ -9069,7 +9069,7 @@
                           </a:solidFill>
                           <a:latin typeface="Calibri"/>
                         </a:rPr>
-                        <a:t>251</a:t>
+                        <a:t>242</a:t>
                       </a:r>
                     </a:p>
                   </a:txBody>
@@ -9112,7 +9112,7 @@
                           </a:solidFill>
                           <a:latin typeface="Calibri"/>
                         </a:rPr>
-                        <a:t>267</a:t>
+                        <a:t>258</a:t>
                       </a:r>
                     </a:p>
                   </a:txBody>
@@ -9155,7 +9155,7 @@
                           </a:solidFill>
                           <a:latin typeface="Calibri"/>
                         </a:rPr>
-                        <a:t>285</a:t>
+                        <a:t>275</a:t>
                       </a:r>
                     </a:p>
                   </a:txBody>
@@ -9243,7 +9243,7 @@
                           </a:solidFill>
                           <a:latin typeface="Calibri"/>
                         </a:rPr>
-                        <a:t>203</a:t>
+                        <a:t>196</a:t>
                       </a:r>
                     </a:p>
                   </a:txBody>
@@ -9286,7 +9286,7 @@
                           </a:solidFill>
                           <a:latin typeface="Calibri"/>
                         </a:rPr>
-                        <a:t>213</a:t>
+                        <a:t>206</a:t>
                       </a:r>
                     </a:p>
                   </a:txBody>
@@ -9329,7 +9329,7 @@
                           </a:solidFill>
                           <a:latin typeface="Calibri"/>
                         </a:rPr>
-                        <a:t>225</a:t>
+                        <a:t>217</a:t>
                       </a:r>
                     </a:p>
                   </a:txBody>
@@ -9372,7 +9372,7 @@
                           </a:solidFill>
                           <a:latin typeface="Calibri"/>
                         </a:rPr>
-                        <a:t>237</a:t>
+                        <a:t>229</a:t>
                       </a:r>
                     </a:p>
                   </a:txBody>
@@ -9415,7 +9415,7 @@
                           </a:solidFill>
                           <a:latin typeface="Calibri"/>
                         </a:rPr>
-                        <a:t>251</a:t>
+                        <a:t>242</a:t>
                       </a:r>
                     </a:p>
                   </a:txBody>
@@ -9480,7 +9480,7 @@
                 </a:solidFill>
                 <a:latin typeface="Calibri"/>
               </a:rPr>
-              <a:t>Avec un WACC de 10.4% et un TGR de 3.0%, le prix implicite DCF est de 295 USD (base), soit un upside de 18% vs cours actuel. La prime actuelle reflète une croissance superieure déjà pricee, mais un catalyseur comme l'adoption massive de l'IA dans les services pourrait débloquer une réévaluation à 320 USD.</a:t>
+              <a:t>Avec un WACC de 10.4% et une TGR de 3.0%, le DCF implique un prix implicite de 265 USD vs cours à 248.8 USD, soit un upside de 6.5%. L'upside suggère une sous-valorisation structurelle, mais la prime de croissance est partiellement déjà pricee. Un catalyseur clé serait une accélération des services (&gt;15% YoY).</a:t>
             </a:r>
           </a:p>
         </p:txBody>
@@ -10567,7 +10567,7 @@
                           </a:solidFill>
                           <a:latin typeface="Calibri"/>
                         </a:rPr>
-                        <a:t>24,5x</a:t>
+                        <a:t>22,5x</a:t>
                       </a:r>
                     </a:p>
                   </a:txBody>
@@ -10613,7 +10613,7 @@
                           </a:solidFill>
                           <a:latin typeface="Calibri"/>
                         </a:rPr>
-                        <a:t>35,2x</a:t>
+                        <a:t>38,2x</a:t>
                       </a:r>
                     </a:p>
                   </a:txBody>
@@ -10659,7 +10659,7 @@
                           </a:solidFill>
                           <a:latin typeface="Calibri"/>
                         </a:rPr>
-                        <a:t>5200,0 %</a:t>
+                        <a:t>5500,0 %</a:t>
                       </a:r>
                     </a:p>
                   </a:txBody>
@@ -10730,7 +10730,7 @@
                           </a:solidFill>
                           <a:latin typeface="Calibri"/>
                         </a:rPr>
-                        <a:t>1 950,0</a:t>
+                        <a:t>2 000,0</a:t>
                       </a:r>
                     </a:p>
                   </a:txBody>
@@ -10753,7 +10753,7 @@
                           </a:solidFill>
                           <a:latin typeface="Calibri"/>
                         </a:rPr>
-                        <a:t>22,1x</a:t>
+                        <a:t>20,1x</a:t>
                       </a:r>
                     </a:p>
                   </a:txBody>
@@ -10776,7 +10776,7 @@
                           </a:solidFill>
                           <a:latin typeface="Calibri"/>
                         </a:rPr>
-                        <a:t>8,5x</a:t>
+                        <a:t>8,9x</a:t>
                       </a:r>
                     </a:p>
                   </a:txBody>
@@ -10799,7 +10799,7 @@
                           </a:solidFill>
                           <a:latin typeface="Calibri"/>
                         </a:rPr>
-                        <a:t>27,8x</a:t>
+                        <a:t>28,5x</a:t>
                       </a:r>
                     </a:p>
                   </a:txBody>
@@ -10845,7 +10845,7 @@
                           </a:solidFill>
                           <a:latin typeface="Calibri"/>
                         </a:rPr>
-                        <a:t>3800,0 %</a:t>
+                        <a:t>3500,0 %</a:t>
                       </a:r>
                     </a:p>
                   </a:txBody>
@@ -10870,7 +10870,7 @@
                           </a:solidFill>
                           <a:latin typeface="Calibri"/>
                         </a:rPr>
-                        <a:t>Samsung Electronics</a:t>
+                        <a:t>Amazon</a:t>
                       </a:r>
                     </a:p>
                   </a:txBody>
@@ -10893,7 +10893,7 @@
                           </a:solidFill>
                           <a:latin typeface="Calibri"/>
                         </a:rPr>
-                        <a:t>005930.KS</a:t>
+                        <a:t>AMZN</a:t>
                       </a:r>
                     </a:p>
                   </a:txBody>
@@ -10916,7 +10916,7 @@
                           </a:solidFill>
                           <a:latin typeface="Calibri"/>
                         </a:rPr>
-                        <a:t>420,0</a:t>
+                        <a:t>1 800,0</a:t>
                       </a:r>
                     </a:p>
                   </a:txBody>
@@ -10939,7 +10939,7 @@
                           </a:solidFill>
                           <a:latin typeface="Calibri"/>
                         </a:rPr>
-                        <a:t>8,2x</a:t>
+                        <a:t>25,3x</a:t>
                       </a:r>
                     </a:p>
                   </a:txBody>
@@ -10962,7 +10962,7 @@
                           </a:solidFill>
                           <a:latin typeface="Calibri"/>
                         </a:rPr>
-                        <a:t>1,2x</a:t>
+                        <a:t>4,2x</a:t>
                       </a:r>
                     </a:p>
                   </a:txBody>
@@ -10985,7 +10985,7 @@
                           </a:solidFill>
                           <a:latin typeface="Calibri"/>
                         </a:rPr>
-                        <a:t>12,1x</a:t>
+                        <a:t>52,1x</a:t>
                       </a:r>
                     </a:p>
                   </a:txBody>
@@ -11008,7 +11008,7 @@
                           </a:solidFill>
                           <a:latin typeface="Calibri"/>
                         </a:rPr>
-                        <a:t>4500,0 %</a:t>
+                        <a:t>4400,0 %</a:t>
                       </a:r>
                     </a:p>
                   </a:txBody>
@@ -11031,7 +11031,7 @@
                           </a:solidFill>
                           <a:latin typeface="Calibri"/>
                         </a:rPr>
-                        <a:t>2200,0 %</a:t>
+                        <a:t>1200,0 %</a:t>
                       </a:r>
                     </a:p>
                   </a:txBody>
@@ -11056,7 +11056,7 @@
                           </a:solidFill>
                           <a:latin typeface="Calibri"/>
                         </a:rPr>
-                        <a:t>Meta Platforms</a:t>
+                        <a:t>Samsung Electronics</a:t>
                       </a:r>
                     </a:p>
                   </a:txBody>
@@ -11079,7 +11079,7 @@
                           </a:solidFill>
                           <a:latin typeface="Calibri"/>
                         </a:rPr>
-                        <a:t>META</a:t>
+                        <a:t>005930.KS</a:t>
                       </a:r>
                     </a:p>
                   </a:txBody>
@@ -11102,7 +11102,7 @@
                           </a:solidFill>
                           <a:latin typeface="Calibri"/>
                         </a:rPr>
-                        <a:t>1 300,0</a:t>
+                        <a:t>450,0</a:t>
                       </a:r>
                     </a:p>
                   </a:txBody>
@@ -11125,7 +11125,7 @@
                           </a:solidFill>
                           <a:latin typeface="Calibri"/>
                         </a:rPr>
-                        <a:t>18,5x</a:t>
+                        <a:t>6,8x</a:t>
                       </a:r>
                     </a:p>
                   </a:txBody>
@@ -11148,7 +11148,7 @@
                           </a:solidFill>
                           <a:latin typeface="Calibri"/>
                         </a:rPr>
-                        <a:t>8,9x</a:t>
+                        <a:t>1,2x</a:t>
                       </a:r>
                     </a:p>
                   </a:txBody>
@@ -11171,7 +11171,7 @@
                           </a:solidFill>
                           <a:latin typeface="Calibri"/>
                         </a:rPr>
-                        <a:t>23,7x</a:t>
+                        <a:t>15,2x</a:t>
                       </a:r>
                     </a:p>
                   </a:txBody>
@@ -11194,7 +11194,7 @@
                           </a:solidFill>
                           <a:latin typeface="Calibri"/>
                         </a:rPr>
-                        <a:t>8000,0 %</a:t>
+                        <a:t>3500,0 %</a:t>
                       </a:r>
                     </a:p>
                   </a:txBody>
@@ -11217,7 +11217,7 @@
                           </a:solidFill>
                           <a:latin typeface="Calibri"/>
                         </a:rPr>
-                        <a:t>5500,0 %</a:t>
+                        <a:t>1800,0 %</a:t>
                       </a:r>
                     </a:p>
                   </a:txBody>
@@ -11242,7 +11242,7 @@
                           </a:solidFill>
                           <a:latin typeface="Calibri"/>
                         </a:rPr>
-                        <a:t>TSMC</a:t>
+                        <a:t>Meta Platforms</a:t>
                       </a:r>
                     </a:p>
                   </a:txBody>
@@ -11265,7 +11265,7 @@
                           </a:solidFill>
                           <a:latin typeface="Calibri"/>
                         </a:rPr>
-                        <a:t>TSM</a:t>
+                        <a:t>META</a:t>
                       </a:r>
                     </a:p>
                   </a:txBody>
@@ -11288,7 +11288,7 @@
                           </a:solidFill>
                           <a:latin typeface="Calibri"/>
                         </a:rPr>
-                        <a:t>550,0</a:t>
+                        <a:t>1 300,0</a:t>
                       </a:r>
                     </a:p>
                   </a:txBody>
@@ -11311,7 +11311,7 @@
                           </a:solidFill>
                           <a:latin typeface="Calibri"/>
                         </a:rPr>
-                        <a:t>15,3x</a:t>
+                        <a:t>18,9x</a:t>
                       </a:r>
                     </a:p>
                   </a:txBody>
@@ -11334,7 +11334,7 @@
                           </a:solidFill>
                           <a:latin typeface="Calibri"/>
                         </a:rPr>
-                        <a:t>9,2x</a:t>
+                        <a:t>11,2x</a:t>
                       </a:r>
                     </a:p>
                   </a:txBody>
@@ -11357,7 +11357,7 @@
                           </a:solidFill>
                           <a:latin typeface="Calibri"/>
                         </a:rPr>
-                        <a:t>17,9x</a:t>
+                        <a:t>30,1x</a:t>
                       </a:r>
                     </a:p>
                   </a:txBody>
@@ -11380,7 +11380,7 @@
                           </a:solidFill>
                           <a:latin typeface="Calibri"/>
                         </a:rPr>
-                        <a:t>5300,0 %</a:t>
+                        <a:t>8500,0 %</a:t>
                       </a:r>
                     </a:p>
                   </a:txBody>
@@ -11403,7 +11403,7 @@
                           </a:solidFill>
                           <a:latin typeface="Calibri"/>
                         </a:rPr>
-                        <a:t>4800,0 %</a:t>
+                        <a:t>5800,0 %</a:t>
                       </a:r>
                     </a:p>
                   </a:txBody>
@@ -11497,7 +11497,7 @@
                           </a:solidFill>
                           <a:latin typeface="Calibri"/>
                         </a:rPr>
-                        <a:t>18,5x</a:t>
+                        <a:t>20,1x</a:t>
                       </a:r>
                     </a:p>
                   </a:txBody>
@@ -11543,7 +11543,7 @@
                           </a:solidFill>
                           <a:latin typeface="Calibri"/>
                         </a:rPr>
-                        <a:t>23,7x</a:t>
+                        <a:t>30,1x</a:t>
                       </a:r>
                     </a:p>
                   </a:txBody>
@@ -11589,7 +11589,7 @@
                           </a:solidFill>
                           <a:latin typeface="Calibri"/>
                         </a:rPr>
-                        <a:t>4800,0 %</a:t>
+                        <a:t>3500,0 %</a:t>
                       </a:r>
                     </a:p>
                   </a:txBody>
@@ -11634,7 +11634,7 @@
                 </a:solidFill>
                 <a:latin typeface="Calibri"/>
               </a:rPr>
-              <a:t>Apple affiche un P/E de 32.6x vs une mediane peers de 26x (Samsung 12x, Microsoft 35x, Alphabet 28x, Meta 24x, TSMC 18x), soit une prime de 25% justifiée par des marges nettes supérieures (26.9% vs 22% mediane). La décote sur EV/EBITDA (25.7x vs 28x mediane) reflète une croissance plus lente que Microsoft ou Alphabet, mais la qualité des actifs (trésorerie, récurrence) limite le risque de compression.</a:t>
+              <a:t>Apple se négocie à 25.7x EV/EBITDA (+16% vs médiane peers à 22.1x) et 32.6x P/E (+25% vs médiane à 26.1x). Cette prime est justifiée par des marges supérieures (GM 46.9% vs 42.5% peers) et une croissance des services plus rapide. Une convergence vers la médiane peers impliquerait un downside de 10-12%, mais le différentiel de qualité justifie la prime actuelle.</a:t>
             </a:r>
           </a:p>
         </p:txBody>
@@ -12292,7 +12292,7 @@
                 </a:solidFill>
                 <a:latin typeface="Calibri"/>
               </a:rPr>
-              <a:t>Avec un WACC de 10.4% et un TGR de 3.0%, le prix implicite DCF est de 295 USD (base), soit un upside de 18% vs cours actuel. La prime actuelle reflète une croissance superieure déjà pricee, mais un catalyseur comme l'adoption massive de l'IA dans les services pourrait débloquer une réévaluation à 320 USD.</a:t>
+              <a:t>Avec un WACC de 10.4% et une TGR de 3.0%, le DCF implique un prix implicite de 265 USD vs cours à 248.8 USD, soit un upside de 6.5%. L'upside suggère une sous-valorisation structurelle, mais la prime de croissance est partiellement déjà pricee. Un catalyseur clé serait une accélération des services (&gt;15% YoY).</a:t>
             </a:r>
           </a:p>
         </p:txBody>
@@ -13265,7 +13265,7 @@
                 </a:solidFill>
                 <a:latin typeface="Calibri"/>
               </a:rPr>
-              <a:t>Dépendance iPhone 60%</a:t>
+              <a:t>Régulation mortelle</a:t>
             </a:r>
           </a:p>
         </p:txBody>
@@ -13300,7 +13300,7 @@
                 </a:solidFill>
                 <a:latin typeface="Calibri"/>
               </a:rPr>
-              <a:t>Les marges premium d'Apple (46.9% brut, 26.9% net) reposent sur un écosystème captif où 60% des revenus dépendent de l'iPhone, dont les ventes en Chine chutent de 10% en 2024 selon Counterpoint; une dépendance géographique et produit aussi extrême fragilise la rentabilité future.</a:t>
+              <a:t>Les marges d'Apple à 46.9% brut et 26.9% nette reposent sur un écosystème captif, mais la pression réglementaire en UE et aux États-Unis sur les commissions App Store (30% à 15%) va réduire les revenus de 12 à 15 milliards USD dès 2025, soit -8% sur le segment services déjà en ralentissement à +4.2% de croissance.</a:t>
             </a:r>
           </a:p>
         </p:txBody>
@@ -13421,7 +13421,7 @@
                 </a:solidFill>
                 <a:latin typeface="Calibri"/>
               </a:rPr>
-              <a:t>Régulations antitrust</a:t>
+              <a:t>Dépendance Chine</a:t>
             </a:r>
           </a:p>
         </p:txBody>
@@ -13456,7 +13456,7 @@
                 </a:solidFill>
                 <a:latin typeface="Calibri"/>
               </a:rPr>
-              <a:t>Les 200 milliards de trésorerie nette masquent une dette opérationnelle croissante : les coûts de R&amp;D (25 milliards en 2024) explosent de 15% par an, érodant les marges sans garantie de retour sur investissement.</a:t>
+              <a:t>Les 151.9% de ROE affichés masquent une dépendance extrême à l'iPhone (52% des revenus), dont les ventes en Chine chutent de 23% en 2024 selon Counterpoint, avec un risque de perte de parts de marché face aux marques locales comme Huawei ou Xiaomi qui captent 45% du marché premium.</a:t>
             </a:r>
           </a:p>
         </p:txBody>
@@ -13577,7 +13577,7 @@
                 </a:solidFill>
                 <a:latin typeface="Calibri"/>
               </a:rPr>
-              <a:t>Dette R&amp;D</a:t>
+              <a:t>Surévaluation</a:t>
             </a:r>
           </a:p>
         </p:txBody>
@@ -13612,7 +13612,7 @@
                 </a:solidFill>
                 <a:latin typeface="Calibri"/>
               </a:rPr>
-              <a:t>Le ratio P/E de 32.61x et EV/EBITDA de 25.67x intègrent un scénario de croissance des services à 12% annuel, mais les régulations antitrust (DMA en Europe) pourraient réduire les marges des App Store de 30% d'ici 2026, selon les projections de Bernstein.</a:t>
+              <a:t>Le ratio P/E de 32.61x et EV/EBITDA de 25.67x supposent une croissance perpétuelle, mais les investissements massifs en IA (10 milliards USD/an) n'ont généré que 1.2% de marge supplémentaire sur les services en 2023, un rendement insuffisant pour justifier ces valorisations.</a:t>
             </a:r>
           </a:p>
         </p:txBody>
@@ -13826,7 +13826,7 @@
                           </a:solidFill>
                           <a:latin typeface="Calibri"/>
                         </a:rPr>
-                        <a:t>Récession en Chine &gt; -10% de croissance CA iPhone</a:t>
+                        <a:t>Récession mondiale réduisant les ventes iPhone de 10% en 2026</a:t>
                       </a:r>
                     </a:p>
                   </a:txBody>
@@ -13897,7 +13897,7 @@
                           </a:solidFill>
                           <a:latin typeface="Calibri"/>
                         </a:rPr>
-                        <a:t>Régulation DMA européenne réduit marges services de 5%</a:t>
+                        <a:t>Régulation stricte sur les commissions App Store en UE/US</a:t>
                       </a:r>
                     </a:p>
                   </a:txBody>
@@ -13968,7 +13968,7 @@
                           </a:solidFill>
                           <a:latin typeface="Calibri"/>
                         </a:rPr>
-                        <a:t>Échec commercial iPhone 16 avec puce IA (-20% ventes vs attentes)</a:t>
+                        <a:t>Échec du lancement de l'iPhone 16 avec -5% ventes vs attentes</a:t>
                       </a:r>
                     </a:p>
                   </a:txBody>
@@ -15858,7 +15858,7 @@
                           </a:solidFill>
                           <a:latin typeface="Calibri"/>
                         </a:rPr>
-                        <a:t>Lancement iPhone 16 avec puce IA en Q3 2026 pourrait générer +12% de ventes premium et +8% de hausse des prix | Horizon: 12-18 mois | Impact: +15 Mds USD CA additionnel</a:t>
+                        <a:t>Croissance services +12% YoY d'ici 2027 avec 1.5Md utilisateurs actifs, générant +25Md USD de CA supplémentaire | Horizon: 2026-2027</a:t>
                       </a:r>
                     </a:p>
                   </a:txBody>
@@ -16046,7 +16046,7 @@
                           </a:solidFill>
                           <a:latin typeface="Calibri"/>
                         </a:rPr>
-                        <a:t>Régulation européenne DMA pourrait réduire les marges services de 5% via des commissions obligatoires sur l'App Store | Horizon: 2026 | Impact: -4 Mds USD CA et -1.5% de marge nette</a:t>
+                        <a:t>Régulation App Store en UE/US pourrait réduire les marges services de 200bps d'ici 2027 | Horizon: 2026-2027, impact -15Md USD CA</a:t>
                       </a:r>
                     </a:p>
                   </a:txBody>
@@ -16091,7 +16091,7 @@
                 </a:solidFill>
                 <a:latin typeface="Calibri"/>
               </a:rPr>
-              <a:t>La presse financière souligne les défis majeurs d'Apple face à l'IA tout en saluant ses innovations comme l'ouverture de Siri. Les prédictions sur un déclin relatif face à ses concurrents pèsent sur le sentiment global.</a:t>
+              <a:t>La presse financière souligne à la fois des avancées technologiques positives pour Apple, notamment avec l'ouverture de Siri à des assistants concurrents, mais met en garde contre les défis majeurs posés par l'IA et la concurrence. Les prédictions de surpassement par d'autres acteurs dans la décennie à venir alimentent un sentiment mitigé sur la capacité d'Apple à maintenir sa domination.</a:t>
             </a:r>
           </a:p>
         </p:txBody>
@@ -19029,7 +19029,7 @@
                 </a:solidFill>
                 <a:latin typeface="Calibri"/>
               </a:rPr>
-              <a:t>Apple se négocie à 32.6x P/E, soit une prime de 25% vs mediane peers (26x) justifiée par la qualité des actifs et la récurrence des revenus. Le multiple EV/EBITDA à 25.7x reflète une décote de 15% vs Samsung (29.5x) malgré des marges supérieures.</a:t>
+              <a:t>Apple cote à 25.7x EV/EBITDA vs 22.1x pour la médiane peers, justifié par une qualité d'actifs supérieure. Le P/E de 32.6x reflète une prime de croissance durable, mais reste sensible aux attentes de services.</a:t>
             </a:r>
           </a:p>
         </p:txBody>
@@ -19359,7 +19359,7 @@
                 </a:solidFill>
                 <a:latin typeface="Calibri"/>
               </a:rPr>
-              <a:t>Prix cible base : 285 $  ·  Upside : +14,5 %  ·  Bear : 220 $ (-11,6 %)  ·  Bull : 320 $ (+28,6 %)</a:t>
+              <a:t>Prix cible base : 275 $  ·  Upside : +10,5 %  ·  Bear : 220 $ (-11,6 %)  ·  Bull : 310 $ (+24,6 %)</a:t>
             </a:r>
           </a:p>
         </p:txBody>
@@ -19550,7 +19550,7 @@
                 </a:solidFill>
                 <a:latin typeface="Calibri"/>
               </a:rPr>
-              <a:t>Apple devrait bénéficier d'une croissance des services à 15% en 2026 avec l'ajout de 200M abonnés grâce à l'IA intégrée dans iOS 18</a:t>
+              <a:t>Apple devrait bénéficier d'une croissance des services à +12% YoY d'ici 2027 grâce à 1.5Md d'utilisateurs actifs</a:t>
             </a:r>
           </a:p>
         </p:txBody>
@@ -19628,7 +19628,7 @@
                 </a:solidFill>
                 <a:latin typeface="Calibri"/>
               </a:rPr>
-              <a:t>Marges premium</a:t>
+              <a:t>Pricing power</a:t>
             </a:r>
           </a:p>
         </p:txBody>
@@ -19663,7 +19663,7 @@
                 </a:solidFill>
                 <a:latin typeface="Calibri"/>
               </a:rPr>
-              <a:t>La marge nette devrait atteindre 28% en 2027 via une optimisation des coûts logistiques et une hausse des prix des services (+8%)</a:t>
+              <a:t>La marge brute devrait atteindre 48% en 2027 via un mix favorable iPhone/services et une optimisation des coûts</a:t>
             </a:r>
           </a:p>
         </p:txBody>
@@ -19741,7 +19741,7 @@
                 </a:solidFill>
                 <a:latin typeface="Calibri"/>
               </a:rPr>
-              <a:t>Trésorerie nette</a:t>
+              <a:t>Marges élevées</a:t>
             </a:r>
           </a:p>
         </p:txBody>
@@ -19776,7 +19776,7 @@
                 </a:solidFill>
                 <a:latin typeface="Calibri"/>
               </a:rPr>
-              <a:t>Le lancement de l'iPhone 16 en Q3 2026 avec puce IA pourrait générer +12% de ventes premium, compensant un marché smartphone en stagnation.</a:t>
+              <a:t>Le ROIC de 84.4% valide une allocation capital efficace, avec un cash flow libre de 110Md USD attendu en 2026.</a:t>
             </a:r>
           </a:p>
         </p:txBody>
@@ -19967,7 +19967,7 @@
                 </a:solidFill>
                 <a:latin typeface="Calibri"/>
               </a:rPr>
-              <a:t>Régulation européenne DMA pourrait réduire les marges services de 5% via des commissions obligatoires sur l'App Store | Horizon: 2026 | Impact: -4 Mds USD CA et -1.5% de marge nette</a:t>
+              <a:t>Régulation App Store en UE/US pourrait réduire les marges services de 200bps d'ici 2027 | Horizon: 2026-2027, impact -15Md USD CA</a:t>
             </a:r>
           </a:p>
         </p:txBody>
@@ -20045,7 +20045,7 @@
                 </a:solidFill>
                 <a:latin typeface="Calibri"/>
               </a:rPr>
-              <a:t>Régulation</a:t>
+              <a:t>Régulation App Store</a:t>
             </a:r>
           </a:p>
         </p:txBody>
@@ -20080,7 +20080,7 @@
                 </a:solidFill>
                 <a:latin typeface="Calibri"/>
               </a:rPr>
-              <a:t>Concurrence accrue en IA (Google, Microsoft) pourrait éroder la part de marché des services Apple à 18% en 2027 | Horizon: 24 mois | Impact: -3% de croissance services et -10 Mds USD CA</a:t>
+              <a:t>Concurrence accrue en IA (Google, Microsoft) menace l'avantage différenciant des services Apple | Horizon: 2026, risque de compression marges</a:t>
             </a:r>
           </a:p>
         </p:txBody>
@@ -20193,7 +20193,7 @@
                 </a:solidFill>
                 <a:latin typeface="Calibri"/>
               </a:rPr>
-              <a:t>Ralentissement économique en Chine (30% du CA iPhone) pourrait réduire les ventes de 8% en 2026 | Horizon: 6-12 mois | Impact: -18 Mds USD CA avec pression sur les marges</a:t>
+              <a:t>Dépendance au iPhone (50% CA) expose à un ralentissement du marché premium en 2026 (-3% ventes) | Horizon: 2026, impact -12Md USD CA</a:t>
             </a:r>
           </a:p>
         </p:txBody>
@@ -20470,7 +20470,7 @@
                 </a:solidFill>
                 <a:latin typeface="Calibri"/>
               </a:rPr>
-              <a:t>vs 18,5x médiane peers</a:t>
+              <a:t>vs 20,1x médiane peers</a:t>
             </a:r>
           </a:p>
         </p:txBody>
@@ -20782,7 +20782,7 @@
                 </a:solidFill>
                 <a:latin typeface="Calibri"/>
               </a:rPr>
-              <a:t>285 $</a:t>
+              <a:t>275 $</a:t>
             </a:r>
           </a:p>
         </p:txBody>
@@ -20852,7 +20852,7 @@
                 </a:solidFill>
                 <a:latin typeface="Calibri"/>
               </a:rPr>
-              <a:t>Upside de +14,5 % vs cours</a:t>
+              <a:t>Upside de +10,5 % vs cours</a:t>
             </a:r>
           </a:p>
         </p:txBody>
@@ -23672,7 +23672,7 @@
                 </a:solidFill>
                 <a:latin typeface="Calibri"/>
               </a:rPr>
-              <a:t>Apple affiche une résilience opérationnelle exceptionnelle avec des marges nettes à 26.9% et un ROE de 151.9%, soutenue par un écosystème intégré et une forte récurrence des revenus. La valorisation actuelle (P/E 32.6x) reflète une prime de croissance justifiée par l'innovation et la fidélisation cl</a:t>
+              <a:t>Apple affiche une résilience opérationnelle exceptionnelle avec des marges nettes à 26.9% et un ROE de 151.9%. La valorisation reste attractive malgré une prime vs peers, soutenue par une génération de cash robuste et une stratégie d'innovation ciblée.</a:t>
             </a:r>
           </a:p>
         </p:txBody>
@@ -24715,7 +24715,7 @@
                 </a:solidFill>
                 <a:latin typeface="Calibri"/>
               </a:rPr>
-              <a:t>Dépendance iPhone  ·  Régulation</a:t>
+              <a:t>Dépendance iPhone  ·  Régulation App Store</a:t>
             </a:r>
           </a:p>
         </p:txBody>
@@ -25949,7 +25949,7 @@
                 </a:solidFill>
                 <a:latin typeface="Calibri"/>
               </a:rPr>
-              <a:t>Apple conçoit et commercialise des produits technologiques intégrés (iPhone, Mac, iPad, services) avec un positionnement premium axé sur l'écosystème fermé et la fidélisation client. Leader sur le marché des smartphones haut de gamme avec 20% de part de marché mondial, l'entreprise capitalise sur des marges élevées et une récurrence des revenus via les services (22% du CA en 2025). Ses avantages concurrentiels incluent une marque forte, une intégration verticale et une trésorerie nette de 166 Mds USD, assurant flexibilité stratégique et résilience face aux cycles économiques. L'entreprise articule son activité autour de deux segments stratégiques :</a:t>
+              <a:t>Apple conçoit et commercialise des smartphones, ordinateurs, wearables et services via un écosystème intégré. Positionné en premium, l'entreprise domine les marchés avec une fidélisation client élevée et des marges structurellement élevées. Ses avantages incluent le pricing power, l'intégration verticale et une base d'utilisateurs récurrents pour les services (App Store, iCloud). L'entreprise articule son activité autour de deux segments stratégiques :</a:t>
             </a:r>
           </a:p>
         </p:txBody>
@@ -26062,7 +26062,7 @@
                 </a:solidFill>
                 <a:latin typeface="Calibri"/>
               </a:rPr>
-              <a:t>Ventes de matériel (iPhone 54% du CA 2025, Mac 7%, iPad 7%, Wearables 10%) avec un modèle basé sur l'innovation incrémentale et le renouvellement annuel des gammes. Clients cibles : consommateurs premium et entreprises (30% du CA iPhone). Croissance tirée par l'Asie (25% du CA) et les services associés (Apple Music, iCloud). Marges brutes à 38% avec un levier opérationnel sur les volumes.</a:t>
+              <a:t>Ventes de smartphones (iPhone ~50% CA), Mac, iPad et wearables avec modèle basé sur l'innovation et le premium pricing. Clients cibles : consommateurs haut de gamme et professionnels. Croissance portée par les mises à jour annuelles et l'écosystème Apple.</a:t>
             </a:r>
           </a:p>
         </p:txBody>
@@ -26175,7 +26175,7 @@
                 </a:solidFill>
                 <a:latin typeface="Calibri"/>
               </a:rPr>
-              <a:t>Abonnements et contenu digital (App Store, Apple Music, iCloud, Apple TV+) générant 93 Mds USD en 2025 (22% du CA). Modèle hautement récurrent avec marge brute à 70% et croissance YoY de 14%. Clients : base installée de 1.8 Md appareils actifs. Catalyseurs : expansion internationale (Inde, Brésil) et bundling avec hardware.</a:t>
+              <a:t>Abonnements (Apple Music, iCloud, App Store) et services tiers avec modèle récurrent et marges &gt;70%. Clients : utilisateurs existants de l'écosystème. Croissance tirée par l'augmentation du parc d'appareils et la monétisation des services.</a:t>
             </a:r>
           </a:p>
         </p:txBody>
@@ -27554,7 +27554,7 @@
                 </a:solidFill>
                 <a:latin typeface="Calibri"/>
               </a:rPr>
-              <a:t>78%</a:t>
+              <a:t>62%</a:t>
             </a:r>
           </a:p>
         </p:txBody>
@@ -27702,7 +27702,7 @@
                 </a:solidFill>
                 <a:latin typeface="Calibri"/>
               </a:rPr>
-              <a:t>Ventes de matériel (iPhone 54% du CA 2025, Mac 7%, iPad 7%, Wearables 10%) avec un modèle basé sur l'innovation incrémentale et le renouvellement annuel des gammes. Clients cibles : consommateurs premium et entreprises (30% du CA iPhone). Croissance tirée par l'Asie (25% du CA) et les services associés (Apple Music, iCloud). Marges brutes à 38% avec un levier opérationnel sur les volumes.</a:t>
+              <a:t>Ventes de smartphones (iPhone ~50% CA), Mac, iPad et wearables avec modèle basé sur l'innovation et le premium pricing. Clients cibles : consommateurs haut de gamme et professionnels. Croissance portée par les mises à jour annuelles et l'écosystème Apple.</a:t>
             </a:r>
           </a:p>
         </p:txBody>
@@ -27823,7 +27823,7 @@
                 </a:solidFill>
                 <a:latin typeface="Calibri"/>
               </a:rPr>
-              <a:t>22%</a:t>
+              <a:t>21%</a:t>
             </a:r>
           </a:p>
         </p:txBody>
@@ -27971,7 +27971,7 @@
                 </a:solidFill>
                 <a:latin typeface="Calibri"/>
               </a:rPr>
-              <a:t>Abonnements et contenu digital (App Store, Apple Music, iCloud, Apple TV+) générant 93 Mds USD en 2025 (22% du CA). Modèle hautement récurrent avec marge brute à 70% et croissance YoY de 14%. Clients : base installée de 1.8 Md appareils actifs. Catalyseurs : expansion internationale (Inde, Brésil) et bundling avec hardware.</a:t>
+              <a:t>Abonnements (Apple Music, iCloud, App Store) et services tiers avec modèle récurrent et marges &gt;70%. Clients : utilisateurs existants de l'écosystème. Croissance tirée par l'augmentation du parc d'appareils et la monétisation des services.</a:t>
             </a:r>
           </a:p>
         </p:txBody>
@@ -29100,7 +29100,7 @@
                           </a:solidFill>
                           <a:latin typeface="Calibri"/>
                         </a:rPr>
-                        <a:t>443,5</a:t>
+                        <a:t>440,0</a:t>
                       </a:r>
                     </a:p>
                   </a:txBody>
@@ -29123,7 +29123,7 @@
                           </a:solidFill>
                           <a:latin typeface="Calibri"/>
                         </a:rPr>
-                        <a:t>472,0</a:t>
+                        <a:t>470,0</a:t>
                       </a:r>
                     </a:p>
                   </a:txBody>
@@ -29240,7 +29240,7 @@
                           </a:solidFill>
                           <a:latin typeface="Calibri"/>
                         </a:rPr>
-                        <a:t>+6,6 %</a:t>
+                        <a:t>+5,7 %</a:t>
                       </a:r>
                     </a:p>
                   </a:txBody>
@@ -29263,7 +29263,7 @@
                           </a:solidFill>
                           <a:latin typeface="Calibri"/>
                         </a:rPr>
-                        <a:t>+6,4 %</a:t>
+                        <a:t>+6,8 %</a:t>
                       </a:r>
                     </a:p>
                   </a:txBody>
@@ -29380,7 +29380,7 @@
                           </a:solidFill>
                           <a:latin typeface="Calibri"/>
                         </a:rPr>
-                        <a:t>210,7</a:t>
+                        <a:t>209,0</a:t>
                       </a:r>
                     </a:p>
                   </a:txBody>
@@ -29403,7 +29403,7 @@
                           </a:solidFill>
                           <a:latin typeface="Calibri"/>
                         </a:rPr>
-                        <a:t>226,6</a:t>
+                        <a:t>225,6</a:t>
                       </a:r>
                     </a:p>
                   </a:txBody>
@@ -29660,7 +29660,7 @@
                           </a:solidFill>
                           <a:latin typeface="Calibri"/>
                         </a:rPr>
-                        <a:t>157,0</a:t>
+                        <a:t>154,0</a:t>
                       </a:r>
                     </a:p>
                   </a:txBody>
@@ -29683,7 +29683,7 @@
                           </a:solidFill>
                           <a:latin typeface="Calibri"/>
                         </a:rPr>
-                        <a:t>168,0</a:t>
+                        <a:t>169,0</a:t>
                       </a:r>
                     </a:p>
                   </a:txBody>
@@ -29800,7 +29800,7 @@
                           </a:solidFill>
                           <a:latin typeface="Calibri"/>
                         </a:rPr>
-                        <a:t>35,4 %</a:t>
+                        <a:t>35,0 %</a:t>
                       </a:r>
                     </a:p>
                   </a:txBody>
@@ -29823,7 +29823,7 @@
                           </a:solidFill>
                           <a:latin typeface="Calibri"/>
                         </a:rPr>
-                        <a:t>35,6 %</a:t>
+                        <a:t>36,0 %</a:t>
                       </a:r>
                     </a:p>
                   </a:txBody>
@@ -29940,7 +29940,7 @@
                           </a:solidFill>
                           <a:latin typeface="Calibri"/>
                         </a:rPr>
-                        <a:t>120,0</a:t>
+                        <a:t>118,8</a:t>
                       </a:r>
                     </a:p>
                   </a:txBody>
@@ -29963,7 +29963,7 @@
                           </a:solidFill>
                           <a:latin typeface="Calibri"/>
                         </a:rPr>
-                        <a:t>129,0</a:t>
+                        <a:t>131,6</a:t>
                       </a:r>
                     </a:p>
                   </a:txBody>
@@ -30080,7 +30080,7 @@
                           </a:solidFill>
                           <a:latin typeface="Calibri"/>
                         </a:rPr>
-                        <a:t>27,1 %</a:t>
+                        <a:t>27,0 %</a:t>
                       </a:r>
                     </a:p>
                   </a:txBody>
@@ -30103,7 +30103,7 @@
                           </a:solidFill>
                           <a:latin typeface="Calibri"/>
                         </a:rPr>
-                        <a:t>27,3 %</a:t>
+                        <a:t>28,0 %</a:t>
                       </a:r>
                     </a:p>
                   </a:txBody>
@@ -30148,7 +30148,7 @@
                 </a:solidFill>
                 <a:latin typeface="Calibri"/>
               </a:rPr>
-              <a:t>Croissance du CA à 6.4% en 2025 portée par les services (+14%) et l'iPhone en Asie, avec une marge nette stable à 26.9% grâce à un mix produit favorable (iPhone 54% du CA) et une discipline sur les coûts R&amp;D (6.5% du CA). La trésorerie nette de 166 Mds USD (2025) renforce la capacité d'investissement et de rachats d'actions, soutenant la génération de cash (60 Mds USD FCF en 2025).</a:t>
+              <a:t>Croissance du CA de 6.4% en 2025 portée par les services (+15% YoY) et l'iPhone (+5% YoY). Les marges nettes progressent à 26.9% grâce à un mix favorable et une discipline opérationnelle. La génération de cash (110Md USD FCF 2026) renforce la solidité bilancielle et permet des rachats d'actions agressifs.</a:t>
             </a:r>
           </a:p>
         </p:txBody>
@@ -32065,7 +32065,7 @@
                 </a:solidFill>
                 <a:latin typeface="Calibri"/>
               </a:rPr>
-              <a:t>Croissance du CA à 6.4% en 2025 portée par les services (+14%) et l'iPhone en Asie, avec une marge nette stable à 26.9% grâce à un mix produit favorable (iPhone 54% du CA) et une discipline sur les coûts R&amp;D (6.5% du CA). La trésorerie nette de 166 Mds USD (2025) renforce la capacité d'investissement et de rachats d'actions, soutenant la génération de cash (60 Mds USD FCF en 2025).</a:t>
+              <a:t>Croissance du CA de 6.4% en 2025 portée par les services (+15% YoY) et l'iPhone (+5% YoY). Les marges nettes progressent à 26.9% grâce à un mix favorable et une discipline opérationnelle. La génération de cash (110Md USD FCF 2026) renforce la solidité bilancielle et permet des rachats d'actions agressifs.</a:t>
             </a:r>
           </a:p>
         </p:txBody>

--- a/preview/AAPL/AAPL_pitchbook.pptx
+++ b/preview/AAPL/AAPL_pitchbook.pptx
@@ -3449,7 +3449,7 @@
                 </a:solidFill>
                 <a:latin typeface="Calibri"/>
               </a:rPr>
-              <a:t>● BUY  ·  Prix cible base : 275 $  ·  Upside : +10,5 %</a:t>
+              <a:t>● BUY  ·  Prix cible base : 285 $  ·  Upside : +14,5 %</a:t>
             </a:r>
           </a:p>
         </p:txBody>
@@ -6138,7 +6138,7 @@
                 </a:solidFill>
                 <a:latin typeface="Calibri"/>
               </a:rPr>
-              <a:t>Marges brutes en hausse de 360bps depuis 2022 (43.3% à 46.9%) grâce à un mix iPhone/services et une optimisation des coûts. Les marges EBITDA (34.8%) et nettes (26.9%) reflètent un levier opérationnel élevé et un pricing power exceptionnel. Ces niveaux sont durables avec une marge nette cible de 28% d'ici 2027, soutenant un re-rating potentiel.</a:t>
+              <a:t>Les marges brutes sont passées de 43.3% en 2022 à 46.9% en 2025, reflétant un mix premium accru et une optimisation de la chaîne logistique. Les marges EBITDA et nettes ont suivi une tendance similaire, confirmant un levier opérationnel durable. La durabilité de ces niveaux dépend de la capacité à maintenir le pricing power face à la concurrence.</a:t>
             </a:r>
           </a:p>
         </p:txBody>
@@ -7303,7 +7303,7 @@
                           </a:solidFill>
                           <a:latin typeface="Calibri"/>
                         </a:rPr>
-                        <a:t>275 $</a:t>
+                        <a:t>285 $</a:t>
                       </a:r>
                     </a:p>
                   </a:txBody>
@@ -7479,7 +7479,7 @@
                           </a:solidFill>
                           <a:latin typeface="Calibri"/>
                         </a:rPr>
-                        <a:t>+10,5 %</a:t>
+                        <a:t>+14,5 %</a:t>
                       </a:r>
                     </a:p>
                   </a:txBody>
@@ -7622,7 +7622,7 @@
                           </a:solidFill>
                           <a:latin typeface="Calibri"/>
                         </a:rPr>
-                        <a:t>220 $</a:t>
+                        <a:t>240 $</a:t>
                       </a:r>
                     </a:p>
                   </a:txBody>
@@ -7645,7 +7645,7 @@
                           </a:solidFill>
                           <a:latin typeface="Calibri"/>
                         </a:rPr>
-                        <a:t>275 $</a:t>
+                        <a:t>285 $</a:t>
                       </a:r>
                     </a:p>
                   </a:txBody>
@@ -7668,7 +7668,7 @@
                           </a:solidFill>
                           <a:latin typeface="Calibri"/>
                         </a:rPr>
-                        <a:t>310 $</a:t>
+                        <a:t>320 $</a:t>
                       </a:r>
                     </a:p>
                   </a:txBody>
@@ -7693,7 +7693,7 @@
                           </a:solidFill>
                           <a:latin typeface="Calibri"/>
                         </a:rPr>
-                        <a:t>-11,6 %</a:t>
+                        <a:t>-3,5 %</a:t>
                       </a:r>
                     </a:p>
                   </a:txBody>
@@ -7716,7 +7716,7 @@
                           </a:solidFill>
                           <a:latin typeface="Calibri"/>
                         </a:rPr>
-                        <a:t>+10,5 %</a:t>
+                        <a:t>+14,5 %</a:t>
                       </a:r>
                     </a:p>
                   </a:txBody>
@@ -7739,7 +7739,7 @@
                           </a:solidFill>
                           <a:latin typeface="Calibri"/>
                         </a:rPr>
-                        <a:t>+24,6 %</a:t>
+                        <a:t>+28,6 %</a:t>
                       </a:r>
                     </a:p>
                   </a:txBody>
@@ -8203,7 +8203,7 @@
                           </a:solidFill>
                           <a:latin typeface="Calibri"/>
                         </a:rPr>
-                        <a:t>318</a:t>
+                        <a:t>329</a:t>
                       </a:r>
                     </a:p>
                   </a:txBody>
@@ -8246,7 +8246,7 @@
                           </a:solidFill>
                           <a:latin typeface="Calibri"/>
                         </a:rPr>
-                        <a:t>345</a:t>
+                        <a:t>357</a:t>
                       </a:r>
                     </a:p>
                   </a:txBody>
@@ -8289,7 +8289,7 @@
                           </a:solidFill>
                           <a:latin typeface="Calibri"/>
                         </a:rPr>
-                        <a:t>376</a:t>
+                        <a:t>390</a:t>
                       </a:r>
                     </a:p>
                   </a:txBody>
@@ -8332,7 +8332,7 @@
                           </a:solidFill>
                           <a:latin typeface="Calibri"/>
                         </a:rPr>
-                        <a:t>414</a:t>
+                        <a:t>430</a:t>
                       </a:r>
                     </a:p>
                   </a:txBody>
@@ -8375,7 +8375,7 @@
                           </a:solidFill>
                           <a:latin typeface="Calibri"/>
                         </a:rPr>
-                        <a:t>461</a:t>
+                        <a:t>478</a:t>
                       </a:r>
                     </a:p>
                   </a:txBody>
@@ -8463,7 +8463,7 @@
                           </a:solidFill>
                           <a:latin typeface="Calibri"/>
                         </a:rPr>
-                        <a:t>275</a:t>
+                        <a:t>285</a:t>
                       </a:r>
                     </a:p>
                   </a:txBody>
@@ -8506,7 +8506,7 @@
                           </a:solidFill>
                           <a:latin typeface="Calibri"/>
                         </a:rPr>
-                        <a:t>295</a:t>
+                        <a:t>306</a:t>
                       </a:r>
                     </a:p>
                   </a:txBody>
@@ -8549,7 +8549,7 @@
                           </a:solidFill>
                           <a:latin typeface="Calibri"/>
                         </a:rPr>
-                        <a:t>318</a:t>
+                        <a:t>329</a:t>
                       </a:r>
                     </a:p>
                   </a:txBody>
@@ -8592,7 +8592,7 @@
                           </a:solidFill>
                           <a:latin typeface="Calibri"/>
                         </a:rPr>
-                        <a:t>345</a:t>
+                        <a:t>357</a:t>
                       </a:r>
                     </a:p>
                   </a:txBody>
@@ -8635,7 +8635,7 @@
                           </a:solidFill>
                           <a:latin typeface="Calibri"/>
                         </a:rPr>
-                        <a:t>376</a:t>
+                        <a:t>390</a:t>
                       </a:r>
                     </a:p>
                   </a:txBody>
@@ -8723,7 +8723,7 @@
                           </a:solidFill>
                           <a:latin typeface="Calibri"/>
                         </a:rPr>
-                        <a:t>242</a:t>
+                        <a:t>251</a:t>
                       </a:r>
                     </a:p>
                   </a:txBody>
@@ -8766,7 +8766,7 @@
                           </a:solidFill>
                           <a:latin typeface="Calibri"/>
                         </a:rPr>
-                        <a:t>258</a:t>
+                        <a:t>267</a:t>
                       </a:r>
                     </a:p>
                   </a:txBody>
@@ -8809,7 +8809,7 @@
                           </a:solidFill>
                           <a:latin typeface="Calibri"/>
                         </a:rPr>
-                        <a:t>275</a:t>
+                        <a:t>285</a:t>
                       </a:r>
                     </a:p>
                   </a:txBody>
@@ -8852,7 +8852,7 @@
                           </a:solidFill>
                           <a:latin typeface="Calibri"/>
                         </a:rPr>
-                        <a:t>295</a:t>
+                        <a:t>306</a:t>
                       </a:r>
                     </a:p>
                   </a:txBody>
@@ -8895,7 +8895,7 @@
                           </a:solidFill>
                           <a:latin typeface="Calibri"/>
                         </a:rPr>
-                        <a:t>318</a:t>
+                        <a:t>329</a:t>
                       </a:r>
                     </a:p>
                   </a:txBody>
@@ -8983,7 +8983,7 @@
                           </a:solidFill>
                           <a:latin typeface="Calibri"/>
                         </a:rPr>
-                        <a:t>217</a:t>
+                        <a:t>225</a:t>
                       </a:r>
                     </a:p>
                   </a:txBody>
@@ -9026,7 +9026,7 @@
                           </a:solidFill>
                           <a:latin typeface="Calibri"/>
                         </a:rPr>
-                        <a:t>229</a:t>
+                        <a:t>237</a:t>
                       </a:r>
                     </a:p>
                   </a:txBody>
@@ -9069,7 +9069,7 @@
                           </a:solidFill>
                           <a:latin typeface="Calibri"/>
                         </a:rPr>
-                        <a:t>242</a:t>
+                        <a:t>251</a:t>
                       </a:r>
                     </a:p>
                   </a:txBody>
@@ -9112,7 +9112,7 @@
                           </a:solidFill>
                           <a:latin typeface="Calibri"/>
                         </a:rPr>
-                        <a:t>258</a:t>
+                        <a:t>267</a:t>
                       </a:r>
                     </a:p>
                   </a:txBody>
@@ -9155,7 +9155,7 @@
                           </a:solidFill>
                           <a:latin typeface="Calibri"/>
                         </a:rPr>
-                        <a:t>275</a:t>
+                        <a:t>285</a:t>
                       </a:r>
                     </a:p>
                   </a:txBody>
@@ -9243,7 +9243,7 @@
                           </a:solidFill>
                           <a:latin typeface="Calibri"/>
                         </a:rPr>
-                        <a:t>196</a:t>
+                        <a:t>203</a:t>
                       </a:r>
                     </a:p>
                   </a:txBody>
@@ -9286,7 +9286,7 @@
                           </a:solidFill>
                           <a:latin typeface="Calibri"/>
                         </a:rPr>
-                        <a:t>206</a:t>
+                        <a:t>213</a:t>
                       </a:r>
                     </a:p>
                   </a:txBody>
@@ -9329,7 +9329,7 @@
                           </a:solidFill>
                           <a:latin typeface="Calibri"/>
                         </a:rPr>
-                        <a:t>217</a:t>
+                        <a:t>225</a:t>
                       </a:r>
                     </a:p>
                   </a:txBody>
@@ -9372,7 +9372,7 @@
                           </a:solidFill>
                           <a:latin typeface="Calibri"/>
                         </a:rPr>
-                        <a:t>229</a:t>
+                        <a:t>237</a:t>
                       </a:r>
                     </a:p>
                   </a:txBody>
@@ -9415,7 +9415,7 @@
                           </a:solidFill>
                           <a:latin typeface="Calibri"/>
                         </a:rPr>
-                        <a:t>242</a:t>
+                        <a:t>251</a:t>
                       </a:r>
                     </a:p>
                   </a:txBody>
@@ -9480,7 +9480,7 @@
                 </a:solidFill>
                 <a:latin typeface="Calibri"/>
               </a:rPr>
-              <a:t>Avec un WACC de 10.4% et une TGR de 3.0%, le DCF implique un prix implicite de 265 USD vs cours à 248.8 USD, soit un upside de 6.5%. L'upside suggère une sous-valorisation structurelle, mais la prime de croissance est partiellement déjà pricee. Un catalyseur clé serait une accélération des services (&gt;15% YoY).</a:t>
+              <a:t>Avec un WACC de 10.4% et un TGR de 3.0%, le prix implicite DCF est de 285$ (base), soit 15% d'upside vs cours actuel. Cet écart suggère une sous-valorisation structurelle, mais la prime de croissance est partiellement pricee. Un catalyseur comme un succès de l'iPhone 16 ou une accélération des services pourrait déclencher un re-rating.</a:t>
             </a:r>
           </a:p>
         </p:txBody>
@@ -10567,7 +10567,7 @@
                           </a:solidFill>
                           <a:latin typeface="Calibri"/>
                         </a:rPr>
-                        <a:t>22,5x</a:t>
+                        <a:t>21,5x</a:t>
                       </a:r>
                     </a:p>
                   </a:txBody>
@@ -10613,7 +10613,7 @@
                           </a:solidFill>
                           <a:latin typeface="Calibri"/>
                         </a:rPr>
-                        <a:t>38,2x</a:t>
+                        <a:t>35,2x</a:t>
                       </a:r>
                     </a:p>
                   </a:txBody>
@@ -10659,7 +10659,7 @@
                           </a:solidFill>
                           <a:latin typeface="Calibri"/>
                         </a:rPr>
-                        <a:t>5500,0 %</a:t>
+                        <a:t>5210,0 %</a:t>
                       </a:r>
                     </a:p>
                   </a:txBody>
@@ -10730,7 +10730,7 @@
                           </a:solidFill>
                           <a:latin typeface="Calibri"/>
                         </a:rPr>
-                        <a:t>2 000,0</a:t>
+                        <a:t>1 950,0</a:t>
                       </a:r>
                     </a:p>
                   </a:txBody>
@@ -10753,7 +10753,7 @@
                           </a:solidFill>
                           <a:latin typeface="Calibri"/>
                         </a:rPr>
-                        <a:t>20,1x</a:t>
+                        <a:t>20,8x</a:t>
                       </a:r>
                     </a:p>
                   </a:txBody>
@@ -10776,7 +10776,7 @@
                           </a:solidFill>
                           <a:latin typeface="Calibri"/>
                         </a:rPr>
-                        <a:t>8,9x</a:t>
+                        <a:t>9,5x</a:t>
                       </a:r>
                     </a:p>
                   </a:txBody>
@@ -10822,7 +10822,7 @@
                           </a:solidFill>
                           <a:latin typeface="Calibri"/>
                         </a:rPr>
-                        <a:t>5600,0 %</a:t>
+                        <a:t>5620,0 %</a:t>
                       </a:r>
                     </a:p>
                   </a:txBody>
@@ -10845,7 +10845,7 @@
                           </a:solidFill>
                           <a:latin typeface="Calibri"/>
                         </a:rPr>
-                        <a:t>3500,0 %</a:t>
+                        <a:t>3870,0 %</a:t>
                       </a:r>
                     </a:p>
                   </a:txBody>
@@ -10870,7 +10870,7 @@
                           </a:solidFill>
                           <a:latin typeface="Calibri"/>
                         </a:rPr>
-                        <a:t>Amazon</a:t>
+                        <a:t>Samsung Electronics</a:t>
                       </a:r>
                     </a:p>
                   </a:txBody>
@@ -10893,7 +10893,7 @@
                           </a:solidFill>
                           <a:latin typeface="Calibri"/>
                         </a:rPr>
-                        <a:t>AMZN</a:t>
+                        <a:t>005930.KS</a:t>
                       </a:r>
                     </a:p>
                   </a:txBody>
@@ -10916,7 +10916,7 @@
                           </a:solidFill>
                           <a:latin typeface="Calibri"/>
                         </a:rPr>
-                        <a:t>1 800,0</a:t>
+                        <a:t>420,0</a:t>
                       </a:r>
                     </a:p>
                   </a:txBody>
@@ -10939,7 +10939,7 @@
                           </a:solidFill>
                           <a:latin typeface="Calibri"/>
                         </a:rPr>
-                        <a:t>25,3x</a:t>
+                        <a:t>7,2x</a:t>
                       </a:r>
                     </a:p>
                   </a:txBody>
@@ -10962,7 +10962,7 @@
                           </a:solidFill>
                           <a:latin typeface="Calibri"/>
                         </a:rPr>
-                        <a:t>4,2x</a:t>
+                        <a:t>1,1x</a:t>
                       </a:r>
                     </a:p>
                   </a:txBody>
@@ -10985,7 +10985,7 @@
                           </a:solidFill>
                           <a:latin typeface="Calibri"/>
                         </a:rPr>
-                        <a:t>52,1x</a:t>
+                        <a:t>12,3x</a:t>
                       </a:r>
                     </a:p>
                   </a:txBody>
@@ -11008,7 +11008,7 @@
                           </a:solidFill>
                           <a:latin typeface="Calibri"/>
                         </a:rPr>
-                        <a:t>4400,0 %</a:t>
+                        <a:t>3510,0 %</a:t>
                       </a:r>
                     </a:p>
                   </a:txBody>
@@ -11031,7 +11031,7 @@
                           </a:solidFill>
                           <a:latin typeface="Calibri"/>
                         </a:rPr>
-                        <a:t>1200,0 %</a:t>
+                        <a:t>2240,0 %</a:t>
                       </a:r>
                     </a:p>
                   </a:txBody>
@@ -11056,7 +11056,7 @@
                           </a:solidFill>
                           <a:latin typeface="Calibri"/>
                         </a:rPr>
-                        <a:t>Samsung Electronics</a:t>
+                        <a:t>Meta Platforms</a:t>
                       </a:r>
                     </a:p>
                   </a:txBody>
@@ -11079,7 +11079,7 @@
                           </a:solidFill>
                           <a:latin typeface="Calibri"/>
                         </a:rPr>
-                        <a:t>005930.KS</a:t>
+                        <a:t>META</a:t>
                       </a:r>
                     </a:p>
                   </a:txBody>
@@ -11102,7 +11102,7 @@
                           </a:solidFill>
                           <a:latin typeface="Calibri"/>
                         </a:rPr>
-                        <a:t>450,0</a:t>
+                        <a:t>1 350,0</a:t>
                       </a:r>
                     </a:p>
                   </a:txBody>
@@ -11125,7 +11125,7 @@
                           </a:solidFill>
                           <a:latin typeface="Calibri"/>
                         </a:rPr>
-                        <a:t>6,8x</a:t>
+                        <a:t>18,9x</a:t>
                       </a:r>
                     </a:p>
                   </a:txBody>
@@ -11148,7 +11148,7 @@
                           </a:solidFill>
                           <a:latin typeface="Calibri"/>
                         </a:rPr>
-                        <a:t>1,2x</a:t>
+                        <a:t>10,2x</a:t>
                       </a:r>
                     </a:p>
                   </a:txBody>
@@ -11171,7 +11171,7 @@
                           </a:solidFill>
                           <a:latin typeface="Calibri"/>
                         </a:rPr>
-                        <a:t>15,2x</a:t>
+                        <a:t>29,8x</a:t>
                       </a:r>
                     </a:p>
                   </a:txBody>
@@ -11194,7 +11194,7 @@
                           </a:solidFill>
                           <a:latin typeface="Calibri"/>
                         </a:rPr>
-                        <a:t>3500,0 %</a:t>
+                        <a:t>8700,0 %</a:t>
                       </a:r>
                     </a:p>
                   </a:txBody>
@@ -11217,7 +11217,7 @@
                           </a:solidFill>
                           <a:latin typeface="Calibri"/>
                         </a:rPr>
-                        <a:t>1800,0 %</a:t>
+                        <a:t>5830,0 %</a:t>
                       </a:r>
                     </a:p>
                   </a:txBody>
@@ -11242,7 +11242,7 @@
                           </a:solidFill>
                           <a:latin typeface="Calibri"/>
                         </a:rPr>
-                        <a:t>Meta Platforms</a:t>
+                        <a:t>Nvidia</a:t>
                       </a:r>
                     </a:p>
                   </a:txBody>
@@ -11265,7 +11265,7 @@
                           </a:solidFill>
                           <a:latin typeface="Calibri"/>
                         </a:rPr>
-                        <a:t>META</a:t>
+                        <a:t>NVDA</a:t>
                       </a:r>
                     </a:p>
                   </a:txBody>
@@ -11288,7 +11288,7 @@
                           </a:solidFill>
                           <a:latin typeface="Calibri"/>
                         </a:rPr>
-                        <a:t>1 300,0</a:t>
+                        <a:t>2 200,0</a:t>
                       </a:r>
                     </a:p>
                   </a:txBody>
@@ -11311,7 +11311,7 @@
                           </a:solidFill>
                           <a:latin typeface="Calibri"/>
                         </a:rPr>
-                        <a:t>18,9x</a:t>
+                        <a:t>55,3x</a:t>
                       </a:r>
                     </a:p>
                   </a:txBody>
@@ -11334,7 +11334,7 @@
                           </a:solidFill>
                           <a:latin typeface="Calibri"/>
                         </a:rPr>
-                        <a:t>11,2x</a:t>
+                        <a:t>25,1x</a:t>
                       </a:r>
                     </a:p>
                   </a:txBody>
@@ -11357,7 +11357,7 @@
                           </a:solidFill>
                           <a:latin typeface="Calibri"/>
                         </a:rPr>
-                        <a:t>30,1x</a:t>
+                        <a:t>42,1x</a:t>
                       </a:r>
                     </a:p>
                   </a:txBody>
@@ -11380,7 +11380,7 @@
                           </a:solidFill>
                           <a:latin typeface="Calibri"/>
                         </a:rPr>
-                        <a:t>8500,0 %</a:t>
+                        <a:t>7630,0 %</a:t>
                       </a:r>
                     </a:p>
                   </a:txBody>
@@ -11403,7 +11403,7 @@
                           </a:solidFill>
                           <a:latin typeface="Calibri"/>
                         </a:rPr>
-                        <a:t>5800,0 %</a:t>
+                        <a:t>6520,0 %</a:t>
                       </a:r>
                     </a:p>
                   </a:txBody>
@@ -11497,7 +11497,7 @@
                           </a:solidFill>
                           <a:latin typeface="Calibri"/>
                         </a:rPr>
-                        <a:t>20,1x</a:t>
+                        <a:t>20,8x</a:t>
                       </a:r>
                     </a:p>
                   </a:txBody>
@@ -11520,7 +11520,7 @@
                           </a:solidFill>
                           <a:latin typeface="Calibri"/>
                         </a:rPr>
-                        <a:t>8,9x</a:t>
+                        <a:t>10,2x</a:t>
                       </a:r>
                     </a:p>
                   </a:txBody>
@@ -11543,7 +11543,7 @@
                           </a:solidFill>
                           <a:latin typeface="Calibri"/>
                         </a:rPr>
-                        <a:t>30,1x</a:t>
+                        <a:t>29,8x</a:t>
                       </a:r>
                     </a:p>
                   </a:txBody>
@@ -11566,7 +11566,7 @@
                           </a:solidFill>
                           <a:latin typeface="Calibri"/>
                         </a:rPr>
-                        <a:t>5600,0 %</a:t>
+                        <a:t>6800,0 %</a:t>
                       </a:r>
                     </a:p>
                   </a:txBody>
@@ -11589,7 +11589,7 @@
                           </a:solidFill>
                           <a:latin typeface="Calibri"/>
                         </a:rPr>
-                        <a:t>3500,0 %</a:t>
+                        <a:t>5210,0 %</a:t>
                       </a:r>
                     </a:p>
                   </a:txBody>
@@ -11634,7 +11634,7 @@
                 </a:solidFill>
                 <a:latin typeface="Calibri"/>
               </a:rPr>
-              <a:t>Apple se négocie à 25.7x EV/EBITDA (+16% vs médiane peers à 22.1x) et 32.6x P/E (+25% vs médiane à 26.1x). Cette prime est justifiée par des marges supérieures (GM 46.9% vs 42.5% peers) et une croissance des services plus rapide. Une convergence vers la médiane peers impliquerait un downside de 10-12%, mais le différentiel de qualité justifie la prime actuelle.</a:t>
+              <a:t>Apple affiche un P/E de 32.6x vs 26.8x pour la médiane peers (Samsung, Microsoft, Alphabet, Meta, Nvidia). La prime de 22% est justifiée par une croissance supérieure (CA +6.4% vs +5.1% peers) et une rentabilité exceptionnelle (ROE 151.9% vs 35% peers). Une convergence vers la médiane impliquerait un downside de 15%, mais peu probable à court terme.</a:t>
             </a:r>
           </a:p>
         </p:txBody>
@@ -12292,7 +12292,7 @@
                 </a:solidFill>
                 <a:latin typeface="Calibri"/>
               </a:rPr>
-              <a:t>Avec un WACC de 10.4% et une TGR de 3.0%, le DCF implique un prix implicite de 265 USD vs cours à 248.8 USD, soit un upside de 6.5%. L'upside suggère une sous-valorisation structurelle, mais la prime de croissance est partiellement déjà pricee. Un catalyseur clé serait une accélération des services (&gt;15% YoY).</a:t>
+              <a:t>Avec un WACC de 10.4% et un TGR de 3.0%, le prix implicite DCF est de 285$ (base), soit 15% d'upside vs cours actuel. Cet écart suggère une sous-valorisation structurelle, mais la prime de croissance est partiellement pricee. Un catalyseur comme un succès de l'iPhone 16 ou une accélération des services pourrait déclencher un re-rating.</a:t>
             </a:r>
           </a:p>
         </p:txBody>
@@ -13265,7 +13265,7 @@
                 </a:solidFill>
                 <a:latin typeface="Calibri"/>
               </a:rPr>
-              <a:t>Régulation mortelle</a:t>
+              <a:t>Marges en érosion</a:t>
             </a:r>
           </a:p>
         </p:txBody>
@@ -13300,7 +13300,7 @@
                 </a:solidFill>
                 <a:latin typeface="Calibri"/>
               </a:rPr>
-              <a:t>Les marges d'Apple à 46.9% brut et 26.9% nette reposent sur un écosystème captif, mais la pression réglementaire en UE et aux États-Unis sur les commissions App Store (30% à 15%) va réduire les revenus de 12 à 15 milliards USD dès 2025, soit -8% sur le segment services déjà en ralentissement à +4.2% de croissance.</a:t>
+              <a:t>Les marges premium d'Apple reposent sur un écosystème captif, mais la guerre des prix en Chine (iPhone 15 à -20% en 2024) réduit déjà les prix de vente moyens de 8% par an depuis 2022, érodant la rentabilité à long terme. Les marges brutes de 46,9% en 2025 supposent une demande inélastique, mais les ventes d'iPhone en Chine ont chuté de 12% au T1 2024, fragilisant le modèle.</a:t>
             </a:r>
           </a:p>
         </p:txBody>
@@ -13421,7 +13421,7 @@
                 </a:solidFill>
                 <a:latin typeface="Calibri"/>
               </a:rPr>
-              <a:t>Dépendance Chine</a:t>
+              <a:t>Satur marché</a:t>
             </a:r>
           </a:p>
         </p:txBody>
@@ -13456,7 +13456,7 @@
                 </a:solidFill>
                 <a:latin typeface="Calibri"/>
               </a:rPr>
-              <a:t>Les 151.9% de ROE affichés masquent une dépendance extrême à l'iPhone (52% des revenus), dont les ventes en Chine chutent de 23% en 2024 selon Counterpoint, avec un risque de perte de parts de marché face aux marques locales comme Huawei ou Xiaomi qui captent 45% du marché premium.</a:t>
+              <a:t>Le ROE de 151,9% est gonflé par des rachats d'actions massifs (50 milliards $ en 2023), masquant une rentabilité opérationnelle réelle de 22% hors effets de levier. Les 26,9% de marge nette incluent des revenus non récurrents comme les services (15% du CA), dont la croissance ralentit à 5% en 2024 contre 16% en 2021.</a:t>
             </a:r>
           </a:p>
         </p:txBody>
@@ -13577,7 +13577,7 @@
                 </a:solidFill>
                 <a:latin typeface="Calibri"/>
               </a:rPr>
-              <a:t>Surévaluation</a:t>
+              <a:t>Dépendance Chine</a:t>
             </a:r>
           </a:p>
         </p:txBody>
@@ -13612,7 +13612,7 @@
                 </a:solidFill>
                 <a:latin typeface="Calibri"/>
               </a:rPr>
-              <a:t>Le ratio P/E de 32.61x et EV/EBITDA de 25.67x supposent une croissance perpétuelle, mais les investissements massifs en IA (10 milliards USD/an) n'ont généré que 1.2% de marge supplémentaire sur les services en 2023, un rendement insuffisant pour justifier ces valorisations.</a:t>
+              <a:t>L'évaluation à 32,61x P/E ignore le risque de saturation du marché des smartphones, où Apple détient déjà 55% des marges du secteur mais seulement 20% des volumes. Le multiple EV/EBITDA de 25,67x suppose une croissance perpétuelle, alors que les revenus totaux n'ont progressé que de 2% en 2023, le plus faible depuis 2001 hors pandémie.</a:t>
             </a:r>
           </a:p>
         </p:txBody>
@@ -13826,7 +13826,7 @@
                           </a:solidFill>
                           <a:latin typeface="Calibri"/>
                         </a:rPr>
-                        <a:t>Récession mondiale réduisant les ventes iPhone de 10% en 2026</a:t>
+                        <a:t>Récession mondiale en 2026 avec -3% de PIB global</a:t>
                       </a:r>
                     </a:p>
                   </a:txBody>
@@ -13897,7 +13897,7 @@
                           </a:solidFill>
                           <a:latin typeface="Calibri"/>
                         </a:rPr>
-                        <a:t>Régulation stricte sur les commissions App Store en UE/US</a:t>
+                        <a:t>Régulation antitrust US sur les services numériques</a:t>
                       </a:r>
                     </a:p>
                   </a:txBody>
@@ -13968,7 +13968,7 @@
                           </a:solidFill>
                           <a:latin typeface="Calibri"/>
                         </a:rPr>
-                        <a:t>Échec du lancement de l'iPhone 16 avec -5% ventes vs attentes</a:t>
+                        <a:t>Échec commercial de l'iPhone 16 avec -15% de volumes</a:t>
                       </a:r>
                     </a:p>
                   </a:txBody>
@@ -15044,7 +15044,7 @@
                 </a:solidFill>
                 <a:latin typeface="Calibri"/>
               </a:rPr>
-              <a:t>Score agrégé : -0,077</a:t>
+              <a:t>Score agrégé : -0,083</a:t>
             </a:r>
           </a:p>
         </p:txBody>
@@ -15356,7 +15356,7 @@
                 </a:solidFill>
                 <a:latin typeface="Calibri"/>
               </a:rPr>
-              <a:t>44,5 %</a:t>
+              <a:t>44,2 %</a:t>
             </a:r>
           </a:p>
         </p:txBody>
@@ -15835,7 +15835,7 @@
                           </a:solidFill>
                           <a:latin typeface="Calibri"/>
                         </a:rPr>
-                        <a:t>+0,239</a:t>
+                        <a:t>+0,237</a:t>
                       </a:r>
                     </a:p>
                   </a:txBody>
@@ -15858,7 +15858,7 @@
                           </a:solidFill>
                           <a:latin typeface="Calibri"/>
                         </a:rPr>
-                        <a:t>Croissance services +12% YoY d'ici 2027 avec 1.5Md utilisateurs actifs, générant +25Md USD de CA supplémentaire | Horizon: 2026-2027</a:t>
+                        <a:t>Lancement iPhone 16 en Q3 2026 avec prix à 1,200$ et +8% de volumes | Impact CA +12% et marge brute +150bps | Horizon 12 mois</a:t>
                       </a:r>
                     </a:p>
                   </a:txBody>
@@ -15929,7 +15929,7 @@
                           </a:solidFill>
                           <a:latin typeface="Calibri"/>
                         </a:rPr>
-                        <a:t>+0,445</a:t>
+                        <a:t>+0,442</a:t>
                       </a:r>
                     </a:p>
                   </a:txBody>
@@ -16023,7 +16023,7 @@
                           </a:solidFill>
                           <a:latin typeface="Calibri"/>
                         </a:rPr>
-                        <a:t>+0,316</a:t>
+                        <a:t>+0,320</a:t>
                       </a:r>
                     </a:p>
                   </a:txBody>
@@ -16046,7 +16046,7 @@
                           </a:solidFill>
                           <a:latin typeface="Calibri"/>
                         </a:rPr>
-                        <a:t>Régulation App Store en UE/US pourrait réduire les marges services de 200bps d'ici 2027 | Horizon: 2026-2027, impact -15Md USD CA</a:t>
+                        <a:t>Régulation antitrust européenne sur l'App Store en 2026 | Impact CA services -15% et marge -300bps | Horizon 12-18 mois</a:t>
                       </a:r>
                     </a:p>
                   </a:txBody>
@@ -16091,7 +16091,7 @@
                 </a:solidFill>
                 <a:latin typeface="Calibri"/>
               </a:rPr>
-              <a:t>La presse financière souligne à la fois des avancées technologiques positives pour Apple, notamment avec l'ouverture de Siri à des assistants concurrents, mais met en garde contre les défis majeurs posés par l'IA et la concurrence. Les prédictions de surpassement par d'autres acteurs dans la décennie à venir alimentent un sentiment mitigé sur la capacité d'Apple à maintenir sa domination.</a:t>
+              <a:t>La presse financière souligne à la fois des avancées technologiques positives pour Apple, notamment avec Siri et l'IA, mais aussi des défis majeurs liés à la concurrence et à l'évolution du marché. L'anniversaire des 50 ans d'Apple met en lumière ces opportunités et risques simultanés.</a:t>
             </a:r>
           </a:p>
         </p:txBody>
@@ -19029,7 +19029,7 @@
                 </a:solidFill>
                 <a:latin typeface="Calibri"/>
               </a:rPr>
-              <a:t>Apple cote à 25.7x EV/EBITDA vs 22.1x pour la médiane peers, justifié par une qualité d'actifs supérieure. Le P/E de 32.6x reflète une prime de croissance durable, mais reste sensible aux attentes de services.</a:t>
+              <a:t>Apple se négocie à 25.7x EV/EBITDA vs 22.1x pour la médiane des peers technologiques. La prime de 16% est justifiée par la qualité des actifs et la récurrence des revenus.</a:t>
             </a:r>
           </a:p>
         </p:txBody>
@@ -19359,7 +19359,7 @@
                 </a:solidFill>
                 <a:latin typeface="Calibri"/>
               </a:rPr>
-              <a:t>Prix cible base : 275 $  ·  Upside : +10,5 %  ·  Bear : 220 $ (-11,6 %)  ·  Bull : 310 $ (+24,6 %)</a:t>
+              <a:t>Prix cible base : 285 $  ·  Upside : +14,5 %  ·  Bear : 240 $ (-3,5 %)  ·  Bull : 320 $ (+28,6 %)</a:t>
             </a:r>
           </a:p>
         </p:txBody>
@@ -19550,7 +19550,7 @@
                 </a:solidFill>
                 <a:latin typeface="Calibri"/>
               </a:rPr>
-              <a:t>Apple devrait bénéficier d'une croissance des services à +12% YoY d'ici 2027 grâce à 1.5Md d'utilisateurs actifs</a:t>
+              <a:t>Apple devrait générer 445,000M$ de CA en 2026 grâce à un iPhone 16 à 1,200$ et une croissance services de 12%</a:t>
             </a:r>
           </a:p>
         </p:txBody>
@@ -19628,7 +19628,7 @@
                 </a:solidFill>
                 <a:latin typeface="Calibri"/>
               </a:rPr>
-              <a:t>Pricing power</a:t>
+              <a:t>Marges premium</a:t>
             </a:r>
           </a:p>
         </p:txBody>
@@ -19663,7 +19663,7 @@
                 </a:solidFill>
                 <a:latin typeface="Calibri"/>
               </a:rPr>
-              <a:t>La marge brute devrait atteindre 48% en 2027 via un mix favorable iPhone/services et une optimisation des coûts</a:t>
+              <a:t>Les marges nettes pourraient atteindre 27.5% en 2026 via un mix services plus rentable et optimisation des coûts logistiques</a:t>
             </a:r>
           </a:p>
         </p:txBody>
@@ -19741,7 +19741,7 @@
                 </a:solidFill>
                 <a:latin typeface="Calibri"/>
               </a:rPr>
-              <a:t>Marges élevées</a:t>
+              <a:t>Cash généré</a:t>
             </a:r>
           </a:p>
         </p:txBody>
@@ -19776,7 +19776,7 @@
                 </a:solidFill>
                 <a:latin typeface="Calibri"/>
               </a:rPr>
-              <a:t>Le ROIC de 84.4% valide une allocation capital efficace, avec un cash flow libre de 110Md USD attendu en 2026.</a:t>
+              <a:t>Le FCF devrait dépasser 120,000M$ en 2026, soutenant un programme de rachat d'actions de 100,000M$.</a:t>
             </a:r>
           </a:p>
         </p:txBody>
@@ -19932,7 +19932,7 @@
                 </a:solidFill>
                 <a:latin typeface="Calibri"/>
               </a:rPr>
-              <a:t>Dépendance iPhone</a:t>
+              <a:t>Régulation antitrust</a:t>
             </a:r>
           </a:p>
         </p:txBody>
@@ -19967,7 +19967,7 @@
                 </a:solidFill>
                 <a:latin typeface="Calibri"/>
               </a:rPr>
-              <a:t>Régulation App Store en UE/US pourrait réduire les marges services de 200bps d'ici 2027 | Horizon: 2026-2027, impact -15Md USD CA</a:t>
+              <a:t>Régulation antitrust européenne sur l'App Store en 2026 | Impact CA services -15% et marge -300bps | Horizon 12-18 mois</a:t>
             </a:r>
           </a:p>
         </p:txBody>
@@ -20024,119 +20024,6 @@
         <p:spPr>
           <a:xfrm>
             <a:off x="4845600" y="2178000"/>
-            <a:ext cx="3794399" cy="183600"/>
-          </a:xfrm>
-          <a:prstGeom prst="rect">
-            <a:avLst/>
-          </a:prstGeom>
-          <a:noFill/>
-        </p:spPr>
-        <p:txBody>
-          <a:bodyPr wrap="square">
-            <a:spAutoFit/>
-          </a:bodyPr>
-          <a:lstStyle/>
-          <a:p>
-            <a:pPr algn="l"/>
-            <a:r>
-              <a:rPr sz="850" b="1" i="0">
-                <a:solidFill>
-                  <a:srgbClr val="1B3A6B"/>
-                </a:solidFill>
-                <a:latin typeface="Calibri"/>
-              </a:rPr>
-              <a:t>Régulation App Store</a:t>
-            </a:r>
-          </a:p>
-        </p:txBody>
-      </p:sp>
-      <p:sp>
-        <p:nvSpPr>
-          <p:cNvPr id="28" name="TextBox 27"/>
-          <p:cNvSpPr txBox="1"/>
-          <p:nvPr/>
-        </p:nvSpPr>
-        <p:spPr>
-          <a:xfrm>
-            <a:off x="4845600" y="2347200"/>
-            <a:ext cx="3794399" cy="327600"/>
-          </a:xfrm>
-          <a:prstGeom prst="rect">
-            <a:avLst/>
-          </a:prstGeom>
-          <a:noFill/>
-        </p:spPr>
-        <p:txBody>
-          <a:bodyPr wrap="square">
-            <a:spAutoFit/>
-          </a:bodyPr>
-          <a:lstStyle/>
-          <a:p>
-            <a:pPr algn="l"/>
-            <a:r>
-              <a:rPr sz="750" b="0" i="0">
-                <a:solidFill>
-                  <a:srgbClr val="333333"/>
-                </a:solidFill>
-                <a:latin typeface="Calibri"/>
-              </a:rPr>
-              <a:t>Concurrence accrue en IA (Google, Microsoft) menace l'avantage différenciant des services Apple | Horizon: 2026, risque de compression marges</a:t>
-            </a:r>
-          </a:p>
-        </p:txBody>
-      </p:sp>
-      <p:sp>
-        <p:nvSpPr>
-          <p:cNvPr id="29" name="Rectangle 28"/>
-          <p:cNvSpPr/>
-          <p:nvPr/>
-        </p:nvSpPr>
-        <p:spPr>
-          <a:xfrm>
-            <a:off x="4708800" y="2728800"/>
-            <a:ext cx="54000" cy="129600"/>
-          </a:xfrm>
-          <a:prstGeom prst="rect">
-            <a:avLst/>
-          </a:prstGeom>
-          <a:solidFill>
-            <a:srgbClr val="A82020"/>
-          </a:solidFill>
-          <a:ln>
-            <a:noFill/>
-          </a:ln>
-        </p:spPr>
-        <p:style>
-          <a:lnRef idx="1">
-            <a:schemeClr val="accent1"/>
-          </a:lnRef>
-          <a:fillRef idx="3">
-            <a:schemeClr val="accent1"/>
-          </a:fillRef>
-          <a:effectRef idx="2">
-            <a:schemeClr val="accent1"/>
-          </a:effectRef>
-          <a:fontRef idx="minor">
-            <a:schemeClr val="lt1"/>
-          </a:fontRef>
-        </p:style>
-        <p:txBody>
-          <a:bodyPr rtlCol="0" anchor="ctr"/>
-          <a:lstStyle/>
-          <a:p>
-            <a:pPr algn="ctr"/>
-          </a:p>
-        </p:txBody>
-      </p:sp>
-      <p:sp>
-        <p:nvSpPr>
-          <p:cNvPr id="30" name="TextBox 29"/>
-          <p:cNvSpPr txBox="1"/>
-          <p:nvPr/>
-        </p:nvSpPr>
-        <p:spPr>
-          <a:xfrm>
-            <a:off x="4845600" y="2710800"/>
             <a:ext cx="3794399" cy="183600"/>
           </a:xfrm>
           <a:prstGeom prst="rect">
@@ -20165,13 +20052,13 @@
       </p:sp>
       <p:sp>
         <p:nvSpPr>
-          <p:cNvPr id="31" name="TextBox 30"/>
+          <p:cNvPr id="28" name="TextBox 27"/>
           <p:cNvSpPr txBox="1"/>
           <p:nvPr/>
         </p:nvSpPr>
         <p:spPr>
           <a:xfrm>
-            <a:off x="4845600" y="2880000"/>
+            <a:off x="4845600" y="2347200"/>
             <a:ext cx="3794399" cy="327600"/>
           </a:xfrm>
           <a:prstGeom prst="rect">
@@ -20193,7 +20080,120 @@
                 </a:solidFill>
                 <a:latin typeface="Calibri"/>
               </a:rPr>
-              <a:t>Dépendance au iPhone (50% CA) expose à un ralentissement du marché premium en 2026 (-3% ventes) | Horizon: 2026, impact -12Md USD CA</a:t>
+              <a:t>Concurrence accrue en IA avec Google et Microsoft en 2027 | Impact part de marché iPhone -5% et marge -200bps | Horizon 18-24 mois</a:t>
+            </a:r>
+          </a:p>
+        </p:txBody>
+      </p:sp>
+      <p:sp>
+        <p:nvSpPr>
+          <p:cNvPr id="29" name="Rectangle 28"/>
+          <p:cNvSpPr/>
+          <p:nvPr/>
+        </p:nvSpPr>
+        <p:spPr>
+          <a:xfrm>
+            <a:off x="4708800" y="2728800"/>
+            <a:ext cx="54000" cy="129600"/>
+          </a:xfrm>
+          <a:prstGeom prst="rect">
+            <a:avLst/>
+          </a:prstGeom>
+          <a:solidFill>
+            <a:srgbClr val="A82020"/>
+          </a:solidFill>
+          <a:ln>
+            <a:noFill/>
+          </a:ln>
+        </p:spPr>
+        <p:style>
+          <a:lnRef idx="1">
+            <a:schemeClr val="accent1"/>
+          </a:lnRef>
+          <a:fillRef idx="3">
+            <a:schemeClr val="accent1"/>
+          </a:fillRef>
+          <a:effectRef idx="2">
+            <a:schemeClr val="accent1"/>
+          </a:effectRef>
+          <a:fontRef idx="minor">
+            <a:schemeClr val="lt1"/>
+          </a:fontRef>
+        </p:style>
+        <p:txBody>
+          <a:bodyPr rtlCol="0" anchor="ctr"/>
+          <a:lstStyle/>
+          <a:p>
+            <a:pPr algn="ctr"/>
+          </a:p>
+        </p:txBody>
+      </p:sp>
+      <p:sp>
+        <p:nvSpPr>
+          <p:cNvPr id="30" name="TextBox 29"/>
+          <p:cNvSpPr txBox="1"/>
+          <p:nvPr/>
+        </p:nvSpPr>
+        <p:spPr>
+          <a:xfrm>
+            <a:off x="4845600" y="2710800"/>
+            <a:ext cx="3794399" cy="183600"/>
+          </a:xfrm>
+          <a:prstGeom prst="rect">
+            <a:avLst/>
+          </a:prstGeom>
+          <a:noFill/>
+        </p:spPr>
+        <p:txBody>
+          <a:bodyPr wrap="square">
+            <a:spAutoFit/>
+          </a:bodyPr>
+          <a:lstStyle/>
+          <a:p>
+            <a:pPr algn="l"/>
+            <a:r>
+              <a:rPr sz="850" b="1" i="0">
+                <a:solidFill>
+                  <a:srgbClr val="1B3A6B"/>
+                </a:solidFill>
+                <a:latin typeface="Calibri"/>
+              </a:rPr>
+              <a:t>Dépendance Chine</a:t>
+            </a:r>
+          </a:p>
+        </p:txBody>
+      </p:sp>
+      <p:sp>
+        <p:nvSpPr>
+          <p:cNvPr id="31" name="TextBox 30"/>
+          <p:cNvSpPr txBox="1"/>
+          <p:nvPr/>
+        </p:nvSpPr>
+        <p:spPr>
+          <a:xfrm>
+            <a:off x="4845600" y="2880000"/>
+            <a:ext cx="3794399" cy="327600"/>
+          </a:xfrm>
+          <a:prstGeom prst="rect">
+            <a:avLst/>
+          </a:prstGeom>
+          <a:noFill/>
+        </p:spPr>
+        <p:txBody>
+          <a:bodyPr wrap="square">
+            <a:spAutoFit/>
+          </a:bodyPr>
+          <a:lstStyle/>
+          <a:p>
+            <a:pPr algn="l"/>
+            <a:r>
+              <a:rPr sz="750" b="0" i="0">
+                <a:solidFill>
+                  <a:srgbClr val="333333"/>
+                </a:solidFill>
+                <a:latin typeface="Calibri"/>
+              </a:rPr>
+              <a:t>Ralentissement économique en Chine en 2026 | Impact CA iPhone -10% et marge -100bps | Horizon 6-12 mois</a:t>
             </a:r>
           </a:p>
         </p:txBody>
@@ -20470,7 +20470,7 @@
                 </a:solidFill>
                 <a:latin typeface="Calibri"/>
               </a:rPr>
-              <a:t>vs 20,1x médiane peers</a:t>
+              <a:t>vs 20,8x médiane peers</a:t>
             </a:r>
           </a:p>
         </p:txBody>
@@ -20782,7 +20782,7 @@
                 </a:solidFill>
                 <a:latin typeface="Calibri"/>
               </a:rPr>
-              <a:t>275 $</a:t>
+              <a:t>285 $</a:t>
             </a:r>
           </a:p>
         </p:txBody>
@@ -20852,7 +20852,7 @@
                 </a:solidFill>
                 <a:latin typeface="Calibri"/>
               </a:rPr>
-              <a:t>Upside de +10,5 % vs cours</a:t>
+              <a:t>Upside de +14,5 % vs cours</a:t>
             </a:r>
           </a:p>
         </p:txBody>
@@ -20973,7 +20973,7 @@
                 </a:solidFill>
                 <a:latin typeface="Calibri"/>
               </a:rPr>
-              <a:t>-0,077</a:t>
+              <a:t>-0,083</a:t>
             </a:r>
           </a:p>
         </p:txBody>
@@ -23672,7 +23672,7 @@
                 </a:solidFill>
                 <a:latin typeface="Calibri"/>
               </a:rPr>
-              <a:t>Apple affiche une résilience opérationnelle exceptionnelle avec des marges nettes à 26.9% et un ROE de 151.9%. La valorisation reste attractive malgré une prime vs peers, soutenue par une génération de cash robuste et une stratégie d'innovation ciblée.</a:t>
+              <a:t>Apple affiche une résilience opérationnelle exceptionnelle avec des marges nettes à 26.9% et un ROE de 151.9%. La valorisation reste attractive malgré une prime vs pairs, justifiée par la qualité des actifs et la génération de cash robuste.</a:t>
             </a:r>
           </a:p>
         </p:txBody>
@@ -24715,7 +24715,7 @@
                 </a:solidFill>
                 <a:latin typeface="Calibri"/>
               </a:rPr>
-              <a:t>Dépendance iPhone  ·  Régulation App Store</a:t>
+              <a:t>Régulation antitrust  ·  Concurrence IA</a:t>
             </a:r>
           </a:p>
         </p:txBody>
@@ -25949,7 +25949,7 @@
                 </a:solidFill>
                 <a:latin typeface="Calibri"/>
               </a:rPr>
-              <a:t>Apple conçoit et commercialise des smartphones, ordinateurs, wearables et services via un écosystème intégré. Positionné en premium, l'entreprise domine les marchés avec une fidélisation client élevée et des marges structurellement élevées. Ses avantages incluent le pricing power, l'intégration verticale et une base d'utilisateurs récurrents pour les services (App Store, iCloud). L'entreprise articule son activité autour de deux segments stratégiques :</a:t>
+              <a:t>Apple conçoit et commercialise des smartphones, ordinateurs et services numériques haut de gamme. Positionné en leader premium, l'entreprise combine écosystème fermé et innovation technologique pour fidéliser ses clients. Son avantage concurrentiel repose sur la marge élevée, la récurrence des revenus via services et une logistique mondiale optimisée. L'entreprise articule son activité autour de deux segments stratégiques :</a:t>
             </a:r>
           </a:p>
         </p:txBody>
@@ -26062,7 +26062,7 @@
                 </a:solidFill>
                 <a:latin typeface="Calibri"/>
               </a:rPr>
-              <a:t>Ventes de smartphones (iPhone ~50% CA), Mac, iPad et wearables avec modèle basé sur l'innovation et le premium pricing. Clients cibles : consommateurs haut de gamme et professionnels. Croissance portée par les mises à jour annuelles et l'écosystème Apple.</a:t>
+              <a:t>Ventes de iPhone, Mac, iPad et wearables représentant 80% du CA en 2025. Modèle basé sur cycles de renouvellement et mix premium. Clients cibles : consommateurs haut de gamme et entreprises. Croissance tirée par l'Asie et les services intégrés (Apple Music, iCloud).</a:t>
             </a:r>
           </a:p>
         </p:txBody>
@@ -26175,7 +26175,7 @@
                 </a:solidFill>
                 <a:latin typeface="Calibri"/>
               </a:rPr>
-              <a:t>Abonnements (Apple Music, iCloud, App Store) et services tiers avec modèle récurrent et marges &gt;70%. Clients : utilisateurs existants de l'écosystème. Croissance tirée par l'augmentation du parc d'appareils et la monétisation des services.</a:t>
+              <a:t>Abonnements (App Store, Apple TV+, Apple Music) et cloud avec marge &gt;70%. Modèle récurrent et à forte rentabilité. Clients : base installée de 2 milliards d'appareils. Croissance de 15% YoY en 2025, portée par l'expansion géographique et la hausse des prix.</a:t>
             </a:r>
           </a:p>
         </p:txBody>
@@ -27554,7 +27554,7 @@
                 </a:solidFill>
                 <a:latin typeface="Calibri"/>
               </a:rPr>
-              <a:t>62%</a:t>
+              <a:t>80%</a:t>
             </a:r>
           </a:p>
         </p:txBody>
@@ -27702,7 +27702,7 @@
                 </a:solidFill>
                 <a:latin typeface="Calibri"/>
               </a:rPr>
-              <a:t>Ventes de smartphones (iPhone ~50% CA), Mac, iPad et wearables avec modèle basé sur l'innovation et le premium pricing. Clients cibles : consommateurs haut de gamme et professionnels. Croissance portée par les mises à jour annuelles et l'écosystème Apple.</a:t>
+              <a:t>Ventes de iPhone, Mac, iPad et wearables représentant 80% du CA en 2025. Modèle basé sur cycles de renouvellement et mix premium. Clients cibles : consommateurs haut de gamme et entreprises. Croissance tirée par l'Asie et les services intégrés (Apple Music, iCloud).</a:t>
             </a:r>
           </a:p>
         </p:txBody>
@@ -27823,7 +27823,7 @@
                 </a:solidFill>
                 <a:latin typeface="Calibri"/>
               </a:rPr>
-              <a:t>21%</a:t>
+              <a:t>20%</a:t>
             </a:r>
           </a:p>
         </p:txBody>
@@ -27971,7 +27971,7 @@
                 </a:solidFill>
                 <a:latin typeface="Calibri"/>
               </a:rPr>
-              <a:t>Abonnements (Apple Music, iCloud, App Store) et services tiers avec modèle récurrent et marges &gt;70%. Clients : utilisateurs existants de l'écosystème. Croissance tirée par l'augmentation du parc d'appareils et la monétisation des services.</a:t>
+              <a:t>Abonnements (App Store, Apple TV+, Apple Music) et cloud avec marge &gt;70%. Modèle récurrent et à forte rentabilité. Clients : base installée de 2 milliards d'appareils. Croissance de 15% YoY en 2025, portée par l'expansion géographique et la hausse des prix.</a:t>
             </a:r>
           </a:p>
         </p:txBody>
@@ -29100,7 +29100,7 @@
                           </a:solidFill>
                           <a:latin typeface="Calibri"/>
                         </a:rPr>
-                        <a:t>440,0</a:t>
+                        <a:t>445,0</a:t>
                       </a:r>
                     </a:p>
                   </a:txBody>
@@ -29123,7 +29123,7 @@
                           </a:solidFill>
                           <a:latin typeface="Calibri"/>
                         </a:rPr>
-                        <a:t>470,0</a:t>
+                        <a:t>475,0</a:t>
                       </a:r>
                     </a:p>
                   </a:txBody>
@@ -29240,7 +29240,7 @@
                           </a:solidFill>
                           <a:latin typeface="Calibri"/>
                         </a:rPr>
-                        <a:t>+5,7 %</a:t>
+                        <a:t>+740,0 %</a:t>
                       </a:r>
                     </a:p>
                   </a:txBody>
@@ -29263,7 +29263,7 @@
                           </a:solidFill>
                           <a:latin typeface="Calibri"/>
                         </a:rPr>
-                        <a:t>+6,8 %</a:t>
+                        <a:t>+670,0 %</a:t>
                       </a:r>
                     </a:p>
                   </a:txBody>
@@ -29380,7 +29380,7 @@
                           </a:solidFill>
                           <a:latin typeface="Calibri"/>
                         </a:rPr>
-                        <a:t>209,0</a:t>
+                        <a:t>21 004,0</a:t>
                       </a:r>
                     </a:p>
                   </a:txBody>
@@ -29403,7 +29403,7 @@
                           </a:solidFill>
                           <a:latin typeface="Calibri"/>
                         </a:rPr>
-                        <a:t>225,6</a:t>
+                        <a:t>22 562,5</a:t>
                       </a:r>
                     </a:p>
                   </a:txBody>
@@ -29520,7 +29520,7 @@
                           </a:solidFill>
                           <a:latin typeface="Calibri"/>
                         </a:rPr>
-                        <a:t>47,5 %</a:t>
+                        <a:t>4720,0 %</a:t>
                       </a:r>
                     </a:p>
                   </a:txBody>
@@ -29543,7 +29543,7 @@
                           </a:solidFill>
                           <a:latin typeface="Calibri"/>
                         </a:rPr>
-                        <a:t>48,0 %</a:t>
+                        <a:t>4750,0 %</a:t>
                       </a:r>
                     </a:p>
                   </a:txBody>
@@ -29660,7 +29660,7 @@
                           </a:solidFill>
                           <a:latin typeface="Calibri"/>
                         </a:rPr>
-                        <a:t>154,0</a:t>
+                        <a:t>154,2</a:t>
                       </a:r>
                     </a:p>
                   </a:txBody>
@@ -29683,7 +29683,7 @@
                           </a:solidFill>
                           <a:latin typeface="Calibri"/>
                         </a:rPr>
-                        <a:t>169,0</a:t>
+                        <a:t>166,5</a:t>
                       </a:r>
                     </a:p>
                   </a:txBody>
@@ -29800,7 +29800,7 @@
                           </a:solidFill>
                           <a:latin typeface="Calibri"/>
                         </a:rPr>
-                        <a:t>35,0 %</a:t>
+                        <a:t>3470,0 %</a:t>
                       </a:r>
                     </a:p>
                   </a:txBody>
@@ -29823,7 +29823,7 @@
                           </a:solidFill>
                           <a:latin typeface="Calibri"/>
                         </a:rPr>
-                        <a:t>36,0 %</a:t>
+                        <a:t>3510,0 %</a:t>
                       </a:r>
                     </a:p>
                   </a:txBody>
@@ -29940,7 +29940,7 @@
                           </a:solidFill>
                           <a:latin typeface="Calibri"/>
                         </a:rPr>
-                        <a:t>118,8</a:t>
+                        <a:t>121,8</a:t>
                       </a:r>
                     </a:p>
                   </a:txBody>
@@ -29963,7 +29963,7 @@
                           </a:solidFill>
                           <a:latin typeface="Calibri"/>
                         </a:rPr>
-                        <a:t>131,6</a:t>
+                        <a:t>131,2</a:t>
                       </a:r>
                     </a:p>
                   </a:txBody>
@@ -30080,7 +30080,7 @@
                           </a:solidFill>
                           <a:latin typeface="Calibri"/>
                         </a:rPr>
-                        <a:t>27,0 %</a:t>
+                        <a:t>2740,0 %</a:t>
                       </a:r>
                     </a:p>
                   </a:txBody>
@@ -30103,7 +30103,7 @@
                           </a:solidFill>
                           <a:latin typeface="Calibri"/>
                         </a:rPr>
-                        <a:t>28,0 %</a:t>
+                        <a:t>2760,0 %</a:t>
                       </a:r>
                     </a:p>
                   </a:txBody>
@@ -30148,7 +30148,7 @@
                 </a:solidFill>
                 <a:latin typeface="Calibri"/>
               </a:rPr>
-              <a:t>Croissance du CA de 6.4% en 2025 portée par les services (+15% YoY) et l'iPhone (+5% YoY). Les marges nettes progressent à 26.9% grâce à un mix favorable et une discipline opérationnelle. La génération de cash (110Md USD FCF 2026) renforce la solidité bilancielle et permet des rachats d'actions agressifs.</a:t>
+              <a:t>Croissance CA de 6.4% en 2025 portée par les services (+15%) et l'iPhone (+5%). Les marges nettes ont rebondi à 26.9% grâce à une meilleure mixité produits et une discipline sur les coûts fixes. Cela renforce la génération de FCF (85,000M$ en 2025) et réduit la dépendance au hardware.</a:t>
             </a:r>
           </a:p>
         </p:txBody>
@@ -32065,7 +32065,7 @@
                 </a:solidFill>
                 <a:latin typeface="Calibri"/>
               </a:rPr>
-              <a:t>Croissance du CA de 6.4% en 2025 portée par les services (+15% YoY) et l'iPhone (+5% YoY). Les marges nettes progressent à 26.9% grâce à un mix favorable et une discipline opérationnelle. La génération de cash (110Md USD FCF 2026) renforce la solidité bilancielle et permet des rachats d'actions agressifs.</a:t>
+              <a:t>Croissance CA de 6.4% en 2025 portée par les services (+15%) et l'iPhone (+5%). Les marges nettes ont rebondi à 26.9% grâce à une meilleure mixité produits et une discipline sur les coûts fixes. Cela renforce la génération de FCF (85,000M$ en 2025) et réduit la dépendance au hardware.</a:t>
             </a:r>
           </a:p>
         </p:txBody>

--- a/preview/AAPL/AAPL_pitchbook.pptx
+++ b/preview/AAPL/AAPL_pitchbook.pptx
@@ -3449,7 +3449,7 @@
                 </a:solidFill>
                 <a:latin typeface="Calibri"/>
               </a:rPr>
-              <a:t>● BUY  ·  Prix cible base : 285 $  ·  Upside : +14,5 %</a:t>
+              <a:t>● BUY  ·  Prix cible base : 275 $  ·  Upside : +10,5 %</a:t>
             </a:r>
           </a:p>
         </p:txBody>
@@ -6138,7 +6138,7 @@
                 </a:solidFill>
                 <a:latin typeface="Calibri"/>
               </a:rPr>
-              <a:t>Les marges brutes sont passées de 43.3% en 2022 à 46.9% en 2025, reflétant un mix premium accru et une optimisation de la chaîne logistique. Les marges EBITDA et nettes ont suivi une tendance similaire, confirmant un levier opérationnel durable. La durabilité de ces niveaux dépend de la capacité à maintenir le pricing power face à la concurrence.</a:t>
+              <a:t>Marges brutes passées de 43.3% (2022) à 46.9% (2025) grâce à un mix produit favorable (iPhone premium) et une optimisation des coûts logistiques. Les marges EBITDA (32.8% à 34.8%) et nettes (24.0% à 26.9%) confirment un levier opérationnel exceptionnel. Cette durabilité est soutenue par le pricing power et la récurrence des services, limitant les risques de compression.</a:t>
             </a:r>
           </a:p>
         </p:txBody>
@@ -7303,7 +7303,7 @@
                           </a:solidFill>
                           <a:latin typeface="Calibri"/>
                         </a:rPr>
-                        <a:t>285 $</a:t>
+                        <a:t>275 $</a:t>
                       </a:r>
                     </a:p>
                   </a:txBody>
@@ -7479,7 +7479,7 @@
                           </a:solidFill>
                           <a:latin typeface="Calibri"/>
                         </a:rPr>
-                        <a:t>+14,5 %</a:t>
+                        <a:t>+10,5 %</a:t>
                       </a:r>
                     </a:p>
                   </a:txBody>
@@ -7622,7 +7622,7 @@
                           </a:solidFill>
                           <a:latin typeface="Calibri"/>
                         </a:rPr>
-                        <a:t>240 $</a:t>
+                        <a:t>220 $</a:t>
                       </a:r>
                     </a:p>
                   </a:txBody>
@@ -7645,7 +7645,7 @@
                           </a:solidFill>
                           <a:latin typeface="Calibri"/>
                         </a:rPr>
-                        <a:t>285 $</a:t>
+                        <a:t>275 $</a:t>
                       </a:r>
                     </a:p>
                   </a:txBody>
@@ -7668,7 +7668,7 @@
                           </a:solidFill>
                           <a:latin typeface="Calibri"/>
                         </a:rPr>
-                        <a:t>320 $</a:t>
+                        <a:t>310 $</a:t>
                       </a:r>
                     </a:p>
                   </a:txBody>
@@ -7693,7 +7693,7 @@
                           </a:solidFill>
                           <a:latin typeface="Calibri"/>
                         </a:rPr>
-                        <a:t>-3,5 %</a:t>
+                        <a:t>-11,6 %</a:t>
                       </a:r>
                     </a:p>
                   </a:txBody>
@@ -7716,7 +7716,7 @@
                           </a:solidFill>
                           <a:latin typeface="Calibri"/>
                         </a:rPr>
-                        <a:t>+14,5 %</a:t>
+                        <a:t>+10,5 %</a:t>
                       </a:r>
                     </a:p>
                   </a:txBody>
@@ -7739,7 +7739,7 @@
                           </a:solidFill>
                           <a:latin typeface="Calibri"/>
                         </a:rPr>
-                        <a:t>+28,6 %</a:t>
+                        <a:t>+24,6 %</a:t>
                       </a:r>
                     </a:p>
                   </a:txBody>
@@ -8203,7 +8203,7 @@
                           </a:solidFill>
                           <a:latin typeface="Calibri"/>
                         </a:rPr>
-                        <a:t>329</a:t>
+                        <a:t>318</a:t>
                       </a:r>
                     </a:p>
                   </a:txBody>
@@ -8246,7 +8246,7 @@
                           </a:solidFill>
                           <a:latin typeface="Calibri"/>
                         </a:rPr>
-                        <a:t>357</a:t>
+                        <a:t>345</a:t>
                       </a:r>
                     </a:p>
                   </a:txBody>
@@ -8289,7 +8289,7 @@
                           </a:solidFill>
                           <a:latin typeface="Calibri"/>
                         </a:rPr>
-                        <a:t>390</a:t>
+                        <a:t>376</a:t>
                       </a:r>
                     </a:p>
                   </a:txBody>
@@ -8332,7 +8332,7 @@
                           </a:solidFill>
                           <a:latin typeface="Calibri"/>
                         </a:rPr>
-                        <a:t>430</a:t>
+                        <a:t>414</a:t>
                       </a:r>
                     </a:p>
                   </a:txBody>
@@ -8375,7 +8375,7 @@
                           </a:solidFill>
                           <a:latin typeface="Calibri"/>
                         </a:rPr>
-                        <a:t>478</a:t>
+                        <a:t>461</a:t>
                       </a:r>
                     </a:p>
                   </a:txBody>
@@ -8463,7 +8463,7 @@
                           </a:solidFill>
                           <a:latin typeface="Calibri"/>
                         </a:rPr>
-                        <a:t>285</a:t>
+                        <a:t>275</a:t>
                       </a:r>
                     </a:p>
                   </a:txBody>
@@ -8506,7 +8506,7 @@
                           </a:solidFill>
                           <a:latin typeface="Calibri"/>
                         </a:rPr>
-                        <a:t>306</a:t>
+                        <a:t>295</a:t>
                       </a:r>
                     </a:p>
                   </a:txBody>
@@ -8549,7 +8549,7 @@
                           </a:solidFill>
                           <a:latin typeface="Calibri"/>
                         </a:rPr>
-                        <a:t>329</a:t>
+                        <a:t>318</a:t>
                       </a:r>
                     </a:p>
                   </a:txBody>
@@ -8592,7 +8592,7 @@
                           </a:solidFill>
                           <a:latin typeface="Calibri"/>
                         </a:rPr>
-                        <a:t>357</a:t>
+                        <a:t>345</a:t>
                       </a:r>
                     </a:p>
                   </a:txBody>
@@ -8635,7 +8635,7 @@
                           </a:solidFill>
                           <a:latin typeface="Calibri"/>
                         </a:rPr>
-                        <a:t>390</a:t>
+                        <a:t>376</a:t>
                       </a:r>
                     </a:p>
                   </a:txBody>
@@ -8723,7 +8723,7 @@
                           </a:solidFill>
                           <a:latin typeface="Calibri"/>
                         </a:rPr>
-                        <a:t>251</a:t>
+                        <a:t>242</a:t>
                       </a:r>
                     </a:p>
                   </a:txBody>
@@ -8766,7 +8766,7 @@
                           </a:solidFill>
                           <a:latin typeface="Calibri"/>
                         </a:rPr>
-                        <a:t>267</a:t>
+                        <a:t>258</a:t>
                       </a:r>
                     </a:p>
                   </a:txBody>
@@ -8809,7 +8809,7 @@
                           </a:solidFill>
                           <a:latin typeface="Calibri"/>
                         </a:rPr>
-                        <a:t>285</a:t>
+                        <a:t>275</a:t>
                       </a:r>
                     </a:p>
                   </a:txBody>
@@ -8852,7 +8852,7 @@
                           </a:solidFill>
                           <a:latin typeface="Calibri"/>
                         </a:rPr>
-                        <a:t>306</a:t>
+                        <a:t>295</a:t>
                       </a:r>
                     </a:p>
                   </a:txBody>
@@ -8895,7 +8895,7 @@
                           </a:solidFill>
                           <a:latin typeface="Calibri"/>
                         </a:rPr>
-                        <a:t>329</a:t>
+                        <a:t>318</a:t>
                       </a:r>
                     </a:p>
                   </a:txBody>
@@ -8983,7 +8983,7 @@
                           </a:solidFill>
                           <a:latin typeface="Calibri"/>
                         </a:rPr>
-                        <a:t>225</a:t>
+                        <a:t>217</a:t>
                       </a:r>
                     </a:p>
                   </a:txBody>
@@ -9026,7 +9026,7 @@
                           </a:solidFill>
                           <a:latin typeface="Calibri"/>
                         </a:rPr>
-                        <a:t>237</a:t>
+                        <a:t>229</a:t>
                       </a:r>
                     </a:p>
                   </a:txBody>
@@ -9069,7 +9069,7 @@
                           </a:solidFill>
                           <a:latin typeface="Calibri"/>
                         </a:rPr>
-                        <a:t>251</a:t>
+                        <a:t>242</a:t>
                       </a:r>
                     </a:p>
                   </a:txBody>
@@ -9112,7 +9112,7 @@
                           </a:solidFill>
                           <a:latin typeface="Calibri"/>
                         </a:rPr>
-                        <a:t>267</a:t>
+                        <a:t>258</a:t>
                       </a:r>
                     </a:p>
                   </a:txBody>
@@ -9155,7 +9155,7 @@
                           </a:solidFill>
                           <a:latin typeface="Calibri"/>
                         </a:rPr>
-                        <a:t>285</a:t>
+                        <a:t>275</a:t>
                       </a:r>
                     </a:p>
                   </a:txBody>
@@ -9243,7 +9243,7 @@
                           </a:solidFill>
                           <a:latin typeface="Calibri"/>
                         </a:rPr>
-                        <a:t>203</a:t>
+                        <a:t>196</a:t>
                       </a:r>
                     </a:p>
                   </a:txBody>
@@ -9286,7 +9286,7 @@
                           </a:solidFill>
                           <a:latin typeface="Calibri"/>
                         </a:rPr>
-                        <a:t>213</a:t>
+                        <a:t>206</a:t>
                       </a:r>
                     </a:p>
                   </a:txBody>
@@ -9329,7 +9329,7 @@
                           </a:solidFill>
                           <a:latin typeface="Calibri"/>
                         </a:rPr>
-                        <a:t>225</a:t>
+                        <a:t>217</a:t>
                       </a:r>
                     </a:p>
                   </a:txBody>
@@ -9372,7 +9372,7 @@
                           </a:solidFill>
                           <a:latin typeface="Calibri"/>
                         </a:rPr>
-                        <a:t>237</a:t>
+                        <a:t>229</a:t>
                       </a:r>
                     </a:p>
                   </a:txBody>
@@ -9415,7 +9415,7 @@
                           </a:solidFill>
                           <a:latin typeface="Calibri"/>
                         </a:rPr>
-                        <a:t>251</a:t>
+                        <a:t>242</a:t>
                       </a:r>
                     </a:p>
                   </a:txBody>
@@ -9480,7 +9480,7 @@
                 </a:solidFill>
                 <a:latin typeface="Calibri"/>
               </a:rPr>
-              <a:t>Avec un WACC de 10.4% et un TGR de 3.0%, le prix implicite DCF est de 285$ (base), soit 15% d'upside vs cours actuel. Cet écart suggère une sous-valorisation structurelle, mais la prime de croissance est partiellement pricee. Un catalyseur comme un succès de l'iPhone 16 ou une accélération des services pourrait déclencher un re-rating.</a:t>
+              <a:t>Avec un WACC de 10.4% et une TGR de 3.0%, le prix implicite DCF est de 285$ (+14% vs cours). La prime actuelle intègre déjà une croissance superieure, mais un rebond des ventes iPhone ou une accélération des services pourrait déclencher un re-rating. Le risque principal est une exécution sous-optimale sur l'IA.</a:t>
             </a:r>
           </a:p>
         </p:txBody>
@@ -10544,7 +10544,7 @@
                           </a:solidFill>
                           <a:latin typeface="Calibri"/>
                         </a:rPr>
-                        <a:t>3 100,0</a:t>
+                        <a:t>3 300,0</a:t>
                       </a:r>
                     </a:p>
                   </a:txBody>
@@ -10567,7 +10567,7 @@
                           </a:solidFill>
                           <a:latin typeface="Calibri"/>
                         </a:rPr>
-                        <a:t>21,5x</a:t>
+                        <a:t>22,1x</a:t>
                       </a:r>
                     </a:p>
                   </a:txBody>
@@ -10590,7 +10590,7 @@
                           </a:solidFill>
                           <a:latin typeface="Calibri"/>
                         </a:rPr>
-                        <a:t>12,8x</a:t>
+                        <a:t>12,5x</a:t>
                       </a:r>
                     </a:p>
                   </a:txBody>
@@ -10613,7 +10613,7 @@
                           </a:solidFill>
                           <a:latin typeface="Calibri"/>
                         </a:rPr>
-                        <a:t>35,2x</a:t>
+                        <a:t>38,2x</a:t>
                       </a:r>
                     </a:p>
                   </a:txBody>
@@ -10636,7 +10636,7 @@
                           </a:solidFill>
                           <a:latin typeface="Calibri"/>
                         </a:rPr>
-                        <a:t>6800,0 %</a:t>
+                        <a:t>68,0 %</a:t>
                       </a:r>
                     </a:p>
                   </a:txBody>
@@ -10659,7 +10659,7 @@
                           </a:solidFill>
                           <a:latin typeface="Calibri"/>
                         </a:rPr>
-                        <a:t>5210,0 %</a:t>
+                        <a:t>48,0 %</a:t>
                       </a:r>
                     </a:p>
                   </a:txBody>
@@ -10730,7 +10730,7 @@
                           </a:solidFill>
                           <a:latin typeface="Calibri"/>
                         </a:rPr>
-                        <a:t>1 950,0</a:t>
+                        <a:t>2 100,0</a:t>
                       </a:r>
                     </a:p>
                   </a:txBody>
@@ -10753,7 +10753,7 @@
                           </a:solidFill>
                           <a:latin typeface="Calibri"/>
                         </a:rPr>
-                        <a:t>20,8x</a:t>
+                        <a:t>20,5x</a:t>
                       </a:r>
                     </a:p>
                   </a:txBody>
@@ -10776,7 +10776,7 @@
                           </a:solidFill>
                           <a:latin typeface="Calibri"/>
                         </a:rPr>
-                        <a:t>9,5x</a:t>
+                        <a:t>9,8x</a:t>
                       </a:r>
                     </a:p>
                   </a:txBody>
@@ -10822,7 +10822,7 @@
                           </a:solidFill>
                           <a:latin typeface="Calibri"/>
                         </a:rPr>
-                        <a:t>5620,0 %</a:t>
+                        <a:t>56,0 %</a:t>
                       </a:r>
                     </a:p>
                   </a:txBody>
@@ -10845,7 +10845,7 @@
                           </a:solidFill>
                           <a:latin typeface="Calibri"/>
                         </a:rPr>
-                        <a:t>3870,0 %</a:t>
+                        <a:t>38,0 %</a:t>
                       </a:r>
                     </a:p>
                   </a:txBody>
@@ -10870,7 +10870,7 @@
                           </a:solidFill>
                           <a:latin typeface="Calibri"/>
                         </a:rPr>
-                        <a:t>Samsung Electronics</a:t>
+                        <a:t>Amazon</a:t>
                       </a:r>
                     </a:p>
                   </a:txBody>
@@ -10893,7 +10893,7 @@
                           </a:solidFill>
                           <a:latin typeface="Calibri"/>
                         </a:rPr>
-                        <a:t>005930.KS</a:t>
+                        <a:t>AMZN</a:t>
                       </a:r>
                     </a:p>
                   </a:txBody>
@@ -10916,7 +10916,7 @@
                           </a:solidFill>
                           <a:latin typeface="Calibri"/>
                         </a:rPr>
-                        <a:t>420,0</a:t>
+                        <a:t>1 800,0</a:t>
                       </a:r>
                     </a:p>
                   </a:txBody>
@@ -10939,7 +10939,7 @@
                           </a:solidFill>
                           <a:latin typeface="Calibri"/>
                         </a:rPr>
-                        <a:t>7,2x</a:t>
+                        <a:t>25,3x</a:t>
                       </a:r>
                     </a:p>
                   </a:txBody>
@@ -10962,7 +10962,7 @@
                           </a:solidFill>
                           <a:latin typeface="Calibri"/>
                         </a:rPr>
-                        <a:t>1,1x</a:t>
+                        <a:t>3,2x</a:t>
                       </a:r>
                     </a:p>
                   </a:txBody>
@@ -10985,7 +10985,7 @@
                           </a:solidFill>
                           <a:latin typeface="Calibri"/>
                         </a:rPr>
-                        <a:t>12,3x</a:t>
+                        <a:t>55,0x</a:t>
                       </a:r>
                     </a:p>
                   </a:txBody>
@@ -11008,7 +11008,7 @@
                           </a:solidFill>
                           <a:latin typeface="Calibri"/>
                         </a:rPr>
-                        <a:t>3510,0 %</a:t>
+                        <a:t>45,0 %</a:t>
                       </a:r>
                     </a:p>
                   </a:txBody>
@@ -11031,7 +11031,7 @@
                           </a:solidFill>
                           <a:latin typeface="Calibri"/>
                         </a:rPr>
-                        <a:t>2240,0 %</a:t>
+                        <a:t>15,0 %</a:t>
                       </a:r>
                     </a:p>
                   </a:txBody>
@@ -11102,7 +11102,7 @@
                           </a:solidFill>
                           <a:latin typeface="Calibri"/>
                         </a:rPr>
-                        <a:t>1 350,0</a:t>
+                        <a:t>1 500,0</a:t>
                       </a:r>
                     </a:p>
                   </a:txBody>
@@ -11125,7 +11125,7 @@
                           </a:solidFill>
                           <a:latin typeface="Calibri"/>
                         </a:rPr>
-                        <a:t>18,9x</a:t>
+                        <a:t>16,8x</a:t>
                       </a:r>
                     </a:p>
                   </a:txBody>
@@ -11171,7 +11171,7 @@
                           </a:solidFill>
                           <a:latin typeface="Calibri"/>
                         </a:rPr>
-                        <a:t>29,8x</a:t>
+                        <a:t>25,0x</a:t>
                       </a:r>
                     </a:p>
                   </a:txBody>
@@ -11194,7 +11194,7 @@
                           </a:solidFill>
                           <a:latin typeface="Calibri"/>
                         </a:rPr>
-                        <a:t>8700,0 %</a:t>
+                        <a:t>85,0 %</a:t>
                       </a:r>
                     </a:p>
                   </a:txBody>
@@ -11217,7 +11217,7 @@
                           </a:solidFill>
                           <a:latin typeface="Calibri"/>
                         </a:rPr>
-                        <a:t>5830,0 %</a:t>
+                        <a:t>55,0 %</a:t>
                       </a:r>
                     </a:p>
                   </a:txBody>
@@ -11242,7 +11242,7 @@
                           </a:solidFill>
                           <a:latin typeface="Calibri"/>
                         </a:rPr>
-                        <a:t>Nvidia</a:t>
+                        <a:t>Tesla</a:t>
                       </a:r>
                     </a:p>
                   </a:txBody>
@@ -11265,7 +11265,7 @@
                           </a:solidFill>
                           <a:latin typeface="Calibri"/>
                         </a:rPr>
-                        <a:t>NVDA</a:t>
+                        <a:t>TSLA</a:t>
                       </a:r>
                     </a:p>
                   </a:txBody>
@@ -11288,7 +11288,7 @@
                           </a:solidFill>
                           <a:latin typeface="Calibri"/>
                         </a:rPr>
-                        <a:t>2 200,0</a:t>
+                        <a:t>600,0</a:t>
                       </a:r>
                     </a:p>
                   </a:txBody>
@@ -11311,7 +11311,7 @@
                           </a:solidFill>
                           <a:latin typeface="Calibri"/>
                         </a:rPr>
-                        <a:t>55,3x</a:t>
+                        <a:t>45,0x</a:t>
                       </a:r>
                     </a:p>
                   </a:txBody>
@@ -11334,7 +11334,7 @@
                           </a:solidFill>
                           <a:latin typeface="Calibri"/>
                         </a:rPr>
-                        <a:t>25,1x</a:t>
+                        <a:t>8,5x</a:t>
                       </a:r>
                     </a:p>
                   </a:txBody>
@@ -11357,7 +11357,7 @@
                           </a:solidFill>
                           <a:latin typeface="Calibri"/>
                         </a:rPr>
-                        <a:t>42,1x</a:t>
+                        <a:t>60,0x</a:t>
                       </a:r>
                     </a:p>
                   </a:txBody>
@@ -11380,7 +11380,7 @@
                           </a:solidFill>
                           <a:latin typeface="Calibri"/>
                         </a:rPr>
-                        <a:t>7630,0 %</a:t>
+                        <a:t>27,0 %</a:t>
                       </a:r>
                     </a:p>
                   </a:txBody>
@@ -11403,7 +11403,7 @@
                           </a:solidFill>
                           <a:latin typeface="Calibri"/>
                         </a:rPr>
-                        <a:t>6520,0 %</a:t>
+                        <a:t>12,0 %</a:t>
                       </a:r>
                     </a:p>
                   </a:txBody>
@@ -11497,7 +11497,7 @@
                           </a:solidFill>
                           <a:latin typeface="Calibri"/>
                         </a:rPr>
-                        <a:t>20,8x</a:t>
+                        <a:t>22,1x</a:t>
                       </a:r>
                     </a:p>
                   </a:txBody>
@@ -11520,7 +11520,7 @@
                           </a:solidFill>
                           <a:latin typeface="Calibri"/>
                         </a:rPr>
-                        <a:t>10,2x</a:t>
+                        <a:t>9,8x</a:t>
                       </a:r>
                     </a:p>
                   </a:txBody>
@@ -11543,7 +11543,7 @@
                           </a:solidFill>
                           <a:latin typeface="Calibri"/>
                         </a:rPr>
-                        <a:t>29,8x</a:t>
+                        <a:t>38,2x</a:t>
                       </a:r>
                     </a:p>
                   </a:txBody>
@@ -11566,7 +11566,7 @@
                           </a:solidFill>
                           <a:latin typeface="Calibri"/>
                         </a:rPr>
-                        <a:t>6800,0 %</a:t>
+                        <a:t>56,0 %</a:t>
                       </a:r>
                     </a:p>
                   </a:txBody>
@@ -11589,7 +11589,7 @@
                           </a:solidFill>
                           <a:latin typeface="Calibri"/>
                         </a:rPr>
-                        <a:t>5210,0 %</a:t>
+                        <a:t>38,0 %</a:t>
                       </a:r>
                     </a:p>
                   </a:txBody>
@@ -11634,7 +11634,7 @@
                 </a:solidFill>
                 <a:latin typeface="Calibri"/>
               </a:rPr>
-              <a:t>Apple affiche un P/E de 32.6x vs 26.8x pour la médiane peers (Samsung, Microsoft, Alphabet, Meta, Nvidia). La prime de 22% est justifiée par une croissance supérieure (CA +6.4% vs +5.1% peers) et une rentabilité exceptionnelle (ROE 151.9% vs 35% peers). Une convergence vers la médiane impliquerait un downside de 15%, mais peu probable à court terme.</a:t>
+              <a:t>Apple se trade à 25.7x EV/EBITDA vs une médiane peers (MSFT, GOOGL, AMZN, META, TSLA) à 20.1x (+28%), justifiée par des marges nettes &gt;25% et un ROIC &gt;80%. La prime est également supportée par une croissance organique &gt;8% vs 5-7% pour les pairs. Une convergence vers la médiane impliquerait un downside de 22%, mais peu probable compte tenu des fondamentaux.</a:t>
             </a:r>
           </a:p>
         </p:txBody>
@@ -12292,7 +12292,7 @@
                 </a:solidFill>
                 <a:latin typeface="Calibri"/>
               </a:rPr>
-              <a:t>Avec un WACC de 10.4% et un TGR de 3.0%, le prix implicite DCF est de 285$ (base), soit 15% d'upside vs cours actuel. Cet écart suggère une sous-valorisation structurelle, mais la prime de croissance est partiellement pricee. Un catalyseur comme un succès de l'iPhone 16 ou une accélération des services pourrait déclencher un re-rating.</a:t>
+              <a:t>Avec un WACC de 10.4% et une TGR de 3.0%, le prix implicite DCF est de 285$ (+14% vs cours). La prime actuelle intègre déjà une croissance superieure, mais un rebond des ventes iPhone ou une accélération des services pourrait déclencher un re-rating. Le risque principal est une exécution sous-optimale sur l'IA.</a:t>
             </a:r>
           </a:p>
         </p:txBody>
@@ -13265,7 +13265,7 @@
                 </a:solidFill>
                 <a:latin typeface="Calibri"/>
               </a:rPr>
-              <a:t>Marges en érosion</a:t>
+              <a:t>Dépendance Asie critique</a:t>
             </a:r>
           </a:p>
         </p:txBody>
@@ -13300,7 +13300,7 @@
                 </a:solidFill>
                 <a:latin typeface="Calibri"/>
               </a:rPr>
-              <a:t>Les marges premium d'Apple reposent sur un écosystème captif, mais la guerre des prix en Chine (iPhone 15 à -20% en 2024) réduit déjà les prix de vente moyens de 8% par an depuis 2022, érodant la rentabilité à long terme. Les marges brutes de 46,9% en 2025 supposent une demande inélastique, mais les ventes d'iPhone en Chine ont chuté de 12% au T1 2024, fragilisant le modèle.</a:t>
+              <a:t>La marge brute de 46.9% repose sur un mix produit vieillissant avec des iPhone représentant 52% du CA 2024, dont les ventes en Chine chutent de 18% en volume sur 2023-2024; la dépendance à l'Asie pour 20% du CA expose à des risques géopolitiques et à une guerre des prix avec Huawei qui grignote déjà 12% de part de marché locale.</a:t>
             </a:r>
           </a:p>
         </p:txBody>
@@ -13421,7 +13421,7 @@
                 </a:solidFill>
                 <a:latin typeface="Calibri"/>
               </a:rPr>
-              <a:t>Satur marché</a:t>
+              <a:t>Marges services en baisse</a:t>
             </a:r>
           </a:p>
         </p:txBody>
@@ -13456,7 +13456,7 @@
                 </a:solidFill>
                 <a:latin typeface="Calibri"/>
               </a:rPr>
-              <a:t>Le ROE de 151,9% est gonflé par des rachats d'actions massifs (50 milliards $ en 2023), masquant une rentabilité opérationnelle réelle de 22% hors effets de levier. Les 26,9% de marge nette incluent des revenus non récurrents comme les services (15% du CA), dont la croissance ralentit à 5% en 2024 contre 16% en 2021.</a:t>
+              <a:t>Les 26.9% de marge nette supposent une maîtrise parfaite des coûts, mais les dépenses R&amp;D ont bondi de 22% en 2023 à 25 milliards $, soit 7.5% du CA, tandis que les marges des services (18% du CA) s'effritent à 22% contre 28% en 2020, signe d'une saturation du marché des abonnements.</a:t>
             </a:r>
           </a:p>
         </p:txBody>
@@ -13577,7 +13577,7 @@
                 </a:solidFill>
                 <a:latin typeface="Calibri"/>
               </a:rPr>
-              <a:t>Dépendance Chine</a:t>
+              <a:t>Buyback artificiel</a:t>
             </a:r>
           </a:p>
         </p:txBody>
@@ -13612,7 +13612,7 @@
                 </a:solidFill>
                 <a:latin typeface="Calibri"/>
               </a:rPr>
-              <a:t>L'évaluation à 32,61x P/E ignore le risque de saturation du marché des smartphones, où Apple détient déjà 55% des marges du secteur mais seulement 20% des volumes. Le multiple EV/EBITDA de 25,67x suppose une croissance perpétuelle, alors que les revenus totaux n'ont progressé que de 2% en 2023, le plus faible depuis 2001 hors pandémie.</a:t>
+              <a:t>Le ROE de 151.9% est artificiellement gonflé par un rachat massif d'actions : 110 milliards $ en 2023, soit 6% du CA, masquant une rentabilité opérationnelle en baisse de 4 points depuis 2021, passant de 30% à 26% sur le core business.</a:t>
             </a:r>
           </a:p>
         </p:txBody>
@@ -13826,7 +13826,7 @@
                           </a:solidFill>
                           <a:latin typeface="Calibri"/>
                         </a:rPr>
-                        <a:t>Récession mondiale en 2026 avec -3% de PIB global</a:t>
+                        <a:t>Récession mondiale en 2026 avec baisse du CA iPhone de 15%</a:t>
                       </a:r>
                     </a:p>
                   </a:txBody>
@@ -13897,7 +13897,7 @@
                           </a:solidFill>
                           <a:latin typeface="Calibri"/>
                         </a:rPr>
-                        <a:t>Régulation antitrust US sur les services numériques</a:t>
+                        <a:t>Régulation européenne forçant la scission de l'App Store</a:t>
                       </a:r>
                     </a:p>
                   </a:txBody>
@@ -13968,7 +13968,7 @@
                           </a:solidFill>
                           <a:latin typeface="Calibri"/>
                         </a:rPr>
-                        <a:t>Échec commercial de l'iPhone 16 avec -15% de volumes</a:t>
+                        <a:t>Échec du déploiement de l'IA sur iPhone 16 (-10% ventes 2026)</a:t>
                       </a:r>
                     </a:p>
                   </a:txBody>
@@ -15858,7 +15858,7 @@
                           </a:solidFill>
                           <a:latin typeface="Calibri"/>
                         </a:rPr>
-                        <a:t>Lancement iPhone 16 en Q3 2026 avec prix à 1,200$ et +8% de volumes | Impact CA +12% et marge brute +150bps | Horizon 12 mois</a:t>
+                        <a:t>Lancement iPhone 16 en 2026 avec IA intégrée boostant les ventes de 8% et marge brute &gt;50% | Croissance services à 18% CAGR d'ici 2027, atteignant 110Mds$ avec marge &gt;72% | Programme de rachat d'actions de 110Mds$ en 2026, soutenant le…</a:t>
                       </a:r>
                     </a:p>
                   </a:txBody>
@@ -16046,7 +16046,7 @@
                           </a:solidFill>
                           <a:latin typeface="Calibri"/>
                         </a:rPr>
-                        <a:t>Régulation antitrust européenne sur l'App Store en 2026 | Impact CA services -15% et marge -300bps | Horizon 12-18 mois</a:t>
+                        <a:t>Régulation européenne sur l'App Store réduisant les marges services de 15% d'ici 2027 | Concurrence accrue en IA (Google, Microsoft) menant à une perte de 10% de parts de marché d'ici 2026 | Ralentissement économique en Chine (-5% CA YoY)…</a:t>
                       </a:r>
                     </a:p>
                   </a:txBody>
@@ -16091,7 +16091,7 @@
                 </a:solidFill>
                 <a:latin typeface="Calibri"/>
               </a:rPr>
-              <a:t>La presse financière souligne à la fois des avancées technologiques positives pour Apple, notamment avec Siri et l'IA, mais aussi des défis majeurs liés à la concurrence et à l'évolution du marché. L'anniversaire des 50 ans d'Apple met en lumière ces opportunités et risques simultanés.</a:t>
+              <a:t>La presse financière souligne les défis majeurs d'Apple face à l'IA et à la concurrence, tout en saluant les innovations comme l'ouverture de Siri. Les perspectives de croissance à long terme suscitent des doutes face à des rivaux potentiels.</a:t>
             </a:r>
           </a:p>
         </p:txBody>
@@ -19029,7 +19029,7 @@
                 </a:solidFill>
                 <a:latin typeface="Calibri"/>
               </a:rPr>
-              <a:t>Apple se négocie à 25.7x EV/EBITDA vs 22.1x pour la médiane des peers technologiques. La prime de 16% est justifiée par la qualité des actifs et la récurrence des revenus.</a:t>
+              <a:t>Apple se négocie à 25.7x EV/EBITDA vs une médiane peers à 20.1x (+28%), reflétant sa qualité d'actifs. Le P/E de 32.6x est justifié par une croissance organique &gt;8% et un ROIC &gt;80%.</a:t>
             </a:r>
           </a:p>
         </p:txBody>
@@ -19359,7 +19359,7 @@
                 </a:solidFill>
                 <a:latin typeface="Calibri"/>
               </a:rPr>
-              <a:t>Prix cible base : 285 $  ·  Upside : +14,5 %  ·  Bear : 240 $ (-3,5 %)  ·  Bull : 320 $ (+28,6 %)</a:t>
+              <a:t>Prix cible base : 275 $  ·  Upside : +10,5 %  ·  Bear : 220 $ (-11,6 %)  ·  Bull : 310 $ (+24,6 %)</a:t>
             </a:r>
           </a:p>
         </p:txBody>
@@ -19550,7 +19550,7 @@
                 </a:solidFill>
                 <a:latin typeface="Calibri"/>
               </a:rPr>
-              <a:t>Apple devrait générer 445,000M$ de CA en 2026 grâce à un iPhone 16 à 1,200$ et une croissance services de 12%</a:t>
+              <a:t>Apple devrait bénéficier d'un rebond des ventes iPhone en 2026 (+8% YoY à 240M d'unités) grâce à l'IA intégrée et aux cycles de remplacement</a:t>
             </a:r>
           </a:p>
         </p:txBody>
@@ -19628,7 +19628,7 @@
                 </a:solidFill>
                 <a:latin typeface="Calibri"/>
               </a:rPr>
-              <a:t>Marges premium</a:t>
+              <a:t>Pricing power</a:t>
             </a:r>
           </a:p>
         </p:txBody>
@@ -19663,7 +19663,7 @@
                 </a:solidFill>
                 <a:latin typeface="Calibri"/>
               </a:rPr>
-              <a:t>Les marges nettes pourraient atteindre 27.5% en 2026 via un mix services plus rentable et optimisation des coûts logistiques</a:t>
+              <a:t>Les services récurrents devraient atteindre 110Mds$ en 2027 (+18% CAGR) avec une marge brute &gt;72%</a:t>
             </a:r>
           </a:p>
         </p:txBody>
@@ -19741,7 +19741,7 @@
                 </a:solidFill>
                 <a:latin typeface="Calibri"/>
               </a:rPr>
-              <a:t>Cash généré</a:t>
+              <a:t>Cash generation</a:t>
             </a:r>
           </a:p>
         </p:txBody>
@@ -19776,7 +19776,7 @@
                 </a:solidFill>
                 <a:latin typeface="Calibri"/>
               </a:rPr>
-              <a:t>Le FCF devrait dépasser 120,000M$ en 2026, soutenant un programme de rachat d'actions de 100,000M$.</a:t>
+              <a:t>Le rachat d'actions de 110Mds$ en 2026 soutiendra la valorisation avec un ROIC &gt;80%.</a:t>
             </a:r>
           </a:p>
         </p:txBody>
@@ -19932,7 +19932,7 @@
                 </a:solidFill>
                 <a:latin typeface="Calibri"/>
               </a:rPr>
-              <a:t>Régulation antitrust</a:t>
+              <a:t>Dépendance iPhone</a:t>
             </a:r>
           </a:p>
         </p:txBody>
@@ -19967,7 +19967,7 @@
                 </a:solidFill>
                 <a:latin typeface="Calibri"/>
               </a:rPr>
-              <a:t>Régulation antitrust européenne sur l'App Store en 2026 | Impact CA services -15% et marge -300bps | Horizon 12-18 mois</a:t>
+              <a:t>Régulation européenne sur l'App Store réduisant les marges services de 15% d'ici 2027 | Concurrence accrue en IA (Google, Microsoft) menant à une perte de 10% de parts de marché d'ici 2026 |…</a:t>
             </a:r>
           </a:p>
         </p:txBody>
@@ -20024,6 +20024,119 @@
         <p:spPr>
           <a:xfrm>
             <a:off x="4845600" y="2178000"/>
+            <a:ext cx="3794399" cy="183600"/>
+          </a:xfrm>
+          <a:prstGeom prst="rect">
+            <a:avLst/>
+          </a:prstGeom>
+          <a:noFill/>
+        </p:spPr>
+        <p:txBody>
+          <a:bodyPr wrap="square">
+            <a:spAutoFit/>
+          </a:bodyPr>
+          <a:lstStyle/>
+          <a:p>
+            <a:pPr algn="l"/>
+            <a:r>
+              <a:rPr sz="850" b="1" i="0">
+                <a:solidFill>
+                  <a:srgbClr val="1B3A6B"/>
+                </a:solidFill>
+                <a:latin typeface="Calibri"/>
+              </a:rPr>
+              <a:t>Régulation App Store</a:t>
+            </a:r>
+          </a:p>
+        </p:txBody>
+      </p:sp>
+      <p:sp>
+        <p:nvSpPr>
+          <p:cNvPr id="28" name="TextBox 27"/>
+          <p:cNvSpPr txBox="1"/>
+          <p:nvPr/>
+        </p:nvSpPr>
+        <p:spPr>
+          <a:xfrm>
+            <a:off x="4845600" y="2347200"/>
+            <a:ext cx="3794399" cy="327600"/>
+          </a:xfrm>
+          <a:prstGeom prst="rect">
+            <a:avLst/>
+          </a:prstGeom>
+          <a:noFill/>
+        </p:spPr>
+        <p:txBody>
+          <a:bodyPr wrap="square">
+            <a:spAutoFit/>
+          </a:bodyPr>
+          <a:lstStyle/>
+          <a:p>
+            <a:pPr algn="l"/>
+            <a:r>
+              <a:rPr sz="750" b="0" i="0">
+                <a:solidFill>
+                  <a:srgbClr val="333333"/>
+                </a:solidFill>
+                <a:latin typeface="Calibri"/>
+              </a:rPr>
+              <a:t>Cyberattaque majeure sur l'écosystème Apple en 2026, réduisant la confiance des utilisateurs et le CA services de 8% | Échec du déploiement de l'IA sur iPhone, entraînant une baisse de 12% des ventes…</a:t>
+            </a:r>
+          </a:p>
+        </p:txBody>
+      </p:sp>
+      <p:sp>
+        <p:nvSpPr>
+          <p:cNvPr id="29" name="Rectangle 28"/>
+          <p:cNvSpPr/>
+          <p:nvPr/>
+        </p:nvSpPr>
+        <p:spPr>
+          <a:xfrm>
+            <a:off x="4708800" y="2728800"/>
+            <a:ext cx="54000" cy="129600"/>
+          </a:xfrm>
+          <a:prstGeom prst="rect">
+            <a:avLst/>
+          </a:prstGeom>
+          <a:solidFill>
+            <a:srgbClr val="A82020"/>
+          </a:solidFill>
+          <a:ln>
+            <a:noFill/>
+          </a:ln>
+        </p:spPr>
+        <p:style>
+          <a:lnRef idx="1">
+            <a:schemeClr val="accent1"/>
+          </a:lnRef>
+          <a:fillRef idx="3">
+            <a:schemeClr val="accent1"/>
+          </a:fillRef>
+          <a:effectRef idx="2">
+            <a:schemeClr val="accent1"/>
+          </a:effectRef>
+          <a:fontRef idx="minor">
+            <a:schemeClr val="lt1"/>
+          </a:fontRef>
+        </p:style>
+        <p:txBody>
+          <a:bodyPr rtlCol="0" anchor="ctr"/>
+          <a:lstStyle/>
+          <a:p>
+            <a:pPr algn="ctr"/>
+          </a:p>
+        </p:txBody>
+      </p:sp>
+      <p:sp>
+        <p:nvSpPr>
+          <p:cNvPr id="30" name="TextBox 29"/>
+          <p:cNvSpPr txBox="1"/>
+          <p:nvPr/>
+        </p:nvSpPr>
+        <p:spPr>
+          <a:xfrm>
+            <a:off x="4845600" y="2710800"/>
             <a:ext cx="3794399" cy="183600"/>
           </a:xfrm>
           <a:prstGeom prst="rect">
@@ -20052,13 +20165,13 @@
       </p:sp>
       <p:sp>
         <p:nvSpPr>
-          <p:cNvPr id="28" name="TextBox 27"/>
+          <p:cNvPr id="31" name="TextBox 30"/>
           <p:cNvSpPr txBox="1"/>
           <p:nvPr/>
         </p:nvSpPr>
         <p:spPr>
           <a:xfrm>
-            <a:off x="4845600" y="2347200"/>
+            <a:off x="4845600" y="2880000"/>
             <a:ext cx="3794399" cy="327600"/>
           </a:xfrm>
           <a:prstGeom prst="rect">
@@ -20080,120 +20193,7 @@
                 </a:solidFill>
                 <a:latin typeface="Calibri"/>
               </a:rPr>
-              <a:t>Concurrence accrue en IA avec Google et Microsoft en 2027 | Impact part de marché iPhone -5% et marge -200bps | Horizon 18-24 mois</a:t>
-            </a:r>
-          </a:p>
-        </p:txBody>
-      </p:sp>
-      <p:sp>
-        <p:nvSpPr>
-          <p:cNvPr id="29" name="Rectangle 28"/>
-          <p:cNvSpPr/>
-          <p:nvPr/>
-        </p:nvSpPr>
-        <p:spPr>
-          <a:xfrm>
-            <a:off x="4708800" y="2728800"/>
-            <a:ext cx="54000" cy="129600"/>
-          </a:xfrm>
-          <a:prstGeom prst="rect">
-            <a:avLst/>
-          </a:prstGeom>
-          <a:solidFill>
-            <a:srgbClr val="A82020"/>
-          </a:solidFill>
-          <a:ln>
-            <a:noFill/>
-          </a:ln>
-        </p:spPr>
-        <p:style>
-          <a:lnRef idx="1">
-            <a:schemeClr val="accent1"/>
-          </a:lnRef>
-          <a:fillRef idx="3">
-            <a:schemeClr val="accent1"/>
-          </a:fillRef>
-          <a:effectRef idx="2">
-            <a:schemeClr val="accent1"/>
-          </a:effectRef>
-          <a:fontRef idx="minor">
-            <a:schemeClr val="lt1"/>
-          </a:fontRef>
-        </p:style>
-        <p:txBody>
-          <a:bodyPr rtlCol="0" anchor="ctr"/>
-          <a:lstStyle/>
-          <a:p>
-            <a:pPr algn="ctr"/>
-          </a:p>
-        </p:txBody>
-      </p:sp>
-      <p:sp>
-        <p:nvSpPr>
-          <p:cNvPr id="30" name="TextBox 29"/>
-          <p:cNvSpPr txBox="1"/>
-          <p:nvPr/>
-        </p:nvSpPr>
-        <p:spPr>
-          <a:xfrm>
-            <a:off x="4845600" y="2710800"/>
-            <a:ext cx="3794399" cy="183600"/>
-          </a:xfrm>
-          <a:prstGeom prst="rect">
-            <a:avLst/>
-          </a:prstGeom>
-          <a:noFill/>
-        </p:spPr>
-        <p:txBody>
-          <a:bodyPr wrap="square">
-            <a:spAutoFit/>
-          </a:bodyPr>
-          <a:lstStyle/>
-          <a:p>
-            <a:pPr algn="l"/>
-            <a:r>
-              <a:rPr sz="850" b="1" i="0">
-                <a:solidFill>
-                  <a:srgbClr val="1B3A6B"/>
-                </a:solidFill>
-                <a:latin typeface="Calibri"/>
-              </a:rPr>
-              <a:t>Dépendance Chine</a:t>
-            </a:r>
-          </a:p>
-        </p:txBody>
-      </p:sp>
-      <p:sp>
-        <p:nvSpPr>
-          <p:cNvPr id="31" name="TextBox 30"/>
-          <p:cNvSpPr txBox="1"/>
-          <p:nvPr/>
-        </p:nvSpPr>
-        <p:spPr>
-          <a:xfrm>
-            <a:off x="4845600" y="2880000"/>
-            <a:ext cx="3794399" cy="327600"/>
-          </a:xfrm>
-          <a:prstGeom prst="rect">
-            <a:avLst/>
-          </a:prstGeom>
-          <a:noFill/>
-        </p:spPr>
-        <p:txBody>
-          <a:bodyPr wrap="square">
-            <a:spAutoFit/>
-          </a:bodyPr>
-          <a:lstStyle/>
-          <a:p>
-            <a:pPr algn="l"/>
-            <a:r>
-              <a:rPr sz="750" b="0" i="0">
-                <a:solidFill>
-                  <a:srgbClr val="333333"/>
-                </a:solidFill>
-                <a:latin typeface="Calibri"/>
-              </a:rPr>
-              <a:t>Ralentissement économique en Chine en 2026 | Impact CA iPhone -10% et marge -100bps | Horizon 6-12 mois</a:t>
+              <a:t>Guerre commerciale USA-Chine aggravée, imposant des tarifs douaniers de 25% sur les composants iPhone, réduisant la marge brute à 42% | Scission forcée de l'App Store en Europe, diminuant les revenus…</a:t>
             </a:r>
           </a:p>
         </p:txBody>
@@ -20470,7 +20470,7 @@
                 </a:solidFill>
                 <a:latin typeface="Calibri"/>
               </a:rPr>
-              <a:t>vs 20,8x médiane peers</a:t>
+              <a:t>vs 22,1x médiane peers</a:t>
             </a:r>
           </a:p>
         </p:txBody>
@@ -20782,7 +20782,7 @@
                 </a:solidFill>
                 <a:latin typeface="Calibri"/>
               </a:rPr>
-              <a:t>285 $</a:t>
+              <a:t>275 $</a:t>
             </a:r>
           </a:p>
         </p:txBody>
@@ -20852,7 +20852,7 @@
                 </a:solidFill>
                 <a:latin typeface="Calibri"/>
               </a:rPr>
-              <a:t>Upside de +14,5 % vs cours</a:t>
+              <a:t>Upside de +10,5 % vs cours</a:t>
             </a:r>
           </a:p>
         </p:txBody>
@@ -23672,7 +23672,7 @@
                 </a:solidFill>
                 <a:latin typeface="Calibri"/>
               </a:rPr>
-              <a:t>Apple affiche une résilience opérationnelle exceptionnelle avec des marges nettes à 26.9% et un ROE de 151.9%. La valorisation reste attractive malgré une prime vs pairs, justifiée par la qualité des actifs et la génération de cash robuste.</a:t>
+              <a:t>Apple affiche une résilience opérationnelle exceptionnelle avec des marges nettes à 26.9% et un ROE de 151.9%, malgré un environnement macroéconomique incertain. La valorisation reste premium mais justifiée par la qualité des actifs et la génération de cash robuste.</a:t>
             </a:r>
           </a:p>
         </p:txBody>
@@ -24715,7 +24715,7 @@
                 </a:solidFill>
                 <a:latin typeface="Calibri"/>
               </a:rPr>
-              <a:t>Régulation antitrust  ·  Concurrence IA</a:t>
+              <a:t>Dépendance iPhone  ·  Régulation App Store</a:t>
             </a:r>
           </a:p>
         </p:txBody>
@@ -25949,7 +25949,7 @@
                 </a:solidFill>
                 <a:latin typeface="Calibri"/>
               </a:rPr>
-              <a:t>Apple conçoit et commercialise des smartphones, ordinateurs et services numériques haut de gamme. Positionné en leader premium, l'entreprise combine écosystème fermé et innovation technologique pour fidéliser ses clients. Son avantage concurrentiel repose sur la marge élevée, la récurrence des revenus via services et une logistique mondiale optimisée. L'entreprise articule son activité autour de deux segments stratégiques :</a:t>
+              <a:t>Apple conçoit et commercialise des produits technologiques innovants (iPhone, Mac, iPad, services) avec un écosystème intégré et une fidélisation client élevée. Positionné en haut de gamme, le groupe domine les segments premium avec des marges structurellement élevées et un pricing power inégalé. Son avantage concurrentiel repose sur l'innovation, la marque forte et une base d'utilisateurs captive via l'App Store et les services récurrents. L'entreprise articule son activité autour de deux segments stratégiques :</a:t>
             </a:r>
           </a:p>
         </p:txBody>
@@ -26062,7 +26062,7 @@
                 </a:solidFill>
                 <a:latin typeface="Calibri"/>
               </a:rPr>
-              <a:t>Ventes de iPhone, Mac, iPad et wearables représentant 80% du CA en 2025. Modèle basé sur cycles de renouvellement et mix premium. Clients cibles : consommateurs haut de gamme et entreprises. Croissance tirée par l'Asie et les services intégrés (Apple Music, iCloud).</a:t>
+              <a:t>Ventes de matériel (iPhone ~50% du CA, Mac, iPad, Wearables) avec un modèle premium et une marge brute &gt;45%. Clients cibles : consommateurs haut de gamme et professionnels. Croissance tirée par l'innovation (IA intégrée, nouveaux form factors) et l'expansion géographique (Inde, Chine).</a:t>
             </a:r>
           </a:p>
         </p:txBody>
@@ -26175,7 +26175,7 @@
                 </a:solidFill>
                 <a:latin typeface="Calibri"/>
               </a:rPr>
-              <a:t>Abonnements (App Store, Apple TV+, Apple Music) et cloud avec marge &gt;70%. Modèle récurrent et à forte rentabilité. Clients : base installée de 2 milliards d'appareils. Croissance de 15% YoY en 2025, portée par l'expansion géographique et la hausse des prix.</a:t>
+              <a:t>Abonnements (App Store, Apple Music, iCloud) avec marge brute &gt;70% et croissance YoY &gt;15%. Modèle récurrent avec 1.8 milliard d'utilisateurs actifs. Moteurs : expansion base installée, prix des abonnements et contenu exclusif (Apple TV+).</a:t>
             </a:r>
           </a:p>
         </p:txBody>
@@ -27554,7 +27554,7 @@
                 </a:solidFill>
                 <a:latin typeface="Calibri"/>
               </a:rPr>
-              <a:t>80%</a:t>
+              <a:t>62%</a:t>
             </a:r>
           </a:p>
         </p:txBody>
@@ -27702,7 +27702,7 @@
                 </a:solidFill>
                 <a:latin typeface="Calibri"/>
               </a:rPr>
-              <a:t>Ventes de iPhone, Mac, iPad et wearables représentant 80% du CA en 2025. Modèle basé sur cycles de renouvellement et mix premium. Clients cibles : consommateurs haut de gamme et entreprises. Croissance tirée par l'Asie et les services intégrés (Apple Music, iCloud).</a:t>
+              <a:t>Ventes de matériel (iPhone ~50% du CA, Mac, iPad, Wearables) avec un modèle premium et une marge brute &gt;45%. Clients cibles : consommateurs haut de gamme et professionnels. Croissance tirée par l'innovation (IA intégrée, nouveaux form factors) et l'expansion géographique (Inde, Chine).</a:t>
             </a:r>
           </a:p>
         </p:txBody>
@@ -27823,7 +27823,7 @@
                 </a:solidFill>
                 <a:latin typeface="Calibri"/>
               </a:rPr>
-              <a:t>20%</a:t>
+              <a:t>22%</a:t>
             </a:r>
           </a:p>
         </p:txBody>
@@ -27971,7 +27971,7 @@
                 </a:solidFill>
                 <a:latin typeface="Calibri"/>
               </a:rPr>
-              <a:t>Abonnements (App Store, Apple TV+, Apple Music) et cloud avec marge &gt;70%. Modèle récurrent et à forte rentabilité. Clients : base installée de 2 milliards d'appareils. Croissance de 15% YoY en 2025, portée par l'expansion géographique et la hausse des prix.</a:t>
+              <a:t>Abonnements (App Store, Apple Music, iCloud) avec marge brute &gt;70% et croissance YoY &gt;15%. Modèle récurrent avec 1.8 milliard d'utilisateurs actifs. Moteurs : expansion base installée, prix des abonnements et contenu exclusif (Apple TV+).</a:t>
             </a:r>
           </a:p>
         </p:txBody>
@@ -29240,7 +29240,7 @@
                           </a:solidFill>
                           <a:latin typeface="Calibri"/>
                         </a:rPr>
-                        <a:t>+740,0 %</a:t>
+                        <a:t>+7,0 %</a:t>
                       </a:r>
                     </a:p>
                   </a:txBody>
@@ -29263,7 +29263,7 @@
                           </a:solidFill>
                           <a:latin typeface="Calibri"/>
                         </a:rPr>
-                        <a:t>+670,0 %</a:t>
+                        <a:t>+6,7 %</a:t>
                       </a:r>
                     </a:p>
                   </a:txBody>
@@ -29380,7 +29380,7 @@
                           </a:solidFill>
                           <a:latin typeface="Calibri"/>
                         </a:rPr>
-                        <a:t>21 004,0</a:t>
+                        <a:t>211,4</a:t>
                       </a:r>
                     </a:p>
                   </a:txBody>
@@ -29403,7 +29403,7 @@
                           </a:solidFill>
                           <a:latin typeface="Calibri"/>
                         </a:rPr>
-                        <a:t>22 562,5</a:t>
+                        <a:t>228,0</a:t>
                       </a:r>
                     </a:p>
                   </a:txBody>
@@ -29520,7 +29520,7 @@
                           </a:solidFill>
                           <a:latin typeface="Calibri"/>
                         </a:rPr>
-                        <a:t>4720,0 %</a:t>
+                        <a:t>47,5 %</a:t>
                       </a:r>
                     </a:p>
                   </a:txBody>
@@ -29543,7 +29543,7 @@
                           </a:solidFill>
                           <a:latin typeface="Calibri"/>
                         </a:rPr>
-                        <a:t>4750,0 %</a:t>
+                        <a:t>48,0 %</a:t>
                       </a:r>
                     </a:p>
                   </a:txBody>
@@ -29660,7 +29660,7 @@
                           </a:solidFill>
                           <a:latin typeface="Calibri"/>
                         </a:rPr>
-                        <a:t>154,2</a:t>
+                        <a:t>162,0</a:t>
                       </a:r>
                     </a:p>
                   </a:txBody>
@@ -29683,7 +29683,7 @@
                           </a:solidFill>
                           <a:latin typeface="Calibri"/>
                         </a:rPr>
-                        <a:t>166,5</a:t>
+                        <a:t>175,0</a:t>
                       </a:r>
                     </a:p>
                   </a:txBody>
@@ -29800,7 +29800,7 @@
                           </a:solidFill>
                           <a:latin typeface="Calibri"/>
                         </a:rPr>
-                        <a:t>3470,0 %</a:t>
+                        <a:t>36,4 %</a:t>
                       </a:r>
                     </a:p>
                   </a:txBody>
@@ -29823,7 +29823,7 @@
                           </a:solidFill>
                           <a:latin typeface="Calibri"/>
                         </a:rPr>
-                        <a:t>3510,0 %</a:t>
+                        <a:t>36,8 %</a:t>
                       </a:r>
                     </a:p>
                   </a:txBody>
@@ -29940,7 +29940,7 @@
                           </a:solidFill>
                           <a:latin typeface="Calibri"/>
                         </a:rPr>
-                        <a:t>121,8</a:t>
+                        <a:t>120,0</a:t>
                       </a:r>
                     </a:p>
                   </a:txBody>
@@ -29963,7 +29963,7 @@
                           </a:solidFill>
                           <a:latin typeface="Calibri"/>
                         </a:rPr>
-                        <a:t>131,2</a:t>
+                        <a:t>130,0</a:t>
                       </a:r>
                     </a:p>
                   </a:txBody>
@@ -30080,7 +30080,7 @@
                           </a:solidFill>
                           <a:latin typeface="Calibri"/>
                         </a:rPr>
-                        <a:t>2740,0 %</a:t>
+                        <a:t>27,0 %</a:t>
                       </a:r>
                     </a:p>
                   </a:txBody>
@@ -30103,7 +30103,7 @@
                           </a:solidFill>
                           <a:latin typeface="Calibri"/>
                         </a:rPr>
-                        <a:t>2760,0 %</a:t>
+                        <a:t>27,4 %</a:t>
                       </a:r>
                     </a:p>
                   </a:txBody>
@@ -30148,7 +30148,7 @@
                 </a:solidFill>
                 <a:latin typeface="Calibri"/>
               </a:rPr>
-              <a:t>Croissance CA de 6.4% en 2025 portée par les services (+15%) et l'iPhone (+5%). Les marges nettes ont rebondi à 26.9% grâce à une meilleure mixité produits et une discipline sur les coûts fixes. Cela renforce la génération de FCF (85,000M$ en 2025) et réduit la dépendance au hardware.</a:t>
+              <a:t>Croissance revenue 2025 à 6.4% (+26Mds$) portée par les services (+16%) et l'iPhone (+5%). Marges nettes en hausse de 290bps grâce à un mix favorable (services &gt;70% marge) et une discipline sur les coûts. La génération de cash libre devrait dépasser 120Mds$ en 2026, renforçant la solidité bilancielle.</a:t>
             </a:r>
           </a:p>
         </p:txBody>
@@ -32065,7 +32065,7 @@
                 </a:solidFill>
                 <a:latin typeface="Calibri"/>
               </a:rPr>
-              <a:t>Croissance CA de 6.4% en 2025 portée par les services (+15%) et l'iPhone (+5%). Les marges nettes ont rebondi à 26.9% grâce à une meilleure mixité produits et une discipline sur les coûts fixes. Cela renforce la génération de FCF (85,000M$ en 2025) et réduit la dépendance au hardware.</a:t>
+              <a:t>Croissance revenue 2025 à 6.4% (+26Mds$) portée par les services (+16%) et l'iPhone (+5%). Marges nettes en hausse de 290bps grâce à un mix favorable (services &gt;70% marge) et une discipline sur les coûts. La génération de cash libre devrait dépasser 120Mds$ en 2026, renforçant la solidité bilancielle.</a:t>
             </a:r>
           </a:p>
         </p:txBody>

--- a/preview/AAPL/AAPL_pitchbook.pptx
+++ b/preview/AAPL/AAPL_pitchbook.pptx
@@ -3449,7 +3449,7 @@
                 </a:solidFill>
                 <a:latin typeface="Calibri"/>
               </a:rPr>
-              <a:t>● BUY  ·  Prix cible base : 275 $  ·  Upside : +10,5 %</a:t>
+              <a:t>● BUY  ·  Prix cible base : 285 $  ·  Upside : +14,5 %</a:t>
             </a:r>
           </a:p>
         </p:txBody>
@@ -6138,7 +6138,7 @@
                 </a:solidFill>
                 <a:latin typeface="Calibri"/>
               </a:rPr>
-              <a:t>Marges brutes passées de 43.3% (2022) à 46.9% (2025) grâce à un mix produit favorable (iPhone premium) et une optimisation des coûts logistiques. Les marges EBITDA (32.8% à 34.8%) et nettes (24.0% à 26.9%) confirment un levier opérationnel exceptionnel. Cette durabilité est soutenue par le pricing power et la récurrence des services, limitant les risques de compression.</a:t>
+              <a:t>Marges brutes en hausse de 43.3% (2022) à 46.9% (2025) via mix services et optimisation supply chain. EBITDA margin stable à 34.8% malgré inflation, preuve de pricing power. Net margin à 26.9% reflète discipline coût et effet de levier sur coûts fixes. Durabilité confirmée par ROIC &gt;80% et faible capex.</a:t>
             </a:r>
           </a:p>
         </p:txBody>
@@ -7303,7 +7303,7 @@
                           </a:solidFill>
                           <a:latin typeface="Calibri"/>
                         </a:rPr>
-                        <a:t>275 $</a:t>
+                        <a:t>285 $</a:t>
                       </a:r>
                     </a:p>
                   </a:txBody>
@@ -7479,7 +7479,7 @@
                           </a:solidFill>
                           <a:latin typeface="Calibri"/>
                         </a:rPr>
-                        <a:t>+10,5 %</a:t>
+                        <a:t>+14,5 %</a:t>
                       </a:r>
                     </a:p>
                   </a:txBody>
@@ -7622,7 +7622,7 @@
                           </a:solidFill>
                           <a:latin typeface="Calibri"/>
                         </a:rPr>
-                        <a:t>220 $</a:t>
+                        <a:t>240 $</a:t>
                       </a:r>
                     </a:p>
                   </a:txBody>
@@ -7645,7 +7645,7 @@
                           </a:solidFill>
                           <a:latin typeface="Calibri"/>
                         </a:rPr>
-                        <a:t>275 $</a:t>
+                        <a:t>285 $</a:t>
                       </a:r>
                     </a:p>
                   </a:txBody>
@@ -7668,7 +7668,7 @@
                           </a:solidFill>
                           <a:latin typeface="Calibri"/>
                         </a:rPr>
-                        <a:t>310 $</a:t>
+                        <a:t>320 $</a:t>
                       </a:r>
                     </a:p>
                   </a:txBody>
@@ -7693,7 +7693,7 @@
                           </a:solidFill>
                           <a:latin typeface="Calibri"/>
                         </a:rPr>
-                        <a:t>-11,6 %</a:t>
+                        <a:t>-3,5 %</a:t>
                       </a:r>
                     </a:p>
                   </a:txBody>
@@ -7716,7 +7716,7 @@
                           </a:solidFill>
                           <a:latin typeface="Calibri"/>
                         </a:rPr>
-                        <a:t>+10,5 %</a:t>
+                        <a:t>+14,5 %</a:t>
                       </a:r>
                     </a:p>
                   </a:txBody>
@@ -7739,7 +7739,7 @@
                           </a:solidFill>
                           <a:latin typeface="Calibri"/>
                         </a:rPr>
-                        <a:t>+24,6 %</a:t>
+                        <a:t>+28,6 %</a:t>
                       </a:r>
                     </a:p>
                   </a:txBody>
@@ -8203,7 +8203,7 @@
                           </a:solidFill>
                           <a:latin typeface="Calibri"/>
                         </a:rPr>
-                        <a:t>318</a:t>
+                        <a:t>329</a:t>
                       </a:r>
                     </a:p>
                   </a:txBody>
@@ -8246,7 +8246,7 @@
                           </a:solidFill>
                           <a:latin typeface="Calibri"/>
                         </a:rPr>
-                        <a:t>345</a:t>
+                        <a:t>357</a:t>
                       </a:r>
                     </a:p>
                   </a:txBody>
@@ -8289,7 +8289,7 @@
                           </a:solidFill>
                           <a:latin typeface="Calibri"/>
                         </a:rPr>
-                        <a:t>376</a:t>
+                        <a:t>390</a:t>
                       </a:r>
                     </a:p>
                   </a:txBody>
@@ -8332,7 +8332,7 @@
                           </a:solidFill>
                           <a:latin typeface="Calibri"/>
                         </a:rPr>
-                        <a:t>414</a:t>
+                        <a:t>430</a:t>
                       </a:r>
                     </a:p>
                   </a:txBody>
@@ -8375,7 +8375,7 @@
                           </a:solidFill>
                           <a:latin typeface="Calibri"/>
                         </a:rPr>
-                        <a:t>461</a:t>
+                        <a:t>478</a:t>
                       </a:r>
                     </a:p>
                   </a:txBody>
@@ -8463,7 +8463,7 @@
                           </a:solidFill>
                           <a:latin typeface="Calibri"/>
                         </a:rPr>
-                        <a:t>275</a:t>
+                        <a:t>285</a:t>
                       </a:r>
                     </a:p>
                   </a:txBody>
@@ -8506,7 +8506,7 @@
                           </a:solidFill>
                           <a:latin typeface="Calibri"/>
                         </a:rPr>
-                        <a:t>295</a:t>
+                        <a:t>306</a:t>
                       </a:r>
                     </a:p>
                   </a:txBody>
@@ -8549,7 +8549,7 @@
                           </a:solidFill>
                           <a:latin typeface="Calibri"/>
                         </a:rPr>
-                        <a:t>318</a:t>
+                        <a:t>329</a:t>
                       </a:r>
                     </a:p>
                   </a:txBody>
@@ -8592,7 +8592,7 @@
                           </a:solidFill>
                           <a:latin typeface="Calibri"/>
                         </a:rPr>
-                        <a:t>345</a:t>
+                        <a:t>357</a:t>
                       </a:r>
                     </a:p>
                   </a:txBody>
@@ -8635,7 +8635,7 @@
                           </a:solidFill>
                           <a:latin typeface="Calibri"/>
                         </a:rPr>
-                        <a:t>376</a:t>
+                        <a:t>390</a:t>
                       </a:r>
                     </a:p>
                   </a:txBody>
@@ -8723,7 +8723,7 @@
                           </a:solidFill>
                           <a:latin typeface="Calibri"/>
                         </a:rPr>
-                        <a:t>242</a:t>
+                        <a:t>251</a:t>
                       </a:r>
                     </a:p>
                   </a:txBody>
@@ -8766,7 +8766,7 @@
                           </a:solidFill>
                           <a:latin typeface="Calibri"/>
                         </a:rPr>
-                        <a:t>258</a:t>
+                        <a:t>267</a:t>
                       </a:r>
                     </a:p>
                   </a:txBody>
@@ -8809,7 +8809,7 @@
                           </a:solidFill>
                           <a:latin typeface="Calibri"/>
                         </a:rPr>
-                        <a:t>275</a:t>
+                        <a:t>285</a:t>
                       </a:r>
                     </a:p>
                   </a:txBody>
@@ -8852,7 +8852,7 @@
                           </a:solidFill>
                           <a:latin typeface="Calibri"/>
                         </a:rPr>
-                        <a:t>295</a:t>
+                        <a:t>306</a:t>
                       </a:r>
                     </a:p>
                   </a:txBody>
@@ -8895,7 +8895,7 @@
                           </a:solidFill>
                           <a:latin typeface="Calibri"/>
                         </a:rPr>
-                        <a:t>318</a:t>
+                        <a:t>329</a:t>
                       </a:r>
                     </a:p>
                   </a:txBody>
@@ -8983,7 +8983,7 @@
                           </a:solidFill>
                           <a:latin typeface="Calibri"/>
                         </a:rPr>
-                        <a:t>217</a:t>
+                        <a:t>225</a:t>
                       </a:r>
                     </a:p>
                   </a:txBody>
@@ -9026,7 +9026,7 @@
                           </a:solidFill>
                           <a:latin typeface="Calibri"/>
                         </a:rPr>
-                        <a:t>229</a:t>
+                        <a:t>237</a:t>
                       </a:r>
                     </a:p>
                   </a:txBody>
@@ -9069,7 +9069,7 @@
                           </a:solidFill>
                           <a:latin typeface="Calibri"/>
                         </a:rPr>
-                        <a:t>242</a:t>
+                        <a:t>251</a:t>
                       </a:r>
                     </a:p>
                   </a:txBody>
@@ -9112,7 +9112,7 @@
                           </a:solidFill>
                           <a:latin typeface="Calibri"/>
                         </a:rPr>
-                        <a:t>258</a:t>
+                        <a:t>267</a:t>
                       </a:r>
                     </a:p>
                   </a:txBody>
@@ -9155,7 +9155,7 @@
                           </a:solidFill>
                           <a:latin typeface="Calibri"/>
                         </a:rPr>
-                        <a:t>275</a:t>
+                        <a:t>285</a:t>
                       </a:r>
                     </a:p>
                   </a:txBody>
@@ -9243,7 +9243,7 @@
                           </a:solidFill>
                           <a:latin typeface="Calibri"/>
                         </a:rPr>
-                        <a:t>196</a:t>
+                        <a:t>203</a:t>
                       </a:r>
                     </a:p>
                   </a:txBody>
@@ -9286,7 +9286,7 @@
                           </a:solidFill>
                           <a:latin typeface="Calibri"/>
                         </a:rPr>
-                        <a:t>206</a:t>
+                        <a:t>213</a:t>
                       </a:r>
                     </a:p>
                   </a:txBody>
@@ -9329,7 +9329,7 @@
                           </a:solidFill>
                           <a:latin typeface="Calibri"/>
                         </a:rPr>
-                        <a:t>217</a:t>
+                        <a:t>225</a:t>
                       </a:r>
                     </a:p>
                   </a:txBody>
@@ -9372,7 +9372,7 @@
                           </a:solidFill>
                           <a:latin typeface="Calibri"/>
                         </a:rPr>
-                        <a:t>229</a:t>
+                        <a:t>237</a:t>
                       </a:r>
                     </a:p>
                   </a:txBody>
@@ -9415,7 +9415,7 @@
                           </a:solidFill>
                           <a:latin typeface="Calibri"/>
                         </a:rPr>
-                        <a:t>242</a:t>
+                        <a:t>251</a:t>
                       </a:r>
                     </a:p>
                   </a:txBody>
@@ -9480,7 +9480,7 @@
                 </a:solidFill>
                 <a:latin typeface="Calibri"/>
               </a:rPr>
-              <a:t>Avec un WACC de 10.4% et une TGR de 3.0%, le prix implicite DCF est de 285$ (+14% vs cours). La prime actuelle intègre déjà une croissance superieure, mais un rebond des ventes iPhone ou une accélération des services pourrait déclencher un re-rating. Le risque principal est une exécution sous-optimale sur l'IA.</a:t>
+              <a:t>WACC 10.4% et TGR 3.0% impliquent un prix implicite DCF à 275 USD vs cours à 248.8 USD (+10.5%). Upside limité par prime de croissance déjà partiellement pricee. Catalyseur clé : accélération services &gt;15% YoY pour justifier re-rating.</a:t>
             </a:r>
           </a:p>
         </p:txBody>
@@ -10544,7 +10544,7 @@
                           </a:solidFill>
                           <a:latin typeface="Calibri"/>
                         </a:rPr>
-                        <a:t>3 300,0</a:t>
+                        <a:t>3 200,0</a:t>
                       </a:r>
                     </a:p>
                   </a:txBody>
@@ -10567,7 +10567,7 @@
                           </a:solidFill>
                           <a:latin typeface="Calibri"/>
                         </a:rPr>
-                        <a:t>22,1x</a:t>
+                        <a:t>22,5x</a:t>
                       </a:r>
                     </a:p>
                   </a:txBody>
@@ -10590,7 +10590,7 @@
                           </a:solidFill>
                           <a:latin typeface="Calibri"/>
                         </a:rPr>
-                        <a:t>12,5x</a:t>
+                        <a:t>12,8x</a:t>
                       </a:r>
                     </a:p>
                   </a:txBody>
@@ -10636,7 +10636,7 @@
                           </a:solidFill>
                           <a:latin typeface="Calibri"/>
                         </a:rPr>
-                        <a:t>68,0 %</a:t>
+                        <a:t>6800,0 %</a:t>
                       </a:r>
                     </a:p>
                   </a:txBody>
@@ -10659,7 +10659,7 @@
                           </a:solidFill>
                           <a:latin typeface="Calibri"/>
                         </a:rPr>
-                        <a:t>48,0 %</a:t>
+                        <a:t>5200,0 %</a:t>
                       </a:r>
                     </a:p>
                   </a:txBody>
@@ -10753,7 +10753,7 @@
                           </a:solidFill>
                           <a:latin typeface="Calibri"/>
                         </a:rPr>
-                        <a:t>20,5x</a:t>
+                        <a:t>20,1x</a:t>
                       </a:r>
                     </a:p>
                   </a:txBody>
@@ -10776,7 +10776,7 @@
                           </a:solidFill>
                           <a:latin typeface="Calibri"/>
                         </a:rPr>
-                        <a:t>9,8x</a:t>
+                        <a:t>7,5x</a:t>
                       </a:r>
                     </a:p>
                   </a:txBody>
@@ -10799,7 +10799,7 @@
                           </a:solidFill>
                           <a:latin typeface="Calibri"/>
                         </a:rPr>
-                        <a:t>28,5x</a:t>
+                        <a:t>26,5x</a:t>
                       </a:r>
                     </a:p>
                   </a:txBody>
@@ -10822,7 +10822,7 @@
                           </a:solidFill>
                           <a:latin typeface="Calibri"/>
                         </a:rPr>
-                        <a:t>56,0 %</a:t>
+                        <a:t>5600,0 %</a:t>
                       </a:r>
                     </a:p>
                   </a:txBody>
@@ -10845,7 +10845,7 @@
                           </a:solidFill>
                           <a:latin typeface="Calibri"/>
                         </a:rPr>
-                        <a:t>38,0 %</a:t>
+                        <a:t>3500,0 %</a:t>
                       </a:r>
                     </a:p>
                   </a:txBody>
@@ -10870,7 +10870,7 @@
                           </a:solidFill>
                           <a:latin typeface="Calibri"/>
                         </a:rPr>
-                        <a:t>Amazon</a:t>
+                        <a:t>Samsung Electronics</a:t>
                       </a:r>
                     </a:p>
                   </a:txBody>
@@ -10893,7 +10893,7 @@
                           </a:solidFill>
                           <a:latin typeface="Calibri"/>
                         </a:rPr>
-                        <a:t>AMZN</a:t>
+                        <a:t>005930.KS</a:t>
                       </a:r>
                     </a:p>
                   </a:txBody>
@@ -10916,7 +10916,7 @@
                           </a:solidFill>
                           <a:latin typeface="Calibri"/>
                         </a:rPr>
-                        <a:t>1 800,0</a:t>
+                        <a:t>450,0</a:t>
                       </a:r>
                     </a:p>
                   </a:txBody>
@@ -10939,7 +10939,7 @@
                           </a:solidFill>
                           <a:latin typeface="Calibri"/>
                         </a:rPr>
-                        <a:t>25,3x</a:t>
+                        <a:t>7,2x</a:t>
                       </a:r>
                     </a:p>
                   </a:txBody>
@@ -10962,7 +10962,7 @@
                           </a:solidFill>
                           <a:latin typeface="Calibri"/>
                         </a:rPr>
-                        <a:t>3,2x</a:t>
+                        <a:t>1,2x</a:t>
                       </a:r>
                     </a:p>
                   </a:txBody>
@@ -10985,7 +10985,7 @@
                           </a:solidFill>
                           <a:latin typeface="Calibri"/>
                         </a:rPr>
-                        <a:t>55,0x</a:t>
+                        <a:t>12,5x</a:t>
                       </a:r>
                     </a:p>
                   </a:txBody>
@@ -11008,7 +11008,7 @@
                           </a:solidFill>
                           <a:latin typeface="Calibri"/>
                         </a:rPr>
-                        <a:t>45,0 %</a:t>
+                        <a:t>4500,0 %</a:t>
                       </a:r>
                     </a:p>
                   </a:txBody>
@@ -11031,7 +11031,7 @@
                           </a:solidFill>
                           <a:latin typeface="Calibri"/>
                         </a:rPr>
-                        <a:t>15,0 %</a:t>
+                        <a:t>2200,0 %</a:t>
                       </a:r>
                     </a:p>
                   </a:txBody>
@@ -11125,7 +11125,7 @@
                           </a:solidFill>
                           <a:latin typeface="Calibri"/>
                         </a:rPr>
-                        <a:t>16,8x</a:t>
+                        <a:t>18,5x</a:t>
                       </a:r>
                     </a:p>
                   </a:txBody>
@@ -11148,7 +11148,7 @@
                           </a:solidFill>
                           <a:latin typeface="Calibri"/>
                         </a:rPr>
-                        <a:t>10,2x</a:t>
+                        <a:t>10,5x</a:t>
                       </a:r>
                     </a:p>
                   </a:txBody>
@@ -11171,7 +11171,7 @@
                           </a:solidFill>
                           <a:latin typeface="Calibri"/>
                         </a:rPr>
-                        <a:t>25,0x</a:t>
+                        <a:t>30,1x</a:t>
                       </a:r>
                     </a:p>
                   </a:txBody>
@@ -11194,7 +11194,7 @@
                           </a:solidFill>
                           <a:latin typeface="Calibri"/>
                         </a:rPr>
-                        <a:t>85,0 %</a:t>
+                        <a:t>8500,0 %</a:t>
                       </a:r>
                     </a:p>
                   </a:txBody>
@@ -11217,7 +11217,7 @@
                           </a:solidFill>
                           <a:latin typeface="Calibri"/>
                         </a:rPr>
-                        <a:t>55,0 %</a:t>
+                        <a:t>5500,0 %</a:t>
                       </a:r>
                     </a:p>
                   </a:txBody>
@@ -11242,7 +11242,7 @@
                           </a:solidFill>
                           <a:latin typeface="Calibri"/>
                         </a:rPr>
-                        <a:t>Tesla</a:t>
+                        <a:t>NVIDIA</a:t>
                       </a:r>
                     </a:p>
                   </a:txBody>
@@ -11265,7 +11265,7 @@
                           </a:solidFill>
                           <a:latin typeface="Calibri"/>
                         </a:rPr>
-                        <a:t>TSLA</a:t>
+                        <a:t>NVDA</a:t>
                       </a:r>
                     </a:p>
                   </a:txBody>
@@ -11288,7 +11288,7 @@
                           </a:solidFill>
                           <a:latin typeface="Calibri"/>
                         </a:rPr>
-                        <a:t>600,0</a:t>
+                        <a:t>2 400,0</a:t>
                       </a:r>
                     </a:p>
                   </a:txBody>
@@ -11311,6 +11311,52 @@
                           </a:solidFill>
                           <a:latin typeface="Calibri"/>
                         </a:rPr>
+                        <a:t>55,0x</a:t>
+                      </a:r>
+                    </a:p>
+                  </a:txBody>
+                  <a:tcPr>
+                    <a:solidFill>
+                      <a:srgbClr val="FFFFFF"/>
+                    </a:solidFill>
+                  </a:tcPr>
+                </a:tc>
+                <a:tc>
+                  <a:txBody>
+                    <a:bodyPr/>
+                    <a:lstStyle/>
+                    <a:p>
+                      <a:pPr algn="ctr"/>
+                      <a:r>
+                        <a:rPr sz="800" b="0" i="0">
+                          <a:solidFill>
+                            <a:srgbClr val="0D0D0D"/>
+                          </a:solidFill>
+                          <a:latin typeface="Calibri"/>
+                        </a:rPr>
+                        <a:t>28,0x</a:t>
+                      </a:r>
+                    </a:p>
+                  </a:txBody>
+                  <a:tcPr>
+                    <a:solidFill>
+                      <a:srgbClr val="FFFFFF"/>
+                    </a:solidFill>
+                  </a:tcPr>
+                </a:tc>
+                <a:tc>
+                  <a:txBody>
+                    <a:bodyPr/>
+                    <a:lstStyle/>
+                    <a:p>
+                      <a:pPr algn="ctr"/>
+                      <a:r>
+                        <a:rPr sz="800" b="0" i="0">
+                          <a:solidFill>
+                            <a:srgbClr val="0D0D0D"/>
+                          </a:solidFill>
+                          <a:latin typeface="Calibri"/>
+                        </a:rPr>
                         <a:t>45,0x</a:t>
                       </a:r>
                     </a:p>
@@ -11334,7 +11380,7 @@
                           </a:solidFill>
                           <a:latin typeface="Calibri"/>
                         </a:rPr>
-                        <a:t>8,5x</a:t>
+                        <a:t>7800,0 %</a:t>
                       </a:r>
                     </a:p>
                   </a:txBody>
@@ -11357,53 +11403,7 @@
                           </a:solidFill>
                           <a:latin typeface="Calibri"/>
                         </a:rPr>
-                        <a:t>60,0x</a:t>
-                      </a:r>
-                    </a:p>
-                  </a:txBody>
-                  <a:tcPr>
-                    <a:solidFill>
-                      <a:srgbClr val="FFFFFF"/>
-                    </a:solidFill>
-                  </a:tcPr>
-                </a:tc>
-                <a:tc>
-                  <a:txBody>
-                    <a:bodyPr/>
-                    <a:lstStyle/>
-                    <a:p>
-                      <a:pPr algn="ctr"/>
-                      <a:r>
-                        <a:rPr sz="800" b="0" i="0">
-                          <a:solidFill>
-                            <a:srgbClr val="0D0D0D"/>
-                          </a:solidFill>
-                          <a:latin typeface="Calibri"/>
-                        </a:rPr>
-                        <a:t>27,0 %</a:t>
-                      </a:r>
-                    </a:p>
-                  </a:txBody>
-                  <a:tcPr>
-                    <a:solidFill>
-                      <a:srgbClr val="FFFFFF"/>
-                    </a:solidFill>
-                  </a:tcPr>
-                </a:tc>
-                <a:tc>
-                  <a:txBody>
-                    <a:bodyPr/>
-                    <a:lstStyle/>
-                    <a:p>
-                      <a:pPr algn="ctr"/>
-                      <a:r>
-                        <a:rPr sz="800" b="0" i="0">
-                          <a:solidFill>
-                            <a:srgbClr val="0D0D0D"/>
-                          </a:solidFill>
-                          <a:latin typeface="Calibri"/>
-                        </a:rPr>
-                        <a:t>12,0 %</a:t>
+                        <a:t>7000,0 %</a:t>
                       </a:r>
                     </a:p>
                   </a:txBody>
@@ -11497,7 +11497,7 @@
                           </a:solidFill>
                           <a:latin typeface="Calibri"/>
                         </a:rPr>
-                        <a:t>22,1x</a:t>
+                        <a:t>20,1x</a:t>
                       </a:r>
                     </a:p>
                   </a:txBody>
@@ -11520,7 +11520,7 @@
                           </a:solidFill>
                           <a:latin typeface="Calibri"/>
                         </a:rPr>
-                        <a:t>9,8x</a:t>
+                        <a:t>10,5x</a:t>
                       </a:r>
                     </a:p>
                   </a:txBody>
@@ -11543,7 +11543,7 @@
                           </a:solidFill>
                           <a:latin typeface="Calibri"/>
                         </a:rPr>
-                        <a:t>38,2x</a:t>
+                        <a:t>30,1x</a:t>
                       </a:r>
                     </a:p>
                   </a:txBody>
@@ -11566,7 +11566,7 @@
                           </a:solidFill>
                           <a:latin typeface="Calibri"/>
                         </a:rPr>
-                        <a:t>56,0 %</a:t>
+                        <a:t>6800,0 %</a:t>
                       </a:r>
                     </a:p>
                   </a:txBody>
@@ -11589,7 +11589,7 @@
                           </a:solidFill>
                           <a:latin typeface="Calibri"/>
                         </a:rPr>
-                        <a:t>38,0 %</a:t>
+                        <a:t>5200,0 %</a:t>
                       </a:r>
                     </a:p>
                   </a:txBody>
@@ -11634,7 +11634,7 @@
                 </a:solidFill>
                 <a:latin typeface="Calibri"/>
               </a:rPr>
-              <a:t>Apple se trade à 25.7x EV/EBITDA vs une médiane peers (MSFT, GOOGL, AMZN, META, TSLA) à 20.1x (+28%), justifiée par des marges nettes &gt;25% et un ROIC &gt;80%. La prime est également supportée par une croissance organique &gt;8% vs 5-7% pour les pairs. Une convergence vers la médiane impliquerait un downside de 22%, mais peu probable compte tenu des fondamentaux.</a:t>
+              <a:t>Apple affiche un P/E 32.6x vs mediane peers 27x (+20%), justifié par ROIC 84.4% vs 30% pour peers. EV/EBITDA 25.7x vs 18x peers (+43%) reflète qualité des actifs. Convergence vers mediane peers impliquerait un downside de 15% sur multiples, mais improbable sans choc opérationnel.</a:t>
             </a:r>
           </a:p>
         </p:txBody>
@@ -12292,7 +12292,7 @@
                 </a:solidFill>
                 <a:latin typeface="Calibri"/>
               </a:rPr>
-              <a:t>Avec un WACC de 10.4% et une TGR de 3.0%, le prix implicite DCF est de 285$ (+14% vs cours). La prime actuelle intègre déjà une croissance superieure, mais un rebond des ventes iPhone ou une accélération des services pourrait déclencher un re-rating. Le risque principal est une exécution sous-optimale sur l'IA.</a:t>
+              <a:t>WACC 10.4% et TGR 3.0% impliquent un prix implicite DCF à 275 USD vs cours à 248.8 USD (+10.5%). Upside limité par prime de croissance déjà partiellement pricee. Catalyseur clé : accélération services &gt;15% YoY pour justifier re-rating.</a:t>
             </a:r>
           </a:p>
         </p:txBody>
@@ -13265,7 +13265,7 @@
                 </a:solidFill>
                 <a:latin typeface="Calibri"/>
               </a:rPr>
-              <a:t>Dépendance Asie critique</a:t>
+              <a:t>Surévaluation P/E</a:t>
             </a:r>
           </a:p>
         </p:txBody>
@@ -13300,7 +13300,7 @@
                 </a:solidFill>
                 <a:latin typeface="Calibri"/>
               </a:rPr>
-              <a:t>La marge brute de 46.9% repose sur un mix produit vieillissant avec des iPhone représentant 52% du CA 2024, dont les ventes en Chine chutent de 18% en volume sur 2023-2024; la dépendance à l'Asie pour 20% du CA expose à des risques géopolitiques et à une guerre des prix avec Huawei qui grignote déjà 12% de part de marché locale.</a:t>
+              <a:t>Le P/E à 32.61x dépasse de 50% la moyenne historique du S&amp;P 500 (21x) et de 25% celle des géants tech (26x), suggérant une surévaluation déjà intégrée dans les marges actuelles. Les 151.9% de ROE reposent sur un écosystème captif, mais la guerre tarifaire en Chine pourrait réduire les marges iPhone de 5 à 3 points d'ici 2026.</a:t>
             </a:r>
           </a:p>
         </p:txBody>
@@ -13421,7 +13421,7 @@
                 </a:solidFill>
                 <a:latin typeface="Calibri"/>
               </a:rPr>
-              <a:t>Marges services en baisse</a:t>
+              <a:t>Risque Chine</a:t>
             </a:r>
           </a:p>
         </p:txBody>
@@ -13456,7 +13456,7 @@
                 </a:solidFill>
                 <a:latin typeface="Calibri"/>
               </a:rPr>
-              <a:t>Les 26.9% de marge nette supposent une maîtrise parfaite des coûts, mais les dépenses R&amp;D ont bondi de 22% en 2023 à 25 milliards $, soit 7.5% du CA, tandis que les marges des services (18% du CA) s'effritent à 22% contre 28% en 2020, signe d'une saturation du marché des abonnements.</a:t>
+              <a:t>La trésorerie nette de 165 milliards cache 90% d'actifs non liquides (investissements long terme), limitant la flexibilité face à une crise de liquidité. L'EV/EBITDA à 25.67x est 30% plus élevé que Microsoft (19.8x), malgré une croissance des revenus inférieure de 40%.</a:t>
             </a:r>
           </a:p>
         </p:txBody>
@@ -13577,7 +13577,7 @@
                 </a:solidFill>
                 <a:latin typeface="Calibri"/>
               </a:rPr>
-              <a:t>Buyback artificiel</a:t>
+              <a:t>Marges services</a:t>
             </a:r>
           </a:p>
         </p:txBody>
@@ -13612,7 +13612,7 @@
                 </a:solidFill>
                 <a:latin typeface="Calibri"/>
               </a:rPr>
-              <a:t>Le ROE de 151.9% est artificiellement gonflé par un rachat massif d'actions : 110 milliards $ en 2023, soit 6% du CA, masquant une rentabilité opérationnelle en baisse de 4 points depuis 2021, passant de 30% à 26% sur le core business.</a:t>
+              <a:t>Le pricing power d'Apple s'érode avec un iPhone 15 Pro à 1 200€, soit +15% vs 2023, risquant une baisse de volume de 8% en Asie selon Counterpoint Research. Les marges brutes à 46.9% sont artificiellement gonflées par les services, dont la croissance ralentit à 12% en 2024 contre 18% en 2023.</a:t>
             </a:r>
           </a:p>
         </p:txBody>
@@ -13826,7 +13826,7 @@
                           </a:solidFill>
                           <a:latin typeface="Calibri"/>
                         </a:rPr>
-                        <a:t>Récession mondiale en 2026 avec baisse du CA iPhone de 15%</a:t>
+                        <a:t>Récession mondiale avec -3% PIB US/UE en 2026</a:t>
                       </a:r>
                     </a:p>
                   </a:txBody>
@@ -13897,7 +13897,7 @@
                           </a:solidFill>
                           <a:latin typeface="Calibri"/>
                         </a:rPr>
-                        <a:t>Régulation européenne forçant la scission de l'App Store</a:t>
+                        <a:t>Régulation stricte sur commissions App Store en UE/US</a:t>
                       </a:r>
                     </a:p>
                   </a:txBody>
@@ -13968,7 +13968,7 @@
                           </a:solidFill>
                           <a:latin typeface="Calibri"/>
                         </a:rPr>
-                        <a:t>Échec du déploiement de l'IA sur iPhone 16 (-10% ventes 2026)</a:t>
+                        <a:t>Baisse CA iPhone &gt;10% en Chine Q3 2026</a:t>
                       </a:r>
                     </a:p>
                   </a:txBody>
@@ -15044,7 +15044,7 @@
                 </a:solidFill>
                 <a:latin typeface="Calibri"/>
               </a:rPr>
-              <a:t>Score agrégé : -0,083</a:t>
+              <a:t>Score agrégé : -0,087</a:t>
             </a:r>
           </a:p>
         </p:txBody>
@@ -15356,7 +15356,7 @@
                 </a:solidFill>
                 <a:latin typeface="Calibri"/>
               </a:rPr>
-              <a:t>44,2 %</a:t>
+              <a:t>45,0 %</a:t>
             </a:r>
           </a:p>
         </p:txBody>
@@ -15835,7 +15835,7 @@
                           </a:solidFill>
                           <a:latin typeface="Calibri"/>
                         </a:rPr>
-                        <a:t>+0,237</a:t>
+                        <a:t>+0,231</a:t>
                       </a:r>
                     </a:p>
                   </a:txBody>
@@ -15858,7 +15858,7 @@
                           </a:solidFill>
                           <a:latin typeface="Calibri"/>
                         </a:rPr>
-                        <a:t>Lancement iPhone 16 en 2026 avec IA intégrée boostant les ventes de 8% et marge brute &gt;50% | Croissance services à 18% CAGR d'ici 2027, atteignant 110Mds$ avec marge &gt;72% | Programme de rachat d'actions de 110Mds$ en 2026, soutenant le…</a:t>
+                        <a:t>Services en croissance à +15% YoY avec 2Md utilisateurs actifs d'ici 2027, boostant marge brute à 49% | Horizon 2026-2027</a:t>
                       </a:r>
                     </a:p>
                   </a:txBody>
@@ -15929,7 +15929,7 @@
                           </a:solidFill>
                           <a:latin typeface="Calibri"/>
                         </a:rPr>
-                        <a:t>+0,442</a:t>
+                        <a:t>+0,450</a:t>
                       </a:r>
                     </a:p>
                   </a:txBody>
@@ -16023,7 +16023,7 @@
                           </a:solidFill>
                           <a:latin typeface="Calibri"/>
                         </a:rPr>
-                        <a:t>+0,320</a:t>
+                        <a:t>+0,319</a:t>
                       </a:r>
                     </a:p>
                   </a:txBody>
@@ -16046,7 +16046,7 @@
                           </a:solidFill>
                           <a:latin typeface="Calibri"/>
                         </a:rPr>
-                        <a:t>Régulation européenne sur l'App Store réduisant les marges services de 15% d'ici 2027 | Concurrence accrue en IA (Google, Microsoft) menant à une perte de 10% de parts de marché d'ici 2026 | Ralentissement économique en Chine (-5% CA YoY)…</a:t>
+                        <a:t>Régulation européenne sur App Store (-10% revenus 2026) impactant marge services de 3pp | Horizon 2026-2027</a:t>
                       </a:r>
                     </a:p>
                   </a:txBody>
@@ -16091,7 +16091,7 @@
                 </a:solidFill>
                 <a:latin typeface="Calibri"/>
               </a:rPr>
-              <a:t>La presse financière souligne les défis majeurs d'Apple face à l'IA et à la concurrence, tout en saluant les innovations comme l'ouverture de Siri. Les perspectives de croissance à long terme suscitent des doutes face à des rivaux potentiels.</a:t>
+              <a:t>La presse financière souligne les défis majeurs d'Apple face à l'IA et à la concurrence, tout en mettant en avant ses initiatives stratégiques comme l'ouverture de Siri. Les annonces positives sur les innovations et la gestion des talents sont contrebalancées par des risques structurels et des prédictions pessimistes.</a:t>
             </a:r>
           </a:p>
         </p:txBody>
@@ -19029,7 +19029,7 @@
                 </a:solidFill>
                 <a:latin typeface="Calibri"/>
               </a:rPr>
-              <a:t>Apple se négocie à 25.7x EV/EBITDA vs une médiane peers à 20.1x (+28%), reflétant sa qualité d'actifs. Le P/E de 32.6x est justifié par une croissance organique &gt;8% et un ROIC &gt;80%.</a:t>
+              <a:t>Prime de 20% vs mediane peers sur P/E (32.6x vs 27x) justifiée par qualité des actifs. EV/EBITDA à 25.7x reste raisonnable vs croissance attendue.</a:t>
             </a:r>
           </a:p>
         </p:txBody>
@@ -19359,7 +19359,7 @@
                 </a:solidFill>
                 <a:latin typeface="Calibri"/>
               </a:rPr>
-              <a:t>Prix cible base : 275 $  ·  Upside : +10,5 %  ·  Bear : 220 $ (-11,6 %)  ·  Bull : 310 $ (+24,6 %)</a:t>
+              <a:t>Prix cible base : 285 $  ·  Upside : +14,5 %  ·  Bear : 240 $ (-3,5 %)  ·  Bull : 320 $ (+28,6 %)</a:t>
             </a:r>
           </a:p>
         </p:txBody>
@@ -19550,7 +19550,7 @@
                 </a:solidFill>
                 <a:latin typeface="Calibri"/>
               </a:rPr>
-              <a:t>Apple devrait bénéficier d'un rebond des ventes iPhone en 2026 (+8% YoY à 240M d'unités) grâce à l'IA intégrée et aux cycles de remplacement</a:t>
+              <a:t>Croissance services à +12% YoY avec 1.8Md utilisateurs actifs d'ici 2027</a:t>
             </a:r>
           </a:p>
         </p:txBody>
@@ -19663,7 +19663,7 @@
                 </a:solidFill>
                 <a:latin typeface="Calibri"/>
               </a:rPr>
-              <a:t>Les services récurrents devraient atteindre 110Mds$ en 2027 (+18% CAGR) avec une marge brute &gt;72%</a:t>
+              <a:t>Marge brute stable à 47% grâce au mix services et pricing power sur iPhone 16</a:t>
             </a:r>
           </a:p>
         </p:txBody>
@@ -19741,7 +19741,7 @@
                 </a:solidFill>
                 <a:latin typeface="Calibri"/>
               </a:rPr>
-              <a:t>Cash generation</a:t>
+              <a:t>Trésorerie massive</a:t>
             </a:r>
           </a:p>
         </p:txBody>
@@ -19776,7 +19776,7 @@
                 </a:solidFill>
                 <a:latin typeface="Calibri"/>
               </a:rPr>
-              <a:t>Le rachat d'actions de 110Mds$ en 2026 soutiendra la valorisation avec un ROIC &gt;80%.</a:t>
+              <a:t>ROIC de 84.4% soutenu par discipline opérationnelle et trésorerie de 166Md USD</a:t>
             </a:r>
           </a:p>
         </p:txBody>
@@ -19967,7 +19967,7 @@
                 </a:solidFill>
                 <a:latin typeface="Calibri"/>
               </a:rPr>
-              <a:t>Régulation européenne sur l'App Store réduisant les marges services de 15% d'ici 2027 | Concurrence accrue en IA (Google, Microsoft) menant à une perte de 10% de parts de marché d'ici 2026 |…</a:t>
+              <a:t>Régulation européenne sur App Store (-10% revenus 2026) impactant marge services de 3pp | Horizon 2026-2027</a:t>
             </a:r>
           </a:p>
         </p:txBody>
@@ -20045,7 +20045,7 @@
                 </a:solidFill>
                 <a:latin typeface="Calibri"/>
               </a:rPr>
-              <a:t>Régulation App Store</a:t>
+              <a:t>Régulation</a:t>
             </a:r>
           </a:p>
         </p:txBody>
@@ -20080,7 +20080,7 @@
                 </a:solidFill>
                 <a:latin typeface="Calibri"/>
               </a:rPr>
-              <a:t>Cyberattaque majeure sur l'écosystème Apple en 2026, réduisant la confiance des utilisateurs et le CA services de 8% | Échec du déploiement de l'IA sur iPhone, entraînant une baisse de 12% des ventes…</a:t>
+              <a:t>Concurrence accrue en IA (Google, Microsoft) réduisant différenciation iPhone | Horizon 2026</a:t>
             </a:r>
           </a:p>
         </p:txBody>
@@ -20193,7 +20193,7 @@
                 </a:solidFill>
                 <a:latin typeface="Calibri"/>
               </a:rPr>
-              <a:t>Guerre commerciale USA-Chine aggravée, imposant des tarifs douaniers de 25% sur les composants iPhone, réduisant la marge brute à 42% | Scission forcée de l'App Store en Europe, diminuant les revenus…</a:t>
+              <a:t>Ralentissement économique en Chine (-5% CA iPhone 2026) affectant croissance globale | Horizon 2026</a:t>
             </a:r>
           </a:p>
         </p:txBody>
@@ -20470,7 +20470,7 @@
                 </a:solidFill>
                 <a:latin typeface="Calibri"/>
               </a:rPr>
-              <a:t>vs 22,1x médiane peers</a:t>
+              <a:t>vs 20,1x médiane peers</a:t>
             </a:r>
           </a:p>
         </p:txBody>
@@ -20782,7 +20782,7 @@
                 </a:solidFill>
                 <a:latin typeface="Calibri"/>
               </a:rPr>
-              <a:t>275 $</a:t>
+              <a:t>285 $</a:t>
             </a:r>
           </a:p>
         </p:txBody>
@@ -20852,7 +20852,7 @@
                 </a:solidFill>
                 <a:latin typeface="Calibri"/>
               </a:rPr>
-              <a:t>Upside de +10,5 % vs cours</a:t>
+              <a:t>Upside de +14,5 % vs cours</a:t>
             </a:r>
           </a:p>
         </p:txBody>
@@ -20973,7 +20973,7 @@
                 </a:solidFill>
                 <a:latin typeface="Calibri"/>
               </a:rPr>
-              <a:t>-0,083</a:t>
+              <a:t>-0,087</a:t>
             </a:r>
           </a:p>
         </p:txBody>
@@ -23672,7 +23672,7 @@
                 </a:solidFill>
                 <a:latin typeface="Calibri"/>
               </a:rPr>
-              <a:t>Apple affiche une résilience opérationnelle exceptionnelle avec des marges nettes à 26.9% et un ROE de 151.9%, malgré un environnement macroéconomique incertain. La valorisation reste premium mais justifiée par la qualité des actifs et la génération de cash robuste.</a:t>
+              <a:t>Apple affiche une résilience opérationnelle exceptionnelle avec des marges nettes à 26.9% et un ROIC de 84.4%. La valorisation reste attractive malgré une prime modérée vs peers technologiques.</a:t>
             </a:r>
           </a:p>
         </p:txBody>
@@ -24715,7 +24715,7 @@
                 </a:solidFill>
                 <a:latin typeface="Calibri"/>
               </a:rPr>
-              <a:t>Dépendance iPhone  ·  Régulation App Store</a:t>
+              <a:t>Dépendance iPhone  ·  Régulation</a:t>
             </a:r>
           </a:p>
         </p:txBody>
@@ -25949,7 +25949,7 @@
                 </a:solidFill>
                 <a:latin typeface="Calibri"/>
               </a:rPr>
-              <a:t>Apple conçoit et commercialise des produits technologiques innovants (iPhone, Mac, iPad, services) avec un écosystème intégré et une fidélisation client élevée. Positionné en haut de gamme, le groupe domine les segments premium avec des marges structurellement élevées et un pricing power inégalé. Son avantage concurrentiel repose sur l'innovation, la marque forte et une base d'utilisateurs captive via l'App Store et les services récurrents. L'entreprise articule son activité autour de deux segments stratégiques :</a:t>
+              <a:t>Apple conçoit et commercialise des produits technologiques premium (iPhone, Mac, iPad, services) avec un écosystème intégré. Positionné en leader sur l'innovation et l'expérience utilisateur, l'entreprise bénéficie d'une fidélisation client élevée et d'une marge de pricing power forte. Son modèle hybride (hardware + services) génère des revenus récurrents et une rentabilité durable. L'entreprise articule son activité autour de deux segments stratégiques :</a:t>
             </a:r>
           </a:p>
         </p:txBody>
@@ -26062,7 +26062,7 @@
                 </a:solidFill>
                 <a:latin typeface="Calibri"/>
               </a:rPr>
-              <a:t>Ventes de matériel (iPhone ~50% du CA, Mac, iPad, Wearables) avec un modèle premium et une marge brute &gt;45%. Clients cibles : consommateurs haut de gamme et professionnels. Croissance tirée par l'innovation (IA intégrée, nouveaux form factors) et l'expansion géographique (Inde, Chine).</a:t>
+              <a:t>Ventes de matériel (iPhone 60% du CA, Mac, iPad, wearables) avec une stratégie premium et un cycle de renouvellement annuel. Clients B2C et B2B avec une forte dépendance à l'iPhone malgré diversification. Marges élevées (GM ~35%) mais sensibles aux coûts de supply chain et à la demande asiatique. Croissance portée par l'Asie et les services associés.</a:t>
             </a:r>
           </a:p>
         </p:txBody>
@@ -26175,7 +26175,7 @@
                 </a:solidFill>
                 <a:latin typeface="Calibri"/>
               </a:rPr>
-              <a:t>Abonnements (App Store, Apple Music, iCloud) avec marge brute &gt;70% et croissance YoY &gt;15%. Modèle récurrent avec 1.8 milliard d'utilisateurs actifs. Moteurs : expansion base installée, prix des abonnements et contenu exclusif (Apple TV+).</a:t>
+              <a:t>Abonnements (Apple Music, iCloud, App Store) et contenus avec GM &gt;70%. Modèle récurrent et à forte rentabilité, moins cyclique que le hardware. Croissance tirée par +1.5Md utilisateurs actifs et expansion géographique. Partenariats avec développeurs et régulation favorable sur commissions App Store.</a:t>
             </a:r>
           </a:p>
         </p:txBody>
@@ -27554,7 +27554,7 @@
                 </a:solidFill>
                 <a:latin typeface="Calibri"/>
               </a:rPr>
-              <a:t>62%</a:t>
+              <a:t>60%</a:t>
             </a:r>
           </a:p>
         </p:txBody>
@@ -27702,7 +27702,7 @@
                 </a:solidFill>
                 <a:latin typeface="Calibri"/>
               </a:rPr>
-              <a:t>Ventes de matériel (iPhone ~50% du CA, Mac, iPad, Wearables) avec un modèle premium et une marge brute &gt;45%. Clients cibles : consommateurs haut de gamme et professionnels. Croissance tirée par l'innovation (IA intégrée, nouveaux form factors) et l'expansion géographique (Inde, Chine).</a:t>
+              <a:t>Ventes de matériel (iPhone 60% du CA, Mac, iPad, wearables) avec une stratégie premium et un cycle de renouvellement annuel. Clients B2C et B2B avec une forte dépendance à l'iPhone malgré diversification. Marges élevées (GM ~35%) mais sensibles aux coûts de supply chain et à la demande asiatique. Croissance portée par l'Asie et les services associés.</a:t>
             </a:r>
           </a:p>
         </p:txBody>
@@ -27971,7 +27971,7 @@
                 </a:solidFill>
                 <a:latin typeface="Calibri"/>
               </a:rPr>
-              <a:t>Abonnements (App Store, Apple Music, iCloud) avec marge brute &gt;70% et croissance YoY &gt;15%. Modèle récurrent avec 1.8 milliard d'utilisateurs actifs. Moteurs : expansion base installée, prix des abonnements et contenu exclusif (Apple TV+).</a:t>
+              <a:t>Abonnements (Apple Music, iCloud, App Store) et contenus avec GM &gt;70%. Modèle récurrent et à forte rentabilité, moins cyclique que le hardware. Croissance tirée par +1.5Md utilisateurs actifs et expansion géographique. Partenariats avec développeurs et régulation favorable sur commissions App Store.</a:t>
             </a:r>
           </a:p>
         </p:txBody>
@@ -29660,7 +29660,7 @@
                           </a:solidFill>
                           <a:latin typeface="Calibri"/>
                         </a:rPr>
-                        <a:t>162,0</a:t>
+                        <a:t>160,0</a:t>
                       </a:r>
                     </a:p>
                   </a:txBody>
@@ -29800,7 +29800,7 @@
                           </a:solidFill>
                           <a:latin typeface="Calibri"/>
                         </a:rPr>
-                        <a:t>36,4 %</a:t>
+                        <a:t>36,0 %</a:t>
                       </a:r>
                     </a:p>
                   </a:txBody>
@@ -29963,7 +29963,7 @@
                           </a:solidFill>
                           <a:latin typeface="Calibri"/>
                         </a:rPr>
-                        <a:t>130,0</a:t>
+                        <a:t>132,0</a:t>
                       </a:r>
                     </a:p>
                   </a:txBody>
@@ -30103,7 +30103,7 @@
                           </a:solidFill>
                           <a:latin typeface="Calibri"/>
                         </a:rPr>
-                        <a:t>27,4 %</a:t>
+                        <a:t>27,8 %</a:t>
                       </a:r>
                     </a:p>
                   </a:txBody>
@@ -30148,7 +30148,7 @@
                 </a:solidFill>
                 <a:latin typeface="Calibri"/>
               </a:rPr>
-              <a:t>Croissance revenue 2025 à 6.4% (+26Mds$) portée par les services (+16%) et l'iPhone (+5%). Marges nettes en hausse de 290bps grâce à un mix favorable (services &gt;70% marge) et une discipline sur les coûts. La génération de cash libre devrait dépasser 120Mds$ en 2026, renforçant la solidité bilancielle.</a:t>
+              <a:t>Croissance CA à 6.4% en 2025 portée par services (+15%) et iPhone (+8%). Marges nettes en hausse à 26.9% grâce au mix favorable et levier opérationnel. Cash flow libre de 110Md USD en 2025, renforçant la solidité bilancielle pour financer R&amp;D et rachats d'actions.</a:t>
             </a:r>
           </a:p>
         </p:txBody>
@@ -32065,7 +32065,7 @@
                 </a:solidFill>
                 <a:latin typeface="Calibri"/>
               </a:rPr>
-              <a:t>Croissance revenue 2025 à 6.4% (+26Mds$) portée par les services (+16%) et l'iPhone (+5%). Marges nettes en hausse de 290bps grâce à un mix favorable (services &gt;70% marge) et une discipline sur les coûts. La génération de cash libre devrait dépasser 120Mds$ en 2026, renforçant la solidité bilancielle.</a:t>
+              <a:t>Croissance CA à 6.4% en 2025 portée par services (+15%) et iPhone (+8%). Marges nettes en hausse à 26.9% grâce au mix favorable et levier opérationnel. Cash flow libre de 110Md USD en 2025, renforçant la solidité bilancielle pour financer R&amp;D et rachats d'actions.</a:t>
             </a:r>
           </a:p>
         </p:txBody>

--- a/preview/AAPL/AAPL_pitchbook.pptx
+++ b/preview/AAPL/AAPL_pitchbook.pptx
@@ -6138,7 +6138,7 @@
                 </a:solidFill>
                 <a:latin typeface="Calibri"/>
               </a:rPr>
-              <a:t>Marges brutes en hausse de 43.3% (2022) à 46.9% (2025) via mix services et optimisation supply chain. EBITDA margin stable à 34.8% malgré inflation, preuve de pricing power. Net margin à 26.9% reflète discipline coût et effet de levier sur coûts fixes. Durabilité confirmée par ROIC &gt;80% et faible capex.</a:t>
+              <a:t>Marges brutes en hausse de 280bps depuis 2022 (44.1% à 46.9%) grâce à l'amélioration du mix produits (iPhone 15 Pro à 1000$+) et à la réduction des coûts de production (-8% sur les puces). Marges EBITDA stables à 34.8% malgré la hausse des R&amp;D (+12% YoY) grâce au levier opérationnel sur les services. Ces niveaux reflètent un pouvoir de pricing exceptionnel et une discipline de coût historique, soutenant la durabilité des marges à 27%+.</a:t>
             </a:r>
           </a:p>
         </p:txBody>
@@ -9480,7 +9480,7 @@
                 </a:solidFill>
                 <a:latin typeface="Calibri"/>
               </a:rPr>
-              <a:t>WACC 10.4% et TGR 3.0% impliquent un prix implicite DCF à 275 USD vs cours à 248.8 USD (+10.5%). Upside limité par prime de croissance déjà partiellement pricee. Catalyseur clé : accélération services &gt;15% YoY pour justifier re-rating.</a:t>
+              <a:t>WACC 10.4% et TGR 3.0% impliquent un prix implicite DCF de 295$ vs cours de 248.8$, soit un upside de 19%. La prime actuelle de 32.6x P/E vs 28x peers suggère une croissance déjà partiellement pricee, mais les catalyseurs (IA, services) pourraient justifier une revalorisation. Un déclenchement de l'upside nécessiterait une accélération des revenus services &gt;20% ou une compression des coûts R&amp;D.</a:t>
             </a:r>
           </a:p>
         </p:txBody>
@@ -10567,7 +10567,7 @@
                           </a:solidFill>
                           <a:latin typeface="Calibri"/>
                         </a:rPr>
-                        <a:t>22,5x</a:t>
+                        <a:t>22,1x</a:t>
                       </a:r>
                     </a:p>
                   </a:txBody>
@@ -10590,7 +10590,7 @@
                           </a:solidFill>
                           <a:latin typeface="Calibri"/>
                         </a:rPr>
-                        <a:t>12,8x</a:t>
+                        <a:t>11,8x</a:t>
                       </a:r>
                     </a:p>
                   </a:txBody>
@@ -10613,7 +10613,7 @@
                           </a:solidFill>
                           <a:latin typeface="Calibri"/>
                         </a:rPr>
-                        <a:t>38,2x</a:t>
+                        <a:t>36,5x</a:t>
                       </a:r>
                     </a:p>
                   </a:txBody>
@@ -10636,7 +10636,7 @@
                           </a:solidFill>
                           <a:latin typeface="Calibri"/>
                         </a:rPr>
-                        <a:t>6800,0 %</a:t>
+                        <a:t>68,0 %</a:t>
                       </a:r>
                     </a:p>
                   </a:txBody>
@@ -10659,7 +10659,7 @@
                           </a:solidFill>
                           <a:latin typeface="Calibri"/>
                         </a:rPr>
-                        <a:t>5200,0 %</a:t>
+                        <a:t>48,0 %</a:t>
                       </a:r>
                     </a:p>
                   </a:txBody>
@@ -10684,7 +10684,7 @@
                           </a:solidFill>
                           <a:latin typeface="Calibri"/>
                         </a:rPr>
-                        <a:t>Alphabet</a:t>
+                        <a:t>Samsung Electronics</a:t>
                       </a:r>
                     </a:p>
                   </a:txBody>
@@ -10707,7 +10707,7 @@
                           </a:solidFill>
                           <a:latin typeface="Calibri"/>
                         </a:rPr>
-                        <a:t>GOOGL</a:t>
+                        <a:t>005930.KS</a:t>
                       </a:r>
                     </a:p>
                   </a:txBody>
@@ -10730,7 +10730,7 @@
                           </a:solidFill>
                           <a:latin typeface="Calibri"/>
                         </a:rPr>
-                        <a:t>2 100,0</a:t>
+                        <a:t>450,0</a:t>
                       </a:r>
                     </a:p>
                   </a:txBody>
@@ -10753,7 +10753,7 @@
                           </a:solidFill>
                           <a:latin typeface="Calibri"/>
                         </a:rPr>
-                        <a:t>20,1x</a:t>
+                        <a:t>8,2x</a:t>
                       </a:r>
                     </a:p>
                   </a:txBody>
@@ -10776,7 +10776,7 @@
                           </a:solidFill>
                           <a:latin typeface="Calibri"/>
                         </a:rPr>
-                        <a:t>7,5x</a:t>
+                        <a:t>1,2x</a:t>
                       </a:r>
                     </a:p>
                   </a:txBody>
@@ -10799,7 +10799,7 @@
                           </a:solidFill>
                           <a:latin typeface="Calibri"/>
                         </a:rPr>
-                        <a:t>26,5x</a:t>
+                        <a:t>12,5x</a:t>
                       </a:r>
                     </a:p>
                   </a:txBody>
@@ -10822,7 +10822,7 @@
                           </a:solidFill>
                           <a:latin typeface="Calibri"/>
                         </a:rPr>
-                        <a:t>5600,0 %</a:t>
+                        <a:t>45,0 %</a:t>
                       </a:r>
                     </a:p>
                   </a:txBody>
@@ -10845,7 +10845,7 @@
                           </a:solidFill>
                           <a:latin typeface="Calibri"/>
                         </a:rPr>
-                        <a:t>3500,0 %</a:t>
+                        <a:t>22,0 %</a:t>
                       </a:r>
                     </a:p>
                   </a:txBody>
@@ -10870,7 +10870,7 @@
                           </a:solidFill>
                           <a:latin typeface="Calibri"/>
                         </a:rPr>
-                        <a:t>Samsung Electronics</a:t>
+                        <a:t>Alphabet</a:t>
                       </a:r>
                     </a:p>
                   </a:txBody>
@@ -10893,7 +10893,7 @@
                           </a:solidFill>
                           <a:latin typeface="Calibri"/>
                         </a:rPr>
-                        <a:t>005930.KS</a:t>
+                        <a:t>GOOGL</a:t>
                       </a:r>
                     </a:p>
                   </a:txBody>
@@ -10916,7 +10916,7 @@
                           </a:solidFill>
                           <a:latin typeface="Calibri"/>
                         </a:rPr>
-                        <a:t>450,0</a:t>
+                        <a:t>2 100,0</a:t>
                       </a:r>
                     </a:p>
                   </a:txBody>
@@ -10939,7 +10939,7 @@
                           </a:solidFill>
                           <a:latin typeface="Calibri"/>
                         </a:rPr>
-                        <a:t>7,2x</a:t>
+                        <a:t>20,5x</a:t>
                       </a:r>
                     </a:p>
                   </a:txBody>
@@ -10962,7 +10962,7 @@
                           </a:solidFill>
                           <a:latin typeface="Calibri"/>
                         </a:rPr>
-                        <a:t>1,2x</a:t>
+                        <a:t>8,5x</a:t>
                       </a:r>
                     </a:p>
                   </a:txBody>
@@ -10985,7 +10985,7 @@
                           </a:solidFill>
                           <a:latin typeface="Calibri"/>
                         </a:rPr>
-                        <a:t>12,5x</a:t>
+                        <a:t>28,0x</a:t>
                       </a:r>
                     </a:p>
                   </a:txBody>
@@ -11008,7 +11008,7 @@
                           </a:solidFill>
                           <a:latin typeface="Calibri"/>
                         </a:rPr>
-                        <a:t>4500,0 %</a:t>
+                        <a:t>56,0 %</a:t>
                       </a:r>
                     </a:p>
                   </a:txBody>
@@ -11031,7 +11031,7 @@
                           </a:solidFill>
                           <a:latin typeface="Calibri"/>
                         </a:rPr>
-                        <a:t>2200,0 %</a:t>
+                        <a:t>38,0 %</a:t>
                       </a:r>
                     </a:p>
                   </a:txBody>
@@ -11125,7 +11125,7 @@
                           </a:solidFill>
                           <a:latin typeface="Calibri"/>
                         </a:rPr>
-                        <a:t>18,5x</a:t>
+                        <a:t>18,0x</a:t>
                       </a:r>
                     </a:p>
                   </a:txBody>
@@ -11171,7 +11171,7 @@
                           </a:solidFill>
                           <a:latin typeface="Calibri"/>
                         </a:rPr>
-                        <a:t>30,1x</a:t>
+                        <a:t>30,0x</a:t>
                       </a:r>
                     </a:p>
                   </a:txBody>
@@ -11194,7 +11194,7 @@
                           </a:solidFill>
                           <a:latin typeface="Calibri"/>
                         </a:rPr>
-                        <a:t>8500,0 %</a:t>
+                        <a:t>85,0 %</a:t>
                       </a:r>
                     </a:p>
                   </a:txBody>
@@ -11217,7 +11217,7 @@
                           </a:solidFill>
                           <a:latin typeface="Calibri"/>
                         </a:rPr>
-                        <a:t>5500,0 %</a:t>
+                        <a:t>55,0 %</a:t>
                       </a:r>
                     </a:p>
                   </a:txBody>
@@ -11242,7 +11242,7 @@
                           </a:solidFill>
                           <a:latin typeface="Calibri"/>
                         </a:rPr>
-                        <a:t>NVIDIA</a:t>
+                        <a:t>TSMC</a:t>
                       </a:r>
                     </a:p>
                   </a:txBody>
@@ -11265,7 +11265,7 @@
                           </a:solidFill>
                           <a:latin typeface="Calibri"/>
                         </a:rPr>
-                        <a:t>NVDA</a:t>
+                        <a:t>TSM</a:t>
                       </a:r>
                     </a:p>
                   </a:txBody>
@@ -11288,7 +11288,7 @@
                           </a:solidFill>
                           <a:latin typeface="Calibri"/>
                         </a:rPr>
-                        <a:t>2 400,0</a:t>
+                        <a:t>600,0</a:t>
                       </a:r>
                     </a:p>
                   </a:txBody>
@@ -11311,7 +11311,7 @@
                           </a:solidFill>
                           <a:latin typeface="Calibri"/>
                         </a:rPr>
-                        <a:t>55,0x</a:t>
+                        <a:t>15,0x</a:t>
                       </a:r>
                     </a:p>
                   </a:txBody>
@@ -11334,7 +11334,7 @@
                           </a:solidFill>
                           <a:latin typeface="Calibri"/>
                         </a:rPr>
-                        <a:t>28,0x</a:t>
+                        <a:t>9,5x</a:t>
                       </a:r>
                     </a:p>
                   </a:txBody>
@@ -11357,7 +11357,7 @@
                           </a:solidFill>
                           <a:latin typeface="Calibri"/>
                         </a:rPr>
-                        <a:t>45,0x</a:t>
+                        <a:t>22,0x</a:t>
                       </a:r>
                     </a:p>
                   </a:txBody>
@@ -11380,7 +11380,7 @@
                           </a:solidFill>
                           <a:latin typeface="Calibri"/>
                         </a:rPr>
-                        <a:t>7800,0 %</a:t>
+                        <a:t>52,0 %</a:t>
                       </a:r>
                     </a:p>
                   </a:txBody>
@@ -11403,7 +11403,7 @@
                           </a:solidFill>
                           <a:latin typeface="Calibri"/>
                         </a:rPr>
-                        <a:t>7000,0 %</a:t>
+                        <a:t>45,0 %</a:t>
                       </a:r>
                     </a:p>
                   </a:txBody>
@@ -11497,7 +11497,7 @@
                           </a:solidFill>
                           <a:latin typeface="Calibri"/>
                         </a:rPr>
-                        <a:t>20,1x</a:t>
+                        <a:t>18,0x</a:t>
                       </a:r>
                     </a:p>
                   </a:txBody>
@@ -11520,7 +11520,7 @@
                           </a:solidFill>
                           <a:latin typeface="Calibri"/>
                         </a:rPr>
-                        <a:t>10,5x</a:t>
+                        <a:t>9,5x</a:t>
                       </a:r>
                     </a:p>
                   </a:txBody>
@@ -11543,7 +11543,7 @@
                           </a:solidFill>
                           <a:latin typeface="Calibri"/>
                         </a:rPr>
-                        <a:t>30,1x</a:t>
+                        <a:t>28,0x</a:t>
                       </a:r>
                     </a:p>
                   </a:txBody>
@@ -11566,7 +11566,7 @@
                           </a:solidFill>
                           <a:latin typeface="Calibri"/>
                         </a:rPr>
-                        <a:t>6800,0 %</a:t>
+                        <a:t>56,0 %</a:t>
                       </a:r>
                     </a:p>
                   </a:txBody>
@@ -11589,7 +11589,7 @@
                           </a:solidFill>
                           <a:latin typeface="Calibri"/>
                         </a:rPr>
-                        <a:t>5200,0 %</a:t>
+                        <a:t>45,0 %</a:t>
                       </a:r>
                     </a:p>
                   </a:txBody>
@@ -11634,7 +11634,7 @@
                 </a:solidFill>
                 <a:latin typeface="Calibri"/>
               </a:rPr>
-              <a:t>Apple affiche un P/E 32.6x vs mediane peers 27x (+20%), justifié par ROIC 84.4% vs 30% pour peers. EV/EBITDA 25.7x vs 18x peers (+43%) reflète qualité des actifs. Convergence vers mediane peers impliquerait un downside de 15% sur multiples, mais improbable sans choc opérationnel.</a:t>
+              <a:t>Apple se trade à +25% vs mediane peers (EV/EBITDA 21x) et +15% vs Microsoft (EV/EBITDA 22x). La prime est justifiée par une croissance organique supérieure (+8% vs +6% peers) et une marge nette de 27% vs 22% pour Samsung. Une convergence vers la médiane impliquerait un downside de 10%, mais la prime semble durable compte tenu de l'écosystème intégré et de la diversification des revenus.</a:t>
             </a:r>
           </a:p>
         </p:txBody>
@@ -12292,7 +12292,7 @@
                 </a:solidFill>
                 <a:latin typeface="Calibri"/>
               </a:rPr>
-              <a:t>WACC 10.4% et TGR 3.0% impliquent un prix implicite DCF à 275 USD vs cours à 248.8 USD (+10.5%). Upside limité par prime de croissance déjà partiellement pricee. Catalyseur clé : accélération services &gt;15% YoY pour justifier re-rating.</a:t>
+              <a:t>WACC 10.4% et TGR 3.0% impliquent un prix implicite DCF de 295$ vs cours de 248.8$, soit un upside de 19%. La prime actuelle de 32.6x P/E vs 28x peers suggère une croissance déjà partiellement pricee, mais les catalyseurs (IA, services) pourraient justifier une revalorisation. Un déclenchement de l'upside nécessiterait une accélération des revenus services &gt;20% ou une compression des coûts R&amp;D.</a:t>
             </a:r>
           </a:p>
         </p:txBody>
@@ -13300,7 +13300,7 @@
                 </a:solidFill>
                 <a:latin typeface="Calibri"/>
               </a:rPr>
-              <a:t>Le P/E à 32.61x dépasse de 50% la moyenne historique du S&amp;P 500 (21x) et de 25% celle des géants tech (26x), suggérant une surévaluation déjà intégrée dans les marges actuelles. Les 151.9% de ROE reposent sur un écosystème captif, mais la guerre tarifaire en Chine pourrait réduire les marges iPhone de 5 à 3 points d'ici 2026.</a:t>
+              <a:t>Le P/E à 32.61x surpasse de 50% la moyenne sectorielle (21.8x) malgré une croissance des revenus limitée à 6.4% en 2025, signalant une surévaluation évidente. Les marges brutes de 46.9% reposent sur un écosystème captif dont la saturation du marché des smartphones limite toute expansion future. Le ROE à 151.9% masque une rentabilité artificiellement gonflée par les rachats d'actions plutôt que par une croissance organique durable.</a:t>
             </a:r>
           </a:p>
         </p:txBody>
@@ -13421,7 +13421,7 @@
                 </a:solidFill>
                 <a:latin typeface="Calibri"/>
               </a:rPr>
-              <a:t>Risque Chine</a:t>
+              <a:t>Dépendance Chine</a:t>
             </a:r>
           </a:p>
         </p:txBody>
@@ -13456,7 +13456,7 @@
                 </a:solidFill>
                 <a:latin typeface="Calibri"/>
               </a:rPr>
-              <a:t>La trésorerie nette de 165 milliards cache 90% d'actifs non liquides (investissements long terme), limitant la flexibilité face à une crise de liquidité. L'EV/EBITDA à 25.67x est 30% plus élevé que Microsoft (19.8x), malgré une croissance des revenus inférieure de 40%.</a:t>
+              <a:t>Les tensions géopolitiques en Chine, représentant 19% du CA, pourraient réduire les ventes de 12% à 15% en cas de restrictions, impactant directement le P/E déjà élevé. La dépendance à l'iPhone, générant 52% des revenus, expose Apple à un risque de substitution par des alternatives moins chères, notamment en Inde où les parts de marché chutent de 3% par an. Les coûts de R&amp;D en hausse de 8% par an depuis 2020 n'ont pas encore produit d'innovations disruptives capables de…</a:t>
             </a:r>
           </a:p>
         </p:txBody>
@@ -13577,7 +13577,7 @@
                 </a:solidFill>
                 <a:latin typeface="Calibri"/>
               </a:rPr>
-              <a:t>Marges services</a:t>
+              <a:t>Innovation insuffisante</a:t>
             </a:r>
           </a:p>
         </p:txBody>
@@ -13612,7 +13612,7 @@
                 </a:solidFill>
                 <a:latin typeface="Calibri"/>
               </a:rPr>
-              <a:t>Le pricing power d'Apple s'érode avec un iPhone 15 Pro à 1 200€, soit +15% vs 2023, risquant une baisse de volume de 8% en Asie selon Counterpoint Research. Les marges brutes à 46.9% sont artificiellement gonflées par les services, dont la croissance ralentit à 12% en 2024 contre 18% en 2023.</a:t>
+              <a:t>Le ratio EV/EBITDA à 25.67x dépasse de 35% celui de Microsoft (18.9x), malgré une diversification moindre. La dette nette/EBITDA à 0.43x est un leurre, car 68% de la trésorerie est bloquée hors des États-Unis, limitant sa flexibilité financière. Les marges nettes de 26.9% pourraient chuter à 20% si les régulateurs américains imposent des amendes pour pratiques anticoncurrentielles, comme le suggère la récente enquête de la FTC.</a:t>
             </a:r>
           </a:p>
         </p:txBody>
@@ -13826,7 +13826,7 @@
                           </a:solidFill>
                           <a:latin typeface="Calibri"/>
                         </a:rPr>
-                        <a:t>Récession mondiale avec -3% PIB US/UE en 2026</a:t>
+                        <a:t>Récession mondiale avec baisse de 15% des dépenses tech des consommateurs</a:t>
                       </a:r>
                     </a:p>
                   </a:txBody>
@@ -13897,7 +13897,7 @@
                           </a:solidFill>
                           <a:latin typeface="Calibri"/>
                         </a:rPr>
-                        <a:t>Régulation stricte sur commissions App Store en UE/US</a:t>
+                        <a:t>Régulation stricte de l'IA générative limitant les fonctionnalités premium des services Apple</a:t>
                       </a:r>
                     </a:p>
                   </a:txBody>
@@ -13968,7 +13968,7 @@
                           </a:solidFill>
                           <a:latin typeface="Calibri"/>
                         </a:rPr>
-                        <a:t>Baisse CA iPhone &gt;10% en Chine Q3 2026</a:t>
+                        <a:t>Échec du lancement de l'iPhone 17 avec baisse de part de marché en Chine sous 15%</a:t>
                       </a:r>
                     </a:p>
                   </a:txBody>
@@ -15858,7 +15858,7 @@
                           </a:solidFill>
                           <a:latin typeface="Calibri"/>
                         </a:rPr>
-                        <a:t>Services en croissance à +15% YoY avec 2Md utilisateurs actifs d'ici 2027, boostant marge brute à 49% | Horizon 2026-2027</a:t>
+                        <a:t>Expansion des services cloud à +20% YoY d'ici 2027, avec une marge EBITDA cible de 75% via l'augmentation des abonnements tiers | Horizon 2026-2027</a:t>
                       </a:r>
                     </a:p>
                   </a:txBody>
@@ -16046,7 +16046,7 @@
                           </a:solidFill>
                           <a:latin typeface="Calibri"/>
                         </a:rPr>
-                        <a:t>Régulation européenne sur App Store (-10% revenus 2026) impactant marge services de 3pp | Horizon 2026-2027</a:t>
+                        <a:t>Régulation européenne sur l'App Store réduisant les commissions de 30% à 15% d'ici 2027, impactant les revenus services de -12% | Horizon 2026-2027</a:t>
                       </a:r>
                     </a:p>
                   </a:txBody>
@@ -16091,7 +16091,7 @@
                 </a:solidFill>
                 <a:latin typeface="Calibri"/>
               </a:rPr>
-              <a:t>La presse financière souligne les défis majeurs d'Apple face à l'IA et à la concurrence, tout en mettant en avant ses initiatives stratégiques comme l'ouverture de Siri. Les annonces positives sur les innovations et la gestion des talents sont contrebalancées par des risques structurels et des prédictions pessimistes.</a:t>
+              <a:t>La presse financière souligne les défis d'Apple face à l'IA et à la concurrence, tout en saluant ses initiatives stratégiques comme l'ouverture de Siri. Les annonces sur les bonus et l'innovation sont perçues positivement, mais les prédictions de déclin relatif pèsent sur le sentiment.</a:t>
             </a:r>
           </a:p>
         </p:txBody>
@@ -19029,7 +19029,7 @@
                 </a:solidFill>
                 <a:latin typeface="Calibri"/>
               </a:rPr>
-              <a:t>Prime de 20% vs mediane peers sur P/E (32.6x vs 27x) justifiée par qualité des actifs. EV/EBITDA à 25.7x reste raisonnable vs croissance attendue.</a:t>
+              <a:t>Prime de 20% vs mediane peers (EV/EBITDA 21x) justifiée par la qualité des actifs et la croissance des services. Décote de 15% sur P/E vs Microsoft reflète une croissance plus volatile mais mieux diversifiée.</a:t>
             </a:r>
           </a:p>
         </p:txBody>
@@ -19550,7 +19550,7 @@
                 </a:solidFill>
                 <a:latin typeface="Calibri"/>
               </a:rPr>
-              <a:t>Croissance services à +12% YoY avec 1.8Md utilisateurs actifs d'ici 2027</a:t>
+              <a:t>Croissance des services à +15% YoY d'ici 2027 grâce à l'expansion des abonnements tiers et à l'augmentation des prix des commissions</a:t>
             </a:r>
           </a:p>
         </p:txBody>
@@ -19663,7 +19663,7 @@
                 </a:solidFill>
                 <a:latin typeface="Calibri"/>
               </a:rPr>
-              <a:t>Marge brute stable à 47% grâce au mix services et pricing power sur iPhone 16</a:t>
+              <a:t>Marges nettes soutenues à 27% via le mix services (70% EBITDA) et la réduction des coûts logistiques sur l'iPhone</a:t>
             </a:r>
           </a:p>
         </p:txBody>
@@ -19741,7 +19741,7 @@
                 </a:solidFill>
                 <a:latin typeface="Calibri"/>
               </a:rPr>
-              <a:t>Trésorerie massive</a:t>
+              <a:t>Cash generation</a:t>
             </a:r>
           </a:p>
         </p:txBody>
@@ -19776,7 +19776,7 @@
                 </a:solidFill>
                 <a:latin typeface="Calibri"/>
               </a:rPr>
-              <a:t>ROIC de 84.4% soutenu par discipline opérationnelle et trésorerie de 166Md USD</a:t>
+              <a:t>Valorisation à 28x P/E justifiée par un ROIC de 84% et une croissance organique supérieure aux peers technologiques</a:t>
             </a:r>
           </a:p>
         </p:txBody>
@@ -19932,7 +19932,7 @@
                 </a:solidFill>
                 <a:latin typeface="Calibri"/>
               </a:rPr>
-              <a:t>Dépendance iPhone</a:t>
+              <a:t>Régulation App Store</a:t>
             </a:r>
           </a:p>
         </p:txBody>
@@ -19967,7 +19967,7 @@
                 </a:solidFill>
                 <a:latin typeface="Calibri"/>
               </a:rPr>
-              <a:t>Régulation européenne sur App Store (-10% revenus 2026) impactant marge services de 3pp | Horizon 2026-2027</a:t>
+              <a:t>Régulation européenne sur l'App Store réduisant les commissions de 30% à 15% d'ici 2027, impactant les revenus services de -12% | Horizon 2026-2027</a:t>
             </a:r>
           </a:p>
         </p:txBody>
@@ -20024,119 +20024,6 @@
         <p:spPr>
           <a:xfrm>
             <a:off x="4845600" y="2178000"/>
-            <a:ext cx="3794399" cy="183600"/>
-          </a:xfrm>
-          <a:prstGeom prst="rect">
-            <a:avLst/>
-          </a:prstGeom>
-          <a:noFill/>
-        </p:spPr>
-        <p:txBody>
-          <a:bodyPr wrap="square">
-            <a:spAutoFit/>
-          </a:bodyPr>
-          <a:lstStyle/>
-          <a:p>
-            <a:pPr algn="l"/>
-            <a:r>
-              <a:rPr sz="850" b="1" i="0">
-                <a:solidFill>
-                  <a:srgbClr val="1B3A6B"/>
-                </a:solidFill>
-                <a:latin typeface="Calibri"/>
-              </a:rPr>
-              <a:t>Régulation</a:t>
-            </a:r>
-          </a:p>
-        </p:txBody>
-      </p:sp>
-      <p:sp>
-        <p:nvSpPr>
-          <p:cNvPr id="28" name="TextBox 27"/>
-          <p:cNvSpPr txBox="1"/>
-          <p:nvPr/>
-        </p:nvSpPr>
-        <p:spPr>
-          <a:xfrm>
-            <a:off x="4845600" y="2347200"/>
-            <a:ext cx="3794399" cy="327600"/>
-          </a:xfrm>
-          <a:prstGeom prst="rect">
-            <a:avLst/>
-          </a:prstGeom>
-          <a:noFill/>
-        </p:spPr>
-        <p:txBody>
-          <a:bodyPr wrap="square">
-            <a:spAutoFit/>
-          </a:bodyPr>
-          <a:lstStyle/>
-          <a:p>
-            <a:pPr algn="l"/>
-            <a:r>
-              <a:rPr sz="750" b="0" i="0">
-                <a:solidFill>
-                  <a:srgbClr val="333333"/>
-                </a:solidFill>
-                <a:latin typeface="Calibri"/>
-              </a:rPr>
-              <a:t>Concurrence accrue en IA (Google, Microsoft) réduisant différenciation iPhone | Horizon 2026</a:t>
-            </a:r>
-          </a:p>
-        </p:txBody>
-      </p:sp>
-      <p:sp>
-        <p:nvSpPr>
-          <p:cNvPr id="29" name="Rectangle 28"/>
-          <p:cNvSpPr/>
-          <p:nvPr/>
-        </p:nvSpPr>
-        <p:spPr>
-          <a:xfrm>
-            <a:off x="4708800" y="2728800"/>
-            <a:ext cx="54000" cy="129600"/>
-          </a:xfrm>
-          <a:prstGeom prst="rect">
-            <a:avLst/>
-          </a:prstGeom>
-          <a:solidFill>
-            <a:srgbClr val="A82020"/>
-          </a:solidFill>
-          <a:ln>
-            <a:noFill/>
-          </a:ln>
-        </p:spPr>
-        <p:style>
-          <a:lnRef idx="1">
-            <a:schemeClr val="accent1"/>
-          </a:lnRef>
-          <a:fillRef idx="3">
-            <a:schemeClr val="accent1"/>
-          </a:fillRef>
-          <a:effectRef idx="2">
-            <a:schemeClr val="accent1"/>
-          </a:effectRef>
-          <a:fontRef idx="minor">
-            <a:schemeClr val="lt1"/>
-          </a:fontRef>
-        </p:style>
-        <p:txBody>
-          <a:bodyPr rtlCol="0" anchor="ctr"/>
-          <a:lstStyle/>
-          <a:p>
-            <a:pPr algn="ctr"/>
-          </a:p>
-        </p:txBody>
-      </p:sp>
-      <p:sp>
-        <p:nvSpPr>
-          <p:cNvPr id="30" name="TextBox 29"/>
-          <p:cNvSpPr txBox="1"/>
-          <p:nvPr/>
-        </p:nvSpPr>
-        <p:spPr>
-          <a:xfrm>
-            <a:off x="4845600" y="2710800"/>
             <a:ext cx="3794399" cy="183600"/>
           </a:xfrm>
           <a:prstGeom prst="rect">
@@ -20165,13 +20052,13 @@
       </p:sp>
       <p:sp>
         <p:nvSpPr>
-          <p:cNvPr id="31" name="TextBox 30"/>
+          <p:cNvPr id="28" name="TextBox 27"/>
           <p:cNvSpPr txBox="1"/>
           <p:nvPr/>
         </p:nvSpPr>
         <p:spPr>
           <a:xfrm>
-            <a:off x="4845600" y="2880000"/>
+            <a:off x="4845600" y="2347200"/>
             <a:ext cx="3794399" cy="327600"/>
           </a:xfrm>
           <a:prstGeom prst="rect">
@@ -20193,7 +20080,120 @@
                 </a:solidFill>
                 <a:latin typeface="Calibri"/>
               </a:rPr>
-              <a:t>Ralentissement économique en Chine (-5% CA iPhone 2026) affectant croissance globale | Horizon 2026</a:t>
+              <a:t>Concurrence accrue en IA (Google, Meta) avec une perte de part de marché sur les services cloud (-8% CA d'ici 2027) | Horizon 2026</a:t>
+            </a:r>
+          </a:p>
+        </p:txBody>
+      </p:sp>
+      <p:sp>
+        <p:nvSpPr>
+          <p:cNvPr id="29" name="Rectangle 28"/>
+          <p:cNvSpPr/>
+          <p:nvPr/>
+        </p:nvSpPr>
+        <p:spPr>
+          <a:xfrm>
+            <a:off x="4708800" y="2728800"/>
+            <a:ext cx="54000" cy="129600"/>
+          </a:xfrm>
+          <a:prstGeom prst="rect">
+            <a:avLst/>
+          </a:prstGeom>
+          <a:solidFill>
+            <a:srgbClr val="A82020"/>
+          </a:solidFill>
+          <a:ln>
+            <a:noFill/>
+          </a:ln>
+        </p:spPr>
+        <p:style>
+          <a:lnRef idx="1">
+            <a:schemeClr val="accent1"/>
+          </a:lnRef>
+          <a:fillRef idx="3">
+            <a:schemeClr val="accent1"/>
+          </a:fillRef>
+          <a:effectRef idx="2">
+            <a:schemeClr val="accent1"/>
+          </a:effectRef>
+          <a:fontRef idx="minor">
+            <a:schemeClr val="lt1"/>
+          </a:fontRef>
+        </p:style>
+        <p:txBody>
+          <a:bodyPr rtlCol="0" anchor="ctr"/>
+          <a:lstStyle/>
+          <a:p>
+            <a:pPr algn="ctr"/>
+          </a:p>
+        </p:txBody>
+      </p:sp>
+      <p:sp>
+        <p:nvSpPr>
+          <p:cNvPr id="30" name="TextBox 29"/>
+          <p:cNvSpPr txBox="1"/>
+          <p:nvPr/>
+        </p:nvSpPr>
+        <p:spPr>
+          <a:xfrm>
+            <a:off x="4845600" y="2710800"/>
+            <a:ext cx="3794399" cy="183600"/>
+          </a:xfrm>
+          <a:prstGeom prst="rect">
+            <a:avLst/>
+          </a:prstGeom>
+          <a:noFill/>
+        </p:spPr>
+        <p:txBody>
+          <a:bodyPr wrap="square">
+            <a:spAutoFit/>
+          </a:bodyPr>
+          <a:lstStyle/>
+          <a:p>
+            <a:pPr algn="l"/>
+            <a:r>
+              <a:rPr sz="850" b="1" i="0">
+                <a:solidFill>
+                  <a:srgbClr val="1B3A6B"/>
+                </a:solidFill>
+                <a:latin typeface="Calibri"/>
+              </a:rPr>
+              <a:t>Dépendance iPhone</a:t>
+            </a:r>
+          </a:p>
+        </p:txBody>
+      </p:sp>
+      <p:sp>
+        <p:nvSpPr>
+          <p:cNvPr id="31" name="TextBox 30"/>
+          <p:cNvSpPr txBox="1"/>
+          <p:nvPr/>
+        </p:nvSpPr>
+        <p:spPr>
+          <a:xfrm>
+            <a:off x="4845600" y="2880000"/>
+            <a:ext cx="3794399" cy="327600"/>
+          </a:xfrm>
+          <a:prstGeom prst="rect">
+            <a:avLst/>
+          </a:prstGeom>
+          <a:noFill/>
+        </p:spPr>
+        <p:txBody>
+          <a:bodyPr wrap="square">
+            <a:spAutoFit/>
+          </a:bodyPr>
+          <a:lstStyle/>
+          <a:p>
+            <a:pPr algn="l"/>
+            <a:r>
+              <a:rPr sz="750" b="0" i="0">
+                <a:solidFill>
+                  <a:srgbClr val="333333"/>
+                </a:solidFill>
+                <a:latin typeface="Calibri"/>
+              </a:rPr>
+              <a:t>Ralentissement économique en Chine (-5% croissance iPhone en 2026) et dépréciation du yuan de -10% impactant les marges de 200bps | Horizon 2026</a:t>
             </a:r>
           </a:p>
         </p:txBody>
@@ -20470,7 +20470,7 @@
                 </a:solidFill>
                 <a:latin typeface="Calibri"/>
               </a:rPr>
-              <a:t>vs 20,1x médiane peers</a:t>
+              <a:t>vs 18,0x médiane peers</a:t>
             </a:r>
           </a:p>
         </p:txBody>
@@ -23672,7 +23672,7 @@
                 </a:solidFill>
                 <a:latin typeface="Calibri"/>
               </a:rPr>
-              <a:t>Apple affiche une résilience opérationnelle exceptionnelle avec des marges nettes à 26.9% et un ROIC de 84.4%. La valorisation reste attractive malgré une prime modérée vs peers technologiques.</a:t>
+              <a:t>Apple affiche une résilience opérationnelle exceptionnelle avec des marges nettes à 26.9% et un ROE de 151.9%. La valorisation reste attractive malgré une prime modérée vs peers, soutenue par une génération de cash robuste et un écosystème intégré unique.</a:t>
             </a:r>
           </a:p>
         </p:txBody>
@@ -24715,7 +24715,7 @@
                 </a:solidFill>
                 <a:latin typeface="Calibri"/>
               </a:rPr>
-              <a:t>Dépendance iPhone  ·  Régulation</a:t>
+              <a:t>Régulation App Store  ·  Concurrence IA</a:t>
             </a:r>
           </a:p>
         </p:txBody>
@@ -25949,7 +25949,7 @@
                 </a:solidFill>
                 <a:latin typeface="Calibri"/>
               </a:rPr>
-              <a:t>Apple conçoit et commercialise des produits technologiques premium (iPhone, Mac, iPad, services) avec un écosystème intégré. Positionné en leader sur l'innovation et l'expérience utilisateur, l'entreprise bénéficie d'une fidélisation client élevée et d'une marge de pricing power forte. Son modèle hybride (hardware + services) génère des revenus récurrents et une rentabilité durable. L'entreprise articule son activité autour de deux segments stratégiques :</a:t>
+              <a:t>Apple conçoit et commercialise des produits technologiques premium (iPhone, Mac, iPad, services) avec un positionnement haut de gamme axé sur l'expérience utilisateur et l'écosystème fermé. Leader sur le segment premium des smartphones (20% de part de marché mondiale) et des services (25% de marge EBITDA). Avantages concurrentiels : intégration verticale, fidélisation client via l'Apple ID, et pouvoir de pricing exceptionnel avec des marges brutes à 46.9%. L'entreprise articule son activité autour de deux segments stratégiques :</a:t>
             </a:r>
           </a:p>
         </p:txBody>
@@ -26062,7 +26062,7 @@
                 </a:solidFill>
                 <a:latin typeface="Calibri"/>
               </a:rPr>
-              <a:t>Ventes de matériel (iPhone 60% du CA, Mac, iPad, wearables) avec une stratégie premium et un cycle de renouvellement annuel. Clients B2C et B2B avec une forte dépendance à l'iPhone malgré diversification. Marges élevées (GM ~35%) mais sensibles aux coûts de supply chain et à la demande asiatique. Croissance portée par l'Asie et les services associés.</a:t>
+              <a:t>Ventes de matériel (iPhone 60%, Mac 10%, iPad 8%, Wearables 10%) avec modèle basé sur des cycles de renouvellement de 3-4 ans et une stratégie de prix premium. Clients : consommateurs haut de gamme et entreprises via programmes BYOD. Croissance tirée par l'innovation (puces M-series) et l'expansion géographique en Asie.</a:t>
             </a:r>
           </a:p>
         </p:txBody>
@@ -26175,7 +26175,7 @@
                 </a:solidFill>
                 <a:latin typeface="Calibri"/>
               </a:rPr>
-              <a:t>Abonnements (Apple Music, iCloud, App Store) et contenus avec GM &gt;70%. Modèle récurrent et à forte rentabilité, moins cyclique que le hardware. Croissance tirée par +1.5Md utilisateurs actifs et expansion géographique. Partenariats avec développeurs et régulation favorable sur commissions App Store.</a:t>
+              <a:t>Abonnements (Apple Music, iCloud, App Store, Apple TV+) générant des revenus récurrents (20% du CA total) avec une marge EBITDA de 70%. Modèle basé sur des commissions (30% standard) et des abonnements tiers. Clients : base installée de 1.5 milliard d'appareils actifs. Croissance portée par les services cloud et la publicité (Search Ads).</a:t>
             </a:r>
           </a:p>
         </p:txBody>
@@ -27554,7 +27554,7 @@
                 </a:solidFill>
                 <a:latin typeface="Calibri"/>
               </a:rPr>
-              <a:t>60%</a:t>
+              <a:t>88%</a:t>
             </a:r>
           </a:p>
         </p:txBody>
@@ -27702,7 +27702,7 @@
                 </a:solidFill>
                 <a:latin typeface="Calibri"/>
               </a:rPr>
-              <a:t>Ventes de matériel (iPhone 60% du CA, Mac, iPad, wearables) avec une stratégie premium et un cycle de renouvellement annuel. Clients B2C et B2B avec une forte dépendance à l'iPhone malgré diversification. Marges élevées (GM ~35%) mais sensibles aux coûts de supply chain et à la demande asiatique. Croissance portée par l'Asie et les services associés.</a:t>
+              <a:t>Ventes de matériel (iPhone 60%, Mac 10%, iPad 8%, Wearables 10%) avec modèle basé sur des cycles de renouvellement de 3-4 ans et une stratégie de prix premium. Clients : consommateurs haut de gamme et entreprises via programmes BYOD. Croissance tirée par l'innovation (puces M-series) et l'expansion géographique en Asie.</a:t>
             </a:r>
           </a:p>
         </p:txBody>
@@ -27823,7 +27823,7 @@
                 </a:solidFill>
                 <a:latin typeface="Calibri"/>
               </a:rPr>
-              <a:t>22%</a:t>
+              <a:t>12%</a:t>
             </a:r>
           </a:p>
         </p:txBody>
@@ -27971,7 +27971,7 @@
                 </a:solidFill>
                 <a:latin typeface="Calibri"/>
               </a:rPr>
-              <a:t>Abonnements (Apple Music, iCloud, App Store) et contenus avec GM &gt;70%. Modèle récurrent et à forte rentabilité, moins cyclique que le hardware. Croissance tirée par +1.5Md utilisateurs actifs et expansion géographique. Partenariats avec développeurs et régulation favorable sur commissions App Store.</a:t>
+              <a:t>Abonnements (Apple Music, iCloud, App Store, Apple TV+) générant des revenus récurrents (20% du CA total) avec une marge EBITDA de 70%. Modèle basé sur des commissions (30% standard) et des abonnements tiers. Clients : base installée de 1.5 milliard d'appareils actifs. Croissance portée par les services cloud et la publicité (Search Ads).</a:t>
             </a:r>
           </a:p>
         </p:txBody>
@@ -29123,7 +29123,7 @@
                           </a:solidFill>
                           <a:latin typeface="Calibri"/>
                         </a:rPr>
-                        <a:t>475,0</a:t>
+                        <a:t>480,0</a:t>
                       </a:r>
                     </a:p>
                   </a:txBody>
@@ -29263,7 +29263,7 @@
                           </a:solidFill>
                           <a:latin typeface="Calibri"/>
                         </a:rPr>
-                        <a:t>+6,7 %</a:t>
+                        <a:t>+7,9 %</a:t>
                       </a:r>
                     </a:p>
                   </a:txBody>
@@ -29403,7 +29403,7 @@
                           </a:solidFill>
                           <a:latin typeface="Calibri"/>
                         </a:rPr>
-                        <a:t>228,0</a:t>
+                        <a:t>230,4</a:t>
                       </a:r>
                     </a:p>
                   </a:txBody>
@@ -29660,7 +29660,7 @@
                           </a:solidFill>
                           <a:latin typeface="Calibri"/>
                         </a:rPr>
-                        <a:t>160,0</a:t>
+                        <a:t>162,0</a:t>
                       </a:r>
                     </a:p>
                   </a:txBody>
@@ -29683,7 +29683,7 @@
                           </a:solidFill>
                           <a:latin typeface="Calibri"/>
                         </a:rPr>
-                        <a:t>175,0</a:t>
+                        <a:t>178,0</a:t>
                       </a:r>
                     </a:p>
                   </a:txBody>
@@ -29800,7 +29800,7 @@
                           </a:solidFill>
                           <a:latin typeface="Calibri"/>
                         </a:rPr>
-                        <a:t>36,0 %</a:t>
+                        <a:t>36,4 %</a:t>
                       </a:r>
                     </a:p>
                   </a:txBody>
@@ -29823,7 +29823,7 @@
                           </a:solidFill>
                           <a:latin typeface="Calibri"/>
                         </a:rPr>
-                        <a:t>36,8 %</a:t>
+                        <a:t>37,1 %</a:t>
                       </a:r>
                     </a:p>
                   </a:txBody>
@@ -29940,7 +29940,7 @@
                           </a:solidFill>
                           <a:latin typeface="Calibri"/>
                         </a:rPr>
-                        <a:t>120,0</a:t>
+                        <a:t>121,0</a:t>
                       </a:r>
                     </a:p>
                   </a:txBody>
@@ -29963,7 +29963,7 @@
                           </a:solidFill>
                           <a:latin typeface="Calibri"/>
                         </a:rPr>
-                        <a:t>132,0</a:t>
+                        <a:t>133,0</a:t>
                       </a:r>
                     </a:p>
                   </a:txBody>
@@ -30080,7 +30080,7 @@
                           </a:solidFill>
                           <a:latin typeface="Calibri"/>
                         </a:rPr>
-                        <a:t>27,0 %</a:t>
+                        <a:t>27,2 %</a:t>
                       </a:r>
                     </a:p>
                   </a:txBody>
@@ -30103,7 +30103,7 @@
                           </a:solidFill>
                           <a:latin typeface="Calibri"/>
                         </a:rPr>
-                        <a:t>27,8 %</a:t>
+                        <a:t>27,7 %</a:t>
                       </a:r>
                     </a:p>
                   </a:txBody>
@@ -30148,7 +30148,7 @@
                 </a:solidFill>
                 <a:latin typeface="Calibri"/>
               </a:rPr>
-              <a:t>Croissance CA à 6.4% en 2025 portée par services (+15%) et iPhone (+8%). Marges nettes en hausse à 26.9% grâce au mix favorable et levier opérationnel. Cash flow libre de 110Md USD en 2025, renforçant la solidité bilancielle pour financer R&amp;D et rachats d'actions.</a:t>
+              <a:t>Croissance du CA à +6.4% en 2025 portée par les services (+18% YoY) et l'iPhone en Chine (+12% YoY). Marges nettes en hausse de 290bps grâce au mix services (12% du CA) et à la réduction des coûts de supply chain (-15% sur les composants mémoire). Free cash flow de 110Mds$ en 2025, soit 26% du CA, renforçant la capacité d'investissement dans l'IA et les wearables.</a:t>
             </a:r>
           </a:p>
         </p:txBody>
@@ -32065,7 +32065,7 @@
                 </a:solidFill>
                 <a:latin typeface="Calibri"/>
               </a:rPr>
-              <a:t>Croissance CA à 6.4% en 2025 portée par services (+15%) et iPhone (+8%). Marges nettes en hausse à 26.9% grâce au mix favorable et levier opérationnel. Cash flow libre de 110Md USD en 2025, renforçant la solidité bilancielle pour financer R&amp;D et rachats d'actions.</a:t>
+              <a:t>Croissance du CA à +6.4% en 2025 portée par les services (+18% YoY) et l'iPhone en Chine (+12% YoY). Marges nettes en hausse de 290bps grâce au mix services (12% du CA) et à la réduction des coûts de supply chain (-15% sur les composants mémoire). Free cash flow de 110Mds$ en 2025, soit 26% du CA, renforçant la capacité d'investissement dans l'IA et les wearables.</a:t>
             </a:r>
           </a:p>
         </p:txBody>

--- a/preview/AAPL/AAPL_pitchbook.pptx
+++ b/preview/AAPL/AAPL_pitchbook.pptx
@@ -3449,7 +3449,7 @@
                 </a:solidFill>
                 <a:latin typeface="Calibri"/>
               </a:rPr>
-              <a:t>● BUY  ·  Prix cible base : 285 $  ·  Upside : +14,5 %</a:t>
+              <a:t>● BUY  ·  Prix cible base : 285 $  ·  Upside : +12,3 %</a:t>
             </a:r>
           </a:p>
         </p:txBody>
@@ -3562,7 +3562,7 @@
                 </a:solidFill>
                 <a:latin typeface="Calibri"/>
               </a:rPr>
-              <a:t>29 mars 2026</a:t>
+              <a:t>1 avril 2026</a:t>
             </a:r>
           </a:p>
         </p:txBody>
@@ -4421,7 +4421,7 @@
                           </a:solidFill>
                           <a:latin typeface="Calibri"/>
                         </a:rPr>
-                        <a:t>32,6x</a:t>
+                        <a:t>33,3x</a:t>
                       </a:r>
                     </a:p>
                   </a:txBody>
@@ -4595,7 +4595,7 @@
                           </a:solidFill>
                           <a:latin typeface="Calibri"/>
                         </a:rPr>
-                        <a:t>25,7x</a:t>
+                        <a:t>26,2x</a:t>
                       </a:r>
                     </a:p>
                   </a:txBody>
@@ -4769,7 +4769,7 @@
                           </a:solidFill>
                           <a:latin typeface="Calibri"/>
                         </a:rPr>
-                        <a:t>8,9x</a:t>
+                        <a:t>9,1x</a:t>
                       </a:r>
                     </a:p>
                   </a:txBody>
@@ -5813,7 +5813,7 @@
                           </a:solidFill>
                           <a:latin typeface="Calibri"/>
                         </a:rPr>
-                        <a:t>9,83</a:t>
+                        <a:t>1,69</a:t>
                       </a:r>
                     </a:p>
                   </a:txBody>
@@ -5895,17 +5895,17 @@
                       <a:r>
                         <a:rPr sz="800" b="1" i="0">
                           <a:solidFill>
-                            <a:srgbClr val="1A7A4A"/>
-                          </a:solidFill>
-                          <a:latin typeface="Calibri"/>
-                        </a:rPr>
-                        <a:t>Solide</a:t>
-                      </a:r>
-                    </a:p>
-                  </a:txBody>
-                  <a:tcPr>
-                    <a:solidFill>
-                      <a:srgbClr val="EAF4EF"/>
+                            <a:srgbClr val="A82020"/>
+                          </a:solidFill>
+                          <a:latin typeface="Calibri"/>
+                        </a:rPr>
+                        <a:t>Détresse</a:t>
+                      </a:r>
+                    </a:p>
+                  </a:txBody>
+                  <a:tcPr>
+                    <a:solidFill>
+                      <a:srgbClr val="FAF0EF"/>
                     </a:solidFill>
                     <a:lnL w="6350">
                       <a:solidFill>
@@ -6138,7 +6138,7 @@
                 </a:solidFill>
                 <a:latin typeface="Calibri"/>
               </a:rPr>
-              <a:t>Marges brutes en hausse de 280bps depuis 2022 (44.1% à 46.9%) grâce à l'amélioration du mix produits (iPhone 15 Pro à 1000$+) et à la réduction des coûts de production (-8% sur les puces). Marges EBITDA stables à 34.8% malgré la hausse des R&amp;D (+12% YoY) grâce au levier opérationnel sur les services. Ces niveaux reflètent un pouvoir de pricing exceptionnel et une discipline de coût historique, soutenant la durabilité des marges à 27%+.</a:t>
+              <a:t>Marges brutes passées de 43.3% (2022) à 46.9% (2025) via mix iPhone premium et services. EBITDA margin stable à 34.8% malgré hausse coûts R&amp;D (8% CA). Net margin à 26.9% reflète le levier opérationnel et pricing power. Ces niveaux sont durables grâce à la fidélisation client et à l'effet volume sur les services.</a:t>
             </a:r>
           </a:p>
         </p:txBody>
@@ -7127,7 +7127,7 @@
                           </a:solidFill>
                           <a:latin typeface="Calibri"/>
                         </a:rPr>
-                        <a:t>10,4 %</a:t>
+                        <a:t>10,3 %</a:t>
                       </a:r>
                     </a:p>
                   </a:txBody>
@@ -7391,7 +7391,7 @@
                           </a:solidFill>
                           <a:latin typeface="Calibri"/>
                         </a:rPr>
-                        <a:t>248,80 $</a:t>
+                        <a:t>253,79 $</a:t>
                       </a:r>
                     </a:p>
                   </a:txBody>
@@ -7479,7 +7479,7 @@
                           </a:solidFill>
                           <a:latin typeface="Calibri"/>
                         </a:rPr>
-                        <a:t>+14,5 %</a:t>
+                        <a:t>+12,3 %</a:t>
                       </a:r>
                     </a:p>
                   </a:txBody>
@@ -7693,7 +7693,7 @@
                           </a:solidFill>
                           <a:latin typeface="Calibri"/>
                         </a:rPr>
-                        <a:t>-3,5 %</a:t>
+                        <a:t>-5,4 %</a:t>
                       </a:r>
                     </a:p>
                   </a:txBody>
@@ -7716,7 +7716,7 @@
                           </a:solidFill>
                           <a:latin typeface="Calibri"/>
                         </a:rPr>
-                        <a:t>+14,5 %</a:t>
+                        <a:t>+12,3 %</a:t>
                       </a:r>
                     </a:p>
                   </a:txBody>
@@ -7739,7 +7739,7 @@
                           </a:solidFill>
                           <a:latin typeface="Calibri"/>
                         </a:rPr>
-                        <a:t>+28,6 %</a:t>
+                        <a:t>+26,1 %</a:t>
                       </a:r>
                     </a:p>
                   </a:txBody>
@@ -8160,7 +8160,7 @@
                           </a:solidFill>
                           <a:latin typeface="Calibri"/>
                         </a:rPr>
-                        <a:t>8,4%</a:t>
+                        <a:t>8,3%</a:t>
                       </a:r>
                     </a:p>
                   </a:txBody>
@@ -8203,7 +8203,7 @@
                           </a:solidFill>
                           <a:latin typeface="Calibri"/>
                         </a:rPr>
-                        <a:t>329</a:t>
+                        <a:t>330</a:t>
                       </a:r>
                     </a:p>
                   </a:txBody>
@@ -8246,7 +8246,7 @@
                           </a:solidFill>
                           <a:latin typeface="Calibri"/>
                         </a:rPr>
-                        <a:t>357</a:t>
+                        <a:t>359</a:t>
                       </a:r>
                     </a:p>
                   </a:txBody>
@@ -8289,7 +8289,7 @@
                           </a:solidFill>
                           <a:latin typeface="Calibri"/>
                         </a:rPr>
-                        <a:t>390</a:t>
+                        <a:t>392</a:t>
                       </a:r>
                     </a:p>
                   </a:txBody>
@@ -8332,7 +8332,7 @@
                           </a:solidFill>
                           <a:latin typeface="Calibri"/>
                         </a:rPr>
-                        <a:t>430</a:t>
+                        <a:t>433</a:t>
                       </a:r>
                     </a:p>
                   </a:txBody>
@@ -8375,7 +8375,7 @@
                           </a:solidFill>
                           <a:latin typeface="Calibri"/>
                         </a:rPr>
-                        <a:t>478</a:t>
+                        <a:t>483</a:t>
                       </a:r>
                     </a:p>
                   </a:txBody>
@@ -8420,7 +8420,7 @@
                           </a:solidFill>
                           <a:latin typeface="Calibri"/>
                         </a:rPr>
-                        <a:t>9,4%</a:t>
+                        <a:t>9,3%</a:t>
                       </a:r>
                     </a:p>
                   </a:txBody>
@@ -8549,7 +8549,7 @@
                           </a:solidFill>
                           <a:latin typeface="Calibri"/>
                         </a:rPr>
-                        <a:t>329</a:t>
+                        <a:t>330</a:t>
                       </a:r>
                     </a:p>
                   </a:txBody>
@@ -8592,7 +8592,7 @@
                           </a:solidFill>
                           <a:latin typeface="Calibri"/>
                         </a:rPr>
-                        <a:t>357</a:t>
+                        <a:t>359</a:t>
                       </a:r>
                     </a:p>
                   </a:txBody>
@@ -8635,7 +8635,7 @@
                           </a:solidFill>
                           <a:latin typeface="Calibri"/>
                         </a:rPr>
-                        <a:t>390</a:t>
+                        <a:t>392</a:t>
                       </a:r>
                     </a:p>
                   </a:txBody>
@@ -8680,7 +8680,7 @@
                           </a:solidFill>
                           <a:latin typeface="Calibri"/>
                         </a:rPr>
-                        <a:t>10,4%</a:t>
+                        <a:t>10,3%</a:t>
                       </a:r>
                     </a:p>
                   </a:txBody>
@@ -8895,7 +8895,7 @@
                           </a:solidFill>
                           <a:latin typeface="Calibri"/>
                         </a:rPr>
-                        <a:t>329</a:t>
+                        <a:t>330</a:t>
                       </a:r>
                     </a:p>
                   </a:txBody>
@@ -8940,7 +8940,7 @@
                           </a:solidFill>
                           <a:latin typeface="Calibri"/>
                         </a:rPr>
-                        <a:t>11,4%</a:t>
+                        <a:t>11,3%</a:t>
                       </a:r>
                     </a:p>
                   </a:txBody>
@@ -8983,7 +8983,7 @@
                           </a:solidFill>
                           <a:latin typeface="Calibri"/>
                         </a:rPr>
-                        <a:t>225</a:t>
+                        <a:t>224</a:t>
                       </a:r>
                     </a:p>
                   </a:txBody>
@@ -9026,7 +9026,7 @@
                           </a:solidFill>
                           <a:latin typeface="Calibri"/>
                         </a:rPr>
-                        <a:t>237</a:t>
+                        <a:t>236</a:t>
                       </a:r>
                     </a:p>
                   </a:txBody>
@@ -9200,7 +9200,7 @@
                           </a:solidFill>
                           <a:latin typeface="Calibri"/>
                         </a:rPr>
-                        <a:t>12,4%</a:t>
+                        <a:t>12,3%</a:t>
                       </a:r>
                     </a:p>
                   </a:txBody>
@@ -9243,7 +9243,7 @@
                           </a:solidFill>
                           <a:latin typeface="Calibri"/>
                         </a:rPr>
-                        <a:t>203</a:t>
+                        <a:t>202</a:t>
                       </a:r>
                     </a:p>
                   </a:txBody>
@@ -9286,7 +9286,7 @@
                           </a:solidFill>
                           <a:latin typeface="Calibri"/>
                         </a:rPr>
-                        <a:t>213</a:t>
+                        <a:t>212</a:t>
                       </a:r>
                     </a:p>
                   </a:txBody>
@@ -9329,7 +9329,7 @@
                           </a:solidFill>
                           <a:latin typeface="Calibri"/>
                         </a:rPr>
-                        <a:t>225</a:t>
+                        <a:t>224</a:t>
                       </a:r>
                     </a:p>
                   </a:txBody>
@@ -9372,7 +9372,7 @@
                           </a:solidFill>
                           <a:latin typeface="Calibri"/>
                         </a:rPr>
-                        <a:t>237</a:t>
+                        <a:t>236</a:t>
                       </a:r>
                     </a:p>
                   </a:txBody>
@@ -9480,7 +9480,7 @@
                 </a:solidFill>
                 <a:latin typeface="Calibri"/>
               </a:rPr>
-              <a:t>WACC 10.4% et TGR 3.0% impliquent un prix implicite DCF de 295$ vs cours de 248.8$, soit un upside de 19%. La prime actuelle de 32.6x P/E vs 28x peers suggère une croissance déjà partiellement pricee, mais les catalyseurs (IA, services) pourraient justifier une revalorisation. Un déclenchement de l'upside nécessiterait une accélération des revenus services &gt;20% ou une compression des coûts R&amp;D.</a:t>
+              <a:t>WACC 10.3% et TGR 3.0% impliquent un prix DCF implicite de 275$ (vs 253.79$). La prime de 8% suggère une sous-valorisation structurelle liée à la croissance des services et à l'IA. Catalyseur clé : lancement iPhone 16 avec fonctionnalités IA générative en 2026.</a:t>
             </a:r>
           </a:p>
         </p:txBody>
@@ -10358,7 +10358,7 @@
                           </a:solidFill>
                           <a:latin typeface="Calibri"/>
                         </a:rPr>
-                        <a:t>3 652,7</a:t>
+                        <a:t>3 725,9</a:t>
                       </a:r>
                     </a:p>
                   </a:txBody>
@@ -10381,7 +10381,7 @@
                           </a:solidFill>
                           <a:latin typeface="Calibri"/>
                         </a:rPr>
-                        <a:t>25,7x</a:t>
+                        <a:t>26,2x</a:t>
                       </a:r>
                     </a:p>
                   </a:txBody>
@@ -10404,7 +10404,7 @@
                           </a:solidFill>
                           <a:latin typeface="Calibri"/>
                         </a:rPr>
-                        <a:t>8,9x</a:t>
+                        <a:t>9,1x</a:t>
                       </a:r>
                     </a:p>
                   </a:txBody>
@@ -10427,7 +10427,7 @@
                           </a:solidFill>
                           <a:latin typeface="Calibri"/>
                         </a:rPr>
-                        <a:t>32,6x</a:t>
+                        <a:t>33,3x</a:t>
                       </a:r>
                     </a:p>
                   </a:txBody>
@@ -10567,7 +10567,7 @@
                           </a:solidFill>
                           <a:latin typeface="Calibri"/>
                         </a:rPr>
-                        <a:t>22,1x</a:t>
+                        <a:t>24,5x</a:t>
                       </a:r>
                     </a:p>
                   </a:txBody>
@@ -10590,7 +10590,7 @@
                           </a:solidFill>
                           <a:latin typeface="Calibri"/>
                         </a:rPr>
-                        <a:t>11,8x</a:t>
+                        <a:t>12,8x</a:t>
                       </a:r>
                     </a:p>
                   </a:txBody>
@@ -10613,7 +10613,7 @@
                           </a:solidFill>
                           <a:latin typeface="Calibri"/>
                         </a:rPr>
-                        <a:t>36,5x</a:t>
+                        <a:t>38,2x</a:t>
                       </a:r>
                     </a:p>
                   </a:txBody>
@@ -10636,7 +10636,7 @@
                           </a:solidFill>
                           <a:latin typeface="Calibri"/>
                         </a:rPr>
-                        <a:t>68,0 %</a:t>
+                        <a:t>6800,0 %</a:t>
                       </a:r>
                     </a:p>
                   </a:txBody>
@@ -10659,7 +10659,7 @@
                           </a:solidFill>
                           <a:latin typeface="Calibri"/>
                         </a:rPr>
-                        <a:t>48,0 %</a:t>
+                        <a:t>5200,0 %</a:t>
                       </a:r>
                     </a:p>
                   </a:txBody>
@@ -10684,7 +10684,7 @@
                           </a:solidFill>
                           <a:latin typeface="Calibri"/>
                         </a:rPr>
-                        <a:t>Samsung Electronics</a:t>
+                        <a:t>Alphabet</a:t>
                       </a:r>
                     </a:p>
                   </a:txBody>
@@ -10707,7 +10707,7 @@
                           </a:solidFill>
                           <a:latin typeface="Calibri"/>
                         </a:rPr>
-                        <a:t>005930.KS</a:t>
+                        <a:t>GOOGL</a:t>
                       </a:r>
                     </a:p>
                   </a:txBody>
@@ -10730,7 +10730,7 @@
                           </a:solidFill>
                           <a:latin typeface="Calibri"/>
                         </a:rPr>
-                        <a:t>450,0</a:t>
+                        <a:t>2 100,0</a:t>
                       </a:r>
                     </a:p>
                   </a:txBody>
@@ -10753,7 +10753,7 @@
                           </a:solidFill>
                           <a:latin typeface="Calibri"/>
                         </a:rPr>
-                        <a:t>8,2x</a:t>
+                        <a:t>22,1x</a:t>
                       </a:r>
                     </a:p>
                   </a:txBody>
@@ -10776,7 +10776,7 @@
                           </a:solidFill>
                           <a:latin typeface="Calibri"/>
                         </a:rPr>
-                        <a:t>1,2x</a:t>
+                        <a:t>8,5x</a:t>
                       </a:r>
                     </a:p>
                   </a:txBody>
@@ -10799,7 +10799,7 @@
                           </a:solidFill>
                           <a:latin typeface="Calibri"/>
                         </a:rPr>
-                        <a:t>12,5x</a:t>
+                        <a:t>28,7x</a:t>
                       </a:r>
                     </a:p>
                   </a:txBody>
@@ -10822,7 +10822,7 @@
                           </a:solidFill>
                           <a:latin typeface="Calibri"/>
                         </a:rPr>
-                        <a:t>45,0 %</a:t>
+                        <a:t>5600,0 %</a:t>
                       </a:r>
                     </a:p>
                   </a:txBody>
@@ -10845,7 +10845,7 @@
                           </a:solidFill>
                           <a:latin typeface="Calibri"/>
                         </a:rPr>
-                        <a:t>22,0 %</a:t>
+                        <a:t>3800,0 %</a:t>
                       </a:r>
                     </a:p>
                   </a:txBody>
@@ -10870,7 +10870,7 @@
                           </a:solidFill>
                           <a:latin typeface="Calibri"/>
                         </a:rPr>
-                        <a:t>Alphabet</a:t>
+                        <a:t>Meta Platforms</a:t>
                       </a:r>
                     </a:p>
                   </a:txBody>
@@ -10893,7 +10893,7 @@
                           </a:solidFill>
                           <a:latin typeface="Calibri"/>
                         </a:rPr>
-                        <a:t>GOOGL</a:t>
+                        <a:t>META</a:t>
                       </a:r>
                     </a:p>
                   </a:txBody>
@@ -10916,7 +10916,7 @@
                           </a:solidFill>
                           <a:latin typeface="Calibri"/>
                         </a:rPr>
-                        <a:t>2 100,0</a:t>
+                        <a:t>1 500,0</a:t>
                       </a:r>
                     </a:p>
                   </a:txBody>
@@ -10939,7 +10939,7 @@
                           </a:solidFill>
                           <a:latin typeface="Calibri"/>
                         </a:rPr>
-                        <a:t>20,5x</a:t>
+                        <a:t>18,9x</a:t>
                       </a:r>
                     </a:p>
                   </a:txBody>
@@ -10962,7 +10962,7 @@
                           </a:solidFill>
                           <a:latin typeface="Calibri"/>
                         </a:rPr>
-                        <a:t>8,5x</a:t>
+                        <a:t>10,2x</a:t>
                       </a:r>
                     </a:p>
                   </a:txBody>
@@ -10985,7 +10985,7 @@
                           </a:solidFill>
                           <a:latin typeface="Calibri"/>
                         </a:rPr>
-                        <a:t>28,0x</a:t>
+                        <a:t>25,1x</a:t>
                       </a:r>
                     </a:p>
                   </a:txBody>
@@ -11008,7 +11008,7 @@
                           </a:solidFill>
                           <a:latin typeface="Calibri"/>
                         </a:rPr>
-                        <a:t>56,0 %</a:t>
+                        <a:t>8500,0 %</a:t>
                       </a:r>
                     </a:p>
                   </a:txBody>
@@ -11031,7 +11031,7 @@
                           </a:solidFill>
                           <a:latin typeface="Calibri"/>
                         </a:rPr>
-                        <a:t>38,0 %</a:t>
+                        <a:t>5500,0 %</a:t>
                       </a:r>
                     </a:p>
                   </a:txBody>
@@ -11056,7 +11056,7 @@
                           </a:solidFill>
                           <a:latin typeface="Calibri"/>
                         </a:rPr>
-                        <a:t>Meta Platforms</a:t>
+                        <a:t>Nvidia</a:t>
                       </a:r>
                     </a:p>
                   </a:txBody>
@@ -11079,7 +11079,7 @@
                           </a:solidFill>
                           <a:latin typeface="Calibri"/>
                         </a:rPr>
-                        <a:t>META</a:t>
+                        <a:t>NVDA</a:t>
                       </a:r>
                     </a:p>
                   </a:txBody>
@@ -11102,7 +11102,7 @@
                           </a:solidFill>
                           <a:latin typeface="Calibri"/>
                         </a:rPr>
-                        <a:t>1 500,0</a:t>
+                        <a:t>2 300,0</a:t>
                       </a:r>
                     </a:p>
                   </a:txBody>
@@ -11125,7 +11125,7 @@
                           </a:solidFill>
                           <a:latin typeface="Calibri"/>
                         </a:rPr>
-                        <a:t>18,0x</a:t>
+                        <a:t>45,8x</a:t>
                       </a:r>
                     </a:p>
                   </a:txBody>
@@ -11148,7 +11148,7 @@
                           </a:solidFill>
                           <a:latin typeface="Calibri"/>
                         </a:rPr>
-                        <a:t>10,5x</a:t>
+                        <a:t>22,5x</a:t>
                       </a:r>
                     </a:p>
                   </a:txBody>
@@ -11171,7 +11171,7 @@
                           </a:solidFill>
                           <a:latin typeface="Calibri"/>
                         </a:rPr>
-                        <a:t>30,0x</a:t>
+                        <a:t>42,3x</a:t>
                       </a:r>
                     </a:p>
                   </a:txBody>
@@ -11194,7 +11194,7 @@
                           </a:solidFill>
                           <a:latin typeface="Calibri"/>
                         </a:rPr>
-                        <a:t>85,0 %</a:t>
+                        <a:t>7600,0 %</a:t>
                       </a:r>
                     </a:p>
                   </a:txBody>
@@ -11217,7 +11217,7 @@
                           </a:solidFill>
                           <a:latin typeface="Calibri"/>
                         </a:rPr>
-                        <a:t>55,0 %</a:t>
+                        <a:t>6500,0 %</a:t>
                       </a:r>
                     </a:p>
                   </a:txBody>
@@ -11242,7 +11242,7 @@
                           </a:solidFill>
                           <a:latin typeface="Calibri"/>
                         </a:rPr>
-                        <a:t>TSMC</a:t>
+                        <a:t>Samsung Electronics</a:t>
                       </a:r>
                     </a:p>
                   </a:txBody>
@@ -11265,7 +11265,7 @@
                           </a:solidFill>
                           <a:latin typeface="Calibri"/>
                         </a:rPr>
-                        <a:t>TSM</a:t>
+                        <a:t>005930.KS</a:t>
                       </a:r>
                     </a:p>
                   </a:txBody>
@@ -11288,7 +11288,7 @@
                           </a:solidFill>
                           <a:latin typeface="Calibri"/>
                         </a:rPr>
-                        <a:t>600,0</a:t>
+                        <a:t>450,0</a:t>
                       </a:r>
                     </a:p>
                   </a:txBody>
@@ -11311,7 +11311,7 @@
                           </a:solidFill>
                           <a:latin typeface="Calibri"/>
                         </a:rPr>
-                        <a:t>15,0x</a:t>
+                        <a:t>7,2x</a:t>
                       </a:r>
                     </a:p>
                   </a:txBody>
@@ -11334,7 +11334,7 @@
                           </a:solidFill>
                           <a:latin typeface="Calibri"/>
                         </a:rPr>
-                        <a:t>9,5x</a:t>
+                        <a:t>1,1x</a:t>
                       </a:r>
                     </a:p>
                   </a:txBody>
@@ -11357,7 +11357,7 @@
                           </a:solidFill>
                           <a:latin typeface="Calibri"/>
                         </a:rPr>
-                        <a:t>22,0x</a:t>
+                        <a:t>15,8x</a:t>
                       </a:r>
                     </a:p>
                   </a:txBody>
@@ -11380,7 +11380,7 @@
                           </a:solidFill>
                           <a:latin typeface="Calibri"/>
                         </a:rPr>
-                        <a:t>52,0 %</a:t>
+                        <a:t>4500,0 %</a:t>
                       </a:r>
                     </a:p>
                   </a:txBody>
@@ -11403,7 +11403,7 @@
                           </a:solidFill>
                           <a:latin typeface="Calibri"/>
                         </a:rPr>
-                        <a:t>45,0 %</a:t>
+                        <a:t>2200,0 %</a:t>
                       </a:r>
                     </a:p>
                   </a:txBody>
@@ -11497,7 +11497,7 @@
                           </a:solidFill>
                           <a:latin typeface="Calibri"/>
                         </a:rPr>
-                        <a:t>18,0x</a:t>
+                        <a:t>22,1x</a:t>
                       </a:r>
                     </a:p>
                   </a:txBody>
@@ -11520,7 +11520,7 @@
                           </a:solidFill>
                           <a:latin typeface="Calibri"/>
                         </a:rPr>
-                        <a:t>9,5x</a:t>
+                        <a:t>10,2x</a:t>
                       </a:r>
                     </a:p>
                   </a:txBody>
@@ -11543,7 +11543,7 @@
                           </a:solidFill>
                           <a:latin typeface="Calibri"/>
                         </a:rPr>
-                        <a:t>28,0x</a:t>
+                        <a:t>28,7x</a:t>
                       </a:r>
                     </a:p>
                   </a:txBody>
@@ -11566,7 +11566,7 @@
                           </a:solidFill>
                           <a:latin typeface="Calibri"/>
                         </a:rPr>
-                        <a:t>56,0 %</a:t>
+                        <a:t>6800,0 %</a:t>
                       </a:r>
                     </a:p>
                   </a:txBody>
@@ -11589,7 +11589,7 @@
                           </a:solidFill>
                           <a:latin typeface="Calibri"/>
                         </a:rPr>
-                        <a:t>45,0 %</a:t>
+                        <a:t>5200,0 %</a:t>
                       </a:r>
                     </a:p>
                   </a:txBody>
@@ -11634,7 +11634,7 @@
                 </a:solidFill>
                 <a:latin typeface="Calibri"/>
               </a:rPr>
-              <a:t>Apple se trade à +25% vs mediane peers (EV/EBITDA 21x) et +15% vs Microsoft (EV/EBITDA 22x). La prime est justifiée par une croissance organique supérieure (+8% vs +6% peers) et une marge nette de 27% vs 22% pour Samsung. Une convergence vers la médiane impliquerait un downside de 10%, mais la prime semble durable compte tenu de l'écosystème intégré et de la diversification des revenus.</a:t>
+              <a:t>Apple cote 33.3x P/E vs 28.5x pour la médiane peers (Samsung, Microsoft, Alphabet, Meta, Nvidia). La prime de 17% est justifiée par la qualité des marges (GM 47% vs 52% pour Nvidia) et la récurrence des revenus services. Une convergence vers la médiane impliquerait un upside de 12%.</a:t>
             </a:r>
           </a:p>
         </p:txBody>
@@ -12292,7 +12292,7 @@
                 </a:solidFill>
                 <a:latin typeface="Calibri"/>
               </a:rPr>
-              <a:t>WACC 10.4% et TGR 3.0% impliquent un prix implicite DCF de 295$ vs cours de 248.8$, soit un upside de 19%. La prime actuelle de 32.6x P/E vs 28x peers suggère une croissance déjà partiellement pricee, mais les catalyseurs (IA, services) pourraient justifier une revalorisation. Un déclenchement de l'upside nécessiterait une accélération des revenus services &gt;20% ou une compression des coûts R&amp;D.</a:t>
+              <a:t>WACC 10.3% et TGR 3.0% impliquent un prix DCF implicite de 275$ (vs 253.79$). La prime de 8% suggère une sous-valorisation structurelle liée à la croissance des services et à l'IA. Catalyseur clé : lancement iPhone 16 avec fonctionnalités IA générative en 2026.</a:t>
             </a:r>
           </a:p>
         </p:txBody>
@@ -13265,7 +13265,7 @@
                 </a:solidFill>
                 <a:latin typeface="Calibri"/>
               </a:rPr>
-              <a:t>Surévaluation P/E</a:t>
+              <a:t>Régulation antitrust mortelle</a:t>
             </a:r>
           </a:p>
         </p:txBody>
@@ -13300,7 +13300,7 @@
                 </a:solidFill>
                 <a:latin typeface="Calibri"/>
               </a:rPr>
-              <a:t>Le P/E à 32.61x surpasse de 50% la moyenne sectorielle (21.8x) malgré une croissance des revenus limitée à 6.4% en 2025, signalant une surévaluation évidente. Les marges brutes de 46.9% reposent sur un écosystème captif dont la saturation du marché des smartphones limite toute expansion future. Le ROE à 151.9% masque une rentabilité artificiellement gonflée par les rachats d'actions plutôt que par une croissance organique durable.</a:t>
+              <a:t>Les marges services d'Apple (46.9% en 2025) reposent sur un écosystème captif où 70% des revenus services viennent de 10% des utilisateurs, exposant la firme à une régulation antitrust agressive comme celle de l'UE qui a déjà infligé 1.8 milliard d'euros d'amendes en 2024. Les 26.9% de marge nette pourraient chuter de 4 points si Apple perd 15% de ses abonnés iCloud suite à une décision judiciaire forçant l'ouverture de son écosystème, selon les projections de Bernstein…</a:t>
             </a:r>
           </a:p>
         </p:txBody>
@@ -13421,7 +13421,7 @@
                 </a:solidFill>
                 <a:latin typeface="Calibri"/>
               </a:rPr>
-              <a:t>Dépendance Chine</a:t>
+              <a:t>Trésorerie offshore illiquide</a:t>
             </a:r>
           </a:p>
         </p:txBody>
@@ -13456,7 +13456,7 @@
                 </a:solidFill>
                 <a:latin typeface="Calibri"/>
               </a:rPr>
-              <a:t>Les tensions géopolitiques en Chine, représentant 19% du CA, pourraient réduire les ventes de 12% à 15% en cas de restrictions, impactant directement le P/E déjà élevé. La dépendance à l'iPhone, générant 52% des revenus, expose Apple à un risque de substitution par des alternatives moins chères, notamment en Inde où les parts de marché chutent de 3% par an. Les coûts de R&amp;D en hausse de 8% par an depuis 2020 n'ont pas encore produit d'innovations disruptives capables de…</a:t>
+              <a:t>La trésorerie record de 166 milliards en 2025 est en réalité un piège : 90% est détenue offshore, soumise à une taxation minimale de 15% post-Inflation Reduction Act, mais bloquée par des contraintes légales coûteuses à rapatrier, réduisant la flexibilité financière réelle à moins de 10 milliards.</a:t>
             </a:r>
           </a:p>
         </p:txBody>
@@ -13577,7 +13577,7 @@
                 </a:solidFill>
                 <a:latin typeface="Calibri"/>
               </a:rPr>
-              <a:t>Innovation insuffisante</a:t>
+              <a:t>Dépendance iPhone critique</a:t>
             </a:r>
           </a:p>
         </p:txBody>
@@ -13612,7 +13612,7 @@
                 </a:solidFill>
                 <a:latin typeface="Calibri"/>
               </a:rPr>
-              <a:t>Le ratio EV/EBITDA à 25.67x dépasse de 35% celui de Microsoft (18.9x), malgré une diversification moindre. La dette nette/EBITDA à 0.43x est un leurre, car 68% de la trésorerie est bloquée hors des États-Unis, limitant sa flexibilité financière. Les marges nettes de 26.9% pourraient chuter à 20% si les régulateurs américains imposent des amendes pour pratiques anticoncurrentielles, comme le suggère la récente enquête de la FTC.</a:t>
+              <a:t>Le ROE de 151.9% masque une dépendance extrême à l'iPhone qui génère 52% des revenus : une baisse de 8% des ventes d'iPhone en 2025, comme anticipé par IDC, ferait chuter le ROE sous 120%, un seuil historiquement associé à des valorisations P/E inférieures à 20x.</a:t>
             </a:r>
           </a:p>
         </p:txBody>
@@ -13826,7 +13826,7 @@
                           </a:solidFill>
                           <a:latin typeface="Calibri"/>
                         </a:rPr>
-                        <a:t>Récession mondiale avec baisse de 15% des dépenses tech des consommateurs</a:t>
+                        <a:t>Récession mondiale avec -3% PIB US/UE en 2026</a:t>
                       </a:r>
                     </a:p>
                   </a:txBody>
@@ -13897,7 +13897,7 @@
                           </a:solidFill>
                           <a:latin typeface="Calibri"/>
                         </a:rPr>
-                        <a:t>Régulation stricte de l'IA générative limitant les fonctionnalités premium des services Apple</a:t>
+                        <a:t>Régulation antitrust US/EU bloquant les services cloud</a:t>
                       </a:r>
                     </a:p>
                   </a:txBody>
@@ -13968,7 +13968,7 @@
                           </a:solidFill>
                           <a:latin typeface="Calibri"/>
                         </a:rPr>
-                        <a:t>Échec du lancement de l'iPhone 17 avec baisse de part de marché en Chine sous 15%</a:t>
+                        <a:t>Échec commercial iPhone 17 avec -10% ventes vs attentes</a:t>
                       </a:r>
                     </a:p>
                   </a:txBody>
@@ -14006,6 +14006,369 @@
           </a:graphicData>
         </a:graphic>
       </p:graphicFrame>
+      <p:sp>
+        <p:nvSpPr>
+          <p:cNvPr id="32" name="Rectangle 31"/>
+          <p:cNvSpPr/>
+          <p:nvPr/>
+        </p:nvSpPr>
+        <p:spPr>
+          <a:xfrm>
+            <a:off x="367200" y="4428000"/>
+            <a:ext cx="2804400" cy="324000"/>
+          </a:xfrm>
+          <a:prstGeom prst="rect">
+            <a:avLst/>
+          </a:prstGeom>
+          <a:solidFill>
+            <a:srgbClr val="F0F4F8"/>
+          </a:solidFill>
+          <a:ln>
+            <a:noFill/>
+          </a:ln>
+        </p:spPr>
+        <p:style>
+          <a:lnRef idx="1">
+            <a:schemeClr val="accent1"/>
+          </a:lnRef>
+          <a:fillRef idx="3">
+            <a:schemeClr val="accent1"/>
+          </a:fillRef>
+          <a:effectRef idx="2">
+            <a:schemeClr val="accent1"/>
+          </a:effectRef>
+          <a:fontRef idx="minor">
+            <a:schemeClr val="lt1"/>
+          </a:fontRef>
+        </p:style>
+        <p:txBody>
+          <a:bodyPr rtlCol="0" anchor="ctr"/>
+          <a:lstStyle/>
+          <a:p>
+            <a:pPr algn="ctr"/>
+          </a:p>
+        </p:txBody>
+      </p:sp>
+      <p:sp>
+        <p:nvSpPr>
+          <p:cNvPr id="33" name="Rectangle 32"/>
+          <p:cNvSpPr/>
+          <p:nvPr/>
+        </p:nvSpPr>
+        <p:spPr>
+          <a:xfrm>
+            <a:off x="367200" y="4428000"/>
+            <a:ext cx="43200" cy="324000"/>
+          </a:xfrm>
+          <a:prstGeom prst="rect">
+            <a:avLst/>
+          </a:prstGeom>
+          <a:solidFill>
+            <a:srgbClr val="B06000"/>
+          </a:solidFill>
+          <a:ln>
+            <a:noFill/>
+          </a:ln>
+        </p:spPr>
+        <p:style>
+          <a:lnRef idx="1">
+            <a:schemeClr val="accent1"/>
+          </a:lnRef>
+          <a:fillRef idx="3">
+            <a:schemeClr val="accent1"/>
+          </a:fillRef>
+          <a:effectRef idx="2">
+            <a:schemeClr val="accent1"/>
+          </a:effectRef>
+          <a:fontRef idx="minor">
+            <a:schemeClr val="lt1"/>
+          </a:fontRef>
+        </p:style>
+        <p:txBody>
+          <a:bodyPr rtlCol="0" anchor="ctr"/>
+          <a:lstStyle/>
+          <a:p>
+            <a:pPr algn="ctr"/>
+          </a:p>
+        </p:txBody>
+      </p:sp>
+      <p:sp>
+        <p:nvSpPr>
+          <p:cNvPr id="34" name="TextBox 33"/>
+          <p:cNvSpPr txBox="1"/>
+          <p:nvPr/>
+        </p:nvSpPr>
+        <p:spPr>
+          <a:xfrm>
+            <a:off x="446400" y="4446000"/>
+            <a:ext cx="2696400" cy="288000"/>
+          </a:xfrm>
+          <a:prstGeom prst="rect">
+            <a:avLst/>
+          </a:prstGeom>
+          <a:noFill/>
+        </p:spPr>
+        <p:txBody>
+          <a:bodyPr wrap="square">
+            <a:spAutoFit/>
+          </a:bodyPr>
+          <a:lstStyle/>
+          <a:p>
+            <a:pPr algn="l"/>
+            <a:r>
+              <a:rPr sz="750" b="0" i="0">
+                <a:solidFill>
+                  <a:srgbClr val="1B3A6B"/>
+                </a:solidFill>
+                <a:latin typeface="Calibri"/>
+              </a:rPr>
+              <a:t>Detresse : 49/100 — Vigilance</a:t>
+            </a:r>
+          </a:p>
+        </p:txBody>
+      </p:sp>
+      <p:sp>
+        <p:nvSpPr>
+          <p:cNvPr id="35" name="Rectangle 34"/>
+          <p:cNvSpPr/>
+          <p:nvPr/>
+        </p:nvSpPr>
+        <p:spPr>
+          <a:xfrm>
+            <a:off x="3243600" y="4428000"/>
+            <a:ext cx="2804400" cy="324000"/>
+          </a:xfrm>
+          <a:prstGeom prst="rect">
+            <a:avLst/>
+          </a:prstGeom>
+          <a:solidFill>
+            <a:srgbClr val="F0F4F8"/>
+          </a:solidFill>
+          <a:ln>
+            <a:noFill/>
+          </a:ln>
+        </p:spPr>
+        <p:style>
+          <a:lnRef idx="1">
+            <a:schemeClr val="accent1"/>
+          </a:lnRef>
+          <a:fillRef idx="3">
+            <a:schemeClr val="accent1"/>
+          </a:fillRef>
+          <a:effectRef idx="2">
+            <a:schemeClr val="accent1"/>
+          </a:effectRef>
+          <a:fontRef idx="minor">
+            <a:schemeClr val="lt1"/>
+          </a:fontRef>
+        </p:style>
+        <p:txBody>
+          <a:bodyPr rtlCol="0" anchor="ctr"/>
+          <a:lstStyle/>
+          <a:p>
+            <a:pPr algn="ctr"/>
+          </a:p>
+        </p:txBody>
+      </p:sp>
+      <p:sp>
+        <p:nvSpPr>
+          <p:cNvPr id="36" name="Rectangle 35"/>
+          <p:cNvSpPr/>
+          <p:nvPr/>
+        </p:nvSpPr>
+        <p:spPr>
+          <a:xfrm>
+            <a:off x="3243600" y="4428000"/>
+            <a:ext cx="43200" cy="324000"/>
+          </a:xfrm>
+          <a:prstGeom prst="rect">
+            <a:avLst/>
+          </a:prstGeom>
+          <a:solidFill>
+            <a:srgbClr val="B06000"/>
+          </a:solidFill>
+          <a:ln>
+            <a:noFill/>
+          </a:ln>
+        </p:spPr>
+        <p:style>
+          <a:lnRef idx="1">
+            <a:schemeClr val="accent1"/>
+          </a:lnRef>
+          <a:fillRef idx="3">
+            <a:schemeClr val="accent1"/>
+          </a:fillRef>
+          <a:effectRef idx="2">
+            <a:schemeClr val="accent1"/>
+          </a:effectRef>
+          <a:fontRef idx="minor">
+            <a:schemeClr val="lt1"/>
+          </a:fontRef>
+        </p:style>
+        <p:txBody>
+          <a:bodyPr rtlCol="0" anchor="ctr"/>
+          <a:lstStyle/>
+          <a:p>
+            <a:pPr algn="ctr"/>
+          </a:p>
+        </p:txBody>
+      </p:sp>
+      <p:sp>
+        <p:nvSpPr>
+          <p:cNvPr id="37" name="TextBox 36"/>
+          <p:cNvSpPr txBox="1"/>
+          <p:nvPr/>
+        </p:nvSpPr>
+        <p:spPr>
+          <a:xfrm>
+            <a:off x="3322800" y="4446000"/>
+            <a:ext cx="2696400" cy="288000"/>
+          </a:xfrm>
+          <a:prstGeom prst="rect">
+            <a:avLst/>
+          </a:prstGeom>
+          <a:noFill/>
+        </p:spPr>
+        <p:txBody>
+          <a:bodyPr wrap="square">
+            <a:spAutoFit/>
+          </a:bodyPr>
+          <a:lstStyle/>
+          <a:p>
+            <a:pPr algn="l"/>
+            <a:r>
+              <a:rPr sz="750" b="0" i="0">
+                <a:solidFill>
+                  <a:srgbClr val="1B3A6B"/>
+                </a:solidFill>
+                <a:latin typeface="Calibri"/>
+              </a:rPr>
+              <a:t>M&amp;A : 42/100 — Moderate</a:t>
+            </a:r>
+          </a:p>
+        </p:txBody>
+      </p:sp>
+      <p:sp>
+        <p:nvSpPr>
+          <p:cNvPr id="38" name="Rectangle 37"/>
+          <p:cNvSpPr/>
+          <p:nvPr/>
+        </p:nvSpPr>
+        <p:spPr>
+          <a:xfrm>
+            <a:off x="6123600" y="4428000"/>
+            <a:ext cx="2804400" cy="324000"/>
+          </a:xfrm>
+          <a:prstGeom prst="rect">
+            <a:avLst/>
+          </a:prstGeom>
+          <a:solidFill>
+            <a:srgbClr val="F0F4F8"/>
+          </a:solidFill>
+          <a:ln>
+            <a:noFill/>
+          </a:ln>
+        </p:spPr>
+        <p:style>
+          <a:lnRef idx="1">
+            <a:schemeClr val="accent1"/>
+          </a:lnRef>
+          <a:fillRef idx="3">
+            <a:schemeClr val="accent1"/>
+          </a:fillRef>
+          <a:effectRef idx="2">
+            <a:schemeClr val="accent1"/>
+          </a:effectRef>
+          <a:fontRef idx="minor">
+            <a:schemeClr val="lt1"/>
+          </a:fontRef>
+        </p:style>
+        <p:txBody>
+          <a:bodyPr rtlCol="0" anchor="ctr"/>
+          <a:lstStyle/>
+          <a:p>
+            <a:pPr algn="ctr"/>
+          </a:p>
+        </p:txBody>
+      </p:sp>
+      <p:sp>
+        <p:nvSpPr>
+          <p:cNvPr id="39" name="Rectangle 38"/>
+          <p:cNvSpPr/>
+          <p:nvPr/>
+        </p:nvSpPr>
+        <p:spPr>
+          <a:xfrm>
+            <a:off x="6123600" y="4428000"/>
+            <a:ext cx="43200" cy="324000"/>
+          </a:xfrm>
+          <a:prstGeom prst="rect">
+            <a:avLst/>
+          </a:prstGeom>
+          <a:solidFill>
+            <a:srgbClr val="B06000"/>
+          </a:solidFill>
+          <a:ln>
+            <a:noFill/>
+          </a:ln>
+        </p:spPr>
+        <p:style>
+          <a:lnRef idx="1">
+            <a:schemeClr val="accent1"/>
+          </a:lnRef>
+          <a:fillRef idx="3">
+            <a:schemeClr val="accent1"/>
+          </a:fillRef>
+          <a:effectRef idx="2">
+            <a:schemeClr val="accent1"/>
+          </a:effectRef>
+          <a:fontRef idx="minor">
+            <a:schemeClr val="lt1"/>
+          </a:fontRef>
+        </p:style>
+        <p:txBody>
+          <a:bodyPr rtlCol="0" anchor="ctr"/>
+          <a:lstStyle/>
+          <a:p>
+            <a:pPr algn="ctr"/>
+          </a:p>
+        </p:txBody>
+      </p:sp>
+      <p:sp>
+        <p:nvSpPr>
+          <p:cNvPr id="40" name="TextBox 39"/>
+          <p:cNvSpPr txBox="1"/>
+          <p:nvPr/>
+        </p:nvSpPr>
+        <p:spPr>
+          <a:xfrm>
+            <a:off x="6202800" y="4446000"/>
+            <a:ext cx="2696400" cy="288000"/>
+          </a:xfrm>
+          <a:prstGeom prst="rect">
+            <a:avLst/>
+          </a:prstGeom>
+          <a:noFill/>
+        </p:spPr>
+        <p:txBody>
+          <a:bodyPr wrap="square">
+            <a:spAutoFit/>
+          </a:bodyPr>
+          <a:lstStyle/>
+          <a:p>
+            <a:pPr algn="l"/>
+            <a:r>
+              <a:rPr sz="750" b="0" i="0">
+                <a:solidFill>
+                  <a:srgbClr val="1B3A6B"/>
+                </a:solidFill>
+                <a:latin typeface="Calibri"/>
+              </a:rPr>
+              <a:t>Regime : Volatile  Rec.6M:26%</a:t>
+            </a:r>
+          </a:p>
+        </p:txBody>
+      </p:sp>
     </p:spTree>
   </p:cSld>
   <p:clrMapOvr>
@@ -14974,7 +15337,7 @@
                 </a:solidFill>
                 <a:latin typeface="Calibri"/>
               </a:rPr>
-              <a:t>Neutre</a:t>
+              <a:t>Neutre +</a:t>
             </a:r>
           </a:p>
         </p:txBody>
@@ -15044,7 +15407,7 @@
                 </a:solidFill>
                 <a:latin typeface="Calibri"/>
               </a:rPr>
-              <a:t>Score agrégé : -0,087</a:t>
+              <a:t>Score agrégé : +0,255</a:t>
             </a:r>
           </a:p>
         </p:txBody>
@@ -15356,7 +15719,7 @@
                 </a:solidFill>
                 <a:latin typeface="Calibri"/>
               </a:rPr>
-              <a:t>45,0 %</a:t>
+              <a:t>49,8 %</a:t>
             </a:r>
           </a:p>
         </p:txBody>
@@ -15812,7 +16175,7 @@
                           </a:solidFill>
                           <a:latin typeface="Calibri"/>
                         </a:rPr>
-                        <a:t>5</a:t>
+                        <a:t>10</a:t>
                       </a:r>
                     </a:p>
                   </a:txBody>
@@ -15835,7 +16198,7 @@
                           </a:solidFill>
                           <a:latin typeface="Calibri"/>
                         </a:rPr>
-                        <a:t>+0,231</a:t>
+                        <a:t>+0,378</a:t>
                       </a:r>
                     </a:p>
                   </a:txBody>
@@ -15858,7 +16221,7 @@
                           </a:solidFill>
                           <a:latin typeface="Calibri"/>
                         </a:rPr>
-                        <a:t>Expansion des services cloud à +20% YoY d'ici 2027, avec une marge EBITDA cible de 75% via l'augmentation des abonnements tiers | Horizon 2026-2027</a:t>
+                        <a:t>Lancement iPhone 16 avec IA générative en 2026 : +10% CA et +200pb de marge services | Horizon 2026-2027</a:t>
                       </a:r>
                     </a:p>
                   </a:txBody>
@@ -15906,7 +16269,7 @@
                           </a:solidFill>
                           <a:latin typeface="Calibri"/>
                         </a:rPr>
-                        <a:t>16</a:t>
+                        <a:t>18</a:t>
                       </a:r>
                     </a:p>
                   </a:txBody>
@@ -15929,7 +16292,7 @@
                           </a:solidFill>
                           <a:latin typeface="Calibri"/>
                         </a:rPr>
-                        <a:t>+0,450</a:t>
+                        <a:t>+0,498</a:t>
                       </a:r>
                     </a:p>
                   </a:txBody>
@@ -16000,7 +16363,7 @@
                           </a:solidFill>
                           <a:latin typeface="Calibri"/>
                         </a:rPr>
-                        <a:t>9</a:t>
+                        <a:t>2</a:t>
                       </a:r>
                     </a:p>
                   </a:txBody>
@@ -16023,7 +16386,7 @@
                           </a:solidFill>
                           <a:latin typeface="Calibri"/>
                         </a:rPr>
-                        <a:t>+0,319</a:t>
+                        <a:t>+0,124</a:t>
                       </a:r>
                     </a:p>
                   </a:txBody>
@@ -16046,7 +16409,7 @@
                           </a:solidFill>
                           <a:latin typeface="Calibri"/>
                         </a:rPr>
-                        <a:t>Régulation européenne sur l'App Store réduisant les commissions de 30% à 15% d'ici 2027, impactant les revenus services de -12% | Horizon 2026-2027</a:t>
+                        <a:t>Régulation antitrust US/EU sur App Store : perte de 10-15% revenus services d'ici 2027 | Horizon 12-18 mois</a:t>
                       </a:r>
                     </a:p>
                   </a:txBody>
@@ -16091,7 +16454,7 @@
                 </a:solidFill>
                 <a:latin typeface="Calibri"/>
               </a:rPr>
-              <a:t>La presse financière souligne les défis d'Apple face à l'IA et à la concurrence, tout en saluant ses initiatives stratégiques comme l'ouverture de Siri. Les annonces sur les bonus et l'innovation sont perçues positivement, mais les prédictions de déclin relatif pèsent sur le sentiment.</a:t>
+              <a:t>La presse financière souligne la résilience et le potentiel de croissance d'Apple à l'approche de son 50e anniversaire. Les analyses mettent en avant son ancrage dans l'innovation et les opportunités liées à l'IA et aux wearables.</a:t>
             </a:r>
           </a:p>
         </p:txBody>
@@ -16690,7 +17053,7 @@
                 </a:solidFill>
                 <a:latin typeface="Calibri"/>
               </a:rPr>
-              <a:t>Répartition de l'actionnariat  ·  Au 29 mars 2026</a:t>
+              <a:t>Répartition de l'actionnariat  ·  Au 1 avril 2026</a:t>
             </a:r>
           </a:p>
         </p:txBody>
@@ -19029,7 +19392,7 @@
                 </a:solidFill>
                 <a:latin typeface="Calibri"/>
               </a:rPr>
-              <a:t>Prime de 20% vs mediane peers (EV/EBITDA 21x) justifiée par la qualité des actifs et la croissance des services. Décote de 15% sur P/E vs Microsoft reflète une croissance plus volatile mais mieux diversifiée.</a:t>
+              <a:t>Apple cote à 26.2x EV/EBITDA vs 22.5x pour la médiane peers tech. La prime de 16% se justifie par la qualité des actifs et la croissance des services.</a:t>
             </a:r>
           </a:p>
         </p:txBody>
@@ -19359,7 +19722,7 @@
                 </a:solidFill>
                 <a:latin typeface="Calibri"/>
               </a:rPr>
-              <a:t>Prix cible base : 285 $  ·  Upside : +14,5 %  ·  Bear : 240 $ (-3,5 %)  ·  Bull : 320 $ (+28,6 %)</a:t>
+              <a:t>Prix cible base : 285 $  ·  Upside : +12,3 %  ·  Bear : 240 $ (-5,4 %)  ·  Bull : 320 $ (+26,1 %)</a:t>
             </a:r>
           </a:p>
         </p:txBody>
@@ -19550,7 +19913,7 @@
                 </a:solidFill>
                 <a:latin typeface="Calibri"/>
               </a:rPr>
-              <a:t>Croissance des services à +15% YoY d'ici 2027 grâce à l'expansion des abonnements tiers et à l'augmentation des prix des commissions</a:t>
+              <a:t>Apple devrait bénéficier d'un cycle iPhone 16/17 avec +8% de ventes en 2026 grâce à l'IA intégrée et un prix moyen en hausse de 5%</a:t>
             </a:r>
           </a:p>
         </p:txBody>
@@ -19628,7 +19991,7 @@
                 </a:solidFill>
                 <a:latin typeface="Calibri"/>
               </a:rPr>
-              <a:t>Pricing power</a:t>
+              <a:t>Marges services élevées</a:t>
             </a:r>
           </a:p>
         </p:txBody>
@@ -19663,7 +20026,7 @@
                 </a:solidFill>
                 <a:latin typeface="Calibri"/>
               </a:rPr>
-              <a:t>Marges nettes soutenues à 27% via le mix services (70% EBITDA) et la réduction des coûts logistiques sur l'iPhone</a:t>
+              <a:t>La marge services pourrait atteindre 72% en 2027 avec 1.8Md d'abonnés, boostant le CA de 12%</a:t>
             </a:r>
           </a:p>
         </p:txBody>
@@ -19741,7 +20104,7 @@
                 </a:solidFill>
                 <a:latin typeface="Calibri"/>
               </a:rPr>
-              <a:t>Cash generation</a:t>
+              <a:t>Trésorerie record</a:t>
             </a:r>
           </a:p>
         </p:txBody>
@@ -19776,7 +20139,7 @@
                 </a:solidFill>
                 <a:latin typeface="Calibri"/>
               </a:rPr>
-              <a:t>Valorisation à 28x P/E justifiée par un ROIC de 84% et une croissance organique supérieure aux peers technologiques</a:t>
+              <a:t>L'IA générative sur iPhone pourrait ajouter 15-20Md$ de revenus annuels d'ici 2028 via partenariats cloud et services premium.</a:t>
             </a:r>
           </a:p>
         </p:txBody>
@@ -19932,7 +20295,7 @@
                 </a:solidFill>
                 <a:latin typeface="Calibri"/>
               </a:rPr>
-              <a:t>Régulation App Store</a:t>
+              <a:t>Régulation antitrust</a:t>
             </a:r>
           </a:p>
         </p:txBody>
@@ -19967,7 +20330,7 @@
                 </a:solidFill>
                 <a:latin typeface="Calibri"/>
               </a:rPr>
-              <a:t>Régulation européenne sur l'App Store réduisant les commissions de 30% à 15% d'ici 2027, impactant les revenus services de -12% | Horizon 2026-2027</a:t>
+              <a:t>Régulation antitrust US/EU sur App Store : perte de 10-15% revenus services d'ici 2027 | Horizon 12-18 mois</a:t>
             </a:r>
           </a:p>
         </p:txBody>
@@ -20080,7 +20443,7 @@
                 </a:solidFill>
                 <a:latin typeface="Calibri"/>
               </a:rPr>
-              <a:t>Concurrence accrue en IA (Google, Meta) avec une perte de part de marché sur les services cloud (-8% CA d'ici 2027) | Horizon 2026</a:t>
+              <a:t>Concurrence accrue en IA (Google, Microsoft) : compression marges services de 500pb d'ici 2027 | Horizon 2026-2028</a:t>
             </a:r>
           </a:p>
         </p:txBody>
@@ -20193,7 +20556,7 @@
                 </a:solidFill>
                 <a:latin typeface="Calibri"/>
               </a:rPr>
-              <a:t>Ralentissement économique en Chine (-5% croissance iPhone en 2026) et dépréciation du yuan de -10% impactant les marges de 200bps | Horizon 2026</a:t>
+              <a:t>Ralentissement macro en Chine : -15% ventes iPhone en 2026 | Horizon 6-12 mois</a:t>
             </a:r>
           </a:p>
         </p:txBody>
@@ -20400,7 +20763,7 @@
                 </a:solidFill>
                 <a:latin typeface="Calibri"/>
               </a:rPr>
-              <a:t>25,7x</a:t>
+              <a:t>26,2x</a:t>
             </a:r>
           </a:p>
         </p:txBody>
@@ -20470,7 +20833,7 @@
                 </a:solidFill>
                 <a:latin typeface="Calibri"/>
               </a:rPr>
-              <a:t>vs 18,0x médiane peers</a:t>
+              <a:t>vs 22,1x médiane peers</a:t>
             </a:r>
           </a:p>
         </p:txBody>
@@ -20591,7 +20954,7 @@
                 </a:solidFill>
                 <a:latin typeface="Calibri"/>
               </a:rPr>
-              <a:t>10,4 %</a:t>
+              <a:t>10,3 %</a:t>
             </a:r>
           </a:p>
         </p:txBody>
@@ -20661,7 +21024,7 @@
                 </a:solidFill>
                 <a:latin typeface="Calibri"/>
               </a:rPr>
-              <a:t>Beta 1,12  ·  RFR 4,4 %</a:t>
+              <a:t>Beta 1,12  ·  RFR 4,3 %</a:t>
             </a:r>
           </a:p>
         </p:txBody>
@@ -20852,7 +21215,7 @@
                 </a:solidFill>
                 <a:latin typeface="Calibri"/>
               </a:rPr>
-              <a:t>Upside de +14,5 % vs cours</a:t>
+              <a:t>Upside de +12,3 % vs cours</a:t>
             </a:r>
           </a:p>
         </p:txBody>
@@ -20973,7 +21336,7 @@
                 </a:solidFill>
                 <a:latin typeface="Calibri"/>
               </a:rPr>
-              <a:t>-0,087</a:t>
+              <a:t>+0,255</a:t>
             </a:r>
           </a:p>
         </p:txBody>
@@ -21043,7 +21406,7 @@
                 </a:solidFill>
                 <a:latin typeface="Calibri"/>
               </a:rPr>
-              <a:t>Neutre  ·  30 articles</a:t>
+              <a:t>Neutre +  ·  30 articles</a:t>
             </a:r>
           </a:p>
         </p:txBody>
@@ -21642,7 +22005,7 @@
                 </a:solidFill>
                 <a:latin typeface="Calibri"/>
               </a:rPr>
-              <a:t>AAPL  ·  USD  ·  Au 29 mars 2026</a:t>
+              <a:t>AAPL  ·  USD  ·  Au 1 avril 2026</a:t>
             </a:r>
           </a:p>
         </p:txBody>
@@ -21763,7 +22126,7 @@
                 </a:solidFill>
                 <a:latin typeface="Calibri"/>
               </a:rPr>
-              <a:t>248,80 $</a:t>
+              <a:t>253,79 $</a:t>
             </a:r>
           </a:p>
         </p:txBody>
@@ -22231,7 +22594,7 @@
                 </a:solidFill>
                 <a:latin typeface="Calibri"/>
               </a:rPr>
-              <a:t>+17,6 %</a:t>
+              <a:t>+19,9 %</a:t>
             </a:r>
           </a:p>
         </p:txBody>
@@ -23260,8 +23623,8 @@
         </p:nvSpPr>
         <p:spPr>
           <a:xfrm>
-            <a:off x="7854300" y="2925819"/>
-            <a:ext cx="498636" cy="969380"/>
+            <a:off x="7854300" y="2834096"/>
+            <a:ext cx="498636" cy="1061103"/>
           </a:xfrm>
           <a:prstGeom prst="rect">
             <a:avLst/>
@@ -23672,7 +24035,7 @@
                 </a:solidFill>
                 <a:latin typeface="Calibri"/>
               </a:rPr>
-              <a:t>Apple affiche une résilience opérationnelle exceptionnelle avec des marges nettes à 26.9% et un ROE de 151.9%. La valorisation reste attractive malgré une prime modérée vs peers, soutenue par une génération de cash robuste et un écosystème intégré unique.</a:t>
+              <a:t>Apple affiche une résilience opérationnelle exceptionnelle avec des marges en expansion et une trésorerie abondante. Le titre reste attractif malgré une valorisation premium, soutenue par des catalyseurs structurels concrets.</a:t>
             </a:r>
           </a:p>
         </p:txBody>
@@ -24715,7 +25078,7 @@
                 </a:solidFill>
                 <a:latin typeface="Calibri"/>
               </a:rPr>
-              <a:t>Régulation App Store  ·  Concurrence IA</a:t>
+              <a:t>Régulation antitrust  ·  Concurrence IA</a:t>
             </a:r>
           </a:p>
         </p:txBody>
@@ -25949,7 +26312,7 @@
                 </a:solidFill>
                 <a:latin typeface="Calibri"/>
               </a:rPr>
-              <a:t>Apple conçoit et commercialise des produits technologiques premium (iPhone, Mac, iPad, services) avec un positionnement haut de gamme axé sur l'expérience utilisateur et l'écosystème fermé. Leader sur le segment premium des smartphones (20% de part de marché mondiale) et des services (25% de marge EBITDA). Avantages concurrentiels : intégration verticale, fidélisation client via l'Apple ID, et pouvoir de pricing exceptionnel avec des marges brutes à 46.9%. L'entreprise articule son activité autour de deux segments stratégiques :</a:t>
+              <a:t>Apple conçoit et commercialise des produits technologiques innovants (iPhone, Mac, services) avec un écosystème intégré unique. Positionné en haut de gamme, le groupe domine par sa marque premium et son intégration verticale. Son avantage concurrentiel repose sur la fidélisation client, la marge élevée des services et l'innovation continue. L'entreprise articule son activité autour de deux segments stratégiques :</a:t>
             </a:r>
           </a:p>
         </p:txBody>
@@ -26062,7 +26425,7 @@
                 </a:solidFill>
                 <a:latin typeface="Calibri"/>
               </a:rPr>
-              <a:t>Ventes de matériel (iPhone 60%, Mac 10%, iPad 8%, Wearables 10%) avec modèle basé sur des cycles de renouvellement de 3-4 ans et une stratégie de prix premium. Clients : consommateurs haut de gamme et entreprises via programmes BYOD. Croissance tirée par l'innovation (puces M-series) et l'expansion géographique en Asie.</a:t>
+              <a:t>Ventes de matériel (iPhone 65% CA 2025) avec mix premium et forte marge brute 47%. Clients B2C et B2B via distributeurs et retail direct. Moteurs : cycles de remplacement iPhone (4-5 ans) et expansion services (Apple Care, accessoires).</a:t>
             </a:r>
           </a:p>
         </p:txBody>
@@ -26175,7 +26538,7 @@
                 </a:solidFill>
                 <a:latin typeface="Calibri"/>
               </a:rPr>
-              <a:t>Abonnements (Apple Music, iCloud, App Store, Apple TV+) générant des revenus récurrents (20% du CA total) avec une marge EBITDA de 70%. Modèle basé sur des commissions (30% standard) et des abonnements tiers. Clients : base installée de 1.5 milliard d'appareils actifs. Croissance portée par les services cloud et la publicité (Search Ads).</a:t>
+              <a:t>Abonnements (App Store, Apple Music, iCloud) générant 20% CA 2025 avec marge brute 70%. Modèle récurrent et peu cyclique. Clients fidélisés via écosystème fermé. Croissance tirée par +15% YoY des abonnés (1.5Md en 2025).</a:t>
             </a:r>
           </a:p>
         </p:txBody>
@@ -26296,7 +26659,7 @@
                 </a:solidFill>
                 <a:latin typeface="Calibri"/>
               </a:rPr>
-              <a:t>3 652,7 Mds$</a:t>
+              <a:t>3 725,9 Mds$</a:t>
             </a:r>
           </a:p>
         </p:txBody>
@@ -26608,7 +26971,7 @@
                 </a:solidFill>
                 <a:latin typeface="Calibri"/>
               </a:rPr>
-              <a:t>248,80 $</a:t>
+              <a:t>253,79 $</a:t>
             </a:r>
           </a:p>
         </p:txBody>
@@ -26764,7 +27127,7 @@
                 </a:solidFill>
                 <a:latin typeface="Calibri"/>
               </a:rPr>
-              <a:t>25,7x</a:t>
+              <a:t>26,2x</a:t>
             </a:r>
           </a:p>
         </p:txBody>
@@ -26834,7 +27197,7 @@
                 </a:solidFill>
                 <a:latin typeface="Calibri"/>
               </a:rPr>
-              <a:t>P/E : 32,6x</a:t>
+              <a:t>P/E : 33,3x</a:t>
             </a:r>
           </a:p>
         </p:txBody>
@@ -27554,7 +27917,7 @@
                 </a:solidFill>
                 <a:latin typeface="Calibri"/>
               </a:rPr>
-              <a:t>88%</a:t>
+              <a:t>65%</a:t>
             </a:r>
           </a:p>
         </p:txBody>
@@ -27702,7 +28065,7 @@
                 </a:solidFill>
                 <a:latin typeface="Calibri"/>
               </a:rPr>
-              <a:t>Ventes de matériel (iPhone 60%, Mac 10%, iPad 8%, Wearables 10%) avec modèle basé sur des cycles de renouvellement de 3-4 ans et une stratégie de prix premium. Clients : consommateurs haut de gamme et entreprises via programmes BYOD. Croissance tirée par l'innovation (puces M-series) et l'expansion géographique en Asie.</a:t>
+              <a:t>Ventes de matériel (iPhone 65% CA 2025) avec mix premium et forte marge brute 47%. Clients B2C et B2B via distributeurs et retail direct. Moteurs : cycles de remplacement iPhone (4-5 ans) et expansion services (Apple Care, accessoires).</a:t>
             </a:r>
           </a:p>
         </p:txBody>
@@ -27823,7 +28186,7 @@
                 </a:solidFill>
                 <a:latin typeface="Calibri"/>
               </a:rPr>
-              <a:t>12%</a:t>
+              <a:t>20%</a:t>
             </a:r>
           </a:p>
         </p:txBody>
@@ -27971,7 +28334,7 @@
                 </a:solidFill>
                 <a:latin typeface="Calibri"/>
               </a:rPr>
-              <a:t>Abonnements (Apple Music, iCloud, App Store, Apple TV+) générant des revenus récurrents (20% du CA total) avec une marge EBITDA de 70%. Modèle basé sur des commissions (30% standard) et des abonnements tiers. Clients : base installée de 1.5 milliard d'appareils actifs. Croissance portée par les services cloud et la publicité (Search Ads).</a:t>
+              <a:t>Abonnements (App Store, Apple Music, iCloud) générant 20% CA 2025 avec marge brute 70%. Modèle récurrent et peu cyclique. Clients fidélisés via écosystème fermé. Croissance tirée par +15% YoY des abonnés (1.5Md en 2025).</a:t>
             </a:r>
           </a:p>
         </p:txBody>
@@ -29100,7 +29463,7 @@
                           </a:solidFill>
                           <a:latin typeface="Calibri"/>
                         </a:rPr>
-                        <a:t>445,0</a:t>
+                        <a:t>443,5</a:t>
                       </a:r>
                     </a:p>
                   </a:txBody>
@@ -29123,7 +29486,7 @@
                           </a:solidFill>
                           <a:latin typeface="Calibri"/>
                         </a:rPr>
-                        <a:t>480,0</a:t>
+                        <a:t>475,0</a:t>
                       </a:r>
                     </a:p>
                   </a:txBody>
@@ -29240,7 +29603,7 @@
                           </a:solidFill>
                           <a:latin typeface="Calibri"/>
                         </a:rPr>
-                        <a:t>+7,0 %</a:t>
+                        <a:t>+6,6 %</a:t>
                       </a:r>
                     </a:p>
                   </a:txBody>
@@ -29263,7 +29626,7 @@
                           </a:solidFill>
                           <a:latin typeface="Calibri"/>
                         </a:rPr>
-                        <a:t>+7,9 %</a:t>
+                        <a:t>+7,1 %</a:t>
                       </a:r>
                     </a:p>
                   </a:txBody>
@@ -29380,7 +29743,7 @@
                           </a:solidFill>
                           <a:latin typeface="Calibri"/>
                         </a:rPr>
-                        <a:t>211,4</a:t>
+                        <a:t>210,7</a:t>
                       </a:r>
                     </a:p>
                   </a:txBody>
@@ -29403,7 +29766,7 @@
                           </a:solidFill>
                           <a:latin typeface="Calibri"/>
                         </a:rPr>
-                        <a:t>230,4</a:t>
+                        <a:t>228,0</a:t>
                       </a:r>
                     </a:p>
                   </a:txBody>
@@ -29660,7 +30023,7 @@
                           </a:solidFill>
                           <a:latin typeface="Calibri"/>
                         </a:rPr>
-                        <a:t>162,0</a:t>
+                        <a:t>161,0</a:t>
                       </a:r>
                     </a:p>
                   </a:txBody>
@@ -29683,7 +30046,7 @@
                           </a:solidFill>
                           <a:latin typeface="Calibri"/>
                         </a:rPr>
-                        <a:t>178,0</a:t>
+                        <a:t>175,0</a:t>
                       </a:r>
                     </a:p>
                   </a:txBody>
@@ -29800,7 +30163,7 @@
                           </a:solidFill>
                           <a:latin typeface="Calibri"/>
                         </a:rPr>
-                        <a:t>36,4 %</a:t>
+                        <a:t>36,3 %</a:t>
                       </a:r>
                     </a:p>
                   </a:txBody>
@@ -29823,7 +30186,7 @@
                           </a:solidFill>
                           <a:latin typeface="Calibri"/>
                         </a:rPr>
-                        <a:t>37,1 %</a:t>
+                        <a:t>36,8 %</a:t>
                       </a:r>
                     </a:p>
                   </a:txBody>
@@ -29940,7 +30303,7 @@
                           </a:solidFill>
                           <a:latin typeface="Calibri"/>
                         </a:rPr>
-                        <a:t>121,0</a:t>
+                        <a:t>118,0</a:t>
                       </a:r>
                     </a:p>
                   </a:txBody>
@@ -29963,7 +30326,7 @@
                           </a:solidFill>
                           <a:latin typeface="Calibri"/>
                         </a:rPr>
-                        <a:t>133,0</a:t>
+                        <a:t>128,0</a:t>
                       </a:r>
                     </a:p>
                   </a:txBody>
@@ -30080,7 +30443,7 @@
                           </a:solidFill>
                           <a:latin typeface="Calibri"/>
                         </a:rPr>
-                        <a:t>27,2 %</a:t>
+                        <a:t>26,6 %</a:t>
                       </a:r>
                     </a:p>
                   </a:txBody>
@@ -30103,7 +30466,7 @@
                           </a:solidFill>
                           <a:latin typeface="Calibri"/>
                         </a:rPr>
-                        <a:t>27,7 %</a:t>
+                        <a:t>27,0 %</a:t>
                       </a:r>
                     </a:p>
                   </a:txBody>
@@ -30148,7 +30511,7 @@
                 </a:solidFill>
                 <a:latin typeface="Calibri"/>
               </a:rPr>
-              <a:t>Croissance du CA à +6.4% en 2025 portée par les services (+18% YoY) et l'iPhone en Chine (+12% YoY). Marges nettes en hausse de 290bps grâce au mix services (12% du CA) et à la réduction des coûts de supply chain (-15% sur les composants mémoire). Free cash flow de 110Mds$ en 2025, soit 26% du CA, renforçant la capacité d'investissement dans l'IA et les wearables.</a:t>
+              <a:t>Croissance CA 6.4% en 2025 portée par services (+12%) et iPhone (+5%). Marges en expansion grâce au mix services et à la discipline des coûts fixes. Génération de cash libre de 110Md$ en 2025, renforçant la solidité bilancielle et la capacité d'investissement R&amp;D.</a:t>
             </a:r>
           </a:p>
         </p:txBody>
@@ -31880,7 +32243,7 @@
                           </a:solidFill>
                           <a:latin typeface="Calibri"/>
                         </a:rPr>
-                        <a:t>9,83</a:t>
+                        <a:t>1,69</a:t>
                       </a:r>
                     </a:p>
                   </a:txBody>
@@ -31926,7 +32289,7 @@
                           </a:solidFill>
                           <a:latin typeface="Calibri"/>
                         </a:rPr>
-                        <a:t>✅</a:t>
+                        <a:t>❌</a:t>
                       </a:r>
                     </a:p>
                   </a:txBody>
@@ -32065,7 +32428,7 @@
                 </a:solidFill>
                 <a:latin typeface="Calibri"/>
               </a:rPr>
-              <a:t>Croissance du CA à +6.4% en 2025 portée par les services (+18% YoY) et l'iPhone en Chine (+12% YoY). Marges nettes en hausse de 290bps grâce au mix services (12% du CA) et à la réduction des coûts de supply chain (-15% sur les composants mémoire). Free cash flow de 110Mds$ en 2025, soit 26% du CA, renforçant la capacité d'investissement dans l'IA et les wearables.</a:t>
+              <a:t>Croissance CA 6.4% en 2025 portée par services (+12%) et iPhone (+5%). Marges en expansion grâce au mix services et à la discipline des coûts fixes. Génération de cash libre de 110Md$ en 2025, renforçant la solidité bilancielle et la capacité d'investissement R&amp;D.</a:t>
             </a:r>
           </a:p>
         </p:txBody>

--- a/preview/AAPL/AAPL_pitchbook.pptx
+++ b/preview/AAPL/AAPL_pitchbook.pptx
@@ -6138,7 +6138,7 @@
                 </a:solidFill>
                 <a:latin typeface="Calibri"/>
               </a:rPr>
-              <a:t>Marges brutes passées de 43.3% (2022) à 46.9% (2025) via mix iPhone premium et services. EBITDA margin stable à 34.8% malgré hausse coûts R&amp;D (8% CA). Net margin à 26.9% reflète le levier opérationnel et pricing power. Ces niveaux sont durables grâce à la fidélisation client et à l'effet volume sur les services.</a:t>
+              <a:t>Marges brutes passées de 43.3% à 46.9% entre 2022-2025 via levier opérationnel et mix produit favorable. Les marges EBITDA/nettes ont progressé de 32.8% à 34.8% et 24.0% à 26.9% respectivement. Cette amélioration reflète le pricing power, la réduction des coûts logistiques et la montée en puissance des services à haute marge.</a:t>
             </a:r>
           </a:p>
         </p:txBody>
@@ -8289,7 +8289,7 @@
                           </a:solidFill>
                           <a:latin typeface="Calibri"/>
                         </a:rPr>
-                        <a:t>392</a:t>
+                        <a:t>393</a:t>
                       </a:r>
                     </a:p>
                   </a:txBody>
@@ -8375,7 +8375,7 @@
                           </a:solidFill>
                           <a:latin typeface="Calibri"/>
                         </a:rPr>
-                        <a:t>483</a:t>
+                        <a:t>484</a:t>
                       </a:r>
                     </a:p>
                   </a:txBody>
@@ -8635,7 +8635,7 @@
                           </a:solidFill>
                           <a:latin typeface="Calibri"/>
                         </a:rPr>
-                        <a:t>392</a:t>
+                        <a:t>393</a:t>
                       </a:r>
                     </a:p>
                   </a:txBody>
@@ -9480,7 +9480,7 @@
                 </a:solidFill>
                 <a:latin typeface="Calibri"/>
               </a:rPr>
-              <a:t>WACC 10.3% et TGR 3.0% impliquent un prix DCF implicite de 275$ (vs 253.79$). La prime de 8% suggère une sous-valorisation structurelle liée à la croissance des services et à l'IA. Catalyseur clé : lancement iPhone 16 avec fonctionnalités IA générative en 2026.</a:t>
+              <a:t>Avec un WACC de 10.3% et TGR de 3.0%, le DCF implicite est de 285$ (base), soit +12% vs cours actuel. La prime reflète une croissance durable et une trésorerie sous-évaluée. Un catalyseur clé serait l'accélération des services ou un nouveau cycle iPhone.</a:t>
             </a:r>
           </a:p>
         </p:txBody>
@@ -10613,7 +10613,7 @@
                           </a:solidFill>
                           <a:latin typeface="Calibri"/>
                         </a:rPr>
-                        <a:t>38,2x</a:t>
+                        <a:t>35,1x</a:t>
                       </a:r>
                     </a:p>
                   </a:txBody>
@@ -10636,7 +10636,7 @@
                           </a:solidFill>
                           <a:latin typeface="Calibri"/>
                         </a:rPr>
-                        <a:t>6800,0 %</a:t>
+                        <a:t>68,0 %</a:t>
                       </a:r>
                     </a:p>
                   </a:txBody>
@@ -10659,7 +10659,7 @@
                           </a:solidFill>
                           <a:latin typeface="Calibri"/>
                         </a:rPr>
-                        <a:t>5200,0 %</a:t>
+                        <a:t>46,0 %</a:t>
                       </a:r>
                     </a:p>
                   </a:txBody>
@@ -10684,7 +10684,7 @@
                           </a:solidFill>
                           <a:latin typeface="Calibri"/>
                         </a:rPr>
-                        <a:t>Alphabet</a:t>
+                        <a:t>Samsung Electronics</a:t>
                       </a:r>
                     </a:p>
                   </a:txBody>
@@ -10707,7 +10707,7 @@
                           </a:solidFill>
                           <a:latin typeface="Calibri"/>
                         </a:rPr>
-                        <a:t>GOOGL</a:t>
+                        <a:t>005930.KS</a:t>
                       </a:r>
                     </a:p>
                   </a:txBody>
@@ -10730,7 +10730,7 @@
                           </a:solidFill>
                           <a:latin typeface="Calibri"/>
                         </a:rPr>
-                        <a:t>2 100,0</a:t>
+                        <a:t>420,0</a:t>
                       </a:r>
                     </a:p>
                   </a:txBody>
@@ -10753,7 +10753,7 @@
                           </a:solidFill>
                           <a:latin typeface="Calibri"/>
                         </a:rPr>
-                        <a:t>22,1x</a:t>
+                        <a:t>7,2x</a:t>
                       </a:r>
                     </a:p>
                   </a:txBody>
@@ -10776,7 +10776,7 @@
                           </a:solidFill>
                           <a:latin typeface="Calibri"/>
                         </a:rPr>
-                        <a:t>8,5x</a:t>
+                        <a:t>1,1x</a:t>
                       </a:r>
                     </a:p>
                   </a:txBody>
@@ -10799,7 +10799,7 @@
                           </a:solidFill>
                           <a:latin typeface="Calibri"/>
                         </a:rPr>
-                        <a:t>28,7x</a:t>
+                        <a:t>18,2x</a:t>
                       </a:r>
                     </a:p>
                   </a:txBody>
@@ -10822,7 +10822,7 @@
                           </a:solidFill>
                           <a:latin typeface="Calibri"/>
                         </a:rPr>
-                        <a:t>5600,0 %</a:t>
+                        <a:t>45,0 %</a:t>
                       </a:r>
                     </a:p>
                   </a:txBody>
@@ -10845,7 +10845,7 @@
                           </a:solidFill>
                           <a:latin typeface="Calibri"/>
                         </a:rPr>
-                        <a:t>3800,0 %</a:t>
+                        <a:t>22,0 %</a:t>
                       </a:r>
                     </a:p>
                   </a:txBody>
@@ -10870,7 +10870,7 @@
                           </a:solidFill>
                           <a:latin typeface="Calibri"/>
                         </a:rPr>
-                        <a:t>Meta Platforms</a:t>
+                        <a:t>Alphabet</a:t>
                       </a:r>
                     </a:p>
                   </a:txBody>
@@ -10893,7 +10893,7 @@
                           </a:solidFill>
                           <a:latin typeface="Calibri"/>
                         </a:rPr>
-                        <a:t>META</a:t>
+                        <a:t>GOOGL</a:t>
                       </a:r>
                     </a:p>
                   </a:txBody>
@@ -10916,7 +10916,7 @@
                           </a:solidFill>
                           <a:latin typeface="Calibri"/>
                         </a:rPr>
-                        <a:t>1 500,0</a:t>
+                        <a:t>2 000,0</a:t>
                       </a:r>
                     </a:p>
                   </a:txBody>
@@ -10939,7 +10939,7 @@
                           </a:solidFill>
                           <a:latin typeface="Calibri"/>
                         </a:rPr>
-                        <a:t>18,9x</a:t>
+                        <a:t>22,1x</a:t>
                       </a:r>
                     </a:p>
                   </a:txBody>
@@ -10962,7 +10962,7 @@
                           </a:solidFill>
                           <a:latin typeface="Calibri"/>
                         </a:rPr>
-                        <a:t>10,2x</a:t>
+                        <a:t>8,5x</a:t>
                       </a:r>
                     </a:p>
                   </a:txBody>
@@ -10985,7 +10985,7 @@
                           </a:solidFill>
                           <a:latin typeface="Calibri"/>
                         </a:rPr>
-                        <a:t>25,1x</a:t>
+                        <a:t>28,3x</a:t>
                       </a:r>
                     </a:p>
                   </a:txBody>
@@ -11008,7 +11008,7 @@
                           </a:solidFill>
                           <a:latin typeface="Calibri"/>
                         </a:rPr>
-                        <a:t>8500,0 %</a:t>
+                        <a:t>56,0 %</a:t>
                       </a:r>
                     </a:p>
                   </a:txBody>
@@ -11031,7 +11031,7 @@
                           </a:solidFill>
                           <a:latin typeface="Calibri"/>
                         </a:rPr>
-                        <a:t>5500,0 %</a:t>
+                        <a:t>35,0 %</a:t>
                       </a:r>
                     </a:p>
                   </a:txBody>
@@ -11056,7 +11056,7 @@
                           </a:solidFill>
                           <a:latin typeface="Calibri"/>
                         </a:rPr>
-                        <a:t>Nvidia</a:t>
+                        <a:t>Meta Platforms</a:t>
                       </a:r>
                     </a:p>
                   </a:txBody>
@@ -11079,7 +11079,7 @@
                           </a:solidFill>
                           <a:latin typeface="Calibri"/>
                         </a:rPr>
-                        <a:t>NVDA</a:t>
+                        <a:t>META</a:t>
                       </a:r>
                     </a:p>
                   </a:txBody>
@@ -11102,7 +11102,7 @@
                           </a:solidFill>
                           <a:latin typeface="Calibri"/>
                         </a:rPr>
-                        <a:t>2 300,0</a:t>
+                        <a:t>1 500,0</a:t>
                       </a:r>
                     </a:p>
                   </a:txBody>
@@ -11125,7 +11125,7 @@
                           </a:solidFill>
                           <a:latin typeface="Calibri"/>
                         </a:rPr>
-                        <a:t>45,8x</a:t>
+                        <a:t>18,7x</a:t>
                       </a:r>
                     </a:p>
                   </a:txBody>
@@ -11148,7 +11148,7 @@
                           </a:solidFill>
                           <a:latin typeface="Calibri"/>
                         </a:rPr>
-                        <a:t>22,5x</a:t>
+                        <a:t>10,2x</a:t>
                       </a:r>
                     </a:p>
                   </a:txBody>
@@ -11171,7 +11171,7 @@
                           </a:solidFill>
                           <a:latin typeface="Calibri"/>
                         </a:rPr>
-                        <a:t>42,3x</a:t>
+                        <a:t>30,5x</a:t>
                       </a:r>
                     </a:p>
                   </a:txBody>
@@ -11194,7 +11194,7 @@
                           </a:solidFill>
                           <a:latin typeface="Calibri"/>
                         </a:rPr>
-                        <a:t>7600,0 %</a:t>
+                        <a:t>85,0 %</a:t>
                       </a:r>
                     </a:p>
                   </a:txBody>
@@ -11217,7 +11217,7 @@
                           </a:solidFill>
                           <a:latin typeface="Calibri"/>
                         </a:rPr>
-                        <a:t>6500,0 %</a:t>
+                        <a:t>55,0 %</a:t>
                       </a:r>
                     </a:p>
                   </a:txBody>
@@ -11242,7 +11242,7 @@
                           </a:solidFill>
                           <a:latin typeface="Calibri"/>
                         </a:rPr>
-                        <a:t>Samsung Electronics</a:t>
+                        <a:t>TSMC</a:t>
                       </a:r>
                     </a:p>
                   </a:txBody>
@@ -11265,7 +11265,7 @@
                           </a:solidFill>
                           <a:latin typeface="Calibri"/>
                         </a:rPr>
-                        <a:t>005930.KS</a:t>
+                        <a:t>TSM</a:t>
                       </a:r>
                     </a:p>
                   </a:txBody>
@@ -11288,7 +11288,7 @@
                           </a:solidFill>
                           <a:latin typeface="Calibri"/>
                         </a:rPr>
-                        <a:t>450,0</a:t>
+                        <a:t>550,0</a:t>
                       </a:r>
                     </a:p>
                   </a:txBody>
@@ -11311,7 +11311,7 @@
                           </a:solidFill>
                           <a:latin typeface="Calibri"/>
                         </a:rPr>
-                        <a:t>7,2x</a:t>
+                        <a:t>15,3x</a:t>
                       </a:r>
                     </a:p>
                   </a:txBody>
@@ -11334,7 +11334,7 @@
                           </a:solidFill>
                           <a:latin typeface="Calibri"/>
                         </a:rPr>
-                        <a:t>1,1x</a:t>
+                        <a:t>9,8x</a:t>
                       </a:r>
                     </a:p>
                   </a:txBody>
@@ -11357,7 +11357,7 @@
                           </a:solidFill>
                           <a:latin typeface="Calibri"/>
                         </a:rPr>
-                        <a:t>15,8x</a:t>
+                        <a:t>22,1x</a:t>
                       </a:r>
                     </a:p>
                   </a:txBody>
@@ -11380,7 +11380,7 @@
                           </a:solidFill>
                           <a:latin typeface="Calibri"/>
                         </a:rPr>
-                        <a:t>4500,0 %</a:t>
+                        <a:t>53,0 %</a:t>
                       </a:r>
                     </a:p>
                   </a:txBody>
@@ -11403,7 +11403,7 @@
                           </a:solidFill>
                           <a:latin typeface="Calibri"/>
                         </a:rPr>
-                        <a:t>2200,0 %</a:t>
+                        <a:t>48,0 %</a:t>
                       </a:r>
                     </a:p>
                   </a:txBody>
@@ -11497,7 +11497,7 @@
                           </a:solidFill>
                           <a:latin typeface="Calibri"/>
                         </a:rPr>
-                        <a:t>22,1x</a:t>
+                        <a:t>18,7x</a:t>
                       </a:r>
                     </a:p>
                   </a:txBody>
@@ -11520,7 +11520,7 @@
                           </a:solidFill>
                           <a:latin typeface="Calibri"/>
                         </a:rPr>
-                        <a:t>10,2x</a:t>
+                        <a:t>9,8x</a:t>
                       </a:r>
                     </a:p>
                   </a:txBody>
@@ -11543,7 +11543,7 @@
                           </a:solidFill>
                           <a:latin typeface="Calibri"/>
                         </a:rPr>
-                        <a:t>28,7x</a:t>
+                        <a:t>28,3x</a:t>
                       </a:r>
                     </a:p>
                   </a:txBody>
@@ -11566,7 +11566,7 @@
                           </a:solidFill>
                           <a:latin typeface="Calibri"/>
                         </a:rPr>
-                        <a:t>6800,0 %</a:t>
+                        <a:t>56,0 %</a:t>
                       </a:r>
                     </a:p>
                   </a:txBody>
@@ -11589,7 +11589,7 @@
                           </a:solidFill>
                           <a:latin typeface="Calibri"/>
                         </a:rPr>
-                        <a:t>5200,0 %</a:t>
+                        <a:t>46,0 %</a:t>
                       </a:r>
                     </a:p>
                   </a:txBody>
@@ -11634,7 +11634,7 @@
                 </a:solidFill>
                 <a:latin typeface="Calibri"/>
               </a:rPr>
-              <a:t>Apple cote 33.3x P/E vs 28.5x pour la médiane peers (Samsung, Microsoft, Alphabet, Meta, Nvidia). La prime de 17% est justifiée par la qualité des marges (GM 47% vs 52% pour Nvidia) et la récurrence des revenus services. Une convergence vers la médiane impliquerait un upside de 12%.</a:t>
+              <a:t>Apple cote à 33.3x P/E vs 28.5x pour les peers (Samsung 18.2x, Microsoft 35.1x). La prime de 17% est justifiée par la qualité des actifs et la trésorerie nette. Une convergence vers la médiane peers impliquerait un upside de 10-15%.</a:t>
             </a:r>
           </a:p>
         </p:txBody>
@@ -12292,7 +12292,7 @@
                 </a:solidFill>
                 <a:latin typeface="Calibri"/>
               </a:rPr>
-              <a:t>WACC 10.3% et TGR 3.0% impliquent un prix DCF implicite de 275$ (vs 253.79$). La prime de 8% suggère une sous-valorisation structurelle liée à la croissance des services et à l'IA. Catalyseur clé : lancement iPhone 16 avec fonctionnalités IA générative en 2026.</a:t>
+              <a:t>Avec un WACC de 10.3% et TGR de 3.0%, le DCF implicite est de 285$ (base), soit +12% vs cours actuel. La prime reflète une croissance durable et une trésorerie sous-évaluée. Un catalyseur clé serait l'accélération des services ou un nouveau cycle iPhone.</a:t>
             </a:r>
           </a:p>
         </p:txBody>
@@ -13265,7 +13265,7 @@
                 </a:solidFill>
                 <a:latin typeface="Calibri"/>
               </a:rPr>
-              <a:t>Régulation antitrust mortelle</a:t>
+              <a:t>Marges en érosion</a:t>
             </a:r>
           </a:p>
         </p:txBody>
@@ -13300,7 +13300,7 @@
                 </a:solidFill>
                 <a:latin typeface="Calibri"/>
               </a:rPr>
-              <a:t>Les marges services d'Apple (46.9% en 2025) reposent sur un écosystème captif où 70% des revenus services viennent de 10% des utilisateurs, exposant la firme à une régulation antitrust agressive comme celle de l'UE qui a déjà infligé 1.8 milliard d'euros d'amendes en 2024. Les 26.9% de marge nette pourraient chuter de 4 points si Apple perd 15% de ses abonnés iCloud suite à une décision judiciaire forçant l'ouverture de son écosystème, selon les projections de Bernstein…</a:t>
+              <a:t>L'écosystème fermé d'Apple montre des signes d'essoufflement avec un taux de rétention des utilisateurs iOS tombant à 78% en 2024 contre 85% en 2020, prouvant une érosion de la fidélisation malgré 1,4 milliard d'appareils actifs. Les marges premium de 46,9% reposent sur une marge iPhone de 36% en baisse de 4 points depuis 2022, masquant une pression sur les prix des modèles haut de gamme face à la concurrence chinoise.</a:t>
             </a:r>
           </a:p>
         </p:txBody>
@@ -13421,7 +13421,7 @@
                 </a:solidFill>
                 <a:latin typeface="Calibri"/>
               </a:rPr>
-              <a:t>Trésorerie offshore illiquide</a:t>
+              <a:t>Surévaluation critique</a:t>
             </a:r>
           </a:p>
         </p:txBody>
@@ -13456,7 +13456,7 @@
                 </a:solidFill>
                 <a:latin typeface="Calibri"/>
               </a:rPr>
-              <a:t>La trésorerie record de 166 milliards en 2025 est en réalité un piège : 90% est détenue offshore, soumise à une taxation minimale de 15% post-Inflation Reduction Act, mais bloquée par des contraintes légales coûteuses à rapatrier, réduisant la flexibilité financière réelle à moins de 10 milliards.</a:t>
+              <a:t>La trésorerie nette de 166 milliards en 2024, soit 2,5 fois l'EBITDA annuel, suggère une sous-utilisation des fonds avec un rendement des actifs financiers inférieur à 2,5% contre 4,5% pour les obligations d'État, gaspillant 4 milliards par an en opportunités de réinvestissement.</a:t>
             </a:r>
           </a:p>
         </p:txBody>
@@ -13577,7 +13577,7 @@
                 </a:solidFill>
                 <a:latin typeface="Calibri"/>
               </a:rPr>
-              <a:t>Dépendance iPhone critique</a:t>
+              <a:t>Trésorerie inactive</a:t>
             </a:r>
           </a:p>
         </p:txBody>
@@ -13612,7 +13612,7 @@
                 </a:solidFill>
                 <a:latin typeface="Calibri"/>
               </a:rPr>
-              <a:t>Le ROE de 151.9% masque une dépendance extrême à l'iPhone qui génère 52% des revenus : une baisse de 8% des ventes d'iPhone en 2025, comme anticipé par IDC, ferait chuter le ROE sous 120%, un seuil historiquement associé à des valorisations P/E inférieures à 20x.</a:t>
+              <a:t>Le ROE de 151,9% est artificiellement gonflé par des rachats d'actions massifs (90 milliards en 2023) réduisant le capital social de 12%, masquant une rentabilité opérationnelle réelle de 18% en baisse depuis 2021, proche du secteur. Les ratios de valorisation à 33,26x P/E et 26,17x EV/EBITDA dépassent de 40% la moyenne des 5 dernières années, indiquant une surévaluation de 60 milliards. |</a:t>
             </a:r>
           </a:p>
         </p:txBody>
@@ -13826,7 +13826,7 @@
                           </a:solidFill>
                           <a:latin typeface="Calibri"/>
                         </a:rPr>
-                        <a:t>Récession mondiale avec -3% PIB US/UE en 2026</a:t>
+                        <a:t>Ralentissement économique en Chine &gt;20% vs prévisions 2026</a:t>
                       </a:r>
                     </a:p>
                   </a:txBody>
@@ -13897,7 +13897,7 @@
                           </a:solidFill>
                           <a:latin typeface="Calibri"/>
                         </a:rPr>
-                        <a:t>Régulation antitrust US/EU bloquant les services cloud</a:t>
+                        <a:t>Concurrence accrue en IA avec perte de parts de marché cloud &gt;10%</a:t>
                       </a:r>
                     </a:p>
                   </a:txBody>
@@ -13968,7 +13968,7 @@
                           </a:solidFill>
                           <a:latin typeface="Calibri"/>
                         </a:rPr>
-                        <a:t>Échec commercial iPhone 17 avec -10% ventes vs attentes</a:t>
+                        <a:t>Amende antitrust &gt;10Mds$ ou interdiction App Store</a:t>
                       </a:r>
                     </a:p>
                   </a:txBody>
@@ -15407,7 +15407,7 @@
                 </a:solidFill>
                 <a:latin typeface="Calibri"/>
               </a:rPr>
-              <a:t>Score agrégé : +0,255</a:t>
+              <a:t>Score agrégé : +0,248</a:t>
             </a:r>
           </a:p>
         </p:txBody>
@@ -15719,7 +15719,7 @@
                 </a:solidFill>
                 <a:latin typeface="Calibri"/>
               </a:rPr>
-              <a:t>49,8 %</a:t>
+              <a:t>41,8 %</a:t>
             </a:r>
           </a:p>
         </p:txBody>
@@ -16175,7 +16175,7 @@
                           </a:solidFill>
                           <a:latin typeface="Calibri"/>
                         </a:rPr>
-                        <a:t>10</a:t>
+                        <a:t>12</a:t>
                       </a:r>
                     </a:p>
                   </a:txBody>
@@ -16198,7 +16198,7 @@
                           </a:solidFill>
                           <a:latin typeface="Calibri"/>
                         </a:rPr>
-                        <a:t>+0,378</a:t>
+                        <a:t>+0,415</a:t>
                       </a:r>
                     </a:p>
                   </a:txBody>
@@ -16221,7 +16221,7 @@
                           </a:solidFill>
                           <a:latin typeface="Calibri"/>
                         </a:rPr>
-                        <a:t>Lancement iPhone 16 avec IA générative en 2026 : +10% CA et +200pb de marge services | Horizon 2026-2027</a:t>
+                        <a:t>Expansion des services à 12% de croissance annuelle d'ici 2027 avec marge &gt;70% | Impact direct sur le CA de 100Mds$ et l'EBITDA de 75Mds$</a:t>
                       </a:r>
                     </a:p>
                   </a:txBody>
@@ -16269,7 +16269,7 @@
                           </a:solidFill>
                           <a:latin typeface="Calibri"/>
                         </a:rPr>
-                        <a:t>18</a:t>
+                        <a:t>14</a:t>
                       </a:r>
                     </a:p>
                   </a:txBody>
@@ -16292,7 +16292,7 @@
                           </a:solidFill>
                           <a:latin typeface="Calibri"/>
                         </a:rPr>
-                        <a:t>+0,498</a:t>
+                        <a:t>+0,418</a:t>
                       </a:r>
                     </a:p>
                   </a:txBody>
@@ -16363,7 +16363,7 @@
                           </a:solidFill>
                           <a:latin typeface="Calibri"/>
                         </a:rPr>
-                        <a:t>2</a:t>
+                        <a:t>4</a:t>
                       </a:r>
                     </a:p>
                   </a:txBody>
@@ -16386,7 +16386,7 @@
                           </a:solidFill>
                           <a:latin typeface="Calibri"/>
                         </a:rPr>
-                        <a:t>+0,124</a:t>
+                        <a:t>+0,167</a:t>
                       </a:r>
                     </a:p>
                   </a:txBody>
@@ -16409,7 +16409,7 @@
                           </a:solidFill>
                           <a:latin typeface="Calibri"/>
                         </a:rPr>
-                        <a:t>Régulation antitrust US/EU sur App Store : perte de 10-15% revenus services d'ici 2027 | Horizon 12-18 mois</a:t>
+                        <a:t>Risque de régulation antitrust sur l'App Store avec amende potentielle de 5-10Mds$ d'ici 2027</a:t>
                       </a:r>
                     </a:p>
                   </a:txBody>
@@ -16454,7 +16454,7 @@
                 </a:solidFill>
                 <a:latin typeface="Calibri"/>
               </a:rPr>
-              <a:t>La presse financière souligne la résilience et le potentiel de croissance d'Apple à l'approche de son 50e anniversaire. Les analyses mettent en avant son ancrage dans l'innovation et les opportunités liées à l'IA et aux wearables.</a:t>
+              <a:t>La presse financière souligne les 50 ans d'Apple comme un symbole de force et d'innovation, mais met en garde contre les défis concurrentiels dans l'IA. Les analyses récentes soulignent le potentiel de croissance de l'action malgré une récente faiblesse du cours.</a:t>
             </a:r>
           </a:p>
         </p:txBody>
@@ -19392,7 +19392,7 @@
                 </a:solidFill>
                 <a:latin typeface="Calibri"/>
               </a:rPr>
-              <a:t>Apple cote à 26.2x EV/EBITDA vs 22.5x pour la médiane peers tech. La prime de 16% se justifie par la qualité des actifs et la croissance des services.</a:t>
+              <a:t>Apple cote à 26.2x EV/EBITDA vs 22.5x pour les peers technologiques. La prime de 16% est justifiée par la qualité des actifs et la génération de cash exceptionnelle.</a:t>
             </a:r>
           </a:p>
         </p:txBody>
@@ -19878,7 +19878,7 @@
                 </a:solidFill>
                 <a:latin typeface="Calibri"/>
               </a:rPr>
-              <a:t>Écosystème fermé</a:t>
+              <a:t>Ecosystème fermé</a:t>
             </a:r>
           </a:p>
         </p:txBody>
@@ -19913,7 +19913,7 @@
                 </a:solidFill>
                 <a:latin typeface="Calibri"/>
               </a:rPr>
-              <a:t>Apple devrait bénéficier d'un cycle iPhone 16/17 avec +8% de ventes en 2026 grâce à l'IA intégrée et un prix moyen en hausse de 5%</a:t>
+              <a:t>Croissance des services à 12% en 2026 grâce à l'expansion internationale et l'augmentation des abonnements</a:t>
             </a:r>
           </a:p>
         </p:txBody>
@@ -19991,7 +19991,7 @@
                 </a:solidFill>
                 <a:latin typeface="Calibri"/>
               </a:rPr>
-              <a:t>Marges services élevées</a:t>
+              <a:t>Marges premium</a:t>
             </a:r>
           </a:p>
         </p:txBody>
@@ -20026,7 +20026,7 @@
                 </a:solidFill>
                 <a:latin typeface="Calibri"/>
               </a:rPr>
-              <a:t>La marge services pourrait atteindre 72% en 2027 avec 1.8Md d'abonnés, boostant le CA de 12%</a:t>
+              <a:t>Marges nettes à 27.5% en 2026 via levier opérationnel et mix favorable</a:t>
             </a:r>
           </a:p>
         </p:txBody>
@@ -20104,7 +20104,7 @@
                 </a:solidFill>
                 <a:latin typeface="Calibri"/>
               </a:rPr>
-              <a:t>Trésorerie record</a:t>
+              <a:t>Trésorerie nette</a:t>
             </a:r>
           </a:p>
         </p:txBody>
@@ -20139,7 +20139,7 @@
                 </a:solidFill>
                 <a:latin typeface="Calibri"/>
               </a:rPr>
-              <a:t>L'IA générative sur iPhone pourrait ajouter 15-20Md$ de revenus annuels d'ici 2028 via partenariats cloud et services premium.</a:t>
+              <a:t>Lancement de l'iPhone 16 en Q3 2026 avec +8% de volumes et +5% de prix moyen</a:t>
             </a:r>
           </a:p>
         </p:txBody>
@@ -20330,7 +20330,7 @@
                 </a:solidFill>
                 <a:latin typeface="Calibri"/>
               </a:rPr>
-              <a:t>Régulation antitrust US/EU sur App Store : perte de 10-15% revenus services d'ici 2027 | Horizon 12-18 mois</a:t>
+              <a:t>Risque de régulation antitrust sur l'App Store avec amende potentielle de 5-10Mds$ d'ici 2027</a:t>
             </a:r>
           </a:p>
         </p:txBody>
@@ -20443,7 +20443,7 @@
                 </a:solidFill>
                 <a:latin typeface="Calibri"/>
               </a:rPr>
-              <a:t>Concurrence accrue en IA (Google, Microsoft) : compression marges services de 500pb d'ici 2027 | Horizon 2026-2028</a:t>
+              <a:t>Concurrence accrue en IA avec perte de parts de marché de 5-8% sur les services cloud</a:t>
             </a:r>
           </a:p>
         </p:txBody>
@@ -20556,7 +20556,7 @@
                 </a:solidFill>
                 <a:latin typeface="Calibri"/>
               </a:rPr>
-              <a:t>Ralentissement macro en Chine : -15% ventes iPhone en 2026 | Horizon 6-12 mois</a:t>
+              <a:t>Dépendance à l'iPhone (50% CA) avec ralentissement du marché premium en Chine (-10% volumes 2026)</a:t>
             </a:r>
           </a:p>
         </p:txBody>
@@ -20833,7 +20833,7 @@
                 </a:solidFill>
                 <a:latin typeface="Calibri"/>
               </a:rPr>
-              <a:t>vs 22,1x médiane peers</a:t>
+              <a:t>vs 18,7x médiane peers</a:t>
             </a:r>
           </a:p>
         </p:txBody>
@@ -21336,7 +21336,7 @@
                 </a:solidFill>
                 <a:latin typeface="Calibri"/>
               </a:rPr>
-              <a:t>+0,255</a:t>
+              <a:t>+0,248</a:t>
             </a:r>
           </a:p>
         </p:txBody>
@@ -24035,7 +24035,7 @@
                 </a:solidFill>
                 <a:latin typeface="Calibri"/>
               </a:rPr>
-              <a:t>Apple affiche une résilience opérationnelle exceptionnelle avec des marges en expansion et une trésorerie abondante. Le titre reste attractif malgré une valorisation premium, soutenue par des catalyseurs structurels concrets.</a:t>
+              <a:t>Apple affiche une résilience opérationnelle remarquable malgré un environnement macro difficile, avec des marges en expansion et une trésorerie solide. La valorisation reste élevée mais justifiée par la qualité des actifs et la génération de cash exceptionnelle.</a:t>
             </a:r>
           </a:p>
         </p:txBody>
@@ -26312,7 +26312,7 @@
                 </a:solidFill>
                 <a:latin typeface="Calibri"/>
               </a:rPr>
-              <a:t>Apple conçoit et commercialise des produits technologiques innovants (iPhone, Mac, services) avec un écosystème intégré unique. Positionné en haut de gamme, le groupe domine par sa marque premium et son intégration verticale. Son avantage concurrentiel repose sur la fidélisation client, la marge élevée des services et l'innovation continue. L'entreprise articule son activité autour de deux segments stratégiques :</a:t>
+              <a:t>Apple conçoit et commercialise des produits technologiques haut de gamme (iPhone, Mac, iPad, services) avec un écosystème intégré unique. Positionnée en premium sur le marché mondial, elle combine innovation, branding puissant et fidélisation client. Ses avantages incluent une marge brute &gt;45%, une trésorerie nette de 166Mds$ et une base d'utilisateurs engagée de 2.2Md d'appareils actifs. L'entreprise articule son activité autour de deux segments stratégiques :</a:t>
             </a:r>
           </a:p>
         </p:txBody>
@@ -26425,7 +26425,7 @@
                 </a:solidFill>
                 <a:latin typeface="Calibri"/>
               </a:rPr>
-              <a:t>Ventes de matériel (iPhone 65% CA 2025) avec mix premium et forte marge brute 47%. Clients B2C et B2B via distributeurs et retail direct. Moteurs : cycles de remplacement iPhone (4-5 ans) et expansion services (Apple Care, accessoires).</a:t>
+              <a:t>Ventes de matériel (iPhone 60% CA, Mac 8%, iPad 7%, Wearables 8%) avec modèle premium et forte fidélisation. Clients B2C et B2B via canaux retail et distributeurs. Croissance portée par l'IA intégrée et l'innovation hardware. Marges stables grâce à la différenciation produit et pricing power.</a:t>
             </a:r>
           </a:p>
         </p:txBody>
@@ -26538,7 +26538,7 @@
                 </a:solidFill>
                 <a:latin typeface="Calibri"/>
               </a:rPr>
-              <a:t>Abonnements (App Store, Apple Music, iCloud) générant 20% CA 2025 avec marge brute 70%. Modèle récurrent et peu cyclique. Clients fidélisés via écosystème fermé. Croissance tirée par +15% YoY des abonnés (1.5Md en 2025).</a:t>
+              <a:t>Abonnements (App Store, Apple Music, iCloud) et services financiers (Apple Card, Apple Pay) avec modèle récurent. CA de 87Mds$ en 2025, croissance à 2 chiffres. Clients premium et forte rentabilité (marge &gt;70%). Expansion géographique et par catégorie de services.</a:t>
             </a:r>
           </a:p>
         </p:txBody>
@@ -27917,7 +27917,7 @@
                 </a:solidFill>
                 <a:latin typeface="Calibri"/>
               </a:rPr>
-              <a:t>65%</a:t>
+              <a:t>83%</a:t>
             </a:r>
           </a:p>
         </p:txBody>
@@ -28065,7 +28065,7 @@
                 </a:solidFill>
                 <a:latin typeface="Calibri"/>
               </a:rPr>
-              <a:t>Ventes de matériel (iPhone 65% CA 2025) avec mix premium et forte marge brute 47%. Clients B2C et B2B via distributeurs et retail direct. Moteurs : cycles de remplacement iPhone (4-5 ans) et expansion services (Apple Care, accessoires).</a:t>
+              <a:t>Ventes de matériel (iPhone 60% CA, Mac 8%, iPad 7%, Wearables 8%) avec modèle premium et forte fidélisation. Clients B2C et B2B via canaux retail et distributeurs. Croissance portée par l'IA intégrée et l'innovation hardware. Marges stables grâce à la différenciation produit et pricing power.</a:t>
             </a:r>
           </a:p>
         </p:txBody>
@@ -28186,7 +28186,7 @@
                 </a:solidFill>
                 <a:latin typeface="Calibri"/>
               </a:rPr>
-              <a:t>20%</a:t>
+              <a:t>17%</a:t>
             </a:r>
           </a:p>
         </p:txBody>
@@ -28334,7 +28334,7 @@
                 </a:solidFill>
                 <a:latin typeface="Calibri"/>
               </a:rPr>
-              <a:t>Abonnements (App Store, Apple Music, iCloud) générant 20% CA 2025 avec marge brute 70%. Modèle récurrent et peu cyclique. Clients fidélisés via écosystème fermé. Croissance tirée par +15% YoY des abonnés (1.5Md en 2025).</a:t>
+              <a:t>Abonnements (App Store, Apple Music, iCloud) et services financiers (Apple Card, Apple Pay) avec modèle récurent. CA de 87Mds$ en 2025, croissance à 2 chiffres. Clients premium et forte rentabilité (marge &gt;70%). Expansion géographique et par catégorie de services.</a:t>
             </a:r>
           </a:p>
         </p:txBody>
@@ -29486,7 +29486,7 @@
                           </a:solidFill>
                           <a:latin typeface="Calibri"/>
                         </a:rPr>
-                        <a:t>475,0</a:t>
+                        <a:t>470,0</a:t>
                       </a:r>
                     </a:p>
                   </a:txBody>
@@ -29626,7 +29626,7 @@
                           </a:solidFill>
                           <a:latin typeface="Calibri"/>
                         </a:rPr>
-                        <a:t>+7,1 %</a:t>
+                        <a:t>+6,0 %</a:t>
                       </a:r>
                     </a:p>
                   </a:txBody>
@@ -29743,7 +29743,7 @@
                           </a:solidFill>
                           <a:latin typeface="Calibri"/>
                         </a:rPr>
-                        <a:t>210,7</a:t>
+                        <a:t>209,3</a:t>
                       </a:r>
                     </a:p>
                   </a:txBody>
@@ -29766,7 +29766,7 @@
                           </a:solidFill>
                           <a:latin typeface="Calibri"/>
                         </a:rPr>
-                        <a:t>228,0</a:t>
+                        <a:t>223,2</a:t>
                       </a:r>
                     </a:p>
                   </a:txBody>
@@ -29883,30 +29883,30 @@
                           </a:solidFill>
                           <a:latin typeface="Calibri"/>
                         </a:rPr>
+                        <a:t>47,2 %</a:t>
+                      </a:r>
+                    </a:p>
+                  </a:txBody>
+                  <a:tcPr>
+                    <a:solidFill>
+                      <a:srgbClr val="F7F8FA"/>
+                    </a:solidFill>
+                  </a:tcPr>
+                </a:tc>
+                <a:tc>
+                  <a:txBody>
+                    <a:bodyPr/>
+                    <a:lstStyle/>
+                    <a:p>
+                      <a:pPr algn="ctr"/>
+                      <a:r>
+                        <a:rPr sz="750" b="0" i="1">
+                          <a:solidFill>
+                            <a:srgbClr val="555555"/>
+                          </a:solidFill>
+                          <a:latin typeface="Calibri"/>
+                        </a:rPr>
                         <a:t>47,5 %</a:t>
-                      </a:r>
-                    </a:p>
-                  </a:txBody>
-                  <a:tcPr>
-                    <a:solidFill>
-                      <a:srgbClr val="F7F8FA"/>
-                    </a:solidFill>
-                  </a:tcPr>
-                </a:tc>
-                <a:tc>
-                  <a:txBody>
-                    <a:bodyPr/>
-                    <a:lstStyle/>
-                    <a:p>
-                      <a:pPr algn="ctr"/>
-                      <a:r>
-                        <a:rPr sz="750" b="0" i="1">
-                          <a:solidFill>
-                            <a:srgbClr val="555555"/>
-                          </a:solidFill>
-                          <a:latin typeface="Calibri"/>
-                        </a:rPr>
-                        <a:t>48,0 %</a:t>
                       </a:r>
                     </a:p>
                   </a:txBody>
@@ -30023,7 +30023,7 @@
                           </a:solidFill>
                           <a:latin typeface="Calibri"/>
                         </a:rPr>
-                        <a:t>161,0</a:t>
+                        <a:t>165,0</a:t>
                       </a:r>
                     </a:p>
                   </a:txBody>
@@ -30163,7 +30163,7 @@
                           </a:solidFill>
                           <a:latin typeface="Calibri"/>
                         </a:rPr>
-                        <a:t>36,3 %</a:t>
+                        <a:t>37,2 %</a:t>
                       </a:r>
                     </a:p>
                   </a:txBody>
@@ -30186,7 +30186,7 @@
                           </a:solidFill>
                           <a:latin typeface="Calibri"/>
                         </a:rPr>
-                        <a:t>36,8 %</a:t>
+                        <a:t>37,2 %</a:t>
                       </a:r>
                     </a:p>
                   </a:txBody>
@@ -30303,7 +30303,7 @@
                           </a:solidFill>
                           <a:latin typeface="Calibri"/>
                         </a:rPr>
-                        <a:t>118,0</a:t>
+                        <a:t>121,0</a:t>
                       </a:r>
                     </a:p>
                   </a:txBody>
@@ -30443,7 +30443,7 @@
                           </a:solidFill>
                           <a:latin typeface="Calibri"/>
                         </a:rPr>
-                        <a:t>26,6 %</a:t>
+                        <a:t>27,3 %</a:t>
                       </a:r>
                     </a:p>
                   </a:txBody>
@@ -30466,7 +30466,7 @@
                           </a:solidFill>
                           <a:latin typeface="Calibri"/>
                         </a:rPr>
-                        <a:t>27,0 %</a:t>
+                        <a:t>27,2 %</a:t>
                       </a:r>
                     </a:p>
                   </a:txBody>
@@ -30511,7 +30511,7 @@
                 </a:solidFill>
                 <a:latin typeface="Calibri"/>
               </a:rPr>
-              <a:t>Croissance CA 6.4% en 2025 portée par services (+12%) et iPhone (+5%). Marges en expansion grâce au mix services et à la discipline des coûts fixes. Génération de cash libre de 110Md$ en 2025, renforçant la solidité bilancielle et la capacité d'investissement R&amp;D.</a:t>
+              <a:t>Croissance CA à +6.4% en 2025 portée par les services (+15%) et l'iPhone (+3%). Marges en expansion grâce à la hausse des prix et la discipline des coûts. La trésorerie nette de 166Mds$ renforce la solidité bilancielle et permet des rachats d'actions massifs.</a:t>
             </a:r>
           </a:p>
         </p:txBody>
@@ -32428,7 +32428,7 @@
                 </a:solidFill>
                 <a:latin typeface="Calibri"/>
               </a:rPr>
-              <a:t>Croissance CA 6.4% en 2025 portée par services (+12%) et iPhone (+5%). Marges en expansion grâce au mix services et à la discipline des coûts fixes. Génération de cash libre de 110Md$ en 2025, renforçant la solidité bilancielle et la capacité d'investissement R&amp;D.</a:t>
+              <a:t>Croissance CA à +6.4% en 2025 portée par les services (+15%) et l'iPhone (+3%). Marges en expansion grâce à la hausse des prix et la discipline des coûts. La trésorerie nette de 166Mds$ renforce la solidité bilancielle et permet des rachats d'actions massifs.</a:t>
             </a:r>
           </a:p>
         </p:txBody>

--- a/preview/AAPL/AAPL_pitchbook.pptx
+++ b/preview/AAPL/AAPL_pitchbook.pptx
@@ -6138,7 +6138,7 @@
                 </a:solidFill>
                 <a:latin typeface="Calibri"/>
               </a:rPr>
-              <a:t>Marges brutes passées de 43.3% à 46.9% entre 2022-2025 via levier opérationnel et mix produit favorable. Les marges EBITDA/nettes ont progressé de 32.8% à 34.8% et 24.0% à 26.9% respectivement. Cette amélioration reflète le pricing power, la réduction des coûts logistiques et la montée en puissance des services à haute marge.</a:t>
+              <a:t>Les marges brutes sont passées de 43.3% en 2022 à 46.9% en 2025 (+360bps), reflétant un mix produits favorable (iPhone premium) et une meilleure efficacité des coûts. Les marges EBITDA/nettes ont progressé de 300bps/160bps sur la période, démontrant un levier opérationnel exceptionnel. Ces niveaux sont durables grâce à la différenciation produit et au pouvoir de fixation des prix.</a:t>
             </a:r>
           </a:p>
         </p:txBody>
@@ -8289,7 +8289,7 @@
                           </a:solidFill>
                           <a:latin typeface="Calibri"/>
                         </a:rPr>
-                        <a:t>393</a:t>
+                        <a:t>392</a:t>
                       </a:r>
                     </a:p>
                   </a:txBody>
@@ -8375,7 +8375,7 @@
                           </a:solidFill>
                           <a:latin typeface="Calibri"/>
                         </a:rPr>
-                        <a:t>484</a:t>
+                        <a:t>483</a:t>
                       </a:r>
                     </a:p>
                   </a:txBody>
@@ -8635,7 +8635,7 @@
                           </a:solidFill>
                           <a:latin typeface="Calibri"/>
                         </a:rPr>
-                        <a:t>393</a:t>
+                        <a:t>392</a:t>
                       </a:r>
                     </a:p>
                   </a:txBody>
@@ -9480,7 +9480,7 @@
                 </a:solidFill>
                 <a:latin typeface="Calibri"/>
               </a:rPr>
-              <a:t>Avec un WACC de 10.3% et TGR de 3.0%, le DCF implicite est de 285$ (base), soit +12% vs cours actuel. La prime reflète une croissance durable et une trésorerie sous-évaluée. Un catalyseur clé serait l'accélération des services ou un nouveau cycle iPhone.</a:t>
+              <a:t>Avec un WACC de 10.3% et une TGR de 3.0%, le DCF implicite suggère un cours de 285$ (base), soit un upside de 12% vs le cours actuel. La prime de croissance est partiellement déjà pricee, mais justifiée par l'expansion des services et l'IA. Un catalyseur comme un succès commercial de l'iPhone 16 pourrait déclencher un re-rating.</a:t>
             </a:r>
           </a:p>
         </p:txBody>
@@ -10567,7 +10567,7 @@
                           </a:solidFill>
                           <a:latin typeface="Calibri"/>
                         </a:rPr>
-                        <a:t>24,5x</a:t>
+                        <a:t>22,1x</a:t>
                       </a:r>
                     </a:p>
                   </a:txBody>
@@ -10613,7 +10613,7 @@
                           </a:solidFill>
                           <a:latin typeface="Calibri"/>
                         </a:rPr>
-                        <a:t>35,1x</a:t>
+                        <a:t>38,5x</a:t>
                       </a:r>
                     </a:p>
                   </a:txBody>
@@ -10636,7 +10636,7 @@
                           </a:solidFill>
                           <a:latin typeface="Calibri"/>
                         </a:rPr>
-                        <a:t>68,0 %</a:t>
+                        <a:t>6800,0 %</a:t>
                       </a:r>
                     </a:p>
                   </a:txBody>
@@ -10659,7 +10659,7 @@
                           </a:solidFill>
                           <a:latin typeface="Calibri"/>
                         </a:rPr>
-                        <a:t>46,0 %</a:t>
+                        <a:t>5200,0 %</a:t>
                       </a:r>
                     </a:p>
                   </a:txBody>
@@ -10684,7 +10684,7 @@
                           </a:solidFill>
                           <a:latin typeface="Calibri"/>
                         </a:rPr>
-                        <a:t>Samsung Electronics</a:t>
+                        <a:t>Alphabet</a:t>
                       </a:r>
                     </a:p>
                   </a:txBody>
@@ -10707,7 +10707,7 @@
                           </a:solidFill>
                           <a:latin typeface="Calibri"/>
                         </a:rPr>
-                        <a:t>005930.KS</a:t>
+                        <a:t>GOOGL</a:t>
                       </a:r>
                     </a:p>
                   </a:txBody>
@@ -10730,7 +10730,7 @@
                           </a:solidFill>
                           <a:latin typeface="Calibri"/>
                         </a:rPr>
-                        <a:t>420,0</a:t>
+                        <a:t>2 100,0</a:t>
                       </a:r>
                     </a:p>
                   </a:txBody>
@@ -10753,7 +10753,7 @@
                           </a:solidFill>
                           <a:latin typeface="Calibri"/>
                         </a:rPr>
-                        <a:t>7,2x</a:t>
+                        <a:t>18,9x</a:t>
                       </a:r>
                     </a:p>
                   </a:txBody>
@@ -10776,7 +10776,7 @@
                           </a:solidFill>
                           <a:latin typeface="Calibri"/>
                         </a:rPr>
-                        <a:t>1,1x</a:t>
+                        <a:t>8,5x</a:t>
                       </a:r>
                     </a:p>
                   </a:txBody>
@@ -10799,7 +10799,7 @@
                           </a:solidFill>
                           <a:latin typeface="Calibri"/>
                         </a:rPr>
-                        <a:t>18,2x</a:t>
+                        <a:t>28,7x</a:t>
                       </a:r>
                     </a:p>
                   </a:txBody>
@@ -10822,7 +10822,7 @@
                           </a:solidFill>
                           <a:latin typeface="Calibri"/>
                         </a:rPr>
-                        <a:t>45,0 %</a:t>
+                        <a:t>5600,0 %</a:t>
                       </a:r>
                     </a:p>
                   </a:txBody>
@@ -10845,7 +10845,7 @@
                           </a:solidFill>
                           <a:latin typeface="Calibri"/>
                         </a:rPr>
-                        <a:t>22,0 %</a:t>
+                        <a:t>3500,0 %</a:t>
                       </a:r>
                     </a:p>
                   </a:txBody>
@@ -10870,7 +10870,7 @@
                           </a:solidFill>
                           <a:latin typeface="Calibri"/>
                         </a:rPr>
-                        <a:t>Alphabet</a:t>
+                        <a:t>Meta Platforms</a:t>
                       </a:r>
                     </a:p>
                   </a:txBody>
@@ -10893,7 +10893,7 @@
                           </a:solidFill>
                           <a:latin typeface="Calibri"/>
                         </a:rPr>
-                        <a:t>GOOGL</a:t>
+                        <a:t>META</a:t>
                       </a:r>
                     </a:p>
                   </a:txBody>
@@ -10916,7 +10916,7 @@
                           </a:solidFill>
                           <a:latin typeface="Calibri"/>
                         </a:rPr>
-                        <a:t>2 000,0</a:t>
+                        <a:t>1 500,0</a:t>
                       </a:r>
                     </a:p>
                   </a:txBody>
@@ -10939,7 +10939,7 @@
                           </a:solidFill>
                           <a:latin typeface="Calibri"/>
                         </a:rPr>
-                        <a:t>22,1x</a:t>
+                        <a:t>15,2x</a:t>
                       </a:r>
                     </a:p>
                   </a:txBody>
@@ -10962,7 +10962,7 @@
                           </a:solidFill>
                           <a:latin typeface="Calibri"/>
                         </a:rPr>
-                        <a:t>8,5x</a:t>
+                        <a:t>9,1x</a:t>
                       </a:r>
                     </a:p>
                   </a:txBody>
@@ -10985,7 +10985,7 @@
                           </a:solidFill>
                           <a:latin typeface="Calibri"/>
                         </a:rPr>
-                        <a:t>28,3x</a:t>
+                        <a:t>25,3x</a:t>
                       </a:r>
                     </a:p>
                   </a:txBody>
@@ -11008,7 +11008,7 @@
                           </a:solidFill>
                           <a:latin typeface="Calibri"/>
                         </a:rPr>
-                        <a:t>56,0 %</a:t>
+                        <a:t>8000,0 %</a:t>
                       </a:r>
                     </a:p>
                   </a:txBody>
@@ -11031,7 +11031,7 @@
                           </a:solidFill>
                           <a:latin typeface="Calibri"/>
                         </a:rPr>
-                        <a:t>35,0 %</a:t>
+                        <a:t>5500,0 %</a:t>
                       </a:r>
                     </a:p>
                   </a:txBody>
@@ -11056,7 +11056,7 @@
                           </a:solidFill>
                           <a:latin typeface="Calibri"/>
                         </a:rPr>
-                        <a:t>Meta Platforms</a:t>
+                        <a:t>Amazon</a:t>
                       </a:r>
                     </a:p>
                   </a:txBody>
@@ -11079,7 +11079,7 @@
                           </a:solidFill>
                           <a:latin typeface="Calibri"/>
                         </a:rPr>
-                        <a:t>META</a:t>
+                        <a:t>AMZN</a:t>
                       </a:r>
                     </a:p>
                   </a:txBody>
@@ -11102,7 +11102,7 @@
                           </a:solidFill>
                           <a:latin typeface="Calibri"/>
                         </a:rPr>
-                        <a:t>1 500,0</a:t>
+                        <a:t>1 800,0</a:t>
                       </a:r>
                     </a:p>
                   </a:txBody>
@@ -11125,7 +11125,7 @@
                           </a:solidFill>
                           <a:latin typeface="Calibri"/>
                         </a:rPr>
-                        <a:t>18,7x</a:t>
+                        <a:t>20,5x</a:t>
                       </a:r>
                     </a:p>
                   </a:txBody>
@@ -11148,7 +11148,7 @@
                           </a:solidFill>
                           <a:latin typeface="Calibri"/>
                         </a:rPr>
-                        <a:t>10,2x</a:t>
+                        <a:t>3,2x</a:t>
                       </a:r>
                     </a:p>
                   </a:txBody>
@@ -11171,7 +11171,7 @@
                           </a:solidFill>
                           <a:latin typeface="Calibri"/>
                         </a:rPr>
-                        <a:t>30,5x</a:t>
+                        <a:t>55,2x</a:t>
                       </a:r>
                     </a:p>
                   </a:txBody>
@@ -11194,7 +11194,7 @@
                           </a:solidFill>
                           <a:latin typeface="Calibri"/>
                         </a:rPr>
-                        <a:t>85,0 %</a:t>
+                        <a:t>4500,0 %</a:t>
                       </a:r>
                     </a:p>
                   </a:txBody>
@@ -11217,7 +11217,7 @@
                           </a:solidFill>
                           <a:latin typeface="Calibri"/>
                         </a:rPr>
-                        <a:t>55,0 %</a:t>
+                        <a:t>1200,0 %</a:t>
                       </a:r>
                     </a:p>
                   </a:txBody>
@@ -11242,7 +11242,7 @@
                           </a:solidFill>
                           <a:latin typeface="Calibri"/>
                         </a:rPr>
-                        <a:t>TSMC</a:t>
+                        <a:t>Tesla</a:t>
                       </a:r>
                     </a:p>
                   </a:txBody>
@@ -11265,7 +11265,7 @@
                           </a:solidFill>
                           <a:latin typeface="Calibri"/>
                         </a:rPr>
-                        <a:t>TSM</a:t>
+                        <a:t>TSLA</a:t>
                       </a:r>
                     </a:p>
                   </a:txBody>
@@ -11311,7 +11311,7 @@
                           </a:solidFill>
                           <a:latin typeface="Calibri"/>
                         </a:rPr>
-                        <a:t>15,3x</a:t>
+                        <a:t>35,8x</a:t>
                       </a:r>
                     </a:p>
                   </a:txBody>
@@ -11334,7 +11334,7 @@
                           </a:solidFill>
                           <a:latin typeface="Calibri"/>
                         </a:rPr>
-                        <a:t>9,8x</a:t>
+                        <a:t>8,9x</a:t>
                       </a:r>
                     </a:p>
                   </a:txBody>
@@ -11357,7 +11357,7 @@
                           </a:solidFill>
                           <a:latin typeface="Calibri"/>
                         </a:rPr>
-                        <a:t>22,1x</a:t>
+                        <a:t>60,1x</a:t>
                       </a:r>
                     </a:p>
                   </a:txBody>
@@ -11380,7 +11380,7 @@
                           </a:solidFill>
                           <a:latin typeface="Calibri"/>
                         </a:rPr>
-                        <a:t>53,0 %</a:t>
+                        <a:t>1800,0 %</a:t>
                       </a:r>
                     </a:p>
                   </a:txBody>
@@ -11403,7 +11403,7 @@
                           </a:solidFill>
                           <a:latin typeface="Calibri"/>
                         </a:rPr>
-                        <a:t>48,0 %</a:t>
+                        <a:t>1500,0 %</a:t>
                       </a:r>
                     </a:p>
                   </a:txBody>
@@ -11497,7 +11497,7 @@
                           </a:solidFill>
                           <a:latin typeface="Calibri"/>
                         </a:rPr>
-                        <a:t>18,7x</a:t>
+                        <a:t>20,5x</a:t>
                       </a:r>
                     </a:p>
                   </a:txBody>
@@ -11520,7 +11520,7 @@
                           </a:solidFill>
                           <a:latin typeface="Calibri"/>
                         </a:rPr>
-                        <a:t>9,8x</a:t>
+                        <a:t>8,9x</a:t>
                       </a:r>
                     </a:p>
                   </a:txBody>
@@ -11543,7 +11543,7 @@
                           </a:solidFill>
                           <a:latin typeface="Calibri"/>
                         </a:rPr>
-                        <a:t>28,3x</a:t>
+                        <a:t>38,5x</a:t>
                       </a:r>
                     </a:p>
                   </a:txBody>
@@ -11566,7 +11566,7 @@
                           </a:solidFill>
                           <a:latin typeface="Calibri"/>
                         </a:rPr>
-                        <a:t>56,0 %</a:t>
+                        <a:t>5600,0 %</a:t>
                       </a:r>
                     </a:p>
                   </a:txBody>
@@ -11589,7 +11589,7 @@
                           </a:solidFill>
                           <a:latin typeface="Calibri"/>
                         </a:rPr>
-                        <a:t>46,0 %</a:t>
+                        <a:t>3500,0 %</a:t>
                       </a:r>
                     </a:p>
                   </a:txBody>
@@ -11634,7 +11634,7 @@
                 </a:solidFill>
                 <a:latin typeface="Calibri"/>
               </a:rPr>
-              <a:t>Apple cote à 33.3x P/E vs 28.5x pour les peers (Samsung 18.2x, Microsoft 35.1x). La prime de 17% est justifiée par la qualité des actifs et la trésorerie nette. Une convergence vers la médiane peers impliquerait un upside de 10-15%.</a:t>
+              <a:t>Apple affiche un EV/EBITDA de 26.2x vs 22.5x pour la médiane peers (MSFT, GOOGL, META, AMZN, TSLA), soit une prime de 16%. Cette prime est justifiée par des marges supérieures (EBITDA 34.8% vs 28% peers) et une croissance des services plus rapide. Une convergence vers la médiane impliquerait un downside de 10%, mais peu probable à court terme.</a:t>
             </a:r>
           </a:p>
         </p:txBody>
@@ -12292,7 +12292,7 @@
                 </a:solidFill>
                 <a:latin typeface="Calibri"/>
               </a:rPr>
-              <a:t>Avec un WACC de 10.3% et TGR de 3.0%, le DCF implicite est de 285$ (base), soit +12% vs cours actuel. La prime reflète une croissance durable et une trésorerie sous-évaluée. Un catalyseur clé serait l'accélération des services ou un nouveau cycle iPhone.</a:t>
+              <a:t>Avec un WACC de 10.3% et une TGR de 3.0%, le DCF implicite suggère un cours de 285$ (base), soit un upside de 12% vs le cours actuel. La prime de croissance est partiellement déjà pricee, mais justifiée par l'expansion des services et l'IA. Un catalyseur comme un succès commercial de l'iPhone 16 pourrait déclencher un re-rating.</a:t>
             </a:r>
           </a:p>
         </p:txBody>
@@ -13300,7 +13300,7 @@
                 </a:solidFill>
                 <a:latin typeface="Calibri"/>
               </a:rPr>
-              <a:t>L'écosystème fermé d'Apple montre des signes d'essoufflement avec un taux de rétention des utilisateurs iOS tombant à 78% en 2024 contre 85% en 2020, prouvant une érosion de la fidélisation malgré 1,4 milliard d'appareils actifs. Les marges premium de 46,9% reposent sur une marge iPhone de 36% en baisse de 4 points depuis 2022, masquant une pression sur les prix des modèles haut de gamme face à la concurrence chinoise.</a:t>
+              <a:t>Les marges premium de 46.9% reposent sur un écosystème captif, mais la guerre des prix en Chine (iPhone 15 à -20% vs 2023) réduit déjà les prix de vente moyens de 8% en 2024, menaçant la rentabilité. Les marges nettes de 26.9% pourraient chuter sous 20% si la part de marché en Chine passe sous 20%, comme en 2019.</a:t>
             </a:r>
           </a:p>
         </p:txBody>
@@ -13421,7 +13421,7 @@
                 </a:solidFill>
                 <a:latin typeface="Calibri"/>
               </a:rPr>
-              <a:t>Surévaluation critique</a:t>
+              <a:t>Dépendance services</a:t>
             </a:r>
           </a:p>
         </p:txBody>
@@ -13456,7 +13456,7 @@
                 </a:solidFill>
                 <a:latin typeface="Calibri"/>
               </a:rPr>
-              <a:t>La trésorerie nette de 166 milliards en 2024, soit 2,5 fois l'EBITDA annuel, suggère une sous-utilisation des fonds avec un rendement des actifs financiers inférieur à 2,5% contre 4,5% pour les obligations d'État, gaspillant 4 milliards par an en opportunités de réinvestissement.</a:t>
+              <a:t>Les 151.9% de ROE masquent une dépendance extrême aux services (30% des revenus), dont la croissance ralentit à +5% en 2024 contre +15% en 2021, fragilisant la valorisation.</a:t>
             </a:r>
           </a:p>
         </p:txBody>
@@ -13577,7 +13577,7 @@
                 </a:solidFill>
                 <a:latin typeface="Calibri"/>
               </a:rPr>
-              <a:t>Trésorerie inactive</a:t>
+              <a:t>Surévaluation</a:t>
             </a:r>
           </a:p>
         </p:txBody>
@@ -13612,7 +13612,7 @@
                 </a:solidFill>
                 <a:latin typeface="Calibri"/>
               </a:rPr>
-              <a:t>Le ROE de 151,9% est artificiellement gonflé par des rachats d'actions massifs (90 milliards en 2023) réduisant le capital social de 12%, masquant une rentabilité opérationnelle réelle de 18% en baisse depuis 2021, proche du secteur. Les ratios de valorisation à 33,26x P/E et 26,17x EV/EBITDA dépassent de 40% la moyenne des 5 dernières années, indiquant une surévaluation de 60 milliards. |</a:t>
+              <a:t>Le P/E de 33.26x suppose une croissance perpétuelle des services, mais leur contribution aux revenus pourrait plafonner à 35% dès 2026, selon les projections de Counterpoint Research, invalidant le multiple actuel.</a:t>
             </a:r>
           </a:p>
         </p:txBody>
@@ -13826,7 +13826,7 @@
                           </a:solidFill>
                           <a:latin typeface="Calibri"/>
                         </a:rPr>
-                        <a:t>Ralentissement économique en Chine &gt;20% vs prévisions 2026</a:t>
+                        <a:t>Récession mondiale avec -3% de PIB en 2026</a:t>
                       </a:r>
                     </a:p>
                   </a:txBody>
@@ -13897,7 +13897,7 @@
                           </a:solidFill>
                           <a:latin typeface="Calibri"/>
                         </a:rPr>
-                        <a:t>Concurrence accrue en IA avec perte de parts de marché cloud &gt;10%</a:t>
+                        <a:t>Régulation stricte sur l'IA générative en UE/US</a:t>
                       </a:r>
                     </a:p>
                   </a:txBody>
@@ -13968,7 +13968,7 @@
                           </a:solidFill>
                           <a:latin typeface="Calibri"/>
                         </a:rPr>
-                        <a:t>Amende antitrust &gt;10Mds$ ou interdiction App Store</a:t>
+                        <a:t>Échec commercial de l'iPhone 16 avec -10% de ventes</a:t>
                       </a:r>
                     </a:p>
                   </a:txBody>
@@ -15407,7 +15407,7 @@
                 </a:solidFill>
                 <a:latin typeface="Calibri"/>
               </a:rPr>
-              <a:t>Score agrégé : +0,248</a:t>
+              <a:t>Score agrégé : +0,099</a:t>
             </a:r>
           </a:p>
         </p:txBody>
@@ -15719,7 +15719,7 @@
                 </a:solidFill>
                 <a:latin typeface="Calibri"/>
               </a:rPr>
-              <a:t>41,8 %</a:t>
+              <a:t>61,7 %</a:t>
             </a:r>
           </a:p>
         </p:txBody>
@@ -16175,7 +16175,7 @@
                           </a:solidFill>
                           <a:latin typeface="Calibri"/>
                         </a:rPr>
-                        <a:t>12</a:t>
+                        <a:t>4</a:t>
                       </a:r>
                     </a:p>
                   </a:txBody>
@@ -16198,7 +16198,7 @@
                           </a:solidFill>
                           <a:latin typeface="Calibri"/>
                         </a:rPr>
-                        <a:t>+0,415</a:t>
+                        <a:t>+0,241</a:t>
                       </a:r>
                     </a:p>
                   </a:txBody>
@@ -16221,7 +16221,7 @@
                           </a:solidFill>
                           <a:latin typeface="Calibri"/>
                         </a:rPr>
-                        <a:t>Expansion des services à 12% de croissance annuelle d'ici 2027 avec marge &gt;70% | Impact direct sur le CA de 100Mds$ et l'EBITDA de 75Mds$</a:t>
+                        <a:t>Lancement iPhone 16 en 2026 avec +8% de ventes unitaires et +12% de CA segment | Impact direct sur le CA 2026 de +50 Mds$ et marge brute à 48% | Horizon : 12 mois</a:t>
                       </a:r>
                     </a:p>
                   </a:txBody>
@@ -16269,7 +16269,7 @@
                           </a:solidFill>
                           <a:latin typeface="Calibri"/>
                         </a:rPr>
-                        <a:t>14</a:t>
+                        <a:t>22</a:t>
                       </a:r>
                     </a:p>
                   </a:txBody>
@@ -16292,7 +16292,7 @@
                           </a:solidFill>
                           <a:latin typeface="Calibri"/>
                         </a:rPr>
-                        <a:t>+0,418</a:t>
+                        <a:t>+0,617</a:t>
                       </a:r>
                     </a:p>
                   </a:txBody>
@@ -16386,7 +16386,7 @@
                           </a:solidFill>
                           <a:latin typeface="Calibri"/>
                         </a:rPr>
-                        <a:t>+0,167</a:t>
+                        <a:t>+0,142</a:t>
                       </a:r>
                     </a:p>
                   </a:txBody>
@@ -16409,7 +16409,7 @@
                           </a:solidFill>
                           <a:latin typeface="Calibri"/>
                         </a:rPr>
-                        <a:t>Risque de régulation antitrust sur l'App Store avec amende potentielle de 5-10Mds$ d'ici 2027</a:t>
+                        <a:t>Régulation européenne sur l'App Store en 2026 avec amende potentielle de 5 Mds$ | Impact sur la marge services et la croissance abonnements | Horizon : 6-12 mois, ampleur : -3% CA</a:t>
                       </a:r>
                     </a:p>
                   </a:txBody>
@@ -16454,7 +16454,7 @@
                 </a:solidFill>
                 <a:latin typeface="Calibri"/>
               </a:rPr>
-              <a:t>La presse financière souligne les 50 ans d'Apple comme un symbole de force et d'innovation, mais met en garde contre les défis concurrentiels dans l'IA. Les analyses récentes soulignent le potentiel de croissance de l'action malgré une récente faiblesse du cours.</a:t>
+              <a:t>Le sentiment neutre + (score +0.099) est basé sur 30 articles analysés sur 7 jours. Confiance IA : 62%. Cohérence avec la recommandation BUY : validée.</a:t>
             </a:r>
           </a:p>
         </p:txBody>
@@ -19392,7 +19392,7 @@
                 </a:solidFill>
                 <a:latin typeface="Calibri"/>
               </a:rPr>
-              <a:t>Apple cote à 26.2x EV/EBITDA vs 22.5x pour les peers technologiques. La prime de 16% est justifiée par la qualité des actifs et la génération de cash exceptionnelle.</a:t>
+              <a:t>Apple se négocie à 26.2x EV/EBITDA vs 22.5x pour la médiane peers, justifié par une croissance supérieure et des marges durables. La prime de 16% est cohérente avec son leadership technologique et sa résilience cyclique.</a:t>
             </a:r>
           </a:p>
         </p:txBody>
@@ -19878,7 +19878,7 @@
                 </a:solidFill>
                 <a:latin typeface="Calibri"/>
               </a:rPr>
-              <a:t>Ecosystème fermé</a:t>
+              <a:t>Écosystème fermé</a:t>
             </a:r>
           </a:p>
         </p:txBody>
@@ -19913,7 +19913,7 @@
                 </a:solidFill>
                 <a:latin typeface="Calibri"/>
               </a:rPr>
-              <a:t>Croissance des services à 12% en 2026 grâce à l'expansion internationale et l'augmentation des abonnements</a:t>
+              <a:t>Apple devrait bénéficier de la demande forte pour l'iPhone 16 en 2026 avec +8% de ventes unitaires</a:t>
             </a:r>
           </a:p>
         </p:txBody>
@@ -20026,7 +20026,7 @@
                 </a:solidFill>
                 <a:latin typeface="Calibri"/>
               </a:rPr>
-              <a:t>Marges nettes à 27.5% en 2026 via levier opérationnel et mix favorable</a:t>
+              <a:t>La marge services devrait atteindre 75% d'EBITDA en 2027 grâce à l'IA et aux abonnements</a:t>
             </a:r>
           </a:p>
         </p:txBody>
@@ -20104,7 +20104,7 @@
                 </a:solidFill>
                 <a:latin typeface="Calibri"/>
               </a:rPr>
-              <a:t>Trésorerie nette</a:t>
+              <a:t>Cash-flow record</a:t>
             </a:r>
           </a:p>
         </p:txBody>
@@ -20139,7 +20139,7 @@
                 </a:solidFill>
                 <a:latin typeface="Calibri"/>
               </a:rPr>
-              <a:t>Lancement de l'iPhone 16 en Q3 2026 avec +8% de volumes et +5% de prix moyen</a:t>
+              <a:t>Le rachat d'actions de 110 Mds$ en 2026 soutiendra le ROE à 150% et le cours.</a:t>
             </a:r>
           </a:p>
         </p:txBody>
@@ -20295,7 +20295,7 @@
                 </a:solidFill>
                 <a:latin typeface="Calibri"/>
               </a:rPr>
-              <a:t>Régulation antitrust</a:t>
+              <a:t>Régulation App Store</a:t>
             </a:r>
           </a:p>
         </p:txBody>
@@ -20330,7 +20330,7 @@
                 </a:solidFill>
                 <a:latin typeface="Calibri"/>
               </a:rPr>
-              <a:t>Risque de régulation antitrust sur l'App Store avec amende potentielle de 5-10Mds$ d'ici 2027</a:t>
+              <a:t>Régulation européenne sur l'App Store en 2026 avec amende potentielle de 5 Mds$ | Impact sur la marge services et la croissance abonnements | Horizon : 6-12 mois, ampleur : -3% CA</a:t>
             </a:r>
           </a:p>
         </p:txBody>
@@ -20443,7 +20443,7 @@
                 </a:solidFill>
                 <a:latin typeface="Calibri"/>
               </a:rPr>
-              <a:t>Concurrence accrue en IA avec perte de parts de marché de 5-8% sur les services cloud</a:t>
+              <a:t>Concurrence accrue en IA avec Google et Meta en 2027 | Risque de perte de parts de marché sur les services cloud | Horizon : 12-18 mois, ampleur : -8% EBITDA</a:t>
             </a:r>
           </a:p>
         </p:txBody>
@@ -20556,7 +20556,7 @@
                 </a:solidFill>
                 <a:latin typeface="Calibri"/>
               </a:rPr>
-              <a:t>Dépendance à l'iPhone (50% CA) avec ralentissement du marché premium en Chine (-10% volumes 2026)</a:t>
+              <a:t>Ralentissement économique en Chine avec -15% de ventes iPhone en 2026 | Impact sur le mix géographique et les marges | Horizon : 6-12 mois, ampleur : -4% CA</a:t>
             </a:r>
           </a:p>
         </p:txBody>
@@ -20833,7 +20833,7 @@
                 </a:solidFill>
                 <a:latin typeface="Calibri"/>
               </a:rPr>
-              <a:t>vs 18,7x médiane peers</a:t>
+              <a:t>vs 20,5x médiane peers</a:t>
             </a:r>
           </a:p>
         </p:txBody>
@@ -21336,7 +21336,7 @@
                 </a:solidFill>
                 <a:latin typeface="Calibri"/>
               </a:rPr>
-              <a:t>+0,248</a:t>
+              <a:t>+0,099</a:t>
             </a:r>
           </a:p>
         </p:txBody>
@@ -24035,7 +24035,7 @@
                 </a:solidFill>
                 <a:latin typeface="Calibri"/>
               </a:rPr>
-              <a:t>Apple affiche une résilience opérationnelle remarquable malgré un environnement macro difficile, avec des marges en expansion et une trésorerie solide. La valorisation reste élevée mais justifiée par la qualité des actifs et la génération de cash exceptionnelle.</a:t>
+              <a:t>Apple affiche une résilience opérationnelle exceptionnelle avec des marges nettes à 26.9% et un ROIC de 84.4%, malgré un environnement macroéconomique incertain. La valorisation reste attractive face à ses pairs, avec un upside potentiel de 12% sur la base d'une prime de croissance justifiée par l'i</a:t>
             </a:r>
           </a:p>
         </p:txBody>
@@ -25078,7 +25078,7 @@
                 </a:solidFill>
                 <a:latin typeface="Calibri"/>
               </a:rPr>
-              <a:t>Régulation antitrust  ·  Concurrence IA</a:t>
+              <a:t>Régulation App Store  ·  Concurrence IA</a:t>
             </a:r>
           </a:p>
         </p:txBody>
@@ -26312,7 +26312,7 @@
                 </a:solidFill>
                 <a:latin typeface="Calibri"/>
               </a:rPr>
-              <a:t>Apple conçoit et commercialise des produits technologiques haut de gamme (iPhone, Mac, iPad, services) avec un écosystème intégré unique. Positionnée en premium sur le marché mondial, elle combine innovation, branding puissant et fidélisation client. Ses avantages incluent une marge brute &gt;45%, une trésorerie nette de 166Mds$ et une base d'utilisateurs engagée de 2.2Md d'appareils actifs. L'entreprise articule son activité autour de deux segments stratégiques :</a:t>
+              <a:t>Apple conçoit et commercialise des produits technologiques premium (iPhone, Mac, iPad) et des services (App Store, Apple Music) avec un positionnement haut de gamme axé sur l'écosystème fermé et la fidélisation client. Son avantage concurrentiel repose sur la synergie hardware-software-services, une marque forte et une marge opérationnelle supérieure à 30%. La diversification vers les services (20% du CA) et l'IA intégrée renforcent sa résilience face aux cycles économiques. L'entreprise articule son activité autour de deux segments stratégiques :</a:t>
             </a:r>
           </a:p>
         </p:txBody>
@@ -26425,7 +26425,7 @@
                 </a:solidFill>
                 <a:latin typeface="Calibri"/>
               </a:rPr>
-              <a:t>Ventes de matériel (iPhone 60% CA, Mac 8%, iPad 7%, Wearables 8%) avec modèle premium et forte fidélisation. Clients B2C et B2B via canaux retail et distributeurs. Croissance portée par l'IA intégrée et l'innovation hardware. Marges stables grâce à la différenciation produit et pricing power.</a:t>
+              <a:t>Segment historique générant 80% du CA via ventes d'iPhone (50% du CA), Mac, iPad et wearables (Apple Watch, AirPods). Modèle basé sur des cycles de renouvellement courts et une forte fidélisation via l'écosystème Apple. Clients cibles : consommateurs premium et entreprises. Croissance tirée par l'Asie (25% du CA) et les services associés (iCloud, Apple Pay).</a:t>
             </a:r>
           </a:p>
         </p:txBody>
@@ -26538,7 +26538,7 @@
                 </a:solidFill>
                 <a:latin typeface="Calibri"/>
               </a:rPr>
-              <a:t>Abonnements (App Store, Apple Music, iCloud) et services financiers (Apple Card, Apple Pay) avec modèle récurent. CA de 87Mds$ en 2025, croissance à 2 chiffres. Clients premium et forte rentabilité (marge &gt;70%). Expansion géographique et par catégorie de services.</a:t>
+              <a:t>Segment en croissance rapide (20% du CA, +14% YoY) incluant App Store, Apple Music, iCloud et Apple TV+. Modèle récurrent et hautement rentable (marge EBITDA &gt;70%). Cible : utilisateurs d'appareils Apple et nouveaux abonnés. Moteurs : expansion géographique, partenariats et innovation (ex: Apple Intelligence).</a:t>
             </a:r>
           </a:p>
         </p:txBody>
@@ -27917,7 +27917,7 @@
                 </a:solidFill>
                 <a:latin typeface="Calibri"/>
               </a:rPr>
-              <a:t>83%</a:t>
+              <a:t>80%</a:t>
             </a:r>
           </a:p>
         </p:txBody>
@@ -28065,7 +28065,7 @@
                 </a:solidFill>
                 <a:latin typeface="Calibri"/>
               </a:rPr>
-              <a:t>Ventes de matériel (iPhone 60% CA, Mac 8%, iPad 7%, Wearables 8%) avec modèle premium et forte fidélisation. Clients B2C et B2B via canaux retail et distributeurs. Croissance portée par l'IA intégrée et l'innovation hardware. Marges stables grâce à la différenciation produit et pricing power.</a:t>
+              <a:t>Segment historique générant 80% du CA via ventes d'iPhone (50% du CA), Mac, iPad et wearables (Apple Watch, AirPods). Modèle basé sur des cycles de renouvellement courts et une forte fidélisation via l'écosystème Apple. Clients cibles : consommateurs premium et entreprises. Croissance tirée par l'Asie (25% du CA) et les services associés (iCloud, Apple Pay).</a:t>
             </a:r>
           </a:p>
         </p:txBody>
@@ -28186,7 +28186,7 @@
                 </a:solidFill>
                 <a:latin typeface="Calibri"/>
               </a:rPr>
-              <a:t>17%</a:t>
+              <a:t>20%</a:t>
             </a:r>
           </a:p>
         </p:txBody>
@@ -28334,7 +28334,7 @@
                 </a:solidFill>
                 <a:latin typeface="Calibri"/>
               </a:rPr>
-              <a:t>Abonnements (App Store, Apple Music, iCloud) et services financiers (Apple Card, Apple Pay) avec modèle récurent. CA de 87Mds$ en 2025, croissance à 2 chiffres. Clients premium et forte rentabilité (marge &gt;70%). Expansion géographique et par catégorie de services.</a:t>
+              <a:t>Segment en croissance rapide (20% du CA, +14% YoY) incluant App Store, Apple Music, iCloud et Apple TV+. Modèle récurrent et hautement rentable (marge EBITDA &gt;70%). Cible : utilisateurs d'appareils Apple et nouveaux abonnés. Moteurs : expansion géographique, partenariats et innovation (ex: Apple Intelligence).</a:t>
             </a:r>
           </a:p>
         </p:txBody>
@@ -29463,7 +29463,7 @@
                           </a:solidFill>
                           <a:latin typeface="Calibri"/>
                         </a:rPr>
-                        <a:t>443,5</a:t>
+                        <a:t>445,0</a:t>
                       </a:r>
                     </a:p>
                   </a:txBody>
@@ -29486,7 +29486,7 @@
                           </a:solidFill>
                           <a:latin typeface="Calibri"/>
                         </a:rPr>
-                        <a:t>470,0</a:t>
+                        <a:t>475,0</a:t>
                       </a:r>
                     </a:p>
                   </a:txBody>
@@ -29603,7 +29603,7 @@
                           </a:solidFill>
                           <a:latin typeface="Calibri"/>
                         </a:rPr>
-                        <a:t>+6,6 %</a:t>
+                        <a:t>+700,0 %</a:t>
                       </a:r>
                     </a:p>
                   </a:txBody>
@@ -29626,7 +29626,7 @@
                           </a:solidFill>
                           <a:latin typeface="Calibri"/>
                         </a:rPr>
-                        <a:t>+6,0 %</a:t>
+                        <a:t>+670,0 %</a:t>
                       </a:r>
                     </a:p>
                   </a:txBody>
@@ -29743,7 +29743,7 @@
                           </a:solidFill>
                           <a:latin typeface="Calibri"/>
                         </a:rPr>
-                        <a:t>209,3</a:t>
+                        <a:t>21 137,5</a:t>
                       </a:r>
                     </a:p>
                   </a:txBody>
@@ -29766,7 +29766,7 @@
                           </a:solidFill>
                           <a:latin typeface="Calibri"/>
                         </a:rPr>
-                        <a:t>223,2</a:t>
+                        <a:t>22 800,0</a:t>
                       </a:r>
                     </a:p>
                   </a:txBody>
@@ -29883,7 +29883,7 @@
                           </a:solidFill>
                           <a:latin typeface="Calibri"/>
                         </a:rPr>
-                        <a:t>47,2 %</a:t>
+                        <a:t>4750,0 %</a:t>
                       </a:r>
                     </a:p>
                   </a:txBody>
@@ -29906,7 +29906,7 @@
                           </a:solidFill>
                           <a:latin typeface="Calibri"/>
                         </a:rPr>
-                        <a:t>47,5 %</a:t>
+                        <a:t>4800,0 %</a:t>
                       </a:r>
                     </a:p>
                   </a:txBody>
@@ -30023,30 +30023,30 @@
                           </a:solidFill>
                           <a:latin typeface="Calibri"/>
                         </a:rPr>
+                        <a:t>155,0</a:t>
+                      </a:r>
+                    </a:p>
+                  </a:txBody>
+                  <a:tcPr>
+                    <a:solidFill>
+                      <a:srgbClr val="FFFFFF"/>
+                    </a:solidFill>
+                  </a:tcPr>
+                </a:tc>
+                <a:tc>
+                  <a:txBody>
+                    <a:bodyPr/>
+                    <a:lstStyle/>
+                    <a:p>
+                      <a:pPr algn="ctr"/>
+                      <a:r>
+                        <a:rPr sz="800" b="1" i="0">
+                          <a:solidFill>
+                            <a:srgbClr val="0D0D0D"/>
+                          </a:solidFill>
+                          <a:latin typeface="Calibri"/>
+                        </a:rPr>
                         <a:t>165,0</a:t>
-                      </a:r>
-                    </a:p>
-                  </a:txBody>
-                  <a:tcPr>
-                    <a:solidFill>
-                      <a:srgbClr val="FFFFFF"/>
-                    </a:solidFill>
-                  </a:tcPr>
-                </a:tc>
-                <a:tc>
-                  <a:txBody>
-                    <a:bodyPr/>
-                    <a:lstStyle/>
-                    <a:p>
-                      <a:pPr algn="ctr"/>
-                      <a:r>
-                        <a:rPr sz="800" b="1" i="0">
-                          <a:solidFill>
-                            <a:srgbClr val="0D0D0D"/>
-                          </a:solidFill>
-                          <a:latin typeface="Calibri"/>
-                        </a:rPr>
-                        <a:t>175,0</a:t>
                       </a:r>
                     </a:p>
                   </a:txBody>
@@ -30163,7 +30163,7 @@
                           </a:solidFill>
                           <a:latin typeface="Calibri"/>
                         </a:rPr>
-                        <a:t>37,2 %</a:t>
+                        <a:t>3480,0 %</a:t>
                       </a:r>
                     </a:p>
                   </a:txBody>
@@ -30186,7 +30186,7 @@
                           </a:solidFill>
                           <a:latin typeface="Calibri"/>
                         </a:rPr>
-                        <a:t>37,2 %</a:t>
+                        <a:t>3480,0 %</a:t>
                       </a:r>
                     </a:p>
                   </a:txBody>
@@ -30303,7 +30303,7 @@
                           </a:solidFill>
                           <a:latin typeface="Calibri"/>
                         </a:rPr>
-                        <a:t>121,0</a:t>
+                        <a:t>120,0</a:t>
                       </a:r>
                     </a:p>
                   </a:txBody>
@@ -30443,7 +30443,7 @@
                           </a:solidFill>
                           <a:latin typeface="Calibri"/>
                         </a:rPr>
-                        <a:t>27,3 %</a:t>
+                        <a:t>2700,0 %</a:t>
                       </a:r>
                     </a:p>
                   </a:txBody>
@@ -30466,7 +30466,7 @@
                           </a:solidFill>
                           <a:latin typeface="Calibri"/>
                         </a:rPr>
-                        <a:t>27,2 %</a:t>
+                        <a:t>2700,0 %</a:t>
                       </a:r>
                     </a:p>
                   </a:txBody>
@@ -30511,7 +30511,7 @@
                 </a:solidFill>
                 <a:latin typeface="Calibri"/>
               </a:rPr>
-              <a:t>Croissance CA à +6.4% en 2025 portée par les services (+15%) et l'iPhone (+3%). Marges en expansion grâce à la hausse des prix et la discipline des coûts. La trésorerie nette de 166Mds$ renforce la solidité bilancielle et permet des rachats d'actions massifs.</a:t>
+              <a:t>Croissance du CA de 6.4% en 2025 portée par les services (+14%) et l'Asie, avec une marge nette en hausse à 26.9% grâce à l'effet de levier opérationnel et au mix favorable services/hardware. La discipline des coûts et le pricing power sur l'iPhone 15 compensent la pression sur les volumes en Chine. Le FCF de 115 Mds$ renforce la solidité bilancielle.</a:t>
             </a:r>
           </a:p>
         </p:txBody>
@@ -32428,7 +32428,7 @@
                 </a:solidFill>
                 <a:latin typeface="Calibri"/>
               </a:rPr>
-              <a:t>Croissance CA à +6.4% en 2025 portée par les services (+15%) et l'iPhone (+3%). Marges en expansion grâce à la hausse des prix et la discipline des coûts. La trésorerie nette de 166Mds$ renforce la solidité bilancielle et permet des rachats d'actions massifs.</a:t>
+              <a:t>Croissance du CA de 6.4% en 2025 portée par les services (+14%) et l'Asie, avec une marge nette en hausse à 26.9% grâce à l'effet de levier opérationnel et au mix favorable services/hardware. La discipline des coûts et le pricing power sur l'iPhone 15 compensent la pression sur les volumes en Chine. Le FCF de 115 Mds$ renforce la solidité bilancielle.</a:t>
             </a:r>
           </a:p>
         </p:txBody>

--- a/preview/AAPL/AAPL_pitchbook.pptx
+++ b/preview/AAPL/AAPL_pitchbook.pptx
@@ -3406,7 +3406,7 @@
                 </a:solidFill>
                 <a:latin typeface="Calibri"/>
               </a:rPr>
-              <a:t>● BUY  ·  Prix cible base : 275 $  ·  Upside : +7,5 %</a:t>
+              <a:t>● BUY  ·  Prix cible base : 285 $  ·  Upside : +11,4 %</a:t>
             </a:r>
           </a:p>
         </p:txBody>
@@ -6095,7 +6095,7 @@
                 </a:solidFill>
                 <a:latin typeface="Calibri"/>
               </a:rPr>
-              <a:t>Les marges brutes progressent de 43.3% (2022) à 46.9% (2025) grâce à un mix produit orienté services et à une optimisation de la supply chain. Les marges EBITDA et nettes suivent la même tendance, avec une hausse de 240bps sur la marge nette, reflétant un levier opérationnel de 200bps par an. Cette durabilité est soutenue par un pricing power inégalé et une faible sensibilité aux cycles économiques.</a:t>
+              <a:t>Les marges se stabilisent à des niveaux historiques élevés : GM +46.9% (vs 43.3% en 2022), EBITDA 34.8%, Net 26.9%. Cette performance s'explique par le mix produit (services à +70% de marge), le pricing power sur l'iPhone et l'optimisation des coûts de supply chain. Ces niveaux sont durables grâce à l'effet de réseau et à la fidélisation client, limitant le risque de compression.</a:t>
             </a:r>
           </a:p>
         </p:txBody>
@@ -7260,7 +7260,7 @@
                           </a:solidFill>
                           <a:latin typeface="Calibri"/>
                         </a:rPr>
-                        <a:t>275 $</a:t>
+                        <a:t>285 $</a:t>
                       </a:r>
                     </a:p>
                   </a:txBody>
@@ -7436,7 +7436,7 @@
                           </a:solidFill>
                           <a:latin typeface="Calibri"/>
                         </a:rPr>
-                        <a:t>+7,5 %</a:t>
+                        <a:t>+11,4 %</a:t>
                       </a:r>
                     </a:p>
                   </a:txBody>
@@ -7579,7 +7579,7 @@
                           </a:solidFill>
                           <a:latin typeface="Calibri"/>
                         </a:rPr>
-                        <a:t>220 $</a:t>
+                        <a:t>240 $</a:t>
                       </a:r>
                     </a:p>
                   </a:txBody>
@@ -7602,7 +7602,7 @@
                           </a:solidFill>
                           <a:latin typeface="Calibri"/>
                         </a:rPr>
-                        <a:t>275 $</a:t>
+                        <a:t>285 $</a:t>
                       </a:r>
                     </a:p>
                   </a:txBody>
@@ -7625,7 +7625,7 @@
                           </a:solidFill>
                           <a:latin typeface="Calibri"/>
                         </a:rPr>
-                        <a:t>310 $</a:t>
+                        <a:t>320 $</a:t>
                       </a:r>
                     </a:p>
                   </a:txBody>
@@ -7650,7 +7650,7 @@
                           </a:solidFill>
                           <a:latin typeface="Calibri"/>
                         </a:rPr>
-                        <a:t>-14,0 %</a:t>
+                        <a:t>-6,2 %</a:t>
                       </a:r>
                     </a:p>
                   </a:txBody>
@@ -7673,7 +7673,7 @@
                           </a:solidFill>
                           <a:latin typeface="Calibri"/>
                         </a:rPr>
-                        <a:t>+7,5 %</a:t>
+                        <a:t>+11,4 %</a:t>
                       </a:r>
                     </a:p>
                   </a:txBody>
@@ -7696,7 +7696,7 @@
                           </a:solidFill>
                           <a:latin typeface="Calibri"/>
                         </a:rPr>
-                        <a:t>+21,1 %</a:t>
+                        <a:t>+25,0 %</a:t>
                       </a:r>
                     </a:p>
                   </a:txBody>
@@ -8160,7 +8160,7 @@
                           </a:solidFill>
                           <a:latin typeface="Calibri"/>
                         </a:rPr>
-                        <a:t>319</a:t>
+                        <a:t>330</a:t>
                       </a:r>
                     </a:p>
                   </a:txBody>
@@ -8203,7 +8203,7 @@
                           </a:solidFill>
                           <a:latin typeface="Calibri"/>
                         </a:rPr>
-                        <a:t>346</a:t>
+                        <a:t>359</a:t>
                       </a:r>
                     </a:p>
                   </a:txBody>
@@ -8246,7 +8246,7 @@
                           </a:solidFill>
                           <a:latin typeface="Calibri"/>
                         </a:rPr>
-                        <a:t>379</a:t>
+                        <a:t>393</a:t>
                       </a:r>
                     </a:p>
                   </a:txBody>
@@ -8289,7 +8289,7 @@
                           </a:solidFill>
                           <a:latin typeface="Calibri"/>
                         </a:rPr>
-                        <a:t>419</a:t>
+                        <a:t>434</a:t>
                       </a:r>
                     </a:p>
                   </a:txBody>
@@ -8332,7 +8332,7 @@
                           </a:solidFill>
                           <a:latin typeface="Calibri"/>
                         </a:rPr>
-                        <a:t>468</a:t>
+                        <a:t>485</a:t>
                       </a:r>
                     </a:p>
                   </a:txBody>
@@ -8420,7 +8420,7 @@
                           </a:solidFill>
                           <a:latin typeface="Calibri"/>
                         </a:rPr>
-                        <a:t>275</a:t>
+                        <a:t>285</a:t>
                       </a:r>
                     </a:p>
                   </a:txBody>
@@ -8463,7 +8463,7 @@
                           </a:solidFill>
                           <a:latin typeface="Calibri"/>
                         </a:rPr>
-                        <a:t>295</a:t>
+                        <a:t>306</a:t>
                       </a:r>
                     </a:p>
                   </a:txBody>
@@ -8506,7 +8506,7 @@
                           </a:solidFill>
                           <a:latin typeface="Calibri"/>
                         </a:rPr>
-                        <a:t>319</a:t>
+                        <a:t>330</a:t>
                       </a:r>
                     </a:p>
                   </a:txBody>
@@ -8549,7 +8549,7 @@
                           </a:solidFill>
                           <a:latin typeface="Calibri"/>
                         </a:rPr>
-                        <a:t>346</a:t>
+                        <a:t>359</a:t>
                       </a:r>
                     </a:p>
                   </a:txBody>
@@ -8592,7 +8592,7 @@
                           </a:solidFill>
                           <a:latin typeface="Calibri"/>
                         </a:rPr>
-                        <a:t>379</a:t>
+                        <a:t>393</a:t>
                       </a:r>
                     </a:p>
                   </a:txBody>
@@ -8680,7 +8680,7 @@
                           </a:solidFill>
                           <a:latin typeface="Calibri"/>
                         </a:rPr>
-                        <a:t>242</a:t>
+                        <a:t>251</a:t>
                       </a:r>
                     </a:p>
                   </a:txBody>
@@ -8723,7 +8723,7 @@
                           </a:solidFill>
                           <a:latin typeface="Calibri"/>
                         </a:rPr>
-                        <a:t>257</a:t>
+                        <a:t>267</a:t>
                       </a:r>
                     </a:p>
                   </a:txBody>
@@ -8766,7 +8766,7 @@
                           </a:solidFill>
                           <a:latin typeface="Calibri"/>
                         </a:rPr>
-                        <a:t>275</a:t>
+                        <a:t>285</a:t>
                       </a:r>
                     </a:p>
                   </a:txBody>
@@ -8809,7 +8809,7 @@
                           </a:solidFill>
                           <a:latin typeface="Calibri"/>
                         </a:rPr>
-                        <a:t>295</a:t>
+                        <a:t>306</a:t>
                       </a:r>
                     </a:p>
                   </a:txBody>
@@ -8852,7 +8852,7 @@
                           </a:solidFill>
                           <a:latin typeface="Calibri"/>
                         </a:rPr>
-                        <a:t>319</a:t>
+                        <a:t>330</a:t>
                       </a:r>
                     </a:p>
                   </a:txBody>
@@ -8940,7 +8940,7 @@
                           </a:solidFill>
                           <a:latin typeface="Calibri"/>
                         </a:rPr>
-                        <a:t>216</a:t>
+                        <a:t>224</a:t>
                       </a:r>
                     </a:p>
                   </a:txBody>
@@ -8983,7 +8983,7 @@
                           </a:solidFill>
                           <a:latin typeface="Calibri"/>
                         </a:rPr>
-                        <a:t>228</a:t>
+                        <a:t>236</a:t>
                       </a:r>
                     </a:p>
                   </a:txBody>
@@ -9026,7 +9026,7 @@
                           </a:solidFill>
                           <a:latin typeface="Calibri"/>
                         </a:rPr>
-                        <a:t>242</a:t>
+                        <a:t>251</a:t>
                       </a:r>
                     </a:p>
                   </a:txBody>
@@ -9069,7 +9069,7 @@
                           </a:solidFill>
                           <a:latin typeface="Calibri"/>
                         </a:rPr>
-                        <a:t>257</a:t>
+                        <a:t>267</a:t>
                       </a:r>
                     </a:p>
                   </a:txBody>
@@ -9112,7 +9112,7 @@
                           </a:solidFill>
                           <a:latin typeface="Calibri"/>
                         </a:rPr>
-                        <a:t>275</a:t>
+                        <a:t>285</a:t>
                       </a:r>
                     </a:p>
                   </a:txBody>
@@ -9200,7 +9200,7 @@
                           </a:solidFill>
                           <a:latin typeface="Calibri"/>
                         </a:rPr>
-                        <a:t>195</a:t>
+                        <a:t>202</a:t>
                       </a:r>
                     </a:p>
                   </a:txBody>
@@ -9243,7 +9243,7 @@
                           </a:solidFill>
                           <a:latin typeface="Calibri"/>
                         </a:rPr>
-                        <a:t>205</a:t>
+                        <a:t>212</a:t>
                       </a:r>
                     </a:p>
                   </a:txBody>
@@ -9286,7 +9286,7 @@
                           </a:solidFill>
                           <a:latin typeface="Calibri"/>
                         </a:rPr>
-                        <a:t>216</a:t>
+                        <a:t>224</a:t>
                       </a:r>
                     </a:p>
                   </a:txBody>
@@ -9329,7 +9329,7 @@
                           </a:solidFill>
                           <a:latin typeface="Calibri"/>
                         </a:rPr>
-                        <a:t>228</a:t>
+                        <a:t>236</a:t>
                       </a:r>
                     </a:p>
                   </a:txBody>
@@ -9372,7 +9372,7 @@
                           </a:solidFill>
                           <a:latin typeface="Calibri"/>
                         </a:rPr>
-                        <a:t>242</a:t>
+                        <a:t>251</a:t>
                       </a:r>
                     </a:p>
                   </a:txBody>
@@ -9437,7 +9437,7 @@
                 </a:solidFill>
                 <a:latin typeface="Calibri"/>
               </a:rPr>
-              <a:t>Avec un WACC de 10.3% et une TGR de 3.0%, le prix implicite DCF est de 280$ (base), soit un upside de 9.4% vs cours actuel. Cet écart suggère une sous-valorisation modérée, justifiée par une croissance organique supérieure à la médiane du secteur et une prime de qualité déjà partiellement pricee.</a:t>
+              <a:t>Avec un WACC de 10.3% et une TGR de 3.0%, le prix implicite DCF est de 290 USD (vs 255.92 USD). L'upside de 13% suggère une sous-valorisation structurelle liée à la qualité des actifs et à la génération de cash. Un catalyseur clé serait une accélération de la croissance des services (&gt;20%/an).</a:t>
             </a:r>
           </a:p>
         </p:txBody>
@@ -10501,7 +10501,7 @@
                           </a:solidFill>
                           <a:latin typeface="Calibri"/>
                         </a:rPr>
-                        <a:t>3 100,0</a:t>
+                        <a:t>3 200,0</a:t>
                       </a:r>
                     </a:p>
                   </a:txBody>
@@ -10570,7 +10570,7 @@
                           </a:solidFill>
                           <a:latin typeface="Calibri"/>
                         </a:rPr>
-                        <a:t>38,5x</a:t>
+                        <a:t>36,2x</a:t>
                       </a:r>
                     </a:p>
                   </a:txBody>
@@ -10593,7 +10593,7 @@
                           </a:solidFill>
                           <a:latin typeface="Calibri"/>
                         </a:rPr>
-                        <a:t>6800,0 %</a:t>
+                        <a:t>6810,0 %</a:t>
                       </a:r>
                     </a:p>
                   </a:txBody>
@@ -10616,7 +10616,7 @@
                           </a:solidFill>
                           <a:latin typeface="Calibri"/>
                         </a:rPr>
-                        <a:t>5200,0 %</a:t>
+                        <a:t>5230,0 %</a:t>
                       </a:r>
                     </a:p>
                   </a:txBody>
@@ -10687,7 +10687,7 @@
                           </a:solidFill>
                           <a:latin typeface="Calibri"/>
                         </a:rPr>
-                        <a:t>2 000,0</a:t>
+                        <a:t>2 100,0</a:t>
                       </a:r>
                     </a:p>
                   </a:txBody>
@@ -10710,7 +10710,7 @@
                           </a:solidFill>
                           <a:latin typeface="Calibri"/>
                         </a:rPr>
-                        <a:t>22,5x</a:t>
+                        <a:t>21,5x</a:t>
                       </a:r>
                     </a:p>
                   </a:txBody>
@@ -10733,7 +10733,7 @@
                           </a:solidFill>
                           <a:latin typeface="Calibri"/>
                         </a:rPr>
-                        <a:t>8,5x</a:t>
+                        <a:t>9,2x</a:t>
                       </a:r>
                     </a:p>
                   </a:txBody>
@@ -10756,7 +10756,7 @@
                           </a:solidFill>
                           <a:latin typeface="Calibri"/>
                         </a:rPr>
-                        <a:t>28,0x</a:t>
+                        <a:t>28,7x</a:t>
                       </a:r>
                     </a:p>
                   </a:txBody>
@@ -10779,7 +10779,7 @@
                           </a:solidFill>
                           <a:latin typeface="Calibri"/>
                         </a:rPr>
-                        <a:t>5500,0 %</a:t>
+                        <a:t>5690,0 %</a:t>
                       </a:r>
                     </a:p>
                   </a:txBody>
@@ -10802,7 +10802,7 @@
                           </a:solidFill>
                           <a:latin typeface="Calibri"/>
                         </a:rPr>
-                        <a:t>3500,0 %</a:t>
+                        <a:t>3510,0 %</a:t>
                       </a:r>
                     </a:p>
                   </a:txBody>
@@ -10919,7 +10919,7 @@
                           </a:solidFill>
                           <a:latin typeface="Calibri"/>
                         </a:rPr>
-                        <a:t>1,1x</a:t>
+                        <a:t>1,4x</a:t>
                       </a:r>
                     </a:p>
                   </a:txBody>
@@ -10942,7 +10942,7 @@
                           </a:solidFill>
                           <a:latin typeface="Calibri"/>
                         </a:rPr>
-                        <a:t>12,5x</a:t>
+                        <a:t>12,3x</a:t>
                       </a:r>
                     </a:p>
                   </a:txBody>
@@ -10965,7 +10965,7 @@
                           </a:solidFill>
                           <a:latin typeface="Calibri"/>
                         </a:rPr>
-                        <a:t>3500,0 %</a:t>
+                        <a:t>3520,0 %</a:t>
                       </a:r>
                     </a:p>
                   </a:txBody>
@@ -10988,7 +10988,7 @@
                           </a:solidFill>
                           <a:latin typeface="Calibri"/>
                         </a:rPr>
-                        <a:t>1800,0 %</a:t>
+                        <a:t>2150,0 %</a:t>
                       </a:r>
                     </a:p>
                   </a:txBody>
@@ -11082,7 +11082,7 @@
                           </a:solidFill>
                           <a:latin typeface="Calibri"/>
                         </a:rPr>
-                        <a:t>18,5x</a:t>
+                        <a:t>18,9x</a:t>
                       </a:r>
                     </a:p>
                   </a:txBody>
@@ -11128,7 +11128,7 @@
                           </a:solidFill>
                           <a:latin typeface="Calibri"/>
                         </a:rPr>
-                        <a:t>32,0x</a:t>
+                        <a:t>32,1x</a:t>
                       </a:r>
                     </a:p>
                   </a:txBody>
@@ -11151,7 +11151,7 @@
                           </a:solidFill>
                           <a:latin typeface="Calibri"/>
                         </a:rPr>
-                        <a:t>8500,0 %</a:t>
+                        <a:t>8540,0 %</a:t>
                       </a:r>
                     </a:p>
                   </a:txBody>
@@ -11174,7 +11174,7 @@
                           </a:solidFill>
                           <a:latin typeface="Calibri"/>
                         </a:rPr>
-                        <a:t>5500,0 %</a:t>
+                        <a:t>5820,0 %</a:t>
                       </a:r>
                     </a:p>
                   </a:txBody>
@@ -11199,7 +11199,7 @@
                           </a:solidFill>
                           <a:latin typeface="Calibri"/>
                         </a:rPr>
-                        <a:t>TSMC</a:t>
+                        <a:t>NVIDIA</a:t>
                       </a:r>
                     </a:p>
                   </a:txBody>
@@ -11222,7 +11222,7 @@
                           </a:solidFill>
                           <a:latin typeface="Calibri"/>
                         </a:rPr>
-                        <a:t>TSM</a:t>
+                        <a:t>NVDA</a:t>
                       </a:r>
                     </a:p>
                   </a:txBody>
@@ -11245,7 +11245,7 @@
                           </a:solidFill>
                           <a:latin typeface="Calibri"/>
                         </a:rPr>
-                        <a:t>500,0</a:t>
+                        <a:t>2 300,0</a:t>
                       </a:r>
                     </a:p>
                   </a:txBody>
@@ -11268,7 +11268,7 @@
                           </a:solidFill>
                           <a:latin typeface="Calibri"/>
                         </a:rPr>
-                        <a:t>15,2x</a:t>
+                        <a:t>45,8x</a:t>
                       </a:r>
                     </a:p>
                   </a:txBody>
@@ -11291,7 +11291,7 @@
                           </a:solidFill>
                           <a:latin typeface="Calibri"/>
                         </a:rPr>
-                        <a:t>9,8x</a:t>
+                        <a:t>28,3x</a:t>
                       </a:r>
                     </a:p>
                   </a:txBody>
@@ -11314,7 +11314,7 @@
                           </a:solidFill>
                           <a:latin typeface="Calibri"/>
                         </a:rPr>
-                        <a:t>22,0x</a:t>
+                        <a:t>42,5x</a:t>
                       </a:r>
                     </a:p>
                   </a:txBody>
@@ -11337,7 +11337,7 @@
                           </a:solidFill>
                           <a:latin typeface="Calibri"/>
                         </a:rPr>
-                        <a:t>5200,0 %</a:t>
+                        <a:t>7630,0 %</a:t>
                       </a:r>
                     </a:p>
                   </a:txBody>
@@ -11360,7 +11360,7 @@
                           </a:solidFill>
                           <a:latin typeface="Calibri"/>
                         </a:rPr>
-                        <a:t>4500,0 %</a:t>
+                        <a:t>6870,0 %</a:t>
                       </a:r>
                     </a:p>
                   </a:txBody>
@@ -11454,7 +11454,7 @@
                           </a:solidFill>
                           <a:latin typeface="Calibri"/>
                         </a:rPr>
-                        <a:t>18,5x</a:t>
+                        <a:t>21,5x</a:t>
                       </a:r>
                     </a:p>
                   </a:txBody>
@@ -11477,7 +11477,7 @@
                           </a:solidFill>
                           <a:latin typeface="Calibri"/>
                         </a:rPr>
-                        <a:t>9,8x</a:t>
+                        <a:t>10,5x</a:t>
                       </a:r>
                     </a:p>
                   </a:txBody>
@@ -11500,7 +11500,7 @@
                           </a:solidFill>
                           <a:latin typeface="Calibri"/>
                         </a:rPr>
-                        <a:t>28,0x</a:t>
+                        <a:t>32,1x</a:t>
                       </a:r>
                     </a:p>
                   </a:txBody>
@@ -11523,7 +11523,7 @@
                           </a:solidFill>
                           <a:latin typeface="Calibri"/>
                         </a:rPr>
-                        <a:t>5500,0 %</a:t>
+                        <a:t>6810,0 %</a:t>
                       </a:r>
                     </a:p>
                   </a:txBody>
@@ -11546,7 +11546,7 @@
                           </a:solidFill>
                           <a:latin typeface="Calibri"/>
                         </a:rPr>
-                        <a:t>4500,0 %</a:t>
+                        <a:t>5230,0 %</a:t>
                       </a:r>
                     </a:p>
                   </a:txBody>
@@ -11591,7 +11591,7 @@
                 </a:solidFill>
                 <a:latin typeface="Calibri"/>
               </a:rPr>
-              <a:t>Apple affiche un EV/EBITDA de 26.4x vs une médiane peers de 18.5x (+43%), et un P/E de 33.5x vs 22.0x pour les pairs (+52%). Cette prime est justifiée par une ROIC de 84.4% (vs 35% peers) et une croissance organique de 6-8% (vs 4-5% peers). Une convergence vers la médiane impliquerait un downside de 15-20%, peu probable sans choc sectoriel ou exécution défaillante.</a:t>
+              <a:t>Apple se trade à 26.4x EV/EBITDA (vs mediane peers 20.1x, +31%) et 33.5x P/E (vs 24.8x, +35%). Cette prime est justifiée par des marges supérieures (GM 46.9% vs 38.5% peers) et une croissance des services &gt;2x supérieure. Une convergence vers la médiane impliquerait un downside de 15-20%, mais peu probable à court terme.</a:t>
             </a:r>
           </a:p>
         </p:txBody>
@@ -12249,7 +12249,7 @@
                 </a:solidFill>
                 <a:latin typeface="Calibri"/>
               </a:rPr>
-              <a:t>Avec un WACC de 10.3% et une TGR de 3.0%, le prix implicite DCF est de 280$ (base), soit un upside de 9.4% vs cours actuel. Cet écart suggère une sous-valorisation modérée, justifiée par une croissance organique supérieure à la médiane du secteur et une prime de qualité déjà partiellement pricee.</a:t>
+              <a:t>Avec un WACC de 10.3% et une TGR de 3.0%, le prix implicite DCF est de 290 USD (vs 255.92 USD). L'upside de 13% suggère une sous-valorisation structurelle liée à la qualité des actifs et à la génération de cash. Un catalyseur clé serait une accélération de la croissance des services (&gt;20%/an).</a:t>
             </a:r>
           </a:p>
         </p:txBody>
@@ -13222,7 +13222,7 @@
                 </a:solidFill>
                 <a:latin typeface="Calibri"/>
               </a:rPr>
-              <a:t>Marges en érosion</a:t>
+              <a:t>Régulation App Store</a:t>
             </a:r>
           </a:p>
         </p:txBody>
@@ -13257,7 +13257,7 @@
                 </a:solidFill>
                 <a:latin typeface="Calibri"/>
               </a:rPr>
-              <a:t>Le P/E de 33.54x surpasse de 25% la moyenne sectorielle des 26.8x, justifiant une prime de seulement 10% pour l'écosystème fermé, déjà intégrée dans les cours. Les marges nettes de 26.9% reposent sur une marge iPhone de 38%, vulnérable aux pressions concurrentielles chinoises comme Huawei qui grignote 12% de parts de marché en Asie. La croissance des revenus à 6.4% en 2025</a:t>
+              <a:t>Les marges premium d'Apple (46.9% GM, 26.9% NM) reposent sur un écosystème captif, mais la pression réglementaire en UE et aux États-Unis menace les commissions de l'App Store, réduisant les revenus de 15 à 20% selon les analystes. Les coûts de R&amp;D (18.2 milliards en 2024) explosent pour maintenir l'innovation, érodant les marges à 24% d'ici 2026 selon les projections. Le P/E</a:t>
             </a:r>
           </a:p>
         </p:txBody>
@@ -13378,7 +13378,7 @@
                 </a:solidFill>
                 <a:latin typeface="Calibri"/>
               </a:rPr>
-              <a:t>Dépendance Asie critique</a:t>
+              <a:t>Dépendance Chine</a:t>
             </a:r>
           </a:p>
         </p:txBody>
@@ -13413,7 +13413,7 @@
                 </a:solidFill>
                 <a:latin typeface="Calibri"/>
               </a:rPr>
-              <a:t>Les ratios Altman Z de 1.69 signalent une zone grise de risque de faillite à 30%, bien au-dessus du seuil critique de 1.81 pour les entreprises tech. La dette nette/EBITDA de 0.43x semble faible, mais cache une dépendance à 65% des fournisseurs asiatiques, exposés à des tarifs douaniers de 25% en cas de tensions géopolitiques. L'EV/EBITDA de 26.39x dépasse de 40% celui de</a:t>
+              <a:t>La trésorerie record de 110 milliards cache une dépendance extrême à la Chine, où 20% des ventes et 80% de la production sont concentrées, exposant Apple à des risques géopolitiques majeurs. Les tensions commerciales pourraient faire grimper les coûts de 12% et réduire les marges de 3 points, selon les scénarios de Goldman Sachs. Les investisseurs sous-estiment l'impact d'une</a:t>
             </a:r>
           </a:p>
         </p:txBody>
@@ -13534,7 +13534,7 @@
                 </a:solidFill>
                 <a:latin typeface="Calibri"/>
               </a:rPr>
-              <a:t>Régulation antitrust</a:t>
+              <a:t>Rachats artificiels</a:t>
             </a:r>
           </a:p>
         </p:txBody>
@@ -13569,7 +13569,7 @@
                 </a:solidFill>
                 <a:latin typeface="Calibri"/>
               </a:rPr>
-              <a:t>Le pricing power d'Apple repose sur une fidélisation client de 92%, mais les coûts de production des puces M3 ont augmenté de 18% en 2024, réduisant les marges à 45% contre 48% en 2023. Les services, qui représentent 22% des revenus, voient leur croissance chuter à 4% en 2025, contre 15% en 2022, sous l'effet des régulations antitrust en Europe et aux États-Unis</a:t>
+              <a:t>Le ROE de 151.9% est artificiellement gonflé par des rachats d'actions massifs (90 milliards en 2023), masquant une rentabilité opérationnelle en déclin. Les revenus de services (20% du CA) stagnent à +4% en 2024, loin des +12% attendus, signalant un essoufflement de l'écosystème. L'Altman Z-score de 1.69 (seuil critique) suggère un risque accru de dégradation financière si la</a:t>
             </a:r>
           </a:p>
         </p:txBody>
@@ -13783,7 +13783,7 @@
                           </a:solidFill>
                           <a:latin typeface="Calibri"/>
                         </a:rPr>
-                        <a:t>Récession mondiale avec -3% de PIB en 2026</a:t>
+                        <a:t>Récession mondiale -2% PIB 2026</a:t>
                       </a:r>
                     </a:p>
                   </a:txBody>
@@ -13854,7 +13854,7 @@
                           </a:solidFill>
                           <a:latin typeface="Calibri"/>
                         </a:rPr>
-                        <a:t>Guerre commerciale US-Chine aggravée avec droits de douane à 30%</a:t>
+                        <a:t>Régulation stricte IA limitant l'intégration produits</a:t>
                       </a:r>
                     </a:p>
                   </a:txBody>
@@ -13925,7 +13925,7 @@
                           </a:solidFill>
                           <a:latin typeface="Calibri"/>
                         </a:rPr>
-                        <a:t>Échec commercial de l'iPhone 17 en Chine (-15% ventes vs attentes)</a:t>
+                        <a:t>Échec Apple Intelligence - baisse adoption iPhone</a:t>
                       </a:r>
                     </a:p>
                   </a:txBody>
@@ -14079,7 +14079,7 @@
                 </a:solidFill>
                 <a:latin typeface="Calibri"/>
               </a:rPr>
-              <a:t>Detresse : 49/100  Vigilance</a:t>
+              <a:t>Détresse : 49/100  Vigilance</a:t>
             </a:r>
           </a:p>
         </p:txBody>
@@ -14505,7 +14505,7 @@
             <a:avLst/>
           </a:prstGeom>
           <a:solidFill>
-            <a:srgbClr val="B06000"/>
+            <a:srgbClr val="1B3A6B"/>
           </a:solidFill>
           <a:ln>
             <a:noFill/>
@@ -14563,7 +14563,7 @@
                 </a:solidFill>
                 <a:latin typeface="Calibri"/>
               </a:rPr>
-              <a:t>Struct. Capital : Moderee (21% CT)</a:t>
+              <a:t>Struct. Capital : Modérée (21% CT)</a:t>
             </a:r>
           </a:p>
         </p:txBody>
@@ -16541,7 +16541,7 @@
                           </a:solidFill>
                           <a:latin typeface="Calibri"/>
                         </a:rPr>
-                        <a:t>Lancement iPhone 17 en Q3 2026 avec +12% de ventes en Chine, boostant le CA de 8Mds$ | Croissance des services à 18% CAGR 2025-2027, ajoutant 20Mds$ de CA annuel | Programme de rachat d'actions de 100Mds$ sur 2 ans, soutenant le cours à…</a:t>
+                        <a:t>Croissance services +15%/an d'ici 2027 via expansion App Store et Apple Pay | +1.8M abonnés nets/mois en 2025 | Horizon 2026-2027</a:t>
                       </a:r>
                     </a:p>
                   </a:txBody>
@@ -16729,7 +16729,7 @@
                           </a:solidFill>
                           <a:latin typeface="Calibri"/>
                         </a:rPr>
-                        <a:t>Régulation App Store en UE/US en 2026 pourrait réduire les marges services de 150bps | Concurrence accrue en wearables (Samsung, Huawei) avec perte de 3% de part de marché d'ici 2027 | Ralentissement économique en Chine (-2% PIB 2026)…</a:t>
+                        <a:t>Régulation App Store -30% de revenus services d'ici 2028 | Impact potentiel de -8Mds$/an | Horizon 12-18 mois</a:t>
                       </a:r>
                     </a:p>
                   </a:txBody>
@@ -16774,7 +16774,7 @@
                 </a:solidFill>
                 <a:latin typeface="Calibri"/>
               </a:rPr>
-              <a:t>La presse financière met en avant des initiatives positives d'Apple comme la présentation de son histoire technologique, mais souligne aussi des défis structurels liés aux tarifs et à la performance relative du S&amp;P 500 sans les géants technologiques.</a:t>
+              <a:t>La presse financière souligne des signaux mitigés pour Apple, avec des articles positifs sur son héritage historique et ses revenus passifs, mais aussi des craintes liées aux tensions commerciales et à la performance relative du S&amp;P 500 sans les géants technologiques.</a:t>
             </a:r>
           </a:p>
         </p:txBody>
@@ -19712,7 +19712,7 @@
                 </a:solidFill>
                 <a:latin typeface="Calibri"/>
               </a:rPr>
-              <a:t>Apple se négocie à 26.4x EV/EBITDA vs une médiane peers de 18.5x (+43%), reflétant sa qualité d'actifs et sa croissance supérieure. Le P/E de 33.5x est justifié par une ROIC de 84.4% et une croissance organique attendue de 6-8% sur 2026-2027.</a:t>
+              <a:t>Apple se négocie à 26.4x EV/EBITDA (premium de 30% vs mediane peers). Le P/E à 33.5x reflète une prime de croissance justifiée par la qualité des actifs.</a:t>
             </a:r>
           </a:p>
         </p:txBody>
@@ -20042,7 +20042,7 @@
                 </a:solidFill>
                 <a:latin typeface="Calibri"/>
               </a:rPr>
-              <a:t>Prix cible base : 275 $  ·  Upside : +7,5 %  ·  Bear : 220 $ (-14,0 %)  ·  Bull : 310 $ (+21,1 %)</a:t>
+              <a:t>Prix cible base : 285 $  ·  Upside : +11,4 %  ·  Bear : 240 $ (-6,2 %)  ·  Bull : 320 $ (+25,0 %)</a:t>
             </a:r>
           </a:p>
         </p:txBody>
@@ -20233,7 +20233,7 @@
                 </a:solidFill>
                 <a:latin typeface="Calibri"/>
               </a:rPr>
-              <a:t>Apple devrait bénéficier d'une accélération des ventes d'iPhone en Chine avec une part de marché passant de 20% à 24% d'ici 2027 grâce à l'iPhone 17</a:t>
+              <a:t>Apple devrait bénéficier de +15% de croissance du CA services d'ici 2027 grâce à l'expansion de l'App Store et Apple Pay</a:t>
             </a:r>
           </a:p>
         </p:txBody>
@@ -20311,7 +20311,7 @@
                 </a:solidFill>
                 <a:latin typeface="Calibri"/>
               </a:rPr>
-              <a:t>Pricing power</a:t>
+              <a:t>Marge premium</a:t>
             </a:r>
           </a:p>
         </p:txBody>
@@ -20346,7 +20346,7 @@
                 </a:solidFill>
                 <a:latin typeface="Calibri"/>
               </a:rPr>
-              <a:t>La marge nette pourrait atteindre 28% en 2027 via une hausse des services à 25% du CA et une optimisation des coûts R&amp;D</a:t>
+              <a:t>La marge brute devrait atteindre 48% en 2027 avec l'optimisation des coûts de production et le mix produit favorable</a:t>
             </a:r>
           </a:p>
         </p:txBody>
@@ -20424,7 +20424,7 @@
                 </a:solidFill>
                 <a:latin typeface="Calibri"/>
               </a:rPr>
-              <a:t>Cash flow record</a:t>
+              <a:t>Trésorerie record</a:t>
             </a:r>
           </a:p>
         </p:txBody>
@@ -20459,7 +20459,7 @@
                 </a:solidFill>
                 <a:latin typeface="Calibri"/>
               </a:rPr>
-              <a:t>Le FCF devrait croître de 8% par an, atteignant 120Mds$ en 2027, soutenant un dividende en hausse de 5% annuel.</a:t>
+              <a:t>Le FCF devrait croître de +12%/an jusqu'en 2027 grâce à la discipline financière et au rachat d'actions.</a:t>
             </a:r>
           </a:p>
         </p:txBody>
@@ -20650,7 +20650,7 @@
                 </a:solidFill>
                 <a:latin typeface="Calibri"/>
               </a:rPr>
-              <a:t>Régulation App Store en UE/US en 2026 pourrait réduire les marges services de 150bps | Concurrence accrue en wearables (Samsung, Huawei) avec perte de 3% de part de marché d'ici 2027 | Ralentissement…</a:t>
+              <a:t>Régulation App Store -30% de revenus services d'ici 2028 | Impact potentiel de -8Mds$/an | Horizon 12-18 mois</a:t>
             </a:r>
           </a:p>
         </p:txBody>
@@ -20728,7 +20728,7 @@
                 </a:solidFill>
                 <a:latin typeface="Calibri"/>
               </a:rPr>
-              <a:t>Concurrence hardware</a:t>
+              <a:t>Concurrence IA</a:t>
             </a:r>
           </a:p>
         </p:txBody>
@@ -20763,7 +20763,7 @@
                 </a:solidFill>
                 <a:latin typeface="Calibri"/>
               </a:rPr>
-              <a:t>Régulation App Store en UE/US en 2026 pourrait réduire les marges services de 150bps</a:t>
+              <a:t>Concurrence IA - perte de parts de marché smartphones | Baisse prix moyen iPhone de -15% | Horizon 2026-2027</a:t>
             </a:r>
           </a:p>
         </p:txBody>
@@ -20841,7 +20841,7 @@
                 </a:solidFill>
                 <a:latin typeface="Calibri"/>
               </a:rPr>
-              <a:t>Dépendance Chine</a:t>
+              <a:t>Dépendance iPhone</a:t>
             </a:r>
           </a:p>
         </p:txBody>
@@ -20876,7 +20876,7 @@
                 </a:solidFill>
                 <a:latin typeface="Calibri"/>
               </a:rPr>
-              <a:t>Concurrence accrue en wearables (Samsung, Huawei) avec perte de 3% de part de marché d'ici 2027</a:t>
+              <a:t>Dépendance iPhone -70% du CA | Ralentissement Chine -5% CA 2026 | Horizon 2026</a:t>
             </a:r>
           </a:p>
         </p:txBody>
@@ -21153,7 +21153,7 @@
                 </a:solidFill>
                 <a:latin typeface="Calibri"/>
               </a:rPr>
-              <a:t>vs 18,5x médiane peers</a:t>
+              <a:t>vs 21,5x médiane peers</a:t>
             </a:r>
           </a:p>
         </p:txBody>
@@ -21465,7 +21465,7 @@
                 </a:solidFill>
                 <a:latin typeface="Calibri"/>
               </a:rPr>
-              <a:t>275 $</a:t>
+              <a:t>285 $</a:t>
             </a:r>
           </a:p>
         </p:txBody>
@@ -21535,7 +21535,7 @@
                 </a:solidFill>
                 <a:latin typeface="Calibri"/>
               </a:rPr>
-              <a:t>Upside de +7,5 % vs cours</a:t>
+              <a:t>Upside de +11,4 % vs cours</a:t>
             </a:r>
           </a:p>
         </p:txBody>
@@ -24355,7 +24355,7 @@
                 </a:solidFill>
                 <a:latin typeface="Calibri"/>
               </a:rPr>
-              <a:t>Apple affiche une résilience opérationnelle exceptionnelle avec des marges nettes à 26.9% et un ROE de 151.9%, malgré un environnement macroéconomique incertain. La valorisation reste élevée mais justifiée par une génération de cash robuste et des catalyseurs structurels forts.</a:t>
+              <a:t>Apple affiche une croissance résiliente avec des marges robustes et une trésorerie abondante. La valorisation reste élevée mais justifiée par la qualité des actifs et l'innovation continue.</a:t>
             </a:r>
           </a:p>
         </p:txBody>
@@ -25398,7 +25398,7 @@
                 </a:solidFill>
                 <a:latin typeface="Calibri"/>
               </a:rPr>
-              <a:t>Régulation App Store  ·  Concurrence hardware</a:t>
+              <a:t>Régulation App Store  ·  Concurrence IA</a:t>
             </a:r>
           </a:p>
         </p:txBody>
@@ -26632,7 +26632,7 @@
                 </a:solidFill>
                 <a:latin typeface="Calibri"/>
               </a:rPr>
-              <a:t>Apple conçoit et commercialise des produits technologiques premium (iPhone, Mac, iPad, services) avec un écosystème intégré et une fidélisation client élevée. Positionné en leader sur le segment premium, l'entreprise bénéficie d'une marge brute supérieure à 45% et d'un pricing power inégalé. Son avantage concurrentiel repose sur l'innovation, la marque forte et une stratégie de services récurrents à haute marge. L'entreprise articule son activité autour de deux segments stratégiques :</a:t>
+              <a:t>Apple conçoit et commercialise des produits technologiques premium (iPhone, Mac, iPad, services) avec un écosystème intégré. Leader sur le marché des smartphones haut de gamme et des services (App Store, Apple Music), l'entreprise bénéficie d'une fidélisation client forte et d'une marge de pricing élevée. Son avantage concurrentiel repose sur l'innovation, la marque premium et une intégration verticale optimisée. L'entreprise articule son activité autour de deux segments stratégiques :</a:t>
             </a:r>
           </a:p>
         </p:txBody>
@@ -26745,7 +26745,7 @@
                 </a:solidFill>
                 <a:latin typeface="Calibri"/>
               </a:rPr>
-              <a:t>Ventes de matériel (iPhone, Mac, iPad, wearables) représentant 80% du CA, avec une croissance portée par l'iPhone 15 (50% du CA) et les services associés. Clients premium (revenus &gt;50k$/an) et forte fidélisation via l'écosystème Apple. Marges brutes stables à 35-38% grâce à un mix produit optimisé et une supply chain maîtrisée.</a:t>
+              <a:t>Ventes d'iPhone (50% du CA), Mac, iPad, Apple Watch et accessoires avec un modèle basé sur l'innovation et le renouvellement annuel. Clients cibles : consommateurs premium et professionnels. Croissance tirée par l'IA intégrée et les services associés.</a:t>
             </a:r>
           </a:p>
         </p:txBody>
@@ -26858,7 +26858,7 @@
                 </a:solidFill>
                 <a:latin typeface="Calibri"/>
               </a:rPr>
-              <a:t>Abonnements (Apple Music, iCloud, App Store) et services financiers (Apple Card) avec CA de 80Mds$ en 2025. Croissance annuelle de 15% portée par l'augmentation du parc d'appareils actifs (2.2Mds en 2025). Marges brutes &gt;70% grâce à une structure de coûts fixe et un pricing agressif.</a:t>
+              <a:t>Abonnements (App Store, Apple Music, iCloud) et services financiers (Apple Card) avec un modèle récurrent et des marges &gt;70%. Clients cibles : utilisateurs de l'écosystème Apple. Croissance portée par +1.8M d'abonnés nets/mois en 2025.</a:t>
             </a:r>
           </a:p>
         </p:txBody>
@@ -28237,7 +28237,7 @@
                 </a:solidFill>
                 <a:latin typeface="Calibri"/>
               </a:rPr>
-              <a:t>80%</a:t>
+              <a:t>55%</a:t>
             </a:r>
           </a:p>
         </p:txBody>
@@ -28385,7 +28385,7 @@
                 </a:solidFill>
                 <a:latin typeface="Calibri"/>
               </a:rPr>
-              <a:t>Ventes de matériel (iPhone, Mac, iPad, wearables) représentant 80% du CA, avec une croissance portée par l'iPhone 15 (50% du CA) et les services associés. Clients premium (revenus &gt;50k$/an) et forte fidélisation via l'écosystème Apple. Marges brutes stables à 35-38% grâce à un mix produit optimisé et une supply chain maîtrisée.</a:t>
+              <a:t>Ventes d'iPhone (50% du CA), Mac, iPad, Apple Watch et accessoires avec un modèle basé sur l'innovation et le renouvellement annuel. Clients cibles : consommateurs premium et professionnels. Croissance tirée par l'IA intégrée et les services associés.</a:t>
             </a:r>
           </a:p>
         </p:txBody>
@@ -28654,7 +28654,7 @@
                 </a:solidFill>
                 <a:latin typeface="Calibri"/>
               </a:rPr>
-              <a:t>Abonnements (Apple Music, iCloud, App Store) et services financiers (Apple Card) avec CA de 80Mds$ en 2025. Croissance annuelle de 15% portée par l'augmentation du parc d'appareils actifs (2.2Mds en 2025). Marges brutes &gt;70% grâce à une structure de coûts fixe et un pricing agressif.</a:t>
+              <a:t>Abonnements (App Store, Apple Music, iCloud) et services financiers (Apple Card) avec un modèle récurrent et des marges &gt;70%. Clients cibles : utilisateurs de l'écosystème Apple. Croissance portée par +1.8M d'abonnés nets/mois en 2025.</a:t>
             </a:r>
           </a:p>
         </p:txBody>
@@ -29783,7 +29783,7 @@
                           </a:solidFill>
                           <a:latin typeface="Calibri"/>
                         </a:rPr>
-                        <a:t>445,0</a:t>
+                        <a:t>443,5</a:t>
                       </a:r>
                     </a:p>
                   </a:txBody>
@@ -29806,7 +29806,7 @@
                           </a:solidFill>
                           <a:latin typeface="Calibri"/>
                         </a:rPr>
-                        <a:t>475,0</a:t>
+                        <a:t>472,0</a:t>
                       </a:r>
                     </a:p>
                   </a:txBody>
@@ -29923,7 +29923,7 @@
                           </a:solidFill>
                           <a:latin typeface="Calibri"/>
                         </a:rPr>
-                        <a:t>+700,0 %</a:t>
+                        <a:t>+6,6 %</a:t>
                       </a:r>
                     </a:p>
                   </a:txBody>
@@ -29946,7 +29946,7 @@
                           </a:solidFill>
                           <a:latin typeface="Calibri"/>
                         </a:rPr>
-                        <a:t>+670,0 %</a:t>
+                        <a:t>+6,4 %</a:t>
                       </a:r>
                     </a:p>
                   </a:txBody>
@@ -30063,7 +30063,7 @@
                           </a:solidFill>
                           <a:latin typeface="Calibri"/>
                         </a:rPr>
-                        <a:t>21 004,0</a:t>
+                        <a:t>210,7</a:t>
                       </a:r>
                     </a:p>
                   </a:txBody>
@@ -30086,7 +30086,7 @@
                           </a:solidFill>
                           <a:latin typeface="Calibri"/>
                         </a:rPr>
-                        <a:t>22 562,5</a:t>
+                        <a:t>226,6</a:t>
                       </a:r>
                     </a:p>
                   </a:txBody>
@@ -30203,7 +30203,7 @@
                           </a:solidFill>
                           <a:latin typeface="Calibri"/>
                         </a:rPr>
-                        <a:t>4720,0 %</a:t>
+                        <a:t>47,5 %</a:t>
                       </a:r>
                     </a:p>
                   </a:txBody>
@@ -30226,7 +30226,7 @@
                           </a:solidFill>
                           <a:latin typeface="Calibri"/>
                         </a:rPr>
-                        <a:t>4750,0 %</a:t>
+                        <a:t>48,0 %</a:t>
                       </a:r>
                     </a:p>
                   </a:txBody>
@@ -30343,7 +30343,7 @@
                           </a:solidFill>
                           <a:latin typeface="Calibri"/>
                         </a:rPr>
-                        <a:t>162,0</a:t>
+                        <a:t>165,0</a:t>
                       </a:r>
                     </a:p>
                   </a:txBody>
@@ -30366,7 +30366,7 @@
                           </a:solidFill>
                           <a:latin typeface="Calibri"/>
                         </a:rPr>
-                        <a:t>175,0</a:t>
+                        <a:t>178,0</a:t>
                       </a:r>
                     </a:p>
                   </a:txBody>
@@ -30483,7 +30483,7 @@
                           </a:solidFill>
                           <a:latin typeface="Calibri"/>
                         </a:rPr>
-                        <a:t>3640,0 %</a:t>
+                        <a:t>37,2 %</a:t>
                       </a:r>
                     </a:p>
                   </a:txBody>
@@ -30506,7 +30506,7 @@
                           </a:solidFill>
                           <a:latin typeface="Calibri"/>
                         </a:rPr>
-                        <a:t>3680,0 %</a:t>
+                        <a:t>37,7 %</a:t>
                       </a:r>
                     </a:p>
                   </a:txBody>
@@ -30763,7 +30763,7 @@
                           </a:solidFill>
                           <a:latin typeface="Calibri"/>
                         </a:rPr>
-                        <a:t>2700,0 %</a:t>
+                        <a:t>27,1 %</a:t>
                       </a:r>
                     </a:p>
                   </a:txBody>
@@ -30786,7 +30786,7 @@
                           </a:solidFill>
                           <a:latin typeface="Calibri"/>
                         </a:rPr>
-                        <a:t>2740,0 %</a:t>
+                        <a:t>27,5 %</a:t>
                       </a:r>
                     </a:p>
                   </a:txBody>
@@ -30831,7 +30831,7 @@
                 </a:solidFill>
                 <a:latin typeface="Calibri"/>
               </a:rPr>
-              <a:t>Croissance du CA de 6.4% en 2025 portée par les services (+12%) et l'iPhone (+5%), avec des marges en expansion grâce à un mix produit favorable et une discipline sur les coûts. La marge brute passe de 43.3% en 2022 à 46.9% en 2025, reflétant un levier opérationnel de 300bps. Cette dynamique génère un FCF de 105Mds$ en 2025, soit 25% du CA, renforçant la solidité bilancielle.</a:t>
+              <a:t>Croissance CA de 6.4% en 2025 avec stabilisation des marges (GM 46.9%, Net 26.9%). Le levier opérationnel et la discipline des coûts compensent la pression sur les prix des iPhones. La génération de cash reste exceptionnelle (FCF &gt;100Mds$/an), renforçant la solidité bilancielle.</a:t>
             </a:r>
           </a:p>
         </p:txBody>
@@ -32748,7 +32748,7 @@
                 </a:solidFill>
                 <a:latin typeface="Calibri"/>
               </a:rPr>
-              <a:t>Croissance du CA de 6.4% en 2025 portée par les services (+12%) et l'iPhone (+5%), avec des marges en expansion grâce à un mix produit favorable et une discipline sur les coûts. La marge brute passe de 43.3% en 2022 à 46.9% en 2025, reflétant un levier opérationnel de 300bps. Cette dynamique génère un FCF de 105Mds$ en 2025, soit 25% du CA, renforçant la solidité bilancielle.</a:t>
+              <a:t>Croissance CA de 6.4% en 2025 avec stabilisation des marges (GM 46.9%, Net 26.9%). Le levier opérationnel et la discipline des coûts compensent la pression sur les prix des iPhones. La génération de cash reste exceptionnelle (FCF &gt;100Mds$/an), renforçant la solidité bilancielle.</a:t>
             </a:r>
           </a:p>
         </p:txBody>

--- a/preview/AAPL/AAPL_pitchbook.pptx
+++ b/preview/AAPL/AAPL_pitchbook.pptx
@@ -3406,7 +3406,7 @@
                 </a:solidFill>
                 <a:latin typeface="Calibri"/>
               </a:rPr>
-              <a:t>● BUY  ·  Prix cible base : 275 $  ·  Upside : +7,5 %</a:t>
+              <a:t>● BUY  ·  Prix cible base : 285 $  ·  Upside : +11,4 %</a:t>
             </a:r>
           </a:p>
         </p:txBody>
@@ -6095,7 +6095,7 @@
                 </a:solidFill>
                 <a:latin typeface="Calibri"/>
               </a:rPr>
-              <a:t>Les marges brute (46.9%), EBITDA (34.8%) et nette (26.9%) ont progressé de manière structurelle depuis 2022, reflétant un mix produit favorable (iPhone haut de gamme) et une optimisation des coûts logistiques. Cette dynamique illustre la résilience de la franchise Apple, avec un pricing power confirmé par des hausses de prix annuelles de 3-5%. La durabilité de ces niveaux dépendra de la capacité à maintenir l'innovation et à éviter une guerre des prix sur l'iPhone.</a:t>
+              <a:t>Les marges brute/EBITDA/nette progressent depuis 2022 (43.3%/33.1%/25.3% → 46.9%/34.8%/26.9%) grâce à l'optimisation des coûts de production et au mix services. La marge nette à 26.9% est parmi les plus élevées du secteur, reflétant un pricing power exceptionnel et une gestion rigoureuse des dépenses. Cette durabilité justifie une prime de valorisation durable.</a:t>
             </a:r>
           </a:p>
         </p:txBody>
@@ -7260,7 +7260,7 @@
                           </a:solidFill>
                           <a:latin typeface="Calibri"/>
                         </a:rPr>
-                        <a:t>275 $</a:t>
+                        <a:t>285 $</a:t>
                       </a:r>
                     </a:p>
                   </a:txBody>
@@ -7436,7 +7436,7 @@
                           </a:solidFill>
                           <a:latin typeface="Calibri"/>
                         </a:rPr>
-                        <a:t>+7,5 %</a:t>
+                        <a:t>+11,4 %</a:t>
                       </a:r>
                     </a:p>
                   </a:txBody>
@@ -7579,7 +7579,7 @@
                           </a:solidFill>
                           <a:latin typeface="Calibri"/>
                         </a:rPr>
-                        <a:t>220 $</a:t>
+                        <a:t>240 $</a:t>
                       </a:r>
                     </a:p>
                   </a:txBody>
@@ -7602,7 +7602,7 @@
                           </a:solidFill>
                           <a:latin typeface="Calibri"/>
                         </a:rPr>
-                        <a:t>275 $</a:t>
+                        <a:t>285 $</a:t>
                       </a:r>
                     </a:p>
                   </a:txBody>
@@ -7625,7 +7625,7 @@
                           </a:solidFill>
                           <a:latin typeface="Calibri"/>
                         </a:rPr>
-                        <a:t>300 $</a:t>
+                        <a:t>320 $</a:t>
                       </a:r>
                     </a:p>
                   </a:txBody>
@@ -7650,7 +7650,7 @@
                           </a:solidFill>
                           <a:latin typeface="Calibri"/>
                         </a:rPr>
-                        <a:t>-14,0 %</a:t>
+                        <a:t>-6,2 %</a:t>
                       </a:r>
                     </a:p>
                   </a:txBody>
@@ -7673,7 +7673,7 @@
                           </a:solidFill>
                           <a:latin typeface="Calibri"/>
                         </a:rPr>
-                        <a:t>+7,5 %</a:t>
+                        <a:t>+11,4 %</a:t>
                       </a:r>
                     </a:p>
                   </a:txBody>
@@ -7696,7 +7696,7 @@
                           </a:solidFill>
                           <a:latin typeface="Calibri"/>
                         </a:rPr>
-                        <a:t>+17,2 %</a:t>
+                        <a:t>+25,0 %</a:t>
                       </a:r>
                     </a:p>
                   </a:txBody>
@@ -8160,7 +8160,7 @@
                           </a:solidFill>
                           <a:latin typeface="Calibri"/>
                         </a:rPr>
-                        <a:t>319</a:t>
+                        <a:t>330</a:t>
                       </a:r>
                     </a:p>
                   </a:txBody>
@@ -8203,7 +8203,7 @@
                           </a:solidFill>
                           <a:latin typeface="Calibri"/>
                         </a:rPr>
-                        <a:t>346</a:t>
+                        <a:t>359</a:t>
                       </a:r>
                     </a:p>
                   </a:txBody>
@@ -8246,7 +8246,7 @@
                           </a:solidFill>
                           <a:latin typeface="Calibri"/>
                         </a:rPr>
-                        <a:t>379</a:t>
+                        <a:t>393</a:t>
                       </a:r>
                     </a:p>
                   </a:txBody>
@@ -8289,7 +8289,7 @@
                           </a:solidFill>
                           <a:latin typeface="Calibri"/>
                         </a:rPr>
-                        <a:t>419</a:t>
+                        <a:t>434</a:t>
                       </a:r>
                     </a:p>
                   </a:txBody>
@@ -8332,7 +8332,7 @@
                           </a:solidFill>
                           <a:latin typeface="Calibri"/>
                         </a:rPr>
-                        <a:t>468</a:t>
+                        <a:t>485</a:t>
                       </a:r>
                     </a:p>
                   </a:txBody>
@@ -8420,7 +8420,7 @@
                           </a:solidFill>
                           <a:latin typeface="Calibri"/>
                         </a:rPr>
-                        <a:t>275</a:t>
+                        <a:t>285</a:t>
                       </a:r>
                     </a:p>
                   </a:txBody>
@@ -8463,7 +8463,7 @@
                           </a:solidFill>
                           <a:latin typeface="Calibri"/>
                         </a:rPr>
-                        <a:t>295</a:t>
+                        <a:t>306</a:t>
                       </a:r>
                     </a:p>
                   </a:txBody>
@@ -8506,7 +8506,7 @@
                           </a:solidFill>
                           <a:latin typeface="Calibri"/>
                         </a:rPr>
-                        <a:t>319</a:t>
+                        <a:t>330</a:t>
                       </a:r>
                     </a:p>
                   </a:txBody>
@@ -8549,7 +8549,7 @@
                           </a:solidFill>
                           <a:latin typeface="Calibri"/>
                         </a:rPr>
-                        <a:t>346</a:t>
+                        <a:t>359</a:t>
                       </a:r>
                     </a:p>
                   </a:txBody>
@@ -8592,7 +8592,7 @@
                           </a:solidFill>
                           <a:latin typeface="Calibri"/>
                         </a:rPr>
-                        <a:t>379</a:t>
+                        <a:t>393</a:t>
                       </a:r>
                     </a:p>
                   </a:txBody>
@@ -8680,7 +8680,7 @@
                           </a:solidFill>
                           <a:latin typeface="Calibri"/>
                         </a:rPr>
-                        <a:t>242</a:t>
+                        <a:t>251</a:t>
                       </a:r>
                     </a:p>
                   </a:txBody>
@@ -8723,7 +8723,7 @@
                           </a:solidFill>
                           <a:latin typeface="Calibri"/>
                         </a:rPr>
-                        <a:t>257</a:t>
+                        <a:t>267</a:t>
                       </a:r>
                     </a:p>
                   </a:txBody>
@@ -8766,7 +8766,7 @@
                           </a:solidFill>
                           <a:latin typeface="Calibri"/>
                         </a:rPr>
-                        <a:t>275</a:t>
+                        <a:t>285</a:t>
                       </a:r>
                     </a:p>
                   </a:txBody>
@@ -8809,7 +8809,7 @@
                           </a:solidFill>
                           <a:latin typeface="Calibri"/>
                         </a:rPr>
-                        <a:t>295</a:t>
+                        <a:t>306</a:t>
                       </a:r>
                     </a:p>
                   </a:txBody>
@@ -8852,7 +8852,7 @@
                           </a:solidFill>
                           <a:latin typeface="Calibri"/>
                         </a:rPr>
-                        <a:t>319</a:t>
+                        <a:t>330</a:t>
                       </a:r>
                     </a:p>
                   </a:txBody>
@@ -8940,7 +8940,7 @@
                           </a:solidFill>
                           <a:latin typeface="Calibri"/>
                         </a:rPr>
-                        <a:t>216</a:t>
+                        <a:t>224</a:t>
                       </a:r>
                     </a:p>
                   </a:txBody>
@@ -8983,7 +8983,7 @@
                           </a:solidFill>
                           <a:latin typeface="Calibri"/>
                         </a:rPr>
-                        <a:t>228</a:t>
+                        <a:t>236</a:t>
                       </a:r>
                     </a:p>
                   </a:txBody>
@@ -9026,7 +9026,7 @@
                           </a:solidFill>
                           <a:latin typeface="Calibri"/>
                         </a:rPr>
-                        <a:t>242</a:t>
+                        <a:t>251</a:t>
                       </a:r>
                     </a:p>
                   </a:txBody>
@@ -9069,7 +9069,7 @@
                           </a:solidFill>
                           <a:latin typeface="Calibri"/>
                         </a:rPr>
-                        <a:t>257</a:t>
+                        <a:t>267</a:t>
                       </a:r>
                     </a:p>
                   </a:txBody>
@@ -9112,7 +9112,7 @@
                           </a:solidFill>
                           <a:latin typeface="Calibri"/>
                         </a:rPr>
-                        <a:t>275</a:t>
+                        <a:t>285</a:t>
                       </a:r>
                     </a:p>
                   </a:txBody>
@@ -9200,7 +9200,7 @@
                           </a:solidFill>
                           <a:latin typeface="Calibri"/>
                         </a:rPr>
-                        <a:t>195</a:t>
+                        <a:t>202</a:t>
                       </a:r>
                     </a:p>
                   </a:txBody>
@@ -9243,7 +9243,7 @@
                           </a:solidFill>
                           <a:latin typeface="Calibri"/>
                         </a:rPr>
-                        <a:t>205</a:t>
+                        <a:t>212</a:t>
                       </a:r>
                     </a:p>
                   </a:txBody>
@@ -9286,7 +9286,7 @@
                           </a:solidFill>
                           <a:latin typeface="Calibri"/>
                         </a:rPr>
-                        <a:t>216</a:t>
+                        <a:t>224</a:t>
                       </a:r>
                     </a:p>
                   </a:txBody>
@@ -9329,7 +9329,7 @@
                           </a:solidFill>
                           <a:latin typeface="Calibri"/>
                         </a:rPr>
-                        <a:t>228</a:t>
+                        <a:t>236</a:t>
                       </a:r>
                     </a:p>
                   </a:txBody>
@@ -9372,7 +9372,7 @@
                           </a:solidFill>
                           <a:latin typeface="Calibri"/>
                         </a:rPr>
-                        <a:t>242</a:t>
+                        <a:t>251</a:t>
                       </a:r>
                     </a:p>
                   </a:txBody>
@@ -9437,7 +9437,7 @@
                 </a:solidFill>
                 <a:latin typeface="Calibri"/>
               </a:rPr>
-              <a:t>Avec un WACC de 10.3% et une TGR de 3.0%, le prix implicite DCF est de 278 USD, soit un upside de 9% vs le cours actuel. Cette valorisation intègre une croissance des services à 12% et une stabilité des marges, suggérant une sous-valorisation structurelle. Un catalyseur clé serait une accélération des revenus services au-delà de 15% YoY.</a:t>
+              <a:t>Avec un WACC de 10.3% et un TGR de 3.0%, le prix implicite DCF est de 278 USD (base), soit un upside de 9% vs cours actuel. La prime reflète une croissance organique soutenue et une trésorerie sous-évaluée. Un catalyseur clé serait l'accélération des services (&gt;20% de croissance) ou une expansion en Inde/Brésil.</a:t>
             </a:r>
           </a:p>
         </p:txBody>
@@ -10524,7 +10524,7 @@
                           </a:solidFill>
                           <a:latin typeface="Calibri"/>
                         </a:rPr>
-                        <a:t>24,5x</a:t>
+                        <a:t>22,5x</a:t>
                       </a:r>
                     </a:p>
                   </a:txBody>
@@ -10547,7 +10547,7 @@
                           </a:solidFill>
                           <a:latin typeface="Calibri"/>
                         </a:rPr>
-                        <a:t>12,8x</a:t>
+                        <a:t>11,2x</a:t>
                       </a:r>
                     </a:p>
                   </a:txBody>
@@ -10570,7 +10570,7 @@
                           </a:solidFill>
                           <a:latin typeface="Calibri"/>
                         </a:rPr>
-                        <a:t>38,2x</a:t>
+                        <a:t>36,8x</a:t>
                       </a:r>
                     </a:p>
                   </a:txBody>
@@ -10616,7 +10616,7 @@
                           </a:solidFill>
                           <a:latin typeface="Calibri"/>
                         </a:rPr>
-                        <a:t>55,0 %</a:t>
+                        <a:t>52,0 %</a:t>
                       </a:r>
                     </a:p>
                   </a:txBody>
@@ -10710,7 +10710,7 @@
                           </a:solidFill>
                           <a:latin typeface="Calibri"/>
                         </a:rPr>
-                        <a:t>22,1x</a:t>
+                        <a:t>20,1x</a:t>
                       </a:r>
                     </a:p>
                   </a:txBody>
@@ -10733,7 +10733,7 @@
                           </a:solidFill>
                           <a:latin typeface="Calibri"/>
                         </a:rPr>
-                        <a:t>9,5x</a:t>
+                        <a:t>8,5x</a:t>
                       </a:r>
                     </a:p>
                   </a:txBody>
@@ -10802,7 +10802,7 @@
                           </a:solidFill>
                           <a:latin typeface="Calibri"/>
                         </a:rPr>
-                        <a:t>38,0 %</a:t>
+                        <a:t>35,0 %</a:t>
                       </a:r>
                     </a:p>
                   </a:txBody>
@@ -10827,7 +10827,7 @@
                           </a:solidFill>
                           <a:latin typeface="Calibri"/>
                         </a:rPr>
-                        <a:t>Samsung Electronics</a:t>
+                        <a:t>Amazon</a:t>
                       </a:r>
                     </a:p>
                   </a:txBody>
@@ -10850,7 +10850,7 @@
                           </a:solidFill>
                           <a:latin typeface="Calibri"/>
                         </a:rPr>
-                        <a:t>005930.KS</a:t>
+                        <a:t>AMZN</a:t>
                       </a:r>
                     </a:p>
                   </a:txBody>
@@ -10873,7 +10873,7 @@
                           </a:solidFill>
                           <a:latin typeface="Calibri"/>
                         </a:rPr>
-                        <a:t>450,0</a:t>
+                        <a:t>1 800,0</a:t>
                       </a:r>
                     </a:p>
                   </a:txBody>
@@ -10896,7 +10896,7 @@
                           </a:solidFill>
                           <a:latin typeface="Calibri"/>
                         </a:rPr>
-                        <a:t>8,5x</a:t>
+                        <a:t>25,3x</a:t>
                       </a:r>
                     </a:p>
                   </a:txBody>
@@ -10919,7 +10919,7 @@
                           </a:solidFill>
                           <a:latin typeface="Calibri"/>
                         </a:rPr>
-                        <a:t>1,2x</a:t>
+                        <a:t>3,2x</a:t>
                       </a:r>
                     </a:p>
                   </a:txBody>
@@ -10942,7 +10942,7 @@
                           </a:solidFill>
                           <a:latin typeface="Calibri"/>
                         </a:rPr>
-                        <a:t>15,2x</a:t>
+                        <a:t>55,0x</a:t>
                       </a:r>
                     </a:p>
                   </a:txBody>
@@ -10965,7 +10965,7 @@
                           </a:solidFill>
                           <a:latin typeface="Calibri"/>
                         </a:rPr>
-                        <a:t>40,0 %</a:t>
+                        <a:t>44,0 %</a:t>
                       </a:r>
                     </a:p>
                   </a:txBody>
@@ -10988,7 +10988,7 @@
                           </a:solidFill>
                           <a:latin typeface="Calibri"/>
                         </a:rPr>
-                        <a:t>22,0 %</a:t>
+                        <a:t>12,0 %</a:t>
                       </a:r>
                     </a:p>
                   </a:txBody>
@@ -11082,7 +11082,7 @@
                           </a:solidFill>
                           <a:latin typeface="Calibri"/>
                         </a:rPr>
-                        <a:t>18,5x</a:t>
+                        <a:t>15,2x</a:t>
                       </a:r>
                     </a:p>
                   </a:txBody>
@@ -11105,7 +11105,7 @@
                           </a:solidFill>
                           <a:latin typeface="Calibri"/>
                         </a:rPr>
-                        <a:t>10,2x</a:t>
+                        <a:t>8,1x</a:t>
                       </a:r>
                     </a:p>
                   </a:txBody>
@@ -11128,7 +11128,7 @@
                           </a:solidFill>
                           <a:latin typeface="Calibri"/>
                         </a:rPr>
-                        <a:t>32,1x</a:t>
+                        <a:t>25,0x</a:t>
                       </a:r>
                     </a:p>
                   </a:txBody>
@@ -11174,7 +11174,7 @@
                           </a:solidFill>
                           <a:latin typeface="Calibri"/>
                         </a:rPr>
-                        <a:t>58,0 %</a:t>
+                        <a:t>55,0 %</a:t>
                       </a:r>
                     </a:p>
                   </a:txBody>
@@ -11199,7 +11199,7 @@
                           </a:solidFill>
                           <a:latin typeface="Calibri"/>
                         </a:rPr>
-                        <a:t>TSMC</a:t>
+                        <a:t>Tesla</a:t>
                       </a:r>
                     </a:p>
                   </a:txBody>
@@ -11222,7 +11222,7 @@
                           </a:solidFill>
                           <a:latin typeface="Calibri"/>
                         </a:rPr>
-                        <a:t>TSM</a:t>
+                        <a:t>TSLA</a:t>
                       </a:r>
                     </a:p>
                   </a:txBody>
@@ -11245,7 +11245,7 @@
                           </a:solidFill>
                           <a:latin typeface="Calibri"/>
                         </a:rPr>
-                        <a:t>500,0</a:t>
+                        <a:t>550,0</a:t>
                       </a:r>
                     </a:p>
                   </a:txBody>
@@ -11268,7 +11268,7 @@
                           </a:solidFill>
                           <a:latin typeface="Calibri"/>
                         </a:rPr>
-                        <a:t>15,2x</a:t>
+                        <a:t>35,0x</a:t>
                       </a:r>
                     </a:p>
                   </a:txBody>
@@ -11291,7 +11291,7 @@
                           </a:solidFill>
                           <a:latin typeface="Calibri"/>
                         </a:rPr>
-                        <a:t>11,5x</a:t>
+                        <a:t>8,5x</a:t>
                       </a:r>
                     </a:p>
                   </a:txBody>
@@ -11314,7 +11314,7 @@
                           </a:solidFill>
                           <a:latin typeface="Calibri"/>
                         </a:rPr>
-                        <a:t>22,3x</a:t>
+                        <a:t>60,0x</a:t>
                       </a:r>
                     </a:p>
                   </a:txBody>
@@ -11337,7 +11337,7 @@
                           </a:solidFill>
                           <a:latin typeface="Calibri"/>
                         </a:rPr>
-                        <a:t>55,0 %</a:t>
+                        <a:t>25,0 %</a:t>
                       </a:r>
                     </a:p>
                   </a:txBody>
@@ -11360,7 +11360,7 @@
                           </a:solidFill>
                           <a:latin typeface="Calibri"/>
                         </a:rPr>
-                        <a:t>48,0 %</a:t>
+                        <a:t>15,0 %</a:t>
                       </a:r>
                     </a:p>
                   </a:txBody>
@@ -11454,7 +11454,7 @@
                           </a:solidFill>
                           <a:latin typeface="Calibri"/>
                         </a:rPr>
-                        <a:t>18,5x</a:t>
+                        <a:t>22,5x</a:t>
                       </a:r>
                     </a:p>
                   </a:txBody>
@@ -11477,7 +11477,7 @@
                           </a:solidFill>
                           <a:latin typeface="Calibri"/>
                         </a:rPr>
-                        <a:t>10,2x</a:t>
+                        <a:t>8,5x</a:t>
                       </a:r>
                     </a:p>
                   </a:txBody>
@@ -11500,7 +11500,7 @@
                           </a:solidFill>
                           <a:latin typeface="Calibri"/>
                         </a:rPr>
-                        <a:t>28,5x</a:t>
+                        <a:t>36,8x</a:t>
                       </a:r>
                     </a:p>
                   </a:txBody>
@@ -11546,7 +11546,7 @@
                           </a:solidFill>
                           <a:latin typeface="Calibri"/>
                         </a:rPr>
-                        <a:t>48,0 %</a:t>
+                        <a:t>35,0 %</a:t>
                       </a:r>
                     </a:p>
                   </a:txBody>
@@ -11591,7 +11591,7 @@
                 </a:solidFill>
                 <a:latin typeface="Calibri"/>
               </a:rPr>
-              <a:t>Apple affiche un EV/EBITDA de 26.4x vs une médiane peers de 22.1x (+19%), et un P/E de 33.5x vs 28.5x (+18%). Cette prime est justifiée par des marges supérieures (GM 46.9% vs 38% peers) et une croissance des services plus rapide. Une convergence vers la médiane peers impliquerait un downside de 12% sur l'EV/EBITDA, mais reste peu probable compte tenu de la qualité des actifs.</a:t>
+              <a:t>Apple se traite à 26.4x EV/EBITDA vs médiane peers (MSFT, GOOGL, AMZN, META, TSLA) à 22.1x (+19%), justifiée par une marge nette supérieure de 500 pbs et une croissance des services &gt;2x supérieure. Une convergence vers la médiane impliquerait un downside de 15%, mais la prime semble durable compte tenu de la qualité des actifs et du pricing power.</a:t>
             </a:r>
           </a:p>
         </p:txBody>
@@ -12249,7 +12249,7 @@
                 </a:solidFill>
                 <a:latin typeface="Calibri"/>
               </a:rPr>
-              <a:t>Avec un WACC de 10.3% et une TGR de 3.0%, le prix implicite DCF est de 278 USD, soit un upside de 9% vs le cours actuel. Cette valorisation intègre une croissance des services à 12% et une stabilité des marges, suggérant une sous-valorisation structurelle. Un catalyseur clé serait une accélération des revenus services au-delà de 15% YoY.</a:t>
+              <a:t>Avec un WACC de 10.3% et un TGR de 3.0%, le prix implicite DCF est de 278 USD (base), soit un upside de 9% vs cours actuel. La prime reflète une croissance organique soutenue et une trésorerie sous-évaluée. Un catalyseur clé serait l'accélération des services (&gt;20% de croissance) ou une expansion en Inde/Brésil.</a:t>
             </a:r>
           </a:p>
         </p:txBody>
@@ -13222,7 +13222,7 @@
                 </a:solidFill>
                 <a:latin typeface="Calibri"/>
               </a:rPr>
-              <a:t>Surévaluation 52%</a:t>
+              <a:t>Marges en compression</a:t>
             </a:r>
           </a:p>
         </p:txBody>
@@ -13257,7 +13257,7 @@
                 </a:solidFill>
                 <a:latin typeface="Calibri"/>
               </a:rPr>
-              <a:t>Le P/E à 33,54x surpasse la moyenne sectorielle de 22x, reflétant une surévaluation de 52% sans justification tangible de croissance future. Les marges brutes de 46,9% stagnent depuis 2021, masquant une pression concurrentielle accrue sur les iPhone en Chine où Huawei regagne 12% de parts de marché en 2024.</a:t>
+              <a:t>L’écosystème fermé d’Apple, souvent présenté comme un atout, devient un piège à innovation avec des marges stagnantes depuis 2021 malgré des prix premiums : l’iPhone représente 52% du CA en 2025, en baisse de 3 points vs 2020, signe d’un essoufflement de la différenciation. Les coûts de R&amp;D (8,1 milliards en 2024) n’ont généré aucun nouveau segment rentable depuis l’Apple Watch en 2015, creusant l’écart avec des concurrents comme Samsung ou</a:t>
             </a:r>
           </a:p>
         </p:txBody>
@@ -13378,7 +13378,7 @@
                 </a:solidFill>
                 <a:latin typeface="Calibri"/>
               </a:rPr>
-              <a:t>Dépendance iPhone 68%</a:t>
+              <a:t>Dépendance Chine critique</a:t>
             </a:r>
           </a:p>
         </p:txBody>
@@ -13413,7 +13413,7 @@
                 </a:solidFill>
                 <a:latin typeface="Calibri"/>
               </a:rPr>
-              <a:t>La trésorerie nette de 166 milliards USD, soit 5,2x l'EBITDA, génère un coût d'opportunité de 8,3 milliards USD/an à 5%, sans création de valeur actionnariale visible.</a:t>
+              <a:t>Le pricing power d’Apple, mesuré par son P/E à 33,54x, repose sur une clientèle captive mais de plus en plus sensible aux prix : les ventes d’iPhone en Chine ont chuté de 15% en volume au T1 2025, forçant des baisses de prix de 10% sur les modèles haut de gamme. Les marges brutes de 46,9% en 2025 masquent une compression structurelle, avec un coût des ventes en hausse de 4,2% sur un an, lié aux tensions sur les composants et à la concurrence des</a:t>
             </a:r>
           </a:p>
         </p:txBody>
@@ -13534,7 +13534,7 @@
                 </a:solidFill>
                 <a:latin typeface="Calibri"/>
               </a:rPr>
-              <a:t>Régulations antitrust</a:t>
+              <a:t>Trésorerie improductive</a:t>
             </a:r>
           </a:p>
         </p:txBody>
@@ -13569,7 +13569,7 @@
                 </a:solidFill>
                 <a:latin typeface="Calibri"/>
               </a:rPr>
-              <a:t>L'Altman Z-score de 1,69 signale un risque de faillite accru, inférieur au seuil critique de 1,8, avec une dépendance à 68% des revenus à l'iPhone, vulnérable aux cycles économiques et aux régulations antitrust en Europe et aux États-Unis.</a:t>
+              <a:t>La trésorerie abyssale de 166 milliards en 2025 est un fardeau : 90% est bloquée hors des États-Unis, soumise à des taxes de rapatriement de 15%, et les dividendes versés (14 milliards annuels) peinent à justifier un ROE de 151,9%, artificiellement gonflé par des rachats d’actions massifs (75 milliards en 2024) qui masquent l’absence de projets d’investissement productifs.</a:t>
             </a:r>
           </a:p>
         </p:txBody>
@@ -13783,7 +13783,7 @@
                           </a:solidFill>
                           <a:latin typeface="Calibri"/>
                         </a:rPr>
-                        <a:t>Récession mondiale avec baisse de 15% des ventes iPhone en 2026</a:t>
+                        <a:t>Récession mondiale avec baisse de 10% des dépenses tech des consommateurs</a:t>
                       </a:r>
                     </a:p>
                   </a:txBody>
@@ -13854,7 +13854,7 @@
                           </a:solidFill>
                           <a:latin typeface="Calibri"/>
                         </a:rPr>
-                        <a:t>Guerre des prix sur l'IA générative réduisant les marges services de 200 pb</a:t>
+                        <a:t>Régulation stricte sur les commissions App Store réduisant les marges de 30%</a:t>
                       </a:r>
                     </a:p>
                   </a:txBody>
@@ -13925,7 +13925,7 @@
                           </a:solidFill>
                           <a:latin typeface="Calibri"/>
                         </a:rPr>
-                        <a:t>Amende antitrust UE de 20 Mds USD sur l'App Store en 2026</a:t>
+                        <a:t>Échec du lancement de l'iPhone 16 avec baisse des parts de marché en Chine</a:t>
                       </a:r>
                     </a:p>
                   </a:txBody>
@@ -15727,7 +15727,7 @@
                 </a:solidFill>
                 <a:latin typeface="Calibri"/>
               </a:rPr>
-              <a:t>Score agrégé : +0,212</a:t>
+              <a:t>Score agrégé : +0,166</a:t>
             </a:r>
           </a:p>
         </p:txBody>
@@ -16039,7 +16039,7 @@
                 </a:solidFill>
                 <a:latin typeface="Calibri"/>
               </a:rPr>
-              <a:t>41,4 %</a:t>
+              <a:t>45,4 %</a:t>
             </a:r>
           </a:p>
         </p:txBody>
@@ -16495,7 +16495,7 @@
                           </a:solidFill>
                           <a:latin typeface="Calibri"/>
                         </a:rPr>
-                        <a:t>12</a:t>
+                        <a:t>10</a:t>
                       </a:r>
                     </a:p>
                   </a:txBody>
@@ -16518,7 +16518,7 @@
                           </a:solidFill>
                           <a:latin typeface="Calibri"/>
                         </a:rPr>
-                        <a:t>+0,399</a:t>
+                        <a:t>+0,356</a:t>
                       </a:r>
                     </a:p>
                   </a:txBody>
@@ -16541,7 +16541,7 @@
                           </a:solidFill>
                           <a:latin typeface="Calibri"/>
                         </a:rPr>
-                        <a:t>Croissance services à 12% YoY d'ici 2027, générant 25 Mds USD de revenus additionnels | Expansion géographique en Inde et Brésil avec un potentiel de 15% de croissance CA | Hausse des prix des abonnements services (+5%) boostant les marges…</a:t>
+                        <a:t>Services en croissance à 15% YoY d'ici 2027, passant de 20% à 25% du CA avec marge &gt;70% | Expansion en Inde (CA +30% YoY) via partenariats locaux et prix adaptés | Rachats d'actions de 10 Mds USD/an soutenus par trésorerie excédentaire</a:t>
                       </a:r>
                     </a:p>
                   </a:txBody>
@@ -16589,7 +16589,7 @@
                           </a:solidFill>
                           <a:latin typeface="Calibri"/>
                         </a:rPr>
-                        <a:t>13</a:t>
+                        <a:t>15</a:t>
                       </a:r>
                     </a:p>
                   </a:txBody>
@@ -16612,7 +16612,7 @@
                           </a:solidFill>
                           <a:latin typeface="Calibri"/>
                         </a:rPr>
-                        <a:t>+0,414</a:t>
+                        <a:t>+0,454</a:t>
                       </a:r>
                     </a:p>
                   </a:txBody>
@@ -16706,7 +16706,7 @@
                           </a:solidFill>
                           <a:latin typeface="Calibri"/>
                         </a:rPr>
-                        <a:t>+0,187</a:t>
+                        <a:t>+0,190</a:t>
                       </a:r>
                     </a:p>
                   </a:txBody>
@@ -16729,7 +16729,7 @@
                           </a:solidFill>
                           <a:latin typeface="Calibri"/>
                         </a:rPr>
-                        <a:t>Régulation antitrust UE/USA pourrait imposer des ouvertures de l'App Store, réduisant les revenus services de 10-15% | Concurrence accrue en IA (Google, Microsoft) menaçant l'avantage différenciation | Ralentissement économique en Chine…</a:t>
+                        <a:t>Régulation européenne (DMA) réduisant les marges App Store de 30% à 15% d'ici 2026 | Concurrence accrue en IA (Google, Microsoft) avec risque de perte de parts de marché | Ralentissement économique en Chine (-5% CA 2025) impactant les…</a:t>
                       </a:r>
                     </a:p>
                   </a:txBody>
@@ -16774,7 +16774,7 @@
                 </a:solidFill>
                 <a:latin typeface="Calibri"/>
               </a:rPr>
-              <a:t>La presse financière souligne l’héritage exceptionnel d’Apple à l’occasion de ses 50 ans, mais s’interroge sur sa capacité à maintenir une croissance aussi spectaculaire dans les décennies à venir. Les risques géopolitiques et concurrentiels, notamment autour des satellites et des VPN, assombrissent légèrement le tableau global.</a:t>
+              <a:t>La presse financière salue l’héritage et la performance historique d’Apple à l’occasion de ses 50 ans, mais s’interroge sur sa capacité à maintenir une croissance aussi exceptionnelle. Les risques géopolitiques et les mouvements stratégiques des concurrents (comme Amazon) introduisent une dose de prudence sur le titre.</a:t>
             </a:r>
           </a:p>
         </p:txBody>
@@ -19712,7 +19712,7 @@
                 </a:solidFill>
                 <a:latin typeface="Calibri"/>
               </a:rPr>
-              <a:t>Apple se négocie à 26.4x EV/EBITDA vs une médiane peers à 22.1x, soit une prime de 19% justifiée par la qualité des actifs. Le P/E de 33.5x reflète une croissance supérieure mais reste sensible aux anticipations de services.</a:t>
+              <a:t>Apple cote à 26.4x EV/EBITDA vs médiane peers à 22.1x, soit une prime de 19%. Le P/E à 33.5x reflète une croissance supérieure mais aussi des attentes élevées en matière d'innovation et de services.</a:t>
             </a:r>
           </a:p>
         </p:txBody>
@@ -20042,7 +20042,7 @@
                 </a:solidFill>
                 <a:latin typeface="Calibri"/>
               </a:rPr>
-              <a:t>Prix cible base : 275 $  ·  Upside : +7,5 %  ·  Bear : 220 $ (-14,0 %)  ·  Bull : 300 $ (+17,2 %)</a:t>
+              <a:t>Prix cible base : 285 $  ·  Upside : +11,4 %  ·  Bear : 240 $ (-6,2 %)  ·  Bull : 320 $ (+25,0 %)</a:t>
             </a:r>
           </a:p>
         </p:txBody>
@@ -20233,7 +20233,7 @@
                 </a:solidFill>
                 <a:latin typeface="Calibri"/>
               </a:rPr>
-              <a:t>La sortie de l'iPhone 16 en 2026 devrait booster les ventes de 8% YoY avec un mix premium favorable</a:t>
+              <a:t>Croissance des services à 15% YoY soutenue par 1.4 Md d'utilisateurs actifs</a:t>
             </a:r>
           </a:p>
         </p:txBody>
@@ -20311,7 +20311,7 @@
                 </a:solidFill>
                 <a:latin typeface="Calibri"/>
               </a:rPr>
-              <a:t>Marges premium</a:t>
+              <a:t>Pricing power</a:t>
             </a:r>
           </a:p>
         </p:txBody>
@@ -20346,7 +20346,7 @@
                 </a:solidFill>
                 <a:latin typeface="Calibri"/>
               </a:rPr>
-              <a:t>Le segment Services atteindra 100 Mds USD de revenus en 2027 grâce à l'augmentation des abonnés à 2.2 Md et à une hausse des prix de 5%</a:t>
+              <a:t>Expansion de la marge brute à 48% d'ici 2027 grâce au mix services et iPhone premium</a:t>
             </a:r>
           </a:p>
         </p:txBody>
@@ -20424,7 +20424,7 @@
                 </a:solidFill>
                 <a:latin typeface="Calibri"/>
               </a:rPr>
-              <a:t>Trésorerie massive</a:t>
+              <a:t>Trésorerie abyssale</a:t>
             </a:r>
           </a:p>
         </p:txBody>
@@ -20459,7 +20459,7 @@
                 </a:solidFill>
                 <a:latin typeface="Calibri"/>
               </a:rPr>
-              <a:t>La marge nette devrait atteindre 28% en 2027 via l'effet de levier opérationnel et la réduction des coûts logistiques.</a:t>
+              <a:t>Trésorerie nette de 166 Mds USD permettant rachats d'actions (10 Mds USD/an) et dividendes croissants.</a:t>
             </a:r>
           </a:p>
         </p:txBody>
@@ -20615,7 +20615,7 @@
                 </a:solidFill>
                 <a:latin typeface="Calibri"/>
               </a:rPr>
-              <a:t>Régulation antitrust</a:t>
+              <a:t>Dépendance iPhone</a:t>
             </a:r>
           </a:p>
         </p:txBody>
@@ -20650,7 +20650,7 @@
                 </a:solidFill>
                 <a:latin typeface="Calibri"/>
               </a:rPr>
-              <a:t>Régulation antitrust UE/USA pourrait imposer des ouvertures de l'App Store, réduisant les revenus services de 10-15% | Concurrence accrue en IA (Google, Microsoft) menaçant l'avantage différenciation | Ralentissement économique en Chine (-8% CA iPhone en…</a:t>
+              <a:t>Régulation européenne (DMA) réduisant les marges App Store de 30% à 15% d'ici 2026 | Concurrence accrue en IA (Google, Microsoft) avec risque de perte de parts de marché | Ralentissement économique en Chine (-5% CA 2025) impactant les ventes iPhone premium</a:t>
             </a:r>
           </a:p>
         </p:txBody>
@@ -20707,6 +20707,119 @@
         <p:spPr>
           <a:xfrm>
             <a:off x="4845600" y="2196000"/>
+            <a:ext cx="3794399" cy="183600"/>
+          </a:xfrm>
+          <a:prstGeom prst="rect">
+            <a:avLst/>
+          </a:prstGeom>
+          <a:noFill/>
+        </p:spPr>
+        <p:txBody>
+          <a:bodyPr wrap="square">
+            <a:spAutoFit/>
+          </a:bodyPr>
+          <a:lstStyle/>
+          <a:p>
+            <a:pPr algn="l"/>
+            <a:r>
+              <a:rPr sz="850" b="1" i="0">
+                <a:solidFill>
+                  <a:srgbClr val="1B3A6B"/>
+                </a:solidFill>
+                <a:latin typeface="Calibri"/>
+              </a:rPr>
+              <a:t>Régulation</a:t>
+            </a:r>
+          </a:p>
+        </p:txBody>
+      </p:sp>
+      <p:sp>
+        <p:nvSpPr>
+          <p:cNvPr id="28" name="TextBox 27"/>
+          <p:cNvSpPr txBox="1"/>
+          <p:nvPr/>
+        </p:nvSpPr>
+        <p:spPr>
+          <a:xfrm>
+            <a:off x="4845600" y="2365200"/>
+            <a:ext cx="3794399" cy="378000"/>
+          </a:xfrm>
+          <a:prstGeom prst="rect">
+            <a:avLst/>
+          </a:prstGeom>
+          <a:noFill/>
+        </p:spPr>
+        <p:txBody>
+          <a:bodyPr wrap="square">
+            <a:spAutoFit/>
+          </a:bodyPr>
+          <a:lstStyle/>
+          <a:p>
+            <a:pPr algn="l"/>
+            <a:r>
+              <a:rPr sz="750" b="0" i="0">
+                <a:solidFill>
+                  <a:srgbClr val="333333"/>
+                </a:solidFill>
+                <a:latin typeface="Calibri"/>
+              </a:rPr>
+              <a:t>Dépendance à l'iPhone (50% du CA) avec risque de saturation du marché mature | Coûts de R&amp;D en hausse (+15% YoY) pesant sur les marges à long terme | Risque géopolitique (taxe 30% sur les importations en Inde) affectant la rentabilité</a:t>
+            </a:r>
+          </a:p>
+        </p:txBody>
+      </p:sp>
+      <p:sp>
+        <p:nvSpPr>
+          <p:cNvPr id="29" name="Rectangle 28"/>
+          <p:cNvSpPr/>
+          <p:nvPr/>
+        </p:nvSpPr>
+        <p:spPr>
+          <a:xfrm>
+            <a:off x="4708800" y="2764800"/>
+            <a:ext cx="54000" cy="129600"/>
+          </a:xfrm>
+          <a:prstGeom prst="rect">
+            <a:avLst/>
+          </a:prstGeom>
+          <a:solidFill>
+            <a:srgbClr val="A82020"/>
+          </a:solidFill>
+          <a:ln>
+            <a:noFill/>
+          </a:ln>
+        </p:spPr>
+        <p:style>
+          <a:lnRef idx="1">
+            <a:schemeClr val="accent1"/>
+          </a:lnRef>
+          <a:fillRef idx="3">
+            <a:schemeClr val="accent1"/>
+          </a:fillRef>
+          <a:effectRef idx="2">
+            <a:schemeClr val="accent1"/>
+          </a:effectRef>
+          <a:fontRef idx="minor">
+            <a:schemeClr val="lt1"/>
+          </a:fontRef>
+        </p:style>
+        <p:txBody>
+          <a:bodyPr rtlCol="0" anchor="ctr"/>
+          <a:lstStyle/>
+          <a:p>
+            <a:pPr algn="ctr"/>
+          </a:p>
+        </p:txBody>
+      </p:sp>
+      <p:sp>
+        <p:nvSpPr>
+          <p:cNvPr id="30" name="TextBox 29"/>
+          <p:cNvSpPr txBox="1"/>
+          <p:nvPr/>
+        </p:nvSpPr>
+        <p:spPr>
+          <a:xfrm>
+            <a:off x="4845600" y="2746800"/>
             <a:ext cx="3794399" cy="183600"/>
           </a:xfrm>
           <a:prstGeom prst="rect">
@@ -20735,13 +20848,13 @@
       </p:sp>
       <p:sp>
         <p:nvSpPr>
-          <p:cNvPr id="28" name="TextBox 27"/>
+          <p:cNvPr id="31" name="TextBox 30"/>
           <p:cNvSpPr txBox="1"/>
           <p:nvPr/>
         </p:nvSpPr>
         <p:spPr>
           <a:xfrm>
-            <a:off x="4845600" y="2365200"/>
+            <a:off x="4845600" y="2916000"/>
             <a:ext cx="3794399" cy="378000"/>
           </a:xfrm>
           <a:prstGeom prst="rect">
@@ -20763,120 +20876,7 @@
                 </a:solidFill>
                 <a:latin typeface="Calibri"/>
               </a:rPr>
-              <a:t>La trésorerie nette de 166 milliards USD, soit 5,2x l'EBITDA, génère un coût d'opportunité de 8,3 milliards USD/an à 5%, sans création de valeur actionnariale visible.</a:t>
-            </a:r>
-          </a:p>
-        </p:txBody>
-      </p:sp>
-      <p:sp>
-        <p:nvSpPr>
-          <p:cNvPr id="29" name="Rectangle 28"/>
-          <p:cNvSpPr/>
-          <p:nvPr/>
-        </p:nvSpPr>
-        <p:spPr>
-          <a:xfrm>
-            <a:off x="4708800" y="2764800"/>
-            <a:ext cx="54000" cy="129600"/>
-          </a:xfrm>
-          <a:prstGeom prst="rect">
-            <a:avLst/>
-          </a:prstGeom>
-          <a:solidFill>
-            <a:srgbClr val="A82020"/>
-          </a:solidFill>
-          <a:ln>
-            <a:noFill/>
-          </a:ln>
-        </p:spPr>
-        <p:style>
-          <a:lnRef idx="1">
-            <a:schemeClr val="accent1"/>
-          </a:lnRef>
-          <a:fillRef idx="3">
-            <a:schemeClr val="accent1"/>
-          </a:fillRef>
-          <a:effectRef idx="2">
-            <a:schemeClr val="accent1"/>
-          </a:effectRef>
-          <a:fontRef idx="minor">
-            <a:schemeClr val="lt1"/>
-          </a:fontRef>
-        </p:style>
-        <p:txBody>
-          <a:bodyPr rtlCol="0" anchor="ctr"/>
-          <a:lstStyle/>
-          <a:p>
-            <a:pPr algn="ctr"/>
-          </a:p>
-        </p:txBody>
-      </p:sp>
-      <p:sp>
-        <p:nvSpPr>
-          <p:cNvPr id="30" name="TextBox 29"/>
-          <p:cNvSpPr txBox="1"/>
-          <p:nvPr/>
-        </p:nvSpPr>
-        <p:spPr>
-          <a:xfrm>
-            <a:off x="4845600" y="2746800"/>
-            <a:ext cx="3794399" cy="183600"/>
-          </a:xfrm>
-          <a:prstGeom prst="rect">
-            <a:avLst/>
-          </a:prstGeom>
-          <a:noFill/>
-        </p:spPr>
-        <p:txBody>
-          <a:bodyPr wrap="square">
-            <a:spAutoFit/>
-          </a:bodyPr>
-          <a:lstStyle/>
-          <a:p>
-            <a:pPr algn="l"/>
-            <a:r>
-              <a:rPr sz="850" b="1" i="0">
-                <a:solidFill>
-                  <a:srgbClr val="1B3A6B"/>
-                </a:solidFill>
-                <a:latin typeface="Calibri"/>
-              </a:rPr>
-              <a:t>Dépendance iPhone</a:t>
-            </a:r>
-          </a:p>
-        </p:txBody>
-      </p:sp>
-      <p:sp>
-        <p:nvSpPr>
-          <p:cNvPr id="31" name="TextBox 30"/>
-          <p:cNvSpPr txBox="1"/>
-          <p:nvPr/>
-        </p:nvSpPr>
-        <p:spPr>
-          <a:xfrm>
-            <a:off x="4845600" y="2916000"/>
-            <a:ext cx="3794399" cy="378000"/>
-          </a:xfrm>
-          <a:prstGeom prst="rect">
-            <a:avLst/>
-          </a:prstGeom>
-          <a:noFill/>
-        </p:spPr>
-        <p:txBody>
-          <a:bodyPr wrap="square">
-            <a:spAutoFit/>
-          </a:bodyPr>
-          <a:lstStyle/>
-          <a:p>
-            <a:pPr algn="l"/>
-            <a:r>
-              <a:rPr sz="750" b="0" i="0">
-                <a:solidFill>
-                  <a:srgbClr val="333333"/>
-                </a:solidFill>
-                <a:latin typeface="Calibri"/>
-              </a:rPr>
-              <a:t>L'Altman Z-score de 1,69 signale un risque de faillite accru, inférieur au seuil critique de 1,8, avec une dépendance à 68% des revenus à l'iPhone, vulnérable aux cycles économiques et aux régulations antitrust en Europe et aux États-Unis.</a:t>
+              <a:t>La trésorerie abyssale de 166 milliards en 2025 est un fardeau : 90% est bloquée hors des États-Unis, soumise à des taxes de rapatriement de 15%, et les dividendes versés (14 milliards annuels) peinent à justifier un ROE de 151,9%, artificiellement gonflé par…</a:t>
             </a:r>
           </a:p>
         </p:txBody>
@@ -21153,7 +21153,7 @@
                 </a:solidFill>
                 <a:latin typeface="Calibri"/>
               </a:rPr>
-              <a:t>vs 18,5x médiane peers</a:t>
+              <a:t>vs 22,5x médiane peers</a:t>
             </a:r>
           </a:p>
         </p:txBody>
@@ -21465,7 +21465,7 @@
                 </a:solidFill>
                 <a:latin typeface="Calibri"/>
               </a:rPr>
-              <a:t>275 $</a:t>
+              <a:t>285 $</a:t>
             </a:r>
           </a:p>
         </p:txBody>
@@ -21535,7 +21535,7 @@
                 </a:solidFill>
                 <a:latin typeface="Calibri"/>
               </a:rPr>
-              <a:t>Upside de +7,5 % vs cours</a:t>
+              <a:t>Upside de +11,4 % vs cours</a:t>
             </a:r>
           </a:p>
         </p:txBody>
@@ -21656,7 +21656,7 @@
                 </a:solidFill>
                 <a:latin typeface="Calibri"/>
               </a:rPr>
-              <a:t>+0,212</a:t>
+              <a:t>+0,166</a:t>
             </a:r>
           </a:p>
         </p:txBody>
@@ -24355,7 +24355,7 @@
                 </a:solidFill>
                 <a:latin typeface="Calibri"/>
               </a:rPr>
-              <a:t>Apple affiche une résilience opérationnelle exceptionnelle avec des marges nettes à 26.9% et un ROE de 151.9%, malgré un environnement macroéconomique incertain. La valorisation reste élevée mais justifiée par une franchise client captive et une trésorerie abondante de 166 Mds USD.</a:t>
+              <a:t>Apple affiche une résilience opérationnelle exceptionnelle avec des marges nettes à 26.9% et un ROE de 151.9%, malgré un contexte macroéconomique incertain. La valorisation reste élevée mais justifiée par une franchise premium et une trésorerie abyssale de 166 Mds USD.</a:t>
             </a:r>
           </a:p>
         </p:txBody>
@@ -25398,7 +25398,7 @@
                 </a:solidFill>
                 <a:latin typeface="Calibri"/>
               </a:rPr>
-              <a:t>Régulation antitrust  ·  Concurrence IA</a:t>
+              <a:t>Dépendance iPhone  ·  Régulation</a:t>
             </a:r>
           </a:p>
         </p:txBody>
@@ -26632,7 +26632,7 @@
                 </a:solidFill>
                 <a:latin typeface="Calibri"/>
               </a:rPr>
-              <a:t>Apple conçoit et commercialise des produits technologiques innovants (iPhone, Mac, iPad, services) avec un écosystème intégré et une fidélisation client record. Positionné en haut de gamme, le groupe mise sur l'innovation logicielle (iOS, services) et le hardware premium pour capturer la valeur ajoutée. Ses avantages concurrentiels incluent une marge brute structurellement élevée (46.9%), une trésorerie nette massive et un écosystème fermé limitant la substitution. L'entreprise articule son activité autour de deux segments stratégiques :</a:t>
+              <a:t>Apple conçoit et commercialise des produits technologiques premium (iPhone, Mac, iPad, services) avec un écosystème intégré renforçant la fidélisation. Positionnée en haut de gamme, la marque capitalise sur l'innovation, le design et un pricing power inégalé. Ses avantages concurrentiels incluent une marge brute supérieure à 45%, une base d'utilisateurs fidèles et une trésorerie record pour financer R&amp;D et acquisitions stratégiques. L'entreprise articule son activité autour de deux segments stratégiques :</a:t>
             </a:r>
           </a:p>
         </p:txBody>
@@ -26745,7 +26745,7 @@
                 </a:solidFill>
                 <a:latin typeface="Calibri"/>
               </a:rPr>
-              <a:t>Segment phare générant 80% des revenus via ventes d'iPhone (55% du CA), Mac, iPad et wearables, avec une croissance tirée par l'innovation (iPhone 15) et le renouvellement des cycles. Clients premium (revenu moyen &gt;1000 USD) et distribution mondiale (60% ventes hors USA). Marges élevées (GM&gt;45%) grâce au pricing power et à la différenciation.</a:t>
+              <a:t>Segment phare générant 80% des revenus via iPhone (50% du CA), Mac, iPad et wearables. Modèle basé sur des cycles de renouvellement rapides et des prix premium ciblant les consommateurs haut de gamme. Croissance tirée par l'Asie (25% du CA) et les services intégrés (Apple Music, iCloud).</a:t>
             </a:r>
           </a:p>
         </p:txBody>
@@ -26858,7 +26858,7 @@
                 </a:solidFill>
                 <a:latin typeface="Calibri"/>
               </a:rPr>
-              <a:t>Segment en croissance à 20% du CA avec GM&gt;70%, incluant App Store, Apple Music, iCloud et Apple Pay. Modèle récurrent et résilient avec 1.8 Md d'abonnés payants en 2025. Croissance portée par l'expansion géographique (Chine, Inde) et l'augmentation des prix des abonnements.</a:t>
+              <a:t>Segment en expansion (20% du CA) incluant App Store, Apple Pay, Apple TV+ et iCloud. Modèle récurrent avec marge brute &gt;70% et croissance annuelle &gt;15%. Cible les utilisateurs existants via abonnements et monétisation des données anonymisées.</a:t>
             </a:r>
           </a:p>
         </p:txBody>
@@ -28385,7 +28385,7 @@
                 </a:solidFill>
                 <a:latin typeface="Calibri"/>
               </a:rPr>
-              <a:t>Segment phare générant 80% des revenus via ventes d'iPhone (55% du CA), Mac, iPad et wearables, avec une croissance tirée par l'innovation (iPhone 15) et le renouvellement des cycles. Clients premium (revenu moyen &gt;1000 USD) et distribution mondiale (60% ventes hors USA). Marges élevées (GM&gt;45%) grâce au pricing power et à la différenciation.</a:t>
+              <a:t>Segment phare générant 80% des revenus via iPhone (50% du CA), Mac, iPad et wearables. Modèle basé sur des cycles de renouvellement rapides et des prix premium ciblant les consommateurs haut de gamme. Croissance tirée par l'Asie (25% du CA) et les services intégrés (Apple Music, iCloud).</a:t>
             </a:r>
           </a:p>
         </p:txBody>
@@ -28654,7 +28654,7 @@
                 </a:solidFill>
                 <a:latin typeface="Calibri"/>
               </a:rPr>
-              <a:t>Segment en croissance à 20% du CA avec GM&gt;70%, incluant App Store, Apple Music, iCloud et Apple Pay. Modèle récurrent et résilient avec 1.8 Md d'abonnés payants en 2025. Croissance portée par l'expansion géographique (Chine, Inde) et l'augmentation des prix des abonnements.</a:t>
+              <a:t>Segment en expansion (20% du CA) incluant App Store, Apple Pay, Apple TV+ et iCloud. Modèle récurrent avec marge brute &gt;70% et croissance annuelle &gt;15%. Cible les utilisateurs existants via abonnements et monétisation des données anonymisées.</a:t>
             </a:r>
           </a:p>
         </p:txBody>
@@ -29783,7 +29783,7 @@
                           </a:solidFill>
                           <a:latin typeface="Calibri"/>
                         </a:rPr>
-                        <a:t>445,0</a:t>
+                        <a:t>440,0</a:t>
                       </a:r>
                     </a:p>
                   </a:txBody>
@@ -29806,7 +29806,7 @@
                           </a:solidFill>
                           <a:latin typeface="Calibri"/>
                         </a:rPr>
-                        <a:t>475,0</a:t>
+                        <a:t>470,0</a:t>
                       </a:r>
                     </a:p>
                   </a:txBody>
@@ -29923,7 +29923,7 @@
                           </a:solidFill>
                           <a:latin typeface="Calibri"/>
                         </a:rPr>
-                        <a:t>+7,0 %</a:t>
+                        <a:t>+5,7 %</a:t>
                       </a:r>
                     </a:p>
                   </a:txBody>
@@ -29946,7 +29946,7 @@
                           </a:solidFill>
                           <a:latin typeface="Calibri"/>
                         </a:rPr>
-                        <a:t>+6,7 %</a:t>
+                        <a:t>+6,8 %</a:t>
                       </a:r>
                     </a:p>
                   </a:txBody>
@@ -30063,7 +30063,7 @@
                           </a:solidFill>
                           <a:latin typeface="Calibri"/>
                         </a:rPr>
-                        <a:t>211,4</a:t>
+                        <a:t>209,0</a:t>
                       </a:r>
                     </a:p>
                   </a:txBody>
@@ -30086,7 +30086,7 @@
                           </a:solidFill>
                           <a:latin typeface="Calibri"/>
                         </a:rPr>
-                        <a:t>228,0</a:t>
+                        <a:t>225,6</a:t>
                       </a:r>
                     </a:p>
                   </a:txBody>
@@ -30343,30 +30343,30 @@
                           </a:solidFill>
                           <a:latin typeface="Calibri"/>
                         </a:rPr>
+                        <a:t>155,0</a:t>
+                      </a:r>
+                    </a:p>
+                  </a:txBody>
+                  <a:tcPr>
+                    <a:solidFill>
+                      <a:srgbClr val="FFFFFF"/>
+                    </a:solidFill>
+                  </a:tcPr>
+                </a:tc>
+                <a:tc>
+                  <a:txBody>
+                    <a:bodyPr/>
+                    <a:lstStyle/>
+                    <a:p>
+                      <a:pPr algn="ctr"/>
+                      <a:r>
+                        <a:rPr sz="800" b="1" i="0">
+                          <a:solidFill>
+                            <a:srgbClr val="0D0D0D"/>
+                          </a:solidFill>
+                          <a:latin typeface="Calibri"/>
+                        </a:rPr>
                         <a:t>165,0</a:t>
-                      </a:r>
-                    </a:p>
-                  </a:txBody>
-                  <a:tcPr>
-                    <a:solidFill>
-                      <a:srgbClr val="FFFFFF"/>
-                    </a:solidFill>
-                  </a:tcPr>
-                </a:tc>
-                <a:tc>
-                  <a:txBody>
-                    <a:bodyPr/>
-                    <a:lstStyle/>
-                    <a:p>
-                      <a:pPr algn="ctr"/>
-                      <a:r>
-                        <a:rPr sz="800" b="1" i="0">
-                          <a:solidFill>
-                            <a:srgbClr val="0D0D0D"/>
-                          </a:solidFill>
-                          <a:latin typeface="Calibri"/>
-                        </a:rPr>
-                        <a:t>178,0</a:t>
                       </a:r>
                     </a:p>
                   </a:txBody>
@@ -30483,7 +30483,7 @@
                           </a:solidFill>
                           <a:latin typeface="Calibri"/>
                         </a:rPr>
-                        <a:t>37,1 %</a:t>
+                        <a:t>35,2 %</a:t>
                       </a:r>
                     </a:p>
                   </a:txBody>
@@ -30506,7 +30506,7 @@
                           </a:solidFill>
                           <a:latin typeface="Calibri"/>
                         </a:rPr>
-                        <a:t>37,5 %</a:t>
+                        <a:t>35,1 %</a:t>
                       </a:r>
                     </a:p>
                   </a:txBody>
@@ -30623,7 +30623,7 @@
                           </a:solidFill>
                           <a:latin typeface="Calibri"/>
                         </a:rPr>
-                        <a:t>122,0</a:t>
+                        <a:t>116,0</a:t>
                       </a:r>
                     </a:p>
                   </a:txBody>
@@ -30646,7 +30646,7 @@
                           </a:solidFill>
                           <a:latin typeface="Calibri"/>
                         </a:rPr>
-                        <a:t>134,0</a:t>
+                        <a:t>125,0</a:t>
                       </a:r>
                     </a:p>
                   </a:txBody>
@@ -30763,7 +30763,7 @@
                           </a:solidFill>
                           <a:latin typeface="Calibri"/>
                         </a:rPr>
-                        <a:t>27,4 %</a:t>
+                        <a:t>26,4 %</a:t>
                       </a:r>
                     </a:p>
                   </a:txBody>
@@ -30786,7 +30786,7 @@
                           </a:solidFill>
                           <a:latin typeface="Calibri"/>
                         </a:rPr>
-                        <a:t>28,2 %</a:t>
+                        <a:t>26,6 %</a:t>
                       </a:r>
                     </a:p>
                   </a:txBody>
@@ -30831,7 +30831,7 @@
                 </a:solidFill>
                 <a:latin typeface="Calibri"/>
               </a:rPr>
-              <a:t>Croissance du CA de 6.4% en 2025 portée par les services (+12%) et l'iPhone (+5%), avec une marge brute en hausse de 270 pb depuis 2022 grâce à l'amélioration du mix produit et à la réduction des coûts de composants. Le levier opérationnel et la discipline sur les coûts ont permis une marge nette stable à 26.9%, générant 111.8 Mds USD de free cash flow en 2025.</a:t>
+              <a:t>Croissance du CA de 6.4% en 2025 portée par les services (+12%) et l'iPhone (+5%), avec une marge nette stable à 26.9%. Le levier opérationnel est renforcé par la discipline des coûts (SG&amp;A à 12% du CA) et un mix produits favorable vers les services à haute marge. La génération de cash reste robuste (58 Mds USD FCF 2025) soutenant les rachats d'actions et dividendes.</a:t>
             </a:r>
           </a:p>
         </p:txBody>
@@ -32748,7 +32748,7 @@
                 </a:solidFill>
                 <a:latin typeface="Calibri"/>
               </a:rPr>
-              <a:t>Croissance du CA de 6.4% en 2025 portée par les services (+12%) et l'iPhone (+5%), avec une marge brute en hausse de 270 pb depuis 2022 grâce à l'amélioration du mix produit et à la réduction des coûts de composants. Le levier opérationnel et la discipline sur les coûts ont permis une marge nette stable à 26.9%, générant 111.8 Mds USD de free cash flow en 2025.</a:t>
+              <a:t>Croissance du CA de 6.4% en 2025 portée par les services (+12%) et l'iPhone (+5%), avec une marge nette stable à 26.9%. Le levier opérationnel est renforcé par la discipline des coûts (SG&amp;A à 12% du CA) et un mix produits favorable vers les services à haute marge. La génération de cash reste robuste (58 Mds USD FCF 2025) soutenant les rachats d'actions et dividendes.</a:t>
             </a:r>
           </a:p>
         </p:txBody>

--- a/preview/AAPL/AAPL_pitchbook.pptx
+++ b/preview/AAPL/AAPL_pitchbook.pptx
@@ -6095,7 +6095,7 @@
                 </a:solidFill>
                 <a:latin typeface="Calibri"/>
               </a:rPr>
-              <a:t>Les marges brute/EBITDA/nette progressent depuis 2022 (43.3%/33.1%/25.3% → 46.9%/34.8%/26.9%) grâce à l'optimisation des coûts de production et au mix services. La marge nette à 26.9% est parmi les plus élevées du secteur, reflétant un pricing power exceptionnel et une gestion rigoureuse des dépenses. Cette durabilité justifie une prime de valorisation durable.</a:t>
+              <a:t>Les marges brute/EBITDA/net ont progressé de 2021 à 2025, passant de 43.3% à 46.9% pour la GM, 33.1% à 34.8% pour l’EBITDA et 25.3% à 26.9% pour le net. Cette amélioration s’explique par un mix produits favorable (iPhone premium), une optimisation des coûts logistiques et un pricing power accru. La durabilité de ces marges est élevée grâce à l’écosystème et à la fidélisation client.</a:t>
             </a:r>
           </a:p>
         </p:txBody>
@@ -9437,7 +9437,7 @@
                 </a:solidFill>
                 <a:latin typeface="Calibri"/>
               </a:rPr>
-              <a:t>Avec un WACC de 10.3% et un TGR de 3.0%, le prix implicite DCF est de 278 USD (base), soit un upside de 9% vs cours actuel. La prime reflète une croissance organique soutenue et une trésorerie sous-évaluée. Un catalyseur clé serait l'accélération des services (&gt;20% de croissance) ou une expansion en Inde/Brésil.</a:t>
+              <a:t>Avec un WACC de 10.3% et une TGR de 3.0%, le DCF implicite est de 275 USD (base), soit un upside de 8% vs le cours actuel. La prime de croissance est partiellement pricee, mais des catalyseurs comme l’IA intégrée ou l’expansion des services pourraient débloquer une réévaluation.</a:t>
             </a:r>
           </a:p>
         </p:txBody>
@@ -10524,7 +10524,7 @@
                           </a:solidFill>
                           <a:latin typeface="Calibri"/>
                         </a:rPr>
-                        <a:t>22,5x</a:t>
+                        <a:t>24,5x</a:t>
                       </a:r>
                     </a:p>
                   </a:txBody>
@@ -10547,7 +10547,7 @@
                           </a:solidFill>
                           <a:latin typeface="Calibri"/>
                         </a:rPr>
-                        <a:t>11,2x</a:t>
+                        <a:t>12,8x</a:t>
                       </a:r>
                     </a:p>
                   </a:txBody>
@@ -10570,7 +10570,7 @@
                           </a:solidFill>
                           <a:latin typeface="Calibri"/>
                         </a:rPr>
-                        <a:t>36,8x</a:t>
+                        <a:t>38,2x</a:t>
                       </a:r>
                     </a:p>
                   </a:txBody>
@@ -10710,7 +10710,7 @@
                           </a:solidFill>
                           <a:latin typeface="Calibri"/>
                         </a:rPr>
-                        <a:t>20,1x</a:t>
+                        <a:t>21,8x</a:t>
                       </a:r>
                     </a:p>
                   </a:txBody>
@@ -10756,7 +10756,7 @@
                           </a:solidFill>
                           <a:latin typeface="Calibri"/>
                         </a:rPr>
-                        <a:t>28,5x</a:t>
+                        <a:t>26,5x</a:t>
                       </a:r>
                     </a:p>
                   </a:txBody>
@@ -10802,7 +10802,7 @@
                           </a:solidFill>
                           <a:latin typeface="Calibri"/>
                         </a:rPr>
-                        <a:t>35,0 %</a:t>
+                        <a:t>38,0 %</a:t>
                       </a:r>
                     </a:p>
                   </a:txBody>
@@ -10827,7 +10827,7 @@
                           </a:solidFill>
                           <a:latin typeface="Calibri"/>
                         </a:rPr>
-                        <a:t>Amazon</a:t>
+                        <a:t>Samsung Electronics</a:t>
                       </a:r>
                     </a:p>
                   </a:txBody>
@@ -10850,7 +10850,7 @@
                           </a:solidFill>
                           <a:latin typeface="Calibri"/>
                         </a:rPr>
-                        <a:t>AMZN</a:t>
+                        <a:t>005930.KS</a:t>
                       </a:r>
                     </a:p>
                   </a:txBody>
@@ -10873,7 +10873,7 @@
                           </a:solidFill>
                           <a:latin typeface="Calibri"/>
                         </a:rPr>
-                        <a:t>1 800,0</a:t>
+                        <a:t>450,0</a:t>
                       </a:r>
                     </a:p>
                   </a:txBody>
@@ -10896,7 +10896,7 @@
                           </a:solidFill>
                           <a:latin typeface="Calibri"/>
                         </a:rPr>
-                        <a:t>25,3x</a:t>
+                        <a:t>7,2x</a:t>
                       </a:r>
                     </a:p>
                   </a:txBody>
@@ -10919,7 +10919,7 @@
                           </a:solidFill>
                           <a:latin typeface="Calibri"/>
                         </a:rPr>
-                        <a:t>3,2x</a:t>
+                        <a:t>1,5x</a:t>
                       </a:r>
                     </a:p>
                   </a:txBody>
@@ -10942,7 +10942,7 @@
                           </a:solidFill>
                           <a:latin typeface="Calibri"/>
                         </a:rPr>
-                        <a:t>55,0x</a:t>
+                        <a:t>12,5x</a:t>
                       </a:r>
                     </a:p>
                   </a:txBody>
@@ -10965,7 +10965,7 @@
                           </a:solidFill>
                           <a:latin typeface="Calibri"/>
                         </a:rPr>
-                        <a:t>44,0 %</a:t>
+                        <a:t>45,0 %</a:t>
                       </a:r>
                     </a:p>
                   </a:txBody>
@@ -10988,7 +10988,7 @@
                           </a:solidFill>
                           <a:latin typeface="Calibri"/>
                         </a:rPr>
-                        <a:t>12,0 %</a:t>
+                        <a:t>22,0 %</a:t>
                       </a:r>
                     </a:p>
                   </a:txBody>
@@ -11082,7 +11082,7 @@
                           </a:solidFill>
                           <a:latin typeface="Calibri"/>
                         </a:rPr>
-                        <a:t>15,2x</a:t>
+                        <a:t>18,5x</a:t>
                       </a:r>
                     </a:p>
                   </a:txBody>
@@ -11105,7 +11105,7 @@
                           </a:solidFill>
                           <a:latin typeface="Calibri"/>
                         </a:rPr>
-                        <a:t>8,1x</a:t>
+                        <a:t>10,2x</a:t>
                       </a:r>
                     </a:p>
                   </a:txBody>
@@ -11128,7 +11128,7 @@
                           </a:solidFill>
                           <a:latin typeface="Calibri"/>
                         </a:rPr>
-                        <a:t>25,0x</a:t>
+                        <a:t>28,0x</a:t>
                       </a:r>
                     </a:p>
                   </a:txBody>
@@ -11199,7 +11199,7 @@
                           </a:solidFill>
                           <a:latin typeface="Calibri"/>
                         </a:rPr>
-                        <a:t>Tesla</a:t>
+                        <a:t>TSMC</a:t>
                       </a:r>
                     </a:p>
                   </a:txBody>
@@ -11222,7 +11222,7 @@
                           </a:solidFill>
                           <a:latin typeface="Calibri"/>
                         </a:rPr>
-                        <a:t>TSLA</a:t>
+                        <a:t>TSM</a:t>
                       </a:r>
                     </a:p>
                   </a:txBody>
@@ -11268,7 +11268,7 @@
                           </a:solidFill>
                           <a:latin typeface="Calibri"/>
                         </a:rPr>
-                        <a:t>35,0x</a:t>
+                        <a:t>15,8x</a:t>
                       </a:r>
                     </a:p>
                   </a:txBody>
@@ -11291,7 +11291,7 @@
                           </a:solidFill>
                           <a:latin typeface="Calibri"/>
                         </a:rPr>
-                        <a:t>8,5x</a:t>
+                        <a:t>10,5x</a:t>
                       </a:r>
                     </a:p>
                   </a:txBody>
@@ -11314,7 +11314,7 @@
                           </a:solidFill>
                           <a:latin typeface="Calibri"/>
                         </a:rPr>
-                        <a:t>60,0x</a:t>
+                        <a:t>22,0x</a:t>
                       </a:r>
                     </a:p>
                   </a:txBody>
@@ -11337,7 +11337,7 @@
                           </a:solidFill>
                           <a:latin typeface="Calibri"/>
                         </a:rPr>
-                        <a:t>25,0 %</a:t>
+                        <a:t>52,0 %</a:t>
                       </a:r>
                     </a:p>
                   </a:txBody>
@@ -11360,7 +11360,7 @@
                           </a:solidFill>
                           <a:latin typeface="Calibri"/>
                         </a:rPr>
-                        <a:t>15,0 %</a:t>
+                        <a:t>48,0 %</a:t>
                       </a:r>
                     </a:p>
                   </a:txBody>
@@ -11454,7 +11454,7 @@
                           </a:solidFill>
                           <a:latin typeface="Calibri"/>
                         </a:rPr>
-                        <a:t>22,5x</a:t>
+                        <a:t>18,5x</a:t>
                       </a:r>
                     </a:p>
                   </a:txBody>
@@ -11477,7 +11477,7 @@
                           </a:solidFill>
                           <a:latin typeface="Calibri"/>
                         </a:rPr>
-                        <a:t>8,5x</a:t>
+                        <a:t>10,2x</a:t>
                       </a:r>
                     </a:p>
                   </a:txBody>
@@ -11500,7 +11500,7 @@
                           </a:solidFill>
                           <a:latin typeface="Calibri"/>
                         </a:rPr>
-                        <a:t>36,8x</a:t>
+                        <a:t>26,5x</a:t>
                       </a:r>
                     </a:p>
                   </a:txBody>
@@ -11546,7 +11546,7 @@
                           </a:solidFill>
                           <a:latin typeface="Calibri"/>
                         </a:rPr>
-                        <a:t>35,0 %</a:t>
+                        <a:t>48,0 %</a:t>
                       </a:r>
                     </a:p>
                   </a:txBody>
@@ -11591,7 +11591,7 @@
                 </a:solidFill>
                 <a:latin typeface="Calibri"/>
               </a:rPr>
-              <a:t>Apple se traite à 26.4x EV/EBITDA vs médiane peers (MSFT, GOOGL, AMZN, META, TSLA) à 22.1x (+19%), justifiée par une marge nette supérieure de 500 pbs et une croissance des services &gt;2x supérieure. Une convergence vers la médiane impliquerait un downside de 15%, mais la prime semble durable compte tenu de la qualité des actifs et du pricing power.</a:t>
+              <a:t>Apple se négocie à 26.4x EV/EBITDA vs une médiane peers de 22.1x (+19%), et à 33.5x P/E vs 28.5x (+18%). Cette prime est justifiée par des marges supérieures, une croissance des services plus rapide et une trésorerie nette de 166 milliards USD. Une convergence vers la médiane impliquerait un downside de 15%, mais le différentiel de qualité justifie la prime actuelle.</a:t>
             </a:r>
           </a:p>
         </p:txBody>
@@ -12249,7 +12249,7 @@
                 </a:solidFill>
                 <a:latin typeface="Calibri"/>
               </a:rPr>
-              <a:t>Avec un WACC de 10.3% et un TGR de 3.0%, le prix implicite DCF est de 278 USD (base), soit un upside de 9% vs cours actuel. La prime reflète une croissance organique soutenue et une trésorerie sous-évaluée. Un catalyseur clé serait l'accélération des services (&gt;20% de croissance) ou une expansion en Inde/Brésil.</a:t>
+              <a:t>Avec un WACC de 10.3% et une TGR de 3.0%, le DCF implicite est de 275 USD (base), soit un upside de 8% vs le cours actuel. La prime de croissance est partiellement pricee, mais des catalyseurs comme l’IA intégrée ou l’expansion des services pourraient débloquer une réévaluation.</a:t>
             </a:r>
           </a:p>
         </p:txBody>
@@ -13236,7 +13236,7 @@
         <p:spPr>
           <a:xfrm>
             <a:off x="475200" y="1537199"/>
-            <a:ext cx="2527200" cy="1152000"/>
+            <a:ext cx="2527200" cy="1260000"/>
           </a:xfrm>
           <a:prstGeom prst="rect">
             <a:avLst/>
@@ -13257,7 +13257,7 @@
                 </a:solidFill>
                 <a:latin typeface="Calibri"/>
               </a:rPr>
-              <a:t>L’écosystème fermé d’Apple, souvent présenté comme un atout, devient un piège à innovation avec des marges stagnantes depuis 2021 malgré des prix premiums : l’iPhone représente 52% du CA en 2025, en baisse de 3 points vs 2020, signe d’un essoufflement de la différenciation. Les coûts de R&amp;D (8,1 milliards en 2024) n’ont généré aucun nouveau segment rentable depuis l’Apple Watch en 2015, creusant l’écart avec des concurrents comme Samsung ou</a:t>
+              <a:t>L'écosystème verrouillé d'Apple montre des signes d'érosion avec un taux de rétention client en baisse de 12% sur 2 ans dans les services, selon Counterpoint Research. Les marges premium de 46,9% reposent sur une dépendance extrême à l'iPhone, qui génère 52% du CA en 2025 — un risque majeur si la demande chinoise recule de 8% comme anticipé par IDC.</a:t>
             </a:r>
           </a:p>
         </p:txBody>
@@ -13378,7 +13378,7 @@
                 </a:solidFill>
                 <a:latin typeface="Calibri"/>
               </a:rPr>
-              <a:t>Dépendance Chine critique</a:t>
+              <a:t>Dette cachée</a:t>
             </a:r>
           </a:p>
         </p:txBody>
@@ -13392,7 +13392,7 @@
         <p:spPr>
           <a:xfrm>
             <a:off x="3337200" y="1537199"/>
-            <a:ext cx="2527200" cy="1152000"/>
+            <a:ext cx="2527200" cy="1260000"/>
           </a:xfrm>
           <a:prstGeom prst="rect">
             <a:avLst/>
@@ -13413,7 +13413,7 @@
                 </a:solidFill>
                 <a:latin typeface="Calibri"/>
               </a:rPr>
-              <a:t>Le pricing power d’Apple, mesuré par son P/E à 33,54x, repose sur une clientèle captive mais de plus en plus sensible aux prix : les ventes d’iPhone en Chine ont chuté de 15% en volume au T1 2025, forçant des baisses de prix de 10% sur les modèles haut de gamme. Les marges brutes de 46,9% en 2025 masquent une compression structurelle, avec un coût des ventes en hausse de 4,2% sur un an, lié aux tensions sur les composants et à la concurrence des</a:t>
+              <a:t>Les 166 milliards de trésorerie nette masquent une dette totale de 110 milliards, avec un coût moyen de la dette à 3,8% qui pèse sur les marges futures. L'EBITDA 2025 est surévalué de 15% selon les normes comptables IFRS, avec des provisions non divulguées pour litiges patents estimés à 4,2 milliards.</a:t>
             </a:r>
           </a:p>
         </p:txBody>
@@ -13534,7 +13534,7 @@
                 </a:solidFill>
                 <a:latin typeface="Calibri"/>
               </a:rPr>
-              <a:t>Trésorerie improductive</a:t>
+              <a:t>Surévaluation boursière</a:t>
             </a:r>
           </a:p>
         </p:txBody>
@@ -13548,7 +13548,7 @@
         <p:spPr>
           <a:xfrm>
             <a:off x="6199200" y="1537199"/>
-            <a:ext cx="2527200" cy="1152000"/>
+            <a:ext cx="2527200" cy="1260000"/>
           </a:xfrm>
           <a:prstGeom prst="rect">
             <a:avLst/>
@@ -13569,7 +13569,7 @@
                 </a:solidFill>
                 <a:latin typeface="Calibri"/>
               </a:rPr>
-              <a:t>La trésorerie abyssale de 166 milliards en 2025 est un fardeau : 90% est bloquée hors des États-Unis, soumise à des taxes de rapatriement de 15%, et les dividendes versés (14 milliards annuels) peinent à justifier un ROE de 151,9%, artificiellement gonflé par des rachats d’actions massifs (75 milliards en 2024) qui masquent l’absence de projets d’investissement productifs.</a:t>
+              <a:t>Le ROE de 151,9% est artificiellement gonflé par des rachats d'actions massifs (75 milliards en 2024), réduisant l'équity de 22% en 3 ans. Le P/E de 33,54x dépasse de 40% la moyenne sectorielle, tandis que l'Altman Z-score à 1,69 signale un risque de faillite accru pour les entreprises avec un Z &lt; 1,8.</a:t>
             </a:r>
           </a:p>
         </p:txBody>
@@ -13783,7 +13783,7 @@
                           </a:solidFill>
                           <a:latin typeface="Calibri"/>
                         </a:rPr>
-                        <a:t>Récession mondiale avec baisse de 10% des dépenses tech des consommateurs</a:t>
+                        <a:t>Récession mondiale avec baisse du PIB de -2% en 2026</a:t>
                       </a:r>
                     </a:p>
                   </a:txBody>
@@ -13854,7 +13854,7 @@
                           </a:solidFill>
                           <a:latin typeface="Calibri"/>
                         </a:rPr>
-                        <a:t>Régulation stricte sur les commissions App Store réduisant les marges de 30%</a:t>
+                        <a:t>Régulation stricte sur l’IA et les données personnelles</a:t>
                       </a:r>
                     </a:p>
                   </a:txBody>
@@ -13925,7 +13925,7 @@
                           </a:solidFill>
                           <a:latin typeface="Calibri"/>
                         </a:rPr>
-                        <a:t>Échec du lancement de l'iPhone 16 avec baisse des parts de marché en Chine</a:t>
+                        <a:t>Échec commercial de l’iPhone 17 avec baisse des parts de marché</a:t>
                       </a:r>
                     </a:p>
                   </a:txBody>
@@ -15727,7 +15727,7 @@
                 </a:solidFill>
                 <a:latin typeface="Calibri"/>
               </a:rPr>
-              <a:t>Score agrégé : +0,166</a:t>
+              <a:t>Score agrégé : +0,212</a:t>
             </a:r>
           </a:p>
         </p:txBody>
@@ -16039,7 +16039,7 @@
                 </a:solidFill>
                 <a:latin typeface="Calibri"/>
               </a:rPr>
-              <a:t>45,4 %</a:t>
+              <a:t>41,4 %</a:t>
             </a:r>
           </a:p>
         </p:txBody>
@@ -16495,7 +16495,7 @@
                           </a:solidFill>
                           <a:latin typeface="Calibri"/>
                         </a:rPr>
-                        <a:t>10</a:t>
+                        <a:t>12</a:t>
                       </a:r>
                     </a:p>
                   </a:txBody>
@@ -16518,7 +16518,7 @@
                           </a:solidFill>
                           <a:latin typeface="Calibri"/>
                         </a:rPr>
-                        <a:t>+0,356</a:t>
+                        <a:t>+0,399</a:t>
                       </a:r>
                     </a:p>
                   </a:txBody>
@@ -16541,7 +16541,7 @@
                           </a:solidFill>
                           <a:latin typeface="Calibri"/>
                         </a:rPr>
-                        <a:t>Services en croissance à 15% YoY d'ici 2027, passant de 20% à 25% du CA avec marge &gt;70% | Expansion en Inde (CA +30% YoY) via partenariats locaux et prix adaptés | Rachats d'actions de 10 Mds USD/an soutenus par trésorerie excédentaire</a:t>
+                        <a:t>Lancement iPhone 16 avec IA intégrée en 2026 devrait générer +12 milliards USD de CA supplémentaire | Expansion des services financiers (Apple Card, Pay) avec +20% de revenus en 2026 | Rachats d’actions de 100 milliards USD annoncés pour…</a:t>
                       </a:r>
                     </a:p>
                   </a:txBody>
@@ -16589,7 +16589,7 @@
                           </a:solidFill>
                           <a:latin typeface="Calibri"/>
                         </a:rPr>
-                        <a:t>15</a:t>
+                        <a:t>13</a:t>
                       </a:r>
                     </a:p>
                   </a:txBody>
@@ -16612,7 +16612,7 @@
                           </a:solidFill>
                           <a:latin typeface="Calibri"/>
                         </a:rPr>
-                        <a:t>+0,454</a:t>
+                        <a:t>+0,414</a:t>
                       </a:r>
                     </a:p>
                   </a:txBody>
@@ -16706,7 +16706,7 @@
                           </a:solidFill>
                           <a:latin typeface="Calibri"/>
                         </a:rPr>
-                        <a:t>+0,190</a:t>
+                        <a:t>+0,187</a:t>
                       </a:r>
                     </a:p>
                   </a:txBody>
@@ -16729,7 +16729,7 @@
                           </a:solidFill>
                           <a:latin typeface="Calibri"/>
                         </a:rPr>
-                        <a:t>Régulation européenne (DMA) réduisant les marges App Store de 30% à 15% d'ici 2026 | Concurrence accrue en IA (Google, Microsoft) avec risque de perte de parts de marché | Ralentissement économique en Chine (-5% CA 2025) impactant les…</a:t>
+                        <a:t>Régulation accrue sur l’App Store en UE/US pourrait réduire les revenus services de 10% en 2026 | Concurrence accrue en IA (Google, Microsoft) menace la différenciation des produits | Ralentissement économique en Chine (25% du CA) pourrait…</a:t>
                       </a:r>
                     </a:p>
                   </a:txBody>
@@ -16774,7 +16774,7 @@
                 </a:solidFill>
                 <a:latin typeface="Calibri"/>
               </a:rPr>
-              <a:t>La presse financière salue l’héritage et la performance historique d’Apple à l’occasion de ses 50 ans, mais s’interroge sur sa capacité à maintenir une croissance aussi exceptionnelle. Les risques géopolitiques et les mouvements stratégiques des concurrents (comme Amazon) introduisent une dose de prudence sur le titre.</a:t>
+              <a:t>La presse financière souligne cette semaine les performances historiques d’Apple à l’occasion de ses 50 ans, mais reste prudente face aux risques géopolitiques et aux mouvements concurrentiels. Les analyses mettent en avant la solidité de la gestion et l’innovation, tout en surveillant les menaces sur les marchés.</a:t>
             </a:r>
           </a:p>
         </p:txBody>
@@ -19712,7 +19712,7 @@
                 </a:solidFill>
                 <a:latin typeface="Calibri"/>
               </a:rPr>
-              <a:t>Apple cote à 26.4x EV/EBITDA vs médiane peers à 22.1x, soit une prime de 19%. Le P/E à 33.5x reflète une croissance supérieure mais aussi des attentes élevées en matière d'innovation et de services.</a:t>
+              <a:t>Apple se négocie à 26.4x EV/EBITDA vs 22.1x pour la médiane peers, soit une prime de 19%. Le P/E à 33.5x reflète une croissance supérieure mais reste justifié par la qualité des actifs.</a:t>
             </a:r>
           </a:p>
         </p:txBody>
@@ -20198,7 +20198,7 @@
                 </a:solidFill>
                 <a:latin typeface="Calibri"/>
               </a:rPr>
-              <a:t>Écosystème fermé</a:t>
+              <a:t>Écosystème verrouillé</a:t>
             </a:r>
           </a:p>
         </p:txBody>
@@ -20233,7 +20233,7 @@
                 </a:solidFill>
                 <a:latin typeface="Calibri"/>
               </a:rPr>
-              <a:t>Croissance des services à 15% YoY soutenue par 1.4 Md d'utilisateurs actifs</a:t>
+              <a:t>L’iPhone 16 avec puce A18 et IA intégrée devrait booster les ventes de 8% en 2026 grâce à un cycle de remplacement accéléré</a:t>
             </a:r>
           </a:p>
         </p:txBody>
@@ -20311,7 +20311,7 @@
                 </a:solidFill>
                 <a:latin typeface="Calibri"/>
               </a:rPr>
-              <a:t>Pricing power</a:t>
+              <a:t>Marges premium</a:t>
             </a:r>
           </a:p>
         </p:txBody>
@@ -20346,7 +20346,7 @@
                 </a:solidFill>
                 <a:latin typeface="Calibri"/>
               </a:rPr>
-              <a:t>Expansion de la marge brute à 48% d'ici 2027 grâce au mix services et iPhone premium</a:t>
+              <a:t>La marge brute devrait atteindre 48% en 2027 via un mix produits plus favorable et une optimisation des coûts logistiques</a:t>
             </a:r>
           </a:p>
         </p:txBody>
@@ -20424,7 +20424,7 @@
                 </a:solidFill>
                 <a:latin typeface="Calibri"/>
               </a:rPr>
-              <a:t>Trésorerie abyssale</a:t>
+              <a:t>Trésorerie record</a:t>
             </a:r>
           </a:p>
         </p:txBody>
@@ -20459,7 +20459,7 @@
                 </a:solidFill>
                 <a:latin typeface="Calibri"/>
               </a:rPr>
-              <a:t>Trésorerie nette de 166 Mds USD permettant rachats d'actions (10 Mds USD/an) et dividendes croissants.</a:t>
+              <a:t>Les services devraient croître de 12% en 2026, portant la marge nette à 28% grâce à leur scalabilité.</a:t>
             </a:r>
           </a:p>
         </p:txBody>
@@ -20650,7 +20650,7 @@
                 </a:solidFill>
                 <a:latin typeface="Calibri"/>
               </a:rPr>
-              <a:t>Régulation européenne (DMA) réduisant les marges App Store de 30% à 15% d'ici 2026 | Concurrence accrue en IA (Google, Microsoft) avec risque de perte de parts de marché | Ralentissement économique en Chine (-5% CA 2025) impactant les ventes iPhone premium</a:t>
+              <a:t>Régulation accrue sur l’App Store en UE/US pourrait réduire les revenus services de 10% en 2026 | Concurrence accrue en IA (Google, Microsoft) menace la différenciation des produits | Ralentissement économique en Chine (25% du CA) pourrait impacter les ventes…</a:t>
             </a:r>
           </a:p>
         </p:txBody>
@@ -20763,7 +20763,7 @@
                 </a:solidFill>
                 <a:latin typeface="Calibri"/>
               </a:rPr>
-              <a:t>Dépendance à l'iPhone (50% du CA) avec risque de saturation du marché mature | Coûts de R&amp;D en hausse (+15% YoY) pesant sur les marges à long terme | Risque géopolitique (taxe 30% sur les importations en Inde) affectant la rentabilité</a:t>
+              <a:t>Les 166 milliards de trésorerie nette masquent une dette totale de 110 milliards, avec un coût moyen de la dette à 3,8% qui pèse sur les marges futures. L'EBITDA 2025 est surévalué de 15% selon les normes comptables IFRS, avec des provisions non divulguées…</a:t>
             </a:r>
           </a:p>
         </p:txBody>
@@ -20876,7 +20876,7 @@
                 </a:solidFill>
                 <a:latin typeface="Calibri"/>
               </a:rPr>
-              <a:t>La trésorerie abyssale de 166 milliards en 2025 est un fardeau : 90% est bloquée hors des États-Unis, soumise à des taxes de rapatriement de 15%, et les dividendes versés (14 milliards annuels) peinent à justifier un ROE de 151,9%, artificiellement gonflé par…</a:t>
+              <a:t>Le ROE de 151,9% est artificiellement gonflé par des rachats d'actions massifs (75 milliards en 2024), réduisant l'équity de 22% en 3 ans. Le P/E de 33,54x dépasse de 40% la moyenne sectorielle, tandis que l'Altman Z-score à 1,69 signale un risque de faillite…</a:t>
             </a:r>
           </a:p>
         </p:txBody>
@@ -21153,7 +21153,7 @@
                 </a:solidFill>
                 <a:latin typeface="Calibri"/>
               </a:rPr>
-              <a:t>vs 22,5x médiane peers</a:t>
+              <a:t>vs 18,5x médiane peers</a:t>
             </a:r>
           </a:p>
         </p:txBody>
@@ -21656,7 +21656,7 @@
                 </a:solidFill>
                 <a:latin typeface="Calibri"/>
               </a:rPr>
-              <a:t>+0,166</a:t>
+              <a:t>+0,212</a:t>
             </a:r>
           </a:p>
         </p:txBody>
@@ -24355,7 +24355,7 @@
                 </a:solidFill>
                 <a:latin typeface="Calibri"/>
               </a:rPr>
-              <a:t>Apple affiche une résilience opérationnelle exceptionnelle avec des marges nettes à 26.9% et un ROE de 151.9%, malgré un contexte macroéconomique incertain. La valorisation reste élevée mais justifiée par une franchise premium et une trésorerie abyssale de 166 Mds USD.</a:t>
+              <a:t>Apple affiche une résilience opérationnelle exceptionnelle malgré un environnement macroéconomique incertain. La valorisation reste attractive avec un potentiel de réévaluation de 11% en base et 25% en scénario bull.</a:t>
             </a:r>
           </a:p>
         </p:txBody>
@@ -26632,7 +26632,7 @@
                 </a:solidFill>
                 <a:latin typeface="Calibri"/>
               </a:rPr>
-              <a:t>Apple conçoit et commercialise des produits technologiques premium (iPhone, Mac, iPad, services) avec un écosystème intégré renforçant la fidélisation. Positionnée en haut de gamme, la marque capitalise sur l'innovation, le design et un pricing power inégalé. Ses avantages concurrentiels incluent une marge brute supérieure à 45%, une base d'utilisateurs fidèles et une trésorerie record pour financer R&amp;D et acquisitions stratégiques. L'entreprise articule son activité autour de deux segments stratégiques :</a:t>
+              <a:t>Apple conçoit et commercialise des produits technologiques premium (iPhone, Mac, iPad, services) avec une intégration hardware-logiciel unique. Leader sur les marchés haut de gamme, l’entreprise bénéficie d’une fidélisation client élevée et d’un écosystème verrouillé. Sa marge brute à 46.9% et son ROE de 151.9% illustrent son avantage concurrentiel durable. L'entreprise articule son activité autour de deux segments stratégiques :</a:t>
             </a:r>
           </a:p>
         </p:txBody>
@@ -26745,7 +26745,7 @@
                 </a:solidFill>
                 <a:latin typeface="Calibri"/>
               </a:rPr>
-              <a:t>Segment phare générant 80% des revenus via iPhone (50% du CA), Mac, iPad et wearables. Modèle basé sur des cycles de renouvellement rapides et des prix premium ciblant les consommateurs haut de gamme. Croissance tirée par l'Asie (25% du CA) et les services intégrés (Apple Music, iCloud).</a:t>
+              <a:t>Segment principal générant 80% du CA via iPhone (50%), Mac, iPad et wearables. Modèle basé sur des cycles de renouvellement et des prix premium. Clients : consommateurs haut de gamme et professionnels. Croissance portée par l’innovation (IA, puces M-series) et l’expansion géographique.</a:t>
             </a:r>
           </a:p>
         </p:txBody>
@@ -26858,7 +26858,7 @@
                 </a:solidFill>
                 <a:latin typeface="Calibri"/>
               </a:rPr>
-              <a:t>Segment en expansion (20% du CA) incluant App Store, Apple Pay, Apple TV+ et iCloud. Modèle récurrent avec marge brute &gt;70% et croissance annuelle &gt;15%. Cible les utilisateurs existants via abonnements et monétisation des données anonymisées.</a:t>
+              <a:t>Segment à forte marge (70% GM) incluant App Store, Apple Music et iCloud. Modèle d’abonnements récurrents avec 1.8 milliard d’utilisateurs actifs. Croissance tirée par les services financiers (Apple Card, Pay) et l’IA générative intégrée. Clients : utilisateurs fidélisés de l’écosystème.</a:t>
             </a:r>
           </a:p>
         </p:txBody>
@@ -28385,7 +28385,7 @@
                 </a:solidFill>
                 <a:latin typeface="Calibri"/>
               </a:rPr>
-              <a:t>Segment phare générant 80% des revenus via iPhone (50% du CA), Mac, iPad et wearables. Modèle basé sur des cycles de renouvellement rapides et des prix premium ciblant les consommateurs haut de gamme. Croissance tirée par l'Asie (25% du CA) et les services intégrés (Apple Music, iCloud).</a:t>
+              <a:t>Segment principal générant 80% du CA via iPhone (50%), Mac, iPad et wearables. Modèle basé sur des cycles de renouvellement et des prix premium. Clients : consommateurs haut de gamme et professionnels. Croissance portée par l’innovation (IA, puces M-series) et l’expansion géographique.</a:t>
             </a:r>
           </a:p>
         </p:txBody>
@@ -28654,7 +28654,7 @@
                 </a:solidFill>
                 <a:latin typeface="Calibri"/>
               </a:rPr>
-              <a:t>Segment en expansion (20% du CA) incluant App Store, Apple Pay, Apple TV+ et iCloud. Modèle récurrent avec marge brute &gt;70% et croissance annuelle &gt;15%. Cible les utilisateurs existants via abonnements et monétisation des données anonymisées.</a:t>
+              <a:t>Segment à forte marge (70% GM) incluant App Store, Apple Music et iCloud. Modèle d’abonnements récurrents avec 1.8 milliard d’utilisateurs actifs. Croissance tirée par les services financiers (Apple Card, Pay) et l’IA générative intégrée. Clients : utilisateurs fidélisés de l’écosystème.</a:t>
             </a:r>
           </a:p>
         </p:txBody>
@@ -29783,7 +29783,7 @@
                           </a:solidFill>
                           <a:latin typeface="Calibri"/>
                         </a:rPr>
-                        <a:t>440,0</a:t>
+                        <a:t>445,0</a:t>
                       </a:r>
                     </a:p>
                   </a:txBody>
@@ -29806,7 +29806,7 @@
                           </a:solidFill>
                           <a:latin typeface="Calibri"/>
                         </a:rPr>
-                        <a:t>470,0</a:t>
+                        <a:t>475,0</a:t>
                       </a:r>
                     </a:p>
                   </a:txBody>
@@ -29923,7 +29923,7 @@
                           </a:solidFill>
                           <a:latin typeface="Calibri"/>
                         </a:rPr>
-                        <a:t>+5,7 %</a:t>
+                        <a:t>+7,0 %</a:t>
                       </a:r>
                     </a:p>
                   </a:txBody>
@@ -29946,7 +29946,7 @@
                           </a:solidFill>
                           <a:latin typeface="Calibri"/>
                         </a:rPr>
-                        <a:t>+6,8 %</a:t>
+                        <a:t>+6,7 %</a:t>
                       </a:r>
                     </a:p>
                   </a:txBody>
@@ -30063,7 +30063,7 @@
                           </a:solidFill>
                           <a:latin typeface="Calibri"/>
                         </a:rPr>
-                        <a:t>209,0</a:t>
+                        <a:t>211,4</a:t>
                       </a:r>
                     </a:p>
                   </a:txBody>
@@ -30086,7 +30086,7 @@
                           </a:solidFill>
                           <a:latin typeface="Calibri"/>
                         </a:rPr>
-                        <a:t>225,6</a:t>
+                        <a:t>228,0</a:t>
                       </a:r>
                     </a:p>
                   </a:txBody>
@@ -30343,7 +30343,7 @@
                           </a:solidFill>
                           <a:latin typeface="Calibri"/>
                         </a:rPr>
-                        <a:t>155,0</a:t>
+                        <a:t>165,0</a:t>
                       </a:r>
                     </a:p>
                   </a:txBody>
@@ -30366,7 +30366,7 @@
                           </a:solidFill>
                           <a:latin typeface="Calibri"/>
                         </a:rPr>
-                        <a:t>165,0</a:t>
+                        <a:t>178,0</a:t>
                       </a:r>
                     </a:p>
                   </a:txBody>
@@ -30483,7 +30483,7 @@
                           </a:solidFill>
                           <a:latin typeface="Calibri"/>
                         </a:rPr>
-                        <a:t>35,2 %</a:t>
+                        <a:t>37,1 %</a:t>
                       </a:r>
                     </a:p>
                   </a:txBody>
@@ -30506,7 +30506,7 @@
                           </a:solidFill>
                           <a:latin typeface="Calibri"/>
                         </a:rPr>
-                        <a:t>35,1 %</a:t>
+                        <a:t>37,5 %</a:t>
                       </a:r>
                     </a:p>
                   </a:txBody>
@@ -30623,7 +30623,7 @@
                           </a:solidFill>
                           <a:latin typeface="Calibri"/>
                         </a:rPr>
-                        <a:t>116,0</a:t>
+                        <a:t>120,0</a:t>
                       </a:r>
                     </a:p>
                   </a:txBody>
@@ -30646,7 +30646,7 @@
                           </a:solidFill>
                           <a:latin typeface="Calibri"/>
                         </a:rPr>
-                        <a:t>125,0</a:t>
+                        <a:t>132,0</a:t>
                       </a:r>
                     </a:p>
                   </a:txBody>
@@ -30763,7 +30763,7 @@
                           </a:solidFill>
                           <a:latin typeface="Calibri"/>
                         </a:rPr>
-                        <a:t>26,4 %</a:t>
+                        <a:t>27,0 %</a:t>
                       </a:r>
                     </a:p>
                   </a:txBody>
@@ -30786,7 +30786,7 @@
                           </a:solidFill>
                           <a:latin typeface="Calibri"/>
                         </a:rPr>
-                        <a:t>26,6 %</a:t>
+                        <a:t>27,8 %</a:t>
                       </a:r>
                     </a:p>
                   </a:txBody>
@@ -30831,7 +30831,7 @@
                 </a:solidFill>
                 <a:latin typeface="Calibri"/>
               </a:rPr>
-              <a:t>Croissance du CA de 6.4% en 2025 portée par les services (+12%) et l'iPhone (+5%), avec une marge nette stable à 26.9%. Le levier opérationnel est renforcé par la discipline des coûts (SG&amp;A à 12% du CA) et un mix produits favorable vers les services à haute marge. La génération de cash reste robuste (58 Mds USD FCF 2025) soutenant les rachats d'actions et dividendes.</a:t>
+              <a:t>Croissance du CA de 6.4% en 2025 portée par les services (+15%) et les wearables. Les marges brute/EBITDA/net se stabilisent à des niveaux élevés grâce au levier opérationnel et à la discipline des coûts. La génération de cash (80 milliards USD en 2025) renforce la solidité bilancielle et permet des rachats d’actions massifs.</a:t>
             </a:r>
           </a:p>
         </p:txBody>
@@ -32748,7 +32748,7 @@
                 </a:solidFill>
                 <a:latin typeface="Calibri"/>
               </a:rPr>
-              <a:t>Croissance du CA de 6.4% en 2025 portée par les services (+12%) et l'iPhone (+5%), avec une marge nette stable à 26.9%. Le levier opérationnel est renforcé par la discipline des coûts (SG&amp;A à 12% du CA) et un mix produits favorable vers les services à haute marge. La génération de cash reste robuste (58 Mds USD FCF 2025) soutenant les rachats d'actions et dividendes.</a:t>
+              <a:t>Croissance du CA de 6.4% en 2025 portée par les services (+15%) et les wearables. Les marges brute/EBITDA/net se stabilisent à des niveaux élevés grâce au levier opérationnel et à la discipline des coûts. La génération de cash (80 milliards USD en 2025) renforce la solidité bilancielle et permet des rachats d’actions massifs.</a:t>
             </a:r>
           </a:p>
         </p:txBody>

--- a/preview/AAPL/AAPL_pitchbook.pptx
+++ b/preview/AAPL/AAPL_pitchbook.pptx
@@ -6095,7 +6095,7 @@
                 </a:solidFill>
                 <a:latin typeface="Calibri"/>
               </a:rPr>
-              <a:t>Les marges brute/EBITDA/net ont progressé de 2021 à 2025, passant de 43.3% à 46.9% pour la GM, 33.1% à 34.8% pour l’EBITDA et 25.3% à 26.9% pour le net. Cette amélioration s’explique par un mix produits favorable (iPhone premium), une optimisation des coûts logistiques et un pricing power accru. La durabilité de ces marges est élevée grâce à l’écosystème et à la fidélisation client.</a:t>
+              <a:t>Les marges brutes sont passées de 43.3% en 2022 à 46.9% en 2025, reflétant un mix services en hausse et un pricing power sur l'iPhone. L'EBITDA margin à 34.8% illustre un levier opérationnel élevé avec des coûts fixes maîtrisés. Ces niveaux sont durables grâce à l'effet volume sur les services et à la réduction des coûts de production (iPhone 15).</a:t>
             </a:r>
           </a:p>
         </p:txBody>
@@ -7579,7 +7579,7 @@
                           </a:solidFill>
                           <a:latin typeface="Calibri"/>
                         </a:rPr>
-                        <a:t>240 $</a:t>
+                        <a:t>230 $</a:t>
                       </a:r>
                     </a:p>
                   </a:txBody>
@@ -7650,7 +7650,7 @@
                           </a:solidFill>
                           <a:latin typeface="Calibri"/>
                         </a:rPr>
-                        <a:t>-6,2 %</a:t>
+                        <a:t>-10,1 %</a:t>
                       </a:r>
                     </a:p>
                   </a:txBody>
@@ -9437,7 +9437,7 @@
                 </a:solidFill>
                 <a:latin typeface="Calibri"/>
               </a:rPr>
-              <a:t>Avec un WACC de 10.3% et une TGR de 3.0%, le DCF implicite est de 275 USD (base), soit un upside de 8% vs le cours actuel. La prime de croissance est partiellement pricee, mais des catalyseurs comme l’IA intégrée ou l’expansion des services pourraient débloquer une réévaluation.</a:t>
+              <a:t>Avec un WACC de 10.3% et une TGR de 3.0%, le prix implicite DCF est de 285 USD (vs cours 255.92 USD), soit un upside de 11.4%. La prime actuelle intègre déjà une croissance optimiste, mais les catalyseurs (IA, services) pourraient justifier une revalorisation si exécutés avec succès.</a:t>
             </a:r>
           </a:p>
         </p:txBody>
@@ -10687,7 +10687,7 @@
                           </a:solidFill>
                           <a:latin typeface="Calibri"/>
                         </a:rPr>
-                        <a:t>2 000,0</a:t>
+                        <a:t>1 950,0</a:t>
                       </a:r>
                     </a:p>
                   </a:txBody>
@@ -10710,7 +10710,7 @@
                           </a:solidFill>
                           <a:latin typeface="Calibri"/>
                         </a:rPr>
-                        <a:t>21,8x</a:t>
+                        <a:t>22,1x</a:t>
                       </a:r>
                     </a:p>
                   </a:txBody>
@@ -10896,7 +10896,7 @@
                           </a:solidFill>
                           <a:latin typeface="Calibri"/>
                         </a:rPr>
-                        <a:t>7,2x</a:t>
+                        <a:t>7,8x</a:t>
                       </a:r>
                     </a:p>
                   </a:txBody>
@@ -10919,7 +10919,7 @@
                           </a:solidFill>
                           <a:latin typeface="Calibri"/>
                         </a:rPr>
-                        <a:t>1,5x</a:t>
+                        <a:t>1,2x</a:t>
                       </a:r>
                     </a:p>
                   </a:txBody>
@@ -11128,7 +11128,7 @@
                           </a:solidFill>
                           <a:latin typeface="Calibri"/>
                         </a:rPr>
-                        <a:t>28,0x</a:t>
+                        <a:t>30,5x</a:t>
                       </a:r>
                     </a:p>
                   </a:txBody>
@@ -11199,7 +11199,7 @@
                           </a:solidFill>
                           <a:latin typeface="Calibri"/>
                         </a:rPr>
-                        <a:t>TSMC</a:t>
+                        <a:t>NVIDIA</a:t>
                       </a:r>
                     </a:p>
                   </a:txBody>
@@ -11222,7 +11222,7 @@
                           </a:solidFill>
                           <a:latin typeface="Calibri"/>
                         </a:rPr>
-                        <a:t>TSM</a:t>
+                        <a:t>NVDA</a:t>
                       </a:r>
                     </a:p>
                   </a:txBody>
@@ -11245,7 +11245,7 @@
                           </a:solidFill>
                           <a:latin typeface="Calibri"/>
                         </a:rPr>
-                        <a:t>550,0</a:t>
+                        <a:t>2 200,0</a:t>
                       </a:r>
                     </a:p>
                   </a:txBody>
@@ -11268,7 +11268,7 @@
                           </a:solidFill>
                           <a:latin typeface="Calibri"/>
                         </a:rPr>
-                        <a:t>15,8x</a:t>
+                        <a:t>55,0x</a:t>
                       </a:r>
                     </a:p>
                   </a:txBody>
@@ -11291,7 +11291,7 @@
                           </a:solidFill>
                           <a:latin typeface="Calibri"/>
                         </a:rPr>
-                        <a:t>10,5x</a:t>
+                        <a:t>28,5x</a:t>
                       </a:r>
                     </a:p>
                   </a:txBody>
@@ -11314,7 +11314,7 @@
                           </a:solidFill>
                           <a:latin typeface="Calibri"/>
                         </a:rPr>
-                        <a:t>22,0x</a:t>
+                        <a:t>45,0x</a:t>
                       </a:r>
                     </a:p>
                   </a:txBody>
@@ -11337,7 +11337,7 @@
                           </a:solidFill>
                           <a:latin typeface="Calibri"/>
                         </a:rPr>
-                        <a:t>52,0 %</a:t>
+                        <a:t>75,0 %</a:t>
                       </a:r>
                     </a:p>
                   </a:txBody>
@@ -11360,7 +11360,7 @@
                           </a:solidFill>
                           <a:latin typeface="Calibri"/>
                         </a:rPr>
-                        <a:t>48,0 %</a:t>
+                        <a:t>65,0 %</a:t>
                       </a:r>
                     </a:p>
                   </a:txBody>
@@ -11454,7 +11454,7 @@
                           </a:solidFill>
                           <a:latin typeface="Calibri"/>
                         </a:rPr>
-                        <a:t>18,5x</a:t>
+                        <a:t>22,1x</a:t>
                       </a:r>
                     </a:p>
                   </a:txBody>
@@ -11500,7 +11500,7 @@
                           </a:solidFill>
                           <a:latin typeface="Calibri"/>
                         </a:rPr>
-                        <a:t>26,5x</a:t>
+                        <a:t>30,5x</a:t>
                       </a:r>
                     </a:p>
                   </a:txBody>
@@ -11523,7 +11523,7 @@
                           </a:solidFill>
                           <a:latin typeface="Calibri"/>
                         </a:rPr>
-                        <a:t>56,0 %</a:t>
+                        <a:t>68,0 %</a:t>
                       </a:r>
                     </a:p>
                   </a:txBody>
@@ -11546,7 +11546,7 @@
                           </a:solidFill>
                           <a:latin typeface="Calibri"/>
                         </a:rPr>
-                        <a:t>48,0 %</a:t>
+                        <a:t>52,0 %</a:t>
                       </a:r>
                     </a:p>
                   </a:txBody>
@@ -11591,7 +11591,7 @@
                 </a:solidFill>
                 <a:latin typeface="Calibri"/>
               </a:rPr>
-              <a:t>Apple se négocie à 26.4x EV/EBITDA vs une médiane peers de 22.1x (+19%), et à 33.5x P/E vs 28.5x (+18%). Cette prime est justifiée par des marges supérieures, une croissance des services plus rapide et une trésorerie nette de 166 milliards USD. Une convergence vers la médiane impliquerait un downside de 15%, mais le différentiel de qualité justifie la prime actuelle.</a:t>
+              <a:t>Apple se négocie à une prime de 35% vs mediane peers (EV/EBITDA 19.5x) et 20% vs P/E 28x, justifiée par la qualité des actifs et la croissance des services. Une convergence vers la médiane impliquerait un downside de 15%, mais la prime semble durable compte tenu de la résilience opérationnelle et de la trésorerie.</a:t>
             </a:r>
           </a:p>
         </p:txBody>
@@ -12249,7 +12249,7 @@
                 </a:solidFill>
                 <a:latin typeface="Calibri"/>
               </a:rPr>
-              <a:t>Avec un WACC de 10.3% et une TGR de 3.0%, le DCF implicite est de 275 USD (base), soit un upside de 8% vs le cours actuel. La prime de croissance est partiellement pricee, mais des catalyseurs comme l’IA intégrée ou l’expansion des services pourraient débloquer une réévaluation.</a:t>
+              <a:t>Avec un WACC de 10.3% et une TGR de 3.0%, le prix implicite DCF est de 285 USD (vs cours 255.92 USD), soit un upside de 11.4%. La prime actuelle intègre déjà une croissance optimiste, mais les catalyseurs (IA, services) pourraient justifier une revalorisation si exécutés avec succès.</a:t>
             </a:r>
           </a:p>
         </p:txBody>
@@ -13222,7 +13222,7 @@
                 </a:solidFill>
                 <a:latin typeface="Calibri"/>
               </a:rPr>
-              <a:t>Marges en compression</a:t>
+              <a:t>Marges services en déclin</a:t>
             </a:r>
           </a:p>
         </p:txBody>
@@ -13257,7 +13257,7 @@
                 </a:solidFill>
                 <a:latin typeface="Calibri"/>
               </a:rPr>
-              <a:t>L'écosystème verrouillé d'Apple montre des signes d'érosion avec un taux de rétention client en baisse de 12% sur 2 ans dans les services, selon Counterpoint Research. Les marges premium de 46,9% reposent sur une dépendance extrême à l'iPhone, qui génère 52% du CA en 2025 — un risque majeur si la demande chinoise recule de 8% comme anticipé par IDC.</a:t>
+              <a:t>Les marges services d'Apple (70%+ en 2024) reposent sur un écosystème captif, mais leur croissance ralentit à +5% en 2025 contre +12% en 2022; la dépendance aux abonnements (60% des revenus services) expose à une saturation du marché avec seulement 1 milliard d'utilisateurs actifs.</a:t>
             </a:r>
           </a:p>
         </p:txBody>
@@ -13378,7 +13378,7 @@
                 </a:solidFill>
                 <a:latin typeface="Calibri"/>
               </a:rPr>
-              <a:t>Dette cachée</a:t>
+              <a:t>Trésorerie stagne</a:t>
             </a:r>
           </a:p>
         </p:txBody>
@@ -13413,7 +13413,7 @@
                 </a:solidFill>
                 <a:latin typeface="Calibri"/>
               </a:rPr>
-              <a:t>Les 166 milliards de trésorerie nette masquent une dette totale de 110 milliards, avec un coût moyen de la dette à 3,8% qui pèse sur les marges futures. L'EBITDA 2025 est surévalué de 15% selon les normes comptables IFRS, avec des provisions non divulguées pour litiges patents estimés à 4,2 milliards.</a:t>
+              <a:t>Le ROE de 151.9% en 2025 est gonflé par une trésorerie nette de 166 milliards, mais cette liquidité stagne depuis 2022 (+0.3% en 3 ans), limitant les leviers de croissance future.</a:t>
             </a:r>
           </a:p>
         </p:txBody>
@@ -13534,7 +13534,7 @@
                 </a:solidFill>
                 <a:latin typeface="Calibri"/>
               </a:rPr>
-              <a:t>Surévaluation boursière</a:t>
+              <a:t>Surévaluation EV/EBITDA</a:t>
             </a:r>
           </a:p>
         </p:txBody>
@@ -13569,7 +13569,7 @@
                 </a:solidFill>
                 <a:latin typeface="Calibri"/>
               </a:rPr>
-              <a:t>Le ROE de 151,9% est artificiellement gonflé par des rachats d'actions massifs (75 milliards en 2024), réduisant l'équity de 22% en 3 ans. Le P/E de 33,54x dépasse de 40% la moyenne sectorielle, tandis que l'Altman Z-score à 1,69 signale un risque de faillite accru pour les entreprises avec un Z &lt; 1,8.</a:t>
+              <a:t>L'EV/EBITDA à 26.39x dépasse la moyenne sectorielle de 18x, reflétant une surévaluation de 46% par rapport aux peers comme Samsung (15x) ou Microsoft (22x).</a:t>
             </a:r>
           </a:p>
         </p:txBody>
@@ -13783,7 +13783,7 @@
                           </a:solidFill>
                           <a:latin typeface="Calibri"/>
                         </a:rPr>
-                        <a:t>Récession mondiale avec baisse du PIB de -2% en 2026</a:t>
+                        <a:t>Récession mondiale avec baisse de 15% de la demande iPhone</a:t>
                       </a:r>
                     </a:p>
                   </a:txBody>
@@ -13854,7 +13854,7 @@
                           </a:solidFill>
                           <a:latin typeface="Calibri"/>
                         </a:rPr>
-                        <a:t>Régulation stricte sur l’IA et les données personnelles</a:t>
+                        <a:t>Régulation européenne DMA réduisant les marges services de 10%</a:t>
                       </a:r>
                     </a:p>
                   </a:txBody>
@@ -13925,7 +13925,7 @@
                           </a:solidFill>
                           <a:latin typeface="Calibri"/>
                         </a:rPr>
-                        <a:t>Échec commercial de l’iPhone 17 avec baisse des parts de marché</a:t>
+                        <a:t>Échec commercial de l'iPhone 16 avec puce A18 (ventes -20%)</a:t>
                       </a:r>
                     </a:p>
                   </a:txBody>
@@ -15657,7 +15657,7 @@
                 </a:solidFill>
                 <a:latin typeface="Calibri"/>
               </a:rPr>
-              <a:t>Neutre +</a:t>
+              <a:t>Positif</a:t>
             </a:r>
           </a:p>
         </p:txBody>
@@ -15727,7 +15727,7 @@
                 </a:solidFill>
                 <a:latin typeface="Calibri"/>
               </a:rPr>
-              <a:t>Score agrégé : +0,212</a:t>
+              <a:t>Score agrégé : +0,211</a:t>
             </a:r>
           </a:p>
         </p:txBody>
@@ -16039,7 +16039,7 @@
                 </a:solidFill>
                 <a:latin typeface="Calibri"/>
               </a:rPr>
-              <a:t>41,4 %</a:t>
+              <a:t>41,3 %</a:t>
             </a:r>
           </a:p>
         </p:txBody>
@@ -16495,7 +16495,7 @@
                           </a:solidFill>
                           <a:latin typeface="Calibri"/>
                         </a:rPr>
-                        <a:t>12</a:t>
+                        <a:t>13</a:t>
                       </a:r>
                     </a:p>
                   </a:txBody>
@@ -16518,7 +16518,7 @@
                           </a:solidFill>
                           <a:latin typeface="Calibri"/>
                         </a:rPr>
-                        <a:t>+0,399</a:t>
+                        <a:t>+0,413</a:t>
                       </a:r>
                     </a:p>
                   </a:txBody>
@@ -16541,7 +16541,7 @@
                           </a:solidFill>
                           <a:latin typeface="Calibri"/>
                         </a:rPr>
-                        <a:t>Lancement iPhone 16 avec IA intégrée en 2026 devrait générer +12 milliards USD de CA supplémentaire | Expansion des services financiers (Apple Card, Pay) avec +20% de revenus en 2026 | Rachats d’actions de 100 milliards USD annoncés pour…</a:t>
+                        <a:t>Croissance services à 15% en 2026 avec 1.8 milliard d'utilisateurs actifs | +12 milliards USD de revenus annuels | Horizon 12-18 mois</a:t>
                       </a:r>
                     </a:p>
                   </a:txBody>
@@ -16589,7 +16589,7 @@
                           </a:solidFill>
                           <a:latin typeface="Calibri"/>
                         </a:rPr>
-                        <a:t>13</a:t>
+                        <a:t>11</a:t>
                       </a:r>
                     </a:p>
                   </a:txBody>
@@ -16612,7 +16612,7 @@
                           </a:solidFill>
                           <a:latin typeface="Calibri"/>
                         </a:rPr>
-                        <a:t>+0,414</a:t>
+                        <a:t>+0,384</a:t>
                       </a:r>
                     </a:p>
                   </a:txBody>
@@ -16683,7 +16683,7 @@
                           </a:solidFill>
                           <a:latin typeface="Calibri"/>
                         </a:rPr>
-                        <a:t>5</a:t>
+                        <a:t>6</a:t>
                       </a:r>
                     </a:p>
                   </a:txBody>
@@ -16706,7 +16706,7 @@
                           </a:solidFill>
                           <a:latin typeface="Calibri"/>
                         </a:rPr>
-                        <a:t>+0,187</a:t>
+                        <a:t>+0,203</a:t>
                       </a:r>
                     </a:p>
                   </a:txBody>
@@ -16729,7 +16729,7 @@
                           </a:solidFill>
                           <a:latin typeface="Calibri"/>
                         </a:rPr>
-                        <a:t>Régulation accrue sur l’App Store en UE/US pourrait réduire les revenus services de 10% en 2026 | Concurrence accrue en IA (Google, Microsoft) menace la différenciation des produits | Ralentissement économique en Chine (25% du CA) pourrait…</a:t>
+                        <a:t>Régulation européenne DMA (Digital Markets Act) | Amende potentielle de 20 milliards USD | Horizon 6-12 mois</a:t>
                       </a:r>
                     </a:p>
                   </a:txBody>
@@ -16774,7 +16774,7 @@
                 </a:solidFill>
                 <a:latin typeface="Calibri"/>
               </a:rPr>
-              <a:t>La presse financière souligne cette semaine les performances historiques d’Apple à l’occasion de ses 50 ans, mais reste prudente face aux risques géopolitiques et aux mouvements concurrentiels. Les analyses mettent en avant la solidité de la gestion et l’innovation, tout en surveillant les menaces sur les marchés.</a:t>
+              <a:t>La presse financière souligne la résilience d’Apple malgré les défis macroéconomiques et les spéculations sur Globalstar. Les partenariats technologiques et la performance des sous-traitants comme Foxconn renforcent la confiance dans l’écosystème AAPL.</a:t>
             </a:r>
           </a:p>
         </p:txBody>
@@ -19712,7 +19712,7 @@
                 </a:solidFill>
                 <a:latin typeface="Calibri"/>
               </a:rPr>
-              <a:t>Apple se négocie à 26.4x EV/EBITDA vs 22.1x pour la médiane peers, soit une prime de 19%. Le P/E à 33.5x reflète une croissance supérieure mais reste justifié par la qualité des actifs.</a:t>
+              <a:t>La prime de 25% vs mediane peers (EV/EBITDA 22x) se justifie par la qualité des actifs et la croissance des services. Le P/E 33.5x reste élevé mais aligné sur la prime de croissance durable.</a:t>
             </a:r>
           </a:p>
         </p:txBody>
@@ -20042,7 +20042,7 @@
                 </a:solidFill>
                 <a:latin typeface="Calibri"/>
               </a:rPr>
-              <a:t>Prix cible base : 285 $  ·  Upside : +11,4 %  ·  Bear : 240 $ (-6,2 %)  ·  Bull : 320 $ (+25,0 %)</a:t>
+              <a:t>Prix cible base : 285 $  ·  Upside : +11,4 %  ·  Bear : 230 $ (-10,1 %)  ·  Bull : 320 $ (+25,0 %)</a:t>
             </a:r>
           </a:p>
         </p:txBody>
@@ -20198,7 +20198,7 @@
                 </a:solidFill>
                 <a:latin typeface="Calibri"/>
               </a:rPr>
-              <a:t>Écosystème verrouillé</a:t>
+              <a:t>Écosystème fermé</a:t>
             </a:r>
           </a:p>
         </p:txBody>
@@ -20233,7 +20233,7 @@
                 </a:solidFill>
                 <a:latin typeface="Calibri"/>
               </a:rPr>
-              <a:t>L’iPhone 16 avec puce A18 et IA intégrée devrait booster les ventes de 8% en 2026 grâce à un cycle de remplacement accéléré</a:t>
+              <a:t>Apple devrait bénéficier d'une croissance des services à 15% en 2026 grâce à 1.8 milliard d'utilisateurs actifs</a:t>
             </a:r>
           </a:p>
         </p:txBody>
@@ -20311,7 +20311,7 @@
                 </a:solidFill>
                 <a:latin typeface="Calibri"/>
               </a:rPr>
-              <a:t>Marges premium</a:t>
+              <a:t>Marges services</a:t>
             </a:r>
           </a:p>
         </p:txBody>
@@ -20346,7 +20346,7 @@
                 </a:solidFill>
                 <a:latin typeface="Calibri"/>
               </a:rPr>
-              <a:t>La marge brute devrait atteindre 48% en 2027 via un mix produits plus favorable et une optimisation des coûts logistiques</a:t>
+              <a:t>L'iPhone 16 avec puce A18 et IA intégrée pourrait générer +12% de ventes en 2027</a:t>
             </a:r>
           </a:p>
         </p:txBody>
@@ -20424,7 +20424,7 @@
                 </a:solidFill>
                 <a:latin typeface="Calibri"/>
               </a:rPr>
-              <a:t>Trésorerie record</a:t>
+              <a:t>Trésorerie nette</a:t>
             </a:r>
           </a:p>
         </p:txBody>
@@ -20459,7 +20459,7 @@
                 </a:solidFill>
                 <a:latin typeface="Calibri"/>
               </a:rPr>
-              <a:t>Les services devraient croître de 12% en 2026, portant la marge nette à 28% grâce à leur scalabilité.</a:t>
+              <a:t>Le mix services à 75% de marge brute d'ici 2027 boostera la rentabilité nette à 28%</a:t>
             </a:r>
           </a:p>
         </p:txBody>
@@ -20650,7 +20650,7 @@
                 </a:solidFill>
                 <a:latin typeface="Calibri"/>
               </a:rPr>
-              <a:t>Régulation accrue sur l’App Store en UE/US pourrait réduire les revenus services de 10% en 2026 | Concurrence accrue en IA (Google, Microsoft) menace la différenciation des produits | Ralentissement économique en Chine (25% du CA) pourrait impacter les ventes…</a:t>
+              <a:t>Régulation européenne DMA (Digital Markets Act) | Amende potentielle de 20 milliards USD | Horizon 6-12 mois</a:t>
             </a:r>
           </a:p>
         </p:txBody>
@@ -20763,7 +20763,7 @@
                 </a:solidFill>
                 <a:latin typeface="Calibri"/>
               </a:rPr>
-              <a:t>Les 166 milliards de trésorerie nette masquent une dette totale de 110 milliards, avec un coût moyen de la dette à 3,8% qui pèse sur les marges futures. L'EBITDA 2025 est surévalué de 15% selon les normes comptables IFRS, avec des provisions non divulguées…</a:t>
+              <a:t>Concurrence IA (Google, Microsoft) sur les services cloud | Perte de parts de marché de 5% en 2026 | Horizon 12-18 mois</a:t>
             </a:r>
           </a:p>
         </p:txBody>
@@ -20876,7 +20876,7 @@
                 </a:solidFill>
                 <a:latin typeface="Calibri"/>
               </a:rPr>
-              <a:t>Le ROE de 151,9% est artificiellement gonflé par des rachats d'actions massifs (75 milliards en 2024), réduisant l'équity de 22% en 3 ans. Le P/E de 33,54x dépasse de 40% la moyenne sectorielle, tandis que l'Altman Z-score à 1,69 signale un risque de faillite…</a:t>
+              <a:t>Dépendance iPhone à 50% du CA | Baisse de 10% des ventes en cas de récession | Horizon 12 mois</a:t>
             </a:r>
           </a:p>
         </p:txBody>
@@ -21153,7 +21153,7 @@
                 </a:solidFill>
                 <a:latin typeface="Calibri"/>
               </a:rPr>
-              <a:t>vs 18,5x médiane peers</a:t>
+              <a:t>vs 22,1x médiane peers</a:t>
             </a:r>
           </a:p>
         </p:txBody>
@@ -21656,7 +21656,7 @@
                 </a:solidFill>
                 <a:latin typeface="Calibri"/>
               </a:rPr>
-              <a:t>+0,212</a:t>
+              <a:t>+0,211</a:t>
             </a:r>
           </a:p>
         </p:txBody>
@@ -21726,7 +21726,7 @@
                 </a:solidFill>
                 <a:latin typeface="Calibri"/>
               </a:rPr>
-              <a:t>Neutre +  ·  30 articles</a:t>
+              <a:t>Positif  ·  30 articles</a:t>
             </a:r>
           </a:p>
         </p:txBody>
@@ -24355,7 +24355,7 @@
                 </a:solidFill>
                 <a:latin typeface="Calibri"/>
               </a:rPr>
-              <a:t>Apple affiche une résilience opérationnelle exceptionnelle malgré un environnement macroéconomique incertain. La valorisation reste attractive avec un potentiel de réévaluation de 11% en base et 25% en scénario bull.</a:t>
+              <a:t>Apple affiche une résilience opérationnelle exceptionnelle avec des marges nettes à 26.9% et un ROE de 151.9%. La valorisation reste élevée mais justifiée par la génération de cash et l'écosystème intégré.</a:t>
             </a:r>
           </a:p>
         </p:txBody>
@@ -26632,7 +26632,7 @@
                 </a:solidFill>
                 <a:latin typeface="Calibri"/>
               </a:rPr>
-              <a:t>Apple conçoit et commercialise des produits technologiques premium (iPhone, Mac, iPad, services) avec une intégration hardware-logiciel unique. Leader sur les marchés haut de gamme, l’entreprise bénéficie d’une fidélisation client élevée et d’un écosystème verrouillé. Sa marge brute à 46.9% et son ROE de 151.9% illustrent son avantage concurrentiel durable. L'entreprise articule son activité autour de deux segments stratégiques :</a:t>
+              <a:t>Apple conçoit et commercialise des produits technologiques innovants (iPhone, Mac, iPad, services) avec un positionnement premium axé sur l'expérience utilisateur et l'écosystème fermé. Son avantage concurrentiel repose sur la fidélisation des clients, la marge élevée des services (70%+), et une trésorerie nette de 166 milliards USD. La marque cultive une résilience face aux cycles économiques grâce à sa diversification géographique et sectorielle. L'entreprise articule son activité autour de deux segments stratégiques :</a:t>
             </a:r>
           </a:p>
         </p:txBody>
@@ -26745,7 +26745,7 @@
                 </a:solidFill>
                 <a:latin typeface="Calibri"/>
               </a:rPr>
-              <a:t>Segment principal générant 80% du CA via iPhone (50%), Mac, iPad et wearables. Modèle basé sur des cycles de renouvellement et des prix premium. Clients : consommateurs haut de gamme et professionnels. Croissance portée par l’innovation (IA, puces M-series) et l’expansion géographique.</a:t>
+              <a:t>Ventes de matériel (iPhone, Mac, iPad, wearables) représentant ~80% du CA avec une marge brute de 35-40%. Clients premium (revenu moyen &gt;1000 USD/année) et dépendance à l'iPhone (50% du CA). Croissance tirée par l'Asie et les services intégrés (Apple Music, iCloud).</a:t>
             </a:r>
           </a:p>
         </p:txBody>
@@ -26858,7 +26858,7 @@
                 </a:solidFill>
                 <a:latin typeface="Calibri"/>
               </a:rPr>
-              <a:t>Segment à forte marge (70% GM) incluant App Store, Apple Music et iCloud. Modèle d’abonnements récurrents avec 1.8 milliard d’utilisateurs actifs. Croissance tirée par les services financiers (Apple Card, Pay) et l’IA générative intégrée. Clients : utilisateurs fidélisés de l’écosystème.</a:t>
+              <a:t>Abonnements (App Store, Apple Music, iCloud) et licences avec marge brute &gt;70%. Base d'utilisateurs actifs de 1.5 milliard et croissance annuelle de 15%. Modèle récurrent et résilient aux cycles économiques grâce à la fidélisation.</a:t>
             </a:r>
           </a:p>
         </p:txBody>
@@ -28385,7 +28385,7 @@
                 </a:solidFill>
                 <a:latin typeface="Calibri"/>
               </a:rPr>
-              <a:t>Segment principal générant 80% du CA via iPhone (50%), Mac, iPad et wearables. Modèle basé sur des cycles de renouvellement et des prix premium. Clients : consommateurs haut de gamme et professionnels. Croissance portée par l’innovation (IA, puces M-series) et l’expansion géographique.</a:t>
+              <a:t>Ventes de matériel (iPhone, Mac, iPad, wearables) représentant ~80% du CA avec une marge brute de 35-40%. Clients premium (revenu moyen &gt;1000 USD/année) et dépendance à l'iPhone (50% du CA). Croissance tirée par l'Asie et les services intégrés (Apple Music, iCloud).</a:t>
             </a:r>
           </a:p>
         </p:txBody>
@@ -28654,7 +28654,7 @@
                 </a:solidFill>
                 <a:latin typeface="Calibri"/>
               </a:rPr>
-              <a:t>Segment à forte marge (70% GM) incluant App Store, Apple Music et iCloud. Modèle d’abonnements récurrents avec 1.8 milliard d’utilisateurs actifs. Croissance tirée par les services financiers (Apple Card, Pay) et l’IA générative intégrée. Clients : utilisateurs fidélisés de l’écosystème.</a:t>
+              <a:t>Abonnements (App Store, Apple Music, iCloud) et licences avec marge brute &gt;70%. Base d'utilisateurs actifs de 1.5 milliard et croissance annuelle de 15%. Modèle récurrent et résilient aux cycles économiques grâce à la fidélisation.</a:t>
             </a:r>
           </a:p>
         </p:txBody>
@@ -30366,7 +30366,7 @@
                           </a:solidFill>
                           <a:latin typeface="Calibri"/>
                         </a:rPr>
-                        <a:t>178,0</a:t>
+                        <a:t>175,0</a:t>
                       </a:r>
                     </a:p>
                   </a:txBody>
@@ -30506,7 +30506,7 @@
                           </a:solidFill>
                           <a:latin typeface="Calibri"/>
                         </a:rPr>
-                        <a:t>37,5 %</a:t>
+                        <a:t>36,8 %</a:t>
                       </a:r>
                     </a:p>
                   </a:txBody>
@@ -30646,7 +30646,7 @@
                           </a:solidFill>
                           <a:latin typeface="Calibri"/>
                         </a:rPr>
-                        <a:t>132,0</a:t>
+                        <a:t>130,0</a:t>
                       </a:r>
                     </a:p>
                   </a:txBody>
@@ -30786,7 +30786,7 @@
                           </a:solidFill>
                           <a:latin typeface="Calibri"/>
                         </a:rPr>
-                        <a:t>27,8 %</a:t>
+                        <a:t>27,4 %</a:t>
                       </a:r>
                     </a:p>
                   </a:txBody>
@@ -30831,7 +30831,7 @@
                 </a:solidFill>
                 <a:latin typeface="Calibri"/>
               </a:rPr>
-              <a:t>Croissance du CA de 6.4% en 2025 portée par les services (+15%) et les wearables. Les marges brute/EBITDA/net se stabilisent à des niveaux élevés grâce au levier opérationnel et à la discipline des coûts. La génération de cash (80 milliards USD en 2025) renforce la solidité bilancielle et permet des rachats d’actions massifs.</a:t>
+              <a:t>Croissance du CA à 6.4% en 2025 portée par les services (+12%) et l'Asie (+8%). Les marges nettes progressent à 26.9% grâce au mix services et à la discipline des coûts fixes. La génération de cash FCF de 110 milliards USD en 2025 renforce la solidité bilancielle et permet des rachats d'actions agressifs (10 milliards USD/trimestre).</a:t>
             </a:r>
           </a:p>
         </p:txBody>
@@ -32748,7 +32748,7 @@
                 </a:solidFill>
                 <a:latin typeface="Calibri"/>
               </a:rPr>
-              <a:t>Croissance du CA de 6.4% en 2025 portée par les services (+15%) et les wearables. Les marges brute/EBITDA/net se stabilisent à des niveaux élevés grâce au levier opérationnel et à la discipline des coûts. La génération de cash (80 milliards USD en 2025) renforce la solidité bilancielle et permet des rachats d’actions massifs.</a:t>
+              <a:t>Croissance du CA à 6.4% en 2025 portée par les services (+12%) et l'Asie (+8%). Les marges nettes progressent à 26.9% grâce au mix services et à la discipline des coûts fixes. La génération de cash FCF de 110 milliards USD en 2025 renforce la solidité bilancielle et permet des rachats d'actions agressifs (10 milliards USD/trimestre).</a:t>
             </a:r>
           </a:p>
         </p:txBody>

--- a/preview/AAPL/AAPL_pitchbook.pptx
+++ b/preview/AAPL/AAPL_pitchbook.pptx
@@ -3348,7 +3348,7 @@
             <a:avLst/>
           </a:prstGeom>
           <a:solidFill>
-            <a:srgbClr val="B06000"/>
+            <a:srgbClr val="1A7A4A"/>
           </a:solidFill>
           <a:ln>
             <a:noFill/>
@@ -3406,7 +3406,7 @@
                 </a:solidFill>
                 <a:latin typeface="Calibri"/>
               </a:rPr>
-              <a:t>● HOLD  ·  Prix cible base : 275 $  ·  Upside : +6,2 %</a:t>
+              <a:t>● BUY  ·  Prix cible base : 285 $  ·  Upside : +10,1 %</a:t>
             </a:r>
           </a:p>
         </p:txBody>
@@ -6095,7 +6095,7 @@
                 </a:solidFill>
                 <a:latin typeface="Calibri"/>
               </a:rPr>
-              <a:t>Les marges brutes sont passées de 43.3% en 2022 à 46.9% en 2025 (+360 bps), reflétant un mix services en hausse et une optimisation des coûts de production. Les marges EBITDA/nettes ont suivi une tendance similaire, confirmant un levier opérationnel élevé et un pricing power intact. Cette durabilité justifie une prime de valorisation durable.</a:t>
+              <a:t>Les marges brutes sont passées de 43.3% (2022) à 46.9% (2025), reflétant un levier opérationnel exceptionnel et un mix produit premium. La marge nette a fluctué autour de 25% grâce à une gestion rigoureuse des dépenses R&amp;D et marketing. Ces niveaux élevés sont durables grâce au pricing power et à la récurrence des revenus services.</a:t>
             </a:r>
           </a:p>
         </p:txBody>
@@ -7260,7 +7260,7 @@
                           </a:solidFill>
                           <a:latin typeface="Calibri"/>
                         </a:rPr>
-                        <a:t>275 $</a:t>
+                        <a:t>285 $</a:t>
                       </a:r>
                     </a:p>
                   </a:txBody>
@@ -7436,7 +7436,7 @@
                           </a:solidFill>
                           <a:latin typeface="Calibri"/>
                         </a:rPr>
-                        <a:t>+6,2 %</a:t>
+                        <a:t>+10,1 %</a:t>
                       </a:r>
                     </a:p>
                   </a:txBody>
@@ -7602,7 +7602,7 @@
                           </a:solidFill>
                           <a:latin typeface="Calibri"/>
                         </a:rPr>
-                        <a:t>275 $</a:t>
+                        <a:t>285 $</a:t>
                       </a:r>
                     </a:p>
                   </a:txBody>
@@ -7625,7 +7625,7 @@
                           </a:solidFill>
                           <a:latin typeface="Calibri"/>
                         </a:rPr>
-                        <a:t>310 $</a:t>
+                        <a:t>320 $</a:t>
                       </a:r>
                     </a:p>
                   </a:txBody>
@@ -7673,7 +7673,7 @@
                           </a:solidFill>
                           <a:latin typeface="Calibri"/>
                         </a:rPr>
-                        <a:t>+6,2 %</a:t>
+                        <a:t>+10,1 %</a:t>
                       </a:r>
                     </a:p>
                   </a:txBody>
@@ -7696,7 +7696,7 @@
                           </a:solidFill>
                           <a:latin typeface="Calibri"/>
                         </a:rPr>
-                        <a:t>+19,8 %</a:t>
+                        <a:t>+23,6 %</a:t>
                       </a:r>
                     </a:p>
                   </a:txBody>
@@ -8160,7 +8160,7 @@
                           </a:solidFill>
                           <a:latin typeface="Calibri"/>
                         </a:rPr>
-                        <a:t>319</a:t>
+                        <a:t>330</a:t>
                       </a:r>
                     </a:p>
                   </a:txBody>
@@ -8203,7 +8203,7 @@
                           </a:solidFill>
                           <a:latin typeface="Calibri"/>
                         </a:rPr>
-                        <a:t>346</a:t>
+                        <a:t>359</a:t>
                       </a:r>
                     </a:p>
                   </a:txBody>
@@ -8246,7 +8246,7 @@
                           </a:solidFill>
                           <a:latin typeface="Calibri"/>
                         </a:rPr>
-                        <a:t>379</a:t>
+                        <a:t>393</a:t>
                       </a:r>
                     </a:p>
                   </a:txBody>
@@ -8289,7 +8289,7 @@
                           </a:solidFill>
                           <a:latin typeface="Calibri"/>
                         </a:rPr>
-                        <a:t>418</a:t>
+                        <a:t>433</a:t>
                       </a:r>
                     </a:p>
                   </a:txBody>
@@ -8332,7 +8332,7 @@
                           </a:solidFill>
                           <a:latin typeface="Calibri"/>
                         </a:rPr>
-                        <a:t>467</a:t>
+                        <a:t>484</a:t>
                       </a:r>
                     </a:p>
                   </a:txBody>
@@ -8420,7 +8420,7 @@
                           </a:solidFill>
                           <a:latin typeface="Calibri"/>
                         </a:rPr>
-                        <a:t>275</a:t>
+                        <a:t>285</a:t>
                       </a:r>
                     </a:p>
                   </a:txBody>
@@ -8463,7 +8463,7 @@
                           </a:solidFill>
                           <a:latin typeface="Calibri"/>
                         </a:rPr>
-                        <a:t>295</a:t>
+                        <a:t>306</a:t>
                       </a:r>
                     </a:p>
                   </a:txBody>
@@ -8506,7 +8506,7 @@
                           </a:solidFill>
                           <a:latin typeface="Calibri"/>
                         </a:rPr>
-                        <a:t>319</a:t>
+                        <a:t>330</a:t>
                       </a:r>
                     </a:p>
                   </a:txBody>
@@ -8549,7 +8549,7 @@
                           </a:solidFill>
                           <a:latin typeface="Calibri"/>
                         </a:rPr>
-                        <a:t>346</a:t>
+                        <a:t>359</a:t>
                       </a:r>
                     </a:p>
                   </a:txBody>
@@ -8592,7 +8592,7 @@
                           </a:solidFill>
                           <a:latin typeface="Calibri"/>
                         </a:rPr>
-                        <a:t>379</a:t>
+                        <a:t>393</a:t>
                       </a:r>
                     </a:p>
                   </a:txBody>
@@ -8680,7 +8680,7 @@
                           </a:solidFill>
                           <a:latin typeface="Calibri"/>
                         </a:rPr>
-                        <a:t>242</a:t>
+                        <a:t>251</a:t>
                       </a:r>
                     </a:p>
                   </a:txBody>
@@ -8723,7 +8723,7 @@
                           </a:solidFill>
                           <a:latin typeface="Calibri"/>
                         </a:rPr>
-                        <a:t>257</a:t>
+                        <a:t>267</a:t>
                       </a:r>
                     </a:p>
                   </a:txBody>
@@ -8766,7 +8766,7 @@
                           </a:solidFill>
                           <a:latin typeface="Calibri"/>
                         </a:rPr>
-                        <a:t>275</a:t>
+                        <a:t>285</a:t>
                       </a:r>
                     </a:p>
                   </a:txBody>
@@ -8809,7 +8809,7 @@
                           </a:solidFill>
                           <a:latin typeface="Calibri"/>
                         </a:rPr>
-                        <a:t>295</a:t>
+                        <a:t>306</a:t>
                       </a:r>
                     </a:p>
                   </a:txBody>
@@ -8852,7 +8852,7 @@
                           </a:solidFill>
                           <a:latin typeface="Calibri"/>
                         </a:rPr>
-                        <a:t>319</a:t>
+                        <a:t>330</a:t>
                       </a:r>
                     </a:p>
                   </a:txBody>
@@ -8940,7 +8940,7 @@
                           </a:solidFill>
                           <a:latin typeface="Calibri"/>
                         </a:rPr>
-                        <a:t>216</a:t>
+                        <a:t>224</a:t>
                       </a:r>
                     </a:p>
                   </a:txBody>
@@ -8983,7 +8983,7 @@
                           </a:solidFill>
                           <a:latin typeface="Calibri"/>
                         </a:rPr>
-                        <a:t>228</a:t>
+                        <a:t>236</a:t>
                       </a:r>
                     </a:p>
                   </a:txBody>
@@ -9026,7 +9026,7 @@
                           </a:solidFill>
                           <a:latin typeface="Calibri"/>
                         </a:rPr>
-                        <a:t>242</a:t>
+                        <a:t>251</a:t>
                       </a:r>
                     </a:p>
                   </a:txBody>
@@ -9069,7 +9069,7 @@
                           </a:solidFill>
                           <a:latin typeface="Calibri"/>
                         </a:rPr>
-                        <a:t>257</a:t>
+                        <a:t>267</a:t>
                       </a:r>
                     </a:p>
                   </a:txBody>
@@ -9112,7 +9112,7 @@
                           </a:solidFill>
                           <a:latin typeface="Calibri"/>
                         </a:rPr>
-                        <a:t>275</a:t>
+                        <a:t>285</a:t>
                       </a:r>
                     </a:p>
                   </a:txBody>
@@ -9200,7 +9200,7 @@
                           </a:solidFill>
                           <a:latin typeface="Calibri"/>
                         </a:rPr>
-                        <a:t>195</a:t>
+                        <a:t>202</a:t>
                       </a:r>
                     </a:p>
                   </a:txBody>
@@ -9243,7 +9243,7 @@
                           </a:solidFill>
                           <a:latin typeface="Calibri"/>
                         </a:rPr>
-                        <a:t>205</a:t>
+                        <a:t>212</a:t>
                       </a:r>
                     </a:p>
                   </a:txBody>
@@ -9286,7 +9286,7 @@
                           </a:solidFill>
                           <a:latin typeface="Calibri"/>
                         </a:rPr>
-                        <a:t>216</a:t>
+                        <a:t>224</a:t>
                       </a:r>
                     </a:p>
                   </a:txBody>
@@ -9329,7 +9329,7 @@
                           </a:solidFill>
                           <a:latin typeface="Calibri"/>
                         </a:rPr>
-                        <a:t>228</a:t>
+                        <a:t>236</a:t>
                       </a:r>
                     </a:p>
                   </a:txBody>
@@ -9372,7 +9372,7 @@
                           </a:solidFill>
                           <a:latin typeface="Calibri"/>
                         </a:rPr>
-                        <a:t>242</a:t>
+                        <a:t>251</a:t>
                       </a:r>
                     </a:p>
                   </a:txBody>
@@ -9437,7 +9437,7 @@
                 </a:solidFill>
                 <a:latin typeface="Calibri"/>
               </a:rPr>
-              <a:t>Avec un WACC de 10.3% et une TGR de 3.0%, le prix implicite DCF est de 275$ (base), soit +6.2% vs cours actuel. L'upside limité suggère une prime de croissance déjà partiellement pricee. Un catalyseur comme un rebond des ventes iPhone ou une accélération des services pourrait déclencher un re-rating.</a:t>
+              <a:t>Avec un WACC de 10.3% et une TGR de 3.0%, le prix implicite DCF est de 290 USD, soit +12% vs le cours actuel. L'upside est justifié par une sous-valorisation structurelle des services (marge &gt;70%) et une prime de croissance déjà partiellement pricee. Un catalyseur clé serait l'accélération des revenus IA en 2026.</a:t>
             </a:r>
           </a:p>
         </p:txBody>
@@ -10501,7 +10501,7 @@
                           </a:solidFill>
                           <a:latin typeface="Calibri"/>
                         </a:rPr>
-                        <a:t>3 100,0</a:t>
+                        <a:t>3 200,0</a:t>
                       </a:r>
                     </a:p>
                   </a:txBody>
@@ -10547,7 +10547,7 @@
                           </a:solidFill>
                           <a:latin typeface="Calibri"/>
                         </a:rPr>
-                        <a:t>13,2x</a:t>
+                        <a:t>11,8x</a:t>
                       </a:r>
                     </a:p>
                   </a:txBody>
@@ -10570,7 +10570,7 @@
                           </a:solidFill>
                           <a:latin typeface="Calibri"/>
                         </a:rPr>
-                        <a:t>32,1x</a:t>
+                        <a:t>38,5x</a:t>
                       </a:r>
                     </a:p>
                   </a:txBody>
@@ -10616,7 +10616,7 @@
                           </a:solidFill>
                           <a:latin typeface="Calibri"/>
                         </a:rPr>
-                        <a:t>45,0 %</a:t>
+                        <a:t>52,0 %</a:t>
                       </a:r>
                     </a:p>
                   </a:txBody>
@@ -10687,7 +10687,7 @@
                           </a:solidFill>
                           <a:latin typeface="Calibri"/>
                         </a:rPr>
-                        <a:t>2 000,0</a:t>
+                        <a:t>2 050,0</a:t>
                       </a:r>
                     </a:p>
                   </a:txBody>
@@ -10710,7 +10710,7 @@
                           </a:solidFill>
                           <a:latin typeface="Calibri"/>
                         </a:rPr>
-                        <a:t>20,8x</a:t>
+                        <a:t>20,1x</a:t>
                       </a:r>
                     </a:p>
                   </a:txBody>
@@ -10733,7 +10733,7 @@
                           </a:solidFill>
                           <a:latin typeface="Calibri"/>
                         </a:rPr>
-                        <a:t>9,5x</a:t>
+                        <a:t>8,5x</a:t>
                       </a:r>
                     </a:p>
                   </a:txBody>
@@ -10756,7 +10756,7 @@
                           </a:solidFill>
                           <a:latin typeface="Calibri"/>
                         </a:rPr>
-                        <a:t>27,8x</a:t>
+                        <a:t>26,8x</a:t>
                       </a:r>
                     </a:p>
                   </a:txBody>
@@ -10873,7 +10873,7 @@
                           </a:solidFill>
                           <a:latin typeface="Calibri"/>
                         </a:rPr>
-                        <a:t>450,0</a:t>
+                        <a:t>420,0</a:t>
                       </a:r>
                     </a:p>
                   </a:txBody>
@@ -10919,7 +10919,7 @@
                           </a:solidFill>
                           <a:latin typeface="Calibri"/>
                         </a:rPr>
-                        <a:t>1,1x</a:t>
+                        <a:t>1,2x</a:t>
                       </a:r>
                     </a:p>
                   </a:txBody>
@@ -10942,7 +10942,7 @@
                           </a:solidFill>
                           <a:latin typeface="Calibri"/>
                         </a:rPr>
-                        <a:t>15,6x</a:t>
+                        <a:t>12,5x</a:t>
                       </a:r>
                     </a:p>
                   </a:txBody>
@@ -10965,7 +10965,7 @@
                           </a:solidFill>
                           <a:latin typeface="Calibri"/>
                         </a:rPr>
-                        <a:t>52,0 %</a:t>
+                        <a:t>45,0 %</a:t>
                       </a:r>
                     </a:p>
                   </a:txBody>
@@ -11059,7 +11059,7 @@
                           </a:solidFill>
                           <a:latin typeface="Calibri"/>
                         </a:rPr>
-                        <a:t>1 400,0</a:t>
+                        <a:t>1 500,0</a:t>
                       </a:r>
                     </a:p>
                   </a:txBody>
@@ -11082,7 +11082,7 @@
                           </a:solidFill>
                           <a:latin typeface="Calibri"/>
                         </a:rPr>
-                        <a:t>18,5x</a:t>
+                        <a:t>15,8x</a:t>
                       </a:r>
                     </a:p>
                   </a:txBody>
@@ -11105,7 +11105,7 @@
                           </a:solidFill>
                           <a:latin typeface="Calibri"/>
                         </a:rPr>
-                        <a:t>10,1x</a:t>
+                        <a:t>8,9x</a:t>
                       </a:r>
                     </a:p>
                   </a:txBody>
@@ -11128,7 +11128,7 @@
                           </a:solidFill>
                           <a:latin typeface="Calibri"/>
                         </a:rPr>
-                        <a:t>30,2x</a:t>
+                        <a:t>32,1x</a:t>
                       </a:r>
                     </a:p>
                   </a:txBody>
@@ -11151,7 +11151,7 @@
                           </a:solidFill>
                           <a:latin typeface="Calibri"/>
                         </a:rPr>
-                        <a:t>88,0 %</a:t>
+                        <a:t>85,0 %</a:t>
                       </a:r>
                     </a:p>
                   </a:txBody>
@@ -11199,7 +11199,7 @@
                           </a:solidFill>
                           <a:latin typeface="Calibri"/>
                         </a:rPr>
-                        <a:t>Oracle</a:t>
+                        <a:t>TSMC</a:t>
                       </a:r>
                     </a:p>
                   </a:txBody>
@@ -11222,7 +11222,7 @@
                           </a:solidFill>
                           <a:latin typeface="Calibri"/>
                         </a:rPr>
-                        <a:t>ORCL</a:t>
+                        <a:t>TSM</a:t>
                       </a:r>
                     </a:p>
                   </a:txBody>
@@ -11245,7 +11245,7 @@
                           </a:solidFill>
                           <a:latin typeface="Calibri"/>
                         </a:rPr>
-                        <a:t>320,0</a:t>
+                        <a:t>550,0</a:t>
                       </a:r>
                     </a:p>
                   </a:txBody>
@@ -11268,7 +11268,7 @@
                           </a:solidFill>
                           <a:latin typeface="Calibri"/>
                         </a:rPr>
-                        <a:t>16,8x</a:t>
+                        <a:t>18,2x</a:t>
                       </a:r>
                     </a:p>
                   </a:txBody>
@@ -11291,7 +11291,7 @@
                           </a:solidFill>
                           <a:latin typeface="Calibri"/>
                         </a:rPr>
-                        <a:t>7,5x</a:t>
+                        <a:t>10,5x</a:t>
                       </a:r>
                     </a:p>
                   </a:txBody>
@@ -11314,7 +11314,7 @@
                           </a:solidFill>
                           <a:latin typeface="Calibri"/>
                         </a:rPr>
-                        <a:t>25,4x</a:t>
+                        <a:t>25,3x</a:t>
                       </a:r>
                     </a:p>
                   </a:txBody>
@@ -11337,7 +11337,7 @@
                           </a:solidFill>
                           <a:latin typeface="Calibri"/>
                         </a:rPr>
-                        <a:t>82,0 %</a:t>
+                        <a:t>52,0 %</a:t>
                       </a:r>
                     </a:p>
                   </a:txBody>
@@ -11454,7 +11454,7 @@
                           </a:solidFill>
                           <a:latin typeface="Calibri"/>
                         </a:rPr>
-                        <a:t>18,5x</a:t>
+                        <a:t>18,2x</a:t>
                       </a:r>
                     </a:p>
                   </a:txBody>
@@ -11477,7 +11477,7 @@
                           </a:solidFill>
                           <a:latin typeface="Calibri"/>
                         </a:rPr>
-                        <a:t>9,5x</a:t>
+                        <a:t>8,9x</a:t>
                       </a:r>
                     </a:p>
                   </a:txBody>
@@ -11500,7 +11500,7 @@
                           </a:solidFill>
                           <a:latin typeface="Calibri"/>
                         </a:rPr>
-                        <a:t>27,8x</a:t>
+                        <a:t>26,8x</a:t>
                       </a:r>
                     </a:p>
                   </a:txBody>
@@ -11523,7 +11523,7 @@
                           </a:solidFill>
                           <a:latin typeface="Calibri"/>
                         </a:rPr>
-                        <a:t>68,0 %</a:t>
+                        <a:t>56,0 %</a:t>
                       </a:r>
                     </a:p>
                   </a:txBody>
@@ -11546,7 +11546,7 @@
                           </a:solidFill>
                           <a:latin typeface="Calibri"/>
                         </a:rPr>
-                        <a:t>45,0 %</a:t>
+                        <a:t>48,0 %</a:t>
                       </a:r>
                     </a:p>
                   </a:txBody>
@@ -11591,7 +11591,7 @@
                 </a:solidFill>
                 <a:latin typeface="Calibri"/>
               </a:rPr>
-              <a:t>Apple affiche un P/E de 33.9x vs 28.5x pour la médiane peers (Microsoft 32.1x, Alphabet 27.8x). La prime de 15% est justifiée par une croissance supérieure (+12% vs +8% peers) et une rentabilité exceptionnelle (ROIC 84.4%). Une convergence vers la médiane impliquerait un downside de 15%.</a:t>
+              <a:t>Apple affiche une prime de 18% sur EV/EBITDA (26.7x vs médiane peers 22.2x) et une décote de 15% sur P/E (33.9x vs 28.5x). Cette prime est justifiée par une croissance organique supérieure (+10% vs +6% pour les pairs) et une rentabilité exceptionnelle (ROE 151.9%). Une convergence vers la médiane peers impliquerait un upside de +15% sur EV/EBITDA.</a:t>
             </a:r>
           </a:p>
         </p:txBody>
@@ -12249,7 +12249,7 @@
                 </a:solidFill>
                 <a:latin typeface="Calibri"/>
               </a:rPr>
-              <a:t>Avec un WACC de 10.3% et une TGR de 3.0%, le prix implicite DCF est de 275$ (base), soit +6.2% vs cours actuel. L'upside limité suggère une prime de croissance déjà partiellement pricee. Un catalyseur comme un rebond des ventes iPhone ou une accélération des services pourrait déclencher un re-rating.</a:t>
+              <a:t>Avec un WACC de 10.3% et une TGR de 3.0%, le prix implicite DCF est de 290 USD, soit +12% vs le cours actuel. L'upside est justifié par une sous-valorisation structurelle des services (marge &gt;70%) et une prime de croissance déjà partiellement pricee. Un catalyseur clé serait l'accélération des revenus IA en 2026.</a:t>
             </a:r>
           </a:p>
         </p:txBody>
@@ -13222,7 +13222,7 @@
                 </a:solidFill>
                 <a:latin typeface="Calibri"/>
               </a:rPr>
-              <a:t>Surévaluation P/E</a:t>
+              <a:t>Marges en érosion</a:t>
             </a:r>
           </a:p>
         </p:txBody>
@@ -13257,7 +13257,7 @@
                 </a:solidFill>
                 <a:latin typeface="Calibri"/>
               </a:rPr>
-              <a:t>Le ratio P/E de 33,93x dépasse de 50% la moyenne sectorielle (22,5x), reflétant une surévaluation de 120 milliards $ basée sur les bénéfices 2025. Les marges nettes de 26,9% sont gonflées par des services marginaux (App Store, abonnements) qui représentent seulement 22% du CA mais 58% de la marge nette. L'Altman Z-score de 1,69 signale un risque de faillite accru, proche du seuil critique de 1,81.</a:t>
+              <a:t>Le P/E à 33,93x surpasse de 30% la moyenne sectorielle des géants tech (26x), sans justification de croissance exceptionnelle : les marges brutes de 46,9% stagnent depuis 2022, tandis que les coûts R&amp;D explosent (+12% en 2 ans) sans retour sur investissement visible. Les marges nettes de 26,9% reposent sur une marge opérationnelle en baisse de 1,8 point depuis 2023, masquée par des rachats</a:t>
             </a:r>
           </a:p>
         </p:txBody>
@@ -13413,7 +13413,7 @@
                 </a:solidFill>
                 <a:latin typeface="Calibri"/>
               </a:rPr>
-              <a:t>La dépendance à la Chine pour 20% de la production expose Apple à des coûts de délocalisation estimés à 8 milliards $/an en cas de tensions géopolitiques. Les marges brutes de 46,9% pourraient chuter de 3 points si les droits de douane sur les composants électroniques passent de 15% à 25%, comme en 2019. Les stocks de produits finis ont augmenté de 18% en 2024, signe d'un ralentissement de la</a:t>
+              <a:t>La dépendance à l'iPhone (52% du CA) expose Apple à un retournement du marché premium chinois, où les parts de marché ont chuté de 18% en 2024 selon Counterpoint Research, avec une croissance des ventes en baisse de 3% au T3 2024. Les services (22% du CA) voient leur croissance ralentir à 10% en 2024, contre 15% en 2023, sous l'effet d'une saturation du marché des abonnements.</a:t>
             </a:r>
           </a:p>
         </p:txBody>
@@ -13534,7 +13534,7 @@
                 </a:solidFill>
                 <a:latin typeface="Calibri"/>
               </a:rPr>
-              <a:t>Marges artificielles</a:t>
+              <a:t>Valorisation excessive</a:t>
             </a:r>
           </a:p>
         </p:txBody>
@@ -13569,7 +13569,7 @@
                 </a:solidFill>
                 <a:latin typeface="Calibri"/>
               </a:rPr>
-              <a:t>Le ROE de 151,9% est artificiellement boosté par des rachats d'actions massifs (40 milliards $/an), masquant une rentabilité opérationnelle en baisse de 4% depuis 2022. L'EV/EBITDA de 26,69x est 40% supérieur à celui de Microsoft (19,1x), malgré une croissance des revenus inférieure de 2 points. La croissance des revenus de 6,4% en 2025 est inférieure à celle des concurrents (Samsung: 8,1%,</a:t>
+              <a:t>Le ratio EV/EBITDA à 26,69x dépasse de 40% celui de Microsoft (19x), alors que la dette nette/EBITDA reste élevée à 0,43x malgré les rachats d'actions. Les flux de trésorerie disponibles ont baissé de 8% en 2024, et les investissements en capex ont augmenté de 25% sans amélioration de productivité, signalant une inefficacité croissante des dépenses.</a:t>
             </a:r>
           </a:p>
         </p:txBody>
@@ -13783,7 +13783,7 @@
                           </a:solidFill>
                           <a:latin typeface="Calibri"/>
                         </a:rPr>
-                        <a:t>Récession mondiale en 2026 avec -3% de PIB en Europe/USA</a:t>
+                        <a:t>Récession mondiale prolongée réduisant la demande de terminaux premium</a:t>
                       </a:r>
                     </a:p>
                   </a:txBody>
@@ -13854,7 +13854,7 @@
                           </a:solidFill>
                           <a:latin typeface="Calibri"/>
                         </a:rPr>
-                        <a:t>Régulation stricte sur l'IA générative limitant les fonctionnalités premium</a:t>
+                        <a:t>Concurrence accrue en IA générative réduisant le différenciation produit</a:t>
                       </a:r>
                     </a:p>
                   </a:txBody>
@@ -13925,7 +13925,7 @@
                           </a:solidFill>
                           <a:latin typeface="Calibri"/>
                         </a:rPr>
-                        <a:t>Échec commercial de l'iPhone 16 avec adoption &lt;15% des utilisateurs</a:t>
+                        <a:t>Échec du déploiement de l'IA sur l'iPhone 16 affectant les ventes</a:t>
                       </a:r>
                     </a:p>
                   </a:txBody>
@@ -15536,7 +15536,7 @@
                 </a:solidFill>
                 <a:latin typeface="Calibri"/>
               </a:rPr>
-              <a:t>Analyse sémantique  ·  20 articles  ·  7 derniers jours  ·  Classification LLM</a:t>
+              <a:t>Analyse sémantique  ·  30 articles  ·  7 derniers jours  ·  Classification LLM</a:t>
             </a:r>
           </a:p>
         </p:txBody>
@@ -15657,7 +15657,7 @@
                 </a:solidFill>
                 <a:latin typeface="Calibri"/>
               </a:rPr>
-              <a:t>Neutre</a:t>
+              <a:t>Négatif</a:t>
             </a:r>
           </a:p>
         </p:txBody>
@@ -15727,7 +15727,7 @@
                 </a:solidFill>
                 <a:latin typeface="Calibri"/>
               </a:rPr>
-              <a:t>Score agrégé : -0,055</a:t>
+              <a:t>Score agrégé : -0,134</a:t>
             </a:r>
           </a:p>
         </p:txBody>
@@ -15848,7 +15848,7 @@
                 </a:solidFill>
                 <a:latin typeface="Calibri"/>
               </a:rPr>
-              <a:t>20</a:t>
+              <a:t>30</a:t>
             </a:r>
           </a:p>
         </p:txBody>
@@ -16039,7 +16039,7 @@
                 </a:solidFill>
                 <a:latin typeface="Calibri"/>
               </a:rPr>
-              <a:t>39,0 %</a:t>
+              <a:t>43,5 %</a:t>
             </a:r>
           </a:p>
         </p:txBody>
@@ -16230,7 +16230,7 @@
                 </a:solidFill>
                 <a:latin typeface="Calibri"/>
               </a:rPr>
-              <a:t>HOLD</a:t>
+              <a:t>BUY</a:t>
             </a:r>
           </a:p>
         </p:txBody>
@@ -16495,7 +16495,7 @@
                           </a:solidFill>
                           <a:latin typeface="Calibri"/>
                         </a:rPr>
-                        <a:t>5</a:t>
+                        <a:t>9</a:t>
                       </a:r>
                     </a:p>
                   </a:txBody>
@@ -16518,7 +16518,7 @@
                           </a:solidFill>
                           <a:latin typeface="Calibri"/>
                         </a:rPr>
-                        <a:t>+0,278</a:t>
+                        <a:t>+0,301</a:t>
                       </a:r>
                     </a:p>
                   </a:txBody>
@@ -16541,7 +16541,7 @@
                           </a:solidFill>
                           <a:latin typeface="Calibri"/>
                         </a:rPr>
-                        <a:t>Lancement iPhone 16 en Q3 2026 avec adoption de 25% des utilisateurs actuels, boostant CA de 8% | Croissance services à 12% CAGR 2025-2027 grâce à l'expansion internationale et aux abonnements | Programme de rachat d'actions de 110 Mds$ en…</a:t>
+                        <a:t>Lancement iPhone 16 en septembre 2026 avec IA intégrée pourrait générer +12% de revenus organiques | Horizon: 12-18 mois | Impact: +15 Md$ de CA annuel</a:t>
                       </a:r>
                     </a:p>
                   </a:txBody>
@@ -16589,7 +16589,7 @@
                           </a:solidFill>
                           <a:latin typeface="Calibri"/>
                         </a:rPr>
-                        <a:t>8</a:t>
+                        <a:t>6</a:t>
                       </a:r>
                     </a:p>
                   </a:txBody>
@@ -16612,7 +16612,7 @@
                           </a:solidFill>
                           <a:latin typeface="Calibri"/>
                         </a:rPr>
-                        <a:t>+0,390</a:t>
+                        <a:t>+0,264</a:t>
                       </a:r>
                     </a:p>
                   </a:txBody>
@@ -16683,7 +16683,7 @@
                           </a:solidFill>
                           <a:latin typeface="Calibri"/>
                         </a:rPr>
-                        <a:t>7</a:t>
+                        <a:t>15</a:t>
                       </a:r>
                     </a:p>
                   </a:txBody>
@@ -16706,7 +16706,7 @@
                           </a:solidFill>
                           <a:latin typeface="Calibri"/>
                         </a:rPr>
-                        <a:t>+0,333</a:t>
+                        <a:t>+0,435</a:t>
                       </a:r>
                     </a:p>
                   </a:txBody>
@@ -16729,7 +16729,7 @@
                           </a:solidFill>
                           <a:latin typeface="Calibri"/>
                         </a:rPr>
-                        <a:t>Régulation européenne sur l'App Store en 2026 réduisant les revenus services de 15% | Concurrence accrue en IA avec Meta et Google captant 30% du marché logiciel d'ici 2027 | Dépendance à l'iPhone (50% du CA) avec un risque de saturation…</a:t>
+                        <a:t>Régulation européenne sur les stores d'applications pourrait réduire les revenus services de 10% | Horizon: 6-12 mois | Ampleur: -15 Md$ de CA</a:t>
                       </a:r>
                     </a:p>
                   </a:txBody>
@@ -16774,7 +16774,7 @@
                 </a:solidFill>
                 <a:latin typeface="Calibri"/>
               </a:rPr>
-              <a:t>La presse financière souligne les défis techniques et stratégiques d'Apple, notamment avec son iPhone pliable et ses tensions autour de l'App Store. Cependant, ses résultats records et son attractivité pour les investisseurs comme Warren Buffett restent des points forts majeurs.</a:t>
+              <a:t>La presse financière cette semaine souligne des défis majeurs pour Apple avec les retards sur son iPhone pliable et des questions sur sa stratégie satellite. Cependant, des soutiens d'investisseurs emblématiques et des performances boursières supérieures au marché tempèrent le sentiment global.</a:t>
             </a:r>
           </a:p>
         </p:txBody>
@@ -19712,7 +19712,7 @@
                 </a:solidFill>
                 <a:latin typeface="Calibri"/>
               </a:rPr>
-              <a:t>Apple cote à 26.7x EV/EBITDA vs 22.5x pour la médiane peers (Samsung, Microsoft, Alphabet). La prime de 19% est justifiée par la qualité des actifs et la résilience des marges.</a:t>
+              <a:t>Apple se négocie à une prime de 20% vs la médiane des pairs sur EV/EBITDA (26.7x vs 22.2x), justifiée par sa qualité d'actifs et sa croissance supérieure. La décote sur P/E (33.9x vs 28.5x) reflète des attentes élevées mais gérables.</a:t>
             </a:r>
           </a:p>
         </p:txBody>
@@ -19906,7 +19906,7 @@
             <a:avLst/>
           </a:prstGeom>
           <a:solidFill>
-            <a:srgbClr val="FDF6E8"/>
+            <a:srgbClr val="EAF4EF"/>
           </a:solidFill>
           <a:ln>
             <a:noFill/>
@@ -19949,7 +19949,7 @@
             <a:avLst/>
           </a:prstGeom>
           <a:solidFill>
-            <a:srgbClr val="B06000"/>
+            <a:srgbClr val="1A7A4A"/>
           </a:solidFill>
           <a:ln>
             <a:noFill/>
@@ -20003,11 +20003,11 @@
             <a:r>
               <a:rPr sz="1100" b="1" i="0">
                 <a:solidFill>
-                  <a:srgbClr val="B06000"/>
+                  <a:srgbClr val="1A7A4A"/>
                 </a:solidFill>
                 <a:latin typeface="Calibri"/>
               </a:rPr>
-              <a:t>● HOLD</a:t>
+              <a:t>● BUY</a:t>
             </a:r>
           </a:p>
         </p:txBody>
@@ -20042,7 +20042,7 @@
                 </a:solidFill>
                 <a:latin typeface="Calibri"/>
               </a:rPr>
-              <a:t>Prix cible base : 275 $  ·  Upside : +6,2 %  ·  Bear : 240 $ (-7,3 %)  ·  Bull : 310 $ (+19,8 %)</a:t>
+              <a:t>Prix cible base : 285 $  ·  Upside : +10,1 %  ·  Bear : 240 $ (-7,3 %)  ·  Bull : 320 $ (+23,6 %)</a:t>
             </a:r>
           </a:p>
         </p:txBody>
@@ -20233,7 +20233,7 @@
                 </a:solidFill>
                 <a:latin typeface="Calibri"/>
               </a:rPr>
-              <a:t>Apple devrait bénéficier d'un rebond des ventes iPhone de +8% en 2026 grâce à l'adoption de l'iPhone 16</a:t>
+              <a:t>Apple devrait bénéficier d'un rebond des ventes d'iPhone de +8% en 2026 grâce à l'adoption massive de l'IA générative sur ses terminaux</a:t>
             </a:r>
           </a:p>
         </p:txBody>
@@ -20311,7 +20311,7 @@
                 </a:solidFill>
                 <a:latin typeface="Calibri"/>
               </a:rPr>
-              <a:t>Marges premium</a:t>
+              <a:t>Pricing power</a:t>
             </a:r>
           </a:p>
         </p:txBody>
@@ -20346,7 +20346,7 @@
                 </a:solidFill>
                 <a:latin typeface="Calibri"/>
               </a:rPr>
-              <a:t>La marge services devrait atteindre 72% en 2027 avec une croissance annuelle de 12%</a:t>
+              <a:t>La marge brute devrait atteindre 48% en 2027 via une optimisation des coûts de production et une hausse des prix des services</a:t>
             </a:r>
           </a:p>
         </p:txBody>
@@ -20459,7 +20459,7 @@
                 </a:solidFill>
                 <a:latin typeface="Calibri"/>
               </a:rPr>
-              <a:t>Le rachat d'actions de 110 Mds$ en 2025-2026 soutiendra la valorisation à 310$ en scénario bull.</a:t>
+              <a:t>Le lancement de l'iPhone 16 en septembre 2026 pourrait générer +12% de revenus organiques sur le segment produits.</a:t>
             </a:r>
           </a:p>
         </p:txBody>
@@ -20615,7 +20615,7 @@
                 </a:solidFill>
                 <a:latin typeface="Calibri"/>
               </a:rPr>
-              <a:t>Régulation App Store</a:t>
+              <a:t>Dépendance iPhone</a:t>
             </a:r>
           </a:p>
         </p:txBody>
@@ -20650,7 +20650,7 @@
                 </a:solidFill>
                 <a:latin typeface="Calibri"/>
               </a:rPr>
-              <a:t>Régulation européenne sur l'App Store en 2026 réduisant les revenus services de 15% | Concurrence accrue en IA avec Meta et Google captant 30% du marché logiciel d'ici 2027 | Dépendance à l'iPhone (50% du CA) avec un risque de saturation du marché premium en 2026</a:t>
+              <a:t>Régulation européenne sur les stores d'applications pourrait réduire les revenus services de 10% | Horizon: 6-12 mois | Ampleur: -15 Md$ de CA</a:t>
             </a:r>
           </a:p>
         </p:txBody>
@@ -20707,6 +20707,119 @@
         <p:spPr>
           <a:xfrm>
             <a:off x="4845600" y="2196000"/>
+            <a:ext cx="3794399" cy="183600"/>
+          </a:xfrm>
+          <a:prstGeom prst="rect">
+            <a:avLst/>
+          </a:prstGeom>
+          <a:noFill/>
+        </p:spPr>
+        <p:txBody>
+          <a:bodyPr wrap="square">
+            <a:spAutoFit/>
+          </a:bodyPr>
+          <a:lstStyle/>
+          <a:p>
+            <a:pPr algn="l"/>
+            <a:r>
+              <a:rPr sz="850" b="1" i="0">
+                <a:solidFill>
+                  <a:srgbClr val="1B3A6B"/>
+                </a:solidFill>
+                <a:latin typeface="Calibri"/>
+              </a:rPr>
+              <a:t>Régulation</a:t>
+            </a:r>
+          </a:p>
+        </p:txBody>
+      </p:sp>
+      <p:sp>
+        <p:nvSpPr>
+          <p:cNvPr id="28" name="TextBox 27"/>
+          <p:cNvSpPr txBox="1"/>
+          <p:nvPr/>
+        </p:nvSpPr>
+        <p:spPr>
+          <a:xfrm>
+            <a:off x="4845600" y="2365200"/>
+            <a:ext cx="3794399" cy="378000"/>
+          </a:xfrm>
+          <a:prstGeom prst="rect">
+            <a:avLst/>
+          </a:prstGeom>
+          <a:noFill/>
+        </p:spPr>
+        <p:txBody>
+          <a:bodyPr wrap="square">
+            <a:spAutoFit/>
+          </a:bodyPr>
+          <a:lstStyle/>
+          <a:p>
+            <a:pPr algn="l"/>
+            <a:r>
+              <a:rPr sz="750" b="0" i="0">
+                <a:solidFill>
+                  <a:srgbClr val="333333"/>
+                </a:solidFill>
+                <a:latin typeface="Calibri"/>
+              </a:rPr>
+              <a:t>Concurrence accrue en IA (Google, Microsoft) pourrait éroder le pricing power sur les terminaux | Horizon: 12-24 mois | Ampleur: -8% de marge brute</a:t>
+            </a:r>
+          </a:p>
+        </p:txBody>
+      </p:sp>
+      <p:sp>
+        <p:nvSpPr>
+          <p:cNvPr id="29" name="Rectangle 28"/>
+          <p:cNvSpPr/>
+          <p:nvPr/>
+        </p:nvSpPr>
+        <p:spPr>
+          <a:xfrm>
+            <a:off x="4708800" y="2764800"/>
+            <a:ext cx="54000" cy="129600"/>
+          </a:xfrm>
+          <a:prstGeom prst="rect">
+            <a:avLst/>
+          </a:prstGeom>
+          <a:solidFill>
+            <a:srgbClr val="A82020"/>
+          </a:solidFill>
+          <a:ln>
+            <a:noFill/>
+          </a:ln>
+        </p:spPr>
+        <p:style>
+          <a:lnRef idx="1">
+            <a:schemeClr val="accent1"/>
+          </a:lnRef>
+          <a:fillRef idx="3">
+            <a:schemeClr val="accent1"/>
+          </a:fillRef>
+          <a:effectRef idx="2">
+            <a:schemeClr val="accent1"/>
+          </a:effectRef>
+          <a:fontRef idx="minor">
+            <a:schemeClr val="lt1"/>
+          </a:fontRef>
+        </p:style>
+        <p:txBody>
+          <a:bodyPr rtlCol="0" anchor="ctr"/>
+          <a:lstStyle/>
+          <a:p>
+            <a:pPr algn="ctr"/>
+          </a:p>
+        </p:txBody>
+      </p:sp>
+      <p:sp>
+        <p:nvSpPr>
+          <p:cNvPr id="30" name="TextBox 29"/>
+          <p:cNvSpPr txBox="1"/>
+          <p:nvPr/>
+        </p:nvSpPr>
+        <p:spPr>
+          <a:xfrm>
+            <a:off x="4845600" y="2746800"/>
             <a:ext cx="3794399" cy="183600"/>
           </a:xfrm>
           <a:prstGeom prst="rect">
@@ -20735,13 +20848,13 @@
       </p:sp>
       <p:sp>
         <p:nvSpPr>
-          <p:cNvPr id="28" name="TextBox 27"/>
+          <p:cNvPr id="31" name="TextBox 30"/>
           <p:cNvSpPr txBox="1"/>
           <p:nvPr/>
         </p:nvSpPr>
         <p:spPr>
           <a:xfrm>
-            <a:off x="4845600" y="2365200"/>
+            <a:off x="4845600" y="2916000"/>
             <a:ext cx="3794399" cy="378000"/>
           </a:xfrm>
           <a:prstGeom prst="rect">
@@ -20763,120 +20876,7 @@
                 </a:solidFill>
                 <a:latin typeface="Calibri"/>
               </a:rPr>
-              <a:t>Sanctions chinoises sur les composants critiques, impactant les marges de 200 bps en 2026 | Ralentissement économique en Europe réduisant les ventes de 5% en 2026 | Coûts accrus liés à la conformité RGPD et aux litiges en cours (+2 Mds$ en 2026)</a:t>
-            </a:r>
-          </a:p>
-        </p:txBody>
-      </p:sp>
-      <p:sp>
-        <p:nvSpPr>
-          <p:cNvPr id="29" name="Rectangle 28"/>
-          <p:cNvSpPr/>
-          <p:nvPr/>
-        </p:nvSpPr>
-        <p:spPr>
-          <a:xfrm>
-            <a:off x="4708800" y="2764800"/>
-            <a:ext cx="54000" cy="129600"/>
-          </a:xfrm>
-          <a:prstGeom prst="rect">
-            <a:avLst/>
-          </a:prstGeom>
-          <a:solidFill>
-            <a:srgbClr val="A82020"/>
-          </a:solidFill>
-          <a:ln>
-            <a:noFill/>
-          </a:ln>
-        </p:spPr>
-        <p:style>
-          <a:lnRef idx="1">
-            <a:schemeClr val="accent1"/>
-          </a:lnRef>
-          <a:fillRef idx="3">
-            <a:schemeClr val="accent1"/>
-          </a:fillRef>
-          <a:effectRef idx="2">
-            <a:schemeClr val="accent1"/>
-          </a:effectRef>
-          <a:fontRef idx="minor">
-            <a:schemeClr val="lt1"/>
-          </a:fontRef>
-        </p:style>
-        <p:txBody>
-          <a:bodyPr rtlCol="0" anchor="ctr"/>
-          <a:lstStyle/>
-          <a:p>
-            <a:pPr algn="ctr"/>
-          </a:p>
-        </p:txBody>
-      </p:sp>
-      <p:sp>
-        <p:nvSpPr>
-          <p:cNvPr id="30" name="TextBox 29"/>
-          <p:cNvSpPr txBox="1"/>
-          <p:nvPr/>
-        </p:nvSpPr>
-        <p:spPr>
-          <a:xfrm>
-            <a:off x="4845600" y="2746800"/>
-            <a:ext cx="3794399" cy="183600"/>
-          </a:xfrm>
-          <a:prstGeom prst="rect">
-            <a:avLst/>
-          </a:prstGeom>
-          <a:noFill/>
-        </p:spPr>
-        <p:txBody>
-          <a:bodyPr wrap="square">
-            <a:spAutoFit/>
-          </a:bodyPr>
-          <a:lstStyle/>
-          <a:p>
-            <a:pPr algn="l"/>
-            <a:r>
-              <a:rPr sz="850" b="1" i="0">
-                <a:solidFill>
-                  <a:srgbClr val="1B3A6B"/>
-                </a:solidFill>
-                <a:latin typeface="Calibri"/>
-              </a:rPr>
-              <a:t>Dépendance iPhone</a:t>
-            </a:r>
-          </a:p>
-        </p:txBody>
-      </p:sp>
-      <p:sp>
-        <p:nvSpPr>
-          <p:cNvPr id="31" name="TextBox 30"/>
-          <p:cNvSpPr txBox="1"/>
-          <p:nvPr/>
-        </p:nvSpPr>
-        <p:spPr>
-          <a:xfrm>
-            <a:off x="4845600" y="2916000"/>
-            <a:ext cx="3794399" cy="378000"/>
-          </a:xfrm>
-          <a:prstGeom prst="rect">
-            <a:avLst/>
-          </a:prstGeom>
-          <a:noFill/>
-        </p:spPr>
-        <p:txBody>
-          <a:bodyPr wrap="square">
-            <a:spAutoFit/>
-          </a:bodyPr>
-          <a:lstStyle/>
-          <a:p>
-            <a:pPr algn="l"/>
-            <a:r>
-              <a:rPr sz="750" b="0" i="0">
-                <a:solidFill>
-                  <a:srgbClr val="333333"/>
-                </a:solidFill>
-                <a:latin typeface="Calibri"/>
-              </a:rPr>
-              <a:t>Le ROE de 151,9% est artificiellement boosté par des rachats d'actions massifs (40 milliards $/an), masquant une rentabilité opérationnelle en baisse de 4% depuis 2022. L'EV/EBITDA de 26,69x est 40% supérieur à celui de Microsoft (19,1x), malgré une croissance des revenus inférieure de 2 points. La croissance des revenus de 6,4% en 2025 est inférieure à celle des concurrents (Samsung: 8,1%, Huawei: 9,3%).</a:t>
+              <a:t>Dépendance à la Chine (20% du CA) expose à des risques géopolitiques | Horizon: 12 mois | Ampleur: -5% de croissance organique</a:t>
             </a:r>
           </a:p>
         </p:txBody>
@@ -21153,7 +21153,7 @@
                 </a:solidFill>
                 <a:latin typeface="Calibri"/>
               </a:rPr>
-              <a:t>vs 18,5x médiane peers</a:t>
+              <a:t>vs 18,2x médiane peers</a:t>
             </a:r>
           </a:p>
         </p:txBody>
@@ -21465,7 +21465,7 @@
                 </a:solidFill>
                 <a:latin typeface="Calibri"/>
               </a:rPr>
-              <a:t>275 $</a:t>
+              <a:t>285 $</a:t>
             </a:r>
           </a:p>
         </p:txBody>
@@ -21535,7 +21535,7 @@
                 </a:solidFill>
                 <a:latin typeface="Calibri"/>
               </a:rPr>
-              <a:t>Upside de +6,2 % vs cours</a:t>
+              <a:t>Upside de +10,1 % vs cours</a:t>
             </a:r>
           </a:p>
         </p:txBody>
@@ -21656,7 +21656,7 @@
                 </a:solidFill>
                 <a:latin typeface="Calibri"/>
               </a:rPr>
-              <a:t>-0,055</a:t>
+              <a:t>-0,134</a:t>
             </a:r>
           </a:p>
         </p:txBody>
@@ -21726,7 +21726,7 @@
                 </a:solidFill>
                 <a:latin typeface="Calibri"/>
               </a:rPr>
-              <a:t>Neutre  ·  20 articles</a:t>
+              <a:t>Négatif  ·  30 articles</a:t>
             </a:r>
           </a:p>
         </p:txBody>
@@ -22989,12 +22989,20 @@
           </a:p>
         </p:txBody>
       </p:sp>
-      <p:sp>
-        <p:nvSpPr>
-          <p:cNvPr id="34" name="Rectangle 33"/>
-          <p:cNvSpPr/>
-          <p:nvPr/>
-        </p:nvSpPr>
+      <p:pic>
+        <p:nvPicPr>
+          <p:cNvPr id="34" name="Picture 33" descr="image.png"/>
+          <p:cNvPicPr>
+            <a:picLocks noChangeAspect="1"/>
+          </p:cNvPicPr>
+          <p:nvPr/>
+        </p:nvPicPr>
+        <p:blipFill>
+          <a:blip r:embed="rId2"/>
+          <a:stretch>
+            <a:fillRect/>
+          </a:stretch>
+        </p:blipFill>
         <p:spPr>
           <a:xfrm>
             <a:off x="367200" y="2102400"/>
@@ -23003,75 +23011,11 @@
           <a:prstGeom prst="rect">
             <a:avLst/>
           </a:prstGeom>
-          <a:solidFill>
-            <a:srgbClr val="F7F8FA"/>
-          </a:solidFill>
-          <a:ln w="6350">
-            <a:solidFill>
-              <a:srgbClr val="D0D0D0"/>
-            </a:solidFill>
-          </a:ln>
-        </p:spPr>
-        <p:style>
-          <a:lnRef idx="1">
-            <a:schemeClr val="accent1"/>
-          </a:lnRef>
-          <a:fillRef idx="3">
-            <a:schemeClr val="accent1"/>
-          </a:fillRef>
-          <a:effectRef idx="2">
-            <a:schemeClr val="accent1"/>
-          </a:effectRef>
-          <a:fontRef idx="minor">
-            <a:schemeClr val="lt1"/>
-          </a:fontRef>
-        </p:style>
-        <p:txBody>
-          <a:bodyPr rtlCol="0" anchor="ctr"/>
-          <a:lstStyle/>
-          <a:p>
-            <a:pPr algn="ctr"/>
-          </a:p>
-        </p:txBody>
-      </p:sp>
+        </p:spPr>
+      </p:pic>
       <p:sp>
         <p:nvSpPr>
           <p:cNvPr id="35" name="TextBox 34"/>
-          <p:cNvSpPr txBox="1"/>
-          <p:nvPr/>
-        </p:nvSpPr>
-        <p:spPr>
-          <a:xfrm>
-            <a:off x="3247200" y="2822400"/>
-            <a:ext cx="2653200" cy="360000"/>
-          </a:xfrm>
-          <a:prstGeom prst="rect">
-            <a:avLst/>
-          </a:prstGeom>
-          <a:noFill/>
-        </p:spPr>
-        <p:txBody>
-          <a:bodyPr wrap="square">
-            <a:spAutoFit/>
-          </a:bodyPr>
-          <a:lstStyle/>
-          <a:p>
-            <a:pPr algn="l"/>
-            <a:r>
-              <a:rPr sz="1000" b="0" i="0">
-                <a:solidFill>
-                  <a:srgbClr val="555555"/>
-                </a:solidFill>
-                <a:latin typeface="Calibri"/>
-              </a:rPr>
-              <a:t>Historique de cours non disponible</a:t>
-            </a:r>
-          </a:p>
-        </p:txBody>
-      </p:sp>
-      <p:sp>
-        <p:nvSpPr>
-          <p:cNvPr id="36" name="TextBox 35"/>
           <p:cNvSpPr txBox="1"/>
           <p:nvPr/>
         </p:nvSpPr>
@@ -23099,7 +23043,7 @@
                 </a:solidFill>
                 <a:latin typeface="Calibri"/>
               </a:rPr>
-              <a:t>Apple affiche une résilience opérationnelle remarquable avec des marges nettes à 26.9% en 2025. La valorisation reste élevée (P/E 33.9x) mais justifiée par la qualité des actifs et la génération de cash. Le sentiment neutre reflète un équilibre entre catalyseurs et risques structurels.</a:t>
+              <a:t>Apple affiche une résilience opérationnelle exceptionnelle malgré un environnement macroéconomique difficile. La valorisation reste attractive avec une prime modérée vs ses pairs, soutenue par des marges historiques et une génération de cash robuste.</a:t>
             </a:r>
           </a:p>
         </p:txBody>
@@ -24142,7 +24086,7 @@
                 </a:solidFill>
                 <a:latin typeface="Calibri"/>
               </a:rPr>
-              <a:t>Régulation App Store  ·  Concurrence IA</a:t>
+              <a:t>Dépendance iPhone  ·  Régulation</a:t>
             </a:r>
           </a:p>
         </p:txBody>
@@ -25376,7 +25320,7 @@
                 </a:solidFill>
                 <a:latin typeface="Calibri"/>
               </a:rPr>
-              <a:t>Apple conçoit et commercialise des produits technologiques haut de gamme (iPhone, Mac, iPad, services) avec un écosystème intégré renforçant la fidélisation. Positionné en premium, l'entreprise capitalise sur l'innovation, la marque forte et une marge de 46.9% grâce à un mix services à forte valeur ajoutée. Son avantage concurrentiel réside dans la synergie hardware-software et un réseau de distribution mondial optimisé. L'entreprise articule son activité autour de deux segments stratégiques :</a:t>
+              <a:t>Apple conçoit, fabrique et commercialise des produits technologiques innovants comme l'iPhone, les Mac, l'iPad et les services (App Store, Apple Music). Leader sur le segment premium avec une intégration verticale unique (matériel/logiciel/services), l'entreprise cible une clientèle fidèle et à haut pouvoir d'achat. Son écosystème fermé et sa marque premium lui confèrent un avantage concurrentiel durable et un pricing power exceptionnel. L'entreprise articule son activité autour de deux segments stratégiques :</a:t>
             </a:r>
           </a:p>
         </p:txBody>
@@ -25489,7 +25433,7 @@
                 </a:solidFill>
                 <a:latin typeface="Calibri"/>
               </a:rPr>
-              <a:t>Segment phare générant 80% du CA via iPhone (50%), Mac, iPad et wearables. Modèle basé sur des cycles de renouvellement fréquents et des prix premium. Clients : consommateurs haut de gamme et professionnels. Moteurs : innovation (A17 Pro), écosystème (AirPods, Apple Watch) et services associés.</a:t>
+              <a:t>Ce segment génère 80% du chiffre d'affaires via la vente d'iPhone (55% du CA), Mac, iPad et accessoires. Les clients cibles sont des particuliers et entreprises avec une forte récurrence d'achat. Les moteurs de croissance incluent l'innovation produit (IA intégrée, nouveaux matériaux) et l'expansion géographique en Asie et Europe de l'Est.</a:t>
             </a:r>
           </a:p>
         </p:txBody>
@@ -25602,7 +25546,7 @@
                 </a:solidFill>
                 <a:latin typeface="Calibri"/>
               </a:rPr>
-              <a:t>Segment en croissance à 20% du CA avec abonnements (Apple Music, iCloud, App Store). Modèle récurrent et marginaux élevés (70%+). Clients : utilisateurs existants fidélisés. Moteurs : expansion géographique, contenu exclusif (Apple TV+) et services financiers (Apple Card).</a:t>
+              <a:t>Segment en croissance rapide (20% du CA) incluant l'App Store, Apple Music, iCloud et Apple Pay. Modèle d'abonnement récurent avec marge brute &gt;70%. Clients cibles : utilisateurs existants de l'écosystème Apple. Principaux leviers : augmentation du nombre d'abonnés (+15% YoY) et hausse des prix des services premium.</a:t>
             </a:r>
           </a:p>
         </p:txBody>
@@ -27129,7 +27073,7 @@
                 </a:solidFill>
                 <a:latin typeface="Calibri"/>
               </a:rPr>
-              <a:t>Segment phare générant 80% du CA via iPhone (50%), Mac, iPad et wearables. Modèle basé sur des cycles de renouvellement fréquents et des prix premium. Clients : consommateurs haut de gamme et professionnels. Moteurs : innovation (A17 Pro), écosystème (AirPods, Apple Watch) et services associés.</a:t>
+              <a:t>Ce segment génère 80% du chiffre d'affaires via la vente d'iPhone (55% du CA), Mac, iPad et accessoires. Les clients cibles sont des particuliers et entreprises avec une forte récurrence d'achat. Les moteurs de croissance incluent l'innovation produit (IA intégrée, nouveaux matériaux) et l'expansion géographique en Asie et Europe de l'Est.</a:t>
             </a:r>
           </a:p>
         </p:txBody>
@@ -27398,7 +27342,7 @@
                 </a:solidFill>
                 <a:latin typeface="Calibri"/>
               </a:rPr>
-              <a:t>Segment en croissance à 20% du CA avec abonnements (Apple Music, iCloud, App Store). Modèle récurrent et marginaux élevés (70%+). Clients : utilisateurs existants fidélisés. Moteurs : expansion géographique, contenu exclusif (Apple TV+) et services financiers (Apple Card).</a:t>
+              <a:t>Segment en croissance rapide (20% du CA) incluant l'App Store, Apple Music, iCloud et Apple Pay. Modèle d'abonnement récurent avec marge brute &gt;70%. Clients cibles : utilisateurs existants de l'écosystème Apple. Principaux leviers : augmentation du nombre d'abonnés (+15% YoY) et hausse des prix des services premium.</a:t>
             </a:r>
           </a:p>
         </p:txBody>
@@ -28527,7 +28471,7 @@
                           </a:solidFill>
                           <a:latin typeface="Calibri"/>
                         </a:rPr>
-                        <a:t>443,6</a:t>
+                        <a:t>445,0</a:t>
                       </a:r>
                     </a:p>
                   </a:txBody>
@@ -28550,7 +28494,7 @@
                           </a:solidFill>
                           <a:latin typeface="Calibri"/>
                         </a:rPr>
-                        <a:t>470,0</a:t>
+                        <a:t>475,0</a:t>
                       </a:r>
                     </a:p>
                   </a:txBody>
@@ -28667,7 +28611,7 @@
                           </a:solidFill>
                           <a:latin typeface="Calibri"/>
                         </a:rPr>
-                        <a:t>+6,6 %</a:t>
+                        <a:t>+6,9 %</a:t>
                       </a:r>
                     </a:p>
                   </a:txBody>
@@ -28690,7 +28634,7 @@
                           </a:solidFill>
                           <a:latin typeface="Calibri"/>
                         </a:rPr>
-                        <a:t>+6,0 %</a:t>
+                        <a:t>+6,7 %</a:t>
                       </a:r>
                     </a:p>
                   </a:txBody>
@@ -28807,7 +28751,7 @@
                           </a:solidFill>
                           <a:latin typeface="Calibri"/>
                         </a:rPr>
-                        <a:t>209,4</a:t>
+                        <a:t>211,4</a:t>
                       </a:r>
                     </a:p>
                   </a:txBody>
@@ -28830,7 +28774,7 @@
                           </a:solidFill>
                           <a:latin typeface="Calibri"/>
                         </a:rPr>
-                        <a:t>223,2</a:t>
+                        <a:t>228,0</a:t>
                       </a:r>
                     </a:p>
                   </a:txBody>
@@ -28947,7 +28891,7 @@
                           </a:solidFill>
                           <a:latin typeface="Calibri"/>
                         </a:rPr>
-                        <a:t>47,2 %</a:t>
+                        <a:t>47,5 %</a:t>
                       </a:r>
                     </a:p>
                   </a:txBody>
@@ -28970,7 +28914,7 @@
                           </a:solidFill>
                           <a:latin typeface="Calibri"/>
                         </a:rPr>
-                        <a:t>47,5 %</a:t>
+                        <a:t>48,0 %</a:t>
                       </a:r>
                     </a:p>
                   </a:txBody>
@@ -29087,7 +29031,7 @@
                           </a:solidFill>
                           <a:latin typeface="Calibri"/>
                         </a:rPr>
-                        <a:t>156,0</a:t>
+                        <a:t>158,0</a:t>
                       </a:r>
                     </a:p>
                   </a:txBody>
@@ -29110,7 +29054,7 @@
                           </a:solidFill>
                           <a:latin typeface="Calibri"/>
                         </a:rPr>
-                        <a:t>165,0</a:t>
+                        <a:t>172,0</a:t>
                       </a:r>
                     </a:p>
                   </a:txBody>
@@ -29227,7 +29171,7 @@
                           </a:solidFill>
                           <a:latin typeface="Calibri"/>
                         </a:rPr>
-                        <a:t>35,2 %</a:t>
+                        <a:t>35,5 %</a:t>
                       </a:r>
                     </a:p>
                   </a:txBody>
@@ -29250,7 +29194,7 @@
                           </a:solidFill>
                           <a:latin typeface="Calibri"/>
                         </a:rPr>
-                        <a:t>35,1 %</a:t>
+                        <a:t>36,2 %</a:t>
                       </a:r>
                     </a:p>
                   </a:txBody>
@@ -29367,7 +29311,7 @@
                           </a:solidFill>
                           <a:latin typeface="Calibri"/>
                         </a:rPr>
-                        <a:t>118,0</a:t>
+                        <a:t>115,0</a:t>
                       </a:r>
                     </a:p>
                   </a:txBody>
@@ -29390,7 +29334,7 @@
                           </a:solidFill>
                           <a:latin typeface="Calibri"/>
                         </a:rPr>
-                        <a:t>125,0</a:t>
+                        <a:t>126,0</a:t>
                       </a:r>
                     </a:p>
                   </a:txBody>
@@ -29507,7 +29451,7 @@
                           </a:solidFill>
                           <a:latin typeface="Calibri"/>
                         </a:rPr>
-                        <a:t>26,6 %</a:t>
+                        <a:t>25,8 %</a:t>
                       </a:r>
                     </a:p>
                   </a:txBody>
@@ -29530,7 +29474,7 @@
                           </a:solidFill>
                           <a:latin typeface="Calibri"/>
                         </a:rPr>
-                        <a:t>26,6 %</a:t>
+                        <a:t>26,5 %</a:t>
                       </a:r>
                     </a:p>
                   </a:txBody>
@@ -29575,7 +29519,7 @@
                 </a:solidFill>
                 <a:latin typeface="Calibri"/>
               </a:rPr>
-              <a:t>Croissance CA de 6.4% en 2025 portée par les services (+15%) et un iPhone en légère reprise. Les marges nettes progressent à 26.9% grâce à un mix services en hausse et une discipline sur les coûts. La génération de cash reste exceptionnelle avec un FCF de 120 Mds$ en 2025, renforçant la solidité bilancielle.</a:t>
+              <a:t>La croissance du CA (+6.4% en 2025) est tirée par les services (+12% YoY) et une reprise des ventes d'iPhone. Les marges s'améliorent grâce à un mix produit favorable (iPhone 15 Pro à 1 000$+) et une discipline stricte sur les coûts. Cette dynamique génère un cash flow libre de 120 Md$ en 2025, renforçant la solidité bilancielle.</a:t>
             </a:r>
           </a:p>
         </p:txBody>
@@ -31492,7 +31436,7 @@
                 </a:solidFill>
                 <a:latin typeface="Calibri"/>
               </a:rPr>
-              <a:t>Croissance CA de 6.4% en 2025 portée par les services (+15%) et un iPhone en légère reprise. Les marges nettes progressent à 26.9% grâce à un mix services en hausse et une discipline sur les coûts. La génération de cash reste exceptionnelle avec un FCF de 120 Mds$ en 2025, renforçant la solidité bilancielle.</a:t>
+              <a:t>La croissance du CA (+6.4% en 2025) est tirée par les services (+12% YoY) et une reprise des ventes d'iPhone. Les marges s'améliorent grâce à un mix produit favorable (iPhone 15 Pro à 1 000$+) et une discipline stricte sur les coûts. Cette dynamique génère un cash flow libre de 120 Md$ en 2025, renforçant la solidité bilancielle.</a:t>
             </a:r>
           </a:p>
         </p:txBody>

--- a/preview/AAPL/AAPL_pitchbook.pptx
+++ b/preview/AAPL/AAPL_pitchbook.pptx
@@ -6095,7 +6095,7 @@
                 </a:solidFill>
                 <a:latin typeface="Calibri"/>
               </a:rPr>
-              <a:t>Les marges brutes sont passées de 43.3% (2022) à 46.9% (2025), reflétant un levier opérationnel exceptionnel et un mix produit premium. La marge nette a fluctué autour de 25% grâce à une gestion rigoureuse des dépenses R&amp;D et marketing. Ces niveaux élevés sont durables grâce au pricing power et à la récurrence des revenus services.</a:t>
+              <a:t>Les marges brutes sont passées de 43.3% en 2022 à 46.9% en 2025, reflétant un mix produit favorable et un pricing power accru. La marge EBITDA a progressé de 32.8% à 34.8% grâce à une meilleure absorption des coûts fixes. Ces niveaux sont durables grâce à la structure de coûts optimisée et à la demande inélastique des produits premium.</a:t>
             </a:r>
           </a:p>
         </p:txBody>
@@ -9437,7 +9437,7 @@
                 </a:solidFill>
                 <a:latin typeface="Calibri"/>
               </a:rPr>
-              <a:t>Avec un WACC de 10.3% et une TGR de 3.0%, le prix implicite DCF est de 290 USD, soit +12% vs le cours actuel. L'upside est justifié par une sous-valorisation structurelle des services (marge &gt;70%) et une prime de croissance déjà partiellement pricee. Un catalyseur clé serait l'accélération des revenus IA en 2026.</a:t>
+              <a:t>Avec un WACC de 10.3% et un TGR de 3.0%, le prix implicite DCF est de 290 USD vs cours de 258.86 USD, soit un upside de 12%. La prime reflète une croissance organique soutenue et une trésorerie sous-évaluée. Un catalyseur clé serait l'accélération des services (&gt;25% du CA).</a:t>
             </a:r>
           </a:p>
         </p:txBody>
@@ -10501,7 +10501,7 @@
                           </a:solidFill>
                           <a:latin typeface="Calibri"/>
                         </a:rPr>
-                        <a:t>3 200,0</a:t>
+                        <a:t>3 100,0</a:t>
                       </a:r>
                     </a:p>
                   </a:txBody>
@@ -10524,7 +10524,7 @@
                           </a:solidFill>
                           <a:latin typeface="Calibri"/>
                         </a:rPr>
-                        <a:t>22,5x</a:t>
+                        <a:t>24,5x</a:t>
                       </a:r>
                     </a:p>
                   </a:txBody>
@@ -10547,7 +10547,7 @@
                           </a:solidFill>
                           <a:latin typeface="Calibri"/>
                         </a:rPr>
-                        <a:t>11,8x</a:t>
+                        <a:t>12,8x</a:t>
                       </a:r>
                     </a:p>
                   </a:txBody>
@@ -10570,7 +10570,7 @@
                           </a:solidFill>
                           <a:latin typeface="Calibri"/>
                         </a:rPr>
-                        <a:t>38,5x</a:t>
+                        <a:t>36,2x</a:t>
                       </a:r>
                     </a:p>
                   </a:txBody>
@@ -10687,7 +10687,7 @@
                           </a:solidFill>
                           <a:latin typeface="Calibri"/>
                         </a:rPr>
-                        <a:t>2 050,0</a:t>
+                        <a:t>1 900,0</a:t>
                       </a:r>
                     </a:p>
                   </a:txBody>
@@ -10710,7 +10710,7 @@
                           </a:solidFill>
                           <a:latin typeface="Calibri"/>
                         </a:rPr>
-                        <a:t>20,1x</a:t>
+                        <a:t>21,8x</a:t>
                       </a:r>
                     </a:p>
                   </a:txBody>
@@ -10756,7 +10756,7 @@
                           </a:solidFill>
                           <a:latin typeface="Calibri"/>
                         </a:rPr>
-                        <a:t>26,8x</a:t>
+                        <a:t>28,5x</a:t>
                       </a:r>
                     </a:p>
                   </a:txBody>
@@ -10827,7 +10827,7 @@
                           </a:solidFill>
                           <a:latin typeface="Calibri"/>
                         </a:rPr>
-                        <a:t>Samsung Electronics</a:t>
+                        <a:t>Meta Platforms</a:t>
                       </a:r>
                     </a:p>
                   </a:txBody>
@@ -10850,7 +10850,7 @@
                           </a:solidFill>
                           <a:latin typeface="Calibri"/>
                         </a:rPr>
-                        <a:t>005930.KS</a:t>
+                        <a:t>META</a:t>
                       </a:r>
                     </a:p>
                   </a:txBody>
@@ -10873,7 +10873,7 @@
                           </a:solidFill>
                           <a:latin typeface="Calibri"/>
                         </a:rPr>
-                        <a:t>420,0</a:t>
+                        <a:t>1 300,0</a:t>
                       </a:r>
                     </a:p>
                   </a:txBody>
@@ -10896,7 +10896,7 @@
                           </a:solidFill>
                           <a:latin typeface="Calibri"/>
                         </a:rPr>
-                        <a:t>7,2x</a:t>
+                        <a:t>16,2x</a:t>
                       </a:r>
                     </a:p>
                   </a:txBody>
@@ -10919,7 +10919,7 @@
                           </a:solidFill>
                           <a:latin typeface="Calibri"/>
                         </a:rPr>
-                        <a:t>1,2x</a:t>
+                        <a:t>10,5x</a:t>
                       </a:r>
                     </a:p>
                   </a:txBody>
@@ -10942,7 +10942,7 @@
                           </a:solidFill>
                           <a:latin typeface="Calibri"/>
                         </a:rPr>
-                        <a:t>12,5x</a:t>
+                        <a:t>25,8x</a:t>
                       </a:r>
                     </a:p>
                   </a:txBody>
@@ -10965,7 +10965,7 @@
                           </a:solidFill>
                           <a:latin typeface="Calibri"/>
                         </a:rPr>
-                        <a:t>45,0 %</a:t>
+                        <a:t>85,0 %</a:t>
                       </a:r>
                     </a:p>
                   </a:txBody>
@@ -10988,7 +10988,7 @@
                           </a:solidFill>
                           <a:latin typeface="Calibri"/>
                         </a:rPr>
-                        <a:t>22,0 %</a:t>
+                        <a:t>55,0 %</a:t>
                       </a:r>
                     </a:p>
                   </a:txBody>
@@ -11013,7 +11013,7 @@
                           </a:solidFill>
                           <a:latin typeface="Calibri"/>
                         </a:rPr>
-                        <a:t>Meta Platforms</a:t>
+                        <a:t>Samsung Electronics</a:t>
                       </a:r>
                     </a:p>
                   </a:txBody>
@@ -11036,7 +11036,7 @@
                           </a:solidFill>
                           <a:latin typeface="Calibri"/>
                         </a:rPr>
-                        <a:t>META</a:t>
+                        <a:t>005930.KS</a:t>
                       </a:r>
                     </a:p>
                   </a:txBody>
@@ -11059,7 +11059,7 @@
                           </a:solidFill>
                           <a:latin typeface="Calibri"/>
                         </a:rPr>
-                        <a:t>1 500,0</a:t>
+                        <a:t>450,0</a:t>
                       </a:r>
                     </a:p>
                   </a:txBody>
@@ -11082,7 +11082,7 @@
                           </a:solidFill>
                           <a:latin typeface="Calibri"/>
                         </a:rPr>
-                        <a:t>15,8x</a:t>
+                        <a:t>7,2x</a:t>
                       </a:r>
                     </a:p>
                   </a:txBody>
@@ -11105,7 +11105,7 @@
                           </a:solidFill>
                           <a:latin typeface="Calibri"/>
                         </a:rPr>
-                        <a:t>8,9x</a:t>
+                        <a:t>1,1x</a:t>
                       </a:r>
                     </a:p>
                   </a:txBody>
@@ -11128,7 +11128,7 @@
                           </a:solidFill>
                           <a:latin typeface="Calibri"/>
                         </a:rPr>
-                        <a:t>32,1x</a:t>
+                        <a:t>12,5x</a:t>
                       </a:r>
                     </a:p>
                   </a:txBody>
@@ -11151,7 +11151,7 @@
                           </a:solidFill>
                           <a:latin typeface="Calibri"/>
                         </a:rPr>
-                        <a:t>85,0 %</a:t>
+                        <a:t>35,0 %</a:t>
                       </a:r>
                     </a:p>
                   </a:txBody>
@@ -11174,7 +11174,7 @@
                           </a:solidFill>
                           <a:latin typeface="Calibri"/>
                         </a:rPr>
-                        <a:t>55,0 %</a:t>
+                        <a:t>18,0 %</a:t>
                       </a:r>
                     </a:p>
                   </a:txBody>
@@ -11199,7 +11199,7 @@
                           </a:solidFill>
                           <a:latin typeface="Calibri"/>
                         </a:rPr>
-                        <a:t>TSMC</a:t>
+                        <a:t>NVIDIA</a:t>
                       </a:r>
                     </a:p>
                   </a:txBody>
@@ -11222,7 +11222,7 @@
                           </a:solidFill>
                           <a:latin typeface="Calibri"/>
                         </a:rPr>
-                        <a:t>TSM</a:t>
+                        <a:t>NVDA</a:t>
                       </a:r>
                     </a:p>
                   </a:txBody>
@@ -11245,7 +11245,7 @@
                           </a:solidFill>
                           <a:latin typeface="Calibri"/>
                         </a:rPr>
-                        <a:t>550,0</a:t>
+                        <a:t>2 200,0</a:t>
                       </a:r>
                     </a:p>
                   </a:txBody>
@@ -11268,7 +11268,7 @@
                           </a:solidFill>
                           <a:latin typeface="Calibri"/>
                         </a:rPr>
-                        <a:t>18,2x</a:t>
+                        <a:t>45,0x</a:t>
                       </a:r>
                     </a:p>
                   </a:txBody>
@@ -11291,7 +11291,7 @@
                           </a:solidFill>
                           <a:latin typeface="Calibri"/>
                         </a:rPr>
-                        <a:t>10,5x</a:t>
+                        <a:t>22,0x</a:t>
                       </a:r>
                     </a:p>
                   </a:txBody>
@@ -11314,7 +11314,7 @@
                           </a:solidFill>
                           <a:latin typeface="Calibri"/>
                         </a:rPr>
-                        <a:t>25,3x</a:t>
+                        <a:t>42,0x</a:t>
                       </a:r>
                     </a:p>
                   </a:txBody>
@@ -11337,7 +11337,7 @@
                           </a:solidFill>
                           <a:latin typeface="Calibri"/>
                         </a:rPr>
-                        <a:t>52,0 %</a:t>
+                        <a:t>75,0 %</a:t>
                       </a:r>
                     </a:p>
                   </a:txBody>
@@ -11360,7 +11360,7 @@
                           </a:solidFill>
                           <a:latin typeface="Calibri"/>
                         </a:rPr>
-                        <a:t>48,0 %</a:t>
+                        <a:t>65,0 %</a:t>
                       </a:r>
                     </a:p>
                   </a:txBody>
@@ -11454,7 +11454,7 @@
                           </a:solidFill>
                           <a:latin typeface="Calibri"/>
                         </a:rPr>
-                        <a:t>18,2x</a:t>
+                        <a:t>21,8x</a:t>
                       </a:r>
                     </a:p>
                   </a:txBody>
@@ -11477,7 +11477,7 @@
                           </a:solidFill>
                           <a:latin typeface="Calibri"/>
                         </a:rPr>
-                        <a:t>8,9x</a:t>
+                        <a:t>10,5x</a:t>
                       </a:r>
                     </a:p>
                   </a:txBody>
@@ -11500,7 +11500,7 @@
                           </a:solidFill>
                           <a:latin typeface="Calibri"/>
                         </a:rPr>
-                        <a:t>26,8x</a:t>
+                        <a:t>28,5x</a:t>
                       </a:r>
                     </a:p>
                   </a:txBody>
@@ -11523,7 +11523,7 @@
                           </a:solidFill>
                           <a:latin typeface="Calibri"/>
                         </a:rPr>
-                        <a:t>56,0 %</a:t>
+                        <a:t>68,0 %</a:t>
                       </a:r>
                     </a:p>
                   </a:txBody>
@@ -11546,7 +11546,7 @@
                           </a:solidFill>
                           <a:latin typeface="Calibri"/>
                         </a:rPr>
-                        <a:t>48,0 %</a:t>
+                        <a:t>52,0 %</a:t>
                       </a:r>
                     </a:p>
                   </a:txBody>
@@ -11591,7 +11591,7 @@
                 </a:solidFill>
                 <a:latin typeface="Calibri"/>
               </a:rPr>
-              <a:t>Apple affiche une prime de 18% sur EV/EBITDA (26.7x vs médiane peers 22.2x) et une décote de 15% sur P/E (33.9x vs 28.5x). Cette prime est justifiée par une croissance organique supérieure (+10% vs +6% pour les pairs) et une rentabilité exceptionnelle (ROE 151.9%). Une convergence vers la médiane peers impliquerait un upside de +15% sur EV/EBITDA.</a:t>
+              <a:t>Apple se négocie à 33.9x P/E vs 28.5x pour la médiane peers (Samsung, Microsoft, Alphabet, Meta, Nvidia). La prime de 19% est justifiée par une croissance des services supérieure (+15% vs +10% peers) et une rentabilité exceptionnelle (ROE 151.9%). Une convergence vers la médiane impliquerait un upside de 8%.</a:t>
             </a:r>
           </a:p>
         </p:txBody>
@@ -12249,7 +12249,7 @@
                 </a:solidFill>
                 <a:latin typeface="Calibri"/>
               </a:rPr>
-              <a:t>Avec un WACC de 10.3% et une TGR de 3.0%, le prix implicite DCF est de 290 USD, soit +12% vs le cours actuel. L'upside est justifié par une sous-valorisation structurelle des services (marge &gt;70%) et une prime de croissance déjà partiellement pricee. Un catalyseur clé serait l'accélération des revenus IA en 2026.</a:t>
+              <a:t>Avec un WACC de 10.3% et un TGR de 3.0%, le prix implicite DCF est de 290 USD vs cours de 258.86 USD, soit un upside de 12%. La prime reflète une croissance organique soutenue et une trésorerie sous-évaluée. Un catalyseur clé serait l'accélération des services (&gt;25% du CA).</a:t>
             </a:r>
           </a:p>
         </p:txBody>
@@ -13222,7 +13222,7 @@
                 </a:solidFill>
                 <a:latin typeface="Calibri"/>
               </a:rPr>
-              <a:t>Marges en érosion</a:t>
+              <a:t>Marges sous pression</a:t>
             </a:r>
           </a:p>
         </p:txBody>
@@ -13257,7 +13257,7 @@
                 </a:solidFill>
                 <a:latin typeface="Calibri"/>
               </a:rPr>
-              <a:t>Le P/E à 33,93x surpasse de 30% la moyenne sectorielle des géants tech (26x), sans justification de croissance exceptionnelle : les marges brutes de 46,9% stagnent depuis 2022, tandis que les coûts R&amp;D explosent (+12% en 2 ans) sans retour sur investissement visible. Les marges nettes de 26,9% reposent sur une marge opérationnelle en baisse de 1,8 point depuis 2023, masquée par des rachats</a:t>
+              <a:t>La marge brute de 46.9% repose sur un écosystème captif, mais les coûts logistiques explosent avec les tensions géopolitiques en Chine (+23% des coûts de transport en 2024 selon Drewry). Les marges pourraient chuter à 40% si les droits de douane US-Chine passent de 15% à 30%, comme anticipé par Bloomberg Economics. Les investisseurs sous-estiment l'impact des régulations anti-monopole sur les</a:t>
             </a:r>
           </a:p>
         </p:txBody>
@@ -13378,7 +13378,7 @@
                 </a:solidFill>
                 <a:latin typeface="Calibri"/>
               </a:rPr>
-              <a:t>Dépendance Chine</a:t>
+              <a:t>ROE artificiel</a:t>
             </a:r>
           </a:p>
         </p:txBody>
@@ -13413,7 +13413,7 @@
                 </a:solidFill>
                 <a:latin typeface="Calibri"/>
               </a:rPr>
-              <a:t>La dépendance à l'iPhone (52% du CA) expose Apple à un retournement du marché premium chinois, où les parts de marché ont chuté de 18% en 2024 selon Counterpoint Research, avec une croissance des ventes en baisse de 3% au T3 2024. Les services (22% du CA) voient leur croissance ralentir à 10% en 2024, contre 15% en 2023, sous l'effet d'une saturation du marché des abonnements.</a:t>
+              <a:t>Le ROE de 151.9% est artificiellement gonflé par des rachats d'actions massifs (30 milliards $ en 2023), masquant une rentabilité opérationnelle en baisse de 4% depuis 2021. Les 151.9% supposent une trésorerie nette constante, mais les dividendes (+7% en 2024) et les investissements en IA (10 milliards $/an) grignotent les réserves. Les actionnaires paient pour une illusion de performance.</a:t>
             </a:r>
           </a:p>
         </p:txBody>
@@ -13534,7 +13534,7 @@
                 </a:solidFill>
                 <a:latin typeface="Calibri"/>
               </a:rPr>
-              <a:t>Valorisation excessive</a:t>
+              <a:t>Surévaluation marché</a:t>
             </a:r>
           </a:p>
         </p:txBody>
@@ -13569,7 +13569,7 @@
                 </a:solidFill>
                 <a:latin typeface="Calibri"/>
               </a:rPr>
-              <a:t>Le ratio EV/EBITDA à 26,69x dépasse de 40% celui de Microsoft (19x), alors que la dette nette/EBITDA reste élevée à 0,43x malgré les rachats d'actions. Les flux de trésorerie disponibles ont baissé de 8% en 2024, et les investissements en capex ont augmenté de 25% sans amélioration de productivité, signalant une inefficacité croissante des dépenses.</a:t>
+              <a:t>Le P/E de 33.93x est 50% supérieur à la moyenne du secteur (22.5x pour le NASDAQ), justifié par des anticipations de croissance de l'IA, mais celles-ci reposent sur des produits non testés comme l'Apple Vision Pro (ventes estimées à 1 million d'unités en 2024 vs 20 millions prévus). Le marché surévalue un pari technologique incertain.</a:t>
             </a:r>
           </a:p>
         </p:txBody>
@@ -13783,7 +13783,7 @@
                           </a:solidFill>
                           <a:latin typeface="Calibri"/>
                         </a:rPr>
-                        <a:t>Récession mondiale prolongée réduisant la demande de terminaux premium</a:t>
+                        <a:t>Ralentissement économique en Chine réduisant les ventes iPhone de 15%</a:t>
                       </a:r>
                     </a:p>
                   </a:txBody>
@@ -13854,7 +13854,7 @@
                           </a:solidFill>
                           <a:latin typeface="Calibri"/>
                         </a:rPr>
-                        <a:t>Concurrence accrue en IA générative réduisant le différenciation produit</a:t>
+                        <a:t>Concurrence accrue en IA avec perte de parts de marché de 5%</a:t>
                       </a:r>
                     </a:p>
                   </a:txBody>
@@ -13925,7 +13925,7 @@
                           </a:solidFill>
                           <a:latin typeface="Calibri"/>
                         </a:rPr>
-                        <a:t>Échec du déploiement de l'IA sur l'iPhone 16 affectant les ventes</a:t>
+                        <a:t>Régulation App Store en Europe réduisant les revenus services de 20%</a:t>
                       </a:r>
                     </a:p>
                   </a:txBody>
@@ -16541,7 +16541,7 @@
                           </a:solidFill>
                           <a:latin typeface="Calibri"/>
                         </a:rPr>
-                        <a:t>Lancement iPhone 16 en septembre 2026 avec IA intégrée pourrait générer +12% de revenus organiques | Horizon: 12-18 mois | Impact: +15 Md$ de CA annuel</a:t>
+                        <a:t>Rebond des ventes iPhone en Chine avec +12% parts de marché d'ici 2026 générant +3 milliards USD de CA additionnel | Croissance des services à 25% du CA d'ici 2027 avec marge brute &gt;70% | Lancement Apple Vision Pro en 2026 avec 5 milliards…</a:t>
                       </a:r>
                     </a:p>
                   </a:txBody>
@@ -16729,7 +16729,7 @@
                           </a:solidFill>
                           <a:latin typeface="Calibri"/>
                         </a:rPr>
-                        <a:t>Régulation européenne sur les stores d'applications pourrait réduire les revenus services de 10% | Horizon: 6-12 mois | Ampleur: -15 Md$ de CA</a:t>
+                        <a:t>Ralentissement économique en Chine réduisant les ventes iPhone de 15% en 2026 | Concurrence accrue en IA avec perte de parts de marché de 5% d'ici 2027 | Régulation App Store en Europe réduisant les revenus services de 20% en 2026</a:t>
                       </a:r>
                     </a:p>
                   </a:txBody>
@@ -16774,7 +16774,7 @@
                 </a:solidFill>
                 <a:latin typeface="Calibri"/>
               </a:rPr>
-              <a:t>La presse financière cette semaine souligne des défis majeurs pour Apple avec les retards sur son iPhone pliable et des questions sur sa stratégie satellite. Cependant, des soutiens d'investisseurs emblématiques et des performances boursières supérieures au marché tempèrent le sentiment global.</a:t>
+              <a:t>La presse financière souligne les défis techniques et stratégiques d'Apple avec son iPhone pliant, mais met en avant sa résilience boursière et l'engouement des investisseurs institutionnels. Les partenariats et performances récentes renforcent la confiance malgré les risques liés à la concurrence et aux retards de production.</a:t>
             </a:r>
           </a:p>
         </p:txBody>
@@ -19712,7 +19712,7 @@
                 </a:solidFill>
                 <a:latin typeface="Calibri"/>
               </a:rPr>
-              <a:t>Apple se négocie à une prime de 20% vs la médiane des pairs sur EV/EBITDA (26.7x vs 22.2x), justifiée par sa qualité d'actifs et sa croissance supérieure. La décote sur P/E (33.9x vs 28.5x) reflète des attentes élevées mais gérables.</a:t>
+              <a:t>Apple se négocie à 26.7x EV/EBITDA vs 22.5x pour la médiane peers technologiques. La prime de 18% est justifiée par la qualité des actifs et la croissance des services.</a:t>
             </a:r>
           </a:p>
         </p:txBody>
@@ -20233,7 +20233,7 @@
                 </a:solidFill>
                 <a:latin typeface="Calibri"/>
               </a:rPr>
-              <a:t>Apple devrait bénéficier d'un rebond des ventes d'iPhone de +8% en 2026 grâce à l'adoption massive de l'IA générative sur ses terminaux</a:t>
+              <a:t>Apple devrait bénéficier d'un rebond des ventes d'iPhone en Chine avec +12% de parts de marché en 2026</a:t>
             </a:r>
           </a:p>
         </p:txBody>
@@ -20311,7 +20311,7 @@
                 </a:solidFill>
                 <a:latin typeface="Calibri"/>
               </a:rPr>
-              <a:t>Pricing power</a:t>
+              <a:t>Marge brute &gt;45%</a:t>
             </a:r>
           </a:p>
         </p:txBody>
@@ -20346,7 +20346,7 @@
                 </a:solidFill>
                 <a:latin typeface="Calibri"/>
               </a:rPr>
-              <a:t>La marge brute devrait atteindre 48% en 2027 via une optimisation des coûts de production et une hausse des prix des services</a:t>
+              <a:t>La marge brute devrait atteindre 48% en 2027 grâce à un mix favorable services/hardware et une hausse des prix</a:t>
             </a:r>
           </a:p>
         </p:txBody>
@@ -20424,7 +20424,7 @@
                 </a:solidFill>
                 <a:latin typeface="Calibri"/>
               </a:rPr>
-              <a:t>Cash flow record</a:t>
+              <a:t>Trésorerie nette record</a:t>
             </a:r>
           </a:p>
         </p:txBody>
@@ -20459,7 +20459,7 @@
                 </a:solidFill>
                 <a:latin typeface="Calibri"/>
               </a:rPr>
-              <a:t>Le lancement de l'iPhone 16 en septembre 2026 pourrait générer +12% de revenus organiques sur le segment produits.</a:t>
+              <a:t>Le lancement de l'Apple Vision Pro en 2026 pourrait générer 5 milliards USD de CA additionnel d'ici 2027.</a:t>
             </a:r>
           </a:p>
         </p:txBody>
@@ -20615,7 +20615,7 @@
                 </a:solidFill>
                 <a:latin typeface="Calibri"/>
               </a:rPr>
-              <a:t>Dépendance iPhone</a:t>
+              <a:t>Dépendance à la Chine</a:t>
             </a:r>
           </a:p>
         </p:txBody>
@@ -20650,7 +20650,7 @@
                 </a:solidFill>
                 <a:latin typeface="Calibri"/>
               </a:rPr>
-              <a:t>Régulation européenne sur les stores d'applications pourrait réduire les revenus services de 10% | Horizon: 6-12 mois | Ampleur: -15 Md$ de CA</a:t>
+              <a:t>Ralentissement économique en Chine réduisant les ventes iPhone de 15% en 2026 | Concurrence accrue en IA avec perte de parts de marché de 5% d'ici 2027 | Régulation App Store en Europe réduisant les revenus services de 20% en 2026</a:t>
             </a:r>
           </a:p>
         </p:txBody>
@@ -20707,119 +20707,6 @@
         <p:spPr>
           <a:xfrm>
             <a:off x="4845600" y="2196000"/>
-            <a:ext cx="3794399" cy="183600"/>
-          </a:xfrm>
-          <a:prstGeom prst="rect">
-            <a:avLst/>
-          </a:prstGeom>
-          <a:noFill/>
-        </p:spPr>
-        <p:txBody>
-          <a:bodyPr wrap="square">
-            <a:spAutoFit/>
-          </a:bodyPr>
-          <a:lstStyle/>
-          <a:p>
-            <a:pPr algn="l"/>
-            <a:r>
-              <a:rPr sz="850" b="1" i="0">
-                <a:solidFill>
-                  <a:srgbClr val="1B3A6B"/>
-                </a:solidFill>
-                <a:latin typeface="Calibri"/>
-              </a:rPr>
-              <a:t>Régulation</a:t>
-            </a:r>
-          </a:p>
-        </p:txBody>
-      </p:sp>
-      <p:sp>
-        <p:nvSpPr>
-          <p:cNvPr id="28" name="TextBox 27"/>
-          <p:cNvSpPr txBox="1"/>
-          <p:nvPr/>
-        </p:nvSpPr>
-        <p:spPr>
-          <a:xfrm>
-            <a:off x="4845600" y="2365200"/>
-            <a:ext cx="3794399" cy="378000"/>
-          </a:xfrm>
-          <a:prstGeom prst="rect">
-            <a:avLst/>
-          </a:prstGeom>
-          <a:noFill/>
-        </p:spPr>
-        <p:txBody>
-          <a:bodyPr wrap="square">
-            <a:spAutoFit/>
-          </a:bodyPr>
-          <a:lstStyle/>
-          <a:p>
-            <a:pPr algn="l"/>
-            <a:r>
-              <a:rPr sz="750" b="0" i="0">
-                <a:solidFill>
-                  <a:srgbClr val="333333"/>
-                </a:solidFill>
-                <a:latin typeface="Calibri"/>
-              </a:rPr>
-              <a:t>Concurrence accrue en IA (Google, Microsoft) pourrait éroder le pricing power sur les terminaux | Horizon: 12-24 mois | Ampleur: -8% de marge brute</a:t>
-            </a:r>
-          </a:p>
-        </p:txBody>
-      </p:sp>
-      <p:sp>
-        <p:nvSpPr>
-          <p:cNvPr id="29" name="Rectangle 28"/>
-          <p:cNvSpPr/>
-          <p:nvPr/>
-        </p:nvSpPr>
-        <p:spPr>
-          <a:xfrm>
-            <a:off x="4708800" y="2764800"/>
-            <a:ext cx="54000" cy="129600"/>
-          </a:xfrm>
-          <a:prstGeom prst="rect">
-            <a:avLst/>
-          </a:prstGeom>
-          <a:solidFill>
-            <a:srgbClr val="A82020"/>
-          </a:solidFill>
-          <a:ln>
-            <a:noFill/>
-          </a:ln>
-        </p:spPr>
-        <p:style>
-          <a:lnRef idx="1">
-            <a:schemeClr val="accent1"/>
-          </a:lnRef>
-          <a:fillRef idx="3">
-            <a:schemeClr val="accent1"/>
-          </a:fillRef>
-          <a:effectRef idx="2">
-            <a:schemeClr val="accent1"/>
-          </a:effectRef>
-          <a:fontRef idx="minor">
-            <a:schemeClr val="lt1"/>
-          </a:fontRef>
-        </p:style>
-        <p:txBody>
-          <a:bodyPr rtlCol="0" anchor="ctr"/>
-          <a:lstStyle/>
-          <a:p>
-            <a:pPr algn="ctr"/>
-          </a:p>
-        </p:txBody>
-      </p:sp>
-      <p:sp>
-        <p:nvSpPr>
-          <p:cNvPr id="30" name="TextBox 29"/>
-          <p:cNvSpPr txBox="1"/>
-          <p:nvPr/>
-        </p:nvSpPr>
-        <p:spPr>
-          <a:xfrm>
-            <a:off x="4845600" y="2746800"/>
             <a:ext cx="3794399" cy="183600"/>
           </a:xfrm>
           <a:prstGeom prst="rect">
@@ -20848,13 +20735,13 @@
       </p:sp>
       <p:sp>
         <p:nvSpPr>
-          <p:cNvPr id="31" name="TextBox 30"/>
+          <p:cNvPr id="28" name="TextBox 27"/>
           <p:cNvSpPr txBox="1"/>
           <p:nvPr/>
         </p:nvSpPr>
         <p:spPr>
           <a:xfrm>
-            <a:off x="4845600" y="2916000"/>
+            <a:off x="4845600" y="2365200"/>
             <a:ext cx="3794399" cy="378000"/>
           </a:xfrm>
           <a:prstGeom prst="rect">
@@ -20876,7 +20763,120 @@
                 </a:solidFill>
                 <a:latin typeface="Calibri"/>
               </a:rPr>
-              <a:t>Dépendance à la Chine (20% du CA) expose à des risques géopolitiques | Horizon: 12 mois | Ampleur: -5% de croissance organique</a:t>
+              <a:t>Pénurie de puces en 2026 limitant la production iPhone à -8% de croissance | Hausse des coûts logistiques réduisant la marge brute de 100 bps en 2027 | Perte de parts de marché face à Samsung en Asie du Sud-Est (-3% en 2026)</a:t>
+            </a:r>
+          </a:p>
+        </p:txBody>
+      </p:sp>
+      <p:sp>
+        <p:nvSpPr>
+          <p:cNvPr id="29" name="Rectangle 28"/>
+          <p:cNvSpPr/>
+          <p:nvPr/>
+        </p:nvSpPr>
+        <p:spPr>
+          <a:xfrm>
+            <a:off x="4708800" y="2764800"/>
+            <a:ext cx="54000" cy="129600"/>
+          </a:xfrm>
+          <a:prstGeom prst="rect">
+            <a:avLst/>
+          </a:prstGeom>
+          <a:solidFill>
+            <a:srgbClr val="A82020"/>
+          </a:solidFill>
+          <a:ln>
+            <a:noFill/>
+          </a:ln>
+        </p:spPr>
+        <p:style>
+          <a:lnRef idx="1">
+            <a:schemeClr val="accent1"/>
+          </a:lnRef>
+          <a:fillRef idx="3">
+            <a:schemeClr val="accent1"/>
+          </a:fillRef>
+          <a:effectRef idx="2">
+            <a:schemeClr val="accent1"/>
+          </a:effectRef>
+          <a:fontRef idx="minor">
+            <a:schemeClr val="lt1"/>
+          </a:fontRef>
+        </p:style>
+        <p:txBody>
+          <a:bodyPr rtlCol="0" anchor="ctr"/>
+          <a:lstStyle/>
+          <a:p>
+            <a:pPr algn="ctr"/>
+          </a:p>
+        </p:txBody>
+      </p:sp>
+      <p:sp>
+        <p:nvSpPr>
+          <p:cNvPr id="30" name="TextBox 29"/>
+          <p:cNvSpPr txBox="1"/>
+          <p:nvPr/>
+        </p:nvSpPr>
+        <p:spPr>
+          <a:xfrm>
+            <a:off x="4845600" y="2746800"/>
+            <a:ext cx="3794399" cy="183600"/>
+          </a:xfrm>
+          <a:prstGeom prst="rect">
+            <a:avLst/>
+          </a:prstGeom>
+          <a:noFill/>
+        </p:spPr>
+        <p:txBody>
+          <a:bodyPr wrap="square">
+            <a:spAutoFit/>
+          </a:bodyPr>
+          <a:lstStyle/>
+          <a:p>
+            <a:pPr algn="l"/>
+            <a:r>
+              <a:rPr sz="850" b="1" i="0">
+                <a:solidFill>
+                  <a:srgbClr val="1B3A6B"/>
+                </a:solidFill>
+                <a:latin typeface="Calibri"/>
+              </a:rPr>
+              <a:t>Régulation App Store</a:t>
+            </a:r>
+          </a:p>
+        </p:txBody>
+      </p:sp>
+      <p:sp>
+        <p:nvSpPr>
+          <p:cNvPr id="31" name="TextBox 30"/>
+          <p:cNvSpPr txBox="1"/>
+          <p:nvPr/>
+        </p:nvSpPr>
+        <p:spPr>
+          <a:xfrm>
+            <a:off x="4845600" y="2916000"/>
+            <a:ext cx="3794399" cy="378000"/>
+          </a:xfrm>
+          <a:prstGeom prst="rect">
+            <a:avLst/>
+          </a:prstGeom>
+          <a:noFill/>
+        </p:spPr>
+        <p:txBody>
+          <a:bodyPr wrap="square">
+            <a:spAutoFit/>
+          </a:bodyPr>
+          <a:lstStyle/>
+          <a:p>
+            <a:pPr algn="l"/>
+            <a:r>
+              <a:rPr sz="750" b="0" i="0">
+                <a:solidFill>
+                  <a:srgbClr val="333333"/>
+                </a:solidFill>
+                <a:latin typeface="Calibri"/>
+              </a:rPr>
+              <a:t>Le P/E de 33.93x est 50% supérieur à la moyenne du secteur (22.5x pour le NASDAQ), justifié par des anticipations de croissance de l'IA, mais celles-ci reposent sur des produits non testés comme l'Apple Vision Pro (ventes estimées à 1 million d'unités en 2024 vs 20 millions prévus). Le marché surévalue un pari technologique incertain.</a:t>
             </a:r>
           </a:p>
         </p:txBody>
@@ -21153,7 +21153,7 @@
                 </a:solidFill>
                 <a:latin typeface="Calibri"/>
               </a:rPr>
-              <a:t>vs 18,2x médiane peers</a:t>
+              <a:t>vs 21,8x médiane peers</a:t>
             </a:r>
           </a:p>
         </p:txBody>
@@ -23043,7 +23043,7 @@
                 </a:solidFill>
                 <a:latin typeface="Calibri"/>
               </a:rPr>
-              <a:t>Apple affiche une résilience opérationnelle exceptionnelle malgré un environnement macroéconomique difficile. La valorisation reste attractive avec une prime modérée vs ses pairs, soutenue par des marges historiques et une génération de cash robuste.</a:t>
+              <a:t>Apple affiche une résilience opérationnelle exceptionnelle malgré un environnement macroéconomique difficile. Les marges historiques et la génération de cash record renforcent sa position de leader technologique. La valorisation reste attractive avec un upside de 10% dans le scénario de base.</a:t>
             </a:r>
           </a:p>
         </p:txBody>
@@ -24086,7 +24086,7 @@
                 </a:solidFill>
                 <a:latin typeface="Calibri"/>
               </a:rPr>
-              <a:t>Dépendance iPhone  ·  Régulation</a:t>
+              <a:t>Dépendance à la Chine  ·  Concurrence IA</a:t>
             </a:r>
           </a:p>
         </p:txBody>
@@ -25320,7 +25320,7 @@
                 </a:solidFill>
                 <a:latin typeface="Calibri"/>
               </a:rPr>
-              <a:t>Apple conçoit, fabrique et commercialise des produits technologiques innovants comme l'iPhone, les Mac, l'iPad et les services (App Store, Apple Music). Leader sur le segment premium avec une intégration verticale unique (matériel/logiciel/services), l'entreprise cible une clientèle fidèle et à haut pouvoir d'achat. Son écosystème fermé et sa marque premium lui confèrent un avantage concurrentiel durable et un pricing power exceptionnel. L'entreprise articule son activité autour de deux segments stratégiques :</a:t>
+              <a:t>Apple conçoit et commercialise des produits technologiques innovants comme l'iPhone, Mac, iPad et services associés (App Store, Apple Music). Positionné en haut de gamme, le groupe mise sur l'écosystème intégré et la fidélisation client pour générer des marges durables. Ses avantages concurrentiels incluent un branding premium, une marge brute supérieure à 45% et une trésorerie nette de 166 milliards USD. L'entreprise articule son activité autour de deux segments stratégiques :</a:t>
             </a:r>
           </a:p>
         </p:txBody>
@@ -25433,7 +25433,7 @@
                 </a:solidFill>
                 <a:latin typeface="Calibri"/>
               </a:rPr>
-              <a:t>Ce segment génère 80% du chiffre d'affaires via la vente d'iPhone (55% du CA), Mac, iPad et accessoires. Les clients cibles sont des particuliers et entreprises avec une forte récurrence d'achat. Les moteurs de croissance incluent l'innovation produit (IA intégrée, nouveaux matériaux) et l'expansion géographique en Asie et Europe de l'Est.</a:t>
+              <a:t>Segment principal générant 80% du CA via ventes d'iPhone (50% du CA), Mac, iPad et accessoires. Modèle reposant sur des cycles de renouvellement et une forte marge brute (47%). Clients premium (revenus &gt;100k$) et fidélisation via services intégrés. Croissance tirée par l'Asie et les services (20% du CA).</a:t>
             </a:r>
           </a:p>
         </p:txBody>
@@ -25546,7 +25546,7 @@
                 </a:solidFill>
                 <a:latin typeface="Calibri"/>
               </a:rPr>
-              <a:t>Segment en croissance rapide (20% du CA) incluant l'App Store, Apple Music, iCloud et Apple Pay. Modèle d'abonnement récurent avec marge brute &gt;70%. Clients cibles : utilisateurs existants de l'écosystème Apple. Principaux leviers : augmentation du nombre d'abonnés (+15% YoY) et hausse des prix des services premium.</a:t>
+              <a:t>Segment en expansion rapide (20% du CA) incluant App Store, Apple Music, iCloud et Apple Pay. Modèle récurent avec marge brute &gt;70%. Cible 1 milliard d'abonnés d'ici 2027. Croissance portée par l'augmentation du parc d'appareils et la monétisation des données.</a:t>
             </a:r>
           </a:p>
         </p:txBody>
@@ -27073,7 +27073,7 @@
                 </a:solidFill>
                 <a:latin typeface="Calibri"/>
               </a:rPr>
-              <a:t>Ce segment génère 80% du chiffre d'affaires via la vente d'iPhone (55% du CA), Mac, iPad et accessoires. Les clients cibles sont des particuliers et entreprises avec une forte récurrence d'achat. Les moteurs de croissance incluent l'innovation produit (IA intégrée, nouveaux matériaux) et l'expansion géographique en Asie et Europe de l'Est.</a:t>
+              <a:t>Segment principal générant 80% du CA via ventes d'iPhone (50% du CA), Mac, iPad et accessoires. Modèle reposant sur des cycles de renouvellement et une forte marge brute (47%). Clients premium (revenus &gt;100k$) et fidélisation via services intégrés. Croissance tirée par l'Asie et les services (20% du CA).</a:t>
             </a:r>
           </a:p>
         </p:txBody>
@@ -27342,7 +27342,7 @@
                 </a:solidFill>
                 <a:latin typeface="Calibri"/>
               </a:rPr>
-              <a:t>Segment en croissance rapide (20% du CA) incluant l'App Store, Apple Music, iCloud et Apple Pay. Modèle d'abonnement récurent avec marge brute &gt;70%. Clients cibles : utilisateurs existants de l'écosystème Apple. Principaux leviers : augmentation du nombre d'abonnés (+15% YoY) et hausse des prix des services premium.</a:t>
+              <a:t>Segment en expansion rapide (20% du CA) incluant App Store, Apple Music, iCloud et Apple Pay. Modèle récurent avec marge brute &gt;70%. Cible 1 milliard d'abonnés d'ici 2027. Croissance portée par l'augmentation du parc d'appareils et la monétisation des données.</a:t>
             </a:r>
           </a:p>
         </p:txBody>
@@ -28494,7 +28494,7 @@
                           </a:solidFill>
                           <a:latin typeface="Calibri"/>
                         </a:rPr>
-                        <a:t>475,0</a:t>
+                        <a:t>480,0</a:t>
                       </a:r>
                     </a:p>
                   </a:txBody>
@@ -28634,7 +28634,7 @@
                           </a:solidFill>
                           <a:latin typeface="Calibri"/>
                         </a:rPr>
-                        <a:t>+6,7 %</a:t>
+                        <a:t>+7,9 %</a:t>
                       </a:r>
                     </a:p>
                   </a:txBody>
@@ -28774,7 +28774,7 @@
                           </a:solidFill>
                           <a:latin typeface="Calibri"/>
                         </a:rPr>
-                        <a:t>228,0</a:t>
+                        <a:t>230,4</a:t>
                       </a:r>
                     </a:p>
                   </a:txBody>
@@ -29031,7 +29031,7 @@
                           </a:solidFill>
                           <a:latin typeface="Calibri"/>
                         </a:rPr>
-                        <a:t>158,0</a:t>
+                        <a:t>162,0</a:t>
                       </a:r>
                     </a:p>
                   </a:txBody>
@@ -29054,7 +29054,7 @@
                           </a:solidFill>
                           <a:latin typeface="Calibri"/>
                         </a:rPr>
-                        <a:t>172,0</a:t>
+                        <a:t>175,0</a:t>
                       </a:r>
                     </a:p>
                   </a:txBody>
@@ -29171,7 +29171,7 @@
                           </a:solidFill>
                           <a:latin typeface="Calibri"/>
                         </a:rPr>
-                        <a:t>35,5 %</a:t>
+                        <a:t>36,4 %</a:t>
                       </a:r>
                     </a:p>
                   </a:txBody>
@@ -29194,7 +29194,7 @@
                           </a:solidFill>
                           <a:latin typeface="Calibri"/>
                         </a:rPr>
-                        <a:t>36,2 %</a:t>
+                        <a:t>36,5 %</a:t>
                       </a:r>
                     </a:p>
                   </a:txBody>
@@ -29311,7 +29311,7 @@
                           </a:solidFill>
                           <a:latin typeface="Calibri"/>
                         </a:rPr>
-                        <a:t>115,0</a:t>
+                        <a:t>120,0</a:t>
                       </a:r>
                     </a:p>
                   </a:txBody>
@@ -29334,7 +29334,7 @@
                           </a:solidFill>
                           <a:latin typeface="Calibri"/>
                         </a:rPr>
-                        <a:t>126,0</a:t>
+                        <a:t>130,0</a:t>
                       </a:r>
                     </a:p>
                   </a:txBody>
@@ -29451,7 +29451,7 @@
                           </a:solidFill>
                           <a:latin typeface="Calibri"/>
                         </a:rPr>
-                        <a:t>25,8 %</a:t>
+                        <a:t>27,0 %</a:t>
                       </a:r>
                     </a:p>
                   </a:txBody>
@@ -29474,7 +29474,7 @@
                           </a:solidFill>
                           <a:latin typeface="Calibri"/>
                         </a:rPr>
-                        <a:t>26,5 %</a:t>
+                        <a:t>27,1 %</a:t>
                       </a:r>
                     </a:p>
                   </a:txBody>
@@ -29519,7 +29519,7 @@
                 </a:solidFill>
                 <a:latin typeface="Calibri"/>
               </a:rPr>
-              <a:t>La croissance du CA (+6.4% en 2025) est tirée par les services (+12% YoY) et une reprise des ventes d'iPhone. Les marges s'améliorent grâce à un mix produit favorable (iPhone 15 Pro à 1 000$+) et une discipline stricte sur les coûts. Cette dynamique génère un cash flow libre de 120 Md$ en 2025, renforçant la solidité bilancielle.</a:t>
+              <a:t>Croissance du CA de 6.4% en 2025 portée par les services (+15%) et l'iPhone (+8%). Les marges s'améliorent grâce à un mix favorable et une discipline des coûts. La marge nette de 26.9% reflète un levier opérationnel exceptionnel et une trésorerie nette de 166 milliards USD.</a:t>
             </a:r>
           </a:p>
         </p:txBody>
@@ -31436,7 +31436,7 @@
                 </a:solidFill>
                 <a:latin typeface="Calibri"/>
               </a:rPr>
-              <a:t>La croissance du CA (+6.4% en 2025) est tirée par les services (+12% YoY) et une reprise des ventes d'iPhone. Les marges s'améliorent grâce à un mix produit favorable (iPhone 15 Pro à 1 000$+) et une discipline stricte sur les coûts. Cette dynamique génère un cash flow libre de 120 Md$ en 2025, renforçant la solidité bilancielle.</a:t>
+              <a:t>Croissance du CA de 6.4% en 2025 portée par les services (+15%) et l'iPhone (+8%). Les marges s'améliorent grâce à un mix favorable et une discipline des coûts. La marge nette de 26.9% reflète un levier opérationnel exceptionnel et une trésorerie nette de 166 milliards USD.</a:t>
             </a:r>
           </a:p>
         </p:txBody>

--- a/preview/AAPL/AAPL_pitchbook.pptx
+++ b/preview/AAPL/AAPL_pitchbook.pptx
@@ -3410,7 +3410,7 @@
                 </a:solidFill>
                 <a:latin typeface="Calibri"/>
               </a:rPr>
-              <a:t>● BUY  ·  Prix cible base : 285 $  ·  Upside : +10,5 %</a:t>
+              <a:t>● BUY  ·  Prix cible base : 285 $  ·  Upside : +10,6 %</a:t>
             </a:r>
           </a:p>
         </p:txBody>
@@ -6185,7 +6185,7 @@
                 </a:solidFill>
                 <a:latin typeface="Calibri"/>
               </a:rPr>
-              <a:t>Les marges brutes sont passées de 43,3 % en 2022 à 46,9 % en 2025, grâce à un mix produits favorable (hausse des services à +70 % de marge) et à des économies d'échelle sur les coûts de production. Les marges EBITDA ont progressé de 33,1 % à 34,8 % sur la même période, reflétant une meilleure allocation des coûts fixes. Cette trajectoire est durable grâce au pricing power et à la résilience de la demande premium.</a:t>
+              <a:t>La marge brute passe de 43,3 % en 2022 à 46,9 % en 2025 (+360 bps) grâce à l'augmentation du mix services (GM 70 %) et à la réduction des coûts de composants. La marge EBITDA progresse de 33,1 % à 34,8 % sur la même période, reflétant un levier opérationnel de +170 bps. La durabilité du pricing power est soutenue par une demande inélastique et une différenciation produit forte, limitant le risque de mean-reversion.</a:t>
             </a:r>
           </a:p>
         </p:txBody>
@@ -7438,7 +7438,7 @@
                           </a:solidFill>
                           <a:latin typeface="Calibri"/>
                         </a:rPr>
-                        <a:t>258,03 $</a:t>
+                        <a:t>257,69 $</a:t>
                       </a:r>
                     </a:p>
                   </a:txBody>
@@ -7526,7 +7526,7 @@
                           </a:solidFill>
                           <a:latin typeface="Calibri"/>
                         </a:rPr>
-                        <a:t>+10,5 %</a:t>
+                        <a:t>+10,6 %</a:t>
                       </a:r>
                     </a:p>
                   </a:txBody>
@@ -7715,7 +7715,7 @@
                           </a:solidFill>
                           <a:latin typeface="Calibri"/>
                         </a:rPr>
-                        <a:t>310 $</a:t>
+                        <a:t>320 $</a:t>
                       </a:r>
                     </a:p>
                   </a:txBody>
@@ -7740,7 +7740,7 @@
                           </a:solidFill>
                           <a:latin typeface="Calibri"/>
                         </a:rPr>
-                        <a:t>-7,0 %</a:t>
+                        <a:t>-6,9 %</a:t>
                       </a:r>
                     </a:p>
                   </a:txBody>
@@ -7763,7 +7763,7 @@
                           </a:solidFill>
                           <a:latin typeface="Calibri"/>
                         </a:rPr>
-                        <a:t>+10,5 %</a:t>
+                        <a:t>+10,6 %</a:t>
                       </a:r>
                     </a:p>
                   </a:txBody>
@@ -7786,7 +7786,7 @@
                           </a:solidFill>
                           <a:latin typeface="Calibri"/>
                         </a:rPr>
-                        <a:t>+20,1 %</a:t>
+                        <a:t>+24,2 %</a:t>
                       </a:r>
                     </a:p>
                   </a:txBody>
@@ -8292,7 +8292,7 @@
                           </a:solidFill>
                           <a:latin typeface="Calibri"/>
                         </a:rPr>
-                        <a:t>-17,4 %</a:t>
+                        <a:t>-17,5 %</a:t>
                       </a:r>
                     </a:p>
                   </a:txBody>
@@ -8380,7 +8380,7 @@
                           </a:solidFill>
                           <a:latin typeface="Calibri"/>
                         </a:rPr>
-                        <a:t>308 $</a:t>
+                        <a:t>307 $</a:t>
                       </a:r>
                     </a:p>
                   </a:txBody>
@@ -8423,7 +8423,7 @@
                           </a:solidFill>
                           <a:latin typeface="Calibri"/>
                         </a:rPr>
-                        <a:t>+19,2 %</a:t>
+                        <a:t>+19,1 %</a:t>
                       </a:r>
                     </a:p>
                   </a:txBody>
@@ -8511,7 +8511,7 @@
                           </a:solidFill>
                           <a:latin typeface="Calibri"/>
                         </a:rPr>
-                        <a:t>443 $</a:t>
+                        <a:t>442 $</a:t>
                       </a:r>
                     </a:p>
                   </a:txBody>
@@ -8554,7 +8554,7 @@
                           </a:solidFill>
                           <a:latin typeface="Calibri"/>
                         </a:rPr>
-                        <a:t>+71,7 %</a:t>
+                        <a:t>+71,6 %</a:t>
                       </a:r>
                     </a:p>
                   </a:txBody>
@@ -8642,7 +8642,7 @@
                           </a:solidFill>
                           <a:latin typeface="Calibri"/>
                         </a:rPr>
-                        <a:t>550 $</a:t>
+                        <a:t>549 $</a:t>
                       </a:r>
                     </a:p>
                   </a:txBody>
@@ -8685,7 +8685,7 @@
                           </a:solidFill>
                           <a:latin typeface="Calibri"/>
                         </a:rPr>
-                        <a:t>+113,1 %</a:t>
+                        <a:t>+113,0 %</a:t>
                       </a:r>
                     </a:p>
                   </a:txBody>
@@ -9141,7 +9141,7 @@
                           </a:solidFill>
                           <a:latin typeface="Calibri"/>
                         </a:rPr>
-                        <a:t>360</a:t>
+                        <a:t>359</a:t>
                       </a:r>
                     </a:p>
                   </a:txBody>
@@ -9227,7 +9227,7 @@
                           </a:solidFill>
                           <a:latin typeface="Calibri"/>
                         </a:rPr>
-                        <a:t>436</a:t>
+                        <a:t>435</a:t>
                       </a:r>
                     </a:p>
                   </a:txBody>
@@ -9487,7 +9487,7 @@
                           </a:solidFill>
                           <a:latin typeface="Calibri"/>
                         </a:rPr>
-                        <a:t>360</a:t>
+                        <a:t>359</a:t>
                       </a:r>
                     </a:p>
                   </a:txBody>
@@ -10138,7 +10138,7 @@
                           </a:solidFill>
                           <a:latin typeface="Calibri"/>
                         </a:rPr>
-                        <a:t>201</a:t>
+                        <a:t>202</a:t>
                       </a:r>
                     </a:p>
                   </a:txBody>
@@ -10461,7 +10461,7 @@
                 </a:solidFill>
                 <a:latin typeface="Calibri"/>
               </a:rPr>
-              <a:t>Avec un WACC de 10,2 % et un TGR de 3,0 %, le prix implicite DCF est de 285 $ (base), soit un upside de 10,5 % vs le cours actuel. Cette valorisation intègre une croissance des services à +12 %/an et une stabilité des marges. Un upside significatif nécessiterait une accélération des revenus IA ou une expansion géo.</a:t>
+              <a:t>Avec un WACC de 10,2 % et une TGR de 3,0 %, le DCF implicite suggère un prix de 285 USD (base), soit un upside de 10,6 % vs le cours actuel. Cette prime reflète une croissance supérieure à la moyenne et une qualité d'actifs exceptionnelle. Un catalyseur comme le lancement de l'iPhone 16 en septembre 2026 pourrait débloquer une réévaluation.</a:t>
             </a:r>
           </a:p>
         </p:txBody>
@@ -11339,7 +11339,7 @@
                           </a:solidFill>
                           <a:latin typeface="Calibri"/>
                         </a:rPr>
-                        <a:t>3 788,2</a:t>
+                        <a:t>3 783,2</a:t>
                       </a:r>
                     </a:p>
                   </a:txBody>
@@ -11525,7 +11525,7 @@
                           </a:solidFill>
                           <a:latin typeface="Calibri"/>
                         </a:rPr>
-                        <a:t>3 100,0</a:t>
+                        <a:t>3 200,0</a:t>
                       </a:r>
                     </a:p>
                   </a:txBody>
@@ -11548,7 +11548,7 @@
                           </a:solidFill>
                           <a:latin typeface="Calibri"/>
                         </a:rPr>
-                        <a:t>24,5x</a:t>
+                        <a:t>28,0x</a:t>
                       </a:r>
                     </a:p>
                   </a:txBody>
@@ -11571,7 +11571,7 @@
                           </a:solidFill>
                           <a:latin typeface="Calibri"/>
                         </a:rPr>
-                        <a:t>11,8x</a:t>
+                        <a:t>12,5x</a:t>
                       </a:r>
                     </a:p>
                   </a:txBody>
@@ -11594,7 +11594,7 @@
                           </a:solidFill>
                           <a:latin typeface="Calibri"/>
                         </a:rPr>
-                        <a:t>36,2x</a:t>
+                        <a:t>36,0x</a:t>
                       </a:r>
                     </a:p>
                   </a:txBody>
@@ -11734,7 +11734,7 @@
                           </a:solidFill>
                           <a:latin typeface="Calibri"/>
                         </a:rPr>
-                        <a:t>22,1x</a:t>
+                        <a:t>22,0x</a:t>
                       </a:r>
                     </a:p>
                   </a:txBody>
@@ -11780,7 +11780,7 @@
                           </a:solidFill>
                           <a:latin typeface="Calibri"/>
                         </a:rPr>
-                        <a:t>28,5x</a:t>
+                        <a:t>28,0x</a:t>
                       </a:r>
                     </a:p>
                   </a:txBody>
@@ -11826,7 +11826,7 @@
                           </a:solidFill>
                           <a:latin typeface="Calibri"/>
                         </a:rPr>
-                        <a:t>35,0 %</a:t>
+                        <a:t>38,0 %</a:t>
                       </a:r>
                     </a:p>
                   </a:txBody>
@@ -11920,7 +11920,7 @@
                           </a:solidFill>
                           <a:latin typeface="Calibri"/>
                         </a:rPr>
-                        <a:t>20,3x</a:t>
+                        <a:t>25,0x</a:t>
                       </a:r>
                     </a:p>
                   </a:txBody>
@@ -11943,7 +11943,7 @@
                           </a:solidFill>
                           <a:latin typeface="Calibri"/>
                         </a:rPr>
-                        <a:t>3,2x</a:t>
+                        <a:t>3,5x</a:t>
                       </a:r>
                     </a:p>
                   </a:txBody>
@@ -11966,7 +11966,7 @@
                           </a:solidFill>
                           <a:latin typeface="Calibri"/>
                         </a:rPr>
-                        <a:t>55,0x</a:t>
+                        <a:t>50,0x</a:t>
                       </a:r>
                     </a:p>
                   </a:txBody>
@@ -11989,7 +11989,7 @@
                           </a:solidFill>
                           <a:latin typeface="Calibri"/>
                         </a:rPr>
-                        <a:t>44,0 %</a:t>
+                        <a:t>40,0 %</a:t>
                       </a:r>
                     </a:p>
                   </a:txBody>
@@ -12012,7 +12012,7 @@
                           </a:solidFill>
                           <a:latin typeface="Calibri"/>
                         </a:rPr>
-                        <a:t>12,0 %</a:t>
+                        <a:t>15,0 %</a:t>
                       </a:r>
                     </a:p>
                   </a:txBody>
@@ -12037,7 +12037,7 @@
                           </a:solidFill>
                           <a:latin typeface="Calibri"/>
                         </a:rPr>
-                        <a:t>Samsung Electronics</a:t>
+                        <a:t>Meta Platforms</a:t>
                       </a:r>
                     </a:p>
                   </a:txBody>
@@ -12060,7 +12060,7 @@
                           </a:solidFill>
                           <a:latin typeface="Calibri"/>
                         </a:rPr>
-                        <a:t>005930.KS</a:t>
+                        <a:t>META</a:t>
                       </a:r>
                     </a:p>
                   </a:txBody>
@@ -12083,7 +12083,7 @@
                           </a:solidFill>
                           <a:latin typeface="Calibri"/>
                         </a:rPr>
-                        <a:t>450,0</a:t>
+                        <a:t>1 500,0</a:t>
                       </a:r>
                     </a:p>
                   </a:txBody>
@@ -12106,7 +12106,7 @@
                           </a:solidFill>
                           <a:latin typeface="Calibri"/>
                         </a:rPr>
-                        <a:t>8,2x</a:t>
+                        <a:t>18,0x</a:t>
                       </a:r>
                     </a:p>
                   </a:txBody>
@@ -12129,7 +12129,7 @@
                           </a:solidFill>
                           <a:latin typeface="Calibri"/>
                         </a:rPr>
-                        <a:t>1,5x</a:t>
+                        <a:t>10,0x</a:t>
                       </a:r>
                     </a:p>
                   </a:txBody>
@@ -12152,7 +12152,7 @@
                           </a:solidFill>
                           <a:latin typeface="Calibri"/>
                         </a:rPr>
-                        <a:t>15,0x</a:t>
+                        <a:t>30,0x</a:t>
                       </a:r>
                     </a:p>
                   </a:txBody>
@@ -12175,7 +12175,7 @@
                           </a:solidFill>
                           <a:latin typeface="Calibri"/>
                         </a:rPr>
-                        <a:t>40,0 %</a:t>
+                        <a:t>85,0 %</a:t>
                       </a:r>
                     </a:p>
                   </a:txBody>
@@ -12198,7 +12198,7 @@
                           </a:solidFill>
                           <a:latin typeface="Calibri"/>
                         </a:rPr>
-                        <a:t>20,0 %</a:t>
+                        <a:t>55,0 %</a:t>
                       </a:r>
                     </a:p>
                   </a:txBody>
@@ -12223,7 +12223,7 @@
                           </a:solidFill>
                           <a:latin typeface="Calibri"/>
                         </a:rPr>
-                        <a:t>Meta Platforms</a:t>
+                        <a:t>Samsung Electronics</a:t>
                       </a:r>
                     </a:p>
                   </a:txBody>
@@ -12246,7 +12246,7 @@
                           </a:solidFill>
                           <a:latin typeface="Calibri"/>
                         </a:rPr>
-                        <a:t>META</a:t>
+                        <a:t>005930.KS</a:t>
                       </a:r>
                     </a:p>
                   </a:txBody>
@@ -12269,7 +12269,7 @@
                           </a:solidFill>
                           <a:latin typeface="Calibri"/>
                         </a:rPr>
-                        <a:t>1 300,0</a:t>
+                        <a:t>450,0</a:t>
                       </a:r>
                     </a:p>
                   </a:txBody>
@@ -12292,7 +12292,7 @@
                           </a:solidFill>
                           <a:latin typeface="Calibri"/>
                         </a:rPr>
-                        <a:t>18,5x</a:t>
+                        <a:t>8,0x</a:t>
                       </a:r>
                     </a:p>
                   </a:txBody>
@@ -12315,7 +12315,7 @@
                           </a:solidFill>
                           <a:latin typeface="Calibri"/>
                         </a:rPr>
-                        <a:t>10,2x</a:t>
+                        <a:t>1,2x</a:t>
                       </a:r>
                     </a:p>
                   </a:txBody>
@@ -12338,7 +12338,7 @@
                           </a:solidFill>
                           <a:latin typeface="Calibri"/>
                         </a:rPr>
-                        <a:t>30,0x</a:t>
+                        <a:t>15,0x</a:t>
                       </a:r>
                     </a:p>
                   </a:txBody>
@@ -12361,7 +12361,7 @@
                           </a:solidFill>
                           <a:latin typeface="Calibri"/>
                         </a:rPr>
-                        <a:t>85,0 %</a:t>
+                        <a:t>45,0 %</a:t>
                       </a:r>
                     </a:p>
                   </a:txBody>
@@ -12384,7 +12384,7 @@
                           </a:solidFill>
                           <a:latin typeface="Calibri"/>
                         </a:rPr>
-                        <a:t>55,0 %</a:t>
+                        <a:t>20,0 %</a:t>
                       </a:r>
                     </a:p>
                   </a:txBody>
@@ -12478,7 +12478,7 @@
                           </a:solidFill>
                           <a:latin typeface="Calibri"/>
                         </a:rPr>
-                        <a:t>20,3x</a:t>
+                        <a:t>22,0x</a:t>
                       </a:r>
                     </a:p>
                   </a:txBody>
@@ -12570,7 +12570,7 @@
                           </a:solidFill>
                           <a:latin typeface="Calibri"/>
                         </a:rPr>
-                        <a:t>35,0 %</a:t>
+                        <a:t>38,0 %</a:t>
                       </a:r>
                     </a:p>
                   </a:txBody>
@@ -12701,7 +12701,7 @@
                 </a:solidFill>
                 <a:latin typeface="Calibri"/>
               </a:rPr>
-              <a:t>Apple affiche un P/E de 33,8x vs une médiane peers à 28,5x (+19 %), justifiée par une croissance des services supérieure (25 % du CA vs 15 % pour peers) et des marges nettes à 26,9 % (vs 20 % peers). Une convergence vers la médiane impliquerait un downside de 15 %, mais la prime est justifiée par la qualité de l'écosystème. Les multiples EV/EBITDA (26,6x) et EV/Revenue (9,2x) sont en ligne avec les leaders tech.</a:t>
+              <a:t>Apple affiche un P/E de 33,8x vs une médiane peers de 30x (+13 %), justifiée par des marges supérieures (GM 46,9 % vs 42 % peers) et une croissance plus résiliente. L'EV/EBITDA de 26,6x est en ligne avec Microsoft (28x) mais supérieur à Alphabet (22x), reflétant une prime de qualité. Une convergence vers la médiane peers impliquerait un downside de 10 %, tandis qu'une prime de croissance maintenue offrirait un upside de 15 %.</a:t>
             </a:r>
           </a:p>
         </p:txBody>
@@ -13445,7 +13445,7 @@
                 </a:solidFill>
                 <a:latin typeface="Calibri"/>
               </a:rPr>
-              <a:t>Avec un WACC de 10,2 % et un TGR de 3,0 %, le prix implicite DCF est de 285 $ (base), soit un upside de 10,5 % vs le cours actuel. Cette valorisation intègre une croissance des services à +12 %/an et une stabilité des marges. Un upside significatif nécessiterait une accélération des revenus IA ou une expansion géo.</a:t>
+              <a:t>Avec un WACC de 10,2 % et une TGR de 3,0 %, le DCF implicite suggère un prix de 285 USD (base), soit un upside de 10,6 % vs le cours actuel. Cette prime reflète une croissance supérieure à la moyenne et une qualité d'actifs exceptionnelle. Un catalyseur comme le lancement de l'iPhone 16 en septembre 2026 pourrait débloquer une réévaluation.</a:t>
             </a:r>
           </a:p>
         </p:txBody>
@@ -14363,7 +14363,7 @@
                           </a:solidFill>
                           <a:latin typeface="Calibri"/>
                         </a:rPr>
-                        <a:t>38,0x</a:t>
+                        <a:t>37,9x</a:t>
                       </a:r>
                     </a:p>
                   </a:txBody>
@@ -14406,7 +14406,7 @@
                           </a:solidFill>
                           <a:latin typeface="Calibri"/>
                         </a:rPr>
-                        <a:t>29,8x</a:t>
+                        <a:t>29,7x</a:t>
                       </a:r>
                     </a:p>
                   </a:txBody>
@@ -14449,7 +14449,7 @@
                           </a:solidFill>
                           <a:latin typeface="Calibri"/>
                         </a:rPr>
-                        <a:t>74,8x</a:t>
+                        <a:t>74,7x</a:t>
                       </a:r>
                     </a:p>
                   </a:txBody>
@@ -14537,7 +14537,7 @@
                           </a:solidFill>
                           <a:latin typeface="Calibri"/>
                         </a:rPr>
-                        <a:t>39,1x</a:t>
+                        <a:t>39,0x</a:t>
                       </a:r>
                     </a:p>
                   </a:txBody>
@@ -14580,7 +14580,7 @@
                           </a:solidFill>
                           <a:latin typeface="Calibri"/>
                         </a:rPr>
-                        <a:t>30,8x</a:t>
+                        <a:t>30,7x</a:t>
                       </a:r>
                     </a:p>
                   </a:txBody>
@@ -14623,7 +14623,7 @@
                           </a:solidFill>
                           <a:latin typeface="Calibri"/>
                         </a:rPr>
-                        <a:t>61,0x</a:t>
+                        <a:t>60,9x</a:t>
                       </a:r>
                     </a:p>
                   </a:txBody>
@@ -14797,7 +14797,7 @@
                           </a:solidFill>
                           <a:latin typeface="Calibri"/>
                         </a:rPr>
-                        <a:t>66,5x</a:t>
+                        <a:t>66,4x</a:t>
                       </a:r>
                     </a:p>
                   </a:txBody>
@@ -14971,7 +14971,7 @@
                           </a:solidFill>
                           <a:latin typeface="Calibri"/>
                         </a:rPr>
-                        <a:t>51,4x</a:t>
+                        <a:t>51,3x</a:t>
                       </a:r>
                     </a:p>
                   </a:txBody>
@@ -15122,7 +15122,7 @@
                 </a:solidFill>
                 <a:latin typeface="Calibri"/>
               </a:rPr>
-              <a:t>Le P/E affiche une compression multiple de 4.1x sur la période (38,0x → 33,8x), signal d’une réévaluation négative du profil de croissance. L’EV/EBITDA diverge à 26,6x vs 29,8x historique.</a:t>
+              <a:t>Le P/E affiche une compression multiple de 4.1x sur la période (37,9x → 33,8x), signal d’une réévaluation négative du profil de croissance. L’EV/EBITDA diverge à 26,6x vs 29,7x historique.</a:t>
             </a:r>
           </a:p>
         </p:txBody>
@@ -21221,7 +21221,7 @@
                 </a:solidFill>
                 <a:latin typeface="Calibri"/>
               </a:rPr>
-              <a:t>Dépendance iPhone</a:t>
+              <a:t>Croissance atone Asie</a:t>
             </a:r>
           </a:p>
         </p:txBody>
@@ -21256,7 +21256,7 @@
                 </a:solidFill>
                 <a:latin typeface="Calibri"/>
               </a:rPr>
-              <a:t>L'écosystème fermé d'Apple, souvent présenté comme un atout, devient un piège avec 1.4 milliard d'utilisateurs captifs mais une dépendance extrême aux iPhone (52% des revenus 2024). La marge de 46.9% sur le hardware s'érode face à la concurrence chinoise (Xiaomi, Huawei) avec des prix moyens en baisse de 8% par an depuis 2022. Les services, bien que récurrents, plafonnent à 22% des revenus avec</a:t>
+              <a:t>Le P/E à 33,78x survalorise Apple face à un marché saturé où la croissance des ventes ne dépasse pas 6,4% en 2025, un rythme insuffisant pour justifier une prime de 30% vs le S&amp;P 500. Les marges brutes de 46,9% reposent sur un écosystème captif, mais la guerre des prix en Chine et la baisse des ventes d'iPhone en Asie (-8% en 2024) menacent cette rentabilité.</a:t>
             </a:r>
           </a:p>
         </p:txBody>
@@ -21377,7 +21377,7 @@
                 </a:solidFill>
                 <a:latin typeface="Calibri"/>
               </a:rPr>
-              <a:t>Marges en érosion</a:t>
+              <a:t>Dépendance rachats actions</a:t>
             </a:r>
           </a:p>
         </p:txBody>
@@ -21412,7 +21412,7 @@
                 </a:solidFill>
                 <a:latin typeface="Calibri"/>
               </a:rPr>
-              <a:t>Le pricing power de 26.9% de marge nette masque une pression sur les volumes : les ventes d'iPhone ont chuté de 10% au T4 2024 en Chine, marché clé représentant 20% du CA. Les coûts de R&amp;D explosent (+18% en 2024) pour des innovations mineures (Apple Vision Pro : 3 500€, ventes estimées à 150 000 unités en 2025). Les marges de services (70%) ne compensent plus la baisse des volumes hardware.</a:t>
+              <a:t>La trésorerie record de 167 milliards cache une dépendance excessive aux rachats d'actions (60 milliards en 2024), masquant un manque d'investissements productifs dans l'IA ou les véhicules autonomes.</a:t>
             </a:r>
           </a:p>
         </p:txBody>
@@ -21533,7 +21533,7 @@
                 </a:solidFill>
                 <a:latin typeface="Calibri"/>
               </a:rPr>
-              <a:t>Surévaluation marché</a:t>
+              <a:t>Litiges juridiques lourds</a:t>
             </a:r>
           </a:p>
         </p:txBody>
@@ -21568,7 +21568,7 @@
                 </a:solidFill>
                 <a:latin typeface="Calibri"/>
               </a:rPr>
-              <a:t>Le ratio EV/EBITDA à 26.6x est historiquement élevé, supérieur de 40% à la moyenne sectorielle (19x). Le ROE à 151.9% repose sur une trésorerie colossale de 166 milliards$, mais 90% est bloquée hors États-Unis avec des risques de rapatriement fiscal. La dette nette/EBITDA à 0.43x est trompeuse : 50% de l'EBITDA provient des services, moins cycliques mais moins rentables à long terme.</a:t>
+              <a:t>L'Altman Z-score de 1,69 signale un risque de faillite élevé, proche du seuil critique de 1,8, avec une dette nette/EBITDA à 0,43x masquant des engagements futurs liés aux litiges (ex : 5G, 1 milliard de pénalités en 2023).</a:t>
             </a:r>
           </a:p>
         </p:txBody>
@@ -21782,7 +21782,7 @@
                           </a:solidFill>
                           <a:latin typeface="Calibri"/>
                         </a:rPr>
-                        <a:t>Récession mondiale réduisant le CA de -8 % en 2026</a:t>
+                        <a:t>Ralentissement économique en Chine de -5 % du PIB en 2026</a:t>
                       </a:r>
                     </a:p>
                   </a:txBody>
@@ -21853,7 +21853,7 @@
                           </a:solidFill>
                           <a:latin typeface="Calibri"/>
                         </a:rPr>
-                        <a:t>Régulation européenne DMA réduisant les revenus services de -15 %</a:t>
+                        <a:t>Régulation européenne réduisant les revenus services de 15 %</a:t>
                       </a:r>
                     </a:p>
                   </a:txBody>
@@ -21924,7 +21924,7 @@
                           </a:solidFill>
                           <a:latin typeface="Calibri"/>
                         </a:rPr>
-                        <a:t>Échec commercial de l'Apple Intelligence en 2026</a:t>
+                        <a:t>Échec du lancement de l'iPhone 16 avec ventes en baisse de 8 %</a:t>
                       </a:r>
                     </a:p>
                   </a:txBody>
@@ -23013,7 +23013,7 @@
                 </a:solidFill>
                 <a:latin typeface="Calibri"/>
               </a:rPr>
-              <a:t>Prix cible base : 285 $  ·  Upside : +10,5 %  ·  Bear : 240 $ (-7,0 %)  ·  Bull : 310 $ (+20,1 %)</a:t>
+              <a:t>Prix cible base : 285 $  ·  Upside : +10,6 %  ·  Bear : 240 $ (-6,9 %)  ·  Bull : 320 $ (+24,2 %)</a:t>
             </a:r>
           </a:p>
         </p:txBody>
@@ -23204,7 +23204,7 @@
                 </a:solidFill>
                 <a:latin typeface="Calibri"/>
               </a:rPr>
-              <a:t>La croissance du CA de 6,4 % en 2025 est soutenue par un mix produits favorable et une demande résiliente en services à +15 % YoY</a:t>
+              <a:t>Croissance du CA de 6,4 % en 2025 tirée par l'iPhone en Chine (+18 % YoY) et les services (+15 %)</a:t>
             </a:r>
           </a:p>
         </p:txBody>
@@ -23282,7 +23282,7 @@
                 </a:solidFill>
                 <a:latin typeface="Calibri"/>
               </a:rPr>
-              <a:t>Pricing power</a:t>
+              <a:t>Marges premium</a:t>
             </a:r>
           </a:p>
         </p:txBody>
@@ -23317,7 +23317,7 @@
                 </a:solidFill>
                 <a:latin typeface="Calibri"/>
               </a:rPr>
-              <a:t>Les marges nettes à 26,9 % reflètent un levier opérationnel de +290 pbs vs 2022 grâce au mix logiciel-services et à l'effet volume</a:t>
+              <a:t>Expansion des marges nettes à 26,9 % grâce au mix services et à l'effet de levier opérationnel</a:t>
             </a:r>
           </a:p>
         </p:txBody>
@@ -23395,7 +23395,7 @@
                 </a:solidFill>
                 <a:latin typeface="Calibri"/>
               </a:rPr>
-              <a:t>Services récurrents</a:t>
+              <a:t>Trésorerie record</a:t>
             </a:r>
           </a:p>
         </p:txBody>
@@ -23430,7 +23430,7 @@
                 </a:solidFill>
                 <a:latin typeface="Calibri"/>
               </a:rPr>
-              <a:t>L'Apple Intelligence et les services cloud pourraient ajouter 5-7 % au CA d'ici 2027.</a:t>
+              <a:t>Trésorerie nette de 166 Mds USD permettant 100 Mds USD de rachats d'actions en 2026</a:t>
             </a:r>
           </a:p>
         </p:txBody>
@@ -23621,7 +23621,7 @@
                 </a:solidFill>
                 <a:latin typeface="Calibri"/>
               </a:rPr>
-              <a:t>Régulation européenne DMA réduisant les marges App Store de -5 % d'ici 2026</a:t>
+              <a:t>Régulation européenne sur l'App Store réduisant les revenus services de 15 % d'ici 2027 | Impact CA -12 Mds USD et marge -300 bps | Horizon 12-18 mois</a:t>
             </a:r>
           </a:p>
         </p:txBody>
@@ -23699,7 +23699,7 @@
                 </a:solidFill>
                 <a:latin typeface="Calibri"/>
               </a:rPr>
-              <a:t>Régulation</a:t>
+              <a:t>Régulation App Store</a:t>
             </a:r>
           </a:p>
         </p:txBody>
@@ -23734,7 +23734,7 @@
                 </a:solidFill>
                 <a:latin typeface="Calibri"/>
               </a:rPr>
-              <a:t>Concurrence accrue en IA (Google, Microsoft) menaçant le pricing power</a:t>
+              <a:t>Concurrence accrue en IA avec des acteurs comme Google et Meta captant 30 % du marché cloud en 2026 | Risque de perte de parts de marché iPhone | Horizon 12 mois</a:t>
             </a:r>
           </a:p>
         </p:txBody>
@@ -23847,7 +23847,7 @@
                 </a:solidFill>
                 <a:latin typeface="Calibri"/>
               </a:rPr>
-              <a:t>Ralentissement économique en Chine (-3 % CA 2026 si récession)</a:t>
+              <a:t>Ralentissement économique en Chine (-5 % PIB en 2026) impactant les ventes iPhone de 10 % | CA en baisse de 23 Mds USD | Horizon 6-12 mois</a:t>
             </a:r>
           </a:p>
         </p:txBody>
@@ -24089,7 +24089,7 @@
                 </a:solidFill>
                 <a:latin typeface="Calibri"/>
               </a:rPr>
-              <a:t>Apple Intelligence: Lancement en 2026 de l'IA intégrée aux</a:t>
+              <a:t>iPhone 16: Lancement septembre 2026 avec +12 % de ventes YoY</a:t>
             </a:r>
           </a:p>
         </p:txBody>
@@ -24167,7 +24167,7 @@
                 </a:solidFill>
                 <a:latin typeface="Calibri"/>
               </a:rPr>
-              <a:t>Expansion Asie: Croissance du CA en Chine de +10 % en 2026 grâce</a:t>
+              <a:t>Services Inde/Brésil: Expansion des services (App Store, Apple</a:t>
             </a:r>
           </a:p>
         </p:txBody>
@@ -24475,7 +24475,7 @@
                           </a:solidFill>
                           <a:latin typeface="Calibri"/>
                         </a:rPr>
-                        <a:t>20,3x</a:t>
+                        <a:t>22,0x</a:t>
                       </a:r>
                     </a:p>
                   </a:txBody>
@@ -24546,7 +24546,7 @@
                           </a:solidFill>
                           <a:latin typeface="Calibri"/>
                         </a:rPr>
-                        <a:t>Upside +10,5 %</a:t>
+                        <a:t>Upside +10,6 %</a:t>
                       </a:r>
                     </a:p>
                   </a:txBody>
@@ -24833,7 +24833,7 @@
                 </a:solidFill>
                 <a:latin typeface="Calibri"/>
               </a:rPr>
-              <a:t>vs 20,3x med. pairs</a:t>
+              <a:t>vs 22,0x med. pairs</a:t>
             </a:r>
           </a:p>
         </p:txBody>
@@ -25215,7 +25215,7 @@
                 </a:solidFill>
                 <a:latin typeface="Calibri"/>
               </a:rPr>
-              <a:t>Upside +10,5 % vs cours</a:t>
+              <a:t>Upside +10,6 % vs cours</a:t>
             </a:r>
           </a:p>
         </p:txBody>
@@ -25336,7 +25336,7 @@
                 </a:solidFill>
                 <a:latin typeface="Calibri"/>
               </a:rPr>
-              <a:t>+0,116</a:t>
+              <a:t>+0,112</a:t>
             </a:r>
           </a:p>
         </p:txBody>
@@ -26223,7 +26223,7 @@
                 </a:solidFill>
                 <a:latin typeface="Calibri"/>
               </a:rPr>
-              <a:t>Sentiment de Marché — FinBERT</a:t>
+              <a:t>Sentiment de Marché — LLM Groq</a:t>
             </a:r>
           </a:p>
         </p:txBody>
@@ -26258,7 +26258,7 @@
                 </a:solidFill>
                 <a:latin typeface="Calibri"/>
               </a:rPr>
-              <a:t>Analyse sémantique  ·  30 articles  ·  7 derniers jours  ·  English-only fallback</a:t>
+              <a:t>Analyse sémantique  ·  30 articles  ·  7 derniers jours  ·  Classification LLM</a:t>
             </a:r>
           </a:p>
         </p:txBody>
@@ -26449,7 +26449,7 @@
                 </a:solidFill>
                 <a:latin typeface="Calibri"/>
               </a:rPr>
-              <a:t>Score agrégé : +0,116</a:t>
+              <a:t>Score agrégé : +0,112</a:t>
             </a:r>
           </a:p>
         </p:txBody>
@@ -26761,7 +26761,7 @@
                 </a:solidFill>
                 <a:latin typeface="Calibri"/>
               </a:rPr>
-              <a:t>43,2 %</a:t>
+              <a:t>42,5 %</a:t>
             </a:r>
           </a:p>
         </p:txBody>
@@ -26831,7 +26831,7 @@
                 </a:solidFill>
                 <a:latin typeface="Calibri"/>
               </a:rPr>
-              <a:t>FinBERT (fallback)</a:t>
+              <a:t>Modèle LLM Groq</a:t>
             </a:r>
           </a:p>
         </p:txBody>
@@ -27217,7 +27217,7 @@
                           </a:solidFill>
                           <a:latin typeface="Calibri"/>
                         </a:rPr>
-                        <a:t>15</a:t>
+                        <a:t>14</a:t>
                       </a:r>
                     </a:p>
                   </a:txBody>
@@ -27240,7 +27240,7 @@
                           </a:solidFill>
                           <a:latin typeface="Calibri"/>
                         </a:rPr>
-                        <a:t>+0,432</a:t>
+                        <a:t>+0,425</a:t>
                       </a:r>
                     </a:p>
                   </a:txBody>
@@ -27263,7 +27263,7 @@
                           </a:solidFill>
                           <a:latin typeface="Calibri"/>
                         </a:rPr>
-                        <a:t>Croissance services +15 % YoY d'ici 2026 grâce à l'Apple Intelligence et abonnements</a:t>
+                        <a:t>Lancement iPhone 16 en septembre 2026 avec +12 % de ventes YoY attendu | Impact CA +27 Mds USD et marge brute +200 bps | Horizon 12-18 mois</a:t>
                       </a:r>
                     </a:p>
                   </a:txBody>
@@ -27311,7 +27311,7 @@
                           </a:solidFill>
                           <a:latin typeface="Calibri"/>
                         </a:rPr>
-                        <a:t>5</a:t>
+                        <a:t>6</a:t>
                       </a:r>
                     </a:p>
                   </a:txBody>
@@ -27334,7 +27334,7 @@
                           </a:solidFill>
                           <a:latin typeface="Calibri"/>
                         </a:rPr>
-                        <a:t>+0,252</a:t>
+                        <a:t>+0,263</a:t>
                       </a:r>
                     </a:p>
                   </a:txBody>
@@ -27428,7 +27428,7 @@
                           </a:solidFill>
                           <a:latin typeface="Calibri"/>
                         </a:rPr>
-                        <a:t>+0,316</a:t>
+                        <a:t>+0,313</a:t>
                       </a:r>
                     </a:p>
                   </a:txBody>
@@ -27451,7 +27451,7 @@
                           </a:solidFill>
                           <a:latin typeface="Calibri"/>
                         </a:rPr>
-                        <a:t>Régulation européenne DMA réduisant les marges App Store de -5 % d'ici 2026</a:t>
+                        <a:t>Régulation européenne sur l'App Store réduisant les revenus services de 15 % d'ici 2027 | Impact CA -12 Mds USD et marge -300 bps | Horizon 12-18 mois</a:t>
                       </a:r>
                     </a:p>
                   </a:txBody>
@@ -27496,7 +27496,7 @@
                 </a:solidFill>
                 <a:latin typeface="Calibri"/>
               </a:rPr>
-              <a:t>Le sentiment positif (score +0.116) est basé sur 30 articles analysés sur 7 jours. Confiance IA : 43%. Cohérence avec la recommandation BUY : validée.</a:t>
+              <a:t>La presse financière salue les initiatives technologiques et partenariales d’Apple cette semaine, malgré des signaux mitigés sur les retards de produits et les risques liés à l’IA. Les annonces autour des Macs Apple Silicon et des projets collaboratifs renforcent l’optimisme des investisseurs.</a:t>
             </a:r>
           </a:p>
         </p:txBody>
@@ -30520,7 +30520,7 @@
                 </a:solidFill>
                 <a:latin typeface="Calibri"/>
               </a:rPr>
-              <a:t>Apple se négocie à 33,8x P/E vs une médiane sectorielle de 30x, soit une prime de 12,7 %. Cette décote s'explique par la qualité des actifs et la croissance supérieure des services.</a:t>
+              <a:t>Apple se négocie à 33,8x P/E vs une médiane sectorielle de 30x, soit une prime de 13 %. La valorisation reflète une croissance structurelle et une qualité d'actifs inégalée dans le secteur technologique.</a:t>
             </a:r>
           </a:p>
         </p:txBody>
@@ -31240,7 +31240,7 @@
                 </a:solidFill>
                 <a:latin typeface="Calibri"/>
               </a:rPr>
-              <a:t>258,03 $</a:t>
+              <a:t>257,69 $</a:t>
             </a:r>
           </a:p>
         </p:txBody>
@@ -31708,7 +31708,7 @@
                 </a:solidFill>
                 <a:latin typeface="Calibri"/>
               </a:rPr>
-              <a:t>+29,0 %</a:t>
+              <a:t>+28,9 %</a:t>
             </a:r>
           </a:p>
         </p:txBody>
@@ -31778,7 +31778,7 @@
                 </a:solidFill>
                 <a:latin typeface="Calibri"/>
               </a:rPr>
-              <a:t>Cours en hausse de +29,0 % sur 12 mois</a:t>
+              <a:t>Cours en hausse de +28,9 % sur 12 mois</a:t>
             </a:r>
           </a:p>
         </p:txBody>
@@ -31923,7 +31923,7 @@
                 </a:solidFill>
                 <a:latin typeface="Calibri"/>
               </a:rPr>
-              <a:t>Apple affiche une résilience opérationnelle remarquable avec une croissance du CA de 6,4 % en 2025 et des marges nettes à 26,9 %. La valorisation actuelle (P/E 33,8x vs médiane sectorielle 30x) reste justifiée par son écosystème intégré et son pricing power.</a:t>
+              <a:t>Apple affiche une résilience exceptionnelle avec une croissance du CA de 6,4 % en 2025 et des marges nettes à 26,9 %. La valorisation reste élevée mais justifiée par un écosystème intégré et une trésorerie abondante de 166 Mds USD.</a:t>
             </a:r>
           </a:p>
         </p:txBody>
@@ -32637,7 +32637,7 @@
                 </a:solidFill>
                 <a:latin typeface="Calibri"/>
               </a:rPr>
-              <a:t>Conviction : 78%</a:t>
+              <a:t>Conviction : 75%</a:t>
             </a:r>
           </a:p>
         </p:txBody>
@@ -32729,7 +32729,7 @@
         <p:spPr>
           <a:xfrm>
             <a:off x="324000" y="2196000"/>
-            <a:ext cx="2106000" cy="198000"/>
+            <a:ext cx="2025000" cy="198000"/>
           </a:xfrm>
           <a:prstGeom prst="rect">
             <a:avLst/>
@@ -32871,7 +32871,7 @@
                 </a:solidFill>
                 <a:latin typeface="Calibri"/>
               </a:rPr>
-              <a:t>Delta conviction : +28% vs Avocat du Diable</a:t>
+              <a:t>Delta conviction : +25% vs Avocat du Diable</a:t>
             </a:r>
           </a:p>
         </p:txBody>
@@ -33027,7 +33027,7 @@
                 </a:solidFill>
                 <a:latin typeface="Calibri"/>
               </a:rPr>
-              <a:t>La croissance du CA de 6,4 % en 2025 est soutenue par un mix produits favorable et une demande résiliente en services à +15 % YoY</a:t>
+              <a:t>Croissance du CA de 6,4 % en 2025 tirée par l'iPhone en Chine (+18 % YoY) et les services (+15 %)</a:t>
             </a:r>
           </a:p>
         </p:txBody>
@@ -33105,7 +33105,7 @@
                 </a:solidFill>
                 <a:latin typeface="Calibri"/>
               </a:rPr>
-              <a:t>Les marges nettes à 26,9 % reflètent un levier opérationnel de +290 pbs vs 2022 grâce au mix logiciel-services et à l'effet volume</a:t>
+              <a:t>Expansion des marges nettes à 26,9 % grâce au mix services et à l'effet de levier opérationnel</a:t>
             </a:r>
           </a:p>
         </p:txBody>
@@ -33183,7 +33183,7 @@
                 </a:solidFill>
                 <a:latin typeface="Calibri"/>
               </a:rPr>
-              <a:t>L'Apple Intelligence et les services cloud pourraient ajouter 5-7 % au CA d'ici 2027.</a:t>
+              <a:t>Trésorerie nette de 166 Mds USD permettant 100 Mds USD de rachats d'actions en 2026</a:t>
             </a:r>
           </a:p>
         </p:txBody>
@@ -33296,7 +33296,7 @@
                 </a:solidFill>
                 <a:latin typeface="Calibri"/>
               </a:rPr>
-              <a:t>• Croissance services +15 % YoY d'ici 2026 grâce à l'Apple Intelligence et abonnements</a:t>
+              <a:t>• Lancement iPhone 16 en septembre 2026 avec +12 % de ventes YoY attendu | Impact CA +27 Mds USD et</a:t>
             </a:r>
           </a:p>
         </p:txBody>
@@ -33331,7 +33331,7 @@
                 </a:solidFill>
                 <a:latin typeface="Calibri"/>
               </a:rPr>
-              <a:t>• Expansion géographique en Asie (Chine +10 % CA 2026) avec effet volume sur les marges</a:t>
+              <a:t>• Expansion services en Inde et Brésil avec +20 % d'abonnés en 2026 | CA additionnel +15 Mds USD et</a:t>
             </a:r>
           </a:p>
         </p:txBody>
@@ -33444,7 +33444,7 @@
                 </a:solidFill>
                 <a:latin typeface="Calibri"/>
               </a:rPr>
-              <a:t>• Régulation européenne DMA réduisant les marges App Store de -5 % d'ici 2026</a:t>
+              <a:t>• Régulation européenne sur l'App Store réduisant les revenus services de 15 % d'ici 2027 | Impact CA</a:t>
             </a:r>
           </a:p>
         </p:txBody>
@@ -33479,7 +33479,7 @@
                 </a:solidFill>
                 <a:latin typeface="Calibri"/>
               </a:rPr>
-              <a:t>• Concurrence accrue en IA (Google, Microsoft) menaçant le pricing power</a:t>
+              <a:t>• Concurrence accrue en IA avec des acteurs comme Google et Meta captant 30 % du marché cloud en 2026</a:t>
             </a:r>
           </a:p>
         </p:txBody>
@@ -33600,7 +33600,7 @@
                 </a:solidFill>
                 <a:latin typeface="Calibri"/>
               </a:rPr>
-              <a:t>⚠ Conditions d’invalidation : Macro: Récession mondiale réduisant le CA de -8 % en 2026  ·  Sectoriel: Régulation européenne DMA réduisant les revenus services de -15 %</a:t>
+              <a:t>⚠ Conditions d’invalidation : Macro: Ralentissement économique en Chine de -5 % du PIB en 2026  ·  Sectoriel: Régulation européenne réduisant les revenus services de 15 %</a:t>
             </a:r>
           </a:p>
         </p:txBody>
@@ -34678,7 +34678,7 @@
                 </a:solidFill>
                 <a:latin typeface="Calibri"/>
               </a:rPr>
-              <a:t>Dépendance iPhone  ·  Régulation</a:t>
+              <a:t>Dépendance iPhone  ·  Régulation App Store</a:t>
             </a:r>
           </a:p>
         </p:txBody>
@@ -35912,7 +35912,7 @@
                 </a:solidFill>
                 <a:latin typeface="Calibri"/>
               </a:rPr>
-              <a:t>Apple conçoit et commercialise des produits technologiques haut de gamme comme l'iPhone, Mac et l'Apple Watch, tout en dominant les services à forte marge (App Store, iCloud, Apple Music). Positionné en leader premium, l'entreprise bénéficie d'une fidélisation client exceptionnelle et d'un écosystème fermé générant des revenus récurrents. Son avantage concurrentiel repose sur l'intégration hardware-logiciel-services, créant des barrières à l'entrée durables. L'entreprise articule son activité autour de deux segments stratégiques :</a:t>
+              <a:t>Apple conçoit, fabrique et commercialise des produits technologiques innovants comme l'iPhone, les Mac et l'Apple Watch. Positionné en haut de gamme, l'entreprise mise sur un écosystème fermé (iOS, App Store, services) pour fidéliser ses clients. Ses avantages concurrentiels incluent une marque premium, une marge brute élevée et une trésorerie colossale générant des rendements exceptionnels. L'entreprise articule son activité autour de deux segments stratégiques :</a:t>
             </a:r>
           </a:p>
         </p:txBody>
@@ -36025,7 +36025,7 @@
                 </a:solidFill>
                 <a:latin typeface="Calibri"/>
               </a:rPr>
-              <a:t>Segment phare générant 75 % du CA, avec l'iPhone (50 % du total) comme moteur principal, suivi des Mac et iPad. Modèle basé sur des cycles de renouvellement annuels et une stratégie de prix premium ciblant les consommateurs et entreprises. Croissance tirée par l'innovation (ex: puces M-series) et l'expansion géographique en Asie.</a:t>
+              <a:t>Segment phare générant 80 % du CA via ventes d'iPhone (55 %), Mac, iPad et accessoires. Modèle basé sur l'innovation hardware et l'intégration logicielle. Clients premium (B2C et B2B) avec une forte récurrence via l'écosystème Apple. Croissance portée par l'Asie-Pacifique (+12 % YoY en 2025) et les services associés.</a:t>
             </a:r>
           </a:p>
         </p:txBody>
@@ -36138,7 +36138,7 @@
                 </a:solidFill>
                 <a:latin typeface="Calibri"/>
               </a:rPr>
-              <a:t>Segment en forte expansion (25 % du CA) incluant l'App Store, Apple Music, iCloud et Apple Pay. Modèle abonnements récurrents avec marge brute &gt;70 % et croissance YoY à deux chiffres. Cible une base d'utilisateurs fidèles et monétise l'engagement via des services intégrés. Moteurs : expansion géographique et hausse des prix des abonnements.</a:t>
+              <a:t>Segment à forte marge (70 % GM) incluant App Store, Apple Music et iCloud. Modèle d'abonnements récurrents (1,8 Md d'utilisateurs actifs). Croissance annuelle de 15 % en 2025 grâce à l'expansion géographique et à l'augmentation des prix. Clients cibles : utilisateurs existants et nouveaux marchés émergents.</a:t>
             </a:r>
           </a:p>
         </p:txBody>
@@ -36259,7 +36259,7 @@
                 </a:solidFill>
                 <a:latin typeface="Calibri"/>
               </a:rPr>
-              <a:t>3 788,2 Mds$</a:t>
+              <a:t>3 783,2 Mds$</a:t>
             </a:r>
           </a:p>
         </p:txBody>
@@ -36571,7 +36571,7 @@
                 </a:solidFill>
                 <a:latin typeface="Calibri"/>
               </a:rPr>
-              <a:t>258,03 $</a:t>
+              <a:t>257,69 $</a:t>
             </a:r>
           </a:p>
         </p:txBody>
@@ -37517,7 +37517,7 @@
                 </a:solidFill>
                 <a:latin typeface="Calibri"/>
               </a:rPr>
-              <a:t>75%</a:t>
+              <a:t>80%</a:t>
             </a:r>
           </a:p>
         </p:txBody>
@@ -37665,7 +37665,7 @@
                 </a:solidFill>
                 <a:latin typeface="Calibri"/>
               </a:rPr>
-              <a:t>Segment phare générant 75 % du CA, avec l'iPhone (50 % du total) comme moteur principal, suivi des Mac et iPad. Modèle basé sur des cycles de renouvellement annuels et une stratégie de prix premium ciblant les consommateurs et entreprises. Croissance tirée par l'innovation (ex: puces M-series) et l'expansion géographique en Asie.</a:t>
+              <a:t>Segment phare générant 80 % du CA via ventes d'iPhone (55 %), Mac, iPad et accessoires. Modèle basé sur l'innovation hardware et l'intégration logicielle. Clients premium (B2C et B2B) avec une forte récurrence via l'écosystème Apple. Croissance portée par l'Asie-Pacifique (+12 % YoY en 2025) et les services associés.</a:t>
             </a:r>
           </a:p>
         </p:txBody>
@@ -37786,7 +37786,7 @@
                 </a:solidFill>
                 <a:latin typeface="Calibri"/>
               </a:rPr>
-              <a:t>25%</a:t>
+              <a:t>20%</a:t>
             </a:r>
           </a:p>
         </p:txBody>
@@ -37934,7 +37934,7 @@
                 </a:solidFill>
                 <a:latin typeface="Calibri"/>
               </a:rPr>
-              <a:t>Segment en forte expansion (25 % du CA) incluant l'App Store, Apple Music, iCloud et Apple Pay. Modèle abonnements récurrents avec marge brute &gt;70 % et croissance YoY à deux chiffres. Cible une base d'utilisateurs fidèles et monétise l'engagement via des services intégrés. Moteurs : expansion géographique et hausse des prix des abonnements.</a:t>
+              <a:t>Segment à forte marge (70 % GM) incluant App Store, Apple Music et iCloud. Modèle d'abonnements récurrents (1,8 Md d'utilisateurs actifs). Croissance annuelle de 15 % en 2025 grâce à l'expansion géographique et à l'augmentation des prix. Clients cibles : utilisateurs existants et nouveaux marchés émergents.</a:t>
             </a:r>
           </a:p>
         </p:txBody>
@@ -39063,7 +39063,7 @@
                           </a:solidFill>
                           <a:latin typeface="Calibri"/>
                         </a:rPr>
-                        <a:t>440,0</a:t>
+                        <a:t>441,4</a:t>
                       </a:r>
                     </a:p>
                   </a:txBody>
@@ -39086,7 +39086,7 @@
                           </a:solidFill>
                           <a:latin typeface="Calibri"/>
                         </a:rPr>
-                        <a:t>465,0</a:t>
+                        <a:t>468,0</a:t>
                       </a:r>
                     </a:p>
                   </a:txBody>
@@ -39203,7 +39203,7 @@
                           </a:solidFill>
                           <a:latin typeface="Calibri"/>
                         </a:rPr>
-                        <a:t>+5,7 %</a:t>
+                        <a:t>+6,1 %</a:t>
                       </a:r>
                     </a:p>
                   </a:txBody>
@@ -39226,7 +39226,7 @@
                           </a:solidFill>
                           <a:latin typeface="Calibri"/>
                         </a:rPr>
-                        <a:t>+5,7 %</a:t>
+                        <a:t>+6,0 %</a:t>
                       </a:r>
                     </a:p>
                   </a:txBody>
@@ -39343,7 +39343,7 @@
                           </a:solidFill>
                           <a:latin typeface="Calibri"/>
                         </a:rPr>
-                        <a:t>207,7</a:t>
+                        <a:t>208,4</a:t>
                       </a:r>
                     </a:p>
                   </a:txBody>
@@ -39366,7 +39366,7 @@
                           </a:solidFill>
                           <a:latin typeface="Calibri"/>
                         </a:rPr>
-                        <a:t>220,9</a:t>
+                        <a:t>222,3</a:t>
                       </a:r>
                     </a:p>
                   </a:txBody>
@@ -39623,7 +39623,7 @@
                           </a:solidFill>
                           <a:latin typeface="Calibri"/>
                         </a:rPr>
-                        <a:t>155,0</a:t>
+                        <a:t>160,0</a:t>
                       </a:r>
                     </a:p>
                   </a:txBody>
@@ -39646,7 +39646,7 @@
                           </a:solidFill>
                           <a:latin typeface="Calibri"/>
                         </a:rPr>
-                        <a:t>165,0</a:t>
+                        <a:t>170,0</a:t>
                       </a:r>
                     </a:p>
                   </a:txBody>
@@ -39763,7 +39763,7 @@
                           </a:solidFill>
                           <a:latin typeface="Calibri"/>
                         </a:rPr>
-                        <a:t>35,2 %</a:t>
+                        <a:t>36,3 %</a:t>
                       </a:r>
                     </a:p>
                   </a:txBody>
@@ -39786,7 +39786,7 @@
                           </a:solidFill>
                           <a:latin typeface="Calibri"/>
                         </a:rPr>
-                        <a:t>35,5 %</a:t>
+                        <a:t>36,3 %</a:t>
                       </a:r>
                     </a:p>
                   </a:txBody>
@@ -39903,7 +39903,7 @@
                           </a:solidFill>
                           <a:latin typeface="Calibri"/>
                         </a:rPr>
-                        <a:t>118,0</a:t>
+                        <a:t>115,0</a:t>
                       </a:r>
                     </a:p>
                   </a:txBody>
@@ -39926,7 +39926,7 @@
                           </a:solidFill>
                           <a:latin typeface="Calibri"/>
                         </a:rPr>
-                        <a:t>126,0</a:t>
+                        <a:t>122,0</a:t>
                       </a:r>
                     </a:p>
                   </a:txBody>
@@ -40043,7 +40043,7 @@
                           </a:solidFill>
                           <a:latin typeface="Calibri"/>
                         </a:rPr>
-                        <a:t>26,8 %</a:t>
+                        <a:t>26,1 %</a:t>
                       </a:r>
                     </a:p>
                   </a:txBody>
@@ -40066,7 +40066,7 @@
                           </a:solidFill>
                           <a:latin typeface="Calibri"/>
                         </a:rPr>
-                        <a:t>27,1 %</a:t>
+                        <a:t>26,1 %</a:t>
                       </a:r>
                     </a:p>
                   </a:txBody>
@@ -40197,7 +40197,7 @@
                 </a:solidFill>
                 <a:latin typeface="Calibri"/>
               </a:rPr>
-              <a:t>Le CA 2025 atteint 416,2 Md$ (+6,4 % YoY), porté par un mix favorable iPhone/services et une demande résiliente en Chine. Les marges nettes à 26,9 % bénéficient d'un levier opérationnel de +290 pbs vs 2022 grâce au mix logiciel-services et à l'effet volume. Le ND/EBITDA à 0,4x et la trésorerie nette de 166 Md$ (mars 2025) permettent un rachat massif d'actions (10 Md$/trimestre) ou des dividendes.</a:t>
+              <a:t>Le CA 2025 atteint 416,2 Mds USD (+6,4 % YoY) porté par l'iPhone (229 Mds USD) et les services (83 Mds USD). La marge brute progresse à 46,9 % (+360 bps vs 2024) grâce au mix logiciel haute marge et à l'optimisation des coûts de production. La trésorerie nette de 166 Mds USD (ND/EBITDA 0,4x) assure une capacité de rachat de 100 Mds USD en 2026.</a:t>
             </a:r>
           </a:p>
         </p:txBody>
@@ -42200,7 +42200,7 @@
                 </a:solidFill>
                 <a:latin typeface="Calibri"/>
               </a:rPr>
-              <a:t>Le CA 2025 atteint 416,2 Md$ (+6,4 % YoY), porté par un mix favorable iPhone/services et une demande résiliente en Chine. Les marges nettes à 26,9 % bénéficient d'un levier opérationnel de +290 pbs vs 2022 grâce au mix logiciel-services et à l'effet volume. Le ND/EBITDA à 0,4x et la trésorerie nette de 166 Md$ (mars 2025) permettent un rachat massif d'actions (10 Md$/trimestre) ou des dividendes.</a:t>
+              <a:t>Le CA 2025 atteint 416,2 Mds USD (+6,4 % YoY) porté par l'iPhone (229 Mds USD) et les services (83 Mds USD). La marge brute progresse à 46,9 % (+360 bps vs 2024) grâce au mix logiciel haute marge et à l'optimisation des coûts de production. La trésorerie nette de 166 Mds USD (ND/EBITDA 0,4x) assure une capacité de rachat de 100 Mds USD en 2026.</a:t>
             </a:r>
           </a:p>
         </p:txBody>
